--- a/deck/CTS Monthly Business Review - 30092026.pptx
+++ b/deck/CTS Monthly Business Review - 30092026.pptx
@@ -7053,8 +7053,8 @@
         </p:nvSpPr>
         <p:spPr>
           <a:xfrm>
-            <a:off x="7543800" y="2971800"/>
-            <a:ext cx="2057400" cy="2057400"/>
+            <a:off x="7040880" y="2743200"/>
+            <a:ext cx="2240280" cy="2240280"/>
           </a:xfrm>
           <a:prstGeom prst="ellipse">
             <a:avLst/>
@@ -7082,14 +7082,14 @@
         </p:nvSpPr>
         <p:spPr>
           <a:xfrm>
-            <a:off x="6126480" y="1508760"/>
-            <a:ext cx="2240280" cy="2240280"/>
+            <a:off x="7772400" y="1874519"/>
+            <a:ext cx="1783080" cy="1783080"/>
           </a:xfrm>
           <a:prstGeom prst="ellipse">
             <a:avLst/>
           </a:prstGeom>
           <a:solidFill>
-            <a:srgbClr val="3FD0C9">
+            <a:srgbClr val="6D71FF">
               <a:alpha val="55000"/>
             </a:srgbClr>
           </a:solidFill>
@@ -7111,14 +7111,14 @@
         </p:nvSpPr>
         <p:spPr>
           <a:xfrm>
-            <a:off x="6629400" y="274320"/>
-            <a:ext cx="1463040" cy="1463040"/>
+            <a:off x="6812280" y="960120"/>
+            <a:ext cx="2148840" cy="2148840"/>
           </a:xfrm>
           <a:prstGeom prst="ellipse">
             <a:avLst/>
           </a:prstGeom>
           <a:solidFill>
-            <a:srgbClr val="6D71FF">
+            <a:srgbClr val="3FD0C9">
               <a:alpha val="55000"/>
             </a:srgbClr>
           </a:solidFill>
@@ -9588,8 +9588,37 @@
         </p:nvSpPr>
         <p:spPr>
           <a:xfrm>
-            <a:off x="6355080" y="822960"/>
-            <a:ext cx="960120" cy="960120"/>
+            <a:off x="6355080" y="2697480"/>
+            <a:ext cx="2240280" cy="2240280"/>
+          </a:xfrm>
+          <a:prstGeom prst="ellipse">
+            <a:avLst/>
+          </a:prstGeom>
+          <a:solidFill>
+            <a:srgbClr val="F33844">
+              <a:alpha val="55000"/>
+            </a:srgbClr>
+          </a:solidFill>
+          <a:ln/>
+        </p:spPr>
+        <p:txBody>
+          <a:bodyPr/>
+          <a:lstStyle/>
+          <a:p>
+            <a:endParaRPr lang="en-AU"/>
+          </a:p>
+        </p:txBody>
+      </p:sp>
+      <p:sp>
+        <p:nvSpPr>
+          <p:cNvPr id="2" name="dot 1"/>
+          <p:cNvSpPr/>
+          <p:nvPr/>
+        </p:nvSpPr>
+        <p:spPr>
+          <a:xfrm>
+            <a:off x="7086600" y="1828800"/>
+            <a:ext cx="1783080" cy="1783080"/>
           </a:xfrm>
           <a:prstGeom prst="ellipse">
             <a:avLst/>
@@ -9611,49 +9640,20 @@
       </p:sp>
       <p:sp>
         <p:nvSpPr>
-          <p:cNvPr id="2" name="dot 1"/>
+          <p:cNvPr id="2" name="dot 0"/>
           <p:cNvSpPr/>
           <p:nvPr/>
         </p:nvSpPr>
         <p:spPr>
           <a:xfrm>
-            <a:off x="7635240" y="685800"/>
-            <a:ext cx="1234440" cy="1234440"/>
+            <a:off x="6126480" y="914400"/>
+            <a:ext cx="2148840" cy="2148840"/>
           </a:xfrm>
           <a:prstGeom prst="ellipse">
             <a:avLst/>
           </a:prstGeom>
           <a:solidFill>
             <a:srgbClr val="3FD0C9">
-              <a:alpha val="55000"/>
-            </a:srgbClr>
-          </a:solidFill>
-          <a:ln/>
-        </p:spPr>
-        <p:txBody>
-          <a:bodyPr/>
-          <a:lstStyle/>
-          <a:p>
-            <a:endParaRPr lang="en-AU"/>
-          </a:p>
-        </p:txBody>
-      </p:sp>
-      <p:sp>
-        <p:nvSpPr>
-          <p:cNvPr id="2" name="dot 0"/>
-          <p:cNvSpPr/>
-          <p:nvPr/>
-        </p:nvSpPr>
-        <p:spPr>
-          <a:xfrm>
-            <a:off x="6263640" y="1965960"/>
-            <a:ext cx="2697480" cy="2697480"/>
-          </a:xfrm>
-          <a:prstGeom prst="ellipse">
-            <a:avLst/>
-          </a:prstGeom>
-          <a:solidFill>
-            <a:srgbClr val="F33844">
               <a:alpha val="55000"/>
             </a:srgbClr>
           </a:solidFill>
@@ -10945,8 +10945,8 @@
         </p:nvSpPr>
         <p:spPr>
           <a:xfrm>
-            <a:off x="8183879" y="3337560"/>
-            <a:ext cx="1508760" cy="1508760"/>
+            <a:off x="7178040" y="2057400"/>
+            <a:ext cx="2240280" cy="2240280"/>
           </a:xfrm>
           <a:prstGeom prst="ellipse">
             <a:avLst/>
@@ -10974,8 +10974,8 @@
         </p:nvSpPr>
         <p:spPr>
           <a:xfrm>
-            <a:off x="6903720" y="2743200"/>
-            <a:ext cx="1965960" cy="1965960"/>
+            <a:off x="7909560" y="1188720"/>
+            <a:ext cx="1783080" cy="1783080"/>
           </a:xfrm>
           <a:prstGeom prst="ellipse">
             <a:avLst/>
@@ -11003,8 +11003,8 @@
         </p:nvSpPr>
         <p:spPr>
           <a:xfrm>
-            <a:off x="5623560" y="3063240"/>
-            <a:ext cx="1600200" cy="1600200"/>
+            <a:off x="6949440" y="274320"/>
+            <a:ext cx="2148840" cy="2148840"/>
           </a:xfrm>
           <a:prstGeom prst="ellipse">
             <a:avLst/>
@@ -12305,37 +12305,8 @@
         </p:nvSpPr>
         <p:spPr>
           <a:xfrm>
-            <a:off x="6629400" y="2880360"/>
-            <a:ext cx="1691640" cy="1691640"/>
-          </a:xfrm>
-          <a:prstGeom prst="ellipse">
-            <a:avLst/>
-          </a:prstGeom>
-          <a:solidFill>
-            <a:srgbClr val="3FD0C9">
-              <a:alpha val="55000"/>
-            </a:srgbClr>
-          </a:solidFill>
-          <a:ln/>
-        </p:spPr>
-        <p:txBody>
-          <a:bodyPr/>
-          <a:lstStyle/>
-          <a:p>
-            <a:endParaRPr lang="en-AU"/>
-          </a:p>
-        </p:txBody>
-      </p:sp>
-      <p:sp>
-        <p:nvSpPr>
-          <p:cNvPr id="2" name="dot 1"/>
-          <p:cNvSpPr/>
-          <p:nvPr/>
-        </p:nvSpPr>
-        <p:spPr>
-          <a:xfrm>
-            <a:off x="7818120" y="1783080"/>
-            <a:ext cx="2148840" cy="2148840"/>
+            <a:off x="6263640" y="2971800"/>
+            <a:ext cx="2240280" cy="2240280"/>
           </a:xfrm>
           <a:prstGeom prst="ellipse">
             <a:avLst/>
@@ -12357,20 +12328,49 @@
       </p:sp>
       <p:sp>
         <p:nvSpPr>
+          <p:cNvPr id="2" name="dot 1"/>
+          <p:cNvSpPr/>
+          <p:nvPr/>
+        </p:nvSpPr>
+        <p:spPr>
+          <a:xfrm>
+            <a:off x="6995159" y="2103120"/>
+            <a:ext cx="1783080" cy="1783080"/>
+          </a:xfrm>
+          <a:prstGeom prst="ellipse">
+            <a:avLst/>
+          </a:prstGeom>
+          <a:solidFill>
+            <a:srgbClr val="6D71FF">
+              <a:alpha val="55000"/>
+            </a:srgbClr>
+          </a:solidFill>
+          <a:ln/>
+        </p:spPr>
+        <p:txBody>
+          <a:bodyPr/>
+          <a:lstStyle/>
+          <a:p>
+            <a:endParaRPr lang="en-AU"/>
+          </a:p>
+        </p:txBody>
+      </p:sp>
+      <p:sp>
+        <p:nvSpPr>
           <p:cNvPr id="2" name="dot 0"/>
           <p:cNvSpPr/>
           <p:nvPr/>
         </p:nvSpPr>
         <p:spPr>
           <a:xfrm>
-            <a:off x="6355080" y="1051560"/>
-            <a:ext cx="1783080" cy="1783080"/>
+            <a:off x="6035040" y="1188720"/>
+            <a:ext cx="2148840" cy="2148840"/>
           </a:xfrm>
           <a:prstGeom prst="ellipse">
             <a:avLst/>
           </a:prstGeom>
           <a:solidFill>
-            <a:srgbClr val="6D71FF">
+            <a:srgbClr val="3FD0C9">
               <a:alpha val="55000"/>
             </a:srgbClr>
           </a:solidFill>
@@ -17316,7 +17316,7 @@
         </p:nvSpPr>
         <p:spPr>
           <a:xfrm>
-            <a:off x="7178040" y="3063240"/>
+            <a:off x="6812280" y="2377440"/>
             <a:ext cx="2240280" cy="2240280"/>
           </a:xfrm>
           <a:prstGeom prst="ellipse">
@@ -17351,8 +17351,8 @@
         </p:nvSpPr>
         <p:spPr>
           <a:xfrm>
-            <a:off x="7635240" y="1691640"/>
-            <a:ext cx="1874519" cy="1874519"/>
+            <a:off x="7543800" y="1508760"/>
+            <a:ext cx="1783080" cy="1783080"/>
           </a:xfrm>
           <a:prstGeom prst="ellipse">
             <a:avLst/>
@@ -17386,8 +17386,8 @@
         </p:nvSpPr>
         <p:spPr>
           <a:xfrm>
-            <a:off x="6903720" y="502920"/>
-            <a:ext cx="1417320" cy="1417320"/>
+            <a:off x="6583680" y="594360"/>
+            <a:ext cx="2148840" cy="2148840"/>
           </a:xfrm>
           <a:prstGeom prst="ellipse">
             <a:avLst/>
@@ -17672,8 +17672,37 @@
         </p:nvSpPr>
         <p:spPr>
           <a:xfrm>
-            <a:off x="5440680" y="2697480"/>
-            <a:ext cx="2011680" cy="2011680"/>
+            <a:off x="5074920" y="2148840"/>
+            <a:ext cx="2240280" cy="2240280"/>
+          </a:xfrm>
+          <a:prstGeom prst="ellipse">
+            <a:avLst/>
+          </a:prstGeom>
+          <a:solidFill>
+            <a:srgbClr val="F33844">
+              <a:alpha val="82000"/>
+            </a:srgbClr>
+          </a:solidFill>
+          <a:ln/>
+        </p:spPr>
+        <p:txBody>
+          <a:bodyPr/>
+          <a:lstStyle/>
+          <a:p>
+            <a:endParaRPr lang="en-AU"/>
+          </a:p>
+        </p:txBody>
+      </p:sp>
+      <p:sp>
+        <p:nvSpPr>
+          <p:cNvPr id="2" name="dot 1"/>
+          <p:cNvSpPr/>
+          <p:nvPr/>
+        </p:nvSpPr>
+        <p:spPr>
+          <a:xfrm>
+            <a:off x="5806440" y="1280160"/>
+            <a:ext cx="1783080" cy="1783080"/>
           </a:xfrm>
           <a:prstGeom prst="ellipse">
             <a:avLst/>
@@ -17695,49 +17724,20 @@
       </p:sp>
       <p:sp>
         <p:nvSpPr>
-          <p:cNvPr id="2" name="dot 1"/>
+          <p:cNvPr id="2" name="dot 0"/>
           <p:cNvSpPr/>
           <p:nvPr/>
         </p:nvSpPr>
         <p:spPr>
           <a:xfrm>
-            <a:off x="6035040" y="1417320"/>
-            <a:ext cx="2377440" cy="2377440"/>
+            <a:off x="4846320" y="365760"/>
+            <a:ext cx="2148840" cy="2148840"/>
           </a:xfrm>
           <a:prstGeom prst="ellipse">
             <a:avLst/>
           </a:prstGeom>
           <a:solidFill>
             <a:srgbClr val="3FD0C9">
-              <a:alpha val="82000"/>
-            </a:srgbClr>
-          </a:solidFill>
-          <a:ln/>
-        </p:spPr>
-        <p:txBody>
-          <a:bodyPr/>
-          <a:lstStyle/>
-          <a:p>
-            <a:endParaRPr lang="en-AU"/>
-          </a:p>
-        </p:txBody>
-      </p:sp>
-      <p:sp>
-        <p:nvSpPr>
-          <p:cNvPr id="2" name="dot 0"/>
-          <p:cNvSpPr/>
-          <p:nvPr/>
-        </p:nvSpPr>
-        <p:spPr>
-          <a:xfrm>
-            <a:off x="4892040" y="411480"/>
-            <a:ext cx="1920240" cy="1920240"/>
-          </a:xfrm>
-          <a:prstGeom prst="ellipse">
-            <a:avLst/>
-          </a:prstGeom>
-          <a:solidFill>
-            <a:srgbClr val="F33844">
               <a:alpha val="82000"/>
             </a:srgbClr>
           </a:solidFill>
@@ -17928,8 +17928,8 @@
         </p:nvSpPr>
         <p:spPr>
           <a:xfrm>
-            <a:off x="6720840" y="3246120"/>
-            <a:ext cx="1874519" cy="1874519"/>
+            <a:off x="6537960" y="1965960"/>
+            <a:ext cx="2240280" cy="2240280"/>
           </a:xfrm>
           <a:prstGeom prst="ellipse">
             <a:avLst/>
@@ -17957,8 +17957,8 @@
         </p:nvSpPr>
         <p:spPr>
           <a:xfrm>
-            <a:off x="7360920" y="1234440"/>
-            <a:ext cx="1554480" cy="1554480"/>
+            <a:off x="7269480" y="1097280"/>
+            <a:ext cx="1783080" cy="1783080"/>
           </a:xfrm>
           <a:prstGeom prst="ellipse">
             <a:avLst/>
@@ -17986,7 +17986,7 @@
         </p:nvSpPr>
         <p:spPr>
           <a:xfrm>
-            <a:off x="6035040" y="2240280"/>
+            <a:off x="6309360" y="182880"/>
             <a:ext cx="2148840" cy="2148840"/>
           </a:xfrm>
           <a:prstGeom prst="ellipse">

--- a/deck/CTS Monthly Business Review - 30092026.pptx
+++ b/deck/CTS Monthly Business Review - 30092026.pptx
@@ -5588,6 +5588,74 @@
           </a:p>
         </p:txBody>
       </p:sp>
+      <p:sp>
+        <p:nvSpPr>
+          <p:cNvPr id="26" name="cts mark"/>
+          <p:cNvSpPr txBox="1"/>
+          <p:nvPr/>
+        </p:nvSpPr>
+        <p:spPr>
+          <a:xfrm>
+            <a:off x="7726679" y="155448"/>
+            <a:ext cx="914400" cy="274320"/>
+          </a:xfrm>
+          <a:prstGeom prst="rect">
+            <a:avLst/>
+          </a:prstGeom>
+          <a:noFill/>
+        </p:spPr>
+        <p:txBody>
+          <a:bodyPr wrap="none" lIns="0" rIns="0" tIns="0" bIns="0">
+            <a:spAutoFit/>
+          </a:bodyPr>
+          <a:lstStyle/>
+          <a:p>
+            <a:pPr algn="r"/>
+            <a:r>
+              <a:rPr sz="1500" b="1">
+                <a:solidFill>
+                  <a:srgbClr val="242C39"/>
+                </a:solidFill>
+              </a:rPr>
+              <a:t>cts</a:t>
+            </a:r>
+          </a:p>
+        </p:txBody>
+      </p:sp>
+      <p:sp>
+        <p:nvSpPr>
+          <p:cNvPr id="27" name="cts mark sub"/>
+          <p:cNvSpPr txBox="1"/>
+          <p:nvPr/>
+        </p:nvSpPr>
+        <p:spPr>
+          <a:xfrm>
+            <a:off x="7726679" y="384048"/>
+            <a:ext cx="914400" cy="164592"/>
+          </a:xfrm>
+          <a:prstGeom prst="rect">
+            <a:avLst/>
+          </a:prstGeom>
+          <a:noFill/>
+        </p:spPr>
+        <p:txBody>
+          <a:bodyPr wrap="none" lIns="0" rIns="0" tIns="0" bIns="0">
+            <a:spAutoFit/>
+          </a:bodyPr>
+          <a:lstStyle/>
+          <a:p>
+            <a:pPr algn="r"/>
+            <a:r>
+              <a:rPr sz="650">
+                <a:solidFill>
+                  <a:srgbClr val="6B7585"/>
+                </a:solidFill>
+              </a:rPr>
+              <a:t>Seamless AV</a:t>
+            </a:r>
+          </a:p>
+        </p:txBody>
+      </p:sp>
     </p:spTree>
   </p:cSld>
   <p:clrMapOvr>
@@ -5946,6 +6014,74 @@
           </a:p>
         </p:txBody>
       </p:sp>
+      <p:sp>
+        <p:nvSpPr>
+          <p:cNvPr id="26" name="cts mark"/>
+          <p:cNvSpPr txBox="1"/>
+          <p:nvPr/>
+        </p:nvSpPr>
+        <p:spPr>
+          <a:xfrm>
+            <a:off x="7726679" y="155448"/>
+            <a:ext cx="914400" cy="274320"/>
+          </a:xfrm>
+          <a:prstGeom prst="rect">
+            <a:avLst/>
+          </a:prstGeom>
+          <a:noFill/>
+        </p:spPr>
+        <p:txBody>
+          <a:bodyPr wrap="none" lIns="0" rIns="0" tIns="0" bIns="0">
+            <a:spAutoFit/>
+          </a:bodyPr>
+          <a:lstStyle/>
+          <a:p>
+            <a:pPr algn="r"/>
+            <a:r>
+              <a:rPr sz="1500" b="1">
+                <a:solidFill>
+                  <a:srgbClr val="242C39"/>
+                </a:solidFill>
+              </a:rPr>
+              <a:t>cts</a:t>
+            </a:r>
+          </a:p>
+        </p:txBody>
+      </p:sp>
+      <p:sp>
+        <p:nvSpPr>
+          <p:cNvPr id="27" name="cts mark sub"/>
+          <p:cNvSpPr txBox="1"/>
+          <p:nvPr/>
+        </p:nvSpPr>
+        <p:spPr>
+          <a:xfrm>
+            <a:off x="7726679" y="384048"/>
+            <a:ext cx="914400" cy="164592"/>
+          </a:xfrm>
+          <a:prstGeom prst="rect">
+            <a:avLst/>
+          </a:prstGeom>
+          <a:noFill/>
+        </p:spPr>
+        <p:txBody>
+          <a:bodyPr wrap="none" lIns="0" rIns="0" tIns="0" bIns="0">
+            <a:spAutoFit/>
+          </a:bodyPr>
+          <a:lstStyle/>
+          <a:p>
+            <a:pPr algn="r"/>
+            <a:r>
+              <a:rPr sz="650">
+                <a:solidFill>
+                  <a:srgbClr val="6B7585"/>
+                </a:solidFill>
+              </a:rPr>
+              <a:t>Seamless AV</a:t>
+            </a:r>
+          </a:p>
+        </p:txBody>
+      </p:sp>
     </p:spTree>
   </p:cSld>
   <p:clrMapOvr>
@@ -6304,6 +6440,74 @@
           </a:p>
         </p:txBody>
       </p:sp>
+      <p:sp>
+        <p:nvSpPr>
+          <p:cNvPr id="26" name="cts mark"/>
+          <p:cNvSpPr txBox="1"/>
+          <p:nvPr/>
+        </p:nvSpPr>
+        <p:spPr>
+          <a:xfrm>
+            <a:off x="7726679" y="155448"/>
+            <a:ext cx="914400" cy="274320"/>
+          </a:xfrm>
+          <a:prstGeom prst="rect">
+            <a:avLst/>
+          </a:prstGeom>
+          <a:noFill/>
+        </p:spPr>
+        <p:txBody>
+          <a:bodyPr wrap="none" lIns="0" rIns="0" tIns="0" bIns="0">
+            <a:spAutoFit/>
+          </a:bodyPr>
+          <a:lstStyle/>
+          <a:p>
+            <a:pPr algn="r"/>
+            <a:r>
+              <a:rPr sz="1500" b="1">
+                <a:solidFill>
+                  <a:srgbClr val="242C39"/>
+                </a:solidFill>
+              </a:rPr>
+              <a:t>cts</a:t>
+            </a:r>
+          </a:p>
+        </p:txBody>
+      </p:sp>
+      <p:sp>
+        <p:nvSpPr>
+          <p:cNvPr id="27" name="cts mark sub"/>
+          <p:cNvSpPr txBox="1"/>
+          <p:nvPr/>
+        </p:nvSpPr>
+        <p:spPr>
+          <a:xfrm>
+            <a:off x="7726679" y="384048"/>
+            <a:ext cx="914400" cy="164592"/>
+          </a:xfrm>
+          <a:prstGeom prst="rect">
+            <a:avLst/>
+          </a:prstGeom>
+          <a:noFill/>
+        </p:spPr>
+        <p:txBody>
+          <a:bodyPr wrap="none" lIns="0" rIns="0" tIns="0" bIns="0">
+            <a:spAutoFit/>
+          </a:bodyPr>
+          <a:lstStyle/>
+          <a:p>
+            <a:pPr algn="r"/>
+            <a:r>
+              <a:rPr sz="650">
+                <a:solidFill>
+                  <a:srgbClr val="6B7585"/>
+                </a:solidFill>
+              </a:rPr>
+              <a:t>Seamless AV</a:t>
+            </a:r>
+          </a:p>
+        </p:txBody>
+      </p:sp>
     </p:spTree>
   </p:cSld>
   <p:clrMapOvr>
@@ -6662,6 +6866,74 @@
           </a:p>
         </p:txBody>
       </p:sp>
+      <p:sp>
+        <p:nvSpPr>
+          <p:cNvPr id="26" name="cts mark"/>
+          <p:cNvSpPr txBox="1"/>
+          <p:nvPr/>
+        </p:nvSpPr>
+        <p:spPr>
+          <a:xfrm>
+            <a:off x="7726679" y="155448"/>
+            <a:ext cx="914400" cy="274320"/>
+          </a:xfrm>
+          <a:prstGeom prst="rect">
+            <a:avLst/>
+          </a:prstGeom>
+          <a:noFill/>
+        </p:spPr>
+        <p:txBody>
+          <a:bodyPr wrap="none" lIns="0" rIns="0" tIns="0" bIns="0">
+            <a:spAutoFit/>
+          </a:bodyPr>
+          <a:lstStyle/>
+          <a:p>
+            <a:pPr algn="r"/>
+            <a:r>
+              <a:rPr sz="1500" b="1">
+                <a:solidFill>
+                  <a:srgbClr val="242C39"/>
+                </a:solidFill>
+              </a:rPr>
+              <a:t>cts</a:t>
+            </a:r>
+          </a:p>
+        </p:txBody>
+      </p:sp>
+      <p:sp>
+        <p:nvSpPr>
+          <p:cNvPr id="27" name="cts mark sub"/>
+          <p:cNvSpPr txBox="1"/>
+          <p:nvPr/>
+        </p:nvSpPr>
+        <p:spPr>
+          <a:xfrm>
+            <a:off x="7726679" y="384048"/>
+            <a:ext cx="914400" cy="164592"/>
+          </a:xfrm>
+          <a:prstGeom prst="rect">
+            <a:avLst/>
+          </a:prstGeom>
+          <a:noFill/>
+        </p:spPr>
+        <p:txBody>
+          <a:bodyPr wrap="none" lIns="0" rIns="0" tIns="0" bIns="0">
+            <a:spAutoFit/>
+          </a:bodyPr>
+          <a:lstStyle/>
+          <a:p>
+            <a:pPr algn="r"/>
+            <a:r>
+              <a:rPr sz="650">
+                <a:solidFill>
+                  <a:srgbClr val="6B7585"/>
+                </a:solidFill>
+              </a:rPr>
+              <a:t>Seamless AV</a:t>
+            </a:r>
+          </a:p>
+        </p:txBody>
+      </p:sp>
     </p:spTree>
   </p:cSld>
   <p:clrMapOvr>
@@ -7020,6 +7292,74 @@
           </a:p>
         </p:txBody>
       </p:sp>
+      <p:sp>
+        <p:nvSpPr>
+          <p:cNvPr id="26" name="cts mark"/>
+          <p:cNvSpPr txBox="1"/>
+          <p:nvPr/>
+        </p:nvSpPr>
+        <p:spPr>
+          <a:xfrm>
+            <a:off x="7726679" y="155448"/>
+            <a:ext cx="914400" cy="274320"/>
+          </a:xfrm>
+          <a:prstGeom prst="rect">
+            <a:avLst/>
+          </a:prstGeom>
+          <a:noFill/>
+        </p:spPr>
+        <p:txBody>
+          <a:bodyPr wrap="none" lIns="0" rIns="0" tIns="0" bIns="0">
+            <a:spAutoFit/>
+          </a:bodyPr>
+          <a:lstStyle/>
+          <a:p>
+            <a:pPr algn="r"/>
+            <a:r>
+              <a:rPr sz="1500" b="1">
+                <a:solidFill>
+                  <a:srgbClr val="242C39"/>
+                </a:solidFill>
+              </a:rPr>
+              <a:t>cts</a:t>
+            </a:r>
+          </a:p>
+        </p:txBody>
+      </p:sp>
+      <p:sp>
+        <p:nvSpPr>
+          <p:cNvPr id="27" name="cts mark sub"/>
+          <p:cNvSpPr txBox="1"/>
+          <p:nvPr/>
+        </p:nvSpPr>
+        <p:spPr>
+          <a:xfrm>
+            <a:off x="7726679" y="384048"/>
+            <a:ext cx="914400" cy="164592"/>
+          </a:xfrm>
+          <a:prstGeom prst="rect">
+            <a:avLst/>
+          </a:prstGeom>
+          <a:noFill/>
+        </p:spPr>
+        <p:txBody>
+          <a:bodyPr wrap="none" lIns="0" rIns="0" tIns="0" bIns="0">
+            <a:spAutoFit/>
+          </a:bodyPr>
+          <a:lstStyle/>
+          <a:p>
+            <a:pPr algn="r"/>
+            <a:r>
+              <a:rPr sz="650">
+                <a:solidFill>
+                  <a:srgbClr val="6B7585"/>
+                </a:solidFill>
+              </a:rPr>
+              <a:t>Seamless AV</a:t>
+            </a:r>
+          </a:p>
+        </p:txBody>
+      </p:sp>
     </p:spTree>
   </p:cSld>
   <p:clrMapOvr>
@@ -7661,6 +8001,74 @@
           </a:p>
         </p:txBody>
       </p:sp>
+      <p:sp>
+        <p:nvSpPr>
+          <p:cNvPr id="26" name="cts mark"/>
+          <p:cNvSpPr txBox="1"/>
+          <p:nvPr/>
+        </p:nvSpPr>
+        <p:spPr>
+          <a:xfrm>
+            <a:off x="7726679" y="155448"/>
+            <a:ext cx="914400" cy="274320"/>
+          </a:xfrm>
+          <a:prstGeom prst="rect">
+            <a:avLst/>
+          </a:prstGeom>
+          <a:noFill/>
+        </p:spPr>
+        <p:txBody>
+          <a:bodyPr wrap="none" lIns="0" rIns="0" tIns="0" bIns="0">
+            <a:spAutoFit/>
+          </a:bodyPr>
+          <a:lstStyle/>
+          <a:p>
+            <a:pPr algn="r"/>
+            <a:r>
+              <a:rPr sz="1500" b="1">
+                <a:solidFill>
+                  <a:srgbClr val="242C39"/>
+                </a:solidFill>
+              </a:rPr>
+              <a:t>cts</a:t>
+            </a:r>
+          </a:p>
+        </p:txBody>
+      </p:sp>
+      <p:sp>
+        <p:nvSpPr>
+          <p:cNvPr id="27" name="cts mark sub"/>
+          <p:cNvSpPr txBox="1"/>
+          <p:nvPr/>
+        </p:nvSpPr>
+        <p:spPr>
+          <a:xfrm>
+            <a:off x="7726679" y="384048"/>
+            <a:ext cx="914400" cy="164592"/>
+          </a:xfrm>
+          <a:prstGeom prst="rect">
+            <a:avLst/>
+          </a:prstGeom>
+          <a:noFill/>
+        </p:spPr>
+        <p:txBody>
+          <a:bodyPr wrap="none" lIns="0" rIns="0" tIns="0" bIns="0">
+            <a:spAutoFit/>
+          </a:bodyPr>
+          <a:lstStyle/>
+          <a:p>
+            <a:pPr algn="r"/>
+            <a:r>
+              <a:rPr sz="650">
+                <a:solidFill>
+                  <a:srgbClr val="6B7585"/>
+                </a:solidFill>
+              </a:rPr>
+              <a:t>Seamless AV</a:t>
+            </a:r>
+          </a:p>
+        </p:txBody>
+      </p:sp>
     </p:spTree>
   </p:cSld>
   <p:clrMapOvr>
@@ -8019,6 +8427,74 @@
           </a:p>
         </p:txBody>
       </p:sp>
+      <p:sp>
+        <p:nvSpPr>
+          <p:cNvPr id="26" name="cts mark"/>
+          <p:cNvSpPr txBox="1"/>
+          <p:nvPr/>
+        </p:nvSpPr>
+        <p:spPr>
+          <a:xfrm>
+            <a:off x="7726679" y="155448"/>
+            <a:ext cx="914400" cy="274320"/>
+          </a:xfrm>
+          <a:prstGeom prst="rect">
+            <a:avLst/>
+          </a:prstGeom>
+          <a:noFill/>
+        </p:spPr>
+        <p:txBody>
+          <a:bodyPr wrap="none" lIns="0" rIns="0" tIns="0" bIns="0">
+            <a:spAutoFit/>
+          </a:bodyPr>
+          <a:lstStyle/>
+          <a:p>
+            <a:pPr algn="r"/>
+            <a:r>
+              <a:rPr sz="1500" b="1">
+                <a:solidFill>
+                  <a:srgbClr val="242C39"/>
+                </a:solidFill>
+              </a:rPr>
+              <a:t>cts</a:t>
+            </a:r>
+          </a:p>
+        </p:txBody>
+      </p:sp>
+      <p:sp>
+        <p:nvSpPr>
+          <p:cNvPr id="27" name="cts mark sub"/>
+          <p:cNvSpPr txBox="1"/>
+          <p:nvPr/>
+        </p:nvSpPr>
+        <p:spPr>
+          <a:xfrm>
+            <a:off x="7726679" y="384048"/>
+            <a:ext cx="914400" cy="164592"/>
+          </a:xfrm>
+          <a:prstGeom prst="rect">
+            <a:avLst/>
+          </a:prstGeom>
+          <a:noFill/>
+        </p:spPr>
+        <p:txBody>
+          <a:bodyPr wrap="none" lIns="0" rIns="0" tIns="0" bIns="0">
+            <a:spAutoFit/>
+          </a:bodyPr>
+          <a:lstStyle/>
+          <a:p>
+            <a:pPr algn="r"/>
+            <a:r>
+              <a:rPr sz="650">
+                <a:solidFill>
+                  <a:srgbClr val="6B7585"/>
+                </a:solidFill>
+              </a:rPr>
+              <a:t>Seamless AV</a:t>
+            </a:r>
+          </a:p>
+        </p:txBody>
+      </p:sp>
     </p:spTree>
   </p:cSld>
   <p:clrMapOvr>
@@ -8377,6 +8853,74 @@
           </a:p>
         </p:txBody>
       </p:sp>
+      <p:sp>
+        <p:nvSpPr>
+          <p:cNvPr id="26" name="cts mark"/>
+          <p:cNvSpPr txBox="1"/>
+          <p:nvPr/>
+        </p:nvSpPr>
+        <p:spPr>
+          <a:xfrm>
+            <a:off x="7726679" y="155448"/>
+            <a:ext cx="914400" cy="274320"/>
+          </a:xfrm>
+          <a:prstGeom prst="rect">
+            <a:avLst/>
+          </a:prstGeom>
+          <a:noFill/>
+        </p:spPr>
+        <p:txBody>
+          <a:bodyPr wrap="none" lIns="0" rIns="0" tIns="0" bIns="0">
+            <a:spAutoFit/>
+          </a:bodyPr>
+          <a:lstStyle/>
+          <a:p>
+            <a:pPr algn="r"/>
+            <a:r>
+              <a:rPr sz="1500" b="1">
+                <a:solidFill>
+                  <a:srgbClr val="242C39"/>
+                </a:solidFill>
+              </a:rPr>
+              <a:t>cts</a:t>
+            </a:r>
+          </a:p>
+        </p:txBody>
+      </p:sp>
+      <p:sp>
+        <p:nvSpPr>
+          <p:cNvPr id="27" name="cts mark sub"/>
+          <p:cNvSpPr txBox="1"/>
+          <p:nvPr/>
+        </p:nvSpPr>
+        <p:spPr>
+          <a:xfrm>
+            <a:off x="7726679" y="384048"/>
+            <a:ext cx="914400" cy="164592"/>
+          </a:xfrm>
+          <a:prstGeom prst="rect">
+            <a:avLst/>
+          </a:prstGeom>
+          <a:noFill/>
+        </p:spPr>
+        <p:txBody>
+          <a:bodyPr wrap="none" lIns="0" rIns="0" tIns="0" bIns="0">
+            <a:spAutoFit/>
+          </a:bodyPr>
+          <a:lstStyle/>
+          <a:p>
+            <a:pPr algn="r"/>
+            <a:r>
+              <a:rPr sz="650">
+                <a:solidFill>
+                  <a:srgbClr val="6B7585"/>
+                </a:solidFill>
+              </a:rPr>
+              <a:t>Seamless AV</a:t>
+            </a:r>
+          </a:p>
+        </p:txBody>
+      </p:sp>
     </p:spTree>
   </p:cSld>
   <p:clrMapOvr>
@@ -8738,6 +9282,74 @@
           </a:p>
         </p:txBody>
       </p:sp>
+      <p:sp>
+        <p:nvSpPr>
+          <p:cNvPr id="26" name="cts mark"/>
+          <p:cNvSpPr txBox="1"/>
+          <p:nvPr/>
+        </p:nvSpPr>
+        <p:spPr>
+          <a:xfrm>
+            <a:off x="7726679" y="155448"/>
+            <a:ext cx="914400" cy="274320"/>
+          </a:xfrm>
+          <a:prstGeom prst="rect">
+            <a:avLst/>
+          </a:prstGeom>
+          <a:noFill/>
+        </p:spPr>
+        <p:txBody>
+          <a:bodyPr wrap="none" lIns="0" rIns="0" tIns="0" bIns="0">
+            <a:spAutoFit/>
+          </a:bodyPr>
+          <a:lstStyle/>
+          <a:p>
+            <a:pPr algn="r"/>
+            <a:r>
+              <a:rPr sz="1500" b="1">
+                <a:solidFill>
+                  <a:srgbClr val="242C39"/>
+                </a:solidFill>
+              </a:rPr>
+              <a:t>cts</a:t>
+            </a:r>
+          </a:p>
+        </p:txBody>
+      </p:sp>
+      <p:sp>
+        <p:nvSpPr>
+          <p:cNvPr id="27" name="cts mark sub"/>
+          <p:cNvSpPr txBox="1"/>
+          <p:nvPr/>
+        </p:nvSpPr>
+        <p:spPr>
+          <a:xfrm>
+            <a:off x="7726679" y="384048"/>
+            <a:ext cx="914400" cy="164592"/>
+          </a:xfrm>
+          <a:prstGeom prst="rect">
+            <a:avLst/>
+          </a:prstGeom>
+          <a:noFill/>
+        </p:spPr>
+        <p:txBody>
+          <a:bodyPr wrap="none" lIns="0" rIns="0" tIns="0" bIns="0">
+            <a:spAutoFit/>
+          </a:bodyPr>
+          <a:lstStyle/>
+          <a:p>
+            <a:pPr algn="r"/>
+            <a:r>
+              <a:rPr sz="650">
+                <a:solidFill>
+                  <a:srgbClr val="6B7585"/>
+                </a:solidFill>
+              </a:rPr>
+              <a:t>Seamless AV</a:t>
+            </a:r>
+          </a:p>
+        </p:txBody>
+      </p:sp>
     </p:spTree>
   </p:cSld>
   <p:clrMapOvr>
@@ -9555,6 +10167,74 @@
           </a:p>
         </p:txBody>
       </p:sp>
+      <p:sp>
+        <p:nvSpPr>
+          <p:cNvPr id="26" name="cts mark"/>
+          <p:cNvSpPr txBox="1"/>
+          <p:nvPr/>
+        </p:nvSpPr>
+        <p:spPr>
+          <a:xfrm>
+            <a:off x="7726679" y="155448"/>
+            <a:ext cx="914400" cy="274320"/>
+          </a:xfrm>
+          <a:prstGeom prst="rect">
+            <a:avLst/>
+          </a:prstGeom>
+          <a:noFill/>
+        </p:spPr>
+        <p:txBody>
+          <a:bodyPr wrap="none" lIns="0" rIns="0" tIns="0" bIns="0">
+            <a:spAutoFit/>
+          </a:bodyPr>
+          <a:lstStyle/>
+          <a:p>
+            <a:pPr algn="r"/>
+            <a:r>
+              <a:rPr sz="1500" b="1">
+                <a:solidFill>
+                  <a:srgbClr val="242C39"/>
+                </a:solidFill>
+              </a:rPr>
+              <a:t>cts</a:t>
+            </a:r>
+          </a:p>
+        </p:txBody>
+      </p:sp>
+      <p:sp>
+        <p:nvSpPr>
+          <p:cNvPr id="27" name="cts mark sub"/>
+          <p:cNvSpPr txBox="1"/>
+          <p:nvPr/>
+        </p:nvSpPr>
+        <p:spPr>
+          <a:xfrm>
+            <a:off x="7726679" y="384048"/>
+            <a:ext cx="914400" cy="164592"/>
+          </a:xfrm>
+          <a:prstGeom prst="rect">
+            <a:avLst/>
+          </a:prstGeom>
+          <a:noFill/>
+        </p:spPr>
+        <p:txBody>
+          <a:bodyPr wrap="none" lIns="0" rIns="0" tIns="0" bIns="0">
+            <a:spAutoFit/>
+          </a:bodyPr>
+          <a:lstStyle/>
+          <a:p>
+            <a:pPr algn="r"/>
+            <a:r>
+              <a:rPr sz="650">
+                <a:solidFill>
+                  <a:srgbClr val="6B7585"/>
+                </a:solidFill>
+              </a:rPr>
+              <a:t>Seamless AV</a:t>
+            </a:r>
+          </a:p>
+        </p:txBody>
+      </p:sp>
     </p:spTree>
   </p:cSld>
   <p:clrMapOvr>
@@ -10196,6 +10876,74 @@
           </a:p>
         </p:txBody>
       </p:sp>
+      <p:sp>
+        <p:nvSpPr>
+          <p:cNvPr id="26" name="cts mark"/>
+          <p:cNvSpPr txBox="1"/>
+          <p:nvPr/>
+        </p:nvSpPr>
+        <p:spPr>
+          <a:xfrm>
+            <a:off x="7726679" y="155448"/>
+            <a:ext cx="914400" cy="274320"/>
+          </a:xfrm>
+          <a:prstGeom prst="rect">
+            <a:avLst/>
+          </a:prstGeom>
+          <a:noFill/>
+        </p:spPr>
+        <p:txBody>
+          <a:bodyPr wrap="none" lIns="0" rIns="0" tIns="0" bIns="0">
+            <a:spAutoFit/>
+          </a:bodyPr>
+          <a:lstStyle/>
+          <a:p>
+            <a:pPr algn="r"/>
+            <a:r>
+              <a:rPr sz="1500" b="1">
+                <a:solidFill>
+                  <a:srgbClr val="242C39"/>
+                </a:solidFill>
+              </a:rPr>
+              <a:t>cts</a:t>
+            </a:r>
+          </a:p>
+        </p:txBody>
+      </p:sp>
+      <p:sp>
+        <p:nvSpPr>
+          <p:cNvPr id="27" name="cts mark sub"/>
+          <p:cNvSpPr txBox="1"/>
+          <p:nvPr/>
+        </p:nvSpPr>
+        <p:spPr>
+          <a:xfrm>
+            <a:off x="7726679" y="384048"/>
+            <a:ext cx="914400" cy="164592"/>
+          </a:xfrm>
+          <a:prstGeom prst="rect">
+            <a:avLst/>
+          </a:prstGeom>
+          <a:noFill/>
+        </p:spPr>
+        <p:txBody>
+          <a:bodyPr wrap="none" lIns="0" rIns="0" tIns="0" bIns="0">
+            <a:spAutoFit/>
+          </a:bodyPr>
+          <a:lstStyle/>
+          <a:p>
+            <a:pPr algn="r"/>
+            <a:r>
+              <a:rPr sz="650">
+                <a:solidFill>
+                  <a:srgbClr val="6B7585"/>
+                </a:solidFill>
+              </a:rPr>
+              <a:t>Seamless AV</a:t>
+            </a:r>
+          </a:p>
+        </p:txBody>
+      </p:sp>
     </p:spTree>
   </p:cSld>
   <p:clrMapOvr>
@@ -10554,6 +11302,74 @@
           </a:p>
         </p:txBody>
       </p:sp>
+      <p:sp>
+        <p:nvSpPr>
+          <p:cNvPr id="26" name="cts mark"/>
+          <p:cNvSpPr txBox="1"/>
+          <p:nvPr/>
+        </p:nvSpPr>
+        <p:spPr>
+          <a:xfrm>
+            <a:off x="7726679" y="155448"/>
+            <a:ext cx="914400" cy="274320"/>
+          </a:xfrm>
+          <a:prstGeom prst="rect">
+            <a:avLst/>
+          </a:prstGeom>
+          <a:noFill/>
+        </p:spPr>
+        <p:txBody>
+          <a:bodyPr wrap="none" lIns="0" rIns="0" tIns="0" bIns="0">
+            <a:spAutoFit/>
+          </a:bodyPr>
+          <a:lstStyle/>
+          <a:p>
+            <a:pPr algn="r"/>
+            <a:r>
+              <a:rPr sz="1500" b="1">
+                <a:solidFill>
+                  <a:srgbClr val="242C39"/>
+                </a:solidFill>
+              </a:rPr>
+              <a:t>cts</a:t>
+            </a:r>
+          </a:p>
+        </p:txBody>
+      </p:sp>
+      <p:sp>
+        <p:nvSpPr>
+          <p:cNvPr id="27" name="cts mark sub"/>
+          <p:cNvSpPr txBox="1"/>
+          <p:nvPr/>
+        </p:nvSpPr>
+        <p:spPr>
+          <a:xfrm>
+            <a:off x="7726679" y="384048"/>
+            <a:ext cx="914400" cy="164592"/>
+          </a:xfrm>
+          <a:prstGeom prst="rect">
+            <a:avLst/>
+          </a:prstGeom>
+          <a:noFill/>
+        </p:spPr>
+        <p:txBody>
+          <a:bodyPr wrap="none" lIns="0" rIns="0" tIns="0" bIns="0">
+            <a:spAutoFit/>
+          </a:bodyPr>
+          <a:lstStyle/>
+          <a:p>
+            <a:pPr algn="r"/>
+            <a:r>
+              <a:rPr sz="650">
+                <a:solidFill>
+                  <a:srgbClr val="6B7585"/>
+                </a:solidFill>
+              </a:rPr>
+              <a:t>Seamless AV</a:t>
+            </a:r>
+          </a:p>
+        </p:txBody>
+      </p:sp>
     </p:spTree>
   </p:cSld>
   <p:clrMapOvr>
@@ -10912,6 +11728,74 @@
           </a:p>
         </p:txBody>
       </p:sp>
+      <p:sp>
+        <p:nvSpPr>
+          <p:cNvPr id="26" name="cts mark"/>
+          <p:cNvSpPr txBox="1"/>
+          <p:nvPr/>
+        </p:nvSpPr>
+        <p:spPr>
+          <a:xfrm>
+            <a:off x="7726679" y="155448"/>
+            <a:ext cx="914400" cy="274320"/>
+          </a:xfrm>
+          <a:prstGeom prst="rect">
+            <a:avLst/>
+          </a:prstGeom>
+          <a:noFill/>
+        </p:spPr>
+        <p:txBody>
+          <a:bodyPr wrap="none" lIns="0" rIns="0" tIns="0" bIns="0">
+            <a:spAutoFit/>
+          </a:bodyPr>
+          <a:lstStyle/>
+          <a:p>
+            <a:pPr algn="r"/>
+            <a:r>
+              <a:rPr sz="1500" b="1">
+                <a:solidFill>
+                  <a:srgbClr val="242C39"/>
+                </a:solidFill>
+              </a:rPr>
+              <a:t>cts</a:t>
+            </a:r>
+          </a:p>
+        </p:txBody>
+      </p:sp>
+      <p:sp>
+        <p:nvSpPr>
+          <p:cNvPr id="27" name="cts mark sub"/>
+          <p:cNvSpPr txBox="1"/>
+          <p:nvPr/>
+        </p:nvSpPr>
+        <p:spPr>
+          <a:xfrm>
+            <a:off x="7726679" y="384048"/>
+            <a:ext cx="914400" cy="164592"/>
+          </a:xfrm>
+          <a:prstGeom prst="rect">
+            <a:avLst/>
+          </a:prstGeom>
+          <a:noFill/>
+        </p:spPr>
+        <p:txBody>
+          <a:bodyPr wrap="none" lIns="0" rIns="0" tIns="0" bIns="0">
+            <a:spAutoFit/>
+          </a:bodyPr>
+          <a:lstStyle/>
+          <a:p>
+            <a:pPr algn="r"/>
+            <a:r>
+              <a:rPr sz="650">
+                <a:solidFill>
+                  <a:srgbClr val="6B7585"/>
+                </a:solidFill>
+              </a:rPr>
+              <a:t>Seamless AV</a:t>
+            </a:r>
+          </a:p>
+        </p:txBody>
+      </p:sp>
     </p:spTree>
   </p:cSld>
   <p:clrMapOvr>
@@ -11556,6 +12440,74 @@
           </a:p>
         </p:txBody>
       </p:sp>
+      <p:sp>
+        <p:nvSpPr>
+          <p:cNvPr id="26" name="cts mark"/>
+          <p:cNvSpPr txBox="1"/>
+          <p:nvPr/>
+        </p:nvSpPr>
+        <p:spPr>
+          <a:xfrm>
+            <a:off x="7726679" y="155448"/>
+            <a:ext cx="914400" cy="274320"/>
+          </a:xfrm>
+          <a:prstGeom prst="rect">
+            <a:avLst/>
+          </a:prstGeom>
+          <a:noFill/>
+        </p:spPr>
+        <p:txBody>
+          <a:bodyPr wrap="none" lIns="0" rIns="0" tIns="0" bIns="0">
+            <a:spAutoFit/>
+          </a:bodyPr>
+          <a:lstStyle/>
+          <a:p>
+            <a:pPr algn="r"/>
+            <a:r>
+              <a:rPr sz="1500" b="1">
+                <a:solidFill>
+                  <a:srgbClr val="242C39"/>
+                </a:solidFill>
+              </a:rPr>
+              <a:t>cts</a:t>
+            </a:r>
+          </a:p>
+        </p:txBody>
+      </p:sp>
+      <p:sp>
+        <p:nvSpPr>
+          <p:cNvPr id="27" name="cts mark sub"/>
+          <p:cNvSpPr txBox="1"/>
+          <p:nvPr/>
+        </p:nvSpPr>
+        <p:spPr>
+          <a:xfrm>
+            <a:off x="7726679" y="384048"/>
+            <a:ext cx="914400" cy="164592"/>
+          </a:xfrm>
+          <a:prstGeom prst="rect">
+            <a:avLst/>
+          </a:prstGeom>
+          <a:noFill/>
+        </p:spPr>
+        <p:txBody>
+          <a:bodyPr wrap="none" lIns="0" rIns="0" tIns="0" bIns="0">
+            <a:spAutoFit/>
+          </a:bodyPr>
+          <a:lstStyle/>
+          <a:p>
+            <a:pPr algn="r"/>
+            <a:r>
+              <a:rPr sz="650">
+                <a:solidFill>
+                  <a:srgbClr val="6B7585"/>
+                </a:solidFill>
+              </a:rPr>
+              <a:t>Seamless AV</a:t>
+            </a:r>
+          </a:p>
+        </p:txBody>
+      </p:sp>
     </p:spTree>
   </p:cSld>
   <p:clrMapOvr>
@@ -11914,6 +12866,74 @@
           </a:p>
         </p:txBody>
       </p:sp>
+      <p:sp>
+        <p:nvSpPr>
+          <p:cNvPr id="26" name="cts mark"/>
+          <p:cNvSpPr txBox="1"/>
+          <p:nvPr/>
+        </p:nvSpPr>
+        <p:spPr>
+          <a:xfrm>
+            <a:off x="7726679" y="155448"/>
+            <a:ext cx="914400" cy="274320"/>
+          </a:xfrm>
+          <a:prstGeom prst="rect">
+            <a:avLst/>
+          </a:prstGeom>
+          <a:noFill/>
+        </p:spPr>
+        <p:txBody>
+          <a:bodyPr wrap="none" lIns="0" rIns="0" tIns="0" bIns="0">
+            <a:spAutoFit/>
+          </a:bodyPr>
+          <a:lstStyle/>
+          <a:p>
+            <a:pPr algn="r"/>
+            <a:r>
+              <a:rPr sz="1500" b="1">
+                <a:solidFill>
+                  <a:srgbClr val="242C39"/>
+                </a:solidFill>
+              </a:rPr>
+              <a:t>cts</a:t>
+            </a:r>
+          </a:p>
+        </p:txBody>
+      </p:sp>
+      <p:sp>
+        <p:nvSpPr>
+          <p:cNvPr id="27" name="cts mark sub"/>
+          <p:cNvSpPr txBox="1"/>
+          <p:nvPr/>
+        </p:nvSpPr>
+        <p:spPr>
+          <a:xfrm>
+            <a:off x="7726679" y="384048"/>
+            <a:ext cx="914400" cy="164592"/>
+          </a:xfrm>
+          <a:prstGeom prst="rect">
+            <a:avLst/>
+          </a:prstGeom>
+          <a:noFill/>
+        </p:spPr>
+        <p:txBody>
+          <a:bodyPr wrap="none" lIns="0" rIns="0" tIns="0" bIns="0">
+            <a:spAutoFit/>
+          </a:bodyPr>
+          <a:lstStyle/>
+          <a:p>
+            <a:pPr algn="r"/>
+            <a:r>
+              <a:rPr sz="650">
+                <a:solidFill>
+                  <a:srgbClr val="6B7585"/>
+                </a:solidFill>
+              </a:rPr>
+              <a:t>Seamless AV</a:t>
+            </a:r>
+          </a:p>
+        </p:txBody>
+      </p:sp>
     </p:spTree>
   </p:cSld>
   <p:clrMapOvr>
@@ -12272,6 +13292,74 @@
           </a:p>
         </p:txBody>
       </p:sp>
+      <p:sp>
+        <p:nvSpPr>
+          <p:cNvPr id="26" name="cts mark"/>
+          <p:cNvSpPr txBox="1"/>
+          <p:nvPr/>
+        </p:nvSpPr>
+        <p:spPr>
+          <a:xfrm>
+            <a:off x="7726679" y="155448"/>
+            <a:ext cx="914400" cy="274320"/>
+          </a:xfrm>
+          <a:prstGeom prst="rect">
+            <a:avLst/>
+          </a:prstGeom>
+          <a:noFill/>
+        </p:spPr>
+        <p:txBody>
+          <a:bodyPr wrap="none" lIns="0" rIns="0" tIns="0" bIns="0">
+            <a:spAutoFit/>
+          </a:bodyPr>
+          <a:lstStyle/>
+          <a:p>
+            <a:pPr algn="r"/>
+            <a:r>
+              <a:rPr sz="1500" b="1">
+                <a:solidFill>
+                  <a:srgbClr val="242C39"/>
+                </a:solidFill>
+              </a:rPr>
+              <a:t>cts</a:t>
+            </a:r>
+          </a:p>
+        </p:txBody>
+      </p:sp>
+      <p:sp>
+        <p:nvSpPr>
+          <p:cNvPr id="27" name="cts mark sub"/>
+          <p:cNvSpPr txBox="1"/>
+          <p:nvPr/>
+        </p:nvSpPr>
+        <p:spPr>
+          <a:xfrm>
+            <a:off x="7726679" y="384048"/>
+            <a:ext cx="914400" cy="164592"/>
+          </a:xfrm>
+          <a:prstGeom prst="rect">
+            <a:avLst/>
+          </a:prstGeom>
+          <a:noFill/>
+        </p:spPr>
+        <p:txBody>
+          <a:bodyPr wrap="none" lIns="0" rIns="0" tIns="0" bIns="0">
+            <a:spAutoFit/>
+          </a:bodyPr>
+          <a:lstStyle/>
+          <a:p>
+            <a:pPr algn="r"/>
+            <a:r>
+              <a:rPr sz="650">
+                <a:solidFill>
+                  <a:srgbClr val="6B7585"/>
+                </a:solidFill>
+              </a:rPr>
+              <a:t>Seamless AV</a:t>
+            </a:r>
+          </a:p>
+        </p:txBody>
+      </p:sp>
     </p:spTree>
   </p:cSld>
   <p:clrMapOvr>
@@ -12913,6 +14001,74 @@
           </a:p>
         </p:txBody>
       </p:sp>
+      <p:sp>
+        <p:nvSpPr>
+          <p:cNvPr id="26" name="cts mark"/>
+          <p:cNvSpPr txBox="1"/>
+          <p:nvPr/>
+        </p:nvSpPr>
+        <p:spPr>
+          <a:xfrm>
+            <a:off x="7726679" y="155448"/>
+            <a:ext cx="914400" cy="274320"/>
+          </a:xfrm>
+          <a:prstGeom prst="rect">
+            <a:avLst/>
+          </a:prstGeom>
+          <a:noFill/>
+        </p:spPr>
+        <p:txBody>
+          <a:bodyPr wrap="none" lIns="0" rIns="0" tIns="0" bIns="0">
+            <a:spAutoFit/>
+          </a:bodyPr>
+          <a:lstStyle/>
+          <a:p>
+            <a:pPr algn="r"/>
+            <a:r>
+              <a:rPr sz="1500" b="1">
+                <a:solidFill>
+                  <a:srgbClr val="242C39"/>
+                </a:solidFill>
+              </a:rPr>
+              <a:t>cts</a:t>
+            </a:r>
+          </a:p>
+        </p:txBody>
+      </p:sp>
+      <p:sp>
+        <p:nvSpPr>
+          <p:cNvPr id="27" name="cts mark sub"/>
+          <p:cNvSpPr txBox="1"/>
+          <p:nvPr/>
+        </p:nvSpPr>
+        <p:spPr>
+          <a:xfrm>
+            <a:off x="7726679" y="384048"/>
+            <a:ext cx="914400" cy="164592"/>
+          </a:xfrm>
+          <a:prstGeom prst="rect">
+            <a:avLst/>
+          </a:prstGeom>
+          <a:noFill/>
+        </p:spPr>
+        <p:txBody>
+          <a:bodyPr wrap="none" lIns="0" rIns="0" tIns="0" bIns="0">
+            <a:spAutoFit/>
+          </a:bodyPr>
+          <a:lstStyle/>
+          <a:p>
+            <a:pPr algn="r"/>
+            <a:r>
+              <a:rPr sz="650">
+                <a:solidFill>
+                  <a:srgbClr val="6B7585"/>
+                </a:solidFill>
+              </a:rPr>
+              <a:t>Seamless AV</a:t>
+            </a:r>
+          </a:p>
+        </p:txBody>
+      </p:sp>
     </p:spTree>
   </p:cSld>
   <p:clrMapOvr>
@@ -15138,6 +16294,74 @@
               <a:t>Ahead of budget by $148k</a:t>
             </a:r>
             <a:endParaRPr lang="en-US" sz="750"/>
+          </a:p>
+        </p:txBody>
+      </p:sp>
+      <p:sp>
+        <p:nvSpPr>
+          <p:cNvPr id="57" name="cts mark"/>
+          <p:cNvSpPr txBox="1"/>
+          <p:nvPr/>
+        </p:nvSpPr>
+        <p:spPr>
+          <a:xfrm>
+            <a:off x="7726679" y="155448"/>
+            <a:ext cx="914400" cy="274320"/>
+          </a:xfrm>
+          <a:prstGeom prst="rect">
+            <a:avLst/>
+          </a:prstGeom>
+          <a:noFill/>
+        </p:spPr>
+        <p:txBody>
+          <a:bodyPr wrap="none" lIns="0" rIns="0" tIns="0" bIns="0">
+            <a:spAutoFit/>
+          </a:bodyPr>
+          <a:lstStyle/>
+          <a:p>
+            <a:pPr algn="r"/>
+            <a:r>
+              <a:rPr sz="1500" b="1">
+                <a:solidFill>
+                  <a:srgbClr val="242C39"/>
+                </a:solidFill>
+              </a:rPr>
+              <a:t>cts</a:t>
+            </a:r>
+          </a:p>
+        </p:txBody>
+      </p:sp>
+      <p:sp>
+        <p:nvSpPr>
+          <p:cNvPr id="58" name="cts mark sub"/>
+          <p:cNvSpPr txBox="1"/>
+          <p:nvPr/>
+        </p:nvSpPr>
+        <p:spPr>
+          <a:xfrm>
+            <a:off x="7726679" y="384048"/>
+            <a:ext cx="914400" cy="164592"/>
+          </a:xfrm>
+          <a:prstGeom prst="rect">
+            <a:avLst/>
+          </a:prstGeom>
+          <a:noFill/>
+        </p:spPr>
+        <p:txBody>
+          <a:bodyPr wrap="none" lIns="0" rIns="0" tIns="0" bIns="0">
+            <a:spAutoFit/>
+          </a:bodyPr>
+          <a:lstStyle/>
+          <a:p>
+            <a:pPr algn="r"/>
+            <a:r>
+              <a:rPr sz="650">
+                <a:solidFill>
+                  <a:srgbClr val="6B7585"/>
+                </a:solidFill>
+              </a:rPr>
+              <a:t>Seamless AV</a:t>
+            </a:r>
           </a:p>
         </p:txBody>
       </p:sp>
@@ -17263,6 +18487,74 @@
           </a:p>
         </p:txBody>
       </p:sp>
+      <p:sp>
+        <p:nvSpPr>
+          <p:cNvPr id="32" name="cts mark"/>
+          <p:cNvSpPr txBox="1"/>
+          <p:nvPr/>
+        </p:nvSpPr>
+        <p:spPr>
+          <a:xfrm>
+            <a:off x="7726679" y="155448"/>
+            <a:ext cx="914400" cy="274320"/>
+          </a:xfrm>
+          <a:prstGeom prst="rect">
+            <a:avLst/>
+          </a:prstGeom>
+          <a:noFill/>
+        </p:spPr>
+        <p:txBody>
+          <a:bodyPr wrap="none" lIns="0" rIns="0" tIns="0" bIns="0">
+            <a:spAutoFit/>
+          </a:bodyPr>
+          <a:lstStyle/>
+          <a:p>
+            <a:pPr algn="r"/>
+            <a:r>
+              <a:rPr sz="1500" b="1">
+                <a:solidFill>
+                  <a:srgbClr val="242C39"/>
+                </a:solidFill>
+              </a:rPr>
+              <a:t>cts</a:t>
+            </a:r>
+          </a:p>
+        </p:txBody>
+      </p:sp>
+      <p:sp>
+        <p:nvSpPr>
+          <p:cNvPr id="33" name="cts mark sub"/>
+          <p:cNvSpPr txBox="1"/>
+          <p:nvPr/>
+        </p:nvSpPr>
+        <p:spPr>
+          <a:xfrm>
+            <a:off x="7726679" y="384048"/>
+            <a:ext cx="914400" cy="164592"/>
+          </a:xfrm>
+          <a:prstGeom prst="rect">
+            <a:avLst/>
+          </a:prstGeom>
+          <a:noFill/>
+        </p:spPr>
+        <p:txBody>
+          <a:bodyPr wrap="none" lIns="0" rIns="0" tIns="0" bIns="0">
+            <a:spAutoFit/>
+          </a:bodyPr>
+          <a:lstStyle/>
+          <a:p>
+            <a:pPr algn="r"/>
+            <a:r>
+              <a:rPr sz="650">
+                <a:solidFill>
+                  <a:srgbClr val="6B7585"/>
+                </a:solidFill>
+              </a:rPr>
+              <a:t>Seamless AV</a:t>
+            </a:r>
+          </a:p>
+        </p:txBody>
+      </p:sp>
     </p:spTree>
   </p:cSld>
   <p:clrMapOvr>
@@ -18560,6 +19852,74 @@
           </a:p>
         </p:txBody>
       </p:sp>
+      <p:sp>
+        <p:nvSpPr>
+          <p:cNvPr id="27" name="cts mark"/>
+          <p:cNvSpPr txBox="1"/>
+          <p:nvPr/>
+        </p:nvSpPr>
+        <p:spPr>
+          <a:xfrm>
+            <a:off x="7726679" y="155448"/>
+            <a:ext cx="914400" cy="274320"/>
+          </a:xfrm>
+          <a:prstGeom prst="rect">
+            <a:avLst/>
+          </a:prstGeom>
+          <a:noFill/>
+        </p:spPr>
+        <p:txBody>
+          <a:bodyPr wrap="none" lIns="0" rIns="0" tIns="0" bIns="0">
+            <a:spAutoFit/>
+          </a:bodyPr>
+          <a:lstStyle/>
+          <a:p>
+            <a:pPr algn="r"/>
+            <a:r>
+              <a:rPr sz="1500" b="1">
+                <a:solidFill>
+                  <a:srgbClr val="242C39"/>
+                </a:solidFill>
+              </a:rPr>
+              <a:t>cts</a:t>
+            </a:r>
+          </a:p>
+        </p:txBody>
+      </p:sp>
+      <p:sp>
+        <p:nvSpPr>
+          <p:cNvPr id="28" name="cts mark sub"/>
+          <p:cNvSpPr txBox="1"/>
+          <p:nvPr/>
+        </p:nvSpPr>
+        <p:spPr>
+          <a:xfrm>
+            <a:off x="7726679" y="384048"/>
+            <a:ext cx="914400" cy="164592"/>
+          </a:xfrm>
+          <a:prstGeom prst="rect">
+            <a:avLst/>
+          </a:prstGeom>
+          <a:noFill/>
+        </p:spPr>
+        <p:txBody>
+          <a:bodyPr wrap="none" lIns="0" rIns="0" tIns="0" bIns="0">
+            <a:spAutoFit/>
+          </a:bodyPr>
+          <a:lstStyle/>
+          <a:p>
+            <a:pPr algn="r"/>
+            <a:r>
+              <a:rPr sz="650">
+                <a:solidFill>
+                  <a:srgbClr val="6B7585"/>
+                </a:solidFill>
+              </a:rPr>
+              <a:t>Seamless AV</a:t>
+            </a:r>
+          </a:p>
+        </p:txBody>
+      </p:sp>
     </p:spTree>
   </p:cSld>
   <p:clrMapOvr>
@@ -18918,6 +20278,74 @@
           </a:p>
         </p:txBody>
       </p:sp>
+      <p:sp>
+        <p:nvSpPr>
+          <p:cNvPr id="26" name="cts mark"/>
+          <p:cNvSpPr txBox="1"/>
+          <p:nvPr/>
+        </p:nvSpPr>
+        <p:spPr>
+          <a:xfrm>
+            <a:off x="7726679" y="155448"/>
+            <a:ext cx="914400" cy="274320"/>
+          </a:xfrm>
+          <a:prstGeom prst="rect">
+            <a:avLst/>
+          </a:prstGeom>
+          <a:noFill/>
+        </p:spPr>
+        <p:txBody>
+          <a:bodyPr wrap="none" lIns="0" rIns="0" tIns="0" bIns="0">
+            <a:spAutoFit/>
+          </a:bodyPr>
+          <a:lstStyle/>
+          <a:p>
+            <a:pPr algn="r"/>
+            <a:r>
+              <a:rPr sz="1500" b="1">
+                <a:solidFill>
+                  <a:srgbClr val="242C39"/>
+                </a:solidFill>
+              </a:rPr>
+              <a:t>cts</a:t>
+            </a:r>
+          </a:p>
+        </p:txBody>
+      </p:sp>
+      <p:sp>
+        <p:nvSpPr>
+          <p:cNvPr id="27" name="cts mark sub"/>
+          <p:cNvSpPr txBox="1"/>
+          <p:nvPr/>
+        </p:nvSpPr>
+        <p:spPr>
+          <a:xfrm>
+            <a:off x="7726679" y="384048"/>
+            <a:ext cx="914400" cy="164592"/>
+          </a:xfrm>
+          <a:prstGeom prst="rect">
+            <a:avLst/>
+          </a:prstGeom>
+          <a:noFill/>
+        </p:spPr>
+        <p:txBody>
+          <a:bodyPr wrap="none" lIns="0" rIns="0" tIns="0" bIns="0">
+            <a:spAutoFit/>
+          </a:bodyPr>
+          <a:lstStyle/>
+          <a:p>
+            <a:pPr algn="r"/>
+            <a:r>
+              <a:rPr sz="650">
+                <a:solidFill>
+                  <a:srgbClr val="6B7585"/>
+                </a:solidFill>
+              </a:rPr>
+              <a:t>Seamless AV</a:t>
+            </a:r>
+          </a:p>
+        </p:txBody>
+      </p:sp>
     </p:spTree>
   </p:cSld>
   <p:clrMapOvr>
@@ -19279,6 +20707,74 @@
           </a:p>
         </p:txBody>
       </p:sp>
+      <p:sp>
+        <p:nvSpPr>
+          <p:cNvPr id="26" name="cts mark"/>
+          <p:cNvSpPr txBox="1"/>
+          <p:nvPr/>
+        </p:nvSpPr>
+        <p:spPr>
+          <a:xfrm>
+            <a:off x="7726679" y="155448"/>
+            <a:ext cx="914400" cy="274320"/>
+          </a:xfrm>
+          <a:prstGeom prst="rect">
+            <a:avLst/>
+          </a:prstGeom>
+          <a:noFill/>
+        </p:spPr>
+        <p:txBody>
+          <a:bodyPr wrap="none" lIns="0" rIns="0" tIns="0" bIns="0">
+            <a:spAutoFit/>
+          </a:bodyPr>
+          <a:lstStyle/>
+          <a:p>
+            <a:pPr algn="r"/>
+            <a:r>
+              <a:rPr sz="1500" b="1">
+                <a:solidFill>
+                  <a:srgbClr val="242C39"/>
+                </a:solidFill>
+              </a:rPr>
+              <a:t>cts</a:t>
+            </a:r>
+          </a:p>
+        </p:txBody>
+      </p:sp>
+      <p:sp>
+        <p:nvSpPr>
+          <p:cNvPr id="27" name="cts mark sub"/>
+          <p:cNvSpPr txBox="1"/>
+          <p:nvPr/>
+        </p:nvSpPr>
+        <p:spPr>
+          <a:xfrm>
+            <a:off x="7726679" y="384048"/>
+            <a:ext cx="914400" cy="164592"/>
+          </a:xfrm>
+          <a:prstGeom prst="rect">
+            <a:avLst/>
+          </a:prstGeom>
+          <a:noFill/>
+        </p:spPr>
+        <p:txBody>
+          <a:bodyPr wrap="none" lIns="0" rIns="0" tIns="0" bIns="0">
+            <a:spAutoFit/>
+          </a:bodyPr>
+          <a:lstStyle/>
+          <a:p>
+            <a:pPr algn="r"/>
+            <a:r>
+              <a:rPr sz="650">
+                <a:solidFill>
+                  <a:srgbClr val="6B7585"/>
+                </a:solidFill>
+              </a:rPr>
+              <a:t>Seamless AV</a:t>
+            </a:r>
+          </a:p>
+        </p:txBody>
+      </p:sp>
     </p:spTree>
   </p:cSld>
   <p:clrMapOvr>
@@ -19640,6 +21136,74 @@
           </a:p>
         </p:txBody>
       </p:sp>
+      <p:sp>
+        <p:nvSpPr>
+          <p:cNvPr id="26" name="cts mark"/>
+          <p:cNvSpPr txBox="1"/>
+          <p:nvPr/>
+        </p:nvSpPr>
+        <p:spPr>
+          <a:xfrm>
+            <a:off x="7726679" y="155448"/>
+            <a:ext cx="914400" cy="274320"/>
+          </a:xfrm>
+          <a:prstGeom prst="rect">
+            <a:avLst/>
+          </a:prstGeom>
+          <a:noFill/>
+        </p:spPr>
+        <p:txBody>
+          <a:bodyPr wrap="none" lIns="0" rIns="0" tIns="0" bIns="0">
+            <a:spAutoFit/>
+          </a:bodyPr>
+          <a:lstStyle/>
+          <a:p>
+            <a:pPr algn="r"/>
+            <a:r>
+              <a:rPr sz="1500" b="1">
+                <a:solidFill>
+                  <a:srgbClr val="242C39"/>
+                </a:solidFill>
+              </a:rPr>
+              <a:t>cts</a:t>
+            </a:r>
+          </a:p>
+        </p:txBody>
+      </p:sp>
+      <p:sp>
+        <p:nvSpPr>
+          <p:cNvPr id="27" name="cts mark sub"/>
+          <p:cNvSpPr txBox="1"/>
+          <p:nvPr/>
+        </p:nvSpPr>
+        <p:spPr>
+          <a:xfrm>
+            <a:off x="7726679" y="384048"/>
+            <a:ext cx="914400" cy="164592"/>
+          </a:xfrm>
+          <a:prstGeom prst="rect">
+            <a:avLst/>
+          </a:prstGeom>
+          <a:noFill/>
+        </p:spPr>
+        <p:txBody>
+          <a:bodyPr wrap="none" lIns="0" rIns="0" tIns="0" bIns="0">
+            <a:spAutoFit/>
+          </a:bodyPr>
+          <a:lstStyle/>
+          <a:p>
+            <a:pPr algn="r"/>
+            <a:r>
+              <a:rPr sz="650">
+                <a:solidFill>
+                  <a:srgbClr val="6B7585"/>
+                </a:solidFill>
+              </a:rPr>
+              <a:t>Seamless AV</a:t>
+            </a:r>
+          </a:p>
+        </p:txBody>
+      </p:sp>
     </p:spTree>
   </p:cSld>
   <p:clrMapOvr>
@@ -19995,6 +21559,74 @@
               <a:t>9</a:t>
             </a:fld>
             <a:endParaRPr lang="en-US"/>
+          </a:p>
+        </p:txBody>
+      </p:sp>
+      <p:sp>
+        <p:nvSpPr>
+          <p:cNvPr id="26" name="cts mark"/>
+          <p:cNvSpPr txBox="1"/>
+          <p:nvPr/>
+        </p:nvSpPr>
+        <p:spPr>
+          <a:xfrm>
+            <a:off x="7726679" y="155448"/>
+            <a:ext cx="914400" cy="274320"/>
+          </a:xfrm>
+          <a:prstGeom prst="rect">
+            <a:avLst/>
+          </a:prstGeom>
+          <a:noFill/>
+        </p:spPr>
+        <p:txBody>
+          <a:bodyPr wrap="none" lIns="0" rIns="0" tIns="0" bIns="0">
+            <a:spAutoFit/>
+          </a:bodyPr>
+          <a:lstStyle/>
+          <a:p>
+            <a:pPr algn="r"/>
+            <a:r>
+              <a:rPr sz="1500" b="1">
+                <a:solidFill>
+                  <a:srgbClr val="242C39"/>
+                </a:solidFill>
+              </a:rPr>
+              <a:t>cts</a:t>
+            </a:r>
+          </a:p>
+        </p:txBody>
+      </p:sp>
+      <p:sp>
+        <p:nvSpPr>
+          <p:cNvPr id="27" name="cts mark sub"/>
+          <p:cNvSpPr txBox="1"/>
+          <p:nvPr/>
+        </p:nvSpPr>
+        <p:spPr>
+          <a:xfrm>
+            <a:off x="7726679" y="384048"/>
+            <a:ext cx="914400" cy="164592"/>
+          </a:xfrm>
+          <a:prstGeom prst="rect">
+            <a:avLst/>
+          </a:prstGeom>
+          <a:noFill/>
+        </p:spPr>
+        <p:txBody>
+          <a:bodyPr wrap="none" lIns="0" rIns="0" tIns="0" bIns="0">
+            <a:spAutoFit/>
+          </a:bodyPr>
+          <a:lstStyle/>
+          <a:p>
+            <a:pPr algn="r"/>
+            <a:r>
+              <a:rPr sz="650">
+                <a:solidFill>
+                  <a:srgbClr val="6B7585"/>
+                </a:solidFill>
+              </a:rPr>
+              <a:t>Seamless AV</a:t>
+            </a:r>
           </a:p>
         </p:txBody>
       </p:sp>

--- a/deck/CTS Monthly Business Review - 30092026.pptx
+++ b/deck/CTS Monthly Business Review - 30092026.pptx
@@ -5614,10 +5614,26 @@
             <a:r>
               <a:rPr sz="1500" b="1">
                 <a:solidFill>
-                  <a:srgbClr val="242C39"/>
-                </a:solidFill>
-              </a:rPr>
-              <a:t>cts</a:t>
+                  <a:srgbClr val="005358"/>
+                </a:solidFill>
+              </a:rPr>
+              <a:t>c</a:t>
+            </a:r>
+            <a:r>
+              <a:rPr sz="1500" b="1">
+                <a:solidFill>
+                  <a:srgbClr val="6D71FF"/>
+                </a:solidFill>
+              </a:rPr>
+              <a:t>t</a:t>
+            </a:r>
+            <a:r>
+              <a:rPr sz="1500" b="1">
+                <a:solidFill>
+                  <a:srgbClr val="F33844"/>
+                </a:solidFill>
+              </a:rPr>
+              <a:t>s</a:t>
             </a:r>
           </a:p>
         </p:txBody>
@@ -6040,10 +6056,26 @@
             <a:r>
               <a:rPr sz="1500" b="1">
                 <a:solidFill>
-                  <a:srgbClr val="242C39"/>
-                </a:solidFill>
-              </a:rPr>
-              <a:t>cts</a:t>
+                  <a:srgbClr val="005358"/>
+                </a:solidFill>
+              </a:rPr>
+              <a:t>c</a:t>
+            </a:r>
+            <a:r>
+              <a:rPr sz="1500" b="1">
+                <a:solidFill>
+                  <a:srgbClr val="6D71FF"/>
+                </a:solidFill>
+              </a:rPr>
+              <a:t>t</a:t>
+            </a:r>
+            <a:r>
+              <a:rPr sz="1500" b="1">
+                <a:solidFill>
+                  <a:srgbClr val="F33844"/>
+                </a:solidFill>
+              </a:rPr>
+              <a:t>s</a:t>
             </a:r>
           </a:p>
         </p:txBody>
@@ -6466,10 +6498,26 @@
             <a:r>
               <a:rPr sz="1500" b="1">
                 <a:solidFill>
-                  <a:srgbClr val="242C39"/>
-                </a:solidFill>
-              </a:rPr>
-              <a:t>cts</a:t>
+                  <a:srgbClr val="005358"/>
+                </a:solidFill>
+              </a:rPr>
+              <a:t>c</a:t>
+            </a:r>
+            <a:r>
+              <a:rPr sz="1500" b="1">
+                <a:solidFill>
+                  <a:srgbClr val="6D71FF"/>
+                </a:solidFill>
+              </a:rPr>
+              <a:t>t</a:t>
+            </a:r>
+            <a:r>
+              <a:rPr sz="1500" b="1">
+                <a:solidFill>
+                  <a:srgbClr val="F33844"/>
+                </a:solidFill>
+              </a:rPr>
+              <a:t>s</a:t>
             </a:r>
           </a:p>
         </p:txBody>
@@ -6892,10 +6940,26 @@
             <a:r>
               <a:rPr sz="1500" b="1">
                 <a:solidFill>
-                  <a:srgbClr val="242C39"/>
-                </a:solidFill>
-              </a:rPr>
-              <a:t>cts</a:t>
+                  <a:srgbClr val="005358"/>
+                </a:solidFill>
+              </a:rPr>
+              <a:t>c</a:t>
+            </a:r>
+            <a:r>
+              <a:rPr sz="1500" b="1">
+                <a:solidFill>
+                  <a:srgbClr val="6D71FF"/>
+                </a:solidFill>
+              </a:rPr>
+              <a:t>t</a:t>
+            </a:r>
+            <a:r>
+              <a:rPr sz="1500" b="1">
+                <a:solidFill>
+                  <a:srgbClr val="F33844"/>
+                </a:solidFill>
+              </a:rPr>
+              <a:t>s</a:t>
             </a:r>
           </a:p>
         </p:txBody>
@@ -7318,10 +7382,26 @@
             <a:r>
               <a:rPr sz="1500" b="1">
                 <a:solidFill>
-                  <a:srgbClr val="242C39"/>
-                </a:solidFill>
-              </a:rPr>
-              <a:t>cts</a:t>
+                  <a:srgbClr val="005358"/>
+                </a:solidFill>
+              </a:rPr>
+              <a:t>c</a:t>
+            </a:r>
+            <a:r>
+              <a:rPr sz="1500" b="1">
+                <a:solidFill>
+                  <a:srgbClr val="6D71FF"/>
+                </a:solidFill>
+              </a:rPr>
+              <a:t>t</a:t>
+            </a:r>
+            <a:r>
+              <a:rPr sz="1500" b="1">
+                <a:solidFill>
+                  <a:srgbClr val="F33844"/>
+                </a:solidFill>
+              </a:rPr>
+              <a:t>s</a:t>
             </a:r>
           </a:p>
         </p:txBody>
@@ -8027,10 +8107,26 @@
             <a:r>
               <a:rPr sz="1500" b="1">
                 <a:solidFill>
-                  <a:srgbClr val="242C39"/>
-                </a:solidFill>
-              </a:rPr>
-              <a:t>cts</a:t>
+                  <a:srgbClr val="005358"/>
+                </a:solidFill>
+              </a:rPr>
+              <a:t>c</a:t>
+            </a:r>
+            <a:r>
+              <a:rPr sz="1500" b="1">
+                <a:solidFill>
+                  <a:srgbClr val="6D71FF"/>
+                </a:solidFill>
+              </a:rPr>
+              <a:t>t</a:t>
+            </a:r>
+            <a:r>
+              <a:rPr sz="1500" b="1">
+                <a:solidFill>
+                  <a:srgbClr val="F33844"/>
+                </a:solidFill>
+              </a:rPr>
+              <a:t>s</a:t>
             </a:r>
           </a:p>
         </p:txBody>
@@ -8453,10 +8549,26 @@
             <a:r>
               <a:rPr sz="1500" b="1">
                 <a:solidFill>
-                  <a:srgbClr val="242C39"/>
-                </a:solidFill>
-              </a:rPr>
-              <a:t>cts</a:t>
+                  <a:srgbClr val="005358"/>
+                </a:solidFill>
+              </a:rPr>
+              <a:t>c</a:t>
+            </a:r>
+            <a:r>
+              <a:rPr sz="1500" b="1">
+                <a:solidFill>
+                  <a:srgbClr val="6D71FF"/>
+                </a:solidFill>
+              </a:rPr>
+              <a:t>t</a:t>
+            </a:r>
+            <a:r>
+              <a:rPr sz="1500" b="1">
+                <a:solidFill>
+                  <a:srgbClr val="F33844"/>
+                </a:solidFill>
+              </a:rPr>
+              <a:t>s</a:t>
             </a:r>
           </a:p>
         </p:txBody>
@@ -8879,10 +8991,26 @@
             <a:r>
               <a:rPr sz="1500" b="1">
                 <a:solidFill>
-                  <a:srgbClr val="242C39"/>
-                </a:solidFill>
-              </a:rPr>
-              <a:t>cts</a:t>
+                  <a:srgbClr val="005358"/>
+                </a:solidFill>
+              </a:rPr>
+              <a:t>c</a:t>
+            </a:r>
+            <a:r>
+              <a:rPr sz="1500" b="1">
+                <a:solidFill>
+                  <a:srgbClr val="6D71FF"/>
+                </a:solidFill>
+              </a:rPr>
+              <a:t>t</a:t>
+            </a:r>
+            <a:r>
+              <a:rPr sz="1500" b="1">
+                <a:solidFill>
+                  <a:srgbClr val="F33844"/>
+                </a:solidFill>
+              </a:rPr>
+              <a:t>s</a:t>
             </a:r>
           </a:p>
         </p:txBody>
@@ -9308,10 +9436,26 @@
             <a:r>
               <a:rPr sz="1500" b="1">
                 <a:solidFill>
-                  <a:srgbClr val="242C39"/>
-                </a:solidFill>
-              </a:rPr>
-              <a:t>cts</a:t>
+                  <a:srgbClr val="005358"/>
+                </a:solidFill>
+              </a:rPr>
+              <a:t>c</a:t>
+            </a:r>
+            <a:r>
+              <a:rPr sz="1500" b="1">
+                <a:solidFill>
+                  <a:srgbClr val="6D71FF"/>
+                </a:solidFill>
+              </a:rPr>
+              <a:t>t</a:t>
+            </a:r>
+            <a:r>
+              <a:rPr sz="1500" b="1">
+                <a:solidFill>
+                  <a:srgbClr val="F33844"/>
+                </a:solidFill>
+              </a:rPr>
+              <a:t>s</a:t>
             </a:r>
           </a:p>
         </p:txBody>
@@ -10193,10 +10337,26 @@
             <a:r>
               <a:rPr sz="1500" b="1">
                 <a:solidFill>
-                  <a:srgbClr val="242C39"/>
-                </a:solidFill>
-              </a:rPr>
-              <a:t>cts</a:t>
+                  <a:srgbClr val="005358"/>
+                </a:solidFill>
+              </a:rPr>
+              <a:t>c</a:t>
+            </a:r>
+            <a:r>
+              <a:rPr sz="1500" b="1">
+                <a:solidFill>
+                  <a:srgbClr val="6D71FF"/>
+                </a:solidFill>
+              </a:rPr>
+              <a:t>t</a:t>
+            </a:r>
+            <a:r>
+              <a:rPr sz="1500" b="1">
+                <a:solidFill>
+                  <a:srgbClr val="F33844"/>
+                </a:solidFill>
+              </a:rPr>
+              <a:t>s</a:t>
             </a:r>
           </a:p>
         </p:txBody>
@@ -10902,10 +11062,26 @@
             <a:r>
               <a:rPr sz="1500" b="1">
                 <a:solidFill>
-                  <a:srgbClr val="242C39"/>
-                </a:solidFill>
-              </a:rPr>
-              <a:t>cts</a:t>
+                  <a:srgbClr val="005358"/>
+                </a:solidFill>
+              </a:rPr>
+              <a:t>c</a:t>
+            </a:r>
+            <a:r>
+              <a:rPr sz="1500" b="1">
+                <a:solidFill>
+                  <a:srgbClr val="6D71FF"/>
+                </a:solidFill>
+              </a:rPr>
+              <a:t>t</a:t>
+            </a:r>
+            <a:r>
+              <a:rPr sz="1500" b="1">
+                <a:solidFill>
+                  <a:srgbClr val="F33844"/>
+                </a:solidFill>
+              </a:rPr>
+              <a:t>s</a:t>
             </a:r>
           </a:p>
         </p:txBody>
@@ -11328,10 +11504,26 @@
             <a:r>
               <a:rPr sz="1500" b="1">
                 <a:solidFill>
-                  <a:srgbClr val="242C39"/>
-                </a:solidFill>
-              </a:rPr>
-              <a:t>cts</a:t>
+                  <a:srgbClr val="005358"/>
+                </a:solidFill>
+              </a:rPr>
+              <a:t>c</a:t>
+            </a:r>
+            <a:r>
+              <a:rPr sz="1500" b="1">
+                <a:solidFill>
+                  <a:srgbClr val="6D71FF"/>
+                </a:solidFill>
+              </a:rPr>
+              <a:t>t</a:t>
+            </a:r>
+            <a:r>
+              <a:rPr sz="1500" b="1">
+                <a:solidFill>
+                  <a:srgbClr val="F33844"/>
+                </a:solidFill>
+              </a:rPr>
+              <a:t>s</a:t>
             </a:r>
           </a:p>
         </p:txBody>
@@ -11754,10 +11946,26 @@
             <a:r>
               <a:rPr sz="1500" b="1">
                 <a:solidFill>
-                  <a:srgbClr val="242C39"/>
-                </a:solidFill>
-              </a:rPr>
-              <a:t>cts</a:t>
+                  <a:srgbClr val="005358"/>
+                </a:solidFill>
+              </a:rPr>
+              <a:t>c</a:t>
+            </a:r>
+            <a:r>
+              <a:rPr sz="1500" b="1">
+                <a:solidFill>
+                  <a:srgbClr val="6D71FF"/>
+                </a:solidFill>
+              </a:rPr>
+              <a:t>t</a:t>
+            </a:r>
+            <a:r>
+              <a:rPr sz="1500" b="1">
+                <a:solidFill>
+                  <a:srgbClr val="F33844"/>
+                </a:solidFill>
+              </a:rPr>
+              <a:t>s</a:t>
             </a:r>
           </a:p>
         </p:txBody>
@@ -12466,10 +12674,26 @@
             <a:r>
               <a:rPr sz="1500" b="1">
                 <a:solidFill>
-                  <a:srgbClr val="242C39"/>
-                </a:solidFill>
-              </a:rPr>
-              <a:t>cts</a:t>
+                  <a:srgbClr val="005358"/>
+                </a:solidFill>
+              </a:rPr>
+              <a:t>c</a:t>
+            </a:r>
+            <a:r>
+              <a:rPr sz="1500" b="1">
+                <a:solidFill>
+                  <a:srgbClr val="6D71FF"/>
+                </a:solidFill>
+              </a:rPr>
+              <a:t>t</a:t>
+            </a:r>
+            <a:r>
+              <a:rPr sz="1500" b="1">
+                <a:solidFill>
+                  <a:srgbClr val="F33844"/>
+                </a:solidFill>
+              </a:rPr>
+              <a:t>s</a:t>
             </a:r>
           </a:p>
         </p:txBody>
@@ -12892,10 +13116,26 @@
             <a:r>
               <a:rPr sz="1500" b="1">
                 <a:solidFill>
-                  <a:srgbClr val="242C39"/>
-                </a:solidFill>
-              </a:rPr>
-              <a:t>cts</a:t>
+                  <a:srgbClr val="005358"/>
+                </a:solidFill>
+              </a:rPr>
+              <a:t>c</a:t>
+            </a:r>
+            <a:r>
+              <a:rPr sz="1500" b="1">
+                <a:solidFill>
+                  <a:srgbClr val="6D71FF"/>
+                </a:solidFill>
+              </a:rPr>
+              <a:t>t</a:t>
+            </a:r>
+            <a:r>
+              <a:rPr sz="1500" b="1">
+                <a:solidFill>
+                  <a:srgbClr val="F33844"/>
+                </a:solidFill>
+              </a:rPr>
+              <a:t>s</a:t>
             </a:r>
           </a:p>
         </p:txBody>
@@ -13318,10 +13558,26 @@
             <a:r>
               <a:rPr sz="1500" b="1">
                 <a:solidFill>
-                  <a:srgbClr val="242C39"/>
-                </a:solidFill>
-              </a:rPr>
-              <a:t>cts</a:t>
+                  <a:srgbClr val="005358"/>
+                </a:solidFill>
+              </a:rPr>
+              <a:t>c</a:t>
+            </a:r>
+            <a:r>
+              <a:rPr sz="1500" b="1">
+                <a:solidFill>
+                  <a:srgbClr val="6D71FF"/>
+                </a:solidFill>
+              </a:rPr>
+              <a:t>t</a:t>
+            </a:r>
+            <a:r>
+              <a:rPr sz="1500" b="1">
+                <a:solidFill>
+                  <a:srgbClr val="F33844"/>
+                </a:solidFill>
+              </a:rPr>
+              <a:t>s</a:t>
             </a:r>
           </a:p>
         </p:txBody>
@@ -14027,10 +14283,26 @@
             <a:r>
               <a:rPr sz="1500" b="1">
                 <a:solidFill>
-                  <a:srgbClr val="242C39"/>
-                </a:solidFill>
-              </a:rPr>
-              <a:t>cts</a:t>
+                  <a:srgbClr val="005358"/>
+                </a:solidFill>
+              </a:rPr>
+              <a:t>c</a:t>
+            </a:r>
+            <a:r>
+              <a:rPr sz="1500" b="1">
+                <a:solidFill>
+                  <a:srgbClr val="6D71FF"/>
+                </a:solidFill>
+              </a:rPr>
+              <a:t>t</a:t>
+            </a:r>
+            <a:r>
+              <a:rPr sz="1500" b="1">
+                <a:solidFill>
+                  <a:srgbClr val="F33844"/>
+                </a:solidFill>
+              </a:rPr>
+              <a:t>s</a:t>
             </a:r>
           </a:p>
         </p:txBody>
@@ -16323,10 +16595,26 @@
             <a:r>
               <a:rPr sz="1500" b="1">
                 <a:solidFill>
-                  <a:srgbClr val="242C39"/>
-                </a:solidFill>
-              </a:rPr>
-              <a:t>cts</a:t>
+                  <a:srgbClr val="005358"/>
+                </a:solidFill>
+              </a:rPr>
+              <a:t>c</a:t>
+            </a:r>
+            <a:r>
+              <a:rPr sz="1500" b="1">
+                <a:solidFill>
+                  <a:srgbClr val="6D71FF"/>
+                </a:solidFill>
+              </a:rPr>
+              <a:t>t</a:t>
+            </a:r>
+            <a:r>
+              <a:rPr sz="1500" b="1">
+                <a:solidFill>
+                  <a:srgbClr val="F33844"/>
+                </a:solidFill>
+              </a:rPr>
+              <a:t>s</a:t>
             </a:r>
           </a:p>
         </p:txBody>
@@ -18513,10 +18801,26 @@
             <a:r>
               <a:rPr sz="1500" b="1">
                 <a:solidFill>
-                  <a:srgbClr val="242C39"/>
-                </a:solidFill>
-              </a:rPr>
-              <a:t>cts</a:t>
+                  <a:srgbClr val="005358"/>
+                </a:solidFill>
+              </a:rPr>
+              <a:t>c</a:t>
+            </a:r>
+            <a:r>
+              <a:rPr sz="1500" b="1">
+                <a:solidFill>
+                  <a:srgbClr val="6D71FF"/>
+                </a:solidFill>
+              </a:rPr>
+              <a:t>t</a:t>
+            </a:r>
+            <a:r>
+              <a:rPr sz="1500" b="1">
+                <a:solidFill>
+                  <a:srgbClr val="F33844"/>
+                </a:solidFill>
+              </a:rPr>
+              <a:t>s</a:t>
             </a:r>
           </a:p>
         </p:txBody>
@@ -19878,10 +20182,26 @@
             <a:r>
               <a:rPr sz="1500" b="1">
                 <a:solidFill>
-                  <a:srgbClr val="242C39"/>
-                </a:solidFill>
-              </a:rPr>
-              <a:t>cts</a:t>
+                  <a:srgbClr val="005358"/>
+                </a:solidFill>
+              </a:rPr>
+              <a:t>c</a:t>
+            </a:r>
+            <a:r>
+              <a:rPr sz="1500" b="1">
+                <a:solidFill>
+                  <a:srgbClr val="6D71FF"/>
+                </a:solidFill>
+              </a:rPr>
+              <a:t>t</a:t>
+            </a:r>
+            <a:r>
+              <a:rPr sz="1500" b="1">
+                <a:solidFill>
+                  <a:srgbClr val="F33844"/>
+                </a:solidFill>
+              </a:rPr>
+              <a:t>s</a:t>
             </a:r>
           </a:p>
         </p:txBody>
@@ -20304,10 +20624,26 @@
             <a:r>
               <a:rPr sz="1500" b="1">
                 <a:solidFill>
-                  <a:srgbClr val="242C39"/>
-                </a:solidFill>
-              </a:rPr>
-              <a:t>cts</a:t>
+                  <a:srgbClr val="005358"/>
+                </a:solidFill>
+              </a:rPr>
+              <a:t>c</a:t>
+            </a:r>
+            <a:r>
+              <a:rPr sz="1500" b="1">
+                <a:solidFill>
+                  <a:srgbClr val="6D71FF"/>
+                </a:solidFill>
+              </a:rPr>
+              <a:t>t</a:t>
+            </a:r>
+            <a:r>
+              <a:rPr sz="1500" b="1">
+                <a:solidFill>
+                  <a:srgbClr val="F33844"/>
+                </a:solidFill>
+              </a:rPr>
+              <a:t>s</a:t>
             </a:r>
           </a:p>
         </p:txBody>
@@ -20733,10 +21069,26 @@
             <a:r>
               <a:rPr sz="1500" b="1">
                 <a:solidFill>
-                  <a:srgbClr val="242C39"/>
-                </a:solidFill>
-              </a:rPr>
-              <a:t>cts</a:t>
+                  <a:srgbClr val="005358"/>
+                </a:solidFill>
+              </a:rPr>
+              <a:t>c</a:t>
+            </a:r>
+            <a:r>
+              <a:rPr sz="1500" b="1">
+                <a:solidFill>
+                  <a:srgbClr val="6D71FF"/>
+                </a:solidFill>
+              </a:rPr>
+              <a:t>t</a:t>
+            </a:r>
+            <a:r>
+              <a:rPr sz="1500" b="1">
+                <a:solidFill>
+                  <a:srgbClr val="F33844"/>
+                </a:solidFill>
+              </a:rPr>
+              <a:t>s</a:t>
             </a:r>
           </a:p>
         </p:txBody>
@@ -21162,10 +21514,26 @@
             <a:r>
               <a:rPr sz="1500" b="1">
                 <a:solidFill>
-                  <a:srgbClr val="242C39"/>
-                </a:solidFill>
-              </a:rPr>
-              <a:t>cts</a:t>
+                  <a:srgbClr val="005358"/>
+                </a:solidFill>
+              </a:rPr>
+              <a:t>c</a:t>
+            </a:r>
+            <a:r>
+              <a:rPr sz="1500" b="1">
+                <a:solidFill>
+                  <a:srgbClr val="6D71FF"/>
+                </a:solidFill>
+              </a:rPr>
+              <a:t>t</a:t>
+            </a:r>
+            <a:r>
+              <a:rPr sz="1500" b="1">
+                <a:solidFill>
+                  <a:srgbClr val="F33844"/>
+                </a:solidFill>
+              </a:rPr>
+              <a:t>s</a:t>
             </a:r>
           </a:p>
         </p:txBody>
@@ -21588,10 +21956,26 @@
             <a:r>
               <a:rPr sz="1500" b="1">
                 <a:solidFill>
-                  <a:srgbClr val="242C39"/>
-                </a:solidFill>
-              </a:rPr>
-              <a:t>cts</a:t>
+                  <a:srgbClr val="005358"/>
+                </a:solidFill>
+              </a:rPr>
+              <a:t>c</a:t>
+            </a:r>
+            <a:r>
+              <a:rPr sz="1500" b="1">
+                <a:solidFill>
+                  <a:srgbClr val="6D71FF"/>
+                </a:solidFill>
+              </a:rPr>
+              <a:t>t</a:t>
+            </a:r>
+            <a:r>
+              <a:rPr sz="1500" b="1">
+                <a:solidFill>
+                  <a:srgbClr val="F33844"/>
+                </a:solidFill>
+              </a:rPr>
+              <a:t>s</a:t>
             </a:r>
           </a:p>
         </p:txBody>

--- a/deck/CTS Monthly Business Review - 30092026.pptx
+++ b/deck/CTS Monthly Business Review - 30092026.pptx
@@ -5588,90 +5588,30 @@
           </a:p>
         </p:txBody>
       </p:sp>
-      <p:sp>
-        <p:nvSpPr>
-          <p:cNvPr id="26" name="cts mark"/>
-          <p:cNvSpPr txBox="1"/>
-          <p:nvPr/>
-        </p:nvSpPr>
-        <p:spPr>
-          <a:xfrm>
-            <a:off x="7726679" y="155448"/>
-            <a:ext cx="914400" cy="274320"/>
-          </a:xfrm>
-          <a:prstGeom prst="rect">
-            <a:avLst/>
-          </a:prstGeom>
-          <a:noFill/>
-        </p:spPr>
-        <p:txBody>
-          <a:bodyPr wrap="none" lIns="0" rIns="0" tIns="0" bIns="0">
-            <a:spAutoFit/>
-          </a:bodyPr>
-          <a:lstStyle/>
-          <a:p>
-            <a:pPr algn="r"/>
-            <a:r>
-              <a:rPr sz="1500" b="1">
-                <a:solidFill>
-                  <a:srgbClr val="005358"/>
-                </a:solidFill>
-              </a:rPr>
-              <a:t>c</a:t>
-            </a:r>
-            <a:r>
-              <a:rPr sz="1500" b="1">
-                <a:solidFill>
-                  <a:srgbClr val="6D71FF"/>
-                </a:solidFill>
-              </a:rPr>
-              <a:t>t</a:t>
-            </a:r>
-            <a:r>
-              <a:rPr sz="1500" b="1">
-                <a:solidFill>
-                  <a:srgbClr val="F33844"/>
-                </a:solidFill>
-              </a:rPr>
-              <a:t>s</a:t>
-            </a:r>
-          </a:p>
-        </p:txBody>
-      </p:sp>
-      <p:sp>
-        <p:nvSpPr>
-          <p:cNvPr id="27" name="cts mark sub"/>
-          <p:cNvSpPr txBox="1"/>
-          <p:nvPr/>
-        </p:nvSpPr>
-        <p:spPr>
-          <a:xfrm>
-            <a:off x="7726679" y="384048"/>
-            <a:ext cx="914400" cy="164592"/>
-          </a:xfrm>
-          <a:prstGeom prst="rect">
-            <a:avLst/>
-          </a:prstGeom>
-          <a:noFill/>
-        </p:spPr>
-        <p:txBody>
-          <a:bodyPr wrap="none" lIns="0" rIns="0" tIns="0" bIns="0">
-            <a:spAutoFit/>
-          </a:bodyPr>
-          <a:lstStyle/>
-          <a:p>
-            <a:pPr algn="r"/>
-            <a:r>
-              <a:rPr sz="650">
-                <a:solidFill>
-                  <a:srgbClr val="6B7585"/>
-                </a:solidFill>
-              </a:rPr>
-              <a:t>Seamless AV</a:t>
-            </a:r>
-          </a:p>
-        </p:txBody>
-      </p:sp>
+      <p:pic>
+        <p:nvPicPr>
+          <p:cNvPr id="26" name="cts logo" descr="cts-logo.png"/>
+          <p:cNvPicPr>
+            <a:picLocks noChangeAspect="1"/>
+          </p:cNvPicPr>
+          <p:nvPr/>
+        </p:nvPicPr>
+        <p:blipFill>
+          <a:blip r:embed="rId4"/>
+          <a:stretch>
+            <a:fillRect/>
+          </a:stretch>
+        </p:blipFill>
+        <p:spPr>
+          <a:xfrm>
+            <a:off x="7680959" y="182880"/>
+            <a:ext cx="960120" cy="539696"/>
+          </a:xfrm>
+          <a:prstGeom prst="rect">
+            <a:avLst/>
+          </a:prstGeom>
+        </p:spPr>
+      </p:pic>
     </p:spTree>
   </p:cSld>
   <p:clrMapOvr>
@@ -6030,90 +5970,30 @@
           </a:p>
         </p:txBody>
       </p:sp>
-      <p:sp>
-        <p:nvSpPr>
-          <p:cNvPr id="26" name="cts mark"/>
-          <p:cNvSpPr txBox="1"/>
-          <p:nvPr/>
-        </p:nvSpPr>
-        <p:spPr>
-          <a:xfrm>
-            <a:off x="7726679" y="155448"/>
-            <a:ext cx="914400" cy="274320"/>
-          </a:xfrm>
-          <a:prstGeom prst="rect">
-            <a:avLst/>
-          </a:prstGeom>
-          <a:noFill/>
-        </p:spPr>
-        <p:txBody>
-          <a:bodyPr wrap="none" lIns="0" rIns="0" tIns="0" bIns="0">
-            <a:spAutoFit/>
-          </a:bodyPr>
-          <a:lstStyle/>
-          <a:p>
-            <a:pPr algn="r"/>
-            <a:r>
-              <a:rPr sz="1500" b="1">
-                <a:solidFill>
-                  <a:srgbClr val="005358"/>
-                </a:solidFill>
-              </a:rPr>
-              <a:t>c</a:t>
-            </a:r>
-            <a:r>
-              <a:rPr sz="1500" b="1">
-                <a:solidFill>
-                  <a:srgbClr val="6D71FF"/>
-                </a:solidFill>
-              </a:rPr>
-              <a:t>t</a:t>
-            </a:r>
-            <a:r>
-              <a:rPr sz="1500" b="1">
-                <a:solidFill>
-                  <a:srgbClr val="F33844"/>
-                </a:solidFill>
-              </a:rPr>
-              <a:t>s</a:t>
-            </a:r>
-          </a:p>
-        </p:txBody>
-      </p:sp>
-      <p:sp>
-        <p:nvSpPr>
-          <p:cNvPr id="27" name="cts mark sub"/>
-          <p:cNvSpPr txBox="1"/>
-          <p:nvPr/>
-        </p:nvSpPr>
-        <p:spPr>
-          <a:xfrm>
-            <a:off x="7726679" y="384048"/>
-            <a:ext cx="914400" cy="164592"/>
-          </a:xfrm>
-          <a:prstGeom prst="rect">
-            <a:avLst/>
-          </a:prstGeom>
-          <a:noFill/>
-        </p:spPr>
-        <p:txBody>
-          <a:bodyPr wrap="none" lIns="0" rIns="0" tIns="0" bIns="0">
-            <a:spAutoFit/>
-          </a:bodyPr>
-          <a:lstStyle/>
-          <a:p>
-            <a:pPr algn="r"/>
-            <a:r>
-              <a:rPr sz="650">
-                <a:solidFill>
-                  <a:srgbClr val="6B7585"/>
-                </a:solidFill>
-              </a:rPr>
-              <a:t>Seamless AV</a:t>
-            </a:r>
-          </a:p>
-        </p:txBody>
-      </p:sp>
+      <p:pic>
+        <p:nvPicPr>
+          <p:cNvPr id="26" name="cts logo" descr="cts-logo.png"/>
+          <p:cNvPicPr>
+            <a:picLocks noChangeAspect="1"/>
+          </p:cNvPicPr>
+          <p:nvPr/>
+        </p:nvPicPr>
+        <p:blipFill>
+          <a:blip r:embed="rId4"/>
+          <a:stretch>
+            <a:fillRect/>
+          </a:stretch>
+        </p:blipFill>
+        <p:spPr>
+          <a:xfrm>
+            <a:off x="7680959" y="182880"/>
+            <a:ext cx="960120" cy="539696"/>
+          </a:xfrm>
+          <a:prstGeom prst="rect">
+            <a:avLst/>
+          </a:prstGeom>
+        </p:spPr>
+      </p:pic>
     </p:spTree>
   </p:cSld>
   <p:clrMapOvr>
@@ -6472,90 +6352,30 @@
           </a:p>
         </p:txBody>
       </p:sp>
-      <p:sp>
-        <p:nvSpPr>
-          <p:cNvPr id="26" name="cts mark"/>
-          <p:cNvSpPr txBox="1"/>
-          <p:nvPr/>
-        </p:nvSpPr>
-        <p:spPr>
-          <a:xfrm>
-            <a:off x="7726679" y="155448"/>
-            <a:ext cx="914400" cy="274320"/>
-          </a:xfrm>
-          <a:prstGeom prst="rect">
-            <a:avLst/>
-          </a:prstGeom>
-          <a:noFill/>
-        </p:spPr>
-        <p:txBody>
-          <a:bodyPr wrap="none" lIns="0" rIns="0" tIns="0" bIns="0">
-            <a:spAutoFit/>
-          </a:bodyPr>
-          <a:lstStyle/>
-          <a:p>
-            <a:pPr algn="r"/>
-            <a:r>
-              <a:rPr sz="1500" b="1">
-                <a:solidFill>
-                  <a:srgbClr val="005358"/>
-                </a:solidFill>
-              </a:rPr>
-              <a:t>c</a:t>
-            </a:r>
-            <a:r>
-              <a:rPr sz="1500" b="1">
-                <a:solidFill>
-                  <a:srgbClr val="6D71FF"/>
-                </a:solidFill>
-              </a:rPr>
-              <a:t>t</a:t>
-            </a:r>
-            <a:r>
-              <a:rPr sz="1500" b="1">
-                <a:solidFill>
-                  <a:srgbClr val="F33844"/>
-                </a:solidFill>
-              </a:rPr>
-              <a:t>s</a:t>
-            </a:r>
-          </a:p>
-        </p:txBody>
-      </p:sp>
-      <p:sp>
-        <p:nvSpPr>
-          <p:cNvPr id="27" name="cts mark sub"/>
-          <p:cNvSpPr txBox="1"/>
-          <p:nvPr/>
-        </p:nvSpPr>
-        <p:spPr>
-          <a:xfrm>
-            <a:off x="7726679" y="384048"/>
-            <a:ext cx="914400" cy="164592"/>
-          </a:xfrm>
-          <a:prstGeom prst="rect">
-            <a:avLst/>
-          </a:prstGeom>
-          <a:noFill/>
-        </p:spPr>
-        <p:txBody>
-          <a:bodyPr wrap="none" lIns="0" rIns="0" tIns="0" bIns="0">
-            <a:spAutoFit/>
-          </a:bodyPr>
-          <a:lstStyle/>
-          <a:p>
-            <a:pPr algn="r"/>
-            <a:r>
-              <a:rPr sz="650">
-                <a:solidFill>
-                  <a:srgbClr val="6B7585"/>
-                </a:solidFill>
-              </a:rPr>
-              <a:t>Seamless AV</a:t>
-            </a:r>
-          </a:p>
-        </p:txBody>
-      </p:sp>
+      <p:pic>
+        <p:nvPicPr>
+          <p:cNvPr id="26" name="cts logo" descr="cts-logo.png"/>
+          <p:cNvPicPr>
+            <a:picLocks noChangeAspect="1"/>
+          </p:cNvPicPr>
+          <p:nvPr/>
+        </p:nvPicPr>
+        <p:blipFill>
+          <a:blip r:embed="rId4"/>
+          <a:stretch>
+            <a:fillRect/>
+          </a:stretch>
+        </p:blipFill>
+        <p:spPr>
+          <a:xfrm>
+            <a:off x="7680959" y="182880"/>
+            <a:ext cx="960120" cy="539696"/>
+          </a:xfrm>
+          <a:prstGeom prst="rect">
+            <a:avLst/>
+          </a:prstGeom>
+        </p:spPr>
+      </p:pic>
     </p:spTree>
   </p:cSld>
   <p:clrMapOvr>
@@ -6914,90 +6734,30 @@
           </a:p>
         </p:txBody>
       </p:sp>
-      <p:sp>
-        <p:nvSpPr>
-          <p:cNvPr id="26" name="cts mark"/>
-          <p:cNvSpPr txBox="1"/>
-          <p:nvPr/>
-        </p:nvSpPr>
-        <p:spPr>
-          <a:xfrm>
-            <a:off x="7726679" y="155448"/>
-            <a:ext cx="914400" cy="274320"/>
-          </a:xfrm>
-          <a:prstGeom prst="rect">
-            <a:avLst/>
-          </a:prstGeom>
-          <a:noFill/>
-        </p:spPr>
-        <p:txBody>
-          <a:bodyPr wrap="none" lIns="0" rIns="0" tIns="0" bIns="0">
-            <a:spAutoFit/>
-          </a:bodyPr>
-          <a:lstStyle/>
-          <a:p>
-            <a:pPr algn="r"/>
-            <a:r>
-              <a:rPr sz="1500" b="1">
-                <a:solidFill>
-                  <a:srgbClr val="005358"/>
-                </a:solidFill>
-              </a:rPr>
-              <a:t>c</a:t>
-            </a:r>
-            <a:r>
-              <a:rPr sz="1500" b="1">
-                <a:solidFill>
-                  <a:srgbClr val="6D71FF"/>
-                </a:solidFill>
-              </a:rPr>
-              <a:t>t</a:t>
-            </a:r>
-            <a:r>
-              <a:rPr sz="1500" b="1">
-                <a:solidFill>
-                  <a:srgbClr val="F33844"/>
-                </a:solidFill>
-              </a:rPr>
-              <a:t>s</a:t>
-            </a:r>
-          </a:p>
-        </p:txBody>
-      </p:sp>
-      <p:sp>
-        <p:nvSpPr>
-          <p:cNvPr id="27" name="cts mark sub"/>
-          <p:cNvSpPr txBox="1"/>
-          <p:nvPr/>
-        </p:nvSpPr>
-        <p:spPr>
-          <a:xfrm>
-            <a:off x="7726679" y="384048"/>
-            <a:ext cx="914400" cy="164592"/>
-          </a:xfrm>
-          <a:prstGeom prst="rect">
-            <a:avLst/>
-          </a:prstGeom>
-          <a:noFill/>
-        </p:spPr>
-        <p:txBody>
-          <a:bodyPr wrap="none" lIns="0" rIns="0" tIns="0" bIns="0">
-            <a:spAutoFit/>
-          </a:bodyPr>
-          <a:lstStyle/>
-          <a:p>
-            <a:pPr algn="r"/>
-            <a:r>
-              <a:rPr sz="650">
-                <a:solidFill>
-                  <a:srgbClr val="6B7585"/>
-                </a:solidFill>
-              </a:rPr>
-              <a:t>Seamless AV</a:t>
-            </a:r>
-          </a:p>
-        </p:txBody>
-      </p:sp>
+      <p:pic>
+        <p:nvPicPr>
+          <p:cNvPr id="26" name="cts logo" descr="cts-logo.png"/>
+          <p:cNvPicPr>
+            <a:picLocks noChangeAspect="1"/>
+          </p:cNvPicPr>
+          <p:nvPr/>
+        </p:nvPicPr>
+        <p:blipFill>
+          <a:blip r:embed="rId4"/>
+          <a:stretch>
+            <a:fillRect/>
+          </a:stretch>
+        </p:blipFill>
+        <p:spPr>
+          <a:xfrm>
+            <a:off x="7680959" y="182880"/>
+            <a:ext cx="960120" cy="539696"/>
+          </a:xfrm>
+          <a:prstGeom prst="rect">
+            <a:avLst/>
+          </a:prstGeom>
+        </p:spPr>
+      </p:pic>
     </p:spTree>
   </p:cSld>
   <p:clrMapOvr>
@@ -7356,90 +7116,30 @@
           </a:p>
         </p:txBody>
       </p:sp>
-      <p:sp>
-        <p:nvSpPr>
-          <p:cNvPr id="26" name="cts mark"/>
-          <p:cNvSpPr txBox="1"/>
-          <p:nvPr/>
-        </p:nvSpPr>
-        <p:spPr>
-          <a:xfrm>
-            <a:off x="7726679" y="155448"/>
-            <a:ext cx="914400" cy="274320"/>
-          </a:xfrm>
-          <a:prstGeom prst="rect">
-            <a:avLst/>
-          </a:prstGeom>
-          <a:noFill/>
-        </p:spPr>
-        <p:txBody>
-          <a:bodyPr wrap="none" lIns="0" rIns="0" tIns="0" bIns="0">
-            <a:spAutoFit/>
-          </a:bodyPr>
-          <a:lstStyle/>
-          <a:p>
-            <a:pPr algn="r"/>
-            <a:r>
-              <a:rPr sz="1500" b="1">
-                <a:solidFill>
-                  <a:srgbClr val="005358"/>
-                </a:solidFill>
-              </a:rPr>
-              <a:t>c</a:t>
-            </a:r>
-            <a:r>
-              <a:rPr sz="1500" b="1">
-                <a:solidFill>
-                  <a:srgbClr val="6D71FF"/>
-                </a:solidFill>
-              </a:rPr>
-              <a:t>t</a:t>
-            </a:r>
-            <a:r>
-              <a:rPr sz="1500" b="1">
-                <a:solidFill>
-                  <a:srgbClr val="F33844"/>
-                </a:solidFill>
-              </a:rPr>
-              <a:t>s</a:t>
-            </a:r>
-          </a:p>
-        </p:txBody>
-      </p:sp>
-      <p:sp>
-        <p:nvSpPr>
-          <p:cNvPr id="27" name="cts mark sub"/>
-          <p:cNvSpPr txBox="1"/>
-          <p:nvPr/>
-        </p:nvSpPr>
-        <p:spPr>
-          <a:xfrm>
-            <a:off x="7726679" y="384048"/>
-            <a:ext cx="914400" cy="164592"/>
-          </a:xfrm>
-          <a:prstGeom prst="rect">
-            <a:avLst/>
-          </a:prstGeom>
-          <a:noFill/>
-        </p:spPr>
-        <p:txBody>
-          <a:bodyPr wrap="none" lIns="0" rIns="0" tIns="0" bIns="0">
-            <a:spAutoFit/>
-          </a:bodyPr>
-          <a:lstStyle/>
-          <a:p>
-            <a:pPr algn="r"/>
-            <a:r>
-              <a:rPr sz="650">
-                <a:solidFill>
-                  <a:srgbClr val="6B7585"/>
-                </a:solidFill>
-              </a:rPr>
-              <a:t>Seamless AV</a:t>
-            </a:r>
-          </a:p>
-        </p:txBody>
-      </p:sp>
+      <p:pic>
+        <p:nvPicPr>
+          <p:cNvPr id="26" name="cts logo" descr="cts-logo.png"/>
+          <p:cNvPicPr>
+            <a:picLocks noChangeAspect="1"/>
+          </p:cNvPicPr>
+          <p:nvPr/>
+        </p:nvPicPr>
+        <p:blipFill>
+          <a:blip r:embed="rId4"/>
+          <a:stretch>
+            <a:fillRect/>
+          </a:stretch>
+        </p:blipFill>
+        <p:spPr>
+          <a:xfrm>
+            <a:off x="7680959" y="182880"/>
+            <a:ext cx="960120" cy="539696"/>
+          </a:xfrm>
+          <a:prstGeom prst="rect">
+            <a:avLst/>
+          </a:prstGeom>
+        </p:spPr>
+      </p:pic>
     </p:spTree>
   </p:cSld>
   <p:clrMapOvr>
@@ -8081,90 +7781,30 @@
           </a:p>
         </p:txBody>
       </p:sp>
-      <p:sp>
-        <p:nvSpPr>
-          <p:cNvPr id="26" name="cts mark"/>
-          <p:cNvSpPr txBox="1"/>
-          <p:nvPr/>
-        </p:nvSpPr>
-        <p:spPr>
-          <a:xfrm>
-            <a:off x="7726679" y="155448"/>
-            <a:ext cx="914400" cy="274320"/>
-          </a:xfrm>
-          <a:prstGeom prst="rect">
-            <a:avLst/>
-          </a:prstGeom>
-          <a:noFill/>
-        </p:spPr>
-        <p:txBody>
-          <a:bodyPr wrap="none" lIns="0" rIns="0" tIns="0" bIns="0">
-            <a:spAutoFit/>
-          </a:bodyPr>
-          <a:lstStyle/>
-          <a:p>
-            <a:pPr algn="r"/>
-            <a:r>
-              <a:rPr sz="1500" b="1">
-                <a:solidFill>
-                  <a:srgbClr val="005358"/>
-                </a:solidFill>
-              </a:rPr>
-              <a:t>c</a:t>
-            </a:r>
-            <a:r>
-              <a:rPr sz="1500" b="1">
-                <a:solidFill>
-                  <a:srgbClr val="6D71FF"/>
-                </a:solidFill>
-              </a:rPr>
-              <a:t>t</a:t>
-            </a:r>
-            <a:r>
-              <a:rPr sz="1500" b="1">
-                <a:solidFill>
-                  <a:srgbClr val="F33844"/>
-                </a:solidFill>
-              </a:rPr>
-              <a:t>s</a:t>
-            </a:r>
-          </a:p>
-        </p:txBody>
-      </p:sp>
-      <p:sp>
-        <p:nvSpPr>
-          <p:cNvPr id="27" name="cts mark sub"/>
-          <p:cNvSpPr txBox="1"/>
-          <p:nvPr/>
-        </p:nvSpPr>
-        <p:spPr>
-          <a:xfrm>
-            <a:off x="7726679" y="384048"/>
-            <a:ext cx="914400" cy="164592"/>
-          </a:xfrm>
-          <a:prstGeom prst="rect">
-            <a:avLst/>
-          </a:prstGeom>
-          <a:noFill/>
-        </p:spPr>
-        <p:txBody>
-          <a:bodyPr wrap="none" lIns="0" rIns="0" tIns="0" bIns="0">
-            <a:spAutoFit/>
-          </a:bodyPr>
-          <a:lstStyle/>
-          <a:p>
-            <a:pPr algn="r"/>
-            <a:r>
-              <a:rPr sz="650">
-                <a:solidFill>
-                  <a:srgbClr val="6B7585"/>
-                </a:solidFill>
-              </a:rPr>
-              <a:t>Seamless AV</a:t>
-            </a:r>
-          </a:p>
-        </p:txBody>
-      </p:sp>
+      <p:pic>
+        <p:nvPicPr>
+          <p:cNvPr id="26" name="cts logo" descr="cts-logo.png"/>
+          <p:cNvPicPr>
+            <a:picLocks noChangeAspect="1"/>
+          </p:cNvPicPr>
+          <p:nvPr/>
+        </p:nvPicPr>
+        <p:blipFill>
+          <a:blip r:embed="rId4"/>
+          <a:stretch>
+            <a:fillRect/>
+          </a:stretch>
+        </p:blipFill>
+        <p:spPr>
+          <a:xfrm>
+            <a:off x="7680959" y="182880"/>
+            <a:ext cx="960120" cy="539696"/>
+          </a:xfrm>
+          <a:prstGeom prst="rect">
+            <a:avLst/>
+          </a:prstGeom>
+        </p:spPr>
+      </p:pic>
     </p:spTree>
   </p:cSld>
   <p:clrMapOvr>
@@ -8523,90 +8163,30 @@
           </a:p>
         </p:txBody>
       </p:sp>
-      <p:sp>
-        <p:nvSpPr>
-          <p:cNvPr id="26" name="cts mark"/>
-          <p:cNvSpPr txBox="1"/>
-          <p:nvPr/>
-        </p:nvSpPr>
-        <p:spPr>
-          <a:xfrm>
-            <a:off x="7726679" y="155448"/>
-            <a:ext cx="914400" cy="274320"/>
-          </a:xfrm>
-          <a:prstGeom prst="rect">
-            <a:avLst/>
-          </a:prstGeom>
-          <a:noFill/>
-        </p:spPr>
-        <p:txBody>
-          <a:bodyPr wrap="none" lIns="0" rIns="0" tIns="0" bIns="0">
-            <a:spAutoFit/>
-          </a:bodyPr>
-          <a:lstStyle/>
-          <a:p>
-            <a:pPr algn="r"/>
-            <a:r>
-              <a:rPr sz="1500" b="1">
-                <a:solidFill>
-                  <a:srgbClr val="005358"/>
-                </a:solidFill>
-              </a:rPr>
-              <a:t>c</a:t>
-            </a:r>
-            <a:r>
-              <a:rPr sz="1500" b="1">
-                <a:solidFill>
-                  <a:srgbClr val="6D71FF"/>
-                </a:solidFill>
-              </a:rPr>
-              <a:t>t</a:t>
-            </a:r>
-            <a:r>
-              <a:rPr sz="1500" b="1">
-                <a:solidFill>
-                  <a:srgbClr val="F33844"/>
-                </a:solidFill>
-              </a:rPr>
-              <a:t>s</a:t>
-            </a:r>
-          </a:p>
-        </p:txBody>
-      </p:sp>
-      <p:sp>
-        <p:nvSpPr>
-          <p:cNvPr id="27" name="cts mark sub"/>
-          <p:cNvSpPr txBox="1"/>
-          <p:nvPr/>
-        </p:nvSpPr>
-        <p:spPr>
-          <a:xfrm>
-            <a:off x="7726679" y="384048"/>
-            <a:ext cx="914400" cy="164592"/>
-          </a:xfrm>
-          <a:prstGeom prst="rect">
-            <a:avLst/>
-          </a:prstGeom>
-          <a:noFill/>
-        </p:spPr>
-        <p:txBody>
-          <a:bodyPr wrap="none" lIns="0" rIns="0" tIns="0" bIns="0">
-            <a:spAutoFit/>
-          </a:bodyPr>
-          <a:lstStyle/>
-          <a:p>
-            <a:pPr algn="r"/>
-            <a:r>
-              <a:rPr sz="650">
-                <a:solidFill>
-                  <a:srgbClr val="6B7585"/>
-                </a:solidFill>
-              </a:rPr>
-              <a:t>Seamless AV</a:t>
-            </a:r>
-          </a:p>
-        </p:txBody>
-      </p:sp>
+      <p:pic>
+        <p:nvPicPr>
+          <p:cNvPr id="26" name="cts logo" descr="cts-logo.png"/>
+          <p:cNvPicPr>
+            <a:picLocks noChangeAspect="1"/>
+          </p:cNvPicPr>
+          <p:nvPr/>
+        </p:nvPicPr>
+        <p:blipFill>
+          <a:blip r:embed="rId4"/>
+          <a:stretch>
+            <a:fillRect/>
+          </a:stretch>
+        </p:blipFill>
+        <p:spPr>
+          <a:xfrm>
+            <a:off x="7680959" y="182880"/>
+            <a:ext cx="960120" cy="539696"/>
+          </a:xfrm>
+          <a:prstGeom prst="rect">
+            <a:avLst/>
+          </a:prstGeom>
+        </p:spPr>
+      </p:pic>
     </p:spTree>
   </p:cSld>
   <p:clrMapOvr>
@@ -8965,90 +8545,30 @@
           </a:p>
         </p:txBody>
       </p:sp>
-      <p:sp>
-        <p:nvSpPr>
-          <p:cNvPr id="26" name="cts mark"/>
-          <p:cNvSpPr txBox="1"/>
-          <p:nvPr/>
-        </p:nvSpPr>
-        <p:spPr>
-          <a:xfrm>
-            <a:off x="7726679" y="155448"/>
-            <a:ext cx="914400" cy="274320"/>
-          </a:xfrm>
-          <a:prstGeom prst="rect">
-            <a:avLst/>
-          </a:prstGeom>
-          <a:noFill/>
-        </p:spPr>
-        <p:txBody>
-          <a:bodyPr wrap="none" lIns="0" rIns="0" tIns="0" bIns="0">
-            <a:spAutoFit/>
-          </a:bodyPr>
-          <a:lstStyle/>
-          <a:p>
-            <a:pPr algn="r"/>
-            <a:r>
-              <a:rPr sz="1500" b="1">
-                <a:solidFill>
-                  <a:srgbClr val="005358"/>
-                </a:solidFill>
-              </a:rPr>
-              <a:t>c</a:t>
-            </a:r>
-            <a:r>
-              <a:rPr sz="1500" b="1">
-                <a:solidFill>
-                  <a:srgbClr val="6D71FF"/>
-                </a:solidFill>
-              </a:rPr>
-              <a:t>t</a:t>
-            </a:r>
-            <a:r>
-              <a:rPr sz="1500" b="1">
-                <a:solidFill>
-                  <a:srgbClr val="F33844"/>
-                </a:solidFill>
-              </a:rPr>
-              <a:t>s</a:t>
-            </a:r>
-          </a:p>
-        </p:txBody>
-      </p:sp>
-      <p:sp>
-        <p:nvSpPr>
-          <p:cNvPr id="27" name="cts mark sub"/>
-          <p:cNvSpPr txBox="1"/>
-          <p:nvPr/>
-        </p:nvSpPr>
-        <p:spPr>
-          <a:xfrm>
-            <a:off x="7726679" y="384048"/>
-            <a:ext cx="914400" cy="164592"/>
-          </a:xfrm>
-          <a:prstGeom prst="rect">
-            <a:avLst/>
-          </a:prstGeom>
-          <a:noFill/>
-        </p:spPr>
-        <p:txBody>
-          <a:bodyPr wrap="none" lIns="0" rIns="0" tIns="0" bIns="0">
-            <a:spAutoFit/>
-          </a:bodyPr>
-          <a:lstStyle/>
-          <a:p>
-            <a:pPr algn="r"/>
-            <a:r>
-              <a:rPr sz="650">
-                <a:solidFill>
-                  <a:srgbClr val="6B7585"/>
-                </a:solidFill>
-              </a:rPr>
-              <a:t>Seamless AV</a:t>
-            </a:r>
-          </a:p>
-        </p:txBody>
-      </p:sp>
+      <p:pic>
+        <p:nvPicPr>
+          <p:cNvPr id="26" name="cts logo" descr="cts-logo.png"/>
+          <p:cNvPicPr>
+            <a:picLocks noChangeAspect="1"/>
+          </p:cNvPicPr>
+          <p:nvPr/>
+        </p:nvPicPr>
+        <p:blipFill>
+          <a:blip r:embed="rId4"/>
+          <a:stretch>
+            <a:fillRect/>
+          </a:stretch>
+        </p:blipFill>
+        <p:spPr>
+          <a:xfrm>
+            <a:off x="7680959" y="182880"/>
+            <a:ext cx="960120" cy="539696"/>
+          </a:xfrm>
+          <a:prstGeom prst="rect">
+            <a:avLst/>
+          </a:prstGeom>
+        </p:spPr>
+      </p:pic>
     </p:spTree>
   </p:cSld>
   <p:clrMapOvr>
@@ -9410,90 +8930,30 @@
           </a:p>
         </p:txBody>
       </p:sp>
-      <p:sp>
-        <p:nvSpPr>
-          <p:cNvPr id="26" name="cts mark"/>
-          <p:cNvSpPr txBox="1"/>
-          <p:nvPr/>
-        </p:nvSpPr>
-        <p:spPr>
-          <a:xfrm>
-            <a:off x="7726679" y="155448"/>
-            <a:ext cx="914400" cy="274320"/>
-          </a:xfrm>
-          <a:prstGeom prst="rect">
-            <a:avLst/>
-          </a:prstGeom>
-          <a:noFill/>
-        </p:spPr>
-        <p:txBody>
-          <a:bodyPr wrap="none" lIns="0" rIns="0" tIns="0" bIns="0">
-            <a:spAutoFit/>
-          </a:bodyPr>
-          <a:lstStyle/>
-          <a:p>
-            <a:pPr algn="r"/>
-            <a:r>
-              <a:rPr sz="1500" b="1">
-                <a:solidFill>
-                  <a:srgbClr val="005358"/>
-                </a:solidFill>
-              </a:rPr>
-              <a:t>c</a:t>
-            </a:r>
-            <a:r>
-              <a:rPr sz="1500" b="1">
-                <a:solidFill>
-                  <a:srgbClr val="6D71FF"/>
-                </a:solidFill>
-              </a:rPr>
-              <a:t>t</a:t>
-            </a:r>
-            <a:r>
-              <a:rPr sz="1500" b="1">
-                <a:solidFill>
-                  <a:srgbClr val="F33844"/>
-                </a:solidFill>
-              </a:rPr>
-              <a:t>s</a:t>
-            </a:r>
-          </a:p>
-        </p:txBody>
-      </p:sp>
-      <p:sp>
-        <p:nvSpPr>
-          <p:cNvPr id="27" name="cts mark sub"/>
-          <p:cNvSpPr txBox="1"/>
-          <p:nvPr/>
-        </p:nvSpPr>
-        <p:spPr>
-          <a:xfrm>
-            <a:off x="7726679" y="384048"/>
-            <a:ext cx="914400" cy="164592"/>
-          </a:xfrm>
-          <a:prstGeom prst="rect">
-            <a:avLst/>
-          </a:prstGeom>
-          <a:noFill/>
-        </p:spPr>
-        <p:txBody>
-          <a:bodyPr wrap="none" lIns="0" rIns="0" tIns="0" bIns="0">
-            <a:spAutoFit/>
-          </a:bodyPr>
-          <a:lstStyle/>
-          <a:p>
-            <a:pPr algn="r"/>
-            <a:r>
-              <a:rPr sz="650">
-                <a:solidFill>
-                  <a:srgbClr val="6B7585"/>
-                </a:solidFill>
-              </a:rPr>
-              <a:t>Seamless AV</a:t>
-            </a:r>
-          </a:p>
-        </p:txBody>
-      </p:sp>
+      <p:pic>
+        <p:nvPicPr>
+          <p:cNvPr id="26" name="cts logo" descr="cts-logo.png"/>
+          <p:cNvPicPr>
+            <a:picLocks noChangeAspect="1"/>
+          </p:cNvPicPr>
+          <p:nvPr/>
+        </p:nvPicPr>
+        <p:blipFill>
+          <a:blip r:embed="rId4"/>
+          <a:stretch>
+            <a:fillRect/>
+          </a:stretch>
+        </p:blipFill>
+        <p:spPr>
+          <a:xfrm>
+            <a:off x="7680959" y="182880"/>
+            <a:ext cx="960120" cy="539696"/>
+          </a:xfrm>
+          <a:prstGeom prst="rect">
+            <a:avLst/>
+          </a:prstGeom>
+        </p:spPr>
+      </p:pic>
     </p:spTree>
   </p:cSld>
   <p:clrMapOvr>
@@ -10311,90 +9771,30 @@
           </a:p>
         </p:txBody>
       </p:sp>
-      <p:sp>
-        <p:nvSpPr>
-          <p:cNvPr id="26" name="cts mark"/>
-          <p:cNvSpPr txBox="1"/>
-          <p:nvPr/>
-        </p:nvSpPr>
-        <p:spPr>
-          <a:xfrm>
-            <a:off x="7726679" y="155448"/>
-            <a:ext cx="914400" cy="274320"/>
-          </a:xfrm>
-          <a:prstGeom prst="rect">
-            <a:avLst/>
-          </a:prstGeom>
-          <a:noFill/>
-        </p:spPr>
-        <p:txBody>
-          <a:bodyPr wrap="none" lIns="0" rIns="0" tIns="0" bIns="0">
-            <a:spAutoFit/>
-          </a:bodyPr>
-          <a:lstStyle/>
-          <a:p>
-            <a:pPr algn="r"/>
-            <a:r>
-              <a:rPr sz="1500" b="1">
-                <a:solidFill>
-                  <a:srgbClr val="005358"/>
-                </a:solidFill>
-              </a:rPr>
-              <a:t>c</a:t>
-            </a:r>
-            <a:r>
-              <a:rPr sz="1500" b="1">
-                <a:solidFill>
-                  <a:srgbClr val="6D71FF"/>
-                </a:solidFill>
-              </a:rPr>
-              <a:t>t</a:t>
-            </a:r>
-            <a:r>
-              <a:rPr sz="1500" b="1">
-                <a:solidFill>
-                  <a:srgbClr val="F33844"/>
-                </a:solidFill>
-              </a:rPr>
-              <a:t>s</a:t>
-            </a:r>
-          </a:p>
-        </p:txBody>
-      </p:sp>
-      <p:sp>
-        <p:nvSpPr>
-          <p:cNvPr id="27" name="cts mark sub"/>
-          <p:cNvSpPr txBox="1"/>
-          <p:nvPr/>
-        </p:nvSpPr>
-        <p:spPr>
-          <a:xfrm>
-            <a:off x="7726679" y="384048"/>
-            <a:ext cx="914400" cy="164592"/>
-          </a:xfrm>
-          <a:prstGeom prst="rect">
-            <a:avLst/>
-          </a:prstGeom>
-          <a:noFill/>
-        </p:spPr>
-        <p:txBody>
-          <a:bodyPr wrap="none" lIns="0" rIns="0" tIns="0" bIns="0">
-            <a:spAutoFit/>
-          </a:bodyPr>
-          <a:lstStyle/>
-          <a:p>
-            <a:pPr algn="r"/>
-            <a:r>
-              <a:rPr sz="650">
-                <a:solidFill>
-                  <a:srgbClr val="6B7585"/>
-                </a:solidFill>
-              </a:rPr>
-              <a:t>Seamless AV</a:t>
-            </a:r>
-          </a:p>
-        </p:txBody>
-      </p:sp>
+      <p:pic>
+        <p:nvPicPr>
+          <p:cNvPr id="26" name="cts logo" descr="cts-logo.png"/>
+          <p:cNvPicPr>
+            <a:picLocks noChangeAspect="1"/>
+          </p:cNvPicPr>
+          <p:nvPr/>
+        </p:nvPicPr>
+        <p:blipFill>
+          <a:blip r:embed="rId3"/>
+          <a:stretch>
+            <a:fillRect/>
+          </a:stretch>
+        </p:blipFill>
+        <p:spPr>
+          <a:xfrm>
+            <a:off x="7680959" y="182880"/>
+            <a:ext cx="960120" cy="539696"/>
+          </a:xfrm>
+          <a:prstGeom prst="rect">
+            <a:avLst/>
+          </a:prstGeom>
+        </p:spPr>
+      </p:pic>
     </p:spTree>
   </p:cSld>
   <p:clrMapOvr>
@@ -11036,90 +10436,30 @@
           </a:p>
         </p:txBody>
       </p:sp>
-      <p:sp>
-        <p:nvSpPr>
-          <p:cNvPr id="26" name="cts mark"/>
-          <p:cNvSpPr txBox="1"/>
-          <p:nvPr/>
-        </p:nvSpPr>
-        <p:spPr>
-          <a:xfrm>
-            <a:off x="7726679" y="155448"/>
-            <a:ext cx="914400" cy="274320"/>
-          </a:xfrm>
-          <a:prstGeom prst="rect">
-            <a:avLst/>
-          </a:prstGeom>
-          <a:noFill/>
-        </p:spPr>
-        <p:txBody>
-          <a:bodyPr wrap="none" lIns="0" rIns="0" tIns="0" bIns="0">
-            <a:spAutoFit/>
-          </a:bodyPr>
-          <a:lstStyle/>
-          <a:p>
-            <a:pPr algn="r"/>
-            <a:r>
-              <a:rPr sz="1500" b="1">
-                <a:solidFill>
-                  <a:srgbClr val="005358"/>
-                </a:solidFill>
-              </a:rPr>
-              <a:t>c</a:t>
-            </a:r>
-            <a:r>
-              <a:rPr sz="1500" b="1">
-                <a:solidFill>
-                  <a:srgbClr val="6D71FF"/>
-                </a:solidFill>
-              </a:rPr>
-              <a:t>t</a:t>
-            </a:r>
-            <a:r>
-              <a:rPr sz="1500" b="1">
-                <a:solidFill>
-                  <a:srgbClr val="F33844"/>
-                </a:solidFill>
-              </a:rPr>
-              <a:t>s</a:t>
-            </a:r>
-          </a:p>
-        </p:txBody>
-      </p:sp>
-      <p:sp>
-        <p:nvSpPr>
-          <p:cNvPr id="27" name="cts mark sub"/>
-          <p:cNvSpPr txBox="1"/>
-          <p:nvPr/>
-        </p:nvSpPr>
-        <p:spPr>
-          <a:xfrm>
-            <a:off x="7726679" y="384048"/>
-            <a:ext cx="914400" cy="164592"/>
-          </a:xfrm>
-          <a:prstGeom prst="rect">
-            <a:avLst/>
-          </a:prstGeom>
-          <a:noFill/>
-        </p:spPr>
-        <p:txBody>
-          <a:bodyPr wrap="none" lIns="0" rIns="0" tIns="0" bIns="0">
-            <a:spAutoFit/>
-          </a:bodyPr>
-          <a:lstStyle/>
-          <a:p>
-            <a:pPr algn="r"/>
-            <a:r>
-              <a:rPr sz="650">
-                <a:solidFill>
-                  <a:srgbClr val="6B7585"/>
-                </a:solidFill>
-              </a:rPr>
-              <a:t>Seamless AV</a:t>
-            </a:r>
-          </a:p>
-        </p:txBody>
-      </p:sp>
+      <p:pic>
+        <p:nvPicPr>
+          <p:cNvPr id="26" name="cts logo" descr="cts-logo.png"/>
+          <p:cNvPicPr>
+            <a:picLocks noChangeAspect="1"/>
+          </p:cNvPicPr>
+          <p:nvPr/>
+        </p:nvPicPr>
+        <p:blipFill>
+          <a:blip r:embed="rId4"/>
+          <a:stretch>
+            <a:fillRect/>
+          </a:stretch>
+        </p:blipFill>
+        <p:spPr>
+          <a:xfrm>
+            <a:off x="7680959" y="182880"/>
+            <a:ext cx="960120" cy="539696"/>
+          </a:xfrm>
+          <a:prstGeom prst="rect">
+            <a:avLst/>
+          </a:prstGeom>
+        </p:spPr>
+      </p:pic>
     </p:spTree>
   </p:cSld>
   <p:clrMapOvr>
@@ -11478,90 +10818,30 @@
           </a:p>
         </p:txBody>
       </p:sp>
-      <p:sp>
-        <p:nvSpPr>
-          <p:cNvPr id="26" name="cts mark"/>
-          <p:cNvSpPr txBox="1"/>
-          <p:nvPr/>
-        </p:nvSpPr>
-        <p:spPr>
-          <a:xfrm>
-            <a:off x="7726679" y="155448"/>
-            <a:ext cx="914400" cy="274320"/>
-          </a:xfrm>
-          <a:prstGeom prst="rect">
-            <a:avLst/>
-          </a:prstGeom>
-          <a:noFill/>
-        </p:spPr>
-        <p:txBody>
-          <a:bodyPr wrap="none" lIns="0" rIns="0" tIns="0" bIns="0">
-            <a:spAutoFit/>
-          </a:bodyPr>
-          <a:lstStyle/>
-          <a:p>
-            <a:pPr algn="r"/>
-            <a:r>
-              <a:rPr sz="1500" b="1">
-                <a:solidFill>
-                  <a:srgbClr val="005358"/>
-                </a:solidFill>
-              </a:rPr>
-              <a:t>c</a:t>
-            </a:r>
-            <a:r>
-              <a:rPr sz="1500" b="1">
-                <a:solidFill>
-                  <a:srgbClr val="6D71FF"/>
-                </a:solidFill>
-              </a:rPr>
-              <a:t>t</a:t>
-            </a:r>
-            <a:r>
-              <a:rPr sz="1500" b="1">
-                <a:solidFill>
-                  <a:srgbClr val="F33844"/>
-                </a:solidFill>
-              </a:rPr>
-              <a:t>s</a:t>
-            </a:r>
-          </a:p>
-        </p:txBody>
-      </p:sp>
-      <p:sp>
-        <p:nvSpPr>
-          <p:cNvPr id="27" name="cts mark sub"/>
-          <p:cNvSpPr txBox="1"/>
-          <p:nvPr/>
-        </p:nvSpPr>
-        <p:spPr>
-          <a:xfrm>
-            <a:off x="7726679" y="384048"/>
-            <a:ext cx="914400" cy="164592"/>
-          </a:xfrm>
-          <a:prstGeom prst="rect">
-            <a:avLst/>
-          </a:prstGeom>
-          <a:noFill/>
-        </p:spPr>
-        <p:txBody>
-          <a:bodyPr wrap="none" lIns="0" rIns="0" tIns="0" bIns="0">
-            <a:spAutoFit/>
-          </a:bodyPr>
-          <a:lstStyle/>
-          <a:p>
-            <a:pPr algn="r"/>
-            <a:r>
-              <a:rPr sz="650">
-                <a:solidFill>
-                  <a:srgbClr val="6B7585"/>
-                </a:solidFill>
-              </a:rPr>
-              <a:t>Seamless AV</a:t>
-            </a:r>
-          </a:p>
-        </p:txBody>
-      </p:sp>
+      <p:pic>
+        <p:nvPicPr>
+          <p:cNvPr id="26" name="cts logo" descr="cts-logo.png"/>
+          <p:cNvPicPr>
+            <a:picLocks noChangeAspect="1"/>
+          </p:cNvPicPr>
+          <p:nvPr/>
+        </p:nvPicPr>
+        <p:blipFill>
+          <a:blip r:embed="rId4"/>
+          <a:stretch>
+            <a:fillRect/>
+          </a:stretch>
+        </p:blipFill>
+        <p:spPr>
+          <a:xfrm>
+            <a:off x="7680959" y="182880"/>
+            <a:ext cx="960120" cy="539696"/>
+          </a:xfrm>
+          <a:prstGeom prst="rect">
+            <a:avLst/>
+          </a:prstGeom>
+        </p:spPr>
+      </p:pic>
     </p:spTree>
   </p:cSld>
   <p:clrMapOvr>
@@ -11920,90 +11200,30 @@
           </a:p>
         </p:txBody>
       </p:sp>
-      <p:sp>
-        <p:nvSpPr>
-          <p:cNvPr id="26" name="cts mark"/>
-          <p:cNvSpPr txBox="1"/>
-          <p:nvPr/>
-        </p:nvSpPr>
-        <p:spPr>
-          <a:xfrm>
-            <a:off x="7726679" y="155448"/>
-            <a:ext cx="914400" cy="274320"/>
-          </a:xfrm>
-          <a:prstGeom prst="rect">
-            <a:avLst/>
-          </a:prstGeom>
-          <a:noFill/>
-        </p:spPr>
-        <p:txBody>
-          <a:bodyPr wrap="none" lIns="0" rIns="0" tIns="0" bIns="0">
-            <a:spAutoFit/>
-          </a:bodyPr>
-          <a:lstStyle/>
-          <a:p>
-            <a:pPr algn="r"/>
-            <a:r>
-              <a:rPr sz="1500" b="1">
-                <a:solidFill>
-                  <a:srgbClr val="005358"/>
-                </a:solidFill>
-              </a:rPr>
-              <a:t>c</a:t>
-            </a:r>
-            <a:r>
-              <a:rPr sz="1500" b="1">
-                <a:solidFill>
-                  <a:srgbClr val="6D71FF"/>
-                </a:solidFill>
-              </a:rPr>
-              <a:t>t</a:t>
-            </a:r>
-            <a:r>
-              <a:rPr sz="1500" b="1">
-                <a:solidFill>
-                  <a:srgbClr val="F33844"/>
-                </a:solidFill>
-              </a:rPr>
-              <a:t>s</a:t>
-            </a:r>
-          </a:p>
-        </p:txBody>
-      </p:sp>
-      <p:sp>
-        <p:nvSpPr>
-          <p:cNvPr id="27" name="cts mark sub"/>
-          <p:cNvSpPr txBox="1"/>
-          <p:nvPr/>
-        </p:nvSpPr>
-        <p:spPr>
-          <a:xfrm>
-            <a:off x="7726679" y="384048"/>
-            <a:ext cx="914400" cy="164592"/>
-          </a:xfrm>
-          <a:prstGeom prst="rect">
-            <a:avLst/>
-          </a:prstGeom>
-          <a:noFill/>
-        </p:spPr>
-        <p:txBody>
-          <a:bodyPr wrap="none" lIns="0" rIns="0" tIns="0" bIns="0">
-            <a:spAutoFit/>
-          </a:bodyPr>
-          <a:lstStyle/>
-          <a:p>
-            <a:pPr algn="r"/>
-            <a:r>
-              <a:rPr sz="650">
-                <a:solidFill>
-                  <a:srgbClr val="6B7585"/>
-                </a:solidFill>
-              </a:rPr>
-              <a:t>Seamless AV</a:t>
-            </a:r>
-          </a:p>
-        </p:txBody>
-      </p:sp>
+      <p:pic>
+        <p:nvPicPr>
+          <p:cNvPr id="26" name="cts logo" descr="cts-logo.png"/>
+          <p:cNvPicPr>
+            <a:picLocks noChangeAspect="1"/>
+          </p:cNvPicPr>
+          <p:nvPr/>
+        </p:nvPicPr>
+        <p:blipFill>
+          <a:blip r:embed="rId4"/>
+          <a:stretch>
+            <a:fillRect/>
+          </a:stretch>
+        </p:blipFill>
+        <p:spPr>
+          <a:xfrm>
+            <a:off x="7680959" y="182880"/>
+            <a:ext cx="960120" cy="539696"/>
+          </a:xfrm>
+          <a:prstGeom prst="rect">
+            <a:avLst/>
+          </a:prstGeom>
+        </p:spPr>
+      </p:pic>
     </p:spTree>
   </p:cSld>
   <p:clrMapOvr>
@@ -12648,90 +11868,30 @@
           </a:p>
         </p:txBody>
       </p:sp>
-      <p:sp>
-        <p:nvSpPr>
-          <p:cNvPr id="26" name="cts mark"/>
-          <p:cNvSpPr txBox="1"/>
-          <p:nvPr/>
-        </p:nvSpPr>
-        <p:spPr>
-          <a:xfrm>
-            <a:off x="7726679" y="155448"/>
-            <a:ext cx="914400" cy="274320"/>
-          </a:xfrm>
-          <a:prstGeom prst="rect">
-            <a:avLst/>
-          </a:prstGeom>
-          <a:noFill/>
-        </p:spPr>
-        <p:txBody>
-          <a:bodyPr wrap="none" lIns="0" rIns="0" tIns="0" bIns="0">
-            <a:spAutoFit/>
-          </a:bodyPr>
-          <a:lstStyle/>
-          <a:p>
-            <a:pPr algn="r"/>
-            <a:r>
-              <a:rPr sz="1500" b="1">
-                <a:solidFill>
-                  <a:srgbClr val="005358"/>
-                </a:solidFill>
-              </a:rPr>
-              <a:t>c</a:t>
-            </a:r>
-            <a:r>
-              <a:rPr sz="1500" b="1">
-                <a:solidFill>
-                  <a:srgbClr val="6D71FF"/>
-                </a:solidFill>
-              </a:rPr>
-              <a:t>t</a:t>
-            </a:r>
-            <a:r>
-              <a:rPr sz="1500" b="1">
-                <a:solidFill>
-                  <a:srgbClr val="F33844"/>
-                </a:solidFill>
-              </a:rPr>
-              <a:t>s</a:t>
-            </a:r>
-          </a:p>
-        </p:txBody>
-      </p:sp>
-      <p:sp>
-        <p:nvSpPr>
-          <p:cNvPr id="27" name="cts mark sub"/>
-          <p:cNvSpPr txBox="1"/>
-          <p:nvPr/>
-        </p:nvSpPr>
-        <p:spPr>
-          <a:xfrm>
-            <a:off x="7726679" y="384048"/>
-            <a:ext cx="914400" cy="164592"/>
-          </a:xfrm>
-          <a:prstGeom prst="rect">
-            <a:avLst/>
-          </a:prstGeom>
-          <a:noFill/>
-        </p:spPr>
-        <p:txBody>
-          <a:bodyPr wrap="none" lIns="0" rIns="0" tIns="0" bIns="0">
-            <a:spAutoFit/>
-          </a:bodyPr>
-          <a:lstStyle/>
-          <a:p>
-            <a:pPr algn="r"/>
-            <a:r>
-              <a:rPr sz="650">
-                <a:solidFill>
-                  <a:srgbClr val="6B7585"/>
-                </a:solidFill>
-              </a:rPr>
-              <a:t>Seamless AV</a:t>
-            </a:r>
-          </a:p>
-        </p:txBody>
-      </p:sp>
+      <p:pic>
+        <p:nvPicPr>
+          <p:cNvPr id="26" name="cts logo" descr="cts-logo.png"/>
+          <p:cNvPicPr>
+            <a:picLocks noChangeAspect="1"/>
+          </p:cNvPicPr>
+          <p:nvPr/>
+        </p:nvPicPr>
+        <p:blipFill>
+          <a:blip r:embed="rId4"/>
+          <a:stretch>
+            <a:fillRect/>
+          </a:stretch>
+        </p:blipFill>
+        <p:spPr>
+          <a:xfrm>
+            <a:off x="7680959" y="182880"/>
+            <a:ext cx="960120" cy="539696"/>
+          </a:xfrm>
+          <a:prstGeom prst="rect">
+            <a:avLst/>
+          </a:prstGeom>
+        </p:spPr>
+      </p:pic>
     </p:spTree>
   </p:cSld>
   <p:clrMapOvr>
@@ -13090,90 +12250,30 @@
           </a:p>
         </p:txBody>
       </p:sp>
-      <p:sp>
-        <p:nvSpPr>
-          <p:cNvPr id="26" name="cts mark"/>
-          <p:cNvSpPr txBox="1"/>
-          <p:nvPr/>
-        </p:nvSpPr>
-        <p:spPr>
-          <a:xfrm>
-            <a:off x="7726679" y="155448"/>
-            <a:ext cx="914400" cy="274320"/>
-          </a:xfrm>
-          <a:prstGeom prst="rect">
-            <a:avLst/>
-          </a:prstGeom>
-          <a:noFill/>
-        </p:spPr>
-        <p:txBody>
-          <a:bodyPr wrap="none" lIns="0" rIns="0" tIns="0" bIns="0">
-            <a:spAutoFit/>
-          </a:bodyPr>
-          <a:lstStyle/>
-          <a:p>
-            <a:pPr algn="r"/>
-            <a:r>
-              <a:rPr sz="1500" b="1">
-                <a:solidFill>
-                  <a:srgbClr val="005358"/>
-                </a:solidFill>
-              </a:rPr>
-              <a:t>c</a:t>
-            </a:r>
-            <a:r>
-              <a:rPr sz="1500" b="1">
-                <a:solidFill>
-                  <a:srgbClr val="6D71FF"/>
-                </a:solidFill>
-              </a:rPr>
-              <a:t>t</a:t>
-            </a:r>
-            <a:r>
-              <a:rPr sz="1500" b="1">
-                <a:solidFill>
-                  <a:srgbClr val="F33844"/>
-                </a:solidFill>
-              </a:rPr>
-              <a:t>s</a:t>
-            </a:r>
-          </a:p>
-        </p:txBody>
-      </p:sp>
-      <p:sp>
-        <p:nvSpPr>
-          <p:cNvPr id="27" name="cts mark sub"/>
-          <p:cNvSpPr txBox="1"/>
-          <p:nvPr/>
-        </p:nvSpPr>
-        <p:spPr>
-          <a:xfrm>
-            <a:off x="7726679" y="384048"/>
-            <a:ext cx="914400" cy="164592"/>
-          </a:xfrm>
-          <a:prstGeom prst="rect">
-            <a:avLst/>
-          </a:prstGeom>
-          <a:noFill/>
-        </p:spPr>
-        <p:txBody>
-          <a:bodyPr wrap="none" lIns="0" rIns="0" tIns="0" bIns="0">
-            <a:spAutoFit/>
-          </a:bodyPr>
-          <a:lstStyle/>
-          <a:p>
-            <a:pPr algn="r"/>
-            <a:r>
-              <a:rPr sz="650">
-                <a:solidFill>
-                  <a:srgbClr val="6B7585"/>
-                </a:solidFill>
-              </a:rPr>
-              <a:t>Seamless AV</a:t>
-            </a:r>
-          </a:p>
-        </p:txBody>
-      </p:sp>
+      <p:pic>
+        <p:nvPicPr>
+          <p:cNvPr id="26" name="cts logo" descr="cts-logo.png"/>
+          <p:cNvPicPr>
+            <a:picLocks noChangeAspect="1"/>
+          </p:cNvPicPr>
+          <p:nvPr/>
+        </p:nvPicPr>
+        <p:blipFill>
+          <a:blip r:embed="rId4"/>
+          <a:stretch>
+            <a:fillRect/>
+          </a:stretch>
+        </p:blipFill>
+        <p:spPr>
+          <a:xfrm>
+            <a:off x="7680959" y="182880"/>
+            <a:ext cx="960120" cy="539696"/>
+          </a:xfrm>
+          <a:prstGeom prst="rect">
+            <a:avLst/>
+          </a:prstGeom>
+        </p:spPr>
+      </p:pic>
     </p:spTree>
   </p:cSld>
   <p:clrMapOvr>
@@ -13532,90 +12632,30 @@
           </a:p>
         </p:txBody>
       </p:sp>
-      <p:sp>
-        <p:nvSpPr>
-          <p:cNvPr id="26" name="cts mark"/>
-          <p:cNvSpPr txBox="1"/>
-          <p:nvPr/>
-        </p:nvSpPr>
-        <p:spPr>
-          <a:xfrm>
-            <a:off x="7726679" y="155448"/>
-            <a:ext cx="914400" cy="274320"/>
-          </a:xfrm>
-          <a:prstGeom prst="rect">
-            <a:avLst/>
-          </a:prstGeom>
-          <a:noFill/>
-        </p:spPr>
-        <p:txBody>
-          <a:bodyPr wrap="none" lIns="0" rIns="0" tIns="0" bIns="0">
-            <a:spAutoFit/>
-          </a:bodyPr>
-          <a:lstStyle/>
-          <a:p>
-            <a:pPr algn="r"/>
-            <a:r>
-              <a:rPr sz="1500" b="1">
-                <a:solidFill>
-                  <a:srgbClr val="005358"/>
-                </a:solidFill>
-              </a:rPr>
-              <a:t>c</a:t>
-            </a:r>
-            <a:r>
-              <a:rPr sz="1500" b="1">
-                <a:solidFill>
-                  <a:srgbClr val="6D71FF"/>
-                </a:solidFill>
-              </a:rPr>
-              <a:t>t</a:t>
-            </a:r>
-            <a:r>
-              <a:rPr sz="1500" b="1">
-                <a:solidFill>
-                  <a:srgbClr val="F33844"/>
-                </a:solidFill>
-              </a:rPr>
-              <a:t>s</a:t>
-            </a:r>
-          </a:p>
-        </p:txBody>
-      </p:sp>
-      <p:sp>
-        <p:nvSpPr>
-          <p:cNvPr id="27" name="cts mark sub"/>
-          <p:cNvSpPr txBox="1"/>
-          <p:nvPr/>
-        </p:nvSpPr>
-        <p:spPr>
-          <a:xfrm>
-            <a:off x="7726679" y="384048"/>
-            <a:ext cx="914400" cy="164592"/>
-          </a:xfrm>
-          <a:prstGeom prst="rect">
-            <a:avLst/>
-          </a:prstGeom>
-          <a:noFill/>
-        </p:spPr>
-        <p:txBody>
-          <a:bodyPr wrap="none" lIns="0" rIns="0" tIns="0" bIns="0">
-            <a:spAutoFit/>
-          </a:bodyPr>
-          <a:lstStyle/>
-          <a:p>
-            <a:pPr algn="r"/>
-            <a:r>
-              <a:rPr sz="650">
-                <a:solidFill>
-                  <a:srgbClr val="6B7585"/>
-                </a:solidFill>
-              </a:rPr>
-              <a:t>Seamless AV</a:t>
-            </a:r>
-          </a:p>
-        </p:txBody>
-      </p:sp>
+      <p:pic>
+        <p:nvPicPr>
+          <p:cNvPr id="26" name="cts logo" descr="cts-logo.png"/>
+          <p:cNvPicPr>
+            <a:picLocks noChangeAspect="1"/>
+          </p:cNvPicPr>
+          <p:nvPr/>
+        </p:nvPicPr>
+        <p:blipFill>
+          <a:blip r:embed="rId4"/>
+          <a:stretch>
+            <a:fillRect/>
+          </a:stretch>
+        </p:blipFill>
+        <p:spPr>
+          <a:xfrm>
+            <a:off x="7680959" y="182880"/>
+            <a:ext cx="960120" cy="539696"/>
+          </a:xfrm>
+          <a:prstGeom prst="rect">
+            <a:avLst/>
+          </a:prstGeom>
+        </p:spPr>
+      </p:pic>
     </p:spTree>
   </p:cSld>
   <p:clrMapOvr>
@@ -14257,90 +13297,30 @@
           </a:p>
         </p:txBody>
       </p:sp>
-      <p:sp>
-        <p:nvSpPr>
-          <p:cNvPr id="26" name="cts mark"/>
-          <p:cNvSpPr txBox="1"/>
-          <p:nvPr/>
-        </p:nvSpPr>
-        <p:spPr>
-          <a:xfrm>
-            <a:off x="7726679" y="155448"/>
-            <a:ext cx="914400" cy="274320"/>
-          </a:xfrm>
-          <a:prstGeom prst="rect">
-            <a:avLst/>
-          </a:prstGeom>
-          <a:noFill/>
-        </p:spPr>
-        <p:txBody>
-          <a:bodyPr wrap="none" lIns="0" rIns="0" tIns="0" bIns="0">
-            <a:spAutoFit/>
-          </a:bodyPr>
-          <a:lstStyle/>
-          <a:p>
-            <a:pPr algn="r"/>
-            <a:r>
-              <a:rPr sz="1500" b="1">
-                <a:solidFill>
-                  <a:srgbClr val="005358"/>
-                </a:solidFill>
-              </a:rPr>
-              <a:t>c</a:t>
-            </a:r>
-            <a:r>
-              <a:rPr sz="1500" b="1">
-                <a:solidFill>
-                  <a:srgbClr val="6D71FF"/>
-                </a:solidFill>
-              </a:rPr>
-              <a:t>t</a:t>
-            </a:r>
-            <a:r>
-              <a:rPr sz="1500" b="1">
-                <a:solidFill>
-                  <a:srgbClr val="F33844"/>
-                </a:solidFill>
-              </a:rPr>
-              <a:t>s</a:t>
-            </a:r>
-          </a:p>
-        </p:txBody>
-      </p:sp>
-      <p:sp>
-        <p:nvSpPr>
-          <p:cNvPr id="27" name="cts mark sub"/>
-          <p:cNvSpPr txBox="1"/>
-          <p:nvPr/>
-        </p:nvSpPr>
-        <p:spPr>
-          <a:xfrm>
-            <a:off x="7726679" y="384048"/>
-            <a:ext cx="914400" cy="164592"/>
-          </a:xfrm>
-          <a:prstGeom prst="rect">
-            <a:avLst/>
-          </a:prstGeom>
-          <a:noFill/>
-        </p:spPr>
-        <p:txBody>
-          <a:bodyPr wrap="none" lIns="0" rIns="0" tIns="0" bIns="0">
-            <a:spAutoFit/>
-          </a:bodyPr>
-          <a:lstStyle/>
-          <a:p>
-            <a:pPr algn="r"/>
-            <a:r>
-              <a:rPr sz="650">
-                <a:solidFill>
-                  <a:srgbClr val="6B7585"/>
-                </a:solidFill>
-              </a:rPr>
-              <a:t>Seamless AV</a:t>
-            </a:r>
-          </a:p>
-        </p:txBody>
-      </p:sp>
+      <p:pic>
+        <p:nvPicPr>
+          <p:cNvPr id="26" name="cts logo" descr="cts-logo.png"/>
+          <p:cNvPicPr>
+            <a:picLocks noChangeAspect="1"/>
+          </p:cNvPicPr>
+          <p:nvPr/>
+        </p:nvPicPr>
+        <p:blipFill>
+          <a:blip r:embed="rId4"/>
+          <a:stretch>
+            <a:fillRect/>
+          </a:stretch>
+        </p:blipFill>
+        <p:spPr>
+          <a:xfrm>
+            <a:off x="7680959" y="182880"/>
+            <a:ext cx="960120" cy="539696"/>
+          </a:xfrm>
+          <a:prstGeom prst="rect">
+            <a:avLst/>
+          </a:prstGeom>
+        </p:spPr>
+      </p:pic>
     </p:spTree>
   </p:cSld>
   <p:clrMapOvr>
@@ -16569,90 +15549,30 @@
           </a:p>
         </p:txBody>
       </p:sp>
-      <p:sp>
-        <p:nvSpPr>
-          <p:cNvPr id="57" name="cts mark"/>
-          <p:cNvSpPr txBox="1"/>
-          <p:nvPr/>
-        </p:nvSpPr>
-        <p:spPr>
-          <a:xfrm>
-            <a:off x="7726679" y="155448"/>
-            <a:ext cx="914400" cy="274320"/>
-          </a:xfrm>
-          <a:prstGeom prst="rect">
-            <a:avLst/>
-          </a:prstGeom>
-          <a:noFill/>
-        </p:spPr>
-        <p:txBody>
-          <a:bodyPr wrap="none" lIns="0" rIns="0" tIns="0" bIns="0">
-            <a:spAutoFit/>
-          </a:bodyPr>
-          <a:lstStyle/>
-          <a:p>
-            <a:pPr algn="r"/>
-            <a:r>
-              <a:rPr sz="1500" b="1">
-                <a:solidFill>
-                  <a:srgbClr val="005358"/>
-                </a:solidFill>
-              </a:rPr>
-              <a:t>c</a:t>
-            </a:r>
-            <a:r>
-              <a:rPr sz="1500" b="1">
-                <a:solidFill>
-                  <a:srgbClr val="6D71FF"/>
-                </a:solidFill>
-              </a:rPr>
-              <a:t>t</a:t>
-            </a:r>
-            <a:r>
-              <a:rPr sz="1500" b="1">
-                <a:solidFill>
-                  <a:srgbClr val="F33844"/>
-                </a:solidFill>
-              </a:rPr>
-              <a:t>s</a:t>
-            </a:r>
-          </a:p>
-        </p:txBody>
-      </p:sp>
-      <p:sp>
-        <p:nvSpPr>
-          <p:cNvPr id="58" name="cts mark sub"/>
-          <p:cNvSpPr txBox="1"/>
-          <p:nvPr/>
-        </p:nvSpPr>
-        <p:spPr>
-          <a:xfrm>
-            <a:off x="7726679" y="384048"/>
-            <a:ext cx="914400" cy="164592"/>
-          </a:xfrm>
-          <a:prstGeom prst="rect">
-            <a:avLst/>
-          </a:prstGeom>
-          <a:noFill/>
-        </p:spPr>
-        <p:txBody>
-          <a:bodyPr wrap="none" lIns="0" rIns="0" tIns="0" bIns="0">
-            <a:spAutoFit/>
-          </a:bodyPr>
-          <a:lstStyle/>
-          <a:p>
-            <a:pPr algn="r"/>
-            <a:r>
-              <a:rPr sz="650">
-                <a:solidFill>
-                  <a:srgbClr val="6B7585"/>
-                </a:solidFill>
-              </a:rPr>
-              <a:t>Seamless AV</a:t>
-            </a:r>
-          </a:p>
-        </p:txBody>
-      </p:sp>
+      <p:pic>
+        <p:nvPicPr>
+          <p:cNvPr id="57" name="cts logo" descr="cts-logo.png"/>
+          <p:cNvPicPr>
+            <a:picLocks noChangeAspect="1"/>
+          </p:cNvPicPr>
+          <p:nvPr/>
+        </p:nvPicPr>
+        <p:blipFill>
+          <a:blip r:embed="rId3"/>
+          <a:stretch>
+            <a:fillRect/>
+          </a:stretch>
+        </p:blipFill>
+        <p:spPr>
+          <a:xfrm>
+            <a:off x="7680959" y="182880"/>
+            <a:ext cx="960120" cy="539696"/>
+          </a:xfrm>
+          <a:prstGeom prst="rect">
+            <a:avLst/>
+          </a:prstGeom>
+        </p:spPr>
+      </p:pic>
     </p:spTree>
   </p:cSld>
   <p:clrMapOvr>
@@ -18775,90 +17695,30 @@
           </a:p>
         </p:txBody>
       </p:sp>
-      <p:sp>
-        <p:nvSpPr>
-          <p:cNvPr id="32" name="cts mark"/>
-          <p:cNvSpPr txBox="1"/>
-          <p:nvPr/>
-        </p:nvSpPr>
-        <p:spPr>
-          <a:xfrm>
-            <a:off x="7726679" y="155448"/>
-            <a:ext cx="914400" cy="274320"/>
-          </a:xfrm>
-          <a:prstGeom prst="rect">
-            <a:avLst/>
-          </a:prstGeom>
-          <a:noFill/>
-        </p:spPr>
-        <p:txBody>
-          <a:bodyPr wrap="none" lIns="0" rIns="0" tIns="0" bIns="0">
-            <a:spAutoFit/>
-          </a:bodyPr>
-          <a:lstStyle/>
-          <a:p>
-            <a:pPr algn="r"/>
-            <a:r>
-              <a:rPr sz="1500" b="1">
-                <a:solidFill>
-                  <a:srgbClr val="005358"/>
-                </a:solidFill>
-              </a:rPr>
-              <a:t>c</a:t>
-            </a:r>
-            <a:r>
-              <a:rPr sz="1500" b="1">
-                <a:solidFill>
-                  <a:srgbClr val="6D71FF"/>
-                </a:solidFill>
-              </a:rPr>
-              <a:t>t</a:t>
-            </a:r>
-            <a:r>
-              <a:rPr sz="1500" b="1">
-                <a:solidFill>
-                  <a:srgbClr val="F33844"/>
-                </a:solidFill>
-              </a:rPr>
-              <a:t>s</a:t>
-            </a:r>
-          </a:p>
-        </p:txBody>
-      </p:sp>
-      <p:sp>
-        <p:nvSpPr>
-          <p:cNvPr id="33" name="cts mark sub"/>
-          <p:cNvSpPr txBox="1"/>
-          <p:nvPr/>
-        </p:nvSpPr>
-        <p:spPr>
-          <a:xfrm>
-            <a:off x="7726679" y="384048"/>
-            <a:ext cx="914400" cy="164592"/>
-          </a:xfrm>
-          <a:prstGeom prst="rect">
-            <a:avLst/>
-          </a:prstGeom>
-          <a:noFill/>
-        </p:spPr>
-        <p:txBody>
-          <a:bodyPr wrap="none" lIns="0" rIns="0" tIns="0" bIns="0">
-            <a:spAutoFit/>
-          </a:bodyPr>
-          <a:lstStyle/>
-          <a:p>
-            <a:pPr algn="r"/>
-            <a:r>
-              <a:rPr sz="650">
-                <a:solidFill>
-                  <a:srgbClr val="6B7585"/>
-                </a:solidFill>
-              </a:rPr>
-              <a:t>Seamless AV</a:t>
-            </a:r>
-          </a:p>
-        </p:txBody>
-      </p:sp>
+      <p:pic>
+        <p:nvPicPr>
+          <p:cNvPr id="32" name="cts logo" descr="cts-logo.png"/>
+          <p:cNvPicPr>
+            <a:picLocks noChangeAspect="1"/>
+          </p:cNvPicPr>
+          <p:nvPr/>
+        </p:nvPicPr>
+        <p:blipFill>
+          <a:blip r:embed="rId3"/>
+          <a:stretch>
+            <a:fillRect/>
+          </a:stretch>
+        </p:blipFill>
+        <p:spPr>
+          <a:xfrm>
+            <a:off x="7680959" y="182880"/>
+            <a:ext cx="960120" cy="539696"/>
+          </a:xfrm>
+          <a:prstGeom prst="rect">
+            <a:avLst/>
+          </a:prstGeom>
+        </p:spPr>
+      </p:pic>
     </p:spTree>
   </p:cSld>
   <p:clrMapOvr>
@@ -20156,90 +19016,30 @@
           </a:p>
         </p:txBody>
       </p:sp>
-      <p:sp>
-        <p:nvSpPr>
-          <p:cNvPr id="27" name="cts mark"/>
-          <p:cNvSpPr txBox="1"/>
-          <p:nvPr/>
-        </p:nvSpPr>
-        <p:spPr>
-          <a:xfrm>
-            <a:off x="7726679" y="155448"/>
-            <a:ext cx="914400" cy="274320"/>
-          </a:xfrm>
-          <a:prstGeom prst="rect">
-            <a:avLst/>
-          </a:prstGeom>
-          <a:noFill/>
-        </p:spPr>
-        <p:txBody>
-          <a:bodyPr wrap="none" lIns="0" rIns="0" tIns="0" bIns="0">
-            <a:spAutoFit/>
-          </a:bodyPr>
-          <a:lstStyle/>
-          <a:p>
-            <a:pPr algn="r"/>
-            <a:r>
-              <a:rPr sz="1500" b="1">
-                <a:solidFill>
-                  <a:srgbClr val="005358"/>
-                </a:solidFill>
-              </a:rPr>
-              <a:t>c</a:t>
-            </a:r>
-            <a:r>
-              <a:rPr sz="1500" b="1">
-                <a:solidFill>
-                  <a:srgbClr val="6D71FF"/>
-                </a:solidFill>
-              </a:rPr>
-              <a:t>t</a:t>
-            </a:r>
-            <a:r>
-              <a:rPr sz="1500" b="1">
-                <a:solidFill>
-                  <a:srgbClr val="F33844"/>
-                </a:solidFill>
-              </a:rPr>
-              <a:t>s</a:t>
-            </a:r>
-          </a:p>
-        </p:txBody>
-      </p:sp>
-      <p:sp>
-        <p:nvSpPr>
-          <p:cNvPr id="28" name="cts mark sub"/>
-          <p:cNvSpPr txBox="1"/>
-          <p:nvPr/>
-        </p:nvSpPr>
-        <p:spPr>
-          <a:xfrm>
-            <a:off x="7726679" y="384048"/>
-            <a:ext cx="914400" cy="164592"/>
-          </a:xfrm>
-          <a:prstGeom prst="rect">
-            <a:avLst/>
-          </a:prstGeom>
-          <a:noFill/>
-        </p:spPr>
-        <p:txBody>
-          <a:bodyPr wrap="none" lIns="0" rIns="0" tIns="0" bIns="0">
-            <a:spAutoFit/>
-          </a:bodyPr>
-          <a:lstStyle/>
-          <a:p>
-            <a:pPr algn="r"/>
-            <a:r>
-              <a:rPr sz="650">
-                <a:solidFill>
-                  <a:srgbClr val="6B7585"/>
-                </a:solidFill>
-              </a:rPr>
-              <a:t>Seamless AV</a:t>
-            </a:r>
-          </a:p>
-        </p:txBody>
-      </p:sp>
+      <p:pic>
+        <p:nvPicPr>
+          <p:cNvPr id="27" name="cts logo" descr="cts-logo.png"/>
+          <p:cNvPicPr>
+            <a:picLocks noChangeAspect="1"/>
+          </p:cNvPicPr>
+          <p:nvPr/>
+        </p:nvPicPr>
+        <p:blipFill>
+          <a:blip r:embed="rId5"/>
+          <a:stretch>
+            <a:fillRect/>
+          </a:stretch>
+        </p:blipFill>
+        <p:spPr>
+          <a:xfrm>
+            <a:off x="7680959" y="182880"/>
+            <a:ext cx="960120" cy="539696"/>
+          </a:xfrm>
+          <a:prstGeom prst="rect">
+            <a:avLst/>
+          </a:prstGeom>
+        </p:spPr>
+      </p:pic>
     </p:spTree>
   </p:cSld>
   <p:clrMapOvr>
@@ -20598,90 +19398,30 @@
           </a:p>
         </p:txBody>
       </p:sp>
-      <p:sp>
-        <p:nvSpPr>
-          <p:cNvPr id="26" name="cts mark"/>
-          <p:cNvSpPr txBox="1"/>
-          <p:nvPr/>
-        </p:nvSpPr>
-        <p:spPr>
-          <a:xfrm>
-            <a:off x="7726679" y="155448"/>
-            <a:ext cx="914400" cy="274320"/>
-          </a:xfrm>
-          <a:prstGeom prst="rect">
-            <a:avLst/>
-          </a:prstGeom>
-          <a:noFill/>
-        </p:spPr>
-        <p:txBody>
-          <a:bodyPr wrap="none" lIns="0" rIns="0" tIns="0" bIns="0">
-            <a:spAutoFit/>
-          </a:bodyPr>
-          <a:lstStyle/>
-          <a:p>
-            <a:pPr algn="r"/>
-            <a:r>
-              <a:rPr sz="1500" b="1">
-                <a:solidFill>
-                  <a:srgbClr val="005358"/>
-                </a:solidFill>
-              </a:rPr>
-              <a:t>c</a:t>
-            </a:r>
-            <a:r>
-              <a:rPr sz="1500" b="1">
-                <a:solidFill>
-                  <a:srgbClr val="6D71FF"/>
-                </a:solidFill>
-              </a:rPr>
-              <a:t>t</a:t>
-            </a:r>
-            <a:r>
-              <a:rPr sz="1500" b="1">
-                <a:solidFill>
-                  <a:srgbClr val="F33844"/>
-                </a:solidFill>
-              </a:rPr>
-              <a:t>s</a:t>
-            </a:r>
-          </a:p>
-        </p:txBody>
-      </p:sp>
-      <p:sp>
-        <p:nvSpPr>
-          <p:cNvPr id="27" name="cts mark sub"/>
-          <p:cNvSpPr txBox="1"/>
-          <p:nvPr/>
-        </p:nvSpPr>
-        <p:spPr>
-          <a:xfrm>
-            <a:off x="7726679" y="384048"/>
-            <a:ext cx="914400" cy="164592"/>
-          </a:xfrm>
-          <a:prstGeom prst="rect">
-            <a:avLst/>
-          </a:prstGeom>
-          <a:noFill/>
-        </p:spPr>
-        <p:txBody>
-          <a:bodyPr wrap="none" lIns="0" rIns="0" tIns="0" bIns="0">
-            <a:spAutoFit/>
-          </a:bodyPr>
-          <a:lstStyle/>
-          <a:p>
-            <a:pPr algn="r"/>
-            <a:r>
-              <a:rPr sz="650">
-                <a:solidFill>
-                  <a:srgbClr val="6B7585"/>
-                </a:solidFill>
-              </a:rPr>
-              <a:t>Seamless AV</a:t>
-            </a:r>
-          </a:p>
-        </p:txBody>
-      </p:sp>
+      <p:pic>
+        <p:nvPicPr>
+          <p:cNvPr id="26" name="cts logo" descr="cts-logo.png"/>
+          <p:cNvPicPr>
+            <a:picLocks noChangeAspect="1"/>
+          </p:cNvPicPr>
+          <p:nvPr/>
+        </p:nvPicPr>
+        <p:blipFill>
+          <a:blip r:embed="rId4"/>
+          <a:stretch>
+            <a:fillRect/>
+          </a:stretch>
+        </p:blipFill>
+        <p:spPr>
+          <a:xfrm>
+            <a:off x="7680959" y="182880"/>
+            <a:ext cx="960120" cy="539696"/>
+          </a:xfrm>
+          <a:prstGeom prst="rect">
+            <a:avLst/>
+          </a:prstGeom>
+        </p:spPr>
+      </p:pic>
     </p:spTree>
   </p:cSld>
   <p:clrMapOvr>
@@ -21043,90 +19783,30 @@
           </a:p>
         </p:txBody>
       </p:sp>
-      <p:sp>
-        <p:nvSpPr>
-          <p:cNvPr id="26" name="cts mark"/>
-          <p:cNvSpPr txBox="1"/>
-          <p:nvPr/>
-        </p:nvSpPr>
-        <p:spPr>
-          <a:xfrm>
-            <a:off x="7726679" y="155448"/>
-            <a:ext cx="914400" cy="274320"/>
-          </a:xfrm>
-          <a:prstGeom prst="rect">
-            <a:avLst/>
-          </a:prstGeom>
-          <a:noFill/>
-        </p:spPr>
-        <p:txBody>
-          <a:bodyPr wrap="none" lIns="0" rIns="0" tIns="0" bIns="0">
-            <a:spAutoFit/>
-          </a:bodyPr>
-          <a:lstStyle/>
-          <a:p>
-            <a:pPr algn="r"/>
-            <a:r>
-              <a:rPr sz="1500" b="1">
-                <a:solidFill>
-                  <a:srgbClr val="005358"/>
-                </a:solidFill>
-              </a:rPr>
-              <a:t>c</a:t>
-            </a:r>
-            <a:r>
-              <a:rPr sz="1500" b="1">
-                <a:solidFill>
-                  <a:srgbClr val="6D71FF"/>
-                </a:solidFill>
-              </a:rPr>
-              <a:t>t</a:t>
-            </a:r>
-            <a:r>
-              <a:rPr sz="1500" b="1">
-                <a:solidFill>
-                  <a:srgbClr val="F33844"/>
-                </a:solidFill>
-              </a:rPr>
-              <a:t>s</a:t>
-            </a:r>
-          </a:p>
-        </p:txBody>
-      </p:sp>
-      <p:sp>
-        <p:nvSpPr>
-          <p:cNvPr id="27" name="cts mark sub"/>
-          <p:cNvSpPr txBox="1"/>
-          <p:nvPr/>
-        </p:nvSpPr>
-        <p:spPr>
-          <a:xfrm>
-            <a:off x="7726679" y="384048"/>
-            <a:ext cx="914400" cy="164592"/>
-          </a:xfrm>
-          <a:prstGeom prst="rect">
-            <a:avLst/>
-          </a:prstGeom>
-          <a:noFill/>
-        </p:spPr>
-        <p:txBody>
-          <a:bodyPr wrap="none" lIns="0" rIns="0" tIns="0" bIns="0">
-            <a:spAutoFit/>
-          </a:bodyPr>
-          <a:lstStyle/>
-          <a:p>
-            <a:pPr algn="r"/>
-            <a:r>
-              <a:rPr sz="650">
-                <a:solidFill>
-                  <a:srgbClr val="6B7585"/>
-                </a:solidFill>
-              </a:rPr>
-              <a:t>Seamless AV</a:t>
-            </a:r>
-          </a:p>
-        </p:txBody>
-      </p:sp>
+      <p:pic>
+        <p:nvPicPr>
+          <p:cNvPr id="26" name="cts logo" descr="cts-logo.png"/>
+          <p:cNvPicPr>
+            <a:picLocks noChangeAspect="1"/>
+          </p:cNvPicPr>
+          <p:nvPr/>
+        </p:nvPicPr>
+        <p:blipFill>
+          <a:blip r:embed="rId4"/>
+          <a:stretch>
+            <a:fillRect/>
+          </a:stretch>
+        </p:blipFill>
+        <p:spPr>
+          <a:xfrm>
+            <a:off x="7680959" y="182880"/>
+            <a:ext cx="960120" cy="539696"/>
+          </a:xfrm>
+          <a:prstGeom prst="rect">
+            <a:avLst/>
+          </a:prstGeom>
+        </p:spPr>
+      </p:pic>
     </p:spTree>
   </p:cSld>
   <p:clrMapOvr>
@@ -21488,90 +20168,30 @@
           </a:p>
         </p:txBody>
       </p:sp>
-      <p:sp>
-        <p:nvSpPr>
-          <p:cNvPr id="26" name="cts mark"/>
-          <p:cNvSpPr txBox="1"/>
-          <p:nvPr/>
-        </p:nvSpPr>
-        <p:spPr>
-          <a:xfrm>
-            <a:off x="7726679" y="155448"/>
-            <a:ext cx="914400" cy="274320"/>
-          </a:xfrm>
-          <a:prstGeom prst="rect">
-            <a:avLst/>
-          </a:prstGeom>
-          <a:noFill/>
-        </p:spPr>
-        <p:txBody>
-          <a:bodyPr wrap="none" lIns="0" rIns="0" tIns="0" bIns="0">
-            <a:spAutoFit/>
-          </a:bodyPr>
-          <a:lstStyle/>
-          <a:p>
-            <a:pPr algn="r"/>
-            <a:r>
-              <a:rPr sz="1500" b="1">
-                <a:solidFill>
-                  <a:srgbClr val="005358"/>
-                </a:solidFill>
-              </a:rPr>
-              <a:t>c</a:t>
-            </a:r>
-            <a:r>
-              <a:rPr sz="1500" b="1">
-                <a:solidFill>
-                  <a:srgbClr val="6D71FF"/>
-                </a:solidFill>
-              </a:rPr>
-              <a:t>t</a:t>
-            </a:r>
-            <a:r>
-              <a:rPr sz="1500" b="1">
-                <a:solidFill>
-                  <a:srgbClr val="F33844"/>
-                </a:solidFill>
-              </a:rPr>
-              <a:t>s</a:t>
-            </a:r>
-          </a:p>
-        </p:txBody>
-      </p:sp>
-      <p:sp>
-        <p:nvSpPr>
-          <p:cNvPr id="27" name="cts mark sub"/>
-          <p:cNvSpPr txBox="1"/>
-          <p:nvPr/>
-        </p:nvSpPr>
-        <p:spPr>
-          <a:xfrm>
-            <a:off x="7726679" y="384048"/>
-            <a:ext cx="914400" cy="164592"/>
-          </a:xfrm>
-          <a:prstGeom prst="rect">
-            <a:avLst/>
-          </a:prstGeom>
-          <a:noFill/>
-        </p:spPr>
-        <p:txBody>
-          <a:bodyPr wrap="none" lIns="0" rIns="0" tIns="0" bIns="0">
-            <a:spAutoFit/>
-          </a:bodyPr>
-          <a:lstStyle/>
-          <a:p>
-            <a:pPr algn="r"/>
-            <a:r>
-              <a:rPr sz="650">
-                <a:solidFill>
-                  <a:srgbClr val="6B7585"/>
-                </a:solidFill>
-              </a:rPr>
-              <a:t>Seamless AV</a:t>
-            </a:r>
-          </a:p>
-        </p:txBody>
-      </p:sp>
+      <p:pic>
+        <p:nvPicPr>
+          <p:cNvPr id="26" name="cts logo" descr="cts-logo.png"/>
+          <p:cNvPicPr>
+            <a:picLocks noChangeAspect="1"/>
+          </p:cNvPicPr>
+          <p:nvPr/>
+        </p:nvPicPr>
+        <p:blipFill>
+          <a:blip r:embed="rId4"/>
+          <a:stretch>
+            <a:fillRect/>
+          </a:stretch>
+        </p:blipFill>
+        <p:spPr>
+          <a:xfrm>
+            <a:off x="7680959" y="182880"/>
+            <a:ext cx="960120" cy="539696"/>
+          </a:xfrm>
+          <a:prstGeom prst="rect">
+            <a:avLst/>
+          </a:prstGeom>
+        </p:spPr>
+      </p:pic>
     </p:spTree>
   </p:cSld>
   <p:clrMapOvr>
@@ -21930,90 +20550,30 @@
           </a:p>
         </p:txBody>
       </p:sp>
-      <p:sp>
-        <p:nvSpPr>
-          <p:cNvPr id="26" name="cts mark"/>
-          <p:cNvSpPr txBox="1"/>
-          <p:nvPr/>
-        </p:nvSpPr>
-        <p:spPr>
-          <a:xfrm>
-            <a:off x="7726679" y="155448"/>
-            <a:ext cx="914400" cy="274320"/>
-          </a:xfrm>
-          <a:prstGeom prst="rect">
-            <a:avLst/>
-          </a:prstGeom>
-          <a:noFill/>
-        </p:spPr>
-        <p:txBody>
-          <a:bodyPr wrap="none" lIns="0" rIns="0" tIns="0" bIns="0">
-            <a:spAutoFit/>
-          </a:bodyPr>
-          <a:lstStyle/>
-          <a:p>
-            <a:pPr algn="r"/>
-            <a:r>
-              <a:rPr sz="1500" b="1">
-                <a:solidFill>
-                  <a:srgbClr val="005358"/>
-                </a:solidFill>
-              </a:rPr>
-              <a:t>c</a:t>
-            </a:r>
-            <a:r>
-              <a:rPr sz="1500" b="1">
-                <a:solidFill>
-                  <a:srgbClr val="6D71FF"/>
-                </a:solidFill>
-              </a:rPr>
-              <a:t>t</a:t>
-            </a:r>
-            <a:r>
-              <a:rPr sz="1500" b="1">
-                <a:solidFill>
-                  <a:srgbClr val="F33844"/>
-                </a:solidFill>
-              </a:rPr>
-              <a:t>s</a:t>
-            </a:r>
-          </a:p>
-        </p:txBody>
-      </p:sp>
-      <p:sp>
-        <p:nvSpPr>
-          <p:cNvPr id="27" name="cts mark sub"/>
-          <p:cNvSpPr txBox="1"/>
-          <p:nvPr/>
-        </p:nvSpPr>
-        <p:spPr>
-          <a:xfrm>
-            <a:off x="7726679" y="384048"/>
-            <a:ext cx="914400" cy="164592"/>
-          </a:xfrm>
-          <a:prstGeom prst="rect">
-            <a:avLst/>
-          </a:prstGeom>
-          <a:noFill/>
-        </p:spPr>
-        <p:txBody>
-          <a:bodyPr wrap="none" lIns="0" rIns="0" tIns="0" bIns="0">
-            <a:spAutoFit/>
-          </a:bodyPr>
-          <a:lstStyle/>
-          <a:p>
-            <a:pPr algn="r"/>
-            <a:r>
-              <a:rPr sz="650">
-                <a:solidFill>
-                  <a:srgbClr val="6B7585"/>
-                </a:solidFill>
-              </a:rPr>
-              <a:t>Seamless AV</a:t>
-            </a:r>
-          </a:p>
-        </p:txBody>
-      </p:sp>
+      <p:pic>
+        <p:nvPicPr>
+          <p:cNvPr id="26" name="cts logo" descr="cts-logo.png"/>
+          <p:cNvPicPr>
+            <a:picLocks noChangeAspect="1"/>
+          </p:cNvPicPr>
+          <p:nvPr/>
+        </p:nvPicPr>
+        <p:blipFill>
+          <a:blip r:embed="rId4"/>
+          <a:stretch>
+            <a:fillRect/>
+          </a:stretch>
+        </p:blipFill>
+        <p:spPr>
+          <a:xfrm>
+            <a:off x="7680959" y="182880"/>
+            <a:ext cx="960120" cy="539696"/>
+          </a:xfrm>
+          <a:prstGeom prst="rect">
+            <a:avLst/>
+          </a:prstGeom>
+        </p:spPr>
+      </p:pic>
     </p:spTree>
   </p:cSld>
   <p:clrMapOvr>

--- a/deck/CTS Monthly Business Review - 30092026.pptx
+++ b/deck/CTS Monthly Business Review - 30092026.pptx
@@ -5255,102 +5255,102 @@
           <a:chExt cx="0" cy="0"/>
         </a:xfrm>
       </p:grpSpPr>
-      <p:sp>
-        <p:nvSpPr>
-          <p:cNvPr id="2" name="Text 0"/>
-          <p:cNvSpPr txBox="1"/>
-          <p:nvPr/>
-        </p:nvSpPr>
-        <p:spPr>
-          <a:xfrm>
-            <a:off x="502920" y="365760"/>
-            <a:ext cx="6400800" cy="274320"/>
-          </a:xfrm>
-          <a:prstGeom prst="rect">
-            <a:avLst/>
-          </a:prstGeom>
-          <a:noFill/>
-          <a:ln/>
-        </p:spPr>
-        <p:txBody>
-          <a:bodyPr wrap="square" lIns="0" tIns="0" rIns="0" bIns="0" rtlCol="0" anchor="ctr"/>
-          <a:lstStyle/>
-          <a:p>
-            <a:pPr marL="0" indent="0">
-              <a:buNone/>
-            </a:pPr>
-            <a:r>
-              <a:rPr lang="en-US" sz="950" b="1" kern="0" spc="220">
-                <a:solidFill>
-                  <a:srgbClr val="122B82"/>
-                </a:solidFill>
-              </a:rPr>
-              <a:t>FINANCIAL PERFORMANCE</a:t>
-            </a:r>
-            <a:endParaRPr lang="en-US" sz="950"/>
-          </a:p>
-        </p:txBody>
-      </p:sp>
-      <p:sp>
-        <p:nvSpPr>
-          <p:cNvPr id="3" name="Text 1"/>
-          <p:cNvSpPr txBox="1"/>
-          <p:nvPr/>
-        </p:nvSpPr>
-        <p:spPr>
-          <a:xfrm>
-            <a:off x="502920" y="640080"/>
-            <a:ext cx="7315200" cy="685800"/>
-          </a:xfrm>
-          <a:prstGeom prst="rect">
-            <a:avLst/>
-          </a:prstGeom>
-          <a:noFill/>
-          <a:ln/>
-        </p:spPr>
-        <p:txBody>
-          <a:bodyPr wrap="square" lIns="0" tIns="0" rIns="0" bIns="0" rtlCol="0" anchor="ctr"/>
-          <a:lstStyle/>
-          <a:p>
-            <a:pPr marL="0" indent="0">
-              <a:buNone/>
-            </a:pPr>
-            <a:r>
-              <a:rPr lang="en-US" sz="2700" b="1">
-                <a:solidFill>
-                  <a:srgbClr val="242C39"/>
-                </a:solidFill>
-              </a:rPr>
-              <a:t>Events, Sep 26</a:t>
-            </a:r>
-            <a:endParaRPr lang="en-US" sz="2700"/>
-          </a:p>
-        </p:txBody>
-      </p:sp>
       <p:pic>
         <p:nvPicPr>
-          <p:cNvPr id="4" name="snip dept_Events" descr="/home/user/Claude/deck/snips/dept_Events.png"/>
+          <p:cNvPr id="27" name="snip dept_Events" descr="dept_Events.png"/>
           <p:cNvPicPr>
             <a:picLocks noChangeAspect="1"/>
           </p:cNvPicPr>
           <p:nvPr/>
         </p:nvPicPr>
         <p:blipFill>
-          <a:blip r:embed="rId3"/>
+          <a:blip r:embed="rId5"/>
           <a:stretch>
             <a:fillRect/>
           </a:stretch>
         </p:blipFill>
         <p:spPr>
           <a:xfrm>
-            <a:off x="502920" y="1444752"/>
-            <a:ext cx="5577840" cy="2594047"/>
+            <a:off x="502920" y="1115568"/>
+            <a:ext cx="8138160" cy="2409752"/>
           </a:xfrm>
           <a:prstGeom prst="rect">
             <a:avLst/>
           </a:prstGeom>
         </p:spPr>
       </p:pic>
+      <p:sp>
+        <p:nvSpPr>
+          <p:cNvPr id="2" name="Text 0"/>
+          <p:cNvSpPr txBox="1"/>
+          <p:nvPr/>
+        </p:nvSpPr>
+        <p:spPr>
+          <a:xfrm>
+            <a:off x="502920" y="365760"/>
+            <a:ext cx="6400800" cy="274320"/>
+          </a:xfrm>
+          <a:prstGeom prst="rect">
+            <a:avLst/>
+          </a:prstGeom>
+          <a:noFill/>
+          <a:ln/>
+        </p:spPr>
+        <p:txBody>
+          <a:bodyPr wrap="square" lIns="0" tIns="0" rIns="0" bIns="0" rtlCol="0" anchor="ctr"/>
+          <a:lstStyle/>
+          <a:p>
+            <a:pPr marL="0" indent="0">
+              <a:buNone/>
+            </a:pPr>
+            <a:r>
+              <a:rPr lang="en-US" sz="950" b="1" kern="0" spc="220">
+                <a:solidFill>
+                  <a:srgbClr val="122B82"/>
+                </a:solidFill>
+              </a:rPr>
+              <a:t>FINANCIAL PERFORMANCE</a:t>
+            </a:r>
+            <a:endParaRPr lang="en-US" sz="950"/>
+          </a:p>
+        </p:txBody>
+      </p:sp>
+      <p:sp>
+        <p:nvSpPr>
+          <p:cNvPr id="3" name="Text 1"/>
+          <p:cNvSpPr txBox="1"/>
+          <p:nvPr/>
+        </p:nvSpPr>
+        <p:spPr>
+          <a:xfrm>
+            <a:off x="502920" y="640080"/>
+            <a:ext cx="7315200" cy="685800"/>
+          </a:xfrm>
+          <a:prstGeom prst="rect">
+            <a:avLst/>
+          </a:prstGeom>
+          <a:noFill/>
+          <a:ln/>
+        </p:spPr>
+        <p:txBody>
+          <a:bodyPr wrap="square" lIns="0" tIns="0" rIns="0" bIns="0" rtlCol="0" anchor="ctr"/>
+          <a:lstStyle/>
+          <a:p>
+            <a:pPr marL="0" indent="0">
+              <a:buNone/>
+            </a:pPr>
+            <a:r>
+              <a:rPr lang="en-US" sz="2700" b="1">
+                <a:solidFill>
+                  <a:srgbClr val="242C39"/>
+                </a:solidFill>
+              </a:rPr>
+              <a:t>Events, Sep 26</a:t>
+            </a:r>
+            <a:endParaRPr lang="en-US" sz="2700"/>
+          </a:p>
+        </p:txBody>
+      </p:sp>
       <p:sp>
         <p:nvSpPr>
           <p:cNvPr id="6" name="commentary panel"/>
@@ -5359,8 +5359,8 @@
         </p:nvSpPr>
         <p:spPr>
           <a:xfrm>
-            <a:off x="6263640" y="1463040"/>
-            <a:ext cx="2377440" cy="3154680"/>
+            <a:off x="502920" y="3635048"/>
+            <a:ext cx="8138160" cy="991815"/>
           </a:xfrm>
           <a:prstGeom prst="rect">
             <a:avLst/>
@@ -5386,8 +5386,8 @@
         </p:nvSpPr>
         <p:spPr>
           <a:xfrm>
-            <a:off x="6446520" y="1627632"/>
-            <a:ext cx="2011680" cy="228600"/>
+            <a:off x="685800" y="3708200"/>
+            <a:ext cx="2743200" cy="228600"/>
           </a:xfrm>
           <a:prstGeom prst="rect">
             <a:avLst/>
@@ -5422,8 +5422,8 @@
         </p:nvSpPr>
         <p:spPr>
           <a:xfrm>
-            <a:off x="6446520" y="1901952"/>
-            <a:ext cx="2011680" cy="2551176"/>
+            <a:off x="685800" y="3881936"/>
+            <a:ext cx="3703320" cy="717495"/>
           </a:xfrm>
           <a:prstGeom prst="rect">
             <a:avLst/>
@@ -5448,7 +5448,7 @@
               <a:buChar char="•"/>
             </a:pPr>
             <a:r>
-              <a:rPr lang="en-US" sz="900">
+              <a:rPr lang="en-US" sz="700">
                 <a:solidFill>
                   <a:srgbClr val="3A4453"/>
                 </a:solidFill>
@@ -5469,7 +5469,7 @@
               <a:buChar char="•"/>
             </a:pPr>
             <a:r>
-              <a:rPr lang="en-US" sz="900">
+              <a:rPr lang="en-US" sz="700">
                 <a:solidFill>
                   <a:srgbClr val="3A4453"/>
                 </a:solidFill>
@@ -5478,6 +5478,99 @@
             </a:r>
             <a:endParaRPr lang="en-US" sz="900"/>
           </a:p>
+        </p:txBody>
+      </p:sp>
+      <p:sp>
+        <p:nvSpPr>
+          <p:cNvPr id="25" name="Slide Number Placeholder 0"/>
+          <p:cNvSpPr>
+            <a:spLocks noGrp="1"/>
+          </p:cNvSpPr>
+          <p:nvPr>
+            <p:ph type="sldNum" sz="quarter" idx="4294967295"/>
+          </p:nvPr>
+        </p:nvSpPr>
+        <p:spPr>
+          <a:xfrm>
+            <a:off x="8092440" y="4736592"/>
+            <a:ext cx="548640" cy="228600"/>
+          </a:xfrm>
+          <a:prstGeom prst="rect">
+            <a:avLst/>
+          </a:prstGeom>
+          <a:extLst>
+            <a:ext uri="{C572A759-6A51-4108-AA02-DFA0A04FC94B}">
+              <ma14:wrappingTextBoxFlag xmlns:ma14="http://schemas.microsoft.com/office/mac/drawingml/2011/main" xmlns="" val="0"/>
+            </a:ext>
+          </a:extLst>
+        </p:spPr>
+        <p:txBody>
+          <a:bodyPr/>
+          <a:lstStyle>
+            <a:lvl1pPr>
+              <a:defRPr sz="800">
+                <a:solidFill>
+                  <a:srgbClr val="6B7585"/>
+                </a:solidFill>
+              </a:defRPr>
+            </a:lvl1pPr>
+          </a:lstStyle>
+          <a:p>
+            <a:pPr algn="r"/>
+            <a:fld id="{F7021451-1387-4CA6-816F-3879F97B5CBC}" type="slidenum">
+              <a:rPr lang="en-US" b="0"/>
+              <a:t>10</a:t>
+            </a:fld>
+            <a:endParaRPr lang="en-US"/>
+          </a:p>
+        </p:txBody>
+      </p:sp>
+      <p:pic>
+        <p:nvPicPr>
+          <p:cNvPr id="26" name="cts logo" descr="cts-logo.png"/>
+          <p:cNvPicPr>
+            <a:picLocks noChangeAspect="1"/>
+          </p:cNvPicPr>
+          <p:nvPr/>
+        </p:nvPicPr>
+        <p:blipFill>
+          <a:blip r:embed="rId4"/>
+          <a:stretch>
+            <a:fillRect/>
+          </a:stretch>
+        </p:blipFill>
+        <p:spPr>
+          <a:xfrm>
+            <a:off x="7680959" y="182880"/>
+            <a:ext cx="960120" cy="539696"/>
+          </a:xfrm>
+          <a:prstGeom prst="rect">
+            <a:avLst/>
+          </a:prstGeom>
+        </p:spPr>
+      </p:pic>
+      <p:sp>
+        <p:nvSpPr>
+          <p:cNvPr id="8" name="Text 5b"/>
+          <p:cNvSpPr txBox="1"/>
+          <p:nvPr/>
+        </p:nvSpPr>
+        <p:spPr>
+          <a:xfrm>
+            <a:off x="4663440" y="3881936"/>
+            <a:ext cx="3703320" cy="717495"/>
+          </a:xfrm>
+          <a:prstGeom prst="rect">
+            <a:avLst/>
+          </a:prstGeom>
+          <a:noFill/>
+          <a:ln/>
+        </p:spPr>
+        <p:txBody>
+          <a:bodyPr wrap="square" lIns="0" tIns="0" rIns="0" bIns="0" rtlCol="0" anchor="t">
+            <a:normAutofit fontScale="92500"/>
+          </a:bodyPr>
+          <a:lstStyle/>
           <a:p>
             <a:pPr marL="342900" indent="-342900">
               <a:lnSpc>
@@ -5490,7 +5583,7 @@
               <a:buChar char="•"/>
             </a:pPr>
             <a:r>
-              <a:rPr lang="en-US" sz="900">
+              <a:rPr lang="en-US" sz="700">
                 <a:solidFill>
                   <a:srgbClr val="3A4453"/>
                 </a:solidFill>
@@ -5511,7 +5604,7 @@
               <a:buChar char="•"/>
             </a:pPr>
             <a:r>
-              <a:rPr lang="en-US" sz="900">
+              <a:rPr lang="en-US" sz="700">
                 <a:solidFill>
                   <a:srgbClr val="3A4453"/>
                 </a:solidFill>
@@ -5532,7 +5625,7 @@
               <a:buChar char="•"/>
             </a:pPr>
             <a:r>
-              <a:rPr lang="en-US" sz="900">
+              <a:rPr lang="en-US" sz="700">
                 <a:solidFill>
                   <a:srgbClr val="3A4453"/>
                 </a:solidFill>
@@ -5543,75 +5636,6 @@
           </a:p>
         </p:txBody>
       </p:sp>
-      <p:sp>
-        <p:nvSpPr>
-          <p:cNvPr id="25" name="Slide Number Placeholder 0"/>
-          <p:cNvSpPr>
-            <a:spLocks noGrp="1"/>
-          </p:cNvSpPr>
-          <p:nvPr>
-            <p:ph type="sldNum" sz="quarter" idx="4294967295"/>
-          </p:nvPr>
-        </p:nvSpPr>
-        <p:spPr>
-          <a:xfrm>
-            <a:off x="8092440" y="4736592"/>
-            <a:ext cx="548640" cy="228600"/>
-          </a:xfrm>
-          <a:prstGeom prst="rect">
-            <a:avLst/>
-          </a:prstGeom>
-          <a:extLst>
-            <a:ext uri="{C572A759-6A51-4108-AA02-DFA0A04FC94B}">
-              <ma14:wrappingTextBoxFlag xmlns:ma14="http://schemas.microsoft.com/office/mac/drawingml/2011/main" xmlns="" val="0"/>
-            </a:ext>
-          </a:extLst>
-        </p:spPr>
-        <p:txBody>
-          <a:bodyPr/>
-          <a:lstStyle>
-            <a:lvl1pPr>
-              <a:defRPr sz="800">
-                <a:solidFill>
-                  <a:srgbClr val="6B7585"/>
-                </a:solidFill>
-              </a:defRPr>
-            </a:lvl1pPr>
-          </a:lstStyle>
-          <a:p>
-            <a:pPr algn="r"/>
-            <a:fld id="{F7021451-1387-4CA6-816F-3879F97B5CBC}" type="slidenum">
-              <a:rPr lang="en-US" b="0"/>
-              <a:t>10</a:t>
-            </a:fld>
-            <a:endParaRPr lang="en-US"/>
-          </a:p>
-        </p:txBody>
-      </p:sp>
-      <p:pic>
-        <p:nvPicPr>
-          <p:cNvPr id="26" name="cts logo" descr="cts-logo.png"/>
-          <p:cNvPicPr>
-            <a:picLocks noChangeAspect="1"/>
-          </p:cNvPicPr>
-          <p:nvPr/>
-        </p:nvPicPr>
-        <p:blipFill>
-          <a:blip r:embed="rId4"/>
-          <a:stretch>
-            <a:fillRect/>
-          </a:stretch>
-        </p:blipFill>
-        <p:spPr>
-          <a:xfrm>
-            <a:off x="7680959" y="182880"/>
-            <a:ext cx="960120" cy="539696"/>
-          </a:xfrm>
-          <a:prstGeom prst="rect">
-            <a:avLst/>
-          </a:prstGeom>
-        </p:spPr>
-      </p:pic>
     </p:spTree>
   </p:cSld>
   <p:clrMapOvr>
@@ -5637,102 +5661,102 @@
           <a:chExt cx="0" cy="0"/>
         </a:xfrm>
       </p:grpSpPr>
-      <p:sp>
-        <p:nvSpPr>
-          <p:cNvPr id="2" name="Text 0"/>
-          <p:cNvSpPr txBox="1"/>
-          <p:nvPr/>
-        </p:nvSpPr>
-        <p:spPr>
-          <a:xfrm>
-            <a:off x="502920" y="365760"/>
-            <a:ext cx="6400800" cy="274320"/>
-          </a:xfrm>
-          <a:prstGeom prst="rect">
-            <a:avLst/>
-          </a:prstGeom>
-          <a:noFill/>
-          <a:ln/>
-        </p:spPr>
-        <p:txBody>
-          <a:bodyPr wrap="square" lIns="0" tIns="0" rIns="0" bIns="0" rtlCol="0" anchor="ctr"/>
-          <a:lstStyle/>
-          <a:p>
-            <a:pPr marL="0" indent="0">
-              <a:buNone/>
-            </a:pPr>
-            <a:r>
-              <a:rPr lang="en-US" sz="950" b="1" kern="0" spc="220">
-                <a:solidFill>
-                  <a:srgbClr val="122B82"/>
-                </a:solidFill>
-              </a:rPr>
-              <a:t>FINANCIAL PERFORMANCE</a:t>
-            </a:r>
-            <a:endParaRPr lang="en-US" sz="950"/>
-          </a:p>
-        </p:txBody>
-      </p:sp>
-      <p:sp>
-        <p:nvSpPr>
-          <p:cNvPr id="3" name="Text 1"/>
-          <p:cNvSpPr txBox="1"/>
-          <p:nvPr/>
-        </p:nvSpPr>
-        <p:spPr>
-          <a:xfrm>
-            <a:off x="502920" y="640080"/>
-            <a:ext cx="7315200" cy="685800"/>
-          </a:xfrm>
-          <a:prstGeom prst="rect">
-            <a:avLst/>
-          </a:prstGeom>
-          <a:noFill/>
-          <a:ln/>
-        </p:spPr>
-        <p:txBody>
-          <a:bodyPr wrap="square" lIns="0" tIns="0" rIns="0" bIns="0" rtlCol="0" anchor="ctr"/>
-          <a:lstStyle/>
-          <a:p>
-            <a:pPr marL="0" indent="0">
-              <a:buNone/>
-            </a:pPr>
-            <a:r>
-              <a:rPr lang="en-US" sz="2700" b="1">
-                <a:solidFill>
-                  <a:srgbClr val="242C39"/>
-                </a:solidFill>
-              </a:rPr>
-              <a:t>Video, Sep 26</a:t>
-            </a:r>
-            <a:endParaRPr lang="en-US" sz="2700"/>
-          </a:p>
-        </p:txBody>
-      </p:sp>
       <p:pic>
         <p:nvPicPr>
-          <p:cNvPr id="4" name="snip dept_Video" descr="/home/user/Claude/deck/snips/dept_Video.png"/>
+          <p:cNvPr id="27" name="snip dept_Video" descr="dept_Video.png"/>
           <p:cNvPicPr>
             <a:picLocks noChangeAspect="1"/>
           </p:cNvPicPr>
           <p:nvPr/>
         </p:nvPicPr>
         <p:blipFill>
-          <a:blip r:embed="rId3"/>
+          <a:blip r:embed="rId5"/>
           <a:stretch>
             <a:fillRect/>
           </a:stretch>
         </p:blipFill>
         <p:spPr>
           <a:xfrm>
-            <a:off x="502920" y="1444752"/>
-            <a:ext cx="5577840" cy="2594047"/>
+            <a:off x="502920" y="1115568"/>
+            <a:ext cx="8138160" cy="2409752"/>
           </a:xfrm>
           <a:prstGeom prst="rect">
             <a:avLst/>
           </a:prstGeom>
         </p:spPr>
       </p:pic>
+      <p:sp>
+        <p:nvSpPr>
+          <p:cNvPr id="2" name="Text 0"/>
+          <p:cNvSpPr txBox="1"/>
+          <p:nvPr/>
+        </p:nvSpPr>
+        <p:spPr>
+          <a:xfrm>
+            <a:off x="502920" y="365760"/>
+            <a:ext cx="6400800" cy="274320"/>
+          </a:xfrm>
+          <a:prstGeom prst="rect">
+            <a:avLst/>
+          </a:prstGeom>
+          <a:noFill/>
+          <a:ln/>
+        </p:spPr>
+        <p:txBody>
+          <a:bodyPr wrap="square" lIns="0" tIns="0" rIns="0" bIns="0" rtlCol="0" anchor="ctr"/>
+          <a:lstStyle/>
+          <a:p>
+            <a:pPr marL="0" indent="0">
+              <a:buNone/>
+            </a:pPr>
+            <a:r>
+              <a:rPr lang="en-US" sz="950" b="1" kern="0" spc="220">
+                <a:solidFill>
+                  <a:srgbClr val="122B82"/>
+                </a:solidFill>
+              </a:rPr>
+              <a:t>FINANCIAL PERFORMANCE</a:t>
+            </a:r>
+            <a:endParaRPr lang="en-US" sz="950"/>
+          </a:p>
+        </p:txBody>
+      </p:sp>
+      <p:sp>
+        <p:nvSpPr>
+          <p:cNvPr id="3" name="Text 1"/>
+          <p:cNvSpPr txBox="1"/>
+          <p:nvPr/>
+        </p:nvSpPr>
+        <p:spPr>
+          <a:xfrm>
+            <a:off x="502920" y="640080"/>
+            <a:ext cx="7315200" cy="685800"/>
+          </a:xfrm>
+          <a:prstGeom prst="rect">
+            <a:avLst/>
+          </a:prstGeom>
+          <a:noFill/>
+          <a:ln/>
+        </p:spPr>
+        <p:txBody>
+          <a:bodyPr wrap="square" lIns="0" tIns="0" rIns="0" bIns="0" rtlCol="0" anchor="ctr"/>
+          <a:lstStyle/>
+          <a:p>
+            <a:pPr marL="0" indent="0">
+              <a:buNone/>
+            </a:pPr>
+            <a:r>
+              <a:rPr lang="en-US" sz="2700" b="1">
+                <a:solidFill>
+                  <a:srgbClr val="242C39"/>
+                </a:solidFill>
+              </a:rPr>
+              <a:t>Video, Sep 26</a:t>
+            </a:r>
+            <a:endParaRPr lang="en-US" sz="2700"/>
+          </a:p>
+        </p:txBody>
+      </p:sp>
       <p:sp>
         <p:nvSpPr>
           <p:cNvPr id="6" name="commentary panel"/>
@@ -5741,8 +5765,8 @@
         </p:nvSpPr>
         <p:spPr>
           <a:xfrm>
-            <a:off x="6263640" y="1463040"/>
-            <a:ext cx="2377440" cy="3154680"/>
+            <a:off x="502920" y="3635048"/>
+            <a:ext cx="8138160" cy="991815"/>
           </a:xfrm>
           <a:prstGeom prst="rect">
             <a:avLst/>
@@ -5768,8 +5792,8 @@
         </p:nvSpPr>
         <p:spPr>
           <a:xfrm>
-            <a:off x="6446520" y="1627632"/>
-            <a:ext cx="2011680" cy="228600"/>
+            <a:off x="685800" y="3708200"/>
+            <a:ext cx="2743200" cy="228600"/>
           </a:xfrm>
           <a:prstGeom prst="rect">
             <a:avLst/>
@@ -5804,8 +5828,8 @@
         </p:nvSpPr>
         <p:spPr>
           <a:xfrm>
-            <a:off x="6446520" y="1901952"/>
-            <a:ext cx="2011680" cy="2551176"/>
+            <a:off x="685800" y="3881936"/>
+            <a:ext cx="3703320" cy="717495"/>
           </a:xfrm>
           <a:prstGeom prst="rect">
             <a:avLst/>
@@ -5830,7 +5854,7 @@
               <a:buChar char="•"/>
             </a:pPr>
             <a:r>
-              <a:rPr lang="en-US" sz="950">
+              <a:rPr lang="en-US" sz="700">
                 <a:solidFill>
                   <a:srgbClr val="3A4453"/>
                 </a:solidFill>
@@ -5851,7 +5875,7 @@
               <a:buChar char="•"/>
             </a:pPr>
             <a:r>
-              <a:rPr lang="en-US" sz="950">
+              <a:rPr lang="en-US" sz="700">
                 <a:solidFill>
                   <a:srgbClr val="3A4453"/>
                 </a:solidFill>
@@ -5860,6 +5884,99 @@
             </a:r>
             <a:endParaRPr lang="en-US" sz="950"/>
           </a:p>
+        </p:txBody>
+      </p:sp>
+      <p:sp>
+        <p:nvSpPr>
+          <p:cNvPr id="25" name="Slide Number Placeholder 0"/>
+          <p:cNvSpPr>
+            <a:spLocks noGrp="1"/>
+          </p:cNvSpPr>
+          <p:nvPr>
+            <p:ph type="sldNum" sz="quarter" idx="4294967295"/>
+          </p:nvPr>
+        </p:nvSpPr>
+        <p:spPr>
+          <a:xfrm>
+            <a:off x="8092440" y="4736592"/>
+            <a:ext cx="548640" cy="228600"/>
+          </a:xfrm>
+          <a:prstGeom prst="rect">
+            <a:avLst/>
+          </a:prstGeom>
+          <a:extLst>
+            <a:ext uri="{C572A759-6A51-4108-AA02-DFA0A04FC94B}">
+              <ma14:wrappingTextBoxFlag xmlns:ma14="http://schemas.microsoft.com/office/mac/drawingml/2011/main" xmlns="" val="0"/>
+            </a:ext>
+          </a:extLst>
+        </p:spPr>
+        <p:txBody>
+          <a:bodyPr/>
+          <a:lstStyle>
+            <a:lvl1pPr>
+              <a:defRPr sz="800">
+                <a:solidFill>
+                  <a:srgbClr val="6B7585"/>
+                </a:solidFill>
+              </a:defRPr>
+            </a:lvl1pPr>
+          </a:lstStyle>
+          <a:p>
+            <a:pPr algn="r"/>
+            <a:fld id="{F7021451-1387-4CA6-816F-3879F97B5CBC}" type="slidenum">
+              <a:rPr lang="en-US" b="0"/>
+              <a:t>11</a:t>
+            </a:fld>
+            <a:endParaRPr lang="en-US"/>
+          </a:p>
+        </p:txBody>
+      </p:sp>
+      <p:pic>
+        <p:nvPicPr>
+          <p:cNvPr id="26" name="cts logo" descr="cts-logo.png"/>
+          <p:cNvPicPr>
+            <a:picLocks noChangeAspect="1"/>
+          </p:cNvPicPr>
+          <p:nvPr/>
+        </p:nvPicPr>
+        <p:blipFill>
+          <a:blip r:embed="rId4"/>
+          <a:stretch>
+            <a:fillRect/>
+          </a:stretch>
+        </p:blipFill>
+        <p:spPr>
+          <a:xfrm>
+            <a:off x="7680959" y="182880"/>
+            <a:ext cx="960120" cy="539696"/>
+          </a:xfrm>
+          <a:prstGeom prst="rect">
+            <a:avLst/>
+          </a:prstGeom>
+        </p:spPr>
+      </p:pic>
+      <p:sp>
+        <p:nvSpPr>
+          <p:cNvPr id="8" name="Text 5b"/>
+          <p:cNvSpPr txBox="1"/>
+          <p:nvPr/>
+        </p:nvSpPr>
+        <p:spPr>
+          <a:xfrm>
+            <a:off x="4663440" y="3881936"/>
+            <a:ext cx="3703320" cy="717495"/>
+          </a:xfrm>
+          <a:prstGeom prst="rect">
+            <a:avLst/>
+          </a:prstGeom>
+          <a:noFill/>
+          <a:ln/>
+        </p:spPr>
+        <p:txBody>
+          <a:bodyPr wrap="square" lIns="0" tIns="0" rIns="0" bIns="0" rtlCol="0" anchor="t">
+            <a:normAutofit/>
+          </a:bodyPr>
+          <a:lstStyle/>
           <a:p>
             <a:pPr marL="342900" indent="-342900">
               <a:lnSpc>
@@ -5872,7 +5989,7 @@
               <a:buChar char="•"/>
             </a:pPr>
             <a:r>
-              <a:rPr lang="en-US" sz="950">
+              <a:rPr lang="en-US" sz="700">
                 <a:solidFill>
                   <a:srgbClr val="3A4453"/>
                 </a:solidFill>
@@ -5893,7 +6010,7 @@
               <a:buChar char="•"/>
             </a:pPr>
             <a:r>
-              <a:rPr lang="en-US" sz="950">
+              <a:rPr lang="en-US" sz="700">
                 <a:solidFill>
                   <a:srgbClr val="3A4453"/>
                 </a:solidFill>
@@ -5914,7 +6031,7 @@
               <a:buChar char="•"/>
             </a:pPr>
             <a:r>
-              <a:rPr lang="en-US" sz="950">
+              <a:rPr lang="en-US" sz="700">
                 <a:solidFill>
                   <a:srgbClr val="3A4453"/>
                 </a:solidFill>
@@ -5925,75 +6042,6 @@
           </a:p>
         </p:txBody>
       </p:sp>
-      <p:sp>
-        <p:nvSpPr>
-          <p:cNvPr id="25" name="Slide Number Placeholder 0"/>
-          <p:cNvSpPr>
-            <a:spLocks noGrp="1"/>
-          </p:cNvSpPr>
-          <p:nvPr>
-            <p:ph type="sldNum" sz="quarter" idx="4294967295"/>
-          </p:nvPr>
-        </p:nvSpPr>
-        <p:spPr>
-          <a:xfrm>
-            <a:off x="8092440" y="4736592"/>
-            <a:ext cx="548640" cy="228600"/>
-          </a:xfrm>
-          <a:prstGeom prst="rect">
-            <a:avLst/>
-          </a:prstGeom>
-          <a:extLst>
-            <a:ext uri="{C572A759-6A51-4108-AA02-DFA0A04FC94B}">
-              <ma14:wrappingTextBoxFlag xmlns:ma14="http://schemas.microsoft.com/office/mac/drawingml/2011/main" xmlns="" val="0"/>
-            </a:ext>
-          </a:extLst>
-        </p:spPr>
-        <p:txBody>
-          <a:bodyPr/>
-          <a:lstStyle>
-            <a:lvl1pPr>
-              <a:defRPr sz="800">
-                <a:solidFill>
-                  <a:srgbClr val="6B7585"/>
-                </a:solidFill>
-              </a:defRPr>
-            </a:lvl1pPr>
-          </a:lstStyle>
-          <a:p>
-            <a:pPr algn="r"/>
-            <a:fld id="{F7021451-1387-4CA6-816F-3879F97B5CBC}" type="slidenum">
-              <a:rPr lang="en-US" b="0"/>
-              <a:t>11</a:t>
-            </a:fld>
-            <a:endParaRPr lang="en-US"/>
-          </a:p>
-        </p:txBody>
-      </p:sp>
-      <p:pic>
-        <p:nvPicPr>
-          <p:cNvPr id="26" name="cts logo" descr="cts-logo.png"/>
-          <p:cNvPicPr>
-            <a:picLocks noChangeAspect="1"/>
-          </p:cNvPicPr>
-          <p:nvPr/>
-        </p:nvPicPr>
-        <p:blipFill>
-          <a:blip r:embed="rId4"/>
-          <a:stretch>
-            <a:fillRect/>
-          </a:stretch>
-        </p:blipFill>
-        <p:spPr>
-          <a:xfrm>
-            <a:off x="7680959" y="182880"/>
-            <a:ext cx="960120" cy="539696"/>
-          </a:xfrm>
-          <a:prstGeom prst="rect">
-            <a:avLst/>
-          </a:prstGeom>
-        </p:spPr>
-      </p:pic>
     </p:spTree>
   </p:cSld>
   <p:clrMapOvr>
@@ -6019,102 +6067,102 @@
           <a:chExt cx="0" cy="0"/>
         </a:xfrm>
       </p:grpSpPr>
-      <p:sp>
-        <p:nvSpPr>
-          <p:cNvPr id="2" name="Text 0"/>
-          <p:cNvSpPr txBox="1"/>
-          <p:nvPr/>
-        </p:nvSpPr>
-        <p:spPr>
-          <a:xfrm>
-            <a:off x="502920" y="365760"/>
-            <a:ext cx="6400800" cy="274320"/>
-          </a:xfrm>
-          <a:prstGeom prst="rect">
-            <a:avLst/>
-          </a:prstGeom>
-          <a:noFill/>
-          <a:ln/>
-        </p:spPr>
-        <p:txBody>
-          <a:bodyPr wrap="square" lIns="0" tIns="0" rIns="0" bIns="0" rtlCol="0" anchor="ctr"/>
-          <a:lstStyle/>
-          <a:p>
-            <a:pPr marL="0" indent="0">
-              <a:buNone/>
-            </a:pPr>
-            <a:r>
-              <a:rPr lang="en-US" sz="950" b="1" kern="0" spc="220">
-                <a:solidFill>
-                  <a:srgbClr val="122B82"/>
-                </a:solidFill>
-              </a:rPr>
-              <a:t>FINANCIAL PERFORMANCE</a:t>
-            </a:r>
-            <a:endParaRPr lang="en-US" sz="950"/>
-          </a:p>
-        </p:txBody>
-      </p:sp>
-      <p:sp>
-        <p:nvSpPr>
-          <p:cNvPr id="3" name="Text 1"/>
-          <p:cNvSpPr txBox="1"/>
-          <p:nvPr/>
-        </p:nvSpPr>
-        <p:spPr>
-          <a:xfrm>
-            <a:off x="502920" y="640080"/>
-            <a:ext cx="7315200" cy="685800"/>
-          </a:xfrm>
-          <a:prstGeom prst="rect">
-            <a:avLst/>
-          </a:prstGeom>
-          <a:noFill/>
-          <a:ln/>
-        </p:spPr>
-        <p:txBody>
-          <a:bodyPr wrap="square" lIns="0" tIns="0" rIns="0" bIns="0" rtlCol="0" anchor="ctr"/>
-          <a:lstStyle/>
-          <a:p>
-            <a:pPr marL="0" indent="0">
-              <a:buNone/>
-            </a:pPr>
-            <a:r>
-              <a:rPr lang="en-US" sz="2700" b="1">
-                <a:solidFill>
-                  <a:srgbClr val="242C39"/>
-                </a:solidFill>
-              </a:rPr>
-              <a:t>Integration, Sep 26</a:t>
-            </a:r>
-            <a:endParaRPr lang="en-US" sz="2700"/>
-          </a:p>
-        </p:txBody>
-      </p:sp>
       <p:pic>
         <p:nvPicPr>
-          <p:cNvPr id="4" name="snip dept_Integration" descr="/home/user/Claude/deck/snips/dept_Integration.png"/>
+          <p:cNvPr id="27" name="snip dept_Integration" descr="dept_Integration.png"/>
           <p:cNvPicPr>
             <a:picLocks noChangeAspect="1"/>
           </p:cNvPicPr>
           <p:nvPr/>
         </p:nvPicPr>
         <p:blipFill>
-          <a:blip r:embed="rId3"/>
+          <a:blip r:embed="rId5"/>
           <a:stretch>
             <a:fillRect/>
           </a:stretch>
         </p:blipFill>
         <p:spPr>
           <a:xfrm>
-            <a:off x="502920" y="1444752"/>
-            <a:ext cx="5577840" cy="2594047"/>
+            <a:off x="502920" y="1115568"/>
+            <a:ext cx="8138160" cy="2409752"/>
           </a:xfrm>
           <a:prstGeom prst="rect">
             <a:avLst/>
           </a:prstGeom>
         </p:spPr>
       </p:pic>
+      <p:sp>
+        <p:nvSpPr>
+          <p:cNvPr id="2" name="Text 0"/>
+          <p:cNvSpPr txBox="1"/>
+          <p:nvPr/>
+        </p:nvSpPr>
+        <p:spPr>
+          <a:xfrm>
+            <a:off x="502920" y="365760"/>
+            <a:ext cx="6400800" cy="274320"/>
+          </a:xfrm>
+          <a:prstGeom prst="rect">
+            <a:avLst/>
+          </a:prstGeom>
+          <a:noFill/>
+          <a:ln/>
+        </p:spPr>
+        <p:txBody>
+          <a:bodyPr wrap="square" lIns="0" tIns="0" rIns="0" bIns="0" rtlCol="0" anchor="ctr"/>
+          <a:lstStyle/>
+          <a:p>
+            <a:pPr marL="0" indent="0">
+              <a:buNone/>
+            </a:pPr>
+            <a:r>
+              <a:rPr lang="en-US" sz="950" b="1" kern="0" spc="220">
+                <a:solidFill>
+                  <a:srgbClr val="122B82"/>
+                </a:solidFill>
+              </a:rPr>
+              <a:t>FINANCIAL PERFORMANCE</a:t>
+            </a:r>
+            <a:endParaRPr lang="en-US" sz="950"/>
+          </a:p>
+        </p:txBody>
+      </p:sp>
+      <p:sp>
+        <p:nvSpPr>
+          <p:cNvPr id="3" name="Text 1"/>
+          <p:cNvSpPr txBox="1"/>
+          <p:nvPr/>
+        </p:nvSpPr>
+        <p:spPr>
+          <a:xfrm>
+            <a:off x="502920" y="640080"/>
+            <a:ext cx="7315200" cy="685800"/>
+          </a:xfrm>
+          <a:prstGeom prst="rect">
+            <a:avLst/>
+          </a:prstGeom>
+          <a:noFill/>
+          <a:ln/>
+        </p:spPr>
+        <p:txBody>
+          <a:bodyPr wrap="square" lIns="0" tIns="0" rIns="0" bIns="0" rtlCol="0" anchor="ctr"/>
+          <a:lstStyle/>
+          <a:p>
+            <a:pPr marL="0" indent="0">
+              <a:buNone/>
+            </a:pPr>
+            <a:r>
+              <a:rPr lang="en-US" sz="2700" b="1">
+                <a:solidFill>
+                  <a:srgbClr val="242C39"/>
+                </a:solidFill>
+              </a:rPr>
+              <a:t>Integration, Sep 26</a:t>
+            </a:r>
+            <a:endParaRPr lang="en-US" sz="2700"/>
+          </a:p>
+        </p:txBody>
+      </p:sp>
       <p:sp>
         <p:nvSpPr>
           <p:cNvPr id="6" name="commentary panel"/>
@@ -6123,8 +6171,8 @@
         </p:nvSpPr>
         <p:spPr>
           <a:xfrm>
-            <a:off x="6263640" y="1463040"/>
-            <a:ext cx="2377440" cy="3154680"/>
+            <a:off x="502920" y="3635048"/>
+            <a:ext cx="8138160" cy="991815"/>
           </a:xfrm>
           <a:prstGeom prst="rect">
             <a:avLst/>
@@ -6150,8 +6198,8 @@
         </p:nvSpPr>
         <p:spPr>
           <a:xfrm>
-            <a:off x="6446520" y="1627632"/>
-            <a:ext cx="2011680" cy="228600"/>
+            <a:off x="685800" y="3708200"/>
+            <a:ext cx="2743200" cy="228600"/>
           </a:xfrm>
           <a:prstGeom prst="rect">
             <a:avLst/>
@@ -6186,8 +6234,8 @@
         </p:nvSpPr>
         <p:spPr>
           <a:xfrm>
-            <a:off x="6446520" y="1901952"/>
-            <a:ext cx="2011680" cy="2551176"/>
+            <a:off x="685800" y="3881936"/>
+            <a:ext cx="3703320" cy="717495"/>
           </a:xfrm>
           <a:prstGeom prst="rect">
             <a:avLst/>
@@ -6212,7 +6260,7 @@
               <a:buChar char="•"/>
             </a:pPr>
             <a:r>
-              <a:rPr lang="en-US" sz="900">
+              <a:rPr lang="en-US" sz="700">
                 <a:solidFill>
                   <a:srgbClr val="3A4453"/>
                 </a:solidFill>
@@ -6233,7 +6281,7 @@
               <a:buChar char="•"/>
             </a:pPr>
             <a:r>
-              <a:rPr lang="en-US" sz="900">
+              <a:rPr lang="en-US" sz="700">
                 <a:solidFill>
                   <a:srgbClr val="3A4453"/>
                 </a:solidFill>
@@ -6242,6 +6290,99 @@
             </a:r>
             <a:endParaRPr lang="en-US" sz="900"/>
           </a:p>
+        </p:txBody>
+      </p:sp>
+      <p:sp>
+        <p:nvSpPr>
+          <p:cNvPr id="25" name="Slide Number Placeholder 0"/>
+          <p:cNvSpPr>
+            <a:spLocks noGrp="1"/>
+          </p:cNvSpPr>
+          <p:nvPr>
+            <p:ph type="sldNum" sz="quarter" idx="4294967295"/>
+          </p:nvPr>
+        </p:nvSpPr>
+        <p:spPr>
+          <a:xfrm>
+            <a:off x="8092440" y="4736592"/>
+            <a:ext cx="548640" cy="228600"/>
+          </a:xfrm>
+          <a:prstGeom prst="rect">
+            <a:avLst/>
+          </a:prstGeom>
+          <a:extLst>
+            <a:ext uri="{C572A759-6A51-4108-AA02-DFA0A04FC94B}">
+              <ma14:wrappingTextBoxFlag xmlns:ma14="http://schemas.microsoft.com/office/mac/drawingml/2011/main" xmlns="" val="0"/>
+            </a:ext>
+          </a:extLst>
+        </p:spPr>
+        <p:txBody>
+          <a:bodyPr/>
+          <a:lstStyle>
+            <a:lvl1pPr>
+              <a:defRPr sz="800">
+                <a:solidFill>
+                  <a:srgbClr val="6B7585"/>
+                </a:solidFill>
+              </a:defRPr>
+            </a:lvl1pPr>
+          </a:lstStyle>
+          <a:p>
+            <a:pPr algn="r"/>
+            <a:fld id="{F7021451-1387-4CA6-816F-3879F97B5CBC}" type="slidenum">
+              <a:rPr lang="en-US" b="0"/>
+              <a:t>12</a:t>
+            </a:fld>
+            <a:endParaRPr lang="en-US"/>
+          </a:p>
+        </p:txBody>
+      </p:sp>
+      <p:pic>
+        <p:nvPicPr>
+          <p:cNvPr id="26" name="cts logo" descr="cts-logo.png"/>
+          <p:cNvPicPr>
+            <a:picLocks noChangeAspect="1"/>
+          </p:cNvPicPr>
+          <p:nvPr/>
+        </p:nvPicPr>
+        <p:blipFill>
+          <a:blip r:embed="rId4"/>
+          <a:stretch>
+            <a:fillRect/>
+          </a:stretch>
+        </p:blipFill>
+        <p:spPr>
+          <a:xfrm>
+            <a:off x="7680959" y="182880"/>
+            <a:ext cx="960120" cy="539696"/>
+          </a:xfrm>
+          <a:prstGeom prst="rect">
+            <a:avLst/>
+          </a:prstGeom>
+        </p:spPr>
+      </p:pic>
+      <p:sp>
+        <p:nvSpPr>
+          <p:cNvPr id="8" name="Text 5b"/>
+          <p:cNvSpPr txBox="1"/>
+          <p:nvPr/>
+        </p:nvSpPr>
+        <p:spPr>
+          <a:xfrm>
+            <a:off x="4663440" y="3881936"/>
+            <a:ext cx="3703320" cy="717495"/>
+          </a:xfrm>
+          <a:prstGeom prst="rect">
+            <a:avLst/>
+          </a:prstGeom>
+          <a:noFill/>
+          <a:ln/>
+        </p:spPr>
+        <p:txBody>
+          <a:bodyPr wrap="square" lIns="0" tIns="0" rIns="0" bIns="0" rtlCol="0" anchor="t">
+            <a:normAutofit fontScale="92500"/>
+          </a:bodyPr>
+          <a:lstStyle/>
           <a:p>
             <a:pPr marL="342900" indent="-342900">
               <a:lnSpc>
@@ -6254,7 +6395,7 @@
               <a:buChar char="•"/>
             </a:pPr>
             <a:r>
-              <a:rPr lang="en-US" sz="900">
+              <a:rPr lang="en-US" sz="700">
                 <a:solidFill>
                   <a:srgbClr val="3A4453"/>
                 </a:solidFill>
@@ -6275,7 +6416,7 @@
               <a:buChar char="•"/>
             </a:pPr>
             <a:r>
-              <a:rPr lang="en-US" sz="900">
+              <a:rPr lang="en-US" sz="700">
                 <a:solidFill>
                   <a:srgbClr val="3A4453"/>
                 </a:solidFill>
@@ -6296,7 +6437,7 @@
               <a:buChar char="•"/>
             </a:pPr>
             <a:r>
-              <a:rPr lang="en-US" sz="900">
+              <a:rPr lang="en-US" sz="700">
                 <a:solidFill>
                   <a:srgbClr val="3A4453"/>
                 </a:solidFill>
@@ -6307,75 +6448,6 @@
           </a:p>
         </p:txBody>
       </p:sp>
-      <p:sp>
-        <p:nvSpPr>
-          <p:cNvPr id="25" name="Slide Number Placeholder 0"/>
-          <p:cNvSpPr>
-            <a:spLocks noGrp="1"/>
-          </p:cNvSpPr>
-          <p:nvPr>
-            <p:ph type="sldNum" sz="quarter" idx="4294967295"/>
-          </p:nvPr>
-        </p:nvSpPr>
-        <p:spPr>
-          <a:xfrm>
-            <a:off x="8092440" y="4736592"/>
-            <a:ext cx="548640" cy="228600"/>
-          </a:xfrm>
-          <a:prstGeom prst="rect">
-            <a:avLst/>
-          </a:prstGeom>
-          <a:extLst>
-            <a:ext uri="{C572A759-6A51-4108-AA02-DFA0A04FC94B}">
-              <ma14:wrappingTextBoxFlag xmlns:ma14="http://schemas.microsoft.com/office/mac/drawingml/2011/main" xmlns="" val="0"/>
-            </a:ext>
-          </a:extLst>
-        </p:spPr>
-        <p:txBody>
-          <a:bodyPr/>
-          <a:lstStyle>
-            <a:lvl1pPr>
-              <a:defRPr sz="800">
-                <a:solidFill>
-                  <a:srgbClr val="6B7585"/>
-                </a:solidFill>
-              </a:defRPr>
-            </a:lvl1pPr>
-          </a:lstStyle>
-          <a:p>
-            <a:pPr algn="r"/>
-            <a:fld id="{F7021451-1387-4CA6-816F-3879F97B5CBC}" type="slidenum">
-              <a:rPr lang="en-US" b="0"/>
-              <a:t>12</a:t>
-            </a:fld>
-            <a:endParaRPr lang="en-US"/>
-          </a:p>
-        </p:txBody>
-      </p:sp>
-      <p:pic>
-        <p:nvPicPr>
-          <p:cNvPr id="26" name="cts logo" descr="cts-logo.png"/>
-          <p:cNvPicPr>
-            <a:picLocks noChangeAspect="1"/>
-          </p:cNvPicPr>
-          <p:nvPr/>
-        </p:nvPicPr>
-        <p:blipFill>
-          <a:blip r:embed="rId4"/>
-          <a:stretch>
-            <a:fillRect/>
-          </a:stretch>
-        </p:blipFill>
-        <p:spPr>
-          <a:xfrm>
-            <a:off x="7680959" y="182880"/>
-            <a:ext cx="960120" cy="539696"/>
-          </a:xfrm>
-          <a:prstGeom prst="rect">
-            <a:avLst/>
-          </a:prstGeom>
-        </p:spPr>
-      </p:pic>
     </p:spTree>
   </p:cSld>
   <p:clrMapOvr>
@@ -6401,102 +6473,102 @@
           <a:chExt cx="0" cy="0"/>
         </a:xfrm>
       </p:grpSpPr>
-      <p:sp>
-        <p:nvSpPr>
-          <p:cNvPr id="2" name="Text 0"/>
-          <p:cNvSpPr txBox="1"/>
-          <p:nvPr/>
-        </p:nvSpPr>
-        <p:spPr>
-          <a:xfrm>
-            <a:off x="502920" y="365760"/>
-            <a:ext cx="6400800" cy="274320"/>
-          </a:xfrm>
-          <a:prstGeom prst="rect">
-            <a:avLst/>
-          </a:prstGeom>
-          <a:noFill/>
-          <a:ln/>
-        </p:spPr>
-        <p:txBody>
-          <a:bodyPr wrap="square" lIns="0" tIns="0" rIns="0" bIns="0" rtlCol="0" anchor="ctr"/>
-          <a:lstStyle/>
-          <a:p>
-            <a:pPr marL="0" indent="0">
-              <a:buNone/>
-            </a:pPr>
-            <a:r>
-              <a:rPr lang="en-US" sz="950" b="1" kern="0" spc="220">
-                <a:solidFill>
-                  <a:srgbClr val="122B82"/>
-                </a:solidFill>
-              </a:rPr>
-              <a:t>FINANCIAL PERFORMANCE</a:t>
-            </a:r>
-            <a:endParaRPr lang="en-US" sz="950"/>
-          </a:p>
-        </p:txBody>
-      </p:sp>
-      <p:sp>
-        <p:nvSpPr>
-          <p:cNvPr id="3" name="Text 1"/>
-          <p:cNvSpPr txBox="1"/>
-          <p:nvPr/>
-        </p:nvSpPr>
-        <p:spPr>
-          <a:xfrm>
-            <a:off x="502920" y="640080"/>
-            <a:ext cx="7315200" cy="685800"/>
-          </a:xfrm>
-          <a:prstGeom prst="rect">
-            <a:avLst/>
-          </a:prstGeom>
-          <a:noFill/>
-          <a:ln/>
-        </p:spPr>
-        <p:txBody>
-          <a:bodyPr wrap="square" lIns="0" tIns="0" rIns="0" bIns="0" rtlCol="0" anchor="ctr"/>
-          <a:lstStyle/>
-          <a:p>
-            <a:pPr marL="0" indent="0">
-              <a:buNone/>
-            </a:pPr>
-            <a:r>
-              <a:rPr lang="en-US" sz="2700" b="1">
-                <a:solidFill>
-                  <a:srgbClr val="242C39"/>
-                </a:solidFill>
-              </a:rPr>
-              <a:t>Consulting, Sep 26</a:t>
-            </a:r>
-            <a:endParaRPr lang="en-US" sz="2700"/>
-          </a:p>
-        </p:txBody>
-      </p:sp>
       <p:pic>
         <p:nvPicPr>
-          <p:cNvPr id="4" name="snip dept_Consulting" descr="/home/user/Claude/deck/snips/dept_Consulting.png"/>
+          <p:cNvPr id="27" name="snip dept_Consulting" descr="dept_Consulting.png"/>
           <p:cNvPicPr>
             <a:picLocks noChangeAspect="1"/>
           </p:cNvPicPr>
           <p:nvPr/>
         </p:nvPicPr>
         <p:blipFill>
-          <a:blip r:embed="rId3"/>
+          <a:blip r:embed="rId5"/>
           <a:stretch>
             <a:fillRect/>
           </a:stretch>
         </p:blipFill>
         <p:spPr>
           <a:xfrm>
-            <a:off x="502920" y="1444752"/>
-            <a:ext cx="5577840" cy="2594047"/>
+            <a:off x="502920" y="1115568"/>
+            <a:ext cx="8138160" cy="2409752"/>
           </a:xfrm>
           <a:prstGeom prst="rect">
             <a:avLst/>
           </a:prstGeom>
         </p:spPr>
       </p:pic>
+      <p:sp>
+        <p:nvSpPr>
+          <p:cNvPr id="2" name="Text 0"/>
+          <p:cNvSpPr txBox="1"/>
+          <p:nvPr/>
+        </p:nvSpPr>
+        <p:spPr>
+          <a:xfrm>
+            <a:off x="502920" y="365760"/>
+            <a:ext cx="6400800" cy="274320"/>
+          </a:xfrm>
+          <a:prstGeom prst="rect">
+            <a:avLst/>
+          </a:prstGeom>
+          <a:noFill/>
+          <a:ln/>
+        </p:spPr>
+        <p:txBody>
+          <a:bodyPr wrap="square" lIns="0" tIns="0" rIns="0" bIns="0" rtlCol="0" anchor="ctr"/>
+          <a:lstStyle/>
+          <a:p>
+            <a:pPr marL="0" indent="0">
+              <a:buNone/>
+            </a:pPr>
+            <a:r>
+              <a:rPr lang="en-US" sz="950" b="1" kern="0" spc="220">
+                <a:solidFill>
+                  <a:srgbClr val="122B82"/>
+                </a:solidFill>
+              </a:rPr>
+              <a:t>FINANCIAL PERFORMANCE</a:t>
+            </a:r>
+            <a:endParaRPr lang="en-US" sz="950"/>
+          </a:p>
+        </p:txBody>
+      </p:sp>
+      <p:sp>
+        <p:nvSpPr>
+          <p:cNvPr id="3" name="Text 1"/>
+          <p:cNvSpPr txBox="1"/>
+          <p:nvPr/>
+        </p:nvSpPr>
+        <p:spPr>
+          <a:xfrm>
+            <a:off x="502920" y="640080"/>
+            <a:ext cx="7315200" cy="685800"/>
+          </a:xfrm>
+          <a:prstGeom prst="rect">
+            <a:avLst/>
+          </a:prstGeom>
+          <a:noFill/>
+          <a:ln/>
+        </p:spPr>
+        <p:txBody>
+          <a:bodyPr wrap="square" lIns="0" tIns="0" rIns="0" bIns="0" rtlCol="0" anchor="ctr"/>
+          <a:lstStyle/>
+          <a:p>
+            <a:pPr marL="0" indent="0">
+              <a:buNone/>
+            </a:pPr>
+            <a:r>
+              <a:rPr lang="en-US" sz="2700" b="1">
+                <a:solidFill>
+                  <a:srgbClr val="242C39"/>
+                </a:solidFill>
+              </a:rPr>
+              <a:t>Consulting, Sep 26</a:t>
+            </a:r>
+            <a:endParaRPr lang="en-US" sz="2700"/>
+          </a:p>
+        </p:txBody>
+      </p:sp>
       <p:sp>
         <p:nvSpPr>
           <p:cNvPr id="6" name="commentary panel"/>
@@ -6505,8 +6577,8 @@
         </p:nvSpPr>
         <p:spPr>
           <a:xfrm>
-            <a:off x="6263640" y="1463040"/>
-            <a:ext cx="2377440" cy="3154680"/>
+            <a:off x="502920" y="3635048"/>
+            <a:ext cx="8138160" cy="991815"/>
           </a:xfrm>
           <a:prstGeom prst="rect">
             <a:avLst/>
@@ -6532,8 +6604,8 @@
         </p:nvSpPr>
         <p:spPr>
           <a:xfrm>
-            <a:off x="6446520" y="1627632"/>
-            <a:ext cx="2011680" cy="228600"/>
+            <a:off x="685800" y="3708200"/>
+            <a:ext cx="2743200" cy="228600"/>
           </a:xfrm>
           <a:prstGeom prst="rect">
             <a:avLst/>
@@ -6568,8 +6640,8 @@
         </p:nvSpPr>
         <p:spPr>
           <a:xfrm>
-            <a:off x="6446520" y="1901952"/>
-            <a:ext cx="2011680" cy="2551176"/>
+            <a:off x="685800" y="3881936"/>
+            <a:ext cx="3703320" cy="717495"/>
           </a:xfrm>
           <a:prstGeom prst="rect">
             <a:avLst/>
@@ -6594,7 +6666,7 @@
               <a:buChar char="•"/>
             </a:pPr>
             <a:r>
-              <a:rPr lang="en-US" sz="950">
+              <a:rPr lang="en-US" sz="750">
                 <a:solidFill>
                   <a:srgbClr val="3A4453"/>
                 </a:solidFill>
@@ -6615,7 +6687,7 @@
               <a:buChar char="•"/>
             </a:pPr>
             <a:r>
-              <a:rPr lang="en-US" sz="950">
+              <a:rPr lang="en-US" sz="750">
                 <a:solidFill>
                   <a:srgbClr val="3A4453"/>
                 </a:solidFill>
@@ -6624,6 +6696,99 @@
             </a:r>
             <a:endParaRPr lang="en-US" sz="950"/>
           </a:p>
+        </p:txBody>
+      </p:sp>
+      <p:sp>
+        <p:nvSpPr>
+          <p:cNvPr id="25" name="Slide Number Placeholder 0"/>
+          <p:cNvSpPr>
+            <a:spLocks noGrp="1"/>
+          </p:cNvSpPr>
+          <p:nvPr>
+            <p:ph type="sldNum" sz="quarter" idx="4294967295"/>
+          </p:nvPr>
+        </p:nvSpPr>
+        <p:spPr>
+          <a:xfrm>
+            <a:off x="8092440" y="4736592"/>
+            <a:ext cx="548640" cy="228600"/>
+          </a:xfrm>
+          <a:prstGeom prst="rect">
+            <a:avLst/>
+          </a:prstGeom>
+          <a:extLst>
+            <a:ext uri="{C572A759-6A51-4108-AA02-DFA0A04FC94B}">
+              <ma14:wrappingTextBoxFlag xmlns:ma14="http://schemas.microsoft.com/office/mac/drawingml/2011/main" xmlns="" val="0"/>
+            </a:ext>
+          </a:extLst>
+        </p:spPr>
+        <p:txBody>
+          <a:bodyPr/>
+          <a:lstStyle>
+            <a:lvl1pPr>
+              <a:defRPr sz="800">
+                <a:solidFill>
+                  <a:srgbClr val="6B7585"/>
+                </a:solidFill>
+              </a:defRPr>
+            </a:lvl1pPr>
+          </a:lstStyle>
+          <a:p>
+            <a:pPr algn="r"/>
+            <a:fld id="{F7021451-1387-4CA6-816F-3879F97B5CBC}" type="slidenum">
+              <a:rPr lang="en-US" b="0"/>
+              <a:t>13</a:t>
+            </a:fld>
+            <a:endParaRPr lang="en-US"/>
+          </a:p>
+        </p:txBody>
+      </p:sp>
+      <p:pic>
+        <p:nvPicPr>
+          <p:cNvPr id="26" name="cts logo" descr="cts-logo.png"/>
+          <p:cNvPicPr>
+            <a:picLocks noChangeAspect="1"/>
+          </p:cNvPicPr>
+          <p:nvPr/>
+        </p:nvPicPr>
+        <p:blipFill>
+          <a:blip r:embed="rId4"/>
+          <a:stretch>
+            <a:fillRect/>
+          </a:stretch>
+        </p:blipFill>
+        <p:spPr>
+          <a:xfrm>
+            <a:off x="7680959" y="182880"/>
+            <a:ext cx="960120" cy="539696"/>
+          </a:xfrm>
+          <a:prstGeom prst="rect">
+            <a:avLst/>
+          </a:prstGeom>
+        </p:spPr>
+      </p:pic>
+      <p:sp>
+        <p:nvSpPr>
+          <p:cNvPr id="8" name="Text 5b"/>
+          <p:cNvSpPr txBox="1"/>
+          <p:nvPr/>
+        </p:nvSpPr>
+        <p:spPr>
+          <a:xfrm>
+            <a:off x="4663440" y="3881936"/>
+            <a:ext cx="3703320" cy="717495"/>
+          </a:xfrm>
+          <a:prstGeom prst="rect">
+            <a:avLst/>
+          </a:prstGeom>
+          <a:noFill/>
+          <a:ln/>
+        </p:spPr>
+        <p:txBody>
+          <a:bodyPr wrap="square" lIns="0" tIns="0" rIns="0" bIns="0" rtlCol="0" anchor="t">
+            <a:normAutofit fontScale="85000" lnSpcReduction="10000"/>
+          </a:bodyPr>
+          <a:lstStyle/>
           <a:p>
             <a:pPr marL="342900" indent="-342900">
               <a:lnSpc>
@@ -6636,7 +6801,7 @@
               <a:buChar char="•"/>
             </a:pPr>
             <a:r>
-              <a:rPr lang="en-US" sz="950">
+              <a:rPr lang="en-US" sz="750">
                 <a:solidFill>
                   <a:srgbClr val="3A4453"/>
                 </a:solidFill>
@@ -6657,7 +6822,7 @@
               <a:buChar char="•"/>
             </a:pPr>
             <a:r>
-              <a:rPr lang="en-US" sz="950">
+              <a:rPr lang="en-US" sz="750">
                 <a:solidFill>
                   <a:srgbClr val="3A4453"/>
                 </a:solidFill>
@@ -6678,7 +6843,7 @@
               <a:buChar char="•"/>
             </a:pPr>
             <a:r>
-              <a:rPr lang="en-US" sz="950">
+              <a:rPr lang="en-US" sz="750">
                 <a:solidFill>
                   <a:srgbClr val="3A4453"/>
                 </a:solidFill>
@@ -6689,75 +6854,6 @@
           </a:p>
         </p:txBody>
       </p:sp>
-      <p:sp>
-        <p:nvSpPr>
-          <p:cNvPr id="25" name="Slide Number Placeholder 0"/>
-          <p:cNvSpPr>
-            <a:spLocks noGrp="1"/>
-          </p:cNvSpPr>
-          <p:nvPr>
-            <p:ph type="sldNum" sz="quarter" idx="4294967295"/>
-          </p:nvPr>
-        </p:nvSpPr>
-        <p:spPr>
-          <a:xfrm>
-            <a:off x="8092440" y="4736592"/>
-            <a:ext cx="548640" cy="228600"/>
-          </a:xfrm>
-          <a:prstGeom prst="rect">
-            <a:avLst/>
-          </a:prstGeom>
-          <a:extLst>
-            <a:ext uri="{C572A759-6A51-4108-AA02-DFA0A04FC94B}">
-              <ma14:wrappingTextBoxFlag xmlns:ma14="http://schemas.microsoft.com/office/mac/drawingml/2011/main" xmlns="" val="0"/>
-            </a:ext>
-          </a:extLst>
-        </p:spPr>
-        <p:txBody>
-          <a:bodyPr/>
-          <a:lstStyle>
-            <a:lvl1pPr>
-              <a:defRPr sz="800">
-                <a:solidFill>
-                  <a:srgbClr val="6B7585"/>
-                </a:solidFill>
-              </a:defRPr>
-            </a:lvl1pPr>
-          </a:lstStyle>
-          <a:p>
-            <a:pPr algn="r"/>
-            <a:fld id="{F7021451-1387-4CA6-816F-3879F97B5CBC}" type="slidenum">
-              <a:rPr lang="en-US" b="0"/>
-              <a:t>13</a:t>
-            </a:fld>
-            <a:endParaRPr lang="en-US"/>
-          </a:p>
-        </p:txBody>
-      </p:sp>
-      <p:pic>
-        <p:nvPicPr>
-          <p:cNvPr id="26" name="cts logo" descr="cts-logo.png"/>
-          <p:cNvPicPr>
-            <a:picLocks noChangeAspect="1"/>
-          </p:cNvPicPr>
-          <p:nvPr/>
-        </p:nvPicPr>
-        <p:blipFill>
-          <a:blip r:embed="rId4"/>
-          <a:stretch>
-            <a:fillRect/>
-          </a:stretch>
-        </p:blipFill>
-        <p:spPr>
-          <a:xfrm>
-            <a:off x="7680959" y="182880"/>
-            <a:ext cx="960120" cy="539696"/>
-          </a:xfrm>
-          <a:prstGeom prst="rect">
-            <a:avLst/>
-          </a:prstGeom>
-        </p:spPr>
-      </p:pic>
     </p:spTree>
   </p:cSld>
   <p:clrMapOvr>
@@ -6783,81 +6879,9 @@
           <a:chExt cx="0" cy="0"/>
         </a:xfrm>
       </p:grpSpPr>
-      <p:sp>
-        <p:nvSpPr>
-          <p:cNvPr id="2" name="Text 0"/>
-          <p:cNvSpPr txBox="1"/>
-          <p:nvPr/>
-        </p:nvSpPr>
-        <p:spPr>
-          <a:xfrm>
-            <a:off x="502920" y="365760"/>
-            <a:ext cx="6400800" cy="274320"/>
-          </a:xfrm>
-          <a:prstGeom prst="rect">
-            <a:avLst/>
-          </a:prstGeom>
-          <a:noFill/>
-          <a:ln/>
-        </p:spPr>
-        <p:txBody>
-          <a:bodyPr wrap="square" lIns="0" tIns="0" rIns="0" bIns="0" rtlCol="0" anchor="ctr"/>
-          <a:lstStyle/>
-          <a:p>
-            <a:pPr marL="0" indent="0">
-              <a:buNone/>
-            </a:pPr>
-            <a:r>
-              <a:rPr lang="en-US" sz="950" b="1" kern="0" spc="220">
-                <a:solidFill>
-                  <a:srgbClr val="122B82"/>
-                </a:solidFill>
-              </a:rPr>
-              <a:t>FINANCIAL PERFORMANCE</a:t>
-            </a:r>
-            <a:endParaRPr lang="en-US" sz="950"/>
-          </a:p>
-        </p:txBody>
-      </p:sp>
-      <p:sp>
-        <p:nvSpPr>
-          <p:cNvPr id="3" name="Text 1"/>
-          <p:cNvSpPr txBox="1"/>
-          <p:nvPr/>
-        </p:nvSpPr>
-        <p:spPr>
-          <a:xfrm>
-            <a:off x="502920" y="640080"/>
-            <a:ext cx="7315200" cy="685800"/>
-          </a:xfrm>
-          <a:prstGeom prst="rect">
-            <a:avLst/>
-          </a:prstGeom>
-          <a:noFill/>
-          <a:ln/>
-        </p:spPr>
-        <p:txBody>
-          <a:bodyPr wrap="square" lIns="0" tIns="0" rIns="0" bIns="0" rtlCol="0" anchor="ctr"/>
-          <a:lstStyle/>
-          <a:p>
-            <a:pPr marL="0" indent="0">
-              <a:buNone/>
-            </a:pPr>
-            <a:r>
-              <a:rPr lang="en-US" sz="2700" b="1">
-                <a:solidFill>
-                  <a:srgbClr val="242C39"/>
-                </a:solidFill>
-              </a:rPr>
-              <a:t>Revenue against budget and last year</a:t>
-            </a:r>
-            <a:endParaRPr lang="en-US" sz="2700"/>
-          </a:p>
-        </p:txBody>
-      </p:sp>
       <p:pic>
         <p:nvPicPr>
-          <p:cNvPr id="4" name="snip rev_by_dept" descr="/home/user/Claude/deck/snips/rev_by_dept.png"/>
+          <p:cNvPr id="27" name="snip rev_by_dept" descr="image.png"/>
           <p:cNvPicPr>
             <a:picLocks noChangeAspect="1"/>
           </p:cNvPicPr>
@@ -6871,14 +6895,86 @@
         </p:blipFill>
         <p:spPr>
           <a:xfrm>
-            <a:off x="502920" y="1444752"/>
-            <a:ext cx="5577840" cy="2392962"/>
+            <a:off x="1566715" y="1115568"/>
+            <a:ext cx="6010568" cy="2578607"/>
           </a:xfrm>
           <a:prstGeom prst="rect">
             <a:avLst/>
           </a:prstGeom>
         </p:spPr>
       </p:pic>
+      <p:sp>
+        <p:nvSpPr>
+          <p:cNvPr id="2" name="Text 0"/>
+          <p:cNvSpPr txBox="1"/>
+          <p:nvPr/>
+        </p:nvSpPr>
+        <p:spPr>
+          <a:xfrm>
+            <a:off x="502920" y="365760"/>
+            <a:ext cx="6400800" cy="274320"/>
+          </a:xfrm>
+          <a:prstGeom prst="rect">
+            <a:avLst/>
+          </a:prstGeom>
+          <a:noFill/>
+          <a:ln/>
+        </p:spPr>
+        <p:txBody>
+          <a:bodyPr wrap="square" lIns="0" tIns="0" rIns="0" bIns="0" rtlCol="0" anchor="ctr"/>
+          <a:lstStyle/>
+          <a:p>
+            <a:pPr marL="0" indent="0">
+              <a:buNone/>
+            </a:pPr>
+            <a:r>
+              <a:rPr lang="en-US" sz="950" b="1" kern="0" spc="220">
+                <a:solidFill>
+                  <a:srgbClr val="122B82"/>
+                </a:solidFill>
+              </a:rPr>
+              <a:t>FINANCIAL PERFORMANCE</a:t>
+            </a:r>
+            <a:endParaRPr lang="en-US" sz="950"/>
+          </a:p>
+        </p:txBody>
+      </p:sp>
+      <p:sp>
+        <p:nvSpPr>
+          <p:cNvPr id="3" name="Text 1"/>
+          <p:cNvSpPr txBox="1"/>
+          <p:nvPr/>
+        </p:nvSpPr>
+        <p:spPr>
+          <a:xfrm>
+            <a:off x="502920" y="640080"/>
+            <a:ext cx="7315200" cy="685800"/>
+          </a:xfrm>
+          <a:prstGeom prst="rect">
+            <a:avLst/>
+          </a:prstGeom>
+          <a:noFill/>
+          <a:ln/>
+        </p:spPr>
+        <p:txBody>
+          <a:bodyPr wrap="square" lIns="0" tIns="0" rIns="0" bIns="0" rtlCol="0" anchor="ctr"/>
+          <a:lstStyle/>
+          <a:p>
+            <a:pPr marL="0" indent="0">
+              <a:buNone/>
+            </a:pPr>
+            <a:r>
+              <a:rPr lang="en-US" sz="2700" b="1">
+                <a:solidFill>
+                  <a:srgbClr val="242C39"/>
+                </a:solidFill>
+              </a:rPr>
+              <a:t>Revenue against budget and last year</a:t>
+            </a:r>
+            <a:endParaRPr lang="en-US" sz="2700"/>
+          </a:p>
+        </p:txBody>
+      </p:sp>
       <p:sp>
         <p:nvSpPr>
           <p:cNvPr id="6" name="commentary panel"/>
@@ -6887,8 +6983,8 @@
         </p:nvSpPr>
         <p:spPr>
           <a:xfrm>
-            <a:off x="6263640" y="1463040"/>
-            <a:ext cx="2377440" cy="3154680"/>
+            <a:off x="502920" y="3803903"/>
+            <a:ext cx="8138160" cy="822960"/>
           </a:xfrm>
           <a:prstGeom prst="rect">
             <a:avLst/>
@@ -6914,8 +7010,8 @@
         </p:nvSpPr>
         <p:spPr>
           <a:xfrm>
-            <a:off x="6446520" y="1627632"/>
-            <a:ext cx="2011680" cy="228600"/>
+            <a:off x="685800" y="3877055"/>
+            <a:ext cx="2743200" cy="228600"/>
           </a:xfrm>
           <a:prstGeom prst="rect">
             <a:avLst/>
@@ -6950,8 +7046,8 @@
         </p:nvSpPr>
         <p:spPr>
           <a:xfrm>
-            <a:off x="6446520" y="1901952"/>
-            <a:ext cx="2011680" cy="2551176"/>
+            <a:off x="685800" y="4050791"/>
+            <a:ext cx="3703320" cy="548640"/>
           </a:xfrm>
           <a:prstGeom prst="rect">
             <a:avLst/>
@@ -6976,7 +7072,7 @@
               <a:buChar char="•"/>
             </a:pPr>
             <a:r>
-              <a:rPr lang="en-US" sz="850">
+              <a:rPr lang="en-US" sz="650">
                 <a:solidFill>
                   <a:srgbClr val="3A4453"/>
                 </a:solidFill>
@@ -6997,7 +7093,7 @@
               <a:buChar char="•"/>
             </a:pPr>
             <a:r>
-              <a:rPr lang="en-US" sz="850">
+              <a:rPr lang="en-US" sz="650">
                 <a:solidFill>
                   <a:srgbClr val="3A4453"/>
                 </a:solidFill>
@@ -7006,6 +7102,99 @@
             </a:r>
             <a:endParaRPr lang="en-US" sz="850"/>
           </a:p>
+        </p:txBody>
+      </p:sp>
+      <p:sp>
+        <p:nvSpPr>
+          <p:cNvPr id="25" name="Slide Number Placeholder 0"/>
+          <p:cNvSpPr>
+            <a:spLocks noGrp="1"/>
+          </p:cNvSpPr>
+          <p:nvPr>
+            <p:ph type="sldNum" sz="quarter" idx="4294967295"/>
+          </p:nvPr>
+        </p:nvSpPr>
+        <p:spPr>
+          <a:xfrm>
+            <a:off x="8092440" y="4736592"/>
+            <a:ext cx="548640" cy="228600"/>
+          </a:xfrm>
+          <a:prstGeom prst="rect">
+            <a:avLst/>
+          </a:prstGeom>
+          <a:extLst>
+            <a:ext uri="{C572A759-6A51-4108-AA02-DFA0A04FC94B}">
+              <ma14:wrappingTextBoxFlag xmlns:ma14="http://schemas.microsoft.com/office/mac/drawingml/2011/main" xmlns="" val="0"/>
+            </a:ext>
+          </a:extLst>
+        </p:spPr>
+        <p:txBody>
+          <a:bodyPr/>
+          <a:lstStyle>
+            <a:lvl1pPr>
+              <a:defRPr sz="800">
+                <a:solidFill>
+                  <a:srgbClr val="6B7585"/>
+                </a:solidFill>
+              </a:defRPr>
+            </a:lvl1pPr>
+          </a:lstStyle>
+          <a:p>
+            <a:pPr algn="r"/>
+            <a:fld id="{F7021451-1387-4CA6-816F-3879F97B5CBC}" type="slidenum">
+              <a:rPr lang="en-US" b="0"/>
+              <a:t>14</a:t>
+            </a:fld>
+            <a:endParaRPr lang="en-US"/>
+          </a:p>
+        </p:txBody>
+      </p:sp>
+      <p:pic>
+        <p:nvPicPr>
+          <p:cNvPr id="26" name="cts logo" descr="cts-logo.png"/>
+          <p:cNvPicPr>
+            <a:picLocks noChangeAspect="1"/>
+          </p:cNvPicPr>
+          <p:nvPr/>
+        </p:nvPicPr>
+        <p:blipFill>
+          <a:blip r:embed="rId4"/>
+          <a:stretch>
+            <a:fillRect/>
+          </a:stretch>
+        </p:blipFill>
+        <p:spPr>
+          <a:xfrm>
+            <a:off x="7680959" y="182880"/>
+            <a:ext cx="960120" cy="539696"/>
+          </a:xfrm>
+          <a:prstGeom prst="rect">
+            <a:avLst/>
+          </a:prstGeom>
+        </p:spPr>
+      </p:pic>
+      <p:sp>
+        <p:nvSpPr>
+          <p:cNvPr id="8" name="Text 5b"/>
+          <p:cNvSpPr txBox="1"/>
+          <p:nvPr/>
+        </p:nvSpPr>
+        <p:spPr>
+          <a:xfrm>
+            <a:off x="4663440" y="4050791"/>
+            <a:ext cx="3703320" cy="548640"/>
+          </a:xfrm>
+          <a:prstGeom prst="rect">
+            <a:avLst/>
+          </a:prstGeom>
+          <a:noFill/>
+          <a:ln/>
+        </p:spPr>
+        <p:txBody>
+          <a:bodyPr wrap="square" lIns="0" tIns="0" rIns="0" bIns="0" rtlCol="0" anchor="t">
+            <a:normAutofit fontScale="92500"/>
+          </a:bodyPr>
+          <a:lstStyle/>
           <a:p>
             <a:pPr marL="342900" indent="-342900">
               <a:lnSpc>
@@ -7018,7 +7207,7 @@
               <a:buChar char="•"/>
             </a:pPr>
             <a:r>
-              <a:rPr lang="en-US" sz="850">
+              <a:rPr lang="en-US" sz="650">
                 <a:solidFill>
                   <a:srgbClr val="3A4453"/>
                 </a:solidFill>
@@ -7039,7 +7228,7 @@
               <a:buChar char="•"/>
             </a:pPr>
             <a:r>
-              <a:rPr lang="en-US" sz="850">
+              <a:rPr lang="en-US" sz="650">
                 <a:solidFill>
                   <a:srgbClr val="3A4453"/>
                 </a:solidFill>
@@ -7060,7 +7249,7 @@
               <a:buChar char="•"/>
             </a:pPr>
             <a:r>
-              <a:rPr lang="en-US" sz="850">
+              <a:rPr lang="en-US" sz="650">
                 <a:solidFill>
                   <a:srgbClr val="3A4453"/>
                 </a:solidFill>
@@ -7071,75 +7260,6 @@
           </a:p>
         </p:txBody>
       </p:sp>
-      <p:sp>
-        <p:nvSpPr>
-          <p:cNvPr id="25" name="Slide Number Placeholder 0"/>
-          <p:cNvSpPr>
-            <a:spLocks noGrp="1"/>
-          </p:cNvSpPr>
-          <p:nvPr>
-            <p:ph type="sldNum" sz="quarter" idx="4294967295"/>
-          </p:nvPr>
-        </p:nvSpPr>
-        <p:spPr>
-          <a:xfrm>
-            <a:off x="8092440" y="4736592"/>
-            <a:ext cx="548640" cy="228600"/>
-          </a:xfrm>
-          <a:prstGeom prst="rect">
-            <a:avLst/>
-          </a:prstGeom>
-          <a:extLst>
-            <a:ext uri="{C572A759-6A51-4108-AA02-DFA0A04FC94B}">
-              <ma14:wrappingTextBoxFlag xmlns:ma14="http://schemas.microsoft.com/office/mac/drawingml/2011/main" xmlns="" val="0"/>
-            </a:ext>
-          </a:extLst>
-        </p:spPr>
-        <p:txBody>
-          <a:bodyPr/>
-          <a:lstStyle>
-            <a:lvl1pPr>
-              <a:defRPr sz="800">
-                <a:solidFill>
-                  <a:srgbClr val="6B7585"/>
-                </a:solidFill>
-              </a:defRPr>
-            </a:lvl1pPr>
-          </a:lstStyle>
-          <a:p>
-            <a:pPr algn="r"/>
-            <a:fld id="{F7021451-1387-4CA6-816F-3879F97B5CBC}" type="slidenum">
-              <a:rPr lang="en-US" b="0"/>
-              <a:t>14</a:t>
-            </a:fld>
-            <a:endParaRPr lang="en-US"/>
-          </a:p>
-        </p:txBody>
-      </p:sp>
-      <p:pic>
-        <p:nvPicPr>
-          <p:cNvPr id="26" name="cts logo" descr="cts-logo.png"/>
-          <p:cNvPicPr>
-            <a:picLocks noChangeAspect="1"/>
-          </p:cNvPicPr>
-          <p:nvPr/>
-        </p:nvPicPr>
-        <p:blipFill>
-          <a:blip r:embed="rId4"/>
-          <a:stretch>
-            <a:fillRect/>
-          </a:stretch>
-        </p:blipFill>
-        <p:spPr>
-          <a:xfrm>
-            <a:off x="7680959" y="182880"/>
-            <a:ext cx="960120" cy="539696"/>
-          </a:xfrm>
-          <a:prstGeom prst="rect">
-            <a:avLst/>
-          </a:prstGeom>
-        </p:spPr>
-      </p:pic>
     </p:spTree>
   </p:cSld>
   <p:clrMapOvr>
@@ -19065,102 +19185,102 @@
           <a:chExt cx="0" cy="0"/>
         </a:xfrm>
       </p:grpSpPr>
-      <p:sp>
-        <p:nvSpPr>
-          <p:cNvPr id="2" name="Text 0"/>
-          <p:cNvSpPr txBox="1"/>
-          <p:nvPr/>
-        </p:nvSpPr>
-        <p:spPr>
-          <a:xfrm>
-            <a:off x="502920" y="365760"/>
-            <a:ext cx="6400800" cy="274320"/>
-          </a:xfrm>
-          <a:prstGeom prst="rect">
-            <a:avLst/>
-          </a:prstGeom>
-          <a:noFill/>
-          <a:ln/>
-        </p:spPr>
-        <p:txBody>
-          <a:bodyPr wrap="square" lIns="0" tIns="0" rIns="0" bIns="0" rtlCol="0" anchor="ctr"/>
-          <a:lstStyle/>
-          <a:p>
-            <a:pPr marL="0" indent="0">
-              <a:buNone/>
-            </a:pPr>
-            <a:r>
-              <a:rPr lang="en-US" sz="950" b="1" kern="0" spc="220">
-                <a:solidFill>
-                  <a:srgbClr val="122B82"/>
-                </a:solidFill>
-              </a:rPr>
-              <a:t>FINANCIAL PERFORMANCE</a:t>
-            </a:r>
-            <a:endParaRPr lang="en-US" sz="950"/>
-          </a:p>
-        </p:txBody>
-      </p:sp>
-      <p:sp>
-        <p:nvSpPr>
-          <p:cNvPr id="3" name="Text 1"/>
-          <p:cNvSpPr txBox="1"/>
-          <p:nvPr/>
-        </p:nvSpPr>
-        <p:spPr>
-          <a:xfrm>
-            <a:off x="502920" y="640080"/>
-            <a:ext cx="7315200" cy="685800"/>
-          </a:xfrm>
-          <a:prstGeom prst="rect">
-            <a:avLst/>
-          </a:prstGeom>
-          <a:noFill/>
-          <a:ln/>
-        </p:spPr>
-        <p:txBody>
-          <a:bodyPr wrap="square" lIns="0" tIns="0" rIns="0" bIns="0" rtlCol="0" anchor="ctr"/>
-          <a:lstStyle/>
-          <a:p>
-            <a:pPr marL="0" indent="0">
-              <a:buNone/>
-            </a:pPr>
-            <a:r>
-              <a:rPr lang="en-US" sz="2700" b="1">
-                <a:solidFill>
-                  <a:srgbClr val="242C39"/>
-                </a:solidFill>
-              </a:rPr>
-              <a:t>P&amp;L summary, cost and profit</a:t>
-            </a:r>
-            <a:endParaRPr lang="en-US" sz="2700"/>
-          </a:p>
-        </p:txBody>
-      </p:sp>
       <p:pic>
         <p:nvPicPr>
-          <p:cNvPr id="4" name="snip pl_result" descr="/home/user/Claude/deck/snips/pl_result.png"/>
+          <p:cNvPr id="27" name="snip pl_result" descr="pl_result.png"/>
           <p:cNvPicPr>
             <a:picLocks noChangeAspect="1"/>
           </p:cNvPicPr>
           <p:nvPr/>
         </p:nvPicPr>
         <p:blipFill>
-          <a:blip r:embed="rId3"/>
+          <a:blip r:embed="rId5"/>
           <a:stretch>
             <a:fillRect/>
           </a:stretch>
         </p:blipFill>
         <p:spPr>
           <a:xfrm>
-            <a:off x="694851" y="1444752"/>
-            <a:ext cx="5193979" cy="3090672"/>
+            <a:off x="502920" y="1115568"/>
+            <a:ext cx="8138160" cy="2231247"/>
           </a:xfrm>
           <a:prstGeom prst="rect">
             <a:avLst/>
           </a:prstGeom>
         </p:spPr>
       </p:pic>
+      <p:sp>
+        <p:nvSpPr>
+          <p:cNvPr id="2" name="Text 0"/>
+          <p:cNvSpPr txBox="1"/>
+          <p:nvPr/>
+        </p:nvSpPr>
+        <p:spPr>
+          <a:xfrm>
+            <a:off x="502920" y="365760"/>
+            <a:ext cx="6400800" cy="274320"/>
+          </a:xfrm>
+          <a:prstGeom prst="rect">
+            <a:avLst/>
+          </a:prstGeom>
+          <a:noFill/>
+          <a:ln/>
+        </p:spPr>
+        <p:txBody>
+          <a:bodyPr wrap="square" lIns="0" tIns="0" rIns="0" bIns="0" rtlCol="0" anchor="ctr"/>
+          <a:lstStyle/>
+          <a:p>
+            <a:pPr marL="0" indent="0">
+              <a:buNone/>
+            </a:pPr>
+            <a:r>
+              <a:rPr lang="en-US" sz="950" b="1" kern="0" spc="220">
+                <a:solidFill>
+                  <a:srgbClr val="122B82"/>
+                </a:solidFill>
+              </a:rPr>
+              <a:t>FINANCIAL PERFORMANCE</a:t>
+            </a:r>
+            <a:endParaRPr lang="en-US" sz="950"/>
+          </a:p>
+        </p:txBody>
+      </p:sp>
+      <p:sp>
+        <p:nvSpPr>
+          <p:cNvPr id="3" name="Text 1"/>
+          <p:cNvSpPr txBox="1"/>
+          <p:nvPr/>
+        </p:nvSpPr>
+        <p:spPr>
+          <a:xfrm>
+            <a:off x="502920" y="640080"/>
+            <a:ext cx="7315200" cy="685800"/>
+          </a:xfrm>
+          <a:prstGeom prst="rect">
+            <a:avLst/>
+          </a:prstGeom>
+          <a:noFill/>
+          <a:ln/>
+        </p:spPr>
+        <p:txBody>
+          <a:bodyPr wrap="square" lIns="0" tIns="0" rIns="0" bIns="0" rtlCol="0" anchor="ctr"/>
+          <a:lstStyle/>
+          <a:p>
+            <a:pPr marL="0" indent="0">
+              <a:buNone/>
+            </a:pPr>
+            <a:r>
+              <a:rPr lang="en-US" sz="2700" b="1">
+                <a:solidFill>
+                  <a:srgbClr val="242C39"/>
+                </a:solidFill>
+              </a:rPr>
+              <a:t>P&amp;L summary, cost and profit</a:t>
+            </a:r>
+            <a:endParaRPr lang="en-US" sz="2700"/>
+          </a:p>
+        </p:txBody>
+      </p:sp>
       <p:sp>
         <p:nvSpPr>
           <p:cNvPr id="6" name="commentary panel"/>
@@ -19169,8 +19289,8 @@
         </p:nvSpPr>
         <p:spPr>
           <a:xfrm>
-            <a:off x="6263640" y="1463040"/>
-            <a:ext cx="2377440" cy="3154680"/>
+            <a:off x="502920" y="3456543"/>
+            <a:ext cx="8138160" cy="1170320"/>
           </a:xfrm>
           <a:prstGeom prst="rect">
             <a:avLst/>
@@ -19196,8 +19316,8 @@
         </p:nvSpPr>
         <p:spPr>
           <a:xfrm>
-            <a:off x="6446520" y="1627632"/>
-            <a:ext cx="2011680" cy="228600"/>
+            <a:off x="685800" y="3529695"/>
+            <a:ext cx="2743200" cy="228600"/>
           </a:xfrm>
           <a:prstGeom prst="rect">
             <a:avLst/>
@@ -19232,8 +19352,8 @@
         </p:nvSpPr>
         <p:spPr>
           <a:xfrm>
-            <a:off x="6446520" y="1901952"/>
-            <a:ext cx="2011680" cy="2551176"/>
+            <a:off x="685800" y="3703431"/>
+            <a:ext cx="3703320" cy="896000"/>
           </a:xfrm>
           <a:prstGeom prst="rect">
             <a:avLst/>
@@ -19258,7 +19378,7 @@
               <a:buChar char="•"/>
             </a:pPr>
             <a:r>
-              <a:rPr lang="en-US" sz="800">
+              <a:rPr lang="en-US" sz="650">
                 <a:solidFill>
                   <a:srgbClr val="3A4453"/>
                 </a:solidFill>
@@ -19279,7 +19399,7 @@
               <a:buChar char="•"/>
             </a:pPr>
             <a:r>
-              <a:rPr lang="en-US" sz="800">
+              <a:rPr lang="en-US" sz="650">
                 <a:solidFill>
                   <a:srgbClr val="3A4453"/>
                 </a:solidFill>
@@ -19288,6 +19408,99 @@
             </a:r>
             <a:endParaRPr lang="en-US" sz="800"/>
           </a:p>
+        </p:txBody>
+      </p:sp>
+      <p:sp>
+        <p:nvSpPr>
+          <p:cNvPr id="25" name="Slide Number Placeholder 0"/>
+          <p:cNvSpPr>
+            <a:spLocks noGrp="1"/>
+          </p:cNvSpPr>
+          <p:nvPr>
+            <p:ph type="sldNum" sz="quarter" idx="4294967295"/>
+          </p:nvPr>
+        </p:nvSpPr>
+        <p:spPr>
+          <a:xfrm>
+            <a:off x="8092440" y="4736592"/>
+            <a:ext cx="548640" cy="228600"/>
+          </a:xfrm>
+          <a:prstGeom prst="rect">
+            <a:avLst/>
+          </a:prstGeom>
+          <a:extLst>
+            <a:ext uri="{C572A759-6A51-4108-AA02-DFA0A04FC94B}">
+              <ma14:wrappingTextBoxFlag xmlns:ma14="http://schemas.microsoft.com/office/mac/drawingml/2011/main" xmlns="" val="0"/>
+            </a:ext>
+          </a:extLst>
+        </p:spPr>
+        <p:txBody>
+          <a:bodyPr/>
+          <a:lstStyle>
+            <a:lvl1pPr>
+              <a:defRPr sz="800">
+                <a:solidFill>
+                  <a:srgbClr val="6B7585"/>
+                </a:solidFill>
+              </a:defRPr>
+            </a:lvl1pPr>
+          </a:lstStyle>
+          <a:p>
+            <a:pPr algn="r"/>
+            <a:fld id="{F7021451-1387-4CA6-816F-3879F97B5CBC}" type="slidenum">
+              <a:rPr lang="en-US" b="0"/>
+              <a:t>6</a:t>
+            </a:fld>
+            <a:endParaRPr lang="en-US"/>
+          </a:p>
+        </p:txBody>
+      </p:sp>
+      <p:pic>
+        <p:nvPicPr>
+          <p:cNvPr id="26" name="cts logo" descr="cts-logo.png"/>
+          <p:cNvPicPr>
+            <a:picLocks noChangeAspect="1"/>
+          </p:cNvPicPr>
+          <p:nvPr/>
+        </p:nvPicPr>
+        <p:blipFill>
+          <a:blip r:embed="rId4"/>
+          <a:stretch>
+            <a:fillRect/>
+          </a:stretch>
+        </p:blipFill>
+        <p:spPr>
+          <a:xfrm>
+            <a:off x="7680959" y="182880"/>
+            <a:ext cx="960120" cy="539696"/>
+          </a:xfrm>
+          <a:prstGeom prst="rect">
+            <a:avLst/>
+          </a:prstGeom>
+        </p:spPr>
+      </p:pic>
+      <p:sp>
+        <p:nvSpPr>
+          <p:cNvPr id="8" name="Text 5b"/>
+          <p:cNvSpPr txBox="1"/>
+          <p:nvPr/>
+        </p:nvSpPr>
+        <p:spPr>
+          <a:xfrm>
+            <a:off x="4663440" y="3703431"/>
+            <a:ext cx="3703320" cy="896000"/>
+          </a:xfrm>
+          <a:prstGeom prst="rect">
+            <a:avLst/>
+          </a:prstGeom>
+          <a:noFill/>
+          <a:ln/>
+        </p:spPr>
+        <p:txBody>
+          <a:bodyPr wrap="square" lIns="0" tIns="0" rIns="0" bIns="0" rtlCol="0" anchor="t">
+            <a:normAutofit fontScale="92500"/>
+          </a:bodyPr>
+          <a:lstStyle/>
           <a:p>
             <a:pPr marL="342900" indent="-342900">
               <a:lnSpc>
@@ -19300,7 +19513,7 @@
               <a:buChar char="•"/>
             </a:pPr>
             <a:r>
-              <a:rPr lang="en-US" sz="800">
+              <a:rPr lang="en-US" sz="650">
                 <a:solidFill>
                   <a:srgbClr val="3A4453"/>
                 </a:solidFill>
@@ -19321,7 +19534,7 @@
               <a:buChar char="•"/>
             </a:pPr>
             <a:r>
-              <a:rPr lang="en-US" sz="800">
+              <a:rPr lang="en-US" sz="650">
                 <a:solidFill>
                   <a:srgbClr val="3A4453"/>
                 </a:solidFill>
@@ -19342,7 +19555,7 @@
               <a:buChar char="•"/>
             </a:pPr>
             <a:r>
-              <a:rPr lang="en-US" sz="800">
+              <a:rPr lang="en-US" sz="650">
                 <a:solidFill>
                   <a:srgbClr val="3A4453"/>
                 </a:solidFill>
@@ -19353,75 +19566,6 @@
           </a:p>
         </p:txBody>
       </p:sp>
-      <p:sp>
-        <p:nvSpPr>
-          <p:cNvPr id="25" name="Slide Number Placeholder 0"/>
-          <p:cNvSpPr>
-            <a:spLocks noGrp="1"/>
-          </p:cNvSpPr>
-          <p:nvPr>
-            <p:ph type="sldNum" sz="quarter" idx="4294967295"/>
-          </p:nvPr>
-        </p:nvSpPr>
-        <p:spPr>
-          <a:xfrm>
-            <a:off x="8092440" y="4736592"/>
-            <a:ext cx="548640" cy="228600"/>
-          </a:xfrm>
-          <a:prstGeom prst="rect">
-            <a:avLst/>
-          </a:prstGeom>
-          <a:extLst>
-            <a:ext uri="{C572A759-6A51-4108-AA02-DFA0A04FC94B}">
-              <ma14:wrappingTextBoxFlag xmlns:ma14="http://schemas.microsoft.com/office/mac/drawingml/2011/main" xmlns="" val="0"/>
-            </a:ext>
-          </a:extLst>
-        </p:spPr>
-        <p:txBody>
-          <a:bodyPr/>
-          <a:lstStyle>
-            <a:lvl1pPr>
-              <a:defRPr sz="800">
-                <a:solidFill>
-                  <a:srgbClr val="6B7585"/>
-                </a:solidFill>
-              </a:defRPr>
-            </a:lvl1pPr>
-          </a:lstStyle>
-          <a:p>
-            <a:pPr algn="r"/>
-            <a:fld id="{F7021451-1387-4CA6-816F-3879F97B5CBC}" type="slidenum">
-              <a:rPr lang="en-US" b="0"/>
-              <a:t>6</a:t>
-            </a:fld>
-            <a:endParaRPr lang="en-US"/>
-          </a:p>
-        </p:txBody>
-      </p:sp>
-      <p:pic>
-        <p:nvPicPr>
-          <p:cNvPr id="26" name="cts logo" descr="cts-logo.png"/>
-          <p:cNvPicPr>
-            <a:picLocks noChangeAspect="1"/>
-          </p:cNvPicPr>
-          <p:nvPr/>
-        </p:nvPicPr>
-        <p:blipFill>
-          <a:blip r:embed="rId4"/>
-          <a:stretch>
-            <a:fillRect/>
-          </a:stretch>
-        </p:blipFill>
-        <p:spPr>
-          <a:xfrm>
-            <a:off x="7680959" y="182880"/>
-            <a:ext cx="960120" cy="539696"/>
-          </a:xfrm>
-          <a:prstGeom prst="rect">
-            <a:avLst/>
-          </a:prstGeom>
-        </p:spPr>
-      </p:pic>
     </p:spTree>
   </p:cSld>
   <p:clrMapOvr>
@@ -20217,102 +20361,102 @@
           <a:chExt cx="0" cy="0"/>
         </a:xfrm>
       </p:grpSpPr>
-      <p:sp>
-        <p:nvSpPr>
-          <p:cNvPr id="2" name="Text 0"/>
-          <p:cNvSpPr txBox="1"/>
-          <p:nvPr/>
-        </p:nvSpPr>
-        <p:spPr>
-          <a:xfrm>
-            <a:off x="502920" y="365760"/>
-            <a:ext cx="6400800" cy="274320"/>
-          </a:xfrm>
-          <a:prstGeom prst="rect">
-            <a:avLst/>
-          </a:prstGeom>
-          <a:noFill/>
-          <a:ln/>
-        </p:spPr>
-        <p:txBody>
-          <a:bodyPr wrap="square" lIns="0" tIns="0" rIns="0" bIns="0" rtlCol="0" anchor="ctr"/>
-          <a:lstStyle/>
-          <a:p>
-            <a:pPr marL="0" indent="0">
-              <a:buNone/>
-            </a:pPr>
-            <a:r>
-              <a:rPr lang="en-US" sz="950" b="1" kern="0" spc="220">
-                <a:solidFill>
-                  <a:srgbClr val="122B82"/>
-                </a:solidFill>
-              </a:rPr>
-              <a:t>FINANCIAL PERFORMANCE</a:t>
-            </a:r>
-            <a:endParaRPr lang="en-US" sz="950"/>
-          </a:p>
-        </p:txBody>
-      </p:sp>
-      <p:sp>
-        <p:nvSpPr>
-          <p:cNvPr id="3" name="Text 1"/>
-          <p:cNvSpPr txBox="1"/>
-          <p:nvPr/>
-        </p:nvSpPr>
-        <p:spPr>
-          <a:xfrm>
-            <a:off x="502920" y="640080"/>
-            <a:ext cx="7315200" cy="685800"/>
-          </a:xfrm>
-          <a:prstGeom prst="rect">
-            <a:avLst/>
-          </a:prstGeom>
-          <a:noFill/>
-          <a:ln/>
-        </p:spPr>
-        <p:txBody>
-          <a:bodyPr wrap="square" lIns="0" tIns="0" rIns="0" bIns="0" rtlCol="0" anchor="ctr"/>
-          <a:lstStyle/>
-          <a:p>
-            <a:pPr marL="0" indent="0">
-              <a:buNone/>
-            </a:pPr>
-            <a:r>
-              <a:rPr lang="en-US" sz="2700" b="1">
-                <a:solidFill>
-                  <a:srgbClr val="242C39"/>
-                </a:solidFill>
-              </a:rPr>
-              <a:t>Support, Sep 26</a:t>
-            </a:r>
-            <a:endParaRPr lang="en-US" sz="2700"/>
-          </a:p>
-        </p:txBody>
-      </p:sp>
       <p:pic>
         <p:nvPicPr>
-          <p:cNvPr id="4" name="snip dept_Support" descr="/home/user/Claude/deck/snips/dept_Support.png"/>
+          <p:cNvPr id="27" name="snip dept_Support" descr="dept_Support.png"/>
           <p:cNvPicPr>
             <a:picLocks noChangeAspect="1"/>
           </p:cNvPicPr>
           <p:nvPr/>
         </p:nvPicPr>
         <p:blipFill>
-          <a:blip r:embed="rId3"/>
+          <a:blip r:embed="rId5"/>
           <a:stretch>
             <a:fillRect/>
           </a:stretch>
         </p:blipFill>
         <p:spPr>
           <a:xfrm>
-            <a:off x="502920" y="1444752"/>
-            <a:ext cx="5577840" cy="2594047"/>
+            <a:off x="502920" y="1115568"/>
+            <a:ext cx="8138160" cy="2409752"/>
           </a:xfrm>
           <a:prstGeom prst="rect">
             <a:avLst/>
           </a:prstGeom>
         </p:spPr>
       </p:pic>
+      <p:sp>
+        <p:nvSpPr>
+          <p:cNvPr id="2" name="Text 0"/>
+          <p:cNvSpPr txBox="1"/>
+          <p:nvPr/>
+        </p:nvSpPr>
+        <p:spPr>
+          <a:xfrm>
+            <a:off x="502920" y="365760"/>
+            <a:ext cx="6400800" cy="274320"/>
+          </a:xfrm>
+          <a:prstGeom prst="rect">
+            <a:avLst/>
+          </a:prstGeom>
+          <a:noFill/>
+          <a:ln/>
+        </p:spPr>
+        <p:txBody>
+          <a:bodyPr wrap="square" lIns="0" tIns="0" rIns="0" bIns="0" rtlCol="0" anchor="ctr"/>
+          <a:lstStyle/>
+          <a:p>
+            <a:pPr marL="0" indent="0">
+              <a:buNone/>
+            </a:pPr>
+            <a:r>
+              <a:rPr lang="en-US" sz="950" b="1" kern="0" spc="220">
+                <a:solidFill>
+                  <a:srgbClr val="122B82"/>
+                </a:solidFill>
+              </a:rPr>
+              <a:t>FINANCIAL PERFORMANCE</a:t>
+            </a:r>
+            <a:endParaRPr lang="en-US" sz="950"/>
+          </a:p>
+        </p:txBody>
+      </p:sp>
+      <p:sp>
+        <p:nvSpPr>
+          <p:cNvPr id="3" name="Text 1"/>
+          <p:cNvSpPr txBox="1"/>
+          <p:nvPr/>
+        </p:nvSpPr>
+        <p:spPr>
+          <a:xfrm>
+            <a:off x="502920" y="640080"/>
+            <a:ext cx="7315200" cy="685800"/>
+          </a:xfrm>
+          <a:prstGeom prst="rect">
+            <a:avLst/>
+          </a:prstGeom>
+          <a:noFill/>
+          <a:ln/>
+        </p:spPr>
+        <p:txBody>
+          <a:bodyPr wrap="square" lIns="0" tIns="0" rIns="0" bIns="0" rtlCol="0" anchor="ctr"/>
+          <a:lstStyle/>
+          <a:p>
+            <a:pPr marL="0" indent="0">
+              <a:buNone/>
+            </a:pPr>
+            <a:r>
+              <a:rPr lang="en-US" sz="2700" b="1">
+                <a:solidFill>
+                  <a:srgbClr val="242C39"/>
+                </a:solidFill>
+              </a:rPr>
+              <a:t>Support, Sep 26</a:t>
+            </a:r>
+            <a:endParaRPr lang="en-US" sz="2700"/>
+          </a:p>
+        </p:txBody>
+      </p:sp>
       <p:sp>
         <p:nvSpPr>
           <p:cNvPr id="6" name="commentary panel"/>
@@ -20321,8 +20465,8 @@
         </p:nvSpPr>
         <p:spPr>
           <a:xfrm>
-            <a:off x="6263640" y="1463040"/>
-            <a:ext cx="2377440" cy="3154680"/>
+            <a:off x="502920" y="3635048"/>
+            <a:ext cx="8138160" cy="991815"/>
           </a:xfrm>
           <a:prstGeom prst="rect">
             <a:avLst/>
@@ -20348,8 +20492,8 @@
         </p:nvSpPr>
         <p:spPr>
           <a:xfrm>
-            <a:off x="6446520" y="1627632"/>
-            <a:ext cx="2011680" cy="228600"/>
+            <a:off x="685800" y="3708200"/>
+            <a:ext cx="2743200" cy="228600"/>
           </a:xfrm>
           <a:prstGeom prst="rect">
             <a:avLst/>
@@ -20384,8 +20528,8 @@
         </p:nvSpPr>
         <p:spPr>
           <a:xfrm>
-            <a:off x="6446520" y="1901952"/>
-            <a:ext cx="2011680" cy="2551176"/>
+            <a:off x="685800" y="3881936"/>
+            <a:ext cx="3703320" cy="717495"/>
           </a:xfrm>
           <a:prstGeom prst="rect">
             <a:avLst/>
@@ -20410,7 +20554,7 @@
               <a:buChar char="•"/>
             </a:pPr>
             <a:r>
-              <a:rPr lang="en-US" sz="850">
+              <a:rPr lang="en-US" sz="700">
                 <a:solidFill>
                   <a:srgbClr val="3A4453"/>
                 </a:solidFill>
@@ -20431,7 +20575,7 @@
               <a:buChar char="•"/>
             </a:pPr>
             <a:r>
-              <a:rPr lang="en-US" sz="850">
+              <a:rPr lang="en-US" sz="700">
                 <a:solidFill>
                   <a:srgbClr val="3A4453"/>
                 </a:solidFill>
@@ -20440,6 +20584,99 @@
             </a:r>
             <a:endParaRPr lang="en-US" sz="850"/>
           </a:p>
+        </p:txBody>
+      </p:sp>
+      <p:sp>
+        <p:nvSpPr>
+          <p:cNvPr id="25" name="Slide Number Placeholder 0"/>
+          <p:cNvSpPr>
+            <a:spLocks noGrp="1"/>
+          </p:cNvSpPr>
+          <p:nvPr>
+            <p:ph type="sldNum" sz="quarter" idx="4294967295"/>
+          </p:nvPr>
+        </p:nvSpPr>
+        <p:spPr>
+          <a:xfrm>
+            <a:off x="8092440" y="4736592"/>
+            <a:ext cx="548640" cy="228600"/>
+          </a:xfrm>
+          <a:prstGeom prst="rect">
+            <a:avLst/>
+          </a:prstGeom>
+          <a:extLst>
+            <a:ext uri="{C572A759-6A51-4108-AA02-DFA0A04FC94B}">
+              <ma14:wrappingTextBoxFlag xmlns:ma14="http://schemas.microsoft.com/office/mac/drawingml/2011/main" xmlns="" val="0"/>
+            </a:ext>
+          </a:extLst>
+        </p:spPr>
+        <p:txBody>
+          <a:bodyPr/>
+          <a:lstStyle>
+            <a:lvl1pPr>
+              <a:defRPr sz="800">
+                <a:solidFill>
+                  <a:srgbClr val="6B7585"/>
+                </a:solidFill>
+              </a:defRPr>
+            </a:lvl1pPr>
+          </a:lstStyle>
+          <a:p>
+            <a:pPr algn="r"/>
+            <a:fld id="{F7021451-1387-4CA6-816F-3879F97B5CBC}" type="slidenum">
+              <a:rPr lang="en-US" b="0"/>
+              <a:t>9</a:t>
+            </a:fld>
+            <a:endParaRPr lang="en-US"/>
+          </a:p>
+        </p:txBody>
+      </p:sp>
+      <p:pic>
+        <p:nvPicPr>
+          <p:cNvPr id="26" name="cts logo" descr="cts-logo.png"/>
+          <p:cNvPicPr>
+            <a:picLocks noChangeAspect="1"/>
+          </p:cNvPicPr>
+          <p:nvPr/>
+        </p:nvPicPr>
+        <p:blipFill>
+          <a:blip r:embed="rId4"/>
+          <a:stretch>
+            <a:fillRect/>
+          </a:stretch>
+        </p:blipFill>
+        <p:spPr>
+          <a:xfrm>
+            <a:off x="7680959" y="182880"/>
+            <a:ext cx="960120" cy="539696"/>
+          </a:xfrm>
+          <a:prstGeom prst="rect">
+            <a:avLst/>
+          </a:prstGeom>
+        </p:spPr>
+      </p:pic>
+      <p:sp>
+        <p:nvSpPr>
+          <p:cNvPr id="8" name="Text 5b"/>
+          <p:cNvSpPr txBox="1"/>
+          <p:nvPr/>
+        </p:nvSpPr>
+        <p:spPr>
+          <a:xfrm>
+            <a:off x="4663440" y="3881936"/>
+            <a:ext cx="3703320" cy="717495"/>
+          </a:xfrm>
+          <a:prstGeom prst="rect">
+            <a:avLst/>
+          </a:prstGeom>
+          <a:noFill/>
+          <a:ln/>
+        </p:spPr>
+        <p:txBody>
+          <a:bodyPr wrap="square" lIns="0" tIns="0" rIns="0" bIns="0" rtlCol="0" anchor="t">
+            <a:normAutofit/>
+          </a:bodyPr>
+          <a:lstStyle/>
           <a:p>
             <a:pPr marL="342900" indent="-342900">
               <a:lnSpc>
@@ -20452,7 +20689,7 @@
               <a:buChar char="•"/>
             </a:pPr>
             <a:r>
-              <a:rPr lang="en-US" sz="850">
+              <a:rPr lang="en-US" sz="700">
                 <a:solidFill>
                   <a:srgbClr val="3A4453"/>
                 </a:solidFill>
@@ -20473,7 +20710,7 @@
               <a:buChar char="•"/>
             </a:pPr>
             <a:r>
-              <a:rPr lang="en-US" sz="850">
+              <a:rPr lang="en-US" sz="700">
                 <a:solidFill>
                   <a:srgbClr val="3A4453"/>
                 </a:solidFill>
@@ -20494,7 +20731,7 @@
               <a:buChar char="•"/>
             </a:pPr>
             <a:r>
-              <a:rPr lang="en-US" sz="850">
+              <a:rPr lang="en-US" sz="700">
                 <a:solidFill>
                   <a:srgbClr val="3A4453"/>
                 </a:solidFill>
@@ -20505,75 +20742,6 @@
           </a:p>
         </p:txBody>
       </p:sp>
-      <p:sp>
-        <p:nvSpPr>
-          <p:cNvPr id="25" name="Slide Number Placeholder 0"/>
-          <p:cNvSpPr>
-            <a:spLocks noGrp="1"/>
-          </p:cNvSpPr>
-          <p:nvPr>
-            <p:ph type="sldNum" sz="quarter" idx="4294967295"/>
-          </p:nvPr>
-        </p:nvSpPr>
-        <p:spPr>
-          <a:xfrm>
-            <a:off x="8092440" y="4736592"/>
-            <a:ext cx="548640" cy="228600"/>
-          </a:xfrm>
-          <a:prstGeom prst="rect">
-            <a:avLst/>
-          </a:prstGeom>
-          <a:extLst>
-            <a:ext uri="{C572A759-6A51-4108-AA02-DFA0A04FC94B}">
-              <ma14:wrappingTextBoxFlag xmlns:ma14="http://schemas.microsoft.com/office/mac/drawingml/2011/main" xmlns="" val="0"/>
-            </a:ext>
-          </a:extLst>
-        </p:spPr>
-        <p:txBody>
-          <a:bodyPr/>
-          <a:lstStyle>
-            <a:lvl1pPr>
-              <a:defRPr sz="800">
-                <a:solidFill>
-                  <a:srgbClr val="6B7585"/>
-                </a:solidFill>
-              </a:defRPr>
-            </a:lvl1pPr>
-          </a:lstStyle>
-          <a:p>
-            <a:pPr algn="r"/>
-            <a:fld id="{F7021451-1387-4CA6-816F-3879F97B5CBC}" type="slidenum">
-              <a:rPr lang="en-US" b="0"/>
-              <a:t>9</a:t>
-            </a:fld>
-            <a:endParaRPr lang="en-US"/>
-          </a:p>
-        </p:txBody>
-      </p:sp>
-      <p:pic>
-        <p:nvPicPr>
-          <p:cNvPr id="26" name="cts logo" descr="cts-logo.png"/>
-          <p:cNvPicPr>
-            <a:picLocks noChangeAspect="1"/>
-          </p:cNvPicPr>
-          <p:nvPr/>
-        </p:nvPicPr>
-        <p:blipFill>
-          <a:blip r:embed="rId4"/>
-          <a:stretch>
-            <a:fillRect/>
-          </a:stretch>
-        </p:blipFill>
-        <p:spPr>
-          <a:xfrm>
-            <a:off x="7680959" y="182880"/>
-            <a:ext cx="960120" cy="539696"/>
-          </a:xfrm>
-          <a:prstGeom prst="rect">
-            <a:avLst/>
-          </a:prstGeom>
-        </p:spPr>
-      </p:pic>
     </p:spTree>
   </p:cSld>
   <p:clrMapOvr>

--- a/deck/CTS Monthly Business Review - 30092026.pptx
+++ b/deck/CTS Monthly Business Review - 30092026.pptx
@@ -5146,7 +5146,7 @@
               <a:buNone/>
             </a:pPr>
             <a:r>
-              <a:rPr lang="en-US" sz="4000" b="1">
+              <a:rPr lang="en-US" sz="3000" b="1">
                 <a:solidFill>
                   <a:srgbClr val="FFFFFF"/>
                 </a:solidFill>
@@ -5340,7 +5340,7 @@
               <a:buNone/>
             </a:pPr>
             <a:r>
-              <a:rPr lang="en-US" sz="2700" b="1">
+              <a:rPr lang="en-US" sz="2200" b="1">
                 <a:solidFill>
                   <a:srgbClr val="242C39"/>
                 </a:solidFill>
@@ -5746,7 +5746,7 @@
               <a:buNone/>
             </a:pPr>
             <a:r>
-              <a:rPr lang="en-US" sz="2700" b="1">
+              <a:rPr lang="en-US" sz="2200" b="1">
                 <a:solidFill>
                   <a:srgbClr val="242C39"/>
                 </a:solidFill>
@@ -6152,7 +6152,7 @@
               <a:buNone/>
             </a:pPr>
             <a:r>
-              <a:rPr lang="en-US" sz="2700" b="1">
+              <a:rPr lang="en-US" sz="2200" b="1">
                 <a:solidFill>
                   <a:srgbClr val="242C39"/>
                 </a:solidFill>
@@ -6558,7 +6558,7 @@
               <a:buNone/>
             </a:pPr>
             <a:r>
-              <a:rPr lang="en-US" sz="2700" b="1">
+              <a:rPr lang="en-US" sz="2200" b="1">
                 <a:solidFill>
                   <a:srgbClr val="242C39"/>
                 </a:solidFill>
@@ -6964,7 +6964,7 @@
               <a:buNone/>
             </a:pPr>
             <a:r>
-              <a:rPr lang="en-US" sz="2700" b="1">
+              <a:rPr lang="en-US" sz="2200" b="1">
                 <a:solidFill>
                   <a:srgbClr val="242C39"/>
                 </a:solidFill>
@@ -7424,7 +7424,7 @@
               <a:buNone/>
             </a:pPr>
             <a:r>
-              <a:rPr lang="en-US" sz="2600" b="1">
+              <a:rPr lang="en-US" sz="2200" b="1">
                 <a:solidFill>
                   <a:srgbClr val="242C39"/>
                 </a:solidFill>
@@ -7496,7 +7496,7 @@
               <a:buNone/>
             </a:pPr>
             <a:r>
-              <a:rPr lang="en-US" sz="2800" b="1">
+              <a:rPr lang="en-US" sz="2300" b="1">
                 <a:solidFill>
                   <a:srgbClr val="FFFFFF"/>
                 </a:solidFill>
@@ -7629,7 +7629,7 @@
               <a:buNone/>
             </a:pPr>
             <a:r>
-              <a:rPr lang="en-US" sz="2700" b="1">
+              <a:rPr lang="en-US" sz="2200" b="1">
                 <a:solidFill>
                   <a:srgbClr val="242C39"/>
                 </a:solidFill>
@@ -8011,7 +8011,7 @@
               <a:buNone/>
             </a:pPr>
             <a:r>
-              <a:rPr lang="en-US" sz="2700" b="1">
+              <a:rPr lang="en-US" sz="2200" b="1">
                 <a:solidFill>
                   <a:srgbClr val="242C39"/>
                 </a:solidFill>
@@ -8393,7 +8393,7 @@
               <a:buNone/>
             </a:pPr>
             <a:r>
-              <a:rPr lang="en-US" sz="2700" b="1">
+              <a:rPr lang="en-US" sz="2200" b="1">
                 <a:solidFill>
                   <a:srgbClr val="242C39"/>
                 </a:solidFill>
@@ -8775,7 +8775,7 @@
               <a:buNone/>
             </a:pPr>
             <a:r>
-              <a:rPr lang="en-US" sz="2700" b="1">
+              <a:rPr lang="en-US" sz="2200" b="1">
                 <a:solidFill>
                   <a:srgbClr val="242C39"/>
                 </a:solidFill>
@@ -9160,7 +9160,7 @@
               <a:buNone/>
             </a:pPr>
             <a:r>
-              <a:rPr lang="en-US" sz="2700" b="1">
+              <a:rPr lang="en-US" sz="2200" b="1">
                 <a:solidFill>
                   <a:srgbClr val="242C39"/>
                 </a:solidFill>
@@ -10079,7 +10079,7 @@
               <a:buNone/>
             </a:pPr>
             <a:r>
-              <a:rPr lang="en-US" sz="2600" b="1">
+              <a:rPr lang="en-US" sz="2200" b="1">
                 <a:solidFill>
                   <a:srgbClr val="242C39"/>
                 </a:solidFill>
@@ -10151,7 +10151,7 @@
               <a:buNone/>
             </a:pPr>
             <a:r>
-              <a:rPr lang="en-US" sz="2800" b="1">
+              <a:rPr lang="en-US" sz="2300" b="1">
                 <a:solidFill>
                   <a:srgbClr val="FFFFFF"/>
                 </a:solidFill>
@@ -10284,7 +10284,7 @@
               <a:buNone/>
             </a:pPr>
             <a:r>
-              <a:rPr lang="en-US" sz="2700" b="1">
+              <a:rPr lang="en-US" sz="2200" b="1">
                 <a:solidFill>
                   <a:srgbClr val="242C39"/>
                 </a:solidFill>
@@ -10666,7 +10666,7 @@
               <a:buNone/>
             </a:pPr>
             <a:r>
-              <a:rPr lang="en-US" sz="2700" b="1">
+              <a:rPr lang="en-US" sz="2200" b="1">
                 <a:solidFill>
                   <a:srgbClr val="242C39"/>
                 </a:solidFill>
@@ -11048,7 +11048,7 @@
               <a:buNone/>
             </a:pPr>
             <a:r>
-              <a:rPr lang="en-US" sz="2700" b="1">
+              <a:rPr lang="en-US" sz="2200" b="1">
                 <a:solidFill>
                   <a:srgbClr val="242C39"/>
                 </a:solidFill>
@@ -11508,7 +11508,7 @@
               <a:buNone/>
             </a:pPr>
             <a:r>
-              <a:rPr lang="en-US" sz="2600" b="1">
+              <a:rPr lang="en-US" sz="2200" b="1">
                 <a:solidFill>
                   <a:srgbClr val="242C39"/>
                 </a:solidFill>
@@ -11580,7 +11580,7 @@
               <a:buNone/>
             </a:pPr>
             <a:r>
-              <a:rPr lang="en-US" sz="2800" b="1">
+              <a:rPr lang="en-US" sz="2300" b="1">
                 <a:solidFill>
                   <a:srgbClr val="FFFFFF"/>
                 </a:solidFill>
@@ -11713,7 +11713,7 @@
               <a:buNone/>
             </a:pPr>
             <a:r>
-              <a:rPr lang="en-US" sz="2700" b="1">
+              <a:rPr lang="en-US" sz="2200" b="1">
                 <a:solidFill>
                   <a:srgbClr val="242C39"/>
                 </a:solidFill>
@@ -12098,7 +12098,7 @@
               <a:buNone/>
             </a:pPr>
             <a:r>
-              <a:rPr lang="en-US" sz="2700" b="1">
+              <a:rPr lang="en-US" sz="2200" b="1">
                 <a:solidFill>
                   <a:srgbClr val="242C39"/>
                 </a:solidFill>
@@ -12480,7 +12480,7 @@
               <a:buNone/>
             </a:pPr>
             <a:r>
-              <a:rPr lang="en-US" sz="2700" b="1">
+              <a:rPr lang="en-US" sz="2200" b="1">
                 <a:solidFill>
                   <a:srgbClr val="242C39"/>
                 </a:solidFill>
@@ -12940,7 +12940,7 @@
               <a:buNone/>
             </a:pPr>
             <a:r>
-              <a:rPr lang="en-US" sz="2600" b="1">
+              <a:rPr lang="en-US" sz="2200" b="1">
                 <a:solidFill>
                   <a:srgbClr val="242C39"/>
                 </a:solidFill>
@@ -13012,7 +13012,7 @@
               <a:buNone/>
             </a:pPr>
             <a:r>
-              <a:rPr lang="en-US" sz="2800" b="1">
+              <a:rPr lang="en-US" sz="2300" b="1">
                 <a:solidFill>
                   <a:srgbClr val="FFFFFF"/>
                 </a:solidFill>
@@ -13145,7 +13145,7 @@
               <a:buNone/>
             </a:pPr>
             <a:r>
-              <a:rPr lang="en-US" sz="2700" b="1">
+              <a:rPr lang="en-US" sz="2200" b="1">
                 <a:solidFill>
                   <a:srgbClr val="242C39"/>
                 </a:solidFill>
@@ -13527,7 +13527,7 @@
               <a:buNone/>
             </a:pPr>
             <a:r>
-              <a:rPr lang="en-US" sz="2700" b="1">
+              <a:rPr lang="en-US" sz="2200" b="1">
                 <a:solidFill>
                   <a:srgbClr val="242C39"/>
                 </a:solidFill>
@@ -15779,7 +15779,7 @@
               <a:buNone/>
             </a:pPr>
             <a:r>
-              <a:rPr lang="en-US" sz="2700" b="1">
+              <a:rPr lang="en-US" sz="2200" b="1">
                 <a:solidFill>
                   <a:srgbClr val="242C39"/>
                 </a:solidFill>
@@ -18047,7 +18047,7 @@
               <a:buNone/>
             </a:pPr>
             <a:r>
-              <a:rPr lang="en-US" sz="2600" b="1">
+              <a:rPr lang="en-US" sz="2200" b="1">
                 <a:solidFill>
                   <a:srgbClr val="242C39"/>
                 </a:solidFill>
@@ -18131,7 +18131,7 @@
               <a:buNone/>
             </a:pPr>
             <a:r>
-              <a:rPr lang="en-US" sz="2800" b="1"/>
+              <a:rPr lang="en-US" sz="2300" b="1"/>
               <a:t>Links </a:t>
             </a:r>
             <a:endParaRPr lang="en-US" sz="2800"/>
@@ -18424,7 +18424,7 @@
               <a:buNone/>
             </a:pPr>
             <a:r>
-              <a:rPr lang="en-US" sz="3800" b="1">
+              <a:rPr lang="en-US" sz="3000" b="1">
                 <a:solidFill>
                   <a:srgbClr val="FFFFFF"/>
                 </a:solidFill>
@@ -18635,7 +18635,7 @@
               <a:buNone/>
             </a:pPr>
             <a:r>
-              <a:rPr lang="en-US" sz="2600" b="1">
+              <a:rPr lang="en-US" sz="2200" b="1">
                 <a:solidFill>
                   <a:srgbClr val="242C39"/>
                 </a:solidFill>
@@ -18707,7 +18707,7 @@
               <a:buNone/>
             </a:pPr>
             <a:r>
-              <a:rPr lang="en-US" sz="2800" b="1">
+              <a:rPr lang="en-US" sz="2300" b="1">
                 <a:solidFill>
                   <a:srgbClr val="FFFFFF"/>
                 </a:solidFill>
@@ -18864,7 +18864,7 @@
               <a:buNone/>
             </a:pPr>
             <a:r>
-              <a:rPr lang="en-US" sz="2700" b="1">
+              <a:rPr lang="en-US" sz="2200" b="1">
                 <a:solidFill>
                   <a:srgbClr val="242C39"/>
                 </a:solidFill>
@@ -19270,7 +19270,7 @@
               <a:buNone/>
             </a:pPr>
             <a:r>
-              <a:rPr lang="en-US" sz="2700" b="1">
+              <a:rPr lang="en-US" sz="2200" b="1">
                 <a:solidFill>
                   <a:srgbClr val="242C39"/>
                 </a:solidFill>
@@ -19652,7 +19652,7 @@
               <a:buNone/>
             </a:pPr>
             <a:r>
-              <a:rPr lang="en-US" sz="2700" b="1">
+              <a:rPr lang="en-US" sz="2200" b="1">
                 <a:solidFill>
                   <a:srgbClr val="242C39"/>
                 </a:solidFill>
@@ -20037,7 +20037,7 @@
               <a:buNone/>
             </a:pPr>
             <a:r>
-              <a:rPr lang="en-US" sz="2700" b="1">
+              <a:rPr lang="en-US" sz="2200" b="1">
                 <a:solidFill>
                   <a:srgbClr val="242C39"/>
                 </a:solidFill>
@@ -20446,7 +20446,7 @@
               <a:buNone/>
             </a:pPr>
             <a:r>
-              <a:rPr lang="en-US" sz="2700" b="1">
+              <a:rPr lang="en-US" sz="2200" b="1">
                 <a:solidFill>
                   <a:srgbClr val="242C39"/>
                 </a:solidFill>

--- a/deck/CTS Monthly Business Review - 30092026.pptx
+++ b/deck/CTS Monthly Business Review - 30092026.pptx
@@ -5271,8 +5271,8 @@
         </p:blipFill>
         <p:spPr>
           <a:xfrm>
-            <a:off x="502920" y="1115568"/>
-            <a:ext cx="8138160" cy="2409752"/>
+            <a:off x="1184920" y="1115568"/>
+            <a:ext cx="6774159" cy="2005865"/>
           </a:xfrm>
           <a:prstGeom prst="rect">
             <a:avLst/>
@@ -5359,8 +5359,8 @@
         </p:nvSpPr>
         <p:spPr>
           <a:xfrm>
-            <a:off x="502920" y="3635048"/>
-            <a:ext cx="8138160" cy="991815"/>
+            <a:off x="502920" y="3231161"/>
+            <a:ext cx="8138160" cy="1395702"/>
           </a:xfrm>
           <a:prstGeom prst="rect">
             <a:avLst/>
@@ -5386,7 +5386,7 @@
         </p:nvSpPr>
         <p:spPr>
           <a:xfrm>
-            <a:off x="685800" y="3708200"/>
+            <a:off x="685800" y="3304313"/>
             <a:ext cx="2743200" cy="228600"/>
           </a:xfrm>
           <a:prstGeom prst="rect">
@@ -5422,8 +5422,8 @@
         </p:nvSpPr>
         <p:spPr>
           <a:xfrm>
-            <a:off x="685800" y="3881936"/>
-            <a:ext cx="3703320" cy="717495"/>
+            <a:off x="685800" y="3478049"/>
+            <a:ext cx="3703320" cy="1121382"/>
           </a:xfrm>
           <a:prstGeom prst="rect">
             <a:avLst/>
@@ -5448,7 +5448,7 @@
               <a:buChar char="•"/>
             </a:pPr>
             <a:r>
-              <a:rPr lang="en-US" sz="700">
+              <a:rPr lang="en-US" sz="1000">
                 <a:solidFill>
                   <a:srgbClr val="3A4453"/>
                 </a:solidFill>
@@ -5469,7 +5469,7 @@
               <a:buChar char="•"/>
             </a:pPr>
             <a:r>
-              <a:rPr lang="en-US" sz="700">
+              <a:rPr lang="en-US" sz="1000">
                 <a:solidFill>
                   <a:srgbClr val="3A4453"/>
                 </a:solidFill>
@@ -5478,99 +5478,6 @@
             </a:r>
             <a:endParaRPr lang="en-US" sz="900"/>
           </a:p>
-        </p:txBody>
-      </p:sp>
-      <p:sp>
-        <p:nvSpPr>
-          <p:cNvPr id="25" name="Slide Number Placeholder 0"/>
-          <p:cNvSpPr>
-            <a:spLocks noGrp="1"/>
-          </p:cNvSpPr>
-          <p:nvPr>
-            <p:ph type="sldNum" sz="quarter" idx="4294967295"/>
-          </p:nvPr>
-        </p:nvSpPr>
-        <p:spPr>
-          <a:xfrm>
-            <a:off x="8092440" y="4736592"/>
-            <a:ext cx="548640" cy="228600"/>
-          </a:xfrm>
-          <a:prstGeom prst="rect">
-            <a:avLst/>
-          </a:prstGeom>
-          <a:extLst>
-            <a:ext uri="{C572A759-6A51-4108-AA02-DFA0A04FC94B}">
-              <ma14:wrappingTextBoxFlag xmlns:ma14="http://schemas.microsoft.com/office/mac/drawingml/2011/main" xmlns="" val="0"/>
-            </a:ext>
-          </a:extLst>
-        </p:spPr>
-        <p:txBody>
-          <a:bodyPr/>
-          <a:lstStyle>
-            <a:lvl1pPr>
-              <a:defRPr sz="800">
-                <a:solidFill>
-                  <a:srgbClr val="6B7585"/>
-                </a:solidFill>
-              </a:defRPr>
-            </a:lvl1pPr>
-          </a:lstStyle>
-          <a:p>
-            <a:pPr algn="r"/>
-            <a:fld id="{F7021451-1387-4CA6-816F-3879F97B5CBC}" type="slidenum">
-              <a:rPr lang="en-US" b="0"/>
-              <a:t>10</a:t>
-            </a:fld>
-            <a:endParaRPr lang="en-US"/>
-          </a:p>
-        </p:txBody>
-      </p:sp>
-      <p:pic>
-        <p:nvPicPr>
-          <p:cNvPr id="26" name="cts logo" descr="cts-logo.png"/>
-          <p:cNvPicPr>
-            <a:picLocks noChangeAspect="1"/>
-          </p:cNvPicPr>
-          <p:nvPr/>
-        </p:nvPicPr>
-        <p:blipFill>
-          <a:blip r:embed="rId4"/>
-          <a:stretch>
-            <a:fillRect/>
-          </a:stretch>
-        </p:blipFill>
-        <p:spPr>
-          <a:xfrm>
-            <a:off x="7680959" y="182880"/>
-            <a:ext cx="960120" cy="539696"/>
-          </a:xfrm>
-          <a:prstGeom prst="rect">
-            <a:avLst/>
-          </a:prstGeom>
-        </p:spPr>
-      </p:pic>
-      <p:sp>
-        <p:nvSpPr>
-          <p:cNvPr id="8" name="Text 5b"/>
-          <p:cNvSpPr txBox="1"/>
-          <p:nvPr/>
-        </p:nvSpPr>
-        <p:spPr>
-          <a:xfrm>
-            <a:off x="4663440" y="3881936"/>
-            <a:ext cx="3703320" cy="717495"/>
-          </a:xfrm>
-          <a:prstGeom prst="rect">
-            <a:avLst/>
-          </a:prstGeom>
-          <a:noFill/>
-          <a:ln/>
-        </p:spPr>
-        <p:txBody>
-          <a:bodyPr wrap="square" lIns="0" tIns="0" rIns="0" bIns="0" rtlCol="0" anchor="t">
-            <a:normAutofit fontScale="92500"/>
-          </a:bodyPr>
-          <a:lstStyle/>
           <a:p>
             <a:pPr marL="342900" indent="-342900">
               <a:lnSpc>
@@ -5583,7 +5490,7 @@
               <a:buChar char="•"/>
             </a:pPr>
             <a:r>
-              <a:rPr lang="en-US" sz="700">
+              <a:rPr lang="en-US" sz="1000">
                 <a:solidFill>
                   <a:srgbClr val="3A4453"/>
                 </a:solidFill>
@@ -5592,6 +5499,99 @@
             </a:r>
             <a:endParaRPr lang="en-US" sz="900"/>
           </a:p>
+        </p:txBody>
+      </p:sp>
+      <p:sp>
+        <p:nvSpPr>
+          <p:cNvPr id="25" name="Slide Number Placeholder 0"/>
+          <p:cNvSpPr>
+            <a:spLocks noGrp="1"/>
+          </p:cNvSpPr>
+          <p:nvPr>
+            <p:ph type="sldNum" sz="quarter" idx="4294967295"/>
+          </p:nvPr>
+        </p:nvSpPr>
+        <p:spPr>
+          <a:xfrm>
+            <a:off x="8092440" y="4736592"/>
+            <a:ext cx="548640" cy="228600"/>
+          </a:xfrm>
+          <a:prstGeom prst="rect">
+            <a:avLst/>
+          </a:prstGeom>
+          <a:extLst>
+            <a:ext uri="{C572A759-6A51-4108-AA02-DFA0A04FC94B}">
+              <ma14:wrappingTextBoxFlag xmlns:ma14="http://schemas.microsoft.com/office/mac/drawingml/2011/main" xmlns="" val="0"/>
+            </a:ext>
+          </a:extLst>
+        </p:spPr>
+        <p:txBody>
+          <a:bodyPr/>
+          <a:lstStyle>
+            <a:lvl1pPr>
+              <a:defRPr sz="800">
+                <a:solidFill>
+                  <a:srgbClr val="6B7585"/>
+                </a:solidFill>
+              </a:defRPr>
+            </a:lvl1pPr>
+          </a:lstStyle>
+          <a:p>
+            <a:pPr algn="r"/>
+            <a:fld id="{F7021451-1387-4CA6-816F-3879F97B5CBC}" type="slidenum">
+              <a:rPr lang="en-US" b="0"/>
+              <a:t>10</a:t>
+            </a:fld>
+            <a:endParaRPr lang="en-US"/>
+          </a:p>
+        </p:txBody>
+      </p:sp>
+      <p:pic>
+        <p:nvPicPr>
+          <p:cNvPr id="26" name="cts logo" descr="cts-logo.png"/>
+          <p:cNvPicPr>
+            <a:picLocks noChangeAspect="1"/>
+          </p:cNvPicPr>
+          <p:nvPr/>
+        </p:nvPicPr>
+        <p:blipFill>
+          <a:blip r:embed="rId4"/>
+          <a:stretch>
+            <a:fillRect/>
+          </a:stretch>
+        </p:blipFill>
+        <p:spPr>
+          <a:xfrm>
+            <a:off x="7680959" y="182880"/>
+            <a:ext cx="960120" cy="539696"/>
+          </a:xfrm>
+          <a:prstGeom prst="rect">
+            <a:avLst/>
+          </a:prstGeom>
+        </p:spPr>
+      </p:pic>
+      <p:sp>
+        <p:nvSpPr>
+          <p:cNvPr id="8" name="Text 5b"/>
+          <p:cNvSpPr txBox="1"/>
+          <p:nvPr/>
+        </p:nvSpPr>
+        <p:spPr>
+          <a:xfrm>
+            <a:off x="4663440" y="3478049"/>
+            <a:ext cx="3703320" cy="1121382"/>
+          </a:xfrm>
+          <a:prstGeom prst="rect">
+            <a:avLst/>
+          </a:prstGeom>
+          <a:noFill/>
+          <a:ln/>
+        </p:spPr>
+        <p:txBody>
+          <a:bodyPr wrap="square" lIns="0" tIns="0" rIns="0" bIns="0" rtlCol="0" anchor="t">
+            <a:normAutofit fontScale="92500"/>
+          </a:bodyPr>
+          <a:lstStyle/>
           <a:p>
             <a:pPr marL="342900" indent="-342900">
               <a:lnSpc>
@@ -5604,7 +5604,7 @@
               <a:buChar char="•"/>
             </a:pPr>
             <a:r>
-              <a:rPr lang="en-US" sz="700">
+              <a:rPr lang="en-US" sz="1000">
                 <a:solidFill>
                   <a:srgbClr val="3A4453"/>
                 </a:solidFill>
@@ -5625,7 +5625,7 @@
               <a:buChar char="•"/>
             </a:pPr>
             <a:r>
-              <a:rPr lang="en-US" sz="700">
+              <a:rPr lang="en-US" sz="1000">
                 <a:solidFill>
                   <a:srgbClr val="3A4453"/>
                 </a:solidFill>
@@ -5677,8 +5677,8 @@
         </p:blipFill>
         <p:spPr>
           <a:xfrm>
-            <a:off x="502920" y="1115568"/>
-            <a:ext cx="8138160" cy="2409752"/>
+            <a:off x="899746" y="1115568"/>
+            <a:ext cx="7344506" cy="2174747"/>
           </a:xfrm>
           <a:prstGeom prst="rect">
             <a:avLst/>
@@ -5765,8 +5765,8 @@
         </p:nvSpPr>
         <p:spPr>
           <a:xfrm>
-            <a:off x="502920" y="3635048"/>
-            <a:ext cx="8138160" cy="991815"/>
+            <a:off x="502920" y="3400043"/>
+            <a:ext cx="8138160" cy="1226820"/>
           </a:xfrm>
           <a:prstGeom prst="rect">
             <a:avLst/>
@@ -5792,7 +5792,7 @@
         </p:nvSpPr>
         <p:spPr>
           <a:xfrm>
-            <a:off x="685800" y="3708200"/>
+            <a:off x="685800" y="3473195"/>
             <a:ext cx="2743200" cy="228600"/>
           </a:xfrm>
           <a:prstGeom prst="rect">
@@ -5828,8 +5828,8 @@
         </p:nvSpPr>
         <p:spPr>
           <a:xfrm>
-            <a:off x="685800" y="3881936"/>
-            <a:ext cx="3703320" cy="717495"/>
+            <a:off x="685800" y="3646931"/>
+            <a:ext cx="3703320" cy="952500"/>
           </a:xfrm>
           <a:prstGeom prst="rect">
             <a:avLst/>
@@ -5854,7 +5854,7 @@
               <a:buChar char="•"/>
             </a:pPr>
             <a:r>
-              <a:rPr lang="en-US" sz="700">
+              <a:rPr lang="en-US" sz="1000">
                 <a:solidFill>
                   <a:srgbClr val="3A4453"/>
                 </a:solidFill>
@@ -5875,7 +5875,7 @@
               <a:buChar char="•"/>
             </a:pPr>
             <a:r>
-              <a:rPr lang="en-US" sz="700">
+              <a:rPr lang="en-US" sz="1000">
                 <a:solidFill>
                   <a:srgbClr val="3A4453"/>
                 </a:solidFill>
@@ -5884,99 +5884,6 @@
             </a:r>
             <a:endParaRPr lang="en-US" sz="950"/>
           </a:p>
-        </p:txBody>
-      </p:sp>
-      <p:sp>
-        <p:nvSpPr>
-          <p:cNvPr id="25" name="Slide Number Placeholder 0"/>
-          <p:cNvSpPr>
-            <a:spLocks noGrp="1"/>
-          </p:cNvSpPr>
-          <p:nvPr>
-            <p:ph type="sldNum" sz="quarter" idx="4294967295"/>
-          </p:nvPr>
-        </p:nvSpPr>
-        <p:spPr>
-          <a:xfrm>
-            <a:off x="8092440" y="4736592"/>
-            <a:ext cx="548640" cy="228600"/>
-          </a:xfrm>
-          <a:prstGeom prst="rect">
-            <a:avLst/>
-          </a:prstGeom>
-          <a:extLst>
-            <a:ext uri="{C572A759-6A51-4108-AA02-DFA0A04FC94B}">
-              <ma14:wrappingTextBoxFlag xmlns:ma14="http://schemas.microsoft.com/office/mac/drawingml/2011/main" xmlns="" val="0"/>
-            </a:ext>
-          </a:extLst>
-        </p:spPr>
-        <p:txBody>
-          <a:bodyPr/>
-          <a:lstStyle>
-            <a:lvl1pPr>
-              <a:defRPr sz="800">
-                <a:solidFill>
-                  <a:srgbClr val="6B7585"/>
-                </a:solidFill>
-              </a:defRPr>
-            </a:lvl1pPr>
-          </a:lstStyle>
-          <a:p>
-            <a:pPr algn="r"/>
-            <a:fld id="{F7021451-1387-4CA6-816F-3879F97B5CBC}" type="slidenum">
-              <a:rPr lang="en-US" b="0"/>
-              <a:t>11</a:t>
-            </a:fld>
-            <a:endParaRPr lang="en-US"/>
-          </a:p>
-        </p:txBody>
-      </p:sp>
-      <p:pic>
-        <p:nvPicPr>
-          <p:cNvPr id="26" name="cts logo" descr="cts-logo.png"/>
-          <p:cNvPicPr>
-            <a:picLocks noChangeAspect="1"/>
-          </p:cNvPicPr>
-          <p:nvPr/>
-        </p:nvPicPr>
-        <p:blipFill>
-          <a:blip r:embed="rId4"/>
-          <a:stretch>
-            <a:fillRect/>
-          </a:stretch>
-        </p:blipFill>
-        <p:spPr>
-          <a:xfrm>
-            <a:off x="7680959" y="182880"/>
-            <a:ext cx="960120" cy="539696"/>
-          </a:xfrm>
-          <a:prstGeom prst="rect">
-            <a:avLst/>
-          </a:prstGeom>
-        </p:spPr>
-      </p:pic>
-      <p:sp>
-        <p:nvSpPr>
-          <p:cNvPr id="8" name="Text 5b"/>
-          <p:cNvSpPr txBox="1"/>
-          <p:nvPr/>
-        </p:nvSpPr>
-        <p:spPr>
-          <a:xfrm>
-            <a:off x="4663440" y="3881936"/>
-            <a:ext cx="3703320" cy="717495"/>
-          </a:xfrm>
-          <a:prstGeom prst="rect">
-            <a:avLst/>
-          </a:prstGeom>
-          <a:noFill/>
-          <a:ln/>
-        </p:spPr>
-        <p:txBody>
-          <a:bodyPr wrap="square" lIns="0" tIns="0" rIns="0" bIns="0" rtlCol="0" anchor="t">
-            <a:normAutofit/>
-          </a:bodyPr>
-          <a:lstStyle/>
           <a:p>
             <a:pPr marL="342900" indent="-342900">
               <a:lnSpc>
@@ -5989,7 +5896,7 @@
               <a:buChar char="•"/>
             </a:pPr>
             <a:r>
-              <a:rPr lang="en-US" sz="700">
+              <a:rPr lang="en-US" sz="1000">
                 <a:solidFill>
                   <a:srgbClr val="3A4453"/>
                 </a:solidFill>
@@ -5998,6 +5905,99 @@
             </a:r>
             <a:endParaRPr lang="en-US" sz="950"/>
           </a:p>
+        </p:txBody>
+      </p:sp>
+      <p:sp>
+        <p:nvSpPr>
+          <p:cNvPr id="25" name="Slide Number Placeholder 0"/>
+          <p:cNvSpPr>
+            <a:spLocks noGrp="1"/>
+          </p:cNvSpPr>
+          <p:nvPr>
+            <p:ph type="sldNum" sz="quarter" idx="4294967295"/>
+          </p:nvPr>
+        </p:nvSpPr>
+        <p:spPr>
+          <a:xfrm>
+            <a:off x="8092440" y="4736592"/>
+            <a:ext cx="548640" cy="228600"/>
+          </a:xfrm>
+          <a:prstGeom prst="rect">
+            <a:avLst/>
+          </a:prstGeom>
+          <a:extLst>
+            <a:ext uri="{C572A759-6A51-4108-AA02-DFA0A04FC94B}">
+              <ma14:wrappingTextBoxFlag xmlns:ma14="http://schemas.microsoft.com/office/mac/drawingml/2011/main" xmlns="" val="0"/>
+            </a:ext>
+          </a:extLst>
+        </p:spPr>
+        <p:txBody>
+          <a:bodyPr/>
+          <a:lstStyle>
+            <a:lvl1pPr>
+              <a:defRPr sz="800">
+                <a:solidFill>
+                  <a:srgbClr val="6B7585"/>
+                </a:solidFill>
+              </a:defRPr>
+            </a:lvl1pPr>
+          </a:lstStyle>
+          <a:p>
+            <a:pPr algn="r"/>
+            <a:fld id="{F7021451-1387-4CA6-816F-3879F97B5CBC}" type="slidenum">
+              <a:rPr lang="en-US" b="0"/>
+              <a:t>11</a:t>
+            </a:fld>
+            <a:endParaRPr lang="en-US"/>
+          </a:p>
+        </p:txBody>
+      </p:sp>
+      <p:pic>
+        <p:nvPicPr>
+          <p:cNvPr id="26" name="cts logo" descr="cts-logo.png"/>
+          <p:cNvPicPr>
+            <a:picLocks noChangeAspect="1"/>
+          </p:cNvPicPr>
+          <p:nvPr/>
+        </p:nvPicPr>
+        <p:blipFill>
+          <a:blip r:embed="rId4"/>
+          <a:stretch>
+            <a:fillRect/>
+          </a:stretch>
+        </p:blipFill>
+        <p:spPr>
+          <a:xfrm>
+            <a:off x="7680959" y="182880"/>
+            <a:ext cx="960120" cy="539696"/>
+          </a:xfrm>
+          <a:prstGeom prst="rect">
+            <a:avLst/>
+          </a:prstGeom>
+        </p:spPr>
+      </p:pic>
+      <p:sp>
+        <p:nvSpPr>
+          <p:cNvPr id="8" name="Text 5b"/>
+          <p:cNvSpPr txBox="1"/>
+          <p:nvPr/>
+        </p:nvSpPr>
+        <p:spPr>
+          <a:xfrm>
+            <a:off x="4663440" y="3646931"/>
+            <a:ext cx="3703320" cy="952500"/>
+          </a:xfrm>
+          <a:prstGeom prst="rect">
+            <a:avLst/>
+          </a:prstGeom>
+          <a:noFill/>
+          <a:ln/>
+        </p:spPr>
+        <p:txBody>
+          <a:bodyPr wrap="square" lIns="0" tIns="0" rIns="0" bIns="0" rtlCol="0" anchor="t">
+            <a:normAutofit/>
+          </a:bodyPr>
+          <a:lstStyle/>
           <a:p>
             <a:pPr marL="342900" indent="-342900">
               <a:lnSpc>
@@ -6010,7 +6010,7 @@
               <a:buChar char="•"/>
             </a:pPr>
             <a:r>
-              <a:rPr lang="en-US" sz="700">
+              <a:rPr lang="en-US" sz="1000">
                 <a:solidFill>
                   <a:srgbClr val="3A4453"/>
                 </a:solidFill>
@@ -6031,7 +6031,7 @@
               <a:buChar char="•"/>
             </a:pPr>
             <a:r>
-              <a:rPr lang="en-US" sz="700">
+              <a:rPr lang="en-US" sz="1000">
                 <a:solidFill>
                   <a:srgbClr val="3A4453"/>
                 </a:solidFill>
@@ -6083,8 +6083,8 @@
         </p:blipFill>
         <p:spPr>
           <a:xfrm>
-            <a:off x="502920" y="1115568"/>
-            <a:ext cx="8138160" cy="2409752"/>
+            <a:off x="1184920" y="1115568"/>
+            <a:ext cx="6774159" cy="2005865"/>
           </a:xfrm>
           <a:prstGeom prst="rect">
             <a:avLst/>
@@ -6171,8 +6171,8 @@
         </p:nvSpPr>
         <p:spPr>
           <a:xfrm>
-            <a:off x="502920" y="3635048"/>
-            <a:ext cx="8138160" cy="991815"/>
+            <a:off x="502920" y="3231161"/>
+            <a:ext cx="8138160" cy="1395702"/>
           </a:xfrm>
           <a:prstGeom prst="rect">
             <a:avLst/>
@@ -6198,7 +6198,7 @@
         </p:nvSpPr>
         <p:spPr>
           <a:xfrm>
-            <a:off x="685800" y="3708200"/>
+            <a:off x="685800" y="3304313"/>
             <a:ext cx="2743200" cy="228600"/>
           </a:xfrm>
           <a:prstGeom prst="rect">
@@ -6234,8 +6234,8 @@
         </p:nvSpPr>
         <p:spPr>
           <a:xfrm>
-            <a:off x="685800" y="3881936"/>
-            <a:ext cx="3703320" cy="717495"/>
+            <a:off x="685800" y="3478049"/>
+            <a:ext cx="3703320" cy="1121382"/>
           </a:xfrm>
           <a:prstGeom prst="rect">
             <a:avLst/>
@@ -6260,7 +6260,7 @@
               <a:buChar char="•"/>
             </a:pPr>
             <a:r>
-              <a:rPr lang="en-US" sz="700">
+              <a:rPr lang="en-US" sz="1000">
                 <a:solidFill>
                   <a:srgbClr val="3A4453"/>
                 </a:solidFill>
@@ -6281,7 +6281,7 @@
               <a:buChar char="•"/>
             </a:pPr>
             <a:r>
-              <a:rPr lang="en-US" sz="700">
+              <a:rPr lang="en-US" sz="1000">
                 <a:solidFill>
                   <a:srgbClr val="3A4453"/>
                 </a:solidFill>
@@ -6290,99 +6290,6 @@
             </a:r>
             <a:endParaRPr lang="en-US" sz="900"/>
           </a:p>
-        </p:txBody>
-      </p:sp>
-      <p:sp>
-        <p:nvSpPr>
-          <p:cNvPr id="25" name="Slide Number Placeholder 0"/>
-          <p:cNvSpPr>
-            <a:spLocks noGrp="1"/>
-          </p:cNvSpPr>
-          <p:nvPr>
-            <p:ph type="sldNum" sz="quarter" idx="4294967295"/>
-          </p:nvPr>
-        </p:nvSpPr>
-        <p:spPr>
-          <a:xfrm>
-            <a:off x="8092440" y="4736592"/>
-            <a:ext cx="548640" cy="228600"/>
-          </a:xfrm>
-          <a:prstGeom prst="rect">
-            <a:avLst/>
-          </a:prstGeom>
-          <a:extLst>
-            <a:ext uri="{C572A759-6A51-4108-AA02-DFA0A04FC94B}">
-              <ma14:wrappingTextBoxFlag xmlns:ma14="http://schemas.microsoft.com/office/mac/drawingml/2011/main" xmlns="" val="0"/>
-            </a:ext>
-          </a:extLst>
-        </p:spPr>
-        <p:txBody>
-          <a:bodyPr/>
-          <a:lstStyle>
-            <a:lvl1pPr>
-              <a:defRPr sz="800">
-                <a:solidFill>
-                  <a:srgbClr val="6B7585"/>
-                </a:solidFill>
-              </a:defRPr>
-            </a:lvl1pPr>
-          </a:lstStyle>
-          <a:p>
-            <a:pPr algn="r"/>
-            <a:fld id="{F7021451-1387-4CA6-816F-3879F97B5CBC}" type="slidenum">
-              <a:rPr lang="en-US" b="0"/>
-              <a:t>12</a:t>
-            </a:fld>
-            <a:endParaRPr lang="en-US"/>
-          </a:p>
-        </p:txBody>
-      </p:sp>
-      <p:pic>
-        <p:nvPicPr>
-          <p:cNvPr id="26" name="cts logo" descr="cts-logo.png"/>
-          <p:cNvPicPr>
-            <a:picLocks noChangeAspect="1"/>
-          </p:cNvPicPr>
-          <p:nvPr/>
-        </p:nvPicPr>
-        <p:blipFill>
-          <a:blip r:embed="rId4"/>
-          <a:stretch>
-            <a:fillRect/>
-          </a:stretch>
-        </p:blipFill>
-        <p:spPr>
-          <a:xfrm>
-            <a:off x="7680959" y="182880"/>
-            <a:ext cx="960120" cy="539696"/>
-          </a:xfrm>
-          <a:prstGeom prst="rect">
-            <a:avLst/>
-          </a:prstGeom>
-        </p:spPr>
-      </p:pic>
-      <p:sp>
-        <p:nvSpPr>
-          <p:cNvPr id="8" name="Text 5b"/>
-          <p:cNvSpPr txBox="1"/>
-          <p:nvPr/>
-        </p:nvSpPr>
-        <p:spPr>
-          <a:xfrm>
-            <a:off x="4663440" y="3881936"/>
-            <a:ext cx="3703320" cy="717495"/>
-          </a:xfrm>
-          <a:prstGeom prst="rect">
-            <a:avLst/>
-          </a:prstGeom>
-          <a:noFill/>
-          <a:ln/>
-        </p:spPr>
-        <p:txBody>
-          <a:bodyPr wrap="square" lIns="0" tIns="0" rIns="0" bIns="0" rtlCol="0" anchor="t">
-            <a:normAutofit fontScale="92500"/>
-          </a:bodyPr>
-          <a:lstStyle/>
           <a:p>
             <a:pPr marL="342900" indent="-342900">
               <a:lnSpc>
@@ -6395,7 +6302,7 @@
               <a:buChar char="•"/>
             </a:pPr>
             <a:r>
-              <a:rPr lang="en-US" sz="700">
+              <a:rPr lang="en-US" sz="1000">
                 <a:solidFill>
                   <a:srgbClr val="3A4453"/>
                 </a:solidFill>
@@ -6404,6 +6311,99 @@
             </a:r>
             <a:endParaRPr lang="en-US" sz="900"/>
           </a:p>
+        </p:txBody>
+      </p:sp>
+      <p:sp>
+        <p:nvSpPr>
+          <p:cNvPr id="25" name="Slide Number Placeholder 0"/>
+          <p:cNvSpPr>
+            <a:spLocks noGrp="1"/>
+          </p:cNvSpPr>
+          <p:nvPr>
+            <p:ph type="sldNum" sz="quarter" idx="4294967295"/>
+          </p:nvPr>
+        </p:nvSpPr>
+        <p:spPr>
+          <a:xfrm>
+            <a:off x="8092440" y="4736592"/>
+            <a:ext cx="548640" cy="228600"/>
+          </a:xfrm>
+          <a:prstGeom prst="rect">
+            <a:avLst/>
+          </a:prstGeom>
+          <a:extLst>
+            <a:ext uri="{C572A759-6A51-4108-AA02-DFA0A04FC94B}">
+              <ma14:wrappingTextBoxFlag xmlns:ma14="http://schemas.microsoft.com/office/mac/drawingml/2011/main" xmlns="" val="0"/>
+            </a:ext>
+          </a:extLst>
+        </p:spPr>
+        <p:txBody>
+          <a:bodyPr/>
+          <a:lstStyle>
+            <a:lvl1pPr>
+              <a:defRPr sz="800">
+                <a:solidFill>
+                  <a:srgbClr val="6B7585"/>
+                </a:solidFill>
+              </a:defRPr>
+            </a:lvl1pPr>
+          </a:lstStyle>
+          <a:p>
+            <a:pPr algn="r"/>
+            <a:fld id="{F7021451-1387-4CA6-816F-3879F97B5CBC}" type="slidenum">
+              <a:rPr lang="en-US" b="0"/>
+              <a:t>12</a:t>
+            </a:fld>
+            <a:endParaRPr lang="en-US"/>
+          </a:p>
+        </p:txBody>
+      </p:sp>
+      <p:pic>
+        <p:nvPicPr>
+          <p:cNvPr id="26" name="cts logo" descr="cts-logo.png"/>
+          <p:cNvPicPr>
+            <a:picLocks noChangeAspect="1"/>
+          </p:cNvPicPr>
+          <p:nvPr/>
+        </p:nvPicPr>
+        <p:blipFill>
+          <a:blip r:embed="rId4"/>
+          <a:stretch>
+            <a:fillRect/>
+          </a:stretch>
+        </p:blipFill>
+        <p:spPr>
+          <a:xfrm>
+            <a:off x="7680959" y="182880"/>
+            <a:ext cx="960120" cy="539696"/>
+          </a:xfrm>
+          <a:prstGeom prst="rect">
+            <a:avLst/>
+          </a:prstGeom>
+        </p:spPr>
+      </p:pic>
+      <p:sp>
+        <p:nvSpPr>
+          <p:cNvPr id="8" name="Text 5b"/>
+          <p:cNvSpPr txBox="1"/>
+          <p:nvPr/>
+        </p:nvSpPr>
+        <p:spPr>
+          <a:xfrm>
+            <a:off x="4663440" y="3478049"/>
+            <a:ext cx="3703320" cy="1121382"/>
+          </a:xfrm>
+          <a:prstGeom prst="rect">
+            <a:avLst/>
+          </a:prstGeom>
+          <a:noFill/>
+          <a:ln/>
+        </p:spPr>
+        <p:txBody>
+          <a:bodyPr wrap="square" lIns="0" tIns="0" rIns="0" bIns="0" rtlCol="0" anchor="t">
+            <a:normAutofit fontScale="92500"/>
+          </a:bodyPr>
+          <a:lstStyle/>
           <a:p>
             <a:pPr marL="342900" indent="-342900">
               <a:lnSpc>
@@ -6416,7 +6416,7 @@
               <a:buChar char="•"/>
             </a:pPr>
             <a:r>
-              <a:rPr lang="en-US" sz="700">
+              <a:rPr lang="en-US" sz="1000">
                 <a:solidFill>
                   <a:srgbClr val="3A4453"/>
                 </a:solidFill>
@@ -6437,7 +6437,7 @@
               <a:buChar char="•"/>
             </a:pPr>
             <a:r>
-              <a:rPr lang="en-US" sz="700">
+              <a:rPr lang="en-US" sz="1000">
                 <a:solidFill>
                   <a:srgbClr val="3A4453"/>
                 </a:solidFill>
@@ -6489,8 +6489,8 @@
         </p:blipFill>
         <p:spPr>
           <a:xfrm>
-            <a:off x="502920" y="1115568"/>
-            <a:ext cx="8138160" cy="2409752"/>
+            <a:off x="1184920" y="1115568"/>
+            <a:ext cx="6774159" cy="2005865"/>
           </a:xfrm>
           <a:prstGeom prst="rect">
             <a:avLst/>
@@ -6577,8 +6577,8 @@
         </p:nvSpPr>
         <p:spPr>
           <a:xfrm>
-            <a:off x="502920" y="3635048"/>
-            <a:ext cx="8138160" cy="991815"/>
+            <a:off x="502920" y="3231161"/>
+            <a:ext cx="8138160" cy="1395702"/>
           </a:xfrm>
           <a:prstGeom prst="rect">
             <a:avLst/>
@@ -6604,7 +6604,7 @@
         </p:nvSpPr>
         <p:spPr>
           <a:xfrm>
-            <a:off x="685800" y="3708200"/>
+            <a:off x="685800" y="3304313"/>
             <a:ext cx="2743200" cy="228600"/>
           </a:xfrm>
           <a:prstGeom prst="rect">
@@ -6640,8 +6640,8 @@
         </p:nvSpPr>
         <p:spPr>
           <a:xfrm>
-            <a:off x="685800" y="3881936"/>
-            <a:ext cx="3703320" cy="717495"/>
+            <a:off x="685800" y="3478049"/>
+            <a:ext cx="3703320" cy="1121382"/>
           </a:xfrm>
           <a:prstGeom prst="rect">
             <a:avLst/>
@@ -6666,7 +6666,7 @@
               <a:buChar char="•"/>
             </a:pPr>
             <a:r>
-              <a:rPr lang="en-US" sz="750">
+              <a:rPr lang="en-US" sz="1000">
                 <a:solidFill>
                   <a:srgbClr val="3A4453"/>
                 </a:solidFill>
@@ -6687,7 +6687,7 @@
               <a:buChar char="•"/>
             </a:pPr>
             <a:r>
-              <a:rPr lang="en-US" sz="750">
+              <a:rPr lang="en-US" sz="1000">
                 <a:solidFill>
                   <a:srgbClr val="3A4453"/>
                 </a:solidFill>
@@ -6775,8 +6775,8 @@
         </p:nvSpPr>
         <p:spPr>
           <a:xfrm>
-            <a:off x="4663440" y="3881936"/>
-            <a:ext cx="3703320" cy="717495"/>
+            <a:off x="4663440" y="3478049"/>
+            <a:ext cx="3703320" cy="1121382"/>
           </a:xfrm>
           <a:prstGeom prst="rect">
             <a:avLst/>
@@ -6801,7 +6801,7 @@
               <a:buChar char="•"/>
             </a:pPr>
             <a:r>
-              <a:rPr lang="en-US" sz="750">
+              <a:rPr lang="en-US" sz="1000">
                 <a:solidFill>
                   <a:srgbClr val="3A4453"/>
                 </a:solidFill>
@@ -6822,7 +6822,7 @@
               <a:buChar char="•"/>
             </a:pPr>
             <a:r>
-              <a:rPr lang="en-US" sz="750">
+              <a:rPr lang="en-US" sz="1000">
                 <a:solidFill>
                   <a:srgbClr val="3A4453"/>
                 </a:solidFill>
@@ -6843,7 +6843,7 @@
               <a:buChar char="•"/>
             </a:pPr>
             <a:r>
-              <a:rPr lang="en-US" sz="750">
+              <a:rPr lang="en-US" sz="1000">
                 <a:solidFill>
                   <a:srgbClr val="3A4453"/>
                 </a:solidFill>
@@ -6895,8 +6895,8 @@
         </p:blipFill>
         <p:spPr>
           <a:xfrm>
-            <a:off x="1566715" y="1115568"/>
-            <a:ext cx="6010568" cy="2578607"/>
+            <a:off x="2234229" y="1115568"/>
+            <a:ext cx="4675541" cy="2005865"/>
           </a:xfrm>
           <a:prstGeom prst="rect">
             <a:avLst/>
@@ -6983,8 +6983,8 @@
         </p:nvSpPr>
         <p:spPr>
           <a:xfrm>
-            <a:off x="502920" y="3803903"/>
-            <a:ext cx="8138160" cy="822960"/>
+            <a:off x="502920" y="3231161"/>
+            <a:ext cx="8138160" cy="1395702"/>
           </a:xfrm>
           <a:prstGeom prst="rect">
             <a:avLst/>
@@ -7010,7 +7010,7 @@
         </p:nvSpPr>
         <p:spPr>
           <a:xfrm>
-            <a:off x="685800" y="3877055"/>
+            <a:off x="685800" y="3304313"/>
             <a:ext cx="2743200" cy="228600"/>
           </a:xfrm>
           <a:prstGeom prst="rect">
@@ -7046,8 +7046,8 @@
         </p:nvSpPr>
         <p:spPr>
           <a:xfrm>
-            <a:off x="685800" y="4050791"/>
-            <a:ext cx="3703320" cy="548640"/>
+            <a:off x="685800" y="3478049"/>
+            <a:ext cx="3703320" cy="1121382"/>
           </a:xfrm>
           <a:prstGeom prst="rect">
             <a:avLst/>
@@ -7072,7 +7072,7 @@
               <a:buChar char="•"/>
             </a:pPr>
             <a:r>
-              <a:rPr lang="en-US" sz="650">
+              <a:rPr lang="en-US" sz="1000">
                 <a:solidFill>
                   <a:srgbClr val="3A4453"/>
                 </a:solidFill>
@@ -7093,7 +7093,7 @@
               <a:buChar char="•"/>
             </a:pPr>
             <a:r>
-              <a:rPr lang="en-US" sz="650">
+              <a:rPr lang="en-US" sz="1000">
                 <a:solidFill>
                   <a:srgbClr val="3A4453"/>
                 </a:solidFill>
@@ -7181,8 +7181,8 @@
         </p:nvSpPr>
         <p:spPr>
           <a:xfrm>
-            <a:off x="4663440" y="4050791"/>
-            <a:ext cx="3703320" cy="548640"/>
+            <a:off x="4663440" y="3478049"/>
+            <a:ext cx="3703320" cy="1121382"/>
           </a:xfrm>
           <a:prstGeom prst="rect">
             <a:avLst/>
@@ -7207,7 +7207,7 @@
               <a:buChar char="•"/>
             </a:pPr>
             <a:r>
-              <a:rPr lang="en-US" sz="650">
+              <a:rPr lang="en-US" sz="1000">
                 <a:solidFill>
                   <a:srgbClr val="3A4453"/>
                 </a:solidFill>
@@ -7228,7 +7228,7 @@
               <a:buChar char="•"/>
             </a:pPr>
             <a:r>
-              <a:rPr lang="en-US" sz="650">
+              <a:rPr lang="en-US" sz="1000">
                 <a:solidFill>
                   <a:srgbClr val="3A4453"/>
                 </a:solidFill>
@@ -7249,7 +7249,7 @@
               <a:buChar char="•"/>
             </a:pPr>
             <a:r>
-              <a:rPr lang="en-US" sz="650">
+              <a:rPr lang="en-US" sz="1000">
                 <a:solidFill>
                   <a:srgbClr val="3A4453"/>
                 </a:solidFill>
@@ -7657,7 +7657,7 @@
         <p:spPr>
           <a:xfrm>
             <a:off x="502920" y="1444752"/>
-            <a:ext cx="5577840" cy="2820757"/>
+            <a:ext cx="4617719" cy="2335216"/>
           </a:xfrm>
           <a:prstGeom prst="rect">
             <a:avLst/>
@@ -7672,8 +7672,8 @@
         </p:nvSpPr>
         <p:spPr>
           <a:xfrm>
-            <a:off x="6263640" y="1463040"/>
-            <a:ext cx="2377440" cy="3154680"/>
+            <a:off x="5349239" y="1463040"/>
+            <a:ext cx="3291840" cy="3154680"/>
           </a:xfrm>
           <a:prstGeom prst="rect">
             <a:avLst/>
@@ -7699,8 +7699,8 @@
         </p:nvSpPr>
         <p:spPr>
           <a:xfrm>
-            <a:off x="6446520" y="1627632"/>
-            <a:ext cx="2011680" cy="228600"/>
+            <a:off x="5532119" y="1627632"/>
+            <a:ext cx="2926080" cy="228600"/>
           </a:xfrm>
           <a:prstGeom prst="rect">
             <a:avLst/>
@@ -7735,8 +7735,8 @@
         </p:nvSpPr>
         <p:spPr>
           <a:xfrm>
-            <a:off x="6446520" y="1901952"/>
-            <a:ext cx="2011680" cy="2551176"/>
+            <a:off x="5532119" y="1901952"/>
+            <a:ext cx="2926080" cy="2706623"/>
           </a:xfrm>
           <a:prstGeom prst="rect">
             <a:avLst/>
@@ -7761,7 +7761,7 @@
               <a:buChar char="•"/>
             </a:pPr>
             <a:r>
-              <a:rPr lang="en-US" sz="850">
+              <a:rPr lang="en-US" sz="1000">
                 <a:solidFill>
                   <a:srgbClr val="3A4453"/>
                 </a:solidFill>
@@ -7782,7 +7782,7 @@
               <a:buChar char="•"/>
             </a:pPr>
             <a:r>
-              <a:rPr lang="en-US" sz="850">
+              <a:rPr lang="en-US" sz="1000">
                 <a:solidFill>
                   <a:srgbClr val="3A4453"/>
                 </a:solidFill>
@@ -7803,7 +7803,7 @@
               <a:buChar char="•"/>
             </a:pPr>
             <a:r>
-              <a:rPr lang="en-US" sz="850">
+              <a:rPr lang="en-US" sz="1000">
                 <a:solidFill>
                   <a:srgbClr val="3A4453"/>
                 </a:solidFill>
@@ -7824,7 +7824,7 @@
               <a:buChar char="•"/>
             </a:pPr>
             <a:r>
-              <a:rPr lang="en-US" sz="850">
+              <a:rPr lang="en-US" sz="1000">
                 <a:solidFill>
                   <a:srgbClr val="3A4453"/>
                 </a:solidFill>
@@ -7845,7 +7845,7 @@
               <a:buChar char="•"/>
             </a:pPr>
             <a:r>
-              <a:rPr lang="en-US" sz="850">
+              <a:rPr lang="en-US" sz="1000">
                 <a:solidFill>
                   <a:srgbClr val="3A4453"/>
                 </a:solidFill>
@@ -8039,7 +8039,7 @@
         <p:spPr>
           <a:xfrm>
             <a:off x="502920" y="1444752"/>
-            <a:ext cx="5577840" cy="2569245"/>
+            <a:ext cx="5349239" cy="2463947"/>
           </a:xfrm>
           <a:prstGeom prst="rect">
             <a:avLst/>
@@ -8054,8 +8054,8 @@
         </p:nvSpPr>
         <p:spPr>
           <a:xfrm>
-            <a:off x="6263640" y="1463040"/>
-            <a:ext cx="2377440" cy="3154680"/>
+            <a:off x="6080759" y="1463040"/>
+            <a:ext cx="2560320" cy="3154680"/>
           </a:xfrm>
           <a:prstGeom prst="rect">
             <a:avLst/>
@@ -8081,8 +8081,8 @@
         </p:nvSpPr>
         <p:spPr>
           <a:xfrm>
-            <a:off x="6446520" y="1627632"/>
-            <a:ext cx="2011680" cy="228600"/>
+            <a:off x="6263639" y="1627632"/>
+            <a:ext cx="2194560" cy="228600"/>
           </a:xfrm>
           <a:prstGeom prst="rect">
             <a:avLst/>
@@ -8117,8 +8117,8 @@
         </p:nvSpPr>
         <p:spPr>
           <a:xfrm>
-            <a:off x="6446520" y="1901952"/>
-            <a:ext cx="2011680" cy="2551176"/>
+            <a:off x="6263639" y="1901952"/>
+            <a:ext cx="2194560" cy="2706623"/>
           </a:xfrm>
           <a:prstGeom prst="rect">
             <a:avLst/>
@@ -8143,7 +8143,7 @@
               <a:buChar char="•"/>
             </a:pPr>
             <a:r>
-              <a:rPr lang="en-US" sz="900">
+              <a:rPr lang="en-US" sz="1000">
                 <a:solidFill>
                   <a:srgbClr val="3A4453"/>
                 </a:solidFill>
@@ -8164,7 +8164,7 @@
               <a:buChar char="•"/>
             </a:pPr>
             <a:r>
-              <a:rPr lang="en-US" sz="900">
+              <a:rPr lang="en-US" sz="1000">
                 <a:solidFill>
                   <a:srgbClr val="3A4453"/>
                 </a:solidFill>
@@ -8185,7 +8185,7 @@
               <a:buChar char="•"/>
             </a:pPr>
             <a:r>
-              <a:rPr lang="en-US" sz="900">
+              <a:rPr lang="en-US" sz="1000">
                 <a:solidFill>
                   <a:srgbClr val="3A4453"/>
                 </a:solidFill>
@@ -8206,7 +8206,7 @@
               <a:buChar char="•"/>
             </a:pPr>
             <a:r>
-              <a:rPr lang="en-US" sz="900">
+              <a:rPr lang="en-US" sz="1000">
                 <a:solidFill>
                   <a:srgbClr val="3A4453"/>
                 </a:solidFill>
@@ -8227,7 +8227,7 @@
               <a:buChar char="•"/>
             </a:pPr>
             <a:r>
-              <a:rPr lang="en-US" sz="900">
+              <a:rPr lang="en-US" sz="1000">
                 <a:solidFill>
                   <a:srgbClr val="3A4453"/>
                 </a:solidFill>
@@ -8420,8 +8420,8 @@
         </p:blipFill>
         <p:spPr>
           <a:xfrm>
-            <a:off x="696031" y="1444752"/>
-            <a:ext cx="5191618" cy="3090672"/>
+            <a:off x="502920" y="1444752"/>
+            <a:ext cx="4892039" cy="2912327"/>
           </a:xfrm>
           <a:prstGeom prst="rect">
             <a:avLst/>
@@ -8436,8 +8436,8 @@
         </p:nvSpPr>
         <p:spPr>
           <a:xfrm>
-            <a:off x="6263640" y="1463040"/>
-            <a:ext cx="2377440" cy="3154680"/>
+            <a:off x="5623559" y="1463040"/>
+            <a:ext cx="3017520" cy="3154680"/>
           </a:xfrm>
           <a:prstGeom prst="rect">
             <a:avLst/>
@@ -8463,8 +8463,8 @@
         </p:nvSpPr>
         <p:spPr>
           <a:xfrm>
-            <a:off x="6446520" y="1627632"/>
-            <a:ext cx="2011680" cy="228600"/>
+            <a:off x="5806439" y="1627632"/>
+            <a:ext cx="2651760" cy="228600"/>
           </a:xfrm>
           <a:prstGeom prst="rect">
             <a:avLst/>
@@ -8499,8 +8499,8 @@
         </p:nvSpPr>
         <p:spPr>
           <a:xfrm>
-            <a:off x="6446520" y="1901952"/>
-            <a:ext cx="2011680" cy="2551176"/>
+            <a:off x="5806439" y="1901952"/>
+            <a:ext cx="2651760" cy="2706623"/>
           </a:xfrm>
           <a:prstGeom prst="rect">
             <a:avLst/>
@@ -8525,7 +8525,7 @@
               <a:buChar char="•"/>
             </a:pPr>
             <a:r>
-              <a:rPr lang="en-US" sz="850">
+              <a:rPr lang="en-US" sz="1000">
                 <a:solidFill>
                   <a:srgbClr val="3A4453"/>
                 </a:solidFill>
@@ -8546,7 +8546,7 @@
               <a:buChar char="•"/>
             </a:pPr>
             <a:r>
-              <a:rPr lang="en-US" sz="850">
+              <a:rPr lang="en-US" sz="1000">
                 <a:solidFill>
                   <a:srgbClr val="3A4453"/>
                 </a:solidFill>
@@ -8567,7 +8567,7 @@
               <a:buChar char="•"/>
             </a:pPr>
             <a:r>
-              <a:rPr lang="en-US" sz="850">
+              <a:rPr lang="en-US" sz="1000">
                 <a:solidFill>
                   <a:srgbClr val="3A4453"/>
                 </a:solidFill>
@@ -8588,7 +8588,7 @@
               <a:buChar char="•"/>
             </a:pPr>
             <a:r>
-              <a:rPr lang="en-US" sz="850">
+              <a:rPr lang="en-US" sz="1000">
                 <a:solidFill>
                   <a:srgbClr val="3A4453"/>
                 </a:solidFill>
@@ -8609,7 +8609,7 @@
               <a:buChar char="•"/>
             </a:pPr>
             <a:r>
-              <a:rPr lang="en-US" sz="850">
+              <a:rPr lang="en-US" sz="1000">
                 <a:solidFill>
                   <a:srgbClr val="3A4453"/>
                 </a:solidFill>
@@ -8802,8 +8802,8 @@
         </p:blipFill>
         <p:spPr>
           <a:xfrm>
-            <a:off x="502920" y="1389888"/>
-            <a:ext cx="8138160" cy="2175629"/>
+            <a:off x="916552" y="1389888"/>
+            <a:ext cx="7310895" cy="1954470"/>
           </a:xfrm>
           <a:prstGeom prst="rect">
             <a:avLst/>
@@ -8818,8 +8818,8 @@
         </p:nvSpPr>
         <p:spPr>
           <a:xfrm>
-            <a:off x="502920" y="3675888"/>
-            <a:ext cx="8138160" cy="950976"/>
+            <a:off x="502920" y="3454086"/>
+            <a:ext cx="8138160" cy="1172777"/>
           </a:xfrm>
           <a:prstGeom prst="rect">
             <a:avLst/>
@@ -8845,7 +8845,7 @@
         </p:nvSpPr>
         <p:spPr>
           <a:xfrm>
-            <a:off x="685800" y="3758184"/>
+            <a:off x="685800" y="3527238"/>
             <a:ext cx="2743200" cy="164592"/>
           </a:xfrm>
           <a:prstGeom prst="rect">
@@ -8881,8 +8881,8 @@
         </p:nvSpPr>
         <p:spPr>
           <a:xfrm>
-            <a:off x="685800" y="3941064"/>
-            <a:ext cx="3703320" cy="621792"/>
+            <a:off x="685800" y="3700974"/>
+            <a:ext cx="3703320" cy="898457"/>
           </a:xfrm>
           <a:prstGeom prst="rect">
             <a:avLst/>
@@ -8907,7 +8907,7 @@
               <a:buChar char="•"/>
             </a:pPr>
             <a:r>
-              <a:rPr lang="en-US" sz="850">
+              <a:rPr lang="en-US" sz="1000">
                 <a:solidFill>
                   <a:srgbClr val="3A4453"/>
                 </a:solidFill>
@@ -8928,7 +8928,7 @@
               <a:buChar char="•"/>
             </a:pPr>
             <a:r>
-              <a:rPr lang="en-US" sz="850">
+              <a:rPr lang="en-US" sz="1000">
                 <a:solidFill>
                   <a:srgbClr val="3A4453"/>
                 </a:solidFill>
@@ -8947,8 +8947,8 @@
         </p:nvSpPr>
         <p:spPr>
           <a:xfrm>
-            <a:off x="4663440" y="3941064"/>
-            <a:ext cx="3703320" cy="621792"/>
+            <a:off x="4663440" y="3700974"/>
+            <a:ext cx="3703320" cy="898457"/>
           </a:xfrm>
           <a:prstGeom prst="rect">
             <a:avLst/>
@@ -8973,7 +8973,7 @@
               <a:buChar char="•"/>
             </a:pPr>
             <a:r>
-              <a:rPr lang="en-US" sz="850">
+              <a:rPr lang="en-US" sz="1000">
                 <a:solidFill>
                   <a:srgbClr val="3A4453"/>
                 </a:solidFill>
@@ -8994,7 +8994,7 @@
               <a:buChar char="•"/>
             </a:pPr>
             <a:r>
-              <a:rPr lang="en-US" sz="850">
+              <a:rPr lang="en-US" sz="1000">
                 <a:solidFill>
                   <a:srgbClr val="3A4453"/>
                 </a:solidFill>
@@ -10312,7 +10312,7 @@
         <p:spPr>
           <a:xfrm>
             <a:off x="502920" y="1444752"/>
-            <a:ext cx="5577840" cy="2818123"/>
+            <a:ext cx="5074919" cy="2564030"/>
           </a:xfrm>
           <a:prstGeom prst="rect">
             <a:avLst/>
@@ -10327,8 +10327,8 @@
         </p:nvSpPr>
         <p:spPr>
           <a:xfrm>
-            <a:off x="6263640" y="1463040"/>
-            <a:ext cx="2377440" cy="3154680"/>
+            <a:off x="5806439" y="1463040"/>
+            <a:ext cx="2834640" cy="3154680"/>
           </a:xfrm>
           <a:prstGeom prst="rect">
             <a:avLst/>
@@ -10354,8 +10354,8 @@
         </p:nvSpPr>
         <p:spPr>
           <a:xfrm>
-            <a:off x="6446520" y="1627632"/>
-            <a:ext cx="2011680" cy="228600"/>
+            <a:off x="5989319" y="1627632"/>
+            <a:ext cx="2468880" cy="228600"/>
           </a:xfrm>
           <a:prstGeom prst="rect">
             <a:avLst/>
@@ -10390,8 +10390,8 @@
         </p:nvSpPr>
         <p:spPr>
           <a:xfrm>
-            <a:off x="6446520" y="1901952"/>
-            <a:ext cx="2011680" cy="2551176"/>
+            <a:off x="5989319" y="1901952"/>
+            <a:ext cx="2468880" cy="2706623"/>
           </a:xfrm>
           <a:prstGeom prst="rect">
             <a:avLst/>
@@ -10416,7 +10416,7 @@
               <a:buChar char="•"/>
             </a:pPr>
             <a:r>
-              <a:rPr lang="en-US" sz="900">
+              <a:rPr lang="en-US" sz="1000">
                 <a:solidFill>
                   <a:srgbClr val="3A4453"/>
                 </a:solidFill>
@@ -10437,7 +10437,7 @@
               <a:buChar char="•"/>
             </a:pPr>
             <a:r>
-              <a:rPr lang="en-US" sz="900">
+              <a:rPr lang="en-US" sz="1000">
                 <a:solidFill>
                   <a:srgbClr val="3A4453"/>
                 </a:solidFill>
@@ -10458,7 +10458,7 @@
               <a:buChar char="•"/>
             </a:pPr>
             <a:r>
-              <a:rPr lang="en-US" sz="900">
+              <a:rPr lang="en-US" sz="1000">
                 <a:solidFill>
                   <a:srgbClr val="3A4453"/>
                 </a:solidFill>
@@ -10479,7 +10479,7 @@
               <a:buChar char="•"/>
             </a:pPr>
             <a:r>
-              <a:rPr lang="en-US" sz="900">
+              <a:rPr lang="en-US" sz="1000">
                 <a:solidFill>
                   <a:srgbClr val="3A4453"/>
                 </a:solidFill>
@@ -10500,7 +10500,7 @@
               <a:buChar char="•"/>
             </a:pPr>
             <a:r>
-              <a:rPr lang="en-US" sz="900">
+              <a:rPr lang="en-US" sz="1000">
                 <a:solidFill>
                   <a:srgbClr val="3A4453"/>
                 </a:solidFill>
@@ -10694,7 +10694,7 @@
         <p:spPr>
           <a:xfrm>
             <a:off x="502920" y="1444752"/>
-            <a:ext cx="5577840" cy="2900215"/>
+            <a:ext cx="5257799" cy="2733809"/>
           </a:xfrm>
           <a:prstGeom prst="rect">
             <a:avLst/>
@@ -10709,8 +10709,8 @@
         </p:nvSpPr>
         <p:spPr>
           <a:xfrm>
-            <a:off x="6263640" y="1463040"/>
-            <a:ext cx="2377440" cy="3154680"/>
+            <a:off x="5989319" y="1463040"/>
+            <a:ext cx="2651760" cy="3154680"/>
           </a:xfrm>
           <a:prstGeom prst="rect">
             <a:avLst/>
@@ -10736,8 +10736,8 @@
         </p:nvSpPr>
         <p:spPr>
           <a:xfrm>
-            <a:off x="6446520" y="1627632"/>
-            <a:ext cx="2011680" cy="228600"/>
+            <a:off x="6172199" y="1627632"/>
+            <a:ext cx="2286000" cy="228600"/>
           </a:xfrm>
           <a:prstGeom prst="rect">
             <a:avLst/>
@@ -10772,8 +10772,8 @@
         </p:nvSpPr>
         <p:spPr>
           <a:xfrm>
-            <a:off x="6446520" y="1901952"/>
-            <a:ext cx="2011680" cy="2551176"/>
+            <a:off x="6172199" y="1901952"/>
+            <a:ext cx="2286000" cy="2706623"/>
           </a:xfrm>
           <a:prstGeom prst="rect">
             <a:avLst/>
@@ -11075,8 +11075,8 @@
         </p:blipFill>
         <p:spPr>
           <a:xfrm>
-            <a:off x="988263" y="1444752"/>
-            <a:ext cx="4607153" cy="3090672"/>
+            <a:off x="502920" y="1444752"/>
+            <a:ext cx="4675306" cy="3136391"/>
           </a:xfrm>
           <a:prstGeom prst="rect">
             <a:avLst/>
@@ -11091,8 +11091,8 @@
         </p:nvSpPr>
         <p:spPr>
           <a:xfrm>
-            <a:off x="6263640" y="1463040"/>
-            <a:ext cx="2377440" cy="3154680"/>
+            <a:off x="5440679" y="1463040"/>
+            <a:ext cx="3200400" cy="3154680"/>
           </a:xfrm>
           <a:prstGeom prst="rect">
             <a:avLst/>
@@ -11118,8 +11118,8 @@
         </p:nvSpPr>
         <p:spPr>
           <a:xfrm>
-            <a:off x="6446520" y="1627632"/>
-            <a:ext cx="2011680" cy="228600"/>
+            <a:off x="5623559" y="1627632"/>
+            <a:ext cx="2834640" cy="228600"/>
           </a:xfrm>
           <a:prstGeom prst="rect">
             <a:avLst/>
@@ -11154,8 +11154,8 @@
         </p:nvSpPr>
         <p:spPr>
           <a:xfrm>
-            <a:off x="6446520" y="1901952"/>
-            <a:ext cx="2011680" cy="2551176"/>
+            <a:off x="5623559" y="1901952"/>
+            <a:ext cx="2834640" cy="2706623"/>
           </a:xfrm>
           <a:prstGeom prst="rect">
             <a:avLst/>
@@ -11180,7 +11180,7 @@
               <a:buChar char="•"/>
             </a:pPr>
             <a:r>
-              <a:rPr lang="en-US" sz="950">
+              <a:rPr lang="en-US" sz="1000">
                 <a:solidFill>
                   <a:srgbClr val="3A4453"/>
                 </a:solidFill>
@@ -11201,7 +11201,7 @@
               <a:buChar char="•"/>
             </a:pPr>
             <a:r>
-              <a:rPr lang="en-US" sz="950">
+              <a:rPr lang="en-US" sz="1000">
                 <a:solidFill>
                   <a:srgbClr val="3A4453"/>
                 </a:solidFill>
@@ -11222,7 +11222,7 @@
               <a:buChar char="•"/>
             </a:pPr>
             <a:r>
-              <a:rPr lang="en-US" sz="950">
+              <a:rPr lang="en-US" sz="1000">
                 <a:solidFill>
                   <a:srgbClr val="3A4453"/>
                 </a:solidFill>
@@ -11243,7 +11243,7 @@
               <a:buChar char="•"/>
             </a:pPr>
             <a:r>
-              <a:rPr lang="en-US" sz="950">
+              <a:rPr lang="en-US" sz="1000">
                 <a:solidFill>
                   <a:srgbClr val="3A4453"/>
                 </a:solidFill>
@@ -11264,7 +11264,7 @@
               <a:buChar char="•"/>
             </a:pPr>
             <a:r>
-              <a:rPr lang="en-US" sz="950">
+              <a:rPr lang="en-US" sz="1000">
                 <a:solidFill>
                   <a:srgbClr val="3A4453"/>
                 </a:solidFill>
@@ -11756,8 +11756,8 @@
         </p:nvSpPr>
         <p:spPr>
           <a:xfrm>
-            <a:off x="502920" y="3675888"/>
-            <a:ext cx="8138160" cy="950976"/>
+            <a:off x="502920" y="3454086"/>
+            <a:ext cx="8138160" cy="1172777"/>
           </a:xfrm>
           <a:prstGeom prst="rect">
             <a:avLst/>
@@ -11783,7 +11783,7 @@
         </p:nvSpPr>
         <p:spPr>
           <a:xfrm>
-            <a:off x="685800" y="3758184"/>
+            <a:off x="685800" y="3527238"/>
             <a:ext cx="2743200" cy="164592"/>
           </a:xfrm>
           <a:prstGeom prst="rect">
@@ -11819,8 +11819,8 @@
         </p:nvSpPr>
         <p:spPr>
           <a:xfrm>
-            <a:off x="685800" y="3941064"/>
-            <a:ext cx="3703320" cy="621792"/>
+            <a:off x="685800" y="3700974"/>
+            <a:ext cx="3703320" cy="898457"/>
           </a:xfrm>
           <a:prstGeom prst="rect">
             <a:avLst/>
@@ -11845,7 +11845,7 @@
               <a:buChar char="•"/>
             </a:pPr>
             <a:r>
-              <a:rPr lang="en-US" sz="850">
+              <a:rPr lang="en-US" sz="1000">
                 <a:solidFill>
                   <a:srgbClr val="3A4453"/>
                 </a:solidFill>
@@ -11866,7 +11866,7 @@
               <a:buChar char="•"/>
             </a:pPr>
             <a:r>
-              <a:rPr lang="en-US" sz="850">
+              <a:rPr lang="en-US" sz="1000">
                 <a:solidFill>
                   <a:srgbClr val="3A4453"/>
                 </a:solidFill>
@@ -11885,8 +11885,8 @@
         </p:nvSpPr>
         <p:spPr>
           <a:xfrm>
-            <a:off x="4663440" y="3941064"/>
-            <a:ext cx="3703320" cy="621792"/>
+            <a:off x="4663440" y="3700974"/>
+            <a:ext cx="3703320" cy="898457"/>
           </a:xfrm>
           <a:prstGeom prst="rect">
             <a:avLst/>
@@ -11911,7 +11911,7 @@
               <a:buChar char="•"/>
             </a:pPr>
             <a:r>
-              <a:rPr lang="en-US" sz="850">
+              <a:rPr lang="en-US" sz="1000">
                 <a:solidFill>
                   <a:srgbClr val="3A4453"/>
                 </a:solidFill>
@@ -11932,7 +11932,7 @@
               <a:buChar char="•"/>
             </a:pPr>
             <a:r>
-              <a:rPr lang="en-US" sz="850">
+              <a:rPr lang="en-US" sz="1000">
                 <a:solidFill>
                   <a:srgbClr val="3A4453"/>
                 </a:solidFill>
@@ -12126,7 +12126,7 @@
         <p:spPr>
           <a:xfrm>
             <a:off x="502920" y="1444752"/>
-            <a:ext cx="5577840" cy="3045909"/>
+            <a:ext cx="5074919" cy="2771278"/>
           </a:xfrm>
           <a:prstGeom prst="rect">
             <a:avLst/>
@@ -12141,8 +12141,8 @@
         </p:nvSpPr>
         <p:spPr>
           <a:xfrm>
-            <a:off x="6263640" y="1463040"/>
-            <a:ext cx="2377440" cy="3154680"/>
+            <a:off x="5806439" y="1463040"/>
+            <a:ext cx="2834640" cy="3154680"/>
           </a:xfrm>
           <a:prstGeom prst="rect">
             <a:avLst/>
@@ -12168,8 +12168,8 @@
         </p:nvSpPr>
         <p:spPr>
           <a:xfrm>
-            <a:off x="6446520" y="1627632"/>
-            <a:ext cx="2011680" cy="228600"/>
+            <a:off x="5989319" y="1627632"/>
+            <a:ext cx="2468880" cy="228600"/>
           </a:xfrm>
           <a:prstGeom prst="rect">
             <a:avLst/>
@@ -12204,8 +12204,8 @@
         </p:nvSpPr>
         <p:spPr>
           <a:xfrm>
-            <a:off x="6446520" y="1901952"/>
-            <a:ext cx="2011680" cy="2551176"/>
+            <a:off x="5989319" y="1901952"/>
+            <a:ext cx="2468880" cy="2706623"/>
           </a:xfrm>
           <a:prstGeom prst="rect">
             <a:avLst/>
@@ -12230,7 +12230,7 @@
               <a:buChar char="•"/>
             </a:pPr>
             <a:r>
-              <a:rPr lang="en-US" sz="850">
+              <a:rPr lang="en-US" sz="1000">
                 <a:solidFill>
                   <a:srgbClr val="3A4453"/>
                 </a:solidFill>
@@ -12251,7 +12251,7 @@
               <a:buChar char="•"/>
             </a:pPr>
             <a:r>
-              <a:rPr lang="en-US" sz="850">
+              <a:rPr lang="en-US" sz="1000">
                 <a:solidFill>
                   <a:srgbClr val="3A4453"/>
                 </a:solidFill>
@@ -12272,7 +12272,7 @@
               <a:buChar char="•"/>
             </a:pPr>
             <a:r>
-              <a:rPr lang="en-US" sz="850">
+              <a:rPr lang="en-US" sz="1000">
                 <a:solidFill>
                   <a:srgbClr val="3A4453"/>
                 </a:solidFill>
@@ -12293,7 +12293,7 @@
               <a:buChar char="•"/>
             </a:pPr>
             <a:r>
-              <a:rPr lang="en-US" sz="850">
+              <a:rPr lang="en-US" sz="1000">
                 <a:solidFill>
                   <a:srgbClr val="3A4453"/>
                 </a:solidFill>
@@ -12314,7 +12314,7 @@
               <a:buChar char="•"/>
             </a:pPr>
             <a:r>
-              <a:rPr lang="en-US" sz="850">
+              <a:rPr lang="en-US" sz="1000">
                 <a:solidFill>
                   <a:srgbClr val="3A4453"/>
                 </a:solidFill>
@@ -12508,7 +12508,7 @@
         <p:spPr>
           <a:xfrm>
             <a:off x="502920" y="1444752"/>
-            <a:ext cx="5577840" cy="2587417"/>
+            <a:ext cx="4800599" cy="2226875"/>
           </a:xfrm>
           <a:prstGeom prst="rect">
             <a:avLst/>
@@ -12523,8 +12523,8 @@
         </p:nvSpPr>
         <p:spPr>
           <a:xfrm>
-            <a:off x="6263640" y="1463040"/>
-            <a:ext cx="2377440" cy="3154680"/>
+            <a:off x="5532119" y="1463040"/>
+            <a:ext cx="3108960" cy="3154680"/>
           </a:xfrm>
           <a:prstGeom prst="rect">
             <a:avLst/>
@@ -12550,8 +12550,8 @@
         </p:nvSpPr>
         <p:spPr>
           <a:xfrm>
-            <a:off x="6446520" y="1627632"/>
-            <a:ext cx="2011680" cy="228600"/>
+            <a:off x="5714999" y="1627632"/>
+            <a:ext cx="2743200" cy="228600"/>
           </a:xfrm>
           <a:prstGeom prst="rect">
             <a:avLst/>
@@ -12586,8 +12586,8 @@
         </p:nvSpPr>
         <p:spPr>
           <a:xfrm>
-            <a:off x="6446520" y="1901952"/>
-            <a:ext cx="2011680" cy="2551176"/>
+            <a:off x="5714999" y="1901952"/>
+            <a:ext cx="2743200" cy="2706623"/>
           </a:xfrm>
           <a:prstGeom prst="rect">
             <a:avLst/>
@@ -12612,7 +12612,7 @@
               <a:buChar char="•"/>
             </a:pPr>
             <a:r>
-              <a:rPr lang="en-US" sz="850">
+              <a:rPr lang="en-US" sz="1000">
                 <a:solidFill>
                   <a:srgbClr val="3A4453"/>
                 </a:solidFill>
@@ -12633,7 +12633,7 @@
               <a:buChar char="•"/>
             </a:pPr>
             <a:r>
-              <a:rPr lang="en-US" sz="850">
+              <a:rPr lang="en-US" sz="1000">
                 <a:solidFill>
                   <a:srgbClr val="3A4453"/>
                 </a:solidFill>
@@ -12654,7 +12654,7 @@
               <a:buChar char="•"/>
             </a:pPr>
             <a:r>
-              <a:rPr lang="en-US" sz="850">
+              <a:rPr lang="en-US" sz="1000">
                 <a:solidFill>
                   <a:srgbClr val="3A4453"/>
                 </a:solidFill>
@@ -12675,7 +12675,7 @@
               <a:buChar char="•"/>
             </a:pPr>
             <a:r>
-              <a:rPr lang="en-US" sz="850">
+              <a:rPr lang="en-US" sz="1000">
                 <a:solidFill>
                   <a:srgbClr val="3A4453"/>
                 </a:solidFill>
@@ -12696,7 +12696,7 @@
               <a:buChar char="•"/>
             </a:pPr>
             <a:r>
-              <a:rPr lang="en-US" sz="850">
+              <a:rPr lang="en-US" sz="1000">
                 <a:solidFill>
                   <a:srgbClr val="3A4453"/>
                 </a:solidFill>
@@ -13173,7 +13173,7 @@
         <p:spPr>
           <a:xfrm>
             <a:off x="502920" y="1444752"/>
-            <a:ext cx="5577840" cy="2604071"/>
+            <a:ext cx="4709159" cy="2198519"/>
           </a:xfrm>
           <a:prstGeom prst="rect">
             <a:avLst/>
@@ -13188,8 +13188,8 @@
         </p:nvSpPr>
         <p:spPr>
           <a:xfrm>
-            <a:off x="6263640" y="1463040"/>
-            <a:ext cx="2377440" cy="3154680"/>
+            <a:off x="5440679" y="1463040"/>
+            <a:ext cx="3200400" cy="3154680"/>
           </a:xfrm>
           <a:prstGeom prst="rect">
             <a:avLst/>
@@ -13215,8 +13215,8 @@
         </p:nvSpPr>
         <p:spPr>
           <a:xfrm>
-            <a:off x="6446520" y="1627632"/>
-            <a:ext cx="2011680" cy="228600"/>
+            <a:off x="5623559" y="1627632"/>
+            <a:ext cx="2834640" cy="228600"/>
           </a:xfrm>
           <a:prstGeom prst="rect">
             <a:avLst/>
@@ -13251,8 +13251,8 @@
         </p:nvSpPr>
         <p:spPr>
           <a:xfrm>
-            <a:off x="6446520" y="1901952"/>
-            <a:ext cx="2011680" cy="2551176"/>
+            <a:off x="5623559" y="1901952"/>
+            <a:ext cx="2834640" cy="2706623"/>
           </a:xfrm>
           <a:prstGeom prst="rect">
             <a:avLst/>
@@ -13277,7 +13277,7 @@
               <a:buChar char="•"/>
             </a:pPr>
             <a:r>
-              <a:rPr lang="en-US" sz="900">
+              <a:rPr lang="en-US" sz="1000">
                 <a:solidFill>
                   <a:srgbClr val="3A4453"/>
                 </a:solidFill>
@@ -13298,7 +13298,7 @@
               <a:buChar char="•"/>
             </a:pPr>
             <a:r>
-              <a:rPr lang="en-US" sz="900">
+              <a:rPr lang="en-US" sz="1000">
                 <a:solidFill>
                   <a:srgbClr val="3A4453"/>
                 </a:solidFill>
@@ -13319,7 +13319,7 @@
               <a:buChar char="•"/>
             </a:pPr>
             <a:r>
-              <a:rPr lang="en-US" sz="900">
+              <a:rPr lang="en-US" sz="1000">
                 <a:solidFill>
                   <a:srgbClr val="3A4453"/>
                 </a:solidFill>
@@ -13340,7 +13340,7 @@
               <a:buChar char="•"/>
             </a:pPr>
             <a:r>
-              <a:rPr lang="en-US" sz="900">
+              <a:rPr lang="en-US" sz="1000">
                 <a:solidFill>
                   <a:srgbClr val="3A4453"/>
                 </a:solidFill>
@@ -13361,7 +13361,7 @@
               <a:buChar char="•"/>
             </a:pPr>
             <a:r>
-              <a:rPr lang="en-US" sz="900">
+              <a:rPr lang="en-US" sz="1000">
                 <a:solidFill>
                   <a:srgbClr val="3A4453"/>
                 </a:solidFill>
@@ -18795,8 +18795,8 @@
         </p:blipFill>
         <p:spPr>
           <a:xfrm>
-            <a:off x="502920" y="1261872"/>
-            <a:ext cx="8138160" cy="2238849"/>
+            <a:off x="1192271" y="1261872"/>
+            <a:ext cx="6759456" cy="1859561"/>
           </a:xfrm>
           <a:prstGeom prst="rect">
             <a:avLst/>
@@ -18883,8 +18883,8 @@
         </p:nvSpPr>
         <p:spPr>
           <a:xfrm>
-            <a:off x="502920" y="3511296"/>
-            <a:ext cx="8138160" cy="1115568"/>
+            <a:off x="502920" y="3231161"/>
+            <a:ext cx="8138160" cy="1395702"/>
           </a:xfrm>
           <a:prstGeom prst="rect">
             <a:avLst/>
@@ -18910,7 +18910,7 @@
         </p:nvSpPr>
         <p:spPr>
           <a:xfrm>
-            <a:off x="685800" y="3593591"/>
+            <a:off x="685800" y="3304313"/>
             <a:ext cx="2743200" cy="228600"/>
           </a:xfrm>
           <a:prstGeom prst="rect">
@@ -18946,8 +18946,8 @@
         </p:nvSpPr>
         <p:spPr>
           <a:xfrm>
-            <a:off x="685800" y="3776472"/>
-            <a:ext cx="3703320" cy="813815"/>
+            <a:off x="685800" y="3478049"/>
+            <a:ext cx="3703320" cy="1121382"/>
           </a:xfrm>
           <a:prstGeom prst="rect">
             <a:avLst/>
@@ -18972,7 +18972,7 @@
               <a:buChar char="•"/>
             </a:pPr>
             <a:r>
-              <a:rPr lang="en-US" sz="800">
+              <a:rPr lang="en-US" sz="1000">
                 <a:solidFill>
                   <a:srgbClr val="3A4453"/>
                 </a:solidFill>
@@ -18993,7 +18993,7 @@
               <a:buChar char="•"/>
             </a:pPr>
             <a:r>
-              <a:rPr lang="en-US" sz="800">
+              <a:rPr lang="en-US" sz="1000">
                 <a:solidFill>
                   <a:srgbClr val="3A4453"/>
                 </a:solidFill>
@@ -19057,8 +19057,8 @@
         </p:nvSpPr>
         <p:spPr>
           <a:xfrm>
-            <a:off x="4663440" y="3776472"/>
-            <a:ext cx="3703320" cy="813815"/>
+            <a:off x="4663440" y="3478049"/>
+            <a:ext cx="3703320" cy="1121382"/>
           </a:xfrm>
           <a:prstGeom prst="rect">
             <a:avLst/>
@@ -19083,7 +19083,7 @@
               <a:buChar char="•"/>
             </a:pPr>
             <a:r>
-              <a:rPr lang="en-US" sz="800">
+              <a:rPr lang="en-US" sz="1000">
                 <a:solidFill>
                   <a:srgbClr val="3A4453"/>
                 </a:solidFill>
@@ -19104,7 +19104,7 @@
               <a:buChar char="•"/>
             </a:pPr>
             <a:r>
-              <a:rPr lang="en-US" sz="800">
+              <a:rPr lang="en-US" sz="1000">
                 <a:solidFill>
                   <a:srgbClr val="3A4453"/>
                 </a:solidFill>
@@ -19125,7 +19125,7 @@
               <a:buChar char="•"/>
             </a:pPr>
             <a:r>
-              <a:rPr lang="en-US" sz="800">
+              <a:rPr lang="en-US" sz="1000">
                 <a:solidFill>
                   <a:srgbClr val="3A4453"/>
                 </a:solidFill>
@@ -19201,8 +19201,8 @@
         </p:blipFill>
         <p:spPr>
           <a:xfrm>
-            <a:off x="502920" y="1115568"/>
-            <a:ext cx="8138160" cy="2231247"/>
+            <a:off x="1221933" y="1115568"/>
+            <a:ext cx="6700133" cy="1836982"/>
           </a:xfrm>
           <a:prstGeom prst="rect">
             <a:avLst/>
@@ -19289,8 +19289,8 @@
         </p:nvSpPr>
         <p:spPr>
           <a:xfrm>
-            <a:off x="502920" y="3456543"/>
-            <a:ext cx="8138160" cy="1170320"/>
+            <a:off x="502920" y="3062278"/>
+            <a:ext cx="8138160" cy="1564585"/>
           </a:xfrm>
           <a:prstGeom prst="rect">
             <a:avLst/>
@@ -19316,7 +19316,7 @@
         </p:nvSpPr>
         <p:spPr>
           <a:xfrm>
-            <a:off x="685800" y="3529695"/>
+            <a:off x="685800" y="3135430"/>
             <a:ext cx="2743200" cy="228600"/>
           </a:xfrm>
           <a:prstGeom prst="rect">
@@ -19352,8 +19352,8 @@
         </p:nvSpPr>
         <p:spPr>
           <a:xfrm>
-            <a:off x="685800" y="3703431"/>
-            <a:ext cx="3703320" cy="896000"/>
+            <a:off x="685800" y="3309166"/>
+            <a:ext cx="3703320" cy="1290265"/>
           </a:xfrm>
           <a:prstGeom prst="rect">
             <a:avLst/>
@@ -19378,7 +19378,7 @@
               <a:buChar char="•"/>
             </a:pPr>
             <a:r>
-              <a:rPr lang="en-US" sz="650">
+              <a:rPr lang="en-US" sz="1000">
                 <a:solidFill>
                   <a:srgbClr val="3A4453"/>
                 </a:solidFill>
@@ -19399,7 +19399,7 @@
               <a:buChar char="•"/>
             </a:pPr>
             <a:r>
-              <a:rPr lang="en-US" sz="650">
+              <a:rPr lang="en-US" sz="1000">
                 <a:solidFill>
                   <a:srgbClr val="3A4453"/>
                 </a:solidFill>
@@ -19408,99 +19408,6 @@
             </a:r>
             <a:endParaRPr lang="en-US" sz="800"/>
           </a:p>
-        </p:txBody>
-      </p:sp>
-      <p:sp>
-        <p:nvSpPr>
-          <p:cNvPr id="25" name="Slide Number Placeholder 0"/>
-          <p:cNvSpPr>
-            <a:spLocks noGrp="1"/>
-          </p:cNvSpPr>
-          <p:nvPr>
-            <p:ph type="sldNum" sz="quarter" idx="4294967295"/>
-          </p:nvPr>
-        </p:nvSpPr>
-        <p:spPr>
-          <a:xfrm>
-            <a:off x="8092440" y="4736592"/>
-            <a:ext cx="548640" cy="228600"/>
-          </a:xfrm>
-          <a:prstGeom prst="rect">
-            <a:avLst/>
-          </a:prstGeom>
-          <a:extLst>
-            <a:ext uri="{C572A759-6A51-4108-AA02-DFA0A04FC94B}">
-              <ma14:wrappingTextBoxFlag xmlns:ma14="http://schemas.microsoft.com/office/mac/drawingml/2011/main" xmlns="" val="0"/>
-            </a:ext>
-          </a:extLst>
-        </p:spPr>
-        <p:txBody>
-          <a:bodyPr/>
-          <a:lstStyle>
-            <a:lvl1pPr>
-              <a:defRPr sz="800">
-                <a:solidFill>
-                  <a:srgbClr val="6B7585"/>
-                </a:solidFill>
-              </a:defRPr>
-            </a:lvl1pPr>
-          </a:lstStyle>
-          <a:p>
-            <a:pPr algn="r"/>
-            <a:fld id="{F7021451-1387-4CA6-816F-3879F97B5CBC}" type="slidenum">
-              <a:rPr lang="en-US" b="0"/>
-              <a:t>6</a:t>
-            </a:fld>
-            <a:endParaRPr lang="en-US"/>
-          </a:p>
-        </p:txBody>
-      </p:sp>
-      <p:pic>
-        <p:nvPicPr>
-          <p:cNvPr id="26" name="cts logo" descr="cts-logo.png"/>
-          <p:cNvPicPr>
-            <a:picLocks noChangeAspect="1"/>
-          </p:cNvPicPr>
-          <p:nvPr/>
-        </p:nvPicPr>
-        <p:blipFill>
-          <a:blip r:embed="rId4"/>
-          <a:stretch>
-            <a:fillRect/>
-          </a:stretch>
-        </p:blipFill>
-        <p:spPr>
-          <a:xfrm>
-            <a:off x="7680959" y="182880"/>
-            <a:ext cx="960120" cy="539696"/>
-          </a:xfrm>
-          <a:prstGeom prst="rect">
-            <a:avLst/>
-          </a:prstGeom>
-        </p:spPr>
-      </p:pic>
-      <p:sp>
-        <p:nvSpPr>
-          <p:cNvPr id="8" name="Text 5b"/>
-          <p:cNvSpPr txBox="1"/>
-          <p:nvPr/>
-        </p:nvSpPr>
-        <p:spPr>
-          <a:xfrm>
-            <a:off x="4663440" y="3703431"/>
-            <a:ext cx="3703320" cy="896000"/>
-          </a:xfrm>
-          <a:prstGeom prst="rect">
-            <a:avLst/>
-          </a:prstGeom>
-          <a:noFill/>
-          <a:ln/>
-        </p:spPr>
-        <p:txBody>
-          <a:bodyPr wrap="square" lIns="0" tIns="0" rIns="0" bIns="0" rtlCol="0" anchor="t">
-            <a:normAutofit fontScale="92500"/>
-          </a:bodyPr>
-          <a:lstStyle/>
           <a:p>
             <a:pPr marL="342900" indent="-342900">
               <a:lnSpc>
@@ -19513,7 +19420,7 @@
               <a:buChar char="•"/>
             </a:pPr>
             <a:r>
-              <a:rPr lang="en-US" sz="650">
+              <a:rPr lang="en-US" sz="1000">
                 <a:solidFill>
                   <a:srgbClr val="3A4453"/>
                 </a:solidFill>
@@ -19522,6 +19429,99 @@
             </a:r>
             <a:endParaRPr lang="en-US" sz="800"/>
           </a:p>
+        </p:txBody>
+      </p:sp>
+      <p:sp>
+        <p:nvSpPr>
+          <p:cNvPr id="25" name="Slide Number Placeholder 0"/>
+          <p:cNvSpPr>
+            <a:spLocks noGrp="1"/>
+          </p:cNvSpPr>
+          <p:nvPr>
+            <p:ph type="sldNum" sz="quarter" idx="4294967295"/>
+          </p:nvPr>
+        </p:nvSpPr>
+        <p:spPr>
+          <a:xfrm>
+            <a:off x="8092440" y="4736592"/>
+            <a:ext cx="548640" cy="228600"/>
+          </a:xfrm>
+          <a:prstGeom prst="rect">
+            <a:avLst/>
+          </a:prstGeom>
+          <a:extLst>
+            <a:ext uri="{C572A759-6A51-4108-AA02-DFA0A04FC94B}">
+              <ma14:wrappingTextBoxFlag xmlns:ma14="http://schemas.microsoft.com/office/mac/drawingml/2011/main" xmlns="" val="0"/>
+            </a:ext>
+          </a:extLst>
+        </p:spPr>
+        <p:txBody>
+          <a:bodyPr/>
+          <a:lstStyle>
+            <a:lvl1pPr>
+              <a:defRPr sz="800">
+                <a:solidFill>
+                  <a:srgbClr val="6B7585"/>
+                </a:solidFill>
+              </a:defRPr>
+            </a:lvl1pPr>
+          </a:lstStyle>
+          <a:p>
+            <a:pPr algn="r"/>
+            <a:fld id="{F7021451-1387-4CA6-816F-3879F97B5CBC}" type="slidenum">
+              <a:rPr lang="en-US" b="0"/>
+              <a:t>6</a:t>
+            </a:fld>
+            <a:endParaRPr lang="en-US"/>
+          </a:p>
+        </p:txBody>
+      </p:sp>
+      <p:pic>
+        <p:nvPicPr>
+          <p:cNvPr id="26" name="cts logo" descr="cts-logo.png"/>
+          <p:cNvPicPr>
+            <a:picLocks noChangeAspect="1"/>
+          </p:cNvPicPr>
+          <p:nvPr/>
+        </p:nvPicPr>
+        <p:blipFill>
+          <a:blip r:embed="rId4"/>
+          <a:stretch>
+            <a:fillRect/>
+          </a:stretch>
+        </p:blipFill>
+        <p:spPr>
+          <a:xfrm>
+            <a:off x="7680959" y="182880"/>
+            <a:ext cx="960120" cy="539696"/>
+          </a:xfrm>
+          <a:prstGeom prst="rect">
+            <a:avLst/>
+          </a:prstGeom>
+        </p:spPr>
+      </p:pic>
+      <p:sp>
+        <p:nvSpPr>
+          <p:cNvPr id="8" name="Text 5b"/>
+          <p:cNvSpPr txBox="1"/>
+          <p:nvPr/>
+        </p:nvSpPr>
+        <p:spPr>
+          <a:xfrm>
+            <a:off x="4663440" y="3309166"/>
+            <a:ext cx="3703320" cy="1290265"/>
+          </a:xfrm>
+          <a:prstGeom prst="rect">
+            <a:avLst/>
+          </a:prstGeom>
+          <a:noFill/>
+          <a:ln/>
+        </p:spPr>
+        <p:txBody>
+          <a:bodyPr wrap="square" lIns="0" tIns="0" rIns="0" bIns="0" rtlCol="0" anchor="t">
+            <a:normAutofit fontScale="92500"/>
+          </a:bodyPr>
+          <a:lstStyle/>
           <a:p>
             <a:pPr marL="342900" indent="-342900">
               <a:lnSpc>
@@ -19534,7 +19534,7 @@
               <a:buChar char="•"/>
             </a:pPr>
             <a:r>
-              <a:rPr lang="en-US" sz="650">
+              <a:rPr lang="en-US" sz="1000">
                 <a:solidFill>
                   <a:srgbClr val="3A4453"/>
                 </a:solidFill>
@@ -19555,7 +19555,7 @@
               <a:buChar char="•"/>
             </a:pPr>
             <a:r>
-              <a:rPr lang="en-US" sz="650">
+              <a:rPr lang="en-US" sz="1000">
                 <a:solidFill>
                   <a:srgbClr val="3A4453"/>
                 </a:solidFill>
@@ -19680,7 +19680,7 @@
         <p:spPr>
           <a:xfrm>
             <a:off x="502920" y="1389888"/>
-            <a:ext cx="8138160" cy="1675123"/>
+            <a:ext cx="8138160" cy="1675122"/>
           </a:xfrm>
           <a:prstGeom prst="rect">
             <a:avLst/>
@@ -19695,8 +19695,8 @@
         </p:nvSpPr>
         <p:spPr>
           <a:xfrm>
-            <a:off x="502920" y="3675888"/>
-            <a:ext cx="8138160" cy="950976"/>
+            <a:off x="502920" y="3454086"/>
+            <a:ext cx="8138160" cy="1172777"/>
           </a:xfrm>
           <a:prstGeom prst="rect">
             <a:avLst/>
@@ -19722,7 +19722,7 @@
         </p:nvSpPr>
         <p:spPr>
           <a:xfrm>
-            <a:off x="685800" y="3758184"/>
+            <a:off x="685800" y="3527238"/>
             <a:ext cx="2743200" cy="164592"/>
           </a:xfrm>
           <a:prstGeom prst="rect">
@@ -19758,8 +19758,8 @@
         </p:nvSpPr>
         <p:spPr>
           <a:xfrm>
-            <a:off x="685800" y="3941064"/>
-            <a:ext cx="3703320" cy="621792"/>
+            <a:off x="685800" y="3700974"/>
+            <a:ext cx="3703320" cy="898457"/>
           </a:xfrm>
           <a:prstGeom prst="rect">
             <a:avLst/>
@@ -19784,7 +19784,7 @@
               <a:buChar char="•"/>
             </a:pPr>
             <a:r>
-              <a:rPr lang="en-US" sz="850">
+              <a:rPr lang="en-US" sz="1000">
                 <a:solidFill>
                   <a:srgbClr val="3A4453"/>
                 </a:solidFill>
@@ -19805,7 +19805,7 @@
               <a:buChar char="•"/>
             </a:pPr>
             <a:r>
-              <a:rPr lang="en-US" sz="850">
+              <a:rPr lang="en-US" sz="1000">
                 <a:solidFill>
                   <a:srgbClr val="3A4453"/>
                 </a:solidFill>
@@ -19824,8 +19824,8 @@
         </p:nvSpPr>
         <p:spPr>
           <a:xfrm>
-            <a:off x="4663440" y="3941064"/>
-            <a:ext cx="3703320" cy="621792"/>
+            <a:off x="4663440" y="3700974"/>
+            <a:ext cx="3703320" cy="898457"/>
           </a:xfrm>
           <a:prstGeom prst="rect">
             <a:avLst/>
@@ -19850,7 +19850,7 @@
               <a:buChar char="•"/>
             </a:pPr>
             <a:r>
-              <a:rPr lang="en-US" sz="850">
+              <a:rPr lang="en-US" sz="1000">
                 <a:solidFill>
                   <a:srgbClr val="3A4453"/>
                 </a:solidFill>
@@ -19871,7 +19871,7 @@
               <a:buChar char="•"/>
             </a:pPr>
             <a:r>
-              <a:rPr lang="en-US" sz="850">
+              <a:rPr lang="en-US" sz="1000">
                 <a:solidFill>
                   <a:srgbClr val="3A4453"/>
                 </a:solidFill>
@@ -20065,7 +20065,7 @@
         <p:spPr>
           <a:xfrm>
             <a:off x="502920" y="1389888"/>
-            <a:ext cx="8138160" cy="1316785"/>
+            <a:ext cx="8138160" cy="1316784"/>
           </a:xfrm>
           <a:prstGeom prst="rect">
             <a:avLst/>
@@ -20080,8 +20080,8 @@
         </p:nvSpPr>
         <p:spPr>
           <a:xfrm>
-            <a:off x="502920" y="3675888"/>
-            <a:ext cx="8138160" cy="950976"/>
+            <a:off x="502920" y="3454086"/>
+            <a:ext cx="8138160" cy="1172777"/>
           </a:xfrm>
           <a:prstGeom prst="rect">
             <a:avLst/>
@@ -20107,7 +20107,7 @@
         </p:nvSpPr>
         <p:spPr>
           <a:xfrm>
-            <a:off x="685800" y="3758184"/>
+            <a:off x="685800" y="3527238"/>
             <a:ext cx="2743200" cy="164592"/>
           </a:xfrm>
           <a:prstGeom prst="rect">
@@ -20143,8 +20143,8 @@
         </p:nvSpPr>
         <p:spPr>
           <a:xfrm>
-            <a:off x="685800" y="3941064"/>
-            <a:ext cx="3703320" cy="621792"/>
+            <a:off x="685800" y="3700974"/>
+            <a:ext cx="3703320" cy="898457"/>
           </a:xfrm>
           <a:prstGeom prst="rect">
             <a:avLst/>
@@ -20169,7 +20169,7 @@
               <a:buChar char="•"/>
             </a:pPr>
             <a:r>
-              <a:rPr lang="en-US" sz="850">
+              <a:rPr lang="en-US" sz="1000">
                 <a:solidFill>
                   <a:srgbClr val="3A4453"/>
                 </a:solidFill>
@@ -20190,7 +20190,7 @@
               <a:buChar char="•"/>
             </a:pPr>
             <a:r>
-              <a:rPr lang="en-US" sz="850">
+              <a:rPr lang="en-US" sz="1000">
                 <a:solidFill>
                   <a:srgbClr val="3A4453"/>
                 </a:solidFill>
@@ -20209,8 +20209,8 @@
         </p:nvSpPr>
         <p:spPr>
           <a:xfrm>
-            <a:off x="4663440" y="3941064"/>
-            <a:ext cx="3703320" cy="621792"/>
+            <a:off x="4663440" y="3700974"/>
+            <a:ext cx="3703320" cy="898457"/>
           </a:xfrm>
           <a:prstGeom prst="rect">
             <a:avLst/>
@@ -20235,7 +20235,7 @@
               <a:buChar char="•"/>
             </a:pPr>
             <a:r>
-              <a:rPr lang="en-US" sz="850">
+              <a:rPr lang="en-US" sz="1000">
                 <a:solidFill>
                   <a:srgbClr val="3A4453"/>
                 </a:solidFill>
@@ -20256,7 +20256,7 @@
               <a:buChar char="•"/>
             </a:pPr>
             <a:r>
-              <a:rPr lang="en-US" sz="850">
+              <a:rPr lang="en-US" sz="1000">
                 <a:solidFill>
                   <a:srgbClr val="3A4453"/>
                 </a:solidFill>
@@ -20377,8 +20377,8 @@
         </p:blipFill>
         <p:spPr>
           <a:xfrm>
-            <a:off x="502920" y="1115568"/>
-            <a:ext cx="8138160" cy="2409752"/>
+            <a:off x="1184920" y="1115568"/>
+            <a:ext cx="6774159" cy="2005865"/>
           </a:xfrm>
           <a:prstGeom prst="rect">
             <a:avLst/>
@@ -20465,8 +20465,8 @@
         </p:nvSpPr>
         <p:spPr>
           <a:xfrm>
-            <a:off x="502920" y="3635048"/>
-            <a:ext cx="8138160" cy="991815"/>
+            <a:off x="502920" y="3231161"/>
+            <a:ext cx="8138160" cy="1395702"/>
           </a:xfrm>
           <a:prstGeom prst="rect">
             <a:avLst/>
@@ -20492,7 +20492,7 @@
         </p:nvSpPr>
         <p:spPr>
           <a:xfrm>
-            <a:off x="685800" y="3708200"/>
+            <a:off x="685800" y="3304313"/>
             <a:ext cx="2743200" cy="228600"/>
           </a:xfrm>
           <a:prstGeom prst="rect">
@@ -20528,8 +20528,8 @@
         </p:nvSpPr>
         <p:spPr>
           <a:xfrm>
-            <a:off x="685800" y="3881936"/>
-            <a:ext cx="3703320" cy="717495"/>
+            <a:off x="685800" y="3478049"/>
+            <a:ext cx="3703320" cy="1121382"/>
           </a:xfrm>
           <a:prstGeom prst="rect">
             <a:avLst/>
@@ -20554,7 +20554,7 @@
               <a:buChar char="•"/>
             </a:pPr>
             <a:r>
-              <a:rPr lang="en-US" sz="700">
+              <a:rPr lang="en-US" sz="1000">
                 <a:solidFill>
                   <a:srgbClr val="3A4453"/>
                 </a:solidFill>
@@ -20575,7 +20575,7 @@
               <a:buChar char="•"/>
             </a:pPr>
             <a:r>
-              <a:rPr lang="en-US" sz="700">
+              <a:rPr lang="en-US" sz="1000">
                 <a:solidFill>
                   <a:srgbClr val="3A4453"/>
                 </a:solidFill>
@@ -20663,8 +20663,8 @@
         </p:nvSpPr>
         <p:spPr>
           <a:xfrm>
-            <a:off x="4663440" y="3881936"/>
-            <a:ext cx="3703320" cy="717495"/>
+            <a:off x="4663440" y="3478049"/>
+            <a:ext cx="3703320" cy="1121382"/>
           </a:xfrm>
           <a:prstGeom prst="rect">
             <a:avLst/>
@@ -20689,7 +20689,7 @@
               <a:buChar char="•"/>
             </a:pPr>
             <a:r>
-              <a:rPr lang="en-US" sz="700">
+              <a:rPr lang="en-US" sz="1000">
                 <a:solidFill>
                   <a:srgbClr val="3A4453"/>
                 </a:solidFill>
@@ -20710,7 +20710,7 @@
               <a:buChar char="•"/>
             </a:pPr>
             <a:r>
-              <a:rPr lang="en-US" sz="700">
+              <a:rPr lang="en-US" sz="1000">
                 <a:solidFill>
                   <a:srgbClr val="3A4453"/>
                 </a:solidFill>
@@ -20731,7 +20731,7 @@
               <a:buChar char="•"/>
             </a:pPr>
             <a:r>
-              <a:rPr lang="en-US" sz="700">
+              <a:rPr lang="en-US" sz="1000">
                 <a:solidFill>
                   <a:srgbClr val="3A4453"/>
                 </a:solidFill>

--- a/deck/CTS Monthly Business Review - 30092026.pptx
+++ b/deck/CTS Monthly Business Review - 30092026.pptx
@@ -13,6 +13,7 @@
     <p:sldId id="258" r:id="rId7"/>
     <p:sldId id="259" r:id="rId8"/>
     <p:sldId id="260" r:id="rId9"/>
+    <p:sldId id="289" r:id="rId44"/>
     <p:sldId id="261" r:id="rId10"/>
     <p:sldId id="262" r:id="rId11"/>
     <p:sldId id="263" r:id="rId12"/>
@@ -3628,6 +3629,100 @@
         <p14:creationId xmlns:p14="http://schemas.microsoft.com/office/powerpoint/2010/main" val="1024086991"/>
       </p:ext>
     </p:extLst>
+  </p:cSld>
+  <p:clrMapOvr>
+    <a:masterClrMapping/>
+  </p:clrMapOvr>
+</p:notes>
+</file>
+
+<file path=ppt/notesSlides/notesSlide33.xml><?xml version="1.0" encoding="utf-8"?>
+<p:notes xmlns:a="http://schemas.openxmlformats.org/drawingml/2006/main" xmlns:p="http://schemas.openxmlformats.org/presentationml/2006/main" xmlns:r="http://schemas.openxmlformats.org/officeDocument/2006/relationships">
+  <p:cSld>
+    <p:spTree>
+      <p:nvGrpSpPr>
+        <p:cNvPr id="1" name=""/>
+        <p:cNvGrpSpPr/>
+        <p:nvPr/>
+      </p:nvGrpSpPr>
+      <p:grpSpPr>
+        <a:xfrm>
+          <a:off x="0" y="0"/>
+          <a:ext cx="0" cy="0"/>
+          <a:chOff x="0" y="0"/>
+          <a:chExt cx="0" cy="0"/>
+        </a:xfrm>
+      </p:grpSpPr>
+      <p:sp>
+        <p:nvSpPr>
+          <p:cNvPr id="3" name="Notes Placeholder 2"/>
+          <p:cNvSpPr>
+            <a:spLocks noGrp="1"/>
+          </p:cNvSpPr>
+          <p:nvPr>
+            <p:ph type="body" idx="1"/>
+          </p:nvPr>
+        </p:nvSpPr>
+        <p:spPr/>
+        <p:txBody>
+          <a:bodyPr lIns="107095" tIns="53547" rIns="107095" bIns="53547"/>
+          <a:lstStyle/>
+          <a:p>
+            <a:r>
+              <a:t>Revenue by month and department for the closed quarter, taken from the Cost Analysis tab.</a:t>
+            </a:r>
+          </a:p>
+          <a:p/>
+          <a:p>
+            <a:r>
+              <a:t>July $459,049, August $603,467 and September $561,945, giving $1,624,460 for the quarter against a budget of $1,996,110.</a:t>
+            </a:r>
+          </a:p>
+          <a:p/>
+          <a:p>
+            <a:r>
+              <a:t>By department for September: Support $242,948, Events $73,304, Video $7,303, Integration $234,858 and Consulting $3,531.</a:t>
+            </a:r>
+          </a:p>
+          <a:p/>
+          <a:p>
+            <a:r>
+              <a:t>Three things the mix shows that a total does not.</a:t>
+            </a:r>
+          </a:p>
+          <a:p/>
+          <a:p>
+            <a:r>
+              <a:t>Support is the base of the business and it barely moves: $235,403, $240,236 and $242,948 across the three months. That is recurring contract income behaving as recurring income should.</a:t>
+            </a:r>
+          </a:p>
+          <a:p/>
+          <a:p>
+            <a:r>
+              <a:t>Integration is the volatility. It billed $112,803 in July, $93,752 in August and $234,858 in September, and the September figure is a single installation completing. It is better read as timing than as growth, particularly as the margin retained on that work is 10.1%.</a:t>
+            </a:r>
+          </a:p>
+          <a:p/>
+          <a:p>
+            <a:r>
+              <a:t>Events moved from $241,371 in August to $73,304 in September, the largest single movement in the quarter, and the reason the company total fell while Integration rose.</a:t>
+            </a:r>
+          </a:p>
+          <a:p/>
+          <a:p>
+            <a:r>
+              <a:t>Video and Consulting contributed $10,834 between them in September against a combined budget of $40,548, which is the third consecutive month both have been short.</a:t>
+            </a:r>
+          </a:p>
+          <a:p/>
+          <a:p>
+            <a:r>
+              <a:t>The chart lengthens by one column each month as the pack closes a month, so it will show the full year by June without being rebuilt.</a:t>
+            </a:r>
+          </a:p>
+        </p:txBody>
+      </p:sp>
+    </p:spTree>
   </p:cSld>
   <p:clrMapOvr>
     <a:masterClrMapping/>
@@ -18479,6 +18574,381 @@
 </p:sld>
 </file>
 
+<file path=ppt/slides/slide33.xml><?xml version="1.0" encoding="utf-8"?>
+<p:sld xmlns:a="http://schemas.openxmlformats.org/drawingml/2006/main" xmlns:p="http://schemas.openxmlformats.org/presentationml/2006/main" xmlns:r="http://schemas.openxmlformats.org/officeDocument/2006/relationships">
+  <p:cSld>
+    <p:spTree>
+      <p:nvGrpSpPr>
+        <p:cNvPr id="1" name=""/>
+        <p:cNvGrpSpPr/>
+        <p:nvPr/>
+      </p:nvGrpSpPr>
+      <p:grpSpPr/>
+      <p:pic>
+        <p:nvPicPr>
+          <p:cNvPr id="27" name="snip rev_month" descr="rev_month.png"/>
+          <p:cNvPicPr>
+            <a:picLocks noChangeAspect="1"/>
+          </p:cNvPicPr>
+          <p:nvPr/>
+        </p:nvPicPr>
+        <p:blipFill>
+          <a:blip r:embed="rId2"/>
+          <a:stretch>
+            <a:fillRect/>
+          </a:stretch>
+        </p:blipFill>
+        <p:spPr>
+          <a:xfrm>
+            <a:off x="502920" y="1444752"/>
+            <a:ext cx="5074920" cy="2561373"/>
+          </a:xfrm>
+          <a:prstGeom prst="rect">
+            <a:avLst/>
+          </a:prstGeom>
+        </p:spPr>
+      </p:pic>
+      <p:sp>
+        <p:nvSpPr>
+          <p:cNvPr id="2" name="Text 0"/>
+          <p:cNvSpPr txBox="1"/>
+          <p:nvPr/>
+        </p:nvSpPr>
+        <p:spPr>
+          <a:xfrm>
+            <a:off x="502920" y="365760"/>
+            <a:ext cx="6400800" cy="274320"/>
+          </a:xfrm>
+          <a:prstGeom prst="rect">
+            <a:avLst/>
+          </a:prstGeom>
+          <a:noFill/>
+          <a:ln/>
+        </p:spPr>
+        <p:txBody>
+          <a:bodyPr wrap="square" lIns="0" tIns="0" rIns="0" bIns="0" rtlCol="0" anchor="ctr"/>
+          <a:lstStyle/>
+          <a:p>
+            <a:pPr marL="0" indent="0">
+              <a:buNone/>
+            </a:pPr>
+            <a:r>
+              <a:rPr lang="en-US" sz="950" b="1" kern="0" spc="220">
+                <a:solidFill>
+                  <a:srgbClr val="122B82"/>
+                </a:solidFill>
+              </a:rPr>
+              <a:t>FINANCIAL PERFORMANCE</a:t>
+            </a:r>
+            <a:endParaRPr lang="en-US" sz="950"/>
+          </a:p>
+        </p:txBody>
+      </p:sp>
+      <p:sp>
+        <p:nvSpPr>
+          <p:cNvPr id="3" name="Text 1"/>
+          <p:cNvSpPr txBox="1"/>
+          <p:nvPr/>
+        </p:nvSpPr>
+        <p:spPr>
+          <a:xfrm>
+            <a:off x="502920" y="640080"/>
+            <a:ext cx="7315200" cy="685800"/>
+          </a:xfrm>
+          <a:prstGeom prst="rect">
+            <a:avLst/>
+          </a:prstGeom>
+          <a:noFill/>
+          <a:ln/>
+        </p:spPr>
+        <p:txBody>
+          <a:bodyPr wrap="square" lIns="0" tIns="0" rIns="0" bIns="0" rtlCol="0" anchor="ctr"/>
+          <a:lstStyle/>
+          <a:p>
+            <a:pPr marL="0" indent="0">
+              <a:buNone/>
+            </a:pPr>
+            <a:r>
+              <a:rPr lang="en-US" sz="2200" b="1">
+                <a:solidFill>
+                  <a:srgbClr val="242C39"/>
+                </a:solidFill>
+              </a:rPr>
+              <a:t>Revenue by month and department</a:t>
+            </a:r>
+            <a:endParaRPr lang="en-US" sz="2700"/>
+          </a:p>
+        </p:txBody>
+      </p:sp>
+      <p:sp>
+        <p:nvSpPr>
+          <p:cNvPr id="6" name="commentary panel"/>
+          <p:cNvSpPr/>
+          <p:nvPr/>
+        </p:nvSpPr>
+        <p:spPr>
+          <a:xfrm>
+            <a:off x="5806440" y="1463040"/>
+            <a:ext cx="2834640" cy="3154680"/>
+          </a:xfrm>
+          <a:prstGeom prst="rect">
+            <a:avLst/>
+          </a:prstGeom>
+          <a:solidFill>
+            <a:srgbClr val="E8F9F8"/>
+          </a:solidFill>
+          <a:ln/>
+        </p:spPr>
+        <p:txBody>
+          <a:bodyPr/>
+          <a:lstStyle/>
+          <a:p>
+            <a:endParaRPr lang="en-AU"/>
+          </a:p>
+        </p:txBody>
+      </p:sp>
+      <p:sp>
+        <p:nvSpPr>
+          <p:cNvPr id="7" name="Text 4"/>
+          <p:cNvSpPr txBox="1"/>
+          <p:nvPr/>
+        </p:nvSpPr>
+        <p:spPr>
+          <a:xfrm>
+            <a:off x="5989320" y="1627632"/>
+            <a:ext cx="2468880" cy="228600"/>
+          </a:xfrm>
+          <a:prstGeom prst="rect">
+            <a:avLst/>
+          </a:prstGeom>
+          <a:noFill/>
+          <a:ln/>
+        </p:spPr>
+        <p:txBody>
+          <a:bodyPr wrap="square" lIns="0" tIns="0" rIns="0" bIns="0" rtlCol="0" anchor="ctr"/>
+          <a:lstStyle/>
+          <a:p>
+            <a:pPr marL="0" indent="0">
+              <a:buNone/>
+            </a:pPr>
+            <a:r>
+              <a:rPr lang="en-US" sz="900" b="1" kern="0" spc="180">
+                <a:solidFill>
+                  <a:srgbClr val="005358"/>
+                </a:solidFill>
+              </a:rPr>
+              <a:t>COMMENTARY</a:t>
+            </a:r>
+            <a:endParaRPr lang="en-US" sz="900"/>
+          </a:p>
+        </p:txBody>
+      </p:sp>
+      <p:sp>
+        <p:nvSpPr>
+          <p:cNvPr id="8" name="Text 5"/>
+          <p:cNvSpPr txBox="1"/>
+          <p:nvPr/>
+        </p:nvSpPr>
+        <p:spPr>
+          <a:xfrm>
+            <a:off x="5989320" y="1901952"/>
+            <a:ext cx="2468880" cy="2706623"/>
+          </a:xfrm>
+          <a:prstGeom prst="rect">
+            <a:avLst/>
+          </a:prstGeom>
+          <a:noFill/>
+          <a:ln/>
+        </p:spPr>
+        <p:txBody>
+          <a:bodyPr wrap="square" lIns="0" tIns="0" rIns="0" bIns="0" rtlCol="0" anchor="t">
+            <a:normAutofit fontScale="85000" lnSpcReduction="10000"/>
+          </a:bodyPr>
+          <a:lstStyle/>
+          <a:p>
+            <a:pPr marL="342900" indent="-342900">
+              <a:lnSpc>
+                <a:spcPts val="1050"/>
+              </a:lnSpc>
+              <a:spcAft>
+                <a:spcPts val="400"/>
+              </a:spcAft>
+              <a:buSzPct val="100000"/>
+              <a:buChar char="•"/>
+            </a:pPr>
+            <a:r>
+              <a:rPr lang="en-US" sz="1000">
+                <a:solidFill>
+                  <a:srgbClr val="3A4453"/>
+                </a:solidFill>
+              </a:rPr>
+              <a:t>Revenue was $459k in July, $603k in August and $562k in September.</a:t>
+            </a:r>
+            <a:endParaRPr lang="en-US" sz="850"/>
+          </a:p>
+          <a:p>
+            <a:pPr marL="342900" indent="-342900">
+              <a:lnSpc>
+                <a:spcPts val="1050"/>
+              </a:lnSpc>
+              <a:spcAft>
+                <a:spcPts val="400"/>
+              </a:spcAft>
+              <a:buSzPct val="100000"/>
+              <a:buChar char="•"/>
+            </a:pPr>
+            <a:r>
+              <a:rPr lang="en-US" sz="1000">
+                <a:solidFill>
+                  <a:srgbClr val="3A4453"/>
+                </a:solidFill>
+              </a:rPr>
+              <a:t>Support is the steady base: $235k, $240k and $243k across the three months.</a:t>
+            </a:r>
+            <a:endParaRPr lang="en-US" sz="850"/>
+          </a:p>
+          <a:p>
+            <a:pPr marL="342900" indent="-342900">
+              <a:lnSpc>
+                <a:spcPts val="1050"/>
+              </a:lnSpc>
+              <a:spcAft>
+                <a:spcPts val="400"/>
+              </a:spcAft>
+              <a:buSzPct val="100000"/>
+              <a:buChar char="•"/>
+            </a:pPr>
+            <a:r>
+              <a:rPr lang="en-US" sz="1000">
+                <a:solidFill>
+                  <a:srgbClr val="3A4453"/>
+                </a:solidFill>
+              </a:rPr>
+              <a:t>September's movement is Integration at $235k against $94k in August, on project completion.</a:t>
+            </a:r>
+            <a:endParaRPr lang="en-US" sz="850"/>
+          </a:p>
+          <a:p>
+            <a:pPr marL="342900" indent="-342900">
+              <a:lnSpc>
+                <a:spcPts val="1050"/>
+              </a:lnSpc>
+              <a:spcAft>
+                <a:spcPts val="400"/>
+              </a:spcAft>
+              <a:buSzPct val="100000"/>
+              <a:buChar char="•"/>
+            </a:pPr>
+            <a:r>
+              <a:rPr lang="en-US" sz="1000">
+                <a:solidFill>
+                  <a:srgbClr val="3A4453"/>
+                </a:solidFill>
+              </a:rPr>
+              <a:t>Events fell from $241k in August to $73k in September, the largest movement in the quarter.</a:t>
+            </a:r>
+            <a:endParaRPr lang="en-US" sz="850"/>
+          </a:p>
+          <a:p>
+            <a:pPr marL="342900" indent="-342900">
+              <a:lnSpc>
+                <a:spcPts val="1050"/>
+              </a:lnSpc>
+              <a:spcAft>
+                <a:spcPts val="400"/>
+              </a:spcAft>
+              <a:buSzPct val="100000"/>
+              <a:buChar char="•"/>
+            </a:pPr>
+            <a:r>
+              <a:rPr lang="en-US" sz="1000">
+                <a:solidFill>
+                  <a:srgbClr val="3A4453"/>
+                </a:solidFill>
+              </a:rPr>
+              <a:t>Video and Consulting contributed $11k in September against a $41k combined budget.</a:t>
+            </a:r>
+            <a:endParaRPr lang="en-US" sz="850"/>
+          </a:p>
+        </p:txBody>
+      </p:sp>
+      <p:sp>
+        <p:nvSpPr>
+          <p:cNvPr id="25" name="Slide Number Placeholder 0"/>
+          <p:cNvSpPr>
+            <a:spLocks noGrp="1"/>
+          </p:cNvSpPr>
+          <p:nvPr>
+            <p:ph type="sldNum" sz="quarter" idx="4294967295"/>
+          </p:nvPr>
+        </p:nvSpPr>
+        <p:spPr>
+          <a:xfrm>
+            <a:off x="8092440" y="4736592"/>
+            <a:ext cx="548640" cy="228600"/>
+          </a:xfrm>
+          <a:prstGeom prst="rect">
+            <a:avLst/>
+          </a:prstGeom>
+          <a:extLst>
+            <a:ext uri="{C572A759-6A51-4108-AA02-DFA0A04FC94B}">
+              <ma14:wrappingTextBoxFlag xmlns:ma14="http://schemas.microsoft.com/office/mac/drawingml/2011/main" xmlns="" val="0"/>
+            </a:ext>
+          </a:extLst>
+        </p:spPr>
+        <p:txBody>
+          <a:bodyPr/>
+          <a:lstStyle>
+            <a:lvl1pPr>
+              <a:defRPr sz="800">
+                <a:solidFill>
+                  <a:srgbClr val="6B7585"/>
+                </a:solidFill>
+              </a:defRPr>
+            </a:lvl1pPr>
+          </a:lstStyle>
+          <a:p>
+            <a:pPr algn="r"/>
+            <a:fld id="{F7021451-1387-4CA6-816F-3879F97B5CBC}" type="slidenum">
+              <a:rPr lang="en-US" b="0"/>
+              <a:t>16</a:t>
+            </a:fld>
+            <a:endParaRPr lang="en-US"/>
+          </a:p>
+        </p:txBody>
+      </p:sp>
+      <p:pic>
+        <p:nvPicPr>
+          <p:cNvPr id="26" name="cts logo" descr="cts-logo.png"/>
+          <p:cNvPicPr>
+            <a:picLocks noChangeAspect="1"/>
+          </p:cNvPicPr>
+          <p:nvPr/>
+        </p:nvPicPr>
+        <p:blipFill>
+          <a:blip r:embed="rId4"/>
+          <a:stretch>
+            <a:fillRect/>
+          </a:stretch>
+        </p:blipFill>
+        <p:spPr>
+          <a:xfrm>
+            <a:off x="7680959" y="182880"/>
+            <a:ext cx="960120" cy="539696"/>
+          </a:xfrm>
+          <a:prstGeom prst="rect">
+            <a:avLst/>
+          </a:prstGeom>
+        </p:spPr>
+      </p:pic>
+    </p:spTree>
+  </p:cSld>
+  <p:clrMapOvr>
+    <a:masterClrMapping/>
+  </p:clrMapOvr>
+</p:sld>
+</file>
+
 <file path=ppt/slides/slide4.xml><?xml version="1.0" encoding="utf-8"?>
 <p:sld xmlns:a="http://schemas.openxmlformats.org/drawingml/2006/main" xmlns:r="http://schemas.openxmlformats.org/officeDocument/2006/relationships" xmlns:p="http://schemas.openxmlformats.org/presentationml/2006/main">
   <p:cSld name="Slide 4">

--- a/deck/CTS Monthly Business Review - 30092026.pptx
+++ b/deck/CTS Monthly Business Review - 30092026.pptx
@@ -3669,18 +3669,30 @@
           <a:lstStyle/>
           <a:p>
             <a:r>
-              <a:t>Revenue by month and department for the closed quarter, taken from the Cost Analysis tab.</a:t>
+              <a:t>Revenue by month and department for the closed quarter, with the budget for the same months, taken from the Cost Analysis tab.</a:t>
             </a:r>
           </a:p>
           <a:p/>
           <a:p>
             <a:r>
-              <a:t>July $459,049, August $603,467 and September $561,945, giving $1,624,460 for the quarter against a budget of $1,996,110.</a:t>
+              <a:t>Actual revenue was $459,049 in July, $603,467 in August and $561,945 in September, $1,624,460 for the quarter.</a:t>
             </a:r>
           </a:p>
           <a:p/>
           <a:p>
             <a:r>
+              <a:t>Budget for those months was $609,277, $973,168 and $413,665, being $1,996,110 for the quarter. The quarter is therefore $371,650 short of budget.</a:t>
+            </a:r>
+          </a:p>
+          <a:p/>
+          <a:p>
+            <a:r>
+              <a:t>The monthly picture is not what the quarter total suggests. July came in $150,228 under budget and August $369,701 under, while September came in $148,280 above. Two thirds of the quarter's shortfall sits in August alone, where the budget asked for $973,168, more than the business has ever billed in a month.</a:t>
+            </a:r>
+          </a:p>
+          <a:p/>
+          <a:p>
+            <a:r>
               <a:t>By department for September: Support $242,948, Events $73,304, Video $7,303, Integration $234,858 and Consulting $3,531.</a:t>
             </a:r>
           </a:p>
@@ -3706,12 +3718,6 @@
           <a:p>
             <a:r>
               <a:t>Events moved from $241,371 in August to $73,304 in September, the largest single movement in the quarter, and the reason the company total fell while Integration rose.</a:t>
-            </a:r>
-          </a:p>
-          <a:p/>
-          <a:p>
-            <a:r>
-              <a:t>Video and Consulting contributed $10,834 between them in September against a combined budget of $40,548, which is the third consecutive month both have been short.</a:t>
             </a:r>
           </a:p>
           <a:p/>
@@ -5335,6 +5341,412 @@
 
 <file path=ppt/slides/slide10.xml><?xml version="1.0" encoding="utf-8"?>
 <p:sld xmlns:a="http://schemas.openxmlformats.org/drawingml/2006/main" xmlns:r="http://schemas.openxmlformats.org/officeDocument/2006/relationships" xmlns:p="http://schemas.openxmlformats.org/presentationml/2006/main">
+  <p:cSld name="Slide 9">
+    <p:spTree>
+      <p:nvGrpSpPr>
+        <p:cNvPr id="1" name=""/>
+        <p:cNvGrpSpPr/>
+        <p:nvPr/>
+      </p:nvGrpSpPr>
+      <p:grpSpPr>
+        <a:xfrm>
+          <a:off x="0" y="0"/>
+          <a:ext cx="0" cy="0"/>
+          <a:chOff x="0" y="0"/>
+          <a:chExt cx="0" cy="0"/>
+        </a:xfrm>
+      </p:grpSpPr>
+      <p:pic>
+        <p:nvPicPr>
+          <p:cNvPr id="27" name="snip dept_Support" descr="dept_Support.png"/>
+          <p:cNvPicPr>
+            <a:picLocks noChangeAspect="1"/>
+          </p:cNvPicPr>
+          <p:nvPr/>
+        </p:nvPicPr>
+        <p:blipFill>
+          <a:blip r:embed="rId5"/>
+          <a:stretch>
+            <a:fillRect/>
+          </a:stretch>
+        </p:blipFill>
+        <p:spPr>
+          <a:xfrm>
+            <a:off x="1184920" y="1115568"/>
+            <a:ext cx="6774159" cy="2005865"/>
+          </a:xfrm>
+          <a:prstGeom prst="rect">
+            <a:avLst/>
+          </a:prstGeom>
+        </p:spPr>
+      </p:pic>
+      <p:sp>
+        <p:nvSpPr>
+          <p:cNvPr id="2" name="Text 0"/>
+          <p:cNvSpPr txBox="1"/>
+          <p:nvPr/>
+        </p:nvSpPr>
+        <p:spPr>
+          <a:xfrm>
+            <a:off x="502920" y="365760"/>
+            <a:ext cx="6400800" cy="274320"/>
+          </a:xfrm>
+          <a:prstGeom prst="rect">
+            <a:avLst/>
+          </a:prstGeom>
+          <a:noFill/>
+          <a:ln/>
+        </p:spPr>
+        <p:txBody>
+          <a:bodyPr wrap="square" lIns="0" tIns="0" rIns="0" bIns="0" rtlCol="0" anchor="ctr"/>
+          <a:lstStyle/>
+          <a:p>
+            <a:pPr marL="0" indent="0">
+              <a:buNone/>
+            </a:pPr>
+            <a:r>
+              <a:rPr lang="en-US" sz="950" b="1" kern="0" spc="220">
+                <a:solidFill>
+                  <a:srgbClr val="122B82"/>
+                </a:solidFill>
+              </a:rPr>
+              <a:t>FINANCIAL PERFORMANCE</a:t>
+            </a:r>
+            <a:endParaRPr lang="en-US" sz="950"/>
+          </a:p>
+        </p:txBody>
+      </p:sp>
+      <p:sp>
+        <p:nvSpPr>
+          <p:cNvPr id="3" name="Text 1"/>
+          <p:cNvSpPr txBox="1"/>
+          <p:nvPr/>
+        </p:nvSpPr>
+        <p:spPr>
+          <a:xfrm>
+            <a:off x="502920" y="640080"/>
+            <a:ext cx="7315200" cy="685800"/>
+          </a:xfrm>
+          <a:prstGeom prst="rect">
+            <a:avLst/>
+          </a:prstGeom>
+          <a:noFill/>
+          <a:ln/>
+        </p:spPr>
+        <p:txBody>
+          <a:bodyPr wrap="square" lIns="0" tIns="0" rIns="0" bIns="0" rtlCol="0" anchor="ctr"/>
+          <a:lstStyle/>
+          <a:p>
+            <a:pPr marL="0" indent="0">
+              <a:buNone/>
+            </a:pPr>
+            <a:r>
+              <a:rPr lang="en-US" sz="2200" b="1">
+                <a:solidFill>
+                  <a:srgbClr val="242C39"/>
+                </a:solidFill>
+              </a:rPr>
+              <a:t>Support, Sep 26</a:t>
+            </a:r>
+            <a:endParaRPr lang="en-US" sz="2700"/>
+          </a:p>
+        </p:txBody>
+      </p:sp>
+      <p:sp>
+        <p:nvSpPr>
+          <p:cNvPr id="6" name="commentary panel"/>
+          <p:cNvSpPr/>
+          <p:nvPr/>
+        </p:nvSpPr>
+        <p:spPr>
+          <a:xfrm>
+            <a:off x="502920" y="3231161"/>
+            <a:ext cx="8138160" cy="1395702"/>
+          </a:xfrm>
+          <a:prstGeom prst="rect">
+            <a:avLst/>
+          </a:prstGeom>
+          <a:solidFill>
+            <a:srgbClr val="E8F9F8"/>
+          </a:solidFill>
+          <a:ln/>
+        </p:spPr>
+        <p:txBody>
+          <a:bodyPr/>
+          <a:lstStyle/>
+          <a:p>
+            <a:endParaRPr lang="en-AU"/>
+          </a:p>
+        </p:txBody>
+      </p:sp>
+      <p:sp>
+        <p:nvSpPr>
+          <p:cNvPr id="7" name="Text 4"/>
+          <p:cNvSpPr txBox="1"/>
+          <p:nvPr/>
+        </p:nvSpPr>
+        <p:spPr>
+          <a:xfrm>
+            <a:off x="685800" y="3304313"/>
+            <a:ext cx="2743200" cy="228600"/>
+          </a:xfrm>
+          <a:prstGeom prst="rect">
+            <a:avLst/>
+          </a:prstGeom>
+          <a:noFill/>
+          <a:ln/>
+        </p:spPr>
+        <p:txBody>
+          <a:bodyPr wrap="square" lIns="0" tIns="0" rIns="0" bIns="0" rtlCol="0" anchor="ctr"/>
+          <a:lstStyle/>
+          <a:p>
+            <a:pPr marL="0" indent="0">
+              <a:buNone/>
+            </a:pPr>
+            <a:r>
+              <a:rPr lang="en-US" sz="900" b="1" kern="0" spc="180">
+                <a:solidFill>
+                  <a:srgbClr val="005358"/>
+                </a:solidFill>
+              </a:rPr>
+              <a:t>COMMENTARY</a:t>
+            </a:r>
+            <a:endParaRPr lang="en-US" sz="900"/>
+          </a:p>
+        </p:txBody>
+      </p:sp>
+      <p:sp>
+        <p:nvSpPr>
+          <p:cNvPr id="8" name="Text 5"/>
+          <p:cNvSpPr txBox="1"/>
+          <p:nvPr/>
+        </p:nvSpPr>
+        <p:spPr>
+          <a:xfrm>
+            <a:off x="685800" y="3478049"/>
+            <a:ext cx="3703320" cy="1121382"/>
+          </a:xfrm>
+          <a:prstGeom prst="rect">
+            <a:avLst/>
+          </a:prstGeom>
+          <a:noFill/>
+          <a:ln/>
+        </p:spPr>
+        <p:txBody>
+          <a:bodyPr wrap="square" lIns="0" tIns="0" rIns="0" bIns="0" rtlCol="0" anchor="t">
+            <a:normAutofit/>
+          </a:bodyPr>
+          <a:lstStyle/>
+          <a:p>
+            <a:pPr marL="342900" indent="-342900">
+              <a:lnSpc>
+                <a:spcPts val="1050"/>
+              </a:lnSpc>
+              <a:spcAft>
+                <a:spcPts val="400"/>
+              </a:spcAft>
+              <a:buSzPct val="100000"/>
+              <a:buChar char="•"/>
+            </a:pPr>
+            <a:r>
+              <a:rPr lang="en-US" sz="1000">
+                <a:solidFill>
+                  <a:srgbClr val="3A4453"/>
+                </a:solidFill>
+              </a:rPr>
+              <a:t>Support generated $243k revenue against a $248k budget, broadly in line with expected recurring contract income.</a:t>
+            </a:r>
+            <a:endParaRPr lang="en-US" sz="850"/>
+          </a:p>
+          <a:p>
+            <a:pPr marL="342900" indent="-342900">
+              <a:lnSpc>
+                <a:spcPts val="1050"/>
+              </a:lnSpc>
+              <a:spcAft>
+                <a:spcPts val="400"/>
+              </a:spcAft>
+              <a:buSzPct val="100000"/>
+              <a:buChar char="•"/>
+            </a:pPr>
+            <a:r>
+              <a:rPr lang="en-US" sz="1000">
+                <a:solidFill>
+                  <a:srgbClr val="3A4453"/>
+                </a:solidFill>
+              </a:rPr>
+              <a:t>Gross margin was 41.7%, compared with 41.0% in September last year.</a:t>
+            </a:r>
+            <a:endParaRPr lang="en-US" sz="850"/>
+          </a:p>
+        </p:txBody>
+      </p:sp>
+      <p:sp>
+        <p:nvSpPr>
+          <p:cNvPr id="25" name="Slide Number Placeholder 0"/>
+          <p:cNvSpPr>
+            <a:spLocks noGrp="1"/>
+          </p:cNvSpPr>
+          <p:nvPr>
+            <p:ph type="sldNum" sz="quarter" idx="4294967295"/>
+          </p:nvPr>
+        </p:nvSpPr>
+        <p:spPr>
+          <a:xfrm>
+            <a:off x="8092440" y="4736592"/>
+            <a:ext cx="548640" cy="228600"/>
+          </a:xfrm>
+          <a:prstGeom prst="rect">
+            <a:avLst/>
+          </a:prstGeom>
+          <a:extLst>
+            <a:ext uri="{C572A759-6A51-4108-AA02-DFA0A04FC94B}">
+              <ma14:wrappingTextBoxFlag xmlns:ma14="http://schemas.microsoft.com/office/mac/drawingml/2011/main" xmlns="" val="0"/>
+            </a:ext>
+          </a:extLst>
+        </p:spPr>
+        <p:txBody>
+          <a:bodyPr/>
+          <a:lstStyle>
+            <a:lvl1pPr>
+              <a:defRPr sz="800">
+                <a:solidFill>
+                  <a:srgbClr val="6B7585"/>
+                </a:solidFill>
+              </a:defRPr>
+            </a:lvl1pPr>
+          </a:lstStyle>
+          <a:p>
+            <a:pPr algn="r"/>
+            <a:fld id="{F7021451-1387-4CA6-816F-3879F97B5CBC}" type="slidenum">
+              <a:rPr lang="en-US" b="0"/>
+              <a:t>9</a:t>
+            </a:fld>
+            <a:endParaRPr lang="en-US"/>
+          </a:p>
+        </p:txBody>
+      </p:sp>
+      <p:pic>
+        <p:nvPicPr>
+          <p:cNvPr id="26" name="cts logo" descr="cts-logo.png"/>
+          <p:cNvPicPr>
+            <a:picLocks noChangeAspect="1"/>
+          </p:cNvPicPr>
+          <p:nvPr/>
+        </p:nvPicPr>
+        <p:blipFill>
+          <a:blip r:embed="rId4"/>
+          <a:stretch>
+            <a:fillRect/>
+          </a:stretch>
+        </p:blipFill>
+        <p:spPr>
+          <a:xfrm>
+            <a:off x="7680959" y="182880"/>
+            <a:ext cx="960120" cy="539696"/>
+          </a:xfrm>
+          <a:prstGeom prst="rect">
+            <a:avLst/>
+          </a:prstGeom>
+        </p:spPr>
+      </p:pic>
+      <p:sp>
+        <p:nvSpPr>
+          <p:cNvPr id="8" name="Text 5b"/>
+          <p:cNvSpPr txBox="1"/>
+          <p:nvPr/>
+        </p:nvSpPr>
+        <p:spPr>
+          <a:xfrm>
+            <a:off x="4663440" y="3478049"/>
+            <a:ext cx="3703320" cy="1121382"/>
+          </a:xfrm>
+          <a:prstGeom prst="rect">
+            <a:avLst/>
+          </a:prstGeom>
+          <a:noFill/>
+          <a:ln/>
+        </p:spPr>
+        <p:txBody>
+          <a:bodyPr wrap="square" lIns="0" tIns="0" rIns="0" bIns="0" rtlCol="0" anchor="t">
+            <a:normAutofit/>
+          </a:bodyPr>
+          <a:lstStyle/>
+          <a:p>
+            <a:pPr marL="342900" indent="-342900">
+              <a:lnSpc>
+                <a:spcPts val="1050"/>
+              </a:lnSpc>
+              <a:spcAft>
+                <a:spcPts val="400"/>
+              </a:spcAft>
+              <a:buSzPct val="100000"/>
+              <a:buChar char="•"/>
+            </a:pPr>
+            <a:r>
+              <a:rPr lang="en-US" sz="1000">
+                <a:solidFill>
+                  <a:srgbClr val="3A4453"/>
+                </a:solidFill>
+              </a:rPr>
+              <a:t>After $72k of allocated overheads, Support recorded a $29k profit.</a:t>
+            </a:r>
+            <a:endParaRPr lang="en-US" sz="850"/>
+          </a:p>
+          <a:p>
+            <a:pPr marL="342900" indent="-342900">
+              <a:lnSpc>
+                <a:spcPts val="1050"/>
+              </a:lnSpc>
+              <a:spcAft>
+                <a:spcPts val="400"/>
+              </a:spcAft>
+              <a:buSzPct val="100000"/>
+              <a:buChar char="•"/>
+            </a:pPr>
+            <a:r>
+              <a:rPr lang="en-US" sz="1000">
+                <a:solidFill>
+                  <a:srgbClr val="3A4453"/>
+                </a:solidFill>
+              </a:rPr>
+              <a:t>Its allocated office wages were $42k, reflecting the established allocation method.</a:t>
+            </a:r>
+            <a:endParaRPr lang="en-US" sz="850"/>
+          </a:p>
+          <a:p>
+            <a:pPr marL="342900" indent="-342900">
+              <a:lnSpc>
+                <a:spcPts val="1050"/>
+              </a:lnSpc>
+              <a:spcAft>
+                <a:spcPts val="400"/>
+              </a:spcAft>
+              <a:buSzPct val="100000"/>
+              <a:buChar char="•"/>
+            </a:pPr>
+            <a:r>
+              <a:rPr lang="en-US" sz="1000">
+                <a:solidFill>
+                  <a:srgbClr val="3A4453"/>
+                </a:solidFill>
+              </a:rPr>
+              <a:t>Chargeable utilisation reached 91.2%, above the 88% target and the strongest result across the groups.</a:t>
+            </a:r>
+            <a:endParaRPr lang="en-US" sz="850"/>
+          </a:p>
+        </p:txBody>
+      </p:sp>
+    </p:spTree>
+  </p:cSld>
+  <p:clrMapOvr>
+    <a:masterClrMapping/>
+  </p:clrMapOvr>
+</p:sld>
+</file>
+
+<file path=ppt/slides/slide11.xml><?xml version="1.0" encoding="utf-8"?>
+<p:sld xmlns:a="http://schemas.openxmlformats.org/drawingml/2006/main" xmlns:r="http://schemas.openxmlformats.org/officeDocument/2006/relationships" xmlns:p="http://schemas.openxmlformats.org/presentationml/2006/main">
   <p:cSld name="Slide 10">
     <p:spTree>
       <p:nvGrpSpPr>
@@ -5739,7 +6151,7 @@
 </p:sld>
 </file>
 
-<file path=ppt/slides/slide11.xml><?xml version="1.0" encoding="utf-8"?>
+<file path=ppt/slides/slide12.xml><?xml version="1.0" encoding="utf-8"?>
 <p:sld xmlns:a="http://schemas.openxmlformats.org/drawingml/2006/main" xmlns:r="http://schemas.openxmlformats.org/officeDocument/2006/relationships" xmlns:p="http://schemas.openxmlformats.org/presentationml/2006/main">
   <p:cSld name="Slide 11">
     <p:spTree>
@@ -6145,7 +6557,7 @@
 </p:sld>
 </file>
 
-<file path=ppt/slides/slide12.xml><?xml version="1.0" encoding="utf-8"?>
+<file path=ppt/slides/slide13.xml><?xml version="1.0" encoding="utf-8"?>
 <p:sld xmlns:a="http://schemas.openxmlformats.org/drawingml/2006/main" xmlns:r="http://schemas.openxmlformats.org/officeDocument/2006/relationships" xmlns:p="http://schemas.openxmlformats.org/presentationml/2006/main">
   <p:cSld name="Slide 12">
     <p:spTree>
@@ -6551,7 +6963,7 @@
 </p:sld>
 </file>
 
-<file path=ppt/slides/slide13.xml><?xml version="1.0" encoding="utf-8"?>
+<file path=ppt/slides/slide14.xml><?xml version="1.0" encoding="utf-8"?>
 <p:sld xmlns:a="http://schemas.openxmlformats.org/drawingml/2006/main" xmlns:r="http://schemas.openxmlformats.org/officeDocument/2006/relationships" xmlns:p="http://schemas.openxmlformats.org/presentationml/2006/main">
   <p:cSld name="Slide 13">
     <p:spTree>
@@ -6957,7 +7369,7 @@
 </p:sld>
 </file>
 
-<file path=ppt/slides/slide14.xml><?xml version="1.0" encoding="utf-8"?>
+<file path=ppt/slides/slide15.xml><?xml version="1.0" encoding="utf-8"?>
 <p:sld xmlns:a="http://schemas.openxmlformats.org/drawingml/2006/main" xmlns:r="http://schemas.openxmlformats.org/officeDocument/2006/relationships" xmlns:p="http://schemas.openxmlformats.org/presentationml/2006/main">
   <p:cSld name="Slide 14">
     <p:spTree>
@@ -7363,7 +7775,7 @@
 </p:sld>
 </file>
 
-<file path=ppt/slides/slide15.xml><?xml version="1.0" encoding="utf-8"?>
+<file path=ppt/slides/slide16.xml><?xml version="1.0" encoding="utf-8"?>
 <p:sld xmlns:a="http://schemas.openxmlformats.org/drawingml/2006/main" xmlns:r="http://schemas.openxmlformats.org/officeDocument/2006/relationships" xmlns:p="http://schemas.openxmlformats.org/presentationml/2006/main">
   <p:cSld name="Slide 15">
     <p:spTree>
@@ -7646,7 +8058,7 @@
 </p:sld>
 </file>
 
-<file path=ppt/slides/slide16.xml><?xml version="1.0" encoding="utf-8"?>
+<file path=ppt/slides/slide17.xml><?xml version="1.0" encoding="utf-8"?>
 <p:sld xmlns:a="http://schemas.openxmlformats.org/drawingml/2006/main" xmlns:r="http://schemas.openxmlformats.org/officeDocument/2006/relationships" xmlns:p="http://schemas.openxmlformats.org/presentationml/2006/main">
   <p:cSld name="Slide 16">
     <p:spTree>
@@ -8028,7 +8440,7 @@
 </p:sld>
 </file>
 
-<file path=ppt/slides/slide17.xml><?xml version="1.0" encoding="utf-8"?>
+<file path=ppt/slides/slide18.xml><?xml version="1.0" encoding="utf-8"?>
 <p:sld xmlns:a="http://schemas.openxmlformats.org/drawingml/2006/main" xmlns:r="http://schemas.openxmlformats.org/officeDocument/2006/relationships" xmlns:p="http://schemas.openxmlformats.org/presentationml/2006/main">
   <p:cSld name="Slide 17">
     <p:spTree>
@@ -8410,7 +8822,7 @@
 </p:sld>
 </file>
 
-<file path=ppt/slides/slide18.xml><?xml version="1.0" encoding="utf-8"?>
+<file path=ppt/slides/slide19.xml><?xml version="1.0" encoding="utf-8"?>
 <p:sld xmlns:a="http://schemas.openxmlformats.org/drawingml/2006/main" xmlns:r="http://schemas.openxmlformats.org/officeDocument/2006/relationships" xmlns:p="http://schemas.openxmlformats.org/presentationml/2006/main">
   <p:cSld name="Slide 18">
     <p:spTree>
@@ -8755,391 +9167,6 @@
             <a:fld id="{F7021451-1387-4CA6-816F-3879F97B5CBC}" type="slidenum">
               <a:rPr lang="en-US" b="0"/>
               <a:t>18</a:t>
-            </a:fld>
-            <a:endParaRPr lang="en-US"/>
-          </a:p>
-        </p:txBody>
-      </p:sp>
-      <p:pic>
-        <p:nvPicPr>
-          <p:cNvPr id="26" name="cts logo" descr="cts-logo.png"/>
-          <p:cNvPicPr>
-            <a:picLocks noChangeAspect="1"/>
-          </p:cNvPicPr>
-          <p:nvPr/>
-        </p:nvPicPr>
-        <p:blipFill>
-          <a:blip r:embed="rId4"/>
-          <a:stretch>
-            <a:fillRect/>
-          </a:stretch>
-        </p:blipFill>
-        <p:spPr>
-          <a:xfrm>
-            <a:off x="7680959" y="182880"/>
-            <a:ext cx="960120" cy="539696"/>
-          </a:xfrm>
-          <a:prstGeom prst="rect">
-            <a:avLst/>
-          </a:prstGeom>
-        </p:spPr>
-      </p:pic>
-    </p:spTree>
-  </p:cSld>
-  <p:clrMapOvr>
-    <a:masterClrMapping/>
-  </p:clrMapOvr>
-</p:sld>
-</file>
-
-<file path=ppt/slides/slide19.xml><?xml version="1.0" encoding="utf-8"?>
-<p:sld xmlns:a="http://schemas.openxmlformats.org/drawingml/2006/main" xmlns:r="http://schemas.openxmlformats.org/officeDocument/2006/relationships" xmlns:p="http://schemas.openxmlformats.org/presentationml/2006/main">
-  <p:cSld name="Slide 19">
-    <p:spTree>
-      <p:nvGrpSpPr>
-        <p:cNvPr id="1" name=""/>
-        <p:cNvGrpSpPr/>
-        <p:nvPr/>
-      </p:nvGrpSpPr>
-      <p:grpSpPr>
-        <a:xfrm>
-          <a:off x="0" y="0"/>
-          <a:ext cx="0" cy="0"/>
-          <a:chOff x="0" y="0"/>
-          <a:chExt cx="0" cy="0"/>
-        </a:xfrm>
-      </p:grpSpPr>
-      <p:sp>
-        <p:nvSpPr>
-          <p:cNvPr id="2" name="Text 0"/>
-          <p:cNvSpPr txBox="1"/>
-          <p:nvPr/>
-        </p:nvSpPr>
-        <p:spPr>
-          <a:xfrm>
-            <a:off x="502920" y="365760"/>
-            <a:ext cx="6400800" cy="274320"/>
-          </a:xfrm>
-          <a:prstGeom prst="rect">
-            <a:avLst/>
-          </a:prstGeom>
-          <a:noFill/>
-          <a:ln/>
-        </p:spPr>
-        <p:txBody>
-          <a:bodyPr wrap="square" lIns="0" tIns="0" rIns="0" bIns="0" rtlCol="0" anchor="ctr"/>
-          <a:lstStyle/>
-          <a:p>
-            <a:pPr marL="0" indent="0">
-              <a:buNone/>
-            </a:pPr>
-            <a:r>
-              <a:rPr lang="en-US" sz="950" b="1" kern="0" spc="220">
-                <a:solidFill>
-                  <a:srgbClr val="122B82"/>
-                </a:solidFill>
-              </a:rPr>
-              <a:t>WHAT WE SPEND</a:t>
-            </a:r>
-            <a:endParaRPr lang="en-US" sz="950"/>
-          </a:p>
-        </p:txBody>
-      </p:sp>
-      <p:sp>
-        <p:nvSpPr>
-          <p:cNvPr id="3" name="Text 1"/>
-          <p:cNvSpPr txBox="1"/>
-          <p:nvPr/>
-        </p:nvSpPr>
-        <p:spPr>
-          <a:xfrm>
-            <a:off x="502920" y="640080"/>
-            <a:ext cx="7315200" cy="685800"/>
-          </a:xfrm>
-          <a:prstGeom prst="rect">
-            <a:avLst/>
-          </a:prstGeom>
-          <a:noFill/>
-          <a:ln/>
-        </p:spPr>
-        <p:txBody>
-          <a:bodyPr wrap="square" lIns="0" tIns="0" rIns="0" bIns="0" rtlCol="0" anchor="ctr"/>
-          <a:lstStyle/>
-          <a:p>
-            <a:pPr marL="0" indent="0">
-              <a:buNone/>
-            </a:pPr>
-            <a:r>
-              <a:rPr lang="en-US" sz="2200" b="1">
-                <a:solidFill>
-                  <a:srgbClr val="242C39"/>
-                </a:solidFill>
-              </a:rPr>
-              <a:t>Employment expense, office and departmental</a:t>
-            </a:r>
-            <a:endParaRPr lang="en-US" sz="2700"/>
-          </a:p>
-        </p:txBody>
-      </p:sp>
-      <p:pic>
-        <p:nvPicPr>
-          <p:cNvPr id="4" name="snip staff_split" descr="/home/user/Claude/deck/snips/staff_split.png"/>
-          <p:cNvPicPr>
-            <a:picLocks noChangeAspect="1"/>
-          </p:cNvPicPr>
-          <p:nvPr/>
-        </p:nvPicPr>
-        <p:blipFill>
-          <a:blip r:embed="rId3"/>
-          <a:stretch>
-            <a:fillRect/>
-          </a:stretch>
-        </p:blipFill>
-        <p:spPr>
-          <a:xfrm>
-            <a:off x="916552" y="1389888"/>
-            <a:ext cx="7310895" cy="1954470"/>
-          </a:xfrm>
-          <a:prstGeom prst="rect">
-            <a:avLst/>
-          </a:prstGeom>
-        </p:spPr>
-      </p:pic>
-      <p:sp>
-        <p:nvSpPr>
-          <p:cNvPr id="6" name="commentary panel"/>
-          <p:cNvSpPr/>
-          <p:nvPr/>
-        </p:nvSpPr>
-        <p:spPr>
-          <a:xfrm>
-            <a:off x="502920" y="3454086"/>
-            <a:ext cx="8138160" cy="1172777"/>
-          </a:xfrm>
-          <a:prstGeom prst="rect">
-            <a:avLst/>
-          </a:prstGeom>
-          <a:solidFill>
-            <a:srgbClr val="E8F9F8"/>
-          </a:solidFill>
-          <a:ln/>
-        </p:spPr>
-        <p:txBody>
-          <a:bodyPr/>
-          <a:lstStyle/>
-          <a:p>
-            <a:endParaRPr lang="en-AU"/>
-          </a:p>
-        </p:txBody>
-      </p:sp>
-      <p:sp>
-        <p:nvSpPr>
-          <p:cNvPr id="7" name="Text 4"/>
-          <p:cNvSpPr txBox="1"/>
-          <p:nvPr/>
-        </p:nvSpPr>
-        <p:spPr>
-          <a:xfrm>
-            <a:off x="685800" y="3527238"/>
-            <a:ext cx="2743200" cy="164592"/>
-          </a:xfrm>
-          <a:prstGeom prst="rect">
-            <a:avLst/>
-          </a:prstGeom>
-          <a:noFill/>
-          <a:ln/>
-        </p:spPr>
-        <p:txBody>
-          <a:bodyPr wrap="square" lIns="0" tIns="0" rIns="0" bIns="0" rtlCol="0" anchor="ctr"/>
-          <a:lstStyle/>
-          <a:p>
-            <a:pPr marL="0" indent="0">
-              <a:buNone/>
-            </a:pPr>
-            <a:r>
-              <a:rPr lang="en-US" sz="850" b="1" kern="0" spc="180">
-                <a:solidFill>
-                  <a:srgbClr val="005358"/>
-                </a:solidFill>
-              </a:rPr>
-              <a:t>COMMENTARY</a:t>
-            </a:r>
-            <a:endParaRPr lang="en-US" sz="850"/>
-          </a:p>
-        </p:txBody>
-      </p:sp>
-      <p:sp>
-        <p:nvSpPr>
-          <p:cNvPr id="8" name="Text 5"/>
-          <p:cNvSpPr txBox="1"/>
-          <p:nvPr/>
-        </p:nvSpPr>
-        <p:spPr>
-          <a:xfrm>
-            <a:off x="685800" y="3700974"/>
-            <a:ext cx="3703320" cy="898457"/>
-          </a:xfrm>
-          <a:prstGeom prst="rect">
-            <a:avLst/>
-          </a:prstGeom>
-          <a:noFill/>
-          <a:ln/>
-        </p:spPr>
-        <p:txBody>
-          <a:bodyPr wrap="square" lIns="0" tIns="0" rIns="0" bIns="0" rtlCol="0" anchor="t">
-            <a:normAutofit/>
-          </a:bodyPr>
-          <a:lstStyle/>
-          <a:p>
-            <a:pPr marL="342900" indent="-342900">
-              <a:lnSpc>
-                <a:spcPts val="1050"/>
-              </a:lnSpc>
-              <a:spcAft>
-                <a:spcPts val="300"/>
-              </a:spcAft>
-              <a:buSzPct val="100000"/>
-              <a:buChar char="•"/>
-            </a:pPr>
-            <a:r>
-              <a:rPr lang="en-US" sz="1000">
-                <a:solidFill>
-                  <a:srgbClr val="3A4453"/>
-                </a:solidFill>
-              </a:rPr>
-              <a:t>Office employment costs totalled $63,077 in September and were allocated across departments.</a:t>
-            </a:r>
-            <a:endParaRPr lang="en-US" sz="850"/>
-          </a:p>
-          <a:p>
-            <a:pPr marL="342900" indent="-342900">
-              <a:lnSpc>
-                <a:spcPts val="1050"/>
-              </a:lnSpc>
-              <a:spcAft>
-                <a:spcPts val="300"/>
-              </a:spcAft>
-              <a:buSzPct val="100000"/>
-              <a:buChar char="•"/>
-            </a:pPr>
-            <a:r>
-              <a:rPr lang="en-US" sz="1000">
-                <a:solidFill>
-                  <a:srgbClr val="3A4453"/>
-                </a:solidFill>
-              </a:rPr>
-              <a:t>Support received approximately 67% of the allocation under the rolling-hours methodology.</a:t>
-            </a:r>
-            <a:endParaRPr lang="en-US" sz="850"/>
-          </a:p>
-        </p:txBody>
-      </p:sp>
-      <p:sp>
-        <p:nvSpPr>
-          <p:cNvPr id="9" name="Text 6"/>
-          <p:cNvSpPr txBox="1"/>
-          <p:nvPr/>
-        </p:nvSpPr>
-        <p:spPr>
-          <a:xfrm>
-            <a:off x="4663440" y="3700974"/>
-            <a:ext cx="3703320" cy="898457"/>
-          </a:xfrm>
-          <a:prstGeom prst="rect">
-            <a:avLst/>
-          </a:prstGeom>
-          <a:noFill/>
-          <a:ln/>
-        </p:spPr>
-        <p:txBody>
-          <a:bodyPr wrap="square" lIns="0" tIns="0" rIns="0" bIns="0" rtlCol="0" anchor="t">
-            <a:normAutofit/>
-          </a:bodyPr>
-          <a:lstStyle/>
-          <a:p>
-            <a:pPr marL="342900" indent="-342900">
-              <a:lnSpc>
-                <a:spcPts val="1050"/>
-              </a:lnSpc>
-              <a:spcAft>
-                <a:spcPts val="300"/>
-              </a:spcAft>
-              <a:buSzPct val="100000"/>
-              <a:buChar char="•"/>
-            </a:pPr>
-            <a:r>
-              <a:rPr lang="en-US" sz="1000">
-                <a:solidFill>
-                  <a:srgbClr val="3A4453"/>
-                </a:solidFill>
-              </a:rPr>
-              <a:t>Events incurred $35,665 in direct departmental employment costs, alongside $15,294 in allocated office wages.</a:t>
-            </a:r>
-            <a:endParaRPr lang="en-US" sz="850"/>
-          </a:p>
-          <a:p>
-            <a:pPr marL="342900" indent="-342900">
-              <a:lnSpc>
-                <a:spcPts val="1050"/>
-              </a:lnSpc>
-              <a:spcAft>
-                <a:spcPts val="300"/>
-              </a:spcAft>
-              <a:buSzPct val="100000"/>
-              <a:buChar char="•"/>
-            </a:pPr>
-            <a:r>
-              <a:rPr lang="en-US" sz="1000">
-                <a:solidFill>
-                  <a:srgbClr val="3A4453"/>
-                </a:solidFill>
-              </a:rPr>
-              <a:t>Integration was allocated $269 in office wages, reflecting its comparatively low share under the allocation methodology.</a:t>
-            </a:r>
-            <a:endParaRPr lang="en-US" sz="850"/>
-          </a:p>
-        </p:txBody>
-      </p:sp>
-      <p:sp>
-        <p:nvSpPr>
-          <p:cNvPr id="25" name="Slide Number Placeholder 0"/>
-          <p:cNvSpPr>
-            <a:spLocks noGrp="1"/>
-          </p:cNvSpPr>
-          <p:nvPr>
-            <p:ph type="sldNum" sz="quarter" idx="4294967295"/>
-          </p:nvPr>
-        </p:nvSpPr>
-        <p:spPr>
-          <a:xfrm>
-            <a:off x="8092440" y="4736592"/>
-            <a:ext cx="548640" cy="228600"/>
-          </a:xfrm>
-          <a:prstGeom prst="rect">
-            <a:avLst/>
-          </a:prstGeom>
-          <a:extLst>
-            <a:ext uri="{C572A759-6A51-4108-AA02-DFA0A04FC94B}">
-              <ma14:wrappingTextBoxFlag xmlns:ma14="http://schemas.microsoft.com/office/mac/drawingml/2011/main" xmlns="" val="0"/>
-            </a:ext>
-          </a:extLst>
-        </p:spPr>
-        <p:txBody>
-          <a:bodyPr/>
-          <a:lstStyle>
-            <a:lvl1pPr>
-              <a:defRPr sz="800">
-                <a:solidFill>
-                  <a:srgbClr val="6B7585"/>
-                </a:solidFill>
-              </a:defRPr>
-            </a:lvl1pPr>
-          </a:lstStyle>
-          <a:p>
-            <a:pPr algn="r"/>
-            <a:fld id="{F7021451-1387-4CA6-816F-3879F97B5CBC}" type="slidenum">
-              <a:rPr lang="en-US" b="0"/>
-              <a:t>19</a:t>
             </a:fld>
             <a:endParaRPr lang="en-US"/>
           </a:p>
@@ -10020,6 +10047,391 @@
 
 <file path=ppt/slides/slide20.xml><?xml version="1.0" encoding="utf-8"?>
 <p:sld xmlns:a="http://schemas.openxmlformats.org/drawingml/2006/main" xmlns:r="http://schemas.openxmlformats.org/officeDocument/2006/relationships" xmlns:p="http://schemas.openxmlformats.org/presentationml/2006/main">
+  <p:cSld name="Slide 19">
+    <p:spTree>
+      <p:nvGrpSpPr>
+        <p:cNvPr id="1" name=""/>
+        <p:cNvGrpSpPr/>
+        <p:nvPr/>
+      </p:nvGrpSpPr>
+      <p:grpSpPr>
+        <a:xfrm>
+          <a:off x="0" y="0"/>
+          <a:ext cx="0" cy="0"/>
+          <a:chOff x="0" y="0"/>
+          <a:chExt cx="0" cy="0"/>
+        </a:xfrm>
+      </p:grpSpPr>
+      <p:sp>
+        <p:nvSpPr>
+          <p:cNvPr id="2" name="Text 0"/>
+          <p:cNvSpPr txBox="1"/>
+          <p:nvPr/>
+        </p:nvSpPr>
+        <p:spPr>
+          <a:xfrm>
+            <a:off x="502920" y="365760"/>
+            <a:ext cx="6400800" cy="274320"/>
+          </a:xfrm>
+          <a:prstGeom prst="rect">
+            <a:avLst/>
+          </a:prstGeom>
+          <a:noFill/>
+          <a:ln/>
+        </p:spPr>
+        <p:txBody>
+          <a:bodyPr wrap="square" lIns="0" tIns="0" rIns="0" bIns="0" rtlCol="0" anchor="ctr"/>
+          <a:lstStyle/>
+          <a:p>
+            <a:pPr marL="0" indent="0">
+              <a:buNone/>
+            </a:pPr>
+            <a:r>
+              <a:rPr lang="en-US" sz="950" b="1" kern="0" spc="220">
+                <a:solidFill>
+                  <a:srgbClr val="122B82"/>
+                </a:solidFill>
+              </a:rPr>
+              <a:t>WHAT WE SPEND</a:t>
+            </a:r>
+            <a:endParaRPr lang="en-US" sz="950"/>
+          </a:p>
+        </p:txBody>
+      </p:sp>
+      <p:sp>
+        <p:nvSpPr>
+          <p:cNvPr id="3" name="Text 1"/>
+          <p:cNvSpPr txBox="1"/>
+          <p:nvPr/>
+        </p:nvSpPr>
+        <p:spPr>
+          <a:xfrm>
+            <a:off x="502920" y="640080"/>
+            <a:ext cx="7315200" cy="685800"/>
+          </a:xfrm>
+          <a:prstGeom prst="rect">
+            <a:avLst/>
+          </a:prstGeom>
+          <a:noFill/>
+          <a:ln/>
+        </p:spPr>
+        <p:txBody>
+          <a:bodyPr wrap="square" lIns="0" tIns="0" rIns="0" bIns="0" rtlCol="0" anchor="ctr"/>
+          <a:lstStyle/>
+          <a:p>
+            <a:pPr marL="0" indent="0">
+              <a:buNone/>
+            </a:pPr>
+            <a:r>
+              <a:rPr lang="en-US" sz="2200" b="1">
+                <a:solidFill>
+                  <a:srgbClr val="242C39"/>
+                </a:solidFill>
+              </a:rPr>
+              <a:t>Employment expense, office and departmental</a:t>
+            </a:r>
+            <a:endParaRPr lang="en-US" sz="2700"/>
+          </a:p>
+        </p:txBody>
+      </p:sp>
+      <p:pic>
+        <p:nvPicPr>
+          <p:cNvPr id="4" name="snip staff_split" descr="/home/user/Claude/deck/snips/staff_split.png"/>
+          <p:cNvPicPr>
+            <a:picLocks noChangeAspect="1"/>
+          </p:cNvPicPr>
+          <p:nvPr/>
+        </p:nvPicPr>
+        <p:blipFill>
+          <a:blip r:embed="rId3"/>
+          <a:stretch>
+            <a:fillRect/>
+          </a:stretch>
+        </p:blipFill>
+        <p:spPr>
+          <a:xfrm>
+            <a:off x="916552" y="1389888"/>
+            <a:ext cx="7310895" cy="1954470"/>
+          </a:xfrm>
+          <a:prstGeom prst="rect">
+            <a:avLst/>
+          </a:prstGeom>
+        </p:spPr>
+      </p:pic>
+      <p:sp>
+        <p:nvSpPr>
+          <p:cNvPr id="6" name="commentary panel"/>
+          <p:cNvSpPr/>
+          <p:nvPr/>
+        </p:nvSpPr>
+        <p:spPr>
+          <a:xfrm>
+            <a:off x="502920" y="3454086"/>
+            <a:ext cx="8138160" cy="1172777"/>
+          </a:xfrm>
+          <a:prstGeom prst="rect">
+            <a:avLst/>
+          </a:prstGeom>
+          <a:solidFill>
+            <a:srgbClr val="E8F9F8"/>
+          </a:solidFill>
+          <a:ln/>
+        </p:spPr>
+        <p:txBody>
+          <a:bodyPr/>
+          <a:lstStyle/>
+          <a:p>
+            <a:endParaRPr lang="en-AU"/>
+          </a:p>
+        </p:txBody>
+      </p:sp>
+      <p:sp>
+        <p:nvSpPr>
+          <p:cNvPr id="7" name="Text 4"/>
+          <p:cNvSpPr txBox="1"/>
+          <p:nvPr/>
+        </p:nvSpPr>
+        <p:spPr>
+          <a:xfrm>
+            <a:off x="685800" y="3527238"/>
+            <a:ext cx="2743200" cy="164592"/>
+          </a:xfrm>
+          <a:prstGeom prst="rect">
+            <a:avLst/>
+          </a:prstGeom>
+          <a:noFill/>
+          <a:ln/>
+        </p:spPr>
+        <p:txBody>
+          <a:bodyPr wrap="square" lIns="0" tIns="0" rIns="0" bIns="0" rtlCol="0" anchor="ctr"/>
+          <a:lstStyle/>
+          <a:p>
+            <a:pPr marL="0" indent="0">
+              <a:buNone/>
+            </a:pPr>
+            <a:r>
+              <a:rPr lang="en-US" sz="850" b="1" kern="0" spc="180">
+                <a:solidFill>
+                  <a:srgbClr val="005358"/>
+                </a:solidFill>
+              </a:rPr>
+              <a:t>COMMENTARY</a:t>
+            </a:r>
+            <a:endParaRPr lang="en-US" sz="850"/>
+          </a:p>
+        </p:txBody>
+      </p:sp>
+      <p:sp>
+        <p:nvSpPr>
+          <p:cNvPr id="8" name="Text 5"/>
+          <p:cNvSpPr txBox="1"/>
+          <p:nvPr/>
+        </p:nvSpPr>
+        <p:spPr>
+          <a:xfrm>
+            <a:off x="685800" y="3700974"/>
+            <a:ext cx="3703320" cy="898457"/>
+          </a:xfrm>
+          <a:prstGeom prst="rect">
+            <a:avLst/>
+          </a:prstGeom>
+          <a:noFill/>
+          <a:ln/>
+        </p:spPr>
+        <p:txBody>
+          <a:bodyPr wrap="square" lIns="0" tIns="0" rIns="0" bIns="0" rtlCol="0" anchor="t">
+            <a:normAutofit/>
+          </a:bodyPr>
+          <a:lstStyle/>
+          <a:p>
+            <a:pPr marL="342900" indent="-342900">
+              <a:lnSpc>
+                <a:spcPts val="1050"/>
+              </a:lnSpc>
+              <a:spcAft>
+                <a:spcPts val="300"/>
+              </a:spcAft>
+              <a:buSzPct val="100000"/>
+              <a:buChar char="•"/>
+            </a:pPr>
+            <a:r>
+              <a:rPr lang="en-US" sz="1000">
+                <a:solidFill>
+                  <a:srgbClr val="3A4453"/>
+                </a:solidFill>
+              </a:rPr>
+              <a:t>Office employment costs totalled $63,077 in September and were allocated across departments.</a:t>
+            </a:r>
+            <a:endParaRPr lang="en-US" sz="850"/>
+          </a:p>
+          <a:p>
+            <a:pPr marL="342900" indent="-342900">
+              <a:lnSpc>
+                <a:spcPts val="1050"/>
+              </a:lnSpc>
+              <a:spcAft>
+                <a:spcPts val="300"/>
+              </a:spcAft>
+              <a:buSzPct val="100000"/>
+              <a:buChar char="•"/>
+            </a:pPr>
+            <a:r>
+              <a:rPr lang="en-US" sz="1000">
+                <a:solidFill>
+                  <a:srgbClr val="3A4453"/>
+                </a:solidFill>
+              </a:rPr>
+              <a:t>Support received approximately 67% of the allocation under the rolling-hours methodology.</a:t>
+            </a:r>
+            <a:endParaRPr lang="en-US" sz="850"/>
+          </a:p>
+        </p:txBody>
+      </p:sp>
+      <p:sp>
+        <p:nvSpPr>
+          <p:cNvPr id="9" name="Text 6"/>
+          <p:cNvSpPr txBox="1"/>
+          <p:nvPr/>
+        </p:nvSpPr>
+        <p:spPr>
+          <a:xfrm>
+            <a:off x="4663440" y="3700974"/>
+            <a:ext cx="3703320" cy="898457"/>
+          </a:xfrm>
+          <a:prstGeom prst="rect">
+            <a:avLst/>
+          </a:prstGeom>
+          <a:noFill/>
+          <a:ln/>
+        </p:spPr>
+        <p:txBody>
+          <a:bodyPr wrap="square" lIns="0" tIns="0" rIns="0" bIns="0" rtlCol="0" anchor="t">
+            <a:normAutofit/>
+          </a:bodyPr>
+          <a:lstStyle/>
+          <a:p>
+            <a:pPr marL="342900" indent="-342900">
+              <a:lnSpc>
+                <a:spcPts val="1050"/>
+              </a:lnSpc>
+              <a:spcAft>
+                <a:spcPts val="300"/>
+              </a:spcAft>
+              <a:buSzPct val="100000"/>
+              <a:buChar char="•"/>
+            </a:pPr>
+            <a:r>
+              <a:rPr lang="en-US" sz="1000">
+                <a:solidFill>
+                  <a:srgbClr val="3A4453"/>
+                </a:solidFill>
+              </a:rPr>
+              <a:t>Events incurred $35,665 in direct departmental employment costs, alongside $15,294 in allocated office wages.</a:t>
+            </a:r>
+            <a:endParaRPr lang="en-US" sz="850"/>
+          </a:p>
+          <a:p>
+            <a:pPr marL="342900" indent="-342900">
+              <a:lnSpc>
+                <a:spcPts val="1050"/>
+              </a:lnSpc>
+              <a:spcAft>
+                <a:spcPts val="300"/>
+              </a:spcAft>
+              <a:buSzPct val="100000"/>
+              <a:buChar char="•"/>
+            </a:pPr>
+            <a:r>
+              <a:rPr lang="en-US" sz="1000">
+                <a:solidFill>
+                  <a:srgbClr val="3A4453"/>
+                </a:solidFill>
+              </a:rPr>
+              <a:t>Integration was allocated $269 in office wages, reflecting its comparatively low share under the allocation methodology.</a:t>
+            </a:r>
+            <a:endParaRPr lang="en-US" sz="850"/>
+          </a:p>
+        </p:txBody>
+      </p:sp>
+      <p:sp>
+        <p:nvSpPr>
+          <p:cNvPr id="25" name="Slide Number Placeholder 0"/>
+          <p:cNvSpPr>
+            <a:spLocks noGrp="1"/>
+          </p:cNvSpPr>
+          <p:nvPr>
+            <p:ph type="sldNum" sz="quarter" idx="4294967295"/>
+          </p:nvPr>
+        </p:nvSpPr>
+        <p:spPr>
+          <a:xfrm>
+            <a:off x="8092440" y="4736592"/>
+            <a:ext cx="548640" cy="228600"/>
+          </a:xfrm>
+          <a:prstGeom prst="rect">
+            <a:avLst/>
+          </a:prstGeom>
+          <a:extLst>
+            <a:ext uri="{C572A759-6A51-4108-AA02-DFA0A04FC94B}">
+              <ma14:wrappingTextBoxFlag xmlns:ma14="http://schemas.microsoft.com/office/mac/drawingml/2011/main" xmlns="" val="0"/>
+            </a:ext>
+          </a:extLst>
+        </p:spPr>
+        <p:txBody>
+          <a:bodyPr/>
+          <a:lstStyle>
+            <a:lvl1pPr>
+              <a:defRPr sz="800">
+                <a:solidFill>
+                  <a:srgbClr val="6B7585"/>
+                </a:solidFill>
+              </a:defRPr>
+            </a:lvl1pPr>
+          </a:lstStyle>
+          <a:p>
+            <a:pPr algn="r"/>
+            <a:fld id="{F7021451-1387-4CA6-816F-3879F97B5CBC}" type="slidenum">
+              <a:rPr lang="en-US" b="0"/>
+              <a:t>19</a:t>
+            </a:fld>
+            <a:endParaRPr lang="en-US"/>
+          </a:p>
+        </p:txBody>
+      </p:sp>
+      <p:pic>
+        <p:nvPicPr>
+          <p:cNvPr id="26" name="cts logo" descr="cts-logo.png"/>
+          <p:cNvPicPr>
+            <a:picLocks noChangeAspect="1"/>
+          </p:cNvPicPr>
+          <p:nvPr/>
+        </p:nvPicPr>
+        <p:blipFill>
+          <a:blip r:embed="rId4"/>
+          <a:stretch>
+            <a:fillRect/>
+          </a:stretch>
+        </p:blipFill>
+        <p:spPr>
+          <a:xfrm>
+            <a:off x="7680959" y="182880"/>
+            <a:ext cx="960120" cy="539696"/>
+          </a:xfrm>
+          <a:prstGeom prst="rect">
+            <a:avLst/>
+          </a:prstGeom>
+        </p:spPr>
+      </p:pic>
+    </p:spTree>
+  </p:cSld>
+  <p:clrMapOvr>
+    <a:masterClrMapping/>
+  </p:clrMapOvr>
+</p:sld>
+</file>
+
+<file path=ppt/slides/slide21.xml><?xml version="1.0" encoding="utf-8"?>
+<p:sld xmlns:a="http://schemas.openxmlformats.org/drawingml/2006/main" xmlns:r="http://schemas.openxmlformats.org/officeDocument/2006/relationships" xmlns:p="http://schemas.openxmlformats.org/presentationml/2006/main">
   <p:cSld name="Slide 20">
     <p:spTree>
       <p:nvGrpSpPr>
@@ -10301,7 +10713,7 @@
 </p:sld>
 </file>
 
-<file path=ppt/slides/slide21.xml><?xml version="1.0" encoding="utf-8"?>
+<file path=ppt/slides/slide22.xml><?xml version="1.0" encoding="utf-8"?>
 <p:sld xmlns:a="http://schemas.openxmlformats.org/drawingml/2006/main" xmlns:r="http://schemas.openxmlformats.org/officeDocument/2006/relationships" xmlns:p="http://schemas.openxmlformats.org/presentationml/2006/main">
   <p:cSld name="Slide 21">
     <p:spTree>
@@ -10683,7 +11095,7 @@
 </p:sld>
 </file>
 
-<file path=ppt/slides/slide22.xml><?xml version="1.0" encoding="utf-8"?>
+<file path=ppt/slides/slide23.xml><?xml version="1.0" encoding="utf-8"?>
 <p:sld xmlns:a="http://schemas.openxmlformats.org/drawingml/2006/main" xmlns:r="http://schemas.openxmlformats.org/officeDocument/2006/relationships" xmlns:p="http://schemas.openxmlformats.org/presentationml/2006/main">
   <p:cSld name="Slide 22">
     <p:spTree>
@@ -11065,7 +11477,7 @@
 </p:sld>
 </file>
 
-<file path=ppt/slides/slide23.xml><?xml version="1.0" encoding="utf-8"?>
+<file path=ppt/slides/slide24.xml><?xml version="1.0" encoding="utf-8"?>
 <p:sld xmlns:a="http://schemas.openxmlformats.org/drawingml/2006/main" xmlns:r="http://schemas.openxmlformats.org/officeDocument/2006/relationships" xmlns:p="http://schemas.openxmlformats.org/presentationml/2006/main">
   <p:cSld name="Slide 23">
     <p:spTree>
@@ -11447,7 +11859,7 @@
 </p:sld>
 </file>
 
-<file path=ppt/slides/slide24.xml><?xml version="1.0" encoding="utf-8"?>
+<file path=ppt/slides/slide25.xml><?xml version="1.0" encoding="utf-8"?>
 <p:sld xmlns:a="http://schemas.openxmlformats.org/drawingml/2006/main" xmlns:r="http://schemas.openxmlformats.org/officeDocument/2006/relationships" xmlns:p="http://schemas.openxmlformats.org/presentationml/2006/main">
   <p:cSld name="Slide 24">
     <p:spTree>
@@ -11730,7 +12142,7 @@
 </p:sld>
 </file>
 
-<file path=ppt/slides/slide25.xml><?xml version="1.0" encoding="utf-8"?>
+<file path=ppt/slides/slide26.xml><?xml version="1.0" encoding="utf-8"?>
 <p:sld xmlns:a="http://schemas.openxmlformats.org/drawingml/2006/main" xmlns:r="http://schemas.openxmlformats.org/officeDocument/2006/relationships" xmlns:p="http://schemas.openxmlformats.org/presentationml/2006/main">
   <p:cSld name="Slide 25">
     <p:spTree>
@@ -12115,7 +12527,7 @@
 </p:sld>
 </file>
 
-<file path=ppt/slides/slide26.xml><?xml version="1.0" encoding="utf-8"?>
+<file path=ppt/slides/slide27.xml><?xml version="1.0" encoding="utf-8"?>
 <p:sld xmlns:a="http://schemas.openxmlformats.org/drawingml/2006/main" xmlns:r="http://schemas.openxmlformats.org/officeDocument/2006/relationships" xmlns:p="http://schemas.openxmlformats.org/presentationml/2006/main">
   <p:cSld name="Slide 26">
     <p:spTree>
@@ -12497,7 +12909,7 @@
 </p:sld>
 </file>
 
-<file path=ppt/slides/slide27.xml><?xml version="1.0" encoding="utf-8"?>
+<file path=ppt/slides/slide28.xml><?xml version="1.0" encoding="utf-8"?>
 <p:sld xmlns:a="http://schemas.openxmlformats.org/drawingml/2006/main" xmlns:r="http://schemas.openxmlformats.org/officeDocument/2006/relationships" xmlns:p="http://schemas.openxmlformats.org/presentationml/2006/main">
   <p:cSld name="Slide 27">
     <p:spTree>
@@ -12879,7 +13291,7 @@
 </p:sld>
 </file>
 
-<file path=ppt/slides/slide28.xml><?xml version="1.0" encoding="utf-8"?>
+<file path=ppt/slides/slide29.xml><?xml version="1.0" encoding="utf-8"?>
 <p:sld xmlns:a="http://schemas.openxmlformats.org/drawingml/2006/main" xmlns:r="http://schemas.openxmlformats.org/officeDocument/2006/relationships" xmlns:p="http://schemas.openxmlformats.org/presentationml/2006/main">
   <p:cSld name="Slide 28">
     <p:spTree>
@@ -13154,388 +13566,6 @@
           </a:p>
         </p:txBody>
       </p:sp>
-    </p:spTree>
-  </p:cSld>
-  <p:clrMapOvr>
-    <a:masterClrMapping/>
-  </p:clrMapOvr>
-</p:sld>
-</file>
-
-<file path=ppt/slides/slide29.xml><?xml version="1.0" encoding="utf-8"?>
-<p:sld xmlns:a="http://schemas.openxmlformats.org/drawingml/2006/main" xmlns:r="http://schemas.openxmlformats.org/officeDocument/2006/relationships" xmlns:p="http://schemas.openxmlformats.org/presentationml/2006/main">
-  <p:cSld name="Slide 29">
-    <p:spTree>
-      <p:nvGrpSpPr>
-        <p:cNvPr id="1" name=""/>
-        <p:cNvGrpSpPr/>
-        <p:nvPr/>
-      </p:nvGrpSpPr>
-      <p:grpSpPr>
-        <a:xfrm>
-          <a:off x="0" y="0"/>
-          <a:ext cx="0" cy="0"/>
-          <a:chOff x="0" y="0"/>
-          <a:chExt cx="0" cy="0"/>
-        </a:xfrm>
-      </p:grpSpPr>
-      <p:sp>
-        <p:nvSpPr>
-          <p:cNvPr id="2" name="Text 0"/>
-          <p:cNvSpPr txBox="1"/>
-          <p:nvPr/>
-        </p:nvSpPr>
-        <p:spPr>
-          <a:xfrm>
-            <a:off x="502920" y="365760"/>
-            <a:ext cx="6400800" cy="274320"/>
-          </a:xfrm>
-          <a:prstGeom prst="rect">
-            <a:avLst/>
-          </a:prstGeom>
-          <a:noFill/>
-          <a:ln/>
-        </p:spPr>
-        <p:txBody>
-          <a:bodyPr wrap="square" lIns="0" tIns="0" rIns="0" bIns="0" rtlCol="0" anchor="ctr"/>
-          <a:lstStyle/>
-          <a:p>
-            <a:pPr marL="0" indent="0">
-              <a:buNone/>
-            </a:pPr>
-            <a:r>
-              <a:rPr lang="en-US" sz="950" b="1" kern="0" spc="220">
-                <a:solidFill>
-                  <a:srgbClr val="122B82"/>
-                </a:solidFill>
-              </a:rPr>
-              <a:t>BUDGET AND OUTLOOK</a:t>
-            </a:r>
-            <a:endParaRPr lang="en-US" sz="950"/>
-          </a:p>
-        </p:txBody>
-      </p:sp>
-      <p:sp>
-        <p:nvSpPr>
-          <p:cNvPr id="3" name="Text 1"/>
-          <p:cNvSpPr txBox="1"/>
-          <p:nvPr/>
-        </p:nvSpPr>
-        <p:spPr>
-          <a:xfrm>
-            <a:off x="502920" y="640080"/>
-            <a:ext cx="7315200" cy="685800"/>
-          </a:xfrm>
-          <a:prstGeom prst="rect">
-            <a:avLst/>
-          </a:prstGeom>
-          <a:noFill/>
-          <a:ln/>
-        </p:spPr>
-        <p:txBody>
-          <a:bodyPr wrap="square" lIns="0" tIns="0" rIns="0" bIns="0" rtlCol="0" anchor="ctr"/>
-          <a:lstStyle/>
-          <a:p>
-            <a:pPr marL="0" indent="0">
-              <a:buNone/>
-            </a:pPr>
-            <a:r>
-              <a:rPr lang="en-US" sz="2200" b="1">
-                <a:solidFill>
-                  <a:srgbClr val="242C39"/>
-                </a:solidFill>
-              </a:rPr>
-              <a:t>Revenue by month against budget</a:t>
-            </a:r>
-            <a:endParaRPr lang="en-US" sz="2700"/>
-          </a:p>
-        </p:txBody>
-      </p:sp>
-      <p:pic>
-        <p:nvPicPr>
-          <p:cNvPr id="4" name="snip income_month" descr="/home/user/Claude/deck/snips/income_month.png"/>
-          <p:cNvPicPr>
-            <a:picLocks noChangeAspect="1"/>
-          </p:cNvPicPr>
-          <p:nvPr/>
-        </p:nvPicPr>
-        <p:blipFill>
-          <a:blip r:embed="rId3"/>
-          <a:stretch>
-            <a:fillRect/>
-          </a:stretch>
-        </p:blipFill>
-        <p:spPr>
-          <a:xfrm>
-            <a:off x="502920" y="1444752"/>
-            <a:ext cx="4709159" cy="2198519"/>
-          </a:xfrm>
-          <a:prstGeom prst="rect">
-            <a:avLst/>
-          </a:prstGeom>
-        </p:spPr>
-      </p:pic>
-      <p:sp>
-        <p:nvSpPr>
-          <p:cNvPr id="6" name="commentary panel"/>
-          <p:cNvSpPr/>
-          <p:nvPr/>
-        </p:nvSpPr>
-        <p:spPr>
-          <a:xfrm>
-            <a:off x="5440679" y="1463040"/>
-            <a:ext cx="3200400" cy="3154680"/>
-          </a:xfrm>
-          <a:prstGeom prst="rect">
-            <a:avLst/>
-          </a:prstGeom>
-          <a:solidFill>
-            <a:srgbClr val="E8F9F8"/>
-          </a:solidFill>
-          <a:ln/>
-        </p:spPr>
-        <p:txBody>
-          <a:bodyPr/>
-          <a:lstStyle/>
-          <a:p>
-            <a:endParaRPr lang="en-AU"/>
-          </a:p>
-        </p:txBody>
-      </p:sp>
-      <p:sp>
-        <p:nvSpPr>
-          <p:cNvPr id="7" name="Text 4"/>
-          <p:cNvSpPr txBox="1"/>
-          <p:nvPr/>
-        </p:nvSpPr>
-        <p:spPr>
-          <a:xfrm>
-            <a:off x="5623559" y="1627632"/>
-            <a:ext cx="2834640" cy="228600"/>
-          </a:xfrm>
-          <a:prstGeom prst="rect">
-            <a:avLst/>
-          </a:prstGeom>
-          <a:noFill/>
-          <a:ln/>
-        </p:spPr>
-        <p:txBody>
-          <a:bodyPr wrap="square" lIns="0" tIns="0" rIns="0" bIns="0" rtlCol="0" anchor="ctr"/>
-          <a:lstStyle/>
-          <a:p>
-            <a:pPr marL="0" indent="0">
-              <a:buNone/>
-            </a:pPr>
-            <a:r>
-              <a:rPr lang="en-US" sz="900" b="1" kern="0" spc="180">
-                <a:solidFill>
-                  <a:srgbClr val="005358"/>
-                </a:solidFill>
-              </a:rPr>
-              <a:t>COMMENTARY</a:t>
-            </a:r>
-            <a:endParaRPr lang="en-US" sz="900"/>
-          </a:p>
-        </p:txBody>
-      </p:sp>
-      <p:sp>
-        <p:nvSpPr>
-          <p:cNvPr id="8" name="Text 5"/>
-          <p:cNvSpPr txBox="1"/>
-          <p:nvPr/>
-        </p:nvSpPr>
-        <p:spPr>
-          <a:xfrm>
-            <a:off x="5623559" y="1901952"/>
-            <a:ext cx="2834640" cy="2706623"/>
-          </a:xfrm>
-          <a:prstGeom prst="rect">
-            <a:avLst/>
-          </a:prstGeom>
-          <a:noFill/>
-          <a:ln/>
-        </p:spPr>
-        <p:txBody>
-          <a:bodyPr wrap="square" lIns="0" tIns="0" rIns="0" bIns="0" rtlCol="0" anchor="t">
-            <a:normAutofit fontScale="77500" lnSpcReduction="20000"/>
-          </a:bodyPr>
-          <a:lstStyle/>
-          <a:p>
-            <a:pPr marL="342900" indent="-342900">
-              <a:lnSpc>
-                <a:spcPts val="1150"/>
-              </a:lnSpc>
-              <a:spcAft>
-                <a:spcPts val="400"/>
-              </a:spcAft>
-              <a:buSzPct val="100000"/>
-              <a:buChar char="•"/>
-            </a:pPr>
-            <a:r>
-              <a:rPr lang="en-US" sz="1000">
-                <a:solidFill>
-                  <a:srgbClr val="3A4453"/>
-                </a:solidFill>
-              </a:rPr>
-              <a:t>First-quarter revenue was $372k below budget, with significant shortfalls in Consulting and Video.</a:t>
-            </a:r>
-            <a:endParaRPr lang="en-US" sz="900"/>
-          </a:p>
-          <a:p>
-            <a:pPr marL="342900" indent="-342900">
-              <a:lnSpc>
-                <a:spcPts val="1150"/>
-              </a:lnSpc>
-              <a:spcAft>
-                <a:spcPts val="400"/>
-              </a:spcAft>
-              <a:buSzPct val="100000"/>
-              <a:buChar char="•"/>
-            </a:pPr>
-            <a:r>
-              <a:rPr lang="en-US" sz="1000">
-                <a:solidFill>
-                  <a:srgbClr val="3A4453"/>
-                </a:solidFill>
-              </a:rPr>
-              <a:t>October to June currently reflects the original budget rather than an updated forecast.</a:t>
-            </a:r>
-            <a:endParaRPr lang="en-US" sz="900"/>
-          </a:p>
-          <a:p>
-            <a:pPr marL="342900" indent="-342900">
-              <a:lnSpc>
-                <a:spcPts val="1150"/>
-              </a:lnSpc>
-              <a:spcAft>
-                <a:spcPts val="400"/>
-              </a:spcAft>
-              <a:buSzPct val="100000"/>
-              <a:buChar char="•"/>
-            </a:pPr>
-            <a:r>
-              <a:rPr lang="en-US" sz="1000">
-                <a:solidFill>
-                  <a:srgbClr val="3A4453"/>
-                </a:solidFill>
-              </a:rPr>
-              <a:t>October revenue is budgeted at $950k, well above the highest actual month recorded so far this year.</a:t>
-            </a:r>
-            <a:endParaRPr lang="en-US" sz="900"/>
-          </a:p>
-          <a:p>
-            <a:pPr marL="342900" indent="-342900">
-              <a:lnSpc>
-                <a:spcPts val="1150"/>
-              </a:lnSpc>
-              <a:spcAft>
-                <a:spcPts val="400"/>
-              </a:spcAft>
-              <a:buSzPct val="100000"/>
-              <a:buChar char="•"/>
-            </a:pPr>
-            <a:r>
-              <a:rPr lang="en-US" sz="1000">
-                <a:solidFill>
-                  <a:srgbClr val="3A4453"/>
-                </a:solidFill>
-              </a:rPr>
-              <a:t>December includes a planned loss reflecting the two-week business closure, which should remain in the revised assumptions.</a:t>
-            </a:r>
-            <a:endParaRPr lang="en-US" sz="900"/>
-          </a:p>
-          <a:p>
-            <a:pPr marL="342900" indent="-342900">
-              <a:lnSpc>
-                <a:spcPts val="1150"/>
-              </a:lnSpc>
-              <a:spcAft>
-                <a:spcPts val="400"/>
-              </a:spcAft>
-              <a:buSzPct val="100000"/>
-              <a:buChar char="•"/>
-            </a:pPr>
-            <a:r>
-              <a:rPr lang="en-US" sz="1000">
-                <a:solidFill>
-                  <a:srgbClr val="3A4453"/>
-                </a:solidFill>
-              </a:rPr>
-              <a:t>Recommend preparing an updated rolling forecast using actual delivery capacity and achievable gross margins.</a:t>
-            </a:r>
-            <a:endParaRPr lang="en-US" sz="900"/>
-          </a:p>
-        </p:txBody>
-      </p:sp>
-      <p:sp>
-        <p:nvSpPr>
-          <p:cNvPr id="25" name="Slide Number Placeholder 0"/>
-          <p:cNvSpPr>
-            <a:spLocks noGrp="1"/>
-          </p:cNvSpPr>
-          <p:nvPr>
-            <p:ph type="sldNum" sz="quarter" idx="4294967295"/>
-          </p:nvPr>
-        </p:nvSpPr>
-        <p:spPr>
-          <a:xfrm>
-            <a:off x="8092440" y="4736592"/>
-            <a:ext cx="548640" cy="228600"/>
-          </a:xfrm>
-          <a:prstGeom prst="rect">
-            <a:avLst/>
-          </a:prstGeom>
-          <a:extLst>
-            <a:ext uri="{C572A759-6A51-4108-AA02-DFA0A04FC94B}">
-              <ma14:wrappingTextBoxFlag xmlns:ma14="http://schemas.microsoft.com/office/mac/drawingml/2011/main" xmlns="" val="0"/>
-            </a:ext>
-          </a:extLst>
-        </p:spPr>
-        <p:txBody>
-          <a:bodyPr/>
-          <a:lstStyle>
-            <a:lvl1pPr>
-              <a:defRPr sz="800">
-                <a:solidFill>
-                  <a:srgbClr val="6B7585"/>
-                </a:solidFill>
-              </a:defRPr>
-            </a:lvl1pPr>
-          </a:lstStyle>
-          <a:p>
-            <a:pPr algn="r"/>
-            <a:fld id="{F7021451-1387-4CA6-816F-3879F97B5CBC}" type="slidenum">
-              <a:rPr lang="en-US" b="0"/>
-              <a:t>29</a:t>
-            </a:fld>
-            <a:endParaRPr lang="en-US"/>
-          </a:p>
-        </p:txBody>
-      </p:sp>
-      <p:pic>
-        <p:nvPicPr>
-          <p:cNvPr id="26" name="cts logo" descr="cts-logo.png"/>
-          <p:cNvPicPr>
-            <a:picLocks noChangeAspect="1"/>
-          </p:cNvPicPr>
-          <p:nvPr/>
-        </p:nvPicPr>
-        <p:blipFill>
-          <a:blip r:embed="rId4"/>
-          <a:stretch>
-            <a:fillRect/>
-          </a:stretch>
-        </p:blipFill>
-        <p:spPr>
-          <a:xfrm>
-            <a:off x="7680959" y="182880"/>
-            <a:ext cx="960120" cy="539696"/>
-          </a:xfrm>
-          <a:prstGeom prst="rect">
-            <a:avLst/>
-          </a:prstGeom>
-        </p:spPr>
-      </p:pic>
     </p:spTree>
   </p:cSld>
   <p:clrMapOvr>
@@ -15797,6 +15827,388 @@
 </file>
 
 <file path=ppt/slides/slide30.xml><?xml version="1.0" encoding="utf-8"?>
+<p:sld xmlns:a="http://schemas.openxmlformats.org/drawingml/2006/main" xmlns:r="http://schemas.openxmlformats.org/officeDocument/2006/relationships" xmlns:p="http://schemas.openxmlformats.org/presentationml/2006/main">
+  <p:cSld name="Slide 29">
+    <p:spTree>
+      <p:nvGrpSpPr>
+        <p:cNvPr id="1" name=""/>
+        <p:cNvGrpSpPr/>
+        <p:nvPr/>
+      </p:nvGrpSpPr>
+      <p:grpSpPr>
+        <a:xfrm>
+          <a:off x="0" y="0"/>
+          <a:ext cx="0" cy="0"/>
+          <a:chOff x="0" y="0"/>
+          <a:chExt cx="0" cy="0"/>
+        </a:xfrm>
+      </p:grpSpPr>
+      <p:sp>
+        <p:nvSpPr>
+          <p:cNvPr id="2" name="Text 0"/>
+          <p:cNvSpPr txBox="1"/>
+          <p:nvPr/>
+        </p:nvSpPr>
+        <p:spPr>
+          <a:xfrm>
+            <a:off x="502920" y="365760"/>
+            <a:ext cx="6400800" cy="274320"/>
+          </a:xfrm>
+          <a:prstGeom prst="rect">
+            <a:avLst/>
+          </a:prstGeom>
+          <a:noFill/>
+          <a:ln/>
+        </p:spPr>
+        <p:txBody>
+          <a:bodyPr wrap="square" lIns="0" tIns="0" rIns="0" bIns="0" rtlCol="0" anchor="ctr"/>
+          <a:lstStyle/>
+          <a:p>
+            <a:pPr marL="0" indent="0">
+              <a:buNone/>
+            </a:pPr>
+            <a:r>
+              <a:rPr lang="en-US" sz="950" b="1" kern="0" spc="220">
+                <a:solidFill>
+                  <a:srgbClr val="122B82"/>
+                </a:solidFill>
+              </a:rPr>
+              <a:t>BUDGET AND OUTLOOK</a:t>
+            </a:r>
+            <a:endParaRPr lang="en-US" sz="950"/>
+          </a:p>
+        </p:txBody>
+      </p:sp>
+      <p:sp>
+        <p:nvSpPr>
+          <p:cNvPr id="3" name="Text 1"/>
+          <p:cNvSpPr txBox="1"/>
+          <p:nvPr/>
+        </p:nvSpPr>
+        <p:spPr>
+          <a:xfrm>
+            <a:off x="502920" y="640080"/>
+            <a:ext cx="7315200" cy="685800"/>
+          </a:xfrm>
+          <a:prstGeom prst="rect">
+            <a:avLst/>
+          </a:prstGeom>
+          <a:noFill/>
+          <a:ln/>
+        </p:spPr>
+        <p:txBody>
+          <a:bodyPr wrap="square" lIns="0" tIns="0" rIns="0" bIns="0" rtlCol="0" anchor="ctr"/>
+          <a:lstStyle/>
+          <a:p>
+            <a:pPr marL="0" indent="0">
+              <a:buNone/>
+            </a:pPr>
+            <a:r>
+              <a:rPr lang="en-US" sz="2200" b="1">
+                <a:solidFill>
+                  <a:srgbClr val="242C39"/>
+                </a:solidFill>
+              </a:rPr>
+              <a:t>Revenue by month against budget</a:t>
+            </a:r>
+            <a:endParaRPr lang="en-US" sz="2700"/>
+          </a:p>
+        </p:txBody>
+      </p:sp>
+      <p:pic>
+        <p:nvPicPr>
+          <p:cNvPr id="4" name="snip income_month" descr="/home/user/Claude/deck/snips/income_month.png"/>
+          <p:cNvPicPr>
+            <a:picLocks noChangeAspect="1"/>
+          </p:cNvPicPr>
+          <p:nvPr/>
+        </p:nvPicPr>
+        <p:blipFill>
+          <a:blip r:embed="rId3"/>
+          <a:stretch>
+            <a:fillRect/>
+          </a:stretch>
+        </p:blipFill>
+        <p:spPr>
+          <a:xfrm>
+            <a:off x="502920" y="1444752"/>
+            <a:ext cx="4709159" cy="2198519"/>
+          </a:xfrm>
+          <a:prstGeom prst="rect">
+            <a:avLst/>
+          </a:prstGeom>
+        </p:spPr>
+      </p:pic>
+      <p:sp>
+        <p:nvSpPr>
+          <p:cNvPr id="6" name="commentary panel"/>
+          <p:cNvSpPr/>
+          <p:nvPr/>
+        </p:nvSpPr>
+        <p:spPr>
+          <a:xfrm>
+            <a:off x="5440679" y="1463040"/>
+            <a:ext cx="3200400" cy="3154680"/>
+          </a:xfrm>
+          <a:prstGeom prst="rect">
+            <a:avLst/>
+          </a:prstGeom>
+          <a:solidFill>
+            <a:srgbClr val="E8F9F8"/>
+          </a:solidFill>
+          <a:ln/>
+        </p:spPr>
+        <p:txBody>
+          <a:bodyPr/>
+          <a:lstStyle/>
+          <a:p>
+            <a:endParaRPr lang="en-AU"/>
+          </a:p>
+        </p:txBody>
+      </p:sp>
+      <p:sp>
+        <p:nvSpPr>
+          <p:cNvPr id="7" name="Text 4"/>
+          <p:cNvSpPr txBox="1"/>
+          <p:nvPr/>
+        </p:nvSpPr>
+        <p:spPr>
+          <a:xfrm>
+            <a:off x="5623559" y="1627632"/>
+            <a:ext cx="2834640" cy="228600"/>
+          </a:xfrm>
+          <a:prstGeom prst="rect">
+            <a:avLst/>
+          </a:prstGeom>
+          <a:noFill/>
+          <a:ln/>
+        </p:spPr>
+        <p:txBody>
+          <a:bodyPr wrap="square" lIns="0" tIns="0" rIns="0" bIns="0" rtlCol="0" anchor="ctr"/>
+          <a:lstStyle/>
+          <a:p>
+            <a:pPr marL="0" indent="0">
+              <a:buNone/>
+            </a:pPr>
+            <a:r>
+              <a:rPr lang="en-US" sz="900" b="1" kern="0" spc="180">
+                <a:solidFill>
+                  <a:srgbClr val="005358"/>
+                </a:solidFill>
+              </a:rPr>
+              <a:t>COMMENTARY</a:t>
+            </a:r>
+            <a:endParaRPr lang="en-US" sz="900"/>
+          </a:p>
+        </p:txBody>
+      </p:sp>
+      <p:sp>
+        <p:nvSpPr>
+          <p:cNvPr id="8" name="Text 5"/>
+          <p:cNvSpPr txBox="1"/>
+          <p:nvPr/>
+        </p:nvSpPr>
+        <p:spPr>
+          <a:xfrm>
+            <a:off x="5623559" y="1901952"/>
+            <a:ext cx="2834640" cy="2706623"/>
+          </a:xfrm>
+          <a:prstGeom prst="rect">
+            <a:avLst/>
+          </a:prstGeom>
+          <a:noFill/>
+          <a:ln/>
+        </p:spPr>
+        <p:txBody>
+          <a:bodyPr wrap="square" lIns="0" tIns="0" rIns="0" bIns="0" rtlCol="0" anchor="t">
+            <a:normAutofit fontScale="77500" lnSpcReduction="20000"/>
+          </a:bodyPr>
+          <a:lstStyle/>
+          <a:p>
+            <a:pPr marL="342900" indent="-342900">
+              <a:lnSpc>
+                <a:spcPts val="1150"/>
+              </a:lnSpc>
+              <a:spcAft>
+                <a:spcPts val="400"/>
+              </a:spcAft>
+              <a:buSzPct val="100000"/>
+              <a:buChar char="•"/>
+            </a:pPr>
+            <a:r>
+              <a:rPr lang="en-US" sz="1000">
+                <a:solidFill>
+                  <a:srgbClr val="3A4453"/>
+                </a:solidFill>
+              </a:rPr>
+              <a:t>First-quarter revenue was $372k below budget, with significant shortfalls in Consulting and Video.</a:t>
+            </a:r>
+            <a:endParaRPr lang="en-US" sz="900"/>
+          </a:p>
+          <a:p>
+            <a:pPr marL="342900" indent="-342900">
+              <a:lnSpc>
+                <a:spcPts val="1150"/>
+              </a:lnSpc>
+              <a:spcAft>
+                <a:spcPts val="400"/>
+              </a:spcAft>
+              <a:buSzPct val="100000"/>
+              <a:buChar char="•"/>
+            </a:pPr>
+            <a:r>
+              <a:rPr lang="en-US" sz="1000">
+                <a:solidFill>
+                  <a:srgbClr val="3A4453"/>
+                </a:solidFill>
+              </a:rPr>
+              <a:t>October to June currently reflects the original budget rather than an updated forecast.</a:t>
+            </a:r>
+            <a:endParaRPr lang="en-US" sz="900"/>
+          </a:p>
+          <a:p>
+            <a:pPr marL="342900" indent="-342900">
+              <a:lnSpc>
+                <a:spcPts val="1150"/>
+              </a:lnSpc>
+              <a:spcAft>
+                <a:spcPts val="400"/>
+              </a:spcAft>
+              <a:buSzPct val="100000"/>
+              <a:buChar char="•"/>
+            </a:pPr>
+            <a:r>
+              <a:rPr lang="en-US" sz="1000">
+                <a:solidFill>
+                  <a:srgbClr val="3A4453"/>
+                </a:solidFill>
+              </a:rPr>
+              <a:t>October revenue is budgeted at $950k, well above the highest actual month recorded so far this year.</a:t>
+            </a:r>
+            <a:endParaRPr lang="en-US" sz="900"/>
+          </a:p>
+          <a:p>
+            <a:pPr marL="342900" indent="-342900">
+              <a:lnSpc>
+                <a:spcPts val="1150"/>
+              </a:lnSpc>
+              <a:spcAft>
+                <a:spcPts val="400"/>
+              </a:spcAft>
+              <a:buSzPct val="100000"/>
+              <a:buChar char="•"/>
+            </a:pPr>
+            <a:r>
+              <a:rPr lang="en-US" sz="1000">
+                <a:solidFill>
+                  <a:srgbClr val="3A4453"/>
+                </a:solidFill>
+              </a:rPr>
+              <a:t>December includes a planned loss reflecting the two-week business closure, which should remain in the revised assumptions.</a:t>
+            </a:r>
+            <a:endParaRPr lang="en-US" sz="900"/>
+          </a:p>
+          <a:p>
+            <a:pPr marL="342900" indent="-342900">
+              <a:lnSpc>
+                <a:spcPts val="1150"/>
+              </a:lnSpc>
+              <a:spcAft>
+                <a:spcPts val="400"/>
+              </a:spcAft>
+              <a:buSzPct val="100000"/>
+              <a:buChar char="•"/>
+            </a:pPr>
+            <a:r>
+              <a:rPr lang="en-US" sz="1000">
+                <a:solidFill>
+                  <a:srgbClr val="3A4453"/>
+                </a:solidFill>
+              </a:rPr>
+              <a:t>Recommend preparing an updated rolling forecast using actual delivery capacity and achievable gross margins.</a:t>
+            </a:r>
+            <a:endParaRPr lang="en-US" sz="900"/>
+          </a:p>
+        </p:txBody>
+      </p:sp>
+      <p:sp>
+        <p:nvSpPr>
+          <p:cNvPr id="25" name="Slide Number Placeholder 0"/>
+          <p:cNvSpPr>
+            <a:spLocks noGrp="1"/>
+          </p:cNvSpPr>
+          <p:nvPr>
+            <p:ph type="sldNum" sz="quarter" idx="4294967295"/>
+          </p:nvPr>
+        </p:nvSpPr>
+        <p:spPr>
+          <a:xfrm>
+            <a:off x="8092440" y="4736592"/>
+            <a:ext cx="548640" cy="228600"/>
+          </a:xfrm>
+          <a:prstGeom prst="rect">
+            <a:avLst/>
+          </a:prstGeom>
+          <a:extLst>
+            <a:ext uri="{C572A759-6A51-4108-AA02-DFA0A04FC94B}">
+              <ma14:wrappingTextBoxFlag xmlns:ma14="http://schemas.microsoft.com/office/mac/drawingml/2011/main" xmlns="" val="0"/>
+            </a:ext>
+          </a:extLst>
+        </p:spPr>
+        <p:txBody>
+          <a:bodyPr/>
+          <a:lstStyle>
+            <a:lvl1pPr>
+              <a:defRPr sz="800">
+                <a:solidFill>
+                  <a:srgbClr val="6B7585"/>
+                </a:solidFill>
+              </a:defRPr>
+            </a:lvl1pPr>
+          </a:lstStyle>
+          <a:p>
+            <a:pPr algn="r"/>
+            <a:fld id="{F7021451-1387-4CA6-816F-3879F97B5CBC}" type="slidenum">
+              <a:rPr lang="en-US" b="0"/>
+              <a:t>29</a:t>
+            </a:fld>
+            <a:endParaRPr lang="en-US"/>
+          </a:p>
+        </p:txBody>
+      </p:sp>
+      <p:pic>
+        <p:nvPicPr>
+          <p:cNvPr id="26" name="cts logo" descr="cts-logo.png"/>
+          <p:cNvPicPr>
+            <a:picLocks noChangeAspect="1"/>
+          </p:cNvPicPr>
+          <p:nvPr/>
+        </p:nvPicPr>
+        <p:blipFill>
+          <a:blip r:embed="rId4"/>
+          <a:stretch>
+            <a:fillRect/>
+          </a:stretch>
+        </p:blipFill>
+        <p:spPr>
+          <a:xfrm>
+            <a:off x="7680959" y="182880"/>
+            <a:ext cx="960120" cy="539696"/>
+          </a:xfrm>
+          <a:prstGeom prst="rect">
+            <a:avLst/>
+          </a:prstGeom>
+        </p:spPr>
+      </p:pic>
+    </p:spTree>
+  </p:cSld>
+  <p:clrMapOvr>
+    <a:masterClrMapping/>
+  </p:clrMapOvr>
+</p:sld>
+</file>
+
+<file path=ppt/slides/slide31.xml><?xml version="1.0" encoding="utf-8"?>
 <p:sld xmlns:a="http://schemas.openxmlformats.org/drawingml/2006/main" xmlns:r="http://schemas.openxmlformats.org/officeDocument/2006/relationships" xmlns:p="http://schemas.openxmlformats.org/presentationml/2006/main">
   <p:cSld name="Slide 30">
     <p:spTree>
@@ -17942,7 +18354,7 @@
 </p:sld>
 </file>
 
-<file path=ppt/slides/slide31.xml><?xml version="1.0" encoding="utf-8"?>
+<file path=ppt/slides/slide32.xml><?xml version="1.0" encoding="utf-8"?>
 <p:sld xmlns:a="http://schemas.openxmlformats.org/drawingml/2006/main" xmlns:r="http://schemas.openxmlformats.org/officeDocument/2006/relationships" xmlns:p="http://schemas.openxmlformats.org/presentationml/2006/main">
   <p:cSld>
     <p:bg>
@@ -18318,7 +18730,7 @@
 </p:sld>
 </file>
 
-<file path=ppt/slides/slide32.xml><?xml version="1.0" encoding="utf-8"?>
+<file path=ppt/slides/slide33.xml><?xml version="1.0" encoding="utf-8"?>
 <p:sld xmlns:a="http://schemas.openxmlformats.org/drawingml/2006/main" xmlns:r="http://schemas.openxmlformats.org/officeDocument/2006/relationships" xmlns:p="http://schemas.openxmlformats.org/presentationml/2006/main">
   <p:cSld name="Slide 31">
     <p:spTree>
@@ -18566,381 +18978,6 @@
           </a:p>
         </p:txBody>
       </p:sp>
-    </p:spTree>
-  </p:cSld>
-  <p:clrMapOvr>
-    <a:masterClrMapping/>
-  </p:clrMapOvr>
-</p:sld>
-</file>
-
-<file path=ppt/slides/slide33.xml><?xml version="1.0" encoding="utf-8"?>
-<p:sld xmlns:a="http://schemas.openxmlformats.org/drawingml/2006/main" xmlns:p="http://schemas.openxmlformats.org/presentationml/2006/main" xmlns:r="http://schemas.openxmlformats.org/officeDocument/2006/relationships">
-  <p:cSld>
-    <p:spTree>
-      <p:nvGrpSpPr>
-        <p:cNvPr id="1" name=""/>
-        <p:cNvGrpSpPr/>
-        <p:nvPr/>
-      </p:nvGrpSpPr>
-      <p:grpSpPr/>
-      <p:pic>
-        <p:nvPicPr>
-          <p:cNvPr id="27" name="snip rev_month" descr="rev_month.png"/>
-          <p:cNvPicPr>
-            <a:picLocks noChangeAspect="1"/>
-          </p:cNvPicPr>
-          <p:nvPr/>
-        </p:nvPicPr>
-        <p:blipFill>
-          <a:blip r:embed="rId2"/>
-          <a:stretch>
-            <a:fillRect/>
-          </a:stretch>
-        </p:blipFill>
-        <p:spPr>
-          <a:xfrm>
-            <a:off x="502920" y="1444752"/>
-            <a:ext cx="5074920" cy="2561373"/>
-          </a:xfrm>
-          <a:prstGeom prst="rect">
-            <a:avLst/>
-          </a:prstGeom>
-        </p:spPr>
-      </p:pic>
-      <p:sp>
-        <p:nvSpPr>
-          <p:cNvPr id="2" name="Text 0"/>
-          <p:cNvSpPr txBox="1"/>
-          <p:nvPr/>
-        </p:nvSpPr>
-        <p:spPr>
-          <a:xfrm>
-            <a:off x="502920" y="365760"/>
-            <a:ext cx="6400800" cy="274320"/>
-          </a:xfrm>
-          <a:prstGeom prst="rect">
-            <a:avLst/>
-          </a:prstGeom>
-          <a:noFill/>
-          <a:ln/>
-        </p:spPr>
-        <p:txBody>
-          <a:bodyPr wrap="square" lIns="0" tIns="0" rIns="0" bIns="0" rtlCol="0" anchor="ctr"/>
-          <a:lstStyle/>
-          <a:p>
-            <a:pPr marL="0" indent="0">
-              <a:buNone/>
-            </a:pPr>
-            <a:r>
-              <a:rPr lang="en-US" sz="950" b="1" kern="0" spc="220">
-                <a:solidFill>
-                  <a:srgbClr val="122B82"/>
-                </a:solidFill>
-              </a:rPr>
-              <a:t>FINANCIAL PERFORMANCE</a:t>
-            </a:r>
-            <a:endParaRPr lang="en-US" sz="950"/>
-          </a:p>
-        </p:txBody>
-      </p:sp>
-      <p:sp>
-        <p:nvSpPr>
-          <p:cNvPr id="3" name="Text 1"/>
-          <p:cNvSpPr txBox="1"/>
-          <p:nvPr/>
-        </p:nvSpPr>
-        <p:spPr>
-          <a:xfrm>
-            <a:off x="502920" y="640080"/>
-            <a:ext cx="7315200" cy="685800"/>
-          </a:xfrm>
-          <a:prstGeom prst="rect">
-            <a:avLst/>
-          </a:prstGeom>
-          <a:noFill/>
-          <a:ln/>
-        </p:spPr>
-        <p:txBody>
-          <a:bodyPr wrap="square" lIns="0" tIns="0" rIns="0" bIns="0" rtlCol="0" anchor="ctr"/>
-          <a:lstStyle/>
-          <a:p>
-            <a:pPr marL="0" indent="0">
-              <a:buNone/>
-            </a:pPr>
-            <a:r>
-              <a:rPr lang="en-US" sz="2200" b="1">
-                <a:solidFill>
-                  <a:srgbClr val="242C39"/>
-                </a:solidFill>
-              </a:rPr>
-              <a:t>Revenue by month and department</a:t>
-            </a:r>
-            <a:endParaRPr lang="en-US" sz="2700"/>
-          </a:p>
-        </p:txBody>
-      </p:sp>
-      <p:sp>
-        <p:nvSpPr>
-          <p:cNvPr id="6" name="commentary panel"/>
-          <p:cNvSpPr/>
-          <p:nvPr/>
-        </p:nvSpPr>
-        <p:spPr>
-          <a:xfrm>
-            <a:off x="5806440" y="1463040"/>
-            <a:ext cx="2834640" cy="3154680"/>
-          </a:xfrm>
-          <a:prstGeom prst="rect">
-            <a:avLst/>
-          </a:prstGeom>
-          <a:solidFill>
-            <a:srgbClr val="E8F9F8"/>
-          </a:solidFill>
-          <a:ln/>
-        </p:spPr>
-        <p:txBody>
-          <a:bodyPr/>
-          <a:lstStyle/>
-          <a:p>
-            <a:endParaRPr lang="en-AU"/>
-          </a:p>
-        </p:txBody>
-      </p:sp>
-      <p:sp>
-        <p:nvSpPr>
-          <p:cNvPr id="7" name="Text 4"/>
-          <p:cNvSpPr txBox="1"/>
-          <p:nvPr/>
-        </p:nvSpPr>
-        <p:spPr>
-          <a:xfrm>
-            <a:off x="5989320" y="1627632"/>
-            <a:ext cx="2468880" cy="228600"/>
-          </a:xfrm>
-          <a:prstGeom prst="rect">
-            <a:avLst/>
-          </a:prstGeom>
-          <a:noFill/>
-          <a:ln/>
-        </p:spPr>
-        <p:txBody>
-          <a:bodyPr wrap="square" lIns="0" tIns="0" rIns="0" bIns="0" rtlCol="0" anchor="ctr"/>
-          <a:lstStyle/>
-          <a:p>
-            <a:pPr marL="0" indent="0">
-              <a:buNone/>
-            </a:pPr>
-            <a:r>
-              <a:rPr lang="en-US" sz="900" b="1" kern="0" spc="180">
-                <a:solidFill>
-                  <a:srgbClr val="005358"/>
-                </a:solidFill>
-              </a:rPr>
-              <a:t>COMMENTARY</a:t>
-            </a:r>
-            <a:endParaRPr lang="en-US" sz="900"/>
-          </a:p>
-        </p:txBody>
-      </p:sp>
-      <p:sp>
-        <p:nvSpPr>
-          <p:cNvPr id="8" name="Text 5"/>
-          <p:cNvSpPr txBox="1"/>
-          <p:nvPr/>
-        </p:nvSpPr>
-        <p:spPr>
-          <a:xfrm>
-            <a:off x="5989320" y="1901952"/>
-            <a:ext cx="2468880" cy="2706623"/>
-          </a:xfrm>
-          <a:prstGeom prst="rect">
-            <a:avLst/>
-          </a:prstGeom>
-          <a:noFill/>
-          <a:ln/>
-        </p:spPr>
-        <p:txBody>
-          <a:bodyPr wrap="square" lIns="0" tIns="0" rIns="0" bIns="0" rtlCol="0" anchor="t">
-            <a:normAutofit fontScale="85000" lnSpcReduction="10000"/>
-          </a:bodyPr>
-          <a:lstStyle/>
-          <a:p>
-            <a:pPr marL="342900" indent="-342900">
-              <a:lnSpc>
-                <a:spcPts val="1050"/>
-              </a:lnSpc>
-              <a:spcAft>
-                <a:spcPts val="400"/>
-              </a:spcAft>
-              <a:buSzPct val="100000"/>
-              <a:buChar char="•"/>
-            </a:pPr>
-            <a:r>
-              <a:rPr lang="en-US" sz="1000">
-                <a:solidFill>
-                  <a:srgbClr val="3A4453"/>
-                </a:solidFill>
-              </a:rPr>
-              <a:t>Revenue was $459k in July, $603k in August and $562k in September.</a:t>
-            </a:r>
-            <a:endParaRPr lang="en-US" sz="850"/>
-          </a:p>
-          <a:p>
-            <a:pPr marL="342900" indent="-342900">
-              <a:lnSpc>
-                <a:spcPts val="1050"/>
-              </a:lnSpc>
-              <a:spcAft>
-                <a:spcPts val="400"/>
-              </a:spcAft>
-              <a:buSzPct val="100000"/>
-              <a:buChar char="•"/>
-            </a:pPr>
-            <a:r>
-              <a:rPr lang="en-US" sz="1000">
-                <a:solidFill>
-                  <a:srgbClr val="3A4453"/>
-                </a:solidFill>
-              </a:rPr>
-              <a:t>Support is the steady base: $235k, $240k and $243k across the three months.</a:t>
-            </a:r>
-            <a:endParaRPr lang="en-US" sz="850"/>
-          </a:p>
-          <a:p>
-            <a:pPr marL="342900" indent="-342900">
-              <a:lnSpc>
-                <a:spcPts val="1050"/>
-              </a:lnSpc>
-              <a:spcAft>
-                <a:spcPts val="400"/>
-              </a:spcAft>
-              <a:buSzPct val="100000"/>
-              <a:buChar char="•"/>
-            </a:pPr>
-            <a:r>
-              <a:rPr lang="en-US" sz="1000">
-                <a:solidFill>
-                  <a:srgbClr val="3A4453"/>
-                </a:solidFill>
-              </a:rPr>
-              <a:t>September's movement is Integration at $235k against $94k in August, on project completion.</a:t>
-            </a:r>
-            <a:endParaRPr lang="en-US" sz="850"/>
-          </a:p>
-          <a:p>
-            <a:pPr marL="342900" indent="-342900">
-              <a:lnSpc>
-                <a:spcPts val="1050"/>
-              </a:lnSpc>
-              <a:spcAft>
-                <a:spcPts val="400"/>
-              </a:spcAft>
-              <a:buSzPct val="100000"/>
-              <a:buChar char="•"/>
-            </a:pPr>
-            <a:r>
-              <a:rPr lang="en-US" sz="1000">
-                <a:solidFill>
-                  <a:srgbClr val="3A4453"/>
-                </a:solidFill>
-              </a:rPr>
-              <a:t>Events fell from $241k in August to $73k in September, the largest movement in the quarter.</a:t>
-            </a:r>
-            <a:endParaRPr lang="en-US" sz="850"/>
-          </a:p>
-          <a:p>
-            <a:pPr marL="342900" indent="-342900">
-              <a:lnSpc>
-                <a:spcPts val="1050"/>
-              </a:lnSpc>
-              <a:spcAft>
-                <a:spcPts val="400"/>
-              </a:spcAft>
-              <a:buSzPct val="100000"/>
-              <a:buChar char="•"/>
-            </a:pPr>
-            <a:r>
-              <a:rPr lang="en-US" sz="1000">
-                <a:solidFill>
-                  <a:srgbClr val="3A4453"/>
-                </a:solidFill>
-              </a:rPr>
-              <a:t>Video and Consulting contributed $11k in September against a $41k combined budget.</a:t>
-            </a:r>
-            <a:endParaRPr lang="en-US" sz="850"/>
-          </a:p>
-        </p:txBody>
-      </p:sp>
-      <p:sp>
-        <p:nvSpPr>
-          <p:cNvPr id="25" name="Slide Number Placeholder 0"/>
-          <p:cNvSpPr>
-            <a:spLocks noGrp="1"/>
-          </p:cNvSpPr>
-          <p:nvPr>
-            <p:ph type="sldNum" sz="quarter" idx="4294967295"/>
-          </p:nvPr>
-        </p:nvSpPr>
-        <p:spPr>
-          <a:xfrm>
-            <a:off x="8092440" y="4736592"/>
-            <a:ext cx="548640" cy="228600"/>
-          </a:xfrm>
-          <a:prstGeom prst="rect">
-            <a:avLst/>
-          </a:prstGeom>
-          <a:extLst>
-            <a:ext uri="{C572A759-6A51-4108-AA02-DFA0A04FC94B}">
-              <ma14:wrappingTextBoxFlag xmlns:ma14="http://schemas.microsoft.com/office/mac/drawingml/2011/main" xmlns="" val="0"/>
-            </a:ext>
-          </a:extLst>
-        </p:spPr>
-        <p:txBody>
-          <a:bodyPr/>
-          <a:lstStyle>
-            <a:lvl1pPr>
-              <a:defRPr sz="800">
-                <a:solidFill>
-                  <a:srgbClr val="6B7585"/>
-                </a:solidFill>
-              </a:defRPr>
-            </a:lvl1pPr>
-          </a:lstStyle>
-          <a:p>
-            <a:pPr algn="r"/>
-            <a:fld id="{F7021451-1387-4CA6-816F-3879F97B5CBC}" type="slidenum">
-              <a:rPr lang="en-US" b="0"/>
-              <a:t>16</a:t>
-            </a:fld>
-            <a:endParaRPr lang="en-US"/>
-          </a:p>
-        </p:txBody>
-      </p:sp>
-      <p:pic>
-        <p:nvPicPr>
-          <p:cNvPr id="26" name="cts logo" descr="cts-logo.png"/>
-          <p:cNvPicPr>
-            <a:picLocks noChangeAspect="1"/>
-          </p:cNvPicPr>
-          <p:nvPr/>
-        </p:nvPicPr>
-        <p:blipFill>
-          <a:blip r:embed="rId4"/>
-          <a:stretch>
-            <a:fillRect/>
-          </a:stretch>
-        </p:blipFill>
-        <p:spPr>
-          <a:xfrm>
-            <a:off x="7680959" y="182880"/>
-            <a:ext cx="960120" cy="539696"/>
-          </a:xfrm>
-          <a:prstGeom prst="rect">
-            <a:avLst/>
-          </a:prstGeom>
-        </p:spPr>
-      </p:pic>
     </p:spTree>
   </p:cSld>
   <p:clrMapOvr>
@@ -19639,6 +19676,405 @@
 </file>
 
 <file path=ppt/slides/slide6.xml><?xml version="1.0" encoding="utf-8"?>
+<p:sld xmlns:a="http://schemas.openxmlformats.org/drawingml/2006/main" xmlns:p="http://schemas.openxmlformats.org/presentationml/2006/main" xmlns:r="http://schemas.openxmlformats.org/officeDocument/2006/relationships">
+  <p:cSld>
+    <p:spTree>
+      <p:nvGrpSpPr>
+        <p:cNvPr id="1" name=""/>
+        <p:cNvGrpSpPr/>
+        <p:nvPr/>
+      </p:nvGrpSpPr>
+      <p:grpSpPr/>
+      <p:pic>
+        <p:nvPicPr>
+          <p:cNvPr id="27" name="snip rev_month" descr="rev_month.png"/>
+          <p:cNvPicPr>
+            <a:picLocks noChangeAspect="1"/>
+          </p:cNvPicPr>
+          <p:nvPr/>
+        </p:nvPicPr>
+        <p:blipFill>
+          <a:blip r:embed="rId5"/>
+          <a:stretch>
+            <a:fillRect/>
+          </a:stretch>
+        </p:blipFill>
+        <p:spPr>
+          <a:xfrm>
+            <a:off x="1655076" y="1115568"/>
+            <a:ext cx="5833847" cy="2174747"/>
+          </a:xfrm>
+          <a:prstGeom prst="rect">
+            <a:avLst/>
+          </a:prstGeom>
+        </p:spPr>
+      </p:pic>
+      <p:sp>
+        <p:nvSpPr>
+          <p:cNvPr id="2" name="Text 0"/>
+          <p:cNvSpPr txBox="1"/>
+          <p:nvPr/>
+        </p:nvSpPr>
+        <p:spPr>
+          <a:xfrm>
+            <a:off x="502920" y="365760"/>
+            <a:ext cx="6400800" cy="274320"/>
+          </a:xfrm>
+          <a:prstGeom prst="rect">
+            <a:avLst/>
+          </a:prstGeom>
+          <a:noFill/>
+          <a:ln/>
+        </p:spPr>
+        <p:txBody>
+          <a:bodyPr wrap="square" lIns="0" tIns="0" rIns="0" bIns="0" rtlCol="0" anchor="ctr"/>
+          <a:lstStyle/>
+          <a:p>
+            <a:pPr marL="0" indent="0">
+              <a:buNone/>
+            </a:pPr>
+            <a:r>
+              <a:rPr lang="en-US" sz="950" b="1" kern="0" spc="220">
+                <a:solidFill>
+                  <a:srgbClr val="122B82"/>
+                </a:solidFill>
+              </a:rPr>
+              <a:t>FINANCIAL PERFORMANCE</a:t>
+            </a:r>
+            <a:endParaRPr lang="en-US" sz="950"/>
+          </a:p>
+        </p:txBody>
+      </p:sp>
+      <p:sp>
+        <p:nvSpPr>
+          <p:cNvPr id="3" name="Text 1"/>
+          <p:cNvSpPr txBox="1"/>
+          <p:nvPr/>
+        </p:nvSpPr>
+        <p:spPr>
+          <a:xfrm>
+            <a:off x="502920" y="640080"/>
+            <a:ext cx="7315200" cy="685800"/>
+          </a:xfrm>
+          <a:prstGeom prst="rect">
+            <a:avLst/>
+          </a:prstGeom>
+          <a:noFill/>
+          <a:ln/>
+        </p:spPr>
+        <p:txBody>
+          <a:bodyPr wrap="square" lIns="0" tIns="0" rIns="0" bIns="0" rtlCol="0" anchor="ctr"/>
+          <a:lstStyle/>
+          <a:p>
+            <a:pPr marL="0" indent="0">
+              <a:buNone/>
+            </a:pPr>
+            <a:r>
+              <a:rPr lang="en-US" sz="2200" b="1">
+                <a:solidFill>
+                  <a:srgbClr val="242C39"/>
+                </a:solidFill>
+              </a:rPr>
+              <a:t>Revenue by month and department</a:t>
+            </a:r>
+            <a:endParaRPr lang="en-US" sz="2700"/>
+          </a:p>
+        </p:txBody>
+      </p:sp>
+      <p:sp>
+        <p:nvSpPr>
+          <p:cNvPr id="6" name="commentary panel"/>
+          <p:cNvSpPr/>
+          <p:nvPr/>
+        </p:nvSpPr>
+        <p:spPr>
+          <a:xfrm>
+            <a:off x="502920" y="3400043"/>
+            <a:ext cx="8138160" cy="1226820"/>
+          </a:xfrm>
+          <a:prstGeom prst="rect">
+            <a:avLst/>
+          </a:prstGeom>
+          <a:solidFill>
+            <a:srgbClr val="E8F9F8"/>
+          </a:solidFill>
+          <a:ln/>
+        </p:spPr>
+        <p:txBody>
+          <a:bodyPr/>
+          <a:lstStyle/>
+          <a:p>
+            <a:endParaRPr lang="en-AU"/>
+          </a:p>
+        </p:txBody>
+      </p:sp>
+      <p:sp>
+        <p:nvSpPr>
+          <p:cNvPr id="7" name="Text 4"/>
+          <p:cNvSpPr txBox="1"/>
+          <p:nvPr/>
+        </p:nvSpPr>
+        <p:spPr>
+          <a:xfrm>
+            <a:off x="685800" y="3473195"/>
+            <a:ext cx="2743200" cy="228600"/>
+          </a:xfrm>
+          <a:prstGeom prst="rect">
+            <a:avLst/>
+          </a:prstGeom>
+          <a:noFill/>
+          <a:ln/>
+        </p:spPr>
+        <p:txBody>
+          <a:bodyPr wrap="square" lIns="0" tIns="0" rIns="0" bIns="0" rtlCol="0" anchor="ctr"/>
+          <a:lstStyle/>
+          <a:p>
+            <a:pPr marL="0" indent="0">
+              <a:buNone/>
+            </a:pPr>
+            <a:r>
+              <a:rPr lang="en-US" sz="900" b="1" kern="0" spc="180">
+                <a:solidFill>
+                  <a:srgbClr val="005358"/>
+                </a:solidFill>
+              </a:rPr>
+              <a:t>COMMENTARY</a:t>
+            </a:r>
+            <a:endParaRPr lang="en-US" sz="900"/>
+          </a:p>
+        </p:txBody>
+      </p:sp>
+      <p:sp>
+        <p:nvSpPr>
+          <p:cNvPr id="8" name="Text 5"/>
+          <p:cNvSpPr txBox="1"/>
+          <p:nvPr/>
+        </p:nvSpPr>
+        <p:spPr>
+          <a:xfrm>
+            <a:off x="685800" y="3646931"/>
+            <a:ext cx="3703320" cy="952500"/>
+          </a:xfrm>
+          <a:prstGeom prst="rect">
+            <a:avLst/>
+          </a:prstGeom>
+          <a:noFill/>
+          <a:ln/>
+        </p:spPr>
+        <p:txBody>
+          <a:bodyPr wrap="square" lIns="0" tIns="0" rIns="0" bIns="0" rtlCol="0" anchor="t">
+            <a:normAutofit fontScale="85000" lnSpcReduction="10000"/>
+          </a:bodyPr>
+          <a:lstStyle/>
+          <a:p>
+            <a:pPr marL="342900" indent="-342900">
+              <a:lnSpc>
+                <a:spcPts val="1050"/>
+              </a:lnSpc>
+              <a:spcAft>
+                <a:spcPts val="400"/>
+              </a:spcAft>
+              <a:buSzPct val="100000"/>
+              <a:buChar char="•"/>
+            </a:pPr>
+            <a:r>
+              <a:rPr lang="en-US" sz="1000">
+                <a:solidFill>
+                  <a:srgbClr val="3A4453"/>
+                </a:solidFill>
+              </a:rPr>
+              <a:t>Revenue was $459k in July, $603k in August and $562k in September, $1,624k for the quarter.</a:t>
+            </a:r>
+            <a:endParaRPr lang="en-US" sz="850"/>
+          </a:p>
+          <a:p>
+            <a:pPr marL="342900" indent="-342900">
+              <a:lnSpc>
+                <a:spcPts val="1050"/>
+              </a:lnSpc>
+              <a:spcAft>
+                <a:spcPts val="400"/>
+              </a:spcAft>
+              <a:buSzPct val="100000"/>
+              <a:buChar char="•"/>
+            </a:pPr>
+            <a:r>
+              <a:rPr lang="en-US" sz="1000">
+                <a:solidFill>
+                  <a:srgbClr val="3A4453"/>
+                </a:solidFill>
+              </a:rPr>
+              <a:t>Budget for the same three months was $1,996k, so the quarter is $372k short.</a:t>
+            </a:r>
+            <a:endParaRPr lang="en-US" sz="850"/>
+          </a:p>
+        </p:txBody>
+      </p:sp>
+      <p:sp>
+        <p:nvSpPr>
+          <p:cNvPr id="25" name="Slide Number Placeholder 0"/>
+          <p:cNvSpPr>
+            <a:spLocks noGrp="1"/>
+          </p:cNvSpPr>
+          <p:nvPr>
+            <p:ph type="sldNum" sz="quarter" idx="4294967295"/>
+          </p:nvPr>
+        </p:nvSpPr>
+        <p:spPr>
+          <a:xfrm>
+            <a:off x="8092440" y="4736592"/>
+            <a:ext cx="548640" cy="228600"/>
+          </a:xfrm>
+          <a:prstGeom prst="rect">
+            <a:avLst/>
+          </a:prstGeom>
+          <a:extLst>
+            <a:ext uri="{C572A759-6A51-4108-AA02-DFA0A04FC94B}">
+              <ma14:wrappingTextBoxFlag xmlns:ma14="http://schemas.microsoft.com/office/mac/drawingml/2011/main" xmlns="" val="0"/>
+            </a:ext>
+          </a:extLst>
+        </p:spPr>
+        <p:txBody>
+          <a:bodyPr/>
+          <a:lstStyle>
+            <a:lvl1pPr>
+              <a:defRPr sz="800">
+                <a:solidFill>
+                  <a:srgbClr val="6B7585"/>
+                </a:solidFill>
+              </a:defRPr>
+            </a:lvl1pPr>
+          </a:lstStyle>
+          <a:p>
+            <a:pPr algn="r"/>
+            <a:fld id="{F7021451-1387-4CA6-816F-3879F97B5CBC}" type="slidenum">
+              <a:rPr lang="en-US" b="0"/>
+              <a:t>16</a:t>
+            </a:fld>
+            <a:endParaRPr lang="en-US"/>
+          </a:p>
+        </p:txBody>
+      </p:sp>
+      <p:pic>
+        <p:nvPicPr>
+          <p:cNvPr id="26" name="cts logo" descr="image.png"/>
+          <p:cNvPicPr>
+            <a:picLocks noChangeAspect="1"/>
+          </p:cNvPicPr>
+          <p:nvPr/>
+        </p:nvPicPr>
+        <p:blipFill>
+          <a:blip r:embed="rId4"/>
+          <a:stretch>
+            <a:fillRect/>
+          </a:stretch>
+        </p:blipFill>
+        <p:spPr>
+          <a:xfrm>
+            <a:off x="7680959" y="182880"/>
+            <a:ext cx="960120" cy="539696"/>
+          </a:xfrm>
+          <a:prstGeom prst="rect">
+            <a:avLst/>
+          </a:prstGeom>
+        </p:spPr>
+      </p:pic>
+      <p:sp>
+        <p:nvSpPr>
+          <p:cNvPr id="8" name="Text 5b"/>
+          <p:cNvSpPr txBox="1"/>
+          <p:nvPr/>
+        </p:nvSpPr>
+        <p:spPr>
+          <a:xfrm>
+            <a:off x="4663440" y="3646931"/>
+            <a:ext cx="3703320" cy="952500"/>
+          </a:xfrm>
+          <a:prstGeom prst="rect">
+            <a:avLst/>
+          </a:prstGeom>
+          <a:noFill/>
+          <a:ln/>
+        </p:spPr>
+        <p:txBody>
+          <a:bodyPr wrap="square" lIns="0" tIns="0" rIns="0" bIns="0" rtlCol="0" anchor="t">
+            <a:normAutofit fontScale="85000" lnSpcReduction="10000"/>
+          </a:bodyPr>
+          <a:lstStyle/>
+          <a:p>
+            <a:pPr marL="342900" indent="-342900">
+              <a:lnSpc>
+                <a:spcPts val="1050"/>
+              </a:lnSpc>
+              <a:spcAft>
+                <a:spcPts val="400"/>
+              </a:spcAft>
+              <a:buSzPct val="100000"/>
+              <a:buChar char="•"/>
+            </a:pPr>
+            <a:r>
+              <a:rPr lang="en-US" sz="1000">
+                <a:solidFill>
+                  <a:srgbClr val="3A4453"/>
+                </a:solidFill>
+              </a:rPr>
+              <a:t>July and August were both well under budget. September came in $148k above it.</a:t>
+            </a:r>
+            <a:endParaRPr lang="en-US" sz="850"/>
+          </a:p>
+          <a:p>
+            <a:pPr marL="342900" indent="-342900">
+              <a:lnSpc>
+                <a:spcPts val="1050"/>
+              </a:lnSpc>
+              <a:spcAft>
+                <a:spcPts val="400"/>
+              </a:spcAft>
+              <a:buSzPct val="100000"/>
+              <a:buChar char="•"/>
+            </a:pPr>
+            <a:r>
+              <a:rPr lang="en-US" sz="1000">
+                <a:solidFill>
+                  <a:srgbClr val="3A4453"/>
+                </a:solidFill>
+              </a:rPr>
+              <a:t>Support is the steady base at $235k, $240k and $243k.</a:t>
+            </a:r>
+            <a:endParaRPr lang="en-US" sz="850"/>
+          </a:p>
+          <a:p>
+            <a:pPr marL="342900" indent="-342900">
+              <a:lnSpc>
+                <a:spcPts val="1050"/>
+              </a:lnSpc>
+              <a:spcAft>
+                <a:spcPts val="400"/>
+              </a:spcAft>
+              <a:buSzPct val="100000"/>
+              <a:buChar char="•"/>
+            </a:pPr>
+            <a:r>
+              <a:rPr lang="en-US" sz="1000">
+                <a:solidFill>
+                  <a:srgbClr val="3A4453"/>
+                </a:solidFill>
+              </a:rPr>
+              <a:t>September's movement is Integration at $235k against $94k in August, on project completion.</a:t>
+            </a:r>
+            <a:endParaRPr lang="en-US" sz="850"/>
+          </a:p>
+        </p:txBody>
+      </p:sp>
+    </p:spTree>
+  </p:cSld>
+  <p:clrMapOvr>
+    <a:masterClrMapping/>
+  </p:clrMapOvr>
+</p:sld>
+</file>
+
+<file path=ppt/slides/slide7.xml><?xml version="1.0" encoding="utf-8"?>
 <p:sld xmlns:a="http://schemas.openxmlformats.org/drawingml/2006/main" xmlns:r="http://schemas.openxmlformats.org/officeDocument/2006/relationships" xmlns:p="http://schemas.openxmlformats.org/presentationml/2006/main">
   <p:cSld name="Slide 6">
     <p:spTree>
@@ -20044,7 +20480,7 @@
 </p:sld>
 </file>
 
-<file path=ppt/slides/slide7.xml><?xml version="1.0" encoding="utf-8"?>
+<file path=ppt/slides/slide8.xml><?xml version="1.0" encoding="utf-8"?>
 <p:sld xmlns:a="http://schemas.openxmlformats.org/drawingml/2006/main" xmlns:r="http://schemas.openxmlformats.org/officeDocument/2006/relationships" xmlns:p="http://schemas.openxmlformats.org/presentationml/2006/main">
   <p:cSld name="Slide 7">
     <p:spTree>
@@ -20429,7 +20865,7 @@
 </p:sld>
 </file>
 
-<file path=ppt/slides/slide8.xml><?xml version="1.0" encoding="utf-8"?>
+<file path=ppt/slides/slide9.xml><?xml version="1.0" encoding="utf-8"?>
 <p:sld xmlns:a="http://schemas.openxmlformats.org/drawingml/2006/main" xmlns:r="http://schemas.openxmlformats.org/officeDocument/2006/relationships" xmlns:p="http://schemas.openxmlformats.org/presentationml/2006/main">
   <p:cSld name="Slide 8">
     <p:spTree>
@@ -20806,412 +21242,6 @@
           </a:prstGeom>
         </p:spPr>
       </p:pic>
-    </p:spTree>
-  </p:cSld>
-  <p:clrMapOvr>
-    <a:masterClrMapping/>
-  </p:clrMapOvr>
-</p:sld>
-</file>
-
-<file path=ppt/slides/slide9.xml><?xml version="1.0" encoding="utf-8"?>
-<p:sld xmlns:a="http://schemas.openxmlformats.org/drawingml/2006/main" xmlns:r="http://schemas.openxmlformats.org/officeDocument/2006/relationships" xmlns:p="http://schemas.openxmlformats.org/presentationml/2006/main">
-  <p:cSld name="Slide 9">
-    <p:spTree>
-      <p:nvGrpSpPr>
-        <p:cNvPr id="1" name=""/>
-        <p:cNvGrpSpPr/>
-        <p:nvPr/>
-      </p:nvGrpSpPr>
-      <p:grpSpPr>
-        <a:xfrm>
-          <a:off x="0" y="0"/>
-          <a:ext cx="0" cy="0"/>
-          <a:chOff x="0" y="0"/>
-          <a:chExt cx="0" cy="0"/>
-        </a:xfrm>
-      </p:grpSpPr>
-      <p:pic>
-        <p:nvPicPr>
-          <p:cNvPr id="27" name="snip dept_Support" descr="dept_Support.png"/>
-          <p:cNvPicPr>
-            <a:picLocks noChangeAspect="1"/>
-          </p:cNvPicPr>
-          <p:nvPr/>
-        </p:nvPicPr>
-        <p:blipFill>
-          <a:blip r:embed="rId5"/>
-          <a:stretch>
-            <a:fillRect/>
-          </a:stretch>
-        </p:blipFill>
-        <p:spPr>
-          <a:xfrm>
-            <a:off x="1184920" y="1115568"/>
-            <a:ext cx="6774159" cy="2005865"/>
-          </a:xfrm>
-          <a:prstGeom prst="rect">
-            <a:avLst/>
-          </a:prstGeom>
-        </p:spPr>
-      </p:pic>
-      <p:sp>
-        <p:nvSpPr>
-          <p:cNvPr id="2" name="Text 0"/>
-          <p:cNvSpPr txBox="1"/>
-          <p:nvPr/>
-        </p:nvSpPr>
-        <p:spPr>
-          <a:xfrm>
-            <a:off x="502920" y="365760"/>
-            <a:ext cx="6400800" cy="274320"/>
-          </a:xfrm>
-          <a:prstGeom prst="rect">
-            <a:avLst/>
-          </a:prstGeom>
-          <a:noFill/>
-          <a:ln/>
-        </p:spPr>
-        <p:txBody>
-          <a:bodyPr wrap="square" lIns="0" tIns="0" rIns="0" bIns="0" rtlCol="0" anchor="ctr"/>
-          <a:lstStyle/>
-          <a:p>
-            <a:pPr marL="0" indent="0">
-              <a:buNone/>
-            </a:pPr>
-            <a:r>
-              <a:rPr lang="en-US" sz="950" b="1" kern="0" spc="220">
-                <a:solidFill>
-                  <a:srgbClr val="122B82"/>
-                </a:solidFill>
-              </a:rPr>
-              <a:t>FINANCIAL PERFORMANCE</a:t>
-            </a:r>
-            <a:endParaRPr lang="en-US" sz="950"/>
-          </a:p>
-        </p:txBody>
-      </p:sp>
-      <p:sp>
-        <p:nvSpPr>
-          <p:cNvPr id="3" name="Text 1"/>
-          <p:cNvSpPr txBox="1"/>
-          <p:nvPr/>
-        </p:nvSpPr>
-        <p:spPr>
-          <a:xfrm>
-            <a:off x="502920" y="640080"/>
-            <a:ext cx="7315200" cy="685800"/>
-          </a:xfrm>
-          <a:prstGeom prst="rect">
-            <a:avLst/>
-          </a:prstGeom>
-          <a:noFill/>
-          <a:ln/>
-        </p:spPr>
-        <p:txBody>
-          <a:bodyPr wrap="square" lIns="0" tIns="0" rIns="0" bIns="0" rtlCol="0" anchor="ctr"/>
-          <a:lstStyle/>
-          <a:p>
-            <a:pPr marL="0" indent="0">
-              <a:buNone/>
-            </a:pPr>
-            <a:r>
-              <a:rPr lang="en-US" sz="2200" b="1">
-                <a:solidFill>
-                  <a:srgbClr val="242C39"/>
-                </a:solidFill>
-              </a:rPr>
-              <a:t>Support, Sep 26</a:t>
-            </a:r>
-            <a:endParaRPr lang="en-US" sz="2700"/>
-          </a:p>
-        </p:txBody>
-      </p:sp>
-      <p:sp>
-        <p:nvSpPr>
-          <p:cNvPr id="6" name="commentary panel"/>
-          <p:cNvSpPr/>
-          <p:nvPr/>
-        </p:nvSpPr>
-        <p:spPr>
-          <a:xfrm>
-            <a:off x="502920" y="3231161"/>
-            <a:ext cx="8138160" cy="1395702"/>
-          </a:xfrm>
-          <a:prstGeom prst="rect">
-            <a:avLst/>
-          </a:prstGeom>
-          <a:solidFill>
-            <a:srgbClr val="E8F9F8"/>
-          </a:solidFill>
-          <a:ln/>
-        </p:spPr>
-        <p:txBody>
-          <a:bodyPr/>
-          <a:lstStyle/>
-          <a:p>
-            <a:endParaRPr lang="en-AU"/>
-          </a:p>
-        </p:txBody>
-      </p:sp>
-      <p:sp>
-        <p:nvSpPr>
-          <p:cNvPr id="7" name="Text 4"/>
-          <p:cNvSpPr txBox="1"/>
-          <p:nvPr/>
-        </p:nvSpPr>
-        <p:spPr>
-          <a:xfrm>
-            <a:off x="685800" y="3304313"/>
-            <a:ext cx="2743200" cy="228600"/>
-          </a:xfrm>
-          <a:prstGeom prst="rect">
-            <a:avLst/>
-          </a:prstGeom>
-          <a:noFill/>
-          <a:ln/>
-        </p:spPr>
-        <p:txBody>
-          <a:bodyPr wrap="square" lIns="0" tIns="0" rIns="0" bIns="0" rtlCol="0" anchor="ctr"/>
-          <a:lstStyle/>
-          <a:p>
-            <a:pPr marL="0" indent="0">
-              <a:buNone/>
-            </a:pPr>
-            <a:r>
-              <a:rPr lang="en-US" sz="900" b="1" kern="0" spc="180">
-                <a:solidFill>
-                  <a:srgbClr val="005358"/>
-                </a:solidFill>
-              </a:rPr>
-              <a:t>COMMENTARY</a:t>
-            </a:r>
-            <a:endParaRPr lang="en-US" sz="900"/>
-          </a:p>
-        </p:txBody>
-      </p:sp>
-      <p:sp>
-        <p:nvSpPr>
-          <p:cNvPr id="8" name="Text 5"/>
-          <p:cNvSpPr txBox="1"/>
-          <p:nvPr/>
-        </p:nvSpPr>
-        <p:spPr>
-          <a:xfrm>
-            <a:off x="685800" y="3478049"/>
-            <a:ext cx="3703320" cy="1121382"/>
-          </a:xfrm>
-          <a:prstGeom prst="rect">
-            <a:avLst/>
-          </a:prstGeom>
-          <a:noFill/>
-          <a:ln/>
-        </p:spPr>
-        <p:txBody>
-          <a:bodyPr wrap="square" lIns="0" tIns="0" rIns="0" bIns="0" rtlCol="0" anchor="t">
-            <a:normAutofit/>
-          </a:bodyPr>
-          <a:lstStyle/>
-          <a:p>
-            <a:pPr marL="342900" indent="-342900">
-              <a:lnSpc>
-                <a:spcPts val="1050"/>
-              </a:lnSpc>
-              <a:spcAft>
-                <a:spcPts val="400"/>
-              </a:spcAft>
-              <a:buSzPct val="100000"/>
-              <a:buChar char="•"/>
-            </a:pPr>
-            <a:r>
-              <a:rPr lang="en-US" sz="1000">
-                <a:solidFill>
-                  <a:srgbClr val="3A4453"/>
-                </a:solidFill>
-              </a:rPr>
-              <a:t>Support generated $243k revenue against a $248k budget, broadly in line with expected recurring contract income.</a:t>
-            </a:r>
-            <a:endParaRPr lang="en-US" sz="850"/>
-          </a:p>
-          <a:p>
-            <a:pPr marL="342900" indent="-342900">
-              <a:lnSpc>
-                <a:spcPts val="1050"/>
-              </a:lnSpc>
-              <a:spcAft>
-                <a:spcPts val="400"/>
-              </a:spcAft>
-              <a:buSzPct val="100000"/>
-              <a:buChar char="•"/>
-            </a:pPr>
-            <a:r>
-              <a:rPr lang="en-US" sz="1000">
-                <a:solidFill>
-                  <a:srgbClr val="3A4453"/>
-                </a:solidFill>
-              </a:rPr>
-              <a:t>Gross margin was 41.7%, compared with 41.0% in September last year.</a:t>
-            </a:r>
-            <a:endParaRPr lang="en-US" sz="850"/>
-          </a:p>
-        </p:txBody>
-      </p:sp>
-      <p:sp>
-        <p:nvSpPr>
-          <p:cNvPr id="25" name="Slide Number Placeholder 0"/>
-          <p:cNvSpPr>
-            <a:spLocks noGrp="1"/>
-          </p:cNvSpPr>
-          <p:nvPr>
-            <p:ph type="sldNum" sz="quarter" idx="4294967295"/>
-          </p:nvPr>
-        </p:nvSpPr>
-        <p:spPr>
-          <a:xfrm>
-            <a:off x="8092440" y="4736592"/>
-            <a:ext cx="548640" cy="228600"/>
-          </a:xfrm>
-          <a:prstGeom prst="rect">
-            <a:avLst/>
-          </a:prstGeom>
-          <a:extLst>
-            <a:ext uri="{C572A759-6A51-4108-AA02-DFA0A04FC94B}">
-              <ma14:wrappingTextBoxFlag xmlns:ma14="http://schemas.microsoft.com/office/mac/drawingml/2011/main" xmlns="" val="0"/>
-            </a:ext>
-          </a:extLst>
-        </p:spPr>
-        <p:txBody>
-          <a:bodyPr/>
-          <a:lstStyle>
-            <a:lvl1pPr>
-              <a:defRPr sz="800">
-                <a:solidFill>
-                  <a:srgbClr val="6B7585"/>
-                </a:solidFill>
-              </a:defRPr>
-            </a:lvl1pPr>
-          </a:lstStyle>
-          <a:p>
-            <a:pPr algn="r"/>
-            <a:fld id="{F7021451-1387-4CA6-816F-3879F97B5CBC}" type="slidenum">
-              <a:rPr lang="en-US" b="0"/>
-              <a:t>9</a:t>
-            </a:fld>
-            <a:endParaRPr lang="en-US"/>
-          </a:p>
-        </p:txBody>
-      </p:sp>
-      <p:pic>
-        <p:nvPicPr>
-          <p:cNvPr id="26" name="cts logo" descr="cts-logo.png"/>
-          <p:cNvPicPr>
-            <a:picLocks noChangeAspect="1"/>
-          </p:cNvPicPr>
-          <p:nvPr/>
-        </p:nvPicPr>
-        <p:blipFill>
-          <a:blip r:embed="rId4"/>
-          <a:stretch>
-            <a:fillRect/>
-          </a:stretch>
-        </p:blipFill>
-        <p:spPr>
-          <a:xfrm>
-            <a:off x="7680959" y="182880"/>
-            <a:ext cx="960120" cy="539696"/>
-          </a:xfrm>
-          <a:prstGeom prst="rect">
-            <a:avLst/>
-          </a:prstGeom>
-        </p:spPr>
-      </p:pic>
-      <p:sp>
-        <p:nvSpPr>
-          <p:cNvPr id="8" name="Text 5b"/>
-          <p:cNvSpPr txBox="1"/>
-          <p:nvPr/>
-        </p:nvSpPr>
-        <p:spPr>
-          <a:xfrm>
-            <a:off x="4663440" y="3478049"/>
-            <a:ext cx="3703320" cy="1121382"/>
-          </a:xfrm>
-          <a:prstGeom prst="rect">
-            <a:avLst/>
-          </a:prstGeom>
-          <a:noFill/>
-          <a:ln/>
-        </p:spPr>
-        <p:txBody>
-          <a:bodyPr wrap="square" lIns="0" tIns="0" rIns="0" bIns="0" rtlCol="0" anchor="t">
-            <a:normAutofit/>
-          </a:bodyPr>
-          <a:lstStyle/>
-          <a:p>
-            <a:pPr marL="342900" indent="-342900">
-              <a:lnSpc>
-                <a:spcPts val="1050"/>
-              </a:lnSpc>
-              <a:spcAft>
-                <a:spcPts val="400"/>
-              </a:spcAft>
-              <a:buSzPct val="100000"/>
-              <a:buChar char="•"/>
-            </a:pPr>
-            <a:r>
-              <a:rPr lang="en-US" sz="1000">
-                <a:solidFill>
-                  <a:srgbClr val="3A4453"/>
-                </a:solidFill>
-              </a:rPr>
-              <a:t>After $72k of allocated overheads, Support recorded a $29k profit.</a:t>
-            </a:r>
-            <a:endParaRPr lang="en-US" sz="850"/>
-          </a:p>
-          <a:p>
-            <a:pPr marL="342900" indent="-342900">
-              <a:lnSpc>
-                <a:spcPts val="1050"/>
-              </a:lnSpc>
-              <a:spcAft>
-                <a:spcPts val="400"/>
-              </a:spcAft>
-              <a:buSzPct val="100000"/>
-              <a:buChar char="•"/>
-            </a:pPr>
-            <a:r>
-              <a:rPr lang="en-US" sz="1000">
-                <a:solidFill>
-                  <a:srgbClr val="3A4453"/>
-                </a:solidFill>
-              </a:rPr>
-              <a:t>Its allocated office wages were $42k, reflecting the established allocation method.</a:t>
-            </a:r>
-            <a:endParaRPr lang="en-US" sz="850"/>
-          </a:p>
-          <a:p>
-            <a:pPr marL="342900" indent="-342900">
-              <a:lnSpc>
-                <a:spcPts val="1050"/>
-              </a:lnSpc>
-              <a:spcAft>
-                <a:spcPts val="400"/>
-              </a:spcAft>
-              <a:buSzPct val="100000"/>
-              <a:buChar char="•"/>
-            </a:pPr>
-            <a:r>
-              <a:rPr lang="en-US" sz="1000">
-                <a:solidFill>
-                  <a:srgbClr val="3A4453"/>
-                </a:solidFill>
-              </a:rPr>
-              <a:t>Chargeable utilisation reached 91.2%, above the 88% target and the strongest result across the groups.</a:t>
-            </a:r>
-            <a:endParaRPr lang="en-US" sz="850"/>
-          </a:p>
-        </p:txBody>
-      </p:sp>
     </p:spTree>
   </p:cSld>
   <p:clrMapOvr>

--- a/deck/CTS Monthly Business Review - 30092026.pptx
+++ b/deck/CTS Monthly Business Review - 30092026.pptx
@@ -14,6 +14,7 @@
     <p:sldId id="259" r:id="rId8"/>
     <p:sldId id="260" r:id="rId9"/>
     <p:sldId id="289" r:id="rId44"/>
+    <p:sldId id="290" r:id="rId45"/>
     <p:sldId id="261" r:id="rId10"/>
     <p:sldId id="262" r:id="rId11"/>
     <p:sldId id="263" r:id="rId12"/>
@@ -3724,6 +3725,108 @@
           <a:p>
             <a:r>
               <a:t>The chart lengthens by one column each month as the pack closes a month, so it will show the full year by June without being rebuilt.</a:t>
+            </a:r>
+          </a:p>
+        </p:txBody>
+      </p:sp>
+    </p:spTree>
+  </p:cSld>
+  <p:clrMapOvr>
+    <a:masterClrMapping/>
+  </p:clrMapOvr>
+</p:notes>
+</file>
+
+<file path=ppt/notesSlides/notesSlide34.xml><?xml version="1.0" encoding="utf-8"?>
+<p:notes xmlns:a="http://schemas.openxmlformats.org/drawingml/2006/main" xmlns:p="http://schemas.openxmlformats.org/presentationml/2006/main" xmlns:r="http://schemas.openxmlformats.org/officeDocument/2006/relationships">
+  <p:cSld>
+    <p:spTree>
+      <p:nvGrpSpPr>
+        <p:cNvPr id="1" name=""/>
+        <p:cNvGrpSpPr/>
+        <p:nvPr/>
+      </p:nvGrpSpPr>
+      <p:grpSpPr>
+        <a:xfrm>
+          <a:off x="0" y="0"/>
+          <a:ext cx="0" cy="0"/>
+          <a:chOff x="0" y="0"/>
+          <a:chExt cx="0" cy="0"/>
+        </a:xfrm>
+      </p:grpSpPr>
+      <p:sp>
+        <p:nvSpPr>
+          <p:cNvPr id="3" name="Notes Placeholder 2"/>
+          <p:cNvSpPr>
+            <a:spLocks noGrp="1"/>
+          </p:cNvSpPr>
+          <p:nvPr>
+            <p:ph type="body" idx="1"/>
+          </p:nvPr>
+        </p:nvSpPr>
+        <p:spPr/>
+        <p:txBody>
+          <a:bodyPr lIns="107095" tIns="53547" rIns="107095" bIns="53547"/>
+          <a:lstStyle/>
+          <a:p>
+            <a:r>
+              <a:t>Revenue against budget for the year to date, by department, taken from the Cost Analysis tab.</a:t>
+            </a:r>
+          </a:p>
+          <a:p/>
+          <a:p>
+            <a:r>
+              <a:t>Support $718,587 against a budget of $743,185, short by $24,597 or 3.3%.</a:t>
+            </a:r>
+          </a:p>
+          <a:p>
+            <a:r>
+              <a:t>Events $420,121 against $321,957, ahead by $98,163 or 30.5%.</a:t>
+            </a:r>
+          </a:p>
+          <a:p>
+            <a:r>
+              <a:t>Video $40,270 against $85,584, short by $45,313 or 52.9%.</a:t>
+            </a:r>
+          </a:p>
+          <a:p>
+            <a:r>
+              <a:t>Integration $441,414 against $608,676, short by $167,263 or 27.5%.</a:t>
+            </a:r>
+          </a:p>
+          <a:p>
+            <a:r>
+              <a:t>Consulting $4,068 against $236,707, short by $232,640 or 98.3%.</a:t>
+            </a:r>
+          </a:p>
+          <a:p/>
+          <a:p>
+            <a:r>
+              <a:t>The company is $371,650 short of budget on revenue, or 18.6%.</a:t>
+            </a:r>
+          </a:p>
+          <a:p/>
+          <a:p>
+            <a:r>
+              <a:t>Where the shortfall actually sits. Consulting accounts for $232,640 of it, which is almost two thirds. Integration adds $167,263 and Video $45,313. Events offsets $98,163 of the total and Support is within 3.3% of plan.</a:t>
+            </a:r>
+          </a:p>
+          <a:p/>
+          <a:p>
+            <a:r>
+              <a:t>That distribution matters for the reforecast. Support and Events are delivering close to or ahead of what was asked of them. The gap is concentrated in the three departments that were budgeted on a resourcing level which does not exist, and no amount of additional effort from Support or Events closes it.</a:t>
+            </a:r>
+          </a:p>
+          <a:p/>
+          <a:p>
+            <a:r>
+              <a:t>Consulting in particular was budgeted $236,707 for the quarter and has billed $4,068. That is not a performance variance, it is a plan built on capacity the business never had.</a:t>
+            </a:r>
+          </a:p>
+          <a:p/>
+          <a:p>
+            <a:r>
+              <a:t>Year to date is summed across the closed months rather than read from a stored total, so this chart follows the reporting month on Setup and will extend as the year goes on.</a:t>
             </a:r>
           </a:p>
         </p:txBody>
@@ -18986,6 +19089,405 @@
 </p:sld>
 </file>
 
+<file path=ppt/slides/slide34.xml><?xml version="1.0" encoding="utf-8"?>
+<p:sld xmlns:a="http://schemas.openxmlformats.org/drawingml/2006/main" xmlns:p="http://schemas.openxmlformats.org/presentationml/2006/main" xmlns:r="http://schemas.openxmlformats.org/officeDocument/2006/relationships">
+  <p:cSld>
+    <p:spTree>
+      <p:nvGrpSpPr>
+        <p:cNvPr id="1" name=""/>
+        <p:cNvGrpSpPr/>
+        <p:nvPr/>
+      </p:nvGrpSpPr>
+      <p:grpSpPr/>
+      <p:pic>
+        <p:nvPicPr>
+          <p:cNvPr id="27" name="snip rev_ytd" descr="rev_ytd.png"/>
+          <p:cNvPicPr>
+            <a:picLocks noChangeAspect="1"/>
+          </p:cNvPicPr>
+          <p:nvPr/>
+        </p:nvPicPr>
+        <p:blipFill>
+          <a:blip r:embed="rId3"/>
+          <a:stretch>
+            <a:fillRect/>
+          </a:stretch>
+        </p:blipFill>
+        <p:spPr>
+          <a:xfrm>
+            <a:off x="1485585" y="1115568"/>
+            <a:ext cx="6172828" cy="2005865"/>
+          </a:xfrm>
+          <a:prstGeom prst="rect">
+            <a:avLst/>
+          </a:prstGeom>
+        </p:spPr>
+      </p:pic>
+      <p:sp>
+        <p:nvSpPr>
+          <p:cNvPr id="2" name="Text 0"/>
+          <p:cNvSpPr txBox="1"/>
+          <p:nvPr/>
+        </p:nvSpPr>
+        <p:spPr>
+          <a:xfrm>
+            <a:off x="502920" y="365760"/>
+            <a:ext cx="6400800" cy="274320"/>
+          </a:xfrm>
+          <a:prstGeom prst="rect">
+            <a:avLst/>
+          </a:prstGeom>
+          <a:noFill/>
+          <a:ln/>
+        </p:spPr>
+        <p:txBody>
+          <a:bodyPr wrap="square" lIns="0" tIns="0" rIns="0" bIns="0" rtlCol="0" anchor="ctr"/>
+          <a:lstStyle/>
+          <a:p>
+            <a:pPr marL="0" indent="0">
+              <a:buNone/>
+            </a:pPr>
+            <a:r>
+              <a:rPr lang="en-US" sz="950" b="1" kern="0" spc="220">
+                <a:solidFill>
+                  <a:srgbClr val="122B82"/>
+                </a:solidFill>
+              </a:rPr>
+              <a:t>FINANCIAL PERFORMANCE</a:t>
+            </a:r>
+            <a:endParaRPr lang="en-US" sz="950"/>
+          </a:p>
+        </p:txBody>
+      </p:sp>
+      <p:sp>
+        <p:nvSpPr>
+          <p:cNvPr id="3" name="Text 1"/>
+          <p:cNvSpPr txBox="1"/>
+          <p:nvPr/>
+        </p:nvSpPr>
+        <p:spPr>
+          <a:xfrm>
+            <a:off x="502920" y="640080"/>
+            <a:ext cx="7315200" cy="685800"/>
+          </a:xfrm>
+          <a:prstGeom prst="rect">
+            <a:avLst/>
+          </a:prstGeom>
+          <a:noFill/>
+          <a:ln/>
+        </p:spPr>
+        <p:txBody>
+          <a:bodyPr wrap="square" lIns="0" tIns="0" rIns="0" bIns="0" rtlCol="0" anchor="ctr"/>
+          <a:lstStyle/>
+          <a:p>
+            <a:pPr marL="0" indent="0">
+              <a:buNone/>
+            </a:pPr>
+            <a:r>
+              <a:rPr lang="en-US" sz="2200" b="1">
+                <a:solidFill>
+                  <a:srgbClr val="242C39"/>
+                </a:solidFill>
+              </a:rPr>
+              <a:t>Revenue against budget, year to date</a:t>
+            </a:r>
+            <a:endParaRPr lang="en-US" sz="2700"/>
+          </a:p>
+        </p:txBody>
+      </p:sp>
+      <p:sp>
+        <p:nvSpPr>
+          <p:cNvPr id="6" name="commentary panel"/>
+          <p:cNvSpPr/>
+          <p:nvPr/>
+        </p:nvSpPr>
+        <p:spPr>
+          <a:xfrm>
+            <a:off x="502920" y="3231161"/>
+            <a:ext cx="8138160" cy="1395702"/>
+          </a:xfrm>
+          <a:prstGeom prst="rect">
+            <a:avLst/>
+          </a:prstGeom>
+          <a:solidFill>
+            <a:srgbClr val="E8F9F8"/>
+          </a:solidFill>
+          <a:ln/>
+        </p:spPr>
+        <p:txBody>
+          <a:bodyPr/>
+          <a:lstStyle/>
+          <a:p>
+            <a:endParaRPr lang="en-AU"/>
+          </a:p>
+        </p:txBody>
+      </p:sp>
+      <p:sp>
+        <p:nvSpPr>
+          <p:cNvPr id="7" name="Text 4"/>
+          <p:cNvSpPr txBox="1"/>
+          <p:nvPr/>
+        </p:nvSpPr>
+        <p:spPr>
+          <a:xfrm>
+            <a:off x="685800" y="3304313"/>
+            <a:ext cx="2743200" cy="228600"/>
+          </a:xfrm>
+          <a:prstGeom prst="rect">
+            <a:avLst/>
+          </a:prstGeom>
+          <a:noFill/>
+          <a:ln/>
+        </p:spPr>
+        <p:txBody>
+          <a:bodyPr wrap="square" lIns="0" tIns="0" rIns="0" bIns="0" rtlCol="0" anchor="ctr"/>
+          <a:lstStyle/>
+          <a:p>
+            <a:pPr marL="0" indent="0">
+              <a:buNone/>
+            </a:pPr>
+            <a:r>
+              <a:rPr lang="en-US" sz="900" b="1" kern="0" spc="180">
+                <a:solidFill>
+                  <a:srgbClr val="005358"/>
+                </a:solidFill>
+              </a:rPr>
+              <a:t>COMMENTARY</a:t>
+            </a:r>
+            <a:endParaRPr lang="en-US" sz="900"/>
+          </a:p>
+        </p:txBody>
+      </p:sp>
+      <p:sp>
+        <p:nvSpPr>
+          <p:cNvPr id="8" name="Text 5"/>
+          <p:cNvSpPr txBox="1"/>
+          <p:nvPr/>
+        </p:nvSpPr>
+        <p:spPr>
+          <a:xfrm>
+            <a:off x="685800" y="3478049"/>
+            <a:ext cx="3703320" cy="1121382"/>
+          </a:xfrm>
+          <a:prstGeom prst="rect">
+            <a:avLst/>
+          </a:prstGeom>
+          <a:noFill/>
+          <a:ln/>
+        </p:spPr>
+        <p:txBody>
+          <a:bodyPr wrap="square" lIns="0" tIns="0" rIns="0" bIns="0" rtlCol="0" anchor="t">
+            <a:normAutofit fontScale="85000" lnSpcReduction="10000"/>
+          </a:bodyPr>
+          <a:lstStyle/>
+          <a:p>
+            <a:pPr marL="342900" indent="-342900">
+              <a:lnSpc>
+                <a:spcPts val="1050"/>
+              </a:lnSpc>
+              <a:spcAft>
+                <a:spcPts val="400"/>
+              </a:spcAft>
+              <a:buSzPct val="100000"/>
+              <a:buChar char="•"/>
+            </a:pPr>
+            <a:r>
+              <a:rPr lang="en-US" sz="1000">
+                <a:solidFill>
+                  <a:srgbClr val="3A4453"/>
+                </a:solidFill>
+              </a:rPr>
+              <a:t>Year to date revenue is $1,624k against a budget of $1,996k, $372k short.</a:t>
+            </a:r>
+            <a:endParaRPr lang="en-US" sz="850"/>
+          </a:p>
+          <a:p>
+            <a:pPr marL="342900" indent="-342900">
+              <a:lnSpc>
+                <a:spcPts val="1050"/>
+              </a:lnSpc>
+              <a:spcAft>
+                <a:spcPts val="400"/>
+              </a:spcAft>
+              <a:buSzPct val="100000"/>
+              <a:buChar char="•"/>
+            </a:pPr>
+            <a:r>
+              <a:rPr lang="en-US" sz="1000">
+                <a:solidFill>
+                  <a:srgbClr val="3A4453"/>
+                </a:solidFill>
+              </a:rPr>
+              <a:t>Consulting is most of the gap: $4k billed against a $237k budget.</a:t>
+            </a:r>
+            <a:endParaRPr lang="en-US" sz="850"/>
+          </a:p>
+        </p:txBody>
+      </p:sp>
+      <p:sp>
+        <p:nvSpPr>
+          <p:cNvPr id="25" name="Slide Number Placeholder 0"/>
+          <p:cNvSpPr>
+            <a:spLocks noGrp="1"/>
+          </p:cNvSpPr>
+          <p:nvPr>
+            <p:ph type="sldNum" sz="quarter" idx="4294967295"/>
+          </p:nvPr>
+        </p:nvSpPr>
+        <p:spPr>
+          <a:xfrm>
+            <a:off x="8092440" y="4736592"/>
+            <a:ext cx="548640" cy="228600"/>
+          </a:xfrm>
+          <a:prstGeom prst="rect">
+            <a:avLst/>
+          </a:prstGeom>
+          <a:extLst>
+            <a:ext uri="{C572A759-6A51-4108-AA02-DFA0A04FC94B}">
+              <ma14:wrappingTextBoxFlag xmlns:ma14="http://schemas.microsoft.com/office/mac/drawingml/2011/main" xmlns="" val="0"/>
+            </a:ext>
+          </a:extLst>
+        </p:spPr>
+        <p:txBody>
+          <a:bodyPr/>
+          <a:lstStyle>
+            <a:lvl1pPr>
+              <a:defRPr sz="800">
+                <a:solidFill>
+                  <a:srgbClr val="6B7585"/>
+                </a:solidFill>
+              </a:defRPr>
+            </a:lvl1pPr>
+          </a:lstStyle>
+          <a:p>
+            <a:pPr algn="r"/>
+            <a:fld id="{F7021451-1387-4CA6-816F-3879F97B5CBC}" type="slidenum">
+              <a:rPr lang="en-US" b="0"/>
+              <a:t>16</a:t>
+            </a:fld>
+            <a:endParaRPr lang="en-US"/>
+          </a:p>
+        </p:txBody>
+      </p:sp>
+      <p:sp>
+        <p:nvSpPr>
+          <p:cNvPr id="8" name="Text 5b"/>
+          <p:cNvSpPr txBox="1"/>
+          <p:nvPr/>
+        </p:nvSpPr>
+        <p:spPr>
+          <a:xfrm>
+            <a:off x="4663440" y="3478049"/>
+            <a:ext cx="3703320" cy="1121382"/>
+          </a:xfrm>
+          <a:prstGeom prst="rect">
+            <a:avLst/>
+          </a:prstGeom>
+          <a:noFill/>
+          <a:ln/>
+        </p:spPr>
+        <p:txBody>
+          <a:bodyPr wrap="square" lIns="0" tIns="0" rIns="0" bIns="0" rtlCol="0" anchor="t">
+            <a:normAutofit fontScale="85000" lnSpcReduction="10000"/>
+          </a:bodyPr>
+          <a:lstStyle/>
+          <a:p>
+            <a:pPr marL="342900" indent="-342900">
+              <a:lnSpc>
+                <a:spcPts val="1050"/>
+              </a:lnSpc>
+              <a:spcAft>
+                <a:spcPts val="400"/>
+              </a:spcAft>
+              <a:buSzPct val="100000"/>
+              <a:buChar char="•"/>
+            </a:pPr>
+            <a:r>
+              <a:rPr lang="en-US" sz="1000">
+                <a:solidFill>
+                  <a:srgbClr val="3A4453"/>
+                </a:solidFill>
+              </a:rPr>
+              <a:t>Integration is $167k short and Video $45k short, both for a third month.</a:t>
+            </a:r>
+            <a:endParaRPr lang="en-US" sz="850"/>
+          </a:p>
+          <a:p>
+            <a:pPr marL="342900" indent="-342900">
+              <a:lnSpc>
+                <a:spcPts val="1050"/>
+              </a:lnSpc>
+              <a:spcAft>
+                <a:spcPts val="400"/>
+              </a:spcAft>
+              <a:buSzPct val="100000"/>
+              <a:buChar char="•"/>
+            </a:pPr>
+            <a:r>
+              <a:rPr lang="en-US" sz="1000">
+                <a:solidFill>
+                  <a:srgbClr val="3A4453"/>
+                </a:solidFill>
+              </a:rPr>
+              <a:t>Events is the only department ahead, $420k against a $322k budget.</a:t>
+            </a:r>
+            <a:endParaRPr lang="en-US" sz="850"/>
+          </a:p>
+          <a:p>
+            <a:pPr marL="342900" indent="-342900">
+              <a:lnSpc>
+                <a:spcPts val="1050"/>
+              </a:lnSpc>
+              <a:spcAft>
+                <a:spcPts val="400"/>
+              </a:spcAft>
+              <a:buSzPct val="100000"/>
+              <a:buChar char="•"/>
+            </a:pPr>
+            <a:r>
+              <a:rPr lang="en-US" sz="1000">
+                <a:solidFill>
+                  <a:srgbClr val="3A4453"/>
+                </a:solidFill>
+              </a:rPr>
+              <a:t>Support is within $25k of its $743k budget, which is the contract base behaving as it should.</a:t>
+            </a:r>
+            <a:endParaRPr lang="en-US" sz="850"/>
+          </a:p>
+        </p:txBody>
+      </p:sp>
+      <p:pic>
+        <p:nvPicPr>
+          <p:cNvPr id="26" name="cts logo" descr="image.png"/>
+          <p:cNvPicPr>
+            <a:picLocks noChangeAspect="1"/>
+          </p:cNvPicPr>
+          <p:nvPr/>
+        </p:nvPicPr>
+        <p:blipFill>
+          <a:blip r:embed="rId2"/>
+          <a:stretch>
+            <a:fillRect/>
+          </a:stretch>
+        </p:blipFill>
+        <p:spPr>
+          <a:xfrm>
+            <a:off x="7680959" y="182880"/>
+            <a:ext cx="960120" cy="539696"/>
+          </a:xfrm>
+          <a:prstGeom prst="rect">
+            <a:avLst/>
+          </a:prstGeom>
+        </p:spPr>
+      </p:pic>
+    </p:spTree>
+  </p:cSld>
+  <p:clrMapOvr>
+    <a:masterClrMapping/>
+  </p:clrMapOvr>
+</p:sld>
+</file>
+
 <file path=ppt/slides/slide4.xml><?xml version="1.0" encoding="utf-8"?>
 <p:sld xmlns:a="http://schemas.openxmlformats.org/drawingml/2006/main" xmlns:r="http://schemas.openxmlformats.org/officeDocument/2006/relationships" xmlns:p="http://schemas.openxmlformats.org/presentationml/2006/main">
   <p:cSld name="Slide 4">

--- a/deck/CTS Monthly Business Review - 30092026.pptx
+++ b/deck/CTS Monthly Business Review - 30092026.pptx
@@ -3770,63 +3770,53 @@
           <a:lstStyle/>
           <a:p>
             <a:r>
-              <a:t>Revenue against budget for the year to date, by department, taken from the Cost Analysis tab.</a:t>
+              <a:t>Revenue against budget for each closed month, taken from the Cost Analysis tab.</a:t>
             </a:r>
           </a:p>
           <a:p/>
           <a:p>
             <a:r>
-              <a:t>Support $718,587 against a budget of $743,185, short by $24,597 or 3.3%.</a:t>
-            </a:r>
-          </a:p>
-          <a:p>
-            <a:r>
-              <a:t>Events $420,121 against $321,957, ahead by $98,163 or 30.5%.</a:t>
-            </a:r>
-          </a:p>
-          <a:p>
-            <a:r>
-              <a:t>Video $40,270 against $85,584, short by $45,313 or 52.9%.</a:t>
-            </a:r>
-          </a:p>
-          <a:p>
-            <a:r>
-              <a:t>Integration $441,414 against $608,676, short by $167,263 or 27.5%.</a:t>
-            </a:r>
-          </a:p>
-          <a:p>
-            <a:r>
-              <a:t>Consulting $4,068 against $236,707, short by $232,640 or 98.3%.</a:t>
+              <a:t>July: $459,049 against a budget of $609,277, short by $150,228 or 24.7%.</a:t>
+            </a:r>
+          </a:p>
+          <a:p>
+            <a:r>
+              <a:t>August: $603,467 against $973,168, short by $369,701 or 38.0%.</a:t>
+            </a:r>
+          </a:p>
+          <a:p>
+            <a:r>
+              <a:t>September: $561,945 against $413,665, ahead by $148,280 or 35.8%.</a:t>
             </a:r>
           </a:p>
           <a:p/>
           <a:p>
             <a:r>
-              <a:t>The company is $371,650 short of budget on revenue, or 18.6%.</a:t>
+              <a:t>Year to date: $1,624,460 against $1,996,110, short by $371,650 or 18.6%.</a:t>
             </a:r>
           </a:p>
           <a:p/>
           <a:p>
             <a:r>
-              <a:t>Where the shortfall actually sits. Consulting accounts for $232,640 of it, which is almost two thirds. Integration adds $167,263 and Video $45,313. Events offsets $98,163 of the total and Support is within 3.3% of plan.</a:t>
+              <a:t>The monthly shape matters more than the quarter total. Two thirds of the shortfall is August alone, where the budget asked for $973,168. That is more than the business has billed in any month on record, so the variance reflects the plan as much as the trading.</a:t>
             </a:r>
           </a:p>
           <a:p/>
           <a:p>
             <a:r>
-              <a:t>That distribution matters for the reforecast. Support and Events are delivering close to or ahead of what was asked of them. The gap is concentrated in the three departments that were budgeted on a resourcing level which does not exist, and no amount of additional effort from Support or Events closes it.</a:t>
+              <a:t>September is the only month ahead of budget, and that came from a single Integration installation completing at a 10.1% gross margin, so it added revenue without adding much profit.</a:t>
             </a:r>
           </a:p>
           <a:p/>
           <a:p>
             <a:r>
-              <a:t>Consulting in particular was budgeted $236,707 for the quarter and has billed $4,068. That is not a performance variance, it is a plan built on capacity the business never had.</a:t>
+              <a:t>Read alongside the previous page, which shows which department billed each month, the two slides together explain the quarter: a steady Support base, one large project landing in September, and a budget that front-loaded the year.</a:t>
             </a:r>
           </a:p>
           <a:p/>
           <a:p>
             <a:r>
-              <a:t>Year to date is summed across the closed months rather than read from a stored total, so this chart follows the reporting month on Setup and will extend as the year goes on.</a:t>
+              <a:t>The chart takes the closed months only and lengthens as the year goes on. The year to date pair sits on the table beneath it rather than on the chart, because a column five times the height of the others would flatten the months.</a:t>
             </a:r>
           </a:p>
         </p:txBody>
@@ -5444,6 +5434,391 @@
 
 <file path=ppt/slides/slide10.xml><?xml version="1.0" encoding="utf-8"?>
 <p:sld xmlns:a="http://schemas.openxmlformats.org/drawingml/2006/main" xmlns:r="http://schemas.openxmlformats.org/officeDocument/2006/relationships" xmlns:p="http://schemas.openxmlformats.org/presentationml/2006/main">
+  <p:cSld name="Slide 8">
+    <p:spTree>
+      <p:nvGrpSpPr>
+        <p:cNvPr id="1" name=""/>
+        <p:cNvGrpSpPr/>
+        <p:nvPr/>
+      </p:nvGrpSpPr>
+      <p:grpSpPr>
+        <a:xfrm>
+          <a:off x="0" y="0"/>
+          <a:ext cx="0" cy="0"/>
+          <a:chOff x="0" y="0"/>
+          <a:chExt cx="0" cy="0"/>
+        </a:xfrm>
+      </p:grpSpPr>
+      <p:sp>
+        <p:nvSpPr>
+          <p:cNvPr id="2" name="Text 0"/>
+          <p:cNvSpPr txBox="1"/>
+          <p:nvPr/>
+        </p:nvSpPr>
+        <p:spPr>
+          <a:xfrm>
+            <a:off x="502920" y="365760"/>
+            <a:ext cx="6400800" cy="274320"/>
+          </a:xfrm>
+          <a:prstGeom prst="rect">
+            <a:avLst/>
+          </a:prstGeom>
+          <a:noFill/>
+          <a:ln/>
+        </p:spPr>
+        <p:txBody>
+          <a:bodyPr wrap="square" lIns="0" tIns="0" rIns="0" bIns="0" rtlCol="0" anchor="ctr"/>
+          <a:lstStyle/>
+          <a:p>
+            <a:pPr marL="0" indent="0">
+              <a:buNone/>
+            </a:pPr>
+            <a:r>
+              <a:rPr lang="en-US" sz="950" b="1" kern="0" spc="220">
+                <a:solidFill>
+                  <a:srgbClr val="122B82"/>
+                </a:solidFill>
+              </a:rPr>
+              <a:t>FINANCIAL PERFORMANCE</a:t>
+            </a:r>
+            <a:endParaRPr lang="en-US" sz="950"/>
+          </a:p>
+        </p:txBody>
+      </p:sp>
+      <p:sp>
+        <p:nvSpPr>
+          <p:cNvPr id="3" name="Text 1"/>
+          <p:cNvSpPr txBox="1"/>
+          <p:nvPr/>
+        </p:nvSpPr>
+        <p:spPr>
+          <a:xfrm>
+            <a:off x="502920" y="640080"/>
+            <a:ext cx="7315200" cy="685800"/>
+          </a:xfrm>
+          <a:prstGeom prst="rect">
+            <a:avLst/>
+          </a:prstGeom>
+          <a:noFill/>
+          <a:ln/>
+        </p:spPr>
+        <p:txBody>
+          <a:bodyPr wrap="square" lIns="0" tIns="0" rIns="0" bIns="0" rtlCol="0" anchor="ctr"/>
+          <a:lstStyle/>
+          <a:p>
+            <a:pPr marL="0" indent="0">
+              <a:buNone/>
+            </a:pPr>
+            <a:r>
+              <a:rPr lang="en-US" sz="2200" b="1">
+                <a:solidFill>
+                  <a:srgbClr val="242C39"/>
+                </a:solidFill>
+              </a:rPr>
+              <a:t>The three departments, Sep 26</a:t>
+            </a:r>
+            <a:endParaRPr lang="en-US" sz="2700"/>
+          </a:p>
+        </p:txBody>
+      </p:sp>
+      <p:pic>
+        <p:nvPicPr>
+          <p:cNvPr id="4" name="snip dept_three" descr="/home/user/Claude/deck/snips/dept_three.png"/>
+          <p:cNvPicPr>
+            <a:picLocks noChangeAspect="1"/>
+          </p:cNvPicPr>
+          <p:nvPr/>
+        </p:nvPicPr>
+        <p:blipFill>
+          <a:blip r:embed="rId3"/>
+          <a:stretch>
+            <a:fillRect/>
+          </a:stretch>
+        </p:blipFill>
+        <p:spPr>
+          <a:xfrm>
+            <a:off x="502920" y="1389888"/>
+            <a:ext cx="8138160" cy="1316784"/>
+          </a:xfrm>
+          <a:prstGeom prst="rect">
+            <a:avLst/>
+          </a:prstGeom>
+        </p:spPr>
+      </p:pic>
+      <p:sp>
+        <p:nvSpPr>
+          <p:cNvPr id="6" name="commentary panel"/>
+          <p:cNvSpPr/>
+          <p:nvPr/>
+        </p:nvSpPr>
+        <p:spPr>
+          <a:xfrm>
+            <a:off x="502920" y="3454086"/>
+            <a:ext cx="8138160" cy="1172777"/>
+          </a:xfrm>
+          <a:prstGeom prst="rect">
+            <a:avLst/>
+          </a:prstGeom>
+          <a:solidFill>
+            <a:srgbClr val="E8F9F8"/>
+          </a:solidFill>
+          <a:ln/>
+        </p:spPr>
+        <p:txBody>
+          <a:bodyPr/>
+          <a:lstStyle/>
+          <a:p>
+            <a:endParaRPr lang="en-AU"/>
+          </a:p>
+        </p:txBody>
+      </p:sp>
+      <p:sp>
+        <p:nvSpPr>
+          <p:cNvPr id="7" name="Text 4"/>
+          <p:cNvSpPr txBox="1"/>
+          <p:nvPr/>
+        </p:nvSpPr>
+        <p:spPr>
+          <a:xfrm>
+            <a:off x="685800" y="3527238"/>
+            <a:ext cx="2743200" cy="164592"/>
+          </a:xfrm>
+          <a:prstGeom prst="rect">
+            <a:avLst/>
+          </a:prstGeom>
+          <a:noFill/>
+          <a:ln/>
+        </p:spPr>
+        <p:txBody>
+          <a:bodyPr wrap="square" lIns="0" tIns="0" rIns="0" bIns="0" rtlCol="0" anchor="ctr"/>
+          <a:lstStyle/>
+          <a:p>
+            <a:pPr marL="0" indent="0">
+              <a:buNone/>
+            </a:pPr>
+            <a:r>
+              <a:rPr lang="en-US" sz="850" b="1" kern="0" spc="180">
+                <a:solidFill>
+                  <a:srgbClr val="005358"/>
+                </a:solidFill>
+              </a:rPr>
+              <a:t>COMMENTARY</a:t>
+            </a:r>
+            <a:endParaRPr lang="en-US" sz="850"/>
+          </a:p>
+        </p:txBody>
+      </p:sp>
+      <p:sp>
+        <p:nvSpPr>
+          <p:cNvPr id="8" name="Text 5"/>
+          <p:cNvSpPr txBox="1"/>
+          <p:nvPr/>
+        </p:nvSpPr>
+        <p:spPr>
+          <a:xfrm>
+            <a:off x="685800" y="3700974"/>
+            <a:ext cx="3703320" cy="898457"/>
+          </a:xfrm>
+          <a:prstGeom prst="rect">
+            <a:avLst/>
+          </a:prstGeom>
+          <a:noFill/>
+          <a:ln/>
+        </p:spPr>
+        <p:txBody>
+          <a:bodyPr wrap="square" lIns="0" tIns="0" rIns="0" bIns="0" rtlCol="0" anchor="t">
+            <a:normAutofit/>
+          </a:bodyPr>
+          <a:lstStyle/>
+          <a:p>
+            <a:pPr marL="342900" indent="-342900">
+              <a:lnSpc>
+                <a:spcPts val="1050"/>
+              </a:lnSpc>
+              <a:spcAft>
+                <a:spcPts val="300"/>
+              </a:spcAft>
+              <a:buSzPct val="100000"/>
+              <a:buChar char="•"/>
+            </a:pPr>
+            <a:r>
+              <a:rPr lang="en-US" sz="1000">
+                <a:solidFill>
+                  <a:srgbClr val="3A4453"/>
+                </a:solidFill>
+              </a:rPr>
+              <a:t>The P&amp;L groups Events and Video under Production, and Integration and Consulting under Consulting.</a:t>
+            </a:r>
+            <a:endParaRPr lang="en-US" sz="850"/>
+          </a:p>
+          <a:p>
+            <a:pPr marL="342900" indent="-342900">
+              <a:lnSpc>
+                <a:spcPts val="1050"/>
+              </a:lnSpc>
+              <a:spcAft>
+                <a:spcPts val="300"/>
+              </a:spcAft>
+              <a:buSzPct val="100000"/>
+              <a:buChar char="•"/>
+            </a:pPr>
+            <a:r>
+              <a:rPr lang="en-US" sz="1000">
+                <a:solidFill>
+                  <a:srgbClr val="3A4453"/>
+                </a:solidFill>
+              </a:rPr>
+              <a:t>Support generated $29k profit on $243k revenue and is the only major group covering its allocated overheads.</a:t>
+            </a:r>
+            <a:endParaRPr lang="en-US" sz="850"/>
+          </a:p>
+        </p:txBody>
+      </p:sp>
+      <p:sp>
+        <p:nvSpPr>
+          <p:cNvPr id="9" name="Text 6"/>
+          <p:cNvSpPr txBox="1"/>
+          <p:nvPr/>
+        </p:nvSpPr>
+        <p:spPr>
+          <a:xfrm>
+            <a:off x="4663440" y="3700974"/>
+            <a:ext cx="3703320" cy="898457"/>
+          </a:xfrm>
+          <a:prstGeom prst="rect">
+            <a:avLst/>
+          </a:prstGeom>
+          <a:noFill/>
+          <a:ln/>
+        </p:spPr>
+        <p:txBody>
+          <a:bodyPr wrap="square" lIns="0" tIns="0" rIns="0" bIns="0" rtlCol="0" anchor="t">
+            <a:normAutofit/>
+          </a:bodyPr>
+          <a:lstStyle/>
+          <a:p>
+            <a:pPr marL="342900" indent="-342900">
+              <a:lnSpc>
+                <a:spcPts val="1050"/>
+              </a:lnSpc>
+              <a:spcAft>
+                <a:spcPts val="300"/>
+              </a:spcAft>
+              <a:buSzPct val="100000"/>
+              <a:buChar char="•"/>
+            </a:pPr>
+            <a:r>
+              <a:rPr lang="en-US" sz="1000">
+                <a:solidFill>
+                  <a:srgbClr val="3A4453"/>
+                </a:solidFill>
+              </a:rPr>
+              <a:t>Production achieved a 78% gross margin on $81k revenue, but recorded a $61k loss after $124k of overheads.</a:t>
+            </a:r>
+            <a:endParaRPr lang="en-US" sz="850"/>
+          </a:p>
+          <a:p>
+            <a:pPr marL="342900" indent="-342900">
+              <a:lnSpc>
+                <a:spcPts val="1050"/>
+              </a:lnSpc>
+              <a:spcAft>
+                <a:spcPts val="300"/>
+              </a:spcAft>
+              <a:buSzPct val="100000"/>
+              <a:buChar char="•"/>
+            </a:pPr>
+            <a:r>
+              <a:rPr lang="en-US" sz="1000">
+                <a:solidFill>
+                  <a:srgbClr val="3A4453"/>
+                </a:solidFill>
+              </a:rPr>
+              <a:t>The combined Consulting group generated $238k revenue against an $82k budget. Its 10% gross margin contributed to a $9k loss.</a:t>
+            </a:r>
+            <a:endParaRPr lang="en-US" sz="850"/>
+          </a:p>
+        </p:txBody>
+      </p:sp>
+      <p:sp>
+        <p:nvSpPr>
+          <p:cNvPr id="25" name="Slide Number Placeholder 0"/>
+          <p:cNvSpPr>
+            <a:spLocks noGrp="1"/>
+          </p:cNvSpPr>
+          <p:nvPr>
+            <p:ph type="sldNum" sz="quarter" idx="4294967295"/>
+          </p:nvPr>
+        </p:nvSpPr>
+        <p:spPr>
+          <a:xfrm>
+            <a:off x="8092440" y="4736592"/>
+            <a:ext cx="548640" cy="228600"/>
+          </a:xfrm>
+          <a:prstGeom prst="rect">
+            <a:avLst/>
+          </a:prstGeom>
+          <a:extLst>
+            <a:ext uri="{C572A759-6A51-4108-AA02-DFA0A04FC94B}">
+              <ma14:wrappingTextBoxFlag xmlns:ma14="http://schemas.microsoft.com/office/mac/drawingml/2011/main" xmlns="" val="0"/>
+            </a:ext>
+          </a:extLst>
+        </p:spPr>
+        <p:txBody>
+          <a:bodyPr/>
+          <a:lstStyle>
+            <a:lvl1pPr>
+              <a:defRPr sz="800">
+                <a:solidFill>
+                  <a:srgbClr val="6B7585"/>
+                </a:solidFill>
+              </a:defRPr>
+            </a:lvl1pPr>
+          </a:lstStyle>
+          <a:p>
+            <a:pPr algn="r"/>
+            <a:fld id="{F7021451-1387-4CA6-816F-3879F97B5CBC}" type="slidenum">
+              <a:rPr lang="en-US" b="0"/>
+              <a:t>8</a:t>
+            </a:fld>
+            <a:endParaRPr lang="en-US"/>
+          </a:p>
+        </p:txBody>
+      </p:sp>
+      <p:pic>
+        <p:nvPicPr>
+          <p:cNvPr id="26" name="cts logo" descr="cts-logo.png"/>
+          <p:cNvPicPr>
+            <a:picLocks noChangeAspect="1"/>
+          </p:cNvPicPr>
+          <p:nvPr/>
+        </p:nvPicPr>
+        <p:blipFill>
+          <a:blip r:embed="rId4"/>
+          <a:stretch>
+            <a:fillRect/>
+          </a:stretch>
+        </p:blipFill>
+        <p:spPr>
+          <a:xfrm>
+            <a:off x="7680959" y="182880"/>
+            <a:ext cx="960120" cy="539696"/>
+          </a:xfrm>
+          <a:prstGeom prst="rect">
+            <a:avLst/>
+          </a:prstGeom>
+        </p:spPr>
+      </p:pic>
+    </p:spTree>
+  </p:cSld>
+  <p:clrMapOvr>
+    <a:masterClrMapping/>
+  </p:clrMapOvr>
+</p:sld>
+</file>
+
+<file path=ppt/slides/slide11.xml><?xml version="1.0" encoding="utf-8"?>
+<p:sld xmlns:a="http://schemas.openxmlformats.org/drawingml/2006/main" xmlns:r="http://schemas.openxmlformats.org/officeDocument/2006/relationships" xmlns:p="http://schemas.openxmlformats.org/presentationml/2006/main">
   <p:cSld name="Slide 9">
     <p:spTree>
       <p:nvGrpSpPr>
@@ -5848,7 +6223,7 @@
 </p:sld>
 </file>
 
-<file path=ppt/slides/slide11.xml><?xml version="1.0" encoding="utf-8"?>
+<file path=ppt/slides/slide12.xml><?xml version="1.0" encoding="utf-8"?>
 <p:sld xmlns:a="http://schemas.openxmlformats.org/drawingml/2006/main" xmlns:r="http://schemas.openxmlformats.org/officeDocument/2006/relationships" xmlns:p="http://schemas.openxmlformats.org/presentationml/2006/main">
   <p:cSld name="Slide 10">
     <p:spTree>
@@ -6254,7 +6629,7 @@
 </p:sld>
 </file>
 
-<file path=ppt/slides/slide12.xml><?xml version="1.0" encoding="utf-8"?>
+<file path=ppt/slides/slide13.xml><?xml version="1.0" encoding="utf-8"?>
 <p:sld xmlns:a="http://schemas.openxmlformats.org/drawingml/2006/main" xmlns:r="http://schemas.openxmlformats.org/officeDocument/2006/relationships" xmlns:p="http://schemas.openxmlformats.org/presentationml/2006/main">
   <p:cSld name="Slide 11">
     <p:spTree>
@@ -6660,7 +7035,7 @@
 </p:sld>
 </file>
 
-<file path=ppt/slides/slide13.xml><?xml version="1.0" encoding="utf-8"?>
+<file path=ppt/slides/slide14.xml><?xml version="1.0" encoding="utf-8"?>
 <p:sld xmlns:a="http://schemas.openxmlformats.org/drawingml/2006/main" xmlns:r="http://schemas.openxmlformats.org/officeDocument/2006/relationships" xmlns:p="http://schemas.openxmlformats.org/presentationml/2006/main">
   <p:cSld name="Slide 12">
     <p:spTree>
@@ -7066,7 +7441,7 @@
 </p:sld>
 </file>
 
-<file path=ppt/slides/slide14.xml><?xml version="1.0" encoding="utf-8"?>
+<file path=ppt/slides/slide15.xml><?xml version="1.0" encoding="utf-8"?>
 <p:sld xmlns:a="http://schemas.openxmlformats.org/drawingml/2006/main" xmlns:r="http://schemas.openxmlformats.org/officeDocument/2006/relationships" xmlns:p="http://schemas.openxmlformats.org/presentationml/2006/main">
   <p:cSld name="Slide 13">
     <p:spTree>
@@ -7472,7 +7847,7 @@
 </p:sld>
 </file>
 
-<file path=ppt/slides/slide15.xml><?xml version="1.0" encoding="utf-8"?>
+<file path=ppt/slides/slide16.xml><?xml version="1.0" encoding="utf-8"?>
 <p:sld xmlns:a="http://schemas.openxmlformats.org/drawingml/2006/main" xmlns:r="http://schemas.openxmlformats.org/officeDocument/2006/relationships" xmlns:p="http://schemas.openxmlformats.org/presentationml/2006/main">
   <p:cSld name="Slide 14">
     <p:spTree>
@@ -7878,7 +8253,7 @@
 </p:sld>
 </file>
 
-<file path=ppt/slides/slide16.xml><?xml version="1.0" encoding="utf-8"?>
+<file path=ppt/slides/slide17.xml><?xml version="1.0" encoding="utf-8"?>
 <p:sld xmlns:a="http://schemas.openxmlformats.org/drawingml/2006/main" xmlns:r="http://schemas.openxmlformats.org/officeDocument/2006/relationships" xmlns:p="http://schemas.openxmlformats.org/presentationml/2006/main">
   <p:cSld name="Slide 15">
     <p:spTree>
@@ -8161,7 +8536,7 @@
 </p:sld>
 </file>
 
-<file path=ppt/slides/slide17.xml><?xml version="1.0" encoding="utf-8"?>
+<file path=ppt/slides/slide18.xml><?xml version="1.0" encoding="utf-8"?>
 <p:sld xmlns:a="http://schemas.openxmlformats.org/drawingml/2006/main" xmlns:r="http://schemas.openxmlformats.org/officeDocument/2006/relationships" xmlns:p="http://schemas.openxmlformats.org/presentationml/2006/main">
   <p:cSld name="Slide 16">
     <p:spTree>
@@ -8543,7 +8918,7 @@
 </p:sld>
 </file>
 
-<file path=ppt/slides/slide18.xml><?xml version="1.0" encoding="utf-8"?>
+<file path=ppt/slides/slide19.xml><?xml version="1.0" encoding="utf-8"?>
 <p:sld xmlns:a="http://schemas.openxmlformats.org/drawingml/2006/main" xmlns:r="http://schemas.openxmlformats.org/officeDocument/2006/relationships" xmlns:p="http://schemas.openxmlformats.org/presentationml/2006/main">
   <p:cSld name="Slide 17">
     <p:spTree>
@@ -8888,388 +9263,6 @@
             <a:fld id="{F7021451-1387-4CA6-816F-3879F97B5CBC}" type="slidenum">
               <a:rPr lang="en-US" b="0"/>
               <a:t>17</a:t>
-            </a:fld>
-            <a:endParaRPr lang="en-US"/>
-          </a:p>
-        </p:txBody>
-      </p:sp>
-      <p:pic>
-        <p:nvPicPr>
-          <p:cNvPr id="26" name="cts logo" descr="cts-logo.png"/>
-          <p:cNvPicPr>
-            <a:picLocks noChangeAspect="1"/>
-          </p:cNvPicPr>
-          <p:nvPr/>
-        </p:nvPicPr>
-        <p:blipFill>
-          <a:blip r:embed="rId4"/>
-          <a:stretch>
-            <a:fillRect/>
-          </a:stretch>
-        </p:blipFill>
-        <p:spPr>
-          <a:xfrm>
-            <a:off x="7680959" y="182880"/>
-            <a:ext cx="960120" cy="539696"/>
-          </a:xfrm>
-          <a:prstGeom prst="rect">
-            <a:avLst/>
-          </a:prstGeom>
-        </p:spPr>
-      </p:pic>
-    </p:spTree>
-  </p:cSld>
-  <p:clrMapOvr>
-    <a:masterClrMapping/>
-  </p:clrMapOvr>
-</p:sld>
-</file>
-
-<file path=ppt/slides/slide19.xml><?xml version="1.0" encoding="utf-8"?>
-<p:sld xmlns:a="http://schemas.openxmlformats.org/drawingml/2006/main" xmlns:r="http://schemas.openxmlformats.org/officeDocument/2006/relationships" xmlns:p="http://schemas.openxmlformats.org/presentationml/2006/main">
-  <p:cSld name="Slide 18">
-    <p:spTree>
-      <p:nvGrpSpPr>
-        <p:cNvPr id="1" name=""/>
-        <p:cNvGrpSpPr/>
-        <p:nvPr/>
-      </p:nvGrpSpPr>
-      <p:grpSpPr>
-        <a:xfrm>
-          <a:off x="0" y="0"/>
-          <a:ext cx="0" cy="0"/>
-          <a:chOff x="0" y="0"/>
-          <a:chExt cx="0" cy="0"/>
-        </a:xfrm>
-      </p:grpSpPr>
-      <p:sp>
-        <p:nvSpPr>
-          <p:cNvPr id="2" name="Text 0"/>
-          <p:cNvSpPr txBox="1"/>
-          <p:nvPr/>
-        </p:nvSpPr>
-        <p:spPr>
-          <a:xfrm>
-            <a:off x="502920" y="365760"/>
-            <a:ext cx="6400800" cy="274320"/>
-          </a:xfrm>
-          <a:prstGeom prst="rect">
-            <a:avLst/>
-          </a:prstGeom>
-          <a:noFill/>
-          <a:ln/>
-        </p:spPr>
-        <p:txBody>
-          <a:bodyPr wrap="square" lIns="0" tIns="0" rIns="0" bIns="0" rtlCol="0" anchor="ctr"/>
-          <a:lstStyle/>
-          <a:p>
-            <a:pPr marL="0" indent="0">
-              <a:buNone/>
-            </a:pPr>
-            <a:r>
-              <a:rPr lang="en-US" sz="950" b="1" kern="0" spc="220">
-                <a:solidFill>
-                  <a:srgbClr val="122B82"/>
-                </a:solidFill>
-              </a:rPr>
-              <a:t>WHAT WE SPEND</a:t>
-            </a:r>
-            <a:endParaRPr lang="en-US" sz="950"/>
-          </a:p>
-        </p:txBody>
-      </p:sp>
-      <p:sp>
-        <p:nvSpPr>
-          <p:cNvPr id="3" name="Text 1"/>
-          <p:cNvSpPr txBox="1"/>
-          <p:nvPr/>
-        </p:nvSpPr>
-        <p:spPr>
-          <a:xfrm>
-            <a:off x="502920" y="640080"/>
-            <a:ext cx="7315200" cy="685800"/>
-          </a:xfrm>
-          <a:prstGeom prst="rect">
-            <a:avLst/>
-          </a:prstGeom>
-          <a:noFill/>
-          <a:ln/>
-        </p:spPr>
-        <p:txBody>
-          <a:bodyPr wrap="square" lIns="0" tIns="0" rIns="0" bIns="0" rtlCol="0" anchor="ctr"/>
-          <a:lstStyle/>
-          <a:p>
-            <a:pPr marL="0" indent="0">
-              <a:buNone/>
-            </a:pPr>
-            <a:r>
-              <a:rPr lang="en-US" sz="2200" b="1">
-                <a:solidFill>
-                  <a:srgbClr val="242C39"/>
-                </a:solidFill>
-              </a:rPr>
-              <a:t>Labour mix, year to date</a:t>
-            </a:r>
-            <a:endParaRPr lang="en-US" sz="2700"/>
-          </a:p>
-        </p:txBody>
-      </p:sp>
-      <p:pic>
-        <p:nvPicPr>
-          <p:cNvPr id="4" name="snip labour_mix" descr="/home/user/Claude/deck/snips/labour_mix.png"/>
-          <p:cNvPicPr>
-            <a:picLocks noChangeAspect="1"/>
-          </p:cNvPicPr>
-          <p:nvPr/>
-        </p:nvPicPr>
-        <p:blipFill>
-          <a:blip r:embed="rId3"/>
-          <a:stretch>
-            <a:fillRect/>
-          </a:stretch>
-        </p:blipFill>
-        <p:spPr>
-          <a:xfrm>
-            <a:off x="502920" y="1444752"/>
-            <a:ext cx="4892039" cy="2912327"/>
-          </a:xfrm>
-          <a:prstGeom prst="rect">
-            <a:avLst/>
-          </a:prstGeom>
-        </p:spPr>
-      </p:pic>
-      <p:sp>
-        <p:nvSpPr>
-          <p:cNvPr id="6" name="commentary panel"/>
-          <p:cNvSpPr/>
-          <p:nvPr/>
-        </p:nvSpPr>
-        <p:spPr>
-          <a:xfrm>
-            <a:off x="5623559" y="1463040"/>
-            <a:ext cx="3017520" cy="3154680"/>
-          </a:xfrm>
-          <a:prstGeom prst="rect">
-            <a:avLst/>
-          </a:prstGeom>
-          <a:solidFill>
-            <a:srgbClr val="E8F9F8"/>
-          </a:solidFill>
-          <a:ln/>
-        </p:spPr>
-        <p:txBody>
-          <a:bodyPr/>
-          <a:lstStyle/>
-          <a:p>
-            <a:endParaRPr lang="en-AU"/>
-          </a:p>
-        </p:txBody>
-      </p:sp>
-      <p:sp>
-        <p:nvSpPr>
-          <p:cNvPr id="7" name="Text 4"/>
-          <p:cNvSpPr txBox="1"/>
-          <p:nvPr/>
-        </p:nvSpPr>
-        <p:spPr>
-          <a:xfrm>
-            <a:off x="5806439" y="1627632"/>
-            <a:ext cx="2651760" cy="228600"/>
-          </a:xfrm>
-          <a:prstGeom prst="rect">
-            <a:avLst/>
-          </a:prstGeom>
-          <a:noFill/>
-          <a:ln/>
-        </p:spPr>
-        <p:txBody>
-          <a:bodyPr wrap="square" lIns="0" tIns="0" rIns="0" bIns="0" rtlCol="0" anchor="ctr"/>
-          <a:lstStyle/>
-          <a:p>
-            <a:pPr marL="0" indent="0">
-              <a:buNone/>
-            </a:pPr>
-            <a:r>
-              <a:rPr lang="en-US" sz="900" b="1" kern="0" spc="180">
-                <a:solidFill>
-                  <a:srgbClr val="005358"/>
-                </a:solidFill>
-              </a:rPr>
-              <a:t>COMMENTARY</a:t>
-            </a:r>
-            <a:endParaRPr lang="en-US" sz="900"/>
-          </a:p>
-        </p:txBody>
-      </p:sp>
-      <p:sp>
-        <p:nvSpPr>
-          <p:cNvPr id="8" name="Text 5"/>
-          <p:cNvSpPr txBox="1"/>
-          <p:nvPr/>
-        </p:nvSpPr>
-        <p:spPr>
-          <a:xfrm>
-            <a:off x="5806439" y="1901952"/>
-            <a:ext cx="2651760" cy="2706623"/>
-          </a:xfrm>
-          <a:prstGeom prst="rect">
-            <a:avLst/>
-          </a:prstGeom>
-          <a:noFill/>
-          <a:ln/>
-        </p:spPr>
-        <p:txBody>
-          <a:bodyPr wrap="square" lIns="0" tIns="0" rIns="0" bIns="0" rtlCol="0" anchor="t">
-            <a:normAutofit/>
-          </a:bodyPr>
-          <a:lstStyle/>
-          <a:p>
-            <a:pPr marL="342900" indent="-342900">
-              <a:lnSpc>
-                <a:spcPts val="1050"/>
-              </a:lnSpc>
-              <a:spcAft>
-                <a:spcPts val="400"/>
-              </a:spcAft>
-              <a:buSzPct val="100000"/>
-              <a:buChar char="•"/>
-            </a:pPr>
-            <a:r>
-              <a:rPr lang="en-US" sz="1000">
-                <a:solidFill>
-                  <a:srgbClr val="3A4453"/>
-                </a:solidFill>
-              </a:rPr>
-              <a:t>Direct labour consists of employee costs and external contractors or service hires.</a:t>
-            </a:r>
-            <a:endParaRPr lang="en-US" sz="850"/>
-          </a:p>
-          <a:p>
-            <a:pPr marL="342900" indent="-342900">
-              <a:lnSpc>
-                <a:spcPts val="1050"/>
-              </a:lnSpc>
-              <a:spcAft>
-                <a:spcPts val="400"/>
-              </a:spcAft>
-              <a:buSzPct val="100000"/>
-              <a:buChar char="•"/>
-            </a:pPr>
-            <a:r>
-              <a:rPr lang="en-US" sz="1000">
-                <a:solidFill>
-                  <a:srgbClr val="3A4453"/>
-                </a:solidFill>
-              </a:rPr>
-              <a:t>Employee salaries, wages and superannuation account for most direct labour costs.</a:t>
-            </a:r>
-            <a:endParaRPr lang="en-US" sz="850"/>
-          </a:p>
-          <a:p>
-            <a:pPr marL="342900" indent="-342900">
-              <a:lnSpc>
-                <a:spcPts val="1050"/>
-              </a:lnSpc>
-              <a:spcAft>
-                <a:spcPts val="400"/>
-              </a:spcAft>
-              <a:buSzPct val="100000"/>
-              <a:buChar char="•"/>
-            </a:pPr>
-            <a:r>
-              <a:rPr lang="en-US" sz="1000">
-                <a:solidFill>
-                  <a:srgbClr val="3A4453"/>
-                </a:solidFill>
-              </a:rPr>
-              <a:t>Contractor spending generally changes with project demand and resourcing requirements.</a:t>
-            </a:r>
-            <a:endParaRPr lang="en-US" sz="850"/>
-          </a:p>
-          <a:p>
-            <a:pPr marL="342900" indent="-342900">
-              <a:lnSpc>
-                <a:spcPts val="1050"/>
-              </a:lnSpc>
-              <a:spcAft>
-                <a:spcPts val="400"/>
-              </a:spcAft>
-              <a:buSzPct val="100000"/>
-              <a:buChar char="•"/>
-            </a:pPr>
-            <a:r>
-              <a:rPr lang="en-US" sz="1000">
-                <a:solidFill>
-                  <a:srgbClr val="3A4453"/>
-                </a:solidFill>
-              </a:rPr>
-              <a:t>Reviewing contractor costs alongside staff utilisation will help identify opportunities to use existing capacity.</a:t>
-            </a:r>
-            <a:endParaRPr lang="en-US" sz="850"/>
-          </a:p>
-          <a:p>
-            <a:pPr marL="342900" indent="-342900">
-              <a:lnSpc>
-                <a:spcPts val="1050"/>
-              </a:lnSpc>
-              <a:spcAft>
-                <a:spcPts val="400"/>
-              </a:spcAft>
-              <a:buSzPct val="100000"/>
-              <a:buChar char="•"/>
-            </a:pPr>
-            <a:r>
-              <a:rPr lang="en-US" sz="1000">
-                <a:solidFill>
-                  <a:srgbClr val="3A4453"/>
-                </a:solidFill>
-              </a:rPr>
-              <a:t>Improving the proportion of working hours that can be billed is important for protecting margins.</a:t>
-            </a:r>
-            <a:endParaRPr lang="en-US" sz="850"/>
-          </a:p>
-        </p:txBody>
-      </p:sp>
-      <p:sp>
-        <p:nvSpPr>
-          <p:cNvPr id="25" name="Slide Number Placeholder 0"/>
-          <p:cNvSpPr>
-            <a:spLocks noGrp="1"/>
-          </p:cNvSpPr>
-          <p:nvPr>
-            <p:ph type="sldNum" sz="quarter" idx="4294967295"/>
-          </p:nvPr>
-        </p:nvSpPr>
-        <p:spPr>
-          <a:xfrm>
-            <a:off x="8092440" y="4736592"/>
-            <a:ext cx="548640" cy="228600"/>
-          </a:xfrm>
-          <a:prstGeom prst="rect">
-            <a:avLst/>
-          </a:prstGeom>
-          <a:extLst>
-            <a:ext uri="{C572A759-6A51-4108-AA02-DFA0A04FC94B}">
-              <ma14:wrappingTextBoxFlag xmlns:ma14="http://schemas.microsoft.com/office/mac/drawingml/2011/main" xmlns="" val="0"/>
-            </a:ext>
-          </a:extLst>
-        </p:spPr>
-        <p:txBody>
-          <a:bodyPr/>
-          <a:lstStyle>
-            <a:lvl1pPr>
-              <a:defRPr sz="800">
-                <a:solidFill>
-                  <a:srgbClr val="6B7585"/>
-                </a:solidFill>
-              </a:defRPr>
-            </a:lvl1pPr>
-          </a:lstStyle>
-          <a:p>
-            <a:pPr algn="r"/>
-            <a:fld id="{F7021451-1387-4CA6-816F-3879F97B5CBC}" type="slidenum">
-              <a:rPr lang="en-US" b="0"/>
-              <a:t>18</a:t>
             </a:fld>
             <a:endParaRPr lang="en-US"/>
           </a:p>
@@ -10150,6 +10143,388 @@
 
 <file path=ppt/slides/slide20.xml><?xml version="1.0" encoding="utf-8"?>
 <p:sld xmlns:a="http://schemas.openxmlformats.org/drawingml/2006/main" xmlns:r="http://schemas.openxmlformats.org/officeDocument/2006/relationships" xmlns:p="http://schemas.openxmlformats.org/presentationml/2006/main">
+  <p:cSld name="Slide 18">
+    <p:spTree>
+      <p:nvGrpSpPr>
+        <p:cNvPr id="1" name=""/>
+        <p:cNvGrpSpPr/>
+        <p:nvPr/>
+      </p:nvGrpSpPr>
+      <p:grpSpPr>
+        <a:xfrm>
+          <a:off x="0" y="0"/>
+          <a:ext cx="0" cy="0"/>
+          <a:chOff x="0" y="0"/>
+          <a:chExt cx="0" cy="0"/>
+        </a:xfrm>
+      </p:grpSpPr>
+      <p:sp>
+        <p:nvSpPr>
+          <p:cNvPr id="2" name="Text 0"/>
+          <p:cNvSpPr txBox="1"/>
+          <p:nvPr/>
+        </p:nvSpPr>
+        <p:spPr>
+          <a:xfrm>
+            <a:off x="502920" y="365760"/>
+            <a:ext cx="6400800" cy="274320"/>
+          </a:xfrm>
+          <a:prstGeom prst="rect">
+            <a:avLst/>
+          </a:prstGeom>
+          <a:noFill/>
+          <a:ln/>
+        </p:spPr>
+        <p:txBody>
+          <a:bodyPr wrap="square" lIns="0" tIns="0" rIns="0" bIns="0" rtlCol="0" anchor="ctr"/>
+          <a:lstStyle/>
+          <a:p>
+            <a:pPr marL="0" indent="0">
+              <a:buNone/>
+            </a:pPr>
+            <a:r>
+              <a:rPr lang="en-US" sz="950" b="1" kern="0" spc="220">
+                <a:solidFill>
+                  <a:srgbClr val="122B82"/>
+                </a:solidFill>
+              </a:rPr>
+              <a:t>WHAT WE SPEND</a:t>
+            </a:r>
+            <a:endParaRPr lang="en-US" sz="950"/>
+          </a:p>
+        </p:txBody>
+      </p:sp>
+      <p:sp>
+        <p:nvSpPr>
+          <p:cNvPr id="3" name="Text 1"/>
+          <p:cNvSpPr txBox="1"/>
+          <p:nvPr/>
+        </p:nvSpPr>
+        <p:spPr>
+          <a:xfrm>
+            <a:off x="502920" y="640080"/>
+            <a:ext cx="7315200" cy="685800"/>
+          </a:xfrm>
+          <a:prstGeom prst="rect">
+            <a:avLst/>
+          </a:prstGeom>
+          <a:noFill/>
+          <a:ln/>
+        </p:spPr>
+        <p:txBody>
+          <a:bodyPr wrap="square" lIns="0" tIns="0" rIns="0" bIns="0" rtlCol="0" anchor="ctr"/>
+          <a:lstStyle/>
+          <a:p>
+            <a:pPr marL="0" indent="0">
+              <a:buNone/>
+            </a:pPr>
+            <a:r>
+              <a:rPr lang="en-US" sz="2200" b="1">
+                <a:solidFill>
+                  <a:srgbClr val="242C39"/>
+                </a:solidFill>
+              </a:rPr>
+              <a:t>Labour mix, year to date</a:t>
+            </a:r>
+            <a:endParaRPr lang="en-US" sz="2700"/>
+          </a:p>
+        </p:txBody>
+      </p:sp>
+      <p:pic>
+        <p:nvPicPr>
+          <p:cNvPr id="4" name="snip labour_mix" descr="/home/user/Claude/deck/snips/labour_mix.png"/>
+          <p:cNvPicPr>
+            <a:picLocks noChangeAspect="1"/>
+          </p:cNvPicPr>
+          <p:nvPr/>
+        </p:nvPicPr>
+        <p:blipFill>
+          <a:blip r:embed="rId3"/>
+          <a:stretch>
+            <a:fillRect/>
+          </a:stretch>
+        </p:blipFill>
+        <p:spPr>
+          <a:xfrm>
+            <a:off x="502920" y="1444752"/>
+            <a:ext cx="4892039" cy="2912327"/>
+          </a:xfrm>
+          <a:prstGeom prst="rect">
+            <a:avLst/>
+          </a:prstGeom>
+        </p:spPr>
+      </p:pic>
+      <p:sp>
+        <p:nvSpPr>
+          <p:cNvPr id="6" name="commentary panel"/>
+          <p:cNvSpPr/>
+          <p:nvPr/>
+        </p:nvSpPr>
+        <p:spPr>
+          <a:xfrm>
+            <a:off x="5623559" y="1463040"/>
+            <a:ext cx="3017520" cy="3154680"/>
+          </a:xfrm>
+          <a:prstGeom prst="rect">
+            <a:avLst/>
+          </a:prstGeom>
+          <a:solidFill>
+            <a:srgbClr val="E8F9F8"/>
+          </a:solidFill>
+          <a:ln/>
+        </p:spPr>
+        <p:txBody>
+          <a:bodyPr/>
+          <a:lstStyle/>
+          <a:p>
+            <a:endParaRPr lang="en-AU"/>
+          </a:p>
+        </p:txBody>
+      </p:sp>
+      <p:sp>
+        <p:nvSpPr>
+          <p:cNvPr id="7" name="Text 4"/>
+          <p:cNvSpPr txBox="1"/>
+          <p:nvPr/>
+        </p:nvSpPr>
+        <p:spPr>
+          <a:xfrm>
+            <a:off x="5806439" y="1627632"/>
+            <a:ext cx="2651760" cy="228600"/>
+          </a:xfrm>
+          <a:prstGeom prst="rect">
+            <a:avLst/>
+          </a:prstGeom>
+          <a:noFill/>
+          <a:ln/>
+        </p:spPr>
+        <p:txBody>
+          <a:bodyPr wrap="square" lIns="0" tIns="0" rIns="0" bIns="0" rtlCol="0" anchor="ctr"/>
+          <a:lstStyle/>
+          <a:p>
+            <a:pPr marL="0" indent="0">
+              <a:buNone/>
+            </a:pPr>
+            <a:r>
+              <a:rPr lang="en-US" sz="900" b="1" kern="0" spc="180">
+                <a:solidFill>
+                  <a:srgbClr val="005358"/>
+                </a:solidFill>
+              </a:rPr>
+              <a:t>COMMENTARY</a:t>
+            </a:r>
+            <a:endParaRPr lang="en-US" sz="900"/>
+          </a:p>
+        </p:txBody>
+      </p:sp>
+      <p:sp>
+        <p:nvSpPr>
+          <p:cNvPr id="8" name="Text 5"/>
+          <p:cNvSpPr txBox="1"/>
+          <p:nvPr/>
+        </p:nvSpPr>
+        <p:spPr>
+          <a:xfrm>
+            <a:off x="5806439" y="1901952"/>
+            <a:ext cx="2651760" cy="2706623"/>
+          </a:xfrm>
+          <a:prstGeom prst="rect">
+            <a:avLst/>
+          </a:prstGeom>
+          <a:noFill/>
+          <a:ln/>
+        </p:spPr>
+        <p:txBody>
+          <a:bodyPr wrap="square" lIns="0" tIns="0" rIns="0" bIns="0" rtlCol="0" anchor="t">
+            <a:normAutofit/>
+          </a:bodyPr>
+          <a:lstStyle/>
+          <a:p>
+            <a:pPr marL="342900" indent="-342900">
+              <a:lnSpc>
+                <a:spcPts val="1050"/>
+              </a:lnSpc>
+              <a:spcAft>
+                <a:spcPts val="400"/>
+              </a:spcAft>
+              <a:buSzPct val="100000"/>
+              <a:buChar char="•"/>
+            </a:pPr>
+            <a:r>
+              <a:rPr lang="en-US" sz="1000">
+                <a:solidFill>
+                  <a:srgbClr val="3A4453"/>
+                </a:solidFill>
+              </a:rPr>
+              <a:t>Direct labour consists of employee costs and external contractors or service hires.</a:t>
+            </a:r>
+            <a:endParaRPr lang="en-US" sz="850"/>
+          </a:p>
+          <a:p>
+            <a:pPr marL="342900" indent="-342900">
+              <a:lnSpc>
+                <a:spcPts val="1050"/>
+              </a:lnSpc>
+              <a:spcAft>
+                <a:spcPts val="400"/>
+              </a:spcAft>
+              <a:buSzPct val="100000"/>
+              <a:buChar char="•"/>
+            </a:pPr>
+            <a:r>
+              <a:rPr lang="en-US" sz="1000">
+                <a:solidFill>
+                  <a:srgbClr val="3A4453"/>
+                </a:solidFill>
+              </a:rPr>
+              <a:t>Employee salaries, wages and superannuation account for most direct labour costs.</a:t>
+            </a:r>
+            <a:endParaRPr lang="en-US" sz="850"/>
+          </a:p>
+          <a:p>
+            <a:pPr marL="342900" indent="-342900">
+              <a:lnSpc>
+                <a:spcPts val="1050"/>
+              </a:lnSpc>
+              <a:spcAft>
+                <a:spcPts val="400"/>
+              </a:spcAft>
+              <a:buSzPct val="100000"/>
+              <a:buChar char="•"/>
+            </a:pPr>
+            <a:r>
+              <a:rPr lang="en-US" sz="1000">
+                <a:solidFill>
+                  <a:srgbClr val="3A4453"/>
+                </a:solidFill>
+              </a:rPr>
+              <a:t>Contractor spending generally changes with project demand and resourcing requirements.</a:t>
+            </a:r>
+            <a:endParaRPr lang="en-US" sz="850"/>
+          </a:p>
+          <a:p>
+            <a:pPr marL="342900" indent="-342900">
+              <a:lnSpc>
+                <a:spcPts val="1050"/>
+              </a:lnSpc>
+              <a:spcAft>
+                <a:spcPts val="400"/>
+              </a:spcAft>
+              <a:buSzPct val="100000"/>
+              <a:buChar char="•"/>
+            </a:pPr>
+            <a:r>
+              <a:rPr lang="en-US" sz="1000">
+                <a:solidFill>
+                  <a:srgbClr val="3A4453"/>
+                </a:solidFill>
+              </a:rPr>
+              <a:t>Reviewing contractor costs alongside staff utilisation will help identify opportunities to use existing capacity.</a:t>
+            </a:r>
+            <a:endParaRPr lang="en-US" sz="850"/>
+          </a:p>
+          <a:p>
+            <a:pPr marL="342900" indent="-342900">
+              <a:lnSpc>
+                <a:spcPts val="1050"/>
+              </a:lnSpc>
+              <a:spcAft>
+                <a:spcPts val="400"/>
+              </a:spcAft>
+              <a:buSzPct val="100000"/>
+              <a:buChar char="•"/>
+            </a:pPr>
+            <a:r>
+              <a:rPr lang="en-US" sz="1000">
+                <a:solidFill>
+                  <a:srgbClr val="3A4453"/>
+                </a:solidFill>
+              </a:rPr>
+              <a:t>Improving the proportion of working hours that can be billed is important for protecting margins.</a:t>
+            </a:r>
+            <a:endParaRPr lang="en-US" sz="850"/>
+          </a:p>
+        </p:txBody>
+      </p:sp>
+      <p:sp>
+        <p:nvSpPr>
+          <p:cNvPr id="25" name="Slide Number Placeholder 0"/>
+          <p:cNvSpPr>
+            <a:spLocks noGrp="1"/>
+          </p:cNvSpPr>
+          <p:nvPr>
+            <p:ph type="sldNum" sz="quarter" idx="4294967295"/>
+          </p:nvPr>
+        </p:nvSpPr>
+        <p:spPr>
+          <a:xfrm>
+            <a:off x="8092440" y="4736592"/>
+            <a:ext cx="548640" cy="228600"/>
+          </a:xfrm>
+          <a:prstGeom prst="rect">
+            <a:avLst/>
+          </a:prstGeom>
+          <a:extLst>
+            <a:ext uri="{C572A759-6A51-4108-AA02-DFA0A04FC94B}">
+              <ma14:wrappingTextBoxFlag xmlns:ma14="http://schemas.microsoft.com/office/mac/drawingml/2011/main" xmlns="" val="0"/>
+            </a:ext>
+          </a:extLst>
+        </p:spPr>
+        <p:txBody>
+          <a:bodyPr/>
+          <a:lstStyle>
+            <a:lvl1pPr>
+              <a:defRPr sz="800">
+                <a:solidFill>
+                  <a:srgbClr val="6B7585"/>
+                </a:solidFill>
+              </a:defRPr>
+            </a:lvl1pPr>
+          </a:lstStyle>
+          <a:p>
+            <a:pPr algn="r"/>
+            <a:fld id="{F7021451-1387-4CA6-816F-3879F97B5CBC}" type="slidenum">
+              <a:rPr lang="en-US" b="0"/>
+              <a:t>18</a:t>
+            </a:fld>
+            <a:endParaRPr lang="en-US"/>
+          </a:p>
+        </p:txBody>
+      </p:sp>
+      <p:pic>
+        <p:nvPicPr>
+          <p:cNvPr id="26" name="cts logo" descr="cts-logo.png"/>
+          <p:cNvPicPr>
+            <a:picLocks noChangeAspect="1"/>
+          </p:cNvPicPr>
+          <p:nvPr/>
+        </p:nvPicPr>
+        <p:blipFill>
+          <a:blip r:embed="rId4"/>
+          <a:stretch>
+            <a:fillRect/>
+          </a:stretch>
+        </p:blipFill>
+        <p:spPr>
+          <a:xfrm>
+            <a:off x="7680959" y="182880"/>
+            <a:ext cx="960120" cy="539696"/>
+          </a:xfrm>
+          <a:prstGeom prst="rect">
+            <a:avLst/>
+          </a:prstGeom>
+        </p:spPr>
+      </p:pic>
+    </p:spTree>
+  </p:cSld>
+  <p:clrMapOvr>
+    <a:masterClrMapping/>
+  </p:clrMapOvr>
+</p:sld>
+</file>
+
+<file path=ppt/slides/slide21.xml><?xml version="1.0" encoding="utf-8"?>
+<p:sld xmlns:a="http://schemas.openxmlformats.org/drawingml/2006/main" xmlns:r="http://schemas.openxmlformats.org/officeDocument/2006/relationships" xmlns:p="http://schemas.openxmlformats.org/presentationml/2006/main">
   <p:cSld name="Slide 19">
     <p:spTree>
       <p:nvGrpSpPr>
@@ -10533,7 +10908,7 @@
 </p:sld>
 </file>
 
-<file path=ppt/slides/slide21.xml><?xml version="1.0" encoding="utf-8"?>
+<file path=ppt/slides/slide22.xml><?xml version="1.0" encoding="utf-8"?>
 <p:sld xmlns:a="http://schemas.openxmlformats.org/drawingml/2006/main" xmlns:r="http://schemas.openxmlformats.org/officeDocument/2006/relationships" xmlns:p="http://schemas.openxmlformats.org/presentationml/2006/main">
   <p:cSld name="Slide 20">
     <p:spTree>
@@ -10816,7 +11191,7 @@
 </p:sld>
 </file>
 
-<file path=ppt/slides/slide22.xml><?xml version="1.0" encoding="utf-8"?>
+<file path=ppt/slides/slide23.xml><?xml version="1.0" encoding="utf-8"?>
 <p:sld xmlns:a="http://schemas.openxmlformats.org/drawingml/2006/main" xmlns:r="http://schemas.openxmlformats.org/officeDocument/2006/relationships" xmlns:p="http://schemas.openxmlformats.org/presentationml/2006/main">
   <p:cSld name="Slide 21">
     <p:spTree>
@@ -11198,7 +11573,7 @@
 </p:sld>
 </file>
 
-<file path=ppt/slides/slide23.xml><?xml version="1.0" encoding="utf-8"?>
+<file path=ppt/slides/slide24.xml><?xml version="1.0" encoding="utf-8"?>
 <p:sld xmlns:a="http://schemas.openxmlformats.org/drawingml/2006/main" xmlns:r="http://schemas.openxmlformats.org/officeDocument/2006/relationships" xmlns:p="http://schemas.openxmlformats.org/presentationml/2006/main">
   <p:cSld name="Slide 22">
     <p:spTree>
@@ -11580,7 +11955,7 @@
 </p:sld>
 </file>
 
-<file path=ppt/slides/slide24.xml><?xml version="1.0" encoding="utf-8"?>
+<file path=ppt/slides/slide25.xml><?xml version="1.0" encoding="utf-8"?>
 <p:sld xmlns:a="http://schemas.openxmlformats.org/drawingml/2006/main" xmlns:r="http://schemas.openxmlformats.org/officeDocument/2006/relationships" xmlns:p="http://schemas.openxmlformats.org/presentationml/2006/main">
   <p:cSld name="Slide 23">
     <p:spTree>
@@ -11962,7 +12337,7 @@
 </p:sld>
 </file>
 
-<file path=ppt/slides/slide25.xml><?xml version="1.0" encoding="utf-8"?>
+<file path=ppt/slides/slide26.xml><?xml version="1.0" encoding="utf-8"?>
 <p:sld xmlns:a="http://schemas.openxmlformats.org/drawingml/2006/main" xmlns:r="http://schemas.openxmlformats.org/officeDocument/2006/relationships" xmlns:p="http://schemas.openxmlformats.org/presentationml/2006/main">
   <p:cSld name="Slide 24">
     <p:spTree>
@@ -12245,7 +12620,7 @@
 </p:sld>
 </file>
 
-<file path=ppt/slides/slide26.xml><?xml version="1.0" encoding="utf-8"?>
+<file path=ppt/slides/slide27.xml><?xml version="1.0" encoding="utf-8"?>
 <p:sld xmlns:a="http://schemas.openxmlformats.org/drawingml/2006/main" xmlns:r="http://schemas.openxmlformats.org/officeDocument/2006/relationships" xmlns:p="http://schemas.openxmlformats.org/presentationml/2006/main">
   <p:cSld name="Slide 25">
     <p:spTree>
@@ -12630,7 +13005,7 @@
 </p:sld>
 </file>
 
-<file path=ppt/slides/slide27.xml><?xml version="1.0" encoding="utf-8"?>
+<file path=ppt/slides/slide28.xml><?xml version="1.0" encoding="utf-8"?>
 <p:sld xmlns:a="http://schemas.openxmlformats.org/drawingml/2006/main" xmlns:r="http://schemas.openxmlformats.org/officeDocument/2006/relationships" xmlns:p="http://schemas.openxmlformats.org/presentationml/2006/main">
   <p:cSld name="Slide 26">
     <p:spTree>
@@ -13012,7 +13387,7 @@
 </p:sld>
 </file>
 
-<file path=ppt/slides/slide28.xml><?xml version="1.0" encoding="utf-8"?>
+<file path=ppt/slides/slide29.xml><?xml version="1.0" encoding="utf-8"?>
 <p:sld xmlns:a="http://schemas.openxmlformats.org/drawingml/2006/main" xmlns:r="http://schemas.openxmlformats.org/officeDocument/2006/relationships" xmlns:p="http://schemas.openxmlformats.org/presentationml/2006/main">
   <p:cSld name="Slide 27">
     <p:spTree>
@@ -13386,289 +13761,6 @@
           </a:prstGeom>
         </p:spPr>
       </p:pic>
-    </p:spTree>
-  </p:cSld>
-  <p:clrMapOvr>
-    <a:masterClrMapping/>
-  </p:clrMapOvr>
-</p:sld>
-</file>
-
-<file path=ppt/slides/slide29.xml><?xml version="1.0" encoding="utf-8"?>
-<p:sld xmlns:a="http://schemas.openxmlformats.org/drawingml/2006/main" xmlns:r="http://schemas.openxmlformats.org/officeDocument/2006/relationships" xmlns:p="http://schemas.openxmlformats.org/presentationml/2006/main">
-  <p:cSld name="Slide 28">
-    <p:spTree>
-      <p:nvGrpSpPr>
-        <p:cNvPr id="1" name=""/>
-        <p:cNvGrpSpPr/>
-        <p:nvPr/>
-      </p:nvGrpSpPr>
-      <p:grpSpPr>
-        <a:xfrm>
-          <a:off x="0" y="0"/>
-          <a:ext cx="0" cy="0"/>
-          <a:chOff x="0" y="0"/>
-          <a:chExt cx="0" cy="0"/>
-        </a:xfrm>
-      </p:grpSpPr>
-      <p:sp>
-        <p:nvSpPr>
-          <p:cNvPr id="2" name="dot 2"/>
-          <p:cNvSpPr/>
-          <p:nvPr/>
-        </p:nvSpPr>
-        <p:spPr>
-          <a:xfrm>
-            <a:off x="6263640" y="2971800"/>
-            <a:ext cx="2240280" cy="2240280"/>
-          </a:xfrm>
-          <a:prstGeom prst="ellipse">
-            <a:avLst/>
-          </a:prstGeom>
-          <a:solidFill>
-            <a:srgbClr val="F33844">
-              <a:alpha val="55000"/>
-            </a:srgbClr>
-          </a:solidFill>
-          <a:ln/>
-        </p:spPr>
-        <p:txBody>
-          <a:bodyPr/>
-          <a:lstStyle/>
-          <a:p>
-            <a:endParaRPr lang="en-AU"/>
-          </a:p>
-        </p:txBody>
-      </p:sp>
-      <p:sp>
-        <p:nvSpPr>
-          <p:cNvPr id="2" name="dot 1"/>
-          <p:cNvSpPr/>
-          <p:nvPr/>
-        </p:nvSpPr>
-        <p:spPr>
-          <a:xfrm>
-            <a:off x="6995159" y="2103120"/>
-            <a:ext cx="1783080" cy="1783080"/>
-          </a:xfrm>
-          <a:prstGeom prst="ellipse">
-            <a:avLst/>
-          </a:prstGeom>
-          <a:solidFill>
-            <a:srgbClr val="6D71FF">
-              <a:alpha val="55000"/>
-            </a:srgbClr>
-          </a:solidFill>
-          <a:ln/>
-        </p:spPr>
-        <p:txBody>
-          <a:bodyPr/>
-          <a:lstStyle/>
-          <a:p>
-            <a:endParaRPr lang="en-AU"/>
-          </a:p>
-        </p:txBody>
-      </p:sp>
-      <p:sp>
-        <p:nvSpPr>
-          <p:cNvPr id="2" name="dot 0"/>
-          <p:cNvSpPr/>
-          <p:nvPr/>
-        </p:nvSpPr>
-        <p:spPr>
-          <a:xfrm>
-            <a:off x="6035040" y="1188720"/>
-            <a:ext cx="2148840" cy="2148840"/>
-          </a:xfrm>
-          <a:prstGeom prst="ellipse">
-            <a:avLst/>
-          </a:prstGeom>
-          <a:solidFill>
-            <a:srgbClr val="3FD0C9">
-              <a:alpha val="55000"/>
-            </a:srgbClr>
-          </a:solidFill>
-          <a:ln/>
-        </p:spPr>
-        <p:txBody>
-          <a:bodyPr/>
-          <a:lstStyle/>
-          <a:p>
-            <a:endParaRPr lang="en-AU"/>
-          </a:p>
-        </p:txBody>
-      </p:sp>
-      <p:sp>
-        <p:nvSpPr>
-          <p:cNvPr id="3" name="Shape 1"/>
-          <p:cNvSpPr/>
-          <p:nvPr/>
-        </p:nvSpPr>
-        <p:spPr>
-          <a:xfrm>
-            <a:off x="502920" y="1874520"/>
-            <a:ext cx="868680" cy="868680"/>
-          </a:xfrm>
-          <a:prstGeom prst="rect">
-            <a:avLst/>
-          </a:prstGeom>
-          <a:solidFill>
-            <a:srgbClr val="3FD0C9"/>
-          </a:solidFill>
-          <a:ln/>
-        </p:spPr>
-        <p:txBody>
-          <a:bodyPr/>
-          <a:lstStyle/>
-          <a:p>
-            <a:endParaRPr lang="en-AU"/>
-          </a:p>
-        </p:txBody>
-      </p:sp>
-      <p:sp>
-        <p:nvSpPr>
-          <p:cNvPr id="4" name="Text 2"/>
-          <p:cNvSpPr txBox="1"/>
-          <p:nvPr/>
-        </p:nvSpPr>
-        <p:spPr>
-          <a:xfrm>
-            <a:off x="502920" y="1874520"/>
-            <a:ext cx="868680" cy="868680"/>
-          </a:xfrm>
-          <a:prstGeom prst="rect">
-            <a:avLst/>
-          </a:prstGeom>
-          <a:noFill/>
-          <a:ln/>
-        </p:spPr>
-        <p:txBody>
-          <a:bodyPr wrap="square" lIns="0" tIns="0" rIns="0" bIns="0" rtlCol="0" anchor="ctr"/>
-          <a:lstStyle/>
-          <a:p>
-            <a:pPr marL="0" indent="0" algn="ctr">
-              <a:buNone/>
-            </a:pPr>
-            <a:r>
-              <a:rPr lang="en-US" sz="2200" b="1">
-                <a:solidFill>
-                  <a:srgbClr val="242C39"/>
-                </a:solidFill>
-              </a:rPr>
-              <a:t>05</a:t>
-            </a:r>
-            <a:endParaRPr lang="en-US" sz="2600"/>
-          </a:p>
-        </p:txBody>
-      </p:sp>
-      <p:sp>
-        <p:nvSpPr>
-          <p:cNvPr id="5" name="Text 3"/>
-          <p:cNvSpPr txBox="1"/>
-          <p:nvPr/>
-        </p:nvSpPr>
-        <p:spPr>
-          <a:xfrm>
-            <a:off x="502920" y="411480"/>
-            <a:ext cx="3657600" cy="274320"/>
-          </a:xfrm>
-          <a:prstGeom prst="rect">
-            <a:avLst/>
-          </a:prstGeom>
-          <a:noFill/>
-          <a:ln/>
-        </p:spPr>
-        <p:txBody>
-          <a:bodyPr wrap="square" lIns="0" tIns="0" rIns="0" bIns="0" rtlCol="0" anchor="ctr"/>
-          <a:lstStyle/>
-          <a:p>
-            <a:pPr marL="0" indent="0">
-              <a:buNone/>
-            </a:pPr>
-            <a:r>
-              <a:rPr lang="en-US" sz="950" b="1" kern="0" spc="220">
-                <a:solidFill>
-                  <a:srgbClr val="3FD0C9"/>
-                </a:solidFill>
-              </a:rPr>
-              <a:t>SECTION</a:t>
-            </a:r>
-            <a:endParaRPr lang="en-US" sz="950"/>
-          </a:p>
-        </p:txBody>
-      </p:sp>
-      <p:sp>
-        <p:nvSpPr>
-          <p:cNvPr id="6" name="Text 4"/>
-          <p:cNvSpPr txBox="1"/>
-          <p:nvPr/>
-        </p:nvSpPr>
-        <p:spPr>
-          <a:xfrm>
-            <a:off x="1600200" y="1874520"/>
-            <a:ext cx="5943600" cy="502920"/>
-          </a:xfrm>
-          <a:prstGeom prst="rect">
-            <a:avLst/>
-          </a:prstGeom>
-          <a:noFill/>
-          <a:ln/>
-        </p:spPr>
-        <p:txBody>
-          <a:bodyPr wrap="square" lIns="0" tIns="0" rIns="0" bIns="0" rtlCol="0" anchor="ctr"/>
-          <a:lstStyle/>
-          <a:p>
-            <a:pPr marL="0" indent="0">
-              <a:buNone/>
-            </a:pPr>
-            <a:r>
-              <a:rPr lang="en-US" sz="2300" b="1">
-                <a:solidFill>
-                  <a:srgbClr val="FFFFFF"/>
-                </a:solidFill>
-              </a:rPr>
-              <a:t>Budget and outlook</a:t>
-            </a:r>
-            <a:endParaRPr lang="en-US" sz="2800"/>
-          </a:p>
-        </p:txBody>
-      </p:sp>
-      <p:sp>
-        <p:nvSpPr>
-          <p:cNvPr id="7" name="Text 5"/>
-          <p:cNvSpPr txBox="1"/>
-          <p:nvPr/>
-        </p:nvSpPr>
-        <p:spPr>
-          <a:xfrm>
-            <a:off x="1600200" y="2395728"/>
-            <a:ext cx="5943600" cy="347472"/>
-          </a:xfrm>
-          <a:prstGeom prst="rect">
-            <a:avLst/>
-          </a:prstGeom>
-          <a:noFill/>
-          <a:ln/>
-        </p:spPr>
-        <p:txBody>
-          <a:bodyPr wrap="square" lIns="0" tIns="0" rIns="0" bIns="0" rtlCol="0" anchor="ctr"/>
-          <a:lstStyle/>
-          <a:p>
-            <a:pPr marL="0" indent="0">
-              <a:buNone/>
-            </a:pPr>
-            <a:r>
-              <a:rPr lang="en-US" sz="1200">
-                <a:solidFill>
-                  <a:srgbClr val="C9CED6"/>
-                </a:solidFill>
-              </a:rPr>
-              <a:t>What the rest of the year looks like and what we change</a:t>
-            </a:r>
-            <a:endParaRPr lang="en-US" sz="1200"/>
-          </a:p>
-        </p:txBody>
-      </p:sp>
     </p:spTree>
   </p:cSld>
   <p:clrMapOvr>
@@ -15931,6 +16023,289 @@
 
 <file path=ppt/slides/slide30.xml><?xml version="1.0" encoding="utf-8"?>
 <p:sld xmlns:a="http://schemas.openxmlformats.org/drawingml/2006/main" xmlns:r="http://schemas.openxmlformats.org/officeDocument/2006/relationships" xmlns:p="http://schemas.openxmlformats.org/presentationml/2006/main">
+  <p:cSld name="Slide 28">
+    <p:spTree>
+      <p:nvGrpSpPr>
+        <p:cNvPr id="1" name=""/>
+        <p:cNvGrpSpPr/>
+        <p:nvPr/>
+      </p:nvGrpSpPr>
+      <p:grpSpPr>
+        <a:xfrm>
+          <a:off x="0" y="0"/>
+          <a:ext cx="0" cy="0"/>
+          <a:chOff x="0" y="0"/>
+          <a:chExt cx="0" cy="0"/>
+        </a:xfrm>
+      </p:grpSpPr>
+      <p:sp>
+        <p:nvSpPr>
+          <p:cNvPr id="2" name="dot 2"/>
+          <p:cNvSpPr/>
+          <p:nvPr/>
+        </p:nvSpPr>
+        <p:spPr>
+          <a:xfrm>
+            <a:off x="6263640" y="2971800"/>
+            <a:ext cx="2240280" cy="2240280"/>
+          </a:xfrm>
+          <a:prstGeom prst="ellipse">
+            <a:avLst/>
+          </a:prstGeom>
+          <a:solidFill>
+            <a:srgbClr val="F33844">
+              <a:alpha val="55000"/>
+            </a:srgbClr>
+          </a:solidFill>
+          <a:ln/>
+        </p:spPr>
+        <p:txBody>
+          <a:bodyPr/>
+          <a:lstStyle/>
+          <a:p>
+            <a:endParaRPr lang="en-AU"/>
+          </a:p>
+        </p:txBody>
+      </p:sp>
+      <p:sp>
+        <p:nvSpPr>
+          <p:cNvPr id="2" name="dot 1"/>
+          <p:cNvSpPr/>
+          <p:nvPr/>
+        </p:nvSpPr>
+        <p:spPr>
+          <a:xfrm>
+            <a:off x="6995159" y="2103120"/>
+            <a:ext cx="1783080" cy="1783080"/>
+          </a:xfrm>
+          <a:prstGeom prst="ellipse">
+            <a:avLst/>
+          </a:prstGeom>
+          <a:solidFill>
+            <a:srgbClr val="6D71FF">
+              <a:alpha val="55000"/>
+            </a:srgbClr>
+          </a:solidFill>
+          <a:ln/>
+        </p:spPr>
+        <p:txBody>
+          <a:bodyPr/>
+          <a:lstStyle/>
+          <a:p>
+            <a:endParaRPr lang="en-AU"/>
+          </a:p>
+        </p:txBody>
+      </p:sp>
+      <p:sp>
+        <p:nvSpPr>
+          <p:cNvPr id="2" name="dot 0"/>
+          <p:cNvSpPr/>
+          <p:nvPr/>
+        </p:nvSpPr>
+        <p:spPr>
+          <a:xfrm>
+            <a:off x="6035040" y="1188720"/>
+            <a:ext cx="2148840" cy="2148840"/>
+          </a:xfrm>
+          <a:prstGeom prst="ellipse">
+            <a:avLst/>
+          </a:prstGeom>
+          <a:solidFill>
+            <a:srgbClr val="3FD0C9">
+              <a:alpha val="55000"/>
+            </a:srgbClr>
+          </a:solidFill>
+          <a:ln/>
+        </p:spPr>
+        <p:txBody>
+          <a:bodyPr/>
+          <a:lstStyle/>
+          <a:p>
+            <a:endParaRPr lang="en-AU"/>
+          </a:p>
+        </p:txBody>
+      </p:sp>
+      <p:sp>
+        <p:nvSpPr>
+          <p:cNvPr id="3" name="Shape 1"/>
+          <p:cNvSpPr/>
+          <p:nvPr/>
+        </p:nvSpPr>
+        <p:spPr>
+          <a:xfrm>
+            <a:off x="502920" y="1874520"/>
+            <a:ext cx="868680" cy="868680"/>
+          </a:xfrm>
+          <a:prstGeom prst="rect">
+            <a:avLst/>
+          </a:prstGeom>
+          <a:solidFill>
+            <a:srgbClr val="3FD0C9"/>
+          </a:solidFill>
+          <a:ln/>
+        </p:spPr>
+        <p:txBody>
+          <a:bodyPr/>
+          <a:lstStyle/>
+          <a:p>
+            <a:endParaRPr lang="en-AU"/>
+          </a:p>
+        </p:txBody>
+      </p:sp>
+      <p:sp>
+        <p:nvSpPr>
+          <p:cNvPr id="4" name="Text 2"/>
+          <p:cNvSpPr txBox="1"/>
+          <p:nvPr/>
+        </p:nvSpPr>
+        <p:spPr>
+          <a:xfrm>
+            <a:off x="502920" y="1874520"/>
+            <a:ext cx="868680" cy="868680"/>
+          </a:xfrm>
+          <a:prstGeom prst="rect">
+            <a:avLst/>
+          </a:prstGeom>
+          <a:noFill/>
+          <a:ln/>
+        </p:spPr>
+        <p:txBody>
+          <a:bodyPr wrap="square" lIns="0" tIns="0" rIns="0" bIns="0" rtlCol="0" anchor="ctr"/>
+          <a:lstStyle/>
+          <a:p>
+            <a:pPr marL="0" indent="0" algn="ctr">
+              <a:buNone/>
+            </a:pPr>
+            <a:r>
+              <a:rPr lang="en-US" sz="2200" b="1">
+                <a:solidFill>
+                  <a:srgbClr val="242C39"/>
+                </a:solidFill>
+              </a:rPr>
+              <a:t>05</a:t>
+            </a:r>
+            <a:endParaRPr lang="en-US" sz="2600"/>
+          </a:p>
+        </p:txBody>
+      </p:sp>
+      <p:sp>
+        <p:nvSpPr>
+          <p:cNvPr id="5" name="Text 3"/>
+          <p:cNvSpPr txBox="1"/>
+          <p:nvPr/>
+        </p:nvSpPr>
+        <p:spPr>
+          <a:xfrm>
+            <a:off x="502920" y="411480"/>
+            <a:ext cx="3657600" cy="274320"/>
+          </a:xfrm>
+          <a:prstGeom prst="rect">
+            <a:avLst/>
+          </a:prstGeom>
+          <a:noFill/>
+          <a:ln/>
+        </p:spPr>
+        <p:txBody>
+          <a:bodyPr wrap="square" lIns="0" tIns="0" rIns="0" bIns="0" rtlCol="0" anchor="ctr"/>
+          <a:lstStyle/>
+          <a:p>
+            <a:pPr marL="0" indent="0">
+              <a:buNone/>
+            </a:pPr>
+            <a:r>
+              <a:rPr lang="en-US" sz="950" b="1" kern="0" spc="220">
+                <a:solidFill>
+                  <a:srgbClr val="3FD0C9"/>
+                </a:solidFill>
+              </a:rPr>
+              <a:t>SECTION</a:t>
+            </a:r>
+            <a:endParaRPr lang="en-US" sz="950"/>
+          </a:p>
+        </p:txBody>
+      </p:sp>
+      <p:sp>
+        <p:nvSpPr>
+          <p:cNvPr id="6" name="Text 4"/>
+          <p:cNvSpPr txBox="1"/>
+          <p:nvPr/>
+        </p:nvSpPr>
+        <p:spPr>
+          <a:xfrm>
+            <a:off x="1600200" y="1874520"/>
+            <a:ext cx="5943600" cy="502920"/>
+          </a:xfrm>
+          <a:prstGeom prst="rect">
+            <a:avLst/>
+          </a:prstGeom>
+          <a:noFill/>
+          <a:ln/>
+        </p:spPr>
+        <p:txBody>
+          <a:bodyPr wrap="square" lIns="0" tIns="0" rIns="0" bIns="0" rtlCol="0" anchor="ctr"/>
+          <a:lstStyle/>
+          <a:p>
+            <a:pPr marL="0" indent="0">
+              <a:buNone/>
+            </a:pPr>
+            <a:r>
+              <a:rPr lang="en-US" sz="2300" b="1">
+                <a:solidFill>
+                  <a:srgbClr val="FFFFFF"/>
+                </a:solidFill>
+              </a:rPr>
+              <a:t>Budget and outlook</a:t>
+            </a:r>
+            <a:endParaRPr lang="en-US" sz="2800"/>
+          </a:p>
+        </p:txBody>
+      </p:sp>
+      <p:sp>
+        <p:nvSpPr>
+          <p:cNvPr id="7" name="Text 5"/>
+          <p:cNvSpPr txBox="1"/>
+          <p:nvPr/>
+        </p:nvSpPr>
+        <p:spPr>
+          <a:xfrm>
+            <a:off x="1600200" y="2395728"/>
+            <a:ext cx="5943600" cy="347472"/>
+          </a:xfrm>
+          <a:prstGeom prst="rect">
+            <a:avLst/>
+          </a:prstGeom>
+          <a:noFill/>
+          <a:ln/>
+        </p:spPr>
+        <p:txBody>
+          <a:bodyPr wrap="square" lIns="0" tIns="0" rIns="0" bIns="0" rtlCol="0" anchor="ctr"/>
+          <a:lstStyle/>
+          <a:p>
+            <a:pPr marL="0" indent="0">
+              <a:buNone/>
+            </a:pPr>
+            <a:r>
+              <a:rPr lang="en-US" sz="1200">
+                <a:solidFill>
+                  <a:srgbClr val="C9CED6"/>
+                </a:solidFill>
+              </a:rPr>
+              <a:t>What the rest of the year looks like and what we change</a:t>
+            </a:r>
+            <a:endParaRPr lang="en-US" sz="1200"/>
+          </a:p>
+        </p:txBody>
+      </p:sp>
+    </p:spTree>
+  </p:cSld>
+  <p:clrMapOvr>
+    <a:masterClrMapping/>
+  </p:clrMapOvr>
+</p:sld>
+</file>
+
+<file path=ppt/slides/slide31.xml><?xml version="1.0" encoding="utf-8"?>
+<p:sld xmlns:a="http://schemas.openxmlformats.org/drawingml/2006/main" xmlns:r="http://schemas.openxmlformats.org/officeDocument/2006/relationships" xmlns:p="http://schemas.openxmlformats.org/presentationml/2006/main">
   <p:cSld name="Slide 29">
     <p:spTree>
       <p:nvGrpSpPr>
@@ -16311,7 +16686,7 @@
 </p:sld>
 </file>
 
-<file path=ppt/slides/slide31.xml><?xml version="1.0" encoding="utf-8"?>
+<file path=ppt/slides/slide32.xml><?xml version="1.0" encoding="utf-8"?>
 <p:sld xmlns:a="http://schemas.openxmlformats.org/drawingml/2006/main" xmlns:r="http://schemas.openxmlformats.org/officeDocument/2006/relationships" xmlns:p="http://schemas.openxmlformats.org/presentationml/2006/main">
   <p:cSld name="Slide 30">
     <p:spTree>
@@ -18457,7 +18832,7 @@
 </p:sld>
 </file>
 
-<file path=ppt/slides/slide32.xml><?xml version="1.0" encoding="utf-8"?>
+<file path=ppt/slides/slide33.xml><?xml version="1.0" encoding="utf-8"?>
 <p:sld xmlns:a="http://schemas.openxmlformats.org/drawingml/2006/main" xmlns:r="http://schemas.openxmlformats.org/officeDocument/2006/relationships" xmlns:p="http://schemas.openxmlformats.org/presentationml/2006/main">
   <p:cSld>
     <p:bg>
@@ -18833,7 +19208,7 @@
 </p:sld>
 </file>
 
-<file path=ppt/slides/slide33.xml><?xml version="1.0" encoding="utf-8"?>
+<file path=ppt/slides/slide34.xml><?xml version="1.0" encoding="utf-8"?>
 <p:sld xmlns:a="http://schemas.openxmlformats.org/drawingml/2006/main" xmlns:r="http://schemas.openxmlformats.org/officeDocument/2006/relationships" xmlns:p="http://schemas.openxmlformats.org/presentationml/2006/main">
   <p:cSld name="Slide 31">
     <p:spTree>
@@ -19081,405 +19456,6 @@
           </a:p>
         </p:txBody>
       </p:sp>
-    </p:spTree>
-  </p:cSld>
-  <p:clrMapOvr>
-    <a:masterClrMapping/>
-  </p:clrMapOvr>
-</p:sld>
-</file>
-
-<file path=ppt/slides/slide34.xml><?xml version="1.0" encoding="utf-8"?>
-<p:sld xmlns:a="http://schemas.openxmlformats.org/drawingml/2006/main" xmlns:p="http://schemas.openxmlformats.org/presentationml/2006/main" xmlns:r="http://schemas.openxmlformats.org/officeDocument/2006/relationships">
-  <p:cSld>
-    <p:spTree>
-      <p:nvGrpSpPr>
-        <p:cNvPr id="1" name=""/>
-        <p:cNvGrpSpPr/>
-        <p:nvPr/>
-      </p:nvGrpSpPr>
-      <p:grpSpPr/>
-      <p:pic>
-        <p:nvPicPr>
-          <p:cNvPr id="27" name="snip rev_ytd" descr="rev_ytd.png"/>
-          <p:cNvPicPr>
-            <a:picLocks noChangeAspect="1"/>
-          </p:cNvPicPr>
-          <p:nvPr/>
-        </p:nvPicPr>
-        <p:blipFill>
-          <a:blip r:embed="rId3"/>
-          <a:stretch>
-            <a:fillRect/>
-          </a:stretch>
-        </p:blipFill>
-        <p:spPr>
-          <a:xfrm>
-            <a:off x="1485585" y="1115568"/>
-            <a:ext cx="6172828" cy="2005865"/>
-          </a:xfrm>
-          <a:prstGeom prst="rect">
-            <a:avLst/>
-          </a:prstGeom>
-        </p:spPr>
-      </p:pic>
-      <p:sp>
-        <p:nvSpPr>
-          <p:cNvPr id="2" name="Text 0"/>
-          <p:cNvSpPr txBox="1"/>
-          <p:nvPr/>
-        </p:nvSpPr>
-        <p:spPr>
-          <a:xfrm>
-            <a:off x="502920" y="365760"/>
-            <a:ext cx="6400800" cy="274320"/>
-          </a:xfrm>
-          <a:prstGeom prst="rect">
-            <a:avLst/>
-          </a:prstGeom>
-          <a:noFill/>
-          <a:ln/>
-        </p:spPr>
-        <p:txBody>
-          <a:bodyPr wrap="square" lIns="0" tIns="0" rIns="0" bIns="0" rtlCol="0" anchor="ctr"/>
-          <a:lstStyle/>
-          <a:p>
-            <a:pPr marL="0" indent="0">
-              <a:buNone/>
-            </a:pPr>
-            <a:r>
-              <a:rPr lang="en-US" sz="950" b="1" kern="0" spc="220">
-                <a:solidFill>
-                  <a:srgbClr val="122B82"/>
-                </a:solidFill>
-              </a:rPr>
-              <a:t>FINANCIAL PERFORMANCE</a:t>
-            </a:r>
-            <a:endParaRPr lang="en-US" sz="950"/>
-          </a:p>
-        </p:txBody>
-      </p:sp>
-      <p:sp>
-        <p:nvSpPr>
-          <p:cNvPr id="3" name="Text 1"/>
-          <p:cNvSpPr txBox="1"/>
-          <p:nvPr/>
-        </p:nvSpPr>
-        <p:spPr>
-          <a:xfrm>
-            <a:off x="502920" y="640080"/>
-            <a:ext cx="7315200" cy="685800"/>
-          </a:xfrm>
-          <a:prstGeom prst="rect">
-            <a:avLst/>
-          </a:prstGeom>
-          <a:noFill/>
-          <a:ln/>
-        </p:spPr>
-        <p:txBody>
-          <a:bodyPr wrap="square" lIns="0" tIns="0" rIns="0" bIns="0" rtlCol="0" anchor="ctr"/>
-          <a:lstStyle/>
-          <a:p>
-            <a:pPr marL="0" indent="0">
-              <a:buNone/>
-            </a:pPr>
-            <a:r>
-              <a:rPr lang="en-US" sz="2200" b="1">
-                <a:solidFill>
-                  <a:srgbClr val="242C39"/>
-                </a:solidFill>
-              </a:rPr>
-              <a:t>Revenue against budget, year to date</a:t>
-            </a:r>
-            <a:endParaRPr lang="en-US" sz="2700"/>
-          </a:p>
-        </p:txBody>
-      </p:sp>
-      <p:sp>
-        <p:nvSpPr>
-          <p:cNvPr id="6" name="commentary panel"/>
-          <p:cNvSpPr/>
-          <p:nvPr/>
-        </p:nvSpPr>
-        <p:spPr>
-          <a:xfrm>
-            <a:off x="502920" y="3231161"/>
-            <a:ext cx="8138160" cy="1395702"/>
-          </a:xfrm>
-          <a:prstGeom prst="rect">
-            <a:avLst/>
-          </a:prstGeom>
-          <a:solidFill>
-            <a:srgbClr val="E8F9F8"/>
-          </a:solidFill>
-          <a:ln/>
-        </p:spPr>
-        <p:txBody>
-          <a:bodyPr/>
-          <a:lstStyle/>
-          <a:p>
-            <a:endParaRPr lang="en-AU"/>
-          </a:p>
-        </p:txBody>
-      </p:sp>
-      <p:sp>
-        <p:nvSpPr>
-          <p:cNvPr id="7" name="Text 4"/>
-          <p:cNvSpPr txBox="1"/>
-          <p:nvPr/>
-        </p:nvSpPr>
-        <p:spPr>
-          <a:xfrm>
-            <a:off x="685800" y="3304313"/>
-            <a:ext cx="2743200" cy="228600"/>
-          </a:xfrm>
-          <a:prstGeom prst="rect">
-            <a:avLst/>
-          </a:prstGeom>
-          <a:noFill/>
-          <a:ln/>
-        </p:spPr>
-        <p:txBody>
-          <a:bodyPr wrap="square" lIns="0" tIns="0" rIns="0" bIns="0" rtlCol="0" anchor="ctr"/>
-          <a:lstStyle/>
-          <a:p>
-            <a:pPr marL="0" indent="0">
-              <a:buNone/>
-            </a:pPr>
-            <a:r>
-              <a:rPr lang="en-US" sz="900" b="1" kern="0" spc="180">
-                <a:solidFill>
-                  <a:srgbClr val="005358"/>
-                </a:solidFill>
-              </a:rPr>
-              <a:t>COMMENTARY</a:t>
-            </a:r>
-            <a:endParaRPr lang="en-US" sz="900"/>
-          </a:p>
-        </p:txBody>
-      </p:sp>
-      <p:sp>
-        <p:nvSpPr>
-          <p:cNvPr id="8" name="Text 5"/>
-          <p:cNvSpPr txBox="1"/>
-          <p:nvPr/>
-        </p:nvSpPr>
-        <p:spPr>
-          <a:xfrm>
-            <a:off x="685800" y="3478049"/>
-            <a:ext cx="3703320" cy="1121382"/>
-          </a:xfrm>
-          <a:prstGeom prst="rect">
-            <a:avLst/>
-          </a:prstGeom>
-          <a:noFill/>
-          <a:ln/>
-        </p:spPr>
-        <p:txBody>
-          <a:bodyPr wrap="square" lIns="0" tIns="0" rIns="0" bIns="0" rtlCol="0" anchor="t">
-            <a:normAutofit fontScale="85000" lnSpcReduction="10000"/>
-          </a:bodyPr>
-          <a:lstStyle/>
-          <a:p>
-            <a:pPr marL="342900" indent="-342900">
-              <a:lnSpc>
-                <a:spcPts val="1050"/>
-              </a:lnSpc>
-              <a:spcAft>
-                <a:spcPts val="400"/>
-              </a:spcAft>
-              <a:buSzPct val="100000"/>
-              <a:buChar char="•"/>
-            </a:pPr>
-            <a:r>
-              <a:rPr lang="en-US" sz="1000">
-                <a:solidFill>
-                  <a:srgbClr val="3A4453"/>
-                </a:solidFill>
-              </a:rPr>
-              <a:t>Year to date revenue is $1,624k against a budget of $1,996k, $372k short.</a:t>
-            </a:r>
-            <a:endParaRPr lang="en-US" sz="850"/>
-          </a:p>
-          <a:p>
-            <a:pPr marL="342900" indent="-342900">
-              <a:lnSpc>
-                <a:spcPts val="1050"/>
-              </a:lnSpc>
-              <a:spcAft>
-                <a:spcPts val="400"/>
-              </a:spcAft>
-              <a:buSzPct val="100000"/>
-              <a:buChar char="•"/>
-            </a:pPr>
-            <a:r>
-              <a:rPr lang="en-US" sz="1000">
-                <a:solidFill>
-                  <a:srgbClr val="3A4453"/>
-                </a:solidFill>
-              </a:rPr>
-              <a:t>Consulting is most of the gap: $4k billed against a $237k budget.</a:t>
-            </a:r>
-            <a:endParaRPr lang="en-US" sz="850"/>
-          </a:p>
-        </p:txBody>
-      </p:sp>
-      <p:sp>
-        <p:nvSpPr>
-          <p:cNvPr id="25" name="Slide Number Placeholder 0"/>
-          <p:cNvSpPr>
-            <a:spLocks noGrp="1"/>
-          </p:cNvSpPr>
-          <p:nvPr>
-            <p:ph type="sldNum" sz="quarter" idx="4294967295"/>
-          </p:nvPr>
-        </p:nvSpPr>
-        <p:spPr>
-          <a:xfrm>
-            <a:off x="8092440" y="4736592"/>
-            <a:ext cx="548640" cy="228600"/>
-          </a:xfrm>
-          <a:prstGeom prst="rect">
-            <a:avLst/>
-          </a:prstGeom>
-          <a:extLst>
-            <a:ext uri="{C572A759-6A51-4108-AA02-DFA0A04FC94B}">
-              <ma14:wrappingTextBoxFlag xmlns:ma14="http://schemas.microsoft.com/office/mac/drawingml/2011/main" xmlns="" val="0"/>
-            </a:ext>
-          </a:extLst>
-        </p:spPr>
-        <p:txBody>
-          <a:bodyPr/>
-          <a:lstStyle>
-            <a:lvl1pPr>
-              <a:defRPr sz="800">
-                <a:solidFill>
-                  <a:srgbClr val="6B7585"/>
-                </a:solidFill>
-              </a:defRPr>
-            </a:lvl1pPr>
-          </a:lstStyle>
-          <a:p>
-            <a:pPr algn="r"/>
-            <a:fld id="{F7021451-1387-4CA6-816F-3879F97B5CBC}" type="slidenum">
-              <a:rPr lang="en-US" b="0"/>
-              <a:t>16</a:t>
-            </a:fld>
-            <a:endParaRPr lang="en-US"/>
-          </a:p>
-        </p:txBody>
-      </p:sp>
-      <p:sp>
-        <p:nvSpPr>
-          <p:cNvPr id="8" name="Text 5b"/>
-          <p:cNvSpPr txBox="1"/>
-          <p:nvPr/>
-        </p:nvSpPr>
-        <p:spPr>
-          <a:xfrm>
-            <a:off x="4663440" y="3478049"/>
-            <a:ext cx="3703320" cy="1121382"/>
-          </a:xfrm>
-          <a:prstGeom prst="rect">
-            <a:avLst/>
-          </a:prstGeom>
-          <a:noFill/>
-          <a:ln/>
-        </p:spPr>
-        <p:txBody>
-          <a:bodyPr wrap="square" lIns="0" tIns="0" rIns="0" bIns="0" rtlCol="0" anchor="t">
-            <a:normAutofit fontScale="85000" lnSpcReduction="10000"/>
-          </a:bodyPr>
-          <a:lstStyle/>
-          <a:p>
-            <a:pPr marL="342900" indent="-342900">
-              <a:lnSpc>
-                <a:spcPts val="1050"/>
-              </a:lnSpc>
-              <a:spcAft>
-                <a:spcPts val="400"/>
-              </a:spcAft>
-              <a:buSzPct val="100000"/>
-              <a:buChar char="•"/>
-            </a:pPr>
-            <a:r>
-              <a:rPr lang="en-US" sz="1000">
-                <a:solidFill>
-                  <a:srgbClr val="3A4453"/>
-                </a:solidFill>
-              </a:rPr>
-              <a:t>Integration is $167k short and Video $45k short, both for a third month.</a:t>
-            </a:r>
-            <a:endParaRPr lang="en-US" sz="850"/>
-          </a:p>
-          <a:p>
-            <a:pPr marL="342900" indent="-342900">
-              <a:lnSpc>
-                <a:spcPts val="1050"/>
-              </a:lnSpc>
-              <a:spcAft>
-                <a:spcPts val="400"/>
-              </a:spcAft>
-              <a:buSzPct val="100000"/>
-              <a:buChar char="•"/>
-            </a:pPr>
-            <a:r>
-              <a:rPr lang="en-US" sz="1000">
-                <a:solidFill>
-                  <a:srgbClr val="3A4453"/>
-                </a:solidFill>
-              </a:rPr>
-              <a:t>Events is the only department ahead, $420k against a $322k budget.</a:t>
-            </a:r>
-            <a:endParaRPr lang="en-US" sz="850"/>
-          </a:p>
-          <a:p>
-            <a:pPr marL="342900" indent="-342900">
-              <a:lnSpc>
-                <a:spcPts val="1050"/>
-              </a:lnSpc>
-              <a:spcAft>
-                <a:spcPts val="400"/>
-              </a:spcAft>
-              <a:buSzPct val="100000"/>
-              <a:buChar char="•"/>
-            </a:pPr>
-            <a:r>
-              <a:rPr lang="en-US" sz="1000">
-                <a:solidFill>
-                  <a:srgbClr val="3A4453"/>
-                </a:solidFill>
-              </a:rPr>
-              <a:t>Support is within $25k of its $743k budget, which is the contract base behaving as it should.</a:t>
-            </a:r>
-            <a:endParaRPr lang="en-US" sz="850"/>
-          </a:p>
-        </p:txBody>
-      </p:sp>
-      <p:pic>
-        <p:nvPicPr>
-          <p:cNvPr id="26" name="cts logo" descr="image.png"/>
-          <p:cNvPicPr>
-            <a:picLocks noChangeAspect="1"/>
-          </p:cNvPicPr>
-          <p:nvPr/>
-        </p:nvPicPr>
-        <p:blipFill>
-          <a:blip r:embed="rId2"/>
-          <a:stretch>
-            <a:fillRect/>
-          </a:stretch>
-        </p:blipFill>
-        <p:spPr>
-          <a:xfrm>
-            <a:off x="7680959" y="182880"/>
-            <a:ext cx="960120" cy="539696"/>
-          </a:xfrm>
-          <a:prstGeom prst="rect">
-            <a:avLst/>
-          </a:prstGeom>
-        </p:spPr>
-      </p:pic>
     </p:spTree>
   </p:cSld>
   <p:clrMapOvr>
@@ -20577,6 +20553,405 @@
 </file>
 
 <file path=ppt/slides/slide7.xml><?xml version="1.0" encoding="utf-8"?>
+<p:sld xmlns:a="http://schemas.openxmlformats.org/drawingml/2006/main" xmlns:p="http://schemas.openxmlformats.org/presentationml/2006/main" xmlns:r="http://schemas.openxmlformats.org/officeDocument/2006/relationships">
+  <p:cSld>
+    <p:spTree>
+      <p:nvGrpSpPr>
+        <p:cNvPr id="1" name=""/>
+        <p:cNvGrpSpPr/>
+        <p:nvPr/>
+      </p:nvGrpSpPr>
+      <p:grpSpPr/>
+      <p:pic>
+        <p:nvPicPr>
+          <p:cNvPr id="27" name="snip rev_month_budget" descr="rev_ytd.png"/>
+          <p:cNvPicPr>
+            <a:picLocks noChangeAspect="1"/>
+          </p:cNvPicPr>
+          <p:nvPr/>
+        </p:nvPicPr>
+        <p:blipFill>
+          <a:blip r:embed="rId5"/>
+          <a:stretch>
+            <a:fillRect/>
+          </a:stretch>
+        </p:blipFill>
+        <p:spPr>
+          <a:xfrm>
+            <a:off x="1296646" y="1115568"/>
+            <a:ext cx="6550706" cy="2228790"/>
+          </a:xfrm>
+          <a:prstGeom prst="rect">
+            <a:avLst/>
+          </a:prstGeom>
+        </p:spPr>
+      </p:pic>
+      <p:sp>
+        <p:nvSpPr>
+          <p:cNvPr id="2" name="Text 0"/>
+          <p:cNvSpPr txBox="1"/>
+          <p:nvPr/>
+        </p:nvSpPr>
+        <p:spPr>
+          <a:xfrm>
+            <a:off x="502920" y="365760"/>
+            <a:ext cx="6400800" cy="274320"/>
+          </a:xfrm>
+          <a:prstGeom prst="rect">
+            <a:avLst/>
+          </a:prstGeom>
+          <a:noFill/>
+          <a:ln/>
+        </p:spPr>
+        <p:txBody>
+          <a:bodyPr wrap="square" lIns="0" tIns="0" rIns="0" bIns="0" rtlCol="0" anchor="ctr"/>
+          <a:lstStyle/>
+          <a:p>
+            <a:pPr marL="0" indent="0">
+              <a:buNone/>
+            </a:pPr>
+            <a:r>
+              <a:rPr lang="en-US" sz="950" b="1" kern="0" spc="220">
+                <a:solidFill>
+                  <a:srgbClr val="122B82"/>
+                </a:solidFill>
+              </a:rPr>
+              <a:t>FINANCIAL PERFORMANCE</a:t>
+            </a:r>
+            <a:endParaRPr lang="en-US" sz="950"/>
+          </a:p>
+        </p:txBody>
+      </p:sp>
+      <p:sp>
+        <p:nvSpPr>
+          <p:cNvPr id="3" name="Text 1"/>
+          <p:cNvSpPr txBox="1"/>
+          <p:nvPr/>
+        </p:nvSpPr>
+        <p:spPr>
+          <a:xfrm>
+            <a:off x="502920" y="640080"/>
+            <a:ext cx="7315200" cy="685800"/>
+          </a:xfrm>
+          <a:prstGeom prst="rect">
+            <a:avLst/>
+          </a:prstGeom>
+          <a:noFill/>
+          <a:ln/>
+        </p:spPr>
+        <p:txBody>
+          <a:bodyPr wrap="square" lIns="0" tIns="0" rIns="0" bIns="0" rtlCol="0" anchor="ctr"/>
+          <a:lstStyle/>
+          <a:p>
+            <a:pPr marL="0" indent="0">
+              <a:buNone/>
+            </a:pPr>
+            <a:r>
+              <a:rPr lang="en-US" sz="2200" b="1">
+                <a:solidFill>
+                  <a:srgbClr val="242C39"/>
+                </a:solidFill>
+              </a:rPr>
+              <a:t>Revenue against budget, month by month</a:t>
+            </a:r>
+            <a:endParaRPr lang="en-US" sz="2700"/>
+          </a:p>
+        </p:txBody>
+      </p:sp>
+      <p:sp>
+        <p:nvSpPr>
+          <p:cNvPr id="6" name="commentary panel"/>
+          <p:cNvSpPr/>
+          <p:nvPr/>
+        </p:nvSpPr>
+        <p:spPr>
+          <a:xfrm>
+            <a:off x="502920" y="3454086"/>
+            <a:ext cx="8138160" cy="1172777"/>
+          </a:xfrm>
+          <a:prstGeom prst="rect">
+            <a:avLst/>
+          </a:prstGeom>
+          <a:solidFill>
+            <a:srgbClr val="E8F9F8"/>
+          </a:solidFill>
+          <a:ln/>
+        </p:spPr>
+        <p:txBody>
+          <a:bodyPr/>
+          <a:lstStyle/>
+          <a:p>
+            <a:endParaRPr lang="en-AU"/>
+          </a:p>
+        </p:txBody>
+      </p:sp>
+      <p:sp>
+        <p:nvSpPr>
+          <p:cNvPr id="7" name="Text 4"/>
+          <p:cNvSpPr txBox="1"/>
+          <p:nvPr/>
+        </p:nvSpPr>
+        <p:spPr>
+          <a:xfrm>
+            <a:off x="685800" y="3527238"/>
+            <a:ext cx="2743200" cy="228600"/>
+          </a:xfrm>
+          <a:prstGeom prst="rect">
+            <a:avLst/>
+          </a:prstGeom>
+          <a:noFill/>
+          <a:ln/>
+        </p:spPr>
+        <p:txBody>
+          <a:bodyPr wrap="square" lIns="0" tIns="0" rIns="0" bIns="0" rtlCol="0" anchor="ctr"/>
+          <a:lstStyle/>
+          <a:p>
+            <a:pPr marL="0" indent="0">
+              <a:buNone/>
+            </a:pPr>
+            <a:r>
+              <a:rPr lang="en-US" sz="900" b="1" kern="0" spc="180">
+                <a:solidFill>
+                  <a:srgbClr val="005358"/>
+                </a:solidFill>
+              </a:rPr>
+              <a:t>COMMENTARY</a:t>
+            </a:r>
+            <a:endParaRPr lang="en-US" sz="900"/>
+          </a:p>
+        </p:txBody>
+      </p:sp>
+      <p:sp>
+        <p:nvSpPr>
+          <p:cNvPr id="8" name="Text 5"/>
+          <p:cNvSpPr txBox="1"/>
+          <p:nvPr/>
+        </p:nvSpPr>
+        <p:spPr>
+          <a:xfrm>
+            <a:off x="685800" y="3700974"/>
+            <a:ext cx="3703320" cy="898457"/>
+          </a:xfrm>
+          <a:prstGeom prst="rect">
+            <a:avLst/>
+          </a:prstGeom>
+          <a:noFill/>
+          <a:ln/>
+        </p:spPr>
+        <p:txBody>
+          <a:bodyPr wrap="square" lIns="0" tIns="0" rIns="0" bIns="0" rtlCol="0" anchor="t">
+            <a:normAutofit fontScale="85000" lnSpcReduction="10000"/>
+          </a:bodyPr>
+          <a:lstStyle/>
+          <a:p>
+            <a:pPr marL="342900" indent="-342900">
+              <a:lnSpc>
+                <a:spcPts val="1050"/>
+              </a:lnSpc>
+              <a:spcAft>
+                <a:spcPts val="400"/>
+              </a:spcAft>
+              <a:buSzPct val="100000"/>
+              <a:buChar char="•"/>
+            </a:pPr>
+            <a:r>
+              <a:rPr lang="en-US" sz="1000">
+                <a:solidFill>
+                  <a:srgbClr val="3A4453"/>
+                </a:solidFill>
+              </a:rPr>
+              <a:t>July billed $459k against a $609k budget, $150k short.</a:t>
+            </a:r>
+            <a:endParaRPr lang="en-US" sz="850"/>
+          </a:p>
+          <a:p>
+            <a:pPr marL="342900" indent="-342900">
+              <a:lnSpc>
+                <a:spcPts val="1050"/>
+              </a:lnSpc>
+              <a:spcAft>
+                <a:spcPts val="400"/>
+              </a:spcAft>
+              <a:buSzPct val="100000"/>
+              <a:buChar char="•"/>
+            </a:pPr>
+            <a:r>
+              <a:rPr lang="en-US" sz="1000">
+                <a:solidFill>
+                  <a:srgbClr val="3A4453"/>
+                </a:solidFill>
+              </a:rPr>
+              <a:t>August billed $603k against a $973k budget, $370k short.</a:t>
+            </a:r>
+            <a:endParaRPr lang="en-US" sz="850"/>
+          </a:p>
+          <a:p>
+            <a:pPr marL="342900" indent="-342900">
+              <a:lnSpc>
+                <a:spcPts val="1050"/>
+              </a:lnSpc>
+              <a:spcAft>
+                <a:spcPts val="400"/>
+              </a:spcAft>
+              <a:buSzPct val="100000"/>
+              <a:buChar char="•"/>
+            </a:pPr>
+            <a:r>
+              <a:rPr lang="en-US" sz="1000">
+                <a:solidFill>
+                  <a:srgbClr val="3A4453"/>
+                </a:solidFill>
+              </a:rPr>
+              <a:t>September billed $562k against a $414k budget, $148k ahead.</a:t>
+            </a:r>
+            <a:endParaRPr lang="en-US" sz="850"/>
+          </a:p>
+        </p:txBody>
+      </p:sp>
+      <p:sp>
+        <p:nvSpPr>
+          <p:cNvPr id="25" name="Slide Number Placeholder 0"/>
+          <p:cNvSpPr>
+            <a:spLocks noGrp="1"/>
+          </p:cNvSpPr>
+          <p:nvPr>
+            <p:ph type="sldNum" sz="quarter" idx="4294967295"/>
+          </p:nvPr>
+        </p:nvSpPr>
+        <p:spPr>
+          <a:xfrm>
+            <a:off x="8092440" y="4736592"/>
+            <a:ext cx="548640" cy="228600"/>
+          </a:xfrm>
+          <a:prstGeom prst="rect">
+            <a:avLst/>
+          </a:prstGeom>
+          <a:extLst>
+            <a:ext uri="{C572A759-6A51-4108-AA02-DFA0A04FC94B}">
+              <ma14:wrappingTextBoxFlag xmlns:ma14="http://schemas.microsoft.com/office/mac/drawingml/2011/main" xmlns="" val="0"/>
+            </a:ext>
+          </a:extLst>
+        </p:spPr>
+        <p:txBody>
+          <a:bodyPr/>
+          <a:lstStyle>
+            <a:lvl1pPr>
+              <a:defRPr sz="800">
+                <a:solidFill>
+                  <a:srgbClr val="6B7585"/>
+                </a:solidFill>
+              </a:defRPr>
+            </a:lvl1pPr>
+          </a:lstStyle>
+          <a:p>
+            <a:pPr algn="r"/>
+            <a:fld id="{F7021451-1387-4CA6-816F-3879F97B5CBC}" type="slidenum">
+              <a:rPr lang="en-US" b="0"/>
+              <a:t>16</a:t>
+            </a:fld>
+            <a:endParaRPr lang="en-US"/>
+          </a:p>
+        </p:txBody>
+      </p:sp>
+      <p:sp>
+        <p:nvSpPr>
+          <p:cNvPr id="8" name="Text 5b"/>
+          <p:cNvSpPr txBox="1"/>
+          <p:nvPr/>
+        </p:nvSpPr>
+        <p:spPr>
+          <a:xfrm>
+            <a:off x="4663440" y="3700974"/>
+            <a:ext cx="3703320" cy="898457"/>
+          </a:xfrm>
+          <a:prstGeom prst="rect">
+            <a:avLst/>
+          </a:prstGeom>
+          <a:noFill/>
+          <a:ln/>
+        </p:spPr>
+        <p:txBody>
+          <a:bodyPr wrap="square" lIns="0" tIns="0" rIns="0" bIns="0" rtlCol="0" anchor="t">
+            <a:normAutofit fontScale="85000" lnSpcReduction="10000"/>
+          </a:bodyPr>
+          <a:lstStyle/>
+          <a:p>
+            <a:pPr marL="342900" indent="-342900">
+              <a:lnSpc>
+                <a:spcPts val="1050"/>
+              </a:lnSpc>
+              <a:spcAft>
+                <a:spcPts val="400"/>
+              </a:spcAft>
+              <a:buSzPct val="100000"/>
+              <a:buChar char="•"/>
+            </a:pPr>
+            <a:r>
+              <a:rPr lang="en-US" sz="1000">
+                <a:solidFill>
+                  <a:srgbClr val="3A4453"/>
+                </a:solidFill>
+              </a:rPr>
+              <a:t>Year to date $1,624k against $1,996k, a shortfall of $372k or 18.6%.</a:t>
+            </a:r>
+            <a:endParaRPr lang="en-US" sz="850"/>
+          </a:p>
+          <a:p>
+            <a:pPr marL="342900" indent="-342900">
+              <a:lnSpc>
+                <a:spcPts val="1050"/>
+              </a:lnSpc>
+              <a:spcAft>
+                <a:spcPts val="400"/>
+              </a:spcAft>
+              <a:buSzPct val="100000"/>
+              <a:buChar char="•"/>
+            </a:pPr>
+            <a:r>
+              <a:rPr lang="en-US" sz="1000">
+                <a:solidFill>
+                  <a:srgbClr val="3A4453"/>
+                </a:solidFill>
+              </a:rPr>
+              <a:t>Two thirds of the shortfall is August alone, where the budget asked for more than the business has ever billed in a month.</a:t>
+            </a:r>
+            <a:endParaRPr lang="en-US" sz="850"/>
+          </a:p>
+        </p:txBody>
+      </p:sp>
+      <p:pic>
+        <p:nvPicPr>
+          <p:cNvPr id="26" name="cts logo" descr="image.png"/>
+          <p:cNvPicPr>
+            <a:picLocks noChangeAspect="1"/>
+          </p:cNvPicPr>
+          <p:nvPr/>
+        </p:nvPicPr>
+        <p:blipFill>
+          <a:blip r:embed="rId2"/>
+          <a:stretch>
+            <a:fillRect/>
+          </a:stretch>
+        </p:blipFill>
+        <p:spPr>
+          <a:xfrm>
+            <a:off x="7680959" y="182880"/>
+            <a:ext cx="960120" cy="539696"/>
+          </a:xfrm>
+          <a:prstGeom prst="rect">
+            <a:avLst/>
+          </a:prstGeom>
+        </p:spPr>
+      </p:pic>
+    </p:spTree>
+  </p:cSld>
+  <p:clrMapOvr>
+    <a:masterClrMapping/>
+  </p:clrMapOvr>
+</p:sld>
+</file>
+
+<file path=ppt/slides/slide8.xml><?xml version="1.0" encoding="utf-8"?>
 <p:sld xmlns:a="http://schemas.openxmlformats.org/drawingml/2006/main" xmlns:r="http://schemas.openxmlformats.org/officeDocument/2006/relationships" xmlns:p="http://schemas.openxmlformats.org/presentationml/2006/main">
   <p:cSld name="Slide 6">
     <p:spTree>
@@ -20982,7 +21357,7 @@
 </p:sld>
 </file>
 
-<file path=ppt/slides/slide8.xml><?xml version="1.0" encoding="utf-8"?>
+<file path=ppt/slides/slide9.xml><?xml version="1.0" encoding="utf-8"?>
 <p:sld xmlns:a="http://schemas.openxmlformats.org/drawingml/2006/main" xmlns:r="http://schemas.openxmlformats.org/officeDocument/2006/relationships" xmlns:p="http://schemas.openxmlformats.org/presentationml/2006/main">
   <p:cSld name="Slide 7">
     <p:spTree>
@@ -21330,391 +21705,6 @@
             <a:fld id="{F7021451-1387-4CA6-816F-3879F97B5CBC}" type="slidenum">
               <a:rPr lang="en-US" b="0"/>
               <a:t>7</a:t>
-            </a:fld>
-            <a:endParaRPr lang="en-US"/>
-          </a:p>
-        </p:txBody>
-      </p:sp>
-      <p:pic>
-        <p:nvPicPr>
-          <p:cNvPr id="26" name="cts logo" descr="cts-logo.png"/>
-          <p:cNvPicPr>
-            <a:picLocks noChangeAspect="1"/>
-          </p:cNvPicPr>
-          <p:nvPr/>
-        </p:nvPicPr>
-        <p:blipFill>
-          <a:blip r:embed="rId4"/>
-          <a:stretch>
-            <a:fillRect/>
-          </a:stretch>
-        </p:blipFill>
-        <p:spPr>
-          <a:xfrm>
-            <a:off x="7680959" y="182880"/>
-            <a:ext cx="960120" cy="539696"/>
-          </a:xfrm>
-          <a:prstGeom prst="rect">
-            <a:avLst/>
-          </a:prstGeom>
-        </p:spPr>
-      </p:pic>
-    </p:spTree>
-  </p:cSld>
-  <p:clrMapOvr>
-    <a:masterClrMapping/>
-  </p:clrMapOvr>
-</p:sld>
-</file>
-
-<file path=ppt/slides/slide9.xml><?xml version="1.0" encoding="utf-8"?>
-<p:sld xmlns:a="http://schemas.openxmlformats.org/drawingml/2006/main" xmlns:r="http://schemas.openxmlformats.org/officeDocument/2006/relationships" xmlns:p="http://schemas.openxmlformats.org/presentationml/2006/main">
-  <p:cSld name="Slide 8">
-    <p:spTree>
-      <p:nvGrpSpPr>
-        <p:cNvPr id="1" name=""/>
-        <p:cNvGrpSpPr/>
-        <p:nvPr/>
-      </p:nvGrpSpPr>
-      <p:grpSpPr>
-        <a:xfrm>
-          <a:off x="0" y="0"/>
-          <a:ext cx="0" cy="0"/>
-          <a:chOff x="0" y="0"/>
-          <a:chExt cx="0" cy="0"/>
-        </a:xfrm>
-      </p:grpSpPr>
-      <p:sp>
-        <p:nvSpPr>
-          <p:cNvPr id="2" name="Text 0"/>
-          <p:cNvSpPr txBox="1"/>
-          <p:nvPr/>
-        </p:nvSpPr>
-        <p:spPr>
-          <a:xfrm>
-            <a:off x="502920" y="365760"/>
-            <a:ext cx="6400800" cy="274320"/>
-          </a:xfrm>
-          <a:prstGeom prst="rect">
-            <a:avLst/>
-          </a:prstGeom>
-          <a:noFill/>
-          <a:ln/>
-        </p:spPr>
-        <p:txBody>
-          <a:bodyPr wrap="square" lIns="0" tIns="0" rIns="0" bIns="0" rtlCol="0" anchor="ctr"/>
-          <a:lstStyle/>
-          <a:p>
-            <a:pPr marL="0" indent="0">
-              <a:buNone/>
-            </a:pPr>
-            <a:r>
-              <a:rPr lang="en-US" sz="950" b="1" kern="0" spc="220">
-                <a:solidFill>
-                  <a:srgbClr val="122B82"/>
-                </a:solidFill>
-              </a:rPr>
-              <a:t>FINANCIAL PERFORMANCE</a:t>
-            </a:r>
-            <a:endParaRPr lang="en-US" sz="950"/>
-          </a:p>
-        </p:txBody>
-      </p:sp>
-      <p:sp>
-        <p:nvSpPr>
-          <p:cNvPr id="3" name="Text 1"/>
-          <p:cNvSpPr txBox="1"/>
-          <p:nvPr/>
-        </p:nvSpPr>
-        <p:spPr>
-          <a:xfrm>
-            <a:off x="502920" y="640080"/>
-            <a:ext cx="7315200" cy="685800"/>
-          </a:xfrm>
-          <a:prstGeom prst="rect">
-            <a:avLst/>
-          </a:prstGeom>
-          <a:noFill/>
-          <a:ln/>
-        </p:spPr>
-        <p:txBody>
-          <a:bodyPr wrap="square" lIns="0" tIns="0" rIns="0" bIns="0" rtlCol="0" anchor="ctr"/>
-          <a:lstStyle/>
-          <a:p>
-            <a:pPr marL="0" indent="0">
-              <a:buNone/>
-            </a:pPr>
-            <a:r>
-              <a:rPr lang="en-US" sz="2200" b="1">
-                <a:solidFill>
-                  <a:srgbClr val="242C39"/>
-                </a:solidFill>
-              </a:rPr>
-              <a:t>The three departments, Sep 26</a:t>
-            </a:r>
-            <a:endParaRPr lang="en-US" sz="2700"/>
-          </a:p>
-        </p:txBody>
-      </p:sp>
-      <p:pic>
-        <p:nvPicPr>
-          <p:cNvPr id="4" name="snip dept_three" descr="/home/user/Claude/deck/snips/dept_three.png"/>
-          <p:cNvPicPr>
-            <a:picLocks noChangeAspect="1"/>
-          </p:cNvPicPr>
-          <p:nvPr/>
-        </p:nvPicPr>
-        <p:blipFill>
-          <a:blip r:embed="rId3"/>
-          <a:stretch>
-            <a:fillRect/>
-          </a:stretch>
-        </p:blipFill>
-        <p:spPr>
-          <a:xfrm>
-            <a:off x="502920" y="1389888"/>
-            <a:ext cx="8138160" cy="1316784"/>
-          </a:xfrm>
-          <a:prstGeom prst="rect">
-            <a:avLst/>
-          </a:prstGeom>
-        </p:spPr>
-      </p:pic>
-      <p:sp>
-        <p:nvSpPr>
-          <p:cNvPr id="6" name="commentary panel"/>
-          <p:cNvSpPr/>
-          <p:nvPr/>
-        </p:nvSpPr>
-        <p:spPr>
-          <a:xfrm>
-            <a:off x="502920" y="3454086"/>
-            <a:ext cx="8138160" cy="1172777"/>
-          </a:xfrm>
-          <a:prstGeom prst="rect">
-            <a:avLst/>
-          </a:prstGeom>
-          <a:solidFill>
-            <a:srgbClr val="E8F9F8"/>
-          </a:solidFill>
-          <a:ln/>
-        </p:spPr>
-        <p:txBody>
-          <a:bodyPr/>
-          <a:lstStyle/>
-          <a:p>
-            <a:endParaRPr lang="en-AU"/>
-          </a:p>
-        </p:txBody>
-      </p:sp>
-      <p:sp>
-        <p:nvSpPr>
-          <p:cNvPr id="7" name="Text 4"/>
-          <p:cNvSpPr txBox="1"/>
-          <p:nvPr/>
-        </p:nvSpPr>
-        <p:spPr>
-          <a:xfrm>
-            <a:off x="685800" y="3527238"/>
-            <a:ext cx="2743200" cy="164592"/>
-          </a:xfrm>
-          <a:prstGeom prst="rect">
-            <a:avLst/>
-          </a:prstGeom>
-          <a:noFill/>
-          <a:ln/>
-        </p:spPr>
-        <p:txBody>
-          <a:bodyPr wrap="square" lIns="0" tIns="0" rIns="0" bIns="0" rtlCol="0" anchor="ctr"/>
-          <a:lstStyle/>
-          <a:p>
-            <a:pPr marL="0" indent="0">
-              <a:buNone/>
-            </a:pPr>
-            <a:r>
-              <a:rPr lang="en-US" sz="850" b="1" kern="0" spc="180">
-                <a:solidFill>
-                  <a:srgbClr val="005358"/>
-                </a:solidFill>
-              </a:rPr>
-              <a:t>COMMENTARY</a:t>
-            </a:r>
-            <a:endParaRPr lang="en-US" sz="850"/>
-          </a:p>
-        </p:txBody>
-      </p:sp>
-      <p:sp>
-        <p:nvSpPr>
-          <p:cNvPr id="8" name="Text 5"/>
-          <p:cNvSpPr txBox="1"/>
-          <p:nvPr/>
-        </p:nvSpPr>
-        <p:spPr>
-          <a:xfrm>
-            <a:off x="685800" y="3700974"/>
-            <a:ext cx="3703320" cy="898457"/>
-          </a:xfrm>
-          <a:prstGeom prst="rect">
-            <a:avLst/>
-          </a:prstGeom>
-          <a:noFill/>
-          <a:ln/>
-        </p:spPr>
-        <p:txBody>
-          <a:bodyPr wrap="square" lIns="0" tIns="0" rIns="0" bIns="0" rtlCol="0" anchor="t">
-            <a:normAutofit/>
-          </a:bodyPr>
-          <a:lstStyle/>
-          <a:p>
-            <a:pPr marL="342900" indent="-342900">
-              <a:lnSpc>
-                <a:spcPts val="1050"/>
-              </a:lnSpc>
-              <a:spcAft>
-                <a:spcPts val="300"/>
-              </a:spcAft>
-              <a:buSzPct val="100000"/>
-              <a:buChar char="•"/>
-            </a:pPr>
-            <a:r>
-              <a:rPr lang="en-US" sz="1000">
-                <a:solidFill>
-                  <a:srgbClr val="3A4453"/>
-                </a:solidFill>
-              </a:rPr>
-              <a:t>The P&amp;L groups Events and Video under Production, and Integration and Consulting under Consulting.</a:t>
-            </a:r>
-            <a:endParaRPr lang="en-US" sz="850"/>
-          </a:p>
-          <a:p>
-            <a:pPr marL="342900" indent="-342900">
-              <a:lnSpc>
-                <a:spcPts val="1050"/>
-              </a:lnSpc>
-              <a:spcAft>
-                <a:spcPts val="300"/>
-              </a:spcAft>
-              <a:buSzPct val="100000"/>
-              <a:buChar char="•"/>
-            </a:pPr>
-            <a:r>
-              <a:rPr lang="en-US" sz="1000">
-                <a:solidFill>
-                  <a:srgbClr val="3A4453"/>
-                </a:solidFill>
-              </a:rPr>
-              <a:t>Support generated $29k profit on $243k revenue and is the only major group covering its allocated overheads.</a:t>
-            </a:r>
-            <a:endParaRPr lang="en-US" sz="850"/>
-          </a:p>
-        </p:txBody>
-      </p:sp>
-      <p:sp>
-        <p:nvSpPr>
-          <p:cNvPr id="9" name="Text 6"/>
-          <p:cNvSpPr txBox="1"/>
-          <p:nvPr/>
-        </p:nvSpPr>
-        <p:spPr>
-          <a:xfrm>
-            <a:off x="4663440" y="3700974"/>
-            <a:ext cx="3703320" cy="898457"/>
-          </a:xfrm>
-          <a:prstGeom prst="rect">
-            <a:avLst/>
-          </a:prstGeom>
-          <a:noFill/>
-          <a:ln/>
-        </p:spPr>
-        <p:txBody>
-          <a:bodyPr wrap="square" lIns="0" tIns="0" rIns="0" bIns="0" rtlCol="0" anchor="t">
-            <a:normAutofit/>
-          </a:bodyPr>
-          <a:lstStyle/>
-          <a:p>
-            <a:pPr marL="342900" indent="-342900">
-              <a:lnSpc>
-                <a:spcPts val="1050"/>
-              </a:lnSpc>
-              <a:spcAft>
-                <a:spcPts val="300"/>
-              </a:spcAft>
-              <a:buSzPct val="100000"/>
-              <a:buChar char="•"/>
-            </a:pPr>
-            <a:r>
-              <a:rPr lang="en-US" sz="1000">
-                <a:solidFill>
-                  <a:srgbClr val="3A4453"/>
-                </a:solidFill>
-              </a:rPr>
-              <a:t>Production achieved a 78% gross margin on $81k revenue, but recorded a $61k loss after $124k of overheads.</a:t>
-            </a:r>
-            <a:endParaRPr lang="en-US" sz="850"/>
-          </a:p>
-          <a:p>
-            <a:pPr marL="342900" indent="-342900">
-              <a:lnSpc>
-                <a:spcPts val="1050"/>
-              </a:lnSpc>
-              <a:spcAft>
-                <a:spcPts val="300"/>
-              </a:spcAft>
-              <a:buSzPct val="100000"/>
-              <a:buChar char="•"/>
-            </a:pPr>
-            <a:r>
-              <a:rPr lang="en-US" sz="1000">
-                <a:solidFill>
-                  <a:srgbClr val="3A4453"/>
-                </a:solidFill>
-              </a:rPr>
-              <a:t>The combined Consulting group generated $238k revenue against an $82k budget. Its 10% gross margin contributed to a $9k loss.</a:t>
-            </a:r>
-            <a:endParaRPr lang="en-US" sz="850"/>
-          </a:p>
-        </p:txBody>
-      </p:sp>
-      <p:sp>
-        <p:nvSpPr>
-          <p:cNvPr id="25" name="Slide Number Placeholder 0"/>
-          <p:cNvSpPr>
-            <a:spLocks noGrp="1"/>
-          </p:cNvSpPr>
-          <p:nvPr>
-            <p:ph type="sldNum" sz="quarter" idx="4294967295"/>
-          </p:nvPr>
-        </p:nvSpPr>
-        <p:spPr>
-          <a:xfrm>
-            <a:off x="8092440" y="4736592"/>
-            <a:ext cx="548640" cy="228600"/>
-          </a:xfrm>
-          <a:prstGeom prst="rect">
-            <a:avLst/>
-          </a:prstGeom>
-          <a:extLst>
-            <a:ext uri="{C572A759-6A51-4108-AA02-DFA0A04FC94B}">
-              <ma14:wrappingTextBoxFlag xmlns:ma14="http://schemas.microsoft.com/office/mac/drawingml/2011/main" xmlns="" val="0"/>
-            </a:ext>
-          </a:extLst>
-        </p:spPr>
-        <p:txBody>
-          <a:bodyPr/>
-          <a:lstStyle>
-            <a:lvl1pPr>
-              <a:defRPr sz="800">
-                <a:solidFill>
-                  <a:srgbClr val="6B7585"/>
-                </a:solidFill>
-              </a:defRPr>
-            </a:lvl1pPr>
-          </a:lstStyle>
-          <a:p>
-            <a:pPr algn="r"/>
-            <a:fld id="{F7021451-1387-4CA6-816F-3879F97B5CBC}" type="slidenum">
-              <a:rPr lang="en-US" b="0"/>
-              <a:t>8</a:t>
             </a:fld>
             <a:endParaRPr lang="en-US"/>
           </a:p>

--- a/deck/CTS Monthly Business Review - 30092026.pptx
+++ b/deck/CTS Monthly Business Review - 30092026.pptx
@@ -15,6 +15,8 @@
     <p:sldId id="260" r:id="rId9"/>
     <p:sldId id="289" r:id="rId44"/>
     <p:sldId id="290" r:id="rId45"/>
+    <p:sldId id="291" r:id="rId46"/>
+    <p:sldId id="292" r:id="rId47"/>
     <p:sldId id="261" r:id="rId10"/>
     <p:sldId id="262" r:id="rId11"/>
     <p:sldId id="263" r:id="rId12"/>
@@ -3817,6 +3819,169 @@
           <a:p>
             <a:r>
               <a:t>The chart takes the closed months only and lengthens as the year goes on. The year to date pair sits on the table beneath it rather than on the chart, because a column five times the height of the others would flatten the months.</a:t>
+            </a:r>
+          </a:p>
+        </p:txBody>
+      </p:sp>
+    </p:spTree>
+  </p:cSld>
+  <p:clrMapOvr>
+    <a:masterClrMapping/>
+  </p:clrMapOvr>
+</p:notes>
+</file>
+
+<file path=ppt/notesSlides/notesSlide35.xml><?xml version="1.0" encoding="utf-8"?>
+<p:notes xmlns:a="http://schemas.openxmlformats.org/drawingml/2006/main" xmlns:p="http://schemas.openxmlformats.org/presentationml/2006/main" xmlns:r="http://schemas.openxmlformats.org/officeDocument/2006/relationships">
+  <p:cSld>
+    <p:spTree>
+      <p:nvGrpSpPr>
+        <p:cNvPr id="1" name=""/>
+        <p:cNvGrpSpPr/>
+        <p:nvPr/>
+      </p:nvGrpSpPr>
+      <p:grpSpPr>
+        <a:xfrm>
+          <a:off x="0" y="0"/>
+          <a:ext cx="0" cy="0"/>
+          <a:chOff x="0" y="0"/>
+          <a:chExt cx="0" cy="0"/>
+        </a:xfrm>
+      </p:grpSpPr>
+      <p:sp>
+        <p:nvSpPr>
+          <p:cNvPr id="3" name="Notes Placeholder 2"/>
+          <p:cNvSpPr>
+            <a:spLocks noGrp="1"/>
+          </p:cNvSpPr>
+          <p:nvPr>
+            <p:ph type="body" idx="1"/>
+          </p:nvPr>
+        </p:nvSpPr>
+        <p:spPr/>
+        <p:txBody>
+          <a:bodyPr lIns="107095" tIns="53547" rIns="107095" bIns="53547"/>
+          <a:lstStyle/>
+          <a:p>
+            <a:r>
+              <a:t>Revenue by month, FY27 against FY26, taken from the Cost Analysis tab.</a:t>
+            </a:r>
+          </a:p>
+          <a:p/>
+          <a:p>
+            <a:r>
+              <a:t>FY27: July $459,049, August $603,467, September $561,945.</a:t>
+            </a:r>
+          </a:p>
+          <a:p>
+            <a:r>
+              <a:t>FY26: July $320,808, August $551,451, September $356,323.</a:t>
+            </a:r>
+          </a:p>
+          <a:p/>
+          <a:p>
+            <a:r>
+              <a:t>FY27 is ahead in each of the three closed months, and ahead by $395,878 or 32.2% for the quarter.</a:t>
+            </a:r>
+          </a:p>
+          <a:p/>
+          <a:p>
+            <a:r>
+              <a:t>The FY27 line stops at September because the months beyond it hold budget rather than actuals, and charting those would show a plan as though it were a result.</a:t>
+            </a:r>
+          </a:p>
+          <a:p/>
+          <a:p>
+            <a:r>
+              <a:t>What FY26's full year shows is worth noting. Its largest month was October at $1,035,562, and its second half ran well below that. The FY27 budget repeats the same shape, with October budgeted at $950,416. If October behaves like the rest of FY27 rather than like FY26's October, the full year gap widens again.</a:t>
+            </a:r>
+          </a:p>
+          <a:p/>
+          <a:p>
+            <a:r>
+              <a:t>On the five year comparison that was asked for. The pack holds two years of actual revenue: FY27 on the P&amp;L FY27 tab and FY26 on the Actual FY26 tab. FY23, FY24 and FY25 are not in the pack and are not in any file I hold. The columns are in place on the tab, shaded, waiting for a paste, and both charts read whichever year columns carry figures, so nothing has to be rebuilt once the exports arrive.</a:t>
+            </a:r>
+          </a:p>
+          <a:p/>
+          <a:p>
+            <a:r>
+              <a:t>What is needed is one Xero profit and loss for each of FY23, FY24 and FY25, set to monthly columns, total income by month. Those three figures per year are all the charts use.</a:t>
+            </a:r>
+          </a:p>
+        </p:txBody>
+      </p:sp>
+    </p:spTree>
+  </p:cSld>
+  <p:clrMapOvr>
+    <a:masterClrMapping/>
+  </p:clrMapOvr>
+</p:notes>
+</file>
+
+<file path=ppt/notesSlides/notesSlide36.xml><?xml version="1.0" encoding="utf-8"?>
+<p:notes xmlns:a="http://schemas.openxmlformats.org/drawingml/2006/main" xmlns:p="http://schemas.openxmlformats.org/presentationml/2006/main" xmlns:r="http://schemas.openxmlformats.org/officeDocument/2006/relationships">
+  <p:cSld>
+    <p:spTree>
+      <p:nvGrpSpPr>
+        <p:cNvPr id="1" name=""/>
+        <p:cNvGrpSpPr/>
+        <p:nvPr/>
+      </p:nvGrpSpPr>
+      <p:grpSpPr>
+        <a:xfrm>
+          <a:off x="0" y="0"/>
+          <a:ext cx="0" cy="0"/>
+          <a:chOff x="0" y="0"/>
+          <a:chExt cx="0" cy="0"/>
+        </a:xfrm>
+      </p:grpSpPr>
+      <p:sp>
+        <p:nvSpPr>
+          <p:cNvPr id="3" name="Notes Placeholder 2"/>
+          <p:cNvSpPr>
+            <a:spLocks noGrp="1"/>
+          </p:cNvSpPr>
+          <p:nvPr>
+            <p:ph type="body" idx="1"/>
+          </p:nvPr>
+        </p:nvSpPr>
+        <p:spPr/>
+        <p:txBody>
+          <a:bodyPr lIns="107095" tIns="53547" rIns="107095" bIns="53547"/>
+          <a:lstStyle/>
+          <a:p>
+            <a:r>
+              <a:t>First quarter revenue year on year, taken from the Cost Analysis tab.</a:t>
+            </a:r>
+          </a:p>
+          <a:p/>
+          <a:p>
+            <a:r>
+              <a:t>FY27 first quarter $1,624,460 against FY26 at $1,228,582, which is $395,878 or 32.2% ahead.</a:t>
+            </a:r>
+          </a:p>
+          <a:p/>
+          <a:p>
+            <a:r>
+              <a:t>By department for the FY27 quarter: Support $718,587, Integration $441,414, Events $420,121, Video $40,270 and Consulting $4,068.</a:t>
+            </a:r>
+          </a:p>
+          <a:p/>
+          <a:p>
+            <a:r>
+              <a:t>The growth is genuine on revenue and it is worth saying so, because the rest of this pack is about the shortfall against budget. The business is billing a third more than it did a year ago.</a:t>
+            </a:r>
+          </a:p>
+          <a:p/>
+          <a:p>
+            <a:r>
+              <a:t>What it did not do is reach the result. The margin delivered on that revenue was 38.9% for the quarter, and the first quarter still produced only $5,774 of EBITDA. Revenue growth at this margin does not reach the bottom line.</a:t>
+            </a:r>
+          </a:p>
+          <a:p/>
+          <a:p>
+            <a:r>
+              <a:t>Only FY26 and FY27 are in the pack. The chart shows the years that carry figures, so FY23, FY24 and FY25 will appear as soon as one Xero profit and loss by month is pasted for each of them.</a:t>
             </a:r>
           </a:p>
         </p:txBody>
@@ -19464,6 +19629,783 @@
 </p:sld>
 </file>
 
+<file path=ppt/slides/slide35.xml><?xml version="1.0" encoding="utf-8"?>
+<p:sld xmlns:a="http://schemas.openxmlformats.org/drawingml/2006/main" xmlns:p="http://schemas.openxmlformats.org/presentationml/2006/main" xmlns:r="http://schemas.openxmlformats.org/officeDocument/2006/relationships">
+  <p:cSld>
+    <p:spTree>
+      <p:nvGrpSpPr>
+        <p:cNvPr id="1" name=""/>
+        <p:cNvGrpSpPr/>
+        <p:nvPr/>
+      </p:nvGrpSpPr>
+      <p:grpSpPr/>
+      <p:pic>
+        <p:nvPicPr>
+          <p:cNvPr id="27" name="snip rev_years" descr="rev_years.png"/>
+          <p:cNvPicPr>
+            <a:picLocks noChangeAspect="1"/>
+          </p:cNvPicPr>
+          <p:nvPr/>
+        </p:nvPicPr>
+        <p:blipFill>
+          <a:blip r:embed="rId3"/>
+          <a:stretch>
+            <a:fillRect/>
+          </a:stretch>
+        </p:blipFill>
+        <p:spPr>
+          <a:xfrm>
+            <a:off x="1376065" y="1115568"/>
+            <a:ext cx="6391868" cy="2174747"/>
+          </a:xfrm>
+          <a:prstGeom prst="rect">
+            <a:avLst/>
+          </a:prstGeom>
+        </p:spPr>
+      </p:pic>
+      <p:sp>
+        <p:nvSpPr>
+          <p:cNvPr id="2" name="Text 0"/>
+          <p:cNvSpPr txBox="1"/>
+          <p:nvPr/>
+        </p:nvSpPr>
+        <p:spPr>
+          <a:xfrm>
+            <a:off x="502920" y="365760"/>
+            <a:ext cx="6400800" cy="274320"/>
+          </a:xfrm>
+          <a:prstGeom prst="rect">
+            <a:avLst/>
+          </a:prstGeom>
+          <a:noFill/>
+          <a:ln/>
+        </p:spPr>
+        <p:txBody>
+          <a:bodyPr wrap="square" lIns="0" tIns="0" rIns="0" bIns="0" rtlCol="0" anchor="ctr"/>
+          <a:lstStyle/>
+          <a:p>
+            <a:pPr marL="0" indent="0">
+              <a:buNone/>
+            </a:pPr>
+            <a:r>
+              <a:rPr lang="en-US" sz="950" b="1" kern="0" spc="220">
+                <a:solidFill>
+                  <a:srgbClr val="122B82"/>
+                </a:solidFill>
+              </a:rPr>
+              <a:t>FINANCIAL PERFORMANCE</a:t>
+            </a:r>
+            <a:endParaRPr lang="en-US" sz="950"/>
+          </a:p>
+        </p:txBody>
+      </p:sp>
+      <p:sp>
+        <p:nvSpPr>
+          <p:cNvPr id="3" name="Text 1"/>
+          <p:cNvSpPr txBox="1"/>
+          <p:nvPr/>
+        </p:nvSpPr>
+        <p:spPr>
+          <a:xfrm>
+            <a:off x="502920" y="640080"/>
+            <a:ext cx="7315200" cy="685800"/>
+          </a:xfrm>
+          <a:prstGeom prst="rect">
+            <a:avLst/>
+          </a:prstGeom>
+          <a:noFill/>
+          <a:ln/>
+        </p:spPr>
+        <p:txBody>
+          <a:bodyPr wrap="square" lIns="0" tIns="0" rIns="0" bIns="0" rtlCol="0" anchor="ctr"/>
+          <a:lstStyle/>
+          <a:p>
+            <a:pPr marL="0" indent="0">
+              <a:buNone/>
+            </a:pPr>
+            <a:r>
+              <a:rPr lang="en-US" sz="2200" b="1">
+                <a:solidFill>
+                  <a:srgbClr val="242C39"/>
+                </a:solidFill>
+              </a:rPr>
+              <a:t>Revenue by month, year on year</a:t>
+            </a:r>
+            <a:endParaRPr lang="en-US" sz="2700"/>
+          </a:p>
+        </p:txBody>
+      </p:sp>
+      <p:sp>
+        <p:nvSpPr>
+          <p:cNvPr id="6" name="commentary panel"/>
+          <p:cNvSpPr/>
+          <p:nvPr/>
+        </p:nvSpPr>
+        <p:spPr>
+          <a:xfrm>
+            <a:off x="502920" y="3400043"/>
+            <a:ext cx="8138160" cy="1226820"/>
+          </a:xfrm>
+          <a:prstGeom prst="rect">
+            <a:avLst/>
+          </a:prstGeom>
+          <a:solidFill>
+            <a:srgbClr val="E8F9F8"/>
+          </a:solidFill>
+          <a:ln/>
+        </p:spPr>
+        <p:txBody>
+          <a:bodyPr/>
+          <a:lstStyle/>
+          <a:p>
+            <a:endParaRPr lang="en-AU"/>
+          </a:p>
+        </p:txBody>
+      </p:sp>
+      <p:sp>
+        <p:nvSpPr>
+          <p:cNvPr id="7" name="Text 4"/>
+          <p:cNvSpPr txBox="1"/>
+          <p:nvPr/>
+        </p:nvSpPr>
+        <p:spPr>
+          <a:xfrm>
+            <a:off x="685800" y="3473195"/>
+            <a:ext cx="2743200" cy="228600"/>
+          </a:xfrm>
+          <a:prstGeom prst="rect">
+            <a:avLst/>
+          </a:prstGeom>
+          <a:noFill/>
+          <a:ln/>
+        </p:spPr>
+        <p:txBody>
+          <a:bodyPr wrap="square" lIns="0" tIns="0" rIns="0" bIns="0" rtlCol="0" anchor="ctr"/>
+          <a:lstStyle/>
+          <a:p>
+            <a:pPr marL="0" indent="0">
+              <a:buNone/>
+            </a:pPr>
+            <a:r>
+              <a:rPr lang="en-US" sz="900" b="1" kern="0" spc="180">
+                <a:solidFill>
+                  <a:srgbClr val="005358"/>
+                </a:solidFill>
+              </a:rPr>
+              <a:t>COMMENTARY</a:t>
+            </a:r>
+            <a:endParaRPr lang="en-US" sz="900"/>
+          </a:p>
+        </p:txBody>
+      </p:sp>
+      <p:sp>
+        <p:nvSpPr>
+          <p:cNvPr id="8" name="Text 5"/>
+          <p:cNvSpPr txBox="1"/>
+          <p:nvPr/>
+        </p:nvSpPr>
+        <p:spPr>
+          <a:xfrm>
+            <a:off x="685800" y="3646931"/>
+            <a:ext cx="3703320" cy="952500"/>
+          </a:xfrm>
+          <a:prstGeom prst="rect">
+            <a:avLst/>
+          </a:prstGeom>
+          <a:noFill/>
+          <a:ln/>
+        </p:spPr>
+        <p:txBody>
+          <a:bodyPr wrap="square" lIns="0" tIns="0" rIns="0" bIns="0" rtlCol="0" anchor="t">
+            <a:normAutofit fontScale="85000" lnSpcReduction="10000"/>
+          </a:bodyPr>
+          <a:lstStyle/>
+          <a:p>
+            <a:pPr marL="342900" indent="-342900">
+              <a:lnSpc>
+                <a:spcPts val="1050"/>
+              </a:lnSpc>
+              <a:spcAft>
+                <a:spcPts val="400"/>
+              </a:spcAft>
+              <a:buSzPct val="100000"/>
+              <a:buChar char="•"/>
+            </a:pPr>
+            <a:r>
+              <a:rPr lang="en-US" sz="1000">
+                <a:solidFill>
+                  <a:srgbClr val="3A4453"/>
+                </a:solidFill>
+              </a:rPr>
+              <a:t>FY27 is ahead of FY26 in all three closed months: $459k against $321k, $603k against $551k, $562k against $356k.</a:t>
+            </a:r>
+            <a:endParaRPr lang="en-US" sz="850"/>
+          </a:p>
+          <a:p>
+            <a:pPr marL="342900" indent="-342900">
+              <a:lnSpc>
+                <a:spcPts val="1050"/>
+              </a:lnSpc>
+              <a:spcAft>
+                <a:spcPts val="400"/>
+              </a:spcAft>
+              <a:buSzPct val="100000"/>
+              <a:buChar char="•"/>
+            </a:pPr>
+            <a:r>
+              <a:rPr lang="en-US" sz="1000">
+                <a:solidFill>
+                  <a:srgbClr val="3A4453"/>
+                </a:solidFill>
+              </a:rPr>
+              <a:t>The quarter is $1,624k against $1,229k, up 32%.</a:t>
+            </a:r>
+            <a:endParaRPr lang="en-US" sz="850"/>
+          </a:p>
+          <a:p>
+            <a:pPr marL="342900" indent="-342900">
+              <a:lnSpc>
+                <a:spcPts val="1050"/>
+              </a:lnSpc>
+              <a:spcAft>
+                <a:spcPts val="400"/>
+              </a:spcAft>
+              <a:buSzPct val="100000"/>
+              <a:buChar char="•"/>
+            </a:pPr>
+            <a:r>
+              <a:rPr lang="en-US" sz="1000">
+                <a:solidFill>
+                  <a:srgbClr val="3A4453"/>
+                </a:solidFill>
+              </a:rPr>
+              <a:t>FY26's own shape is the warning. Its largest month was October at $1,036k, and the FY27 budget repeats that pattern.</a:t>
+            </a:r>
+            <a:endParaRPr lang="en-US" sz="850"/>
+          </a:p>
+        </p:txBody>
+      </p:sp>
+      <p:sp>
+        <p:nvSpPr>
+          <p:cNvPr id="25" name="Slide Number Placeholder 0"/>
+          <p:cNvSpPr>
+            <a:spLocks noGrp="1"/>
+          </p:cNvSpPr>
+          <p:nvPr>
+            <p:ph type="sldNum" sz="quarter" idx="4294967295"/>
+          </p:nvPr>
+        </p:nvSpPr>
+        <p:spPr>
+          <a:xfrm>
+            <a:off x="8092440" y="4736592"/>
+            <a:ext cx="548640" cy="228600"/>
+          </a:xfrm>
+          <a:prstGeom prst="rect">
+            <a:avLst/>
+          </a:prstGeom>
+          <a:extLst>
+            <a:ext uri="{C572A759-6A51-4108-AA02-DFA0A04FC94B}">
+              <ma14:wrappingTextBoxFlag xmlns:ma14="http://schemas.microsoft.com/office/mac/drawingml/2011/main" xmlns="" val="0"/>
+            </a:ext>
+          </a:extLst>
+        </p:spPr>
+        <p:txBody>
+          <a:bodyPr/>
+          <a:lstStyle>
+            <a:lvl1pPr>
+              <a:defRPr sz="800">
+                <a:solidFill>
+                  <a:srgbClr val="6B7585"/>
+                </a:solidFill>
+              </a:defRPr>
+            </a:lvl1pPr>
+          </a:lstStyle>
+          <a:p>
+            <a:pPr algn="r"/>
+            <a:fld id="{F7021451-1387-4CA6-816F-3879F97B5CBC}" type="slidenum">
+              <a:rPr lang="en-US" b="0"/>
+              <a:t>16</a:t>
+            </a:fld>
+            <a:endParaRPr lang="en-US"/>
+          </a:p>
+        </p:txBody>
+      </p:sp>
+      <p:sp>
+        <p:nvSpPr>
+          <p:cNvPr id="8" name="Text 5b"/>
+          <p:cNvSpPr txBox="1"/>
+          <p:nvPr/>
+        </p:nvSpPr>
+        <p:spPr>
+          <a:xfrm>
+            <a:off x="4663440" y="3646931"/>
+            <a:ext cx="3703320" cy="952500"/>
+          </a:xfrm>
+          <a:prstGeom prst="rect">
+            <a:avLst/>
+          </a:prstGeom>
+          <a:noFill/>
+          <a:ln/>
+        </p:spPr>
+        <p:txBody>
+          <a:bodyPr wrap="square" lIns="0" tIns="0" rIns="0" bIns="0" rtlCol="0" anchor="t">
+            <a:normAutofit fontScale="85000" lnSpcReduction="10000"/>
+          </a:bodyPr>
+          <a:lstStyle/>
+          <a:p>
+            <a:pPr marL="342900" indent="-342900">
+              <a:lnSpc>
+                <a:spcPts val="1050"/>
+              </a:lnSpc>
+              <a:spcAft>
+                <a:spcPts val="400"/>
+              </a:spcAft>
+              <a:buSzPct val="100000"/>
+              <a:buChar char="•"/>
+            </a:pPr>
+            <a:r>
+              <a:rPr lang="en-US" sz="1000">
+                <a:solidFill>
+                  <a:srgbClr val="3A4453"/>
+                </a:solidFill>
+              </a:rPr>
+              <a:t>Only FY26 and FY27 are in the pack. FY23, FY24 and FY25 need one Xero export each.</a:t>
+            </a:r>
+            <a:endParaRPr lang="en-US" sz="850"/>
+          </a:p>
+          <a:p>
+            <a:pPr marL="342900" indent="-342900">
+              <a:lnSpc>
+                <a:spcPts val="1050"/>
+              </a:lnSpc>
+              <a:spcAft>
+                <a:spcPts val="400"/>
+              </a:spcAft>
+              <a:buSzPct val="100000"/>
+              <a:buChar char="•"/>
+            </a:pPr>
+            <a:r>
+              <a:rPr lang="en-US" sz="1000">
+                <a:solidFill>
+                  <a:srgbClr val="3A4453"/>
+                </a:solidFill>
+              </a:rPr>
+              <a:t>The chart reads whichever years have figures, so pasting a year in is all that is needed.</a:t>
+            </a:r>
+            <a:endParaRPr lang="en-US" sz="850"/>
+          </a:p>
+        </p:txBody>
+      </p:sp>
+      <p:pic>
+        <p:nvPicPr>
+          <p:cNvPr id="26" name="cts logo" descr="image.png"/>
+          <p:cNvPicPr>
+            <a:picLocks noChangeAspect="1"/>
+          </p:cNvPicPr>
+          <p:nvPr/>
+        </p:nvPicPr>
+        <p:blipFill>
+          <a:blip r:embed="rId2"/>
+          <a:stretch>
+            <a:fillRect/>
+          </a:stretch>
+        </p:blipFill>
+        <p:spPr>
+          <a:xfrm>
+            <a:off x="7680959" y="182880"/>
+            <a:ext cx="960120" cy="539696"/>
+          </a:xfrm>
+          <a:prstGeom prst="rect">
+            <a:avLst/>
+          </a:prstGeom>
+        </p:spPr>
+      </p:pic>
+    </p:spTree>
+  </p:cSld>
+  <p:clrMapOvr>
+    <a:masterClrMapping/>
+  </p:clrMapOvr>
+</p:sld>
+</file>
+
+<file path=ppt/slides/slide36.xml><?xml version="1.0" encoding="utf-8"?>
+<p:sld xmlns:a="http://schemas.openxmlformats.org/drawingml/2006/main" xmlns:p="http://schemas.openxmlformats.org/presentationml/2006/main" xmlns:r="http://schemas.openxmlformats.org/officeDocument/2006/relationships">
+  <p:cSld>
+    <p:spTree>
+      <p:nvGrpSpPr>
+        <p:cNvPr id="1" name=""/>
+        <p:cNvGrpSpPr/>
+        <p:nvPr/>
+      </p:nvGrpSpPr>
+      <p:grpSpPr/>
+      <p:pic>
+        <p:nvPicPr>
+          <p:cNvPr id="27" name="snip rev_q1" descr="rev_q1.png"/>
+          <p:cNvPicPr>
+            <a:picLocks noChangeAspect="1"/>
+          </p:cNvPicPr>
+          <p:nvPr/>
+        </p:nvPicPr>
+        <p:blipFill>
+          <a:blip r:embed="rId3"/>
+          <a:stretch>
+            <a:fillRect/>
+          </a:stretch>
+        </p:blipFill>
+        <p:spPr>
+          <a:xfrm>
+            <a:off x="1734604" y="1115568"/>
+            <a:ext cx="5674791" cy="2397673"/>
+          </a:xfrm>
+          <a:prstGeom prst="rect">
+            <a:avLst/>
+          </a:prstGeom>
+        </p:spPr>
+      </p:pic>
+      <p:sp>
+        <p:nvSpPr>
+          <p:cNvPr id="2" name="Text 0"/>
+          <p:cNvSpPr txBox="1"/>
+          <p:nvPr/>
+        </p:nvSpPr>
+        <p:spPr>
+          <a:xfrm>
+            <a:off x="502920" y="365760"/>
+            <a:ext cx="6400800" cy="274320"/>
+          </a:xfrm>
+          <a:prstGeom prst="rect">
+            <a:avLst/>
+          </a:prstGeom>
+          <a:noFill/>
+          <a:ln/>
+        </p:spPr>
+        <p:txBody>
+          <a:bodyPr wrap="square" lIns="0" tIns="0" rIns="0" bIns="0" rtlCol="0" anchor="ctr"/>
+          <a:lstStyle/>
+          <a:p>
+            <a:pPr marL="0" indent="0">
+              <a:buNone/>
+            </a:pPr>
+            <a:r>
+              <a:rPr lang="en-US" sz="950" b="1" kern="0" spc="220">
+                <a:solidFill>
+                  <a:srgbClr val="122B82"/>
+                </a:solidFill>
+              </a:rPr>
+              <a:t>FINANCIAL PERFORMANCE</a:t>
+            </a:r>
+            <a:endParaRPr lang="en-US" sz="950"/>
+          </a:p>
+        </p:txBody>
+      </p:sp>
+      <p:sp>
+        <p:nvSpPr>
+          <p:cNvPr id="3" name="Text 1"/>
+          <p:cNvSpPr txBox="1"/>
+          <p:nvPr/>
+        </p:nvSpPr>
+        <p:spPr>
+          <a:xfrm>
+            <a:off x="502920" y="640080"/>
+            <a:ext cx="7315200" cy="685800"/>
+          </a:xfrm>
+          <a:prstGeom prst="rect">
+            <a:avLst/>
+          </a:prstGeom>
+          <a:noFill/>
+          <a:ln/>
+        </p:spPr>
+        <p:txBody>
+          <a:bodyPr wrap="square" lIns="0" tIns="0" rIns="0" bIns="0" rtlCol="0" anchor="ctr"/>
+          <a:lstStyle/>
+          <a:p>
+            <a:pPr marL="0" indent="0">
+              <a:buNone/>
+            </a:pPr>
+            <a:r>
+              <a:rPr lang="en-US" sz="2200" b="1">
+                <a:solidFill>
+                  <a:srgbClr val="242C39"/>
+                </a:solidFill>
+              </a:rPr>
+              <a:t>First quarter revenue, year on year</a:t>
+            </a:r>
+            <a:endParaRPr lang="en-US" sz="2700"/>
+          </a:p>
+        </p:txBody>
+      </p:sp>
+      <p:sp>
+        <p:nvSpPr>
+          <p:cNvPr id="6" name="commentary panel"/>
+          <p:cNvSpPr/>
+          <p:nvPr/>
+        </p:nvSpPr>
+        <p:spPr>
+          <a:xfrm>
+            <a:off x="502920" y="3622969"/>
+            <a:ext cx="8138160" cy="1003894"/>
+          </a:xfrm>
+          <a:prstGeom prst="rect">
+            <a:avLst/>
+          </a:prstGeom>
+          <a:solidFill>
+            <a:srgbClr val="E8F9F8"/>
+          </a:solidFill>
+          <a:ln/>
+        </p:spPr>
+        <p:txBody>
+          <a:bodyPr/>
+          <a:lstStyle/>
+          <a:p>
+            <a:endParaRPr lang="en-AU"/>
+          </a:p>
+        </p:txBody>
+      </p:sp>
+      <p:sp>
+        <p:nvSpPr>
+          <p:cNvPr id="7" name="Text 4"/>
+          <p:cNvSpPr txBox="1"/>
+          <p:nvPr/>
+        </p:nvSpPr>
+        <p:spPr>
+          <a:xfrm>
+            <a:off x="685800" y="3696121"/>
+            <a:ext cx="2743200" cy="228600"/>
+          </a:xfrm>
+          <a:prstGeom prst="rect">
+            <a:avLst/>
+          </a:prstGeom>
+          <a:noFill/>
+          <a:ln/>
+        </p:spPr>
+        <p:txBody>
+          <a:bodyPr wrap="square" lIns="0" tIns="0" rIns="0" bIns="0" rtlCol="0" anchor="ctr"/>
+          <a:lstStyle/>
+          <a:p>
+            <a:pPr marL="0" indent="0">
+              <a:buNone/>
+            </a:pPr>
+            <a:r>
+              <a:rPr lang="en-US" sz="900" b="1" kern="0" spc="180">
+                <a:solidFill>
+                  <a:srgbClr val="005358"/>
+                </a:solidFill>
+              </a:rPr>
+              <a:t>COMMENTARY</a:t>
+            </a:r>
+            <a:endParaRPr lang="en-US" sz="900"/>
+          </a:p>
+        </p:txBody>
+      </p:sp>
+      <p:sp>
+        <p:nvSpPr>
+          <p:cNvPr id="8" name="Text 5"/>
+          <p:cNvSpPr txBox="1"/>
+          <p:nvPr/>
+        </p:nvSpPr>
+        <p:spPr>
+          <a:xfrm>
+            <a:off x="685800" y="3869857"/>
+            <a:ext cx="3703320" cy="729574"/>
+          </a:xfrm>
+          <a:prstGeom prst="rect">
+            <a:avLst/>
+          </a:prstGeom>
+          <a:noFill/>
+          <a:ln/>
+        </p:spPr>
+        <p:txBody>
+          <a:bodyPr wrap="square" lIns="0" tIns="0" rIns="0" bIns="0" rtlCol="0" anchor="t">
+            <a:normAutofit fontScale="85000" lnSpcReduction="10000"/>
+          </a:bodyPr>
+          <a:lstStyle/>
+          <a:p>
+            <a:pPr marL="342900" indent="-342900">
+              <a:lnSpc>
+                <a:spcPts val="1050"/>
+              </a:lnSpc>
+              <a:spcAft>
+                <a:spcPts val="400"/>
+              </a:spcAft>
+              <a:buSzPct val="100000"/>
+              <a:buChar char="•"/>
+            </a:pPr>
+            <a:r>
+              <a:rPr lang="en-US" sz="1000">
+                <a:solidFill>
+                  <a:srgbClr val="3A4453"/>
+                </a:solidFill>
+              </a:rPr>
+              <a:t>First quarter revenue is $1,624k against $1,229k last year, up $396k or 32%.</a:t>
+            </a:r>
+            <a:endParaRPr lang="en-US" sz="850"/>
+          </a:p>
+          <a:p>
+            <a:pPr marL="342900" indent="-342900">
+              <a:lnSpc>
+                <a:spcPts val="1050"/>
+              </a:lnSpc>
+              <a:spcAft>
+                <a:spcPts val="400"/>
+              </a:spcAft>
+              <a:buSzPct val="100000"/>
+              <a:buChar char="•"/>
+            </a:pPr>
+            <a:r>
+              <a:rPr lang="en-US" sz="1000">
+                <a:solidFill>
+                  <a:srgbClr val="3A4453"/>
+                </a:solidFill>
+              </a:rPr>
+              <a:t>Support contributed $719k of that, Integration $441k and Events $420k.</a:t>
+            </a:r>
+            <a:endParaRPr lang="en-US" sz="850"/>
+          </a:p>
+        </p:txBody>
+      </p:sp>
+      <p:sp>
+        <p:nvSpPr>
+          <p:cNvPr id="25" name="Slide Number Placeholder 0"/>
+          <p:cNvSpPr>
+            <a:spLocks noGrp="1"/>
+          </p:cNvSpPr>
+          <p:nvPr>
+            <p:ph type="sldNum" sz="quarter" idx="4294967295"/>
+          </p:nvPr>
+        </p:nvSpPr>
+        <p:spPr>
+          <a:xfrm>
+            <a:off x="8092440" y="4736592"/>
+            <a:ext cx="548640" cy="228600"/>
+          </a:xfrm>
+          <a:prstGeom prst="rect">
+            <a:avLst/>
+          </a:prstGeom>
+          <a:extLst>
+            <a:ext uri="{C572A759-6A51-4108-AA02-DFA0A04FC94B}">
+              <ma14:wrappingTextBoxFlag xmlns:ma14="http://schemas.microsoft.com/office/mac/drawingml/2011/main" xmlns="" val="0"/>
+            </a:ext>
+          </a:extLst>
+        </p:spPr>
+        <p:txBody>
+          <a:bodyPr/>
+          <a:lstStyle>
+            <a:lvl1pPr>
+              <a:defRPr sz="800">
+                <a:solidFill>
+                  <a:srgbClr val="6B7585"/>
+                </a:solidFill>
+              </a:defRPr>
+            </a:lvl1pPr>
+          </a:lstStyle>
+          <a:p>
+            <a:pPr algn="r"/>
+            <a:fld id="{F7021451-1387-4CA6-816F-3879F97B5CBC}" type="slidenum">
+              <a:rPr lang="en-US" b="0"/>
+              <a:t>16</a:t>
+            </a:fld>
+            <a:endParaRPr lang="en-US"/>
+          </a:p>
+        </p:txBody>
+      </p:sp>
+      <p:sp>
+        <p:nvSpPr>
+          <p:cNvPr id="8" name="Text 5b"/>
+          <p:cNvSpPr txBox="1"/>
+          <p:nvPr/>
+        </p:nvSpPr>
+        <p:spPr>
+          <a:xfrm>
+            <a:off x="4663440" y="3869857"/>
+            <a:ext cx="3703320" cy="729574"/>
+          </a:xfrm>
+          <a:prstGeom prst="rect">
+            <a:avLst/>
+          </a:prstGeom>
+          <a:noFill/>
+          <a:ln/>
+        </p:spPr>
+        <p:txBody>
+          <a:bodyPr wrap="square" lIns="0" tIns="0" rIns="0" bIns="0" rtlCol="0" anchor="t">
+            <a:normAutofit fontScale="85000" lnSpcReduction="10000"/>
+          </a:bodyPr>
+          <a:lstStyle/>
+          <a:p>
+            <a:pPr marL="342900" indent="-342900">
+              <a:lnSpc>
+                <a:spcPts val="1050"/>
+              </a:lnSpc>
+              <a:spcAft>
+                <a:spcPts val="400"/>
+              </a:spcAft>
+              <a:buSzPct val="100000"/>
+              <a:buChar char="•"/>
+            </a:pPr>
+            <a:r>
+              <a:rPr lang="en-US" sz="1000">
+                <a:solidFill>
+                  <a:srgbClr val="3A4453"/>
+                </a:solidFill>
+              </a:rPr>
+              <a:t>The growth is real on revenue. It did not reach the result, because the margin delivered on it was 38.9%.</a:t>
+            </a:r>
+            <a:endParaRPr lang="en-US" sz="850"/>
+          </a:p>
+          <a:p>
+            <a:pPr marL="342900" indent="-342900">
+              <a:lnSpc>
+                <a:spcPts val="1050"/>
+              </a:lnSpc>
+              <a:spcAft>
+                <a:spcPts val="400"/>
+              </a:spcAft>
+              <a:buSzPct val="100000"/>
+              <a:buChar char="•"/>
+            </a:pPr>
+            <a:r>
+              <a:rPr lang="en-US" sz="1000">
+                <a:solidFill>
+                  <a:srgbClr val="3A4453"/>
+                </a:solidFill>
+              </a:rPr>
+              <a:t>FY23 to FY25 are not in the pack. One Xero profit and loss by month for each year is all that is needed.</a:t>
+            </a:r>
+            <a:endParaRPr lang="en-US" sz="850"/>
+          </a:p>
+        </p:txBody>
+      </p:sp>
+      <p:pic>
+        <p:nvPicPr>
+          <p:cNvPr id="26" name="cts logo" descr="image.png"/>
+          <p:cNvPicPr>
+            <a:picLocks noChangeAspect="1"/>
+          </p:cNvPicPr>
+          <p:nvPr/>
+        </p:nvPicPr>
+        <p:blipFill>
+          <a:blip r:embed="rId2"/>
+          <a:stretch>
+            <a:fillRect/>
+          </a:stretch>
+        </p:blipFill>
+        <p:spPr>
+          <a:xfrm>
+            <a:off x="7680959" y="182880"/>
+            <a:ext cx="960120" cy="539696"/>
+          </a:xfrm>
+          <a:prstGeom prst="rect">
+            <a:avLst/>
+          </a:prstGeom>
+        </p:spPr>
+      </p:pic>
+    </p:spTree>
+  </p:cSld>
+  <p:clrMapOvr>
+    <a:masterClrMapping/>
+  </p:clrMapOvr>
+</p:sld>
+</file>
+
 <file path=ppt/slides/slide4.xml><?xml version="1.0" encoding="utf-8"?>
 <p:sld xmlns:a="http://schemas.openxmlformats.org/drawingml/2006/main" xmlns:r="http://schemas.openxmlformats.org/officeDocument/2006/relationships" xmlns:p="http://schemas.openxmlformats.org/presentationml/2006/main">
   <p:cSld name="Slide 4">

--- a/deck/CTS Monthly Business Review - 30092026.pptx
+++ b/deck/CTS Monthly Business Review - 30092026.pptx
@@ -17,6 +17,7 @@
     <p:sldId id="290" r:id="rId45"/>
     <p:sldId id="291" r:id="rId46"/>
     <p:sldId id="292" r:id="rId47"/>
+    <p:sldId id="293" r:id="rId48"/>
     <p:sldId id="261" r:id="rId10"/>
     <p:sldId id="262" r:id="rId11"/>
     <p:sldId id="263" r:id="rId12"/>
@@ -3864,48 +3865,37 @@
           <a:lstStyle/>
           <a:p>
             <a:r>
-              <a:t>Revenue by month, FY27 against FY26, taken from the Cost Analysis tab.</a:t>
+              <a:t>Revenue for September across three years, taken from the Xero History tab and the Cost Analysis tab.</a:t>
             </a:r>
           </a:p>
           <a:p/>
           <a:p>
             <a:r>
-              <a:t>FY27: July $459,049, August $603,467, September $561,945.</a:t>
-            </a:r>
-          </a:p>
-          <a:p>
-            <a:r>
-              <a:t>FY26: July $320,808, August $551,451, September $356,323.</a:t>
+              <a:t>September 2026 $561,945. September 2025 $356,323. September 2024 $440,243.</a:t>
             </a:r>
           </a:p>
           <a:p/>
           <a:p>
             <a:r>
-              <a:t>FY27 is ahead in each of the three closed months, and ahead by $395,878 or 32.2% for the quarter.</a:t>
+              <a:t>September 2026 is $205,621 or 57.7% ahead of September 2025, and $121,701 or 27.6% ahead of September 2024. September 2025 was itself $83,920 or 19.1% below September 2024.</a:t>
             </a:r>
           </a:p>
           <a:p/>
           <a:p>
             <a:r>
-              <a:t>The FY27 line stops at September because the months beyond it hold budget rather than actuals, and charting those would show a plan as though it were a result.</a:t>
+              <a:t>The 57.7% headline is flattering because the year it is measured against was the weakest of the three. FY26 was a down year across the board, and part of what FY27 has done is recover ground rather than break new ground. Against FY25 the same month is 27.6% ahead, which over two years is about 13% a year, and that is the number worth carrying into the reforecast.</a:t>
             </a:r>
           </a:p>
           <a:p/>
           <a:p>
             <a:r>
-              <a:t>What FY26's full year shows is worth noting. Its largest month was October at $1,035,562, and its second half ran well below that. The FY27 budget repeats the same shape, with October budgeted at $950,416. If October behaves like the rest of FY27 rather than like FY26's October, the full year gap widens again.</a:t>
+              <a:t>On the source. FY25 was pulled from Xero on 22 October 2026 as total income by month on the accrual basis, and sits on its own Xero History tab in the pack. FY26 and FY27 are references to the pack's own actuals tabs. Three months were checked against Xero directly and agree: July 2025, August 2025 and September 2025 on the FY26 side, and September 2026 on the FY27 side.</a:t>
             </a:r>
           </a:p>
           <a:p/>
           <a:p>
             <a:r>
-              <a:t>On the five year comparison that was asked for. The pack holds two years of actual revenue: FY27 on the P&amp;L FY27 tab and FY26 on the Actual FY26 tab. FY23, FY24 and FY25 are not in the pack and are not in any file I hold. The columns are in place on the tab, shaded, waiting for a paste, and both charts read whichever year columns carry figures, so nothing has to be rebuilt once the exports arrive.</a:t>
-            </a:r>
-          </a:p>
-          <a:p/>
-          <a:p>
-            <a:r>
-              <a:t>What is needed is one Xero profit and loss for each of FY23, FY24 and FY25, set to monthly columns, total income by month. Those three figures per year are all the charts use.</a:t>
+              <a:t>A five year comparison was asked for and cannot be produced. Xero only serves the last three financial years, and a request for September 2022 is refused by the API. FY23 and FY24 would have to come from an older copy of the pack or from a saved export. The columns for them are in place on the Cost Analysis tab and the chart reads whichever years carry figures.</a:t>
             </a:r>
           </a:p>
         </p:txBody>
@@ -3951,37 +3941,131 @@
           <a:lstStyle/>
           <a:p>
             <a:r>
-              <a:t>First quarter revenue year on year, taken from the Cost Analysis tab.</a:t>
+              <a:t>First quarter revenue across three years, taken from the Xero History tab and the Cost Analysis tab.</a:t>
             </a:r>
           </a:p>
           <a:p/>
           <a:p>
             <a:r>
-              <a:t>FY27 first quarter $1,624,460 against FY26 at $1,228,582, which is $395,878 or 32.2% ahead.</a:t>
+              <a:t>Q1 2026, being July to September 2026, $1,624,460. Q1 2025 $1,228,582. Q1 2024 $1,380,102.</a:t>
             </a:r>
           </a:p>
           <a:p/>
           <a:p>
             <a:r>
-              <a:t>By department for the FY27 quarter: Support $718,587, Integration $441,414, Events $420,121, Video $40,270 and Consulting $4,068.</a:t>
+              <a:t>Against last year the quarter is $395,878 or 32.2% ahead. Against two years ago it is $244,358 or 17.7% ahead. The middle year fell $151,520 or 11.0% below the first.</a:t>
             </a:r>
           </a:p>
           <a:p/>
           <a:p>
             <a:r>
-              <a:t>The growth is genuine on revenue and it is worth saying so, because the rest of this pack is about the shortfall against budget. The business is billing a third more than it did a year ago.</a:t>
+              <a:t>The two readings tell different stories and the second is the more useful one. A 32% increase measured off the weakest of three years is not a growth rate the business can plan on. Compounded over the two years, the first quarter has grown about 8.5% a year. That is the figure to put against the reforecast.</a:t>
             </a:r>
           </a:p>
           <a:p/>
           <a:p>
             <a:r>
-              <a:t>What it did not do is reach the result. The margin delivered on that revenue was 38.9% for the quarter, and the first quarter still produced only $5,774 of EBITDA. Revenue growth at this margin does not reach the bottom line.</a:t>
+              <a:t>The first quarter has held a steady share of the year in both completed years, 19.7% of FY25 and 20.1% of FY26. On that relationship a first quarter of $1,624,460 implies a full year of around $8.1 million, which is well ahead of both completed years and ahead of where the FY27 budget sits after the first three months.</a:t>
             </a:r>
           </a:p>
           <a:p/>
           <a:p>
             <a:r>
-              <a:t>Only FY26 and FY27 are in the pack. The chart shows the years that carry figures, so FY23, FY24 and FY25 will appear as soon as one Xero profit and loss by month is pasted for each of them.</a:t>
+              <a:t>What the quarter did not do is reach the result. The margin delivered on that revenue was 38.9% and the quarter produced $5,774 of EBITDA. Revenue growth at this margin does not reach the bottom line, and that is the point the rest of the pack returns to.</a:t>
+            </a:r>
+          </a:p>
+          <a:p/>
+          <a:p>
+            <a:r>
+              <a:t>FY23 and FY24 are outside the three financial years Xero serves, so the comparison stops at FY25.</a:t>
+            </a:r>
+          </a:p>
+        </p:txBody>
+      </p:sp>
+    </p:spTree>
+  </p:cSld>
+  <p:clrMapOvr>
+    <a:masterClrMapping/>
+  </p:clrMapOvr>
+</p:notes>
+</file>
+
+<file path=ppt/notesSlides/notesSlide37.xml><?xml version="1.0" encoding="utf-8"?>
+<p:notes xmlns:a="http://schemas.openxmlformats.org/drawingml/2006/main" xmlns:p="http://schemas.openxmlformats.org/presentationml/2006/main" xmlns:r="http://schemas.openxmlformats.org/officeDocument/2006/relationships">
+  <p:cSld>
+    <p:spTree>
+      <p:nvGrpSpPr>
+        <p:cNvPr id="1" name=""/>
+        <p:cNvGrpSpPr/>
+        <p:nvPr/>
+      </p:nvGrpSpPr>
+      <p:grpSpPr>
+        <a:xfrm>
+          <a:off x="0" y="0"/>
+          <a:ext cx="0" cy="0"/>
+          <a:chOff x="0" y="0"/>
+          <a:chExt cx="0" cy="0"/>
+        </a:xfrm>
+      </p:grpSpPr>
+      <p:sp>
+        <p:nvSpPr>
+          <p:cNvPr id="3" name="Notes Placeholder 2"/>
+          <p:cNvSpPr>
+            <a:spLocks noGrp="1"/>
+          </p:cNvSpPr>
+          <p:nvPr>
+            <p:ph type="body" idx="1"/>
+          </p:nvPr>
+        </p:nvSpPr>
+        <p:spPr/>
+        <p:txBody>
+          <a:bodyPr lIns="107095" tIns="53547" rIns="107095" bIns="53547"/>
+          <a:lstStyle/>
+          <a:p>
+            <a:r>
+              <a:t>Thirty six months of revenue, taken from the new Xero History tab.</a:t>
+            </a:r>
+          </a:p>
+          <a:p/>
+          <a:p>
+            <a:r>
+              <a:t>FY25 totalled $7,000,357 and FY26 $6,113,186, a fall of $887,171 or 12.7%. FY27 stands at $1,624,460 after three months.</a:t>
+            </a:r>
+          </a:p>
+          <a:p/>
+          <a:p>
+            <a:r>
+              <a:t>The fall in FY26 was not confined to one half. The first half was $533,509 or 14.6% below FY25 and the second half $353,662 or 10.6% below.</a:t>
+            </a:r>
+          </a:p>
+          <a:p/>
+          <a:p>
+            <a:r>
+              <a:t>Two features of the shape are worth the board's attention.</a:t>
+            </a:r>
+          </a:p>
+          <a:p/>
+          <a:p>
+            <a:r>
+              <a:t>The first is October. It was the largest month of FY25 at $948,991 and the largest month of FY26 at $1,035,562, and the FY27 budget repeats that pattern with $950,416. October is a quarter of the way to a seven figure month on its own, and if it behaves like the rest of FY27 rather than like its own history, the full year gap against budget widens materially. There is no second October in the year to recover it.</a:t>
+            </a:r>
+          </a:p>
+          <a:p/>
+          <a:p>
+            <a:r>
+              <a:t>The second is January. FY25 billed $918,289 in January and FY26 billed $268,631, a swing of $649,658 in a single month. January is the month most exposed to how much work carries over the Christmas shutdown, and it is the month least able to be recovered once it is gone.</a:t>
+            </a:r>
+          </a:p>
+          <a:p/>
+          <a:p>
+            <a:r>
+              <a:t>On the source and how it is maintained. FY25 was pulled from Xero on 22 October 2026 as total income by month on the accrual basis, and is held on the tab as figures, because the pack has no FY25 tab to reference. FY26 and FY27 are references to the Actual FY26 and P&amp;L FY27 tabs, so they follow the pack rather than duplicating it, and FY27 shows closed months only. Four months were checked against Xero directly and agree to the cent, apart from one cent of rounding on September 2025.</a:t>
+            </a:r>
+          </a:p>
+          <a:p/>
+          <a:p>
+            <a:r>
+              <a:t>Xero serves the last three financial years. FY23 and FY24 cannot be pulled, which is why the history begins in July 2024.</a:t>
             </a:r>
           </a:p>
         </p:txBody>
@@ -5599,6 +5683,797 @@
 
 <file path=ppt/slides/slide10.xml><?xml version="1.0" encoding="utf-8"?>
 <p:sld xmlns:a="http://schemas.openxmlformats.org/drawingml/2006/main" xmlns:r="http://schemas.openxmlformats.org/officeDocument/2006/relationships" xmlns:p="http://schemas.openxmlformats.org/presentationml/2006/main">
+  <p:cSld name="Slide 6">
+    <p:spTree>
+      <p:nvGrpSpPr>
+        <p:cNvPr id="1" name=""/>
+        <p:cNvGrpSpPr/>
+        <p:nvPr/>
+      </p:nvGrpSpPr>
+      <p:grpSpPr>
+        <a:xfrm>
+          <a:off x="0" y="0"/>
+          <a:ext cx="0" cy="0"/>
+          <a:chOff x="0" y="0"/>
+          <a:chExt cx="0" cy="0"/>
+        </a:xfrm>
+      </p:grpSpPr>
+      <p:pic>
+        <p:nvPicPr>
+          <p:cNvPr id="27" name="snip pl_result" descr="pl_result.png"/>
+          <p:cNvPicPr>
+            <a:picLocks noChangeAspect="1"/>
+          </p:cNvPicPr>
+          <p:nvPr/>
+        </p:nvPicPr>
+        <p:blipFill>
+          <a:blip r:embed="rId5"/>
+          <a:stretch>
+            <a:fillRect/>
+          </a:stretch>
+        </p:blipFill>
+        <p:spPr>
+          <a:xfrm>
+            <a:off x="1221933" y="1115568"/>
+            <a:ext cx="6700133" cy="1836982"/>
+          </a:xfrm>
+          <a:prstGeom prst="rect">
+            <a:avLst/>
+          </a:prstGeom>
+        </p:spPr>
+      </p:pic>
+      <p:sp>
+        <p:nvSpPr>
+          <p:cNvPr id="2" name="Text 0"/>
+          <p:cNvSpPr txBox="1"/>
+          <p:nvPr/>
+        </p:nvSpPr>
+        <p:spPr>
+          <a:xfrm>
+            <a:off x="502920" y="365760"/>
+            <a:ext cx="6400800" cy="274320"/>
+          </a:xfrm>
+          <a:prstGeom prst="rect">
+            <a:avLst/>
+          </a:prstGeom>
+          <a:noFill/>
+          <a:ln/>
+        </p:spPr>
+        <p:txBody>
+          <a:bodyPr wrap="square" lIns="0" tIns="0" rIns="0" bIns="0" rtlCol="0" anchor="ctr"/>
+          <a:lstStyle/>
+          <a:p>
+            <a:pPr marL="0" indent="0">
+              <a:buNone/>
+            </a:pPr>
+            <a:r>
+              <a:rPr lang="en-US" sz="950" b="1" kern="0" spc="220">
+                <a:solidFill>
+                  <a:srgbClr val="122B82"/>
+                </a:solidFill>
+              </a:rPr>
+              <a:t>FINANCIAL PERFORMANCE</a:t>
+            </a:r>
+            <a:endParaRPr lang="en-US" sz="950"/>
+          </a:p>
+        </p:txBody>
+      </p:sp>
+      <p:sp>
+        <p:nvSpPr>
+          <p:cNvPr id="3" name="Text 1"/>
+          <p:cNvSpPr txBox="1"/>
+          <p:nvPr/>
+        </p:nvSpPr>
+        <p:spPr>
+          <a:xfrm>
+            <a:off x="502920" y="640080"/>
+            <a:ext cx="7315200" cy="685800"/>
+          </a:xfrm>
+          <a:prstGeom prst="rect">
+            <a:avLst/>
+          </a:prstGeom>
+          <a:noFill/>
+          <a:ln/>
+        </p:spPr>
+        <p:txBody>
+          <a:bodyPr wrap="square" lIns="0" tIns="0" rIns="0" bIns="0" rtlCol="0" anchor="ctr"/>
+          <a:lstStyle/>
+          <a:p>
+            <a:pPr marL="0" indent="0">
+              <a:buNone/>
+            </a:pPr>
+            <a:r>
+              <a:rPr lang="en-US" sz="2200" b="1">
+                <a:solidFill>
+                  <a:srgbClr val="242C39"/>
+                </a:solidFill>
+              </a:rPr>
+              <a:t>P&amp;L summary, cost and profit</a:t>
+            </a:r>
+            <a:endParaRPr lang="en-US" sz="2700"/>
+          </a:p>
+        </p:txBody>
+      </p:sp>
+      <p:sp>
+        <p:nvSpPr>
+          <p:cNvPr id="6" name="commentary panel"/>
+          <p:cNvSpPr/>
+          <p:nvPr/>
+        </p:nvSpPr>
+        <p:spPr>
+          <a:xfrm>
+            <a:off x="502920" y="3062278"/>
+            <a:ext cx="8138160" cy="1564585"/>
+          </a:xfrm>
+          <a:prstGeom prst="rect">
+            <a:avLst/>
+          </a:prstGeom>
+          <a:solidFill>
+            <a:srgbClr val="E8F9F8"/>
+          </a:solidFill>
+          <a:ln/>
+        </p:spPr>
+        <p:txBody>
+          <a:bodyPr/>
+          <a:lstStyle/>
+          <a:p>
+            <a:endParaRPr lang="en-AU"/>
+          </a:p>
+        </p:txBody>
+      </p:sp>
+      <p:sp>
+        <p:nvSpPr>
+          <p:cNvPr id="7" name="Text 4"/>
+          <p:cNvSpPr txBox="1"/>
+          <p:nvPr/>
+        </p:nvSpPr>
+        <p:spPr>
+          <a:xfrm>
+            <a:off x="685800" y="3135430"/>
+            <a:ext cx="2743200" cy="228600"/>
+          </a:xfrm>
+          <a:prstGeom prst="rect">
+            <a:avLst/>
+          </a:prstGeom>
+          <a:noFill/>
+          <a:ln/>
+        </p:spPr>
+        <p:txBody>
+          <a:bodyPr wrap="square" lIns="0" tIns="0" rIns="0" bIns="0" rtlCol="0" anchor="ctr"/>
+          <a:lstStyle/>
+          <a:p>
+            <a:pPr marL="0" indent="0">
+              <a:buNone/>
+            </a:pPr>
+            <a:r>
+              <a:rPr lang="en-US" sz="900" b="1" kern="0" spc="180">
+                <a:solidFill>
+                  <a:srgbClr val="005358"/>
+                </a:solidFill>
+              </a:rPr>
+              <a:t>COMMENTARY</a:t>
+            </a:r>
+            <a:endParaRPr lang="en-US" sz="900"/>
+          </a:p>
+        </p:txBody>
+      </p:sp>
+      <p:sp>
+        <p:nvSpPr>
+          <p:cNvPr id="8" name="Text 5"/>
+          <p:cNvSpPr txBox="1"/>
+          <p:nvPr/>
+        </p:nvSpPr>
+        <p:spPr>
+          <a:xfrm>
+            <a:off x="685800" y="3309166"/>
+            <a:ext cx="3703320" cy="1290265"/>
+          </a:xfrm>
+          <a:prstGeom prst="rect">
+            <a:avLst/>
+          </a:prstGeom>
+          <a:noFill/>
+          <a:ln/>
+        </p:spPr>
+        <p:txBody>
+          <a:bodyPr wrap="square" lIns="0" tIns="0" rIns="0" bIns="0" rtlCol="0" anchor="t">
+            <a:normAutofit fontScale="92500"/>
+          </a:bodyPr>
+          <a:lstStyle/>
+          <a:p>
+            <a:pPr marL="342900" indent="-342900">
+              <a:lnSpc>
+                <a:spcPts val="1000"/>
+              </a:lnSpc>
+              <a:spcAft>
+                <a:spcPts val="400"/>
+              </a:spcAft>
+              <a:buSzPct val="100000"/>
+              <a:buChar char="•"/>
+            </a:pPr>
+            <a:r>
+              <a:rPr lang="en-US" sz="1000">
+                <a:solidFill>
+                  <a:srgbClr val="3A4453"/>
+                </a:solidFill>
+              </a:rPr>
+              <a:t>Year-to-date EBITDA is $6k against a budget of $223k, a shortfall of approximately $217k.</a:t>
+            </a:r>
+            <a:endParaRPr lang="en-US" sz="800"/>
+          </a:p>
+          <a:p>
+            <a:pPr marL="342900" indent="-342900">
+              <a:lnSpc>
+                <a:spcPts val="1000"/>
+              </a:lnSpc>
+              <a:spcAft>
+                <a:spcPts val="400"/>
+              </a:spcAft>
+              <a:buSzPct val="100000"/>
+              <a:buChar char="•"/>
+            </a:pPr>
+            <a:r>
+              <a:rPr lang="en-US" sz="1000">
+                <a:solidFill>
+                  <a:srgbClr val="3A4453"/>
+                </a:solidFill>
+              </a:rPr>
+              <a:t>The first quarter accounted for 56% of the full-year EBITDA budget, making the current shortfall significant.</a:t>
+            </a:r>
+            <a:endParaRPr lang="en-US" sz="800"/>
+          </a:p>
+          <a:p>
+            <a:pPr marL="342900" indent="-342900">
+              <a:lnSpc>
+                <a:spcPts val="1000"/>
+              </a:lnSpc>
+              <a:spcAft>
+                <a:spcPts val="400"/>
+              </a:spcAft>
+              <a:buSzPct val="100000"/>
+              <a:buChar char="•"/>
+            </a:pPr>
+            <a:r>
+              <a:rPr lang="en-US" sz="1000">
+                <a:solidFill>
+                  <a:srgbClr val="3A4453"/>
+                </a:solidFill>
+              </a:rPr>
+              <a:t>To achieve the $397k annual target, the remaining nine months would need to deliver approximately $391k, compared with the original $175k budget.</a:t>
+            </a:r>
+            <a:endParaRPr lang="en-US" sz="800"/>
+          </a:p>
+        </p:txBody>
+      </p:sp>
+      <p:sp>
+        <p:nvSpPr>
+          <p:cNvPr id="25" name="Slide Number Placeholder 0"/>
+          <p:cNvSpPr>
+            <a:spLocks noGrp="1"/>
+          </p:cNvSpPr>
+          <p:nvPr>
+            <p:ph type="sldNum" sz="quarter" idx="4294967295"/>
+          </p:nvPr>
+        </p:nvSpPr>
+        <p:spPr>
+          <a:xfrm>
+            <a:off x="8092440" y="4736592"/>
+            <a:ext cx="548640" cy="228600"/>
+          </a:xfrm>
+          <a:prstGeom prst="rect">
+            <a:avLst/>
+          </a:prstGeom>
+          <a:extLst>
+            <a:ext uri="{C572A759-6A51-4108-AA02-DFA0A04FC94B}">
+              <ma14:wrappingTextBoxFlag xmlns:ma14="http://schemas.microsoft.com/office/mac/drawingml/2011/main" xmlns="" val="0"/>
+            </a:ext>
+          </a:extLst>
+        </p:spPr>
+        <p:txBody>
+          <a:bodyPr/>
+          <a:lstStyle>
+            <a:lvl1pPr>
+              <a:defRPr sz="800">
+                <a:solidFill>
+                  <a:srgbClr val="6B7585"/>
+                </a:solidFill>
+              </a:defRPr>
+            </a:lvl1pPr>
+          </a:lstStyle>
+          <a:p>
+            <a:pPr algn="r"/>
+            <a:fld id="{F7021451-1387-4CA6-816F-3879F97B5CBC}" type="slidenum">
+              <a:rPr lang="en-US" b="0"/>
+              <a:t>6</a:t>
+            </a:fld>
+            <a:endParaRPr lang="en-US"/>
+          </a:p>
+        </p:txBody>
+      </p:sp>
+      <p:pic>
+        <p:nvPicPr>
+          <p:cNvPr id="26" name="cts logo" descr="cts-logo.png"/>
+          <p:cNvPicPr>
+            <a:picLocks noChangeAspect="1"/>
+          </p:cNvPicPr>
+          <p:nvPr/>
+        </p:nvPicPr>
+        <p:blipFill>
+          <a:blip r:embed="rId4"/>
+          <a:stretch>
+            <a:fillRect/>
+          </a:stretch>
+        </p:blipFill>
+        <p:spPr>
+          <a:xfrm>
+            <a:off x="7680959" y="182880"/>
+            <a:ext cx="960120" cy="539696"/>
+          </a:xfrm>
+          <a:prstGeom prst="rect">
+            <a:avLst/>
+          </a:prstGeom>
+        </p:spPr>
+      </p:pic>
+      <p:sp>
+        <p:nvSpPr>
+          <p:cNvPr id="8" name="Text 5b"/>
+          <p:cNvSpPr txBox="1"/>
+          <p:nvPr/>
+        </p:nvSpPr>
+        <p:spPr>
+          <a:xfrm>
+            <a:off x="4663440" y="3309166"/>
+            <a:ext cx="3703320" cy="1290265"/>
+          </a:xfrm>
+          <a:prstGeom prst="rect">
+            <a:avLst/>
+          </a:prstGeom>
+          <a:noFill/>
+          <a:ln/>
+        </p:spPr>
+        <p:txBody>
+          <a:bodyPr wrap="square" lIns="0" tIns="0" rIns="0" bIns="0" rtlCol="0" anchor="t">
+            <a:normAutofit fontScale="92500"/>
+          </a:bodyPr>
+          <a:lstStyle/>
+          <a:p>
+            <a:pPr marL="342900" indent="-342900">
+              <a:lnSpc>
+                <a:spcPts val="1000"/>
+              </a:lnSpc>
+              <a:spcAft>
+                <a:spcPts val="400"/>
+              </a:spcAft>
+              <a:buSzPct val="100000"/>
+              <a:buChar char="•"/>
+            </a:pPr>
+            <a:r>
+              <a:rPr lang="en-US" sz="1000">
+                <a:solidFill>
+                  <a:srgbClr val="3A4453"/>
+                </a:solidFill>
+              </a:rPr>
+              <a:t>That requirement is around 1.7 times the EBITDA achieved in the whole of last financial year, making the annual target highly unlikely without a significant change in performance.</a:t>
+            </a:r>
+            <a:endParaRPr lang="en-US" sz="800"/>
+          </a:p>
+          <a:p>
+            <a:pPr marL="342900" indent="-342900">
+              <a:lnSpc>
+                <a:spcPts val="1000"/>
+              </a:lnSpc>
+              <a:spcAft>
+                <a:spcPts val="400"/>
+              </a:spcAft>
+              <a:buSzPct val="100000"/>
+              <a:buChar char="•"/>
+            </a:pPr>
+            <a:r>
+              <a:rPr lang="en-US" sz="1000">
+                <a:solidFill>
+                  <a:srgbClr val="3A4453"/>
+                </a:solidFill>
+              </a:rPr>
+              <a:t>Revenue reached 81% of the year-to-date budget, while gross profit reached only 69%. Improving gross margin is a priority.</a:t>
+            </a:r>
+            <a:endParaRPr lang="en-US" sz="800"/>
+          </a:p>
+        </p:txBody>
+      </p:sp>
+    </p:spTree>
+  </p:cSld>
+  <p:clrMapOvr>
+    <a:masterClrMapping/>
+  </p:clrMapOvr>
+</p:sld>
+</file>
+
+<file path=ppt/slides/slide11.xml><?xml version="1.0" encoding="utf-8"?>
+<p:sld xmlns:a="http://schemas.openxmlformats.org/drawingml/2006/main" xmlns:r="http://schemas.openxmlformats.org/officeDocument/2006/relationships" xmlns:p="http://schemas.openxmlformats.org/presentationml/2006/main">
+  <p:cSld name="Slide 7">
+    <p:spTree>
+      <p:nvGrpSpPr>
+        <p:cNvPr id="1" name=""/>
+        <p:cNvGrpSpPr/>
+        <p:nvPr/>
+      </p:nvGrpSpPr>
+      <p:grpSpPr>
+        <a:xfrm>
+          <a:off x="0" y="0"/>
+          <a:ext cx="0" cy="0"/>
+          <a:chOff x="0" y="0"/>
+          <a:chExt cx="0" cy="0"/>
+        </a:xfrm>
+      </p:grpSpPr>
+      <p:sp>
+        <p:nvSpPr>
+          <p:cNvPr id="2" name="Text 0"/>
+          <p:cNvSpPr txBox="1"/>
+          <p:nvPr/>
+        </p:nvSpPr>
+        <p:spPr>
+          <a:xfrm>
+            <a:off x="502920" y="365760"/>
+            <a:ext cx="6400800" cy="274320"/>
+          </a:xfrm>
+          <a:prstGeom prst="rect">
+            <a:avLst/>
+          </a:prstGeom>
+          <a:noFill/>
+          <a:ln/>
+        </p:spPr>
+        <p:txBody>
+          <a:bodyPr wrap="square" lIns="0" tIns="0" rIns="0" bIns="0" rtlCol="0" anchor="ctr"/>
+          <a:lstStyle/>
+          <a:p>
+            <a:pPr marL="0" indent="0">
+              <a:buNone/>
+            </a:pPr>
+            <a:r>
+              <a:rPr lang="en-US" sz="950" b="1" kern="0" spc="220">
+                <a:solidFill>
+                  <a:srgbClr val="122B82"/>
+                </a:solidFill>
+              </a:rPr>
+              <a:t>FINANCIAL PERFORMANCE</a:t>
+            </a:r>
+            <a:endParaRPr lang="en-US" sz="950"/>
+          </a:p>
+        </p:txBody>
+      </p:sp>
+      <p:sp>
+        <p:nvSpPr>
+          <p:cNvPr id="3" name="Text 1"/>
+          <p:cNvSpPr txBox="1"/>
+          <p:nvPr/>
+        </p:nvSpPr>
+        <p:spPr>
+          <a:xfrm>
+            <a:off x="502920" y="640080"/>
+            <a:ext cx="7315200" cy="685800"/>
+          </a:xfrm>
+          <a:prstGeom prst="rect">
+            <a:avLst/>
+          </a:prstGeom>
+          <a:noFill/>
+          <a:ln/>
+        </p:spPr>
+        <p:txBody>
+          <a:bodyPr wrap="square" lIns="0" tIns="0" rIns="0" bIns="0" rtlCol="0" anchor="ctr"/>
+          <a:lstStyle/>
+          <a:p>
+            <a:pPr marL="0" indent="0">
+              <a:buNone/>
+            </a:pPr>
+            <a:r>
+              <a:rPr lang="en-US" sz="2200" b="1">
+                <a:solidFill>
+                  <a:srgbClr val="242C39"/>
+                </a:solidFill>
+              </a:rPr>
+              <a:t>Department result, Sep 26</a:t>
+            </a:r>
+            <a:endParaRPr lang="en-US" sz="2700"/>
+          </a:p>
+        </p:txBody>
+      </p:sp>
+      <p:pic>
+        <p:nvPicPr>
+          <p:cNvPr id="4" name="snip dept_result" descr="/home/user/Claude/deck/snips/dept_result.png"/>
+          <p:cNvPicPr>
+            <a:picLocks noChangeAspect="1"/>
+          </p:cNvPicPr>
+          <p:nvPr/>
+        </p:nvPicPr>
+        <p:blipFill>
+          <a:blip r:embed="rId3"/>
+          <a:stretch>
+            <a:fillRect/>
+          </a:stretch>
+        </p:blipFill>
+        <p:spPr>
+          <a:xfrm>
+            <a:off x="502920" y="1389888"/>
+            <a:ext cx="8138160" cy="1675122"/>
+          </a:xfrm>
+          <a:prstGeom prst="rect">
+            <a:avLst/>
+          </a:prstGeom>
+        </p:spPr>
+      </p:pic>
+      <p:sp>
+        <p:nvSpPr>
+          <p:cNvPr id="6" name="commentary panel"/>
+          <p:cNvSpPr/>
+          <p:nvPr/>
+        </p:nvSpPr>
+        <p:spPr>
+          <a:xfrm>
+            <a:off x="502920" y="3454086"/>
+            <a:ext cx="8138160" cy="1172777"/>
+          </a:xfrm>
+          <a:prstGeom prst="rect">
+            <a:avLst/>
+          </a:prstGeom>
+          <a:solidFill>
+            <a:srgbClr val="E8F9F8"/>
+          </a:solidFill>
+          <a:ln/>
+        </p:spPr>
+        <p:txBody>
+          <a:bodyPr/>
+          <a:lstStyle/>
+          <a:p>
+            <a:endParaRPr lang="en-AU"/>
+          </a:p>
+        </p:txBody>
+      </p:sp>
+      <p:sp>
+        <p:nvSpPr>
+          <p:cNvPr id="7" name="Text 4"/>
+          <p:cNvSpPr txBox="1"/>
+          <p:nvPr/>
+        </p:nvSpPr>
+        <p:spPr>
+          <a:xfrm>
+            <a:off x="685800" y="3527238"/>
+            <a:ext cx="2743200" cy="164592"/>
+          </a:xfrm>
+          <a:prstGeom prst="rect">
+            <a:avLst/>
+          </a:prstGeom>
+          <a:noFill/>
+          <a:ln/>
+        </p:spPr>
+        <p:txBody>
+          <a:bodyPr wrap="square" lIns="0" tIns="0" rIns="0" bIns="0" rtlCol="0" anchor="ctr"/>
+          <a:lstStyle/>
+          <a:p>
+            <a:pPr marL="0" indent="0">
+              <a:buNone/>
+            </a:pPr>
+            <a:r>
+              <a:rPr lang="en-US" sz="850" b="1" kern="0" spc="180">
+                <a:solidFill>
+                  <a:srgbClr val="005358"/>
+                </a:solidFill>
+              </a:rPr>
+              <a:t>COMMENTARY</a:t>
+            </a:r>
+            <a:endParaRPr lang="en-US" sz="850"/>
+          </a:p>
+        </p:txBody>
+      </p:sp>
+      <p:sp>
+        <p:nvSpPr>
+          <p:cNvPr id="8" name="Text 5"/>
+          <p:cNvSpPr txBox="1"/>
+          <p:nvPr/>
+        </p:nvSpPr>
+        <p:spPr>
+          <a:xfrm>
+            <a:off x="685800" y="3700974"/>
+            <a:ext cx="3703320" cy="898457"/>
+          </a:xfrm>
+          <a:prstGeom prst="rect">
+            <a:avLst/>
+          </a:prstGeom>
+          <a:noFill/>
+          <a:ln/>
+        </p:spPr>
+        <p:txBody>
+          <a:bodyPr wrap="square" lIns="0" tIns="0" rIns="0" bIns="0" rtlCol="0" anchor="t">
+            <a:normAutofit/>
+          </a:bodyPr>
+          <a:lstStyle/>
+          <a:p>
+            <a:pPr marL="342900" indent="-342900">
+              <a:lnSpc>
+                <a:spcPts val="1050"/>
+              </a:lnSpc>
+              <a:spcAft>
+                <a:spcPts val="300"/>
+              </a:spcAft>
+              <a:buSzPct val="100000"/>
+              <a:buChar char="•"/>
+            </a:pPr>
+            <a:r>
+              <a:rPr lang="en-US" sz="1000">
+                <a:solidFill>
+                  <a:srgbClr val="3A4453"/>
+                </a:solidFill>
+              </a:rPr>
+              <a:t>Support generated a $29k profit on $243k revenue after its allocated overheads.</a:t>
+            </a:r>
+            <a:endParaRPr lang="en-US" sz="850"/>
+          </a:p>
+          <a:p>
+            <a:pPr marL="342900" indent="-342900">
+              <a:lnSpc>
+                <a:spcPts val="1050"/>
+              </a:lnSpc>
+              <a:spcAft>
+                <a:spcPts val="300"/>
+              </a:spcAft>
+              <a:buSzPct val="100000"/>
+              <a:buChar char="•"/>
+            </a:pPr>
+            <a:r>
+              <a:rPr lang="en-US" sz="1000">
+                <a:solidFill>
+                  <a:srgbClr val="3A4453"/>
+                </a:solidFill>
+              </a:rPr>
+              <a:t>Events achieved a 78% gross margin, but recorded a $54k loss after $111k in allocated overheads and $73k revenue.</a:t>
+            </a:r>
+            <a:endParaRPr lang="en-US" sz="850"/>
+          </a:p>
+        </p:txBody>
+      </p:sp>
+      <p:sp>
+        <p:nvSpPr>
+          <p:cNvPr id="9" name="Text 6"/>
+          <p:cNvSpPr txBox="1"/>
+          <p:nvPr/>
+        </p:nvSpPr>
+        <p:spPr>
+          <a:xfrm>
+            <a:off x="4663440" y="3700974"/>
+            <a:ext cx="3703320" cy="898457"/>
+          </a:xfrm>
+          <a:prstGeom prst="rect">
+            <a:avLst/>
+          </a:prstGeom>
+          <a:noFill/>
+          <a:ln/>
+        </p:spPr>
+        <p:txBody>
+          <a:bodyPr wrap="square" lIns="0" tIns="0" rIns="0" bIns="0" rtlCol="0" anchor="t">
+            <a:normAutofit/>
+          </a:bodyPr>
+          <a:lstStyle/>
+          <a:p>
+            <a:pPr marL="342900" indent="-342900">
+              <a:lnSpc>
+                <a:spcPts val="1050"/>
+              </a:lnSpc>
+              <a:spcAft>
+                <a:spcPts val="300"/>
+              </a:spcAft>
+              <a:buSzPct val="100000"/>
+              <a:buChar char="•"/>
+            </a:pPr>
+            <a:r>
+              <a:rPr lang="en-US" sz="1000">
+                <a:solidFill>
+                  <a:srgbClr val="3A4453"/>
+                </a:solidFill>
+              </a:rPr>
+              <a:t>Integration delivered $235k revenue against a $59k budget. A 10% gross margin limited the final profit to $10k.</a:t>
+            </a:r>
+            <a:endParaRPr lang="en-US" sz="850"/>
+          </a:p>
+          <a:p>
+            <a:pPr marL="342900" indent="-342900">
+              <a:lnSpc>
+                <a:spcPts val="1050"/>
+              </a:lnSpc>
+              <a:spcAft>
+                <a:spcPts val="300"/>
+              </a:spcAft>
+              <a:buSzPct val="100000"/>
+              <a:buChar char="•"/>
+            </a:pPr>
+            <a:r>
+              <a:rPr lang="en-US" sz="1000">
+                <a:solidFill>
+                  <a:srgbClr val="3A4453"/>
+                </a:solidFill>
+              </a:rPr>
+              <a:t>Consulting generated $4k revenue against approximately $20k of overheads. Its operating model and cost allocation require review.</a:t>
+            </a:r>
+            <a:endParaRPr lang="en-US" sz="850"/>
+          </a:p>
+        </p:txBody>
+      </p:sp>
+      <p:sp>
+        <p:nvSpPr>
+          <p:cNvPr id="25" name="Slide Number Placeholder 0"/>
+          <p:cNvSpPr>
+            <a:spLocks noGrp="1"/>
+          </p:cNvSpPr>
+          <p:nvPr>
+            <p:ph type="sldNum" sz="quarter" idx="4294967295"/>
+          </p:nvPr>
+        </p:nvSpPr>
+        <p:spPr>
+          <a:xfrm>
+            <a:off x="8092440" y="4736592"/>
+            <a:ext cx="548640" cy="228600"/>
+          </a:xfrm>
+          <a:prstGeom prst="rect">
+            <a:avLst/>
+          </a:prstGeom>
+          <a:extLst>
+            <a:ext uri="{C572A759-6A51-4108-AA02-DFA0A04FC94B}">
+              <ma14:wrappingTextBoxFlag xmlns:ma14="http://schemas.microsoft.com/office/mac/drawingml/2011/main" xmlns="" val="0"/>
+            </a:ext>
+          </a:extLst>
+        </p:spPr>
+        <p:txBody>
+          <a:bodyPr/>
+          <a:lstStyle>
+            <a:lvl1pPr>
+              <a:defRPr sz="800">
+                <a:solidFill>
+                  <a:srgbClr val="6B7585"/>
+                </a:solidFill>
+              </a:defRPr>
+            </a:lvl1pPr>
+          </a:lstStyle>
+          <a:p>
+            <a:pPr algn="r"/>
+            <a:fld id="{F7021451-1387-4CA6-816F-3879F97B5CBC}" type="slidenum">
+              <a:rPr lang="en-US" b="0"/>
+              <a:t>7</a:t>
+            </a:fld>
+            <a:endParaRPr lang="en-US"/>
+          </a:p>
+        </p:txBody>
+      </p:sp>
+      <p:pic>
+        <p:nvPicPr>
+          <p:cNvPr id="26" name="cts logo" descr="cts-logo.png"/>
+          <p:cNvPicPr>
+            <a:picLocks noChangeAspect="1"/>
+          </p:cNvPicPr>
+          <p:nvPr/>
+        </p:nvPicPr>
+        <p:blipFill>
+          <a:blip r:embed="rId4"/>
+          <a:stretch>
+            <a:fillRect/>
+          </a:stretch>
+        </p:blipFill>
+        <p:spPr>
+          <a:xfrm>
+            <a:off x="7680959" y="182880"/>
+            <a:ext cx="960120" cy="539696"/>
+          </a:xfrm>
+          <a:prstGeom prst="rect">
+            <a:avLst/>
+          </a:prstGeom>
+        </p:spPr>
+      </p:pic>
+    </p:spTree>
+  </p:cSld>
+  <p:clrMapOvr>
+    <a:masterClrMapping/>
+  </p:clrMapOvr>
+</p:sld>
+</file>
+
+<file path=ppt/slides/slide12.xml><?xml version="1.0" encoding="utf-8"?>
+<p:sld xmlns:a="http://schemas.openxmlformats.org/drawingml/2006/main" xmlns:r="http://schemas.openxmlformats.org/officeDocument/2006/relationships" xmlns:p="http://schemas.openxmlformats.org/presentationml/2006/main">
   <p:cSld name="Slide 8">
     <p:spTree>
       <p:nvGrpSpPr>
@@ -5982,7 +6857,7 @@
 </p:sld>
 </file>
 
-<file path=ppt/slides/slide11.xml><?xml version="1.0" encoding="utf-8"?>
+<file path=ppt/slides/slide13.xml><?xml version="1.0" encoding="utf-8"?>
 <p:sld xmlns:a="http://schemas.openxmlformats.org/drawingml/2006/main" xmlns:r="http://schemas.openxmlformats.org/officeDocument/2006/relationships" xmlns:p="http://schemas.openxmlformats.org/presentationml/2006/main">
   <p:cSld name="Slide 9">
     <p:spTree>
@@ -6388,7 +7263,7 @@
 </p:sld>
 </file>
 
-<file path=ppt/slides/slide12.xml><?xml version="1.0" encoding="utf-8"?>
+<file path=ppt/slides/slide14.xml><?xml version="1.0" encoding="utf-8"?>
 <p:sld xmlns:a="http://schemas.openxmlformats.org/drawingml/2006/main" xmlns:r="http://schemas.openxmlformats.org/officeDocument/2006/relationships" xmlns:p="http://schemas.openxmlformats.org/presentationml/2006/main">
   <p:cSld name="Slide 10">
     <p:spTree>
@@ -6794,7 +7669,7 @@
 </p:sld>
 </file>
 
-<file path=ppt/slides/slide13.xml><?xml version="1.0" encoding="utf-8"?>
+<file path=ppt/slides/slide15.xml><?xml version="1.0" encoding="utf-8"?>
 <p:sld xmlns:a="http://schemas.openxmlformats.org/drawingml/2006/main" xmlns:r="http://schemas.openxmlformats.org/officeDocument/2006/relationships" xmlns:p="http://schemas.openxmlformats.org/presentationml/2006/main">
   <p:cSld name="Slide 11">
     <p:spTree>
@@ -7200,7 +8075,7 @@
 </p:sld>
 </file>
 
-<file path=ppt/slides/slide14.xml><?xml version="1.0" encoding="utf-8"?>
+<file path=ppt/slides/slide16.xml><?xml version="1.0" encoding="utf-8"?>
 <p:sld xmlns:a="http://schemas.openxmlformats.org/drawingml/2006/main" xmlns:r="http://schemas.openxmlformats.org/officeDocument/2006/relationships" xmlns:p="http://schemas.openxmlformats.org/presentationml/2006/main">
   <p:cSld name="Slide 12">
     <p:spTree>
@@ -7606,7 +8481,7 @@
 </p:sld>
 </file>
 
-<file path=ppt/slides/slide15.xml><?xml version="1.0" encoding="utf-8"?>
+<file path=ppt/slides/slide17.xml><?xml version="1.0" encoding="utf-8"?>
 <p:sld xmlns:a="http://schemas.openxmlformats.org/drawingml/2006/main" xmlns:r="http://schemas.openxmlformats.org/officeDocument/2006/relationships" xmlns:p="http://schemas.openxmlformats.org/presentationml/2006/main">
   <p:cSld name="Slide 13">
     <p:spTree>
@@ -8012,7 +8887,7 @@
 </p:sld>
 </file>
 
-<file path=ppt/slides/slide16.xml><?xml version="1.0" encoding="utf-8"?>
+<file path=ppt/slides/slide18.xml><?xml version="1.0" encoding="utf-8"?>
 <p:sld xmlns:a="http://schemas.openxmlformats.org/drawingml/2006/main" xmlns:r="http://schemas.openxmlformats.org/officeDocument/2006/relationships" xmlns:p="http://schemas.openxmlformats.org/presentationml/2006/main">
   <p:cSld name="Slide 14">
     <p:spTree>
@@ -8418,7 +9293,7 @@
 </p:sld>
 </file>
 
-<file path=ppt/slides/slide17.xml><?xml version="1.0" encoding="utf-8"?>
+<file path=ppt/slides/slide19.xml><?xml version="1.0" encoding="utf-8"?>
 <p:sld xmlns:a="http://schemas.openxmlformats.org/drawingml/2006/main" xmlns:r="http://schemas.openxmlformats.org/officeDocument/2006/relationships" xmlns:p="http://schemas.openxmlformats.org/presentationml/2006/main">
   <p:cSld name="Slide 15">
     <p:spTree>
@@ -8693,770 +9568,6 @@
           </a:p>
         </p:txBody>
       </p:sp>
-    </p:spTree>
-  </p:cSld>
-  <p:clrMapOvr>
-    <a:masterClrMapping/>
-  </p:clrMapOvr>
-</p:sld>
-</file>
-
-<file path=ppt/slides/slide18.xml><?xml version="1.0" encoding="utf-8"?>
-<p:sld xmlns:a="http://schemas.openxmlformats.org/drawingml/2006/main" xmlns:r="http://schemas.openxmlformats.org/officeDocument/2006/relationships" xmlns:p="http://schemas.openxmlformats.org/presentationml/2006/main">
-  <p:cSld name="Slide 16">
-    <p:spTree>
-      <p:nvGrpSpPr>
-        <p:cNvPr id="1" name=""/>
-        <p:cNvGrpSpPr/>
-        <p:nvPr/>
-      </p:nvGrpSpPr>
-      <p:grpSpPr>
-        <a:xfrm>
-          <a:off x="0" y="0"/>
-          <a:ext cx="0" cy="0"/>
-          <a:chOff x="0" y="0"/>
-          <a:chExt cx="0" cy="0"/>
-        </a:xfrm>
-      </p:grpSpPr>
-      <p:sp>
-        <p:nvSpPr>
-          <p:cNvPr id="2" name="Text 0"/>
-          <p:cNvSpPr txBox="1"/>
-          <p:nvPr/>
-        </p:nvSpPr>
-        <p:spPr>
-          <a:xfrm>
-            <a:off x="502920" y="365760"/>
-            <a:ext cx="6400800" cy="274320"/>
-          </a:xfrm>
-          <a:prstGeom prst="rect">
-            <a:avLst/>
-          </a:prstGeom>
-          <a:noFill/>
-          <a:ln/>
-        </p:spPr>
-        <p:txBody>
-          <a:bodyPr wrap="square" lIns="0" tIns="0" rIns="0" bIns="0" rtlCol="0" anchor="ctr"/>
-          <a:lstStyle/>
-          <a:p>
-            <a:pPr marL="0" indent="0">
-              <a:buNone/>
-            </a:pPr>
-            <a:r>
-              <a:rPr lang="en-US" sz="950" b="1" kern="0" spc="220">
-                <a:solidFill>
-                  <a:srgbClr val="122B82"/>
-                </a:solidFill>
-              </a:rPr>
-              <a:t>WHAT WE SPEND</a:t>
-            </a:r>
-            <a:endParaRPr lang="en-US" sz="950"/>
-          </a:p>
-        </p:txBody>
-      </p:sp>
-      <p:sp>
-        <p:nvSpPr>
-          <p:cNvPr id="3" name="Text 1"/>
-          <p:cNvSpPr txBox="1"/>
-          <p:nvPr/>
-        </p:nvSpPr>
-        <p:spPr>
-          <a:xfrm>
-            <a:off x="502920" y="640080"/>
-            <a:ext cx="7315200" cy="685800"/>
-          </a:xfrm>
-          <a:prstGeom prst="rect">
-            <a:avLst/>
-          </a:prstGeom>
-          <a:noFill/>
-          <a:ln/>
-        </p:spPr>
-        <p:txBody>
-          <a:bodyPr wrap="square" lIns="0" tIns="0" rIns="0" bIns="0" rtlCol="0" anchor="ctr"/>
-          <a:lstStyle/>
-          <a:p>
-            <a:pPr marL="0" indent="0">
-              <a:buNone/>
-            </a:pPr>
-            <a:r>
-              <a:rPr lang="en-US" sz="2200" b="1">
-                <a:solidFill>
-                  <a:srgbClr val="242C39"/>
-                </a:solidFill>
-              </a:rPr>
-              <a:t>Operating cost distribution, year to date</a:t>
-            </a:r>
-            <a:endParaRPr lang="en-US" sz="2700"/>
-          </a:p>
-        </p:txBody>
-      </p:sp>
-      <p:pic>
-        <p:nvPicPr>
-          <p:cNvPr id="4" name="snip cost_dist" descr="/home/user/Claude/deck/snips/cost_dist.png"/>
-          <p:cNvPicPr>
-            <a:picLocks noChangeAspect="1"/>
-          </p:cNvPicPr>
-          <p:nvPr/>
-        </p:nvPicPr>
-        <p:blipFill>
-          <a:blip r:embed="rId3"/>
-          <a:stretch>
-            <a:fillRect/>
-          </a:stretch>
-        </p:blipFill>
-        <p:spPr>
-          <a:xfrm>
-            <a:off x="502920" y="1444752"/>
-            <a:ext cx="4617719" cy="2335216"/>
-          </a:xfrm>
-          <a:prstGeom prst="rect">
-            <a:avLst/>
-          </a:prstGeom>
-        </p:spPr>
-      </p:pic>
-      <p:sp>
-        <p:nvSpPr>
-          <p:cNvPr id="6" name="commentary panel"/>
-          <p:cNvSpPr/>
-          <p:nvPr/>
-        </p:nvSpPr>
-        <p:spPr>
-          <a:xfrm>
-            <a:off x="5349239" y="1463040"/>
-            <a:ext cx="3291840" cy="3154680"/>
-          </a:xfrm>
-          <a:prstGeom prst="rect">
-            <a:avLst/>
-          </a:prstGeom>
-          <a:solidFill>
-            <a:srgbClr val="E8F9F8"/>
-          </a:solidFill>
-          <a:ln/>
-        </p:spPr>
-        <p:txBody>
-          <a:bodyPr/>
-          <a:lstStyle/>
-          <a:p>
-            <a:endParaRPr lang="en-AU"/>
-          </a:p>
-        </p:txBody>
-      </p:sp>
-      <p:sp>
-        <p:nvSpPr>
-          <p:cNvPr id="7" name="Text 4"/>
-          <p:cNvSpPr txBox="1"/>
-          <p:nvPr/>
-        </p:nvSpPr>
-        <p:spPr>
-          <a:xfrm>
-            <a:off x="5532119" y="1627632"/>
-            <a:ext cx="2926080" cy="228600"/>
-          </a:xfrm>
-          <a:prstGeom prst="rect">
-            <a:avLst/>
-          </a:prstGeom>
-          <a:noFill/>
-          <a:ln/>
-        </p:spPr>
-        <p:txBody>
-          <a:bodyPr wrap="square" lIns="0" tIns="0" rIns="0" bIns="0" rtlCol="0" anchor="ctr"/>
-          <a:lstStyle/>
-          <a:p>
-            <a:pPr marL="0" indent="0">
-              <a:buNone/>
-            </a:pPr>
-            <a:r>
-              <a:rPr lang="en-US" sz="900" b="1" kern="0" spc="180">
-                <a:solidFill>
-                  <a:srgbClr val="005358"/>
-                </a:solidFill>
-              </a:rPr>
-              <a:t>COMMENTARY</a:t>
-            </a:r>
-            <a:endParaRPr lang="en-US" sz="900"/>
-          </a:p>
-        </p:txBody>
-      </p:sp>
-      <p:sp>
-        <p:nvSpPr>
-          <p:cNvPr id="8" name="Text 5"/>
-          <p:cNvSpPr txBox="1"/>
-          <p:nvPr/>
-        </p:nvSpPr>
-        <p:spPr>
-          <a:xfrm>
-            <a:off x="5532119" y="1901952"/>
-            <a:ext cx="2926080" cy="2706623"/>
-          </a:xfrm>
-          <a:prstGeom prst="rect">
-            <a:avLst/>
-          </a:prstGeom>
-          <a:noFill/>
-          <a:ln/>
-        </p:spPr>
-        <p:txBody>
-          <a:bodyPr wrap="square" lIns="0" tIns="0" rIns="0" bIns="0" rtlCol="0" anchor="t">
-            <a:normAutofit fontScale="85000" lnSpcReduction="10000"/>
-          </a:bodyPr>
-          <a:lstStyle/>
-          <a:p>
-            <a:pPr marL="342900" indent="-342900">
-              <a:lnSpc>
-                <a:spcPts val="1050"/>
-              </a:lnSpc>
-              <a:spcAft>
-                <a:spcPts val="400"/>
-              </a:spcAft>
-              <a:buSzPct val="100000"/>
-              <a:buChar char="•"/>
-            </a:pPr>
-            <a:r>
-              <a:rPr lang="en-US" sz="1000">
-                <a:solidFill>
-                  <a:srgbClr val="3A4453"/>
-                </a:solidFill>
-              </a:rPr>
-              <a:t>Year-to-date direct labour costs total $621k, with a further $369k in employment overheads. Together, these represent a substantial share of total costs.</a:t>
-            </a:r>
-            <a:endParaRPr lang="en-US" sz="850"/>
-          </a:p>
-          <a:p>
-            <a:pPr marL="342900" indent="-342900">
-              <a:lnSpc>
-                <a:spcPts val="1050"/>
-              </a:lnSpc>
-              <a:spcAft>
-                <a:spcPts val="400"/>
-              </a:spcAft>
-              <a:buSzPct val="100000"/>
-              <a:buChar char="•"/>
-            </a:pPr>
-            <a:r>
-              <a:rPr lang="en-US" sz="1000">
-                <a:solidFill>
-                  <a:srgbClr val="3A4453"/>
-                </a:solidFill>
-              </a:rPr>
-              <a:t>Labour is the largest cost category and has a major impact on profitability.</a:t>
-            </a:r>
-            <a:endParaRPr lang="en-US" sz="850"/>
-          </a:p>
-          <a:p>
-            <a:pPr marL="342900" indent="-342900">
-              <a:lnSpc>
-                <a:spcPts val="1050"/>
-              </a:lnSpc>
-              <a:spcAft>
-                <a:spcPts val="400"/>
-              </a:spcAft>
-              <a:buSzPct val="100000"/>
-              <a:buChar char="•"/>
-            </a:pPr>
-            <a:r>
-              <a:rPr lang="en-US" sz="1000">
-                <a:solidFill>
-                  <a:srgbClr val="3A4453"/>
-                </a:solidFill>
-              </a:rPr>
-              <a:t>Much of the employment overhead is relatively fixed in the short term, even when revenue fluctuates.</a:t>
-            </a:r>
-            <a:endParaRPr lang="en-US" sz="850"/>
-          </a:p>
-          <a:p>
-            <a:pPr marL="342900" indent="-342900">
-              <a:lnSpc>
-                <a:spcPts val="1050"/>
-              </a:lnSpc>
-              <a:spcAft>
-                <a:spcPts val="400"/>
-              </a:spcAft>
-              <a:buSzPct val="100000"/>
-              <a:buChar char="•"/>
-            </a:pPr>
-            <a:r>
-              <a:rPr lang="en-US" sz="1000">
-                <a:solidFill>
-                  <a:srgbClr val="3A4453"/>
-                </a:solidFill>
-              </a:rPr>
-              <a:t>Equipment and services costs of $347k are more closely linked to project activity.</a:t>
-            </a:r>
-            <a:endParaRPr lang="en-US" sz="850"/>
-          </a:p>
-          <a:p>
-            <a:pPr marL="342900" indent="-342900">
-              <a:lnSpc>
-                <a:spcPts val="1050"/>
-              </a:lnSpc>
-              <a:spcAft>
-                <a:spcPts val="400"/>
-              </a:spcAft>
-              <a:buSzPct val="100000"/>
-              <a:buChar char="•"/>
-            </a:pPr>
-            <a:r>
-              <a:rPr lang="en-US" sz="1000">
-                <a:solidFill>
-                  <a:srgbClr val="3A4453"/>
-                </a:solidFill>
-              </a:rPr>
-              <a:t>Material cost reductions would require a review of staffing capacity, utilisation and premises costs, while maintaining service delivery.</a:t>
-            </a:r>
-            <a:endParaRPr lang="en-US" sz="850"/>
-          </a:p>
-        </p:txBody>
-      </p:sp>
-      <p:sp>
-        <p:nvSpPr>
-          <p:cNvPr id="25" name="Slide Number Placeholder 0"/>
-          <p:cNvSpPr>
-            <a:spLocks noGrp="1"/>
-          </p:cNvSpPr>
-          <p:nvPr>
-            <p:ph type="sldNum" sz="quarter" idx="4294967295"/>
-          </p:nvPr>
-        </p:nvSpPr>
-        <p:spPr>
-          <a:xfrm>
-            <a:off x="8092440" y="4736592"/>
-            <a:ext cx="548640" cy="228600"/>
-          </a:xfrm>
-          <a:prstGeom prst="rect">
-            <a:avLst/>
-          </a:prstGeom>
-          <a:extLst>
-            <a:ext uri="{C572A759-6A51-4108-AA02-DFA0A04FC94B}">
-              <ma14:wrappingTextBoxFlag xmlns:ma14="http://schemas.microsoft.com/office/mac/drawingml/2011/main" xmlns="" val="0"/>
-            </a:ext>
-          </a:extLst>
-        </p:spPr>
-        <p:txBody>
-          <a:bodyPr/>
-          <a:lstStyle>
-            <a:lvl1pPr>
-              <a:defRPr sz="800">
-                <a:solidFill>
-                  <a:srgbClr val="6B7585"/>
-                </a:solidFill>
-              </a:defRPr>
-            </a:lvl1pPr>
-          </a:lstStyle>
-          <a:p>
-            <a:pPr algn="r"/>
-            <a:fld id="{F7021451-1387-4CA6-816F-3879F97B5CBC}" type="slidenum">
-              <a:rPr lang="en-US" b="0"/>
-              <a:t>16</a:t>
-            </a:fld>
-            <a:endParaRPr lang="en-US"/>
-          </a:p>
-        </p:txBody>
-      </p:sp>
-      <p:pic>
-        <p:nvPicPr>
-          <p:cNvPr id="26" name="cts logo" descr="cts-logo.png"/>
-          <p:cNvPicPr>
-            <a:picLocks noChangeAspect="1"/>
-          </p:cNvPicPr>
-          <p:nvPr/>
-        </p:nvPicPr>
-        <p:blipFill>
-          <a:blip r:embed="rId4"/>
-          <a:stretch>
-            <a:fillRect/>
-          </a:stretch>
-        </p:blipFill>
-        <p:spPr>
-          <a:xfrm>
-            <a:off x="7680959" y="182880"/>
-            <a:ext cx="960120" cy="539696"/>
-          </a:xfrm>
-          <a:prstGeom prst="rect">
-            <a:avLst/>
-          </a:prstGeom>
-        </p:spPr>
-      </p:pic>
-    </p:spTree>
-  </p:cSld>
-  <p:clrMapOvr>
-    <a:masterClrMapping/>
-  </p:clrMapOvr>
-</p:sld>
-</file>
-
-<file path=ppt/slides/slide19.xml><?xml version="1.0" encoding="utf-8"?>
-<p:sld xmlns:a="http://schemas.openxmlformats.org/drawingml/2006/main" xmlns:r="http://schemas.openxmlformats.org/officeDocument/2006/relationships" xmlns:p="http://schemas.openxmlformats.org/presentationml/2006/main">
-  <p:cSld name="Slide 17">
-    <p:spTree>
-      <p:nvGrpSpPr>
-        <p:cNvPr id="1" name=""/>
-        <p:cNvGrpSpPr/>
-        <p:nvPr/>
-      </p:nvGrpSpPr>
-      <p:grpSpPr>
-        <a:xfrm>
-          <a:off x="0" y="0"/>
-          <a:ext cx="0" cy="0"/>
-          <a:chOff x="0" y="0"/>
-          <a:chExt cx="0" cy="0"/>
-        </a:xfrm>
-      </p:grpSpPr>
-      <p:sp>
-        <p:nvSpPr>
-          <p:cNvPr id="2" name="Text 0"/>
-          <p:cNvSpPr txBox="1"/>
-          <p:nvPr/>
-        </p:nvSpPr>
-        <p:spPr>
-          <a:xfrm>
-            <a:off x="502920" y="365760"/>
-            <a:ext cx="6400800" cy="274320"/>
-          </a:xfrm>
-          <a:prstGeom prst="rect">
-            <a:avLst/>
-          </a:prstGeom>
-          <a:noFill/>
-          <a:ln/>
-        </p:spPr>
-        <p:txBody>
-          <a:bodyPr wrap="square" lIns="0" tIns="0" rIns="0" bIns="0" rtlCol="0" anchor="ctr"/>
-          <a:lstStyle/>
-          <a:p>
-            <a:pPr marL="0" indent="0">
-              <a:buNone/>
-            </a:pPr>
-            <a:r>
-              <a:rPr lang="en-US" sz="950" b="1" kern="0" spc="220">
-                <a:solidFill>
-                  <a:srgbClr val="122B82"/>
-                </a:solidFill>
-              </a:rPr>
-              <a:t>WHAT WE SPEND</a:t>
-            </a:r>
-            <a:endParaRPr lang="en-US" sz="950"/>
-          </a:p>
-        </p:txBody>
-      </p:sp>
-      <p:sp>
-        <p:nvSpPr>
-          <p:cNvPr id="3" name="Text 1"/>
-          <p:cNvSpPr txBox="1"/>
-          <p:nvPr/>
-        </p:nvSpPr>
-        <p:spPr>
-          <a:xfrm>
-            <a:off x="502920" y="640080"/>
-            <a:ext cx="7315200" cy="685800"/>
-          </a:xfrm>
-          <a:prstGeom prst="rect">
-            <a:avLst/>
-          </a:prstGeom>
-          <a:noFill/>
-          <a:ln/>
-        </p:spPr>
-        <p:txBody>
-          <a:bodyPr wrap="square" lIns="0" tIns="0" rIns="0" bIns="0" rtlCol="0" anchor="ctr"/>
-          <a:lstStyle/>
-          <a:p>
-            <a:pPr marL="0" indent="0">
-              <a:buNone/>
-            </a:pPr>
-            <a:r>
-              <a:rPr lang="en-US" sz="2200" b="1">
-                <a:solidFill>
-                  <a:srgbClr val="242C39"/>
-                </a:solidFill>
-              </a:rPr>
-              <a:t>Other operating expenses, year to date</a:t>
-            </a:r>
-            <a:endParaRPr lang="en-US" sz="2700"/>
-          </a:p>
-        </p:txBody>
-      </p:sp>
-      <p:pic>
-        <p:nvPicPr>
-          <p:cNvPr id="4" name="snip other_opex" descr="/home/user/Claude/deck/snips/other_opex.png"/>
-          <p:cNvPicPr>
-            <a:picLocks noChangeAspect="1"/>
-          </p:cNvPicPr>
-          <p:nvPr/>
-        </p:nvPicPr>
-        <p:blipFill>
-          <a:blip r:embed="rId3"/>
-          <a:stretch>
-            <a:fillRect/>
-          </a:stretch>
-        </p:blipFill>
-        <p:spPr>
-          <a:xfrm>
-            <a:off x="502920" y="1444752"/>
-            <a:ext cx="5349239" cy="2463947"/>
-          </a:xfrm>
-          <a:prstGeom prst="rect">
-            <a:avLst/>
-          </a:prstGeom>
-        </p:spPr>
-      </p:pic>
-      <p:sp>
-        <p:nvSpPr>
-          <p:cNvPr id="6" name="commentary panel"/>
-          <p:cNvSpPr/>
-          <p:nvPr/>
-        </p:nvSpPr>
-        <p:spPr>
-          <a:xfrm>
-            <a:off x="6080759" y="1463040"/>
-            <a:ext cx="2560320" cy="3154680"/>
-          </a:xfrm>
-          <a:prstGeom prst="rect">
-            <a:avLst/>
-          </a:prstGeom>
-          <a:solidFill>
-            <a:srgbClr val="E8F9F8"/>
-          </a:solidFill>
-          <a:ln/>
-        </p:spPr>
-        <p:txBody>
-          <a:bodyPr/>
-          <a:lstStyle/>
-          <a:p>
-            <a:endParaRPr lang="en-AU"/>
-          </a:p>
-        </p:txBody>
-      </p:sp>
-      <p:sp>
-        <p:nvSpPr>
-          <p:cNvPr id="7" name="Text 4"/>
-          <p:cNvSpPr txBox="1"/>
-          <p:nvPr/>
-        </p:nvSpPr>
-        <p:spPr>
-          <a:xfrm>
-            <a:off x="6263639" y="1627632"/>
-            <a:ext cx="2194560" cy="228600"/>
-          </a:xfrm>
-          <a:prstGeom prst="rect">
-            <a:avLst/>
-          </a:prstGeom>
-          <a:noFill/>
-          <a:ln/>
-        </p:spPr>
-        <p:txBody>
-          <a:bodyPr wrap="square" lIns="0" tIns="0" rIns="0" bIns="0" rtlCol="0" anchor="ctr"/>
-          <a:lstStyle/>
-          <a:p>
-            <a:pPr marL="0" indent="0">
-              <a:buNone/>
-            </a:pPr>
-            <a:r>
-              <a:rPr lang="en-US" sz="900" b="1" kern="0" spc="180">
-                <a:solidFill>
-                  <a:srgbClr val="005358"/>
-                </a:solidFill>
-              </a:rPr>
-              <a:t>COMMENTARY</a:t>
-            </a:r>
-            <a:endParaRPr lang="en-US" sz="900"/>
-          </a:p>
-        </p:txBody>
-      </p:sp>
-      <p:sp>
-        <p:nvSpPr>
-          <p:cNvPr id="8" name="Text 5"/>
-          <p:cNvSpPr txBox="1"/>
-          <p:nvPr/>
-        </p:nvSpPr>
-        <p:spPr>
-          <a:xfrm>
-            <a:off x="6263639" y="1901952"/>
-            <a:ext cx="2194560" cy="2706623"/>
-          </a:xfrm>
-          <a:prstGeom prst="rect">
-            <a:avLst/>
-          </a:prstGeom>
-          <a:noFill/>
-          <a:ln/>
-        </p:spPr>
-        <p:txBody>
-          <a:bodyPr wrap="square" lIns="0" tIns="0" rIns="0" bIns="0" rtlCol="0" anchor="t">
-            <a:normAutofit/>
-          </a:bodyPr>
-          <a:lstStyle/>
-          <a:p>
-            <a:pPr marL="342900" indent="-342900">
-              <a:lnSpc>
-                <a:spcPts val="1150"/>
-              </a:lnSpc>
-              <a:spcAft>
-                <a:spcPts val="400"/>
-              </a:spcAft>
-              <a:buSzPct val="100000"/>
-              <a:buChar char="•"/>
-            </a:pPr>
-            <a:r>
-              <a:rPr lang="en-US" sz="1000">
-                <a:solidFill>
-                  <a:srgbClr val="3A4453"/>
-                </a:solidFill>
-              </a:rPr>
-              <a:t>Rent and property outgoings total approximately $77k year to date, making premises the largest expense in this category.</a:t>
-            </a:r>
-            <a:endParaRPr lang="en-US" sz="900"/>
-          </a:p>
-          <a:p>
-            <a:pPr marL="342900" indent="-342900">
-              <a:lnSpc>
-                <a:spcPts val="1150"/>
-              </a:lnSpc>
-              <a:spcAft>
-                <a:spcPts val="400"/>
-              </a:spcAft>
-              <a:buSzPct val="100000"/>
-              <a:buChar char="•"/>
-            </a:pPr>
-            <a:r>
-              <a:rPr lang="en-US" sz="1000">
-                <a:solidFill>
-                  <a:srgbClr val="3A4453"/>
-                </a:solidFill>
-              </a:rPr>
-              <a:t>IT network support is the next largest cost at approximately $40k.</a:t>
-            </a:r>
-            <a:endParaRPr lang="en-US" sz="900"/>
-          </a:p>
-          <a:p>
-            <a:pPr marL="342900" indent="-342900">
-              <a:lnSpc>
-                <a:spcPts val="1150"/>
-              </a:lnSpc>
-              <a:spcAft>
-                <a:spcPts val="400"/>
-              </a:spcAft>
-              <a:buSzPct val="100000"/>
-              <a:buChar char="•"/>
-            </a:pPr>
-            <a:r>
-              <a:rPr lang="en-US" sz="1000">
-                <a:solidFill>
-                  <a:srgbClr val="3A4453"/>
-                </a:solidFill>
-              </a:rPr>
-              <a:t>Most remaining individual categories are below $6k for the quarter.</a:t>
-            </a:r>
-            <a:endParaRPr lang="en-US" sz="900"/>
-          </a:p>
-          <a:p>
-            <a:pPr marL="342900" indent="-342900">
-              <a:lnSpc>
-                <a:spcPts val="1150"/>
-              </a:lnSpc>
-              <a:spcAft>
-                <a:spcPts val="400"/>
-              </a:spcAft>
-              <a:buSzPct val="100000"/>
-              <a:buChar char="•"/>
-            </a:pPr>
-            <a:r>
-              <a:rPr lang="en-US" sz="1000">
-                <a:solidFill>
-                  <a:srgbClr val="3A4453"/>
-                </a:solidFill>
-              </a:rPr>
-              <a:t>Smaller expense reductions may help, but are unlikely to materially change overall profitability.</a:t>
-            </a:r>
-            <a:endParaRPr lang="en-US" sz="900"/>
-          </a:p>
-          <a:p>
-            <a:pPr marL="342900" indent="-342900">
-              <a:lnSpc>
-                <a:spcPts val="1150"/>
-              </a:lnSpc>
-              <a:spcAft>
-                <a:spcPts val="400"/>
-              </a:spcAft>
-              <a:buSzPct val="100000"/>
-              <a:buChar char="•"/>
-            </a:pPr>
-            <a:r>
-              <a:rPr lang="en-US" sz="1000">
-                <a:solidFill>
-                  <a:srgbClr val="3A4453"/>
-                </a:solidFill>
-              </a:rPr>
-              <a:t>Any substantial saving in this category would require a review of premises and lease commitments.</a:t>
-            </a:r>
-            <a:endParaRPr lang="en-US" sz="900"/>
-          </a:p>
-        </p:txBody>
-      </p:sp>
-      <p:sp>
-        <p:nvSpPr>
-          <p:cNvPr id="25" name="Slide Number Placeholder 0"/>
-          <p:cNvSpPr>
-            <a:spLocks noGrp="1"/>
-          </p:cNvSpPr>
-          <p:nvPr>
-            <p:ph type="sldNum" sz="quarter" idx="4294967295"/>
-          </p:nvPr>
-        </p:nvSpPr>
-        <p:spPr>
-          <a:xfrm>
-            <a:off x="8092440" y="4736592"/>
-            <a:ext cx="548640" cy="228600"/>
-          </a:xfrm>
-          <a:prstGeom prst="rect">
-            <a:avLst/>
-          </a:prstGeom>
-          <a:extLst>
-            <a:ext uri="{C572A759-6A51-4108-AA02-DFA0A04FC94B}">
-              <ma14:wrappingTextBoxFlag xmlns:ma14="http://schemas.microsoft.com/office/mac/drawingml/2011/main" xmlns="" val="0"/>
-            </a:ext>
-          </a:extLst>
-        </p:spPr>
-        <p:txBody>
-          <a:bodyPr/>
-          <a:lstStyle>
-            <a:lvl1pPr>
-              <a:defRPr sz="800">
-                <a:solidFill>
-                  <a:srgbClr val="6B7585"/>
-                </a:solidFill>
-              </a:defRPr>
-            </a:lvl1pPr>
-          </a:lstStyle>
-          <a:p>
-            <a:pPr algn="r"/>
-            <a:fld id="{F7021451-1387-4CA6-816F-3879F97B5CBC}" type="slidenum">
-              <a:rPr lang="en-US" b="0"/>
-              <a:t>17</a:t>
-            </a:fld>
-            <a:endParaRPr lang="en-US"/>
-          </a:p>
-        </p:txBody>
-      </p:sp>
-      <p:pic>
-        <p:nvPicPr>
-          <p:cNvPr id="26" name="cts logo" descr="cts-logo.png"/>
-          <p:cNvPicPr>
-            <a:picLocks noChangeAspect="1"/>
-          </p:cNvPicPr>
-          <p:nvPr/>
-        </p:nvPicPr>
-        <p:blipFill>
-          <a:blip r:embed="rId4"/>
-          <a:stretch>
-            <a:fillRect/>
-          </a:stretch>
-        </p:blipFill>
-        <p:spPr>
-          <a:xfrm>
-            <a:off x="7680959" y="182880"/>
-            <a:ext cx="960120" cy="539696"/>
-          </a:xfrm>
-          <a:prstGeom prst="rect">
-            <a:avLst/>
-          </a:prstGeom>
-        </p:spPr>
-      </p:pic>
     </p:spTree>
   </p:cSld>
   <p:clrMapOvr>
@@ -10308,6 +10419,770 @@
 
 <file path=ppt/slides/slide20.xml><?xml version="1.0" encoding="utf-8"?>
 <p:sld xmlns:a="http://schemas.openxmlformats.org/drawingml/2006/main" xmlns:r="http://schemas.openxmlformats.org/officeDocument/2006/relationships" xmlns:p="http://schemas.openxmlformats.org/presentationml/2006/main">
+  <p:cSld name="Slide 16">
+    <p:spTree>
+      <p:nvGrpSpPr>
+        <p:cNvPr id="1" name=""/>
+        <p:cNvGrpSpPr/>
+        <p:nvPr/>
+      </p:nvGrpSpPr>
+      <p:grpSpPr>
+        <a:xfrm>
+          <a:off x="0" y="0"/>
+          <a:ext cx="0" cy="0"/>
+          <a:chOff x="0" y="0"/>
+          <a:chExt cx="0" cy="0"/>
+        </a:xfrm>
+      </p:grpSpPr>
+      <p:sp>
+        <p:nvSpPr>
+          <p:cNvPr id="2" name="Text 0"/>
+          <p:cNvSpPr txBox="1"/>
+          <p:nvPr/>
+        </p:nvSpPr>
+        <p:spPr>
+          <a:xfrm>
+            <a:off x="502920" y="365760"/>
+            <a:ext cx="6400800" cy="274320"/>
+          </a:xfrm>
+          <a:prstGeom prst="rect">
+            <a:avLst/>
+          </a:prstGeom>
+          <a:noFill/>
+          <a:ln/>
+        </p:spPr>
+        <p:txBody>
+          <a:bodyPr wrap="square" lIns="0" tIns="0" rIns="0" bIns="0" rtlCol="0" anchor="ctr"/>
+          <a:lstStyle/>
+          <a:p>
+            <a:pPr marL="0" indent="0">
+              <a:buNone/>
+            </a:pPr>
+            <a:r>
+              <a:rPr lang="en-US" sz="950" b="1" kern="0" spc="220">
+                <a:solidFill>
+                  <a:srgbClr val="122B82"/>
+                </a:solidFill>
+              </a:rPr>
+              <a:t>WHAT WE SPEND</a:t>
+            </a:r>
+            <a:endParaRPr lang="en-US" sz="950"/>
+          </a:p>
+        </p:txBody>
+      </p:sp>
+      <p:sp>
+        <p:nvSpPr>
+          <p:cNvPr id="3" name="Text 1"/>
+          <p:cNvSpPr txBox="1"/>
+          <p:nvPr/>
+        </p:nvSpPr>
+        <p:spPr>
+          <a:xfrm>
+            <a:off x="502920" y="640080"/>
+            <a:ext cx="7315200" cy="685800"/>
+          </a:xfrm>
+          <a:prstGeom prst="rect">
+            <a:avLst/>
+          </a:prstGeom>
+          <a:noFill/>
+          <a:ln/>
+        </p:spPr>
+        <p:txBody>
+          <a:bodyPr wrap="square" lIns="0" tIns="0" rIns="0" bIns="0" rtlCol="0" anchor="ctr"/>
+          <a:lstStyle/>
+          <a:p>
+            <a:pPr marL="0" indent="0">
+              <a:buNone/>
+            </a:pPr>
+            <a:r>
+              <a:rPr lang="en-US" sz="2200" b="1">
+                <a:solidFill>
+                  <a:srgbClr val="242C39"/>
+                </a:solidFill>
+              </a:rPr>
+              <a:t>Operating cost distribution, year to date</a:t>
+            </a:r>
+            <a:endParaRPr lang="en-US" sz="2700"/>
+          </a:p>
+        </p:txBody>
+      </p:sp>
+      <p:pic>
+        <p:nvPicPr>
+          <p:cNvPr id="4" name="snip cost_dist" descr="/home/user/Claude/deck/snips/cost_dist.png"/>
+          <p:cNvPicPr>
+            <a:picLocks noChangeAspect="1"/>
+          </p:cNvPicPr>
+          <p:nvPr/>
+        </p:nvPicPr>
+        <p:blipFill>
+          <a:blip r:embed="rId3"/>
+          <a:stretch>
+            <a:fillRect/>
+          </a:stretch>
+        </p:blipFill>
+        <p:spPr>
+          <a:xfrm>
+            <a:off x="502920" y="1444752"/>
+            <a:ext cx="4617719" cy="2335216"/>
+          </a:xfrm>
+          <a:prstGeom prst="rect">
+            <a:avLst/>
+          </a:prstGeom>
+        </p:spPr>
+      </p:pic>
+      <p:sp>
+        <p:nvSpPr>
+          <p:cNvPr id="6" name="commentary panel"/>
+          <p:cNvSpPr/>
+          <p:nvPr/>
+        </p:nvSpPr>
+        <p:spPr>
+          <a:xfrm>
+            <a:off x="5349239" y="1463040"/>
+            <a:ext cx="3291840" cy="3154680"/>
+          </a:xfrm>
+          <a:prstGeom prst="rect">
+            <a:avLst/>
+          </a:prstGeom>
+          <a:solidFill>
+            <a:srgbClr val="E8F9F8"/>
+          </a:solidFill>
+          <a:ln/>
+        </p:spPr>
+        <p:txBody>
+          <a:bodyPr/>
+          <a:lstStyle/>
+          <a:p>
+            <a:endParaRPr lang="en-AU"/>
+          </a:p>
+        </p:txBody>
+      </p:sp>
+      <p:sp>
+        <p:nvSpPr>
+          <p:cNvPr id="7" name="Text 4"/>
+          <p:cNvSpPr txBox="1"/>
+          <p:nvPr/>
+        </p:nvSpPr>
+        <p:spPr>
+          <a:xfrm>
+            <a:off x="5532119" y="1627632"/>
+            <a:ext cx="2926080" cy="228600"/>
+          </a:xfrm>
+          <a:prstGeom prst="rect">
+            <a:avLst/>
+          </a:prstGeom>
+          <a:noFill/>
+          <a:ln/>
+        </p:spPr>
+        <p:txBody>
+          <a:bodyPr wrap="square" lIns="0" tIns="0" rIns="0" bIns="0" rtlCol="0" anchor="ctr"/>
+          <a:lstStyle/>
+          <a:p>
+            <a:pPr marL="0" indent="0">
+              <a:buNone/>
+            </a:pPr>
+            <a:r>
+              <a:rPr lang="en-US" sz="900" b="1" kern="0" spc="180">
+                <a:solidFill>
+                  <a:srgbClr val="005358"/>
+                </a:solidFill>
+              </a:rPr>
+              <a:t>COMMENTARY</a:t>
+            </a:r>
+            <a:endParaRPr lang="en-US" sz="900"/>
+          </a:p>
+        </p:txBody>
+      </p:sp>
+      <p:sp>
+        <p:nvSpPr>
+          <p:cNvPr id="8" name="Text 5"/>
+          <p:cNvSpPr txBox="1"/>
+          <p:nvPr/>
+        </p:nvSpPr>
+        <p:spPr>
+          <a:xfrm>
+            <a:off x="5532119" y="1901952"/>
+            <a:ext cx="2926080" cy="2706623"/>
+          </a:xfrm>
+          <a:prstGeom prst="rect">
+            <a:avLst/>
+          </a:prstGeom>
+          <a:noFill/>
+          <a:ln/>
+        </p:spPr>
+        <p:txBody>
+          <a:bodyPr wrap="square" lIns="0" tIns="0" rIns="0" bIns="0" rtlCol="0" anchor="t">
+            <a:normAutofit fontScale="85000" lnSpcReduction="10000"/>
+          </a:bodyPr>
+          <a:lstStyle/>
+          <a:p>
+            <a:pPr marL="342900" indent="-342900">
+              <a:lnSpc>
+                <a:spcPts val="1050"/>
+              </a:lnSpc>
+              <a:spcAft>
+                <a:spcPts val="400"/>
+              </a:spcAft>
+              <a:buSzPct val="100000"/>
+              <a:buChar char="•"/>
+            </a:pPr>
+            <a:r>
+              <a:rPr lang="en-US" sz="1000">
+                <a:solidFill>
+                  <a:srgbClr val="3A4453"/>
+                </a:solidFill>
+              </a:rPr>
+              <a:t>Year-to-date direct labour costs total $621k, with a further $369k in employment overheads. Together, these represent a substantial share of total costs.</a:t>
+            </a:r>
+            <a:endParaRPr lang="en-US" sz="850"/>
+          </a:p>
+          <a:p>
+            <a:pPr marL="342900" indent="-342900">
+              <a:lnSpc>
+                <a:spcPts val="1050"/>
+              </a:lnSpc>
+              <a:spcAft>
+                <a:spcPts val="400"/>
+              </a:spcAft>
+              <a:buSzPct val="100000"/>
+              <a:buChar char="•"/>
+            </a:pPr>
+            <a:r>
+              <a:rPr lang="en-US" sz="1000">
+                <a:solidFill>
+                  <a:srgbClr val="3A4453"/>
+                </a:solidFill>
+              </a:rPr>
+              <a:t>Labour is the largest cost category and has a major impact on profitability.</a:t>
+            </a:r>
+            <a:endParaRPr lang="en-US" sz="850"/>
+          </a:p>
+          <a:p>
+            <a:pPr marL="342900" indent="-342900">
+              <a:lnSpc>
+                <a:spcPts val="1050"/>
+              </a:lnSpc>
+              <a:spcAft>
+                <a:spcPts val="400"/>
+              </a:spcAft>
+              <a:buSzPct val="100000"/>
+              <a:buChar char="•"/>
+            </a:pPr>
+            <a:r>
+              <a:rPr lang="en-US" sz="1000">
+                <a:solidFill>
+                  <a:srgbClr val="3A4453"/>
+                </a:solidFill>
+              </a:rPr>
+              <a:t>Much of the employment overhead is relatively fixed in the short term, even when revenue fluctuates.</a:t>
+            </a:r>
+            <a:endParaRPr lang="en-US" sz="850"/>
+          </a:p>
+          <a:p>
+            <a:pPr marL="342900" indent="-342900">
+              <a:lnSpc>
+                <a:spcPts val="1050"/>
+              </a:lnSpc>
+              <a:spcAft>
+                <a:spcPts val="400"/>
+              </a:spcAft>
+              <a:buSzPct val="100000"/>
+              <a:buChar char="•"/>
+            </a:pPr>
+            <a:r>
+              <a:rPr lang="en-US" sz="1000">
+                <a:solidFill>
+                  <a:srgbClr val="3A4453"/>
+                </a:solidFill>
+              </a:rPr>
+              <a:t>Equipment and services costs of $347k are more closely linked to project activity.</a:t>
+            </a:r>
+            <a:endParaRPr lang="en-US" sz="850"/>
+          </a:p>
+          <a:p>
+            <a:pPr marL="342900" indent="-342900">
+              <a:lnSpc>
+                <a:spcPts val="1050"/>
+              </a:lnSpc>
+              <a:spcAft>
+                <a:spcPts val="400"/>
+              </a:spcAft>
+              <a:buSzPct val="100000"/>
+              <a:buChar char="•"/>
+            </a:pPr>
+            <a:r>
+              <a:rPr lang="en-US" sz="1000">
+                <a:solidFill>
+                  <a:srgbClr val="3A4453"/>
+                </a:solidFill>
+              </a:rPr>
+              <a:t>Material cost reductions would require a review of staffing capacity, utilisation and premises costs, while maintaining service delivery.</a:t>
+            </a:r>
+            <a:endParaRPr lang="en-US" sz="850"/>
+          </a:p>
+        </p:txBody>
+      </p:sp>
+      <p:sp>
+        <p:nvSpPr>
+          <p:cNvPr id="25" name="Slide Number Placeholder 0"/>
+          <p:cNvSpPr>
+            <a:spLocks noGrp="1"/>
+          </p:cNvSpPr>
+          <p:nvPr>
+            <p:ph type="sldNum" sz="quarter" idx="4294967295"/>
+          </p:nvPr>
+        </p:nvSpPr>
+        <p:spPr>
+          <a:xfrm>
+            <a:off x="8092440" y="4736592"/>
+            <a:ext cx="548640" cy="228600"/>
+          </a:xfrm>
+          <a:prstGeom prst="rect">
+            <a:avLst/>
+          </a:prstGeom>
+          <a:extLst>
+            <a:ext uri="{C572A759-6A51-4108-AA02-DFA0A04FC94B}">
+              <ma14:wrappingTextBoxFlag xmlns:ma14="http://schemas.microsoft.com/office/mac/drawingml/2011/main" xmlns="" val="0"/>
+            </a:ext>
+          </a:extLst>
+        </p:spPr>
+        <p:txBody>
+          <a:bodyPr/>
+          <a:lstStyle>
+            <a:lvl1pPr>
+              <a:defRPr sz="800">
+                <a:solidFill>
+                  <a:srgbClr val="6B7585"/>
+                </a:solidFill>
+              </a:defRPr>
+            </a:lvl1pPr>
+          </a:lstStyle>
+          <a:p>
+            <a:pPr algn="r"/>
+            <a:fld id="{F7021451-1387-4CA6-816F-3879F97B5CBC}" type="slidenum">
+              <a:rPr lang="en-US" b="0"/>
+              <a:t>16</a:t>
+            </a:fld>
+            <a:endParaRPr lang="en-US"/>
+          </a:p>
+        </p:txBody>
+      </p:sp>
+      <p:pic>
+        <p:nvPicPr>
+          <p:cNvPr id="26" name="cts logo" descr="cts-logo.png"/>
+          <p:cNvPicPr>
+            <a:picLocks noChangeAspect="1"/>
+          </p:cNvPicPr>
+          <p:nvPr/>
+        </p:nvPicPr>
+        <p:blipFill>
+          <a:blip r:embed="rId4"/>
+          <a:stretch>
+            <a:fillRect/>
+          </a:stretch>
+        </p:blipFill>
+        <p:spPr>
+          <a:xfrm>
+            <a:off x="7680959" y="182880"/>
+            <a:ext cx="960120" cy="539696"/>
+          </a:xfrm>
+          <a:prstGeom prst="rect">
+            <a:avLst/>
+          </a:prstGeom>
+        </p:spPr>
+      </p:pic>
+    </p:spTree>
+  </p:cSld>
+  <p:clrMapOvr>
+    <a:masterClrMapping/>
+  </p:clrMapOvr>
+</p:sld>
+</file>
+
+<file path=ppt/slides/slide21.xml><?xml version="1.0" encoding="utf-8"?>
+<p:sld xmlns:a="http://schemas.openxmlformats.org/drawingml/2006/main" xmlns:r="http://schemas.openxmlformats.org/officeDocument/2006/relationships" xmlns:p="http://schemas.openxmlformats.org/presentationml/2006/main">
+  <p:cSld name="Slide 17">
+    <p:spTree>
+      <p:nvGrpSpPr>
+        <p:cNvPr id="1" name=""/>
+        <p:cNvGrpSpPr/>
+        <p:nvPr/>
+      </p:nvGrpSpPr>
+      <p:grpSpPr>
+        <a:xfrm>
+          <a:off x="0" y="0"/>
+          <a:ext cx="0" cy="0"/>
+          <a:chOff x="0" y="0"/>
+          <a:chExt cx="0" cy="0"/>
+        </a:xfrm>
+      </p:grpSpPr>
+      <p:sp>
+        <p:nvSpPr>
+          <p:cNvPr id="2" name="Text 0"/>
+          <p:cNvSpPr txBox="1"/>
+          <p:nvPr/>
+        </p:nvSpPr>
+        <p:spPr>
+          <a:xfrm>
+            <a:off x="502920" y="365760"/>
+            <a:ext cx="6400800" cy="274320"/>
+          </a:xfrm>
+          <a:prstGeom prst="rect">
+            <a:avLst/>
+          </a:prstGeom>
+          <a:noFill/>
+          <a:ln/>
+        </p:spPr>
+        <p:txBody>
+          <a:bodyPr wrap="square" lIns="0" tIns="0" rIns="0" bIns="0" rtlCol="0" anchor="ctr"/>
+          <a:lstStyle/>
+          <a:p>
+            <a:pPr marL="0" indent="0">
+              <a:buNone/>
+            </a:pPr>
+            <a:r>
+              <a:rPr lang="en-US" sz="950" b="1" kern="0" spc="220">
+                <a:solidFill>
+                  <a:srgbClr val="122B82"/>
+                </a:solidFill>
+              </a:rPr>
+              <a:t>WHAT WE SPEND</a:t>
+            </a:r>
+            <a:endParaRPr lang="en-US" sz="950"/>
+          </a:p>
+        </p:txBody>
+      </p:sp>
+      <p:sp>
+        <p:nvSpPr>
+          <p:cNvPr id="3" name="Text 1"/>
+          <p:cNvSpPr txBox="1"/>
+          <p:nvPr/>
+        </p:nvSpPr>
+        <p:spPr>
+          <a:xfrm>
+            <a:off x="502920" y="640080"/>
+            <a:ext cx="7315200" cy="685800"/>
+          </a:xfrm>
+          <a:prstGeom prst="rect">
+            <a:avLst/>
+          </a:prstGeom>
+          <a:noFill/>
+          <a:ln/>
+        </p:spPr>
+        <p:txBody>
+          <a:bodyPr wrap="square" lIns="0" tIns="0" rIns="0" bIns="0" rtlCol="0" anchor="ctr"/>
+          <a:lstStyle/>
+          <a:p>
+            <a:pPr marL="0" indent="0">
+              <a:buNone/>
+            </a:pPr>
+            <a:r>
+              <a:rPr lang="en-US" sz="2200" b="1">
+                <a:solidFill>
+                  <a:srgbClr val="242C39"/>
+                </a:solidFill>
+              </a:rPr>
+              <a:t>Other operating expenses, year to date</a:t>
+            </a:r>
+            <a:endParaRPr lang="en-US" sz="2700"/>
+          </a:p>
+        </p:txBody>
+      </p:sp>
+      <p:pic>
+        <p:nvPicPr>
+          <p:cNvPr id="4" name="snip other_opex" descr="/home/user/Claude/deck/snips/other_opex.png"/>
+          <p:cNvPicPr>
+            <a:picLocks noChangeAspect="1"/>
+          </p:cNvPicPr>
+          <p:nvPr/>
+        </p:nvPicPr>
+        <p:blipFill>
+          <a:blip r:embed="rId3"/>
+          <a:stretch>
+            <a:fillRect/>
+          </a:stretch>
+        </p:blipFill>
+        <p:spPr>
+          <a:xfrm>
+            <a:off x="502920" y="1444752"/>
+            <a:ext cx="5349239" cy="2463947"/>
+          </a:xfrm>
+          <a:prstGeom prst="rect">
+            <a:avLst/>
+          </a:prstGeom>
+        </p:spPr>
+      </p:pic>
+      <p:sp>
+        <p:nvSpPr>
+          <p:cNvPr id="6" name="commentary panel"/>
+          <p:cNvSpPr/>
+          <p:nvPr/>
+        </p:nvSpPr>
+        <p:spPr>
+          <a:xfrm>
+            <a:off x="6080759" y="1463040"/>
+            <a:ext cx="2560320" cy="3154680"/>
+          </a:xfrm>
+          <a:prstGeom prst="rect">
+            <a:avLst/>
+          </a:prstGeom>
+          <a:solidFill>
+            <a:srgbClr val="E8F9F8"/>
+          </a:solidFill>
+          <a:ln/>
+        </p:spPr>
+        <p:txBody>
+          <a:bodyPr/>
+          <a:lstStyle/>
+          <a:p>
+            <a:endParaRPr lang="en-AU"/>
+          </a:p>
+        </p:txBody>
+      </p:sp>
+      <p:sp>
+        <p:nvSpPr>
+          <p:cNvPr id="7" name="Text 4"/>
+          <p:cNvSpPr txBox="1"/>
+          <p:nvPr/>
+        </p:nvSpPr>
+        <p:spPr>
+          <a:xfrm>
+            <a:off x="6263639" y="1627632"/>
+            <a:ext cx="2194560" cy="228600"/>
+          </a:xfrm>
+          <a:prstGeom prst="rect">
+            <a:avLst/>
+          </a:prstGeom>
+          <a:noFill/>
+          <a:ln/>
+        </p:spPr>
+        <p:txBody>
+          <a:bodyPr wrap="square" lIns="0" tIns="0" rIns="0" bIns="0" rtlCol="0" anchor="ctr"/>
+          <a:lstStyle/>
+          <a:p>
+            <a:pPr marL="0" indent="0">
+              <a:buNone/>
+            </a:pPr>
+            <a:r>
+              <a:rPr lang="en-US" sz="900" b="1" kern="0" spc="180">
+                <a:solidFill>
+                  <a:srgbClr val="005358"/>
+                </a:solidFill>
+              </a:rPr>
+              <a:t>COMMENTARY</a:t>
+            </a:r>
+            <a:endParaRPr lang="en-US" sz="900"/>
+          </a:p>
+        </p:txBody>
+      </p:sp>
+      <p:sp>
+        <p:nvSpPr>
+          <p:cNvPr id="8" name="Text 5"/>
+          <p:cNvSpPr txBox="1"/>
+          <p:nvPr/>
+        </p:nvSpPr>
+        <p:spPr>
+          <a:xfrm>
+            <a:off x="6263639" y="1901952"/>
+            <a:ext cx="2194560" cy="2706623"/>
+          </a:xfrm>
+          <a:prstGeom prst="rect">
+            <a:avLst/>
+          </a:prstGeom>
+          <a:noFill/>
+          <a:ln/>
+        </p:spPr>
+        <p:txBody>
+          <a:bodyPr wrap="square" lIns="0" tIns="0" rIns="0" bIns="0" rtlCol="0" anchor="t">
+            <a:normAutofit/>
+          </a:bodyPr>
+          <a:lstStyle/>
+          <a:p>
+            <a:pPr marL="342900" indent="-342900">
+              <a:lnSpc>
+                <a:spcPts val="1150"/>
+              </a:lnSpc>
+              <a:spcAft>
+                <a:spcPts val="400"/>
+              </a:spcAft>
+              <a:buSzPct val="100000"/>
+              <a:buChar char="•"/>
+            </a:pPr>
+            <a:r>
+              <a:rPr lang="en-US" sz="1000">
+                <a:solidFill>
+                  <a:srgbClr val="3A4453"/>
+                </a:solidFill>
+              </a:rPr>
+              <a:t>Rent and property outgoings total approximately $77k year to date, making premises the largest expense in this category.</a:t>
+            </a:r>
+            <a:endParaRPr lang="en-US" sz="900"/>
+          </a:p>
+          <a:p>
+            <a:pPr marL="342900" indent="-342900">
+              <a:lnSpc>
+                <a:spcPts val="1150"/>
+              </a:lnSpc>
+              <a:spcAft>
+                <a:spcPts val="400"/>
+              </a:spcAft>
+              <a:buSzPct val="100000"/>
+              <a:buChar char="•"/>
+            </a:pPr>
+            <a:r>
+              <a:rPr lang="en-US" sz="1000">
+                <a:solidFill>
+                  <a:srgbClr val="3A4453"/>
+                </a:solidFill>
+              </a:rPr>
+              <a:t>IT network support is the next largest cost at approximately $40k.</a:t>
+            </a:r>
+            <a:endParaRPr lang="en-US" sz="900"/>
+          </a:p>
+          <a:p>
+            <a:pPr marL="342900" indent="-342900">
+              <a:lnSpc>
+                <a:spcPts val="1150"/>
+              </a:lnSpc>
+              <a:spcAft>
+                <a:spcPts val="400"/>
+              </a:spcAft>
+              <a:buSzPct val="100000"/>
+              <a:buChar char="•"/>
+            </a:pPr>
+            <a:r>
+              <a:rPr lang="en-US" sz="1000">
+                <a:solidFill>
+                  <a:srgbClr val="3A4453"/>
+                </a:solidFill>
+              </a:rPr>
+              <a:t>Most remaining individual categories are below $6k for the quarter.</a:t>
+            </a:r>
+            <a:endParaRPr lang="en-US" sz="900"/>
+          </a:p>
+          <a:p>
+            <a:pPr marL="342900" indent="-342900">
+              <a:lnSpc>
+                <a:spcPts val="1150"/>
+              </a:lnSpc>
+              <a:spcAft>
+                <a:spcPts val="400"/>
+              </a:spcAft>
+              <a:buSzPct val="100000"/>
+              <a:buChar char="•"/>
+            </a:pPr>
+            <a:r>
+              <a:rPr lang="en-US" sz="1000">
+                <a:solidFill>
+                  <a:srgbClr val="3A4453"/>
+                </a:solidFill>
+              </a:rPr>
+              <a:t>Smaller expense reductions may help, but are unlikely to materially change overall profitability.</a:t>
+            </a:r>
+            <a:endParaRPr lang="en-US" sz="900"/>
+          </a:p>
+          <a:p>
+            <a:pPr marL="342900" indent="-342900">
+              <a:lnSpc>
+                <a:spcPts val="1150"/>
+              </a:lnSpc>
+              <a:spcAft>
+                <a:spcPts val="400"/>
+              </a:spcAft>
+              <a:buSzPct val="100000"/>
+              <a:buChar char="•"/>
+            </a:pPr>
+            <a:r>
+              <a:rPr lang="en-US" sz="1000">
+                <a:solidFill>
+                  <a:srgbClr val="3A4453"/>
+                </a:solidFill>
+              </a:rPr>
+              <a:t>Any substantial saving in this category would require a review of premises and lease commitments.</a:t>
+            </a:r>
+            <a:endParaRPr lang="en-US" sz="900"/>
+          </a:p>
+        </p:txBody>
+      </p:sp>
+      <p:sp>
+        <p:nvSpPr>
+          <p:cNvPr id="25" name="Slide Number Placeholder 0"/>
+          <p:cNvSpPr>
+            <a:spLocks noGrp="1"/>
+          </p:cNvSpPr>
+          <p:nvPr>
+            <p:ph type="sldNum" sz="quarter" idx="4294967295"/>
+          </p:nvPr>
+        </p:nvSpPr>
+        <p:spPr>
+          <a:xfrm>
+            <a:off x="8092440" y="4736592"/>
+            <a:ext cx="548640" cy="228600"/>
+          </a:xfrm>
+          <a:prstGeom prst="rect">
+            <a:avLst/>
+          </a:prstGeom>
+          <a:extLst>
+            <a:ext uri="{C572A759-6A51-4108-AA02-DFA0A04FC94B}">
+              <ma14:wrappingTextBoxFlag xmlns:ma14="http://schemas.microsoft.com/office/mac/drawingml/2011/main" xmlns="" val="0"/>
+            </a:ext>
+          </a:extLst>
+        </p:spPr>
+        <p:txBody>
+          <a:bodyPr/>
+          <a:lstStyle>
+            <a:lvl1pPr>
+              <a:defRPr sz="800">
+                <a:solidFill>
+                  <a:srgbClr val="6B7585"/>
+                </a:solidFill>
+              </a:defRPr>
+            </a:lvl1pPr>
+          </a:lstStyle>
+          <a:p>
+            <a:pPr algn="r"/>
+            <a:fld id="{F7021451-1387-4CA6-816F-3879F97B5CBC}" type="slidenum">
+              <a:rPr lang="en-US" b="0"/>
+              <a:t>17</a:t>
+            </a:fld>
+            <a:endParaRPr lang="en-US"/>
+          </a:p>
+        </p:txBody>
+      </p:sp>
+      <p:pic>
+        <p:nvPicPr>
+          <p:cNvPr id="26" name="cts logo" descr="cts-logo.png"/>
+          <p:cNvPicPr>
+            <a:picLocks noChangeAspect="1"/>
+          </p:cNvPicPr>
+          <p:nvPr/>
+        </p:nvPicPr>
+        <p:blipFill>
+          <a:blip r:embed="rId4"/>
+          <a:stretch>
+            <a:fillRect/>
+          </a:stretch>
+        </p:blipFill>
+        <p:spPr>
+          <a:xfrm>
+            <a:off x="7680959" y="182880"/>
+            <a:ext cx="960120" cy="539696"/>
+          </a:xfrm>
+          <a:prstGeom prst="rect">
+            <a:avLst/>
+          </a:prstGeom>
+        </p:spPr>
+      </p:pic>
+    </p:spTree>
+  </p:cSld>
+  <p:clrMapOvr>
+    <a:masterClrMapping/>
+  </p:clrMapOvr>
+</p:sld>
+</file>
+
+<file path=ppt/slides/slide22.xml><?xml version="1.0" encoding="utf-8"?>
+<p:sld xmlns:a="http://schemas.openxmlformats.org/drawingml/2006/main" xmlns:r="http://schemas.openxmlformats.org/officeDocument/2006/relationships" xmlns:p="http://schemas.openxmlformats.org/presentationml/2006/main">
   <p:cSld name="Slide 18">
     <p:spTree>
       <p:nvGrpSpPr>
@@ -10688,7 +11563,7 @@
 </p:sld>
 </file>
 
-<file path=ppt/slides/slide21.xml><?xml version="1.0" encoding="utf-8"?>
+<file path=ppt/slides/slide23.xml><?xml version="1.0" encoding="utf-8"?>
 <p:sld xmlns:a="http://schemas.openxmlformats.org/drawingml/2006/main" xmlns:r="http://schemas.openxmlformats.org/officeDocument/2006/relationships" xmlns:p="http://schemas.openxmlformats.org/presentationml/2006/main">
   <p:cSld name="Slide 19">
     <p:spTree>
@@ -11073,7 +11948,7 @@
 </p:sld>
 </file>
 
-<file path=ppt/slides/slide22.xml><?xml version="1.0" encoding="utf-8"?>
+<file path=ppt/slides/slide24.xml><?xml version="1.0" encoding="utf-8"?>
 <p:sld xmlns:a="http://schemas.openxmlformats.org/drawingml/2006/main" xmlns:r="http://schemas.openxmlformats.org/officeDocument/2006/relationships" xmlns:p="http://schemas.openxmlformats.org/presentationml/2006/main">
   <p:cSld name="Slide 20">
     <p:spTree>
@@ -11356,7 +12231,7 @@
 </p:sld>
 </file>
 
-<file path=ppt/slides/slide23.xml><?xml version="1.0" encoding="utf-8"?>
+<file path=ppt/slides/slide25.xml><?xml version="1.0" encoding="utf-8"?>
 <p:sld xmlns:a="http://schemas.openxmlformats.org/drawingml/2006/main" xmlns:r="http://schemas.openxmlformats.org/officeDocument/2006/relationships" xmlns:p="http://schemas.openxmlformats.org/presentationml/2006/main">
   <p:cSld name="Slide 21">
     <p:spTree>
@@ -11738,7 +12613,7 @@
 </p:sld>
 </file>
 
-<file path=ppt/slides/slide24.xml><?xml version="1.0" encoding="utf-8"?>
+<file path=ppt/slides/slide26.xml><?xml version="1.0" encoding="utf-8"?>
 <p:sld xmlns:a="http://schemas.openxmlformats.org/drawingml/2006/main" xmlns:r="http://schemas.openxmlformats.org/officeDocument/2006/relationships" xmlns:p="http://schemas.openxmlformats.org/presentationml/2006/main">
   <p:cSld name="Slide 22">
     <p:spTree>
@@ -12120,7 +12995,7 @@
 </p:sld>
 </file>
 
-<file path=ppt/slides/slide25.xml><?xml version="1.0" encoding="utf-8"?>
+<file path=ppt/slides/slide27.xml><?xml version="1.0" encoding="utf-8"?>
 <p:sld xmlns:a="http://schemas.openxmlformats.org/drawingml/2006/main" xmlns:r="http://schemas.openxmlformats.org/officeDocument/2006/relationships" xmlns:p="http://schemas.openxmlformats.org/presentationml/2006/main">
   <p:cSld name="Slide 23">
     <p:spTree>
@@ -12502,7 +13377,7 @@
 </p:sld>
 </file>
 
-<file path=ppt/slides/slide26.xml><?xml version="1.0" encoding="utf-8"?>
+<file path=ppt/slides/slide28.xml><?xml version="1.0" encoding="utf-8"?>
 <p:sld xmlns:a="http://schemas.openxmlformats.org/drawingml/2006/main" xmlns:r="http://schemas.openxmlformats.org/officeDocument/2006/relationships" xmlns:p="http://schemas.openxmlformats.org/presentationml/2006/main">
   <p:cSld name="Slide 24">
     <p:spTree>
@@ -12785,7 +13660,7 @@
 </p:sld>
 </file>
 
-<file path=ppt/slides/slide27.xml><?xml version="1.0" encoding="utf-8"?>
+<file path=ppt/slides/slide29.xml><?xml version="1.0" encoding="utf-8"?>
 <p:sld xmlns:a="http://schemas.openxmlformats.org/drawingml/2006/main" xmlns:r="http://schemas.openxmlformats.org/officeDocument/2006/relationships" xmlns:p="http://schemas.openxmlformats.org/presentationml/2006/main">
   <p:cSld name="Slide 25">
     <p:spTree>
@@ -13133,770 +14008,6 @@
             <a:fld id="{F7021451-1387-4CA6-816F-3879F97B5CBC}" type="slidenum">
               <a:rPr lang="en-US" b="0"/>
               <a:t>25</a:t>
-            </a:fld>
-            <a:endParaRPr lang="en-US"/>
-          </a:p>
-        </p:txBody>
-      </p:sp>
-      <p:pic>
-        <p:nvPicPr>
-          <p:cNvPr id="26" name="cts logo" descr="cts-logo.png"/>
-          <p:cNvPicPr>
-            <a:picLocks noChangeAspect="1"/>
-          </p:cNvPicPr>
-          <p:nvPr/>
-        </p:nvPicPr>
-        <p:blipFill>
-          <a:blip r:embed="rId4"/>
-          <a:stretch>
-            <a:fillRect/>
-          </a:stretch>
-        </p:blipFill>
-        <p:spPr>
-          <a:xfrm>
-            <a:off x="7680959" y="182880"/>
-            <a:ext cx="960120" cy="539696"/>
-          </a:xfrm>
-          <a:prstGeom prst="rect">
-            <a:avLst/>
-          </a:prstGeom>
-        </p:spPr>
-      </p:pic>
-    </p:spTree>
-  </p:cSld>
-  <p:clrMapOvr>
-    <a:masterClrMapping/>
-  </p:clrMapOvr>
-</p:sld>
-</file>
-
-<file path=ppt/slides/slide28.xml><?xml version="1.0" encoding="utf-8"?>
-<p:sld xmlns:a="http://schemas.openxmlformats.org/drawingml/2006/main" xmlns:r="http://schemas.openxmlformats.org/officeDocument/2006/relationships" xmlns:p="http://schemas.openxmlformats.org/presentationml/2006/main">
-  <p:cSld name="Slide 26">
-    <p:spTree>
-      <p:nvGrpSpPr>
-        <p:cNvPr id="1" name=""/>
-        <p:cNvGrpSpPr/>
-        <p:nvPr/>
-      </p:nvGrpSpPr>
-      <p:grpSpPr>
-        <a:xfrm>
-          <a:off x="0" y="0"/>
-          <a:ext cx="0" cy="0"/>
-          <a:chOff x="0" y="0"/>
-          <a:chExt cx="0" cy="0"/>
-        </a:xfrm>
-      </p:grpSpPr>
-      <p:sp>
-        <p:nvSpPr>
-          <p:cNvPr id="2" name="Text 0"/>
-          <p:cNvSpPr txBox="1"/>
-          <p:nvPr/>
-        </p:nvSpPr>
-        <p:spPr>
-          <a:xfrm>
-            <a:off x="502920" y="365760"/>
-            <a:ext cx="6400800" cy="274320"/>
-          </a:xfrm>
-          <a:prstGeom prst="rect">
-            <a:avLst/>
-          </a:prstGeom>
-          <a:noFill/>
-          <a:ln/>
-        </p:spPr>
-        <p:txBody>
-          <a:bodyPr wrap="square" lIns="0" tIns="0" rIns="0" bIns="0" rtlCol="0" anchor="ctr"/>
-          <a:lstStyle/>
-          <a:p>
-            <a:pPr marL="0" indent="0">
-              <a:buNone/>
-            </a:pPr>
-            <a:r>
-              <a:rPr lang="en-US" sz="950" b="1" kern="0" spc="220">
-                <a:solidFill>
-                  <a:srgbClr val="122B82"/>
-                </a:solidFill>
-              </a:rPr>
-              <a:t>PEOPLE AND UTILISATION</a:t>
-            </a:r>
-            <a:endParaRPr lang="en-US" sz="950"/>
-          </a:p>
-        </p:txBody>
-      </p:sp>
-      <p:sp>
-        <p:nvSpPr>
-          <p:cNvPr id="3" name="Text 1"/>
-          <p:cNvSpPr txBox="1"/>
-          <p:nvPr/>
-        </p:nvSpPr>
-        <p:spPr>
-          <a:xfrm>
-            <a:off x="502920" y="640080"/>
-            <a:ext cx="7315200" cy="685800"/>
-          </a:xfrm>
-          <a:prstGeom prst="rect">
-            <a:avLst/>
-          </a:prstGeom>
-          <a:noFill/>
-          <a:ln/>
-        </p:spPr>
-        <p:txBody>
-          <a:bodyPr wrap="square" lIns="0" tIns="0" rIns="0" bIns="0" rtlCol="0" anchor="ctr"/>
-          <a:lstStyle/>
-          <a:p>
-            <a:pPr marL="0" indent="0">
-              <a:buNone/>
-            </a:pPr>
-            <a:r>
-              <a:rPr lang="en-US" sz="2200" b="1">
-                <a:solidFill>
-                  <a:srgbClr val="242C39"/>
-                </a:solidFill>
-              </a:rPr>
-              <a:t>How each department spent its hours, Sep 26</a:t>
-            </a:r>
-            <a:endParaRPr lang="en-US" sz="2700"/>
-          </a:p>
-        </p:txBody>
-      </p:sp>
-      <p:pic>
-        <p:nvPicPr>
-          <p:cNvPr id="4" name="snip util_chart" descr="/home/user/Claude/deck/snips/util_chart.png"/>
-          <p:cNvPicPr>
-            <a:picLocks noChangeAspect="1"/>
-          </p:cNvPicPr>
-          <p:nvPr/>
-        </p:nvPicPr>
-        <p:blipFill>
-          <a:blip r:embed="rId3"/>
-          <a:stretch>
-            <a:fillRect/>
-          </a:stretch>
-        </p:blipFill>
-        <p:spPr>
-          <a:xfrm>
-            <a:off x="502920" y="1444752"/>
-            <a:ext cx="5074919" cy="2771278"/>
-          </a:xfrm>
-          <a:prstGeom prst="rect">
-            <a:avLst/>
-          </a:prstGeom>
-        </p:spPr>
-      </p:pic>
-      <p:sp>
-        <p:nvSpPr>
-          <p:cNvPr id="6" name="commentary panel"/>
-          <p:cNvSpPr/>
-          <p:nvPr/>
-        </p:nvSpPr>
-        <p:spPr>
-          <a:xfrm>
-            <a:off x="5806439" y="1463040"/>
-            <a:ext cx="2834640" cy="3154680"/>
-          </a:xfrm>
-          <a:prstGeom prst="rect">
-            <a:avLst/>
-          </a:prstGeom>
-          <a:solidFill>
-            <a:srgbClr val="E8F9F8"/>
-          </a:solidFill>
-          <a:ln/>
-        </p:spPr>
-        <p:txBody>
-          <a:bodyPr/>
-          <a:lstStyle/>
-          <a:p>
-            <a:endParaRPr lang="en-AU"/>
-          </a:p>
-        </p:txBody>
-      </p:sp>
-      <p:sp>
-        <p:nvSpPr>
-          <p:cNvPr id="7" name="Text 4"/>
-          <p:cNvSpPr txBox="1"/>
-          <p:nvPr/>
-        </p:nvSpPr>
-        <p:spPr>
-          <a:xfrm>
-            <a:off x="5989319" y="1627632"/>
-            <a:ext cx="2468880" cy="228600"/>
-          </a:xfrm>
-          <a:prstGeom prst="rect">
-            <a:avLst/>
-          </a:prstGeom>
-          <a:noFill/>
-          <a:ln/>
-        </p:spPr>
-        <p:txBody>
-          <a:bodyPr wrap="square" lIns="0" tIns="0" rIns="0" bIns="0" rtlCol="0" anchor="ctr"/>
-          <a:lstStyle/>
-          <a:p>
-            <a:pPr marL="0" indent="0">
-              <a:buNone/>
-            </a:pPr>
-            <a:r>
-              <a:rPr lang="en-US" sz="900" b="1" kern="0" spc="180">
-                <a:solidFill>
-                  <a:srgbClr val="005358"/>
-                </a:solidFill>
-              </a:rPr>
-              <a:t>COMMENTARY</a:t>
-            </a:r>
-            <a:endParaRPr lang="en-US" sz="900"/>
-          </a:p>
-        </p:txBody>
-      </p:sp>
-      <p:sp>
-        <p:nvSpPr>
-          <p:cNvPr id="8" name="Text 5"/>
-          <p:cNvSpPr txBox="1"/>
-          <p:nvPr/>
-        </p:nvSpPr>
-        <p:spPr>
-          <a:xfrm>
-            <a:off x="5989319" y="1901952"/>
-            <a:ext cx="2468880" cy="2706623"/>
-          </a:xfrm>
-          <a:prstGeom prst="rect">
-            <a:avLst/>
-          </a:prstGeom>
-          <a:noFill/>
-          <a:ln/>
-        </p:spPr>
-        <p:txBody>
-          <a:bodyPr wrap="square" lIns="0" tIns="0" rIns="0" bIns="0" rtlCol="0" anchor="t">
-            <a:normAutofit fontScale="92500"/>
-          </a:bodyPr>
-          <a:lstStyle/>
-          <a:p>
-            <a:pPr marL="342900" indent="-342900">
-              <a:lnSpc>
-                <a:spcPts val="1050"/>
-              </a:lnSpc>
-              <a:spcAft>
-                <a:spcPts val="400"/>
-              </a:spcAft>
-              <a:buSzPct val="100000"/>
-              <a:buChar char="•"/>
-            </a:pPr>
-            <a:r>
-              <a:rPr lang="en-US" sz="1000">
-                <a:solidFill>
-                  <a:srgbClr val="3A4453"/>
-                </a:solidFill>
-              </a:rPr>
-              <a:t>Each bar shows the mix of hours within its own department, rather than comparing total hours between departments.</a:t>
-            </a:r>
-            <a:endParaRPr lang="en-US" sz="850"/>
-          </a:p>
-          <a:p>
-            <a:pPr marL="342900" indent="-342900">
-              <a:lnSpc>
-                <a:spcPts val="1050"/>
-              </a:lnSpc>
-              <a:spcAft>
-                <a:spcPts val="400"/>
-              </a:spcAft>
-              <a:buSzPct val="100000"/>
-              <a:buChar char="•"/>
-            </a:pPr>
-            <a:r>
-              <a:rPr lang="en-US" sz="1000">
-                <a:solidFill>
-                  <a:srgbClr val="3A4453"/>
-                </a:solidFill>
-              </a:rPr>
-              <a:t>Support's hours were predominantly billable, supporting its positive financial result.</a:t>
-            </a:r>
-            <a:endParaRPr lang="en-US" sz="850"/>
-          </a:p>
-          <a:p>
-            <a:pPr marL="342900" indent="-342900">
-              <a:lnSpc>
-                <a:spcPts val="1050"/>
-              </a:lnSpc>
-              <a:spcAft>
-                <a:spcPts val="400"/>
-              </a:spcAft>
-              <a:buSzPct val="100000"/>
-              <a:buChar char="•"/>
-            </a:pPr>
-            <a:r>
-              <a:rPr lang="en-US" sz="1000">
-                <a:solidFill>
-                  <a:srgbClr val="3A4453"/>
-                </a:solidFill>
-              </a:rPr>
-              <a:t>Events recorded 333 hours of leave and 241 billable hours, reducing its available delivery capacity.</a:t>
-            </a:r>
-            <a:endParaRPr lang="en-US" sz="850"/>
-          </a:p>
-          <a:p>
-            <a:pPr marL="342900" indent="-342900">
-              <a:lnSpc>
-                <a:spcPts val="1050"/>
-              </a:lnSpc>
-              <a:spcAft>
-                <a:spcPts val="400"/>
-              </a:spcAft>
-              <a:buSzPct val="100000"/>
-              <a:buChar char="•"/>
-            </a:pPr>
-            <a:r>
-              <a:rPr lang="en-US" sz="1000">
-                <a:solidFill>
-                  <a:srgbClr val="3A4453"/>
-                </a:solidFill>
-              </a:rPr>
-              <a:t>Consulting recorded 84 non-billable hours compared with 31 billable hours.</a:t>
-            </a:r>
-            <a:endParaRPr lang="en-US" sz="850"/>
-          </a:p>
-          <a:p>
-            <a:pPr marL="342900" indent="-342900">
-              <a:lnSpc>
-                <a:spcPts val="1050"/>
-              </a:lnSpc>
-              <a:spcAft>
-                <a:spcPts val="400"/>
-              </a:spcAft>
-              <a:buSzPct val="100000"/>
-              <a:buChar char="•"/>
-            </a:pPr>
-            <a:r>
-              <a:rPr lang="en-US" sz="1000">
-                <a:solidFill>
-                  <a:srgbClr val="3A4453"/>
-                </a:solidFill>
-              </a:rPr>
-              <a:t>The non-billable and leave portions highlight opportunities to improve workforce planning and billable utilisation.</a:t>
-            </a:r>
-            <a:endParaRPr lang="en-US" sz="850"/>
-          </a:p>
-        </p:txBody>
-      </p:sp>
-      <p:sp>
-        <p:nvSpPr>
-          <p:cNvPr id="25" name="Slide Number Placeholder 0"/>
-          <p:cNvSpPr>
-            <a:spLocks noGrp="1"/>
-          </p:cNvSpPr>
-          <p:nvPr>
-            <p:ph type="sldNum" sz="quarter" idx="4294967295"/>
-          </p:nvPr>
-        </p:nvSpPr>
-        <p:spPr>
-          <a:xfrm>
-            <a:off x="8092440" y="4736592"/>
-            <a:ext cx="548640" cy="228600"/>
-          </a:xfrm>
-          <a:prstGeom prst="rect">
-            <a:avLst/>
-          </a:prstGeom>
-          <a:extLst>
-            <a:ext uri="{C572A759-6A51-4108-AA02-DFA0A04FC94B}">
-              <ma14:wrappingTextBoxFlag xmlns:ma14="http://schemas.microsoft.com/office/mac/drawingml/2011/main" xmlns="" val="0"/>
-            </a:ext>
-          </a:extLst>
-        </p:spPr>
-        <p:txBody>
-          <a:bodyPr/>
-          <a:lstStyle>
-            <a:lvl1pPr>
-              <a:defRPr sz="800">
-                <a:solidFill>
-                  <a:srgbClr val="6B7585"/>
-                </a:solidFill>
-              </a:defRPr>
-            </a:lvl1pPr>
-          </a:lstStyle>
-          <a:p>
-            <a:pPr algn="r"/>
-            <a:fld id="{F7021451-1387-4CA6-816F-3879F97B5CBC}" type="slidenum">
-              <a:rPr lang="en-US" b="0"/>
-              <a:t>26</a:t>
-            </a:fld>
-            <a:endParaRPr lang="en-US"/>
-          </a:p>
-        </p:txBody>
-      </p:sp>
-      <p:pic>
-        <p:nvPicPr>
-          <p:cNvPr id="26" name="cts logo" descr="cts-logo.png"/>
-          <p:cNvPicPr>
-            <a:picLocks noChangeAspect="1"/>
-          </p:cNvPicPr>
-          <p:nvPr/>
-        </p:nvPicPr>
-        <p:blipFill>
-          <a:blip r:embed="rId4"/>
-          <a:stretch>
-            <a:fillRect/>
-          </a:stretch>
-        </p:blipFill>
-        <p:spPr>
-          <a:xfrm>
-            <a:off x="7680959" y="182880"/>
-            <a:ext cx="960120" cy="539696"/>
-          </a:xfrm>
-          <a:prstGeom prst="rect">
-            <a:avLst/>
-          </a:prstGeom>
-        </p:spPr>
-      </p:pic>
-    </p:spTree>
-  </p:cSld>
-  <p:clrMapOvr>
-    <a:masterClrMapping/>
-  </p:clrMapOvr>
-</p:sld>
-</file>
-
-<file path=ppt/slides/slide29.xml><?xml version="1.0" encoding="utf-8"?>
-<p:sld xmlns:a="http://schemas.openxmlformats.org/drawingml/2006/main" xmlns:r="http://schemas.openxmlformats.org/officeDocument/2006/relationships" xmlns:p="http://schemas.openxmlformats.org/presentationml/2006/main">
-  <p:cSld name="Slide 27">
-    <p:spTree>
-      <p:nvGrpSpPr>
-        <p:cNvPr id="1" name=""/>
-        <p:cNvGrpSpPr/>
-        <p:nvPr/>
-      </p:nvGrpSpPr>
-      <p:grpSpPr>
-        <a:xfrm>
-          <a:off x="0" y="0"/>
-          <a:ext cx="0" cy="0"/>
-          <a:chOff x="0" y="0"/>
-          <a:chExt cx="0" cy="0"/>
-        </a:xfrm>
-      </p:grpSpPr>
-      <p:sp>
-        <p:nvSpPr>
-          <p:cNvPr id="2" name="Text 0"/>
-          <p:cNvSpPr txBox="1"/>
-          <p:nvPr/>
-        </p:nvSpPr>
-        <p:spPr>
-          <a:xfrm>
-            <a:off x="502920" y="365760"/>
-            <a:ext cx="6400800" cy="274320"/>
-          </a:xfrm>
-          <a:prstGeom prst="rect">
-            <a:avLst/>
-          </a:prstGeom>
-          <a:noFill/>
-          <a:ln/>
-        </p:spPr>
-        <p:txBody>
-          <a:bodyPr wrap="square" lIns="0" tIns="0" rIns="0" bIns="0" rtlCol="0" anchor="ctr"/>
-          <a:lstStyle/>
-          <a:p>
-            <a:pPr marL="0" indent="0">
-              <a:buNone/>
-            </a:pPr>
-            <a:r>
-              <a:rPr lang="en-US" sz="950" b="1" kern="0" spc="220">
-                <a:solidFill>
-                  <a:srgbClr val="122B82"/>
-                </a:solidFill>
-              </a:rPr>
-              <a:t>PEOPLE AND UTILISATION</a:t>
-            </a:r>
-            <a:endParaRPr lang="en-US" sz="950"/>
-          </a:p>
-        </p:txBody>
-      </p:sp>
-      <p:sp>
-        <p:nvSpPr>
-          <p:cNvPr id="3" name="Text 1"/>
-          <p:cNvSpPr txBox="1"/>
-          <p:nvPr/>
-        </p:nvSpPr>
-        <p:spPr>
-          <a:xfrm>
-            <a:off x="502920" y="640080"/>
-            <a:ext cx="7315200" cy="685800"/>
-          </a:xfrm>
-          <a:prstGeom prst="rect">
-            <a:avLst/>
-          </a:prstGeom>
-          <a:noFill/>
-          <a:ln/>
-        </p:spPr>
-        <p:txBody>
-          <a:bodyPr wrap="square" lIns="0" tIns="0" rIns="0" bIns="0" rtlCol="0" anchor="ctr"/>
-          <a:lstStyle/>
-          <a:p>
-            <a:pPr marL="0" indent="0">
-              <a:buNone/>
-            </a:pPr>
-            <a:r>
-              <a:rPr lang="en-US" sz="2200" b="1">
-                <a:solidFill>
-                  <a:srgbClr val="242C39"/>
-                </a:solidFill>
-              </a:rPr>
-              <a:t>Hours, the three departments, Sep 26</a:t>
-            </a:r>
-            <a:endParaRPr lang="en-US" sz="2700"/>
-          </a:p>
-        </p:txBody>
-      </p:sp>
-      <p:pic>
-        <p:nvPicPr>
-          <p:cNvPr id="4" name="snip util_three" descr="/home/user/Claude/deck/snips/util_three.png"/>
-          <p:cNvPicPr>
-            <a:picLocks noChangeAspect="1"/>
-          </p:cNvPicPr>
-          <p:nvPr/>
-        </p:nvPicPr>
-        <p:blipFill>
-          <a:blip r:embed="rId3"/>
-          <a:stretch>
-            <a:fillRect/>
-          </a:stretch>
-        </p:blipFill>
-        <p:spPr>
-          <a:xfrm>
-            <a:off x="502920" y="1444752"/>
-            <a:ext cx="4800599" cy="2226875"/>
-          </a:xfrm>
-          <a:prstGeom prst="rect">
-            <a:avLst/>
-          </a:prstGeom>
-        </p:spPr>
-      </p:pic>
-      <p:sp>
-        <p:nvSpPr>
-          <p:cNvPr id="6" name="commentary panel"/>
-          <p:cNvSpPr/>
-          <p:nvPr/>
-        </p:nvSpPr>
-        <p:spPr>
-          <a:xfrm>
-            <a:off x="5532119" y="1463040"/>
-            <a:ext cx="3108960" cy="3154680"/>
-          </a:xfrm>
-          <a:prstGeom prst="rect">
-            <a:avLst/>
-          </a:prstGeom>
-          <a:solidFill>
-            <a:srgbClr val="E8F9F8"/>
-          </a:solidFill>
-          <a:ln/>
-        </p:spPr>
-        <p:txBody>
-          <a:bodyPr/>
-          <a:lstStyle/>
-          <a:p>
-            <a:endParaRPr lang="en-AU"/>
-          </a:p>
-        </p:txBody>
-      </p:sp>
-      <p:sp>
-        <p:nvSpPr>
-          <p:cNvPr id="7" name="Text 4"/>
-          <p:cNvSpPr txBox="1"/>
-          <p:nvPr/>
-        </p:nvSpPr>
-        <p:spPr>
-          <a:xfrm>
-            <a:off x="5714999" y="1627632"/>
-            <a:ext cx="2743200" cy="228600"/>
-          </a:xfrm>
-          <a:prstGeom prst="rect">
-            <a:avLst/>
-          </a:prstGeom>
-          <a:noFill/>
-          <a:ln/>
-        </p:spPr>
-        <p:txBody>
-          <a:bodyPr wrap="square" lIns="0" tIns="0" rIns="0" bIns="0" rtlCol="0" anchor="ctr"/>
-          <a:lstStyle/>
-          <a:p>
-            <a:pPr marL="0" indent="0">
-              <a:buNone/>
-            </a:pPr>
-            <a:r>
-              <a:rPr lang="en-US" sz="900" b="1" kern="0" spc="180">
-                <a:solidFill>
-                  <a:srgbClr val="005358"/>
-                </a:solidFill>
-              </a:rPr>
-              <a:t>COMMENTARY</a:t>
-            </a:r>
-            <a:endParaRPr lang="en-US" sz="900"/>
-          </a:p>
-        </p:txBody>
-      </p:sp>
-      <p:sp>
-        <p:nvSpPr>
-          <p:cNvPr id="8" name="Text 5"/>
-          <p:cNvSpPr txBox="1"/>
-          <p:nvPr/>
-        </p:nvSpPr>
-        <p:spPr>
-          <a:xfrm>
-            <a:off x="5714999" y="1901952"/>
-            <a:ext cx="2743200" cy="2706623"/>
-          </a:xfrm>
-          <a:prstGeom prst="rect">
-            <a:avLst/>
-          </a:prstGeom>
-          <a:noFill/>
-          <a:ln/>
-        </p:spPr>
-        <p:txBody>
-          <a:bodyPr wrap="square" lIns="0" tIns="0" rIns="0" bIns="0" rtlCol="0" anchor="t">
-            <a:normAutofit fontScale="85000" lnSpcReduction="10000"/>
-          </a:bodyPr>
-          <a:lstStyle/>
-          <a:p>
-            <a:pPr marL="342900" indent="-342900">
-              <a:lnSpc>
-                <a:spcPts val="1050"/>
-              </a:lnSpc>
-              <a:spcAft>
-                <a:spcPts val="400"/>
-              </a:spcAft>
-              <a:buSzPct val="100000"/>
-              <a:buChar char="•"/>
-            </a:pPr>
-            <a:r>
-              <a:rPr lang="en-US" sz="1000">
-                <a:solidFill>
-                  <a:srgbClr val="3A4453"/>
-                </a:solidFill>
-              </a:rPr>
-              <a:t>This view combines Events and Video as Production, and Integration and Consulting as Consulting, consistent with the P&amp;L.</a:t>
-            </a:r>
-            <a:endParaRPr lang="en-US" sz="850"/>
-          </a:p>
-          <a:p>
-            <a:pPr marL="342900" indent="-342900">
-              <a:lnSpc>
-                <a:spcPts val="1050"/>
-              </a:lnSpc>
-              <a:spcAft>
-                <a:spcPts val="400"/>
-              </a:spcAft>
-              <a:buSzPct val="100000"/>
-              <a:buChar char="•"/>
-            </a:pPr>
-            <a:r>
-              <a:rPr lang="en-US" sz="1000">
-                <a:solidFill>
-                  <a:srgbClr val="3A4453"/>
-                </a:solidFill>
-              </a:rPr>
-              <a:t>Production recorded 265 billable hours, 257 non-billable hours and 333 hours of leave.</a:t>
-            </a:r>
-            <a:endParaRPr lang="en-US" sz="850"/>
-          </a:p>
-          <a:p>
-            <a:pPr marL="342900" indent="-342900">
-              <a:lnSpc>
-                <a:spcPts val="1050"/>
-              </a:lnSpc>
-              <a:spcAft>
-                <a:spcPts val="400"/>
-              </a:spcAft>
-              <a:buSzPct val="100000"/>
-              <a:buChar char="•"/>
-            </a:pPr>
-            <a:r>
-              <a:rPr lang="en-US" sz="1000">
-                <a:solidFill>
-                  <a:srgbClr val="3A4453"/>
-                </a:solidFill>
-              </a:rPr>
-              <a:t>Consulting recorded 40 billable hours and 84 non-billable hours, indicating low utilisation of available working time.</a:t>
-            </a:r>
-            <a:endParaRPr lang="en-US" sz="850"/>
-          </a:p>
-          <a:p>
-            <a:pPr marL="342900" indent="-342900">
-              <a:lnSpc>
-                <a:spcPts val="1050"/>
-              </a:lnSpc>
-              <a:spcAft>
-                <a:spcPts val="400"/>
-              </a:spcAft>
-              <a:buSzPct val="100000"/>
-              <a:buChar char="•"/>
-            </a:pPr>
-            <a:r>
-              <a:rPr lang="en-US" sz="1000">
-                <a:solidFill>
-                  <a:srgbClr val="3A4453"/>
-                </a:solidFill>
-              </a:rPr>
-              <a:t>Support's hours were predominantly billable and supported the group's positive contribution.</a:t>
-            </a:r>
-            <a:endParaRPr lang="en-US" sz="850"/>
-          </a:p>
-          <a:p>
-            <a:pPr marL="342900" indent="-342900">
-              <a:lnSpc>
-                <a:spcPts val="1050"/>
-              </a:lnSpc>
-              <a:spcAft>
-                <a:spcPts val="400"/>
-              </a:spcAft>
-              <a:buSzPct val="100000"/>
-              <a:buChar char="•"/>
-            </a:pPr>
-            <a:r>
-              <a:rPr lang="en-US" sz="1000">
-                <a:solidFill>
-                  <a:srgbClr val="3A4453"/>
-                </a:solidFill>
-              </a:rPr>
-              <a:t>Each bar is scaled separately, as Support has substantially more recorded hours than the other groups.</a:t>
-            </a:r>
-            <a:endParaRPr lang="en-US" sz="850"/>
-          </a:p>
-        </p:txBody>
-      </p:sp>
-      <p:sp>
-        <p:nvSpPr>
-          <p:cNvPr id="25" name="Slide Number Placeholder 0"/>
-          <p:cNvSpPr>
-            <a:spLocks noGrp="1"/>
-          </p:cNvSpPr>
-          <p:nvPr>
-            <p:ph type="sldNum" sz="quarter" idx="4294967295"/>
-          </p:nvPr>
-        </p:nvSpPr>
-        <p:spPr>
-          <a:xfrm>
-            <a:off x="8092440" y="4736592"/>
-            <a:ext cx="548640" cy="228600"/>
-          </a:xfrm>
-          <a:prstGeom prst="rect">
-            <a:avLst/>
-          </a:prstGeom>
-          <a:extLst>
-            <a:ext uri="{C572A759-6A51-4108-AA02-DFA0A04FC94B}">
-              <ma14:wrappingTextBoxFlag xmlns:ma14="http://schemas.microsoft.com/office/mac/drawingml/2011/main" xmlns="" val="0"/>
-            </a:ext>
-          </a:extLst>
-        </p:spPr>
-        <p:txBody>
-          <a:bodyPr/>
-          <a:lstStyle>
-            <a:lvl1pPr>
-              <a:defRPr sz="800">
-                <a:solidFill>
-                  <a:srgbClr val="6B7585"/>
-                </a:solidFill>
-              </a:defRPr>
-            </a:lvl1pPr>
-          </a:lstStyle>
-          <a:p>
-            <a:pPr algn="r"/>
-            <a:fld id="{F7021451-1387-4CA6-816F-3879F97B5CBC}" type="slidenum">
-              <a:rPr lang="en-US" b="0"/>
-              <a:t>27</a:t>
             </a:fld>
             <a:endParaRPr lang="en-US"/>
           </a:p>
@@ -16188,6 +16299,770 @@
 
 <file path=ppt/slides/slide30.xml><?xml version="1.0" encoding="utf-8"?>
 <p:sld xmlns:a="http://schemas.openxmlformats.org/drawingml/2006/main" xmlns:r="http://schemas.openxmlformats.org/officeDocument/2006/relationships" xmlns:p="http://schemas.openxmlformats.org/presentationml/2006/main">
+  <p:cSld name="Slide 26">
+    <p:spTree>
+      <p:nvGrpSpPr>
+        <p:cNvPr id="1" name=""/>
+        <p:cNvGrpSpPr/>
+        <p:nvPr/>
+      </p:nvGrpSpPr>
+      <p:grpSpPr>
+        <a:xfrm>
+          <a:off x="0" y="0"/>
+          <a:ext cx="0" cy="0"/>
+          <a:chOff x="0" y="0"/>
+          <a:chExt cx="0" cy="0"/>
+        </a:xfrm>
+      </p:grpSpPr>
+      <p:sp>
+        <p:nvSpPr>
+          <p:cNvPr id="2" name="Text 0"/>
+          <p:cNvSpPr txBox="1"/>
+          <p:nvPr/>
+        </p:nvSpPr>
+        <p:spPr>
+          <a:xfrm>
+            <a:off x="502920" y="365760"/>
+            <a:ext cx="6400800" cy="274320"/>
+          </a:xfrm>
+          <a:prstGeom prst="rect">
+            <a:avLst/>
+          </a:prstGeom>
+          <a:noFill/>
+          <a:ln/>
+        </p:spPr>
+        <p:txBody>
+          <a:bodyPr wrap="square" lIns="0" tIns="0" rIns="0" bIns="0" rtlCol="0" anchor="ctr"/>
+          <a:lstStyle/>
+          <a:p>
+            <a:pPr marL="0" indent="0">
+              <a:buNone/>
+            </a:pPr>
+            <a:r>
+              <a:rPr lang="en-US" sz="950" b="1" kern="0" spc="220">
+                <a:solidFill>
+                  <a:srgbClr val="122B82"/>
+                </a:solidFill>
+              </a:rPr>
+              <a:t>PEOPLE AND UTILISATION</a:t>
+            </a:r>
+            <a:endParaRPr lang="en-US" sz="950"/>
+          </a:p>
+        </p:txBody>
+      </p:sp>
+      <p:sp>
+        <p:nvSpPr>
+          <p:cNvPr id="3" name="Text 1"/>
+          <p:cNvSpPr txBox="1"/>
+          <p:nvPr/>
+        </p:nvSpPr>
+        <p:spPr>
+          <a:xfrm>
+            <a:off x="502920" y="640080"/>
+            <a:ext cx="7315200" cy="685800"/>
+          </a:xfrm>
+          <a:prstGeom prst="rect">
+            <a:avLst/>
+          </a:prstGeom>
+          <a:noFill/>
+          <a:ln/>
+        </p:spPr>
+        <p:txBody>
+          <a:bodyPr wrap="square" lIns="0" tIns="0" rIns="0" bIns="0" rtlCol="0" anchor="ctr"/>
+          <a:lstStyle/>
+          <a:p>
+            <a:pPr marL="0" indent="0">
+              <a:buNone/>
+            </a:pPr>
+            <a:r>
+              <a:rPr lang="en-US" sz="2200" b="1">
+                <a:solidFill>
+                  <a:srgbClr val="242C39"/>
+                </a:solidFill>
+              </a:rPr>
+              <a:t>How each department spent its hours, Sep 26</a:t>
+            </a:r>
+            <a:endParaRPr lang="en-US" sz="2700"/>
+          </a:p>
+        </p:txBody>
+      </p:sp>
+      <p:pic>
+        <p:nvPicPr>
+          <p:cNvPr id="4" name="snip util_chart" descr="/home/user/Claude/deck/snips/util_chart.png"/>
+          <p:cNvPicPr>
+            <a:picLocks noChangeAspect="1"/>
+          </p:cNvPicPr>
+          <p:nvPr/>
+        </p:nvPicPr>
+        <p:blipFill>
+          <a:blip r:embed="rId3"/>
+          <a:stretch>
+            <a:fillRect/>
+          </a:stretch>
+        </p:blipFill>
+        <p:spPr>
+          <a:xfrm>
+            <a:off x="502920" y="1444752"/>
+            <a:ext cx="5074919" cy="2771278"/>
+          </a:xfrm>
+          <a:prstGeom prst="rect">
+            <a:avLst/>
+          </a:prstGeom>
+        </p:spPr>
+      </p:pic>
+      <p:sp>
+        <p:nvSpPr>
+          <p:cNvPr id="6" name="commentary panel"/>
+          <p:cNvSpPr/>
+          <p:nvPr/>
+        </p:nvSpPr>
+        <p:spPr>
+          <a:xfrm>
+            <a:off x="5806439" y="1463040"/>
+            <a:ext cx="2834640" cy="3154680"/>
+          </a:xfrm>
+          <a:prstGeom prst="rect">
+            <a:avLst/>
+          </a:prstGeom>
+          <a:solidFill>
+            <a:srgbClr val="E8F9F8"/>
+          </a:solidFill>
+          <a:ln/>
+        </p:spPr>
+        <p:txBody>
+          <a:bodyPr/>
+          <a:lstStyle/>
+          <a:p>
+            <a:endParaRPr lang="en-AU"/>
+          </a:p>
+        </p:txBody>
+      </p:sp>
+      <p:sp>
+        <p:nvSpPr>
+          <p:cNvPr id="7" name="Text 4"/>
+          <p:cNvSpPr txBox="1"/>
+          <p:nvPr/>
+        </p:nvSpPr>
+        <p:spPr>
+          <a:xfrm>
+            <a:off x="5989319" y="1627632"/>
+            <a:ext cx="2468880" cy="228600"/>
+          </a:xfrm>
+          <a:prstGeom prst="rect">
+            <a:avLst/>
+          </a:prstGeom>
+          <a:noFill/>
+          <a:ln/>
+        </p:spPr>
+        <p:txBody>
+          <a:bodyPr wrap="square" lIns="0" tIns="0" rIns="0" bIns="0" rtlCol="0" anchor="ctr"/>
+          <a:lstStyle/>
+          <a:p>
+            <a:pPr marL="0" indent="0">
+              <a:buNone/>
+            </a:pPr>
+            <a:r>
+              <a:rPr lang="en-US" sz="900" b="1" kern="0" spc="180">
+                <a:solidFill>
+                  <a:srgbClr val="005358"/>
+                </a:solidFill>
+              </a:rPr>
+              <a:t>COMMENTARY</a:t>
+            </a:r>
+            <a:endParaRPr lang="en-US" sz="900"/>
+          </a:p>
+        </p:txBody>
+      </p:sp>
+      <p:sp>
+        <p:nvSpPr>
+          <p:cNvPr id="8" name="Text 5"/>
+          <p:cNvSpPr txBox="1"/>
+          <p:nvPr/>
+        </p:nvSpPr>
+        <p:spPr>
+          <a:xfrm>
+            <a:off x="5989319" y="1901952"/>
+            <a:ext cx="2468880" cy="2706623"/>
+          </a:xfrm>
+          <a:prstGeom prst="rect">
+            <a:avLst/>
+          </a:prstGeom>
+          <a:noFill/>
+          <a:ln/>
+        </p:spPr>
+        <p:txBody>
+          <a:bodyPr wrap="square" lIns="0" tIns="0" rIns="0" bIns="0" rtlCol="0" anchor="t">
+            <a:normAutofit fontScale="92500"/>
+          </a:bodyPr>
+          <a:lstStyle/>
+          <a:p>
+            <a:pPr marL="342900" indent="-342900">
+              <a:lnSpc>
+                <a:spcPts val="1050"/>
+              </a:lnSpc>
+              <a:spcAft>
+                <a:spcPts val="400"/>
+              </a:spcAft>
+              <a:buSzPct val="100000"/>
+              <a:buChar char="•"/>
+            </a:pPr>
+            <a:r>
+              <a:rPr lang="en-US" sz="1000">
+                <a:solidFill>
+                  <a:srgbClr val="3A4453"/>
+                </a:solidFill>
+              </a:rPr>
+              <a:t>Each bar shows the mix of hours within its own department, rather than comparing total hours between departments.</a:t>
+            </a:r>
+            <a:endParaRPr lang="en-US" sz="850"/>
+          </a:p>
+          <a:p>
+            <a:pPr marL="342900" indent="-342900">
+              <a:lnSpc>
+                <a:spcPts val="1050"/>
+              </a:lnSpc>
+              <a:spcAft>
+                <a:spcPts val="400"/>
+              </a:spcAft>
+              <a:buSzPct val="100000"/>
+              <a:buChar char="•"/>
+            </a:pPr>
+            <a:r>
+              <a:rPr lang="en-US" sz="1000">
+                <a:solidFill>
+                  <a:srgbClr val="3A4453"/>
+                </a:solidFill>
+              </a:rPr>
+              <a:t>Support's hours were predominantly billable, supporting its positive financial result.</a:t>
+            </a:r>
+            <a:endParaRPr lang="en-US" sz="850"/>
+          </a:p>
+          <a:p>
+            <a:pPr marL="342900" indent="-342900">
+              <a:lnSpc>
+                <a:spcPts val="1050"/>
+              </a:lnSpc>
+              <a:spcAft>
+                <a:spcPts val="400"/>
+              </a:spcAft>
+              <a:buSzPct val="100000"/>
+              <a:buChar char="•"/>
+            </a:pPr>
+            <a:r>
+              <a:rPr lang="en-US" sz="1000">
+                <a:solidFill>
+                  <a:srgbClr val="3A4453"/>
+                </a:solidFill>
+              </a:rPr>
+              <a:t>Events recorded 333 hours of leave and 241 billable hours, reducing its available delivery capacity.</a:t>
+            </a:r>
+            <a:endParaRPr lang="en-US" sz="850"/>
+          </a:p>
+          <a:p>
+            <a:pPr marL="342900" indent="-342900">
+              <a:lnSpc>
+                <a:spcPts val="1050"/>
+              </a:lnSpc>
+              <a:spcAft>
+                <a:spcPts val="400"/>
+              </a:spcAft>
+              <a:buSzPct val="100000"/>
+              <a:buChar char="•"/>
+            </a:pPr>
+            <a:r>
+              <a:rPr lang="en-US" sz="1000">
+                <a:solidFill>
+                  <a:srgbClr val="3A4453"/>
+                </a:solidFill>
+              </a:rPr>
+              <a:t>Consulting recorded 84 non-billable hours compared with 31 billable hours.</a:t>
+            </a:r>
+            <a:endParaRPr lang="en-US" sz="850"/>
+          </a:p>
+          <a:p>
+            <a:pPr marL="342900" indent="-342900">
+              <a:lnSpc>
+                <a:spcPts val="1050"/>
+              </a:lnSpc>
+              <a:spcAft>
+                <a:spcPts val="400"/>
+              </a:spcAft>
+              <a:buSzPct val="100000"/>
+              <a:buChar char="•"/>
+            </a:pPr>
+            <a:r>
+              <a:rPr lang="en-US" sz="1000">
+                <a:solidFill>
+                  <a:srgbClr val="3A4453"/>
+                </a:solidFill>
+              </a:rPr>
+              <a:t>The non-billable and leave portions highlight opportunities to improve workforce planning and billable utilisation.</a:t>
+            </a:r>
+            <a:endParaRPr lang="en-US" sz="850"/>
+          </a:p>
+        </p:txBody>
+      </p:sp>
+      <p:sp>
+        <p:nvSpPr>
+          <p:cNvPr id="25" name="Slide Number Placeholder 0"/>
+          <p:cNvSpPr>
+            <a:spLocks noGrp="1"/>
+          </p:cNvSpPr>
+          <p:nvPr>
+            <p:ph type="sldNum" sz="quarter" idx="4294967295"/>
+          </p:nvPr>
+        </p:nvSpPr>
+        <p:spPr>
+          <a:xfrm>
+            <a:off x="8092440" y="4736592"/>
+            <a:ext cx="548640" cy="228600"/>
+          </a:xfrm>
+          <a:prstGeom prst="rect">
+            <a:avLst/>
+          </a:prstGeom>
+          <a:extLst>
+            <a:ext uri="{C572A759-6A51-4108-AA02-DFA0A04FC94B}">
+              <ma14:wrappingTextBoxFlag xmlns:ma14="http://schemas.microsoft.com/office/mac/drawingml/2011/main" xmlns="" val="0"/>
+            </a:ext>
+          </a:extLst>
+        </p:spPr>
+        <p:txBody>
+          <a:bodyPr/>
+          <a:lstStyle>
+            <a:lvl1pPr>
+              <a:defRPr sz="800">
+                <a:solidFill>
+                  <a:srgbClr val="6B7585"/>
+                </a:solidFill>
+              </a:defRPr>
+            </a:lvl1pPr>
+          </a:lstStyle>
+          <a:p>
+            <a:pPr algn="r"/>
+            <a:fld id="{F7021451-1387-4CA6-816F-3879F97B5CBC}" type="slidenum">
+              <a:rPr lang="en-US" b="0"/>
+              <a:t>26</a:t>
+            </a:fld>
+            <a:endParaRPr lang="en-US"/>
+          </a:p>
+        </p:txBody>
+      </p:sp>
+      <p:pic>
+        <p:nvPicPr>
+          <p:cNvPr id="26" name="cts logo" descr="cts-logo.png"/>
+          <p:cNvPicPr>
+            <a:picLocks noChangeAspect="1"/>
+          </p:cNvPicPr>
+          <p:nvPr/>
+        </p:nvPicPr>
+        <p:blipFill>
+          <a:blip r:embed="rId4"/>
+          <a:stretch>
+            <a:fillRect/>
+          </a:stretch>
+        </p:blipFill>
+        <p:spPr>
+          <a:xfrm>
+            <a:off x="7680959" y="182880"/>
+            <a:ext cx="960120" cy="539696"/>
+          </a:xfrm>
+          <a:prstGeom prst="rect">
+            <a:avLst/>
+          </a:prstGeom>
+        </p:spPr>
+      </p:pic>
+    </p:spTree>
+  </p:cSld>
+  <p:clrMapOvr>
+    <a:masterClrMapping/>
+  </p:clrMapOvr>
+</p:sld>
+</file>
+
+<file path=ppt/slides/slide31.xml><?xml version="1.0" encoding="utf-8"?>
+<p:sld xmlns:a="http://schemas.openxmlformats.org/drawingml/2006/main" xmlns:r="http://schemas.openxmlformats.org/officeDocument/2006/relationships" xmlns:p="http://schemas.openxmlformats.org/presentationml/2006/main">
+  <p:cSld name="Slide 27">
+    <p:spTree>
+      <p:nvGrpSpPr>
+        <p:cNvPr id="1" name=""/>
+        <p:cNvGrpSpPr/>
+        <p:nvPr/>
+      </p:nvGrpSpPr>
+      <p:grpSpPr>
+        <a:xfrm>
+          <a:off x="0" y="0"/>
+          <a:ext cx="0" cy="0"/>
+          <a:chOff x="0" y="0"/>
+          <a:chExt cx="0" cy="0"/>
+        </a:xfrm>
+      </p:grpSpPr>
+      <p:sp>
+        <p:nvSpPr>
+          <p:cNvPr id="2" name="Text 0"/>
+          <p:cNvSpPr txBox="1"/>
+          <p:nvPr/>
+        </p:nvSpPr>
+        <p:spPr>
+          <a:xfrm>
+            <a:off x="502920" y="365760"/>
+            <a:ext cx="6400800" cy="274320"/>
+          </a:xfrm>
+          <a:prstGeom prst="rect">
+            <a:avLst/>
+          </a:prstGeom>
+          <a:noFill/>
+          <a:ln/>
+        </p:spPr>
+        <p:txBody>
+          <a:bodyPr wrap="square" lIns="0" tIns="0" rIns="0" bIns="0" rtlCol="0" anchor="ctr"/>
+          <a:lstStyle/>
+          <a:p>
+            <a:pPr marL="0" indent="0">
+              <a:buNone/>
+            </a:pPr>
+            <a:r>
+              <a:rPr lang="en-US" sz="950" b="1" kern="0" spc="220">
+                <a:solidFill>
+                  <a:srgbClr val="122B82"/>
+                </a:solidFill>
+              </a:rPr>
+              <a:t>PEOPLE AND UTILISATION</a:t>
+            </a:r>
+            <a:endParaRPr lang="en-US" sz="950"/>
+          </a:p>
+        </p:txBody>
+      </p:sp>
+      <p:sp>
+        <p:nvSpPr>
+          <p:cNvPr id="3" name="Text 1"/>
+          <p:cNvSpPr txBox="1"/>
+          <p:nvPr/>
+        </p:nvSpPr>
+        <p:spPr>
+          <a:xfrm>
+            <a:off x="502920" y="640080"/>
+            <a:ext cx="7315200" cy="685800"/>
+          </a:xfrm>
+          <a:prstGeom prst="rect">
+            <a:avLst/>
+          </a:prstGeom>
+          <a:noFill/>
+          <a:ln/>
+        </p:spPr>
+        <p:txBody>
+          <a:bodyPr wrap="square" lIns="0" tIns="0" rIns="0" bIns="0" rtlCol="0" anchor="ctr"/>
+          <a:lstStyle/>
+          <a:p>
+            <a:pPr marL="0" indent="0">
+              <a:buNone/>
+            </a:pPr>
+            <a:r>
+              <a:rPr lang="en-US" sz="2200" b="1">
+                <a:solidFill>
+                  <a:srgbClr val="242C39"/>
+                </a:solidFill>
+              </a:rPr>
+              <a:t>Hours, the three departments, Sep 26</a:t>
+            </a:r>
+            <a:endParaRPr lang="en-US" sz="2700"/>
+          </a:p>
+        </p:txBody>
+      </p:sp>
+      <p:pic>
+        <p:nvPicPr>
+          <p:cNvPr id="4" name="snip util_three" descr="/home/user/Claude/deck/snips/util_three.png"/>
+          <p:cNvPicPr>
+            <a:picLocks noChangeAspect="1"/>
+          </p:cNvPicPr>
+          <p:nvPr/>
+        </p:nvPicPr>
+        <p:blipFill>
+          <a:blip r:embed="rId3"/>
+          <a:stretch>
+            <a:fillRect/>
+          </a:stretch>
+        </p:blipFill>
+        <p:spPr>
+          <a:xfrm>
+            <a:off x="502920" y="1444752"/>
+            <a:ext cx="4800599" cy="2226875"/>
+          </a:xfrm>
+          <a:prstGeom prst="rect">
+            <a:avLst/>
+          </a:prstGeom>
+        </p:spPr>
+      </p:pic>
+      <p:sp>
+        <p:nvSpPr>
+          <p:cNvPr id="6" name="commentary panel"/>
+          <p:cNvSpPr/>
+          <p:nvPr/>
+        </p:nvSpPr>
+        <p:spPr>
+          <a:xfrm>
+            <a:off x="5532119" y="1463040"/>
+            <a:ext cx="3108960" cy="3154680"/>
+          </a:xfrm>
+          <a:prstGeom prst="rect">
+            <a:avLst/>
+          </a:prstGeom>
+          <a:solidFill>
+            <a:srgbClr val="E8F9F8"/>
+          </a:solidFill>
+          <a:ln/>
+        </p:spPr>
+        <p:txBody>
+          <a:bodyPr/>
+          <a:lstStyle/>
+          <a:p>
+            <a:endParaRPr lang="en-AU"/>
+          </a:p>
+        </p:txBody>
+      </p:sp>
+      <p:sp>
+        <p:nvSpPr>
+          <p:cNvPr id="7" name="Text 4"/>
+          <p:cNvSpPr txBox="1"/>
+          <p:nvPr/>
+        </p:nvSpPr>
+        <p:spPr>
+          <a:xfrm>
+            <a:off x="5714999" y="1627632"/>
+            <a:ext cx="2743200" cy="228600"/>
+          </a:xfrm>
+          <a:prstGeom prst="rect">
+            <a:avLst/>
+          </a:prstGeom>
+          <a:noFill/>
+          <a:ln/>
+        </p:spPr>
+        <p:txBody>
+          <a:bodyPr wrap="square" lIns="0" tIns="0" rIns="0" bIns="0" rtlCol="0" anchor="ctr"/>
+          <a:lstStyle/>
+          <a:p>
+            <a:pPr marL="0" indent="0">
+              <a:buNone/>
+            </a:pPr>
+            <a:r>
+              <a:rPr lang="en-US" sz="900" b="1" kern="0" spc="180">
+                <a:solidFill>
+                  <a:srgbClr val="005358"/>
+                </a:solidFill>
+              </a:rPr>
+              <a:t>COMMENTARY</a:t>
+            </a:r>
+            <a:endParaRPr lang="en-US" sz="900"/>
+          </a:p>
+        </p:txBody>
+      </p:sp>
+      <p:sp>
+        <p:nvSpPr>
+          <p:cNvPr id="8" name="Text 5"/>
+          <p:cNvSpPr txBox="1"/>
+          <p:nvPr/>
+        </p:nvSpPr>
+        <p:spPr>
+          <a:xfrm>
+            <a:off x="5714999" y="1901952"/>
+            <a:ext cx="2743200" cy="2706623"/>
+          </a:xfrm>
+          <a:prstGeom prst="rect">
+            <a:avLst/>
+          </a:prstGeom>
+          <a:noFill/>
+          <a:ln/>
+        </p:spPr>
+        <p:txBody>
+          <a:bodyPr wrap="square" lIns="0" tIns="0" rIns="0" bIns="0" rtlCol="0" anchor="t">
+            <a:normAutofit fontScale="85000" lnSpcReduction="10000"/>
+          </a:bodyPr>
+          <a:lstStyle/>
+          <a:p>
+            <a:pPr marL="342900" indent="-342900">
+              <a:lnSpc>
+                <a:spcPts val="1050"/>
+              </a:lnSpc>
+              <a:spcAft>
+                <a:spcPts val="400"/>
+              </a:spcAft>
+              <a:buSzPct val="100000"/>
+              <a:buChar char="•"/>
+            </a:pPr>
+            <a:r>
+              <a:rPr lang="en-US" sz="1000">
+                <a:solidFill>
+                  <a:srgbClr val="3A4453"/>
+                </a:solidFill>
+              </a:rPr>
+              <a:t>This view combines Events and Video as Production, and Integration and Consulting as Consulting, consistent with the P&amp;L.</a:t>
+            </a:r>
+            <a:endParaRPr lang="en-US" sz="850"/>
+          </a:p>
+          <a:p>
+            <a:pPr marL="342900" indent="-342900">
+              <a:lnSpc>
+                <a:spcPts val="1050"/>
+              </a:lnSpc>
+              <a:spcAft>
+                <a:spcPts val="400"/>
+              </a:spcAft>
+              <a:buSzPct val="100000"/>
+              <a:buChar char="•"/>
+            </a:pPr>
+            <a:r>
+              <a:rPr lang="en-US" sz="1000">
+                <a:solidFill>
+                  <a:srgbClr val="3A4453"/>
+                </a:solidFill>
+              </a:rPr>
+              <a:t>Production recorded 265 billable hours, 257 non-billable hours and 333 hours of leave.</a:t>
+            </a:r>
+            <a:endParaRPr lang="en-US" sz="850"/>
+          </a:p>
+          <a:p>
+            <a:pPr marL="342900" indent="-342900">
+              <a:lnSpc>
+                <a:spcPts val="1050"/>
+              </a:lnSpc>
+              <a:spcAft>
+                <a:spcPts val="400"/>
+              </a:spcAft>
+              <a:buSzPct val="100000"/>
+              <a:buChar char="•"/>
+            </a:pPr>
+            <a:r>
+              <a:rPr lang="en-US" sz="1000">
+                <a:solidFill>
+                  <a:srgbClr val="3A4453"/>
+                </a:solidFill>
+              </a:rPr>
+              <a:t>Consulting recorded 40 billable hours and 84 non-billable hours, indicating low utilisation of available working time.</a:t>
+            </a:r>
+            <a:endParaRPr lang="en-US" sz="850"/>
+          </a:p>
+          <a:p>
+            <a:pPr marL="342900" indent="-342900">
+              <a:lnSpc>
+                <a:spcPts val="1050"/>
+              </a:lnSpc>
+              <a:spcAft>
+                <a:spcPts val="400"/>
+              </a:spcAft>
+              <a:buSzPct val="100000"/>
+              <a:buChar char="•"/>
+            </a:pPr>
+            <a:r>
+              <a:rPr lang="en-US" sz="1000">
+                <a:solidFill>
+                  <a:srgbClr val="3A4453"/>
+                </a:solidFill>
+              </a:rPr>
+              <a:t>Support's hours were predominantly billable and supported the group's positive contribution.</a:t>
+            </a:r>
+            <a:endParaRPr lang="en-US" sz="850"/>
+          </a:p>
+          <a:p>
+            <a:pPr marL="342900" indent="-342900">
+              <a:lnSpc>
+                <a:spcPts val="1050"/>
+              </a:lnSpc>
+              <a:spcAft>
+                <a:spcPts val="400"/>
+              </a:spcAft>
+              <a:buSzPct val="100000"/>
+              <a:buChar char="•"/>
+            </a:pPr>
+            <a:r>
+              <a:rPr lang="en-US" sz="1000">
+                <a:solidFill>
+                  <a:srgbClr val="3A4453"/>
+                </a:solidFill>
+              </a:rPr>
+              <a:t>Each bar is scaled separately, as Support has substantially more recorded hours than the other groups.</a:t>
+            </a:r>
+            <a:endParaRPr lang="en-US" sz="850"/>
+          </a:p>
+        </p:txBody>
+      </p:sp>
+      <p:sp>
+        <p:nvSpPr>
+          <p:cNvPr id="25" name="Slide Number Placeholder 0"/>
+          <p:cNvSpPr>
+            <a:spLocks noGrp="1"/>
+          </p:cNvSpPr>
+          <p:nvPr>
+            <p:ph type="sldNum" sz="quarter" idx="4294967295"/>
+          </p:nvPr>
+        </p:nvSpPr>
+        <p:spPr>
+          <a:xfrm>
+            <a:off x="8092440" y="4736592"/>
+            <a:ext cx="548640" cy="228600"/>
+          </a:xfrm>
+          <a:prstGeom prst="rect">
+            <a:avLst/>
+          </a:prstGeom>
+          <a:extLst>
+            <a:ext uri="{C572A759-6A51-4108-AA02-DFA0A04FC94B}">
+              <ma14:wrappingTextBoxFlag xmlns:ma14="http://schemas.microsoft.com/office/mac/drawingml/2011/main" xmlns="" val="0"/>
+            </a:ext>
+          </a:extLst>
+        </p:spPr>
+        <p:txBody>
+          <a:bodyPr/>
+          <a:lstStyle>
+            <a:lvl1pPr>
+              <a:defRPr sz="800">
+                <a:solidFill>
+                  <a:srgbClr val="6B7585"/>
+                </a:solidFill>
+              </a:defRPr>
+            </a:lvl1pPr>
+          </a:lstStyle>
+          <a:p>
+            <a:pPr algn="r"/>
+            <a:fld id="{F7021451-1387-4CA6-816F-3879F97B5CBC}" type="slidenum">
+              <a:rPr lang="en-US" b="0"/>
+              <a:t>27</a:t>
+            </a:fld>
+            <a:endParaRPr lang="en-US"/>
+          </a:p>
+        </p:txBody>
+      </p:sp>
+      <p:pic>
+        <p:nvPicPr>
+          <p:cNvPr id="26" name="cts logo" descr="cts-logo.png"/>
+          <p:cNvPicPr>
+            <a:picLocks noChangeAspect="1"/>
+          </p:cNvPicPr>
+          <p:nvPr/>
+        </p:nvPicPr>
+        <p:blipFill>
+          <a:blip r:embed="rId4"/>
+          <a:stretch>
+            <a:fillRect/>
+          </a:stretch>
+        </p:blipFill>
+        <p:spPr>
+          <a:xfrm>
+            <a:off x="7680959" y="182880"/>
+            <a:ext cx="960120" cy="539696"/>
+          </a:xfrm>
+          <a:prstGeom prst="rect">
+            <a:avLst/>
+          </a:prstGeom>
+        </p:spPr>
+      </p:pic>
+    </p:spTree>
+  </p:cSld>
+  <p:clrMapOvr>
+    <a:masterClrMapping/>
+  </p:clrMapOvr>
+</p:sld>
+</file>
+
+<file path=ppt/slides/slide32.xml><?xml version="1.0" encoding="utf-8"?>
+<p:sld xmlns:a="http://schemas.openxmlformats.org/drawingml/2006/main" xmlns:r="http://schemas.openxmlformats.org/officeDocument/2006/relationships" xmlns:p="http://schemas.openxmlformats.org/presentationml/2006/main">
   <p:cSld name="Slide 28">
     <p:spTree>
       <p:nvGrpSpPr>
@@ -16469,7 +17344,7 @@
 </p:sld>
 </file>
 
-<file path=ppt/slides/slide31.xml><?xml version="1.0" encoding="utf-8"?>
+<file path=ppt/slides/slide33.xml><?xml version="1.0" encoding="utf-8"?>
 <p:sld xmlns:a="http://schemas.openxmlformats.org/drawingml/2006/main" xmlns:r="http://schemas.openxmlformats.org/officeDocument/2006/relationships" xmlns:p="http://schemas.openxmlformats.org/presentationml/2006/main">
   <p:cSld name="Slide 29">
     <p:spTree>
@@ -16851,7 +17726,7 @@
 </p:sld>
 </file>
 
-<file path=ppt/slides/slide32.xml><?xml version="1.0" encoding="utf-8"?>
+<file path=ppt/slides/slide34.xml><?xml version="1.0" encoding="utf-8"?>
 <p:sld xmlns:a="http://schemas.openxmlformats.org/drawingml/2006/main" xmlns:r="http://schemas.openxmlformats.org/officeDocument/2006/relationships" xmlns:p="http://schemas.openxmlformats.org/presentationml/2006/main">
   <p:cSld name="Slide 30">
     <p:spTree>
@@ -18997,7 +19872,7 @@
 </p:sld>
 </file>
 
-<file path=ppt/slides/slide33.xml><?xml version="1.0" encoding="utf-8"?>
+<file path=ppt/slides/slide35.xml><?xml version="1.0" encoding="utf-8"?>
 <p:sld xmlns:a="http://schemas.openxmlformats.org/drawingml/2006/main" xmlns:r="http://schemas.openxmlformats.org/officeDocument/2006/relationships" xmlns:p="http://schemas.openxmlformats.org/presentationml/2006/main">
   <p:cSld>
     <p:bg>
@@ -19373,7 +20248,7 @@
 </p:sld>
 </file>
 
-<file path=ppt/slides/slide34.xml><?xml version="1.0" encoding="utf-8"?>
+<file path=ppt/slides/slide36.xml><?xml version="1.0" encoding="utf-8"?>
 <p:sld xmlns:a="http://schemas.openxmlformats.org/drawingml/2006/main" xmlns:r="http://schemas.openxmlformats.org/officeDocument/2006/relationships" xmlns:p="http://schemas.openxmlformats.org/presentationml/2006/main">
   <p:cSld name="Slide 31">
     <p:spTree>
@@ -19629,7 +20504,7 @@
 </p:sld>
 </file>
 
-<file path=ppt/slides/slide35.xml><?xml version="1.0" encoding="utf-8"?>
+<file path=ppt/slides/slide37.xml><?xml version="1.0" encoding="utf-8"?>
 <p:sld xmlns:a="http://schemas.openxmlformats.org/drawingml/2006/main" xmlns:p="http://schemas.openxmlformats.org/presentationml/2006/main" xmlns:r="http://schemas.openxmlformats.org/officeDocument/2006/relationships">
   <p:cSld>
     <p:spTree>
@@ -19641,7 +20516,7 @@
       <p:grpSpPr/>
       <p:pic>
         <p:nvPicPr>
-          <p:cNvPr id="27" name="snip rev_years" descr="rev_years.png"/>
+          <p:cNvPr id="27" name="snip xero_hist" descr="xero_hist.png"/>
           <p:cNvPicPr>
             <a:picLocks noChangeAspect="1"/>
           </p:cNvPicPr>
@@ -19655,8 +20530,8 @@
         </p:blipFill>
         <p:spPr>
           <a:xfrm>
-            <a:off x="1376065" y="1115568"/>
-            <a:ext cx="6391868" cy="2174747"/>
+            <a:off x="1362886" y="1115568"/>
+            <a:ext cx="6418226" cy="2397673"/>
           </a:xfrm>
           <a:prstGeom prst="rect">
             <a:avLst/>
@@ -19729,7 +20604,7 @@
                   <a:srgbClr val="242C39"/>
                 </a:solidFill>
               </a:rPr>
-              <a:t>Revenue by month, year on year</a:t>
+              <a:t>Three years of revenue by month</a:t>
             </a:r>
             <a:endParaRPr lang="en-US" sz="2700"/>
           </a:p>
@@ -19743,8 +20618,8 @@
         </p:nvSpPr>
         <p:spPr>
           <a:xfrm>
-            <a:off x="502920" y="3400043"/>
-            <a:ext cx="8138160" cy="1226820"/>
+            <a:off x="502920" y="3622969"/>
+            <a:ext cx="8138160" cy="1003894"/>
           </a:xfrm>
           <a:prstGeom prst="rect">
             <a:avLst/>
@@ -19770,7 +20645,7 @@
         </p:nvSpPr>
         <p:spPr>
           <a:xfrm>
-            <a:off x="685800" y="3473195"/>
+            <a:off x="685800" y="3696121"/>
             <a:ext cx="2743200" cy="228600"/>
           </a:xfrm>
           <a:prstGeom prst="rect">
@@ -19806,8 +20681,8 @@
         </p:nvSpPr>
         <p:spPr>
           <a:xfrm>
-            <a:off x="685800" y="3646931"/>
-            <a:ext cx="3703320" cy="952500"/>
+            <a:off x="685800" y="3869857"/>
+            <a:ext cx="3703320" cy="729574"/>
           </a:xfrm>
           <a:prstGeom prst="rect">
             <a:avLst/>
@@ -19837,7 +20712,7 @@
                   <a:srgbClr val="3A4453"/>
                 </a:solidFill>
               </a:rPr>
-              <a:t>FY27 is ahead of FY26 in all three closed months: $459k against $321k, $603k against $551k, $562k against $356k.</a:t>
+              <a:t>Thirty six months of revenue, from July 2024 through to September 2026.</a:t>
             </a:r>
             <a:endParaRPr lang="en-US" sz="850"/>
           </a:p>
@@ -19858,10 +20733,79 @@
                   <a:srgbClr val="3A4453"/>
                 </a:solidFill>
               </a:rPr>
-              <a:t>The quarter is $1,624k against $1,229k, up 32%.</a:t>
+              <a:t>FY26 was the softer year at $6,113k against $7,000k, and it was down in both halves.</a:t>
             </a:r>
             <a:endParaRPr lang="en-US" sz="850"/>
           </a:p>
+        </p:txBody>
+      </p:sp>
+      <p:sp>
+        <p:nvSpPr>
+          <p:cNvPr id="25" name="Slide Number Placeholder 0"/>
+          <p:cNvSpPr>
+            <a:spLocks noGrp="1"/>
+          </p:cNvSpPr>
+          <p:nvPr>
+            <p:ph type="sldNum" sz="quarter" idx="4294967295"/>
+          </p:nvPr>
+        </p:nvSpPr>
+        <p:spPr>
+          <a:xfrm>
+            <a:off x="8092440" y="4736592"/>
+            <a:ext cx="548640" cy="228600"/>
+          </a:xfrm>
+          <a:prstGeom prst="rect">
+            <a:avLst/>
+          </a:prstGeom>
+          <a:extLst>
+            <a:ext uri="{C572A759-6A51-4108-AA02-DFA0A04FC94B}">
+              <ma14:wrappingTextBoxFlag xmlns:ma14="http://schemas.microsoft.com/office/mac/drawingml/2011/main" xmlns="" val="0"/>
+            </a:ext>
+          </a:extLst>
+        </p:spPr>
+        <p:txBody>
+          <a:bodyPr/>
+          <a:lstStyle>
+            <a:lvl1pPr>
+              <a:defRPr sz="800">
+                <a:solidFill>
+                  <a:srgbClr val="6B7585"/>
+                </a:solidFill>
+              </a:defRPr>
+            </a:lvl1pPr>
+          </a:lstStyle>
+          <a:p>
+            <a:pPr algn="r"/>
+            <a:fld id="{F7021451-1387-4CA6-816F-3879F97B5CBC}" type="slidenum">
+              <a:rPr lang="en-US" b="0"/>
+              <a:t>16</a:t>
+            </a:fld>
+            <a:endParaRPr lang="en-US"/>
+          </a:p>
+        </p:txBody>
+      </p:sp>
+      <p:sp>
+        <p:nvSpPr>
+          <p:cNvPr id="8" name="Text 5b"/>
+          <p:cNvSpPr txBox="1"/>
+          <p:nvPr/>
+        </p:nvSpPr>
+        <p:spPr>
+          <a:xfrm>
+            <a:off x="4663440" y="3869857"/>
+            <a:ext cx="3703320" cy="729574"/>
+          </a:xfrm>
+          <a:prstGeom prst="rect">
+            <a:avLst/>
+          </a:prstGeom>
+          <a:noFill/>
+          <a:ln/>
+        </p:spPr>
+        <p:txBody>
+          <a:bodyPr wrap="square" lIns="0" tIns="0" rIns="0" bIns="0" rtlCol="0" anchor="t">
+            <a:normAutofit fontScale="85000" lnSpcReduction="10000"/>
+          </a:bodyPr>
+          <a:lstStyle/>
           <a:p>
             <a:pPr marL="342900" indent="-342900">
               <a:lnSpc>
@@ -19879,79 +20823,10 @@
                   <a:srgbClr val="3A4453"/>
                 </a:solidFill>
               </a:rPr>
-              <a:t>FY26's own shape is the warning. Its largest month was October at $1,036k, and the FY27 budget repeats that pattern.</a:t>
+              <a:t>The largest single swing is January: $918k in FY25 against $269k in FY26.</a:t>
             </a:r>
             <a:endParaRPr lang="en-US" sz="850"/>
           </a:p>
-        </p:txBody>
-      </p:sp>
-      <p:sp>
-        <p:nvSpPr>
-          <p:cNvPr id="25" name="Slide Number Placeholder 0"/>
-          <p:cNvSpPr>
-            <a:spLocks noGrp="1"/>
-          </p:cNvSpPr>
-          <p:nvPr>
-            <p:ph type="sldNum" sz="quarter" idx="4294967295"/>
-          </p:nvPr>
-        </p:nvSpPr>
-        <p:spPr>
-          <a:xfrm>
-            <a:off x="8092440" y="4736592"/>
-            <a:ext cx="548640" cy="228600"/>
-          </a:xfrm>
-          <a:prstGeom prst="rect">
-            <a:avLst/>
-          </a:prstGeom>
-          <a:extLst>
-            <a:ext uri="{C572A759-6A51-4108-AA02-DFA0A04FC94B}">
-              <ma14:wrappingTextBoxFlag xmlns:ma14="http://schemas.microsoft.com/office/mac/drawingml/2011/main" xmlns="" val="0"/>
-            </a:ext>
-          </a:extLst>
-        </p:spPr>
-        <p:txBody>
-          <a:bodyPr/>
-          <a:lstStyle>
-            <a:lvl1pPr>
-              <a:defRPr sz="800">
-                <a:solidFill>
-                  <a:srgbClr val="6B7585"/>
-                </a:solidFill>
-              </a:defRPr>
-            </a:lvl1pPr>
-          </a:lstStyle>
-          <a:p>
-            <a:pPr algn="r"/>
-            <a:fld id="{F7021451-1387-4CA6-816F-3879F97B5CBC}" type="slidenum">
-              <a:rPr lang="en-US" b="0"/>
-              <a:t>16</a:t>
-            </a:fld>
-            <a:endParaRPr lang="en-US"/>
-          </a:p>
-        </p:txBody>
-      </p:sp>
-      <p:sp>
-        <p:nvSpPr>
-          <p:cNvPr id="8" name="Text 5b"/>
-          <p:cNvSpPr txBox="1"/>
-          <p:nvPr/>
-        </p:nvSpPr>
-        <p:spPr>
-          <a:xfrm>
-            <a:off x="4663440" y="3646931"/>
-            <a:ext cx="3703320" cy="952500"/>
-          </a:xfrm>
-          <a:prstGeom prst="rect">
-            <a:avLst/>
-          </a:prstGeom>
-          <a:noFill/>
-          <a:ln/>
-        </p:spPr>
-        <p:txBody>
-          <a:bodyPr wrap="square" lIns="0" tIns="0" rIns="0" bIns="0" rtlCol="0" anchor="t">
-            <a:normAutofit fontScale="85000" lnSpcReduction="10000"/>
-          </a:bodyPr>
-          <a:lstStyle/>
           <a:p>
             <a:pPr marL="342900" indent="-342900">
               <a:lnSpc>
@@ -19969,406 +20844,7 @@
                   <a:srgbClr val="3A4453"/>
                 </a:solidFill>
               </a:rPr>
-              <a:t>Only FY26 and FY27 are in the pack. FY23, FY24 and FY25 need one Xero export each.</a:t>
-            </a:r>
-            <a:endParaRPr lang="en-US" sz="850"/>
-          </a:p>
-          <a:p>
-            <a:pPr marL="342900" indent="-342900">
-              <a:lnSpc>
-                <a:spcPts val="1050"/>
-              </a:lnSpc>
-              <a:spcAft>
-                <a:spcPts val="400"/>
-              </a:spcAft>
-              <a:buSzPct val="100000"/>
-              <a:buChar char="•"/>
-            </a:pPr>
-            <a:r>
-              <a:rPr lang="en-US" sz="1000">
-                <a:solidFill>
-                  <a:srgbClr val="3A4453"/>
-                </a:solidFill>
-              </a:rPr>
-              <a:t>The chart reads whichever years have figures, so pasting a year in is all that is needed.</a:t>
-            </a:r>
-            <a:endParaRPr lang="en-US" sz="850"/>
-          </a:p>
-        </p:txBody>
-      </p:sp>
-      <p:pic>
-        <p:nvPicPr>
-          <p:cNvPr id="26" name="cts logo" descr="image.png"/>
-          <p:cNvPicPr>
-            <a:picLocks noChangeAspect="1"/>
-          </p:cNvPicPr>
-          <p:nvPr/>
-        </p:nvPicPr>
-        <p:blipFill>
-          <a:blip r:embed="rId2"/>
-          <a:stretch>
-            <a:fillRect/>
-          </a:stretch>
-        </p:blipFill>
-        <p:spPr>
-          <a:xfrm>
-            <a:off x="7680959" y="182880"/>
-            <a:ext cx="960120" cy="539696"/>
-          </a:xfrm>
-          <a:prstGeom prst="rect">
-            <a:avLst/>
-          </a:prstGeom>
-        </p:spPr>
-      </p:pic>
-    </p:spTree>
-  </p:cSld>
-  <p:clrMapOvr>
-    <a:masterClrMapping/>
-  </p:clrMapOvr>
-</p:sld>
-</file>
-
-<file path=ppt/slides/slide36.xml><?xml version="1.0" encoding="utf-8"?>
-<p:sld xmlns:a="http://schemas.openxmlformats.org/drawingml/2006/main" xmlns:p="http://schemas.openxmlformats.org/presentationml/2006/main" xmlns:r="http://schemas.openxmlformats.org/officeDocument/2006/relationships">
-  <p:cSld>
-    <p:spTree>
-      <p:nvGrpSpPr>
-        <p:cNvPr id="1" name=""/>
-        <p:cNvGrpSpPr/>
-        <p:nvPr/>
-      </p:nvGrpSpPr>
-      <p:grpSpPr/>
-      <p:pic>
-        <p:nvPicPr>
-          <p:cNvPr id="27" name="snip rev_q1" descr="rev_q1.png"/>
-          <p:cNvPicPr>
-            <a:picLocks noChangeAspect="1"/>
-          </p:cNvPicPr>
-          <p:nvPr/>
-        </p:nvPicPr>
-        <p:blipFill>
-          <a:blip r:embed="rId3"/>
-          <a:stretch>
-            <a:fillRect/>
-          </a:stretch>
-        </p:blipFill>
-        <p:spPr>
-          <a:xfrm>
-            <a:off x="1734604" y="1115568"/>
-            <a:ext cx="5674791" cy="2397673"/>
-          </a:xfrm>
-          <a:prstGeom prst="rect">
-            <a:avLst/>
-          </a:prstGeom>
-        </p:spPr>
-      </p:pic>
-      <p:sp>
-        <p:nvSpPr>
-          <p:cNvPr id="2" name="Text 0"/>
-          <p:cNvSpPr txBox="1"/>
-          <p:nvPr/>
-        </p:nvSpPr>
-        <p:spPr>
-          <a:xfrm>
-            <a:off x="502920" y="365760"/>
-            <a:ext cx="6400800" cy="274320"/>
-          </a:xfrm>
-          <a:prstGeom prst="rect">
-            <a:avLst/>
-          </a:prstGeom>
-          <a:noFill/>
-          <a:ln/>
-        </p:spPr>
-        <p:txBody>
-          <a:bodyPr wrap="square" lIns="0" tIns="0" rIns="0" bIns="0" rtlCol="0" anchor="ctr"/>
-          <a:lstStyle/>
-          <a:p>
-            <a:pPr marL="0" indent="0">
-              <a:buNone/>
-            </a:pPr>
-            <a:r>
-              <a:rPr lang="en-US" sz="950" b="1" kern="0" spc="220">
-                <a:solidFill>
-                  <a:srgbClr val="122B82"/>
-                </a:solidFill>
-              </a:rPr>
-              <a:t>FINANCIAL PERFORMANCE</a:t>
-            </a:r>
-            <a:endParaRPr lang="en-US" sz="950"/>
-          </a:p>
-        </p:txBody>
-      </p:sp>
-      <p:sp>
-        <p:nvSpPr>
-          <p:cNvPr id="3" name="Text 1"/>
-          <p:cNvSpPr txBox="1"/>
-          <p:nvPr/>
-        </p:nvSpPr>
-        <p:spPr>
-          <a:xfrm>
-            <a:off x="502920" y="640080"/>
-            <a:ext cx="7315200" cy="685800"/>
-          </a:xfrm>
-          <a:prstGeom prst="rect">
-            <a:avLst/>
-          </a:prstGeom>
-          <a:noFill/>
-          <a:ln/>
-        </p:spPr>
-        <p:txBody>
-          <a:bodyPr wrap="square" lIns="0" tIns="0" rIns="0" bIns="0" rtlCol="0" anchor="ctr"/>
-          <a:lstStyle/>
-          <a:p>
-            <a:pPr marL="0" indent="0">
-              <a:buNone/>
-            </a:pPr>
-            <a:r>
-              <a:rPr lang="en-US" sz="2200" b="1">
-                <a:solidFill>
-                  <a:srgbClr val="242C39"/>
-                </a:solidFill>
-              </a:rPr>
-              <a:t>First quarter revenue, year on year</a:t>
-            </a:r>
-            <a:endParaRPr lang="en-US" sz="2700"/>
-          </a:p>
-        </p:txBody>
-      </p:sp>
-      <p:sp>
-        <p:nvSpPr>
-          <p:cNvPr id="6" name="commentary panel"/>
-          <p:cNvSpPr/>
-          <p:nvPr/>
-        </p:nvSpPr>
-        <p:spPr>
-          <a:xfrm>
-            <a:off x="502920" y="3622969"/>
-            <a:ext cx="8138160" cy="1003894"/>
-          </a:xfrm>
-          <a:prstGeom prst="rect">
-            <a:avLst/>
-          </a:prstGeom>
-          <a:solidFill>
-            <a:srgbClr val="E8F9F8"/>
-          </a:solidFill>
-          <a:ln/>
-        </p:spPr>
-        <p:txBody>
-          <a:bodyPr/>
-          <a:lstStyle/>
-          <a:p>
-            <a:endParaRPr lang="en-AU"/>
-          </a:p>
-        </p:txBody>
-      </p:sp>
-      <p:sp>
-        <p:nvSpPr>
-          <p:cNvPr id="7" name="Text 4"/>
-          <p:cNvSpPr txBox="1"/>
-          <p:nvPr/>
-        </p:nvSpPr>
-        <p:spPr>
-          <a:xfrm>
-            <a:off x="685800" y="3696121"/>
-            <a:ext cx="2743200" cy="228600"/>
-          </a:xfrm>
-          <a:prstGeom prst="rect">
-            <a:avLst/>
-          </a:prstGeom>
-          <a:noFill/>
-          <a:ln/>
-        </p:spPr>
-        <p:txBody>
-          <a:bodyPr wrap="square" lIns="0" tIns="0" rIns="0" bIns="0" rtlCol="0" anchor="ctr"/>
-          <a:lstStyle/>
-          <a:p>
-            <a:pPr marL="0" indent="0">
-              <a:buNone/>
-            </a:pPr>
-            <a:r>
-              <a:rPr lang="en-US" sz="900" b="1" kern="0" spc="180">
-                <a:solidFill>
-                  <a:srgbClr val="005358"/>
-                </a:solidFill>
-              </a:rPr>
-              <a:t>COMMENTARY</a:t>
-            </a:r>
-            <a:endParaRPr lang="en-US" sz="900"/>
-          </a:p>
-        </p:txBody>
-      </p:sp>
-      <p:sp>
-        <p:nvSpPr>
-          <p:cNvPr id="8" name="Text 5"/>
-          <p:cNvSpPr txBox="1"/>
-          <p:nvPr/>
-        </p:nvSpPr>
-        <p:spPr>
-          <a:xfrm>
-            <a:off x="685800" y="3869857"/>
-            <a:ext cx="3703320" cy="729574"/>
-          </a:xfrm>
-          <a:prstGeom prst="rect">
-            <a:avLst/>
-          </a:prstGeom>
-          <a:noFill/>
-          <a:ln/>
-        </p:spPr>
-        <p:txBody>
-          <a:bodyPr wrap="square" lIns="0" tIns="0" rIns="0" bIns="0" rtlCol="0" anchor="t">
-            <a:normAutofit fontScale="85000" lnSpcReduction="10000"/>
-          </a:bodyPr>
-          <a:lstStyle/>
-          <a:p>
-            <a:pPr marL="342900" indent="-342900">
-              <a:lnSpc>
-                <a:spcPts val="1050"/>
-              </a:lnSpc>
-              <a:spcAft>
-                <a:spcPts val="400"/>
-              </a:spcAft>
-              <a:buSzPct val="100000"/>
-              <a:buChar char="•"/>
-            </a:pPr>
-            <a:r>
-              <a:rPr lang="en-US" sz="1000">
-                <a:solidFill>
-                  <a:srgbClr val="3A4453"/>
-                </a:solidFill>
-              </a:rPr>
-              <a:t>First quarter revenue is $1,624k against $1,229k last year, up $396k or 32%.</a:t>
-            </a:r>
-            <a:endParaRPr lang="en-US" sz="850"/>
-          </a:p>
-          <a:p>
-            <a:pPr marL="342900" indent="-342900">
-              <a:lnSpc>
-                <a:spcPts val="1050"/>
-              </a:lnSpc>
-              <a:spcAft>
-                <a:spcPts val="400"/>
-              </a:spcAft>
-              <a:buSzPct val="100000"/>
-              <a:buChar char="•"/>
-            </a:pPr>
-            <a:r>
-              <a:rPr lang="en-US" sz="1000">
-                <a:solidFill>
-                  <a:srgbClr val="3A4453"/>
-                </a:solidFill>
-              </a:rPr>
-              <a:t>Support contributed $719k of that, Integration $441k and Events $420k.</a:t>
-            </a:r>
-            <a:endParaRPr lang="en-US" sz="850"/>
-          </a:p>
-        </p:txBody>
-      </p:sp>
-      <p:sp>
-        <p:nvSpPr>
-          <p:cNvPr id="25" name="Slide Number Placeholder 0"/>
-          <p:cNvSpPr>
-            <a:spLocks noGrp="1"/>
-          </p:cNvSpPr>
-          <p:nvPr>
-            <p:ph type="sldNum" sz="quarter" idx="4294967295"/>
-          </p:nvPr>
-        </p:nvSpPr>
-        <p:spPr>
-          <a:xfrm>
-            <a:off x="8092440" y="4736592"/>
-            <a:ext cx="548640" cy="228600"/>
-          </a:xfrm>
-          <a:prstGeom prst="rect">
-            <a:avLst/>
-          </a:prstGeom>
-          <a:extLst>
-            <a:ext uri="{C572A759-6A51-4108-AA02-DFA0A04FC94B}">
-              <ma14:wrappingTextBoxFlag xmlns:ma14="http://schemas.microsoft.com/office/mac/drawingml/2011/main" xmlns="" val="0"/>
-            </a:ext>
-          </a:extLst>
-        </p:spPr>
-        <p:txBody>
-          <a:bodyPr/>
-          <a:lstStyle>
-            <a:lvl1pPr>
-              <a:defRPr sz="800">
-                <a:solidFill>
-                  <a:srgbClr val="6B7585"/>
-                </a:solidFill>
-              </a:defRPr>
-            </a:lvl1pPr>
-          </a:lstStyle>
-          <a:p>
-            <a:pPr algn="r"/>
-            <a:fld id="{F7021451-1387-4CA6-816F-3879F97B5CBC}" type="slidenum">
-              <a:rPr lang="en-US" b="0"/>
-              <a:t>16</a:t>
-            </a:fld>
-            <a:endParaRPr lang="en-US"/>
-          </a:p>
-        </p:txBody>
-      </p:sp>
-      <p:sp>
-        <p:nvSpPr>
-          <p:cNvPr id="8" name="Text 5b"/>
-          <p:cNvSpPr txBox="1"/>
-          <p:nvPr/>
-        </p:nvSpPr>
-        <p:spPr>
-          <a:xfrm>
-            <a:off x="4663440" y="3869857"/>
-            <a:ext cx="3703320" cy="729574"/>
-          </a:xfrm>
-          <a:prstGeom prst="rect">
-            <a:avLst/>
-          </a:prstGeom>
-          <a:noFill/>
-          <a:ln/>
-        </p:spPr>
-        <p:txBody>
-          <a:bodyPr wrap="square" lIns="0" tIns="0" rIns="0" bIns="0" rtlCol="0" anchor="t">
-            <a:normAutofit fontScale="85000" lnSpcReduction="10000"/>
-          </a:bodyPr>
-          <a:lstStyle/>
-          <a:p>
-            <a:pPr marL="342900" indent="-342900">
-              <a:lnSpc>
-                <a:spcPts val="1050"/>
-              </a:lnSpc>
-              <a:spcAft>
-                <a:spcPts val="400"/>
-              </a:spcAft>
-              <a:buSzPct val="100000"/>
-              <a:buChar char="•"/>
-            </a:pPr>
-            <a:r>
-              <a:rPr lang="en-US" sz="1000">
-                <a:solidFill>
-                  <a:srgbClr val="3A4453"/>
-                </a:solidFill>
-              </a:rPr>
-              <a:t>The growth is real on revenue. It did not reach the result, because the margin delivered on it was 38.9%.</a:t>
-            </a:r>
-            <a:endParaRPr lang="en-US" sz="850"/>
-          </a:p>
-          <a:p>
-            <a:pPr marL="342900" indent="-342900">
-              <a:lnSpc>
-                <a:spcPts val="1050"/>
-              </a:lnSpc>
-              <a:spcAft>
-                <a:spcPts val="400"/>
-              </a:spcAft>
-              <a:buSzPct val="100000"/>
-              <a:buChar char="•"/>
-            </a:pPr>
-            <a:r>
-              <a:rPr lang="en-US" sz="1000">
-                <a:solidFill>
-                  <a:srgbClr val="3A4453"/>
-                </a:solidFill>
-              </a:rPr>
-              <a:t>FY23 to FY25 are not in the pack. One Xero profit and loss by month for each year is all that is needed.</a:t>
+              <a:t>October carries the year. It was $949k in FY25 and $1,036k in FY26, and FY27 has it budgeted at $950k.</a:t>
             </a:r>
             <a:endParaRPr lang="en-US" sz="850"/>
           </a:p>
@@ -21894,25 +22370,18 @@
 </file>
 
 <file path=ppt/slides/slide8.xml><?xml version="1.0" encoding="utf-8"?>
-<p:sld xmlns:a="http://schemas.openxmlformats.org/drawingml/2006/main" xmlns:r="http://schemas.openxmlformats.org/officeDocument/2006/relationships" xmlns:p="http://schemas.openxmlformats.org/presentationml/2006/main">
-  <p:cSld name="Slide 6">
+<p:sld xmlns:a="http://schemas.openxmlformats.org/drawingml/2006/main" xmlns:p="http://schemas.openxmlformats.org/presentationml/2006/main" xmlns:r="http://schemas.openxmlformats.org/officeDocument/2006/relationships">
+  <p:cSld>
     <p:spTree>
       <p:nvGrpSpPr>
         <p:cNvPr id="1" name=""/>
         <p:cNvGrpSpPr/>
         <p:nvPr/>
       </p:nvGrpSpPr>
-      <p:grpSpPr>
-        <a:xfrm>
-          <a:off x="0" y="0"/>
-          <a:ext cx="0" cy="0"/>
-          <a:chOff x="0" y="0"/>
-          <a:chExt cx="0" cy="0"/>
-        </a:xfrm>
-      </p:grpSpPr>
+      <p:grpSpPr/>
       <p:pic>
         <p:nvPicPr>
-          <p:cNvPr id="27" name="snip pl_result" descr="pl_result.png"/>
+          <p:cNvPr id="27" name="snip rev_years" descr="rev_years.png"/>
           <p:cNvPicPr>
             <a:picLocks noChangeAspect="1"/>
           </p:cNvPicPr>
@@ -21926,8 +22395,8 @@
         </p:blipFill>
         <p:spPr>
           <a:xfrm>
-            <a:off x="1221933" y="1115568"/>
-            <a:ext cx="6700133" cy="1836982"/>
+            <a:off x="1734604" y="1115568"/>
+            <a:ext cx="5674791" cy="2397673"/>
           </a:xfrm>
           <a:prstGeom prst="rect">
             <a:avLst/>
@@ -22000,7 +22469,7 @@
                   <a:srgbClr val="242C39"/>
                 </a:solidFill>
               </a:rPr>
-              <a:t>P&amp;L summary, cost and profit</a:t>
+              <a:t>Revenue for the month, year on year</a:t>
             </a:r>
             <a:endParaRPr lang="en-US" sz="2700"/>
           </a:p>
@@ -22014,8 +22483,8 @@
         </p:nvSpPr>
         <p:spPr>
           <a:xfrm>
-            <a:off x="502920" y="3062278"/>
-            <a:ext cx="8138160" cy="1564585"/>
+            <a:off x="502920" y="3622969"/>
+            <a:ext cx="8138160" cy="1003894"/>
           </a:xfrm>
           <a:prstGeom prst="rect">
             <a:avLst/>
@@ -22041,7 +22510,7 @@
         </p:nvSpPr>
         <p:spPr>
           <a:xfrm>
-            <a:off x="685800" y="3135430"/>
+            <a:off x="685800" y="3696121"/>
             <a:ext cx="2743200" cy="228600"/>
           </a:xfrm>
           <a:prstGeom prst="rect">
@@ -22077,8 +22546,8 @@
         </p:nvSpPr>
         <p:spPr>
           <a:xfrm>
-            <a:off x="685800" y="3309166"/>
-            <a:ext cx="3703320" cy="1290265"/>
+            <a:off x="685800" y="3869857"/>
+            <a:ext cx="3703320" cy="729574"/>
           </a:xfrm>
           <a:prstGeom prst="rect">
             <a:avLst/>
@@ -22088,13 +22557,13 @@
         </p:spPr>
         <p:txBody>
           <a:bodyPr wrap="square" lIns="0" tIns="0" rIns="0" bIns="0" rtlCol="0" anchor="t">
-            <a:normAutofit fontScale="92500"/>
+            <a:normAutofit fontScale="85000" lnSpcReduction="10000"/>
           </a:bodyPr>
           <a:lstStyle/>
           <a:p>
             <a:pPr marL="342900" indent="-342900">
               <a:lnSpc>
-                <a:spcPts val="1000"/>
+                <a:spcPts val="1050"/>
               </a:lnSpc>
               <a:spcAft>
                 <a:spcPts val="400"/>
@@ -22108,14 +22577,14 @@
                   <a:srgbClr val="3A4453"/>
                 </a:solidFill>
               </a:rPr>
-              <a:t>Year-to-date EBITDA is $6k against a budget of $223k, a shortfall of approximately $217k.</a:t>
-            </a:r>
-            <a:endParaRPr lang="en-US" sz="800"/>
+              <a:t>September revenue was $562k, against $356k last September and $440k the September before that.</a:t>
+            </a:r>
+            <a:endParaRPr lang="en-US" sz="850"/>
           </a:p>
           <a:p>
             <a:pPr marL="342900" indent="-342900">
               <a:lnSpc>
-                <a:spcPts val="1000"/>
+                <a:spcPts val="1050"/>
               </a:lnSpc>
               <a:spcAft>
                 <a:spcPts val="400"/>
@@ -22129,30 +22598,9 @@
                   <a:srgbClr val="3A4453"/>
                 </a:solidFill>
               </a:rPr>
-              <a:t>The first quarter accounted for 56% of the full-year EBITDA budget, making the current shortfall significant.</a:t>
-            </a:r>
-            <a:endParaRPr lang="en-US" sz="800"/>
-          </a:p>
-          <a:p>
-            <a:pPr marL="342900" indent="-342900">
-              <a:lnSpc>
-                <a:spcPts val="1000"/>
-              </a:lnSpc>
-              <a:spcAft>
-                <a:spcPts val="400"/>
-              </a:spcAft>
-              <a:buSzPct val="100000"/>
-              <a:buChar char="•"/>
-            </a:pPr>
-            <a:r>
-              <a:rPr lang="en-US" sz="1000">
-                <a:solidFill>
-                  <a:srgbClr val="3A4453"/>
-                </a:solidFill>
-              </a:rPr>
-              <a:t>To achieve the $397k annual target, the remaining nine months would need to deliver approximately $391k, compared with the original $175k budget.</a:t>
-            </a:r>
-            <a:endParaRPr lang="en-US" sz="800"/>
+              <a:t>The three year shape is a dip and a recovery. September fell 19% between FY25 and FY26, then rose 58% into FY27.</a:t>
+            </a:r>
+            <a:endParaRPr lang="en-US" sz="850"/>
           </a:p>
         </p:txBody>
       </p:sp>
@@ -22195,36 +22643,12 @@
             <a:pPr algn="r"/>
             <a:fld id="{F7021451-1387-4CA6-816F-3879F97B5CBC}" type="slidenum">
               <a:rPr lang="en-US" b="0"/>
-              <a:t>6</a:t>
+              <a:t>16</a:t>
             </a:fld>
             <a:endParaRPr lang="en-US"/>
           </a:p>
         </p:txBody>
       </p:sp>
-      <p:pic>
-        <p:nvPicPr>
-          <p:cNvPr id="26" name="cts logo" descr="cts-logo.png"/>
-          <p:cNvPicPr>
-            <a:picLocks noChangeAspect="1"/>
-          </p:cNvPicPr>
-          <p:nvPr/>
-        </p:nvPicPr>
-        <p:blipFill>
-          <a:blip r:embed="rId4"/>
-          <a:stretch>
-            <a:fillRect/>
-          </a:stretch>
-        </p:blipFill>
-        <p:spPr>
-          <a:xfrm>
-            <a:off x="7680959" y="182880"/>
-            <a:ext cx="960120" cy="539696"/>
-          </a:xfrm>
-          <a:prstGeom prst="rect">
-            <a:avLst/>
-          </a:prstGeom>
-        </p:spPr>
-      </p:pic>
       <p:sp>
         <p:nvSpPr>
           <p:cNvPr id="8" name="Text 5b"/>
@@ -22233,8 +22657,8 @@
         </p:nvSpPr>
         <p:spPr>
           <a:xfrm>
-            <a:off x="4663440" y="3309166"/>
-            <a:ext cx="3703320" cy="1290265"/>
+            <a:off x="4663440" y="3869857"/>
+            <a:ext cx="3703320" cy="729574"/>
           </a:xfrm>
           <a:prstGeom prst="rect">
             <a:avLst/>
@@ -22244,13 +22668,13 @@
         </p:spPr>
         <p:txBody>
           <a:bodyPr wrap="square" lIns="0" tIns="0" rIns="0" bIns="0" rtlCol="0" anchor="t">
-            <a:normAutofit fontScale="92500"/>
+            <a:normAutofit fontScale="85000" lnSpcReduction="10000"/>
           </a:bodyPr>
           <a:lstStyle/>
           <a:p>
             <a:pPr marL="342900" indent="-342900">
               <a:lnSpc>
-                <a:spcPts val="1000"/>
+                <a:spcPts val="1050"/>
               </a:lnSpc>
               <a:spcAft>
                 <a:spcPts val="400"/>
@@ -22264,14 +22688,14 @@
                   <a:srgbClr val="3A4453"/>
                 </a:solidFill>
               </a:rPr>
-              <a:t>That requirement is around 1.7 times the EBITDA achieved in the whole of last financial year, making the annual target highly unlikely without a significant change in performance.</a:t>
-            </a:r>
-            <a:endParaRPr lang="en-US" sz="800"/>
+              <a:t>Measured against FY25 rather than the weak FY26, September is 28% ahead, which is the steadier read on growth.</a:t>
+            </a:r>
+            <a:endParaRPr lang="en-US" sz="850"/>
           </a:p>
           <a:p>
             <a:pPr marL="342900" indent="-342900">
               <a:lnSpc>
-                <a:spcPts val="1000"/>
+                <a:spcPts val="1050"/>
               </a:lnSpc>
               <a:spcAft>
                 <a:spcPts val="400"/>
@@ -22285,12 +22709,36 @@
                   <a:srgbClr val="3A4453"/>
                 </a:solidFill>
               </a:rPr>
-              <a:t>Revenue reached 81% of the year-to-date budget, while gross profit reached only 69%. Improving gross margin is a priority.</a:t>
-            </a:r>
-            <a:endParaRPr lang="en-US" sz="800"/>
-          </a:p>
-        </p:txBody>
-      </p:sp>
+              <a:t>Xero holds the last three financial years, so September 2024 is the earliest month available for this comparison.</a:t>
+            </a:r>
+            <a:endParaRPr lang="en-US" sz="850"/>
+          </a:p>
+        </p:txBody>
+      </p:sp>
+      <p:pic>
+        <p:nvPicPr>
+          <p:cNvPr id="26" name="cts logo" descr="image.png"/>
+          <p:cNvPicPr>
+            <a:picLocks noChangeAspect="1"/>
+          </p:cNvPicPr>
+          <p:nvPr/>
+        </p:nvPicPr>
+        <p:blipFill>
+          <a:blip r:embed="rId2"/>
+          <a:stretch>
+            <a:fillRect/>
+          </a:stretch>
+        </p:blipFill>
+        <p:spPr>
+          <a:xfrm>
+            <a:off x="7680959" y="182880"/>
+            <a:ext cx="960120" cy="539696"/>
+          </a:xfrm>
+          <a:prstGeom prst="rect">
+            <a:avLst/>
+          </a:prstGeom>
+        </p:spPr>
+      </p:pic>
     </p:spTree>
   </p:cSld>
   <p:clrMapOvr>
@@ -22300,118 +22748,111 @@
 </file>
 
 <file path=ppt/slides/slide9.xml><?xml version="1.0" encoding="utf-8"?>
-<p:sld xmlns:a="http://schemas.openxmlformats.org/drawingml/2006/main" xmlns:r="http://schemas.openxmlformats.org/officeDocument/2006/relationships" xmlns:p="http://schemas.openxmlformats.org/presentationml/2006/main">
-  <p:cSld name="Slide 7">
+<p:sld xmlns:a="http://schemas.openxmlformats.org/drawingml/2006/main" xmlns:p="http://schemas.openxmlformats.org/presentationml/2006/main" xmlns:r="http://schemas.openxmlformats.org/officeDocument/2006/relationships">
+  <p:cSld>
     <p:spTree>
       <p:nvGrpSpPr>
         <p:cNvPr id="1" name=""/>
         <p:cNvGrpSpPr/>
         <p:nvPr/>
       </p:nvGrpSpPr>
-      <p:grpSpPr>
-        <a:xfrm>
-          <a:off x="0" y="0"/>
-          <a:ext cx="0" cy="0"/>
-          <a:chOff x="0" y="0"/>
-          <a:chExt cx="0" cy="0"/>
-        </a:xfrm>
-      </p:grpSpPr>
-      <p:sp>
-        <p:nvSpPr>
-          <p:cNvPr id="2" name="Text 0"/>
-          <p:cNvSpPr txBox="1"/>
-          <p:nvPr/>
-        </p:nvSpPr>
-        <p:spPr>
-          <a:xfrm>
-            <a:off x="502920" y="365760"/>
-            <a:ext cx="6400800" cy="274320"/>
-          </a:xfrm>
-          <a:prstGeom prst="rect">
-            <a:avLst/>
-          </a:prstGeom>
-          <a:noFill/>
-          <a:ln/>
-        </p:spPr>
-        <p:txBody>
-          <a:bodyPr wrap="square" lIns="0" tIns="0" rIns="0" bIns="0" rtlCol="0" anchor="ctr"/>
-          <a:lstStyle/>
-          <a:p>
-            <a:pPr marL="0" indent="0">
-              <a:buNone/>
-            </a:pPr>
-            <a:r>
-              <a:rPr lang="en-US" sz="950" b="1" kern="0" spc="220">
-                <a:solidFill>
-                  <a:srgbClr val="122B82"/>
-                </a:solidFill>
-              </a:rPr>
-              <a:t>FINANCIAL PERFORMANCE</a:t>
-            </a:r>
-            <a:endParaRPr lang="en-US" sz="950"/>
-          </a:p>
-        </p:txBody>
-      </p:sp>
-      <p:sp>
-        <p:nvSpPr>
-          <p:cNvPr id="3" name="Text 1"/>
-          <p:cNvSpPr txBox="1"/>
-          <p:nvPr/>
-        </p:nvSpPr>
-        <p:spPr>
-          <a:xfrm>
-            <a:off x="502920" y="640080"/>
-            <a:ext cx="7315200" cy="685800"/>
-          </a:xfrm>
-          <a:prstGeom prst="rect">
-            <a:avLst/>
-          </a:prstGeom>
-          <a:noFill/>
-          <a:ln/>
-        </p:spPr>
-        <p:txBody>
-          <a:bodyPr wrap="square" lIns="0" tIns="0" rIns="0" bIns="0" rtlCol="0" anchor="ctr"/>
-          <a:lstStyle/>
-          <a:p>
-            <a:pPr marL="0" indent="0">
-              <a:buNone/>
-            </a:pPr>
-            <a:r>
-              <a:rPr lang="en-US" sz="2200" b="1">
-                <a:solidFill>
-                  <a:srgbClr val="242C39"/>
-                </a:solidFill>
-              </a:rPr>
-              <a:t>Department result, Sep 26</a:t>
-            </a:r>
-            <a:endParaRPr lang="en-US" sz="2700"/>
-          </a:p>
-        </p:txBody>
-      </p:sp>
+      <p:grpSpPr/>
       <p:pic>
         <p:nvPicPr>
-          <p:cNvPr id="4" name="snip dept_result" descr="/home/user/Claude/deck/snips/dept_result.png"/>
+          <p:cNvPr id="27" name="snip rev_q1" descr="rev_q1.png"/>
           <p:cNvPicPr>
             <a:picLocks noChangeAspect="1"/>
           </p:cNvPicPr>
           <p:nvPr/>
         </p:nvPicPr>
         <p:blipFill>
-          <a:blip r:embed="rId3"/>
+          <a:blip r:embed="rId5"/>
           <a:stretch>
             <a:fillRect/>
           </a:stretch>
         </p:blipFill>
         <p:spPr>
           <a:xfrm>
-            <a:off x="502920" y="1389888"/>
-            <a:ext cx="8138160" cy="1675122"/>
+            <a:off x="1734604" y="1115568"/>
+            <a:ext cx="5674791" cy="2397673"/>
           </a:xfrm>
           <a:prstGeom prst="rect">
             <a:avLst/>
           </a:prstGeom>
         </p:spPr>
       </p:pic>
+      <p:sp>
+        <p:nvSpPr>
+          <p:cNvPr id="2" name="Text 0"/>
+          <p:cNvSpPr txBox="1"/>
+          <p:nvPr/>
+        </p:nvSpPr>
+        <p:spPr>
+          <a:xfrm>
+            <a:off x="502920" y="365760"/>
+            <a:ext cx="6400800" cy="274320"/>
+          </a:xfrm>
+          <a:prstGeom prst="rect">
+            <a:avLst/>
+          </a:prstGeom>
+          <a:noFill/>
+          <a:ln/>
+        </p:spPr>
+        <p:txBody>
+          <a:bodyPr wrap="square" lIns="0" tIns="0" rIns="0" bIns="0" rtlCol="0" anchor="ctr"/>
+          <a:lstStyle/>
+          <a:p>
+            <a:pPr marL="0" indent="0">
+              <a:buNone/>
+            </a:pPr>
+            <a:r>
+              <a:rPr lang="en-US" sz="950" b="1" kern="0" spc="220">
+                <a:solidFill>
+                  <a:srgbClr val="122B82"/>
+                </a:solidFill>
+              </a:rPr>
+              <a:t>FINANCIAL PERFORMANCE</a:t>
+            </a:r>
+            <a:endParaRPr lang="en-US" sz="950"/>
+          </a:p>
+        </p:txBody>
+      </p:sp>
+      <p:sp>
+        <p:nvSpPr>
+          <p:cNvPr id="3" name="Text 1"/>
+          <p:cNvSpPr txBox="1"/>
+          <p:nvPr/>
+        </p:nvSpPr>
+        <p:spPr>
+          <a:xfrm>
+            <a:off x="502920" y="640080"/>
+            <a:ext cx="7315200" cy="685800"/>
+          </a:xfrm>
+          <a:prstGeom prst="rect">
+            <a:avLst/>
+          </a:prstGeom>
+          <a:noFill/>
+          <a:ln/>
+        </p:spPr>
+        <p:txBody>
+          <a:bodyPr wrap="square" lIns="0" tIns="0" rIns="0" bIns="0" rtlCol="0" anchor="ctr"/>
+          <a:lstStyle/>
+          <a:p>
+            <a:pPr marL="0" indent="0">
+              <a:buNone/>
+            </a:pPr>
+            <a:r>
+              <a:rPr lang="en-US" sz="2200" b="1">
+                <a:solidFill>
+                  <a:srgbClr val="242C39"/>
+                </a:solidFill>
+              </a:rPr>
+              <a:t>First quarter revenue, year on year</a:t>
+            </a:r>
+            <a:endParaRPr lang="en-US" sz="2700"/>
+          </a:p>
+        </p:txBody>
+      </p:sp>
       <p:sp>
         <p:nvSpPr>
           <p:cNvPr id="6" name="commentary panel"/>
@@ -22420,8 +22861,8 @@
         </p:nvSpPr>
         <p:spPr>
           <a:xfrm>
-            <a:off x="502920" y="3454086"/>
-            <a:ext cx="8138160" cy="1172777"/>
+            <a:off x="502920" y="3622969"/>
+            <a:ext cx="8138160" cy="1003894"/>
           </a:xfrm>
           <a:prstGeom prst="rect">
             <a:avLst/>
@@ -22447,8 +22888,8 @@
         </p:nvSpPr>
         <p:spPr>
           <a:xfrm>
-            <a:off x="685800" y="3527238"/>
-            <a:ext cx="2743200" cy="164592"/>
+            <a:off x="685800" y="3696121"/>
+            <a:ext cx="2743200" cy="228600"/>
           </a:xfrm>
           <a:prstGeom prst="rect">
             <a:avLst/>
@@ -22464,14 +22905,14 @@
               <a:buNone/>
             </a:pPr>
             <a:r>
-              <a:rPr lang="en-US" sz="850" b="1" kern="0" spc="180">
+              <a:rPr lang="en-US" sz="900" b="1" kern="0" spc="180">
                 <a:solidFill>
                   <a:srgbClr val="005358"/>
                 </a:solidFill>
               </a:rPr>
               <a:t>COMMENTARY</a:t>
             </a:r>
-            <a:endParaRPr lang="en-US" sz="850"/>
+            <a:endParaRPr lang="en-US" sz="900"/>
           </a:p>
         </p:txBody>
       </p:sp>
@@ -22483,8 +22924,8 @@
         </p:nvSpPr>
         <p:spPr>
           <a:xfrm>
-            <a:off x="685800" y="3700974"/>
-            <a:ext cx="3703320" cy="898457"/>
+            <a:off x="685800" y="3869857"/>
+            <a:ext cx="3703320" cy="729574"/>
           </a:xfrm>
           <a:prstGeom prst="rect">
             <a:avLst/>
@@ -22494,7 +22935,7 @@
         </p:spPr>
         <p:txBody>
           <a:bodyPr wrap="square" lIns="0" tIns="0" rIns="0" bIns="0" rtlCol="0" anchor="t">
-            <a:normAutofit/>
+            <a:normAutofit fontScale="85000" lnSpcReduction="10000"/>
           </a:bodyPr>
           <a:lstStyle/>
           <a:p>
@@ -22503,7 +22944,7 @@
                 <a:spcPts val="1050"/>
               </a:lnSpc>
               <a:spcAft>
-                <a:spcPts val="300"/>
+                <a:spcPts val="400"/>
               </a:spcAft>
               <a:buSzPct val="100000"/>
               <a:buChar char="•"/>
@@ -22514,7 +22955,7 @@
                   <a:srgbClr val="3A4453"/>
                 </a:solidFill>
               </a:rPr>
-              <a:t>Support generated a $29k profit on $243k revenue after its allocated overheads.</a:t>
+              <a:t>First quarter revenue was $1,624k, against $1,229k last year and $1,380k the year before.</a:t>
             </a:r>
             <a:endParaRPr lang="en-US" sz="850"/>
           </a:p>
@@ -22524,7 +22965,7 @@
                 <a:spcPts val="1050"/>
               </a:lnSpc>
               <a:spcAft>
-                <a:spcPts val="300"/>
+                <a:spcPts val="400"/>
               </a:spcAft>
               <a:buSzPct val="100000"/>
               <a:buChar char="•"/>
@@ -22535,73 +22976,7 @@
                   <a:srgbClr val="3A4453"/>
                 </a:solidFill>
               </a:rPr>
-              <a:t>Events achieved a 78% gross margin, but recorded a $54k loss after $111k in allocated overheads and $73k revenue.</a:t>
-            </a:r>
-            <a:endParaRPr lang="en-US" sz="850"/>
-          </a:p>
-        </p:txBody>
-      </p:sp>
-      <p:sp>
-        <p:nvSpPr>
-          <p:cNvPr id="9" name="Text 6"/>
-          <p:cNvSpPr txBox="1"/>
-          <p:nvPr/>
-        </p:nvSpPr>
-        <p:spPr>
-          <a:xfrm>
-            <a:off x="4663440" y="3700974"/>
-            <a:ext cx="3703320" cy="898457"/>
-          </a:xfrm>
-          <a:prstGeom prst="rect">
-            <a:avLst/>
-          </a:prstGeom>
-          <a:noFill/>
-          <a:ln/>
-        </p:spPr>
-        <p:txBody>
-          <a:bodyPr wrap="square" lIns="0" tIns="0" rIns="0" bIns="0" rtlCol="0" anchor="t">
-            <a:normAutofit/>
-          </a:bodyPr>
-          <a:lstStyle/>
-          <a:p>
-            <a:pPr marL="342900" indent="-342900">
-              <a:lnSpc>
-                <a:spcPts val="1050"/>
-              </a:lnSpc>
-              <a:spcAft>
-                <a:spcPts val="300"/>
-              </a:spcAft>
-              <a:buSzPct val="100000"/>
-              <a:buChar char="•"/>
-            </a:pPr>
-            <a:r>
-              <a:rPr lang="en-US" sz="1000">
-                <a:solidFill>
-                  <a:srgbClr val="3A4453"/>
-                </a:solidFill>
-              </a:rPr>
-              <a:t>Integration delivered $235k revenue against a $59k budget. A 10% gross margin limited the final profit to $10k.</a:t>
-            </a:r>
-            <a:endParaRPr lang="en-US" sz="850"/>
-          </a:p>
-          <a:p>
-            <a:pPr marL="342900" indent="-342900">
-              <a:lnSpc>
-                <a:spcPts val="1050"/>
-              </a:lnSpc>
-              <a:spcAft>
-                <a:spcPts val="300"/>
-              </a:spcAft>
-              <a:buSzPct val="100000"/>
-              <a:buChar char="•"/>
-            </a:pPr>
-            <a:r>
-              <a:rPr lang="en-US" sz="1000">
-                <a:solidFill>
-                  <a:srgbClr val="3A4453"/>
-                </a:solidFill>
-              </a:rPr>
-              <a:t>Consulting generated $4k revenue against approximately $20k of overheads. Its operating model and cost allocation require review.</a:t>
+              <a:t>FY26 was the softest of the three, 11% below FY25 for the quarter and 13% below for the full year.</a:t>
             </a:r>
             <a:endParaRPr lang="en-US" sz="850"/>
           </a:p>
@@ -22646,22 +23021,88 @@
             <a:pPr algn="r"/>
             <a:fld id="{F7021451-1387-4CA6-816F-3879F97B5CBC}" type="slidenum">
               <a:rPr lang="en-US" b="0"/>
-              <a:t>7</a:t>
+              <a:t>16</a:t>
             </a:fld>
             <a:endParaRPr lang="en-US"/>
           </a:p>
         </p:txBody>
       </p:sp>
+      <p:sp>
+        <p:nvSpPr>
+          <p:cNvPr id="8" name="Text 5b"/>
+          <p:cNvSpPr txBox="1"/>
+          <p:nvPr/>
+        </p:nvSpPr>
+        <p:spPr>
+          <a:xfrm>
+            <a:off x="4663440" y="3869857"/>
+            <a:ext cx="3703320" cy="729574"/>
+          </a:xfrm>
+          <a:prstGeom prst="rect">
+            <a:avLst/>
+          </a:prstGeom>
+          <a:noFill/>
+          <a:ln/>
+        </p:spPr>
+        <p:txBody>
+          <a:bodyPr wrap="square" lIns="0" tIns="0" rIns="0" bIns="0" rtlCol="0" anchor="t">
+            <a:normAutofit fontScale="85000" lnSpcReduction="10000"/>
+          </a:bodyPr>
+          <a:lstStyle/>
+          <a:p>
+            <a:pPr marL="342900" indent="-342900">
+              <a:lnSpc>
+                <a:spcPts val="1050"/>
+              </a:lnSpc>
+              <a:spcAft>
+                <a:spcPts val="400"/>
+              </a:spcAft>
+              <a:buSzPct val="100000"/>
+              <a:buChar char="•"/>
+            </a:pPr>
+            <a:r>
+              <a:rPr lang="en-US" sz="1000">
+                <a:solidFill>
+                  <a:srgbClr val="3A4453"/>
+                </a:solidFill>
+              </a:rPr>
+              <a:t>Against FY26 the quarter is 32% ahead. Against FY25 it is 18% ahead, which is about 8.5% a year.</a:t>
+            </a:r>
+            <a:endParaRPr lang="en-US" sz="850"/>
+          </a:p>
+          <a:p>
+            <a:pPr marL="342900" indent="-342900">
+              <a:lnSpc>
+                <a:spcPts val="1050"/>
+              </a:lnSpc>
+              <a:spcAft>
+                <a:spcPts val="400"/>
+              </a:spcAft>
+              <a:buSzPct val="100000"/>
+              <a:buChar char="•"/>
+            </a:pPr>
+            <a:r>
+              <a:rPr lang="en-US" sz="1000">
+                <a:solidFill>
+                  <a:srgbClr val="3A4453"/>
+                </a:solidFill>
+              </a:rPr>
+              <a:t>The growth is on revenue alone. The quarter delivered a 38.9% margin and $5.8k of EBITDA.</a:t>
+            </a:r>
+            <a:endParaRPr lang="en-US" sz="850"/>
+          </a:p>
+        </p:txBody>
+      </p:sp>
       <p:pic>
         <p:nvPicPr>
-          <p:cNvPr id="26" name="cts logo" descr="cts-logo.png"/>
+          <p:cNvPr id="26" name="cts logo" descr="image.png"/>
           <p:cNvPicPr>
             <a:picLocks noChangeAspect="1"/>
           </p:cNvPicPr>
           <p:nvPr/>
         </p:nvPicPr>
         <p:blipFill>
-          <a:blip r:embed="rId4"/>
+          <a:blip r:embed="rId2"/>
           <a:stretch>
             <a:fillRect/>
           </a:stretch>

--- a/deck/CTS Monthly Business Review - 30092026.pptx
+++ b/deck/CTS Monthly Business Review - 30092026.pptx
@@ -18,6 +18,7 @@
     <p:sldId id="291" r:id="rId46"/>
     <p:sldId id="292" r:id="rId47"/>
     <p:sldId id="293" r:id="rId48"/>
+    <p:sldId id="294" r:id="rId49"/>
     <p:sldId id="261" r:id="rId10"/>
     <p:sldId id="262" r:id="rId11"/>
     <p:sldId id="263" r:id="rId12"/>
@@ -3941,43 +3942,58 @@
           <a:lstStyle/>
           <a:p>
             <a:r>
-              <a:t>First quarter revenue across three years, taken from the Xero History tab and the Cost Analysis tab.</a:t>
+              <a:t>Revenue by quarter across three years, taken from the Xero History tab.</a:t>
             </a:r>
           </a:p>
           <a:p/>
           <a:p>
             <a:r>
-              <a:t>Q1 2026, being July to September 2026, $1,624,460. Q1 2025 $1,228,582. Q1 2024 $1,380,102.</a:t>
+              <a:t>First quarter: FY25 $1,380,102, FY26 $1,228,582, FY27 $1,624,460.</a:t>
+            </a:r>
+          </a:p>
+          <a:p>
+            <a:r>
+              <a:t>Second quarter: FY25 $2,276,986, FY26 $1,894,997.</a:t>
+            </a:r>
+          </a:p>
+          <a:p>
+            <a:r>
+              <a:t>Third quarter: FY25 $1,873,339, FY26 $1,303,789.</a:t>
+            </a:r>
+          </a:p>
+          <a:p>
+            <a:r>
+              <a:t>Fourth quarter: FY25 $1,469,930, FY26 $1,685,818.</a:t>
             </a:r>
           </a:p>
           <a:p/>
           <a:p>
             <a:r>
-              <a:t>Against last year the quarter is $395,878 or 32.2% ahead. Against two years ago it is $244,358 or 17.7% ahead. The middle year fell $151,520 or 11.0% below the first.</a:t>
+              <a:t>Three things come out of this that the single quarter comparison could not show.</a:t>
             </a:r>
           </a:p>
           <a:p/>
           <a:p>
             <a:r>
-              <a:t>The two readings tell different stories and the second is the more useful one. A 32% increase measured off the weakest of three years is not a growth rate the business can plan on. Compounded over the two years, the first quarter has grown about 8.5% a year. That is the figure to put against the reforecast.</a:t>
+              <a:t>The first is that the quarter just closed is the smallest quarter of the year in both completed years, and FY27 has made it the largest first quarter of the three. That is a genuinely good result and it is worth saying so.</a:t>
             </a:r>
           </a:p>
           <a:p/>
           <a:p>
             <a:r>
-              <a:t>The first quarter has held a steady share of the year in both completed years, 19.7% of FY25 and 20.1% of FY26. On that relationship a first quarter of $1,624,460 implies a full year of around $8.1 million, which is well ahead of both completed years and ahead of where the FY27 budget sits after the first three months.</a:t>
+              <a:t>The second is where FY26 actually lost its year. It was the third quarter, January to March, which fell $569,550 or 30.4% below the same quarter of FY25. The first quarter of FY26 was 11.0% below and the second 16.8% below, but the third is where the damage was done. The fourth quarter was the one quarter FY26 beat FY25, by $215,888 or 14.7%.</a:t>
             </a:r>
           </a:p>
           <a:p/>
           <a:p>
             <a:r>
-              <a:t>What the quarter did not do is reach the result. The margin delivered on that revenue was 38.9% and the quarter produced $5,774 of EBITDA. Revenue growth at this margin does not reach the bottom line, and that is the point the rest of the pack returns to.</a:t>
+              <a:t>The third is what is immediately ahead. The second quarter has carried 32.5% of FY25 and 31.0% of FY26, which makes it the quarter the year is won or lost in. October alone was the largest month of both completed years. The FY27 budget has October at $950,416, and the first quarter has run 18.6% behind budget on revenue. A second quarter that behaves like FY26's rather than FY25's would widen the full year gap by around $380,000 on its own.</a:t>
             </a:r>
           </a:p>
           <a:p/>
           <a:p>
             <a:r>
-              <a:t>FY23 and FY24 are outside the three financial years Xero serves, so the comparison stops at FY25.</a:t>
+              <a:t>FY27 shows one quarter because one quarter has closed. The chart fills in as each quarter closes.</a:t>
             </a:r>
           </a:p>
         </p:txBody>
@@ -4066,6 +4082,100 @@
           <a:p>
             <a:r>
               <a:t>Xero serves the last three financial years. FY23 and FY24 cannot be pulled, which is why the history begins in July 2024.</a:t>
+            </a:r>
+          </a:p>
+        </p:txBody>
+      </p:sp>
+    </p:spTree>
+  </p:cSld>
+  <p:clrMapOvr>
+    <a:masterClrMapping/>
+  </p:clrMapOvr>
+</p:notes>
+</file>
+
+<file path=ppt/notesSlides/notesSlide38.xml><?xml version="1.0" encoding="utf-8"?>
+<p:notes xmlns:a="http://schemas.openxmlformats.org/drawingml/2006/main" xmlns:p="http://schemas.openxmlformats.org/presentationml/2006/main" xmlns:r="http://schemas.openxmlformats.org/officeDocument/2006/relationships">
+  <p:cSld>
+    <p:spTree>
+      <p:nvGrpSpPr>
+        <p:cNvPr id="1" name=""/>
+        <p:cNvGrpSpPr/>
+        <p:nvPr/>
+      </p:nvGrpSpPr>
+      <p:grpSpPr>
+        <a:xfrm>
+          <a:off x="0" y="0"/>
+          <a:ext cx="0" cy="0"/>
+          <a:chOff x="0" y="0"/>
+          <a:chExt cx="0" cy="0"/>
+        </a:xfrm>
+      </p:grpSpPr>
+      <p:sp>
+        <p:nvSpPr>
+          <p:cNvPr id="3" name="Notes Placeholder 2"/>
+          <p:cNvSpPr>
+            <a:spLocks noGrp="1"/>
+          </p:cNvSpPr>
+          <p:nvPr>
+            <p:ph type="body" idx="1"/>
+          </p:nvPr>
+        </p:nvSpPr>
+        <p:spPr/>
+        <p:txBody>
+          <a:bodyPr lIns="107095" tIns="53547" rIns="107095" bIns="53547"/>
+          <a:lstStyle/>
+          <a:p>
+            <a:r>
+              <a:t>Revenue on a rolling twelve month basis, taken from the Xero History tab. Each point is the total of that month and the eleven before it.</a:t>
+            </a:r>
+          </a:p>
+          <a:p/>
+          <a:p>
+            <a:r>
+              <a:t>This is the chart that takes the seasonality out. For a business where October can be a seven figure month and January can be a quarter of that, the month by month picture and the quarterly picture both move for reasons that have nothing to do with how the business is actually travelling. The rolling twelve months does not.</a:t>
+            </a:r>
+          </a:p>
+          <a:p/>
+          <a:p>
+            <a:r>
+              <a:t>The peak was $7,000,357 at June 2025, which is the FY25 full year.</a:t>
+            </a:r>
+          </a:p>
+          <a:p/>
+          <a:p>
+            <a:r>
+              <a:t>It fell from there for seven straight months to $5,817,190 at January 2026, a fall of $1,183,167 or 16.9%. January 2026 is the single worst month in the three years at $268,631 against $918,289 the year before, and it drags the rolling figure down the moment it enters the window.</a:t>
+            </a:r>
+          </a:p>
+          <a:p/>
+          <a:p>
+            <a:r>
+              <a:t>Since January the line has turned up. It now stands at $6,509,064 at September 2026, which is $691,874 or 11.9% above the trough.</a:t>
+            </a:r>
+          </a:p>
+          <a:p/>
+          <a:p>
+            <a:r>
+              <a:t>It is still $491,293 or 7.0% below the peak.</a:t>
+            </a:r>
+          </a:p>
+          <a:p/>
+          <a:p>
+            <a:r>
+              <a:t>That is the honest position. The business is recovering and the direction is right, but it has not yet got back to where it was fifteen months ago. Quarterly growth of 32% measured off the weakest quarter of the three years does not describe a business at a record. This line does.</a:t>
+            </a:r>
+          </a:p>
+          <a:p/>
+          <a:p>
+            <a:r>
+              <a:t>The line begins at June 2025 because that is the first month with twelve months of Xero history behind it, and it stops at September 2026 because that is the last closed month.</a:t>
+            </a:r>
+          </a:p>
+          <a:p/>
+          <a:p>
+            <a:r>
+              <a:t>One note on the chart itself. The scale starts at five million rather than at zero. This series only moves between $5.8 million and $7.0 million, and drawn from zero it is a flat line with a 17% fall invisible in it. The axis labels show where the scale starts.</a:t>
             </a:r>
           </a:p>
         </p:txBody>
@@ -5682,6 +5792,384 @@
 </file>
 
 <file path=ppt/slides/slide10.xml><?xml version="1.0" encoding="utf-8"?>
+<p:sld xmlns:a="http://schemas.openxmlformats.org/drawingml/2006/main" xmlns:p="http://schemas.openxmlformats.org/presentationml/2006/main" xmlns:r="http://schemas.openxmlformats.org/officeDocument/2006/relationships">
+  <p:cSld>
+    <p:spTree>
+      <p:nvGrpSpPr>
+        <p:cNvPr id="1" name=""/>
+        <p:cNvGrpSpPr/>
+        <p:nvPr/>
+      </p:nvGrpSpPr>
+      <p:grpSpPr/>
+      <p:pic>
+        <p:nvPicPr>
+          <p:cNvPr id="27" name="snip xero_hist" descr="xero_hist.png"/>
+          <p:cNvPicPr>
+            <a:picLocks noChangeAspect="1"/>
+          </p:cNvPicPr>
+          <p:nvPr/>
+        </p:nvPicPr>
+        <p:blipFill>
+          <a:blip r:embed="rId3"/>
+          <a:stretch>
+            <a:fillRect/>
+          </a:stretch>
+        </p:blipFill>
+        <p:spPr>
+          <a:xfrm>
+            <a:off x="1362886" y="1115568"/>
+            <a:ext cx="6418226" cy="2397673"/>
+          </a:xfrm>
+          <a:prstGeom prst="rect">
+            <a:avLst/>
+          </a:prstGeom>
+        </p:spPr>
+      </p:pic>
+      <p:sp>
+        <p:nvSpPr>
+          <p:cNvPr id="2" name="Text 0"/>
+          <p:cNvSpPr txBox="1"/>
+          <p:nvPr/>
+        </p:nvSpPr>
+        <p:spPr>
+          <a:xfrm>
+            <a:off x="502920" y="365760"/>
+            <a:ext cx="6400800" cy="274320"/>
+          </a:xfrm>
+          <a:prstGeom prst="rect">
+            <a:avLst/>
+          </a:prstGeom>
+          <a:noFill/>
+          <a:ln/>
+        </p:spPr>
+        <p:txBody>
+          <a:bodyPr wrap="square" lIns="0" tIns="0" rIns="0" bIns="0" rtlCol="0" anchor="ctr"/>
+          <a:lstStyle/>
+          <a:p>
+            <a:pPr marL="0" indent="0">
+              <a:buNone/>
+            </a:pPr>
+            <a:r>
+              <a:rPr lang="en-US" sz="950" b="1" kern="0" spc="220">
+                <a:solidFill>
+                  <a:srgbClr val="122B82"/>
+                </a:solidFill>
+              </a:rPr>
+              <a:t>FINANCIAL PERFORMANCE</a:t>
+            </a:r>
+            <a:endParaRPr lang="en-US" sz="950"/>
+          </a:p>
+        </p:txBody>
+      </p:sp>
+      <p:sp>
+        <p:nvSpPr>
+          <p:cNvPr id="3" name="Text 1"/>
+          <p:cNvSpPr txBox="1"/>
+          <p:nvPr/>
+        </p:nvSpPr>
+        <p:spPr>
+          <a:xfrm>
+            <a:off x="502920" y="640080"/>
+            <a:ext cx="7315200" cy="685800"/>
+          </a:xfrm>
+          <a:prstGeom prst="rect">
+            <a:avLst/>
+          </a:prstGeom>
+          <a:noFill/>
+          <a:ln/>
+        </p:spPr>
+        <p:txBody>
+          <a:bodyPr wrap="square" lIns="0" tIns="0" rIns="0" bIns="0" rtlCol="0" anchor="ctr"/>
+          <a:lstStyle/>
+          <a:p>
+            <a:pPr marL="0" indent="0">
+              <a:buNone/>
+            </a:pPr>
+            <a:r>
+              <a:rPr lang="en-US" sz="2200" b="1">
+                <a:solidFill>
+                  <a:srgbClr val="242C39"/>
+                </a:solidFill>
+              </a:rPr>
+              <a:t>Three years of revenue by month</a:t>
+            </a:r>
+            <a:endParaRPr lang="en-US" sz="2700"/>
+          </a:p>
+        </p:txBody>
+      </p:sp>
+      <p:sp>
+        <p:nvSpPr>
+          <p:cNvPr id="6" name="commentary panel"/>
+          <p:cNvSpPr/>
+          <p:nvPr/>
+        </p:nvSpPr>
+        <p:spPr>
+          <a:xfrm>
+            <a:off x="502920" y="3622969"/>
+            <a:ext cx="8138160" cy="1003894"/>
+          </a:xfrm>
+          <a:prstGeom prst="rect">
+            <a:avLst/>
+          </a:prstGeom>
+          <a:solidFill>
+            <a:srgbClr val="E8F9F8"/>
+          </a:solidFill>
+          <a:ln/>
+        </p:spPr>
+        <p:txBody>
+          <a:bodyPr/>
+          <a:lstStyle/>
+          <a:p>
+            <a:endParaRPr lang="en-AU"/>
+          </a:p>
+        </p:txBody>
+      </p:sp>
+      <p:sp>
+        <p:nvSpPr>
+          <p:cNvPr id="7" name="Text 4"/>
+          <p:cNvSpPr txBox="1"/>
+          <p:nvPr/>
+        </p:nvSpPr>
+        <p:spPr>
+          <a:xfrm>
+            <a:off x="685800" y="3696121"/>
+            <a:ext cx="2743200" cy="228600"/>
+          </a:xfrm>
+          <a:prstGeom prst="rect">
+            <a:avLst/>
+          </a:prstGeom>
+          <a:noFill/>
+          <a:ln/>
+        </p:spPr>
+        <p:txBody>
+          <a:bodyPr wrap="square" lIns="0" tIns="0" rIns="0" bIns="0" rtlCol="0" anchor="ctr"/>
+          <a:lstStyle/>
+          <a:p>
+            <a:pPr marL="0" indent="0">
+              <a:buNone/>
+            </a:pPr>
+            <a:r>
+              <a:rPr lang="en-US" sz="900" b="1" kern="0" spc="180">
+                <a:solidFill>
+                  <a:srgbClr val="005358"/>
+                </a:solidFill>
+              </a:rPr>
+              <a:t>COMMENTARY</a:t>
+            </a:r>
+            <a:endParaRPr lang="en-US" sz="900"/>
+          </a:p>
+        </p:txBody>
+      </p:sp>
+      <p:sp>
+        <p:nvSpPr>
+          <p:cNvPr id="8" name="Text 5"/>
+          <p:cNvSpPr txBox="1"/>
+          <p:nvPr/>
+        </p:nvSpPr>
+        <p:spPr>
+          <a:xfrm>
+            <a:off x="685800" y="3869857"/>
+            <a:ext cx="3703320" cy="729574"/>
+          </a:xfrm>
+          <a:prstGeom prst="rect">
+            <a:avLst/>
+          </a:prstGeom>
+          <a:noFill/>
+          <a:ln/>
+        </p:spPr>
+        <p:txBody>
+          <a:bodyPr wrap="square" lIns="0" tIns="0" rIns="0" bIns="0" rtlCol="0" anchor="t">
+            <a:normAutofit fontScale="85000" lnSpcReduction="10000"/>
+          </a:bodyPr>
+          <a:lstStyle/>
+          <a:p>
+            <a:pPr marL="342900" indent="-342900">
+              <a:lnSpc>
+                <a:spcPts val="1050"/>
+              </a:lnSpc>
+              <a:spcAft>
+                <a:spcPts val="400"/>
+              </a:spcAft>
+              <a:buSzPct val="100000"/>
+              <a:buChar char="•"/>
+            </a:pPr>
+            <a:r>
+              <a:rPr lang="en-US" sz="1000">
+                <a:solidFill>
+                  <a:srgbClr val="3A4453"/>
+                </a:solidFill>
+              </a:rPr>
+              <a:t>Thirty six months of revenue, from July 2024 through to September 2026.</a:t>
+            </a:r>
+            <a:endParaRPr lang="en-US" sz="850"/>
+          </a:p>
+          <a:p>
+            <a:pPr marL="342900" indent="-342900">
+              <a:lnSpc>
+                <a:spcPts val="1050"/>
+              </a:lnSpc>
+              <a:spcAft>
+                <a:spcPts val="400"/>
+              </a:spcAft>
+              <a:buSzPct val="100000"/>
+              <a:buChar char="•"/>
+            </a:pPr>
+            <a:r>
+              <a:rPr lang="en-US" sz="1000">
+                <a:solidFill>
+                  <a:srgbClr val="3A4453"/>
+                </a:solidFill>
+              </a:rPr>
+              <a:t>FY26 was the softer year at $6,113k against $7,000k, and it was down in both halves.</a:t>
+            </a:r>
+            <a:endParaRPr lang="en-US" sz="850"/>
+          </a:p>
+        </p:txBody>
+      </p:sp>
+      <p:sp>
+        <p:nvSpPr>
+          <p:cNvPr id="25" name="Slide Number Placeholder 0"/>
+          <p:cNvSpPr>
+            <a:spLocks noGrp="1"/>
+          </p:cNvSpPr>
+          <p:nvPr>
+            <p:ph type="sldNum" sz="quarter" idx="4294967295"/>
+          </p:nvPr>
+        </p:nvSpPr>
+        <p:spPr>
+          <a:xfrm>
+            <a:off x="8092440" y="4736592"/>
+            <a:ext cx="548640" cy="228600"/>
+          </a:xfrm>
+          <a:prstGeom prst="rect">
+            <a:avLst/>
+          </a:prstGeom>
+          <a:extLst>
+            <a:ext uri="{C572A759-6A51-4108-AA02-DFA0A04FC94B}">
+              <ma14:wrappingTextBoxFlag xmlns:ma14="http://schemas.microsoft.com/office/mac/drawingml/2011/main" xmlns="" val="0"/>
+            </a:ext>
+          </a:extLst>
+        </p:spPr>
+        <p:txBody>
+          <a:bodyPr/>
+          <a:lstStyle>
+            <a:lvl1pPr>
+              <a:defRPr sz="800">
+                <a:solidFill>
+                  <a:srgbClr val="6B7585"/>
+                </a:solidFill>
+              </a:defRPr>
+            </a:lvl1pPr>
+          </a:lstStyle>
+          <a:p>
+            <a:pPr algn="r"/>
+            <a:fld id="{F7021451-1387-4CA6-816F-3879F97B5CBC}" type="slidenum">
+              <a:rPr lang="en-US" b="0"/>
+              <a:t>16</a:t>
+            </a:fld>
+            <a:endParaRPr lang="en-US"/>
+          </a:p>
+        </p:txBody>
+      </p:sp>
+      <p:sp>
+        <p:nvSpPr>
+          <p:cNvPr id="8" name="Text 5b"/>
+          <p:cNvSpPr txBox="1"/>
+          <p:nvPr/>
+        </p:nvSpPr>
+        <p:spPr>
+          <a:xfrm>
+            <a:off x="4663440" y="3869857"/>
+            <a:ext cx="3703320" cy="729574"/>
+          </a:xfrm>
+          <a:prstGeom prst="rect">
+            <a:avLst/>
+          </a:prstGeom>
+          <a:noFill/>
+          <a:ln/>
+        </p:spPr>
+        <p:txBody>
+          <a:bodyPr wrap="square" lIns="0" tIns="0" rIns="0" bIns="0" rtlCol="0" anchor="t">
+            <a:normAutofit fontScale="85000" lnSpcReduction="10000"/>
+          </a:bodyPr>
+          <a:lstStyle/>
+          <a:p>
+            <a:pPr marL="342900" indent="-342900">
+              <a:lnSpc>
+                <a:spcPts val="1050"/>
+              </a:lnSpc>
+              <a:spcAft>
+                <a:spcPts val="400"/>
+              </a:spcAft>
+              <a:buSzPct val="100000"/>
+              <a:buChar char="•"/>
+            </a:pPr>
+            <a:r>
+              <a:rPr lang="en-US" sz="1000">
+                <a:solidFill>
+                  <a:srgbClr val="3A4453"/>
+                </a:solidFill>
+              </a:rPr>
+              <a:t>The largest single swing is January: $918k in FY25 against $269k in FY26.</a:t>
+            </a:r>
+            <a:endParaRPr lang="en-US" sz="850"/>
+          </a:p>
+          <a:p>
+            <a:pPr marL="342900" indent="-342900">
+              <a:lnSpc>
+                <a:spcPts val="1050"/>
+              </a:lnSpc>
+              <a:spcAft>
+                <a:spcPts val="400"/>
+              </a:spcAft>
+              <a:buSzPct val="100000"/>
+              <a:buChar char="•"/>
+            </a:pPr>
+            <a:r>
+              <a:rPr lang="en-US" sz="1000">
+                <a:solidFill>
+                  <a:srgbClr val="3A4453"/>
+                </a:solidFill>
+              </a:rPr>
+              <a:t>October carries the year. It was $949k in FY25 and $1,036k in FY26, and FY27 has it budgeted at $950k.</a:t>
+            </a:r>
+            <a:endParaRPr lang="en-US" sz="850"/>
+          </a:p>
+        </p:txBody>
+      </p:sp>
+      <p:pic>
+        <p:nvPicPr>
+          <p:cNvPr id="26" name="cts logo" descr="image.png"/>
+          <p:cNvPicPr>
+            <a:picLocks noChangeAspect="1"/>
+          </p:cNvPicPr>
+          <p:nvPr/>
+        </p:nvPicPr>
+        <p:blipFill>
+          <a:blip r:embed="rId2"/>
+          <a:stretch>
+            <a:fillRect/>
+          </a:stretch>
+        </p:blipFill>
+        <p:spPr>
+          <a:xfrm>
+            <a:off x="7680959" y="182880"/>
+            <a:ext cx="960120" cy="539696"/>
+          </a:xfrm>
+          <a:prstGeom prst="rect">
+            <a:avLst/>
+          </a:prstGeom>
+        </p:spPr>
+      </p:pic>
+    </p:spTree>
+  </p:cSld>
+  <p:clrMapOvr>
+    <a:masterClrMapping/>
+  </p:clrMapOvr>
+</p:sld>
+</file>
+
+<file path=ppt/slides/slide11.xml><?xml version="1.0" encoding="utf-8"?>
 <p:sld xmlns:a="http://schemas.openxmlformats.org/drawingml/2006/main" xmlns:r="http://schemas.openxmlformats.org/officeDocument/2006/relationships" xmlns:p="http://schemas.openxmlformats.org/presentationml/2006/main">
   <p:cSld name="Slide 6">
     <p:spTree>
@@ -6087,7 +6575,7 @@
 </p:sld>
 </file>
 
-<file path=ppt/slides/slide11.xml><?xml version="1.0" encoding="utf-8"?>
+<file path=ppt/slides/slide12.xml><?xml version="1.0" encoding="utf-8"?>
 <p:sld xmlns:a="http://schemas.openxmlformats.org/drawingml/2006/main" xmlns:r="http://schemas.openxmlformats.org/officeDocument/2006/relationships" xmlns:p="http://schemas.openxmlformats.org/presentationml/2006/main">
   <p:cSld name="Slide 7">
     <p:spTree>
@@ -6472,7 +6960,7 @@
 </p:sld>
 </file>
 
-<file path=ppt/slides/slide12.xml><?xml version="1.0" encoding="utf-8"?>
+<file path=ppt/slides/slide13.xml><?xml version="1.0" encoding="utf-8"?>
 <p:sld xmlns:a="http://schemas.openxmlformats.org/drawingml/2006/main" xmlns:r="http://schemas.openxmlformats.org/officeDocument/2006/relationships" xmlns:p="http://schemas.openxmlformats.org/presentationml/2006/main">
   <p:cSld name="Slide 8">
     <p:spTree>
@@ -6857,7 +7345,7 @@
 </p:sld>
 </file>
 
-<file path=ppt/slides/slide13.xml><?xml version="1.0" encoding="utf-8"?>
+<file path=ppt/slides/slide14.xml><?xml version="1.0" encoding="utf-8"?>
 <p:sld xmlns:a="http://schemas.openxmlformats.org/drawingml/2006/main" xmlns:r="http://schemas.openxmlformats.org/officeDocument/2006/relationships" xmlns:p="http://schemas.openxmlformats.org/presentationml/2006/main">
   <p:cSld name="Slide 9">
     <p:spTree>
@@ -7263,7 +7751,7 @@
 </p:sld>
 </file>
 
-<file path=ppt/slides/slide14.xml><?xml version="1.0" encoding="utf-8"?>
+<file path=ppt/slides/slide15.xml><?xml version="1.0" encoding="utf-8"?>
 <p:sld xmlns:a="http://schemas.openxmlformats.org/drawingml/2006/main" xmlns:r="http://schemas.openxmlformats.org/officeDocument/2006/relationships" xmlns:p="http://schemas.openxmlformats.org/presentationml/2006/main">
   <p:cSld name="Slide 10">
     <p:spTree>
@@ -7669,7 +8157,7 @@
 </p:sld>
 </file>
 
-<file path=ppt/slides/slide15.xml><?xml version="1.0" encoding="utf-8"?>
+<file path=ppt/slides/slide16.xml><?xml version="1.0" encoding="utf-8"?>
 <p:sld xmlns:a="http://schemas.openxmlformats.org/drawingml/2006/main" xmlns:r="http://schemas.openxmlformats.org/officeDocument/2006/relationships" xmlns:p="http://schemas.openxmlformats.org/presentationml/2006/main">
   <p:cSld name="Slide 11">
     <p:spTree>
@@ -8075,7 +8563,7 @@
 </p:sld>
 </file>
 
-<file path=ppt/slides/slide16.xml><?xml version="1.0" encoding="utf-8"?>
+<file path=ppt/slides/slide17.xml><?xml version="1.0" encoding="utf-8"?>
 <p:sld xmlns:a="http://schemas.openxmlformats.org/drawingml/2006/main" xmlns:r="http://schemas.openxmlformats.org/officeDocument/2006/relationships" xmlns:p="http://schemas.openxmlformats.org/presentationml/2006/main">
   <p:cSld name="Slide 12">
     <p:spTree>
@@ -8481,7 +8969,7 @@
 </p:sld>
 </file>
 
-<file path=ppt/slides/slide17.xml><?xml version="1.0" encoding="utf-8"?>
+<file path=ppt/slides/slide18.xml><?xml version="1.0" encoding="utf-8"?>
 <p:sld xmlns:a="http://schemas.openxmlformats.org/drawingml/2006/main" xmlns:r="http://schemas.openxmlformats.org/officeDocument/2006/relationships" xmlns:p="http://schemas.openxmlformats.org/presentationml/2006/main">
   <p:cSld name="Slide 13">
     <p:spTree>
@@ -8887,7 +9375,7 @@
 </p:sld>
 </file>
 
-<file path=ppt/slides/slide18.xml><?xml version="1.0" encoding="utf-8"?>
+<file path=ppt/slides/slide19.xml><?xml version="1.0" encoding="utf-8"?>
 <p:sld xmlns:a="http://schemas.openxmlformats.org/drawingml/2006/main" xmlns:r="http://schemas.openxmlformats.org/officeDocument/2006/relationships" xmlns:p="http://schemas.openxmlformats.org/presentationml/2006/main">
   <p:cSld name="Slide 14">
     <p:spTree>
@@ -9282,289 +9770,6 @@
               <a:t>Total revenue increased 58% against September last year, although the gross margin percentage declined.</a:t>
             </a:r>
             <a:endParaRPr lang="en-US" sz="850"/>
-          </a:p>
-        </p:txBody>
-      </p:sp>
-    </p:spTree>
-  </p:cSld>
-  <p:clrMapOvr>
-    <a:masterClrMapping/>
-  </p:clrMapOvr>
-</p:sld>
-</file>
-
-<file path=ppt/slides/slide19.xml><?xml version="1.0" encoding="utf-8"?>
-<p:sld xmlns:a="http://schemas.openxmlformats.org/drawingml/2006/main" xmlns:r="http://schemas.openxmlformats.org/officeDocument/2006/relationships" xmlns:p="http://schemas.openxmlformats.org/presentationml/2006/main">
-  <p:cSld name="Slide 15">
-    <p:spTree>
-      <p:nvGrpSpPr>
-        <p:cNvPr id="1" name=""/>
-        <p:cNvGrpSpPr/>
-        <p:nvPr/>
-      </p:nvGrpSpPr>
-      <p:grpSpPr>
-        <a:xfrm>
-          <a:off x="0" y="0"/>
-          <a:ext cx="0" cy="0"/>
-          <a:chOff x="0" y="0"/>
-          <a:chExt cx="0" cy="0"/>
-        </a:xfrm>
-      </p:grpSpPr>
-      <p:sp>
-        <p:nvSpPr>
-          <p:cNvPr id="2" name="dot 2"/>
-          <p:cNvSpPr/>
-          <p:nvPr/>
-        </p:nvSpPr>
-        <p:spPr>
-          <a:xfrm>
-            <a:off x="7040880" y="2743200"/>
-            <a:ext cx="2240280" cy="2240280"/>
-          </a:xfrm>
-          <a:prstGeom prst="ellipse">
-            <a:avLst/>
-          </a:prstGeom>
-          <a:solidFill>
-            <a:srgbClr val="F33844">
-              <a:alpha val="55000"/>
-            </a:srgbClr>
-          </a:solidFill>
-          <a:ln/>
-        </p:spPr>
-        <p:txBody>
-          <a:bodyPr/>
-          <a:lstStyle/>
-          <a:p>
-            <a:endParaRPr lang="en-AU"/>
-          </a:p>
-        </p:txBody>
-      </p:sp>
-      <p:sp>
-        <p:nvSpPr>
-          <p:cNvPr id="2" name="dot 1"/>
-          <p:cNvSpPr/>
-          <p:nvPr/>
-        </p:nvSpPr>
-        <p:spPr>
-          <a:xfrm>
-            <a:off x="7772400" y="1874519"/>
-            <a:ext cx="1783080" cy="1783080"/>
-          </a:xfrm>
-          <a:prstGeom prst="ellipse">
-            <a:avLst/>
-          </a:prstGeom>
-          <a:solidFill>
-            <a:srgbClr val="6D71FF">
-              <a:alpha val="55000"/>
-            </a:srgbClr>
-          </a:solidFill>
-          <a:ln/>
-        </p:spPr>
-        <p:txBody>
-          <a:bodyPr/>
-          <a:lstStyle/>
-          <a:p>
-            <a:endParaRPr lang="en-AU"/>
-          </a:p>
-        </p:txBody>
-      </p:sp>
-      <p:sp>
-        <p:nvSpPr>
-          <p:cNvPr id="2" name="dot 0"/>
-          <p:cNvSpPr/>
-          <p:nvPr/>
-        </p:nvSpPr>
-        <p:spPr>
-          <a:xfrm>
-            <a:off x="6812280" y="960120"/>
-            <a:ext cx="2148840" cy="2148840"/>
-          </a:xfrm>
-          <a:prstGeom prst="ellipse">
-            <a:avLst/>
-          </a:prstGeom>
-          <a:solidFill>
-            <a:srgbClr val="3FD0C9">
-              <a:alpha val="55000"/>
-            </a:srgbClr>
-          </a:solidFill>
-          <a:ln/>
-        </p:spPr>
-        <p:txBody>
-          <a:bodyPr/>
-          <a:lstStyle/>
-          <a:p>
-            <a:endParaRPr lang="en-AU"/>
-          </a:p>
-        </p:txBody>
-      </p:sp>
-      <p:sp>
-        <p:nvSpPr>
-          <p:cNvPr id="3" name="Shape 1"/>
-          <p:cNvSpPr/>
-          <p:nvPr/>
-        </p:nvSpPr>
-        <p:spPr>
-          <a:xfrm>
-            <a:off x="502920" y="1874520"/>
-            <a:ext cx="868680" cy="868680"/>
-          </a:xfrm>
-          <a:prstGeom prst="rect">
-            <a:avLst/>
-          </a:prstGeom>
-          <a:solidFill>
-            <a:srgbClr val="3FD0C9"/>
-          </a:solidFill>
-          <a:ln/>
-        </p:spPr>
-        <p:txBody>
-          <a:bodyPr/>
-          <a:lstStyle/>
-          <a:p>
-            <a:endParaRPr lang="en-AU"/>
-          </a:p>
-        </p:txBody>
-      </p:sp>
-      <p:sp>
-        <p:nvSpPr>
-          <p:cNvPr id="4" name="Text 2"/>
-          <p:cNvSpPr txBox="1"/>
-          <p:nvPr/>
-        </p:nvSpPr>
-        <p:spPr>
-          <a:xfrm>
-            <a:off x="502920" y="1874520"/>
-            <a:ext cx="868680" cy="868680"/>
-          </a:xfrm>
-          <a:prstGeom prst="rect">
-            <a:avLst/>
-          </a:prstGeom>
-          <a:noFill/>
-          <a:ln/>
-        </p:spPr>
-        <p:txBody>
-          <a:bodyPr wrap="square" lIns="0" tIns="0" rIns="0" bIns="0" rtlCol="0" anchor="ctr"/>
-          <a:lstStyle/>
-          <a:p>
-            <a:pPr marL="0" indent="0" algn="ctr">
-              <a:buNone/>
-            </a:pPr>
-            <a:r>
-              <a:rPr lang="en-US" sz="2200" b="1">
-                <a:solidFill>
-                  <a:srgbClr val="242C39"/>
-                </a:solidFill>
-              </a:rPr>
-              <a:t>02</a:t>
-            </a:r>
-            <a:endParaRPr lang="en-US" sz="2600"/>
-          </a:p>
-        </p:txBody>
-      </p:sp>
-      <p:sp>
-        <p:nvSpPr>
-          <p:cNvPr id="5" name="Text 3"/>
-          <p:cNvSpPr txBox="1"/>
-          <p:nvPr/>
-        </p:nvSpPr>
-        <p:spPr>
-          <a:xfrm>
-            <a:off x="502920" y="411480"/>
-            <a:ext cx="3657600" cy="274320"/>
-          </a:xfrm>
-          <a:prstGeom prst="rect">
-            <a:avLst/>
-          </a:prstGeom>
-          <a:noFill/>
-          <a:ln/>
-        </p:spPr>
-        <p:txBody>
-          <a:bodyPr wrap="square" lIns="0" tIns="0" rIns="0" bIns="0" rtlCol="0" anchor="ctr"/>
-          <a:lstStyle/>
-          <a:p>
-            <a:pPr marL="0" indent="0">
-              <a:buNone/>
-            </a:pPr>
-            <a:r>
-              <a:rPr lang="en-US" sz="950" b="1" kern="0" spc="220">
-                <a:solidFill>
-                  <a:srgbClr val="3FD0C9"/>
-                </a:solidFill>
-              </a:rPr>
-              <a:t>SECTION</a:t>
-            </a:r>
-            <a:endParaRPr lang="en-US" sz="950"/>
-          </a:p>
-        </p:txBody>
-      </p:sp>
-      <p:sp>
-        <p:nvSpPr>
-          <p:cNvPr id="6" name="Text 4"/>
-          <p:cNvSpPr txBox="1"/>
-          <p:nvPr/>
-        </p:nvSpPr>
-        <p:spPr>
-          <a:xfrm>
-            <a:off x="1600200" y="1874520"/>
-            <a:ext cx="5943600" cy="502920"/>
-          </a:xfrm>
-          <a:prstGeom prst="rect">
-            <a:avLst/>
-          </a:prstGeom>
-          <a:noFill/>
-          <a:ln/>
-        </p:spPr>
-        <p:txBody>
-          <a:bodyPr wrap="square" lIns="0" tIns="0" rIns="0" bIns="0" rtlCol="0" anchor="ctr"/>
-          <a:lstStyle/>
-          <a:p>
-            <a:pPr marL="0" indent="0">
-              <a:buNone/>
-            </a:pPr>
-            <a:r>
-              <a:rPr lang="en-US" sz="2300" b="1">
-                <a:solidFill>
-                  <a:srgbClr val="FFFFFF"/>
-                </a:solidFill>
-              </a:rPr>
-              <a:t>What we spend</a:t>
-            </a:r>
-            <a:endParaRPr lang="en-US" sz="2800"/>
-          </a:p>
-        </p:txBody>
-      </p:sp>
-      <p:sp>
-        <p:nvSpPr>
-          <p:cNvPr id="7" name="Text 5"/>
-          <p:cNvSpPr txBox="1"/>
-          <p:nvPr/>
-        </p:nvSpPr>
-        <p:spPr>
-          <a:xfrm>
-            <a:off x="1600200" y="2395728"/>
-            <a:ext cx="5943600" cy="347472"/>
-          </a:xfrm>
-          <a:prstGeom prst="rect">
-            <a:avLst/>
-          </a:prstGeom>
-          <a:noFill/>
-          <a:ln/>
-        </p:spPr>
-        <p:txBody>
-          <a:bodyPr wrap="square" lIns="0" tIns="0" rIns="0" bIns="0" rtlCol="0" anchor="ctr"/>
-          <a:lstStyle/>
-          <a:p>
-            <a:pPr marL="0" indent="0">
-              <a:buNone/>
-            </a:pPr>
-            <a:r>
-              <a:rPr lang="en-US" sz="1200">
-                <a:solidFill>
-                  <a:srgbClr val="C9CED6"/>
-                </a:solidFill>
-              </a:rPr>
-              <a:t>Where the money goes and which lines move</a:t>
-            </a:r>
-            <a:endParaRPr lang="en-US" sz="1200"/>
           </a:p>
         </p:txBody>
       </p:sp>
@@ -10419,6 +10624,289 @@
 
 <file path=ppt/slides/slide20.xml><?xml version="1.0" encoding="utf-8"?>
 <p:sld xmlns:a="http://schemas.openxmlformats.org/drawingml/2006/main" xmlns:r="http://schemas.openxmlformats.org/officeDocument/2006/relationships" xmlns:p="http://schemas.openxmlformats.org/presentationml/2006/main">
+  <p:cSld name="Slide 15">
+    <p:spTree>
+      <p:nvGrpSpPr>
+        <p:cNvPr id="1" name=""/>
+        <p:cNvGrpSpPr/>
+        <p:nvPr/>
+      </p:nvGrpSpPr>
+      <p:grpSpPr>
+        <a:xfrm>
+          <a:off x="0" y="0"/>
+          <a:ext cx="0" cy="0"/>
+          <a:chOff x="0" y="0"/>
+          <a:chExt cx="0" cy="0"/>
+        </a:xfrm>
+      </p:grpSpPr>
+      <p:sp>
+        <p:nvSpPr>
+          <p:cNvPr id="2" name="dot 2"/>
+          <p:cNvSpPr/>
+          <p:nvPr/>
+        </p:nvSpPr>
+        <p:spPr>
+          <a:xfrm>
+            <a:off x="7040880" y="2743200"/>
+            <a:ext cx="2240280" cy="2240280"/>
+          </a:xfrm>
+          <a:prstGeom prst="ellipse">
+            <a:avLst/>
+          </a:prstGeom>
+          <a:solidFill>
+            <a:srgbClr val="F33844">
+              <a:alpha val="55000"/>
+            </a:srgbClr>
+          </a:solidFill>
+          <a:ln/>
+        </p:spPr>
+        <p:txBody>
+          <a:bodyPr/>
+          <a:lstStyle/>
+          <a:p>
+            <a:endParaRPr lang="en-AU"/>
+          </a:p>
+        </p:txBody>
+      </p:sp>
+      <p:sp>
+        <p:nvSpPr>
+          <p:cNvPr id="2" name="dot 1"/>
+          <p:cNvSpPr/>
+          <p:nvPr/>
+        </p:nvSpPr>
+        <p:spPr>
+          <a:xfrm>
+            <a:off x="7772400" y="1874519"/>
+            <a:ext cx="1783080" cy="1783080"/>
+          </a:xfrm>
+          <a:prstGeom prst="ellipse">
+            <a:avLst/>
+          </a:prstGeom>
+          <a:solidFill>
+            <a:srgbClr val="6D71FF">
+              <a:alpha val="55000"/>
+            </a:srgbClr>
+          </a:solidFill>
+          <a:ln/>
+        </p:spPr>
+        <p:txBody>
+          <a:bodyPr/>
+          <a:lstStyle/>
+          <a:p>
+            <a:endParaRPr lang="en-AU"/>
+          </a:p>
+        </p:txBody>
+      </p:sp>
+      <p:sp>
+        <p:nvSpPr>
+          <p:cNvPr id="2" name="dot 0"/>
+          <p:cNvSpPr/>
+          <p:nvPr/>
+        </p:nvSpPr>
+        <p:spPr>
+          <a:xfrm>
+            <a:off x="6812280" y="960120"/>
+            <a:ext cx="2148840" cy="2148840"/>
+          </a:xfrm>
+          <a:prstGeom prst="ellipse">
+            <a:avLst/>
+          </a:prstGeom>
+          <a:solidFill>
+            <a:srgbClr val="3FD0C9">
+              <a:alpha val="55000"/>
+            </a:srgbClr>
+          </a:solidFill>
+          <a:ln/>
+        </p:spPr>
+        <p:txBody>
+          <a:bodyPr/>
+          <a:lstStyle/>
+          <a:p>
+            <a:endParaRPr lang="en-AU"/>
+          </a:p>
+        </p:txBody>
+      </p:sp>
+      <p:sp>
+        <p:nvSpPr>
+          <p:cNvPr id="3" name="Shape 1"/>
+          <p:cNvSpPr/>
+          <p:nvPr/>
+        </p:nvSpPr>
+        <p:spPr>
+          <a:xfrm>
+            <a:off x="502920" y="1874520"/>
+            <a:ext cx="868680" cy="868680"/>
+          </a:xfrm>
+          <a:prstGeom prst="rect">
+            <a:avLst/>
+          </a:prstGeom>
+          <a:solidFill>
+            <a:srgbClr val="3FD0C9"/>
+          </a:solidFill>
+          <a:ln/>
+        </p:spPr>
+        <p:txBody>
+          <a:bodyPr/>
+          <a:lstStyle/>
+          <a:p>
+            <a:endParaRPr lang="en-AU"/>
+          </a:p>
+        </p:txBody>
+      </p:sp>
+      <p:sp>
+        <p:nvSpPr>
+          <p:cNvPr id="4" name="Text 2"/>
+          <p:cNvSpPr txBox="1"/>
+          <p:nvPr/>
+        </p:nvSpPr>
+        <p:spPr>
+          <a:xfrm>
+            <a:off x="502920" y="1874520"/>
+            <a:ext cx="868680" cy="868680"/>
+          </a:xfrm>
+          <a:prstGeom prst="rect">
+            <a:avLst/>
+          </a:prstGeom>
+          <a:noFill/>
+          <a:ln/>
+        </p:spPr>
+        <p:txBody>
+          <a:bodyPr wrap="square" lIns="0" tIns="0" rIns="0" bIns="0" rtlCol="0" anchor="ctr"/>
+          <a:lstStyle/>
+          <a:p>
+            <a:pPr marL="0" indent="0" algn="ctr">
+              <a:buNone/>
+            </a:pPr>
+            <a:r>
+              <a:rPr lang="en-US" sz="2200" b="1">
+                <a:solidFill>
+                  <a:srgbClr val="242C39"/>
+                </a:solidFill>
+              </a:rPr>
+              <a:t>02</a:t>
+            </a:r>
+            <a:endParaRPr lang="en-US" sz="2600"/>
+          </a:p>
+        </p:txBody>
+      </p:sp>
+      <p:sp>
+        <p:nvSpPr>
+          <p:cNvPr id="5" name="Text 3"/>
+          <p:cNvSpPr txBox="1"/>
+          <p:nvPr/>
+        </p:nvSpPr>
+        <p:spPr>
+          <a:xfrm>
+            <a:off x="502920" y="411480"/>
+            <a:ext cx="3657600" cy="274320"/>
+          </a:xfrm>
+          <a:prstGeom prst="rect">
+            <a:avLst/>
+          </a:prstGeom>
+          <a:noFill/>
+          <a:ln/>
+        </p:spPr>
+        <p:txBody>
+          <a:bodyPr wrap="square" lIns="0" tIns="0" rIns="0" bIns="0" rtlCol="0" anchor="ctr"/>
+          <a:lstStyle/>
+          <a:p>
+            <a:pPr marL="0" indent="0">
+              <a:buNone/>
+            </a:pPr>
+            <a:r>
+              <a:rPr lang="en-US" sz="950" b="1" kern="0" spc="220">
+                <a:solidFill>
+                  <a:srgbClr val="3FD0C9"/>
+                </a:solidFill>
+              </a:rPr>
+              <a:t>SECTION</a:t>
+            </a:r>
+            <a:endParaRPr lang="en-US" sz="950"/>
+          </a:p>
+        </p:txBody>
+      </p:sp>
+      <p:sp>
+        <p:nvSpPr>
+          <p:cNvPr id="6" name="Text 4"/>
+          <p:cNvSpPr txBox="1"/>
+          <p:nvPr/>
+        </p:nvSpPr>
+        <p:spPr>
+          <a:xfrm>
+            <a:off x="1600200" y="1874520"/>
+            <a:ext cx="5943600" cy="502920"/>
+          </a:xfrm>
+          <a:prstGeom prst="rect">
+            <a:avLst/>
+          </a:prstGeom>
+          <a:noFill/>
+          <a:ln/>
+        </p:spPr>
+        <p:txBody>
+          <a:bodyPr wrap="square" lIns="0" tIns="0" rIns="0" bIns="0" rtlCol="0" anchor="ctr"/>
+          <a:lstStyle/>
+          <a:p>
+            <a:pPr marL="0" indent="0">
+              <a:buNone/>
+            </a:pPr>
+            <a:r>
+              <a:rPr lang="en-US" sz="2300" b="1">
+                <a:solidFill>
+                  <a:srgbClr val="FFFFFF"/>
+                </a:solidFill>
+              </a:rPr>
+              <a:t>What we spend</a:t>
+            </a:r>
+            <a:endParaRPr lang="en-US" sz="2800"/>
+          </a:p>
+        </p:txBody>
+      </p:sp>
+      <p:sp>
+        <p:nvSpPr>
+          <p:cNvPr id="7" name="Text 5"/>
+          <p:cNvSpPr txBox="1"/>
+          <p:nvPr/>
+        </p:nvSpPr>
+        <p:spPr>
+          <a:xfrm>
+            <a:off x="1600200" y="2395728"/>
+            <a:ext cx="5943600" cy="347472"/>
+          </a:xfrm>
+          <a:prstGeom prst="rect">
+            <a:avLst/>
+          </a:prstGeom>
+          <a:noFill/>
+          <a:ln/>
+        </p:spPr>
+        <p:txBody>
+          <a:bodyPr wrap="square" lIns="0" tIns="0" rIns="0" bIns="0" rtlCol="0" anchor="ctr"/>
+          <a:lstStyle/>
+          <a:p>
+            <a:pPr marL="0" indent="0">
+              <a:buNone/>
+            </a:pPr>
+            <a:r>
+              <a:rPr lang="en-US" sz="1200">
+                <a:solidFill>
+                  <a:srgbClr val="C9CED6"/>
+                </a:solidFill>
+              </a:rPr>
+              <a:t>Where the money goes and which lines move</a:t>
+            </a:r>
+            <a:endParaRPr lang="en-US" sz="1200"/>
+          </a:p>
+        </p:txBody>
+      </p:sp>
+    </p:spTree>
+  </p:cSld>
+  <p:clrMapOvr>
+    <a:masterClrMapping/>
+  </p:clrMapOvr>
+</p:sld>
+</file>
+
+<file path=ppt/slides/slide21.xml><?xml version="1.0" encoding="utf-8"?>
+<p:sld xmlns:a="http://schemas.openxmlformats.org/drawingml/2006/main" xmlns:r="http://schemas.openxmlformats.org/officeDocument/2006/relationships" xmlns:p="http://schemas.openxmlformats.org/presentationml/2006/main">
   <p:cSld name="Slide 16">
     <p:spTree>
       <p:nvGrpSpPr>
@@ -10799,7 +11287,7 @@
 </p:sld>
 </file>
 
-<file path=ppt/slides/slide21.xml><?xml version="1.0" encoding="utf-8"?>
+<file path=ppt/slides/slide22.xml><?xml version="1.0" encoding="utf-8"?>
 <p:sld xmlns:a="http://schemas.openxmlformats.org/drawingml/2006/main" xmlns:r="http://schemas.openxmlformats.org/officeDocument/2006/relationships" xmlns:p="http://schemas.openxmlformats.org/presentationml/2006/main">
   <p:cSld name="Slide 17">
     <p:spTree>
@@ -11181,7 +11669,7 @@
 </p:sld>
 </file>
 
-<file path=ppt/slides/slide22.xml><?xml version="1.0" encoding="utf-8"?>
+<file path=ppt/slides/slide23.xml><?xml version="1.0" encoding="utf-8"?>
 <p:sld xmlns:a="http://schemas.openxmlformats.org/drawingml/2006/main" xmlns:r="http://schemas.openxmlformats.org/officeDocument/2006/relationships" xmlns:p="http://schemas.openxmlformats.org/presentationml/2006/main">
   <p:cSld name="Slide 18">
     <p:spTree>
@@ -11563,7 +12051,7 @@
 </p:sld>
 </file>
 
-<file path=ppt/slides/slide23.xml><?xml version="1.0" encoding="utf-8"?>
+<file path=ppt/slides/slide24.xml><?xml version="1.0" encoding="utf-8"?>
 <p:sld xmlns:a="http://schemas.openxmlformats.org/drawingml/2006/main" xmlns:r="http://schemas.openxmlformats.org/officeDocument/2006/relationships" xmlns:p="http://schemas.openxmlformats.org/presentationml/2006/main">
   <p:cSld name="Slide 19">
     <p:spTree>
@@ -11948,7 +12436,7 @@
 </p:sld>
 </file>
 
-<file path=ppt/slides/slide24.xml><?xml version="1.0" encoding="utf-8"?>
+<file path=ppt/slides/slide25.xml><?xml version="1.0" encoding="utf-8"?>
 <p:sld xmlns:a="http://schemas.openxmlformats.org/drawingml/2006/main" xmlns:r="http://schemas.openxmlformats.org/officeDocument/2006/relationships" xmlns:p="http://schemas.openxmlformats.org/presentationml/2006/main">
   <p:cSld name="Slide 20">
     <p:spTree>
@@ -12231,7 +12719,7 @@
 </p:sld>
 </file>
 
-<file path=ppt/slides/slide25.xml><?xml version="1.0" encoding="utf-8"?>
+<file path=ppt/slides/slide26.xml><?xml version="1.0" encoding="utf-8"?>
 <p:sld xmlns:a="http://schemas.openxmlformats.org/drawingml/2006/main" xmlns:r="http://schemas.openxmlformats.org/officeDocument/2006/relationships" xmlns:p="http://schemas.openxmlformats.org/presentationml/2006/main">
   <p:cSld name="Slide 21">
     <p:spTree>
@@ -12613,7 +13101,7 @@
 </p:sld>
 </file>
 
-<file path=ppt/slides/slide26.xml><?xml version="1.0" encoding="utf-8"?>
+<file path=ppt/slides/slide27.xml><?xml version="1.0" encoding="utf-8"?>
 <p:sld xmlns:a="http://schemas.openxmlformats.org/drawingml/2006/main" xmlns:r="http://schemas.openxmlformats.org/officeDocument/2006/relationships" xmlns:p="http://schemas.openxmlformats.org/presentationml/2006/main">
   <p:cSld name="Slide 22">
     <p:spTree>
@@ -12995,7 +13483,7 @@
 </p:sld>
 </file>
 
-<file path=ppt/slides/slide27.xml><?xml version="1.0" encoding="utf-8"?>
+<file path=ppt/slides/slide28.xml><?xml version="1.0" encoding="utf-8"?>
 <p:sld xmlns:a="http://schemas.openxmlformats.org/drawingml/2006/main" xmlns:r="http://schemas.openxmlformats.org/officeDocument/2006/relationships" xmlns:p="http://schemas.openxmlformats.org/presentationml/2006/main">
   <p:cSld name="Slide 23">
     <p:spTree>
@@ -13377,7 +13865,7 @@
 </p:sld>
 </file>
 
-<file path=ppt/slides/slide28.xml><?xml version="1.0" encoding="utf-8"?>
+<file path=ppt/slides/slide29.xml><?xml version="1.0" encoding="utf-8"?>
 <p:sld xmlns:a="http://schemas.openxmlformats.org/drawingml/2006/main" xmlns:r="http://schemas.openxmlformats.org/officeDocument/2006/relationships" xmlns:p="http://schemas.openxmlformats.org/presentationml/2006/main">
   <p:cSld name="Slide 24">
     <p:spTree>
@@ -13652,391 +14140,6 @@
           </a:p>
         </p:txBody>
       </p:sp>
-    </p:spTree>
-  </p:cSld>
-  <p:clrMapOvr>
-    <a:masterClrMapping/>
-  </p:clrMapOvr>
-</p:sld>
-</file>
-
-<file path=ppt/slides/slide29.xml><?xml version="1.0" encoding="utf-8"?>
-<p:sld xmlns:a="http://schemas.openxmlformats.org/drawingml/2006/main" xmlns:r="http://schemas.openxmlformats.org/officeDocument/2006/relationships" xmlns:p="http://schemas.openxmlformats.org/presentationml/2006/main">
-  <p:cSld name="Slide 25">
-    <p:spTree>
-      <p:nvGrpSpPr>
-        <p:cNvPr id="1" name=""/>
-        <p:cNvGrpSpPr/>
-        <p:nvPr/>
-      </p:nvGrpSpPr>
-      <p:grpSpPr>
-        <a:xfrm>
-          <a:off x="0" y="0"/>
-          <a:ext cx="0" cy="0"/>
-          <a:chOff x="0" y="0"/>
-          <a:chExt cx="0" cy="0"/>
-        </a:xfrm>
-      </p:grpSpPr>
-      <p:sp>
-        <p:nvSpPr>
-          <p:cNvPr id="2" name="Text 0"/>
-          <p:cNvSpPr txBox="1"/>
-          <p:nvPr/>
-        </p:nvSpPr>
-        <p:spPr>
-          <a:xfrm>
-            <a:off x="502920" y="365760"/>
-            <a:ext cx="6400800" cy="274320"/>
-          </a:xfrm>
-          <a:prstGeom prst="rect">
-            <a:avLst/>
-          </a:prstGeom>
-          <a:noFill/>
-          <a:ln/>
-        </p:spPr>
-        <p:txBody>
-          <a:bodyPr wrap="square" lIns="0" tIns="0" rIns="0" bIns="0" rtlCol="0" anchor="ctr"/>
-          <a:lstStyle/>
-          <a:p>
-            <a:pPr marL="0" indent="0">
-              <a:buNone/>
-            </a:pPr>
-            <a:r>
-              <a:rPr lang="en-US" sz="950" b="1" kern="0" spc="220">
-                <a:solidFill>
-                  <a:srgbClr val="122B82"/>
-                </a:solidFill>
-              </a:rPr>
-              <a:t>PEOPLE AND UTILISATION</a:t>
-            </a:r>
-            <a:endParaRPr lang="en-US" sz="950"/>
-          </a:p>
-        </p:txBody>
-      </p:sp>
-      <p:sp>
-        <p:nvSpPr>
-          <p:cNvPr id="3" name="Text 1"/>
-          <p:cNvSpPr txBox="1"/>
-          <p:nvPr/>
-        </p:nvSpPr>
-        <p:spPr>
-          <a:xfrm>
-            <a:off x="502920" y="640080"/>
-            <a:ext cx="7315200" cy="685800"/>
-          </a:xfrm>
-          <a:prstGeom prst="rect">
-            <a:avLst/>
-          </a:prstGeom>
-          <a:noFill/>
-          <a:ln/>
-        </p:spPr>
-        <p:txBody>
-          <a:bodyPr wrap="square" lIns="0" tIns="0" rIns="0" bIns="0" rtlCol="0" anchor="ctr"/>
-          <a:lstStyle/>
-          <a:p>
-            <a:pPr marL="0" indent="0">
-              <a:buNone/>
-            </a:pPr>
-            <a:r>
-              <a:rPr lang="en-US" sz="2200" b="1">
-                <a:solidFill>
-                  <a:srgbClr val="242C39"/>
-                </a:solidFill>
-              </a:rPr>
-              <a:t>Chargeable per cent, Sep 26</a:t>
-            </a:r>
-            <a:endParaRPr lang="en-US" sz="2700"/>
-          </a:p>
-        </p:txBody>
-      </p:sp>
-      <p:pic>
-        <p:nvPicPr>
-          <p:cNvPr id="4" name="snip util_month" descr="/home/user/Claude/deck/snips/util_month.png"/>
-          <p:cNvPicPr>
-            <a:picLocks noChangeAspect="1"/>
-          </p:cNvPicPr>
-          <p:nvPr/>
-        </p:nvPicPr>
-        <p:blipFill>
-          <a:blip r:embed="rId3"/>
-          <a:stretch>
-            <a:fillRect/>
-          </a:stretch>
-        </p:blipFill>
-        <p:spPr>
-          <a:xfrm>
-            <a:off x="502920" y="1389888"/>
-            <a:ext cx="8138160" cy="1385122"/>
-          </a:xfrm>
-          <a:prstGeom prst="rect">
-            <a:avLst/>
-          </a:prstGeom>
-        </p:spPr>
-      </p:pic>
-      <p:sp>
-        <p:nvSpPr>
-          <p:cNvPr id="6" name="commentary panel"/>
-          <p:cNvSpPr/>
-          <p:nvPr/>
-        </p:nvSpPr>
-        <p:spPr>
-          <a:xfrm>
-            <a:off x="502920" y="3454086"/>
-            <a:ext cx="8138160" cy="1172777"/>
-          </a:xfrm>
-          <a:prstGeom prst="rect">
-            <a:avLst/>
-          </a:prstGeom>
-          <a:solidFill>
-            <a:srgbClr val="E8F9F8"/>
-          </a:solidFill>
-          <a:ln/>
-        </p:spPr>
-        <p:txBody>
-          <a:bodyPr/>
-          <a:lstStyle/>
-          <a:p>
-            <a:endParaRPr lang="en-AU"/>
-          </a:p>
-        </p:txBody>
-      </p:sp>
-      <p:sp>
-        <p:nvSpPr>
-          <p:cNvPr id="7" name="Text 4"/>
-          <p:cNvSpPr txBox="1"/>
-          <p:nvPr/>
-        </p:nvSpPr>
-        <p:spPr>
-          <a:xfrm>
-            <a:off x="685800" y="3527238"/>
-            <a:ext cx="2743200" cy="164592"/>
-          </a:xfrm>
-          <a:prstGeom prst="rect">
-            <a:avLst/>
-          </a:prstGeom>
-          <a:noFill/>
-          <a:ln/>
-        </p:spPr>
-        <p:txBody>
-          <a:bodyPr wrap="square" lIns="0" tIns="0" rIns="0" bIns="0" rtlCol="0" anchor="ctr"/>
-          <a:lstStyle/>
-          <a:p>
-            <a:pPr marL="0" indent="0">
-              <a:buNone/>
-            </a:pPr>
-            <a:r>
-              <a:rPr lang="en-US" sz="850" b="1" kern="0" spc="180">
-                <a:solidFill>
-                  <a:srgbClr val="005358"/>
-                </a:solidFill>
-              </a:rPr>
-              <a:t>COMMENTARY</a:t>
-            </a:r>
-            <a:endParaRPr lang="en-US" sz="850"/>
-          </a:p>
-        </p:txBody>
-      </p:sp>
-      <p:sp>
-        <p:nvSpPr>
-          <p:cNvPr id="8" name="Text 5"/>
-          <p:cNvSpPr txBox="1"/>
-          <p:nvPr/>
-        </p:nvSpPr>
-        <p:spPr>
-          <a:xfrm>
-            <a:off x="685800" y="3700974"/>
-            <a:ext cx="3703320" cy="898457"/>
-          </a:xfrm>
-          <a:prstGeom prst="rect">
-            <a:avLst/>
-          </a:prstGeom>
-          <a:noFill/>
-          <a:ln/>
-        </p:spPr>
-        <p:txBody>
-          <a:bodyPr wrap="square" lIns="0" tIns="0" rIns="0" bIns="0" rtlCol="0" anchor="t">
-            <a:normAutofit/>
-          </a:bodyPr>
-          <a:lstStyle/>
-          <a:p>
-            <a:pPr marL="342900" indent="-342900">
-              <a:lnSpc>
-                <a:spcPts val="1050"/>
-              </a:lnSpc>
-              <a:spcAft>
-                <a:spcPts val="300"/>
-              </a:spcAft>
-              <a:buSzPct val="100000"/>
-              <a:buChar char="•"/>
-            </a:pPr>
-            <a:r>
-              <a:rPr lang="en-US" sz="1000">
-                <a:solidFill>
-                  <a:srgbClr val="3A4453"/>
-                </a:solidFill>
-              </a:rPr>
-              <a:t>Chargeable utilisation is calculated as billable hours divided by workable business hours, including leave in the available-hours base.</a:t>
-            </a:r>
-            <a:endParaRPr lang="en-US" sz="850"/>
-          </a:p>
-          <a:p>
-            <a:pPr marL="342900" indent="-342900">
-              <a:lnSpc>
-                <a:spcPts val="1050"/>
-              </a:lnSpc>
-              <a:spcAft>
-                <a:spcPts val="300"/>
-              </a:spcAft>
-              <a:buSzPct val="100000"/>
-              <a:buChar char="•"/>
-            </a:pPr>
-            <a:r>
-              <a:rPr lang="en-US" sz="1000">
-                <a:solidFill>
-                  <a:srgbClr val="3A4453"/>
-                </a:solidFill>
-              </a:rPr>
-              <a:t>Support achieved 91.2% against an 88.0% target, exceeding the target by 3.2 percentage points.</a:t>
-            </a:r>
-            <a:endParaRPr lang="en-US" sz="850"/>
-          </a:p>
-        </p:txBody>
-      </p:sp>
-      <p:sp>
-        <p:nvSpPr>
-          <p:cNvPr id="9" name="Text 6"/>
-          <p:cNvSpPr txBox="1"/>
-          <p:nvPr/>
-        </p:nvSpPr>
-        <p:spPr>
-          <a:xfrm>
-            <a:off x="4663440" y="3700974"/>
-            <a:ext cx="3703320" cy="898457"/>
-          </a:xfrm>
-          <a:prstGeom prst="rect">
-            <a:avLst/>
-          </a:prstGeom>
-          <a:noFill/>
-          <a:ln/>
-        </p:spPr>
-        <p:txBody>
-          <a:bodyPr wrap="square" lIns="0" tIns="0" rIns="0" bIns="0" rtlCol="0" anchor="t">
-            <a:normAutofit/>
-          </a:bodyPr>
-          <a:lstStyle/>
-          <a:p>
-            <a:pPr marL="342900" indent="-342900">
-              <a:lnSpc>
-                <a:spcPts val="1050"/>
-              </a:lnSpc>
-              <a:spcAft>
-                <a:spcPts val="300"/>
-              </a:spcAft>
-              <a:buSzPct val="100000"/>
-              <a:buChar char="•"/>
-            </a:pPr>
-            <a:r>
-              <a:rPr lang="en-US" sz="1000">
-                <a:solidFill>
-                  <a:srgbClr val="3A4453"/>
-                </a:solidFill>
-              </a:rPr>
-              <a:t>Production achieved 30.2% against a 67.0% target. Leave represented approximately 38% of its available hours.</a:t>
-            </a:r>
-            <a:endParaRPr lang="en-US" sz="850"/>
-          </a:p>
-          <a:p>
-            <a:pPr marL="342900" indent="-342900">
-              <a:lnSpc>
-                <a:spcPts val="1050"/>
-              </a:lnSpc>
-              <a:spcAft>
-                <a:spcPts val="300"/>
-              </a:spcAft>
-              <a:buSzPct val="100000"/>
-              <a:buChar char="•"/>
-            </a:pPr>
-            <a:r>
-              <a:rPr lang="en-US" sz="1000">
-                <a:solidFill>
-                  <a:srgbClr val="3A4453"/>
-                </a:solidFill>
-              </a:rPr>
-              <a:t>Overall utilisation was 71.8% against an 80.9% target, a shortfall of 9.0 percentage points.</a:t>
-            </a:r>
-            <a:endParaRPr lang="en-US" sz="850"/>
-          </a:p>
-        </p:txBody>
-      </p:sp>
-      <p:sp>
-        <p:nvSpPr>
-          <p:cNvPr id="25" name="Slide Number Placeholder 0"/>
-          <p:cNvSpPr>
-            <a:spLocks noGrp="1"/>
-          </p:cNvSpPr>
-          <p:nvPr>
-            <p:ph type="sldNum" sz="quarter" idx="4294967295"/>
-          </p:nvPr>
-        </p:nvSpPr>
-        <p:spPr>
-          <a:xfrm>
-            <a:off x="8092440" y="4736592"/>
-            <a:ext cx="548640" cy="228600"/>
-          </a:xfrm>
-          <a:prstGeom prst="rect">
-            <a:avLst/>
-          </a:prstGeom>
-          <a:extLst>
-            <a:ext uri="{C572A759-6A51-4108-AA02-DFA0A04FC94B}">
-              <ma14:wrappingTextBoxFlag xmlns:ma14="http://schemas.microsoft.com/office/mac/drawingml/2011/main" xmlns="" val="0"/>
-            </a:ext>
-          </a:extLst>
-        </p:spPr>
-        <p:txBody>
-          <a:bodyPr/>
-          <a:lstStyle>
-            <a:lvl1pPr>
-              <a:defRPr sz="800">
-                <a:solidFill>
-                  <a:srgbClr val="6B7585"/>
-                </a:solidFill>
-              </a:defRPr>
-            </a:lvl1pPr>
-          </a:lstStyle>
-          <a:p>
-            <a:pPr algn="r"/>
-            <a:fld id="{F7021451-1387-4CA6-816F-3879F97B5CBC}" type="slidenum">
-              <a:rPr lang="en-US" b="0"/>
-              <a:t>25</a:t>
-            </a:fld>
-            <a:endParaRPr lang="en-US"/>
-          </a:p>
-        </p:txBody>
-      </p:sp>
-      <p:pic>
-        <p:nvPicPr>
-          <p:cNvPr id="26" name="cts logo" descr="cts-logo.png"/>
-          <p:cNvPicPr>
-            <a:picLocks noChangeAspect="1"/>
-          </p:cNvPicPr>
-          <p:nvPr/>
-        </p:nvPicPr>
-        <p:blipFill>
-          <a:blip r:embed="rId4"/>
-          <a:stretch>
-            <a:fillRect/>
-          </a:stretch>
-        </p:blipFill>
-        <p:spPr>
-          <a:xfrm>
-            <a:off x="7680959" y="182880"/>
-            <a:ext cx="960120" cy="539696"/>
-          </a:xfrm>
-          <a:prstGeom prst="rect">
-            <a:avLst/>
-          </a:prstGeom>
-        </p:spPr>
-      </p:pic>
     </p:spTree>
   </p:cSld>
   <p:clrMapOvr>
@@ -16299,6 +16402,391 @@
 
 <file path=ppt/slides/slide30.xml><?xml version="1.0" encoding="utf-8"?>
 <p:sld xmlns:a="http://schemas.openxmlformats.org/drawingml/2006/main" xmlns:r="http://schemas.openxmlformats.org/officeDocument/2006/relationships" xmlns:p="http://schemas.openxmlformats.org/presentationml/2006/main">
+  <p:cSld name="Slide 25">
+    <p:spTree>
+      <p:nvGrpSpPr>
+        <p:cNvPr id="1" name=""/>
+        <p:cNvGrpSpPr/>
+        <p:nvPr/>
+      </p:nvGrpSpPr>
+      <p:grpSpPr>
+        <a:xfrm>
+          <a:off x="0" y="0"/>
+          <a:ext cx="0" cy="0"/>
+          <a:chOff x="0" y="0"/>
+          <a:chExt cx="0" cy="0"/>
+        </a:xfrm>
+      </p:grpSpPr>
+      <p:sp>
+        <p:nvSpPr>
+          <p:cNvPr id="2" name="Text 0"/>
+          <p:cNvSpPr txBox="1"/>
+          <p:nvPr/>
+        </p:nvSpPr>
+        <p:spPr>
+          <a:xfrm>
+            <a:off x="502920" y="365760"/>
+            <a:ext cx="6400800" cy="274320"/>
+          </a:xfrm>
+          <a:prstGeom prst="rect">
+            <a:avLst/>
+          </a:prstGeom>
+          <a:noFill/>
+          <a:ln/>
+        </p:spPr>
+        <p:txBody>
+          <a:bodyPr wrap="square" lIns="0" tIns="0" rIns="0" bIns="0" rtlCol="0" anchor="ctr"/>
+          <a:lstStyle/>
+          <a:p>
+            <a:pPr marL="0" indent="0">
+              <a:buNone/>
+            </a:pPr>
+            <a:r>
+              <a:rPr lang="en-US" sz="950" b="1" kern="0" spc="220">
+                <a:solidFill>
+                  <a:srgbClr val="122B82"/>
+                </a:solidFill>
+              </a:rPr>
+              <a:t>PEOPLE AND UTILISATION</a:t>
+            </a:r>
+            <a:endParaRPr lang="en-US" sz="950"/>
+          </a:p>
+        </p:txBody>
+      </p:sp>
+      <p:sp>
+        <p:nvSpPr>
+          <p:cNvPr id="3" name="Text 1"/>
+          <p:cNvSpPr txBox="1"/>
+          <p:nvPr/>
+        </p:nvSpPr>
+        <p:spPr>
+          <a:xfrm>
+            <a:off x="502920" y="640080"/>
+            <a:ext cx="7315200" cy="685800"/>
+          </a:xfrm>
+          <a:prstGeom prst="rect">
+            <a:avLst/>
+          </a:prstGeom>
+          <a:noFill/>
+          <a:ln/>
+        </p:spPr>
+        <p:txBody>
+          <a:bodyPr wrap="square" lIns="0" tIns="0" rIns="0" bIns="0" rtlCol="0" anchor="ctr"/>
+          <a:lstStyle/>
+          <a:p>
+            <a:pPr marL="0" indent="0">
+              <a:buNone/>
+            </a:pPr>
+            <a:r>
+              <a:rPr lang="en-US" sz="2200" b="1">
+                <a:solidFill>
+                  <a:srgbClr val="242C39"/>
+                </a:solidFill>
+              </a:rPr>
+              <a:t>Chargeable per cent, Sep 26</a:t>
+            </a:r>
+            <a:endParaRPr lang="en-US" sz="2700"/>
+          </a:p>
+        </p:txBody>
+      </p:sp>
+      <p:pic>
+        <p:nvPicPr>
+          <p:cNvPr id="4" name="snip util_month" descr="/home/user/Claude/deck/snips/util_month.png"/>
+          <p:cNvPicPr>
+            <a:picLocks noChangeAspect="1"/>
+          </p:cNvPicPr>
+          <p:nvPr/>
+        </p:nvPicPr>
+        <p:blipFill>
+          <a:blip r:embed="rId3"/>
+          <a:stretch>
+            <a:fillRect/>
+          </a:stretch>
+        </p:blipFill>
+        <p:spPr>
+          <a:xfrm>
+            <a:off x="502920" y="1389888"/>
+            <a:ext cx="8138160" cy="1385122"/>
+          </a:xfrm>
+          <a:prstGeom prst="rect">
+            <a:avLst/>
+          </a:prstGeom>
+        </p:spPr>
+      </p:pic>
+      <p:sp>
+        <p:nvSpPr>
+          <p:cNvPr id="6" name="commentary panel"/>
+          <p:cNvSpPr/>
+          <p:nvPr/>
+        </p:nvSpPr>
+        <p:spPr>
+          <a:xfrm>
+            <a:off x="502920" y="3454086"/>
+            <a:ext cx="8138160" cy="1172777"/>
+          </a:xfrm>
+          <a:prstGeom prst="rect">
+            <a:avLst/>
+          </a:prstGeom>
+          <a:solidFill>
+            <a:srgbClr val="E8F9F8"/>
+          </a:solidFill>
+          <a:ln/>
+        </p:spPr>
+        <p:txBody>
+          <a:bodyPr/>
+          <a:lstStyle/>
+          <a:p>
+            <a:endParaRPr lang="en-AU"/>
+          </a:p>
+        </p:txBody>
+      </p:sp>
+      <p:sp>
+        <p:nvSpPr>
+          <p:cNvPr id="7" name="Text 4"/>
+          <p:cNvSpPr txBox="1"/>
+          <p:nvPr/>
+        </p:nvSpPr>
+        <p:spPr>
+          <a:xfrm>
+            <a:off x="685800" y="3527238"/>
+            <a:ext cx="2743200" cy="164592"/>
+          </a:xfrm>
+          <a:prstGeom prst="rect">
+            <a:avLst/>
+          </a:prstGeom>
+          <a:noFill/>
+          <a:ln/>
+        </p:spPr>
+        <p:txBody>
+          <a:bodyPr wrap="square" lIns="0" tIns="0" rIns="0" bIns="0" rtlCol="0" anchor="ctr"/>
+          <a:lstStyle/>
+          <a:p>
+            <a:pPr marL="0" indent="0">
+              <a:buNone/>
+            </a:pPr>
+            <a:r>
+              <a:rPr lang="en-US" sz="850" b="1" kern="0" spc="180">
+                <a:solidFill>
+                  <a:srgbClr val="005358"/>
+                </a:solidFill>
+              </a:rPr>
+              <a:t>COMMENTARY</a:t>
+            </a:r>
+            <a:endParaRPr lang="en-US" sz="850"/>
+          </a:p>
+        </p:txBody>
+      </p:sp>
+      <p:sp>
+        <p:nvSpPr>
+          <p:cNvPr id="8" name="Text 5"/>
+          <p:cNvSpPr txBox="1"/>
+          <p:nvPr/>
+        </p:nvSpPr>
+        <p:spPr>
+          <a:xfrm>
+            <a:off x="685800" y="3700974"/>
+            <a:ext cx="3703320" cy="898457"/>
+          </a:xfrm>
+          <a:prstGeom prst="rect">
+            <a:avLst/>
+          </a:prstGeom>
+          <a:noFill/>
+          <a:ln/>
+        </p:spPr>
+        <p:txBody>
+          <a:bodyPr wrap="square" lIns="0" tIns="0" rIns="0" bIns="0" rtlCol="0" anchor="t">
+            <a:normAutofit/>
+          </a:bodyPr>
+          <a:lstStyle/>
+          <a:p>
+            <a:pPr marL="342900" indent="-342900">
+              <a:lnSpc>
+                <a:spcPts val="1050"/>
+              </a:lnSpc>
+              <a:spcAft>
+                <a:spcPts val="300"/>
+              </a:spcAft>
+              <a:buSzPct val="100000"/>
+              <a:buChar char="•"/>
+            </a:pPr>
+            <a:r>
+              <a:rPr lang="en-US" sz="1000">
+                <a:solidFill>
+                  <a:srgbClr val="3A4453"/>
+                </a:solidFill>
+              </a:rPr>
+              <a:t>Chargeable utilisation is calculated as billable hours divided by workable business hours, including leave in the available-hours base.</a:t>
+            </a:r>
+            <a:endParaRPr lang="en-US" sz="850"/>
+          </a:p>
+          <a:p>
+            <a:pPr marL="342900" indent="-342900">
+              <a:lnSpc>
+                <a:spcPts val="1050"/>
+              </a:lnSpc>
+              <a:spcAft>
+                <a:spcPts val="300"/>
+              </a:spcAft>
+              <a:buSzPct val="100000"/>
+              <a:buChar char="•"/>
+            </a:pPr>
+            <a:r>
+              <a:rPr lang="en-US" sz="1000">
+                <a:solidFill>
+                  <a:srgbClr val="3A4453"/>
+                </a:solidFill>
+              </a:rPr>
+              <a:t>Support achieved 91.2% against an 88.0% target, exceeding the target by 3.2 percentage points.</a:t>
+            </a:r>
+            <a:endParaRPr lang="en-US" sz="850"/>
+          </a:p>
+        </p:txBody>
+      </p:sp>
+      <p:sp>
+        <p:nvSpPr>
+          <p:cNvPr id="9" name="Text 6"/>
+          <p:cNvSpPr txBox="1"/>
+          <p:nvPr/>
+        </p:nvSpPr>
+        <p:spPr>
+          <a:xfrm>
+            <a:off x="4663440" y="3700974"/>
+            <a:ext cx="3703320" cy="898457"/>
+          </a:xfrm>
+          <a:prstGeom prst="rect">
+            <a:avLst/>
+          </a:prstGeom>
+          <a:noFill/>
+          <a:ln/>
+        </p:spPr>
+        <p:txBody>
+          <a:bodyPr wrap="square" lIns="0" tIns="0" rIns="0" bIns="0" rtlCol="0" anchor="t">
+            <a:normAutofit/>
+          </a:bodyPr>
+          <a:lstStyle/>
+          <a:p>
+            <a:pPr marL="342900" indent="-342900">
+              <a:lnSpc>
+                <a:spcPts val="1050"/>
+              </a:lnSpc>
+              <a:spcAft>
+                <a:spcPts val="300"/>
+              </a:spcAft>
+              <a:buSzPct val="100000"/>
+              <a:buChar char="•"/>
+            </a:pPr>
+            <a:r>
+              <a:rPr lang="en-US" sz="1000">
+                <a:solidFill>
+                  <a:srgbClr val="3A4453"/>
+                </a:solidFill>
+              </a:rPr>
+              <a:t>Production achieved 30.2% against a 67.0% target. Leave represented approximately 38% of its available hours.</a:t>
+            </a:r>
+            <a:endParaRPr lang="en-US" sz="850"/>
+          </a:p>
+          <a:p>
+            <a:pPr marL="342900" indent="-342900">
+              <a:lnSpc>
+                <a:spcPts val="1050"/>
+              </a:lnSpc>
+              <a:spcAft>
+                <a:spcPts val="300"/>
+              </a:spcAft>
+              <a:buSzPct val="100000"/>
+              <a:buChar char="•"/>
+            </a:pPr>
+            <a:r>
+              <a:rPr lang="en-US" sz="1000">
+                <a:solidFill>
+                  <a:srgbClr val="3A4453"/>
+                </a:solidFill>
+              </a:rPr>
+              <a:t>Overall utilisation was 71.8% against an 80.9% target, a shortfall of 9.0 percentage points.</a:t>
+            </a:r>
+            <a:endParaRPr lang="en-US" sz="850"/>
+          </a:p>
+        </p:txBody>
+      </p:sp>
+      <p:sp>
+        <p:nvSpPr>
+          <p:cNvPr id="25" name="Slide Number Placeholder 0"/>
+          <p:cNvSpPr>
+            <a:spLocks noGrp="1"/>
+          </p:cNvSpPr>
+          <p:nvPr>
+            <p:ph type="sldNum" sz="quarter" idx="4294967295"/>
+          </p:nvPr>
+        </p:nvSpPr>
+        <p:spPr>
+          <a:xfrm>
+            <a:off x="8092440" y="4736592"/>
+            <a:ext cx="548640" cy="228600"/>
+          </a:xfrm>
+          <a:prstGeom prst="rect">
+            <a:avLst/>
+          </a:prstGeom>
+          <a:extLst>
+            <a:ext uri="{C572A759-6A51-4108-AA02-DFA0A04FC94B}">
+              <ma14:wrappingTextBoxFlag xmlns:ma14="http://schemas.microsoft.com/office/mac/drawingml/2011/main" xmlns="" val="0"/>
+            </a:ext>
+          </a:extLst>
+        </p:spPr>
+        <p:txBody>
+          <a:bodyPr/>
+          <a:lstStyle>
+            <a:lvl1pPr>
+              <a:defRPr sz="800">
+                <a:solidFill>
+                  <a:srgbClr val="6B7585"/>
+                </a:solidFill>
+              </a:defRPr>
+            </a:lvl1pPr>
+          </a:lstStyle>
+          <a:p>
+            <a:pPr algn="r"/>
+            <a:fld id="{F7021451-1387-4CA6-816F-3879F97B5CBC}" type="slidenum">
+              <a:rPr lang="en-US" b="0"/>
+              <a:t>25</a:t>
+            </a:fld>
+            <a:endParaRPr lang="en-US"/>
+          </a:p>
+        </p:txBody>
+      </p:sp>
+      <p:pic>
+        <p:nvPicPr>
+          <p:cNvPr id="26" name="cts logo" descr="cts-logo.png"/>
+          <p:cNvPicPr>
+            <a:picLocks noChangeAspect="1"/>
+          </p:cNvPicPr>
+          <p:nvPr/>
+        </p:nvPicPr>
+        <p:blipFill>
+          <a:blip r:embed="rId4"/>
+          <a:stretch>
+            <a:fillRect/>
+          </a:stretch>
+        </p:blipFill>
+        <p:spPr>
+          <a:xfrm>
+            <a:off x="7680959" y="182880"/>
+            <a:ext cx="960120" cy="539696"/>
+          </a:xfrm>
+          <a:prstGeom prst="rect">
+            <a:avLst/>
+          </a:prstGeom>
+        </p:spPr>
+      </p:pic>
+    </p:spTree>
+  </p:cSld>
+  <p:clrMapOvr>
+    <a:masterClrMapping/>
+  </p:clrMapOvr>
+</p:sld>
+</file>
+
+<file path=ppt/slides/slide31.xml><?xml version="1.0" encoding="utf-8"?>
+<p:sld xmlns:a="http://schemas.openxmlformats.org/drawingml/2006/main" xmlns:r="http://schemas.openxmlformats.org/officeDocument/2006/relationships" xmlns:p="http://schemas.openxmlformats.org/presentationml/2006/main">
   <p:cSld name="Slide 26">
     <p:spTree>
       <p:nvGrpSpPr>
@@ -16679,7 +17167,7 @@
 </p:sld>
 </file>
 
-<file path=ppt/slides/slide31.xml><?xml version="1.0" encoding="utf-8"?>
+<file path=ppt/slides/slide32.xml><?xml version="1.0" encoding="utf-8"?>
 <p:sld xmlns:a="http://schemas.openxmlformats.org/drawingml/2006/main" xmlns:r="http://schemas.openxmlformats.org/officeDocument/2006/relationships" xmlns:p="http://schemas.openxmlformats.org/presentationml/2006/main">
   <p:cSld name="Slide 27">
     <p:spTree>
@@ -17061,7 +17549,7 @@
 </p:sld>
 </file>
 
-<file path=ppt/slides/slide32.xml><?xml version="1.0" encoding="utf-8"?>
+<file path=ppt/slides/slide33.xml><?xml version="1.0" encoding="utf-8"?>
 <p:sld xmlns:a="http://schemas.openxmlformats.org/drawingml/2006/main" xmlns:r="http://schemas.openxmlformats.org/officeDocument/2006/relationships" xmlns:p="http://schemas.openxmlformats.org/presentationml/2006/main">
   <p:cSld name="Slide 28">
     <p:spTree>
@@ -17344,7 +17832,7 @@
 </p:sld>
 </file>
 
-<file path=ppt/slides/slide33.xml><?xml version="1.0" encoding="utf-8"?>
+<file path=ppt/slides/slide34.xml><?xml version="1.0" encoding="utf-8"?>
 <p:sld xmlns:a="http://schemas.openxmlformats.org/drawingml/2006/main" xmlns:r="http://schemas.openxmlformats.org/officeDocument/2006/relationships" xmlns:p="http://schemas.openxmlformats.org/presentationml/2006/main">
   <p:cSld name="Slide 29">
     <p:spTree>
@@ -17726,7 +18214,7 @@
 </p:sld>
 </file>
 
-<file path=ppt/slides/slide34.xml><?xml version="1.0" encoding="utf-8"?>
+<file path=ppt/slides/slide35.xml><?xml version="1.0" encoding="utf-8"?>
 <p:sld xmlns:a="http://schemas.openxmlformats.org/drawingml/2006/main" xmlns:r="http://schemas.openxmlformats.org/officeDocument/2006/relationships" xmlns:p="http://schemas.openxmlformats.org/presentationml/2006/main">
   <p:cSld name="Slide 30">
     <p:spTree>
@@ -19872,7 +20360,7 @@
 </p:sld>
 </file>
 
-<file path=ppt/slides/slide35.xml><?xml version="1.0" encoding="utf-8"?>
+<file path=ppt/slides/slide36.xml><?xml version="1.0" encoding="utf-8"?>
 <p:sld xmlns:a="http://schemas.openxmlformats.org/drawingml/2006/main" xmlns:r="http://schemas.openxmlformats.org/officeDocument/2006/relationships" xmlns:p="http://schemas.openxmlformats.org/presentationml/2006/main">
   <p:cSld>
     <p:bg>
@@ -20248,7 +20736,7 @@
 </p:sld>
 </file>
 
-<file path=ppt/slides/slide36.xml><?xml version="1.0" encoding="utf-8"?>
+<file path=ppt/slides/slide37.xml><?xml version="1.0" encoding="utf-8"?>
 <p:sld xmlns:a="http://schemas.openxmlformats.org/drawingml/2006/main" xmlns:r="http://schemas.openxmlformats.org/officeDocument/2006/relationships" xmlns:p="http://schemas.openxmlformats.org/presentationml/2006/main">
   <p:cSld name="Slide 31">
     <p:spTree>
@@ -20504,7 +20992,7 @@
 </p:sld>
 </file>
 
-<file path=ppt/slides/slide37.xml><?xml version="1.0" encoding="utf-8"?>
+<file path=ppt/slides/slide38.xml><?xml version="1.0" encoding="utf-8"?>
 <p:sld xmlns:a="http://schemas.openxmlformats.org/drawingml/2006/main" xmlns:p="http://schemas.openxmlformats.org/presentationml/2006/main" xmlns:r="http://schemas.openxmlformats.org/officeDocument/2006/relationships">
   <p:cSld>
     <p:spTree>
@@ -20516,7 +21004,7 @@
       <p:grpSpPr/>
       <p:pic>
         <p:nvPicPr>
-          <p:cNvPr id="27" name="snip xero_hist" descr="xero_hist.png"/>
+          <p:cNvPr id="27" name="snip xero_roll" descr="xero_roll.png"/>
           <p:cNvPicPr>
             <a:picLocks noChangeAspect="1"/>
           </p:cNvPicPr>
@@ -20604,7 +21092,7 @@
                   <a:srgbClr val="242C39"/>
                 </a:solidFill>
               </a:rPr>
-              <a:t>Three years of revenue by month</a:t>
+              <a:t>Revenue, rolling twelve months</a:t>
             </a:r>
             <a:endParaRPr lang="en-US" sz="2700"/>
           </a:p>
@@ -20712,7 +21200,7 @@
                   <a:srgbClr val="3A4453"/>
                 </a:solidFill>
               </a:rPr>
-              <a:t>Thirty six months of revenue, from July 2024 through to September 2026.</a:t>
+              <a:t>The twelve months to September 2026 billed $6,509k.</a:t>
             </a:r>
             <a:endParaRPr lang="en-US" sz="850"/>
           </a:p>
@@ -20733,7 +21221,7 @@
                   <a:srgbClr val="3A4453"/>
                 </a:solidFill>
               </a:rPr>
-              <a:t>FY26 was the softer year at $6,113k against $7,000k, and it was down in both halves.</a:t>
+              <a:t>The peak was $7,000k in June 2025. The trough was $5,817k in January 2026, a fall of 17%.</a:t>
             </a:r>
             <a:endParaRPr lang="en-US" sz="850"/>
           </a:p>
@@ -20823,7 +21311,7 @@
                   <a:srgbClr val="3A4453"/>
                 </a:solidFill>
               </a:rPr>
-              <a:t>The largest single swing is January: $918k in FY25 against $269k in FY26.</a:t>
+              <a:t>The trend has turned up since January and has recovered $692k of that, about 12%.</a:t>
             </a:r>
             <a:endParaRPr lang="en-US" sz="850"/>
           </a:p>
@@ -20844,7 +21332,7 @@
                   <a:srgbClr val="3A4453"/>
                 </a:solidFill>
               </a:rPr>
-              <a:t>October carries the year. It was $949k in FY25 and $1,036k in FY26, and FY27 has it budgeted at $950k.</a:t>
+              <a:t>It is still $491k or 7% below the peak. The recovery is real but it is not finished.</a:t>
             </a:r>
             <a:endParaRPr lang="en-US" sz="850"/>
           </a:p>
@@ -22759,22 +23247,22 @@
       <p:grpSpPr/>
       <p:pic>
         <p:nvPicPr>
-          <p:cNvPr id="27" name="snip rev_q1" descr="rev_q1.png"/>
+          <p:cNvPr id="27" name="snip rev_q1" descr="xero_qtr.png"/>
           <p:cNvPicPr>
             <a:picLocks noChangeAspect="1"/>
           </p:cNvPicPr>
           <p:nvPr/>
         </p:nvPicPr>
         <p:blipFill>
-          <a:blip r:embed="rId5"/>
+          <a:blip r:embed="rId6"/>
           <a:stretch>
             <a:fillRect/>
           </a:stretch>
         </p:blipFill>
         <p:spPr>
           <a:xfrm>
-            <a:off x="1734604" y="1115568"/>
-            <a:ext cx="5674791" cy="2397673"/>
+            <a:off x="1362886" y="1115568"/>
+            <a:ext cx="6418226" cy="2397673"/>
           </a:xfrm>
           <a:prstGeom prst="rect">
             <a:avLst/>
@@ -22847,7 +23335,7 @@
                   <a:srgbClr val="242C39"/>
                 </a:solidFill>
               </a:rPr>
-              <a:t>First quarter revenue, year on year</a:t>
+              <a:t>Revenue by quarter, year on year</a:t>
             </a:r>
             <a:endParaRPr lang="en-US" sz="2700"/>
           </a:p>
@@ -22955,7 +23443,7 @@
                   <a:srgbClr val="3A4453"/>
                 </a:solidFill>
               </a:rPr>
-              <a:t>First quarter revenue was $1,624k, against $1,229k last year and $1,380k the year before.</a:t>
+              <a:t>The first quarter was $1,624k, the strongest of the three years.</a:t>
             </a:r>
             <a:endParaRPr lang="en-US" sz="850"/>
           </a:p>
@@ -22976,7 +23464,7 @@
                   <a:srgbClr val="3A4453"/>
                 </a:solidFill>
               </a:rPr>
-              <a:t>FY26 was the softest of the three, 11% below FY25 for the quarter and 13% below for the full year.</a:t>
+              <a:t>It is also the smallest quarter of the year. The second quarter carries about 32% of revenue.</a:t>
             </a:r>
             <a:endParaRPr lang="en-US" sz="850"/>
           </a:p>
@@ -23066,7 +23554,7 @@
                   <a:srgbClr val="3A4453"/>
                 </a:solidFill>
               </a:rPr>
-              <a:t>Against FY26 the quarter is 32% ahead. Against FY25 it is 18% ahead, which is about 8.5% a year.</a:t>
+              <a:t>FY26 lost its year in the third quarter: $1,304k against $1,873k, down 30%.</a:t>
             </a:r>
             <a:endParaRPr lang="en-US" sz="850"/>
           </a:p>
@@ -23087,7 +23575,7 @@
                   <a:srgbClr val="3A4453"/>
                 </a:solidFill>
               </a:rPr>
-              <a:t>The growth is on revenue alone. The quarter delivered a 38.9% margin and $5.8k of EBITDA.</a:t>
+              <a:t>The second quarter is next and it decides the year. FY25 billed $2,277k in it, FY26 $1,895k.</a:t>
             </a:r>
             <a:endParaRPr lang="en-US" sz="850"/>
           </a:p>

--- a/deck/CTS Monthly Business Review - 30092026.pptx
+++ b/deck/CTS Monthly Business Review - 30092026.pptx
@@ -4127,55 +4127,49 @@
           <a:lstStyle/>
           <a:p>
             <a:r>
-              <a:t>Revenue on a rolling twelve month basis, taken from the Xero History tab. Each point is the total of that month and the eleven before it.</a:t>
+              <a:t>Revenue year to date on a cumulative basis, three years against the FY27 budget, taken from the Xero History tab.</a:t>
             </a:r>
           </a:p>
           <a:p/>
           <a:p>
             <a:r>
-              <a:t>This is the chart that takes the seasonality out. For a business where October can be a seven figure month and January can be a quarter of that, the month by month picture and the quarterly picture both move for reasons that have nothing to do with how the business is actually travelling. The rolling twelve months does not.</a:t>
+              <a:t>At September: FY27 $1,624,460, FY26 $1,228,582, FY25 $1,380,102, and the FY27 budget $1,996,110.</a:t>
             </a:r>
           </a:p>
           <a:p/>
           <a:p>
             <a:r>
-              <a:t>The peak was $7,000,357 at June 2025, which is the FY25 full year.</a:t>
+              <a:t>The year is ahead of both completed years at this point. It is $371,650 or 18.6% behind the budget set for it.</a:t>
             </a:r>
           </a:p>
           <a:p/>
           <a:p>
             <a:r>
-              <a:t>It fell from there for seven straight months to $5,817,190 at January 2026, a fall of $1,183,167 or 16.9%. January 2026 is the single worst month in the three years at $268,631 against $918,289 the year before, and it drags the rolling figure down the moment it enters the window.</a:t>
+              <a:t>Where that gap came from, month by month. July was $150,228 behind budget. August was $369,702 behind, which is where almost all of it opened. September was $148,280 ahead of budget, which closed part of it back. August was budgeted at $973,168, the second largest month of the FY27 budget, and billed $603,467.</a:t>
             </a:r>
           </a:p>
           <a:p/>
           <a:p>
             <a:r>
-              <a:t>Since January the line has turned up. It now stands at $6,509,064 at September 2026, which is $691,874 or 11.9% above the trough.</a:t>
+              <a:t>What the two completed lines show is where a year gets lost. FY25 and FY26 track each other almost exactly from July to November. They separate in December and January. December was $395,542 behind and January $649,658 behind, $1,045,200 across the two months, against a full year gap of $887,171. Every other month of FY26 combined was ahead of FY25.</a:t>
             </a:r>
           </a:p>
           <a:p/>
           <a:p>
             <a:r>
-              <a:t>It is still $491,293 or 7.0% below the peak.</a:t>
+              <a:t>That matters now because FY27 is about to enter the same two months, and the budget has December at $344,970 and January at $353,969, both well below what FY25 billed in them.</a:t>
             </a:r>
           </a:p>
           <a:p/>
           <a:p>
             <a:r>
-              <a:t>That is the honest position. The business is recovering and the direction is right, but it has not yet got back to where it was fifteen months ago. Quarterly growth of 32% measured off the weakest quarter of the three years does not describe a business at a record. This line does.</a:t>
+              <a:t>The last point is the budget itself. The full year FY27 budget is $6,304,601. FY25 actually billed $7,000,357. The plan for this year is $695,756 or 9.9% below what the business delivered two years ago, and $191,415 or 3.1% above FY26. Being 18.6% behind that budget is the gap against a plan that was already set below the FY25 result.</a:t>
             </a:r>
           </a:p>
           <a:p/>
           <a:p>
             <a:r>
-              <a:t>The line begins at June 2025 because that is the first month with twelve months of Xero history behind it, and it stops at September 2026 because that is the last closed month.</a:t>
-            </a:r>
-          </a:p>
-          <a:p/>
-          <a:p>
-            <a:r>
-              <a:t>One note on the chart itself. The scale starts at five million rather than at zero. This series only moves between $5.8 million and $7.0 million, and drawn from zero it is a flat line with a 17% fall invisible in it. The axis labels show where the scale starts.</a:t>
+              <a:t>The FY27 line stops at September because the months beyond it hold budget rather than actuals. The budget line runs the full year because a budget is set for the whole year.</a:t>
             </a:r>
           </a:p>
         </p:txBody>
@@ -6170,6 +6164,384 @@
 </file>
 
 <file path=ppt/slides/slide11.xml><?xml version="1.0" encoding="utf-8"?>
+<p:sld xmlns:a="http://schemas.openxmlformats.org/drawingml/2006/main" xmlns:p="http://schemas.openxmlformats.org/presentationml/2006/main" xmlns:r="http://schemas.openxmlformats.org/officeDocument/2006/relationships">
+  <p:cSld>
+    <p:spTree>
+      <p:nvGrpSpPr>
+        <p:cNvPr id="1" name=""/>
+        <p:cNvGrpSpPr/>
+        <p:nvPr/>
+      </p:nvGrpSpPr>
+      <p:grpSpPr/>
+      <p:pic>
+        <p:nvPicPr>
+          <p:cNvPr id="27" name="snip xero_cum" descr="xero_cum.png"/>
+          <p:cNvPicPr>
+            <a:picLocks noChangeAspect="1"/>
+          </p:cNvPicPr>
+          <p:nvPr/>
+        </p:nvPicPr>
+        <p:blipFill>
+          <a:blip r:embed="rId5"/>
+          <a:stretch>
+            <a:fillRect/>
+          </a:stretch>
+        </p:blipFill>
+        <p:spPr>
+          <a:xfrm>
+            <a:off x="1362886" y="1115568"/>
+            <a:ext cx="6418226" cy="2397673"/>
+          </a:xfrm>
+          <a:prstGeom prst="rect">
+            <a:avLst/>
+          </a:prstGeom>
+        </p:spPr>
+      </p:pic>
+      <p:sp>
+        <p:nvSpPr>
+          <p:cNvPr id="2" name="Text 0"/>
+          <p:cNvSpPr txBox="1"/>
+          <p:nvPr/>
+        </p:nvSpPr>
+        <p:spPr>
+          <a:xfrm>
+            <a:off x="502920" y="365760"/>
+            <a:ext cx="6400800" cy="274320"/>
+          </a:xfrm>
+          <a:prstGeom prst="rect">
+            <a:avLst/>
+          </a:prstGeom>
+          <a:noFill/>
+          <a:ln/>
+        </p:spPr>
+        <p:txBody>
+          <a:bodyPr wrap="square" lIns="0" tIns="0" rIns="0" bIns="0" rtlCol="0" anchor="ctr"/>
+          <a:lstStyle/>
+          <a:p>
+            <a:pPr marL="0" indent="0">
+              <a:buNone/>
+            </a:pPr>
+            <a:r>
+              <a:rPr lang="en-US" sz="950" b="1" kern="0" spc="220">
+                <a:solidFill>
+                  <a:srgbClr val="122B82"/>
+                </a:solidFill>
+              </a:rPr>
+              <a:t>FINANCIAL PERFORMANCE</a:t>
+            </a:r>
+            <a:endParaRPr lang="en-US" sz="950"/>
+          </a:p>
+        </p:txBody>
+      </p:sp>
+      <p:sp>
+        <p:nvSpPr>
+          <p:cNvPr id="3" name="Text 1"/>
+          <p:cNvSpPr txBox="1"/>
+          <p:nvPr/>
+        </p:nvSpPr>
+        <p:spPr>
+          <a:xfrm>
+            <a:off x="502920" y="640080"/>
+            <a:ext cx="7315200" cy="685800"/>
+          </a:xfrm>
+          <a:prstGeom prst="rect">
+            <a:avLst/>
+          </a:prstGeom>
+          <a:noFill/>
+          <a:ln/>
+        </p:spPr>
+        <p:txBody>
+          <a:bodyPr wrap="square" lIns="0" tIns="0" rIns="0" bIns="0" rtlCol="0" anchor="ctr"/>
+          <a:lstStyle/>
+          <a:p>
+            <a:pPr marL="0" indent="0">
+              <a:buNone/>
+            </a:pPr>
+            <a:r>
+              <a:rPr lang="en-US" sz="2200" b="1">
+                <a:solidFill>
+                  <a:srgbClr val="242C39"/>
+                </a:solidFill>
+              </a:rPr>
+              <a:t>Revenue year to date, against budget</a:t>
+            </a:r>
+            <a:endParaRPr lang="en-US" sz="2700"/>
+          </a:p>
+        </p:txBody>
+      </p:sp>
+      <p:sp>
+        <p:nvSpPr>
+          <p:cNvPr id="6" name="commentary panel"/>
+          <p:cNvSpPr/>
+          <p:nvPr/>
+        </p:nvSpPr>
+        <p:spPr>
+          <a:xfrm>
+            <a:off x="502920" y="3622969"/>
+            <a:ext cx="8138160" cy="1003894"/>
+          </a:xfrm>
+          <a:prstGeom prst="rect">
+            <a:avLst/>
+          </a:prstGeom>
+          <a:solidFill>
+            <a:srgbClr val="E8F9F8"/>
+          </a:solidFill>
+          <a:ln/>
+        </p:spPr>
+        <p:txBody>
+          <a:bodyPr/>
+          <a:lstStyle/>
+          <a:p>
+            <a:endParaRPr lang="en-AU"/>
+          </a:p>
+        </p:txBody>
+      </p:sp>
+      <p:sp>
+        <p:nvSpPr>
+          <p:cNvPr id="7" name="Text 4"/>
+          <p:cNvSpPr txBox="1"/>
+          <p:nvPr/>
+        </p:nvSpPr>
+        <p:spPr>
+          <a:xfrm>
+            <a:off x="685800" y="3696121"/>
+            <a:ext cx="2743200" cy="228600"/>
+          </a:xfrm>
+          <a:prstGeom prst="rect">
+            <a:avLst/>
+          </a:prstGeom>
+          <a:noFill/>
+          <a:ln/>
+        </p:spPr>
+        <p:txBody>
+          <a:bodyPr wrap="square" lIns="0" tIns="0" rIns="0" bIns="0" rtlCol="0" anchor="ctr"/>
+          <a:lstStyle/>
+          <a:p>
+            <a:pPr marL="0" indent="0">
+              <a:buNone/>
+            </a:pPr>
+            <a:r>
+              <a:rPr lang="en-US" sz="900" b="1" kern="0" spc="180">
+                <a:solidFill>
+                  <a:srgbClr val="005358"/>
+                </a:solidFill>
+              </a:rPr>
+              <a:t>COMMENTARY</a:t>
+            </a:r>
+            <a:endParaRPr lang="en-US" sz="900"/>
+          </a:p>
+        </p:txBody>
+      </p:sp>
+      <p:sp>
+        <p:nvSpPr>
+          <p:cNvPr id="8" name="Text 5"/>
+          <p:cNvSpPr txBox="1"/>
+          <p:nvPr/>
+        </p:nvSpPr>
+        <p:spPr>
+          <a:xfrm>
+            <a:off x="685800" y="3869857"/>
+            <a:ext cx="3703320" cy="729574"/>
+          </a:xfrm>
+          <a:prstGeom prst="rect">
+            <a:avLst/>
+          </a:prstGeom>
+          <a:noFill/>
+          <a:ln/>
+        </p:spPr>
+        <p:txBody>
+          <a:bodyPr wrap="square" lIns="0" tIns="0" rIns="0" bIns="0" rtlCol="0" anchor="t">
+            <a:normAutofit fontScale="85000" lnSpcReduction="10000"/>
+          </a:bodyPr>
+          <a:lstStyle/>
+          <a:p>
+            <a:pPr marL="342900" indent="-342900">
+              <a:lnSpc>
+                <a:spcPts val="1050"/>
+              </a:lnSpc>
+              <a:spcAft>
+                <a:spcPts val="400"/>
+              </a:spcAft>
+              <a:buSzPct val="100000"/>
+              <a:buChar char="•"/>
+            </a:pPr>
+            <a:r>
+              <a:rPr lang="en-US" sz="1000">
+                <a:solidFill>
+                  <a:srgbClr val="3A4453"/>
+                </a:solidFill>
+              </a:rPr>
+              <a:t>Year to date revenue is $1,624k, ahead of both completed years at this point in the year.</a:t>
+            </a:r>
+            <a:endParaRPr lang="en-US" sz="850"/>
+          </a:p>
+          <a:p>
+            <a:pPr marL="342900" indent="-342900">
+              <a:lnSpc>
+                <a:spcPts val="1050"/>
+              </a:lnSpc>
+              <a:spcAft>
+                <a:spcPts val="400"/>
+              </a:spcAft>
+              <a:buSzPct val="100000"/>
+              <a:buChar char="•"/>
+            </a:pPr>
+            <a:r>
+              <a:rPr lang="en-US" sz="1000">
+                <a:solidFill>
+                  <a:srgbClr val="3A4453"/>
+                </a:solidFill>
+              </a:rPr>
+              <a:t>It is $372k or 19% behind budget. Almost all of that opened in August, and September closed $148k of it back.</a:t>
+            </a:r>
+            <a:endParaRPr lang="en-US" sz="850"/>
+          </a:p>
+        </p:txBody>
+      </p:sp>
+      <p:sp>
+        <p:nvSpPr>
+          <p:cNvPr id="25" name="Slide Number Placeholder 0"/>
+          <p:cNvSpPr>
+            <a:spLocks noGrp="1"/>
+          </p:cNvSpPr>
+          <p:nvPr>
+            <p:ph type="sldNum" sz="quarter" idx="4294967295"/>
+          </p:nvPr>
+        </p:nvSpPr>
+        <p:spPr>
+          <a:xfrm>
+            <a:off x="8092440" y="4736592"/>
+            <a:ext cx="548640" cy="228600"/>
+          </a:xfrm>
+          <a:prstGeom prst="rect">
+            <a:avLst/>
+          </a:prstGeom>
+          <a:extLst>
+            <a:ext uri="{C572A759-6A51-4108-AA02-DFA0A04FC94B}">
+              <ma14:wrappingTextBoxFlag xmlns:ma14="http://schemas.microsoft.com/office/mac/drawingml/2011/main" xmlns="" val="0"/>
+            </a:ext>
+          </a:extLst>
+        </p:spPr>
+        <p:txBody>
+          <a:bodyPr/>
+          <a:lstStyle>
+            <a:lvl1pPr>
+              <a:defRPr sz="800">
+                <a:solidFill>
+                  <a:srgbClr val="6B7585"/>
+                </a:solidFill>
+              </a:defRPr>
+            </a:lvl1pPr>
+          </a:lstStyle>
+          <a:p>
+            <a:pPr algn="r"/>
+            <a:fld id="{F7021451-1387-4CA6-816F-3879F97B5CBC}" type="slidenum">
+              <a:rPr lang="en-US" b="0"/>
+              <a:t>16</a:t>
+            </a:fld>
+            <a:endParaRPr lang="en-US"/>
+          </a:p>
+        </p:txBody>
+      </p:sp>
+      <p:sp>
+        <p:nvSpPr>
+          <p:cNvPr id="8" name="Text 5b"/>
+          <p:cNvSpPr txBox="1"/>
+          <p:nvPr/>
+        </p:nvSpPr>
+        <p:spPr>
+          <a:xfrm>
+            <a:off x="4663440" y="3869857"/>
+            <a:ext cx="3703320" cy="729574"/>
+          </a:xfrm>
+          <a:prstGeom prst="rect">
+            <a:avLst/>
+          </a:prstGeom>
+          <a:noFill/>
+          <a:ln/>
+        </p:spPr>
+        <p:txBody>
+          <a:bodyPr wrap="square" lIns="0" tIns="0" rIns="0" bIns="0" rtlCol="0" anchor="t">
+            <a:normAutofit fontScale="85000" lnSpcReduction="10000"/>
+          </a:bodyPr>
+          <a:lstStyle/>
+          <a:p>
+            <a:pPr marL="342900" indent="-342900">
+              <a:lnSpc>
+                <a:spcPts val="1050"/>
+              </a:lnSpc>
+              <a:spcAft>
+                <a:spcPts val="400"/>
+              </a:spcAft>
+              <a:buSzPct val="100000"/>
+              <a:buChar char="•"/>
+            </a:pPr>
+            <a:r>
+              <a:rPr lang="en-US" sz="1000">
+                <a:solidFill>
+                  <a:srgbClr val="3A4453"/>
+                </a:solidFill>
+              </a:rPr>
+              <a:t>FY26 lost its year in December and January, $1,045k behind FY25 across those two months.</a:t>
+            </a:r>
+            <a:endParaRPr lang="en-US" sz="850"/>
+          </a:p>
+          <a:p>
+            <a:pPr marL="342900" indent="-342900">
+              <a:lnSpc>
+                <a:spcPts val="1050"/>
+              </a:lnSpc>
+              <a:spcAft>
+                <a:spcPts val="400"/>
+              </a:spcAft>
+              <a:buSzPct val="100000"/>
+              <a:buChar char="•"/>
+            </a:pPr>
+            <a:r>
+              <a:rPr lang="en-US" sz="1000">
+                <a:solidFill>
+                  <a:srgbClr val="3A4453"/>
+                </a:solidFill>
+              </a:rPr>
+              <a:t>The full year budget of $6,305k is itself 10% below what FY25 actually billed.</a:t>
+            </a:r>
+            <a:endParaRPr lang="en-US" sz="850"/>
+          </a:p>
+        </p:txBody>
+      </p:sp>
+      <p:pic>
+        <p:nvPicPr>
+          <p:cNvPr id="26" name="cts logo" descr="image.png"/>
+          <p:cNvPicPr>
+            <a:picLocks noChangeAspect="1"/>
+          </p:cNvPicPr>
+          <p:nvPr/>
+        </p:nvPicPr>
+        <p:blipFill>
+          <a:blip r:embed="rId2"/>
+          <a:stretch>
+            <a:fillRect/>
+          </a:stretch>
+        </p:blipFill>
+        <p:spPr>
+          <a:xfrm>
+            <a:off x="7680959" y="182880"/>
+            <a:ext cx="960120" cy="539696"/>
+          </a:xfrm>
+          <a:prstGeom prst="rect">
+            <a:avLst/>
+          </a:prstGeom>
+        </p:spPr>
+      </p:pic>
+    </p:spTree>
+  </p:cSld>
+  <p:clrMapOvr>
+    <a:masterClrMapping/>
+  </p:clrMapOvr>
+</p:sld>
+</file>
+
+<file path=ppt/slides/slide12.xml><?xml version="1.0" encoding="utf-8"?>
 <p:sld xmlns:a="http://schemas.openxmlformats.org/drawingml/2006/main" xmlns:r="http://schemas.openxmlformats.org/officeDocument/2006/relationships" xmlns:p="http://schemas.openxmlformats.org/presentationml/2006/main">
   <p:cSld name="Slide 6">
     <p:spTree>
@@ -6575,7 +6947,7 @@
 </p:sld>
 </file>
 
-<file path=ppt/slides/slide12.xml><?xml version="1.0" encoding="utf-8"?>
+<file path=ppt/slides/slide13.xml><?xml version="1.0" encoding="utf-8"?>
 <p:sld xmlns:a="http://schemas.openxmlformats.org/drawingml/2006/main" xmlns:r="http://schemas.openxmlformats.org/officeDocument/2006/relationships" xmlns:p="http://schemas.openxmlformats.org/presentationml/2006/main">
   <p:cSld name="Slide 7">
     <p:spTree>
@@ -6960,7 +7332,7 @@
 </p:sld>
 </file>
 
-<file path=ppt/slides/slide13.xml><?xml version="1.0" encoding="utf-8"?>
+<file path=ppt/slides/slide14.xml><?xml version="1.0" encoding="utf-8"?>
 <p:sld xmlns:a="http://schemas.openxmlformats.org/drawingml/2006/main" xmlns:r="http://schemas.openxmlformats.org/officeDocument/2006/relationships" xmlns:p="http://schemas.openxmlformats.org/presentationml/2006/main">
   <p:cSld name="Slide 8">
     <p:spTree>
@@ -7345,7 +7717,7 @@
 </p:sld>
 </file>
 
-<file path=ppt/slides/slide14.xml><?xml version="1.0" encoding="utf-8"?>
+<file path=ppt/slides/slide15.xml><?xml version="1.0" encoding="utf-8"?>
 <p:sld xmlns:a="http://schemas.openxmlformats.org/drawingml/2006/main" xmlns:r="http://schemas.openxmlformats.org/officeDocument/2006/relationships" xmlns:p="http://schemas.openxmlformats.org/presentationml/2006/main">
   <p:cSld name="Slide 9">
     <p:spTree>
@@ -7751,7 +8123,7 @@
 </p:sld>
 </file>
 
-<file path=ppt/slides/slide15.xml><?xml version="1.0" encoding="utf-8"?>
+<file path=ppt/slides/slide16.xml><?xml version="1.0" encoding="utf-8"?>
 <p:sld xmlns:a="http://schemas.openxmlformats.org/drawingml/2006/main" xmlns:r="http://schemas.openxmlformats.org/officeDocument/2006/relationships" xmlns:p="http://schemas.openxmlformats.org/presentationml/2006/main">
   <p:cSld name="Slide 10">
     <p:spTree>
@@ -8157,7 +8529,7 @@
 </p:sld>
 </file>
 
-<file path=ppt/slides/slide16.xml><?xml version="1.0" encoding="utf-8"?>
+<file path=ppt/slides/slide17.xml><?xml version="1.0" encoding="utf-8"?>
 <p:sld xmlns:a="http://schemas.openxmlformats.org/drawingml/2006/main" xmlns:r="http://schemas.openxmlformats.org/officeDocument/2006/relationships" xmlns:p="http://schemas.openxmlformats.org/presentationml/2006/main">
   <p:cSld name="Slide 11">
     <p:spTree>
@@ -8563,7 +8935,7 @@
 </p:sld>
 </file>
 
-<file path=ppt/slides/slide17.xml><?xml version="1.0" encoding="utf-8"?>
+<file path=ppt/slides/slide18.xml><?xml version="1.0" encoding="utf-8"?>
 <p:sld xmlns:a="http://schemas.openxmlformats.org/drawingml/2006/main" xmlns:r="http://schemas.openxmlformats.org/officeDocument/2006/relationships" xmlns:p="http://schemas.openxmlformats.org/presentationml/2006/main">
   <p:cSld name="Slide 12">
     <p:spTree>
@@ -8969,7 +9341,7 @@
 </p:sld>
 </file>
 
-<file path=ppt/slides/slide18.xml><?xml version="1.0" encoding="utf-8"?>
+<file path=ppt/slides/slide19.xml><?xml version="1.0" encoding="utf-8"?>
 <p:sld xmlns:a="http://schemas.openxmlformats.org/drawingml/2006/main" xmlns:r="http://schemas.openxmlformats.org/officeDocument/2006/relationships" xmlns:p="http://schemas.openxmlformats.org/presentationml/2006/main">
   <p:cSld name="Slide 13">
     <p:spTree>
@@ -9364,412 +9736,6 @@
               <a:t>Management should review the department's future structure, capacity and commercial viability, including whether to rebuild or combine its activities.</a:t>
             </a:r>
             <a:endParaRPr lang="en-US" sz="950"/>
-          </a:p>
-        </p:txBody>
-      </p:sp>
-    </p:spTree>
-  </p:cSld>
-  <p:clrMapOvr>
-    <a:masterClrMapping/>
-  </p:clrMapOvr>
-</p:sld>
-</file>
-
-<file path=ppt/slides/slide19.xml><?xml version="1.0" encoding="utf-8"?>
-<p:sld xmlns:a="http://schemas.openxmlformats.org/drawingml/2006/main" xmlns:r="http://schemas.openxmlformats.org/officeDocument/2006/relationships" xmlns:p="http://schemas.openxmlformats.org/presentationml/2006/main">
-  <p:cSld name="Slide 14">
-    <p:spTree>
-      <p:nvGrpSpPr>
-        <p:cNvPr id="1" name=""/>
-        <p:cNvGrpSpPr/>
-        <p:nvPr/>
-      </p:nvGrpSpPr>
-      <p:grpSpPr>
-        <a:xfrm>
-          <a:off x="0" y="0"/>
-          <a:ext cx="0" cy="0"/>
-          <a:chOff x="0" y="0"/>
-          <a:chExt cx="0" cy="0"/>
-        </a:xfrm>
-      </p:grpSpPr>
-      <p:pic>
-        <p:nvPicPr>
-          <p:cNvPr id="27" name="snip rev_by_dept" descr="image.png"/>
-          <p:cNvPicPr>
-            <a:picLocks noChangeAspect="1"/>
-          </p:cNvPicPr>
-          <p:nvPr/>
-        </p:nvPicPr>
-        <p:blipFill>
-          <a:blip r:embed="rId3"/>
-          <a:stretch>
-            <a:fillRect/>
-          </a:stretch>
-        </p:blipFill>
-        <p:spPr>
-          <a:xfrm>
-            <a:off x="2234229" y="1115568"/>
-            <a:ext cx="4675541" cy="2005865"/>
-          </a:xfrm>
-          <a:prstGeom prst="rect">
-            <a:avLst/>
-          </a:prstGeom>
-        </p:spPr>
-      </p:pic>
-      <p:sp>
-        <p:nvSpPr>
-          <p:cNvPr id="2" name="Text 0"/>
-          <p:cNvSpPr txBox="1"/>
-          <p:nvPr/>
-        </p:nvSpPr>
-        <p:spPr>
-          <a:xfrm>
-            <a:off x="502920" y="365760"/>
-            <a:ext cx="6400800" cy="274320"/>
-          </a:xfrm>
-          <a:prstGeom prst="rect">
-            <a:avLst/>
-          </a:prstGeom>
-          <a:noFill/>
-          <a:ln/>
-        </p:spPr>
-        <p:txBody>
-          <a:bodyPr wrap="square" lIns="0" tIns="0" rIns="0" bIns="0" rtlCol="0" anchor="ctr"/>
-          <a:lstStyle/>
-          <a:p>
-            <a:pPr marL="0" indent="0">
-              <a:buNone/>
-            </a:pPr>
-            <a:r>
-              <a:rPr lang="en-US" sz="950" b="1" kern="0" spc="220">
-                <a:solidFill>
-                  <a:srgbClr val="122B82"/>
-                </a:solidFill>
-              </a:rPr>
-              <a:t>FINANCIAL PERFORMANCE</a:t>
-            </a:r>
-            <a:endParaRPr lang="en-US" sz="950"/>
-          </a:p>
-        </p:txBody>
-      </p:sp>
-      <p:sp>
-        <p:nvSpPr>
-          <p:cNvPr id="3" name="Text 1"/>
-          <p:cNvSpPr txBox="1"/>
-          <p:nvPr/>
-        </p:nvSpPr>
-        <p:spPr>
-          <a:xfrm>
-            <a:off x="502920" y="640080"/>
-            <a:ext cx="7315200" cy="685800"/>
-          </a:xfrm>
-          <a:prstGeom prst="rect">
-            <a:avLst/>
-          </a:prstGeom>
-          <a:noFill/>
-          <a:ln/>
-        </p:spPr>
-        <p:txBody>
-          <a:bodyPr wrap="square" lIns="0" tIns="0" rIns="0" bIns="0" rtlCol="0" anchor="ctr"/>
-          <a:lstStyle/>
-          <a:p>
-            <a:pPr marL="0" indent="0">
-              <a:buNone/>
-            </a:pPr>
-            <a:r>
-              <a:rPr lang="en-US" sz="2200" b="1">
-                <a:solidFill>
-                  <a:srgbClr val="242C39"/>
-                </a:solidFill>
-              </a:rPr>
-              <a:t>Revenue against budget and last year</a:t>
-            </a:r>
-            <a:endParaRPr lang="en-US" sz="2700"/>
-          </a:p>
-        </p:txBody>
-      </p:sp>
-      <p:sp>
-        <p:nvSpPr>
-          <p:cNvPr id="6" name="commentary panel"/>
-          <p:cNvSpPr/>
-          <p:nvPr/>
-        </p:nvSpPr>
-        <p:spPr>
-          <a:xfrm>
-            <a:off x="502920" y="3231161"/>
-            <a:ext cx="8138160" cy="1395702"/>
-          </a:xfrm>
-          <a:prstGeom prst="rect">
-            <a:avLst/>
-          </a:prstGeom>
-          <a:solidFill>
-            <a:srgbClr val="E8F9F8"/>
-          </a:solidFill>
-          <a:ln/>
-        </p:spPr>
-        <p:txBody>
-          <a:bodyPr/>
-          <a:lstStyle/>
-          <a:p>
-            <a:endParaRPr lang="en-AU"/>
-          </a:p>
-        </p:txBody>
-      </p:sp>
-      <p:sp>
-        <p:nvSpPr>
-          <p:cNvPr id="7" name="Text 4"/>
-          <p:cNvSpPr txBox="1"/>
-          <p:nvPr/>
-        </p:nvSpPr>
-        <p:spPr>
-          <a:xfrm>
-            <a:off x="685800" y="3304313"/>
-            <a:ext cx="2743200" cy="228600"/>
-          </a:xfrm>
-          <a:prstGeom prst="rect">
-            <a:avLst/>
-          </a:prstGeom>
-          <a:noFill/>
-          <a:ln/>
-        </p:spPr>
-        <p:txBody>
-          <a:bodyPr wrap="square" lIns="0" tIns="0" rIns="0" bIns="0" rtlCol="0" anchor="ctr"/>
-          <a:lstStyle/>
-          <a:p>
-            <a:pPr marL="0" indent="0">
-              <a:buNone/>
-            </a:pPr>
-            <a:r>
-              <a:rPr lang="en-US" sz="900" b="1" kern="0" spc="180">
-                <a:solidFill>
-                  <a:srgbClr val="005358"/>
-                </a:solidFill>
-              </a:rPr>
-              <a:t>COMMENTARY</a:t>
-            </a:r>
-            <a:endParaRPr lang="en-US" sz="900"/>
-          </a:p>
-        </p:txBody>
-      </p:sp>
-      <p:sp>
-        <p:nvSpPr>
-          <p:cNvPr id="8" name="Text 5"/>
-          <p:cNvSpPr txBox="1"/>
-          <p:nvPr/>
-        </p:nvSpPr>
-        <p:spPr>
-          <a:xfrm>
-            <a:off x="685800" y="3478049"/>
-            <a:ext cx="3703320" cy="1121382"/>
-          </a:xfrm>
-          <a:prstGeom prst="rect">
-            <a:avLst/>
-          </a:prstGeom>
-          <a:noFill/>
-          <a:ln/>
-        </p:spPr>
-        <p:txBody>
-          <a:bodyPr wrap="square" lIns="0" tIns="0" rIns="0" bIns="0" rtlCol="0" anchor="t">
-            <a:normAutofit fontScale="92500"/>
-          </a:bodyPr>
-          <a:lstStyle/>
-          <a:p>
-            <a:pPr marL="342900" indent="-342900">
-              <a:lnSpc>
-                <a:spcPts val="1050"/>
-              </a:lnSpc>
-              <a:spcAft>
-                <a:spcPts val="400"/>
-              </a:spcAft>
-              <a:buSzPct val="100000"/>
-              <a:buChar char="•"/>
-            </a:pPr>
-            <a:r>
-              <a:rPr lang="en-US" sz="1000">
-                <a:solidFill>
-                  <a:srgbClr val="3A4453"/>
-                </a:solidFill>
-              </a:rPr>
-              <a:t>Integration generated $235k revenue against a $59k budget, mainly from a completed installation project. This result may not recur in October.</a:t>
-            </a:r>
-            <a:endParaRPr lang="en-US" sz="850"/>
-          </a:p>
-          <a:p>
-            <a:pPr marL="342900" indent="-342900">
-              <a:lnSpc>
-                <a:spcPts val="1050"/>
-              </a:lnSpc>
-              <a:spcAft>
-                <a:spcPts val="400"/>
-              </a:spcAft>
-              <a:buSzPct val="100000"/>
-              <a:buChar char="•"/>
-            </a:pPr>
-            <a:r>
-              <a:rPr lang="en-US" sz="1000">
-                <a:solidFill>
-                  <a:srgbClr val="3A4453"/>
-                </a:solidFill>
-              </a:rPr>
-              <a:t>Support recorded $243k revenue against a $248k budget, remaining broadly in line with recurring contracts.</a:t>
-            </a:r>
-            <a:endParaRPr lang="en-US" sz="850"/>
-          </a:p>
-        </p:txBody>
-      </p:sp>
-      <p:sp>
-        <p:nvSpPr>
-          <p:cNvPr id="25" name="Slide Number Placeholder 0"/>
-          <p:cNvSpPr>
-            <a:spLocks noGrp="1"/>
-          </p:cNvSpPr>
-          <p:nvPr>
-            <p:ph type="sldNum" sz="quarter" idx="4294967295"/>
-          </p:nvPr>
-        </p:nvSpPr>
-        <p:spPr>
-          <a:xfrm>
-            <a:off x="8092440" y="4736592"/>
-            <a:ext cx="548640" cy="228600"/>
-          </a:xfrm>
-          <a:prstGeom prst="rect">
-            <a:avLst/>
-          </a:prstGeom>
-          <a:extLst>
-            <a:ext uri="{C572A759-6A51-4108-AA02-DFA0A04FC94B}">
-              <ma14:wrappingTextBoxFlag xmlns:ma14="http://schemas.microsoft.com/office/mac/drawingml/2011/main" xmlns="" val="0"/>
-            </a:ext>
-          </a:extLst>
-        </p:spPr>
-        <p:txBody>
-          <a:bodyPr/>
-          <a:lstStyle>
-            <a:lvl1pPr>
-              <a:defRPr sz="800">
-                <a:solidFill>
-                  <a:srgbClr val="6B7585"/>
-                </a:solidFill>
-              </a:defRPr>
-            </a:lvl1pPr>
-          </a:lstStyle>
-          <a:p>
-            <a:pPr algn="r"/>
-            <a:fld id="{F7021451-1387-4CA6-816F-3879F97B5CBC}" type="slidenum">
-              <a:rPr lang="en-US" b="0"/>
-              <a:t>14</a:t>
-            </a:fld>
-            <a:endParaRPr lang="en-US"/>
-          </a:p>
-        </p:txBody>
-      </p:sp>
-      <p:pic>
-        <p:nvPicPr>
-          <p:cNvPr id="26" name="cts logo" descr="cts-logo.png"/>
-          <p:cNvPicPr>
-            <a:picLocks noChangeAspect="1"/>
-          </p:cNvPicPr>
-          <p:nvPr/>
-        </p:nvPicPr>
-        <p:blipFill>
-          <a:blip r:embed="rId4"/>
-          <a:stretch>
-            <a:fillRect/>
-          </a:stretch>
-        </p:blipFill>
-        <p:spPr>
-          <a:xfrm>
-            <a:off x="7680959" y="182880"/>
-            <a:ext cx="960120" cy="539696"/>
-          </a:xfrm>
-          <a:prstGeom prst="rect">
-            <a:avLst/>
-          </a:prstGeom>
-        </p:spPr>
-      </p:pic>
-      <p:sp>
-        <p:nvSpPr>
-          <p:cNvPr id="8" name="Text 5b"/>
-          <p:cNvSpPr txBox="1"/>
-          <p:nvPr/>
-        </p:nvSpPr>
-        <p:spPr>
-          <a:xfrm>
-            <a:off x="4663440" y="3478049"/>
-            <a:ext cx="3703320" cy="1121382"/>
-          </a:xfrm>
-          <a:prstGeom prst="rect">
-            <a:avLst/>
-          </a:prstGeom>
-          <a:noFill/>
-          <a:ln/>
-        </p:spPr>
-        <p:txBody>
-          <a:bodyPr wrap="square" lIns="0" tIns="0" rIns="0" bIns="0" rtlCol="0" anchor="t">
-            <a:normAutofit fontScale="92500"/>
-          </a:bodyPr>
-          <a:lstStyle/>
-          <a:p>
-            <a:pPr marL="342900" indent="-342900">
-              <a:lnSpc>
-                <a:spcPts val="1050"/>
-              </a:lnSpc>
-              <a:spcAft>
-                <a:spcPts val="400"/>
-              </a:spcAft>
-              <a:buSzPct val="100000"/>
-              <a:buChar char="•"/>
-            </a:pPr>
-            <a:r>
-              <a:rPr lang="en-US" sz="1000">
-                <a:solidFill>
-                  <a:srgbClr val="3A4453"/>
-                </a:solidFill>
-              </a:rPr>
-              <a:t>Events delivered $73k revenue against a $66k budget.</a:t>
-            </a:r>
-            <a:endParaRPr lang="en-US" sz="850"/>
-          </a:p>
-          <a:p>
-            <a:pPr marL="342900" indent="-342900">
-              <a:lnSpc>
-                <a:spcPts val="1050"/>
-              </a:lnSpc>
-              <a:spcAft>
-                <a:spcPts val="400"/>
-              </a:spcAft>
-              <a:buSzPct val="100000"/>
-              <a:buChar char="•"/>
-            </a:pPr>
-            <a:r>
-              <a:rPr lang="en-US" sz="1000">
-                <a:solidFill>
-                  <a:srgbClr val="3A4453"/>
-                </a:solidFill>
-              </a:rPr>
-              <a:t>Video recorded $7k against $17k, and Consulting $4k against $23k. Both remain below budget for the third consecutive month.</a:t>
-            </a:r>
-            <a:endParaRPr lang="en-US" sz="850"/>
-          </a:p>
-          <a:p>
-            <a:pPr marL="342900" indent="-342900">
-              <a:lnSpc>
-                <a:spcPts val="1050"/>
-              </a:lnSpc>
-              <a:spcAft>
-                <a:spcPts val="400"/>
-              </a:spcAft>
-              <a:buSzPct val="100000"/>
-              <a:buChar char="•"/>
-            </a:pPr>
-            <a:r>
-              <a:rPr lang="en-US" sz="1000">
-                <a:solidFill>
-                  <a:srgbClr val="3A4453"/>
-                </a:solidFill>
-              </a:rPr>
-              <a:t>Total revenue increased 58% against September last year, although the gross margin percentage declined.</a:t>
-            </a:r>
-            <a:endParaRPr lang="en-US" sz="850"/>
           </a:p>
         </p:txBody>
       </p:sp>
@@ -10624,6 +10590,412 @@
 
 <file path=ppt/slides/slide20.xml><?xml version="1.0" encoding="utf-8"?>
 <p:sld xmlns:a="http://schemas.openxmlformats.org/drawingml/2006/main" xmlns:r="http://schemas.openxmlformats.org/officeDocument/2006/relationships" xmlns:p="http://schemas.openxmlformats.org/presentationml/2006/main">
+  <p:cSld name="Slide 14">
+    <p:spTree>
+      <p:nvGrpSpPr>
+        <p:cNvPr id="1" name=""/>
+        <p:cNvGrpSpPr/>
+        <p:nvPr/>
+      </p:nvGrpSpPr>
+      <p:grpSpPr>
+        <a:xfrm>
+          <a:off x="0" y="0"/>
+          <a:ext cx="0" cy="0"/>
+          <a:chOff x="0" y="0"/>
+          <a:chExt cx="0" cy="0"/>
+        </a:xfrm>
+      </p:grpSpPr>
+      <p:pic>
+        <p:nvPicPr>
+          <p:cNvPr id="27" name="snip rev_by_dept" descr="image.png"/>
+          <p:cNvPicPr>
+            <a:picLocks noChangeAspect="1"/>
+          </p:cNvPicPr>
+          <p:nvPr/>
+        </p:nvPicPr>
+        <p:blipFill>
+          <a:blip r:embed="rId3"/>
+          <a:stretch>
+            <a:fillRect/>
+          </a:stretch>
+        </p:blipFill>
+        <p:spPr>
+          <a:xfrm>
+            <a:off x="2234229" y="1115568"/>
+            <a:ext cx="4675541" cy="2005865"/>
+          </a:xfrm>
+          <a:prstGeom prst="rect">
+            <a:avLst/>
+          </a:prstGeom>
+        </p:spPr>
+      </p:pic>
+      <p:sp>
+        <p:nvSpPr>
+          <p:cNvPr id="2" name="Text 0"/>
+          <p:cNvSpPr txBox="1"/>
+          <p:nvPr/>
+        </p:nvSpPr>
+        <p:spPr>
+          <a:xfrm>
+            <a:off x="502920" y="365760"/>
+            <a:ext cx="6400800" cy="274320"/>
+          </a:xfrm>
+          <a:prstGeom prst="rect">
+            <a:avLst/>
+          </a:prstGeom>
+          <a:noFill/>
+          <a:ln/>
+        </p:spPr>
+        <p:txBody>
+          <a:bodyPr wrap="square" lIns="0" tIns="0" rIns="0" bIns="0" rtlCol="0" anchor="ctr"/>
+          <a:lstStyle/>
+          <a:p>
+            <a:pPr marL="0" indent="0">
+              <a:buNone/>
+            </a:pPr>
+            <a:r>
+              <a:rPr lang="en-US" sz="950" b="1" kern="0" spc="220">
+                <a:solidFill>
+                  <a:srgbClr val="122B82"/>
+                </a:solidFill>
+              </a:rPr>
+              <a:t>FINANCIAL PERFORMANCE</a:t>
+            </a:r>
+            <a:endParaRPr lang="en-US" sz="950"/>
+          </a:p>
+        </p:txBody>
+      </p:sp>
+      <p:sp>
+        <p:nvSpPr>
+          <p:cNvPr id="3" name="Text 1"/>
+          <p:cNvSpPr txBox="1"/>
+          <p:nvPr/>
+        </p:nvSpPr>
+        <p:spPr>
+          <a:xfrm>
+            <a:off x="502920" y="640080"/>
+            <a:ext cx="7315200" cy="685800"/>
+          </a:xfrm>
+          <a:prstGeom prst="rect">
+            <a:avLst/>
+          </a:prstGeom>
+          <a:noFill/>
+          <a:ln/>
+        </p:spPr>
+        <p:txBody>
+          <a:bodyPr wrap="square" lIns="0" tIns="0" rIns="0" bIns="0" rtlCol="0" anchor="ctr"/>
+          <a:lstStyle/>
+          <a:p>
+            <a:pPr marL="0" indent="0">
+              <a:buNone/>
+            </a:pPr>
+            <a:r>
+              <a:rPr lang="en-US" sz="2200" b="1">
+                <a:solidFill>
+                  <a:srgbClr val="242C39"/>
+                </a:solidFill>
+              </a:rPr>
+              <a:t>Revenue against budget and last year</a:t>
+            </a:r>
+            <a:endParaRPr lang="en-US" sz="2700"/>
+          </a:p>
+        </p:txBody>
+      </p:sp>
+      <p:sp>
+        <p:nvSpPr>
+          <p:cNvPr id="6" name="commentary panel"/>
+          <p:cNvSpPr/>
+          <p:nvPr/>
+        </p:nvSpPr>
+        <p:spPr>
+          <a:xfrm>
+            <a:off x="502920" y="3231161"/>
+            <a:ext cx="8138160" cy="1395702"/>
+          </a:xfrm>
+          <a:prstGeom prst="rect">
+            <a:avLst/>
+          </a:prstGeom>
+          <a:solidFill>
+            <a:srgbClr val="E8F9F8"/>
+          </a:solidFill>
+          <a:ln/>
+        </p:spPr>
+        <p:txBody>
+          <a:bodyPr/>
+          <a:lstStyle/>
+          <a:p>
+            <a:endParaRPr lang="en-AU"/>
+          </a:p>
+        </p:txBody>
+      </p:sp>
+      <p:sp>
+        <p:nvSpPr>
+          <p:cNvPr id="7" name="Text 4"/>
+          <p:cNvSpPr txBox="1"/>
+          <p:nvPr/>
+        </p:nvSpPr>
+        <p:spPr>
+          <a:xfrm>
+            <a:off x="685800" y="3304313"/>
+            <a:ext cx="2743200" cy="228600"/>
+          </a:xfrm>
+          <a:prstGeom prst="rect">
+            <a:avLst/>
+          </a:prstGeom>
+          <a:noFill/>
+          <a:ln/>
+        </p:spPr>
+        <p:txBody>
+          <a:bodyPr wrap="square" lIns="0" tIns="0" rIns="0" bIns="0" rtlCol="0" anchor="ctr"/>
+          <a:lstStyle/>
+          <a:p>
+            <a:pPr marL="0" indent="0">
+              <a:buNone/>
+            </a:pPr>
+            <a:r>
+              <a:rPr lang="en-US" sz="900" b="1" kern="0" spc="180">
+                <a:solidFill>
+                  <a:srgbClr val="005358"/>
+                </a:solidFill>
+              </a:rPr>
+              <a:t>COMMENTARY</a:t>
+            </a:r>
+            <a:endParaRPr lang="en-US" sz="900"/>
+          </a:p>
+        </p:txBody>
+      </p:sp>
+      <p:sp>
+        <p:nvSpPr>
+          <p:cNvPr id="8" name="Text 5"/>
+          <p:cNvSpPr txBox="1"/>
+          <p:nvPr/>
+        </p:nvSpPr>
+        <p:spPr>
+          <a:xfrm>
+            <a:off x="685800" y="3478049"/>
+            <a:ext cx="3703320" cy="1121382"/>
+          </a:xfrm>
+          <a:prstGeom prst="rect">
+            <a:avLst/>
+          </a:prstGeom>
+          <a:noFill/>
+          <a:ln/>
+        </p:spPr>
+        <p:txBody>
+          <a:bodyPr wrap="square" lIns="0" tIns="0" rIns="0" bIns="0" rtlCol="0" anchor="t">
+            <a:normAutofit fontScale="92500"/>
+          </a:bodyPr>
+          <a:lstStyle/>
+          <a:p>
+            <a:pPr marL="342900" indent="-342900">
+              <a:lnSpc>
+                <a:spcPts val="1050"/>
+              </a:lnSpc>
+              <a:spcAft>
+                <a:spcPts val="400"/>
+              </a:spcAft>
+              <a:buSzPct val="100000"/>
+              <a:buChar char="•"/>
+            </a:pPr>
+            <a:r>
+              <a:rPr lang="en-US" sz="1000">
+                <a:solidFill>
+                  <a:srgbClr val="3A4453"/>
+                </a:solidFill>
+              </a:rPr>
+              <a:t>Integration generated $235k revenue against a $59k budget, mainly from a completed installation project. This result may not recur in October.</a:t>
+            </a:r>
+            <a:endParaRPr lang="en-US" sz="850"/>
+          </a:p>
+          <a:p>
+            <a:pPr marL="342900" indent="-342900">
+              <a:lnSpc>
+                <a:spcPts val="1050"/>
+              </a:lnSpc>
+              <a:spcAft>
+                <a:spcPts val="400"/>
+              </a:spcAft>
+              <a:buSzPct val="100000"/>
+              <a:buChar char="•"/>
+            </a:pPr>
+            <a:r>
+              <a:rPr lang="en-US" sz="1000">
+                <a:solidFill>
+                  <a:srgbClr val="3A4453"/>
+                </a:solidFill>
+              </a:rPr>
+              <a:t>Support recorded $243k revenue against a $248k budget, remaining broadly in line with recurring contracts.</a:t>
+            </a:r>
+            <a:endParaRPr lang="en-US" sz="850"/>
+          </a:p>
+        </p:txBody>
+      </p:sp>
+      <p:sp>
+        <p:nvSpPr>
+          <p:cNvPr id="25" name="Slide Number Placeholder 0"/>
+          <p:cNvSpPr>
+            <a:spLocks noGrp="1"/>
+          </p:cNvSpPr>
+          <p:nvPr>
+            <p:ph type="sldNum" sz="quarter" idx="4294967295"/>
+          </p:nvPr>
+        </p:nvSpPr>
+        <p:spPr>
+          <a:xfrm>
+            <a:off x="8092440" y="4736592"/>
+            <a:ext cx="548640" cy="228600"/>
+          </a:xfrm>
+          <a:prstGeom prst="rect">
+            <a:avLst/>
+          </a:prstGeom>
+          <a:extLst>
+            <a:ext uri="{C572A759-6A51-4108-AA02-DFA0A04FC94B}">
+              <ma14:wrappingTextBoxFlag xmlns:ma14="http://schemas.microsoft.com/office/mac/drawingml/2011/main" xmlns="" val="0"/>
+            </a:ext>
+          </a:extLst>
+        </p:spPr>
+        <p:txBody>
+          <a:bodyPr/>
+          <a:lstStyle>
+            <a:lvl1pPr>
+              <a:defRPr sz="800">
+                <a:solidFill>
+                  <a:srgbClr val="6B7585"/>
+                </a:solidFill>
+              </a:defRPr>
+            </a:lvl1pPr>
+          </a:lstStyle>
+          <a:p>
+            <a:pPr algn="r"/>
+            <a:fld id="{F7021451-1387-4CA6-816F-3879F97B5CBC}" type="slidenum">
+              <a:rPr lang="en-US" b="0"/>
+              <a:t>14</a:t>
+            </a:fld>
+            <a:endParaRPr lang="en-US"/>
+          </a:p>
+        </p:txBody>
+      </p:sp>
+      <p:pic>
+        <p:nvPicPr>
+          <p:cNvPr id="26" name="cts logo" descr="cts-logo.png"/>
+          <p:cNvPicPr>
+            <a:picLocks noChangeAspect="1"/>
+          </p:cNvPicPr>
+          <p:nvPr/>
+        </p:nvPicPr>
+        <p:blipFill>
+          <a:blip r:embed="rId4"/>
+          <a:stretch>
+            <a:fillRect/>
+          </a:stretch>
+        </p:blipFill>
+        <p:spPr>
+          <a:xfrm>
+            <a:off x="7680959" y="182880"/>
+            <a:ext cx="960120" cy="539696"/>
+          </a:xfrm>
+          <a:prstGeom prst="rect">
+            <a:avLst/>
+          </a:prstGeom>
+        </p:spPr>
+      </p:pic>
+      <p:sp>
+        <p:nvSpPr>
+          <p:cNvPr id="8" name="Text 5b"/>
+          <p:cNvSpPr txBox="1"/>
+          <p:nvPr/>
+        </p:nvSpPr>
+        <p:spPr>
+          <a:xfrm>
+            <a:off x="4663440" y="3478049"/>
+            <a:ext cx="3703320" cy="1121382"/>
+          </a:xfrm>
+          <a:prstGeom prst="rect">
+            <a:avLst/>
+          </a:prstGeom>
+          <a:noFill/>
+          <a:ln/>
+        </p:spPr>
+        <p:txBody>
+          <a:bodyPr wrap="square" lIns="0" tIns="0" rIns="0" bIns="0" rtlCol="0" anchor="t">
+            <a:normAutofit fontScale="92500"/>
+          </a:bodyPr>
+          <a:lstStyle/>
+          <a:p>
+            <a:pPr marL="342900" indent="-342900">
+              <a:lnSpc>
+                <a:spcPts val="1050"/>
+              </a:lnSpc>
+              <a:spcAft>
+                <a:spcPts val="400"/>
+              </a:spcAft>
+              <a:buSzPct val="100000"/>
+              <a:buChar char="•"/>
+            </a:pPr>
+            <a:r>
+              <a:rPr lang="en-US" sz="1000">
+                <a:solidFill>
+                  <a:srgbClr val="3A4453"/>
+                </a:solidFill>
+              </a:rPr>
+              <a:t>Events delivered $73k revenue against a $66k budget.</a:t>
+            </a:r>
+            <a:endParaRPr lang="en-US" sz="850"/>
+          </a:p>
+          <a:p>
+            <a:pPr marL="342900" indent="-342900">
+              <a:lnSpc>
+                <a:spcPts val="1050"/>
+              </a:lnSpc>
+              <a:spcAft>
+                <a:spcPts val="400"/>
+              </a:spcAft>
+              <a:buSzPct val="100000"/>
+              <a:buChar char="•"/>
+            </a:pPr>
+            <a:r>
+              <a:rPr lang="en-US" sz="1000">
+                <a:solidFill>
+                  <a:srgbClr val="3A4453"/>
+                </a:solidFill>
+              </a:rPr>
+              <a:t>Video recorded $7k against $17k, and Consulting $4k against $23k. Both remain below budget for the third consecutive month.</a:t>
+            </a:r>
+            <a:endParaRPr lang="en-US" sz="850"/>
+          </a:p>
+          <a:p>
+            <a:pPr marL="342900" indent="-342900">
+              <a:lnSpc>
+                <a:spcPts val="1050"/>
+              </a:lnSpc>
+              <a:spcAft>
+                <a:spcPts val="400"/>
+              </a:spcAft>
+              <a:buSzPct val="100000"/>
+              <a:buChar char="•"/>
+            </a:pPr>
+            <a:r>
+              <a:rPr lang="en-US" sz="1000">
+                <a:solidFill>
+                  <a:srgbClr val="3A4453"/>
+                </a:solidFill>
+              </a:rPr>
+              <a:t>Total revenue increased 58% against September last year, although the gross margin percentage declined.</a:t>
+            </a:r>
+            <a:endParaRPr lang="en-US" sz="850"/>
+          </a:p>
+        </p:txBody>
+      </p:sp>
+    </p:spTree>
+  </p:cSld>
+  <p:clrMapOvr>
+    <a:masterClrMapping/>
+  </p:clrMapOvr>
+</p:sld>
+</file>
+
+<file path=ppt/slides/slide21.xml><?xml version="1.0" encoding="utf-8"?>
+<p:sld xmlns:a="http://schemas.openxmlformats.org/drawingml/2006/main" xmlns:r="http://schemas.openxmlformats.org/officeDocument/2006/relationships" xmlns:p="http://schemas.openxmlformats.org/presentationml/2006/main">
   <p:cSld name="Slide 15">
     <p:spTree>
       <p:nvGrpSpPr>
@@ -10905,7 +11277,7 @@
 </p:sld>
 </file>
 
-<file path=ppt/slides/slide21.xml><?xml version="1.0" encoding="utf-8"?>
+<file path=ppt/slides/slide22.xml><?xml version="1.0" encoding="utf-8"?>
 <p:sld xmlns:a="http://schemas.openxmlformats.org/drawingml/2006/main" xmlns:r="http://schemas.openxmlformats.org/officeDocument/2006/relationships" xmlns:p="http://schemas.openxmlformats.org/presentationml/2006/main">
   <p:cSld name="Slide 16">
     <p:spTree>
@@ -11287,7 +11659,7 @@
 </p:sld>
 </file>
 
-<file path=ppt/slides/slide22.xml><?xml version="1.0" encoding="utf-8"?>
+<file path=ppt/slides/slide23.xml><?xml version="1.0" encoding="utf-8"?>
 <p:sld xmlns:a="http://schemas.openxmlformats.org/drawingml/2006/main" xmlns:r="http://schemas.openxmlformats.org/officeDocument/2006/relationships" xmlns:p="http://schemas.openxmlformats.org/presentationml/2006/main">
   <p:cSld name="Slide 17">
     <p:spTree>
@@ -11669,7 +12041,7 @@
 </p:sld>
 </file>
 
-<file path=ppt/slides/slide23.xml><?xml version="1.0" encoding="utf-8"?>
+<file path=ppt/slides/slide24.xml><?xml version="1.0" encoding="utf-8"?>
 <p:sld xmlns:a="http://schemas.openxmlformats.org/drawingml/2006/main" xmlns:r="http://schemas.openxmlformats.org/officeDocument/2006/relationships" xmlns:p="http://schemas.openxmlformats.org/presentationml/2006/main">
   <p:cSld name="Slide 18">
     <p:spTree>
@@ -12051,7 +12423,7 @@
 </p:sld>
 </file>
 
-<file path=ppt/slides/slide24.xml><?xml version="1.0" encoding="utf-8"?>
+<file path=ppt/slides/slide25.xml><?xml version="1.0" encoding="utf-8"?>
 <p:sld xmlns:a="http://schemas.openxmlformats.org/drawingml/2006/main" xmlns:r="http://schemas.openxmlformats.org/officeDocument/2006/relationships" xmlns:p="http://schemas.openxmlformats.org/presentationml/2006/main">
   <p:cSld name="Slide 19">
     <p:spTree>
@@ -12436,7 +12808,7 @@
 </p:sld>
 </file>
 
-<file path=ppt/slides/slide25.xml><?xml version="1.0" encoding="utf-8"?>
+<file path=ppt/slides/slide26.xml><?xml version="1.0" encoding="utf-8"?>
 <p:sld xmlns:a="http://schemas.openxmlformats.org/drawingml/2006/main" xmlns:r="http://schemas.openxmlformats.org/officeDocument/2006/relationships" xmlns:p="http://schemas.openxmlformats.org/presentationml/2006/main">
   <p:cSld name="Slide 20">
     <p:spTree>
@@ -12719,7 +13091,7 @@
 </p:sld>
 </file>
 
-<file path=ppt/slides/slide26.xml><?xml version="1.0" encoding="utf-8"?>
+<file path=ppt/slides/slide27.xml><?xml version="1.0" encoding="utf-8"?>
 <p:sld xmlns:a="http://schemas.openxmlformats.org/drawingml/2006/main" xmlns:r="http://schemas.openxmlformats.org/officeDocument/2006/relationships" xmlns:p="http://schemas.openxmlformats.org/presentationml/2006/main">
   <p:cSld name="Slide 21">
     <p:spTree>
@@ -13101,7 +13473,7 @@
 </p:sld>
 </file>
 
-<file path=ppt/slides/slide27.xml><?xml version="1.0" encoding="utf-8"?>
+<file path=ppt/slides/slide28.xml><?xml version="1.0" encoding="utf-8"?>
 <p:sld xmlns:a="http://schemas.openxmlformats.org/drawingml/2006/main" xmlns:r="http://schemas.openxmlformats.org/officeDocument/2006/relationships" xmlns:p="http://schemas.openxmlformats.org/presentationml/2006/main">
   <p:cSld name="Slide 22">
     <p:spTree>
@@ -13483,7 +13855,7 @@
 </p:sld>
 </file>
 
-<file path=ppt/slides/slide28.xml><?xml version="1.0" encoding="utf-8"?>
+<file path=ppt/slides/slide29.xml><?xml version="1.0" encoding="utf-8"?>
 <p:sld xmlns:a="http://schemas.openxmlformats.org/drawingml/2006/main" xmlns:r="http://schemas.openxmlformats.org/officeDocument/2006/relationships" xmlns:p="http://schemas.openxmlformats.org/presentationml/2006/main">
   <p:cSld name="Slide 23">
     <p:spTree>
@@ -13857,289 +14229,6 @@
           </a:prstGeom>
         </p:spPr>
       </p:pic>
-    </p:spTree>
-  </p:cSld>
-  <p:clrMapOvr>
-    <a:masterClrMapping/>
-  </p:clrMapOvr>
-</p:sld>
-</file>
-
-<file path=ppt/slides/slide29.xml><?xml version="1.0" encoding="utf-8"?>
-<p:sld xmlns:a="http://schemas.openxmlformats.org/drawingml/2006/main" xmlns:r="http://schemas.openxmlformats.org/officeDocument/2006/relationships" xmlns:p="http://schemas.openxmlformats.org/presentationml/2006/main">
-  <p:cSld name="Slide 24">
-    <p:spTree>
-      <p:nvGrpSpPr>
-        <p:cNvPr id="1" name=""/>
-        <p:cNvGrpSpPr/>
-        <p:nvPr/>
-      </p:nvGrpSpPr>
-      <p:grpSpPr>
-        <a:xfrm>
-          <a:off x="0" y="0"/>
-          <a:ext cx="0" cy="0"/>
-          <a:chOff x="0" y="0"/>
-          <a:chExt cx="0" cy="0"/>
-        </a:xfrm>
-      </p:grpSpPr>
-      <p:sp>
-        <p:nvSpPr>
-          <p:cNvPr id="2" name="dot 2"/>
-          <p:cNvSpPr/>
-          <p:nvPr/>
-        </p:nvSpPr>
-        <p:spPr>
-          <a:xfrm>
-            <a:off x="7178040" y="2057400"/>
-            <a:ext cx="2240280" cy="2240280"/>
-          </a:xfrm>
-          <a:prstGeom prst="ellipse">
-            <a:avLst/>
-          </a:prstGeom>
-          <a:solidFill>
-            <a:srgbClr val="F33844">
-              <a:alpha val="55000"/>
-            </a:srgbClr>
-          </a:solidFill>
-          <a:ln/>
-        </p:spPr>
-        <p:txBody>
-          <a:bodyPr/>
-          <a:lstStyle/>
-          <a:p>
-            <a:endParaRPr lang="en-AU"/>
-          </a:p>
-        </p:txBody>
-      </p:sp>
-      <p:sp>
-        <p:nvSpPr>
-          <p:cNvPr id="2" name="dot 1"/>
-          <p:cNvSpPr/>
-          <p:nvPr/>
-        </p:nvSpPr>
-        <p:spPr>
-          <a:xfrm>
-            <a:off x="7909560" y="1188720"/>
-            <a:ext cx="1783080" cy="1783080"/>
-          </a:xfrm>
-          <a:prstGeom prst="ellipse">
-            <a:avLst/>
-          </a:prstGeom>
-          <a:solidFill>
-            <a:srgbClr val="6D71FF">
-              <a:alpha val="55000"/>
-            </a:srgbClr>
-          </a:solidFill>
-          <a:ln/>
-        </p:spPr>
-        <p:txBody>
-          <a:bodyPr/>
-          <a:lstStyle/>
-          <a:p>
-            <a:endParaRPr lang="en-AU"/>
-          </a:p>
-        </p:txBody>
-      </p:sp>
-      <p:sp>
-        <p:nvSpPr>
-          <p:cNvPr id="2" name="dot 0"/>
-          <p:cNvSpPr/>
-          <p:nvPr/>
-        </p:nvSpPr>
-        <p:spPr>
-          <a:xfrm>
-            <a:off x="6949440" y="274320"/>
-            <a:ext cx="2148840" cy="2148840"/>
-          </a:xfrm>
-          <a:prstGeom prst="ellipse">
-            <a:avLst/>
-          </a:prstGeom>
-          <a:solidFill>
-            <a:srgbClr val="3FD0C9">
-              <a:alpha val="55000"/>
-            </a:srgbClr>
-          </a:solidFill>
-          <a:ln/>
-        </p:spPr>
-        <p:txBody>
-          <a:bodyPr/>
-          <a:lstStyle/>
-          <a:p>
-            <a:endParaRPr lang="en-AU"/>
-          </a:p>
-        </p:txBody>
-      </p:sp>
-      <p:sp>
-        <p:nvSpPr>
-          <p:cNvPr id="3" name="Shape 1"/>
-          <p:cNvSpPr/>
-          <p:nvPr/>
-        </p:nvSpPr>
-        <p:spPr>
-          <a:xfrm>
-            <a:off x="502920" y="1874520"/>
-            <a:ext cx="868680" cy="868680"/>
-          </a:xfrm>
-          <a:prstGeom prst="rect">
-            <a:avLst/>
-          </a:prstGeom>
-          <a:solidFill>
-            <a:srgbClr val="3FD0C9"/>
-          </a:solidFill>
-          <a:ln/>
-        </p:spPr>
-        <p:txBody>
-          <a:bodyPr/>
-          <a:lstStyle/>
-          <a:p>
-            <a:endParaRPr lang="en-AU"/>
-          </a:p>
-        </p:txBody>
-      </p:sp>
-      <p:sp>
-        <p:nvSpPr>
-          <p:cNvPr id="4" name="Text 2"/>
-          <p:cNvSpPr txBox="1"/>
-          <p:nvPr/>
-        </p:nvSpPr>
-        <p:spPr>
-          <a:xfrm>
-            <a:off x="502920" y="1874520"/>
-            <a:ext cx="868680" cy="868680"/>
-          </a:xfrm>
-          <a:prstGeom prst="rect">
-            <a:avLst/>
-          </a:prstGeom>
-          <a:noFill/>
-          <a:ln/>
-        </p:spPr>
-        <p:txBody>
-          <a:bodyPr wrap="square" lIns="0" tIns="0" rIns="0" bIns="0" rtlCol="0" anchor="ctr"/>
-          <a:lstStyle/>
-          <a:p>
-            <a:pPr marL="0" indent="0" algn="ctr">
-              <a:buNone/>
-            </a:pPr>
-            <a:r>
-              <a:rPr lang="en-US" sz="2200" b="1">
-                <a:solidFill>
-                  <a:srgbClr val="242C39"/>
-                </a:solidFill>
-              </a:rPr>
-              <a:t>04</a:t>
-            </a:r>
-            <a:endParaRPr lang="en-US" sz="2600"/>
-          </a:p>
-        </p:txBody>
-      </p:sp>
-      <p:sp>
-        <p:nvSpPr>
-          <p:cNvPr id="5" name="Text 3"/>
-          <p:cNvSpPr txBox="1"/>
-          <p:nvPr/>
-        </p:nvSpPr>
-        <p:spPr>
-          <a:xfrm>
-            <a:off x="502920" y="411480"/>
-            <a:ext cx="3657600" cy="274320"/>
-          </a:xfrm>
-          <a:prstGeom prst="rect">
-            <a:avLst/>
-          </a:prstGeom>
-          <a:noFill/>
-          <a:ln/>
-        </p:spPr>
-        <p:txBody>
-          <a:bodyPr wrap="square" lIns="0" tIns="0" rIns="0" bIns="0" rtlCol="0" anchor="ctr"/>
-          <a:lstStyle/>
-          <a:p>
-            <a:pPr marL="0" indent="0">
-              <a:buNone/>
-            </a:pPr>
-            <a:r>
-              <a:rPr lang="en-US" sz="950" b="1" kern="0" spc="220">
-                <a:solidFill>
-                  <a:srgbClr val="3FD0C9"/>
-                </a:solidFill>
-              </a:rPr>
-              <a:t>SECTION</a:t>
-            </a:r>
-            <a:endParaRPr lang="en-US" sz="950"/>
-          </a:p>
-        </p:txBody>
-      </p:sp>
-      <p:sp>
-        <p:nvSpPr>
-          <p:cNvPr id="6" name="Text 4"/>
-          <p:cNvSpPr txBox="1"/>
-          <p:nvPr/>
-        </p:nvSpPr>
-        <p:spPr>
-          <a:xfrm>
-            <a:off x="1600200" y="1874520"/>
-            <a:ext cx="5943600" cy="502920"/>
-          </a:xfrm>
-          <a:prstGeom prst="rect">
-            <a:avLst/>
-          </a:prstGeom>
-          <a:noFill/>
-          <a:ln/>
-        </p:spPr>
-        <p:txBody>
-          <a:bodyPr wrap="square" lIns="0" tIns="0" rIns="0" bIns="0" rtlCol="0" anchor="ctr"/>
-          <a:lstStyle/>
-          <a:p>
-            <a:pPr marL="0" indent="0">
-              <a:buNone/>
-            </a:pPr>
-            <a:r>
-              <a:rPr lang="en-US" sz="2300" b="1">
-                <a:solidFill>
-                  <a:srgbClr val="FFFFFF"/>
-                </a:solidFill>
-              </a:rPr>
-              <a:t>People and utilisation</a:t>
-            </a:r>
-            <a:endParaRPr lang="en-US" sz="2800"/>
-          </a:p>
-        </p:txBody>
-      </p:sp>
-      <p:sp>
-        <p:nvSpPr>
-          <p:cNvPr id="7" name="Text 5"/>
-          <p:cNvSpPr txBox="1"/>
-          <p:nvPr/>
-        </p:nvSpPr>
-        <p:spPr>
-          <a:xfrm>
-            <a:off x="1600200" y="2395728"/>
-            <a:ext cx="5943600" cy="347472"/>
-          </a:xfrm>
-          <a:prstGeom prst="rect">
-            <a:avLst/>
-          </a:prstGeom>
-          <a:noFill/>
-          <a:ln/>
-        </p:spPr>
-        <p:txBody>
-          <a:bodyPr wrap="square" lIns="0" tIns="0" rIns="0" bIns="0" rtlCol="0" anchor="ctr"/>
-          <a:lstStyle/>
-          <a:p>
-            <a:pPr marL="0" indent="0">
-              <a:buNone/>
-            </a:pPr>
-            <a:r>
-              <a:rPr lang="en-US" sz="1200">
-                <a:solidFill>
-                  <a:srgbClr val="C9CED6"/>
-                </a:solidFill>
-              </a:rPr>
-              <a:t>Chargeable hours and the profit they produce</a:t>
-            </a:r>
-            <a:endParaRPr lang="en-US" sz="1200"/>
-          </a:p>
-        </p:txBody>
-      </p:sp>
     </p:spTree>
   </p:cSld>
   <p:clrMapOvr>
@@ -16402,6 +16491,289 @@
 
 <file path=ppt/slides/slide30.xml><?xml version="1.0" encoding="utf-8"?>
 <p:sld xmlns:a="http://schemas.openxmlformats.org/drawingml/2006/main" xmlns:r="http://schemas.openxmlformats.org/officeDocument/2006/relationships" xmlns:p="http://schemas.openxmlformats.org/presentationml/2006/main">
+  <p:cSld name="Slide 24">
+    <p:spTree>
+      <p:nvGrpSpPr>
+        <p:cNvPr id="1" name=""/>
+        <p:cNvGrpSpPr/>
+        <p:nvPr/>
+      </p:nvGrpSpPr>
+      <p:grpSpPr>
+        <a:xfrm>
+          <a:off x="0" y="0"/>
+          <a:ext cx="0" cy="0"/>
+          <a:chOff x="0" y="0"/>
+          <a:chExt cx="0" cy="0"/>
+        </a:xfrm>
+      </p:grpSpPr>
+      <p:sp>
+        <p:nvSpPr>
+          <p:cNvPr id="2" name="dot 2"/>
+          <p:cNvSpPr/>
+          <p:nvPr/>
+        </p:nvSpPr>
+        <p:spPr>
+          <a:xfrm>
+            <a:off x="7178040" y="2057400"/>
+            <a:ext cx="2240280" cy="2240280"/>
+          </a:xfrm>
+          <a:prstGeom prst="ellipse">
+            <a:avLst/>
+          </a:prstGeom>
+          <a:solidFill>
+            <a:srgbClr val="F33844">
+              <a:alpha val="55000"/>
+            </a:srgbClr>
+          </a:solidFill>
+          <a:ln/>
+        </p:spPr>
+        <p:txBody>
+          <a:bodyPr/>
+          <a:lstStyle/>
+          <a:p>
+            <a:endParaRPr lang="en-AU"/>
+          </a:p>
+        </p:txBody>
+      </p:sp>
+      <p:sp>
+        <p:nvSpPr>
+          <p:cNvPr id="2" name="dot 1"/>
+          <p:cNvSpPr/>
+          <p:nvPr/>
+        </p:nvSpPr>
+        <p:spPr>
+          <a:xfrm>
+            <a:off x="7909560" y="1188720"/>
+            <a:ext cx="1783080" cy="1783080"/>
+          </a:xfrm>
+          <a:prstGeom prst="ellipse">
+            <a:avLst/>
+          </a:prstGeom>
+          <a:solidFill>
+            <a:srgbClr val="6D71FF">
+              <a:alpha val="55000"/>
+            </a:srgbClr>
+          </a:solidFill>
+          <a:ln/>
+        </p:spPr>
+        <p:txBody>
+          <a:bodyPr/>
+          <a:lstStyle/>
+          <a:p>
+            <a:endParaRPr lang="en-AU"/>
+          </a:p>
+        </p:txBody>
+      </p:sp>
+      <p:sp>
+        <p:nvSpPr>
+          <p:cNvPr id="2" name="dot 0"/>
+          <p:cNvSpPr/>
+          <p:nvPr/>
+        </p:nvSpPr>
+        <p:spPr>
+          <a:xfrm>
+            <a:off x="6949440" y="274320"/>
+            <a:ext cx="2148840" cy="2148840"/>
+          </a:xfrm>
+          <a:prstGeom prst="ellipse">
+            <a:avLst/>
+          </a:prstGeom>
+          <a:solidFill>
+            <a:srgbClr val="3FD0C9">
+              <a:alpha val="55000"/>
+            </a:srgbClr>
+          </a:solidFill>
+          <a:ln/>
+        </p:spPr>
+        <p:txBody>
+          <a:bodyPr/>
+          <a:lstStyle/>
+          <a:p>
+            <a:endParaRPr lang="en-AU"/>
+          </a:p>
+        </p:txBody>
+      </p:sp>
+      <p:sp>
+        <p:nvSpPr>
+          <p:cNvPr id="3" name="Shape 1"/>
+          <p:cNvSpPr/>
+          <p:nvPr/>
+        </p:nvSpPr>
+        <p:spPr>
+          <a:xfrm>
+            <a:off x="502920" y="1874520"/>
+            <a:ext cx="868680" cy="868680"/>
+          </a:xfrm>
+          <a:prstGeom prst="rect">
+            <a:avLst/>
+          </a:prstGeom>
+          <a:solidFill>
+            <a:srgbClr val="3FD0C9"/>
+          </a:solidFill>
+          <a:ln/>
+        </p:spPr>
+        <p:txBody>
+          <a:bodyPr/>
+          <a:lstStyle/>
+          <a:p>
+            <a:endParaRPr lang="en-AU"/>
+          </a:p>
+        </p:txBody>
+      </p:sp>
+      <p:sp>
+        <p:nvSpPr>
+          <p:cNvPr id="4" name="Text 2"/>
+          <p:cNvSpPr txBox="1"/>
+          <p:nvPr/>
+        </p:nvSpPr>
+        <p:spPr>
+          <a:xfrm>
+            <a:off x="502920" y="1874520"/>
+            <a:ext cx="868680" cy="868680"/>
+          </a:xfrm>
+          <a:prstGeom prst="rect">
+            <a:avLst/>
+          </a:prstGeom>
+          <a:noFill/>
+          <a:ln/>
+        </p:spPr>
+        <p:txBody>
+          <a:bodyPr wrap="square" lIns="0" tIns="0" rIns="0" bIns="0" rtlCol="0" anchor="ctr"/>
+          <a:lstStyle/>
+          <a:p>
+            <a:pPr marL="0" indent="0" algn="ctr">
+              <a:buNone/>
+            </a:pPr>
+            <a:r>
+              <a:rPr lang="en-US" sz="2200" b="1">
+                <a:solidFill>
+                  <a:srgbClr val="242C39"/>
+                </a:solidFill>
+              </a:rPr>
+              <a:t>04</a:t>
+            </a:r>
+            <a:endParaRPr lang="en-US" sz="2600"/>
+          </a:p>
+        </p:txBody>
+      </p:sp>
+      <p:sp>
+        <p:nvSpPr>
+          <p:cNvPr id="5" name="Text 3"/>
+          <p:cNvSpPr txBox="1"/>
+          <p:nvPr/>
+        </p:nvSpPr>
+        <p:spPr>
+          <a:xfrm>
+            <a:off x="502920" y="411480"/>
+            <a:ext cx="3657600" cy="274320"/>
+          </a:xfrm>
+          <a:prstGeom prst="rect">
+            <a:avLst/>
+          </a:prstGeom>
+          <a:noFill/>
+          <a:ln/>
+        </p:spPr>
+        <p:txBody>
+          <a:bodyPr wrap="square" lIns="0" tIns="0" rIns="0" bIns="0" rtlCol="0" anchor="ctr"/>
+          <a:lstStyle/>
+          <a:p>
+            <a:pPr marL="0" indent="0">
+              <a:buNone/>
+            </a:pPr>
+            <a:r>
+              <a:rPr lang="en-US" sz="950" b="1" kern="0" spc="220">
+                <a:solidFill>
+                  <a:srgbClr val="3FD0C9"/>
+                </a:solidFill>
+              </a:rPr>
+              <a:t>SECTION</a:t>
+            </a:r>
+            <a:endParaRPr lang="en-US" sz="950"/>
+          </a:p>
+        </p:txBody>
+      </p:sp>
+      <p:sp>
+        <p:nvSpPr>
+          <p:cNvPr id="6" name="Text 4"/>
+          <p:cNvSpPr txBox="1"/>
+          <p:nvPr/>
+        </p:nvSpPr>
+        <p:spPr>
+          <a:xfrm>
+            <a:off x="1600200" y="1874520"/>
+            <a:ext cx="5943600" cy="502920"/>
+          </a:xfrm>
+          <a:prstGeom prst="rect">
+            <a:avLst/>
+          </a:prstGeom>
+          <a:noFill/>
+          <a:ln/>
+        </p:spPr>
+        <p:txBody>
+          <a:bodyPr wrap="square" lIns="0" tIns="0" rIns="0" bIns="0" rtlCol="0" anchor="ctr"/>
+          <a:lstStyle/>
+          <a:p>
+            <a:pPr marL="0" indent="0">
+              <a:buNone/>
+            </a:pPr>
+            <a:r>
+              <a:rPr lang="en-US" sz="2300" b="1">
+                <a:solidFill>
+                  <a:srgbClr val="FFFFFF"/>
+                </a:solidFill>
+              </a:rPr>
+              <a:t>People and utilisation</a:t>
+            </a:r>
+            <a:endParaRPr lang="en-US" sz="2800"/>
+          </a:p>
+        </p:txBody>
+      </p:sp>
+      <p:sp>
+        <p:nvSpPr>
+          <p:cNvPr id="7" name="Text 5"/>
+          <p:cNvSpPr txBox="1"/>
+          <p:nvPr/>
+        </p:nvSpPr>
+        <p:spPr>
+          <a:xfrm>
+            <a:off x="1600200" y="2395728"/>
+            <a:ext cx="5943600" cy="347472"/>
+          </a:xfrm>
+          <a:prstGeom prst="rect">
+            <a:avLst/>
+          </a:prstGeom>
+          <a:noFill/>
+          <a:ln/>
+        </p:spPr>
+        <p:txBody>
+          <a:bodyPr wrap="square" lIns="0" tIns="0" rIns="0" bIns="0" rtlCol="0" anchor="ctr"/>
+          <a:lstStyle/>
+          <a:p>
+            <a:pPr marL="0" indent="0">
+              <a:buNone/>
+            </a:pPr>
+            <a:r>
+              <a:rPr lang="en-US" sz="1200">
+                <a:solidFill>
+                  <a:srgbClr val="C9CED6"/>
+                </a:solidFill>
+              </a:rPr>
+              <a:t>Chargeable hours and the profit they produce</a:t>
+            </a:r>
+            <a:endParaRPr lang="en-US" sz="1200"/>
+          </a:p>
+        </p:txBody>
+      </p:sp>
+    </p:spTree>
+  </p:cSld>
+  <p:clrMapOvr>
+    <a:masterClrMapping/>
+  </p:clrMapOvr>
+</p:sld>
+</file>
+
+<file path=ppt/slides/slide31.xml><?xml version="1.0" encoding="utf-8"?>
+<p:sld xmlns:a="http://schemas.openxmlformats.org/drawingml/2006/main" xmlns:r="http://schemas.openxmlformats.org/officeDocument/2006/relationships" xmlns:p="http://schemas.openxmlformats.org/presentationml/2006/main">
   <p:cSld name="Slide 25">
     <p:spTree>
       <p:nvGrpSpPr>
@@ -16785,7 +17157,7 @@
 </p:sld>
 </file>
 
-<file path=ppt/slides/slide31.xml><?xml version="1.0" encoding="utf-8"?>
+<file path=ppt/slides/slide32.xml><?xml version="1.0" encoding="utf-8"?>
 <p:sld xmlns:a="http://schemas.openxmlformats.org/drawingml/2006/main" xmlns:r="http://schemas.openxmlformats.org/officeDocument/2006/relationships" xmlns:p="http://schemas.openxmlformats.org/presentationml/2006/main">
   <p:cSld name="Slide 26">
     <p:spTree>
@@ -17167,7 +17539,7 @@
 </p:sld>
 </file>
 
-<file path=ppt/slides/slide32.xml><?xml version="1.0" encoding="utf-8"?>
+<file path=ppt/slides/slide33.xml><?xml version="1.0" encoding="utf-8"?>
 <p:sld xmlns:a="http://schemas.openxmlformats.org/drawingml/2006/main" xmlns:r="http://schemas.openxmlformats.org/officeDocument/2006/relationships" xmlns:p="http://schemas.openxmlformats.org/presentationml/2006/main">
   <p:cSld name="Slide 27">
     <p:spTree>
@@ -17549,7 +17921,7 @@
 </p:sld>
 </file>
 
-<file path=ppt/slides/slide33.xml><?xml version="1.0" encoding="utf-8"?>
+<file path=ppt/slides/slide34.xml><?xml version="1.0" encoding="utf-8"?>
 <p:sld xmlns:a="http://schemas.openxmlformats.org/drawingml/2006/main" xmlns:r="http://schemas.openxmlformats.org/officeDocument/2006/relationships" xmlns:p="http://schemas.openxmlformats.org/presentationml/2006/main">
   <p:cSld name="Slide 28">
     <p:spTree>
@@ -17832,7 +18204,7 @@
 </p:sld>
 </file>
 
-<file path=ppt/slides/slide34.xml><?xml version="1.0" encoding="utf-8"?>
+<file path=ppt/slides/slide35.xml><?xml version="1.0" encoding="utf-8"?>
 <p:sld xmlns:a="http://schemas.openxmlformats.org/drawingml/2006/main" xmlns:r="http://schemas.openxmlformats.org/officeDocument/2006/relationships" xmlns:p="http://schemas.openxmlformats.org/presentationml/2006/main">
   <p:cSld name="Slide 29">
     <p:spTree>
@@ -18214,7 +18586,7 @@
 </p:sld>
 </file>
 
-<file path=ppt/slides/slide35.xml><?xml version="1.0" encoding="utf-8"?>
+<file path=ppt/slides/slide36.xml><?xml version="1.0" encoding="utf-8"?>
 <p:sld xmlns:a="http://schemas.openxmlformats.org/drawingml/2006/main" xmlns:r="http://schemas.openxmlformats.org/officeDocument/2006/relationships" xmlns:p="http://schemas.openxmlformats.org/presentationml/2006/main">
   <p:cSld name="Slide 30">
     <p:spTree>
@@ -20360,7 +20732,7 @@
 </p:sld>
 </file>
 
-<file path=ppt/slides/slide36.xml><?xml version="1.0" encoding="utf-8"?>
+<file path=ppt/slides/slide37.xml><?xml version="1.0" encoding="utf-8"?>
 <p:sld xmlns:a="http://schemas.openxmlformats.org/drawingml/2006/main" xmlns:r="http://schemas.openxmlformats.org/officeDocument/2006/relationships" xmlns:p="http://schemas.openxmlformats.org/presentationml/2006/main">
   <p:cSld>
     <p:bg>
@@ -20736,7 +21108,7 @@
 </p:sld>
 </file>
 
-<file path=ppt/slides/slide37.xml><?xml version="1.0" encoding="utf-8"?>
+<file path=ppt/slides/slide38.xml><?xml version="1.0" encoding="utf-8"?>
 <p:sld xmlns:a="http://schemas.openxmlformats.org/drawingml/2006/main" xmlns:r="http://schemas.openxmlformats.org/officeDocument/2006/relationships" xmlns:p="http://schemas.openxmlformats.org/presentationml/2006/main">
   <p:cSld name="Slide 31">
     <p:spTree>
@@ -20984,384 +21356,6 @@
           </a:p>
         </p:txBody>
       </p:sp>
-    </p:spTree>
-  </p:cSld>
-  <p:clrMapOvr>
-    <a:masterClrMapping/>
-  </p:clrMapOvr>
-</p:sld>
-</file>
-
-<file path=ppt/slides/slide38.xml><?xml version="1.0" encoding="utf-8"?>
-<p:sld xmlns:a="http://schemas.openxmlformats.org/drawingml/2006/main" xmlns:p="http://schemas.openxmlformats.org/presentationml/2006/main" xmlns:r="http://schemas.openxmlformats.org/officeDocument/2006/relationships">
-  <p:cSld>
-    <p:spTree>
-      <p:nvGrpSpPr>
-        <p:cNvPr id="1" name=""/>
-        <p:cNvGrpSpPr/>
-        <p:nvPr/>
-      </p:nvGrpSpPr>
-      <p:grpSpPr/>
-      <p:pic>
-        <p:nvPicPr>
-          <p:cNvPr id="27" name="snip xero_roll" descr="xero_roll.png"/>
-          <p:cNvPicPr>
-            <a:picLocks noChangeAspect="1"/>
-          </p:cNvPicPr>
-          <p:nvPr/>
-        </p:nvPicPr>
-        <p:blipFill>
-          <a:blip r:embed="rId3"/>
-          <a:stretch>
-            <a:fillRect/>
-          </a:stretch>
-        </p:blipFill>
-        <p:spPr>
-          <a:xfrm>
-            <a:off x="1362886" y="1115568"/>
-            <a:ext cx="6418226" cy="2397673"/>
-          </a:xfrm>
-          <a:prstGeom prst="rect">
-            <a:avLst/>
-          </a:prstGeom>
-        </p:spPr>
-      </p:pic>
-      <p:sp>
-        <p:nvSpPr>
-          <p:cNvPr id="2" name="Text 0"/>
-          <p:cNvSpPr txBox="1"/>
-          <p:nvPr/>
-        </p:nvSpPr>
-        <p:spPr>
-          <a:xfrm>
-            <a:off x="502920" y="365760"/>
-            <a:ext cx="6400800" cy="274320"/>
-          </a:xfrm>
-          <a:prstGeom prst="rect">
-            <a:avLst/>
-          </a:prstGeom>
-          <a:noFill/>
-          <a:ln/>
-        </p:spPr>
-        <p:txBody>
-          <a:bodyPr wrap="square" lIns="0" tIns="0" rIns="0" bIns="0" rtlCol="0" anchor="ctr"/>
-          <a:lstStyle/>
-          <a:p>
-            <a:pPr marL="0" indent="0">
-              <a:buNone/>
-            </a:pPr>
-            <a:r>
-              <a:rPr lang="en-US" sz="950" b="1" kern="0" spc="220">
-                <a:solidFill>
-                  <a:srgbClr val="122B82"/>
-                </a:solidFill>
-              </a:rPr>
-              <a:t>FINANCIAL PERFORMANCE</a:t>
-            </a:r>
-            <a:endParaRPr lang="en-US" sz="950"/>
-          </a:p>
-        </p:txBody>
-      </p:sp>
-      <p:sp>
-        <p:nvSpPr>
-          <p:cNvPr id="3" name="Text 1"/>
-          <p:cNvSpPr txBox="1"/>
-          <p:nvPr/>
-        </p:nvSpPr>
-        <p:spPr>
-          <a:xfrm>
-            <a:off x="502920" y="640080"/>
-            <a:ext cx="7315200" cy="685800"/>
-          </a:xfrm>
-          <a:prstGeom prst="rect">
-            <a:avLst/>
-          </a:prstGeom>
-          <a:noFill/>
-          <a:ln/>
-        </p:spPr>
-        <p:txBody>
-          <a:bodyPr wrap="square" lIns="0" tIns="0" rIns="0" bIns="0" rtlCol="0" anchor="ctr"/>
-          <a:lstStyle/>
-          <a:p>
-            <a:pPr marL="0" indent="0">
-              <a:buNone/>
-            </a:pPr>
-            <a:r>
-              <a:rPr lang="en-US" sz="2200" b="1">
-                <a:solidFill>
-                  <a:srgbClr val="242C39"/>
-                </a:solidFill>
-              </a:rPr>
-              <a:t>Revenue, rolling twelve months</a:t>
-            </a:r>
-            <a:endParaRPr lang="en-US" sz="2700"/>
-          </a:p>
-        </p:txBody>
-      </p:sp>
-      <p:sp>
-        <p:nvSpPr>
-          <p:cNvPr id="6" name="commentary panel"/>
-          <p:cNvSpPr/>
-          <p:nvPr/>
-        </p:nvSpPr>
-        <p:spPr>
-          <a:xfrm>
-            <a:off x="502920" y="3622969"/>
-            <a:ext cx="8138160" cy="1003894"/>
-          </a:xfrm>
-          <a:prstGeom prst="rect">
-            <a:avLst/>
-          </a:prstGeom>
-          <a:solidFill>
-            <a:srgbClr val="E8F9F8"/>
-          </a:solidFill>
-          <a:ln/>
-        </p:spPr>
-        <p:txBody>
-          <a:bodyPr/>
-          <a:lstStyle/>
-          <a:p>
-            <a:endParaRPr lang="en-AU"/>
-          </a:p>
-        </p:txBody>
-      </p:sp>
-      <p:sp>
-        <p:nvSpPr>
-          <p:cNvPr id="7" name="Text 4"/>
-          <p:cNvSpPr txBox="1"/>
-          <p:nvPr/>
-        </p:nvSpPr>
-        <p:spPr>
-          <a:xfrm>
-            <a:off x="685800" y="3696121"/>
-            <a:ext cx="2743200" cy="228600"/>
-          </a:xfrm>
-          <a:prstGeom prst="rect">
-            <a:avLst/>
-          </a:prstGeom>
-          <a:noFill/>
-          <a:ln/>
-        </p:spPr>
-        <p:txBody>
-          <a:bodyPr wrap="square" lIns="0" tIns="0" rIns="0" bIns="0" rtlCol="0" anchor="ctr"/>
-          <a:lstStyle/>
-          <a:p>
-            <a:pPr marL="0" indent="0">
-              <a:buNone/>
-            </a:pPr>
-            <a:r>
-              <a:rPr lang="en-US" sz="900" b="1" kern="0" spc="180">
-                <a:solidFill>
-                  <a:srgbClr val="005358"/>
-                </a:solidFill>
-              </a:rPr>
-              <a:t>COMMENTARY</a:t>
-            </a:r>
-            <a:endParaRPr lang="en-US" sz="900"/>
-          </a:p>
-        </p:txBody>
-      </p:sp>
-      <p:sp>
-        <p:nvSpPr>
-          <p:cNvPr id="8" name="Text 5"/>
-          <p:cNvSpPr txBox="1"/>
-          <p:nvPr/>
-        </p:nvSpPr>
-        <p:spPr>
-          <a:xfrm>
-            <a:off x="685800" y="3869857"/>
-            <a:ext cx="3703320" cy="729574"/>
-          </a:xfrm>
-          <a:prstGeom prst="rect">
-            <a:avLst/>
-          </a:prstGeom>
-          <a:noFill/>
-          <a:ln/>
-        </p:spPr>
-        <p:txBody>
-          <a:bodyPr wrap="square" lIns="0" tIns="0" rIns="0" bIns="0" rtlCol="0" anchor="t">
-            <a:normAutofit fontScale="85000" lnSpcReduction="10000"/>
-          </a:bodyPr>
-          <a:lstStyle/>
-          <a:p>
-            <a:pPr marL="342900" indent="-342900">
-              <a:lnSpc>
-                <a:spcPts val="1050"/>
-              </a:lnSpc>
-              <a:spcAft>
-                <a:spcPts val="400"/>
-              </a:spcAft>
-              <a:buSzPct val="100000"/>
-              <a:buChar char="•"/>
-            </a:pPr>
-            <a:r>
-              <a:rPr lang="en-US" sz="1000">
-                <a:solidFill>
-                  <a:srgbClr val="3A4453"/>
-                </a:solidFill>
-              </a:rPr>
-              <a:t>The twelve months to September 2026 billed $6,509k.</a:t>
-            </a:r>
-            <a:endParaRPr lang="en-US" sz="850"/>
-          </a:p>
-          <a:p>
-            <a:pPr marL="342900" indent="-342900">
-              <a:lnSpc>
-                <a:spcPts val="1050"/>
-              </a:lnSpc>
-              <a:spcAft>
-                <a:spcPts val="400"/>
-              </a:spcAft>
-              <a:buSzPct val="100000"/>
-              <a:buChar char="•"/>
-            </a:pPr>
-            <a:r>
-              <a:rPr lang="en-US" sz="1000">
-                <a:solidFill>
-                  <a:srgbClr val="3A4453"/>
-                </a:solidFill>
-              </a:rPr>
-              <a:t>The peak was $7,000k in June 2025. The trough was $5,817k in January 2026, a fall of 17%.</a:t>
-            </a:r>
-            <a:endParaRPr lang="en-US" sz="850"/>
-          </a:p>
-        </p:txBody>
-      </p:sp>
-      <p:sp>
-        <p:nvSpPr>
-          <p:cNvPr id="25" name="Slide Number Placeholder 0"/>
-          <p:cNvSpPr>
-            <a:spLocks noGrp="1"/>
-          </p:cNvSpPr>
-          <p:nvPr>
-            <p:ph type="sldNum" sz="quarter" idx="4294967295"/>
-          </p:nvPr>
-        </p:nvSpPr>
-        <p:spPr>
-          <a:xfrm>
-            <a:off x="8092440" y="4736592"/>
-            <a:ext cx="548640" cy="228600"/>
-          </a:xfrm>
-          <a:prstGeom prst="rect">
-            <a:avLst/>
-          </a:prstGeom>
-          <a:extLst>
-            <a:ext uri="{C572A759-6A51-4108-AA02-DFA0A04FC94B}">
-              <ma14:wrappingTextBoxFlag xmlns:ma14="http://schemas.microsoft.com/office/mac/drawingml/2011/main" xmlns="" val="0"/>
-            </a:ext>
-          </a:extLst>
-        </p:spPr>
-        <p:txBody>
-          <a:bodyPr/>
-          <a:lstStyle>
-            <a:lvl1pPr>
-              <a:defRPr sz="800">
-                <a:solidFill>
-                  <a:srgbClr val="6B7585"/>
-                </a:solidFill>
-              </a:defRPr>
-            </a:lvl1pPr>
-          </a:lstStyle>
-          <a:p>
-            <a:pPr algn="r"/>
-            <a:fld id="{F7021451-1387-4CA6-816F-3879F97B5CBC}" type="slidenum">
-              <a:rPr lang="en-US" b="0"/>
-              <a:t>16</a:t>
-            </a:fld>
-            <a:endParaRPr lang="en-US"/>
-          </a:p>
-        </p:txBody>
-      </p:sp>
-      <p:sp>
-        <p:nvSpPr>
-          <p:cNvPr id="8" name="Text 5b"/>
-          <p:cNvSpPr txBox="1"/>
-          <p:nvPr/>
-        </p:nvSpPr>
-        <p:spPr>
-          <a:xfrm>
-            <a:off x="4663440" y="3869857"/>
-            <a:ext cx="3703320" cy="729574"/>
-          </a:xfrm>
-          <a:prstGeom prst="rect">
-            <a:avLst/>
-          </a:prstGeom>
-          <a:noFill/>
-          <a:ln/>
-        </p:spPr>
-        <p:txBody>
-          <a:bodyPr wrap="square" lIns="0" tIns="0" rIns="0" bIns="0" rtlCol="0" anchor="t">
-            <a:normAutofit fontScale="85000" lnSpcReduction="10000"/>
-          </a:bodyPr>
-          <a:lstStyle/>
-          <a:p>
-            <a:pPr marL="342900" indent="-342900">
-              <a:lnSpc>
-                <a:spcPts val="1050"/>
-              </a:lnSpc>
-              <a:spcAft>
-                <a:spcPts val="400"/>
-              </a:spcAft>
-              <a:buSzPct val="100000"/>
-              <a:buChar char="•"/>
-            </a:pPr>
-            <a:r>
-              <a:rPr lang="en-US" sz="1000">
-                <a:solidFill>
-                  <a:srgbClr val="3A4453"/>
-                </a:solidFill>
-              </a:rPr>
-              <a:t>The trend has turned up since January and has recovered $692k of that, about 12%.</a:t>
-            </a:r>
-            <a:endParaRPr lang="en-US" sz="850"/>
-          </a:p>
-          <a:p>
-            <a:pPr marL="342900" indent="-342900">
-              <a:lnSpc>
-                <a:spcPts val="1050"/>
-              </a:lnSpc>
-              <a:spcAft>
-                <a:spcPts val="400"/>
-              </a:spcAft>
-              <a:buSzPct val="100000"/>
-              <a:buChar char="•"/>
-            </a:pPr>
-            <a:r>
-              <a:rPr lang="en-US" sz="1000">
-                <a:solidFill>
-                  <a:srgbClr val="3A4453"/>
-                </a:solidFill>
-              </a:rPr>
-              <a:t>It is still $491k or 7% below the peak. The recovery is real but it is not finished.</a:t>
-            </a:r>
-            <a:endParaRPr lang="en-US" sz="850"/>
-          </a:p>
-        </p:txBody>
-      </p:sp>
-      <p:pic>
-        <p:nvPicPr>
-          <p:cNvPr id="26" name="cts logo" descr="image.png"/>
-          <p:cNvPicPr>
-            <a:picLocks noChangeAspect="1"/>
-          </p:cNvPicPr>
-          <p:nvPr/>
-        </p:nvPicPr>
-        <p:blipFill>
-          <a:blip r:embed="rId2"/>
-          <a:stretch>
-            <a:fillRect/>
-          </a:stretch>
-        </p:blipFill>
-        <p:spPr>
-          <a:xfrm>
-            <a:off x="7680959" y="182880"/>
-            <a:ext cx="960120" cy="539696"/>
-          </a:xfrm>
-          <a:prstGeom prst="rect">
-            <a:avLst/>
-          </a:prstGeom>
-        </p:spPr>
-      </p:pic>
     </p:spTree>
   </p:cSld>
   <p:clrMapOvr>

--- a/deck/CTS Monthly Business Review - 30092026.pptx
+++ b/deck/CTS Monthly Business Review - 30092026.pptx
@@ -11140,102 +11140,102 @@
           <a:chExt cx="0" cy="0"/>
         </a:xfrm>
       </p:grpSpPr>
-      <p:sp>
-        <p:nvSpPr>
-          <p:cNvPr id="2" name="Text 0"/>
-          <p:cNvSpPr txBox="1"/>
-          <p:nvPr/>
-        </p:nvSpPr>
-        <p:spPr>
-          <a:xfrm>
-            <a:off x="502920" y="365760"/>
-            <a:ext cx="6400800" cy="274320"/>
-          </a:xfrm>
-          <a:prstGeom prst="rect">
-            <a:avLst/>
-          </a:prstGeom>
-          <a:noFill/>
-          <a:ln/>
-        </p:spPr>
-        <p:txBody>
-          <a:bodyPr wrap="square" lIns="0" tIns="0" rIns="0" bIns="0" rtlCol="0" anchor="ctr"/>
-          <a:lstStyle/>
-          <a:p>
-            <a:pPr marL="0" indent="0">
-              <a:buNone/>
-            </a:pPr>
-            <a:r>
-              <a:rPr lang="en-US" sz="950" b="1" kern="0" spc="220">
-                <a:solidFill>
-                  <a:srgbClr val="122B82"/>
-                </a:solidFill>
-              </a:rPr>
-              <a:t>WHAT WE SPEND</a:t>
-            </a:r>
-            <a:endParaRPr lang="en-US" sz="950"/>
-          </a:p>
-        </p:txBody>
-      </p:sp>
-      <p:sp>
-        <p:nvSpPr>
-          <p:cNvPr id="3" name="Text 1"/>
-          <p:cNvSpPr txBox="1"/>
-          <p:nvPr/>
-        </p:nvSpPr>
-        <p:spPr>
-          <a:xfrm>
-            <a:off x="502920" y="640080"/>
-            <a:ext cx="7315200" cy="365760"/>
-          </a:xfrm>
-          <a:prstGeom prst="rect">
-            <a:avLst/>
-          </a:prstGeom>
-          <a:noFill/>
-          <a:ln/>
-        </p:spPr>
-        <p:txBody>
-          <a:bodyPr wrap="square" lIns="0" tIns="0" rIns="0" bIns="0" rtlCol="0" anchor="ctr"/>
-          <a:lstStyle/>
-          <a:p>
-            <a:pPr marL="0" indent="0" algn="ctr">
-              <a:buNone/>
-            </a:pPr>
-            <a:r>
-              <a:rPr lang="en-US" sz="2200" b="1">
-                <a:solidFill>
-                  <a:srgbClr val="242C39"/>
-                </a:solidFill>
-              </a:rPr>
-              <a:t>Operating cost distribution, year to date</a:t>
-            </a:r>
-            <a:endParaRPr lang="en-US" sz="2700"/>
-          </a:p>
-        </p:txBody>
-      </p:sp>
       <p:pic>
         <p:nvPicPr>
-          <p:cNvPr id="4" name="snip cost_dist" descr="/home/user/Claude/deck/snips/cost_dist.png"/>
+          <p:cNvPr id="27" name="snip cost_dist" descr="cost_dist.png"/>
           <p:cNvPicPr>
             <a:picLocks noChangeAspect="1"/>
           </p:cNvPicPr>
           <p:nvPr/>
         </p:nvPicPr>
         <p:blipFill>
-          <a:blip r:embed="rId3"/>
+          <a:blip r:embed="rId5"/>
           <a:stretch>
             <a:fillRect/>
           </a:stretch>
         </p:blipFill>
         <p:spPr>
           <a:xfrm>
-            <a:off x="502920" y="1444752"/>
-            <a:ext cx="4617719" cy="2335216"/>
+            <a:off x="2632893" y="1005840"/>
+            <a:ext cx="3878213" cy="1964998"/>
           </a:xfrm>
           <a:prstGeom prst="rect">
             <a:avLst/>
           </a:prstGeom>
         </p:spPr>
       </p:pic>
+      <p:sp>
+        <p:nvSpPr>
+          <p:cNvPr id="2" name="Text 0"/>
+          <p:cNvSpPr txBox="1"/>
+          <p:nvPr/>
+        </p:nvSpPr>
+        <p:spPr>
+          <a:xfrm>
+            <a:off x="502920" y="365760"/>
+            <a:ext cx="6400800" cy="274320"/>
+          </a:xfrm>
+          <a:prstGeom prst="rect">
+            <a:avLst/>
+          </a:prstGeom>
+          <a:noFill/>
+          <a:ln/>
+        </p:spPr>
+        <p:txBody>
+          <a:bodyPr wrap="square" lIns="0" tIns="0" rIns="0" bIns="0" rtlCol="0" anchor="ctr"/>
+          <a:lstStyle/>
+          <a:p>
+            <a:pPr marL="0" indent="0">
+              <a:buNone/>
+            </a:pPr>
+            <a:r>
+              <a:rPr lang="en-US" sz="950" b="1" kern="0" spc="220">
+                <a:solidFill>
+                  <a:srgbClr val="122B82"/>
+                </a:solidFill>
+              </a:rPr>
+              <a:t>WHAT WE SPEND</a:t>
+            </a:r>
+            <a:endParaRPr lang="en-US" sz="950"/>
+          </a:p>
+        </p:txBody>
+      </p:sp>
+      <p:sp>
+        <p:nvSpPr>
+          <p:cNvPr id="3" name="Text 1"/>
+          <p:cNvSpPr txBox="1"/>
+          <p:nvPr/>
+        </p:nvSpPr>
+        <p:spPr>
+          <a:xfrm>
+            <a:off x="502920" y="640080"/>
+            <a:ext cx="7315200" cy="365760"/>
+          </a:xfrm>
+          <a:prstGeom prst="rect">
+            <a:avLst/>
+          </a:prstGeom>
+          <a:noFill/>
+          <a:ln/>
+        </p:spPr>
+        <p:txBody>
+          <a:bodyPr wrap="square" lIns="0" tIns="0" rIns="0" bIns="0" rtlCol="0" anchor="ctr"/>
+          <a:lstStyle/>
+          <a:p>
+            <a:pPr marL="0" indent="0" algn="ctr">
+              <a:buNone/>
+            </a:pPr>
+            <a:r>
+              <a:rPr lang="en-US" sz="2200" b="1">
+                <a:solidFill>
+                  <a:srgbClr val="242C39"/>
+                </a:solidFill>
+              </a:rPr>
+              <a:t>Operating cost distribution, year to date</a:t>
+            </a:r>
+            <a:endParaRPr lang="en-US" sz="2700"/>
+          </a:p>
+        </p:txBody>
+      </p:sp>
       <p:sp>
         <p:nvSpPr>
           <p:cNvPr id="6" name="commentary panel"/>
@@ -11244,8 +11244,8 @@
         </p:nvSpPr>
         <p:spPr>
           <a:xfrm>
-            <a:off x="5349239" y="1463040"/>
-            <a:ext cx="3291840" cy="3154680"/>
+            <a:off x="502920" y="3062278"/>
+            <a:ext cx="8138160" cy="1564585"/>
           </a:xfrm>
           <a:prstGeom prst="rect">
             <a:avLst/>
@@ -11271,8 +11271,8 @@
         </p:nvSpPr>
         <p:spPr>
           <a:xfrm>
-            <a:off x="5532119" y="1627632"/>
-            <a:ext cx="2926080" cy="228600"/>
+            <a:off x="685800" y="3135430"/>
+            <a:ext cx="2743200" cy="228600"/>
           </a:xfrm>
           <a:prstGeom prst="rect">
             <a:avLst/>
@@ -11307,8 +11307,8 @@
         </p:nvSpPr>
         <p:spPr>
           <a:xfrm>
-            <a:off x="5532119" y="1901952"/>
-            <a:ext cx="2926080" cy="2706623"/>
+            <a:off x="685800" y="3309166"/>
+            <a:ext cx="3703320" cy="1290265"/>
           </a:xfrm>
           <a:prstGeom prst="rect">
             <a:avLst/>
@@ -11363,6 +11363,99 @@
             </a:r>
             <a:endParaRPr lang="en-US" sz="850"/>
           </a:p>
+        </p:txBody>
+      </p:sp>
+      <p:sp>
+        <p:nvSpPr>
+          <p:cNvPr id="25" name="Slide Number Placeholder 0"/>
+          <p:cNvSpPr>
+            <a:spLocks noGrp="1"/>
+          </p:cNvSpPr>
+          <p:nvPr>
+            <p:ph type="sldNum" sz="quarter" idx="4294967295"/>
+          </p:nvPr>
+        </p:nvSpPr>
+        <p:spPr>
+          <a:xfrm>
+            <a:off x="8092440" y="4736592"/>
+            <a:ext cx="548640" cy="228600"/>
+          </a:xfrm>
+          <a:prstGeom prst="rect">
+            <a:avLst/>
+          </a:prstGeom>
+          <a:extLst>
+            <a:ext uri="{C572A759-6A51-4108-AA02-DFA0A04FC94B}">
+              <ma14:wrappingTextBoxFlag xmlns="" xmlns:ma14="http://schemas.microsoft.com/office/mac/drawingml/2011/main" val="0"/>
+            </a:ext>
+          </a:extLst>
+        </p:spPr>
+        <p:txBody>
+          <a:bodyPr/>
+          <a:lstStyle>
+            <a:lvl1pPr>
+              <a:defRPr sz="800">
+                <a:solidFill>
+                  <a:srgbClr val="6B7585"/>
+                </a:solidFill>
+              </a:defRPr>
+            </a:lvl1pPr>
+          </a:lstStyle>
+          <a:p>
+            <a:pPr algn="r"/>
+            <a:fld id="{F7021451-1387-4CA6-816F-3879F97B5CBC}" type="slidenum">
+              <a:rPr lang="en-US" b="0"/>
+              <a:t>21</a:t>
+            </a:fld>
+            <a:endParaRPr lang="en-US"/>
+          </a:p>
+        </p:txBody>
+      </p:sp>
+      <p:pic>
+        <p:nvPicPr>
+          <p:cNvPr id="26" name="cts logo" descr="cts-logo.png"/>
+          <p:cNvPicPr>
+            <a:picLocks noChangeAspect="1"/>
+          </p:cNvPicPr>
+          <p:nvPr/>
+        </p:nvPicPr>
+        <p:blipFill>
+          <a:blip r:embed="rId4"/>
+          <a:stretch>
+            <a:fillRect/>
+          </a:stretch>
+        </p:blipFill>
+        <p:spPr>
+          <a:xfrm>
+            <a:off x="7680959" y="182880"/>
+            <a:ext cx="960120" cy="539696"/>
+          </a:xfrm>
+          <a:prstGeom prst="rect">
+            <a:avLst/>
+          </a:prstGeom>
+        </p:spPr>
+      </p:pic>
+      <p:sp>
+        <p:nvSpPr>
+          <p:cNvPr id="8" name="Text 5b"/>
+          <p:cNvSpPr txBox="1"/>
+          <p:nvPr/>
+        </p:nvSpPr>
+        <p:spPr>
+          <a:xfrm>
+            <a:off x="4663440" y="3309166"/>
+            <a:ext cx="3703320" cy="1290265"/>
+          </a:xfrm>
+          <a:prstGeom prst="rect">
+            <a:avLst/>
+          </a:prstGeom>
+          <a:noFill/>
+          <a:ln/>
+        </p:spPr>
+        <p:txBody>
+          <a:bodyPr wrap="square" lIns="0" tIns="0" rIns="0" bIns="0" rtlCol="0" anchor="t">
+            <a:normAutofit fontScale="85000" lnSpcReduction="10000"/>
+          </a:bodyPr>
+          <a:lstStyle/>
           <a:p>
             <a:pPr marL="342900" indent="-342900">
               <a:lnSpc>
@@ -11428,75 +11521,6 @@
           </a:p>
         </p:txBody>
       </p:sp>
-      <p:sp>
-        <p:nvSpPr>
-          <p:cNvPr id="25" name="Slide Number Placeholder 0"/>
-          <p:cNvSpPr>
-            <a:spLocks noGrp="1"/>
-          </p:cNvSpPr>
-          <p:nvPr>
-            <p:ph type="sldNum" sz="quarter" idx="4294967295"/>
-          </p:nvPr>
-        </p:nvSpPr>
-        <p:spPr>
-          <a:xfrm>
-            <a:off x="8092440" y="4736592"/>
-            <a:ext cx="548640" cy="228600"/>
-          </a:xfrm>
-          <a:prstGeom prst="rect">
-            <a:avLst/>
-          </a:prstGeom>
-          <a:extLst>
-            <a:ext uri="{C572A759-6A51-4108-AA02-DFA0A04FC94B}">
-              <ma14:wrappingTextBoxFlag xmlns="" xmlns:ma14="http://schemas.microsoft.com/office/mac/drawingml/2011/main" val="0"/>
-            </a:ext>
-          </a:extLst>
-        </p:spPr>
-        <p:txBody>
-          <a:bodyPr/>
-          <a:lstStyle>
-            <a:lvl1pPr>
-              <a:defRPr sz="800">
-                <a:solidFill>
-                  <a:srgbClr val="6B7585"/>
-                </a:solidFill>
-              </a:defRPr>
-            </a:lvl1pPr>
-          </a:lstStyle>
-          <a:p>
-            <a:pPr algn="r"/>
-            <a:fld id="{F7021451-1387-4CA6-816F-3879F97B5CBC}" type="slidenum">
-              <a:rPr lang="en-US" b="0"/>
-              <a:t>21</a:t>
-            </a:fld>
-            <a:endParaRPr lang="en-US"/>
-          </a:p>
-        </p:txBody>
-      </p:sp>
-      <p:pic>
-        <p:nvPicPr>
-          <p:cNvPr id="26" name="cts logo" descr="cts-logo.png"/>
-          <p:cNvPicPr>
-            <a:picLocks noChangeAspect="1"/>
-          </p:cNvPicPr>
-          <p:nvPr/>
-        </p:nvPicPr>
-        <p:blipFill>
-          <a:blip r:embed="rId4"/>
-          <a:stretch>
-            <a:fillRect/>
-          </a:stretch>
-        </p:blipFill>
-        <p:spPr>
-          <a:xfrm>
-            <a:off x="7680959" y="182880"/>
-            <a:ext cx="960120" cy="539696"/>
-          </a:xfrm>
-          <a:prstGeom prst="rect">
-            <a:avLst/>
-          </a:prstGeom>
-        </p:spPr>
-      </p:pic>
     </p:spTree>
   </p:cSld>
   <p:clrMapOvr>
@@ -11522,102 +11546,102 @@
           <a:chExt cx="0" cy="0"/>
         </a:xfrm>
       </p:grpSpPr>
-      <p:sp>
-        <p:nvSpPr>
-          <p:cNvPr id="2" name="Text 0"/>
-          <p:cNvSpPr txBox="1"/>
-          <p:nvPr/>
-        </p:nvSpPr>
-        <p:spPr>
-          <a:xfrm>
-            <a:off x="502920" y="365760"/>
-            <a:ext cx="6400800" cy="274320"/>
-          </a:xfrm>
-          <a:prstGeom prst="rect">
-            <a:avLst/>
-          </a:prstGeom>
-          <a:noFill/>
-          <a:ln/>
-        </p:spPr>
-        <p:txBody>
-          <a:bodyPr wrap="square" lIns="0" tIns="0" rIns="0" bIns="0" rtlCol="0" anchor="ctr"/>
-          <a:lstStyle/>
-          <a:p>
-            <a:pPr marL="0" indent="0">
-              <a:buNone/>
-            </a:pPr>
-            <a:r>
-              <a:rPr lang="en-US" sz="950" b="1" kern="0" spc="220">
-                <a:solidFill>
-                  <a:srgbClr val="122B82"/>
-                </a:solidFill>
-              </a:rPr>
-              <a:t>WHAT WE SPEND</a:t>
-            </a:r>
-            <a:endParaRPr lang="en-US" sz="950"/>
-          </a:p>
-        </p:txBody>
-      </p:sp>
-      <p:sp>
-        <p:nvSpPr>
-          <p:cNvPr id="3" name="Text 1"/>
-          <p:cNvSpPr txBox="1"/>
-          <p:nvPr/>
-        </p:nvSpPr>
-        <p:spPr>
-          <a:xfrm>
-            <a:off x="502920" y="640080"/>
-            <a:ext cx="7315200" cy="365760"/>
-          </a:xfrm>
-          <a:prstGeom prst="rect">
-            <a:avLst/>
-          </a:prstGeom>
-          <a:noFill/>
-          <a:ln/>
-        </p:spPr>
-        <p:txBody>
-          <a:bodyPr wrap="square" lIns="0" tIns="0" rIns="0" bIns="0" rtlCol="0" anchor="ctr"/>
-          <a:lstStyle/>
-          <a:p>
-            <a:pPr marL="0" indent="0" algn="ctr">
-              <a:buNone/>
-            </a:pPr>
-            <a:r>
-              <a:rPr lang="en-US" sz="2200" b="1">
-                <a:solidFill>
-                  <a:srgbClr val="242C39"/>
-                </a:solidFill>
-              </a:rPr>
-              <a:t>Other operating expenses, year to date</a:t>
-            </a:r>
-            <a:endParaRPr lang="en-US" sz="2700"/>
-          </a:p>
-        </p:txBody>
-      </p:sp>
       <p:pic>
         <p:nvPicPr>
-          <p:cNvPr id="4" name="snip other_opex" descr="/home/user/Claude/deck/snips/other_opex.png"/>
+          <p:cNvPr id="27" name="snip other_opex" descr="other_opex.png"/>
           <p:cNvPicPr>
             <a:picLocks noChangeAspect="1"/>
           </p:cNvPicPr>
           <p:nvPr/>
         </p:nvPicPr>
         <p:blipFill>
-          <a:blip r:embed="rId3"/>
+          <a:blip r:embed="rId5"/>
           <a:stretch>
             <a:fillRect/>
           </a:stretch>
         </p:blipFill>
         <p:spPr>
           <a:xfrm>
-            <a:off x="502920" y="1444752"/>
-            <a:ext cx="5349239" cy="2463947"/>
+            <a:off x="2264619" y="1005840"/>
+            <a:ext cx="4614760" cy="2133881"/>
           </a:xfrm>
           <a:prstGeom prst="rect">
             <a:avLst/>
           </a:prstGeom>
         </p:spPr>
       </p:pic>
+      <p:sp>
+        <p:nvSpPr>
+          <p:cNvPr id="2" name="Text 0"/>
+          <p:cNvSpPr txBox="1"/>
+          <p:nvPr/>
+        </p:nvSpPr>
+        <p:spPr>
+          <a:xfrm>
+            <a:off x="502920" y="365760"/>
+            <a:ext cx="6400800" cy="274320"/>
+          </a:xfrm>
+          <a:prstGeom prst="rect">
+            <a:avLst/>
+          </a:prstGeom>
+          <a:noFill/>
+          <a:ln/>
+        </p:spPr>
+        <p:txBody>
+          <a:bodyPr wrap="square" lIns="0" tIns="0" rIns="0" bIns="0" rtlCol="0" anchor="ctr"/>
+          <a:lstStyle/>
+          <a:p>
+            <a:pPr marL="0" indent="0">
+              <a:buNone/>
+            </a:pPr>
+            <a:r>
+              <a:rPr lang="en-US" sz="950" b="1" kern="0" spc="220">
+                <a:solidFill>
+                  <a:srgbClr val="122B82"/>
+                </a:solidFill>
+              </a:rPr>
+              <a:t>WHAT WE SPEND</a:t>
+            </a:r>
+            <a:endParaRPr lang="en-US" sz="950"/>
+          </a:p>
+        </p:txBody>
+      </p:sp>
+      <p:sp>
+        <p:nvSpPr>
+          <p:cNvPr id="3" name="Text 1"/>
+          <p:cNvSpPr txBox="1"/>
+          <p:nvPr/>
+        </p:nvSpPr>
+        <p:spPr>
+          <a:xfrm>
+            <a:off x="502920" y="640080"/>
+            <a:ext cx="7315200" cy="365760"/>
+          </a:xfrm>
+          <a:prstGeom prst="rect">
+            <a:avLst/>
+          </a:prstGeom>
+          <a:noFill/>
+          <a:ln/>
+        </p:spPr>
+        <p:txBody>
+          <a:bodyPr wrap="square" lIns="0" tIns="0" rIns="0" bIns="0" rtlCol="0" anchor="ctr"/>
+          <a:lstStyle/>
+          <a:p>
+            <a:pPr marL="0" indent="0" algn="ctr">
+              <a:buNone/>
+            </a:pPr>
+            <a:r>
+              <a:rPr lang="en-US" sz="2200" b="1">
+                <a:solidFill>
+                  <a:srgbClr val="242C39"/>
+                </a:solidFill>
+              </a:rPr>
+              <a:t>Other operating expenses, year to date</a:t>
+            </a:r>
+            <a:endParaRPr lang="en-US" sz="2700"/>
+          </a:p>
+        </p:txBody>
+      </p:sp>
       <p:sp>
         <p:nvSpPr>
           <p:cNvPr id="6" name="commentary panel"/>
@@ -11626,8 +11650,8 @@
         </p:nvSpPr>
         <p:spPr>
           <a:xfrm>
-            <a:off x="6080759" y="1463040"/>
-            <a:ext cx="2560320" cy="3154680"/>
+            <a:off x="502920" y="3231161"/>
+            <a:ext cx="8138160" cy="1395702"/>
           </a:xfrm>
           <a:prstGeom prst="rect">
             <a:avLst/>
@@ -11653,8 +11677,8 @@
         </p:nvSpPr>
         <p:spPr>
           <a:xfrm>
-            <a:off x="6263639" y="1627632"/>
-            <a:ext cx="2194560" cy="228600"/>
+            <a:off x="685800" y="3304313"/>
+            <a:ext cx="2743200" cy="228600"/>
           </a:xfrm>
           <a:prstGeom prst="rect">
             <a:avLst/>
@@ -11689,8 +11713,8 @@
         </p:nvSpPr>
         <p:spPr>
           <a:xfrm>
-            <a:off x="6263639" y="1901952"/>
-            <a:ext cx="2194560" cy="2706623"/>
+            <a:off x="685800" y="3478049"/>
+            <a:ext cx="3703320" cy="1121382"/>
           </a:xfrm>
           <a:prstGeom prst="rect">
             <a:avLst/>
@@ -11745,6 +11769,99 @@
             </a:r>
             <a:endParaRPr lang="en-US" sz="900"/>
           </a:p>
+        </p:txBody>
+      </p:sp>
+      <p:sp>
+        <p:nvSpPr>
+          <p:cNvPr id="25" name="Slide Number Placeholder 0"/>
+          <p:cNvSpPr>
+            <a:spLocks noGrp="1"/>
+          </p:cNvSpPr>
+          <p:nvPr>
+            <p:ph type="sldNum" sz="quarter" idx="4294967295"/>
+          </p:nvPr>
+        </p:nvSpPr>
+        <p:spPr>
+          <a:xfrm>
+            <a:off x="8092440" y="4736592"/>
+            <a:ext cx="548640" cy="228600"/>
+          </a:xfrm>
+          <a:prstGeom prst="rect">
+            <a:avLst/>
+          </a:prstGeom>
+          <a:extLst>
+            <a:ext uri="{C572A759-6A51-4108-AA02-DFA0A04FC94B}">
+              <ma14:wrappingTextBoxFlag xmlns="" xmlns:ma14="http://schemas.microsoft.com/office/mac/drawingml/2011/main" val="0"/>
+            </a:ext>
+          </a:extLst>
+        </p:spPr>
+        <p:txBody>
+          <a:bodyPr/>
+          <a:lstStyle>
+            <a:lvl1pPr>
+              <a:defRPr sz="800">
+                <a:solidFill>
+                  <a:srgbClr val="6B7585"/>
+                </a:solidFill>
+              </a:defRPr>
+            </a:lvl1pPr>
+          </a:lstStyle>
+          <a:p>
+            <a:pPr algn="r"/>
+            <a:fld id="{F7021451-1387-4CA6-816F-3879F97B5CBC}" type="slidenum">
+              <a:rPr lang="en-US" b="0"/>
+              <a:t>22</a:t>
+            </a:fld>
+            <a:endParaRPr lang="en-US"/>
+          </a:p>
+        </p:txBody>
+      </p:sp>
+      <p:pic>
+        <p:nvPicPr>
+          <p:cNvPr id="26" name="cts logo" descr="cts-logo.png"/>
+          <p:cNvPicPr>
+            <a:picLocks noChangeAspect="1"/>
+          </p:cNvPicPr>
+          <p:nvPr/>
+        </p:nvPicPr>
+        <p:blipFill>
+          <a:blip r:embed="rId4"/>
+          <a:stretch>
+            <a:fillRect/>
+          </a:stretch>
+        </p:blipFill>
+        <p:spPr>
+          <a:xfrm>
+            <a:off x="7680959" y="182880"/>
+            <a:ext cx="960120" cy="539696"/>
+          </a:xfrm>
+          <a:prstGeom prst="rect">
+            <a:avLst/>
+          </a:prstGeom>
+        </p:spPr>
+      </p:pic>
+      <p:sp>
+        <p:nvSpPr>
+          <p:cNvPr id="8" name="Text 5b"/>
+          <p:cNvSpPr txBox="1"/>
+          <p:nvPr/>
+        </p:nvSpPr>
+        <p:spPr>
+          <a:xfrm>
+            <a:off x="4663440" y="3478049"/>
+            <a:ext cx="3703320" cy="1121382"/>
+          </a:xfrm>
+          <a:prstGeom prst="rect">
+            <a:avLst/>
+          </a:prstGeom>
+          <a:noFill/>
+          <a:ln/>
+        </p:spPr>
+        <p:txBody>
+          <a:bodyPr wrap="square" lIns="0" tIns="0" rIns="0" bIns="0" rtlCol="0" anchor="t">
+            <a:normAutofit/>
+          </a:bodyPr>
+          <a:lstStyle/>
           <a:p>
             <a:pPr marL="342900" indent="-342900">
               <a:lnSpc>
@@ -11810,75 +11927,6 @@
           </a:p>
         </p:txBody>
       </p:sp>
-      <p:sp>
-        <p:nvSpPr>
-          <p:cNvPr id="25" name="Slide Number Placeholder 0"/>
-          <p:cNvSpPr>
-            <a:spLocks noGrp="1"/>
-          </p:cNvSpPr>
-          <p:nvPr>
-            <p:ph type="sldNum" sz="quarter" idx="4294967295"/>
-          </p:nvPr>
-        </p:nvSpPr>
-        <p:spPr>
-          <a:xfrm>
-            <a:off x="8092440" y="4736592"/>
-            <a:ext cx="548640" cy="228600"/>
-          </a:xfrm>
-          <a:prstGeom prst="rect">
-            <a:avLst/>
-          </a:prstGeom>
-          <a:extLst>
-            <a:ext uri="{C572A759-6A51-4108-AA02-DFA0A04FC94B}">
-              <ma14:wrappingTextBoxFlag xmlns="" xmlns:ma14="http://schemas.microsoft.com/office/mac/drawingml/2011/main" val="0"/>
-            </a:ext>
-          </a:extLst>
-        </p:spPr>
-        <p:txBody>
-          <a:bodyPr/>
-          <a:lstStyle>
-            <a:lvl1pPr>
-              <a:defRPr sz="800">
-                <a:solidFill>
-                  <a:srgbClr val="6B7585"/>
-                </a:solidFill>
-              </a:defRPr>
-            </a:lvl1pPr>
-          </a:lstStyle>
-          <a:p>
-            <a:pPr algn="r"/>
-            <a:fld id="{F7021451-1387-4CA6-816F-3879F97B5CBC}" type="slidenum">
-              <a:rPr lang="en-US" b="0"/>
-              <a:t>22</a:t>
-            </a:fld>
-            <a:endParaRPr lang="en-US"/>
-          </a:p>
-        </p:txBody>
-      </p:sp>
-      <p:pic>
-        <p:nvPicPr>
-          <p:cNvPr id="26" name="cts logo" descr="cts-logo.png"/>
-          <p:cNvPicPr>
-            <a:picLocks noChangeAspect="1"/>
-          </p:cNvPicPr>
-          <p:nvPr/>
-        </p:nvPicPr>
-        <p:blipFill>
-          <a:blip r:embed="rId4"/>
-          <a:stretch>
-            <a:fillRect/>
-          </a:stretch>
-        </p:blipFill>
-        <p:spPr>
-          <a:xfrm>
-            <a:off x="7680959" y="182880"/>
-            <a:ext cx="960120" cy="539696"/>
-          </a:xfrm>
-          <a:prstGeom prst="rect">
-            <a:avLst/>
-          </a:prstGeom>
-        </p:spPr>
-      </p:pic>
     </p:spTree>
   </p:cSld>
   <p:clrMapOvr>
@@ -11904,102 +11952,102 @@
           <a:chExt cx="0" cy="0"/>
         </a:xfrm>
       </p:grpSpPr>
-      <p:sp>
-        <p:nvSpPr>
-          <p:cNvPr id="2" name="Text 0"/>
-          <p:cNvSpPr txBox="1"/>
-          <p:nvPr/>
-        </p:nvSpPr>
-        <p:spPr>
-          <a:xfrm>
-            <a:off x="502920" y="365760"/>
-            <a:ext cx="6400800" cy="274320"/>
-          </a:xfrm>
-          <a:prstGeom prst="rect">
-            <a:avLst/>
-          </a:prstGeom>
-          <a:noFill/>
-          <a:ln/>
-        </p:spPr>
-        <p:txBody>
-          <a:bodyPr wrap="square" lIns="0" tIns="0" rIns="0" bIns="0" rtlCol="0" anchor="ctr"/>
-          <a:lstStyle/>
-          <a:p>
-            <a:pPr marL="0" indent="0">
-              <a:buNone/>
-            </a:pPr>
-            <a:r>
-              <a:rPr lang="en-US" sz="950" b="1" kern="0" spc="220">
-                <a:solidFill>
-                  <a:srgbClr val="122B82"/>
-                </a:solidFill>
-              </a:rPr>
-              <a:t>WHAT WE SPEND</a:t>
-            </a:r>
-            <a:endParaRPr lang="en-US" sz="950"/>
-          </a:p>
-        </p:txBody>
-      </p:sp>
-      <p:sp>
-        <p:nvSpPr>
-          <p:cNvPr id="3" name="Text 1"/>
-          <p:cNvSpPr txBox="1"/>
-          <p:nvPr/>
-        </p:nvSpPr>
-        <p:spPr>
-          <a:xfrm>
-            <a:off x="502920" y="640080"/>
-            <a:ext cx="7315200" cy="365760"/>
-          </a:xfrm>
-          <a:prstGeom prst="rect">
-            <a:avLst/>
-          </a:prstGeom>
-          <a:noFill/>
-          <a:ln/>
-        </p:spPr>
-        <p:txBody>
-          <a:bodyPr wrap="square" lIns="0" tIns="0" rIns="0" bIns="0" rtlCol="0" anchor="ctr"/>
-          <a:lstStyle/>
-          <a:p>
-            <a:pPr marL="0" indent="0" algn="ctr">
-              <a:buNone/>
-            </a:pPr>
-            <a:r>
-              <a:rPr lang="en-US" sz="2200" b="1">
-                <a:solidFill>
-                  <a:srgbClr val="242C39"/>
-                </a:solidFill>
-              </a:rPr>
-              <a:t>Labour mix, year to date</a:t>
-            </a:r>
-            <a:endParaRPr lang="en-US" sz="2700"/>
-          </a:p>
-        </p:txBody>
-      </p:sp>
       <p:pic>
         <p:nvPicPr>
-          <p:cNvPr id="4" name="snip labour_mix" descr="/home/user/Claude/deck/snips/labour_mix.png"/>
+          <p:cNvPr id="27" name="snip labour_mix" descr="labour_mix.png"/>
           <p:cNvPicPr>
             <a:picLocks noChangeAspect="1"/>
           </p:cNvPicPr>
           <p:nvPr/>
         </p:nvPicPr>
         <p:blipFill>
-          <a:blip r:embed="rId3"/>
+          <a:blip r:embed="rId5"/>
           <a:stretch>
             <a:fillRect/>
           </a:stretch>
         </p:blipFill>
         <p:spPr>
           <a:xfrm>
-            <a:off x="502920" y="1444752"/>
-            <a:ext cx="4892039" cy="2912327"/>
+            <a:off x="2783712" y="1005840"/>
+            <a:ext cx="3576575" cy="2133881"/>
           </a:xfrm>
           <a:prstGeom prst="rect">
             <a:avLst/>
           </a:prstGeom>
         </p:spPr>
       </p:pic>
+      <p:sp>
+        <p:nvSpPr>
+          <p:cNvPr id="2" name="Text 0"/>
+          <p:cNvSpPr txBox="1"/>
+          <p:nvPr/>
+        </p:nvSpPr>
+        <p:spPr>
+          <a:xfrm>
+            <a:off x="502920" y="365760"/>
+            <a:ext cx="6400800" cy="274320"/>
+          </a:xfrm>
+          <a:prstGeom prst="rect">
+            <a:avLst/>
+          </a:prstGeom>
+          <a:noFill/>
+          <a:ln/>
+        </p:spPr>
+        <p:txBody>
+          <a:bodyPr wrap="square" lIns="0" tIns="0" rIns="0" bIns="0" rtlCol="0" anchor="ctr"/>
+          <a:lstStyle/>
+          <a:p>
+            <a:pPr marL="0" indent="0">
+              <a:buNone/>
+            </a:pPr>
+            <a:r>
+              <a:rPr lang="en-US" sz="950" b="1" kern="0" spc="220">
+                <a:solidFill>
+                  <a:srgbClr val="122B82"/>
+                </a:solidFill>
+              </a:rPr>
+              <a:t>WHAT WE SPEND</a:t>
+            </a:r>
+            <a:endParaRPr lang="en-US" sz="950"/>
+          </a:p>
+        </p:txBody>
+      </p:sp>
+      <p:sp>
+        <p:nvSpPr>
+          <p:cNvPr id="3" name="Text 1"/>
+          <p:cNvSpPr txBox="1"/>
+          <p:nvPr/>
+        </p:nvSpPr>
+        <p:spPr>
+          <a:xfrm>
+            <a:off x="502920" y="640080"/>
+            <a:ext cx="7315200" cy="365760"/>
+          </a:xfrm>
+          <a:prstGeom prst="rect">
+            <a:avLst/>
+          </a:prstGeom>
+          <a:noFill/>
+          <a:ln/>
+        </p:spPr>
+        <p:txBody>
+          <a:bodyPr wrap="square" lIns="0" tIns="0" rIns="0" bIns="0" rtlCol="0" anchor="ctr"/>
+          <a:lstStyle/>
+          <a:p>
+            <a:pPr marL="0" indent="0" algn="ctr">
+              <a:buNone/>
+            </a:pPr>
+            <a:r>
+              <a:rPr lang="en-US" sz="2200" b="1">
+                <a:solidFill>
+                  <a:srgbClr val="242C39"/>
+                </a:solidFill>
+              </a:rPr>
+              <a:t>Labour mix, year to date</a:t>
+            </a:r>
+            <a:endParaRPr lang="en-US" sz="2700"/>
+          </a:p>
+        </p:txBody>
+      </p:sp>
       <p:sp>
         <p:nvSpPr>
           <p:cNvPr id="6" name="commentary panel"/>
@@ -12008,8 +12056,8 @@
         </p:nvSpPr>
         <p:spPr>
           <a:xfrm>
-            <a:off x="5623559" y="1463040"/>
-            <a:ext cx="3017520" cy="3154680"/>
+            <a:off x="502920" y="3231161"/>
+            <a:ext cx="8138160" cy="1395702"/>
           </a:xfrm>
           <a:prstGeom prst="rect">
             <a:avLst/>
@@ -12035,8 +12083,8 @@
         </p:nvSpPr>
         <p:spPr>
           <a:xfrm>
-            <a:off x="5806439" y="1627632"/>
-            <a:ext cx="2651760" cy="228600"/>
+            <a:off x="685800" y="3304313"/>
+            <a:ext cx="2743200" cy="228600"/>
           </a:xfrm>
           <a:prstGeom prst="rect">
             <a:avLst/>
@@ -12071,8 +12119,8 @@
         </p:nvSpPr>
         <p:spPr>
           <a:xfrm>
-            <a:off x="5806439" y="1901952"/>
-            <a:ext cx="2651760" cy="2706623"/>
+            <a:off x="685800" y="3478049"/>
+            <a:ext cx="3703320" cy="1121382"/>
           </a:xfrm>
           <a:prstGeom prst="rect">
             <a:avLst/>
@@ -12127,6 +12175,99 @@
             </a:r>
             <a:endParaRPr lang="en-US" sz="850"/>
           </a:p>
+        </p:txBody>
+      </p:sp>
+      <p:sp>
+        <p:nvSpPr>
+          <p:cNvPr id="25" name="Slide Number Placeholder 0"/>
+          <p:cNvSpPr>
+            <a:spLocks noGrp="1"/>
+          </p:cNvSpPr>
+          <p:nvPr>
+            <p:ph type="sldNum" sz="quarter" idx="4294967295"/>
+          </p:nvPr>
+        </p:nvSpPr>
+        <p:spPr>
+          <a:xfrm>
+            <a:off x="8092440" y="4736592"/>
+            <a:ext cx="548640" cy="228600"/>
+          </a:xfrm>
+          <a:prstGeom prst="rect">
+            <a:avLst/>
+          </a:prstGeom>
+          <a:extLst>
+            <a:ext uri="{C572A759-6A51-4108-AA02-DFA0A04FC94B}">
+              <ma14:wrappingTextBoxFlag xmlns="" xmlns:ma14="http://schemas.microsoft.com/office/mac/drawingml/2011/main" val="0"/>
+            </a:ext>
+          </a:extLst>
+        </p:spPr>
+        <p:txBody>
+          <a:bodyPr/>
+          <a:lstStyle>
+            <a:lvl1pPr>
+              <a:defRPr sz="800">
+                <a:solidFill>
+                  <a:srgbClr val="6B7585"/>
+                </a:solidFill>
+              </a:defRPr>
+            </a:lvl1pPr>
+          </a:lstStyle>
+          <a:p>
+            <a:pPr algn="r"/>
+            <a:fld id="{F7021451-1387-4CA6-816F-3879F97B5CBC}" type="slidenum">
+              <a:rPr lang="en-US" b="0"/>
+              <a:t>23</a:t>
+            </a:fld>
+            <a:endParaRPr lang="en-US"/>
+          </a:p>
+        </p:txBody>
+      </p:sp>
+      <p:pic>
+        <p:nvPicPr>
+          <p:cNvPr id="26" name="cts logo" descr="cts-logo.png"/>
+          <p:cNvPicPr>
+            <a:picLocks noChangeAspect="1"/>
+          </p:cNvPicPr>
+          <p:nvPr/>
+        </p:nvPicPr>
+        <p:blipFill>
+          <a:blip r:embed="rId4"/>
+          <a:stretch>
+            <a:fillRect/>
+          </a:stretch>
+        </p:blipFill>
+        <p:spPr>
+          <a:xfrm>
+            <a:off x="7680959" y="182880"/>
+            <a:ext cx="960120" cy="539696"/>
+          </a:xfrm>
+          <a:prstGeom prst="rect">
+            <a:avLst/>
+          </a:prstGeom>
+        </p:spPr>
+      </p:pic>
+      <p:sp>
+        <p:nvSpPr>
+          <p:cNvPr id="8" name="Text 5b"/>
+          <p:cNvSpPr txBox="1"/>
+          <p:nvPr/>
+        </p:nvSpPr>
+        <p:spPr>
+          <a:xfrm>
+            <a:off x="4663440" y="3478049"/>
+            <a:ext cx="3703320" cy="1121382"/>
+          </a:xfrm>
+          <a:prstGeom prst="rect">
+            <a:avLst/>
+          </a:prstGeom>
+          <a:noFill/>
+          <a:ln/>
+        </p:spPr>
+        <p:txBody>
+          <a:bodyPr wrap="square" lIns="0" tIns="0" rIns="0" bIns="0" rtlCol="0" anchor="t">
+            <a:normAutofit/>
+          </a:bodyPr>
+          <a:lstStyle/>
           <a:p>
             <a:pPr marL="342900" indent="-342900">
               <a:lnSpc>
@@ -12192,75 +12333,6 @@
           </a:p>
         </p:txBody>
       </p:sp>
-      <p:sp>
-        <p:nvSpPr>
-          <p:cNvPr id="25" name="Slide Number Placeholder 0"/>
-          <p:cNvSpPr>
-            <a:spLocks noGrp="1"/>
-          </p:cNvSpPr>
-          <p:nvPr>
-            <p:ph type="sldNum" sz="quarter" idx="4294967295"/>
-          </p:nvPr>
-        </p:nvSpPr>
-        <p:spPr>
-          <a:xfrm>
-            <a:off x="8092440" y="4736592"/>
-            <a:ext cx="548640" cy="228600"/>
-          </a:xfrm>
-          <a:prstGeom prst="rect">
-            <a:avLst/>
-          </a:prstGeom>
-          <a:extLst>
-            <a:ext uri="{C572A759-6A51-4108-AA02-DFA0A04FC94B}">
-              <ma14:wrappingTextBoxFlag xmlns="" xmlns:ma14="http://schemas.microsoft.com/office/mac/drawingml/2011/main" val="0"/>
-            </a:ext>
-          </a:extLst>
-        </p:spPr>
-        <p:txBody>
-          <a:bodyPr/>
-          <a:lstStyle>
-            <a:lvl1pPr>
-              <a:defRPr sz="800">
-                <a:solidFill>
-                  <a:srgbClr val="6B7585"/>
-                </a:solidFill>
-              </a:defRPr>
-            </a:lvl1pPr>
-          </a:lstStyle>
-          <a:p>
-            <a:pPr algn="r"/>
-            <a:fld id="{F7021451-1387-4CA6-816F-3879F97B5CBC}" type="slidenum">
-              <a:rPr lang="en-US" b="0"/>
-              <a:t>23</a:t>
-            </a:fld>
-            <a:endParaRPr lang="en-US"/>
-          </a:p>
-        </p:txBody>
-      </p:sp>
-      <p:pic>
-        <p:nvPicPr>
-          <p:cNvPr id="26" name="cts logo" descr="cts-logo.png"/>
-          <p:cNvPicPr>
-            <a:picLocks noChangeAspect="1"/>
-          </p:cNvPicPr>
-          <p:nvPr/>
-        </p:nvPicPr>
-        <p:blipFill>
-          <a:blip r:embed="rId4"/>
-          <a:stretch>
-            <a:fillRect/>
-          </a:stretch>
-        </p:blipFill>
-        <p:spPr>
-          <a:xfrm>
-            <a:off x="7680959" y="182880"/>
-            <a:ext cx="960120" cy="539696"/>
-          </a:xfrm>
-          <a:prstGeom prst="rect">
-            <a:avLst/>
-          </a:prstGeom>
-        </p:spPr>
-      </p:pic>
     </p:spTree>
   </p:cSld>
   <p:clrMapOvr>
@@ -12954,102 +13026,102 @@
           <a:chExt cx="0" cy="0"/>
         </a:xfrm>
       </p:grpSpPr>
-      <p:sp>
-        <p:nvSpPr>
-          <p:cNvPr id="2" name="Text 0"/>
-          <p:cNvSpPr txBox="1"/>
-          <p:nvPr/>
-        </p:nvSpPr>
-        <p:spPr>
-          <a:xfrm>
-            <a:off x="502920" y="365760"/>
-            <a:ext cx="6400800" cy="274320"/>
-          </a:xfrm>
-          <a:prstGeom prst="rect">
-            <a:avLst/>
-          </a:prstGeom>
-          <a:noFill/>
-          <a:ln/>
-        </p:spPr>
-        <p:txBody>
-          <a:bodyPr wrap="square" lIns="0" tIns="0" rIns="0" bIns="0" rtlCol="0" anchor="ctr"/>
-          <a:lstStyle/>
-          <a:p>
-            <a:pPr marL="0" indent="0">
-              <a:buNone/>
-            </a:pPr>
-            <a:r>
-              <a:rPr lang="en-US" sz="950" b="1" kern="0" spc="220">
-                <a:solidFill>
-                  <a:srgbClr val="122B82"/>
-                </a:solidFill>
-              </a:rPr>
-              <a:t>CUSTOMERS AND CASH</a:t>
-            </a:r>
-            <a:endParaRPr lang="en-US" sz="950"/>
-          </a:p>
-        </p:txBody>
-      </p:sp>
-      <p:sp>
-        <p:nvSpPr>
-          <p:cNvPr id="3" name="Text 1"/>
-          <p:cNvSpPr txBox="1"/>
-          <p:nvPr/>
-        </p:nvSpPr>
-        <p:spPr>
-          <a:xfrm>
-            <a:off x="502920" y="640080"/>
-            <a:ext cx="7315200" cy="365760"/>
-          </a:xfrm>
-          <a:prstGeom prst="rect">
-            <a:avLst/>
-          </a:prstGeom>
-          <a:noFill/>
-          <a:ln/>
-        </p:spPr>
-        <p:txBody>
-          <a:bodyPr wrap="square" lIns="0" tIns="0" rIns="0" bIns="0" rtlCol="0" anchor="ctr"/>
-          <a:lstStyle/>
-          <a:p>
-            <a:pPr marL="0" indent="0" algn="ctr">
-              <a:buNone/>
-            </a:pPr>
-            <a:r>
-              <a:rPr lang="en-US" sz="2200" b="1">
-                <a:solidFill>
-                  <a:srgbClr val="242C39"/>
-                </a:solidFill>
-              </a:rPr>
-              <a:t>Top ten customers, year to date</a:t>
-            </a:r>
-            <a:endParaRPr lang="en-US" sz="2700"/>
-          </a:p>
-        </p:txBody>
-      </p:sp>
       <p:pic>
         <p:nvPicPr>
-          <p:cNvPr id="4" name="snip top10" descr="/home/user/Claude/deck/snips/top10.png"/>
+          <p:cNvPr id="27" name="snip top10" descr="top10.png"/>
           <p:cNvPicPr>
             <a:picLocks noChangeAspect="1"/>
           </p:cNvPicPr>
           <p:nvPr/>
         </p:nvPicPr>
         <p:blipFill>
-          <a:blip r:embed="rId3"/>
+          <a:blip r:embed="rId5"/>
           <a:stretch>
             <a:fillRect/>
           </a:stretch>
         </p:blipFill>
         <p:spPr>
           <a:xfrm>
-            <a:off x="502920" y="1444752"/>
-            <a:ext cx="5074919" cy="2564030"/>
+            <a:off x="2639119" y="1005840"/>
+            <a:ext cx="3865761" cy="1964998"/>
           </a:xfrm>
           <a:prstGeom prst="rect">
             <a:avLst/>
           </a:prstGeom>
         </p:spPr>
       </p:pic>
+      <p:sp>
+        <p:nvSpPr>
+          <p:cNvPr id="2" name="Text 0"/>
+          <p:cNvSpPr txBox="1"/>
+          <p:nvPr/>
+        </p:nvSpPr>
+        <p:spPr>
+          <a:xfrm>
+            <a:off x="502920" y="365760"/>
+            <a:ext cx="6400800" cy="274320"/>
+          </a:xfrm>
+          <a:prstGeom prst="rect">
+            <a:avLst/>
+          </a:prstGeom>
+          <a:noFill/>
+          <a:ln/>
+        </p:spPr>
+        <p:txBody>
+          <a:bodyPr wrap="square" lIns="0" tIns="0" rIns="0" bIns="0" rtlCol="0" anchor="ctr"/>
+          <a:lstStyle/>
+          <a:p>
+            <a:pPr marL="0" indent="0">
+              <a:buNone/>
+            </a:pPr>
+            <a:r>
+              <a:rPr lang="en-US" sz="950" b="1" kern="0" spc="220">
+                <a:solidFill>
+                  <a:srgbClr val="122B82"/>
+                </a:solidFill>
+              </a:rPr>
+              <a:t>CUSTOMERS AND CASH</a:t>
+            </a:r>
+            <a:endParaRPr lang="en-US" sz="950"/>
+          </a:p>
+        </p:txBody>
+      </p:sp>
+      <p:sp>
+        <p:nvSpPr>
+          <p:cNvPr id="3" name="Text 1"/>
+          <p:cNvSpPr txBox="1"/>
+          <p:nvPr/>
+        </p:nvSpPr>
+        <p:spPr>
+          <a:xfrm>
+            <a:off x="502920" y="640080"/>
+            <a:ext cx="7315200" cy="365760"/>
+          </a:xfrm>
+          <a:prstGeom prst="rect">
+            <a:avLst/>
+          </a:prstGeom>
+          <a:noFill/>
+          <a:ln/>
+        </p:spPr>
+        <p:txBody>
+          <a:bodyPr wrap="square" lIns="0" tIns="0" rIns="0" bIns="0" rtlCol="0" anchor="ctr"/>
+          <a:lstStyle/>
+          <a:p>
+            <a:pPr marL="0" indent="0" algn="ctr">
+              <a:buNone/>
+            </a:pPr>
+            <a:r>
+              <a:rPr lang="en-US" sz="2200" b="1">
+                <a:solidFill>
+                  <a:srgbClr val="242C39"/>
+                </a:solidFill>
+              </a:rPr>
+              <a:t>Top ten customers, year to date</a:t>
+            </a:r>
+            <a:endParaRPr lang="en-US" sz="2700"/>
+          </a:p>
+        </p:txBody>
+      </p:sp>
       <p:sp>
         <p:nvSpPr>
           <p:cNvPr id="6" name="commentary panel"/>
@@ -13058,8 +13130,8 @@
         </p:nvSpPr>
         <p:spPr>
           <a:xfrm>
-            <a:off x="5806439" y="1463040"/>
-            <a:ext cx="2834640" cy="3154680"/>
+            <a:off x="502920" y="3062278"/>
+            <a:ext cx="8138160" cy="1564585"/>
           </a:xfrm>
           <a:prstGeom prst="rect">
             <a:avLst/>
@@ -13085,8 +13157,8 @@
         </p:nvSpPr>
         <p:spPr>
           <a:xfrm>
-            <a:off x="5989319" y="1627632"/>
-            <a:ext cx="2468880" cy="228600"/>
+            <a:off x="685800" y="3135430"/>
+            <a:ext cx="2743200" cy="228600"/>
           </a:xfrm>
           <a:prstGeom prst="rect">
             <a:avLst/>
@@ -13121,8 +13193,8 @@
         </p:nvSpPr>
         <p:spPr>
           <a:xfrm>
-            <a:off x="5989319" y="1901952"/>
-            <a:ext cx="2468880" cy="2706623"/>
+            <a:off x="685800" y="3309166"/>
+            <a:ext cx="3703320" cy="1290265"/>
           </a:xfrm>
           <a:prstGeom prst="rect">
             <a:avLst/>
@@ -13198,6 +13270,99 @@
             </a:r>
             <a:endParaRPr lang="en-US" sz="900"/>
           </a:p>
+        </p:txBody>
+      </p:sp>
+      <p:sp>
+        <p:nvSpPr>
+          <p:cNvPr id="25" name="Slide Number Placeholder 0"/>
+          <p:cNvSpPr>
+            <a:spLocks noGrp="1"/>
+          </p:cNvSpPr>
+          <p:nvPr>
+            <p:ph type="sldNum" sz="quarter" idx="4294967295"/>
+          </p:nvPr>
+        </p:nvSpPr>
+        <p:spPr>
+          <a:xfrm>
+            <a:off x="8092440" y="4736592"/>
+            <a:ext cx="548640" cy="228600"/>
+          </a:xfrm>
+          <a:prstGeom prst="rect">
+            <a:avLst/>
+          </a:prstGeom>
+          <a:extLst>
+            <a:ext uri="{C572A759-6A51-4108-AA02-DFA0A04FC94B}">
+              <ma14:wrappingTextBoxFlag xmlns="" xmlns:ma14="http://schemas.microsoft.com/office/mac/drawingml/2011/main" val="0"/>
+            </a:ext>
+          </a:extLst>
+        </p:spPr>
+        <p:txBody>
+          <a:bodyPr/>
+          <a:lstStyle>
+            <a:lvl1pPr>
+              <a:defRPr sz="800">
+                <a:solidFill>
+                  <a:srgbClr val="6B7585"/>
+                </a:solidFill>
+              </a:defRPr>
+            </a:lvl1pPr>
+          </a:lstStyle>
+          <a:p>
+            <a:pPr algn="r"/>
+            <a:fld id="{F7021451-1387-4CA6-816F-3879F97B5CBC}" type="slidenum">
+              <a:rPr lang="en-US" b="0"/>
+              <a:t>26</a:t>
+            </a:fld>
+            <a:endParaRPr lang="en-US"/>
+          </a:p>
+        </p:txBody>
+      </p:sp>
+      <p:pic>
+        <p:nvPicPr>
+          <p:cNvPr id="26" name="cts logo" descr="cts-logo.png"/>
+          <p:cNvPicPr>
+            <a:picLocks noChangeAspect="1"/>
+          </p:cNvPicPr>
+          <p:nvPr/>
+        </p:nvPicPr>
+        <p:blipFill>
+          <a:blip r:embed="rId4"/>
+          <a:stretch>
+            <a:fillRect/>
+          </a:stretch>
+        </p:blipFill>
+        <p:spPr>
+          <a:xfrm>
+            <a:off x="7680959" y="182880"/>
+            <a:ext cx="960120" cy="539696"/>
+          </a:xfrm>
+          <a:prstGeom prst="rect">
+            <a:avLst/>
+          </a:prstGeom>
+        </p:spPr>
+      </p:pic>
+      <p:sp>
+        <p:nvSpPr>
+          <p:cNvPr id="8" name="Text 5b"/>
+          <p:cNvSpPr txBox="1"/>
+          <p:nvPr/>
+        </p:nvSpPr>
+        <p:spPr>
+          <a:xfrm>
+            <a:off x="4663440" y="3309166"/>
+            <a:ext cx="3703320" cy="1290265"/>
+          </a:xfrm>
+          <a:prstGeom prst="rect">
+            <a:avLst/>
+          </a:prstGeom>
+          <a:noFill/>
+          <a:ln/>
+        </p:spPr>
+        <p:txBody>
+          <a:bodyPr wrap="square" lIns="0" tIns="0" rIns="0" bIns="0" rtlCol="0" anchor="t">
+            <a:normAutofit fontScale="77500" lnSpcReduction="20000"/>
+          </a:bodyPr>
+          <a:lstStyle/>
           <a:p>
             <a:pPr marL="342900" indent="-342900">
               <a:lnSpc>
@@ -13242,75 +13407,6 @@
           </a:p>
         </p:txBody>
       </p:sp>
-      <p:sp>
-        <p:nvSpPr>
-          <p:cNvPr id="25" name="Slide Number Placeholder 0"/>
-          <p:cNvSpPr>
-            <a:spLocks noGrp="1"/>
-          </p:cNvSpPr>
-          <p:nvPr>
-            <p:ph type="sldNum" sz="quarter" idx="4294967295"/>
-          </p:nvPr>
-        </p:nvSpPr>
-        <p:spPr>
-          <a:xfrm>
-            <a:off x="8092440" y="4736592"/>
-            <a:ext cx="548640" cy="228600"/>
-          </a:xfrm>
-          <a:prstGeom prst="rect">
-            <a:avLst/>
-          </a:prstGeom>
-          <a:extLst>
-            <a:ext uri="{C572A759-6A51-4108-AA02-DFA0A04FC94B}">
-              <ma14:wrappingTextBoxFlag xmlns="" xmlns:ma14="http://schemas.microsoft.com/office/mac/drawingml/2011/main" val="0"/>
-            </a:ext>
-          </a:extLst>
-        </p:spPr>
-        <p:txBody>
-          <a:bodyPr/>
-          <a:lstStyle>
-            <a:lvl1pPr>
-              <a:defRPr sz="800">
-                <a:solidFill>
-                  <a:srgbClr val="6B7585"/>
-                </a:solidFill>
-              </a:defRPr>
-            </a:lvl1pPr>
-          </a:lstStyle>
-          <a:p>
-            <a:pPr algn="r"/>
-            <a:fld id="{F7021451-1387-4CA6-816F-3879F97B5CBC}" type="slidenum">
-              <a:rPr lang="en-US" b="0"/>
-              <a:t>26</a:t>
-            </a:fld>
-            <a:endParaRPr lang="en-US"/>
-          </a:p>
-        </p:txBody>
-      </p:sp>
-      <p:pic>
-        <p:nvPicPr>
-          <p:cNvPr id="26" name="cts logo" descr="cts-logo.png"/>
-          <p:cNvPicPr>
-            <a:picLocks noChangeAspect="1"/>
-          </p:cNvPicPr>
-          <p:nvPr/>
-        </p:nvPicPr>
-        <p:blipFill>
-          <a:blip r:embed="rId4"/>
-          <a:stretch>
-            <a:fillRect/>
-          </a:stretch>
-        </p:blipFill>
-        <p:spPr>
-          <a:xfrm>
-            <a:off x="7680959" y="182880"/>
-            <a:ext cx="960120" cy="539696"/>
-          </a:xfrm>
-          <a:prstGeom prst="rect">
-            <a:avLst/>
-          </a:prstGeom>
-        </p:spPr>
-      </p:pic>
     </p:spTree>
   </p:cSld>
   <p:clrMapOvr>
@@ -13336,81 +13432,9 @@
           <a:chExt cx="0" cy="0"/>
         </a:xfrm>
       </p:grpSpPr>
-      <p:sp>
-        <p:nvSpPr>
-          <p:cNvPr id="2" name="Text 0"/>
-          <p:cNvSpPr txBox="1"/>
-          <p:nvPr/>
-        </p:nvSpPr>
-        <p:spPr>
-          <a:xfrm>
-            <a:off x="502920" y="365760"/>
-            <a:ext cx="6400800" cy="274320"/>
-          </a:xfrm>
-          <a:prstGeom prst="rect">
-            <a:avLst/>
-          </a:prstGeom>
-          <a:noFill/>
-          <a:ln/>
-        </p:spPr>
-        <p:txBody>
-          <a:bodyPr wrap="square" lIns="0" tIns="0" rIns="0" bIns="0" rtlCol="0" anchor="ctr"/>
-          <a:lstStyle/>
-          <a:p>
-            <a:pPr marL="0" indent="0">
-              <a:buNone/>
-            </a:pPr>
-            <a:r>
-              <a:rPr lang="en-US" sz="950" b="1" kern="0" spc="220">
-                <a:solidFill>
-                  <a:srgbClr val="122B82"/>
-                </a:solidFill>
-              </a:rPr>
-              <a:t>CUSTOMERS AND CASH</a:t>
-            </a:r>
-            <a:endParaRPr lang="en-US" sz="950"/>
-          </a:p>
-        </p:txBody>
-      </p:sp>
-      <p:sp>
-        <p:nvSpPr>
-          <p:cNvPr id="3" name="Text 1"/>
-          <p:cNvSpPr txBox="1"/>
-          <p:nvPr/>
-        </p:nvSpPr>
-        <p:spPr>
-          <a:xfrm>
-            <a:off x="502920" y="640080"/>
-            <a:ext cx="7315200" cy="365760"/>
-          </a:xfrm>
-          <a:prstGeom prst="rect">
-            <a:avLst/>
-          </a:prstGeom>
-          <a:noFill/>
-          <a:ln/>
-        </p:spPr>
-        <p:txBody>
-          <a:bodyPr wrap="square" lIns="0" tIns="0" rIns="0" bIns="0" rtlCol="0" anchor="ctr"/>
-          <a:lstStyle/>
-          <a:p>
-            <a:pPr marL="0" indent="0" algn="ctr">
-              <a:buNone/>
-            </a:pPr>
-            <a:r>
-              <a:rPr lang="en-US" sz="2200" b="1">
-                <a:solidFill>
-                  <a:srgbClr val="242C39"/>
-                </a:solidFill>
-              </a:rPr>
-              <a:t>How long customers take to pay</a:t>
-            </a:r>
-            <a:endParaRPr lang="en-US" sz="2700"/>
-          </a:p>
-        </p:txBody>
-      </p:sp>
       <p:pic>
         <p:nvPicPr>
-          <p:cNvPr id="4" name="snip dso_calc" descr="/home/user/Claude/deck/snips/dso_calc.png"/>
+          <p:cNvPr id="27" name="snip dso_calc" descr="image.png"/>
           <p:cNvPicPr>
             <a:picLocks noChangeAspect="1"/>
           </p:cNvPicPr>
@@ -13424,14 +13448,86 @@
         </p:blipFill>
         <p:spPr>
           <a:xfrm>
-            <a:off x="502920" y="1444752"/>
-            <a:ext cx="5257799" cy="2733809"/>
+            <a:off x="2520006" y="1005840"/>
+            <a:ext cx="4103987" cy="2133881"/>
           </a:xfrm>
           <a:prstGeom prst="rect">
             <a:avLst/>
           </a:prstGeom>
         </p:spPr>
       </p:pic>
+      <p:sp>
+        <p:nvSpPr>
+          <p:cNvPr id="2" name="Text 0"/>
+          <p:cNvSpPr txBox="1"/>
+          <p:nvPr/>
+        </p:nvSpPr>
+        <p:spPr>
+          <a:xfrm>
+            <a:off x="502920" y="365760"/>
+            <a:ext cx="6400800" cy="274320"/>
+          </a:xfrm>
+          <a:prstGeom prst="rect">
+            <a:avLst/>
+          </a:prstGeom>
+          <a:noFill/>
+          <a:ln/>
+        </p:spPr>
+        <p:txBody>
+          <a:bodyPr wrap="square" lIns="0" tIns="0" rIns="0" bIns="0" rtlCol="0" anchor="ctr"/>
+          <a:lstStyle/>
+          <a:p>
+            <a:pPr marL="0" indent="0">
+              <a:buNone/>
+            </a:pPr>
+            <a:r>
+              <a:rPr lang="en-US" sz="950" b="1" kern="0" spc="220">
+                <a:solidFill>
+                  <a:srgbClr val="122B82"/>
+                </a:solidFill>
+              </a:rPr>
+              <a:t>CUSTOMERS AND CASH</a:t>
+            </a:r>
+            <a:endParaRPr lang="en-US" sz="950"/>
+          </a:p>
+        </p:txBody>
+      </p:sp>
+      <p:sp>
+        <p:nvSpPr>
+          <p:cNvPr id="3" name="Text 1"/>
+          <p:cNvSpPr txBox="1"/>
+          <p:nvPr/>
+        </p:nvSpPr>
+        <p:spPr>
+          <a:xfrm>
+            <a:off x="502920" y="640080"/>
+            <a:ext cx="7315200" cy="365760"/>
+          </a:xfrm>
+          <a:prstGeom prst="rect">
+            <a:avLst/>
+          </a:prstGeom>
+          <a:noFill/>
+          <a:ln/>
+        </p:spPr>
+        <p:txBody>
+          <a:bodyPr wrap="square" lIns="0" tIns="0" rIns="0" bIns="0" rtlCol="0" anchor="ctr"/>
+          <a:lstStyle/>
+          <a:p>
+            <a:pPr marL="0" indent="0" algn="ctr">
+              <a:buNone/>
+            </a:pPr>
+            <a:r>
+              <a:rPr lang="en-US" sz="2200" b="1">
+                <a:solidFill>
+                  <a:srgbClr val="242C39"/>
+                </a:solidFill>
+              </a:rPr>
+              <a:t>How long customers take to pay</a:t>
+            </a:r>
+            <a:endParaRPr lang="en-US" sz="2700"/>
+          </a:p>
+        </p:txBody>
+      </p:sp>
       <p:sp>
         <p:nvSpPr>
           <p:cNvPr id="6" name="commentary panel"/>
@@ -13440,8 +13536,8 @@
         </p:nvSpPr>
         <p:spPr>
           <a:xfrm>
-            <a:off x="5989319" y="1463040"/>
-            <a:ext cx="2651760" cy="3154680"/>
+            <a:off x="502920" y="3231161"/>
+            <a:ext cx="8138160" cy="1395702"/>
           </a:xfrm>
           <a:prstGeom prst="rect">
             <a:avLst/>
@@ -13467,8 +13563,8 @@
         </p:nvSpPr>
         <p:spPr>
           <a:xfrm>
-            <a:off x="6172199" y="1627632"/>
-            <a:ext cx="2286000" cy="228600"/>
+            <a:off x="685800" y="3304313"/>
+            <a:ext cx="2743200" cy="228600"/>
           </a:xfrm>
           <a:prstGeom prst="rect">
             <a:avLst/>
@@ -13503,8 +13599,8 @@
         </p:nvSpPr>
         <p:spPr>
           <a:xfrm>
-            <a:off x="6172199" y="1901952"/>
-            <a:ext cx="2286000" cy="2706623"/>
+            <a:off x="685800" y="3478049"/>
+            <a:ext cx="3703320" cy="1121382"/>
           </a:xfrm>
           <a:prstGeom prst="rect">
             <a:avLst/>
@@ -13559,6 +13655,99 @@
             </a:r>
             <a:endParaRPr lang="en-US" sz="1000"/>
           </a:p>
+        </p:txBody>
+      </p:sp>
+      <p:sp>
+        <p:nvSpPr>
+          <p:cNvPr id="25" name="Slide Number Placeholder 0"/>
+          <p:cNvSpPr>
+            <a:spLocks noGrp="1"/>
+          </p:cNvSpPr>
+          <p:nvPr>
+            <p:ph type="sldNum" sz="quarter" idx="4294967295"/>
+          </p:nvPr>
+        </p:nvSpPr>
+        <p:spPr>
+          <a:xfrm>
+            <a:off x="8092440" y="4736592"/>
+            <a:ext cx="548640" cy="228600"/>
+          </a:xfrm>
+          <a:prstGeom prst="rect">
+            <a:avLst/>
+          </a:prstGeom>
+          <a:extLst>
+            <a:ext uri="{C572A759-6A51-4108-AA02-DFA0A04FC94B}">
+              <ma14:wrappingTextBoxFlag xmlns="" xmlns:ma14="http://schemas.microsoft.com/office/mac/drawingml/2011/main" val="0"/>
+            </a:ext>
+          </a:extLst>
+        </p:spPr>
+        <p:txBody>
+          <a:bodyPr/>
+          <a:lstStyle>
+            <a:lvl1pPr>
+              <a:defRPr sz="800">
+                <a:solidFill>
+                  <a:srgbClr val="6B7585"/>
+                </a:solidFill>
+              </a:defRPr>
+            </a:lvl1pPr>
+          </a:lstStyle>
+          <a:p>
+            <a:pPr algn="r"/>
+            <a:fld id="{F7021451-1387-4CA6-816F-3879F97B5CBC}" type="slidenum">
+              <a:rPr lang="en-US" b="0"/>
+              <a:t>27</a:t>
+            </a:fld>
+            <a:endParaRPr lang="en-US"/>
+          </a:p>
+        </p:txBody>
+      </p:sp>
+      <p:pic>
+        <p:nvPicPr>
+          <p:cNvPr id="26" name="cts logo" descr="cts-logo.png"/>
+          <p:cNvPicPr>
+            <a:picLocks noChangeAspect="1"/>
+          </p:cNvPicPr>
+          <p:nvPr/>
+        </p:nvPicPr>
+        <p:blipFill>
+          <a:blip r:embed="rId4"/>
+          <a:stretch>
+            <a:fillRect/>
+          </a:stretch>
+        </p:blipFill>
+        <p:spPr>
+          <a:xfrm>
+            <a:off x="7680959" y="182880"/>
+            <a:ext cx="960120" cy="539696"/>
+          </a:xfrm>
+          <a:prstGeom prst="rect">
+            <a:avLst/>
+          </a:prstGeom>
+        </p:spPr>
+      </p:pic>
+      <p:sp>
+        <p:nvSpPr>
+          <p:cNvPr id="8" name="Text 5b"/>
+          <p:cNvSpPr txBox="1"/>
+          <p:nvPr/>
+        </p:nvSpPr>
+        <p:spPr>
+          <a:xfrm>
+            <a:off x="4663440" y="3478049"/>
+            <a:ext cx="3703320" cy="1121382"/>
+          </a:xfrm>
+          <a:prstGeom prst="rect">
+            <a:avLst/>
+          </a:prstGeom>
+          <a:noFill/>
+          <a:ln/>
+        </p:spPr>
+        <p:txBody>
+          <a:bodyPr wrap="square" lIns="0" tIns="0" rIns="0" bIns="0" rtlCol="0" anchor="t">
+            <a:normAutofit fontScale="77500" lnSpcReduction="20000"/>
+          </a:bodyPr>
+          <a:lstStyle/>
           <a:p>
             <a:pPr marL="342900" indent="-342900">
               <a:lnSpc>
@@ -13624,75 +13813,6 @@
           </a:p>
         </p:txBody>
       </p:sp>
-      <p:sp>
-        <p:nvSpPr>
-          <p:cNvPr id="25" name="Slide Number Placeholder 0"/>
-          <p:cNvSpPr>
-            <a:spLocks noGrp="1"/>
-          </p:cNvSpPr>
-          <p:nvPr>
-            <p:ph type="sldNum" sz="quarter" idx="4294967295"/>
-          </p:nvPr>
-        </p:nvSpPr>
-        <p:spPr>
-          <a:xfrm>
-            <a:off x="8092440" y="4736592"/>
-            <a:ext cx="548640" cy="228600"/>
-          </a:xfrm>
-          <a:prstGeom prst="rect">
-            <a:avLst/>
-          </a:prstGeom>
-          <a:extLst>
-            <a:ext uri="{C572A759-6A51-4108-AA02-DFA0A04FC94B}">
-              <ma14:wrappingTextBoxFlag xmlns="" xmlns:ma14="http://schemas.microsoft.com/office/mac/drawingml/2011/main" val="0"/>
-            </a:ext>
-          </a:extLst>
-        </p:spPr>
-        <p:txBody>
-          <a:bodyPr/>
-          <a:lstStyle>
-            <a:lvl1pPr>
-              <a:defRPr sz="800">
-                <a:solidFill>
-                  <a:srgbClr val="6B7585"/>
-                </a:solidFill>
-              </a:defRPr>
-            </a:lvl1pPr>
-          </a:lstStyle>
-          <a:p>
-            <a:pPr algn="r"/>
-            <a:fld id="{F7021451-1387-4CA6-816F-3879F97B5CBC}" type="slidenum">
-              <a:rPr lang="en-US" b="0"/>
-              <a:t>27</a:t>
-            </a:fld>
-            <a:endParaRPr lang="en-US"/>
-          </a:p>
-        </p:txBody>
-      </p:sp>
-      <p:pic>
-        <p:nvPicPr>
-          <p:cNvPr id="26" name="cts logo" descr="cts-logo.png"/>
-          <p:cNvPicPr>
-            <a:picLocks noChangeAspect="1"/>
-          </p:cNvPicPr>
-          <p:nvPr/>
-        </p:nvPicPr>
-        <p:blipFill>
-          <a:blip r:embed="rId4"/>
-          <a:stretch>
-            <a:fillRect/>
-          </a:stretch>
-        </p:blipFill>
-        <p:spPr>
-          <a:xfrm>
-            <a:off x="7680959" y="182880"/>
-            <a:ext cx="960120" cy="539696"/>
-          </a:xfrm>
-          <a:prstGeom prst="rect">
-            <a:avLst/>
-          </a:prstGeom>
-        </p:spPr>
-      </p:pic>
     </p:spTree>
   </p:cSld>
   <p:clrMapOvr>
@@ -13718,81 +13838,9 @@
           <a:chExt cx="0" cy="0"/>
         </a:xfrm>
       </p:grpSpPr>
-      <p:sp>
-        <p:nvSpPr>
-          <p:cNvPr id="2" name="Text 0"/>
-          <p:cNvSpPr txBox="1"/>
-          <p:nvPr/>
-        </p:nvSpPr>
-        <p:spPr>
-          <a:xfrm>
-            <a:off x="502920" y="365760"/>
-            <a:ext cx="6400800" cy="274320"/>
-          </a:xfrm>
-          <a:prstGeom prst="rect">
-            <a:avLst/>
-          </a:prstGeom>
-          <a:noFill/>
-          <a:ln/>
-        </p:spPr>
-        <p:txBody>
-          <a:bodyPr wrap="square" lIns="0" tIns="0" rIns="0" bIns="0" rtlCol="0" anchor="ctr"/>
-          <a:lstStyle/>
-          <a:p>
-            <a:pPr marL="0" indent="0">
-              <a:buNone/>
-            </a:pPr>
-            <a:r>
-              <a:rPr lang="en-US" sz="950" b="1" kern="0" spc="220">
-                <a:solidFill>
-                  <a:srgbClr val="122B82"/>
-                </a:solidFill>
-              </a:rPr>
-              <a:t>CUSTOMERS AND CASH</a:t>
-            </a:r>
-            <a:endParaRPr lang="en-US" sz="950"/>
-          </a:p>
-        </p:txBody>
-      </p:sp>
-      <p:sp>
-        <p:nvSpPr>
-          <p:cNvPr id="3" name="Text 1"/>
-          <p:cNvSpPr txBox="1"/>
-          <p:nvPr/>
-        </p:nvSpPr>
-        <p:spPr>
-          <a:xfrm>
-            <a:off x="502920" y="640080"/>
-            <a:ext cx="7315200" cy="365760"/>
-          </a:xfrm>
-          <a:prstGeom prst="rect">
-            <a:avLst/>
-          </a:prstGeom>
-          <a:noFill/>
-          <a:ln/>
-        </p:spPr>
-        <p:txBody>
-          <a:bodyPr wrap="square" lIns="0" tIns="0" rIns="0" bIns="0" rtlCol="0" anchor="ctr"/>
-          <a:lstStyle/>
-          <a:p>
-            <a:pPr marL="0" indent="0" algn="ctr">
-              <a:buNone/>
-            </a:pPr>
-            <a:r>
-              <a:rPr lang="en-US" sz="2200" b="1">
-                <a:solidFill>
-                  <a:srgbClr val="242C39"/>
-                </a:solidFill>
-              </a:rPr>
-              <a:t>Who owes us the most</a:t>
-            </a:r>
-            <a:endParaRPr lang="en-US" sz="2700"/>
-          </a:p>
-        </p:txBody>
-      </p:sp>
       <p:pic>
         <p:nvPicPr>
-          <p:cNvPr id="4" name="snip dso_who" descr="/home/user/Claude/deck/snips/dso_who.png"/>
+          <p:cNvPr id="27" name="snip dso_who" descr="image.png"/>
           <p:cNvPicPr>
             <a:picLocks noChangeAspect="1"/>
           </p:cNvPicPr>
@@ -13806,14 +13854,86 @@
         </p:blipFill>
         <p:spPr>
           <a:xfrm>
-            <a:off x="502920" y="1444752"/>
-            <a:ext cx="4675306" cy="3136391"/>
+            <a:off x="3107424" y="1005840"/>
+            <a:ext cx="2929151" cy="1964998"/>
           </a:xfrm>
           <a:prstGeom prst="rect">
             <a:avLst/>
           </a:prstGeom>
         </p:spPr>
       </p:pic>
+      <p:sp>
+        <p:nvSpPr>
+          <p:cNvPr id="2" name="Text 0"/>
+          <p:cNvSpPr txBox="1"/>
+          <p:nvPr/>
+        </p:nvSpPr>
+        <p:spPr>
+          <a:xfrm>
+            <a:off x="502920" y="365760"/>
+            <a:ext cx="6400800" cy="274320"/>
+          </a:xfrm>
+          <a:prstGeom prst="rect">
+            <a:avLst/>
+          </a:prstGeom>
+          <a:noFill/>
+          <a:ln/>
+        </p:spPr>
+        <p:txBody>
+          <a:bodyPr wrap="square" lIns="0" tIns="0" rIns="0" bIns="0" rtlCol="0" anchor="ctr"/>
+          <a:lstStyle/>
+          <a:p>
+            <a:pPr marL="0" indent="0">
+              <a:buNone/>
+            </a:pPr>
+            <a:r>
+              <a:rPr lang="en-US" sz="950" b="1" kern="0" spc="220">
+                <a:solidFill>
+                  <a:srgbClr val="122B82"/>
+                </a:solidFill>
+              </a:rPr>
+              <a:t>CUSTOMERS AND CASH</a:t>
+            </a:r>
+            <a:endParaRPr lang="en-US" sz="950"/>
+          </a:p>
+        </p:txBody>
+      </p:sp>
+      <p:sp>
+        <p:nvSpPr>
+          <p:cNvPr id="3" name="Text 1"/>
+          <p:cNvSpPr txBox="1"/>
+          <p:nvPr/>
+        </p:nvSpPr>
+        <p:spPr>
+          <a:xfrm>
+            <a:off x="502920" y="640080"/>
+            <a:ext cx="7315200" cy="365760"/>
+          </a:xfrm>
+          <a:prstGeom prst="rect">
+            <a:avLst/>
+          </a:prstGeom>
+          <a:noFill/>
+          <a:ln/>
+        </p:spPr>
+        <p:txBody>
+          <a:bodyPr wrap="square" lIns="0" tIns="0" rIns="0" bIns="0" rtlCol="0" anchor="ctr"/>
+          <a:lstStyle/>
+          <a:p>
+            <a:pPr marL="0" indent="0" algn="ctr">
+              <a:buNone/>
+            </a:pPr>
+            <a:r>
+              <a:rPr lang="en-US" sz="2200" b="1">
+                <a:solidFill>
+                  <a:srgbClr val="242C39"/>
+                </a:solidFill>
+              </a:rPr>
+              <a:t>Who owes us the most</a:t>
+            </a:r>
+            <a:endParaRPr lang="en-US" sz="2700"/>
+          </a:p>
+        </p:txBody>
+      </p:sp>
       <p:sp>
         <p:nvSpPr>
           <p:cNvPr id="6" name="commentary panel"/>
@@ -13822,8 +13942,8 @@
         </p:nvSpPr>
         <p:spPr>
           <a:xfrm>
-            <a:off x="5440679" y="1463040"/>
-            <a:ext cx="3200400" cy="3154680"/>
+            <a:off x="502920" y="3062278"/>
+            <a:ext cx="8138160" cy="1564585"/>
           </a:xfrm>
           <a:prstGeom prst="rect">
             <a:avLst/>
@@ -13849,8 +13969,8 @@
         </p:nvSpPr>
         <p:spPr>
           <a:xfrm>
-            <a:off x="5623559" y="1627632"/>
-            <a:ext cx="2834640" cy="228600"/>
+            <a:off x="685800" y="3135430"/>
+            <a:ext cx="2743200" cy="228600"/>
           </a:xfrm>
           <a:prstGeom prst="rect">
             <a:avLst/>
@@ -13885,8 +14005,8 @@
         </p:nvSpPr>
         <p:spPr>
           <a:xfrm>
-            <a:off x="5623559" y="1901952"/>
-            <a:ext cx="2834640" cy="2706623"/>
+            <a:off x="685800" y="3309166"/>
+            <a:ext cx="3703320" cy="1290265"/>
           </a:xfrm>
           <a:prstGeom prst="rect">
             <a:avLst/>
@@ -13941,6 +14061,99 @@
             </a:r>
             <a:endParaRPr lang="en-US" sz="950"/>
           </a:p>
+        </p:txBody>
+      </p:sp>
+      <p:sp>
+        <p:nvSpPr>
+          <p:cNvPr id="25" name="Slide Number Placeholder 0"/>
+          <p:cNvSpPr>
+            <a:spLocks noGrp="1"/>
+          </p:cNvSpPr>
+          <p:nvPr>
+            <p:ph type="sldNum" sz="quarter" idx="4294967295"/>
+          </p:nvPr>
+        </p:nvSpPr>
+        <p:spPr>
+          <a:xfrm>
+            <a:off x="8092440" y="4736592"/>
+            <a:ext cx="548640" cy="228600"/>
+          </a:xfrm>
+          <a:prstGeom prst="rect">
+            <a:avLst/>
+          </a:prstGeom>
+          <a:extLst>
+            <a:ext uri="{C572A759-6A51-4108-AA02-DFA0A04FC94B}">
+              <ma14:wrappingTextBoxFlag xmlns="" xmlns:ma14="http://schemas.microsoft.com/office/mac/drawingml/2011/main" val="0"/>
+            </a:ext>
+          </a:extLst>
+        </p:spPr>
+        <p:txBody>
+          <a:bodyPr/>
+          <a:lstStyle>
+            <a:lvl1pPr>
+              <a:defRPr sz="800">
+                <a:solidFill>
+                  <a:srgbClr val="6B7585"/>
+                </a:solidFill>
+              </a:defRPr>
+            </a:lvl1pPr>
+          </a:lstStyle>
+          <a:p>
+            <a:pPr algn="r"/>
+            <a:fld id="{F7021451-1387-4CA6-816F-3879F97B5CBC}" type="slidenum">
+              <a:rPr lang="en-US" b="0"/>
+              <a:t>28</a:t>
+            </a:fld>
+            <a:endParaRPr lang="en-US"/>
+          </a:p>
+        </p:txBody>
+      </p:sp>
+      <p:pic>
+        <p:nvPicPr>
+          <p:cNvPr id="26" name="cts logo" descr="cts-logo.png"/>
+          <p:cNvPicPr>
+            <a:picLocks noChangeAspect="1"/>
+          </p:cNvPicPr>
+          <p:nvPr/>
+        </p:nvPicPr>
+        <p:blipFill>
+          <a:blip r:embed="rId4"/>
+          <a:stretch>
+            <a:fillRect/>
+          </a:stretch>
+        </p:blipFill>
+        <p:spPr>
+          <a:xfrm>
+            <a:off x="7680959" y="182880"/>
+            <a:ext cx="960120" cy="539696"/>
+          </a:xfrm>
+          <a:prstGeom prst="rect">
+            <a:avLst/>
+          </a:prstGeom>
+        </p:spPr>
+      </p:pic>
+      <p:sp>
+        <p:nvSpPr>
+          <p:cNvPr id="8" name="Text 5b"/>
+          <p:cNvSpPr txBox="1"/>
+          <p:nvPr/>
+        </p:nvSpPr>
+        <p:spPr>
+          <a:xfrm>
+            <a:off x="4663440" y="3309166"/>
+            <a:ext cx="3703320" cy="1290265"/>
+          </a:xfrm>
+          <a:prstGeom prst="rect">
+            <a:avLst/>
+          </a:prstGeom>
+          <a:noFill/>
+          <a:ln/>
+        </p:spPr>
+        <p:txBody>
+          <a:bodyPr wrap="square" lIns="0" tIns="0" rIns="0" bIns="0" rtlCol="0" anchor="t">
+            <a:normAutofit fontScale="77500" lnSpcReduction="20000"/>
+          </a:bodyPr>
+          <a:lstStyle/>
           <a:p>
             <a:pPr marL="342900" indent="-342900">
               <a:lnSpc>
@@ -14006,75 +14219,6 @@
           </a:p>
         </p:txBody>
       </p:sp>
-      <p:sp>
-        <p:nvSpPr>
-          <p:cNvPr id="25" name="Slide Number Placeholder 0"/>
-          <p:cNvSpPr>
-            <a:spLocks noGrp="1"/>
-          </p:cNvSpPr>
-          <p:nvPr>
-            <p:ph type="sldNum" sz="quarter" idx="4294967295"/>
-          </p:nvPr>
-        </p:nvSpPr>
-        <p:spPr>
-          <a:xfrm>
-            <a:off x="8092440" y="4736592"/>
-            <a:ext cx="548640" cy="228600"/>
-          </a:xfrm>
-          <a:prstGeom prst="rect">
-            <a:avLst/>
-          </a:prstGeom>
-          <a:extLst>
-            <a:ext uri="{C572A759-6A51-4108-AA02-DFA0A04FC94B}">
-              <ma14:wrappingTextBoxFlag xmlns="" xmlns:ma14="http://schemas.microsoft.com/office/mac/drawingml/2011/main" val="0"/>
-            </a:ext>
-          </a:extLst>
-        </p:spPr>
-        <p:txBody>
-          <a:bodyPr/>
-          <a:lstStyle>
-            <a:lvl1pPr>
-              <a:defRPr sz="800">
-                <a:solidFill>
-                  <a:srgbClr val="6B7585"/>
-                </a:solidFill>
-              </a:defRPr>
-            </a:lvl1pPr>
-          </a:lstStyle>
-          <a:p>
-            <a:pPr algn="r"/>
-            <a:fld id="{F7021451-1387-4CA6-816F-3879F97B5CBC}" type="slidenum">
-              <a:rPr lang="en-US" b="0"/>
-              <a:t>28</a:t>
-            </a:fld>
-            <a:endParaRPr lang="en-US"/>
-          </a:p>
-        </p:txBody>
-      </p:sp>
-      <p:pic>
-        <p:nvPicPr>
-          <p:cNvPr id="26" name="cts logo" descr="cts-logo.png"/>
-          <p:cNvPicPr>
-            <a:picLocks noChangeAspect="1"/>
-          </p:cNvPicPr>
-          <p:nvPr/>
-        </p:nvPicPr>
-        <p:blipFill>
-          <a:blip r:embed="rId4"/>
-          <a:stretch>
-            <a:fillRect/>
-          </a:stretch>
-        </p:blipFill>
-        <p:spPr>
-          <a:xfrm>
-            <a:off x="7680959" y="182880"/>
-            <a:ext cx="960120" cy="539696"/>
-          </a:xfrm>
-          <a:prstGeom prst="rect">
-            <a:avLst/>
-          </a:prstGeom>
-        </p:spPr>
-      </p:pic>
     </p:spTree>
   </p:cSld>
   <p:clrMapOvr>
@@ -17020,102 +17164,102 @@
           <a:chExt cx="0" cy="0"/>
         </a:xfrm>
       </p:grpSpPr>
-      <p:sp>
-        <p:nvSpPr>
-          <p:cNvPr id="2" name="Text 0"/>
-          <p:cNvSpPr txBox="1"/>
-          <p:nvPr/>
-        </p:nvSpPr>
-        <p:spPr>
-          <a:xfrm>
-            <a:off x="502920" y="365760"/>
-            <a:ext cx="6400800" cy="274320"/>
-          </a:xfrm>
-          <a:prstGeom prst="rect">
-            <a:avLst/>
-          </a:prstGeom>
-          <a:noFill/>
-          <a:ln/>
-        </p:spPr>
-        <p:txBody>
-          <a:bodyPr wrap="square" lIns="0" tIns="0" rIns="0" bIns="0" rtlCol="0" anchor="ctr"/>
-          <a:lstStyle/>
-          <a:p>
-            <a:pPr marL="0" indent="0">
-              <a:buNone/>
-            </a:pPr>
-            <a:r>
-              <a:rPr lang="en-US" sz="950" b="1" kern="0" spc="220">
-                <a:solidFill>
-                  <a:srgbClr val="122B82"/>
-                </a:solidFill>
-              </a:rPr>
-              <a:t>PEOPLE AND UTILISATION</a:t>
-            </a:r>
-            <a:endParaRPr lang="en-US" sz="950"/>
-          </a:p>
-        </p:txBody>
-      </p:sp>
-      <p:sp>
-        <p:nvSpPr>
-          <p:cNvPr id="3" name="Text 1"/>
-          <p:cNvSpPr txBox="1"/>
-          <p:nvPr/>
-        </p:nvSpPr>
-        <p:spPr>
-          <a:xfrm>
-            <a:off x="502920" y="640080"/>
-            <a:ext cx="7315200" cy="365760"/>
-          </a:xfrm>
-          <a:prstGeom prst="rect">
-            <a:avLst/>
-          </a:prstGeom>
-          <a:noFill/>
-          <a:ln/>
-        </p:spPr>
-        <p:txBody>
-          <a:bodyPr wrap="square" lIns="0" tIns="0" rIns="0" bIns="0" rtlCol="0" anchor="ctr"/>
-          <a:lstStyle/>
-          <a:p>
-            <a:pPr marL="0" indent="0" algn="ctr">
-              <a:buNone/>
-            </a:pPr>
-            <a:r>
-              <a:rPr lang="en-US" sz="2200" b="1">
-                <a:solidFill>
-                  <a:srgbClr val="242C39"/>
-                </a:solidFill>
-              </a:rPr>
-              <a:t>How each department spent its hours, Sep 26</a:t>
-            </a:r>
-            <a:endParaRPr lang="en-US" sz="2700"/>
-          </a:p>
-        </p:txBody>
-      </p:sp>
       <p:pic>
         <p:nvPicPr>
-          <p:cNvPr id="4" name="snip util_chart" descr="/home/user/Claude/deck/snips/util_chart.png"/>
+          <p:cNvPr id="27" name="snip util_chart" descr="util_chart.png"/>
           <p:cNvPicPr>
             <a:picLocks noChangeAspect="1"/>
           </p:cNvPicPr>
           <p:nvPr/>
         </p:nvPicPr>
         <p:blipFill>
-          <a:blip r:embed="rId3"/>
+          <a:blip r:embed="rId5"/>
           <a:stretch>
             <a:fillRect/>
           </a:stretch>
         </p:blipFill>
         <p:spPr>
           <a:xfrm>
-            <a:off x="502920" y="1444752"/>
-            <a:ext cx="5074919" cy="2771278"/>
+            <a:off x="559702" y="1005840"/>
+            <a:ext cx="8024594" cy="2133881"/>
           </a:xfrm>
           <a:prstGeom prst="rect">
             <a:avLst/>
           </a:prstGeom>
         </p:spPr>
       </p:pic>
+      <p:sp>
+        <p:nvSpPr>
+          <p:cNvPr id="2" name="Text 0"/>
+          <p:cNvSpPr txBox="1"/>
+          <p:nvPr/>
+        </p:nvSpPr>
+        <p:spPr>
+          <a:xfrm>
+            <a:off x="502920" y="365760"/>
+            <a:ext cx="6400800" cy="274320"/>
+          </a:xfrm>
+          <a:prstGeom prst="rect">
+            <a:avLst/>
+          </a:prstGeom>
+          <a:noFill/>
+          <a:ln/>
+        </p:spPr>
+        <p:txBody>
+          <a:bodyPr wrap="square" lIns="0" tIns="0" rIns="0" bIns="0" rtlCol="0" anchor="ctr"/>
+          <a:lstStyle/>
+          <a:p>
+            <a:pPr marL="0" indent="0">
+              <a:buNone/>
+            </a:pPr>
+            <a:r>
+              <a:rPr lang="en-US" sz="950" b="1" kern="0" spc="220">
+                <a:solidFill>
+                  <a:srgbClr val="122B82"/>
+                </a:solidFill>
+              </a:rPr>
+              <a:t>PEOPLE AND UTILISATION</a:t>
+            </a:r>
+            <a:endParaRPr lang="en-US" sz="950"/>
+          </a:p>
+        </p:txBody>
+      </p:sp>
+      <p:sp>
+        <p:nvSpPr>
+          <p:cNvPr id="3" name="Text 1"/>
+          <p:cNvSpPr txBox="1"/>
+          <p:nvPr/>
+        </p:nvSpPr>
+        <p:spPr>
+          <a:xfrm>
+            <a:off x="502920" y="640080"/>
+            <a:ext cx="7315200" cy="365760"/>
+          </a:xfrm>
+          <a:prstGeom prst="rect">
+            <a:avLst/>
+          </a:prstGeom>
+          <a:noFill/>
+          <a:ln/>
+        </p:spPr>
+        <p:txBody>
+          <a:bodyPr wrap="square" lIns="0" tIns="0" rIns="0" bIns="0" rtlCol="0" anchor="ctr"/>
+          <a:lstStyle/>
+          <a:p>
+            <a:pPr marL="0" indent="0" algn="ctr">
+              <a:buNone/>
+            </a:pPr>
+            <a:r>
+              <a:rPr lang="en-US" sz="2200" b="1">
+                <a:solidFill>
+                  <a:srgbClr val="242C39"/>
+                </a:solidFill>
+              </a:rPr>
+              <a:t>How each department spent its hours, Sep 26</a:t>
+            </a:r>
+            <a:endParaRPr lang="en-US" sz="2700"/>
+          </a:p>
+        </p:txBody>
+      </p:sp>
       <p:sp>
         <p:nvSpPr>
           <p:cNvPr id="6" name="commentary panel"/>
@@ -17124,8 +17268,8 @@
         </p:nvSpPr>
         <p:spPr>
           <a:xfrm>
-            <a:off x="5806439" y="1463040"/>
-            <a:ext cx="2834640" cy="3154680"/>
+            <a:off x="502920" y="3231161"/>
+            <a:ext cx="8138160" cy="1395702"/>
           </a:xfrm>
           <a:prstGeom prst="rect">
             <a:avLst/>
@@ -17151,8 +17295,8 @@
         </p:nvSpPr>
         <p:spPr>
           <a:xfrm>
-            <a:off x="5989319" y="1627632"/>
-            <a:ext cx="2468880" cy="228600"/>
+            <a:off x="685800" y="3304313"/>
+            <a:ext cx="2743200" cy="228600"/>
           </a:xfrm>
           <a:prstGeom prst="rect">
             <a:avLst/>
@@ -17187,8 +17331,8 @@
         </p:nvSpPr>
         <p:spPr>
           <a:xfrm>
-            <a:off x="5989319" y="1901952"/>
-            <a:ext cx="2468880" cy="2706623"/>
+            <a:off x="685800" y="3478049"/>
+            <a:ext cx="3703320" cy="1121382"/>
           </a:xfrm>
           <a:prstGeom prst="rect">
             <a:avLst/>
@@ -17243,6 +17387,99 @@
             </a:r>
             <a:endParaRPr lang="en-US" sz="850"/>
           </a:p>
+        </p:txBody>
+      </p:sp>
+      <p:sp>
+        <p:nvSpPr>
+          <p:cNvPr id="25" name="Slide Number Placeholder 0"/>
+          <p:cNvSpPr>
+            <a:spLocks noGrp="1"/>
+          </p:cNvSpPr>
+          <p:nvPr>
+            <p:ph type="sldNum" sz="quarter" idx="4294967295"/>
+          </p:nvPr>
+        </p:nvSpPr>
+        <p:spPr>
+          <a:xfrm>
+            <a:off x="8092440" y="4736592"/>
+            <a:ext cx="548640" cy="228600"/>
+          </a:xfrm>
+          <a:prstGeom prst="rect">
+            <a:avLst/>
+          </a:prstGeom>
+          <a:extLst>
+            <a:ext uri="{C572A759-6A51-4108-AA02-DFA0A04FC94B}">
+              <ma14:wrappingTextBoxFlag xmlns="" xmlns:ma14="http://schemas.microsoft.com/office/mac/drawingml/2011/main" val="0"/>
+            </a:ext>
+          </a:extLst>
+        </p:spPr>
+        <p:txBody>
+          <a:bodyPr/>
+          <a:lstStyle>
+            <a:lvl1pPr>
+              <a:defRPr sz="800">
+                <a:solidFill>
+                  <a:srgbClr val="6B7585"/>
+                </a:solidFill>
+              </a:defRPr>
+            </a:lvl1pPr>
+          </a:lstStyle>
+          <a:p>
+            <a:pPr algn="r"/>
+            <a:fld id="{F7021451-1387-4CA6-816F-3879F97B5CBC}" type="slidenum">
+              <a:rPr lang="en-US" b="0"/>
+              <a:t>31</a:t>
+            </a:fld>
+            <a:endParaRPr lang="en-US"/>
+          </a:p>
+        </p:txBody>
+      </p:sp>
+      <p:pic>
+        <p:nvPicPr>
+          <p:cNvPr id="26" name="cts logo" descr="cts-logo.png"/>
+          <p:cNvPicPr>
+            <a:picLocks noChangeAspect="1"/>
+          </p:cNvPicPr>
+          <p:nvPr/>
+        </p:nvPicPr>
+        <p:blipFill>
+          <a:blip r:embed="rId4"/>
+          <a:stretch>
+            <a:fillRect/>
+          </a:stretch>
+        </p:blipFill>
+        <p:spPr>
+          <a:xfrm>
+            <a:off x="7680959" y="182880"/>
+            <a:ext cx="960120" cy="539696"/>
+          </a:xfrm>
+          <a:prstGeom prst="rect">
+            <a:avLst/>
+          </a:prstGeom>
+        </p:spPr>
+      </p:pic>
+      <p:sp>
+        <p:nvSpPr>
+          <p:cNvPr id="8" name="Text 5b"/>
+          <p:cNvSpPr txBox="1"/>
+          <p:nvPr/>
+        </p:nvSpPr>
+        <p:spPr>
+          <a:xfrm>
+            <a:off x="4663440" y="3478049"/>
+            <a:ext cx="3703320" cy="1121382"/>
+          </a:xfrm>
+          <a:prstGeom prst="rect">
+            <a:avLst/>
+          </a:prstGeom>
+          <a:noFill/>
+          <a:ln/>
+        </p:spPr>
+        <p:txBody>
+          <a:bodyPr wrap="square" lIns="0" tIns="0" rIns="0" bIns="0" rtlCol="0" anchor="t">
+            <a:normAutofit fontScale="92500"/>
+          </a:bodyPr>
+          <a:lstStyle/>
           <a:p>
             <a:pPr marL="342900" indent="-342900">
               <a:lnSpc>
@@ -17308,75 +17545,6 @@
           </a:p>
         </p:txBody>
       </p:sp>
-      <p:sp>
-        <p:nvSpPr>
-          <p:cNvPr id="25" name="Slide Number Placeholder 0"/>
-          <p:cNvSpPr>
-            <a:spLocks noGrp="1"/>
-          </p:cNvSpPr>
-          <p:nvPr>
-            <p:ph type="sldNum" sz="quarter" idx="4294967295"/>
-          </p:nvPr>
-        </p:nvSpPr>
-        <p:spPr>
-          <a:xfrm>
-            <a:off x="8092440" y="4736592"/>
-            <a:ext cx="548640" cy="228600"/>
-          </a:xfrm>
-          <a:prstGeom prst="rect">
-            <a:avLst/>
-          </a:prstGeom>
-          <a:extLst>
-            <a:ext uri="{C572A759-6A51-4108-AA02-DFA0A04FC94B}">
-              <ma14:wrappingTextBoxFlag xmlns="" xmlns:ma14="http://schemas.microsoft.com/office/mac/drawingml/2011/main" val="0"/>
-            </a:ext>
-          </a:extLst>
-        </p:spPr>
-        <p:txBody>
-          <a:bodyPr/>
-          <a:lstStyle>
-            <a:lvl1pPr>
-              <a:defRPr sz="800">
-                <a:solidFill>
-                  <a:srgbClr val="6B7585"/>
-                </a:solidFill>
-              </a:defRPr>
-            </a:lvl1pPr>
-          </a:lstStyle>
-          <a:p>
-            <a:pPr algn="r"/>
-            <a:fld id="{F7021451-1387-4CA6-816F-3879F97B5CBC}" type="slidenum">
-              <a:rPr lang="en-US" b="0"/>
-              <a:t>31</a:t>
-            </a:fld>
-            <a:endParaRPr lang="en-US"/>
-          </a:p>
-        </p:txBody>
-      </p:sp>
-      <p:pic>
-        <p:nvPicPr>
-          <p:cNvPr id="26" name="cts logo" descr="cts-logo.png"/>
-          <p:cNvPicPr>
-            <a:picLocks noChangeAspect="1"/>
-          </p:cNvPicPr>
-          <p:nvPr/>
-        </p:nvPicPr>
-        <p:blipFill>
-          <a:blip r:embed="rId4"/>
-          <a:stretch>
-            <a:fillRect/>
-          </a:stretch>
-        </p:blipFill>
-        <p:spPr>
-          <a:xfrm>
-            <a:off x="7680959" y="182880"/>
-            <a:ext cx="960120" cy="539696"/>
-          </a:xfrm>
-          <a:prstGeom prst="rect">
-            <a:avLst/>
-          </a:prstGeom>
-        </p:spPr>
-      </p:pic>
     </p:spTree>
   </p:cSld>
   <p:clrMapOvr>
@@ -17402,102 +17570,102 @@
           <a:chExt cx="0" cy="0"/>
         </a:xfrm>
       </p:grpSpPr>
-      <p:sp>
-        <p:nvSpPr>
-          <p:cNvPr id="2" name="Text 0"/>
-          <p:cNvSpPr txBox="1"/>
-          <p:nvPr/>
-        </p:nvSpPr>
-        <p:spPr>
-          <a:xfrm>
-            <a:off x="502920" y="365760"/>
-            <a:ext cx="6400800" cy="274320"/>
-          </a:xfrm>
-          <a:prstGeom prst="rect">
-            <a:avLst/>
-          </a:prstGeom>
-          <a:noFill/>
-          <a:ln/>
-        </p:spPr>
-        <p:txBody>
-          <a:bodyPr wrap="square" lIns="0" tIns="0" rIns="0" bIns="0" rtlCol="0" anchor="ctr"/>
-          <a:lstStyle/>
-          <a:p>
-            <a:pPr marL="0" indent="0">
-              <a:buNone/>
-            </a:pPr>
-            <a:r>
-              <a:rPr lang="en-US" sz="950" b="1" kern="0" spc="220">
-                <a:solidFill>
-                  <a:srgbClr val="122B82"/>
-                </a:solidFill>
-              </a:rPr>
-              <a:t>PEOPLE AND UTILISATION</a:t>
-            </a:r>
-            <a:endParaRPr lang="en-US" sz="950"/>
-          </a:p>
-        </p:txBody>
-      </p:sp>
-      <p:sp>
-        <p:nvSpPr>
-          <p:cNvPr id="3" name="Text 1"/>
-          <p:cNvSpPr txBox="1"/>
-          <p:nvPr/>
-        </p:nvSpPr>
-        <p:spPr>
-          <a:xfrm>
-            <a:off x="502920" y="640080"/>
-            <a:ext cx="7315200" cy="365760"/>
-          </a:xfrm>
-          <a:prstGeom prst="rect">
-            <a:avLst/>
-          </a:prstGeom>
-          <a:noFill/>
-          <a:ln/>
-        </p:spPr>
-        <p:txBody>
-          <a:bodyPr wrap="square" lIns="0" tIns="0" rIns="0" bIns="0" rtlCol="0" anchor="ctr"/>
-          <a:lstStyle/>
-          <a:p>
-            <a:pPr marL="0" indent="0" algn="ctr">
-              <a:buNone/>
-            </a:pPr>
-            <a:r>
-              <a:rPr lang="en-US" sz="2200" b="1">
-                <a:solidFill>
-                  <a:srgbClr val="242C39"/>
-                </a:solidFill>
-              </a:rPr>
-              <a:t>Hours, the three departments, Sep 26</a:t>
-            </a:r>
-            <a:endParaRPr lang="en-US" sz="2700"/>
-          </a:p>
-        </p:txBody>
-      </p:sp>
       <p:pic>
         <p:nvPicPr>
-          <p:cNvPr id="4" name="snip util_three" descr="/home/user/Claude/deck/snips/util_three.png"/>
+          <p:cNvPr id="27" name="snip util_three" descr="util_three.png"/>
           <p:cNvPicPr>
             <a:picLocks noChangeAspect="1"/>
           </p:cNvPicPr>
           <p:nvPr/>
         </p:nvPicPr>
         <p:blipFill>
-          <a:blip r:embed="rId3"/>
+          <a:blip r:embed="rId5"/>
           <a:stretch>
             <a:fillRect/>
           </a:stretch>
         </p:blipFill>
         <p:spPr>
           <a:xfrm>
-            <a:off x="502920" y="1444752"/>
-            <a:ext cx="4800599" cy="2226875"/>
+            <a:off x="587282" y="1005840"/>
+            <a:ext cx="7969435" cy="1964998"/>
           </a:xfrm>
           <a:prstGeom prst="rect">
             <a:avLst/>
           </a:prstGeom>
         </p:spPr>
       </p:pic>
+      <p:sp>
+        <p:nvSpPr>
+          <p:cNvPr id="2" name="Text 0"/>
+          <p:cNvSpPr txBox="1"/>
+          <p:nvPr/>
+        </p:nvSpPr>
+        <p:spPr>
+          <a:xfrm>
+            <a:off x="502920" y="365760"/>
+            <a:ext cx="6400800" cy="274320"/>
+          </a:xfrm>
+          <a:prstGeom prst="rect">
+            <a:avLst/>
+          </a:prstGeom>
+          <a:noFill/>
+          <a:ln/>
+        </p:spPr>
+        <p:txBody>
+          <a:bodyPr wrap="square" lIns="0" tIns="0" rIns="0" bIns="0" rtlCol="0" anchor="ctr"/>
+          <a:lstStyle/>
+          <a:p>
+            <a:pPr marL="0" indent="0">
+              <a:buNone/>
+            </a:pPr>
+            <a:r>
+              <a:rPr lang="en-US" sz="950" b="1" kern="0" spc="220">
+                <a:solidFill>
+                  <a:srgbClr val="122B82"/>
+                </a:solidFill>
+              </a:rPr>
+              <a:t>PEOPLE AND UTILISATION</a:t>
+            </a:r>
+            <a:endParaRPr lang="en-US" sz="950"/>
+          </a:p>
+        </p:txBody>
+      </p:sp>
+      <p:sp>
+        <p:nvSpPr>
+          <p:cNvPr id="3" name="Text 1"/>
+          <p:cNvSpPr txBox="1"/>
+          <p:nvPr/>
+        </p:nvSpPr>
+        <p:spPr>
+          <a:xfrm>
+            <a:off x="502920" y="640080"/>
+            <a:ext cx="7315200" cy="365760"/>
+          </a:xfrm>
+          <a:prstGeom prst="rect">
+            <a:avLst/>
+          </a:prstGeom>
+          <a:noFill/>
+          <a:ln/>
+        </p:spPr>
+        <p:txBody>
+          <a:bodyPr wrap="square" lIns="0" tIns="0" rIns="0" bIns="0" rtlCol="0" anchor="ctr"/>
+          <a:lstStyle/>
+          <a:p>
+            <a:pPr marL="0" indent="0" algn="ctr">
+              <a:buNone/>
+            </a:pPr>
+            <a:r>
+              <a:rPr lang="en-US" sz="2200" b="1">
+                <a:solidFill>
+                  <a:srgbClr val="242C39"/>
+                </a:solidFill>
+              </a:rPr>
+              <a:t>Hours, the three departments, Sep 26</a:t>
+            </a:r>
+            <a:endParaRPr lang="en-US" sz="2700"/>
+          </a:p>
+        </p:txBody>
+      </p:sp>
       <p:sp>
         <p:nvSpPr>
           <p:cNvPr id="6" name="commentary panel"/>
@@ -17506,8 +17674,8 @@
         </p:nvSpPr>
         <p:spPr>
           <a:xfrm>
-            <a:off x="5532119" y="1463040"/>
-            <a:ext cx="3108960" cy="3154680"/>
+            <a:off x="502920" y="3062278"/>
+            <a:ext cx="8138160" cy="1564585"/>
           </a:xfrm>
           <a:prstGeom prst="rect">
             <a:avLst/>
@@ -17533,7 +17701,7 @@
         </p:nvSpPr>
         <p:spPr>
           <a:xfrm>
-            <a:off x="5714999" y="1627632"/>
+            <a:off x="685800" y="3135430"/>
             <a:ext cx="2743200" cy="228600"/>
           </a:xfrm>
           <a:prstGeom prst="rect">
@@ -17569,8 +17737,8 @@
         </p:nvSpPr>
         <p:spPr>
           <a:xfrm>
-            <a:off x="5714999" y="1901952"/>
-            <a:ext cx="2743200" cy="2706623"/>
+            <a:off x="685800" y="3309166"/>
+            <a:ext cx="3703320" cy="1290265"/>
           </a:xfrm>
           <a:prstGeom prst="rect">
             <a:avLst/>
@@ -17625,6 +17793,99 @@
             </a:r>
             <a:endParaRPr lang="en-US" sz="850"/>
           </a:p>
+        </p:txBody>
+      </p:sp>
+      <p:sp>
+        <p:nvSpPr>
+          <p:cNvPr id="25" name="Slide Number Placeholder 0"/>
+          <p:cNvSpPr>
+            <a:spLocks noGrp="1"/>
+          </p:cNvSpPr>
+          <p:nvPr>
+            <p:ph type="sldNum" sz="quarter" idx="4294967295"/>
+          </p:nvPr>
+        </p:nvSpPr>
+        <p:spPr>
+          <a:xfrm>
+            <a:off x="8092440" y="4736592"/>
+            <a:ext cx="548640" cy="228600"/>
+          </a:xfrm>
+          <a:prstGeom prst="rect">
+            <a:avLst/>
+          </a:prstGeom>
+          <a:extLst>
+            <a:ext uri="{C572A759-6A51-4108-AA02-DFA0A04FC94B}">
+              <ma14:wrappingTextBoxFlag xmlns="" xmlns:ma14="http://schemas.microsoft.com/office/mac/drawingml/2011/main" val="0"/>
+            </a:ext>
+          </a:extLst>
+        </p:spPr>
+        <p:txBody>
+          <a:bodyPr/>
+          <a:lstStyle>
+            <a:lvl1pPr>
+              <a:defRPr sz="800">
+                <a:solidFill>
+                  <a:srgbClr val="6B7585"/>
+                </a:solidFill>
+              </a:defRPr>
+            </a:lvl1pPr>
+          </a:lstStyle>
+          <a:p>
+            <a:pPr algn="r"/>
+            <a:fld id="{F7021451-1387-4CA6-816F-3879F97B5CBC}" type="slidenum">
+              <a:rPr lang="en-US" b="0"/>
+              <a:t>32</a:t>
+            </a:fld>
+            <a:endParaRPr lang="en-US"/>
+          </a:p>
+        </p:txBody>
+      </p:sp>
+      <p:pic>
+        <p:nvPicPr>
+          <p:cNvPr id="26" name="cts logo" descr="cts-logo.png"/>
+          <p:cNvPicPr>
+            <a:picLocks noChangeAspect="1"/>
+          </p:cNvPicPr>
+          <p:nvPr/>
+        </p:nvPicPr>
+        <p:blipFill>
+          <a:blip r:embed="rId4"/>
+          <a:stretch>
+            <a:fillRect/>
+          </a:stretch>
+        </p:blipFill>
+        <p:spPr>
+          <a:xfrm>
+            <a:off x="7680959" y="182880"/>
+            <a:ext cx="960120" cy="539696"/>
+          </a:xfrm>
+          <a:prstGeom prst="rect">
+            <a:avLst/>
+          </a:prstGeom>
+        </p:spPr>
+      </p:pic>
+      <p:sp>
+        <p:nvSpPr>
+          <p:cNvPr id="8" name="Text 5b"/>
+          <p:cNvSpPr txBox="1"/>
+          <p:nvPr/>
+        </p:nvSpPr>
+        <p:spPr>
+          <a:xfrm>
+            <a:off x="4663440" y="3309166"/>
+            <a:ext cx="3703320" cy="1290265"/>
+          </a:xfrm>
+          <a:prstGeom prst="rect">
+            <a:avLst/>
+          </a:prstGeom>
+          <a:noFill/>
+          <a:ln/>
+        </p:spPr>
+        <p:txBody>
+          <a:bodyPr wrap="square" lIns="0" tIns="0" rIns="0" bIns="0" rtlCol="0" anchor="t">
+            <a:normAutofit fontScale="85000" lnSpcReduction="10000"/>
+          </a:bodyPr>
+          <a:lstStyle/>
           <a:p>
             <a:pPr marL="342900" indent="-342900">
               <a:lnSpc>
@@ -17690,75 +17951,6 @@
           </a:p>
         </p:txBody>
       </p:sp>
-      <p:sp>
-        <p:nvSpPr>
-          <p:cNvPr id="25" name="Slide Number Placeholder 0"/>
-          <p:cNvSpPr>
-            <a:spLocks noGrp="1"/>
-          </p:cNvSpPr>
-          <p:nvPr>
-            <p:ph type="sldNum" sz="quarter" idx="4294967295"/>
-          </p:nvPr>
-        </p:nvSpPr>
-        <p:spPr>
-          <a:xfrm>
-            <a:off x="8092440" y="4736592"/>
-            <a:ext cx="548640" cy="228600"/>
-          </a:xfrm>
-          <a:prstGeom prst="rect">
-            <a:avLst/>
-          </a:prstGeom>
-          <a:extLst>
-            <a:ext uri="{C572A759-6A51-4108-AA02-DFA0A04FC94B}">
-              <ma14:wrappingTextBoxFlag xmlns="" xmlns:ma14="http://schemas.microsoft.com/office/mac/drawingml/2011/main" val="0"/>
-            </a:ext>
-          </a:extLst>
-        </p:spPr>
-        <p:txBody>
-          <a:bodyPr/>
-          <a:lstStyle>
-            <a:lvl1pPr>
-              <a:defRPr sz="800">
-                <a:solidFill>
-                  <a:srgbClr val="6B7585"/>
-                </a:solidFill>
-              </a:defRPr>
-            </a:lvl1pPr>
-          </a:lstStyle>
-          <a:p>
-            <a:pPr algn="r"/>
-            <a:fld id="{F7021451-1387-4CA6-816F-3879F97B5CBC}" type="slidenum">
-              <a:rPr lang="en-US" b="0"/>
-              <a:t>32</a:t>
-            </a:fld>
-            <a:endParaRPr lang="en-US"/>
-          </a:p>
-        </p:txBody>
-      </p:sp>
-      <p:pic>
-        <p:nvPicPr>
-          <p:cNvPr id="26" name="cts logo" descr="cts-logo.png"/>
-          <p:cNvPicPr>
-            <a:picLocks noChangeAspect="1"/>
-          </p:cNvPicPr>
-          <p:nvPr/>
-        </p:nvPicPr>
-        <p:blipFill>
-          <a:blip r:embed="rId4"/>
-          <a:stretch>
-            <a:fillRect/>
-          </a:stretch>
-        </p:blipFill>
-        <p:spPr>
-          <a:xfrm>
-            <a:off x="7680959" y="182880"/>
-            <a:ext cx="960120" cy="539696"/>
-          </a:xfrm>
-          <a:prstGeom prst="rect">
-            <a:avLst/>
-          </a:prstGeom>
-        </p:spPr>
-      </p:pic>
     </p:spTree>
   </p:cSld>
   <p:clrMapOvr>
@@ -18067,102 +18259,102 @@
           <a:chExt cx="0" cy="0"/>
         </a:xfrm>
       </p:grpSpPr>
-      <p:sp>
-        <p:nvSpPr>
-          <p:cNvPr id="2" name="Text 0"/>
-          <p:cNvSpPr txBox="1"/>
-          <p:nvPr/>
-        </p:nvSpPr>
-        <p:spPr>
-          <a:xfrm>
-            <a:off x="502920" y="365760"/>
-            <a:ext cx="6400800" cy="274320"/>
-          </a:xfrm>
-          <a:prstGeom prst="rect">
-            <a:avLst/>
-          </a:prstGeom>
-          <a:noFill/>
-          <a:ln/>
-        </p:spPr>
-        <p:txBody>
-          <a:bodyPr wrap="square" lIns="0" tIns="0" rIns="0" bIns="0" rtlCol="0" anchor="ctr"/>
-          <a:lstStyle/>
-          <a:p>
-            <a:pPr marL="0" indent="0">
-              <a:buNone/>
-            </a:pPr>
-            <a:r>
-              <a:rPr lang="en-US" sz="950" b="1" kern="0" spc="220">
-                <a:solidFill>
-                  <a:srgbClr val="122B82"/>
-                </a:solidFill>
-              </a:rPr>
-              <a:t>BUDGET AND OUTLOOK</a:t>
-            </a:r>
-            <a:endParaRPr lang="en-US" sz="950"/>
-          </a:p>
-        </p:txBody>
-      </p:sp>
-      <p:sp>
-        <p:nvSpPr>
-          <p:cNvPr id="3" name="Text 1"/>
-          <p:cNvSpPr txBox="1"/>
-          <p:nvPr/>
-        </p:nvSpPr>
-        <p:spPr>
-          <a:xfrm>
-            <a:off x="502920" y="640080"/>
-            <a:ext cx="7315200" cy="365760"/>
-          </a:xfrm>
-          <a:prstGeom prst="rect">
-            <a:avLst/>
-          </a:prstGeom>
-          <a:noFill/>
-          <a:ln/>
-        </p:spPr>
-        <p:txBody>
-          <a:bodyPr wrap="square" lIns="0" tIns="0" rIns="0" bIns="0" rtlCol="0" anchor="ctr"/>
-          <a:lstStyle/>
-          <a:p>
-            <a:pPr marL="0" indent="0" algn="ctr">
-              <a:buNone/>
-            </a:pPr>
-            <a:r>
-              <a:rPr lang="en-US" sz="2200" b="1">
-                <a:solidFill>
-                  <a:srgbClr val="242C39"/>
-                </a:solidFill>
-              </a:rPr>
-              <a:t>Revenue by month against budget</a:t>
-            </a:r>
-            <a:endParaRPr lang="en-US" sz="2700"/>
-          </a:p>
-        </p:txBody>
-      </p:sp>
       <p:pic>
         <p:nvPicPr>
-          <p:cNvPr id="4" name="snip income_month" descr="/home/user/Claude/deck/snips/income_month.png"/>
+          <p:cNvPr id="27" name="snip income_month" descr="income_month.png"/>
           <p:cNvPicPr>
             <a:picLocks noChangeAspect="1"/>
           </p:cNvPicPr>
           <p:nvPr/>
         </p:nvPicPr>
         <p:blipFill>
-          <a:blip r:embed="rId3"/>
+          <a:blip r:embed="rId5"/>
           <a:stretch>
             <a:fillRect/>
           </a:stretch>
         </p:blipFill>
         <p:spPr>
           <a:xfrm>
-            <a:off x="502920" y="1444752"/>
-            <a:ext cx="4709159" cy="2198519"/>
+            <a:off x="543882" y="1005840"/>
+            <a:ext cx="8056234" cy="2133881"/>
           </a:xfrm>
           <a:prstGeom prst="rect">
             <a:avLst/>
           </a:prstGeom>
         </p:spPr>
       </p:pic>
+      <p:sp>
+        <p:nvSpPr>
+          <p:cNvPr id="2" name="Text 0"/>
+          <p:cNvSpPr txBox="1"/>
+          <p:nvPr/>
+        </p:nvSpPr>
+        <p:spPr>
+          <a:xfrm>
+            <a:off x="502920" y="365760"/>
+            <a:ext cx="6400800" cy="274320"/>
+          </a:xfrm>
+          <a:prstGeom prst="rect">
+            <a:avLst/>
+          </a:prstGeom>
+          <a:noFill/>
+          <a:ln/>
+        </p:spPr>
+        <p:txBody>
+          <a:bodyPr wrap="square" lIns="0" tIns="0" rIns="0" bIns="0" rtlCol="0" anchor="ctr"/>
+          <a:lstStyle/>
+          <a:p>
+            <a:pPr marL="0" indent="0">
+              <a:buNone/>
+            </a:pPr>
+            <a:r>
+              <a:rPr lang="en-US" sz="950" b="1" kern="0" spc="220">
+                <a:solidFill>
+                  <a:srgbClr val="122B82"/>
+                </a:solidFill>
+              </a:rPr>
+              <a:t>BUDGET AND OUTLOOK</a:t>
+            </a:r>
+            <a:endParaRPr lang="en-US" sz="950"/>
+          </a:p>
+        </p:txBody>
+      </p:sp>
+      <p:sp>
+        <p:nvSpPr>
+          <p:cNvPr id="3" name="Text 1"/>
+          <p:cNvSpPr txBox="1"/>
+          <p:nvPr/>
+        </p:nvSpPr>
+        <p:spPr>
+          <a:xfrm>
+            <a:off x="502920" y="640080"/>
+            <a:ext cx="7315200" cy="365760"/>
+          </a:xfrm>
+          <a:prstGeom prst="rect">
+            <a:avLst/>
+          </a:prstGeom>
+          <a:noFill/>
+          <a:ln/>
+        </p:spPr>
+        <p:txBody>
+          <a:bodyPr wrap="square" lIns="0" tIns="0" rIns="0" bIns="0" rtlCol="0" anchor="ctr"/>
+          <a:lstStyle/>
+          <a:p>
+            <a:pPr marL="0" indent="0" algn="ctr">
+              <a:buNone/>
+            </a:pPr>
+            <a:r>
+              <a:rPr lang="en-US" sz="2200" b="1">
+                <a:solidFill>
+                  <a:srgbClr val="242C39"/>
+                </a:solidFill>
+              </a:rPr>
+              <a:t>Revenue by month against budget</a:t>
+            </a:r>
+            <a:endParaRPr lang="en-US" sz="2700"/>
+          </a:p>
+        </p:txBody>
+      </p:sp>
       <p:sp>
         <p:nvSpPr>
           <p:cNvPr id="6" name="commentary panel"/>
@@ -18171,8 +18363,8 @@
         </p:nvSpPr>
         <p:spPr>
           <a:xfrm>
-            <a:off x="5440679" y="1463040"/>
-            <a:ext cx="3200400" cy="3154680"/>
+            <a:off x="502920" y="3231161"/>
+            <a:ext cx="8138160" cy="1395702"/>
           </a:xfrm>
           <a:prstGeom prst="rect">
             <a:avLst/>
@@ -18198,8 +18390,8 @@
         </p:nvSpPr>
         <p:spPr>
           <a:xfrm>
-            <a:off x="5623559" y="1627632"/>
-            <a:ext cx="2834640" cy="228600"/>
+            <a:off x="685800" y="3304313"/>
+            <a:ext cx="2743200" cy="228600"/>
           </a:xfrm>
           <a:prstGeom prst="rect">
             <a:avLst/>
@@ -18234,8 +18426,8 @@
         </p:nvSpPr>
         <p:spPr>
           <a:xfrm>
-            <a:off x="5623559" y="1901952"/>
-            <a:ext cx="2834640" cy="2706623"/>
+            <a:off x="685800" y="3478049"/>
+            <a:ext cx="3703320" cy="1121382"/>
           </a:xfrm>
           <a:prstGeom prst="rect">
             <a:avLst/>
@@ -18311,6 +18503,99 @@
             </a:r>
             <a:endParaRPr lang="en-US" sz="900"/>
           </a:p>
+        </p:txBody>
+      </p:sp>
+      <p:sp>
+        <p:nvSpPr>
+          <p:cNvPr id="25" name="Slide Number Placeholder 0"/>
+          <p:cNvSpPr>
+            <a:spLocks noGrp="1"/>
+          </p:cNvSpPr>
+          <p:nvPr>
+            <p:ph type="sldNum" sz="quarter" idx="4294967295"/>
+          </p:nvPr>
+        </p:nvSpPr>
+        <p:spPr>
+          <a:xfrm>
+            <a:off x="8092440" y="4736592"/>
+            <a:ext cx="548640" cy="228600"/>
+          </a:xfrm>
+          <a:prstGeom prst="rect">
+            <a:avLst/>
+          </a:prstGeom>
+          <a:extLst>
+            <a:ext uri="{C572A759-6A51-4108-AA02-DFA0A04FC94B}">
+              <ma14:wrappingTextBoxFlag xmlns="" xmlns:ma14="http://schemas.microsoft.com/office/mac/drawingml/2011/main" val="0"/>
+            </a:ext>
+          </a:extLst>
+        </p:spPr>
+        <p:txBody>
+          <a:bodyPr/>
+          <a:lstStyle>
+            <a:lvl1pPr>
+              <a:defRPr sz="800">
+                <a:solidFill>
+                  <a:srgbClr val="6B7585"/>
+                </a:solidFill>
+              </a:defRPr>
+            </a:lvl1pPr>
+          </a:lstStyle>
+          <a:p>
+            <a:pPr algn="r"/>
+            <a:fld id="{F7021451-1387-4CA6-816F-3879F97B5CBC}" type="slidenum">
+              <a:rPr lang="en-US" b="0"/>
+              <a:t>34</a:t>
+            </a:fld>
+            <a:endParaRPr lang="en-US"/>
+          </a:p>
+        </p:txBody>
+      </p:sp>
+      <p:pic>
+        <p:nvPicPr>
+          <p:cNvPr id="26" name="cts logo" descr="cts-logo.png"/>
+          <p:cNvPicPr>
+            <a:picLocks noChangeAspect="1"/>
+          </p:cNvPicPr>
+          <p:nvPr/>
+        </p:nvPicPr>
+        <p:blipFill>
+          <a:blip r:embed="rId4"/>
+          <a:stretch>
+            <a:fillRect/>
+          </a:stretch>
+        </p:blipFill>
+        <p:spPr>
+          <a:xfrm>
+            <a:off x="7680959" y="182880"/>
+            <a:ext cx="960120" cy="539696"/>
+          </a:xfrm>
+          <a:prstGeom prst="rect">
+            <a:avLst/>
+          </a:prstGeom>
+        </p:spPr>
+      </p:pic>
+      <p:sp>
+        <p:nvSpPr>
+          <p:cNvPr id="8" name="Text 5b"/>
+          <p:cNvSpPr txBox="1"/>
+          <p:nvPr/>
+        </p:nvSpPr>
+        <p:spPr>
+          <a:xfrm>
+            <a:off x="4663440" y="3478049"/>
+            <a:ext cx="3703320" cy="1121382"/>
+          </a:xfrm>
+          <a:prstGeom prst="rect">
+            <a:avLst/>
+          </a:prstGeom>
+          <a:noFill/>
+          <a:ln/>
+        </p:spPr>
+        <p:txBody>
+          <a:bodyPr wrap="square" lIns="0" tIns="0" rIns="0" bIns="0" rtlCol="0" anchor="t">
+            <a:normAutofit fontScale="77500" lnSpcReduction="20000"/>
+          </a:bodyPr>
+          <a:lstStyle/>
           <a:p>
             <a:pPr marL="342900" indent="-342900">
               <a:lnSpc>
@@ -18355,75 +18640,6 @@
           </a:p>
         </p:txBody>
       </p:sp>
-      <p:sp>
-        <p:nvSpPr>
-          <p:cNvPr id="25" name="Slide Number Placeholder 0"/>
-          <p:cNvSpPr>
-            <a:spLocks noGrp="1"/>
-          </p:cNvSpPr>
-          <p:nvPr>
-            <p:ph type="sldNum" sz="quarter" idx="4294967295"/>
-          </p:nvPr>
-        </p:nvSpPr>
-        <p:spPr>
-          <a:xfrm>
-            <a:off x="8092440" y="4736592"/>
-            <a:ext cx="548640" cy="228600"/>
-          </a:xfrm>
-          <a:prstGeom prst="rect">
-            <a:avLst/>
-          </a:prstGeom>
-          <a:extLst>
-            <a:ext uri="{C572A759-6A51-4108-AA02-DFA0A04FC94B}">
-              <ma14:wrappingTextBoxFlag xmlns="" xmlns:ma14="http://schemas.microsoft.com/office/mac/drawingml/2011/main" val="0"/>
-            </a:ext>
-          </a:extLst>
-        </p:spPr>
-        <p:txBody>
-          <a:bodyPr/>
-          <a:lstStyle>
-            <a:lvl1pPr>
-              <a:defRPr sz="800">
-                <a:solidFill>
-                  <a:srgbClr val="6B7585"/>
-                </a:solidFill>
-              </a:defRPr>
-            </a:lvl1pPr>
-          </a:lstStyle>
-          <a:p>
-            <a:pPr algn="r"/>
-            <a:fld id="{F7021451-1387-4CA6-816F-3879F97B5CBC}" type="slidenum">
-              <a:rPr lang="en-US" b="0"/>
-              <a:t>34</a:t>
-            </a:fld>
-            <a:endParaRPr lang="en-US"/>
-          </a:p>
-        </p:txBody>
-      </p:sp>
-      <p:pic>
-        <p:nvPicPr>
-          <p:cNvPr id="26" name="cts logo" descr="cts-logo.png"/>
-          <p:cNvPicPr>
-            <a:picLocks noChangeAspect="1"/>
-          </p:cNvPicPr>
-          <p:nvPr/>
-        </p:nvPicPr>
-        <p:blipFill>
-          <a:blip r:embed="rId4"/>
-          <a:stretch>
-            <a:fillRect/>
-          </a:stretch>
-        </p:blipFill>
-        <p:spPr>
-          <a:xfrm>
-            <a:off x="7680959" y="182880"/>
-            <a:ext cx="960120" cy="539696"/>
-          </a:xfrm>
-          <a:prstGeom prst="rect">
-            <a:avLst/>
-          </a:prstGeom>
-        </p:spPr>
-      </p:pic>
     </p:spTree>
   </p:cSld>
   <p:clrMapOvr>

--- a/deck/CTS Monthly Business Review - 30092026.pptx
+++ b/deck/CTS Monthly Business Review - 30092026.pptx
@@ -19,6 +19,9 @@
     <p:sldId id="293" r:id="rId13"/>
     <p:sldId id="294" r:id="rId14"/>
     <p:sldId id="261" r:id="rId15"/>
+    <p:sldId id="295" r:id="rId49"/>
+    <p:sldId id="296" r:id="rId50"/>
+    <p:sldId id="297" r:id="rId51"/>
     <p:sldId id="262" r:id="rId16"/>
     <p:sldId id="263" r:id="rId17"/>
     <p:sldId id="264" r:id="rId18"/>
@@ -4488,6 +4491,176 @@
 </p:notes>
 </file>
 
+<file path=ppt/notesSlides/notesSlide38.xml><?xml version="1.0" encoding="utf-8"?>
+<p:notes xmlns:a="http://schemas.openxmlformats.org/drawingml/2006/main" xmlns:p="http://schemas.openxmlformats.org/presentationml/2006/main" xmlns:r="http://schemas.openxmlformats.org/officeDocument/2006/relationships">
+  <p:cSld>
+    <p:spTree>
+      <p:nvGrpSpPr>
+        <p:cNvPr id="1" name=""/>
+        <p:cNvGrpSpPr/>
+        <p:nvPr/>
+      </p:nvGrpSpPr>
+      <p:grpSpPr>
+        <a:xfrm>
+          <a:off x="0" y="0"/>
+          <a:ext cx="0" cy="0"/>
+          <a:chOff x="0" y="0"/>
+          <a:chExt cx="0" cy="0"/>
+        </a:xfrm>
+      </p:grpSpPr>
+      <p:sp>
+        <p:nvSpPr>
+          <p:cNvPr id="3" name="Notes Placeholder 2"/>
+          <p:cNvSpPr>
+            <a:spLocks noGrp="1"/>
+          </p:cNvSpPr>
+          <p:nvPr>
+            <p:ph type="body" idx="1"/>
+          </p:nvPr>
+        </p:nvSpPr>
+        <p:spPr/>
+        <p:txBody>
+          <a:bodyPr lIns="107095" tIns="53547" rIns="107095" bIns="53547"/>
+          <a:lstStyle/>
+          <a:p>
+            <a:r>
+              <a:t>Spend for September across three years and against budget, taken from the Xero History tab.</a:t>
+            </a:r>
+          </a:p>
+          <a:p/>
+          <a:p>
+            <a:r>
+              <a:t>Spend here is cost of sales plus overheads. September 2026 $604,363. Budget $520,765. September 2025 $408,939. September 2024 $419,910.</a:t>
+            </a:r>
+          </a:p>
+          <a:p/>
+          <a:p>
+            <a:r>
+              <a:t>September was $83,599 or 16.1% over budget on spend.</a:t>
+            </a:r>
+          </a:p>
+          <a:p/>
+          <a:p>
+            <a:r>
+              <a:t>Where that sits matters more than the total. Cost of sales was $374,130 against $289,192 budgeted, which is $84,938 over. Overheads were $230,233 against $231,573 budgeted, which is $1,340 under. So the entire overspend is cost of sales and the overheads landed on plan.</a:t>
+            </a:r>
+          </a:p>
+          <a:p/>
+          <a:p>
+            <a:r>
+              <a:t>That is the better of the two outcomes. Cost of sales moves with revenue, and September billed $561,945 against a budget of $413,665, so some of the extra cost bought extra revenue. Overheads do not move with revenue, and those held.</a:t>
+            </a:r>
+          </a:p>
+          <a:p/>
+          <a:p>
+            <a:r>
+              <a:t>Against the two earlier years, spend is up $195,425 or 47.8% on September 2025 and $184,453 or 43.9% on September 2024. Revenue over the same two years is up 57.7% and 27.6%, so spend has grown faster than revenue against FY25 and slower than revenue against FY26.</a:t>
+            </a:r>
+          </a:p>
+          <a:p/>
+          <a:p>
+            <a:r>
+              <a:t>The red line is revenue. It sat above the spend bar in September 2024 and below it in both years since, which is the same thing as saying those two Septembers lost money.</a:t>
+            </a:r>
+          </a:p>
+          <a:p/>
+          <a:p>
+            <a:r>
+              <a:t>FY25 comes from Xero, pulled on 22 October 2026. FY26 is the Actual FY26 tab and FY27 the P&amp;L FY27 tab. The month follows the reporting month on Setup, so in October this becomes October.</a:t>
+            </a:r>
+          </a:p>
+        </p:txBody>
+      </p:sp>
+    </p:spTree>
+  </p:cSld>
+  <p:clrMapOvr>
+    <a:masterClrMapping/>
+  </p:clrMapOvr>
+</p:notes>
+</file>
+
+<file path=ppt/notesSlides/notesSlide39.xml><?xml version="1.0" encoding="utf-8"?>
+<p:notes xmlns:a="http://schemas.openxmlformats.org/drawingml/2006/main" xmlns:p="http://schemas.openxmlformats.org/presentationml/2006/main" xmlns:r="http://schemas.openxmlformats.org/officeDocument/2006/relationships">
+  <p:cSld>
+    <p:spTree>
+      <p:nvGrpSpPr>
+        <p:cNvPr id="1" name=""/>
+        <p:cNvGrpSpPr/>
+        <p:nvPr/>
+      </p:nvGrpSpPr>
+      <p:grpSpPr>
+        <a:xfrm>
+          <a:off x="0" y="0"/>
+          <a:ext cx="0" cy="0"/>
+          <a:chOff x="0" y="0"/>
+          <a:chExt cx="0" cy="0"/>
+        </a:xfrm>
+      </p:grpSpPr>
+      <p:sp>
+        <p:nvSpPr>
+          <p:cNvPr id="3" name="Notes Placeholder 2"/>
+          <p:cNvSpPr>
+            <a:spLocks noGrp="1"/>
+          </p:cNvSpPr>
+          <p:nvPr>
+            <p:ph type="body" idx="1"/>
+          </p:nvPr>
+        </p:nvSpPr>
+        <p:spPr/>
+        <p:txBody>
+          <a:bodyPr lIns="107095" tIns="53547" rIns="107095" bIns="53547"/>
+          <a:lstStyle/>
+          <a:p>
+            <a:r>
+              <a:t>Spend for the first quarter across three years and against budget, taken from the Xero History tab.</a:t>
+            </a:r>
+          </a:p>
+          <a:p/>
+          <a:p>
+            <a:r>
+              <a:t>Q1 2026 $1,633,668. Budget $1,773,409. Q1 2025 $1,313,986. Q1 2024 $1,347,094.</a:t>
+            </a:r>
+          </a:p>
+          <a:p/>
+          <a:p>
+            <a:r>
+              <a:t>The quarter is $139,742 or 7.9% under budget on spend. That is the opposite of the month, where spend ran over.</a:t>
+            </a:r>
+          </a:p>
+          <a:p/>
+          <a:p>
+            <a:r>
+              <a:t>The split is the point. Overheads have been $638,615, $646,721 and $641,508 across the three first quarters, a range of $8,106 on about $640,000. The overhead base has not moved in three years. Every bit of the movement in spend is cost of sales, which went $708,478, $667,265 and $992,160, up $324,895 or 48.7% on last year.</a:t>
+            </a:r>
+          </a:p>
+          <a:p/>
+          <a:p>
+            <a:r>
+              <a:t>Cost of sales rising with revenue is what should happen. Revenue rose $395,878 over the same year, so cost of sales rose $324,895 to earn it, which is a contribution of about $71,000 on the extra revenue. That is a thin return on the extra work and it is why the quarter is still a loss.</a:t>
+            </a:r>
+          </a:p>
+          <a:p/>
+          <a:p>
+            <a:r>
+              <a:t>The red line is revenue. In Q1 2024 it sat above the spend bar and the quarter made money. In Q1 2025 and Q1 2026 it sat below and both lost money. The budget line has revenue well clear of spend, which is how it was built to make $223,000.</a:t>
+            </a:r>
+          </a:p>
+          <a:p/>
+          <a:p>
+            <a:r>
+              <a:t>FY25 comes from Xero, pulled 22 October 2026. The quarter is July to September, so it is fixed rather than following Setup.</a:t>
+            </a:r>
+          </a:p>
+        </p:txBody>
+      </p:sp>
+    </p:spTree>
+  </p:cSld>
+  <p:clrMapOvr>
+    <a:masterClrMapping/>
+  </p:clrMapOvr>
+</p:notes>
+</file>
+
 <file path=ppt/notesSlides/notesSlide4.xml><?xml version="1.0" encoding="utf-8"?>
 <p:notes xmlns:a="http://schemas.openxmlformats.org/drawingml/2006/main" xmlns:r="http://schemas.openxmlformats.org/officeDocument/2006/relationships" xmlns:p="http://schemas.openxmlformats.org/presentationml/2006/main">
   <p:cSld>
@@ -4567,6 +4740,94 @@
         <p14:creationId xmlns:p14="http://schemas.microsoft.com/office/powerpoint/2010/main" val="1024086991"/>
       </p:ext>
     </p:extLst>
+  </p:cSld>
+  <p:clrMapOvr>
+    <a:masterClrMapping/>
+  </p:clrMapOvr>
+</p:notes>
+</file>
+
+<file path=ppt/notesSlides/notesSlide40.xml><?xml version="1.0" encoding="utf-8"?>
+<p:notes xmlns:a="http://schemas.openxmlformats.org/drawingml/2006/main" xmlns:p="http://schemas.openxmlformats.org/presentationml/2006/main" xmlns:r="http://schemas.openxmlformats.org/officeDocument/2006/relationships">
+  <p:cSld>
+    <p:spTree>
+      <p:nvGrpSpPr>
+        <p:cNvPr id="1" name=""/>
+        <p:cNvGrpSpPr/>
+        <p:nvPr/>
+      </p:nvGrpSpPr>
+      <p:grpSpPr>
+        <a:xfrm>
+          <a:off x="0" y="0"/>
+          <a:ext cx="0" cy="0"/>
+          <a:chOff x="0" y="0"/>
+          <a:chExt cx="0" cy="0"/>
+        </a:xfrm>
+      </p:grpSpPr>
+      <p:sp>
+        <p:nvSpPr>
+          <p:cNvPr id="3" name="Notes Placeholder 2"/>
+          <p:cNvSpPr>
+            <a:spLocks noGrp="1"/>
+          </p:cNvSpPr>
+          <p:nvPr>
+            <p:ph type="body" idx="1"/>
+          </p:nvPr>
+        </p:nvSpPr>
+        <p:spPr/>
+        <p:txBody>
+          <a:bodyPr lIns="107095" tIns="53547" rIns="107095" bIns="53547"/>
+          <a:lstStyle/>
+          <a:p>
+            <a:r>
+              <a:t>Net profit above and below the line, the reporting month and the first quarter across three years, taken from the Xero History tab. Net profit is the pack's own figure and includes other income.</a:t>
+            </a:r>
+          </a:p>
+          <a:p/>
+          <a:p>
+            <a:r>
+              <a:t>The month: September 2026 a loss of $41,464, September 2025 a loss of $52,615, September 2024 a profit of $20,737.</a:t>
+            </a:r>
+          </a:p>
+          <a:p/>
+          <a:p>
+            <a:r>
+              <a:t>The quarter: Q1 2026 a loss of $5,808, Q1 2025 a loss of $85,404, Q1 2024 a profit of $34,595.</a:t>
+            </a:r>
+          </a:p>
+          <a:p/>
+          <a:p>
+            <a:r>
+              <a:t>Two readings come out of this and they point in opposite directions.</a:t>
+            </a:r>
+          </a:p>
+          <a:p/>
+          <a:p>
+            <a:r>
+              <a:t>The first is that the business has been below the line for two years. Five of the six bars on this chart are losses or near enough, and the only two profits are both FY25. Whatever else the numbers say, September and the first quarter have not made money since FY25.</a:t>
+            </a:r>
+          </a:p>
+          <a:p/>
+          <a:p>
+            <a:r>
+              <a:t>The second is that the direction is right. The quarter has improved $79,596 on last year and is within $5,808 of breaking even. The month is $11,152 better than the same month last year. On revenue alone the business is billing a third more than it did a year ago.</a:t>
+            </a:r>
+          </a:p>
+          <a:p/>
+          <a:p>
+            <a:r>
+              <a:t>What stops that being good news is the plan. The budget had the first quarter at a $222,700 profit. Coming in at a $5,808 loss is $228,508 below it. The business has recovered most of the ground it lost in FY26 and is still a long way from the year it was asked to deliver.</a:t>
+            </a:r>
+          </a:p>
+          <a:p/>
+          <a:p>
+            <a:r>
+              <a:t>FY25 was pulled from Xero on 22 October 2026. Only the first quarter of FY25 was pulled, so the FY25 bar on the monthly side is blank from October onward until the rest is pulled.</a:t>
+            </a:r>
+          </a:p>
+        </p:txBody>
+      </p:sp>
+    </p:spTree>
   </p:cSld>
   <p:clrMapOvr>
     <a:masterClrMapping/>
@@ -6021,7 +6282,7 @@
       </p:grpSpPr>
       <p:pic>
         <p:nvPicPr>
-          <p:cNvPr id="27" name="snip xero_cum" descr="xero_cum.png"/>
+          <p:cNvPr id="27" name="snip xero_cum" descr="image.png"/>
           <p:cNvPicPr>
             <a:picLocks noChangeAspect="1"/>
           </p:cNvPicPr>
@@ -6794,6 +7055,1140 @@
 </file>
 
 <file path=ppt/slides/slide12.xml><?xml version="1.0" encoding="utf-8"?>
+<p:sld xmlns:a="http://schemas.openxmlformats.org/drawingml/2006/main" xmlns:p="http://schemas.openxmlformats.org/presentationml/2006/main" xmlns:r="http://schemas.openxmlformats.org/officeDocument/2006/relationships">
+  <p:cSld>
+    <p:spTree>
+      <p:nvGrpSpPr>
+        <p:cNvPr id="1" name=""/>
+        <p:cNvGrpSpPr/>
+        <p:nvPr/>
+      </p:nvGrpSpPr>
+      <p:grpSpPr/>
+      <p:pic>
+        <p:nvPicPr>
+          <p:cNvPr id="27" name="snip spend_month" descr="spend_month.png"/>
+          <p:cNvPicPr>
+            <a:picLocks noChangeAspect="1"/>
+          </p:cNvPicPr>
+          <p:nvPr/>
+        </p:nvPicPr>
+        <p:blipFill>
+          <a:blip r:embed="rId3"/>
+          <a:stretch>
+            <a:fillRect/>
+          </a:stretch>
+        </p:blipFill>
+        <p:spPr>
+          <a:xfrm>
+            <a:off x="522419" y="1005840"/>
+            <a:ext cx="8099161" cy="2525689"/>
+          </a:xfrm>
+          <a:prstGeom prst="rect">
+            <a:avLst/>
+          </a:prstGeom>
+        </p:spPr>
+      </p:pic>
+      <p:sp>
+        <p:nvSpPr>
+          <p:cNvPr id="2" name="Text 0"/>
+          <p:cNvSpPr txBox="1"/>
+          <p:nvPr/>
+        </p:nvSpPr>
+        <p:spPr>
+          <a:xfrm>
+            <a:off x="502920" y="365760"/>
+            <a:ext cx="6400800" cy="274320"/>
+          </a:xfrm>
+          <a:prstGeom prst="rect">
+            <a:avLst/>
+          </a:prstGeom>
+          <a:noFill/>
+          <a:ln/>
+        </p:spPr>
+        <p:txBody>
+          <a:bodyPr wrap="square" lIns="0" tIns="0" rIns="0" bIns="0" rtlCol="0" anchor="ctr"/>
+          <a:lstStyle/>
+          <a:p>
+            <a:pPr marL="0" indent="0">
+              <a:buNone/>
+            </a:pPr>
+            <a:r>
+              <a:rPr lang="en-US" sz="950" b="1" kern="0" spc="220">
+                <a:solidFill>
+                  <a:srgbClr val="122B82"/>
+                </a:solidFill>
+              </a:rPr>
+              <a:t>FINANCIAL PERFORMANCE</a:t>
+            </a:r>
+            <a:endParaRPr lang="en-US" sz="950"/>
+          </a:p>
+        </p:txBody>
+      </p:sp>
+      <p:sp>
+        <p:nvSpPr>
+          <p:cNvPr id="3" name="Text 1"/>
+          <p:cNvSpPr txBox="1"/>
+          <p:nvPr/>
+        </p:nvSpPr>
+        <p:spPr>
+          <a:xfrm>
+            <a:off x="502920" y="640080"/>
+            <a:ext cx="7315200" cy="365760"/>
+          </a:xfrm>
+          <a:prstGeom prst="rect">
+            <a:avLst/>
+          </a:prstGeom>
+          <a:noFill/>
+          <a:ln/>
+        </p:spPr>
+        <p:txBody>
+          <a:bodyPr wrap="square" lIns="0" tIns="0" rIns="0" bIns="0" rtlCol="0" anchor="ctr"/>
+          <a:lstStyle/>
+          <a:p>
+            <a:pPr marL="0" indent="0" algn="ctr">
+              <a:buNone/>
+            </a:pPr>
+            <a:r>
+              <a:rPr lang="en-US" sz="2200" b="1" dirty="0">
+                <a:solidFill>
+                  <a:srgbClr val="242C39"/>
+                </a:solidFill>
+              </a:rPr>
+              <a:t>Spend for the month, against budget</a:t>
+            </a:r>
+            <a:endParaRPr lang="en-US" sz="2700" dirty="0"/>
+          </a:p>
+        </p:txBody>
+      </p:sp>
+      <p:sp>
+        <p:nvSpPr>
+          <p:cNvPr id="6" name="commentary panel"/>
+          <p:cNvSpPr/>
+          <p:nvPr/>
+        </p:nvSpPr>
+        <p:spPr>
+          <a:xfrm>
+            <a:off x="502920" y="3622969"/>
+            <a:ext cx="8138160" cy="1003894"/>
+          </a:xfrm>
+          <a:prstGeom prst="rect">
+            <a:avLst/>
+          </a:prstGeom>
+          <a:solidFill>
+            <a:srgbClr val="E8F9F8"/>
+          </a:solidFill>
+          <a:ln/>
+        </p:spPr>
+        <p:txBody>
+          <a:bodyPr/>
+          <a:lstStyle/>
+          <a:p>
+            <a:endParaRPr lang="en-AU"/>
+          </a:p>
+        </p:txBody>
+      </p:sp>
+      <p:sp>
+        <p:nvSpPr>
+          <p:cNvPr id="7" name="Text 4"/>
+          <p:cNvSpPr txBox="1"/>
+          <p:nvPr/>
+        </p:nvSpPr>
+        <p:spPr>
+          <a:xfrm>
+            <a:off x="685800" y="3696121"/>
+            <a:ext cx="2743200" cy="228600"/>
+          </a:xfrm>
+          <a:prstGeom prst="rect">
+            <a:avLst/>
+          </a:prstGeom>
+          <a:noFill/>
+          <a:ln/>
+        </p:spPr>
+        <p:txBody>
+          <a:bodyPr wrap="square" lIns="0" tIns="0" rIns="0" bIns="0" rtlCol="0" anchor="ctr"/>
+          <a:lstStyle/>
+          <a:p>
+            <a:pPr marL="0" indent="0">
+              <a:buNone/>
+            </a:pPr>
+            <a:r>
+              <a:rPr lang="en-US" sz="900" b="1" kern="0" spc="180">
+                <a:solidFill>
+                  <a:srgbClr val="005358"/>
+                </a:solidFill>
+              </a:rPr>
+              <a:t>COMMENTARY</a:t>
+            </a:r>
+            <a:endParaRPr lang="en-US" sz="900"/>
+          </a:p>
+        </p:txBody>
+      </p:sp>
+      <p:sp>
+        <p:nvSpPr>
+          <p:cNvPr id="8" name="Text 5"/>
+          <p:cNvSpPr txBox="1"/>
+          <p:nvPr/>
+        </p:nvSpPr>
+        <p:spPr>
+          <a:xfrm>
+            <a:off x="685800" y="3869857"/>
+            <a:ext cx="3703320" cy="729574"/>
+          </a:xfrm>
+          <a:prstGeom prst="rect">
+            <a:avLst/>
+          </a:prstGeom>
+          <a:noFill/>
+          <a:ln/>
+        </p:spPr>
+        <p:txBody>
+          <a:bodyPr wrap="square" lIns="0" tIns="0" rIns="0" bIns="0" rtlCol="0" anchor="t">
+            <a:normAutofit fontScale="85000" lnSpcReduction="10000"/>
+          </a:bodyPr>
+          <a:lstStyle/>
+          <a:p>
+            <a:pPr marL="342900" indent="-342900">
+              <a:lnSpc>
+                <a:spcPts val="1050"/>
+              </a:lnSpc>
+              <a:spcAft>
+                <a:spcPts val="400"/>
+              </a:spcAft>
+              <a:buSzPct val="100000"/>
+              <a:buChar char="•"/>
+            </a:pPr>
+            <a:r>
+              <a:rPr lang="en-US" sz="1000">
+                <a:solidFill>
+                  <a:srgbClr val="3A4453"/>
+                </a:solidFill>
+              </a:rPr>
+              <a:t>September spend was $604k against a budget of $521k, $84k over.</a:t>
+            </a:r>
+            <a:endParaRPr lang="en-US" sz="850"/>
+          </a:p>
+          <a:p>
+            <a:pPr marL="342900" indent="-342900">
+              <a:lnSpc>
+                <a:spcPts val="1050"/>
+              </a:lnSpc>
+              <a:spcAft>
+                <a:spcPts val="400"/>
+              </a:spcAft>
+              <a:buSzPct val="100000"/>
+              <a:buChar char="•"/>
+            </a:pPr>
+            <a:r>
+              <a:rPr lang="en-US" sz="1000">
+                <a:solidFill>
+                  <a:srgbClr val="3A4453"/>
+                </a:solidFill>
+              </a:rPr>
+              <a:t>All of the overspend is cost of sales: $374k against $289k budgeted.</a:t>
+            </a:r>
+            <a:endParaRPr lang="en-US" sz="850"/>
+          </a:p>
+        </p:txBody>
+      </p:sp>
+      <p:sp>
+        <p:nvSpPr>
+          <p:cNvPr id="25" name="Slide Number Placeholder 0"/>
+          <p:cNvSpPr>
+            <a:spLocks noGrp="1"/>
+          </p:cNvSpPr>
+          <p:nvPr>
+            <p:ph type="sldNum" sz="quarter" idx="4294967295"/>
+          </p:nvPr>
+        </p:nvSpPr>
+        <p:spPr>
+          <a:xfrm>
+            <a:off x="8092440" y="4736592"/>
+            <a:ext cx="548640" cy="228600"/>
+          </a:xfrm>
+          <a:prstGeom prst="rect">
+            <a:avLst/>
+          </a:prstGeom>
+          <a:extLst>
+            <a:ext uri="{C572A759-6A51-4108-AA02-DFA0A04FC94B}">
+              <ma14:wrappingTextBoxFlag xmlns="" xmlns:ma14="http://schemas.microsoft.com/office/mac/drawingml/2011/main" val="0"/>
+            </a:ext>
+          </a:extLst>
+        </p:spPr>
+        <p:txBody>
+          <a:bodyPr/>
+          <a:lstStyle>
+            <a:lvl1pPr>
+              <a:defRPr sz="800">
+                <a:solidFill>
+                  <a:srgbClr val="6B7585"/>
+                </a:solidFill>
+              </a:defRPr>
+            </a:lvl1pPr>
+          </a:lstStyle>
+          <a:p>
+            <a:pPr algn="r"/>
+            <a:fld id="{F7021451-1387-4CA6-816F-3879F97B5CBC}" type="slidenum">
+              <a:rPr lang="en-US" b="0"/>
+              <a:t>9</a:t>
+            </a:fld>
+            <a:endParaRPr lang="en-US"/>
+          </a:p>
+        </p:txBody>
+      </p:sp>
+      <p:sp>
+        <p:nvSpPr>
+          <p:cNvPr id="4" name="Text 5b"/>
+          <p:cNvSpPr txBox="1"/>
+          <p:nvPr/>
+        </p:nvSpPr>
+        <p:spPr>
+          <a:xfrm>
+            <a:off x="4663440" y="3869857"/>
+            <a:ext cx="3703320" cy="729574"/>
+          </a:xfrm>
+          <a:prstGeom prst="rect">
+            <a:avLst/>
+          </a:prstGeom>
+          <a:noFill/>
+          <a:ln/>
+        </p:spPr>
+        <p:txBody>
+          <a:bodyPr wrap="square" lIns="0" tIns="0" rIns="0" bIns="0" rtlCol="0" anchor="t">
+            <a:normAutofit fontScale="85000" lnSpcReduction="10000"/>
+          </a:bodyPr>
+          <a:lstStyle/>
+          <a:p>
+            <a:pPr marL="342900" indent="-342900">
+              <a:lnSpc>
+                <a:spcPts val="1050"/>
+              </a:lnSpc>
+              <a:spcAft>
+                <a:spcPts val="400"/>
+              </a:spcAft>
+              <a:buSzPct val="100000"/>
+              <a:buChar char="•"/>
+            </a:pPr>
+            <a:r>
+              <a:rPr lang="en-US" sz="1000">
+                <a:solidFill>
+                  <a:srgbClr val="3A4453"/>
+                </a:solidFill>
+              </a:rPr>
+              <a:t>Overheads came in at $230k against $232k budgeted, which is on plan.</a:t>
+            </a:r>
+            <a:endParaRPr lang="en-US" sz="850"/>
+          </a:p>
+          <a:p>
+            <a:pPr marL="342900" indent="-342900">
+              <a:lnSpc>
+                <a:spcPts val="1050"/>
+              </a:lnSpc>
+              <a:spcAft>
+                <a:spcPts val="400"/>
+              </a:spcAft>
+              <a:buSzPct val="100000"/>
+              <a:buChar char="•"/>
+            </a:pPr>
+            <a:r>
+              <a:rPr lang="en-US" sz="1000">
+                <a:solidFill>
+                  <a:srgbClr val="3A4453"/>
+                </a:solidFill>
+              </a:rPr>
+              <a:t>Spend is up 48% on last September and 44% on the September before.</a:t>
+            </a:r>
+            <a:endParaRPr lang="en-US" sz="850"/>
+          </a:p>
+        </p:txBody>
+      </p:sp>
+      <p:pic>
+        <p:nvPicPr>
+          <p:cNvPr id="26" name="cts logo" descr="image.png"/>
+          <p:cNvPicPr>
+            <a:picLocks noChangeAspect="1"/>
+          </p:cNvPicPr>
+          <p:nvPr/>
+        </p:nvPicPr>
+        <p:blipFill>
+          <a:blip r:embed="rId2"/>
+          <a:stretch>
+            <a:fillRect/>
+          </a:stretch>
+        </p:blipFill>
+        <p:spPr>
+          <a:xfrm>
+            <a:off x="7680959" y="182880"/>
+            <a:ext cx="960120" cy="539696"/>
+          </a:xfrm>
+          <a:prstGeom prst="rect">
+            <a:avLst/>
+          </a:prstGeom>
+        </p:spPr>
+      </p:pic>
+    </p:spTree>
+  </p:cSld>
+  <p:clrMapOvr>
+    <a:masterClrMapping/>
+  </p:clrMapOvr>
+</p:sld>
+</file>
+
+<file path=ppt/slides/slide13.xml><?xml version="1.0" encoding="utf-8"?>
+<p:sld xmlns:a="http://schemas.openxmlformats.org/drawingml/2006/main" xmlns:p="http://schemas.openxmlformats.org/presentationml/2006/main" xmlns:r="http://schemas.openxmlformats.org/officeDocument/2006/relationships">
+  <p:cSld>
+    <p:spTree>
+      <p:nvGrpSpPr>
+        <p:cNvPr id="1" name=""/>
+        <p:cNvGrpSpPr/>
+        <p:nvPr/>
+      </p:nvGrpSpPr>
+      <p:grpSpPr/>
+      <p:pic>
+        <p:nvPicPr>
+          <p:cNvPr id="27" name="snip spend_qtr" descr="spend_qtr.png"/>
+          <p:cNvPicPr>
+            <a:picLocks noChangeAspect="1"/>
+          </p:cNvPicPr>
+          <p:nvPr/>
+        </p:nvPicPr>
+        <p:blipFill>
+          <a:blip r:embed="rId3"/>
+          <a:stretch>
+            <a:fillRect/>
+          </a:stretch>
+        </p:blipFill>
+        <p:spPr>
+          <a:xfrm>
+            <a:off x="522419" y="1005840"/>
+            <a:ext cx="8099161" cy="2525689"/>
+          </a:xfrm>
+          <a:prstGeom prst="rect">
+            <a:avLst/>
+          </a:prstGeom>
+        </p:spPr>
+      </p:pic>
+      <p:sp>
+        <p:nvSpPr>
+          <p:cNvPr id="2" name="Text 0"/>
+          <p:cNvSpPr txBox="1"/>
+          <p:nvPr/>
+        </p:nvSpPr>
+        <p:spPr>
+          <a:xfrm>
+            <a:off x="502920" y="365760"/>
+            <a:ext cx="6400800" cy="274320"/>
+          </a:xfrm>
+          <a:prstGeom prst="rect">
+            <a:avLst/>
+          </a:prstGeom>
+          <a:noFill/>
+          <a:ln/>
+        </p:spPr>
+        <p:txBody>
+          <a:bodyPr wrap="square" lIns="0" tIns="0" rIns="0" bIns="0" rtlCol="0" anchor="ctr"/>
+          <a:lstStyle/>
+          <a:p>
+            <a:pPr marL="0" indent="0">
+              <a:buNone/>
+            </a:pPr>
+            <a:r>
+              <a:rPr lang="en-US" sz="950" b="1" kern="0" spc="220">
+                <a:solidFill>
+                  <a:srgbClr val="122B82"/>
+                </a:solidFill>
+              </a:rPr>
+              <a:t>FINANCIAL PERFORMANCE</a:t>
+            </a:r>
+            <a:endParaRPr lang="en-US" sz="950"/>
+          </a:p>
+        </p:txBody>
+      </p:sp>
+      <p:sp>
+        <p:nvSpPr>
+          <p:cNvPr id="3" name="Text 1"/>
+          <p:cNvSpPr txBox="1"/>
+          <p:nvPr/>
+        </p:nvSpPr>
+        <p:spPr>
+          <a:xfrm>
+            <a:off x="502920" y="640080"/>
+            <a:ext cx="7315200" cy="365760"/>
+          </a:xfrm>
+          <a:prstGeom prst="rect">
+            <a:avLst/>
+          </a:prstGeom>
+          <a:noFill/>
+          <a:ln/>
+        </p:spPr>
+        <p:txBody>
+          <a:bodyPr wrap="square" lIns="0" tIns="0" rIns="0" bIns="0" rtlCol="0" anchor="ctr"/>
+          <a:lstStyle/>
+          <a:p>
+            <a:pPr marL="0" indent="0" algn="ctr">
+              <a:buNone/>
+            </a:pPr>
+            <a:r>
+              <a:rPr lang="en-US" sz="2200" b="1" dirty="0">
+                <a:solidFill>
+                  <a:srgbClr val="242C39"/>
+                </a:solidFill>
+              </a:rPr>
+              <a:t>Spend for the quarter, against budget</a:t>
+            </a:r>
+            <a:endParaRPr lang="en-US" sz="2700" dirty="0"/>
+          </a:p>
+        </p:txBody>
+      </p:sp>
+      <p:sp>
+        <p:nvSpPr>
+          <p:cNvPr id="6" name="commentary panel"/>
+          <p:cNvSpPr/>
+          <p:nvPr/>
+        </p:nvSpPr>
+        <p:spPr>
+          <a:xfrm>
+            <a:off x="502920" y="3622969"/>
+            <a:ext cx="8138160" cy="1003894"/>
+          </a:xfrm>
+          <a:prstGeom prst="rect">
+            <a:avLst/>
+          </a:prstGeom>
+          <a:solidFill>
+            <a:srgbClr val="E8F9F8"/>
+          </a:solidFill>
+          <a:ln/>
+        </p:spPr>
+        <p:txBody>
+          <a:bodyPr/>
+          <a:lstStyle/>
+          <a:p>
+            <a:endParaRPr lang="en-AU"/>
+          </a:p>
+        </p:txBody>
+      </p:sp>
+      <p:sp>
+        <p:nvSpPr>
+          <p:cNvPr id="7" name="Text 4"/>
+          <p:cNvSpPr txBox="1"/>
+          <p:nvPr/>
+        </p:nvSpPr>
+        <p:spPr>
+          <a:xfrm>
+            <a:off x="685800" y="3696121"/>
+            <a:ext cx="2743200" cy="228600"/>
+          </a:xfrm>
+          <a:prstGeom prst="rect">
+            <a:avLst/>
+          </a:prstGeom>
+          <a:noFill/>
+          <a:ln/>
+        </p:spPr>
+        <p:txBody>
+          <a:bodyPr wrap="square" lIns="0" tIns="0" rIns="0" bIns="0" rtlCol="0" anchor="ctr"/>
+          <a:lstStyle/>
+          <a:p>
+            <a:pPr marL="0" indent="0">
+              <a:buNone/>
+            </a:pPr>
+            <a:r>
+              <a:rPr lang="en-US" sz="900" b="1" kern="0" spc="180">
+                <a:solidFill>
+                  <a:srgbClr val="005358"/>
+                </a:solidFill>
+              </a:rPr>
+              <a:t>COMMENTARY</a:t>
+            </a:r>
+            <a:endParaRPr lang="en-US" sz="900"/>
+          </a:p>
+        </p:txBody>
+      </p:sp>
+      <p:sp>
+        <p:nvSpPr>
+          <p:cNvPr id="8" name="Text 5"/>
+          <p:cNvSpPr txBox="1"/>
+          <p:nvPr/>
+        </p:nvSpPr>
+        <p:spPr>
+          <a:xfrm>
+            <a:off x="685800" y="3869857"/>
+            <a:ext cx="3703320" cy="729574"/>
+          </a:xfrm>
+          <a:prstGeom prst="rect">
+            <a:avLst/>
+          </a:prstGeom>
+          <a:noFill/>
+          <a:ln/>
+        </p:spPr>
+        <p:txBody>
+          <a:bodyPr wrap="square" lIns="0" tIns="0" rIns="0" bIns="0" rtlCol="0" anchor="t">
+            <a:normAutofit fontScale="85000" lnSpcReduction="10000"/>
+          </a:bodyPr>
+          <a:lstStyle/>
+          <a:p>
+            <a:pPr marL="342900" indent="-342900">
+              <a:lnSpc>
+                <a:spcPts val="1050"/>
+              </a:lnSpc>
+              <a:spcAft>
+                <a:spcPts val="400"/>
+              </a:spcAft>
+              <a:buSzPct val="100000"/>
+              <a:buChar char="•"/>
+            </a:pPr>
+            <a:r>
+              <a:rPr lang="en-US" sz="1000">
+                <a:solidFill>
+                  <a:srgbClr val="3A4453"/>
+                </a:solidFill>
+              </a:rPr>
+              <a:t>Quarter spend was $1,634k against a budget of $1,773k, $140k under.</a:t>
+            </a:r>
+            <a:endParaRPr lang="en-US" sz="850"/>
+          </a:p>
+          <a:p>
+            <a:pPr marL="342900" indent="-342900">
+              <a:lnSpc>
+                <a:spcPts val="1050"/>
+              </a:lnSpc>
+              <a:spcAft>
+                <a:spcPts val="400"/>
+              </a:spcAft>
+              <a:buSzPct val="100000"/>
+              <a:buChar char="•"/>
+            </a:pPr>
+            <a:r>
+              <a:rPr lang="en-US" sz="1000">
+                <a:solidFill>
+                  <a:srgbClr val="3A4453"/>
+                </a:solidFill>
+              </a:rPr>
+              <a:t>Overheads have barely moved in three years: $639k, $647k and $642k.</a:t>
+            </a:r>
+            <a:endParaRPr lang="en-US" sz="850"/>
+          </a:p>
+        </p:txBody>
+      </p:sp>
+      <p:sp>
+        <p:nvSpPr>
+          <p:cNvPr id="25" name="Slide Number Placeholder 0"/>
+          <p:cNvSpPr>
+            <a:spLocks noGrp="1"/>
+          </p:cNvSpPr>
+          <p:nvPr>
+            <p:ph type="sldNum" sz="quarter" idx="4294967295"/>
+          </p:nvPr>
+        </p:nvSpPr>
+        <p:spPr>
+          <a:xfrm>
+            <a:off x="8092440" y="4736592"/>
+            <a:ext cx="548640" cy="228600"/>
+          </a:xfrm>
+          <a:prstGeom prst="rect">
+            <a:avLst/>
+          </a:prstGeom>
+          <a:extLst>
+            <a:ext uri="{C572A759-6A51-4108-AA02-DFA0A04FC94B}">
+              <ma14:wrappingTextBoxFlag xmlns="" xmlns:ma14="http://schemas.microsoft.com/office/mac/drawingml/2011/main" val="0"/>
+            </a:ext>
+          </a:extLst>
+        </p:spPr>
+        <p:txBody>
+          <a:bodyPr/>
+          <a:lstStyle>
+            <a:lvl1pPr>
+              <a:defRPr sz="800">
+                <a:solidFill>
+                  <a:srgbClr val="6B7585"/>
+                </a:solidFill>
+              </a:defRPr>
+            </a:lvl1pPr>
+          </a:lstStyle>
+          <a:p>
+            <a:pPr algn="r"/>
+            <a:fld id="{F7021451-1387-4CA6-816F-3879F97B5CBC}" type="slidenum">
+              <a:rPr lang="en-US" b="0"/>
+              <a:t>9</a:t>
+            </a:fld>
+            <a:endParaRPr lang="en-US"/>
+          </a:p>
+        </p:txBody>
+      </p:sp>
+      <p:sp>
+        <p:nvSpPr>
+          <p:cNvPr id="4" name="Text 5b"/>
+          <p:cNvSpPr txBox="1"/>
+          <p:nvPr/>
+        </p:nvSpPr>
+        <p:spPr>
+          <a:xfrm>
+            <a:off x="4663440" y="3869857"/>
+            <a:ext cx="3703320" cy="729574"/>
+          </a:xfrm>
+          <a:prstGeom prst="rect">
+            <a:avLst/>
+          </a:prstGeom>
+          <a:noFill/>
+          <a:ln/>
+        </p:spPr>
+        <p:txBody>
+          <a:bodyPr wrap="square" lIns="0" tIns="0" rIns="0" bIns="0" rtlCol="0" anchor="t">
+            <a:normAutofit fontScale="85000" lnSpcReduction="10000"/>
+          </a:bodyPr>
+          <a:lstStyle/>
+          <a:p>
+            <a:pPr marL="342900" indent="-342900">
+              <a:lnSpc>
+                <a:spcPts val="1050"/>
+              </a:lnSpc>
+              <a:spcAft>
+                <a:spcPts val="400"/>
+              </a:spcAft>
+              <a:buSzPct val="100000"/>
+              <a:buChar char="•"/>
+            </a:pPr>
+            <a:r>
+              <a:rPr lang="en-US" sz="1000">
+                <a:solidFill>
+                  <a:srgbClr val="3A4453"/>
+                </a:solidFill>
+              </a:rPr>
+              <a:t>All the movement is cost of sales, up $325k on last year to $992k.</a:t>
+            </a:r>
+            <a:endParaRPr lang="en-US" sz="850"/>
+          </a:p>
+          <a:p>
+            <a:pPr marL="342900" indent="-342900">
+              <a:lnSpc>
+                <a:spcPts val="1050"/>
+              </a:lnSpc>
+              <a:spcAft>
+                <a:spcPts val="400"/>
+              </a:spcAft>
+              <a:buSzPct val="100000"/>
+              <a:buChar char="•"/>
+            </a:pPr>
+            <a:r>
+              <a:rPr lang="en-US" sz="1000">
+                <a:solidFill>
+                  <a:srgbClr val="3A4453"/>
+                </a:solidFill>
+              </a:rPr>
+              <a:t>Revenue sat above spend in Q1 2024 and below it in both years since.</a:t>
+            </a:r>
+            <a:endParaRPr lang="en-US" sz="850"/>
+          </a:p>
+        </p:txBody>
+      </p:sp>
+      <p:pic>
+        <p:nvPicPr>
+          <p:cNvPr id="26" name="cts logo" descr="image.png"/>
+          <p:cNvPicPr>
+            <a:picLocks noChangeAspect="1"/>
+          </p:cNvPicPr>
+          <p:nvPr/>
+        </p:nvPicPr>
+        <p:blipFill>
+          <a:blip r:embed="rId2"/>
+          <a:stretch>
+            <a:fillRect/>
+          </a:stretch>
+        </p:blipFill>
+        <p:spPr>
+          <a:xfrm>
+            <a:off x="7680959" y="182880"/>
+            <a:ext cx="960120" cy="539696"/>
+          </a:xfrm>
+          <a:prstGeom prst="rect">
+            <a:avLst/>
+          </a:prstGeom>
+        </p:spPr>
+      </p:pic>
+    </p:spTree>
+  </p:cSld>
+  <p:clrMapOvr>
+    <a:masterClrMapping/>
+  </p:clrMapOvr>
+</p:sld>
+</file>
+
+<file path=ppt/slides/slide14.xml><?xml version="1.0" encoding="utf-8"?>
+<p:sld xmlns:a="http://schemas.openxmlformats.org/drawingml/2006/main" xmlns:p="http://schemas.openxmlformats.org/presentationml/2006/main" xmlns:r="http://schemas.openxmlformats.org/officeDocument/2006/relationships">
+  <p:cSld>
+    <p:spTree>
+      <p:nvGrpSpPr>
+        <p:cNvPr id="1" name=""/>
+        <p:cNvGrpSpPr/>
+        <p:nvPr/>
+      </p:nvGrpSpPr>
+      <p:grpSpPr/>
+      <p:pic>
+        <p:nvPicPr>
+          <p:cNvPr id="27" name="snip profit_line" descr="profit_line.png"/>
+          <p:cNvPicPr>
+            <a:picLocks noChangeAspect="1"/>
+          </p:cNvPicPr>
+          <p:nvPr/>
+        </p:nvPicPr>
+        <p:blipFill>
+          <a:blip r:embed="rId3"/>
+          <a:stretch>
+            <a:fillRect/>
+          </a:stretch>
+        </p:blipFill>
+        <p:spPr>
+          <a:xfrm>
+            <a:off x="522419" y="1005840"/>
+            <a:ext cx="8099161" cy="2525689"/>
+          </a:xfrm>
+          <a:prstGeom prst="rect">
+            <a:avLst/>
+          </a:prstGeom>
+        </p:spPr>
+      </p:pic>
+      <p:sp>
+        <p:nvSpPr>
+          <p:cNvPr id="2" name="Text 0"/>
+          <p:cNvSpPr txBox="1"/>
+          <p:nvPr/>
+        </p:nvSpPr>
+        <p:spPr>
+          <a:xfrm>
+            <a:off x="502920" y="365760"/>
+            <a:ext cx="6400800" cy="274320"/>
+          </a:xfrm>
+          <a:prstGeom prst="rect">
+            <a:avLst/>
+          </a:prstGeom>
+          <a:noFill/>
+          <a:ln/>
+        </p:spPr>
+        <p:txBody>
+          <a:bodyPr wrap="square" lIns="0" tIns="0" rIns="0" bIns="0" rtlCol="0" anchor="ctr"/>
+          <a:lstStyle/>
+          <a:p>
+            <a:pPr marL="0" indent="0">
+              <a:buNone/>
+            </a:pPr>
+            <a:r>
+              <a:rPr lang="en-US" sz="950" b="1" kern="0" spc="220">
+                <a:solidFill>
+                  <a:srgbClr val="122B82"/>
+                </a:solidFill>
+              </a:rPr>
+              <a:t>FINANCIAL PERFORMANCE</a:t>
+            </a:r>
+            <a:endParaRPr lang="en-US" sz="950"/>
+          </a:p>
+        </p:txBody>
+      </p:sp>
+      <p:sp>
+        <p:nvSpPr>
+          <p:cNvPr id="3" name="Text 1"/>
+          <p:cNvSpPr txBox="1"/>
+          <p:nvPr/>
+        </p:nvSpPr>
+        <p:spPr>
+          <a:xfrm>
+            <a:off x="502920" y="640080"/>
+            <a:ext cx="7315200" cy="365760"/>
+          </a:xfrm>
+          <a:prstGeom prst="rect">
+            <a:avLst/>
+          </a:prstGeom>
+          <a:noFill/>
+          <a:ln/>
+        </p:spPr>
+        <p:txBody>
+          <a:bodyPr wrap="square" lIns="0" tIns="0" rIns="0" bIns="0" rtlCol="0" anchor="ctr"/>
+          <a:lstStyle/>
+          <a:p>
+            <a:pPr marL="0" indent="0" algn="ctr">
+              <a:buNone/>
+            </a:pPr>
+            <a:r>
+              <a:rPr lang="en-US" sz="2200" b="1" dirty="0">
+                <a:solidFill>
+                  <a:srgbClr val="242C39"/>
+                </a:solidFill>
+              </a:rPr>
+              <a:t>Net profit above and below the line</a:t>
+            </a:r>
+            <a:endParaRPr lang="en-US" sz="2700" dirty="0"/>
+          </a:p>
+        </p:txBody>
+      </p:sp>
+      <p:sp>
+        <p:nvSpPr>
+          <p:cNvPr id="6" name="commentary panel"/>
+          <p:cNvSpPr/>
+          <p:nvPr/>
+        </p:nvSpPr>
+        <p:spPr>
+          <a:xfrm>
+            <a:off x="502920" y="3622969"/>
+            <a:ext cx="8138160" cy="1003894"/>
+          </a:xfrm>
+          <a:prstGeom prst="rect">
+            <a:avLst/>
+          </a:prstGeom>
+          <a:solidFill>
+            <a:srgbClr val="E8F9F8"/>
+          </a:solidFill>
+          <a:ln/>
+        </p:spPr>
+        <p:txBody>
+          <a:bodyPr/>
+          <a:lstStyle/>
+          <a:p>
+            <a:endParaRPr lang="en-AU"/>
+          </a:p>
+        </p:txBody>
+      </p:sp>
+      <p:sp>
+        <p:nvSpPr>
+          <p:cNvPr id="7" name="Text 4"/>
+          <p:cNvSpPr txBox="1"/>
+          <p:nvPr/>
+        </p:nvSpPr>
+        <p:spPr>
+          <a:xfrm>
+            <a:off x="685800" y="3696121"/>
+            <a:ext cx="2743200" cy="228600"/>
+          </a:xfrm>
+          <a:prstGeom prst="rect">
+            <a:avLst/>
+          </a:prstGeom>
+          <a:noFill/>
+          <a:ln/>
+        </p:spPr>
+        <p:txBody>
+          <a:bodyPr wrap="square" lIns="0" tIns="0" rIns="0" bIns="0" rtlCol="0" anchor="ctr"/>
+          <a:lstStyle/>
+          <a:p>
+            <a:pPr marL="0" indent="0">
+              <a:buNone/>
+            </a:pPr>
+            <a:r>
+              <a:rPr lang="en-US" sz="900" b="1" kern="0" spc="180">
+                <a:solidFill>
+                  <a:srgbClr val="005358"/>
+                </a:solidFill>
+              </a:rPr>
+              <a:t>COMMENTARY</a:t>
+            </a:r>
+            <a:endParaRPr lang="en-US" sz="900"/>
+          </a:p>
+        </p:txBody>
+      </p:sp>
+      <p:sp>
+        <p:nvSpPr>
+          <p:cNvPr id="8" name="Text 5"/>
+          <p:cNvSpPr txBox="1"/>
+          <p:nvPr/>
+        </p:nvSpPr>
+        <p:spPr>
+          <a:xfrm>
+            <a:off x="685800" y="3869857"/>
+            <a:ext cx="3703320" cy="729574"/>
+          </a:xfrm>
+          <a:prstGeom prst="rect">
+            <a:avLst/>
+          </a:prstGeom>
+          <a:noFill/>
+          <a:ln/>
+        </p:spPr>
+        <p:txBody>
+          <a:bodyPr wrap="square" lIns="0" tIns="0" rIns="0" bIns="0" rtlCol="0" anchor="t">
+            <a:normAutofit fontScale="85000" lnSpcReduction="10000"/>
+          </a:bodyPr>
+          <a:lstStyle/>
+          <a:p>
+            <a:pPr marL="342900" indent="-342900">
+              <a:lnSpc>
+                <a:spcPts val="1050"/>
+              </a:lnSpc>
+              <a:spcAft>
+                <a:spcPts val="400"/>
+              </a:spcAft>
+              <a:buSzPct val="100000"/>
+              <a:buChar char="•"/>
+            </a:pPr>
+            <a:r>
+              <a:rPr lang="en-US" sz="1000">
+                <a:solidFill>
+                  <a:srgbClr val="3A4453"/>
+                </a:solidFill>
+              </a:rPr>
+              <a:t>September lost $41k. Last September lost $53k. The September before made $21k.</a:t>
+            </a:r>
+            <a:endParaRPr lang="en-US" sz="850"/>
+          </a:p>
+          <a:p>
+            <a:pPr marL="342900" indent="-342900">
+              <a:lnSpc>
+                <a:spcPts val="1050"/>
+              </a:lnSpc>
+              <a:spcAft>
+                <a:spcPts val="400"/>
+              </a:spcAft>
+              <a:buSzPct val="100000"/>
+              <a:buChar char="•"/>
+            </a:pPr>
+            <a:r>
+              <a:rPr lang="en-US" sz="1000">
+                <a:solidFill>
+                  <a:srgbClr val="3A4453"/>
+                </a:solidFill>
+              </a:rPr>
+              <a:t>The quarter lost $6k, against a $85k loss last year and a $35k profit the year before.</a:t>
+            </a:r>
+            <a:endParaRPr lang="en-US" sz="850"/>
+          </a:p>
+        </p:txBody>
+      </p:sp>
+      <p:sp>
+        <p:nvSpPr>
+          <p:cNvPr id="25" name="Slide Number Placeholder 0"/>
+          <p:cNvSpPr>
+            <a:spLocks noGrp="1"/>
+          </p:cNvSpPr>
+          <p:nvPr>
+            <p:ph type="sldNum" sz="quarter" idx="4294967295"/>
+          </p:nvPr>
+        </p:nvSpPr>
+        <p:spPr>
+          <a:xfrm>
+            <a:off x="8092440" y="4736592"/>
+            <a:ext cx="548640" cy="228600"/>
+          </a:xfrm>
+          <a:prstGeom prst="rect">
+            <a:avLst/>
+          </a:prstGeom>
+          <a:extLst>
+            <a:ext uri="{C572A759-6A51-4108-AA02-DFA0A04FC94B}">
+              <ma14:wrappingTextBoxFlag xmlns="" xmlns:ma14="http://schemas.microsoft.com/office/mac/drawingml/2011/main" val="0"/>
+            </a:ext>
+          </a:extLst>
+        </p:spPr>
+        <p:txBody>
+          <a:bodyPr/>
+          <a:lstStyle>
+            <a:lvl1pPr>
+              <a:defRPr sz="800">
+                <a:solidFill>
+                  <a:srgbClr val="6B7585"/>
+                </a:solidFill>
+              </a:defRPr>
+            </a:lvl1pPr>
+          </a:lstStyle>
+          <a:p>
+            <a:pPr algn="r"/>
+            <a:fld id="{F7021451-1387-4CA6-816F-3879F97B5CBC}" type="slidenum">
+              <a:rPr lang="en-US" b="0"/>
+              <a:t>9</a:t>
+            </a:fld>
+            <a:endParaRPr lang="en-US"/>
+          </a:p>
+        </p:txBody>
+      </p:sp>
+      <p:sp>
+        <p:nvSpPr>
+          <p:cNvPr id="4" name="Text 5b"/>
+          <p:cNvSpPr txBox="1"/>
+          <p:nvPr/>
+        </p:nvSpPr>
+        <p:spPr>
+          <a:xfrm>
+            <a:off x="4663440" y="3869857"/>
+            <a:ext cx="3703320" cy="729574"/>
+          </a:xfrm>
+          <a:prstGeom prst="rect">
+            <a:avLst/>
+          </a:prstGeom>
+          <a:noFill/>
+          <a:ln/>
+        </p:spPr>
+        <p:txBody>
+          <a:bodyPr wrap="square" lIns="0" tIns="0" rIns="0" bIns="0" rtlCol="0" anchor="t">
+            <a:normAutofit fontScale="85000" lnSpcReduction="10000"/>
+          </a:bodyPr>
+          <a:lstStyle/>
+          <a:p>
+            <a:pPr marL="342900" indent="-342900">
+              <a:lnSpc>
+                <a:spcPts val="1050"/>
+              </a:lnSpc>
+              <a:spcAft>
+                <a:spcPts val="400"/>
+              </a:spcAft>
+              <a:buSzPct val="100000"/>
+              <a:buChar char="•"/>
+            </a:pPr>
+            <a:r>
+              <a:rPr lang="en-US" sz="1000">
+                <a:solidFill>
+                  <a:srgbClr val="3A4453"/>
+                </a:solidFill>
+              </a:rPr>
+              <a:t>The quarter is $80k better than last year and close to breakeven.</a:t>
+            </a:r>
+            <a:endParaRPr lang="en-US" sz="850"/>
+          </a:p>
+          <a:p>
+            <a:pPr marL="342900" indent="-342900">
+              <a:lnSpc>
+                <a:spcPts val="1050"/>
+              </a:lnSpc>
+              <a:spcAft>
+                <a:spcPts val="400"/>
+              </a:spcAft>
+              <a:buSzPct val="100000"/>
+              <a:buChar char="•"/>
+            </a:pPr>
+            <a:r>
+              <a:rPr lang="en-US" sz="1000">
+                <a:solidFill>
+                  <a:srgbClr val="3A4453"/>
+                </a:solidFill>
+              </a:rPr>
+              <a:t>It is still $229k below budget, which had the quarter at a $223k profit.</a:t>
+            </a:r>
+            <a:endParaRPr lang="en-US" sz="850"/>
+          </a:p>
+        </p:txBody>
+      </p:sp>
+      <p:pic>
+        <p:nvPicPr>
+          <p:cNvPr id="26" name="cts logo" descr="image.png"/>
+          <p:cNvPicPr>
+            <a:picLocks noChangeAspect="1"/>
+          </p:cNvPicPr>
+          <p:nvPr/>
+        </p:nvPicPr>
+        <p:blipFill>
+          <a:blip r:embed="rId2"/>
+          <a:stretch>
+            <a:fillRect/>
+          </a:stretch>
+        </p:blipFill>
+        <p:spPr>
+          <a:xfrm>
+            <a:off x="7680959" y="182880"/>
+            <a:ext cx="960120" cy="539696"/>
+          </a:xfrm>
+          <a:prstGeom prst="rect">
+            <a:avLst/>
+          </a:prstGeom>
+        </p:spPr>
+      </p:pic>
+    </p:spTree>
+  </p:cSld>
+  <p:clrMapOvr>
+    <a:masterClrMapping/>
+  </p:clrMapOvr>
+</p:sld>
+</file>
+
+<file path=ppt/slides/slide15.xml><?xml version="1.0" encoding="utf-8"?>
 <p:sld xmlns:a="http://schemas.openxmlformats.org/drawingml/2006/main" xmlns:r="http://schemas.openxmlformats.org/officeDocument/2006/relationships" xmlns:p="http://schemas.openxmlformats.org/presentationml/2006/main">
   <p:cSld name="Slide 7">
     <p:spTree>
@@ -7178,7 +8573,7 @@
 </p:sld>
 </file>
 
-<file path=ppt/slides/slide13.xml><?xml version="1.0" encoding="utf-8"?>
+<file path=ppt/slides/slide16.xml><?xml version="1.0" encoding="utf-8"?>
 <p:sld xmlns:a="http://schemas.openxmlformats.org/drawingml/2006/main" xmlns:r="http://schemas.openxmlformats.org/officeDocument/2006/relationships" xmlns:p="http://schemas.openxmlformats.org/presentationml/2006/main">
   <p:cSld name="Slide 8">
     <p:spTree>
@@ -7563,7 +8958,7 @@
 </p:sld>
 </file>
 
-<file path=ppt/slides/slide14.xml><?xml version="1.0" encoding="utf-8"?>
+<file path=ppt/slides/slide17.xml><?xml version="1.0" encoding="utf-8"?>
 <p:sld xmlns:a="http://schemas.openxmlformats.org/drawingml/2006/main" xmlns:r="http://schemas.openxmlformats.org/officeDocument/2006/relationships" xmlns:p="http://schemas.openxmlformats.org/presentationml/2006/main">
   <p:cSld name="Slide 9">
     <p:spTree>
@@ -7969,7 +9364,7 @@
 </p:sld>
 </file>
 
-<file path=ppt/slides/slide15.xml><?xml version="1.0" encoding="utf-8"?>
+<file path=ppt/slides/slide18.xml><?xml version="1.0" encoding="utf-8"?>
 <p:sld xmlns:a="http://schemas.openxmlformats.org/drawingml/2006/main" xmlns:r="http://schemas.openxmlformats.org/officeDocument/2006/relationships" xmlns:p="http://schemas.openxmlformats.org/presentationml/2006/main">
   <p:cSld name="Slide 10">
     <p:spTree>
@@ -8375,7 +9770,7 @@
 </p:sld>
 </file>
 
-<file path=ppt/slides/slide16.xml><?xml version="1.0" encoding="utf-8"?>
+<file path=ppt/slides/slide19.xml><?xml version="1.0" encoding="utf-8"?>
 <p:sld xmlns:a="http://schemas.openxmlformats.org/drawingml/2006/main" xmlns:r="http://schemas.openxmlformats.org/officeDocument/2006/relationships" xmlns:p="http://schemas.openxmlformats.org/presentationml/2006/main">
   <p:cSld name="Slide 11">
     <p:spTree>
@@ -8770,1224 +10165,6 @@
               <a:t>Only 24.5 billable hours were recorded for September, indicating limited activity.</a:t>
             </a:r>
             <a:endParaRPr lang="en-US" sz="950"/>
-          </a:p>
-        </p:txBody>
-      </p:sp>
-    </p:spTree>
-  </p:cSld>
-  <p:clrMapOvr>
-    <a:masterClrMapping/>
-  </p:clrMapOvr>
-</p:sld>
-</file>
-
-<file path=ppt/slides/slide17.xml><?xml version="1.0" encoding="utf-8"?>
-<p:sld xmlns:a="http://schemas.openxmlformats.org/drawingml/2006/main" xmlns:r="http://schemas.openxmlformats.org/officeDocument/2006/relationships" xmlns:p="http://schemas.openxmlformats.org/presentationml/2006/main">
-  <p:cSld name="Slide 12">
-    <p:spTree>
-      <p:nvGrpSpPr>
-        <p:cNvPr id="1" name=""/>
-        <p:cNvGrpSpPr/>
-        <p:nvPr/>
-      </p:nvGrpSpPr>
-      <p:grpSpPr>
-        <a:xfrm>
-          <a:off x="0" y="0"/>
-          <a:ext cx="0" cy="0"/>
-          <a:chOff x="0" y="0"/>
-          <a:chExt cx="0" cy="0"/>
-        </a:xfrm>
-      </p:grpSpPr>
-      <p:pic>
-        <p:nvPicPr>
-          <p:cNvPr id="27" name="snip dept_Integration" descr="dept_Integration.png"/>
-          <p:cNvPicPr>
-            <a:picLocks noChangeAspect="1"/>
-          </p:cNvPicPr>
-          <p:nvPr/>
-        </p:nvPicPr>
-        <p:blipFill>
-          <a:blip r:embed="rId3"/>
-          <a:stretch>
-            <a:fillRect/>
-          </a:stretch>
-        </p:blipFill>
-        <p:spPr>
-          <a:xfrm>
-            <a:off x="968754" y="1005840"/>
-            <a:ext cx="7206491" cy="2133881"/>
-          </a:xfrm>
-          <a:prstGeom prst="rect">
-            <a:avLst/>
-          </a:prstGeom>
-        </p:spPr>
-      </p:pic>
-      <p:sp>
-        <p:nvSpPr>
-          <p:cNvPr id="2" name="Text 0"/>
-          <p:cNvSpPr txBox="1"/>
-          <p:nvPr/>
-        </p:nvSpPr>
-        <p:spPr>
-          <a:xfrm>
-            <a:off x="502920" y="365760"/>
-            <a:ext cx="6400800" cy="274320"/>
-          </a:xfrm>
-          <a:prstGeom prst="rect">
-            <a:avLst/>
-          </a:prstGeom>
-          <a:noFill/>
-          <a:ln/>
-        </p:spPr>
-        <p:txBody>
-          <a:bodyPr wrap="square" lIns="0" tIns="0" rIns="0" bIns="0" rtlCol="0" anchor="ctr"/>
-          <a:lstStyle/>
-          <a:p>
-            <a:pPr marL="0" indent="0">
-              <a:buNone/>
-            </a:pPr>
-            <a:r>
-              <a:rPr lang="en-US" sz="950" b="1" kern="0" spc="220">
-                <a:solidFill>
-                  <a:srgbClr val="122B82"/>
-                </a:solidFill>
-              </a:rPr>
-              <a:t>FINANCIAL PERFORMANCE</a:t>
-            </a:r>
-            <a:endParaRPr lang="en-US" sz="950"/>
-          </a:p>
-        </p:txBody>
-      </p:sp>
-      <p:sp>
-        <p:nvSpPr>
-          <p:cNvPr id="3" name="Text 1"/>
-          <p:cNvSpPr txBox="1"/>
-          <p:nvPr/>
-        </p:nvSpPr>
-        <p:spPr>
-          <a:xfrm>
-            <a:off x="502920" y="640080"/>
-            <a:ext cx="7315200" cy="365760"/>
-          </a:xfrm>
-          <a:prstGeom prst="rect">
-            <a:avLst/>
-          </a:prstGeom>
-          <a:noFill/>
-          <a:ln/>
-        </p:spPr>
-        <p:txBody>
-          <a:bodyPr wrap="square" lIns="0" tIns="0" rIns="0" bIns="0" rtlCol="0" anchor="ctr"/>
-          <a:lstStyle/>
-          <a:p>
-            <a:pPr marL="0" indent="0" algn="ctr">
-              <a:buNone/>
-            </a:pPr>
-            <a:r>
-              <a:rPr lang="en-US" sz="2200" b="1">
-                <a:solidFill>
-                  <a:srgbClr val="242C39"/>
-                </a:solidFill>
-              </a:rPr>
-              <a:t>Integration, Sep 26</a:t>
-            </a:r>
-            <a:endParaRPr lang="en-US" sz="2700"/>
-          </a:p>
-        </p:txBody>
-      </p:sp>
-      <p:sp>
-        <p:nvSpPr>
-          <p:cNvPr id="6" name="commentary panel"/>
-          <p:cNvSpPr/>
-          <p:nvPr/>
-        </p:nvSpPr>
-        <p:spPr>
-          <a:xfrm>
-            <a:off x="502920" y="3231161"/>
-            <a:ext cx="8138160" cy="1395702"/>
-          </a:xfrm>
-          <a:prstGeom prst="rect">
-            <a:avLst/>
-          </a:prstGeom>
-          <a:solidFill>
-            <a:srgbClr val="E8F9F8"/>
-          </a:solidFill>
-          <a:ln/>
-        </p:spPr>
-        <p:txBody>
-          <a:bodyPr/>
-          <a:lstStyle/>
-          <a:p>
-            <a:endParaRPr lang="en-AU"/>
-          </a:p>
-        </p:txBody>
-      </p:sp>
-      <p:sp>
-        <p:nvSpPr>
-          <p:cNvPr id="7" name="Text 4"/>
-          <p:cNvSpPr txBox="1"/>
-          <p:nvPr/>
-        </p:nvSpPr>
-        <p:spPr>
-          <a:xfrm>
-            <a:off x="685800" y="3304313"/>
-            <a:ext cx="2743200" cy="228600"/>
-          </a:xfrm>
-          <a:prstGeom prst="rect">
-            <a:avLst/>
-          </a:prstGeom>
-          <a:noFill/>
-          <a:ln/>
-        </p:spPr>
-        <p:txBody>
-          <a:bodyPr wrap="square" lIns="0" tIns="0" rIns="0" bIns="0" rtlCol="0" anchor="ctr"/>
-          <a:lstStyle/>
-          <a:p>
-            <a:pPr marL="0" indent="0">
-              <a:buNone/>
-            </a:pPr>
-            <a:r>
-              <a:rPr lang="en-US" sz="900" b="1" kern="0" spc="180">
-                <a:solidFill>
-                  <a:srgbClr val="005358"/>
-                </a:solidFill>
-              </a:rPr>
-              <a:t>COMMENTARY</a:t>
-            </a:r>
-            <a:endParaRPr lang="en-US" sz="900"/>
-          </a:p>
-        </p:txBody>
-      </p:sp>
-      <p:sp>
-        <p:nvSpPr>
-          <p:cNvPr id="8" name="Text 5"/>
-          <p:cNvSpPr txBox="1"/>
-          <p:nvPr/>
-        </p:nvSpPr>
-        <p:spPr>
-          <a:xfrm>
-            <a:off x="685800" y="3478049"/>
-            <a:ext cx="3703320" cy="1121382"/>
-          </a:xfrm>
-          <a:prstGeom prst="rect">
-            <a:avLst/>
-          </a:prstGeom>
-          <a:noFill/>
-          <a:ln/>
-        </p:spPr>
-        <p:txBody>
-          <a:bodyPr wrap="square" lIns="0" tIns="0" rIns="0" bIns="0" rtlCol="0" anchor="t">
-            <a:normAutofit fontScale="92500"/>
-          </a:bodyPr>
-          <a:lstStyle/>
-          <a:p>
-            <a:pPr marL="342900" indent="-342900">
-              <a:lnSpc>
-                <a:spcPts val="1150"/>
-              </a:lnSpc>
-              <a:spcAft>
-                <a:spcPts val="400"/>
-              </a:spcAft>
-              <a:buSzPct val="100000"/>
-              <a:buChar char="•"/>
-            </a:pPr>
-            <a:r>
-              <a:rPr lang="en-US" sz="1000">
-                <a:solidFill>
-                  <a:srgbClr val="3A4453"/>
-                </a:solidFill>
-              </a:rPr>
-              <a:t>Integration generated $235k revenue against a $59k budget, largely from a completed installation project.</a:t>
-            </a:r>
-            <a:endParaRPr lang="en-US" sz="900"/>
-          </a:p>
-          <a:p>
-            <a:pPr marL="342900" indent="-342900">
-              <a:lnSpc>
-                <a:spcPts val="1150"/>
-              </a:lnSpc>
-              <a:spcAft>
-                <a:spcPts val="400"/>
-              </a:spcAft>
-              <a:buSzPct val="100000"/>
-              <a:buChar char="•"/>
-            </a:pPr>
-            <a:r>
-              <a:rPr lang="en-US" sz="1000">
-                <a:solidFill>
-                  <a:srgbClr val="3A4453"/>
-                </a:solidFill>
-              </a:rPr>
-              <a:t>Gross margin was 10.1%, reflecting the high equipment and supplier costs associated with the work.</a:t>
-            </a:r>
-            <a:endParaRPr lang="en-US" sz="900"/>
-          </a:p>
-          <a:p>
-            <a:pPr marL="342900" indent="-342900">
-              <a:lnSpc>
-                <a:spcPts val="1150"/>
-              </a:lnSpc>
-              <a:spcAft>
-                <a:spcPts val="400"/>
-              </a:spcAft>
-              <a:buSzPct val="100000"/>
-              <a:buChar char="•"/>
-            </a:pPr>
-            <a:r>
-              <a:rPr lang="en-US" sz="1000">
-                <a:solidFill>
-                  <a:srgbClr val="3A4453"/>
-                </a:solidFill>
-              </a:rPr>
-              <a:t>This resulted in approximately $24k gross profit, despite the strong revenue result.</a:t>
-            </a:r>
-            <a:endParaRPr lang="en-US" sz="900"/>
-          </a:p>
-        </p:txBody>
-      </p:sp>
-      <p:sp>
-        <p:nvSpPr>
-          <p:cNvPr id="25" name="Slide Number Placeholder 0"/>
-          <p:cNvSpPr>
-            <a:spLocks noGrp="1"/>
-          </p:cNvSpPr>
-          <p:nvPr>
-            <p:ph type="sldNum" sz="quarter" idx="4294967295"/>
-          </p:nvPr>
-        </p:nvSpPr>
-        <p:spPr>
-          <a:xfrm>
-            <a:off x="8092440" y="4736592"/>
-            <a:ext cx="548640" cy="228600"/>
-          </a:xfrm>
-          <a:prstGeom prst="rect">
-            <a:avLst/>
-          </a:prstGeom>
-          <a:extLst>
-            <a:ext uri="{C572A759-6A51-4108-AA02-DFA0A04FC94B}">
-              <ma14:wrappingTextBoxFlag xmlns="" xmlns:ma14="http://schemas.microsoft.com/office/mac/drawingml/2011/main" val="0"/>
-            </a:ext>
-          </a:extLst>
-        </p:spPr>
-        <p:txBody>
-          <a:bodyPr/>
-          <a:lstStyle>
-            <a:lvl1pPr>
-              <a:defRPr sz="800">
-                <a:solidFill>
-                  <a:srgbClr val="6B7585"/>
-                </a:solidFill>
-              </a:defRPr>
-            </a:lvl1pPr>
-          </a:lstStyle>
-          <a:p>
-            <a:pPr algn="r"/>
-            <a:fld id="{F7021451-1387-4CA6-816F-3879F97B5CBC}" type="slidenum">
-              <a:rPr lang="en-US" b="0"/>
-              <a:t>17</a:t>
-            </a:fld>
-            <a:endParaRPr lang="en-US"/>
-          </a:p>
-        </p:txBody>
-      </p:sp>
-      <p:pic>
-        <p:nvPicPr>
-          <p:cNvPr id="26" name="cts logo" descr="cts-logo.png"/>
-          <p:cNvPicPr>
-            <a:picLocks noChangeAspect="1"/>
-          </p:cNvPicPr>
-          <p:nvPr/>
-        </p:nvPicPr>
-        <p:blipFill>
-          <a:blip r:embed="rId4"/>
-          <a:stretch>
-            <a:fillRect/>
-          </a:stretch>
-        </p:blipFill>
-        <p:spPr>
-          <a:xfrm>
-            <a:off x="7680959" y="182880"/>
-            <a:ext cx="960120" cy="539696"/>
-          </a:xfrm>
-          <a:prstGeom prst="rect">
-            <a:avLst/>
-          </a:prstGeom>
-        </p:spPr>
-      </p:pic>
-      <p:sp>
-        <p:nvSpPr>
-          <p:cNvPr id="4" name="Text 5b"/>
-          <p:cNvSpPr txBox="1"/>
-          <p:nvPr/>
-        </p:nvSpPr>
-        <p:spPr>
-          <a:xfrm>
-            <a:off x="4663440" y="3478049"/>
-            <a:ext cx="3703320" cy="1121382"/>
-          </a:xfrm>
-          <a:prstGeom prst="rect">
-            <a:avLst/>
-          </a:prstGeom>
-          <a:noFill/>
-          <a:ln/>
-        </p:spPr>
-        <p:txBody>
-          <a:bodyPr wrap="square" lIns="0" tIns="0" rIns="0" bIns="0" rtlCol="0" anchor="t">
-            <a:normAutofit fontScale="92500"/>
-          </a:bodyPr>
-          <a:lstStyle/>
-          <a:p>
-            <a:pPr marL="342900" indent="-342900">
-              <a:lnSpc>
-                <a:spcPts val="1150"/>
-              </a:lnSpc>
-              <a:spcAft>
-                <a:spcPts val="400"/>
-              </a:spcAft>
-              <a:buSzPct val="100000"/>
-              <a:buChar char="•"/>
-            </a:pPr>
-            <a:r>
-              <a:rPr lang="en-US" sz="1000">
-                <a:solidFill>
-                  <a:srgbClr val="3A4453"/>
-                </a:solidFill>
-              </a:rPr>
-              <a:t>After $13k of overheads, Integration reported a $10k profit.</a:t>
-            </a:r>
-            <a:endParaRPr lang="en-US" sz="900"/>
-          </a:p>
-          <a:p>
-            <a:pPr marL="342900" indent="-342900">
-              <a:lnSpc>
-                <a:spcPts val="1150"/>
-              </a:lnSpc>
-              <a:spcAft>
-                <a:spcPts val="400"/>
-              </a:spcAft>
-              <a:buSzPct val="100000"/>
-              <a:buChar char="•"/>
-            </a:pPr>
-            <a:r>
-              <a:rPr lang="en-US" sz="1000">
-                <a:solidFill>
-                  <a:srgbClr val="3A4453"/>
-                </a:solidFill>
-              </a:rPr>
-              <a:t>Only 10 billable hours were recorded, indicating that the revenue was mainly driven by equipment supply rather than labour delivery.</a:t>
-            </a:r>
-            <a:endParaRPr lang="en-US" sz="900"/>
-          </a:p>
-        </p:txBody>
-      </p:sp>
-    </p:spTree>
-  </p:cSld>
-  <p:clrMapOvr>
-    <a:masterClrMapping/>
-  </p:clrMapOvr>
-</p:sld>
-</file>
-
-<file path=ppt/slides/slide18.xml><?xml version="1.0" encoding="utf-8"?>
-<p:sld xmlns:a="http://schemas.openxmlformats.org/drawingml/2006/main" xmlns:r="http://schemas.openxmlformats.org/officeDocument/2006/relationships" xmlns:p="http://schemas.openxmlformats.org/presentationml/2006/main">
-  <p:cSld name="Slide 13">
-    <p:spTree>
-      <p:nvGrpSpPr>
-        <p:cNvPr id="1" name=""/>
-        <p:cNvGrpSpPr/>
-        <p:nvPr/>
-      </p:nvGrpSpPr>
-      <p:grpSpPr>
-        <a:xfrm>
-          <a:off x="0" y="0"/>
-          <a:ext cx="0" cy="0"/>
-          <a:chOff x="0" y="0"/>
-          <a:chExt cx="0" cy="0"/>
-        </a:xfrm>
-      </p:grpSpPr>
-      <p:pic>
-        <p:nvPicPr>
-          <p:cNvPr id="27" name="snip dept_Consulting" descr="dept_Consulting.png"/>
-          <p:cNvPicPr>
-            <a:picLocks noChangeAspect="1"/>
-          </p:cNvPicPr>
-          <p:nvPr/>
-        </p:nvPicPr>
-        <p:blipFill>
-          <a:blip r:embed="rId3"/>
-          <a:stretch>
-            <a:fillRect/>
-          </a:stretch>
-        </p:blipFill>
-        <p:spPr>
-          <a:xfrm>
-            <a:off x="968754" y="1005840"/>
-            <a:ext cx="7206491" cy="2133881"/>
-          </a:xfrm>
-          <a:prstGeom prst="rect">
-            <a:avLst/>
-          </a:prstGeom>
-        </p:spPr>
-      </p:pic>
-      <p:sp>
-        <p:nvSpPr>
-          <p:cNvPr id="2" name="Text 0"/>
-          <p:cNvSpPr txBox="1"/>
-          <p:nvPr/>
-        </p:nvSpPr>
-        <p:spPr>
-          <a:xfrm>
-            <a:off x="502920" y="365760"/>
-            <a:ext cx="6400800" cy="274320"/>
-          </a:xfrm>
-          <a:prstGeom prst="rect">
-            <a:avLst/>
-          </a:prstGeom>
-          <a:noFill/>
-          <a:ln/>
-        </p:spPr>
-        <p:txBody>
-          <a:bodyPr wrap="square" lIns="0" tIns="0" rIns="0" bIns="0" rtlCol="0" anchor="ctr"/>
-          <a:lstStyle/>
-          <a:p>
-            <a:pPr marL="0" indent="0">
-              <a:buNone/>
-            </a:pPr>
-            <a:r>
-              <a:rPr lang="en-US" sz="950" b="1" kern="0" spc="220">
-                <a:solidFill>
-                  <a:srgbClr val="122B82"/>
-                </a:solidFill>
-              </a:rPr>
-              <a:t>FINANCIAL PERFORMANCE</a:t>
-            </a:r>
-            <a:endParaRPr lang="en-US" sz="950"/>
-          </a:p>
-        </p:txBody>
-      </p:sp>
-      <p:sp>
-        <p:nvSpPr>
-          <p:cNvPr id="3" name="Text 1"/>
-          <p:cNvSpPr txBox="1"/>
-          <p:nvPr/>
-        </p:nvSpPr>
-        <p:spPr>
-          <a:xfrm>
-            <a:off x="502920" y="640080"/>
-            <a:ext cx="7315200" cy="365760"/>
-          </a:xfrm>
-          <a:prstGeom prst="rect">
-            <a:avLst/>
-          </a:prstGeom>
-          <a:noFill/>
-          <a:ln/>
-        </p:spPr>
-        <p:txBody>
-          <a:bodyPr wrap="square" lIns="0" tIns="0" rIns="0" bIns="0" rtlCol="0" anchor="ctr"/>
-          <a:lstStyle/>
-          <a:p>
-            <a:pPr marL="0" indent="0" algn="ctr">
-              <a:buNone/>
-            </a:pPr>
-            <a:r>
-              <a:rPr lang="en-US" sz="2200" b="1">
-                <a:solidFill>
-                  <a:srgbClr val="242C39"/>
-                </a:solidFill>
-              </a:rPr>
-              <a:t>Consulting, Sep 26</a:t>
-            </a:r>
-            <a:endParaRPr lang="en-US" sz="2700"/>
-          </a:p>
-        </p:txBody>
-      </p:sp>
-      <p:sp>
-        <p:nvSpPr>
-          <p:cNvPr id="6" name="commentary panel"/>
-          <p:cNvSpPr/>
-          <p:nvPr/>
-        </p:nvSpPr>
-        <p:spPr>
-          <a:xfrm>
-            <a:off x="502920" y="3231161"/>
-            <a:ext cx="8138160" cy="1395702"/>
-          </a:xfrm>
-          <a:prstGeom prst="rect">
-            <a:avLst/>
-          </a:prstGeom>
-          <a:solidFill>
-            <a:srgbClr val="E8F9F8"/>
-          </a:solidFill>
-          <a:ln/>
-        </p:spPr>
-        <p:txBody>
-          <a:bodyPr/>
-          <a:lstStyle/>
-          <a:p>
-            <a:endParaRPr lang="en-AU"/>
-          </a:p>
-        </p:txBody>
-      </p:sp>
-      <p:sp>
-        <p:nvSpPr>
-          <p:cNvPr id="7" name="Text 4"/>
-          <p:cNvSpPr txBox="1"/>
-          <p:nvPr/>
-        </p:nvSpPr>
-        <p:spPr>
-          <a:xfrm>
-            <a:off x="685800" y="3304313"/>
-            <a:ext cx="2743200" cy="228600"/>
-          </a:xfrm>
-          <a:prstGeom prst="rect">
-            <a:avLst/>
-          </a:prstGeom>
-          <a:noFill/>
-          <a:ln/>
-        </p:spPr>
-        <p:txBody>
-          <a:bodyPr wrap="square" lIns="0" tIns="0" rIns="0" bIns="0" rtlCol="0" anchor="ctr"/>
-          <a:lstStyle/>
-          <a:p>
-            <a:pPr marL="0" indent="0">
-              <a:buNone/>
-            </a:pPr>
-            <a:r>
-              <a:rPr lang="en-US" sz="900" b="1" kern="0" spc="180">
-                <a:solidFill>
-                  <a:srgbClr val="005358"/>
-                </a:solidFill>
-              </a:rPr>
-              <a:t>COMMENTARY</a:t>
-            </a:r>
-            <a:endParaRPr lang="en-US" sz="900"/>
-          </a:p>
-        </p:txBody>
-      </p:sp>
-      <p:sp>
-        <p:nvSpPr>
-          <p:cNvPr id="8" name="Text 5"/>
-          <p:cNvSpPr txBox="1"/>
-          <p:nvPr/>
-        </p:nvSpPr>
-        <p:spPr>
-          <a:xfrm>
-            <a:off x="685800" y="3478049"/>
-            <a:ext cx="3703320" cy="1121382"/>
-          </a:xfrm>
-          <a:prstGeom prst="rect">
-            <a:avLst/>
-          </a:prstGeom>
-          <a:noFill/>
-          <a:ln/>
-        </p:spPr>
-        <p:txBody>
-          <a:bodyPr wrap="square" lIns="0" tIns="0" rIns="0" bIns="0" rtlCol="0" anchor="t">
-            <a:normAutofit fontScale="85000" lnSpcReduction="10000"/>
-          </a:bodyPr>
-          <a:lstStyle/>
-          <a:p>
-            <a:pPr marL="342900" indent="-342900">
-              <a:lnSpc>
-                <a:spcPts val="1200"/>
-              </a:lnSpc>
-              <a:spcAft>
-                <a:spcPts val="400"/>
-              </a:spcAft>
-              <a:buSzPct val="100000"/>
-              <a:buChar char="•"/>
-            </a:pPr>
-            <a:r>
-              <a:rPr lang="en-US" sz="1000">
-                <a:solidFill>
-                  <a:srgbClr val="3A4453"/>
-                </a:solidFill>
-              </a:rPr>
-              <a:t>Consulting generated $4k revenue against a $23k budget, reflecting limited fee-generating activity.</a:t>
-            </a:r>
-            <a:endParaRPr lang="en-US" sz="950"/>
-          </a:p>
-          <a:p>
-            <a:pPr marL="342900" indent="-342900">
-              <a:lnSpc>
-                <a:spcPts val="1200"/>
-              </a:lnSpc>
-              <a:spcAft>
-                <a:spcPts val="400"/>
-              </a:spcAft>
-              <a:buSzPct val="100000"/>
-              <a:buChar char="•"/>
-            </a:pPr>
-            <a:r>
-              <a:rPr lang="en-US" sz="1000">
-                <a:solidFill>
-                  <a:srgbClr val="3A4453"/>
-                </a:solidFill>
-              </a:rPr>
-              <a:t>The department recorded a $20k loss after approximately $20k of overheads.</a:t>
-            </a:r>
-            <a:endParaRPr lang="en-US" sz="950"/>
-          </a:p>
-        </p:txBody>
-      </p:sp>
-      <p:sp>
-        <p:nvSpPr>
-          <p:cNvPr id="25" name="Slide Number Placeholder 0"/>
-          <p:cNvSpPr>
-            <a:spLocks noGrp="1"/>
-          </p:cNvSpPr>
-          <p:nvPr>
-            <p:ph type="sldNum" sz="quarter" idx="4294967295"/>
-          </p:nvPr>
-        </p:nvSpPr>
-        <p:spPr>
-          <a:xfrm>
-            <a:off x="8092440" y="4736592"/>
-            <a:ext cx="548640" cy="228600"/>
-          </a:xfrm>
-          <a:prstGeom prst="rect">
-            <a:avLst/>
-          </a:prstGeom>
-          <a:extLst>
-            <a:ext uri="{C572A759-6A51-4108-AA02-DFA0A04FC94B}">
-              <ma14:wrappingTextBoxFlag xmlns="" xmlns:ma14="http://schemas.microsoft.com/office/mac/drawingml/2011/main" val="0"/>
-            </a:ext>
-          </a:extLst>
-        </p:spPr>
-        <p:txBody>
-          <a:bodyPr/>
-          <a:lstStyle>
-            <a:lvl1pPr>
-              <a:defRPr sz="800">
-                <a:solidFill>
-                  <a:srgbClr val="6B7585"/>
-                </a:solidFill>
-              </a:defRPr>
-            </a:lvl1pPr>
-          </a:lstStyle>
-          <a:p>
-            <a:pPr algn="r"/>
-            <a:fld id="{F7021451-1387-4CA6-816F-3879F97B5CBC}" type="slidenum">
-              <a:rPr lang="en-US" b="0"/>
-              <a:t>18</a:t>
-            </a:fld>
-            <a:endParaRPr lang="en-US"/>
-          </a:p>
-        </p:txBody>
-      </p:sp>
-      <p:pic>
-        <p:nvPicPr>
-          <p:cNvPr id="26" name="cts logo" descr="cts-logo.png"/>
-          <p:cNvPicPr>
-            <a:picLocks noChangeAspect="1"/>
-          </p:cNvPicPr>
-          <p:nvPr/>
-        </p:nvPicPr>
-        <p:blipFill>
-          <a:blip r:embed="rId4"/>
-          <a:stretch>
-            <a:fillRect/>
-          </a:stretch>
-        </p:blipFill>
-        <p:spPr>
-          <a:xfrm>
-            <a:off x="7680959" y="182880"/>
-            <a:ext cx="960120" cy="539696"/>
-          </a:xfrm>
-          <a:prstGeom prst="rect">
-            <a:avLst/>
-          </a:prstGeom>
-        </p:spPr>
-      </p:pic>
-      <p:sp>
-        <p:nvSpPr>
-          <p:cNvPr id="4" name="Text 5b"/>
-          <p:cNvSpPr txBox="1"/>
-          <p:nvPr/>
-        </p:nvSpPr>
-        <p:spPr>
-          <a:xfrm>
-            <a:off x="4663440" y="3478049"/>
-            <a:ext cx="3703320" cy="1121382"/>
-          </a:xfrm>
-          <a:prstGeom prst="rect">
-            <a:avLst/>
-          </a:prstGeom>
-          <a:noFill/>
-          <a:ln/>
-        </p:spPr>
-        <p:txBody>
-          <a:bodyPr wrap="square" lIns="0" tIns="0" rIns="0" bIns="0" rtlCol="0" anchor="t">
-            <a:normAutofit fontScale="85000" lnSpcReduction="10000"/>
-          </a:bodyPr>
-          <a:lstStyle/>
-          <a:p>
-            <a:pPr marL="342900" indent="-342900">
-              <a:lnSpc>
-                <a:spcPts val="1200"/>
-              </a:lnSpc>
-              <a:spcAft>
-                <a:spcPts val="400"/>
-              </a:spcAft>
-              <a:buSzPct val="100000"/>
-              <a:buChar char="•"/>
-            </a:pPr>
-            <a:r>
-              <a:rPr lang="en-US" sz="1000">
-                <a:solidFill>
-                  <a:srgbClr val="3A4453"/>
-                </a:solidFill>
-              </a:rPr>
-              <a:t>Non-billable activity totalled 84 hours, compared with 31 billable hours.</a:t>
-            </a:r>
-            <a:endParaRPr lang="en-US" sz="950"/>
-          </a:p>
-          <a:p>
-            <a:pPr marL="342900" indent="-342900">
-              <a:lnSpc>
-                <a:spcPts val="1200"/>
-              </a:lnSpc>
-              <a:spcAft>
-                <a:spcPts val="400"/>
-              </a:spcAft>
-              <a:buSzPct val="100000"/>
-              <a:buChar char="•"/>
-            </a:pPr>
-            <a:r>
-              <a:rPr lang="en-US" sz="1000">
-                <a:solidFill>
-                  <a:srgbClr val="3A4453"/>
-                </a:solidFill>
-              </a:rPr>
-              <a:t>Year-to-date revenue is $4k against a $237k budget.</a:t>
-            </a:r>
-            <a:endParaRPr lang="en-US" sz="950"/>
-          </a:p>
-          <a:p>
-            <a:pPr marL="342900" indent="-342900">
-              <a:lnSpc>
-                <a:spcPts val="1200"/>
-              </a:lnSpc>
-              <a:spcAft>
-                <a:spcPts val="400"/>
-              </a:spcAft>
-              <a:buSzPct val="100000"/>
-              <a:buChar char="•"/>
-            </a:pPr>
-            <a:r>
-              <a:rPr lang="en-US" sz="1000">
-                <a:solidFill>
-                  <a:srgbClr val="3A4453"/>
-                </a:solidFill>
-              </a:rPr>
-              <a:t>Management should review the department's future structure, capacity and commercial viability, including whether to rebuild or combine its activities.</a:t>
-            </a:r>
-            <a:endParaRPr lang="en-US" sz="950"/>
-          </a:p>
-        </p:txBody>
-      </p:sp>
-    </p:spTree>
-  </p:cSld>
-  <p:clrMapOvr>
-    <a:masterClrMapping/>
-  </p:clrMapOvr>
-</p:sld>
-</file>
-
-<file path=ppt/slides/slide19.xml><?xml version="1.0" encoding="utf-8"?>
-<p:sld xmlns:a="http://schemas.openxmlformats.org/drawingml/2006/main" xmlns:r="http://schemas.openxmlformats.org/officeDocument/2006/relationships" xmlns:p="http://schemas.openxmlformats.org/presentationml/2006/main">
-  <p:cSld name="Slide 14">
-    <p:spTree>
-      <p:nvGrpSpPr>
-        <p:cNvPr id="1" name=""/>
-        <p:cNvGrpSpPr/>
-        <p:nvPr/>
-      </p:nvGrpSpPr>
-      <p:grpSpPr>
-        <a:xfrm>
-          <a:off x="0" y="0"/>
-          <a:ext cx="0" cy="0"/>
-          <a:chOff x="0" y="0"/>
-          <a:chExt cx="0" cy="0"/>
-        </a:xfrm>
-      </p:grpSpPr>
-      <p:pic>
-        <p:nvPicPr>
-          <p:cNvPr id="27" name="snip rev_by_dept" descr="rev_by_dept.png"/>
-          <p:cNvPicPr>
-            <a:picLocks noChangeAspect="1"/>
-          </p:cNvPicPr>
-          <p:nvPr/>
-        </p:nvPicPr>
-        <p:blipFill>
-          <a:blip r:embed="rId5"/>
-          <a:stretch>
-            <a:fillRect/>
-          </a:stretch>
-        </p:blipFill>
-        <p:spPr>
-          <a:xfrm>
-            <a:off x="518066" y="1005840"/>
-            <a:ext cx="8107866" cy="2133881"/>
-          </a:xfrm>
-          <a:prstGeom prst="rect">
-            <a:avLst/>
-          </a:prstGeom>
-        </p:spPr>
-      </p:pic>
-      <p:sp>
-        <p:nvSpPr>
-          <p:cNvPr id="2" name="Text 0"/>
-          <p:cNvSpPr txBox="1"/>
-          <p:nvPr/>
-        </p:nvSpPr>
-        <p:spPr>
-          <a:xfrm>
-            <a:off x="502920" y="365760"/>
-            <a:ext cx="6400800" cy="274320"/>
-          </a:xfrm>
-          <a:prstGeom prst="rect">
-            <a:avLst/>
-          </a:prstGeom>
-          <a:noFill/>
-          <a:ln/>
-        </p:spPr>
-        <p:txBody>
-          <a:bodyPr wrap="square" lIns="0" tIns="0" rIns="0" bIns="0" rtlCol="0" anchor="ctr"/>
-          <a:lstStyle/>
-          <a:p>
-            <a:pPr marL="0" indent="0">
-              <a:buNone/>
-            </a:pPr>
-            <a:r>
-              <a:rPr lang="en-US" sz="950" b="1" kern="0" spc="220">
-                <a:solidFill>
-                  <a:srgbClr val="122B82"/>
-                </a:solidFill>
-              </a:rPr>
-              <a:t>FINANCIAL PERFORMANCE</a:t>
-            </a:r>
-            <a:endParaRPr lang="en-US" sz="950"/>
-          </a:p>
-        </p:txBody>
-      </p:sp>
-      <p:sp>
-        <p:nvSpPr>
-          <p:cNvPr id="3" name="Text 1"/>
-          <p:cNvSpPr txBox="1"/>
-          <p:nvPr/>
-        </p:nvSpPr>
-        <p:spPr>
-          <a:xfrm>
-            <a:off x="502920" y="640080"/>
-            <a:ext cx="7315200" cy="365760"/>
-          </a:xfrm>
-          <a:prstGeom prst="rect">
-            <a:avLst/>
-          </a:prstGeom>
-          <a:noFill/>
-          <a:ln/>
-        </p:spPr>
-        <p:txBody>
-          <a:bodyPr wrap="square" lIns="0" tIns="0" rIns="0" bIns="0" rtlCol="0" anchor="ctr"/>
-          <a:lstStyle/>
-          <a:p>
-            <a:pPr marL="0" indent="0" algn="ctr">
-              <a:buNone/>
-            </a:pPr>
-            <a:r>
-              <a:rPr lang="en-US" sz="2200" b="1">
-                <a:solidFill>
-                  <a:srgbClr val="242C39"/>
-                </a:solidFill>
-              </a:rPr>
-              <a:t>Revenue against budget and last year</a:t>
-            </a:r>
-            <a:endParaRPr lang="en-US" sz="2700"/>
-          </a:p>
-        </p:txBody>
-      </p:sp>
-      <p:sp>
-        <p:nvSpPr>
-          <p:cNvPr id="6" name="commentary panel"/>
-          <p:cNvSpPr/>
-          <p:nvPr/>
-        </p:nvSpPr>
-        <p:spPr>
-          <a:xfrm>
-            <a:off x="502920" y="3231161"/>
-            <a:ext cx="8138160" cy="1395702"/>
-          </a:xfrm>
-          <a:prstGeom prst="rect">
-            <a:avLst/>
-          </a:prstGeom>
-          <a:solidFill>
-            <a:srgbClr val="E8F9F8"/>
-          </a:solidFill>
-          <a:ln/>
-        </p:spPr>
-        <p:txBody>
-          <a:bodyPr/>
-          <a:lstStyle/>
-          <a:p>
-            <a:endParaRPr lang="en-AU"/>
-          </a:p>
-        </p:txBody>
-      </p:sp>
-      <p:sp>
-        <p:nvSpPr>
-          <p:cNvPr id="7" name="Text 4"/>
-          <p:cNvSpPr txBox="1"/>
-          <p:nvPr/>
-        </p:nvSpPr>
-        <p:spPr>
-          <a:xfrm>
-            <a:off x="685800" y="3304313"/>
-            <a:ext cx="2743200" cy="228600"/>
-          </a:xfrm>
-          <a:prstGeom prst="rect">
-            <a:avLst/>
-          </a:prstGeom>
-          <a:noFill/>
-          <a:ln/>
-        </p:spPr>
-        <p:txBody>
-          <a:bodyPr wrap="square" lIns="0" tIns="0" rIns="0" bIns="0" rtlCol="0" anchor="ctr"/>
-          <a:lstStyle/>
-          <a:p>
-            <a:pPr marL="0" indent="0">
-              <a:buNone/>
-            </a:pPr>
-            <a:r>
-              <a:rPr lang="en-US" sz="900" b="1" kern="0" spc="180">
-                <a:solidFill>
-                  <a:srgbClr val="005358"/>
-                </a:solidFill>
-              </a:rPr>
-              <a:t>COMMENTARY</a:t>
-            </a:r>
-            <a:endParaRPr lang="en-US" sz="900"/>
-          </a:p>
-        </p:txBody>
-      </p:sp>
-      <p:sp>
-        <p:nvSpPr>
-          <p:cNvPr id="8" name="Text 5"/>
-          <p:cNvSpPr txBox="1"/>
-          <p:nvPr/>
-        </p:nvSpPr>
-        <p:spPr>
-          <a:xfrm>
-            <a:off x="685800" y="3478049"/>
-            <a:ext cx="3703320" cy="1121382"/>
-          </a:xfrm>
-          <a:prstGeom prst="rect">
-            <a:avLst/>
-          </a:prstGeom>
-          <a:noFill/>
-          <a:ln/>
-        </p:spPr>
-        <p:txBody>
-          <a:bodyPr wrap="square" lIns="0" tIns="0" rIns="0" bIns="0" rtlCol="0" anchor="t">
-            <a:normAutofit fontScale="92500"/>
-          </a:bodyPr>
-          <a:lstStyle/>
-          <a:p>
-            <a:pPr marL="342900" indent="-342900">
-              <a:lnSpc>
-                <a:spcPts val="1050"/>
-              </a:lnSpc>
-              <a:spcAft>
-                <a:spcPts val="400"/>
-              </a:spcAft>
-              <a:buSzPct val="100000"/>
-              <a:buChar char="•"/>
-            </a:pPr>
-            <a:r>
-              <a:rPr lang="en-US" sz="1000">
-                <a:solidFill>
-                  <a:srgbClr val="3A4453"/>
-                </a:solidFill>
-              </a:rPr>
-              <a:t>Integration generated $235k revenue against a $59k budget, mainly from a completed installation project. This result may not recur in October.</a:t>
-            </a:r>
-            <a:endParaRPr lang="en-US" sz="850"/>
-          </a:p>
-          <a:p>
-            <a:pPr marL="342900" indent="-342900">
-              <a:lnSpc>
-                <a:spcPts val="1050"/>
-              </a:lnSpc>
-              <a:spcAft>
-                <a:spcPts val="400"/>
-              </a:spcAft>
-              <a:buSzPct val="100000"/>
-              <a:buChar char="•"/>
-            </a:pPr>
-            <a:r>
-              <a:rPr lang="en-US" sz="1000">
-                <a:solidFill>
-                  <a:srgbClr val="3A4453"/>
-                </a:solidFill>
-              </a:rPr>
-              <a:t>Support recorded $243k revenue against a $248k budget, remaining broadly in line with recurring contracts.</a:t>
-            </a:r>
-            <a:endParaRPr lang="en-US" sz="850"/>
-          </a:p>
-        </p:txBody>
-      </p:sp>
-      <p:sp>
-        <p:nvSpPr>
-          <p:cNvPr id="25" name="Slide Number Placeholder 0"/>
-          <p:cNvSpPr>
-            <a:spLocks noGrp="1"/>
-          </p:cNvSpPr>
-          <p:nvPr>
-            <p:ph type="sldNum" sz="quarter" idx="4294967295"/>
-          </p:nvPr>
-        </p:nvSpPr>
-        <p:spPr>
-          <a:xfrm>
-            <a:off x="8092440" y="4736592"/>
-            <a:ext cx="548640" cy="228600"/>
-          </a:xfrm>
-          <a:prstGeom prst="rect">
-            <a:avLst/>
-          </a:prstGeom>
-          <a:extLst>
-            <a:ext uri="{C572A759-6A51-4108-AA02-DFA0A04FC94B}">
-              <ma14:wrappingTextBoxFlag xmlns="" xmlns:ma14="http://schemas.microsoft.com/office/mac/drawingml/2011/main" val="0"/>
-            </a:ext>
-          </a:extLst>
-        </p:spPr>
-        <p:txBody>
-          <a:bodyPr/>
-          <a:lstStyle>
-            <a:lvl1pPr>
-              <a:defRPr sz="800">
-                <a:solidFill>
-                  <a:srgbClr val="6B7585"/>
-                </a:solidFill>
-              </a:defRPr>
-            </a:lvl1pPr>
-          </a:lstStyle>
-          <a:p>
-            <a:pPr algn="r"/>
-            <a:fld id="{F7021451-1387-4CA6-816F-3879F97B5CBC}" type="slidenum">
-              <a:rPr lang="en-US" b="0"/>
-              <a:t>19</a:t>
-            </a:fld>
-            <a:endParaRPr lang="en-US"/>
-          </a:p>
-        </p:txBody>
-      </p:sp>
-      <p:pic>
-        <p:nvPicPr>
-          <p:cNvPr id="26" name="cts logo" descr="cts-logo.png"/>
-          <p:cNvPicPr>
-            <a:picLocks noChangeAspect="1"/>
-          </p:cNvPicPr>
-          <p:nvPr/>
-        </p:nvPicPr>
-        <p:blipFill>
-          <a:blip r:embed="rId4"/>
-          <a:stretch>
-            <a:fillRect/>
-          </a:stretch>
-        </p:blipFill>
-        <p:spPr>
-          <a:xfrm>
-            <a:off x="7680959" y="182880"/>
-            <a:ext cx="960120" cy="539696"/>
-          </a:xfrm>
-          <a:prstGeom prst="rect">
-            <a:avLst/>
-          </a:prstGeom>
-        </p:spPr>
-      </p:pic>
-      <p:sp>
-        <p:nvSpPr>
-          <p:cNvPr id="4" name="Text 5b"/>
-          <p:cNvSpPr txBox="1"/>
-          <p:nvPr/>
-        </p:nvSpPr>
-        <p:spPr>
-          <a:xfrm>
-            <a:off x="4663440" y="3478049"/>
-            <a:ext cx="3703320" cy="1121382"/>
-          </a:xfrm>
-          <a:prstGeom prst="rect">
-            <a:avLst/>
-          </a:prstGeom>
-          <a:noFill/>
-          <a:ln/>
-        </p:spPr>
-        <p:txBody>
-          <a:bodyPr wrap="square" lIns="0" tIns="0" rIns="0" bIns="0" rtlCol="0" anchor="t">
-            <a:normAutofit fontScale="92500"/>
-          </a:bodyPr>
-          <a:lstStyle/>
-          <a:p>
-            <a:pPr marL="342900" indent="-342900">
-              <a:lnSpc>
-                <a:spcPts val="1050"/>
-              </a:lnSpc>
-              <a:spcAft>
-                <a:spcPts val="400"/>
-              </a:spcAft>
-              <a:buSzPct val="100000"/>
-              <a:buChar char="•"/>
-            </a:pPr>
-            <a:r>
-              <a:rPr lang="en-US" sz="1000">
-                <a:solidFill>
-                  <a:srgbClr val="3A4453"/>
-                </a:solidFill>
-              </a:rPr>
-              <a:t>Events delivered $73k revenue against a $66k budget.</a:t>
-            </a:r>
-            <a:endParaRPr lang="en-US" sz="850"/>
-          </a:p>
-          <a:p>
-            <a:pPr marL="342900" indent="-342900">
-              <a:lnSpc>
-                <a:spcPts val="1050"/>
-              </a:lnSpc>
-              <a:spcAft>
-                <a:spcPts val="400"/>
-              </a:spcAft>
-              <a:buSzPct val="100000"/>
-              <a:buChar char="•"/>
-            </a:pPr>
-            <a:r>
-              <a:rPr lang="en-US" sz="1000">
-                <a:solidFill>
-                  <a:srgbClr val="3A4453"/>
-                </a:solidFill>
-              </a:rPr>
-              <a:t>Video recorded $7k against $17k, and Consulting $4k against $23k. Both remain below budget for the third consecutive month.</a:t>
-            </a:r>
-            <a:endParaRPr lang="en-US" sz="850"/>
-          </a:p>
-          <a:p>
-            <a:pPr marL="342900" indent="-342900">
-              <a:lnSpc>
-                <a:spcPts val="1050"/>
-              </a:lnSpc>
-              <a:spcAft>
-                <a:spcPts val="400"/>
-              </a:spcAft>
-              <a:buSzPct val="100000"/>
-              <a:buChar char="•"/>
-            </a:pPr>
-            <a:r>
-              <a:rPr lang="en-US" sz="1000">
-                <a:solidFill>
-                  <a:srgbClr val="3A4453"/>
-                </a:solidFill>
-              </a:rPr>
-              <a:t>Total revenue increased 58% against September last year, although the gross margin percentage declined.</a:t>
-            </a:r>
-            <a:endParaRPr lang="en-US" sz="850"/>
           </a:p>
         </p:txBody>
       </p:sp>
@@ -10842,6 +11019,1224 @@
 
 <file path=ppt/slides/slide20.xml><?xml version="1.0" encoding="utf-8"?>
 <p:sld xmlns:a="http://schemas.openxmlformats.org/drawingml/2006/main" xmlns:r="http://schemas.openxmlformats.org/officeDocument/2006/relationships" xmlns:p="http://schemas.openxmlformats.org/presentationml/2006/main">
+  <p:cSld name="Slide 12">
+    <p:spTree>
+      <p:nvGrpSpPr>
+        <p:cNvPr id="1" name=""/>
+        <p:cNvGrpSpPr/>
+        <p:nvPr/>
+      </p:nvGrpSpPr>
+      <p:grpSpPr>
+        <a:xfrm>
+          <a:off x="0" y="0"/>
+          <a:ext cx="0" cy="0"/>
+          <a:chOff x="0" y="0"/>
+          <a:chExt cx="0" cy="0"/>
+        </a:xfrm>
+      </p:grpSpPr>
+      <p:pic>
+        <p:nvPicPr>
+          <p:cNvPr id="27" name="snip dept_Integration" descr="dept_Integration.png"/>
+          <p:cNvPicPr>
+            <a:picLocks noChangeAspect="1"/>
+          </p:cNvPicPr>
+          <p:nvPr/>
+        </p:nvPicPr>
+        <p:blipFill>
+          <a:blip r:embed="rId3"/>
+          <a:stretch>
+            <a:fillRect/>
+          </a:stretch>
+        </p:blipFill>
+        <p:spPr>
+          <a:xfrm>
+            <a:off x="968754" y="1005840"/>
+            <a:ext cx="7206491" cy="2133881"/>
+          </a:xfrm>
+          <a:prstGeom prst="rect">
+            <a:avLst/>
+          </a:prstGeom>
+        </p:spPr>
+      </p:pic>
+      <p:sp>
+        <p:nvSpPr>
+          <p:cNvPr id="2" name="Text 0"/>
+          <p:cNvSpPr txBox="1"/>
+          <p:nvPr/>
+        </p:nvSpPr>
+        <p:spPr>
+          <a:xfrm>
+            <a:off x="502920" y="365760"/>
+            <a:ext cx="6400800" cy="274320"/>
+          </a:xfrm>
+          <a:prstGeom prst="rect">
+            <a:avLst/>
+          </a:prstGeom>
+          <a:noFill/>
+          <a:ln/>
+        </p:spPr>
+        <p:txBody>
+          <a:bodyPr wrap="square" lIns="0" tIns="0" rIns="0" bIns="0" rtlCol="0" anchor="ctr"/>
+          <a:lstStyle/>
+          <a:p>
+            <a:pPr marL="0" indent="0">
+              <a:buNone/>
+            </a:pPr>
+            <a:r>
+              <a:rPr lang="en-US" sz="950" b="1" kern="0" spc="220">
+                <a:solidFill>
+                  <a:srgbClr val="122B82"/>
+                </a:solidFill>
+              </a:rPr>
+              <a:t>FINANCIAL PERFORMANCE</a:t>
+            </a:r>
+            <a:endParaRPr lang="en-US" sz="950"/>
+          </a:p>
+        </p:txBody>
+      </p:sp>
+      <p:sp>
+        <p:nvSpPr>
+          <p:cNvPr id="3" name="Text 1"/>
+          <p:cNvSpPr txBox="1"/>
+          <p:nvPr/>
+        </p:nvSpPr>
+        <p:spPr>
+          <a:xfrm>
+            <a:off x="502920" y="640080"/>
+            <a:ext cx="7315200" cy="365760"/>
+          </a:xfrm>
+          <a:prstGeom prst="rect">
+            <a:avLst/>
+          </a:prstGeom>
+          <a:noFill/>
+          <a:ln/>
+        </p:spPr>
+        <p:txBody>
+          <a:bodyPr wrap="square" lIns="0" tIns="0" rIns="0" bIns="0" rtlCol="0" anchor="ctr"/>
+          <a:lstStyle/>
+          <a:p>
+            <a:pPr marL="0" indent="0" algn="ctr">
+              <a:buNone/>
+            </a:pPr>
+            <a:r>
+              <a:rPr lang="en-US" sz="2200" b="1">
+                <a:solidFill>
+                  <a:srgbClr val="242C39"/>
+                </a:solidFill>
+              </a:rPr>
+              <a:t>Integration, Sep 26</a:t>
+            </a:r>
+            <a:endParaRPr lang="en-US" sz="2700"/>
+          </a:p>
+        </p:txBody>
+      </p:sp>
+      <p:sp>
+        <p:nvSpPr>
+          <p:cNvPr id="6" name="commentary panel"/>
+          <p:cNvSpPr/>
+          <p:nvPr/>
+        </p:nvSpPr>
+        <p:spPr>
+          <a:xfrm>
+            <a:off x="502920" y="3231161"/>
+            <a:ext cx="8138160" cy="1395702"/>
+          </a:xfrm>
+          <a:prstGeom prst="rect">
+            <a:avLst/>
+          </a:prstGeom>
+          <a:solidFill>
+            <a:srgbClr val="E8F9F8"/>
+          </a:solidFill>
+          <a:ln/>
+        </p:spPr>
+        <p:txBody>
+          <a:bodyPr/>
+          <a:lstStyle/>
+          <a:p>
+            <a:endParaRPr lang="en-AU"/>
+          </a:p>
+        </p:txBody>
+      </p:sp>
+      <p:sp>
+        <p:nvSpPr>
+          <p:cNvPr id="7" name="Text 4"/>
+          <p:cNvSpPr txBox="1"/>
+          <p:nvPr/>
+        </p:nvSpPr>
+        <p:spPr>
+          <a:xfrm>
+            <a:off x="685800" y="3304313"/>
+            <a:ext cx="2743200" cy="228600"/>
+          </a:xfrm>
+          <a:prstGeom prst="rect">
+            <a:avLst/>
+          </a:prstGeom>
+          <a:noFill/>
+          <a:ln/>
+        </p:spPr>
+        <p:txBody>
+          <a:bodyPr wrap="square" lIns="0" tIns="0" rIns="0" bIns="0" rtlCol="0" anchor="ctr"/>
+          <a:lstStyle/>
+          <a:p>
+            <a:pPr marL="0" indent="0">
+              <a:buNone/>
+            </a:pPr>
+            <a:r>
+              <a:rPr lang="en-US" sz="900" b="1" kern="0" spc="180">
+                <a:solidFill>
+                  <a:srgbClr val="005358"/>
+                </a:solidFill>
+              </a:rPr>
+              <a:t>COMMENTARY</a:t>
+            </a:r>
+            <a:endParaRPr lang="en-US" sz="900"/>
+          </a:p>
+        </p:txBody>
+      </p:sp>
+      <p:sp>
+        <p:nvSpPr>
+          <p:cNvPr id="8" name="Text 5"/>
+          <p:cNvSpPr txBox="1"/>
+          <p:nvPr/>
+        </p:nvSpPr>
+        <p:spPr>
+          <a:xfrm>
+            <a:off x="685800" y="3478049"/>
+            <a:ext cx="3703320" cy="1121382"/>
+          </a:xfrm>
+          <a:prstGeom prst="rect">
+            <a:avLst/>
+          </a:prstGeom>
+          <a:noFill/>
+          <a:ln/>
+        </p:spPr>
+        <p:txBody>
+          <a:bodyPr wrap="square" lIns="0" tIns="0" rIns="0" bIns="0" rtlCol="0" anchor="t">
+            <a:normAutofit fontScale="92500"/>
+          </a:bodyPr>
+          <a:lstStyle/>
+          <a:p>
+            <a:pPr marL="342900" indent="-342900">
+              <a:lnSpc>
+                <a:spcPts val="1150"/>
+              </a:lnSpc>
+              <a:spcAft>
+                <a:spcPts val="400"/>
+              </a:spcAft>
+              <a:buSzPct val="100000"/>
+              <a:buChar char="•"/>
+            </a:pPr>
+            <a:r>
+              <a:rPr lang="en-US" sz="1000">
+                <a:solidFill>
+                  <a:srgbClr val="3A4453"/>
+                </a:solidFill>
+              </a:rPr>
+              <a:t>Integration generated $235k revenue against a $59k budget, largely from a completed installation project.</a:t>
+            </a:r>
+            <a:endParaRPr lang="en-US" sz="900"/>
+          </a:p>
+          <a:p>
+            <a:pPr marL="342900" indent="-342900">
+              <a:lnSpc>
+                <a:spcPts val="1150"/>
+              </a:lnSpc>
+              <a:spcAft>
+                <a:spcPts val="400"/>
+              </a:spcAft>
+              <a:buSzPct val="100000"/>
+              <a:buChar char="•"/>
+            </a:pPr>
+            <a:r>
+              <a:rPr lang="en-US" sz="1000">
+                <a:solidFill>
+                  <a:srgbClr val="3A4453"/>
+                </a:solidFill>
+              </a:rPr>
+              <a:t>Gross margin was 10.1%, reflecting the high equipment and supplier costs associated with the work.</a:t>
+            </a:r>
+            <a:endParaRPr lang="en-US" sz="900"/>
+          </a:p>
+          <a:p>
+            <a:pPr marL="342900" indent="-342900">
+              <a:lnSpc>
+                <a:spcPts val="1150"/>
+              </a:lnSpc>
+              <a:spcAft>
+                <a:spcPts val="400"/>
+              </a:spcAft>
+              <a:buSzPct val="100000"/>
+              <a:buChar char="•"/>
+            </a:pPr>
+            <a:r>
+              <a:rPr lang="en-US" sz="1000">
+                <a:solidFill>
+                  <a:srgbClr val="3A4453"/>
+                </a:solidFill>
+              </a:rPr>
+              <a:t>This resulted in approximately $24k gross profit, despite the strong revenue result.</a:t>
+            </a:r>
+            <a:endParaRPr lang="en-US" sz="900"/>
+          </a:p>
+        </p:txBody>
+      </p:sp>
+      <p:sp>
+        <p:nvSpPr>
+          <p:cNvPr id="25" name="Slide Number Placeholder 0"/>
+          <p:cNvSpPr>
+            <a:spLocks noGrp="1"/>
+          </p:cNvSpPr>
+          <p:nvPr>
+            <p:ph type="sldNum" sz="quarter" idx="4294967295"/>
+          </p:nvPr>
+        </p:nvSpPr>
+        <p:spPr>
+          <a:xfrm>
+            <a:off x="8092440" y="4736592"/>
+            <a:ext cx="548640" cy="228600"/>
+          </a:xfrm>
+          <a:prstGeom prst="rect">
+            <a:avLst/>
+          </a:prstGeom>
+          <a:extLst>
+            <a:ext uri="{C572A759-6A51-4108-AA02-DFA0A04FC94B}">
+              <ma14:wrappingTextBoxFlag xmlns="" xmlns:ma14="http://schemas.microsoft.com/office/mac/drawingml/2011/main" val="0"/>
+            </a:ext>
+          </a:extLst>
+        </p:spPr>
+        <p:txBody>
+          <a:bodyPr/>
+          <a:lstStyle>
+            <a:lvl1pPr>
+              <a:defRPr sz="800">
+                <a:solidFill>
+                  <a:srgbClr val="6B7585"/>
+                </a:solidFill>
+              </a:defRPr>
+            </a:lvl1pPr>
+          </a:lstStyle>
+          <a:p>
+            <a:pPr algn="r"/>
+            <a:fld id="{F7021451-1387-4CA6-816F-3879F97B5CBC}" type="slidenum">
+              <a:rPr lang="en-US" b="0"/>
+              <a:t>17</a:t>
+            </a:fld>
+            <a:endParaRPr lang="en-US"/>
+          </a:p>
+        </p:txBody>
+      </p:sp>
+      <p:pic>
+        <p:nvPicPr>
+          <p:cNvPr id="26" name="cts logo" descr="cts-logo.png"/>
+          <p:cNvPicPr>
+            <a:picLocks noChangeAspect="1"/>
+          </p:cNvPicPr>
+          <p:nvPr/>
+        </p:nvPicPr>
+        <p:blipFill>
+          <a:blip r:embed="rId4"/>
+          <a:stretch>
+            <a:fillRect/>
+          </a:stretch>
+        </p:blipFill>
+        <p:spPr>
+          <a:xfrm>
+            <a:off x="7680959" y="182880"/>
+            <a:ext cx="960120" cy="539696"/>
+          </a:xfrm>
+          <a:prstGeom prst="rect">
+            <a:avLst/>
+          </a:prstGeom>
+        </p:spPr>
+      </p:pic>
+      <p:sp>
+        <p:nvSpPr>
+          <p:cNvPr id="4" name="Text 5b"/>
+          <p:cNvSpPr txBox="1"/>
+          <p:nvPr/>
+        </p:nvSpPr>
+        <p:spPr>
+          <a:xfrm>
+            <a:off x="4663440" y="3478049"/>
+            <a:ext cx="3703320" cy="1121382"/>
+          </a:xfrm>
+          <a:prstGeom prst="rect">
+            <a:avLst/>
+          </a:prstGeom>
+          <a:noFill/>
+          <a:ln/>
+        </p:spPr>
+        <p:txBody>
+          <a:bodyPr wrap="square" lIns="0" tIns="0" rIns="0" bIns="0" rtlCol="0" anchor="t">
+            <a:normAutofit fontScale="92500"/>
+          </a:bodyPr>
+          <a:lstStyle/>
+          <a:p>
+            <a:pPr marL="342900" indent="-342900">
+              <a:lnSpc>
+                <a:spcPts val="1150"/>
+              </a:lnSpc>
+              <a:spcAft>
+                <a:spcPts val="400"/>
+              </a:spcAft>
+              <a:buSzPct val="100000"/>
+              <a:buChar char="•"/>
+            </a:pPr>
+            <a:r>
+              <a:rPr lang="en-US" sz="1000">
+                <a:solidFill>
+                  <a:srgbClr val="3A4453"/>
+                </a:solidFill>
+              </a:rPr>
+              <a:t>After $13k of overheads, Integration reported a $10k profit.</a:t>
+            </a:r>
+            <a:endParaRPr lang="en-US" sz="900"/>
+          </a:p>
+          <a:p>
+            <a:pPr marL="342900" indent="-342900">
+              <a:lnSpc>
+                <a:spcPts val="1150"/>
+              </a:lnSpc>
+              <a:spcAft>
+                <a:spcPts val="400"/>
+              </a:spcAft>
+              <a:buSzPct val="100000"/>
+              <a:buChar char="•"/>
+            </a:pPr>
+            <a:r>
+              <a:rPr lang="en-US" sz="1000">
+                <a:solidFill>
+                  <a:srgbClr val="3A4453"/>
+                </a:solidFill>
+              </a:rPr>
+              <a:t>Only 10 billable hours were recorded, indicating that the revenue was mainly driven by equipment supply rather than labour delivery.</a:t>
+            </a:r>
+            <a:endParaRPr lang="en-US" sz="900"/>
+          </a:p>
+        </p:txBody>
+      </p:sp>
+    </p:spTree>
+  </p:cSld>
+  <p:clrMapOvr>
+    <a:masterClrMapping/>
+  </p:clrMapOvr>
+</p:sld>
+</file>
+
+<file path=ppt/slides/slide21.xml><?xml version="1.0" encoding="utf-8"?>
+<p:sld xmlns:a="http://schemas.openxmlformats.org/drawingml/2006/main" xmlns:r="http://schemas.openxmlformats.org/officeDocument/2006/relationships" xmlns:p="http://schemas.openxmlformats.org/presentationml/2006/main">
+  <p:cSld name="Slide 13">
+    <p:spTree>
+      <p:nvGrpSpPr>
+        <p:cNvPr id="1" name=""/>
+        <p:cNvGrpSpPr/>
+        <p:nvPr/>
+      </p:nvGrpSpPr>
+      <p:grpSpPr>
+        <a:xfrm>
+          <a:off x="0" y="0"/>
+          <a:ext cx="0" cy="0"/>
+          <a:chOff x="0" y="0"/>
+          <a:chExt cx="0" cy="0"/>
+        </a:xfrm>
+      </p:grpSpPr>
+      <p:pic>
+        <p:nvPicPr>
+          <p:cNvPr id="27" name="snip dept_Consulting" descr="dept_Consulting.png"/>
+          <p:cNvPicPr>
+            <a:picLocks noChangeAspect="1"/>
+          </p:cNvPicPr>
+          <p:nvPr/>
+        </p:nvPicPr>
+        <p:blipFill>
+          <a:blip r:embed="rId3"/>
+          <a:stretch>
+            <a:fillRect/>
+          </a:stretch>
+        </p:blipFill>
+        <p:spPr>
+          <a:xfrm>
+            <a:off x="968754" y="1005840"/>
+            <a:ext cx="7206491" cy="2133881"/>
+          </a:xfrm>
+          <a:prstGeom prst="rect">
+            <a:avLst/>
+          </a:prstGeom>
+        </p:spPr>
+      </p:pic>
+      <p:sp>
+        <p:nvSpPr>
+          <p:cNvPr id="2" name="Text 0"/>
+          <p:cNvSpPr txBox="1"/>
+          <p:nvPr/>
+        </p:nvSpPr>
+        <p:spPr>
+          <a:xfrm>
+            <a:off x="502920" y="365760"/>
+            <a:ext cx="6400800" cy="274320"/>
+          </a:xfrm>
+          <a:prstGeom prst="rect">
+            <a:avLst/>
+          </a:prstGeom>
+          <a:noFill/>
+          <a:ln/>
+        </p:spPr>
+        <p:txBody>
+          <a:bodyPr wrap="square" lIns="0" tIns="0" rIns="0" bIns="0" rtlCol="0" anchor="ctr"/>
+          <a:lstStyle/>
+          <a:p>
+            <a:pPr marL="0" indent="0">
+              <a:buNone/>
+            </a:pPr>
+            <a:r>
+              <a:rPr lang="en-US" sz="950" b="1" kern="0" spc="220">
+                <a:solidFill>
+                  <a:srgbClr val="122B82"/>
+                </a:solidFill>
+              </a:rPr>
+              <a:t>FINANCIAL PERFORMANCE</a:t>
+            </a:r>
+            <a:endParaRPr lang="en-US" sz="950"/>
+          </a:p>
+        </p:txBody>
+      </p:sp>
+      <p:sp>
+        <p:nvSpPr>
+          <p:cNvPr id="3" name="Text 1"/>
+          <p:cNvSpPr txBox="1"/>
+          <p:nvPr/>
+        </p:nvSpPr>
+        <p:spPr>
+          <a:xfrm>
+            <a:off x="502920" y="640080"/>
+            <a:ext cx="7315200" cy="365760"/>
+          </a:xfrm>
+          <a:prstGeom prst="rect">
+            <a:avLst/>
+          </a:prstGeom>
+          <a:noFill/>
+          <a:ln/>
+        </p:spPr>
+        <p:txBody>
+          <a:bodyPr wrap="square" lIns="0" tIns="0" rIns="0" bIns="0" rtlCol="0" anchor="ctr"/>
+          <a:lstStyle/>
+          <a:p>
+            <a:pPr marL="0" indent="0" algn="ctr">
+              <a:buNone/>
+            </a:pPr>
+            <a:r>
+              <a:rPr lang="en-US" sz="2200" b="1">
+                <a:solidFill>
+                  <a:srgbClr val="242C39"/>
+                </a:solidFill>
+              </a:rPr>
+              <a:t>Consulting, Sep 26</a:t>
+            </a:r>
+            <a:endParaRPr lang="en-US" sz="2700"/>
+          </a:p>
+        </p:txBody>
+      </p:sp>
+      <p:sp>
+        <p:nvSpPr>
+          <p:cNvPr id="6" name="commentary panel"/>
+          <p:cNvSpPr/>
+          <p:nvPr/>
+        </p:nvSpPr>
+        <p:spPr>
+          <a:xfrm>
+            <a:off x="502920" y="3231161"/>
+            <a:ext cx="8138160" cy="1395702"/>
+          </a:xfrm>
+          <a:prstGeom prst="rect">
+            <a:avLst/>
+          </a:prstGeom>
+          <a:solidFill>
+            <a:srgbClr val="E8F9F8"/>
+          </a:solidFill>
+          <a:ln/>
+        </p:spPr>
+        <p:txBody>
+          <a:bodyPr/>
+          <a:lstStyle/>
+          <a:p>
+            <a:endParaRPr lang="en-AU"/>
+          </a:p>
+        </p:txBody>
+      </p:sp>
+      <p:sp>
+        <p:nvSpPr>
+          <p:cNvPr id="7" name="Text 4"/>
+          <p:cNvSpPr txBox="1"/>
+          <p:nvPr/>
+        </p:nvSpPr>
+        <p:spPr>
+          <a:xfrm>
+            <a:off x="685800" y="3304313"/>
+            <a:ext cx="2743200" cy="228600"/>
+          </a:xfrm>
+          <a:prstGeom prst="rect">
+            <a:avLst/>
+          </a:prstGeom>
+          <a:noFill/>
+          <a:ln/>
+        </p:spPr>
+        <p:txBody>
+          <a:bodyPr wrap="square" lIns="0" tIns="0" rIns="0" bIns="0" rtlCol="0" anchor="ctr"/>
+          <a:lstStyle/>
+          <a:p>
+            <a:pPr marL="0" indent="0">
+              <a:buNone/>
+            </a:pPr>
+            <a:r>
+              <a:rPr lang="en-US" sz="900" b="1" kern="0" spc="180">
+                <a:solidFill>
+                  <a:srgbClr val="005358"/>
+                </a:solidFill>
+              </a:rPr>
+              <a:t>COMMENTARY</a:t>
+            </a:r>
+            <a:endParaRPr lang="en-US" sz="900"/>
+          </a:p>
+        </p:txBody>
+      </p:sp>
+      <p:sp>
+        <p:nvSpPr>
+          <p:cNvPr id="8" name="Text 5"/>
+          <p:cNvSpPr txBox="1"/>
+          <p:nvPr/>
+        </p:nvSpPr>
+        <p:spPr>
+          <a:xfrm>
+            <a:off x="685800" y="3478049"/>
+            <a:ext cx="3703320" cy="1121382"/>
+          </a:xfrm>
+          <a:prstGeom prst="rect">
+            <a:avLst/>
+          </a:prstGeom>
+          <a:noFill/>
+          <a:ln/>
+        </p:spPr>
+        <p:txBody>
+          <a:bodyPr wrap="square" lIns="0" tIns="0" rIns="0" bIns="0" rtlCol="0" anchor="t">
+            <a:normAutofit fontScale="85000" lnSpcReduction="10000"/>
+          </a:bodyPr>
+          <a:lstStyle/>
+          <a:p>
+            <a:pPr marL="342900" indent="-342900">
+              <a:lnSpc>
+                <a:spcPts val="1200"/>
+              </a:lnSpc>
+              <a:spcAft>
+                <a:spcPts val="400"/>
+              </a:spcAft>
+              <a:buSzPct val="100000"/>
+              <a:buChar char="•"/>
+            </a:pPr>
+            <a:r>
+              <a:rPr lang="en-US" sz="1000">
+                <a:solidFill>
+                  <a:srgbClr val="3A4453"/>
+                </a:solidFill>
+              </a:rPr>
+              <a:t>Consulting generated $4k revenue against a $23k budget, reflecting limited fee-generating activity.</a:t>
+            </a:r>
+            <a:endParaRPr lang="en-US" sz="950"/>
+          </a:p>
+          <a:p>
+            <a:pPr marL="342900" indent="-342900">
+              <a:lnSpc>
+                <a:spcPts val="1200"/>
+              </a:lnSpc>
+              <a:spcAft>
+                <a:spcPts val="400"/>
+              </a:spcAft>
+              <a:buSzPct val="100000"/>
+              <a:buChar char="•"/>
+            </a:pPr>
+            <a:r>
+              <a:rPr lang="en-US" sz="1000">
+                <a:solidFill>
+                  <a:srgbClr val="3A4453"/>
+                </a:solidFill>
+              </a:rPr>
+              <a:t>The department recorded a $20k loss after approximately $20k of overheads.</a:t>
+            </a:r>
+            <a:endParaRPr lang="en-US" sz="950"/>
+          </a:p>
+        </p:txBody>
+      </p:sp>
+      <p:sp>
+        <p:nvSpPr>
+          <p:cNvPr id="25" name="Slide Number Placeholder 0"/>
+          <p:cNvSpPr>
+            <a:spLocks noGrp="1"/>
+          </p:cNvSpPr>
+          <p:nvPr>
+            <p:ph type="sldNum" sz="quarter" idx="4294967295"/>
+          </p:nvPr>
+        </p:nvSpPr>
+        <p:spPr>
+          <a:xfrm>
+            <a:off x="8092440" y="4736592"/>
+            <a:ext cx="548640" cy="228600"/>
+          </a:xfrm>
+          <a:prstGeom prst="rect">
+            <a:avLst/>
+          </a:prstGeom>
+          <a:extLst>
+            <a:ext uri="{C572A759-6A51-4108-AA02-DFA0A04FC94B}">
+              <ma14:wrappingTextBoxFlag xmlns="" xmlns:ma14="http://schemas.microsoft.com/office/mac/drawingml/2011/main" val="0"/>
+            </a:ext>
+          </a:extLst>
+        </p:spPr>
+        <p:txBody>
+          <a:bodyPr/>
+          <a:lstStyle>
+            <a:lvl1pPr>
+              <a:defRPr sz="800">
+                <a:solidFill>
+                  <a:srgbClr val="6B7585"/>
+                </a:solidFill>
+              </a:defRPr>
+            </a:lvl1pPr>
+          </a:lstStyle>
+          <a:p>
+            <a:pPr algn="r"/>
+            <a:fld id="{F7021451-1387-4CA6-816F-3879F97B5CBC}" type="slidenum">
+              <a:rPr lang="en-US" b="0"/>
+              <a:t>18</a:t>
+            </a:fld>
+            <a:endParaRPr lang="en-US"/>
+          </a:p>
+        </p:txBody>
+      </p:sp>
+      <p:pic>
+        <p:nvPicPr>
+          <p:cNvPr id="26" name="cts logo" descr="cts-logo.png"/>
+          <p:cNvPicPr>
+            <a:picLocks noChangeAspect="1"/>
+          </p:cNvPicPr>
+          <p:nvPr/>
+        </p:nvPicPr>
+        <p:blipFill>
+          <a:blip r:embed="rId4"/>
+          <a:stretch>
+            <a:fillRect/>
+          </a:stretch>
+        </p:blipFill>
+        <p:spPr>
+          <a:xfrm>
+            <a:off x="7680959" y="182880"/>
+            <a:ext cx="960120" cy="539696"/>
+          </a:xfrm>
+          <a:prstGeom prst="rect">
+            <a:avLst/>
+          </a:prstGeom>
+        </p:spPr>
+      </p:pic>
+      <p:sp>
+        <p:nvSpPr>
+          <p:cNvPr id="4" name="Text 5b"/>
+          <p:cNvSpPr txBox="1"/>
+          <p:nvPr/>
+        </p:nvSpPr>
+        <p:spPr>
+          <a:xfrm>
+            <a:off x="4663440" y="3478049"/>
+            <a:ext cx="3703320" cy="1121382"/>
+          </a:xfrm>
+          <a:prstGeom prst="rect">
+            <a:avLst/>
+          </a:prstGeom>
+          <a:noFill/>
+          <a:ln/>
+        </p:spPr>
+        <p:txBody>
+          <a:bodyPr wrap="square" lIns="0" tIns="0" rIns="0" bIns="0" rtlCol="0" anchor="t">
+            <a:normAutofit fontScale="85000" lnSpcReduction="10000"/>
+          </a:bodyPr>
+          <a:lstStyle/>
+          <a:p>
+            <a:pPr marL="342900" indent="-342900">
+              <a:lnSpc>
+                <a:spcPts val="1200"/>
+              </a:lnSpc>
+              <a:spcAft>
+                <a:spcPts val="400"/>
+              </a:spcAft>
+              <a:buSzPct val="100000"/>
+              <a:buChar char="•"/>
+            </a:pPr>
+            <a:r>
+              <a:rPr lang="en-US" sz="1000">
+                <a:solidFill>
+                  <a:srgbClr val="3A4453"/>
+                </a:solidFill>
+              </a:rPr>
+              <a:t>Non-billable activity totalled 84 hours, compared with 31 billable hours.</a:t>
+            </a:r>
+            <a:endParaRPr lang="en-US" sz="950"/>
+          </a:p>
+          <a:p>
+            <a:pPr marL="342900" indent="-342900">
+              <a:lnSpc>
+                <a:spcPts val="1200"/>
+              </a:lnSpc>
+              <a:spcAft>
+                <a:spcPts val="400"/>
+              </a:spcAft>
+              <a:buSzPct val="100000"/>
+              <a:buChar char="•"/>
+            </a:pPr>
+            <a:r>
+              <a:rPr lang="en-US" sz="1000">
+                <a:solidFill>
+                  <a:srgbClr val="3A4453"/>
+                </a:solidFill>
+              </a:rPr>
+              <a:t>Year-to-date revenue is $4k against a $237k budget.</a:t>
+            </a:r>
+            <a:endParaRPr lang="en-US" sz="950"/>
+          </a:p>
+          <a:p>
+            <a:pPr marL="342900" indent="-342900">
+              <a:lnSpc>
+                <a:spcPts val="1200"/>
+              </a:lnSpc>
+              <a:spcAft>
+                <a:spcPts val="400"/>
+              </a:spcAft>
+              <a:buSzPct val="100000"/>
+              <a:buChar char="•"/>
+            </a:pPr>
+            <a:r>
+              <a:rPr lang="en-US" sz="1000">
+                <a:solidFill>
+                  <a:srgbClr val="3A4453"/>
+                </a:solidFill>
+              </a:rPr>
+              <a:t>Management should review the department's future structure, capacity and commercial viability, including whether to rebuild or combine its activities.</a:t>
+            </a:r>
+            <a:endParaRPr lang="en-US" sz="950"/>
+          </a:p>
+        </p:txBody>
+      </p:sp>
+    </p:spTree>
+  </p:cSld>
+  <p:clrMapOvr>
+    <a:masterClrMapping/>
+  </p:clrMapOvr>
+</p:sld>
+</file>
+
+<file path=ppt/slides/slide22.xml><?xml version="1.0" encoding="utf-8"?>
+<p:sld xmlns:a="http://schemas.openxmlformats.org/drawingml/2006/main" xmlns:r="http://schemas.openxmlformats.org/officeDocument/2006/relationships" xmlns:p="http://schemas.openxmlformats.org/presentationml/2006/main">
+  <p:cSld name="Slide 14">
+    <p:spTree>
+      <p:nvGrpSpPr>
+        <p:cNvPr id="1" name=""/>
+        <p:cNvGrpSpPr/>
+        <p:nvPr/>
+      </p:nvGrpSpPr>
+      <p:grpSpPr>
+        <a:xfrm>
+          <a:off x="0" y="0"/>
+          <a:ext cx="0" cy="0"/>
+          <a:chOff x="0" y="0"/>
+          <a:chExt cx="0" cy="0"/>
+        </a:xfrm>
+      </p:grpSpPr>
+      <p:pic>
+        <p:nvPicPr>
+          <p:cNvPr id="27" name="snip rev_by_dept" descr="image.png"/>
+          <p:cNvPicPr>
+            <a:picLocks noChangeAspect="1"/>
+          </p:cNvPicPr>
+          <p:nvPr/>
+        </p:nvPicPr>
+        <p:blipFill>
+          <a:blip r:embed="rId5"/>
+          <a:stretch>
+            <a:fillRect/>
+          </a:stretch>
+        </p:blipFill>
+        <p:spPr>
+          <a:xfrm>
+            <a:off x="518066" y="1005840"/>
+            <a:ext cx="8107866" cy="2133881"/>
+          </a:xfrm>
+          <a:prstGeom prst="rect">
+            <a:avLst/>
+          </a:prstGeom>
+        </p:spPr>
+      </p:pic>
+      <p:sp>
+        <p:nvSpPr>
+          <p:cNvPr id="2" name="Text 0"/>
+          <p:cNvSpPr txBox="1"/>
+          <p:nvPr/>
+        </p:nvSpPr>
+        <p:spPr>
+          <a:xfrm>
+            <a:off x="502920" y="365760"/>
+            <a:ext cx="6400800" cy="274320"/>
+          </a:xfrm>
+          <a:prstGeom prst="rect">
+            <a:avLst/>
+          </a:prstGeom>
+          <a:noFill/>
+          <a:ln/>
+        </p:spPr>
+        <p:txBody>
+          <a:bodyPr wrap="square" lIns="0" tIns="0" rIns="0" bIns="0" rtlCol="0" anchor="ctr"/>
+          <a:lstStyle/>
+          <a:p>
+            <a:pPr marL="0" indent="0">
+              <a:buNone/>
+            </a:pPr>
+            <a:r>
+              <a:rPr lang="en-US" sz="950" b="1" kern="0" spc="220">
+                <a:solidFill>
+                  <a:srgbClr val="122B82"/>
+                </a:solidFill>
+              </a:rPr>
+              <a:t>FINANCIAL PERFORMANCE</a:t>
+            </a:r>
+            <a:endParaRPr lang="en-US" sz="950"/>
+          </a:p>
+        </p:txBody>
+      </p:sp>
+      <p:sp>
+        <p:nvSpPr>
+          <p:cNvPr id="3" name="Text 1"/>
+          <p:cNvSpPr txBox="1"/>
+          <p:nvPr/>
+        </p:nvSpPr>
+        <p:spPr>
+          <a:xfrm>
+            <a:off x="502920" y="640080"/>
+            <a:ext cx="7315200" cy="365760"/>
+          </a:xfrm>
+          <a:prstGeom prst="rect">
+            <a:avLst/>
+          </a:prstGeom>
+          <a:noFill/>
+          <a:ln/>
+        </p:spPr>
+        <p:txBody>
+          <a:bodyPr wrap="square" lIns="0" tIns="0" rIns="0" bIns="0" rtlCol="0" anchor="ctr"/>
+          <a:lstStyle/>
+          <a:p>
+            <a:pPr marL="0" indent="0" algn="ctr">
+              <a:buNone/>
+            </a:pPr>
+            <a:r>
+              <a:rPr lang="en-US" sz="2200" b="1">
+                <a:solidFill>
+                  <a:srgbClr val="242C39"/>
+                </a:solidFill>
+              </a:rPr>
+              <a:t>Revenue against budget and last year</a:t>
+            </a:r>
+            <a:endParaRPr lang="en-US" sz="2700"/>
+          </a:p>
+        </p:txBody>
+      </p:sp>
+      <p:sp>
+        <p:nvSpPr>
+          <p:cNvPr id="6" name="commentary panel"/>
+          <p:cNvSpPr/>
+          <p:nvPr/>
+        </p:nvSpPr>
+        <p:spPr>
+          <a:xfrm>
+            <a:off x="502920" y="3231161"/>
+            <a:ext cx="8138160" cy="1395702"/>
+          </a:xfrm>
+          <a:prstGeom prst="rect">
+            <a:avLst/>
+          </a:prstGeom>
+          <a:solidFill>
+            <a:srgbClr val="E8F9F8"/>
+          </a:solidFill>
+          <a:ln/>
+        </p:spPr>
+        <p:txBody>
+          <a:bodyPr/>
+          <a:lstStyle/>
+          <a:p>
+            <a:endParaRPr lang="en-AU"/>
+          </a:p>
+        </p:txBody>
+      </p:sp>
+      <p:sp>
+        <p:nvSpPr>
+          <p:cNvPr id="7" name="Text 4"/>
+          <p:cNvSpPr txBox="1"/>
+          <p:nvPr/>
+        </p:nvSpPr>
+        <p:spPr>
+          <a:xfrm>
+            <a:off x="685800" y="3304313"/>
+            <a:ext cx="2743200" cy="228600"/>
+          </a:xfrm>
+          <a:prstGeom prst="rect">
+            <a:avLst/>
+          </a:prstGeom>
+          <a:noFill/>
+          <a:ln/>
+        </p:spPr>
+        <p:txBody>
+          <a:bodyPr wrap="square" lIns="0" tIns="0" rIns="0" bIns="0" rtlCol="0" anchor="ctr"/>
+          <a:lstStyle/>
+          <a:p>
+            <a:pPr marL="0" indent="0">
+              <a:buNone/>
+            </a:pPr>
+            <a:r>
+              <a:rPr lang="en-US" sz="900" b="1" kern="0" spc="180">
+                <a:solidFill>
+                  <a:srgbClr val="005358"/>
+                </a:solidFill>
+              </a:rPr>
+              <a:t>COMMENTARY</a:t>
+            </a:r>
+            <a:endParaRPr lang="en-US" sz="900"/>
+          </a:p>
+        </p:txBody>
+      </p:sp>
+      <p:sp>
+        <p:nvSpPr>
+          <p:cNvPr id="8" name="Text 5"/>
+          <p:cNvSpPr txBox="1"/>
+          <p:nvPr/>
+        </p:nvSpPr>
+        <p:spPr>
+          <a:xfrm>
+            <a:off x="685800" y="3478049"/>
+            <a:ext cx="3703320" cy="1121382"/>
+          </a:xfrm>
+          <a:prstGeom prst="rect">
+            <a:avLst/>
+          </a:prstGeom>
+          <a:noFill/>
+          <a:ln/>
+        </p:spPr>
+        <p:txBody>
+          <a:bodyPr wrap="square" lIns="0" tIns="0" rIns="0" bIns="0" rtlCol="0" anchor="t">
+            <a:normAutofit fontScale="92500"/>
+          </a:bodyPr>
+          <a:lstStyle/>
+          <a:p>
+            <a:pPr marL="342900" indent="-342900">
+              <a:lnSpc>
+                <a:spcPts val="1050"/>
+              </a:lnSpc>
+              <a:spcAft>
+                <a:spcPts val="400"/>
+              </a:spcAft>
+              <a:buSzPct val="100000"/>
+              <a:buChar char="•"/>
+            </a:pPr>
+            <a:r>
+              <a:rPr lang="en-US" sz="1000">
+                <a:solidFill>
+                  <a:srgbClr val="3A4453"/>
+                </a:solidFill>
+              </a:rPr>
+              <a:t>Integration generated $235k revenue against a $59k budget, mainly from a completed installation project. This result may not recur in October.</a:t>
+            </a:r>
+            <a:endParaRPr lang="en-US" sz="850"/>
+          </a:p>
+          <a:p>
+            <a:pPr marL="342900" indent="-342900">
+              <a:lnSpc>
+                <a:spcPts val="1050"/>
+              </a:lnSpc>
+              <a:spcAft>
+                <a:spcPts val="400"/>
+              </a:spcAft>
+              <a:buSzPct val="100000"/>
+              <a:buChar char="•"/>
+            </a:pPr>
+            <a:r>
+              <a:rPr lang="en-US" sz="1000">
+                <a:solidFill>
+                  <a:srgbClr val="3A4453"/>
+                </a:solidFill>
+              </a:rPr>
+              <a:t>Support recorded $243k revenue against a $248k budget, remaining broadly in line with recurring contracts.</a:t>
+            </a:r>
+            <a:endParaRPr lang="en-US" sz="850"/>
+          </a:p>
+        </p:txBody>
+      </p:sp>
+      <p:sp>
+        <p:nvSpPr>
+          <p:cNvPr id="25" name="Slide Number Placeholder 0"/>
+          <p:cNvSpPr>
+            <a:spLocks noGrp="1"/>
+          </p:cNvSpPr>
+          <p:nvPr>
+            <p:ph type="sldNum" sz="quarter" idx="4294967295"/>
+          </p:nvPr>
+        </p:nvSpPr>
+        <p:spPr>
+          <a:xfrm>
+            <a:off x="8092440" y="4736592"/>
+            <a:ext cx="548640" cy="228600"/>
+          </a:xfrm>
+          <a:prstGeom prst="rect">
+            <a:avLst/>
+          </a:prstGeom>
+          <a:extLst>
+            <a:ext uri="{C572A759-6A51-4108-AA02-DFA0A04FC94B}">
+              <ma14:wrappingTextBoxFlag xmlns="" xmlns:ma14="http://schemas.microsoft.com/office/mac/drawingml/2011/main" val="0"/>
+            </a:ext>
+          </a:extLst>
+        </p:spPr>
+        <p:txBody>
+          <a:bodyPr/>
+          <a:lstStyle>
+            <a:lvl1pPr>
+              <a:defRPr sz="800">
+                <a:solidFill>
+                  <a:srgbClr val="6B7585"/>
+                </a:solidFill>
+              </a:defRPr>
+            </a:lvl1pPr>
+          </a:lstStyle>
+          <a:p>
+            <a:pPr algn="r"/>
+            <a:fld id="{F7021451-1387-4CA6-816F-3879F97B5CBC}" type="slidenum">
+              <a:rPr lang="en-US" b="0"/>
+              <a:t>19</a:t>
+            </a:fld>
+            <a:endParaRPr lang="en-US"/>
+          </a:p>
+        </p:txBody>
+      </p:sp>
+      <p:pic>
+        <p:nvPicPr>
+          <p:cNvPr id="26" name="cts logo" descr="cts-logo.png"/>
+          <p:cNvPicPr>
+            <a:picLocks noChangeAspect="1"/>
+          </p:cNvPicPr>
+          <p:nvPr/>
+        </p:nvPicPr>
+        <p:blipFill>
+          <a:blip r:embed="rId4"/>
+          <a:stretch>
+            <a:fillRect/>
+          </a:stretch>
+        </p:blipFill>
+        <p:spPr>
+          <a:xfrm>
+            <a:off x="7680959" y="182880"/>
+            <a:ext cx="960120" cy="539696"/>
+          </a:xfrm>
+          <a:prstGeom prst="rect">
+            <a:avLst/>
+          </a:prstGeom>
+        </p:spPr>
+      </p:pic>
+      <p:sp>
+        <p:nvSpPr>
+          <p:cNvPr id="4" name="Text 5b"/>
+          <p:cNvSpPr txBox="1"/>
+          <p:nvPr/>
+        </p:nvSpPr>
+        <p:spPr>
+          <a:xfrm>
+            <a:off x="4663440" y="3478049"/>
+            <a:ext cx="3703320" cy="1121382"/>
+          </a:xfrm>
+          <a:prstGeom prst="rect">
+            <a:avLst/>
+          </a:prstGeom>
+          <a:noFill/>
+          <a:ln/>
+        </p:spPr>
+        <p:txBody>
+          <a:bodyPr wrap="square" lIns="0" tIns="0" rIns="0" bIns="0" rtlCol="0" anchor="t">
+            <a:normAutofit fontScale="92500"/>
+          </a:bodyPr>
+          <a:lstStyle/>
+          <a:p>
+            <a:pPr marL="342900" indent="-342900">
+              <a:lnSpc>
+                <a:spcPts val="1050"/>
+              </a:lnSpc>
+              <a:spcAft>
+                <a:spcPts val="400"/>
+              </a:spcAft>
+              <a:buSzPct val="100000"/>
+              <a:buChar char="•"/>
+            </a:pPr>
+            <a:r>
+              <a:rPr lang="en-US" sz="1000">
+                <a:solidFill>
+                  <a:srgbClr val="3A4453"/>
+                </a:solidFill>
+              </a:rPr>
+              <a:t>Events delivered $73k revenue against a $66k budget.</a:t>
+            </a:r>
+            <a:endParaRPr lang="en-US" sz="850"/>
+          </a:p>
+          <a:p>
+            <a:pPr marL="342900" indent="-342900">
+              <a:lnSpc>
+                <a:spcPts val="1050"/>
+              </a:lnSpc>
+              <a:spcAft>
+                <a:spcPts val="400"/>
+              </a:spcAft>
+              <a:buSzPct val="100000"/>
+              <a:buChar char="•"/>
+            </a:pPr>
+            <a:r>
+              <a:rPr lang="en-US" sz="1000">
+                <a:solidFill>
+                  <a:srgbClr val="3A4453"/>
+                </a:solidFill>
+              </a:rPr>
+              <a:t>Video recorded $7k against $17k, and Consulting $4k against $23k. Both remain below budget for the third consecutive month.</a:t>
+            </a:r>
+            <a:endParaRPr lang="en-US" sz="850"/>
+          </a:p>
+          <a:p>
+            <a:pPr marL="342900" indent="-342900">
+              <a:lnSpc>
+                <a:spcPts val="1050"/>
+              </a:lnSpc>
+              <a:spcAft>
+                <a:spcPts val="400"/>
+              </a:spcAft>
+              <a:buSzPct val="100000"/>
+              <a:buChar char="•"/>
+            </a:pPr>
+            <a:r>
+              <a:rPr lang="en-US" sz="1000">
+                <a:solidFill>
+                  <a:srgbClr val="3A4453"/>
+                </a:solidFill>
+              </a:rPr>
+              <a:t>Total revenue increased 58% against September last year, although the gross margin percentage declined.</a:t>
+            </a:r>
+            <a:endParaRPr lang="en-US" sz="850"/>
+          </a:p>
+        </p:txBody>
+      </p:sp>
+    </p:spTree>
+  </p:cSld>
+  <p:clrMapOvr>
+    <a:masterClrMapping/>
+  </p:clrMapOvr>
+</p:sld>
+</file>
+
+<file path=ppt/slides/slide23.xml><?xml version="1.0" encoding="utf-8"?>
+<p:sld xmlns:a="http://schemas.openxmlformats.org/drawingml/2006/main" xmlns:r="http://schemas.openxmlformats.org/officeDocument/2006/relationships" xmlns:p="http://schemas.openxmlformats.org/presentationml/2006/main">
   <p:cSld name="Slide 15">
     <p:spTree>
       <p:nvGrpSpPr>
@@ -11123,7 +12518,7 @@
 </p:sld>
 </file>
 
-<file path=ppt/slides/slide21.xml><?xml version="1.0" encoding="utf-8"?>
+<file path=ppt/slides/slide24.xml><?xml version="1.0" encoding="utf-8"?>
 <p:sld xmlns:a="http://schemas.openxmlformats.org/drawingml/2006/main" xmlns:r="http://schemas.openxmlformats.org/officeDocument/2006/relationships" xmlns:p="http://schemas.openxmlformats.org/presentationml/2006/main">
   <p:cSld name="Slide 16">
     <p:spTree>
@@ -11157,7 +12552,7 @@
         <p:spPr>
           <a:xfrm>
             <a:off x="2632893" y="1005840"/>
-            <a:ext cx="3878213" cy="1964998"/>
+            <a:ext cx="3878213" cy="1964997"/>
           </a:xfrm>
           <a:prstGeom prst="rect">
             <a:avLst/>
@@ -11529,7 +12924,7 @@
 </p:sld>
 </file>
 
-<file path=ppt/slides/slide22.xml><?xml version="1.0" encoding="utf-8"?>
+<file path=ppt/slides/slide25.xml><?xml version="1.0" encoding="utf-8"?>
 <p:sld xmlns:a="http://schemas.openxmlformats.org/drawingml/2006/main" xmlns:r="http://schemas.openxmlformats.org/officeDocument/2006/relationships" xmlns:p="http://schemas.openxmlformats.org/presentationml/2006/main">
   <p:cSld name="Slide 17">
     <p:spTree>
@@ -11935,7 +13330,7 @@
 </p:sld>
 </file>
 
-<file path=ppt/slides/slide23.xml><?xml version="1.0" encoding="utf-8"?>
+<file path=ppt/slides/slide26.xml><?xml version="1.0" encoding="utf-8"?>
 <p:sld xmlns:a="http://schemas.openxmlformats.org/drawingml/2006/main" xmlns:r="http://schemas.openxmlformats.org/officeDocument/2006/relationships" xmlns:p="http://schemas.openxmlformats.org/presentationml/2006/main">
   <p:cSld name="Slide 18">
     <p:spTree>
@@ -12341,7 +13736,7 @@
 </p:sld>
 </file>
 
-<file path=ppt/slides/slide24.xml><?xml version="1.0" encoding="utf-8"?>
+<file path=ppt/slides/slide27.xml><?xml version="1.0" encoding="utf-8"?>
 <p:sld xmlns:a="http://schemas.openxmlformats.org/drawingml/2006/main" xmlns:r="http://schemas.openxmlformats.org/officeDocument/2006/relationships" xmlns:p="http://schemas.openxmlformats.org/presentationml/2006/main">
   <p:cSld name="Slide 19">
     <p:spTree>
@@ -12726,7 +14121,7 @@
 </p:sld>
 </file>
 
-<file path=ppt/slides/slide25.xml><?xml version="1.0" encoding="utf-8"?>
+<file path=ppt/slides/slide28.xml><?xml version="1.0" encoding="utf-8"?>
 <p:sld xmlns:a="http://schemas.openxmlformats.org/drawingml/2006/main" xmlns:r="http://schemas.openxmlformats.org/officeDocument/2006/relationships" xmlns:p="http://schemas.openxmlformats.org/presentationml/2006/main">
   <p:cSld name="Slide 20">
     <p:spTree>
@@ -13009,7 +14404,7 @@
 </p:sld>
 </file>
 
-<file path=ppt/slides/slide26.xml><?xml version="1.0" encoding="utf-8"?>
+<file path=ppt/slides/slide29.xml><?xml version="1.0" encoding="utf-8"?>
 <p:sld xmlns:a="http://schemas.openxmlformats.org/drawingml/2006/main" xmlns:r="http://schemas.openxmlformats.org/officeDocument/2006/relationships" xmlns:p="http://schemas.openxmlformats.org/presentationml/2006/main">
   <p:cSld name="Slide 21">
     <p:spTree>
@@ -13043,7 +14438,7 @@
         <p:spPr>
           <a:xfrm>
             <a:off x="2639119" y="1005840"/>
-            <a:ext cx="3865761" cy="1964998"/>
+            <a:ext cx="3865761" cy="1964997"/>
           </a:xfrm>
           <a:prstGeom prst="rect">
             <a:avLst/>
@@ -13404,1101 +14799,6 @@
               <a:t>Revenue drops considerably beyond the largest customers, highlighting the importance of growing the wider customer base.</a:t>
             </a:r>
             <a:endParaRPr lang="en-US" sz="900"/>
-          </a:p>
-        </p:txBody>
-      </p:sp>
-    </p:spTree>
-  </p:cSld>
-  <p:clrMapOvr>
-    <a:masterClrMapping/>
-  </p:clrMapOvr>
-</p:sld>
-</file>
-
-<file path=ppt/slides/slide27.xml><?xml version="1.0" encoding="utf-8"?>
-<p:sld xmlns:a="http://schemas.openxmlformats.org/drawingml/2006/main" xmlns:r="http://schemas.openxmlformats.org/officeDocument/2006/relationships" xmlns:p="http://schemas.openxmlformats.org/presentationml/2006/main">
-  <p:cSld name="Slide 22">
-    <p:spTree>
-      <p:nvGrpSpPr>
-        <p:cNvPr id="1" name=""/>
-        <p:cNvGrpSpPr/>
-        <p:nvPr/>
-      </p:nvGrpSpPr>
-      <p:grpSpPr>
-        <a:xfrm>
-          <a:off x="0" y="0"/>
-          <a:ext cx="0" cy="0"/>
-          <a:chOff x="0" y="0"/>
-          <a:chExt cx="0" cy="0"/>
-        </a:xfrm>
-      </p:grpSpPr>
-      <p:pic>
-        <p:nvPicPr>
-          <p:cNvPr id="27" name="snip dso_calc" descr="image.png"/>
-          <p:cNvPicPr>
-            <a:picLocks noChangeAspect="1"/>
-          </p:cNvPicPr>
-          <p:nvPr/>
-        </p:nvPicPr>
-        <p:blipFill>
-          <a:blip r:embed="rId3"/>
-          <a:stretch>
-            <a:fillRect/>
-          </a:stretch>
-        </p:blipFill>
-        <p:spPr>
-          <a:xfrm>
-            <a:off x="2520006" y="1005840"/>
-            <a:ext cx="4103987" cy="2133881"/>
-          </a:xfrm>
-          <a:prstGeom prst="rect">
-            <a:avLst/>
-          </a:prstGeom>
-        </p:spPr>
-      </p:pic>
-      <p:sp>
-        <p:nvSpPr>
-          <p:cNvPr id="2" name="Text 0"/>
-          <p:cNvSpPr txBox="1"/>
-          <p:nvPr/>
-        </p:nvSpPr>
-        <p:spPr>
-          <a:xfrm>
-            <a:off x="502920" y="365760"/>
-            <a:ext cx="6400800" cy="274320"/>
-          </a:xfrm>
-          <a:prstGeom prst="rect">
-            <a:avLst/>
-          </a:prstGeom>
-          <a:noFill/>
-          <a:ln/>
-        </p:spPr>
-        <p:txBody>
-          <a:bodyPr wrap="square" lIns="0" tIns="0" rIns="0" bIns="0" rtlCol="0" anchor="ctr"/>
-          <a:lstStyle/>
-          <a:p>
-            <a:pPr marL="0" indent="0">
-              <a:buNone/>
-            </a:pPr>
-            <a:r>
-              <a:rPr lang="en-US" sz="950" b="1" kern="0" spc="220">
-                <a:solidFill>
-                  <a:srgbClr val="122B82"/>
-                </a:solidFill>
-              </a:rPr>
-              <a:t>CUSTOMERS AND CASH</a:t>
-            </a:r>
-            <a:endParaRPr lang="en-US" sz="950"/>
-          </a:p>
-        </p:txBody>
-      </p:sp>
-      <p:sp>
-        <p:nvSpPr>
-          <p:cNvPr id="3" name="Text 1"/>
-          <p:cNvSpPr txBox="1"/>
-          <p:nvPr/>
-        </p:nvSpPr>
-        <p:spPr>
-          <a:xfrm>
-            <a:off x="502920" y="640080"/>
-            <a:ext cx="7315200" cy="365760"/>
-          </a:xfrm>
-          <a:prstGeom prst="rect">
-            <a:avLst/>
-          </a:prstGeom>
-          <a:noFill/>
-          <a:ln/>
-        </p:spPr>
-        <p:txBody>
-          <a:bodyPr wrap="square" lIns="0" tIns="0" rIns="0" bIns="0" rtlCol="0" anchor="ctr"/>
-          <a:lstStyle/>
-          <a:p>
-            <a:pPr marL="0" indent="0" algn="ctr">
-              <a:buNone/>
-            </a:pPr>
-            <a:r>
-              <a:rPr lang="en-US" sz="2200" b="1">
-                <a:solidFill>
-                  <a:srgbClr val="242C39"/>
-                </a:solidFill>
-              </a:rPr>
-              <a:t>How long customers take to pay</a:t>
-            </a:r>
-            <a:endParaRPr lang="en-US" sz="2700"/>
-          </a:p>
-        </p:txBody>
-      </p:sp>
-      <p:sp>
-        <p:nvSpPr>
-          <p:cNvPr id="6" name="commentary panel"/>
-          <p:cNvSpPr/>
-          <p:nvPr/>
-        </p:nvSpPr>
-        <p:spPr>
-          <a:xfrm>
-            <a:off x="502920" y="3231161"/>
-            <a:ext cx="8138160" cy="1395702"/>
-          </a:xfrm>
-          <a:prstGeom prst="rect">
-            <a:avLst/>
-          </a:prstGeom>
-          <a:solidFill>
-            <a:srgbClr val="E8F9F8"/>
-          </a:solidFill>
-          <a:ln/>
-        </p:spPr>
-        <p:txBody>
-          <a:bodyPr/>
-          <a:lstStyle/>
-          <a:p>
-            <a:endParaRPr lang="en-AU"/>
-          </a:p>
-        </p:txBody>
-      </p:sp>
-      <p:sp>
-        <p:nvSpPr>
-          <p:cNvPr id="7" name="Text 4"/>
-          <p:cNvSpPr txBox="1"/>
-          <p:nvPr/>
-        </p:nvSpPr>
-        <p:spPr>
-          <a:xfrm>
-            <a:off x="685800" y="3304313"/>
-            <a:ext cx="2743200" cy="228600"/>
-          </a:xfrm>
-          <a:prstGeom prst="rect">
-            <a:avLst/>
-          </a:prstGeom>
-          <a:noFill/>
-          <a:ln/>
-        </p:spPr>
-        <p:txBody>
-          <a:bodyPr wrap="square" lIns="0" tIns="0" rIns="0" bIns="0" rtlCol="0" anchor="ctr"/>
-          <a:lstStyle/>
-          <a:p>
-            <a:pPr marL="0" indent="0">
-              <a:buNone/>
-            </a:pPr>
-            <a:r>
-              <a:rPr lang="en-US" sz="900" b="1" kern="0" spc="180">
-                <a:solidFill>
-                  <a:srgbClr val="005358"/>
-                </a:solidFill>
-              </a:rPr>
-              <a:t>COMMENTARY</a:t>
-            </a:r>
-            <a:endParaRPr lang="en-US" sz="900"/>
-          </a:p>
-        </p:txBody>
-      </p:sp>
-      <p:sp>
-        <p:nvSpPr>
-          <p:cNvPr id="8" name="Text 5"/>
-          <p:cNvSpPr txBox="1"/>
-          <p:nvPr/>
-        </p:nvSpPr>
-        <p:spPr>
-          <a:xfrm>
-            <a:off x="685800" y="3478049"/>
-            <a:ext cx="3703320" cy="1121382"/>
-          </a:xfrm>
-          <a:prstGeom prst="rect">
-            <a:avLst/>
-          </a:prstGeom>
-          <a:noFill/>
-          <a:ln/>
-        </p:spPr>
-        <p:txBody>
-          <a:bodyPr wrap="square" lIns="0" tIns="0" rIns="0" bIns="0" rtlCol="0" anchor="t">
-            <a:normAutofit fontScale="77500" lnSpcReduction="20000"/>
-          </a:bodyPr>
-          <a:lstStyle/>
-          <a:p>
-            <a:pPr marL="342900" indent="-342900">
-              <a:lnSpc>
-                <a:spcPts val="1250"/>
-              </a:lnSpc>
-              <a:spcAft>
-                <a:spcPts val="400"/>
-              </a:spcAft>
-              <a:buSzPct val="100000"/>
-              <a:buChar char="•"/>
-            </a:pPr>
-            <a:r>
-              <a:rPr lang="en-US" sz="1000">
-                <a:solidFill>
-                  <a:srgbClr val="3A4453"/>
-                </a:solidFill>
-              </a:rPr>
-              <a:t>Days sales outstanding is 47.2 days, compared with a target of 30 days.</a:t>
-            </a:r>
-            <a:endParaRPr lang="en-US" sz="1000"/>
-          </a:p>
-          <a:p>
-            <a:pPr marL="342900" indent="-342900">
-              <a:lnSpc>
-                <a:spcPts val="1250"/>
-              </a:lnSpc>
-              <a:spcAft>
-                <a:spcPts val="400"/>
-              </a:spcAft>
-              <a:buSzPct val="100000"/>
-              <a:buChar char="•"/>
-            </a:pPr>
-            <a:r>
-              <a:rPr lang="en-US" sz="1000">
-                <a:solidFill>
-                  <a:srgbClr val="3A4453"/>
-                </a:solidFill>
-              </a:rPr>
-              <a:t>This represents approximately 17 additional days of revenue tied up in receivables.</a:t>
-            </a:r>
-            <a:endParaRPr lang="en-US" sz="1000"/>
-          </a:p>
-        </p:txBody>
-      </p:sp>
-      <p:sp>
-        <p:nvSpPr>
-          <p:cNvPr id="25" name="Slide Number Placeholder 0"/>
-          <p:cNvSpPr>
-            <a:spLocks noGrp="1"/>
-          </p:cNvSpPr>
-          <p:nvPr>
-            <p:ph type="sldNum" sz="quarter" idx="4294967295"/>
-          </p:nvPr>
-        </p:nvSpPr>
-        <p:spPr>
-          <a:xfrm>
-            <a:off x="8092440" y="4736592"/>
-            <a:ext cx="548640" cy="228600"/>
-          </a:xfrm>
-          <a:prstGeom prst="rect">
-            <a:avLst/>
-          </a:prstGeom>
-          <a:extLst>
-            <a:ext uri="{C572A759-6A51-4108-AA02-DFA0A04FC94B}">
-              <ma14:wrappingTextBoxFlag xmlns="" xmlns:ma14="http://schemas.microsoft.com/office/mac/drawingml/2011/main" val="0"/>
-            </a:ext>
-          </a:extLst>
-        </p:spPr>
-        <p:txBody>
-          <a:bodyPr/>
-          <a:lstStyle>
-            <a:lvl1pPr>
-              <a:defRPr sz="800">
-                <a:solidFill>
-                  <a:srgbClr val="6B7585"/>
-                </a:solidFill>
-              </a:defRPr>
-            </a:lvl1pPr>
-          </a:lstStyle>
-          <a:p>
-            <a:pPr algn="r"/>
-            <a:fld id="{F7021451-1387-4CA6-816F-3879F97B5CBC}" type="slidenum">
-              <a:rPr lang="en-US" b="0"/>
-              <a:t>27</a:t>
-            </a:fld>
-            <a:endParaRPr lang="en-US"/>
-          </a:p>
-        </p:txBody>
-      </p:sp>
-      <p:pic>
-        <p:nvPicPr>
-          <p:cNvPr id="26" name="cts logo" descr="cts-logo.png"/>
-          <p:cNvPicPr>
-            <a:picLocks noChangeAspect="1"/>
-          </p:cNvPicPr>
-          <p:nvPr/>
-        </p:nvPicPr>
-        <p:blipFill>
-          <a:blip r:embed="rId4"/>
-          <a:stretch>
-            <a:fillRect/>
-          </a:stretch>
-        </p:blipFill>
-        <p:spPr>
-          <a:xfrm>
-            <a:off x="7680959" y="182880"/>
-            <a:ext cx="960120" cy="539696"/>
-          </a:xfrm>
-          <a:prstGeom prst="rect">
-            <a:avLst/>
-          </a:prstGeom>
-        </p:spPr>
-      </p:pic>
-      <p:sp>
-        <p:nvSpPr>
-          <p:cNvPr id="8" name="Text 5b"/>
-          <p:cNvSpPr txBox="1"/>
-          <p:nvPr/>
-        </p:nvSpPr>
-        <p:spPr>
-          <a:xfrm>
-            <a:off x="4663440" y="3478049"/>
-            <a:ext cx="3703320" cy="1121382"/>
-          </a:xfrm>
-          <a:prstGeom prst="rect">
-            <a:avLst/>
-          </a:prstGeom>
-          <a:noFill/>
-          <a:ln/>
-        </p:spPr>
-        <p:txBody>
-          <a:bodyPr wrap="square" lIns="0" tIns="0" rIns="0" bIns="0" rtlCol="0" anchor="t">
-            <a:normAutofit fontScale="77500" lnSpcReduction="20000"/>
-          </a:bodyPr>
-          <a:lstStyle/>
-          <a:p>
-            <a:pPr marL="342900" indent="-342900">
-              <a:lnSpc>
-                <a:spcPts val="1250"/>
-              </a:lnSpc>
-              <a:spcAft>
-                <a:spcPts val="400"/>
-              </a:spcAft>
-              <a:buSzPct val="100000"/>
-              <a:buChar char="•"/>
-            </a:pPr>
-            <a:r>
-              <a:rPr lang="en-US" sz="1000">
-                <a:solidFill>
-                  <a:srgbClr val="3A4453"/>
-                </a:solidFill>
-              </a:rPr>
-              <a:t>At the current revenue rate, closing the gap could release approximately $304k in working capital.</a:t>
-            </a:r>
-            <a:endParaRPr lang="en-US" sz="1000"/>
-          </a:p>
-          <a:p>
-            <a:pPr marL="342900" indent="-342900">
-              <a:lnSpc>
-                <a:spcPts val="1250"/>
-              </a:lnSpc>
-              <a:spcAft>
-                <a:spcPts val="400"/>
-              </a:spcAft>
-              <a:buSzPct val="100000"/>
-              <a:buChar char="•"/>
-            </a:pPr>
-            <a:r>
-              <a:rPr lang="en-US" sz="1000">
-                <a:solidFill>
-                  <a:srgbClr val="3A4453"/>
-                </a:solidFill>
-              </a:rPr>
-              <a:t>Each day of improvement is equivalent to approximately $17.7k in receivables at the current sales rate.</a:t>
-            </a:r>
-            <a:endParaRPr lang="en-US" sz="1000"/>
-          </a:p>
-          <a:p>
-            <a:pPr marL="342900" indent="-342900">
-              <a:lnSpc>
-                <a:spcPts val="1250"/>
-              </a:lnSpc>
-              <a:spcAft>
-                <a:spcPts val="400"/>
-              </a:spcAft>
-              <a:buSzPct val="100000"/>
-              <a:buChar char="•"/>
-            </a:pPr>
-            <a:r>
-              <a:rPr lang="en-US" sz="1000">
-                <a:solidFill>
-                  <a:srgbClr val="3A4453"/>
-                </a:solidFill>
-              </a:rPr>
-              <a:t>Collections should remain a short-term cash-flow priority, with focus on larger outstanding balances.</a:t>
-            </a:r>
-            <a:endParaRPr lang="en-US" sz="1000"/>
-          </a:p>
-        </p:txBody>
-      </p:sp>
-    </p:spTree>
-  </p:cSld>
-  <p:clrMapOvr>
-    <a:masterClrMapping/>
-  </p:clrMapOvr>
-</p:sld>
-</file>
-
-<file path=ppt/slides/slide28.xml><?xml version="1.0" encoding="utf-8"?>
-<p:sld xmlns:a="http://schemas.openxmlformats.org/drawingml/2006/main" xmlns:r="http://schemas.openxmlformats.org/officeDocument/2006/relationships" xmlns:p="http://schemas.openxmlformats.org/presentationml/2006/main">
-  <p:cSld name="Slide 23">
-    <p:spTree>
-      <p:nvGrpSpPr>
-        <p:cNvPr id="1" name=""/>
-        <p:cNvGrpSpPr/>
-        <p:nvPr/>
-      </p:nvGrpSpPr>
-      <p:grpSpPr>
-        <a:xfrm>
-          <a:off x="0" y="0"/>
-          <a:ext cx="0" cy="0"/>
-          <a:chOff x="0" y="0"/>
-          <a:chExt cx="0" cy="0"/>
-        </a:xfrm>
-      </p:grpSpPr>
-      <p:pic>
-        <p:nvPicPr>
-          <p:cNvPr id="27" name="snip dso_who" descr="image.png"/>
-          <p:cNvPicPr>
-            <a:picLocks noChangeAspect="1"/>
-          </p:cNvPicPr>
-          <p:nvPr/>
-        </p:nvPicPr>
-        <p:blipFill>
-          <a:blip r:embed="rId3"/>
-          <a:stretch>
-            <a:fillRect/>
-          </a:stretch>
-        </p:blipFill>
-        <p:spPr>
-          <a:xfrm>
-            <a:off x="3107424" y="1005840"/>
-            <a:ext cx="2929151" cy="1964998"/>
-          </a:xfrm>
-          <a:prstGeom prst="rect">
-            <a:avLst/>
-          </a:prstGeom>
-        </p:spPr>
-      </p:pic>
-      <p:sp>
-        <p:nvSpPr>
-          <p:cNvPr id="2" name="Text 0"/>
-          <p:cNvSpPr txBox="1"/>
-          <p:nvPr/>
-        </p:nvSpPr>
-        <p:spPr>
-          <a:xfrm>
-            <a:off x="502920" y="365760"/>
-            <a:ext cx="6400800" cy="274320"/>
-          </a:xfrm>
-          <a:prstGeom prst="rect">
-            <a:avLst/>
-          </a:prstGeom>
-          <a:noFill/>
-          <a:ln/>
-        </p:spPr>
-        <p:txBody>
-          <a:bodyPr wrap="square" lIns="0" tIns="0" rIns="0" bIns="0" rtlCol="0" anchor="ctr"/>
-          <a:lstStyle/>
-          <a:p>
-            <a:pPr marL="0" indent="0">
-              <a:buNone/>
-            </a:pPr>
-            <a:r>
-              <a:rPr lang="en-US" sz="950" b="1" kern="0" spc="220">
-                <a:solidFill>
-                  <a:srgbClr val="122B82"/>
-                </a:solidFill>
-              </a:rPr>
-              <a:t>CUSTOMERS AND CASH</a:t>
-            </a:r>
-            <a:endParaRPr lang="en-US" sz="950"/>
-          </a:p>
-        </p:txBody>
-      </p:sp>
-      <p:sp>
-        <p:nvSpPr>
-          <p:cNvPr id="3" name="Text 1"/>
-          <p:cNvSpPr txBox="1"/>
-          <p:nvPr/>
-        </p:nvSpPr>
-        <p:spPr>
-          <a:xfrm>
-            <a:off x="502920" y="640080"/>
-            <a:ext cx="7315200" cy="365760"/>
-          </a:xfrm>
-          <a:prstGeom prst="rect">
-            <a:avLst/>
-          </a:prstGeom>
-          <a:noFill/>
-          <a:ln/>
-        </p:spPr>
-        <p:txBody>
-          <a:bodyPr wrap="square" lIns="0" tIns="0" rIns="0" bIns="0" rtlCol="0" anchor="ctr"/>
-          <a:lstStyle/>
-          <a:p>
-            <a:pPr marL="0" indent="0" algn="ctr">
-              <a:buNone/>
-            </a:pPr>
-            <a:r>
-              <a:rPr lang="en-US" sz="2200" b="1">
-                <a:solidFill>
-                  <a:srgbClr val="242C39"/>
-                </a:solidFill>
-              </a:rPr>
-              <a:t>Who owes us the most</a:t>
-            </a:r>
-            <a:endParaRPr lang="en-US" sz="2700"/>
-          </a:p>
-        </p:txBody>
-      </p:sp>
-      <p:sp>
-        <p:nvSpPr>
-          <p:cNvPr id="6" name="commentary panel"/>
-          <p:cNvSpPr/>
-          <p:nvPr/>
-        </p:nvSpPr>
-        <p:spPr>
-          <a:xfrm>
-            <a:off x="502920" y="3062278"/>
-            <a:ext cx="8138160" cy="1564585"/>
-          </a:xfrm>
-          <a:prstGeom prst="rect">
-            <a:avLst/>
-          </a:prstGeom>
-          <a:solidFill>
-            <a:srgbClr val="E8F9F8"/>
-          </a:solidFill>
-          <a:ln/>
-        </p:spPr>
-        <p:txBody>
-          <a:bodyPr/>
-          <a:lstStyle/>
-          <a:p>
-            <a:endParaRPr lang="en-AU"/>
-          </a:p>
-        </p:txBody>
-      </p:sp>
-      <p:sp>
-        <p:nvSpPr>
-          <p:cNvPr id="7" name="Text 4"/>
-          <p:cNvSpPr txBox="1"/>
-          <p:nvPr/>
-        </p:nvSpPr>
-        <p:spPr>
-          <a:xfrm>
-            <a:off x="685800" y="3135430"/>
-            <a:ext cx="2743200" cy="228600"/>
-          </a:xfrm>
-          <a:prstGeom prst="rect">
-            <a:avLst/>
-          </a:prstGeom>
-          <a:noFill/>
-          <a:ln/>
-        </p:spPr>
-        <p:txBody>
-          <a:bodyPr wrap="square" lIns="0" tIns="0" rIns="0" bIns="0" rtlCol="0" anchor="ctr"/>
-          <a:lstStyle/>
-          <a:p>
-            <a:pPr marL="0" indent="0">
-              <a:buNone/>
-            </a:pPr>
-            <a:r>
-              <a:rPr lang="en-US" sz="900" b="1" kern="0" spc="180">
-                <a:solidFill>
-                  <a:srgbClr val="005358"/>
-                </a:solidFill>
-              </a:rPr>
-              <a:t>COMMENTARY</a:t>
-            </a:r>
-            <a:endParaRPr lang="en-US" sz="900"/>
-          </a:p>
-        </p:txBody>
-      </p:sp>
-      <p:sp>
-        <p:nvSpPr>
-          <p:cNvPr id="8" name="Text 5"/>
-          <p:cNvSpPr txBox="1"/>
-          <p:nvPr/>
-        </p:nvSpPr>
-        <p:spPr>
-          <a:xfrm>
-            <a:off x="685800" y="3309166"/>
-            <a:ext cx="3703320" cy="1290265"/>
-          </a:xfrm>
-          <a:prstGeom prst="rect">
-            <a:avLst/>
-          </a:prstGeom>
-          <a:noFill/>
-          <a:ln/>
-        </p:spPr>
-        <p:txBody>
-          <a:bodyPr wrap="square" lIns="0" tIns="0" rIns="0" bIns="0" rtlCol="0" anchor="t">
-            <a:normAutofit fontScale="77500" lnSpcReduction="20000"/>
-          </a:bodyPr>
-          <a:lstStyle/>
-          <a:p>
-            <a:pPr marL="342900" indent="-342900">
-              <a:lnSpc>
-                <a:spcPts val="1200"/>
-              </a:lnSpc>
-              <a:spcAft>
-                <a:spcPts val="400"/>
-              </a:spcAft>
-              <a:buSzPct val="100000"/>
-              <a:buChar char="•"/>
-            </a:pPr>
-            <a:r>
-              <a:rPr lang="en-US" sz="1000">
-                <a:solidFill>
-                  <a:srgbClr val="3A4453"/>
-                </a:solidFill>
-              </a:rPr>
-              <a:t>Aware Super has an outstanding balance of $277k, representing 33% of total receivables.</a:t>
-            </a:r>
-            <a:endParaRPr lang="en-US" sz="950"/>
-          </a:p>
-          <a:p>
-            <a:pPr marL="342900" indent="-342900">
-              <a:lnSpc>
-                <a:spcPts val="1200"/>
-              </a:lnSpc>
-              <a:spcAft>
-                <a:spcPts val="400"/>
-              </a:spcAft>
-              <a:buSzPct val="100000"/>
-              <a:buChar char="•"/>
-            </a:pPr>
-            <a:r>
-              <a:rPr lang="en-US" sz="1000">
-                <a:solidFill>
-                  <a:srgbClr val="3A4453"/>
-                </a:solidFill>
-              </a:rPr>
-              <a:t>Together with Deloitte Services P/L for Deloitte Services Trust at $132k, the two account for approximately 49% of receivables.</a:t>
-            </a:r>
-            <a:endParaRPr lang="en-US" sz="950"/>
-          </a:p>
-        </p:txBody>
-      </p:sp>
-      <p:sp>
-        <p:nvSpPr>
-          <p:cNvPr id="25" name="Slide Number Placeholder 0"/>
-          <p:cNvSpPr>
-            <a:spLocks noGrp="1"/>
-          </p:cNvSpPr>
-          <p:nvPr>
-            <p:ph type="sldNum" sz="quarter" idx="4294967295"/>
-          </p:nvPr>
-        </p:nvSpPr>
-        <p:spPr>
-          <a:xfrm>
-            <a:off x="8092440" y="4736592"/>
-            <a:ext cx="548640" cy="228600"/>
-          </a:xfrm>
-          <a:prstGeom prst="rect">
-            <a:avLst/>
-          </a:prstGeom>
-          <a:extLst>
-            <a:ext uri="{C572A759-6A51-4108-AA02-DFA0A04FC94B}">
-              <ma14:wrappingTextBoxFlag xmlns="" xmlns:ma14="http://schemas.microsoft.com/office/mac/drawingml/2011/main" val="0"/>
-            </a:ext>
-          </a:extLst>
-        </p:spPr>
-        <p:txBody>
-          <a:bodyPr/>
-          <a:lstStyle>
-            <a:lvl1pPr>
-              <a:defRPr sz="800">
-                <a:solidFill>
-                  <a:srgbClr val="6B7585"/>
-                </a:solidFill>
-              </a:defRPr>
-            </a:lvl1pPr>
-          </a:lstStyle>
-          <a:p>
-            <a:pPr algn="r"/>
-            <a:fld id="{F7021451-1387-4CA6-816F-3879F97B5CBC}" type="slidenum">
-              <a:rPr lang="en-US" b="0"/>
-              <a:t>28</a:t>
-            </a:fld>
-            <a:endParaRPr lang="en-US"/>
-          </a:p>
-        </p:txBody>
-      </p:sp>
-      <p:pic>
-        <p:nvPicPr>
-          <p:cNvPr id="26" name="cts logo" descr="cts-logo.png"/>
-          <p:cNvPicPr>
-            <a:picLocks noChangeAspect="1"/>
-          </p:cNvPicPr>
-          <p:nvPr/>
-        </p:nvPicPr>
-        <p:blipFill>
-          <a:blip r:embed="rId4"/>
-          <a:stretch>
-            <a:fillRect/>
-          </a:stretch>
-        </p:blipFill>
-        <p:spPr>
-          <a:xfrm>
-            <a:off x="7680959" y="182880"/>
-            <a:ext cx="960120" cy="539696"/>
-          </a:xfrm>
-          <a:prstGeom prst="rect">
-            <a:avLst/>
-          </a:prstGeom>
-        </p:spPr>
-      </p:pic>
-      <p:sp>
-        <p:nvSpPr>
-          <p:cNvPr id="8" name="Text 5b"/>
-          <p:cNvSpPr txBox="1"/>
-          <p:nvPr/>
-        </p:nvSpPr>
-        <p:spPr>
-          <a:xfrm>
-            <a:off x="4663440" y="3309166"/>
-            <a:ext cx="3703320" cy="1290265"/>
-          </a:xfrm>
-          <a:prstGeom prst="rect">
-            <a:avLst/>
-          </a:prstGeom>
-          <a:noFill/>
-          <a:ln/>
-        </p:spPr>
-        <p:txBody>
-          <a:bodyPr wrap="square" lIns="0" tIns="0" rIns="0" bIns="0" rtlCol="0" anchor="t">
-            <a:normAutofit fontScale="77500" lnSpcReduction="20000"/>
-          </a:bodyPr>
-          <a:lstStyle/>
-          <a:p>
-            <a:pPr marL="342900" indent="-342900">
-              <a:lnSpc>
-                <a:spcPts val="1200"/>
-              </a:lnSpc>
-              <a:spcAft>
-                <a:spcPts val="400"/>
-              </a:spcAft>
-              <a:buSzPct val="100000"/>
-              <a:buChar char="•"/>
-            </a:pPr>
-            <a:r>
-              <a:rPr lang="en-US" sz="1000">
-                <a:solidFill>
-                  <a:srgbClr val="3A4453"/>
-                </a:solidFill>
-              </a:rPr>
-              <a:t>Overdue amounts total approximately $245k, or 29% of the debtor balance.</a:t>
-            </a:r>
-            <a:endParaRPr lang="en-US" sz="950"/>
-          </a:p>
-          <a:p>
-            <a:pPr marL="342900" indent="-342900">
-              <a:lnSpc>
-                <a:spcPts val="1200"/>
-              </a:lnSpc>
-              <a:spcAft>
-                <a:spcPts val="400"/>
-              </a:spcAft>
-              <a:buSzPct val="100000"/>
-              <a:buChar char="•"/>
-            </a:pPr>
-            <a:r>
-              <a:rPr lang="en-US" sz="1000">
-                <a:solidFill>
-                  <a:srgbClr val="3A4453"/>
-                </a:solidFill>
-              </a:rPr>
-              <a:t>Collections efforts should prioritise these larger accounts while maintaining follow-up on other overdue invoices.</a:t>
-            </a:r>
-            <a:endParaRPr lang="en-US" sz="950"/>
-          </a:p>
-          <a:p>
-            <a:pPr marL="342900" indent="-342900">
-              <a:lnSpc>
-                <a:spcPts val="1200"/>
-              </a:lnSpc>
-              <a:spcAft>
-                <a:spcPts val="400"/>
-              </a:spcAft>
-              <a:buSzPct val="100000"/>
-              <a:buChar char="•"/>
-            </a:pPr>
-            <a:r>
-              <a:rPr lang="en-US" sz="1000">
-                <a:solidFill>
-                  <a:srgbClr val="3A4453"/>
-                </a:solidFill>
-              </a:rPr>
-              <a:t>A targeted collections plan with clear owners and follow-up dates is likely to be more effective than a broad reminder process alone.</a:t>
-            </a:r>
-            <a:endParaRPr lang="en-US" sz="950"/>
-          </a:p>
-        </p:txBody>
-      </p:sp>
-    </p:spTree>
-  </p:cSld>
-  <p:clrMapOvr>
-    <a:masterClrMapping/>
-  </p:clrMapOvr>
-</p:sld>
-</file>
-
-<file path=ppt/slides/slide29.xml><?xml version="1.0" encoding="utf-8"?>
-<p:sld xmlns:a="http://schemas.openxmlformats.org/drawingml/2006/main" xmlns:r="http://schemas.openxmlformats.org/officeDocument/2006/relationships" xmlns:p="http://schemas.openxmlformats.org/presentationml/2006/main">
-  <p:cSld name="Slide 24">
-    <p:spTree>
-      <p:nvGrpSpPr>
-        <p:cNvPr id="1" name=""/>
-        <p:cNvGrpSpPr/>
-        <p:nvPr/>
-      </p:nvGrpSpPr>
-      <p:grpSpPr>
-        <a:xfrm>
-          <a:off x="0" y="0"/>
-          <a:ext cx="0" cy="0"/>
-          <a:chOff x="0" y="0"/>
-          <a:chExt cx="0" cy="0"/>
-        </a:xfrm>
-      </p:grpSpPr>
-      <p:sp>
-        <p:nvSpPr>
-          <p:cNvPr id="2" name="dot 2"/>
-          <p:cNvSpPr/>
-          <p:nvPr/>
-        </p:nvSpPr>
-        <p:spPr>
-          <a:xfrm>
-            <a:off x="7178040" y="2057400"/>
-            <a:ext cx="2240280" cy="2240280"/>
-          </a:xfrm>
-          <a:prstGeom prst="ellipse">
-            <a:avLst/>
-          </a:prstGeom>
-          <a:solidFill>
-            <a:srgbClr val="F33844">
-              <a:alpha val="55000"/>
-            </a:srgbClr>
-          </a:solidFill>
-          <a:ln/>
-        </p:spPr>
-        <p:txBody>
-          <a:bodyPr/>
-          <a:lstStyle/>
-          <a:p>
-            <a:endParaRPr lang="en-AU"/>
-          </a:p>
-        </p:txBody>
-      </p:sp>
-      <p:sp>
-        <p:nvSpPr>
-          <p:cNvPr id="8" name="dot 1"/>
-          <p:cNvSpPr/>
-          <p:nvPr/>
-        </p:nvSpPr>
-        <p:spPr>
-          <a:xfrm>
-            <a:off x="7909560" y="1188720"/>
-            <a:ext cx="1783080" cy="1783080"/>
-          </a:xfrm>
-          <a:prstGeom prst="ellipse">
-            <a:avLst/>
-          </a:prstGeom>
-          <a:solidFill>
-            <a:srgbClr val="6D71FF">
-              <a:alpha val="55000"/>
-            </a:srgbClr>
-          </a:solidFill>
-          <a:ln/>
-        </p:spPr>
-        <p:txBody>
-          <a:bodyPr/>
-          <a:lstStyle/>
-          <a:p>
-            <a:endParaRPr lang="en-AU"/>
-          </a:p>
-        </p:txBody>
-      </p:sp>
-      <p:sp>
-        <p:nvSpPr>
-          <p:cNvPr id="9" name="dot 0"/>
-          <p:cNvSpPr/>
-          <p:nvPr/>
-        </p:nvSpPr>
-        <p:spPr>
-          <a:xfrm>
-            <a:off x="6949440" y="274320"/>
-            <a:ext cx="2148840" cy="2148840"/>
-          </a:xfrm>
-          <a:prstGeom prst="ellipse">
-            <a:avLst/>
-          </a:prstGeom>
-          <a:solidFill>
-            <a:srgbClr val="3FD0C9">
-              <a:alpha val="55000"/>
-            </a:srgbClr>
-          </a:solidFill>
-          <a:ln/>
-        </p:spPr>
-        <p:txBody>
-          <a:bodyPr/>
-          <a:lstStyle/>
-          <a:p>
-            <a:endParaRPr lang="en-AU"/>
-          </a:p>
-        </p:txBody>
-      </p:sp>
-      <p:sp>
-        <p:nvSpPr>
-          <p:cNvPr id="3" name="Shape 1"/>
-          <p:cNvSpPr/>
-          <p:nvPr/>
-        </p:nvSpPr>
-        <p:spPr>
-          <a:xfrm>
-            <a:off x="502920" y="1874520"/>
-            <a:ext cx="868680" cy="868680"/>
-          </a:xfrm>
-          <a:prstGeom prst="rect">
-            <a:avLst/>
-          </a:prstGeom>
-          <a:solidFill>
-            <a:srgbClr val="3FD0C9"/>
-          </a:solidFill>
-          <a:ln/>
-        </p:spPr>
-        <p:txBody>
-          <a:bodyPr/>
-          <a:lstStyle/>
-          <a:p>
-            <a:endParaRPr lang="en-AU"/>
-          </a:p>
-        </p:txBody>
-      </p:sp>
-      <p:sp>
-        <p:nvSpPr>
-          <p:cNvPr id="4" name="Text 2"/>
-          <p:cNvSpPr txBox="1"/>
-          <p:nvPr/>
-        </p:nvSpPr>
-        <p:spPr>
-          <a:xfrm>
-            <a:off x="502920" y="1874520"/>
-            <a:ext cx="868680" cy="868680"/>
-          </a:xfrm>
-          <a:prstGeom prst="rect">
-            <a:avLst/>
-          </a:prstGeom>
-          <a:noFill/>
-          <a:ln/>
-        </p:spPr>
-        <p:txBody>
-          <a:bodyPr wrap="square" lIns="0" tIns="0" rIns="0" bIns="0" rtlCol="0" anchor="ctr"/>
-          <a:lstStyle/>
-          <a:p>
-            <a:pPr marL="0" indent="0" algn="ctr">
-              <a:buNone/>
-            </a:pPr>
-            <a:r>
-              <a:rPr lang="en-US" sz="2200" b="1">
-                <a:solidFill>
-                  <a:srgbClr val="242C39"/>
-                </a:solidFill>
-              </a:rPr>
-              <a:t>04</a:t>
-            </a:r>
-            <a:endParaRPr lang="en-US" sz="2600"/>
-          </a:p>
-        </p:txBody>
-      </p:sp>
-      <p:sp>
-        <p:nvSpPr>
-          <p:cNvPr id="5" name="Text 3"/>
-          <p:cNvSpPr txBox="1"/>
-          <p:nvPr/>
-        </p:nvSpPr>
-        <p:spPr>
-          <a:xfrm>
-            <a:off x="502920" y="411480"/>
-            <a:ext cx="3657600" cy="274320"/>
-          </a:xfrm>
-          <a:prstGeom prst="rect">
-            <a:avLst/>
-          </a:prstGeom>
-          <a:noFill/>
-          <a:ln/>
-        </p:spPr>
-        <p:txBody>
-          <a:bodyPr wrap="square" lIns="0" tIns="0" rIns="0" bIns="0" rtlCol="0" anchor="ctr"/>
-          <a:lstStyle/>
-          <a:p>
-            <a:pPr marL="0" indent="0">
-              <a:buNone/>
-            </a:pPr>
-            <a:r>
-              <a:rPr lang="en-US" sz="950" b="1" kern="0" spc="220">
-                <a:solidFill>
-                  <a:srgbClr val="3FD0C9"/>
-                </a:solidFill>
-              </a:rPr>
-              <a:t>SECTION</a:t>
-            </a:r>
-            <a:endParaRPr lang="en-US" sz="950"/>
-          </a:p>
-        </p:txBody>
-      </p:sp>
-      <p:sp>
-        <p:nvSpPr>
-          <p:cNvPr id="6" name="Text 4"/>
-          <p:cNvSpPr txBox="1"/>
-          <p:nvPr/>
-        </p:nvSpPr>
-        <p:spPr>
-          <a:xfrm>
-            <a:off x="1600200" y="1874520"/>
-            <a:ext cx="5943600" cy="502920"/>
-          </a:xfrm>
-          <a:prstGeom prst="rect">
-            <a:avLst/>
-          </a:prstGeom>
-          <a:noFill/>
-          <a:ln/>
-        </p:spPr>
-        <p:txBody>
-          <a:bodyPr wrap="square" lIns="0" tIns="0" rIns="0" bIns="0" rtlCol="0" anchor="ctr"/>
-          <a:lstStyle/>
-          <a:p>
-            <a:pPr marL="0" indent="0">
-              <a:buNone/>
-            </a:pPr>
-            <a:r>
-              <a:rPr lang="en-US" sz="2300" b="1">
-                <a:solidFill>
-                  <a:srgbClr val="FFFFFF"/>
-                </a:solidFill>
-              </a:rPr>
-              <a:t>People and utilisation</a:t>
-            </a:r>
-            <a:endParaRPr lang="en-US" sz="2800"/>
-          </a:p>
-        </p:txBody>
-      </p:sp>
-      <p:sp>
-        <p:nvSpPr>
-          <p:cNvPr id="7" name="Text 5"/>
-          <p:cNvSpPr txBox="1"/>
-          <p:nvPr/>
-        </p:nvSpPr>
-        <p:spPr>
-          <a:xfrm>
-            <a:off x="1600200" y="2395728"/>
-            <a:ext cx="5943600" cy="347472"/>
-          </a:xfrm>
-          <a:prstGeom prst="rect">
-            <a:avLst/>
-          </a:prstGeom>
-          <a:noFill/>
-          <a:ln/>
-        </p:spPr>
-        <p:txBody>
-          <a:bodyPr wrap="square" lIns="0" tIns="0" rIns="0" bIns="0" rtlCol="0" anchor="ctr"/>
-          <a:lstStyle/>
-          <a:p>
-            <a:pPr marL="0" indent="0">
-              <a:buNone/>
-            </a:pPr>
-            <a:r>
-              <a:rPr lang="en-US" sz="1200">
-                <a:solidFill>
-                  <a:srgbClr val="C9CED6"/>
-                </a:solidFill>
-              </a:rPr>
-              <a:t>Chargeable hours and the profit they produce</a:t>
-            </a:r>
-            <a:endParaRPr lang="en-US" sz="1200"/>
           </a:p>
         </p:txBody>
       </p:sp>
@@ -16764,6 +17064,1101 @@
 
 <file path=ppt/slides/slide30.xml><?xml version="1.0" encoding="utf-8"?>
 <p:sld xmlns:a="http://schemas.openxmlformats.org/drawingml/2006/main" xmlns:r="http://schemas.openxmlformats.org/officeDocument/2006/relationships" xmlns:p="http://schemas.openxmlformats.org/presentationml/2006/main">
+  <p:cSld name="Slide 22">
+    <p:spTree>
+      <p:nvGrpSpPr>
+        <p:cNvPr id="1" name=""/>
+        <p:cNvGrpSpPr/>
+        <p:nvPr/>
+      </p:nvGrpSpPr>
+      <p:grpSpPr>
+        <a:xfrm>
+          <a:off x="0" y="0"/>
+          <a:ext cx="0" cy="0"/>
+          <a:chOff x="0" y="0"/>
+          <a:chExt cx="0" cy="0"/>
+        </a:xfrm>
+      </p:grpSpPr>
+      <p:pic>
+        <p:nvPicPr>
+          <p:cNvPr id="27" name="snip dso_calc" descr="image.png"/>
+          <p:cNvPicPr>
+            <a:picLocks noChangeAspect="1"/>
+          </p:cNvPicPr>
+          <p:nvPr/>
+        </p:nvPicPr>
+        <p:blipFill>
+          <a:blip r:embed="rId3"/>
+          <a:stretch>
+            <a:fillRect/>
+          </a:stretch>
+        </p:blipFill>
+        <p:spPr>
+          <a:xfrm>
+            <a:off x="2520006" y="1005840"/>
+            <a:ext cx="4103987" cy="2133881"/>
+          </a:xfrm>
+          <a:prstGeom prst="rect">
+            <a:avLst/>
+          </a:prstGeom>
+        </p:spPr>
+      </p:pic>
+      <p:sp>
+        <p:nvSpPr>
+          <p:cNvPr id="2" name="Text 0"/>
+          <p:cNvSpPr txBox="1"/>
+          <p:nvPr/>
+        </p:nvSpPr>
+        <p:spPr>
+          <a:xfrm>
+            <a:off x="502920" y="365760"/>
+            <a:ext cx="6400800" cy="274320"/>
+          </a:xfrm>
+          <a:prstGeom prst="rect">
+            <a:avLst/>
+          </a:prstGeom>
+          <a:noFill/>
+          <a:ln/>
+        </p:spPr>
+        <p:txBody>
+          <a:bodyPr wrap="square" lIns="0" tIns="0" rIns="0" bIns="0" rtlCol="0" anchor="ctr"/>
+          <a:lstStyle/>
+          <a:p>
+            <a:pPr marL="0" indent="0">
+              <a:buNone/>
+            </a:pPr>
+            <a:r>
+              <a:rPr lang="en-US" sz="950" b="1" kern="0" spc="220">
+                <a:solidFill>
+                  <a:srgbClr val="122B82"/>
+                </a:solidFill>
+              </a:rPr>
+              <a:t>CUSTOMERS AND CASH</a:t>
+            </a:r>
+            <a:endParaRPr lang="en-US" sz="950"/>
+          </a:p>
+        </p:txBody>
+      </p:sp>
+      <p:sp>
+        <p:nvSpPr>
+          <p:cNvPr id="3" name="Text 1"/>
+          <p:cNvSpPr txBox="1"/>
+          <p:nvPr/>
+        </p:nvSpPr>
+        <p:spPr>
+          <a:xfrm>
+            <a:off x="502920" y="640080"/>
+            <a:ext cx="7315200" cy="365760"/>
+          </a:xfrm>
+          <a:prstGeom prst="rect">
+            <a:avLst/>
+          </a:prstGeom>
+          <a:noFill/>
+          <a:ln/>
+        </p:spPr>
+        <p:txBody>
+          <a:bodyPr wrap="square" lIns="0" tIns="0" rIns="0" bIns="0" rtlCol="0" anchor="ctr"/>
+          <a:lstStyle/>
+          <a:p>
+            <a:pPr marL="0" indent="0" algn="ctr">
+              <a:buNone/>
+            </a:pPr>
+            <a:r>
+              <a:rPr lang="en-US" sz="2200" b="1">
+                <a:solidFill>
+                  <a:srgbClr val="242C39"/>
+                </a:solidFill>
+              </a:rPr>
+              <a:t>How long customers take to pay</a:t>
+            </a:r>
+            <a:endParaRPr lang="en-US" sz="2700"/>
+          </a:p>
+        </p:txBody>
+      </p:sp>
+      <p:sp>
+        <p:nvSpPr>
+          <p:cNvPr id="6" name="commentary panel"/>
+          <p:cNvSpPr/>
+          <p:nvPr/>
+        </p:nvSpPr>
+        <p:spPr>
+          <a:xfrm>
+            <a:off x="502920" y="3231161"/>
+            <a:ext cx="8138160" cy="1395702"/>
+          </a:xfrm>
+          <a:prstGeom prst="rect">
+            <a:avLst/>
+          </a:prstGeom>
+          <a:solidFill>
+            <a:srgbClr val="E8F9F8"/>
+          </a:solidFill>
+          <a:ln/>
+        </p:spPr>
+        <p:txBody>
+          <a:bodyPr/>
+          <a:lstStyle/>
+          <a:p>
+            <a:endParaRPr lang="en-AU"/>
+          </a:p>
+        </p:txBody>
+      </p:sp>
+      <p:sp>
+        <p:nvSpPr>
+          <p:cNvPr id="7" name="Text 4"/>
+          <p:cNvSpPr txBox="1"/>
+          <p:nvPr/>
+        </p:nvSpPr>
+        <p:spPr>
+          <a:xfrm>
+            <a:off x="685800" y="3304313"/>
+            <a:ext cx="2743200" cy="228600"/>
+          </a:xfrm>
+          <a:prstGeom prst="rect">
+            <a:avLst/>
+          </a:prstGeom>
+          <a:noFill/>
+          <a:ln/>
+        </p:spPr>
+        <p:txBody>
+          <a:bodyPr wrap="square" lIns="0" tIns="0" rIns="0" bIns="0" rtlCol="0" anchor="ctr"/>
+          <a:lstStyle/>
+          <a:p>
+            <a:pPr marL="0" indent="0">
+              <a:buNone/>
+            </a:pPr>
+            <a:r>
+              <a:rPr lang="en-US" sz="900" b="1" kern="0" spc="180">
+                <a:solidFill>
+                  <a:srgbClr val="005358"/>
+                </a:solidFill>
+              </a:rPr>
+              <a:t>COMMENTARY</a:t>
+            </a:r>
+            <a:endParaRPr lang="en-US" sz="900"/>
+          </a:p>
+        </p:txBody>
+      </p:sp>
+      <p:sp>
+        <p:nvSpPr>
+          <p:cNvPr id="8" name="Text 5"/>
+          <p:cNvSpPr txBox="1"/>
+          <p:nvPr/>
+        </p:nvSpPr>
+        <p:spPr>
+          <a:xfrm>
+            <a:off x="685800" y="3478049"/>
+            <a:ext cx="3703320" cy="1121382"/>
+          </a:xfrm>
+          <a:prstGeom prst="rect">
+            <a:avLst/>
+          </a:prstGeom>
+          <a:noFill/>
+          <a:ln/>
+        </p:spPr>
+        <p:txBody>
+          <a:bodyPr wrap="square" lIns="0" tIns="0" rIns="0" bIns="0" rtlCol="0" anchor="t">
+            <a:normAutofit fontScale="77500" lnSpcReduction="20000"/>
+          </a:bodyPr>
+          <a:lstStyle/>
+          <a:p>
+            <a:pPr marL="342900" indent="-342900">
+              <a:lnSpc>
+                <a:spcPts val="1250"/>
+              </a:lnSpc>
+              <a:spcAft>
+                <a:spcPts val="400"/>
+              </a:spcAft>
+              <a:buSzPct val="100000"/>
+              <a:buChar char="•"/>
+            </a:pPr>
+            <a:r>
+              <a:rPr lang="en-US" sz="1000">
+                <a:solidFill>
+                  <a:srgbClr val="3A4453"/>
+                </a:solidFill>
+              </a:rPr>
+              <a:t>Days sales outstanding is 47.2 days, compared with a target of 30 days.</a:t>
+            </a:r>
+            <a:endParaRPr lang="en-US" sz="1000"/>
+          </a:p>
+          <a:p>
+            <a:pPr marL="342900" indent="-342900">
+              <a:lnSpc>
+                <a:spcPts val="1250"/>
+              </a:lnSpc>
+              <a:spcAft>
+                <a:spcPts val="400"/>
+              </a:spcAft>
+              <a:buSzPct val="100000"/>
+              <a:buChar char="•"/>
+            </a:pPr>
+            <a:r>
+              <a:rPr lang="en-US" sz="1000">
+                <a:solidFill>
+                  <a:srgbClr val="3A4453"/>
+                </a:solidFill>
+              </a:rPr>
+              <a:t>This represents approximately 17 additional days of revenue tied up in receivables.</a:t>
+            </a:r>
+            <a:endParaRPr lang="en-US" sz="1000"/>
+          </a:p>
+        </p:txBody>
+      </p:sp>
+      <p:sp>
+        <p:nvSpPr>
+          <p:cNvPr id="25" name="Slide Number Placeholder 0"/>
+          <p:cNvSpPr>
+            <a:spLocks noGrp="1"/>
+          </p:cNvSpPr>
+          <p:nvPr>
+            <p:ph type="sldNum" sz="quarter" idx="4294967295"/>
+          </p:nvPr>
+        </p:nvSpPr>
+        <p:spPr>
+          <a:xfrm>
+            <a:off x="8092440" y="4736592"/>
+            <a:ext cx="548640" cy="228600"/>
+          </a:xfrm>
+          <a:prstGeom prst="rect">
+            <a:avLst/>
+          </a:prstGeom>
+          <a:extLst>
+            <a:ext uri="{C572A759-6A51-4108-AA02-DFA0A04FC94B}">
+              <ma14:wrappingTextBoxFlag xmlns="" xmlns:ma14="http://schemas.microsoft.com/office/mac/drawingml/2011/main" val="0"/>
+            </a:ext>
+          </a:extLst>
+        </p:spPr>
+        <p:txBody>
+          <a:bodyPr/>
+          <a:lstStyle>
+            <a:lvl1pPr>
+              <a:defRPr sz="800">
+                <a:solidFill>
+                  <a:srgbClr val="6B7585"/>
+                </a:solidFill>
+              </a:defRPr>
+            </a:lvl1pPr>
+          </a:lstStyle>
+          <a:p>
+            <a:pPr algn="r"/>
+            <a:fld id="{F7021451-1387-4CA6-816F-3879F97B5CBC}" type="slidenum">
+              <a:rPr lang="en-US" b="0"/>
+              <a:t>27</a:t>
+            </a:fld>
+            <a:endParaRPr lang="en-US"/>
+          </a:p>
+        </p:txBody>
+      </p:sp>
+      <p:pic>
+        <p:nvPicPr>
+          <p:cNvPr id="26" name="cts logo" descr="cts-logo.png"/>
+          <p:cNvPicPr>
+            <a:picLocks noChangeAspect="1"/>
+          </p:cNvPicPr>
+          <p:nvPr/>
+        </p:nvPicPr>
+        <p:blipFill>
+          <a:blip r:embed="rId4"/>
+          <a:stretch>
+            <a:fillRect/>
+          </a:stretch>
+        </p:blipFill>
+        <p:spPr>
+          <a:xfrm>
+            <a:off x="7680959" y="182880"/>
+            <a:ext cx="960120" cy="539696"/>
+          </a:xfrm>
+          <a:prstGeom prst="rect">
+            <a:avLst/>
+          </a:prstGeom>
+        </p:spPr>
+      </p:pic>
+      <p:sp>
+        <p:nvSpPr>
+          <p:cNvPr id="8" name="Text 5b"/>
+          <p:cNvSpPr txBox="1"/>
+          <p:nvPr/>
+        </p:nvSpPr>
+        <p:spPr>
+          <a:xfrm>
+            <a:off x="4663440" y="3478049"/>
+            <a:ext cx="3703320" cy="1121382"/>
+          </a:xfrm>
+          <a:prstGeom prst="rect">
+            <a:avLst/>
+          </a:prstGeom>
+          <a:noFill/>
+          <a:ln/>
+        </p:spPr>
+        <p:txBody>
+          <a:bodyPr wrap="square" lIns="0" tIns="0" rIns="0" bIns="0" rtlCol="0" anchor="t">
+            <a:normAutofit fontScale="77500" lnSpcReduction="20000"/>
+          </a:bodyPr>
+          <a:lstStyle/>
+          <a:p>
+            <a:pPr marL="342900" indent="-342900">
+              <a:lnSpc>
+                <a:spcPts val="1250"/>
+              </a:lnSpc>
+              <a:spcAft>
+                <a:spcPts val="400"/>
+              </a:spcAft>
+              <a:buSzPct val="100000"/>
+              <a:buChar char="•"/>
+            </a:pPr>
+            <a:r>
+              <a:rPr lang="en-US" sz="1000">
+                <a:solidFill>
+                  <a:srgbClr val="3A4453"/>
+                </a:solidFill>
+              </a:rPr>
+              <a:t>At the current revenue rate, closing the gap could release approximately $304k in working capital.</a:t>
+            </a:r>
+            <a:endParaRPr lang="en-US" sz="1000"/>
+          </a:p>
+          <a:p>
+            <a:pPr marL="342900" indent="-342900">
+              <a:lnSpc>
+                <a:spcPts val="1250"/>
+              </a:lnSpc>
+              <a:spcAft>
+                <a:spcPts val="400"/>
+              </a:spcAft>
+              <a:buSzPct val="100000"/>
+              <a:buChar char="•"/>
+            </a:pPr>
+            <a:r>
+              <a:rPr lang="en-US" sz="1000">
+                <a:solidFill>
+                  <a:srgbClr val="3A4453"/>
+                </a:solidFill>
+              </a:rPr>
+              <a:t>Each day of improvement is equivalent to approximately $17.7k in receivables at the current sales rate.</a:t>
+            </a:r>
+            <a:endParaRPr lang="en-US" sz="1000"/>
+          </a:p>
+          <a:p>
+            <a:pPr marL="342900" indent="-342900">
+              <a:lnSpc>
+                <a:spcPts val="1250"/>
+              </a:lnSpc>
+              <a:spcAft>
+                <a:spcPts val="400"/>
+              </a:spcAft>
+              <a:buSzPct val="100000"/>
+              <a:buChar char="•"/>
+            </a:pPr>
+            <a:r>
+              <a:rPr lang="en-US" sz="1000">
+                <a:solidFill>
+                  <a:srgbClr val="3A4453"/>
+                </a:solidFill>
+              </a:rPr>
+              <a:t>Collections should remain a short-term cash-flow priority, with focus on larger outstanding balances.</a:t>
+            </a:r>
+            <a:endParaRPr lang="en-US" sz="1000"/>
+          </a:p>
+        </p:txBody>
+      </p:sp>
+    </p:spTree>
+  </p:cSld>
+  <p:clrMapOvr>
+    <a:masterClrMapping/>
+  </p:clrMapOvr>
+</p:sld>
+</file>
+
+<file path=ppt/slides/slide31.xml><?xml version="1.0" encoding="utf-8"?>
+<p:sld xmlns:a="http://schemas.openxmlformats.org/drawingml/2006/main" xmlns:r="http://schemas.openxmlformats.org/officeDocument/2006/relationships" xmlns:p="http://schemas.openxmlformats.org/presentationml/2006/main">
+  <p:cSld name="Slide 23">
+    <p:spTree>
+      <p:nvGrpSpPr>
+        <p:cNvPr id="1" name=""/>
+        <p:cNvGrpSpPr/>
+        <p:nvPr/>
+      </p:nvGrpSpPr>
+      <p:grpSpPr>
+        <a:xfrm>
+          <a:off x="0" y="0"/>
+          <a:ext cx="0" cy="0"/>
+          <a:chOff x="0" y="0"/>
+          <a:chExt cx="0" cy="0"/>
+        </a:xfrm>
+      </p:grpSpPr>
+      <p:pic>
+        <p:nvPicPr>
+          <p:cNvPr id="27" name="snip dso_who" descr="image.png"/>
+          <p:cNvPicPr>
+            <a:picLocks noChangeAspect="1"/>
+          </p:cNvPicPr>
+          <p:nvPr/>
+        </p:nvPicPr>
+        <p:blipFill>
+          <a:blip r:embed="rId3"/>
+          <a:stretch>
+            <a:fillRect/>
+          </a:stretch>
+        </p:blipFill>
+        <p:spPr>
+          <a:xfrm>
+            <a:off x="3107424" y="1005840"/>
+            <a:ext cx="2929151" cy="1964997"/>
+          </a:xfrm>
+          <a:prstGeom prst="rect">
+            <a:avLst/>
+          </a:prstGeom>
+        </p:spPr>
+      </p:pic>
+      <p:sp>
+        <p:nvSpPr>
+          <p:cNvPr id="2" name="Text 0"/>
+          <p:cNvSpPr txBox="1"/>
+          <p:nvPr/>
+        </p:nvSpPr>
+        <p:spPr>
+          <a:xfrm>
+            <a:off x="502920" y="365760"/>
+            <a:ext cx="6400800" cy="274320"/>
+          </a:xfrm>
+          <a:prstGeom prst="rect">
+            <a:avLst/>
+          </a:prstGeom>
+          <a:noFill/>
+          <a:ln/>
+        </p:spPr>
+        <p:txBody>
+          <a:bodyPr wrap="square" lIns="0" tIns="0" rIns="0" bIns="0" rtlCol="0" anchor="ctr"/>
+          <a:lstStyle/>
+          <a:p>
+            <a:pPr marL="0" indent="0">
+              <a:buNone/>
+            </a:pPr>
+            <a:r>
+              <a:rPr lang="en-US" sz="950" b="1" kern="0" spc="220">
+                <a:solidFill>
+                  <a:srgbClr val="122B82"/>
+                </a:solidFill>
+              </a:rPr>
+              <a:t>CUSTOMERS AND CASH</a:t>
+            </a:r>
+            <a:endParaRPr lang="en-US" sz="950"/>
+          </a:p>
+        </p:txBody>
+      </p:sp>
+      <p:sp>
+        <p:nvSpPr>
+          <p:cNvPr id="3" name="Text 1"/>
+          <p:cNvSpPr txBox="1"/>
+          <p:nvPr/>
+        </p:nvSpPr>
+        <p:spPr>
+          <a:xfrm>
+            <a:off x="502920" y="640080"/>
+            <a:ext cx="7315200" cy="365760"/>
+          </a:xfrm>
+          <a:prstGeom prst="rect">
+            <a:avLst/>
+          </a:prstGeom>
+          <a:noFill/>
+          <a:ln/>
+        </p:spPr>
+        <p:txBody>
+          <a:bodyPr wrap="square" lIns="0" tIns="0" rIns="0" bIns="0" rtlCol="0" anchor="ctr"/>
+          <a:lstStyle/>
+          <a:p>
+            <a:pPr marL="0" indent="0" algn="ctr">
+              <a:buNone/>
+            </a:pPr>
+            <a:r>
+              <a:rPr lang="en-US" sz="2200" b="1">
+                <a:solidFill>
+                  <a:srgbClr val="242C39"/>
+                </a:solidFill>
+              </a:rPr>
+              <a:t>Who owes us the most</a:t>
+            </a:r>
+            <a:endParaRPr lang="en-US" sz="2700"/>
+          </a:p>
+        </p:txBody>
+      </p:sp>
+      <p:sp>
+        <p:nvSpPr>
+          <p:cNvPr id="6" name="commentary panel"/>
+          <p:cNvSpPr/>
+          <p:nvPr/>
+        </p:nvSpPr>
+        <p:spPr>
+          <a:xfrm>
+            <a:off x="502920" y="3062278"/>
+            <a:ext cx="8138160" cy="1564585"/>
+          </a:xfrm>
+          <a:prstGeom prst="rect">
+            <a:avLst/>
+          </a:prstGeom>
+          <a:solidFill>
+            <a:srgbClr val="E8F9F8"/>
+          </a:solidFill>
+          <a:ln/>
+        </p:spPr>
+        <p:txBody>
+          <a:bodyPr/>
+          <a:lstStyle/>
+          <a:p>
+            <a:endParaRPr lang="en-AU"/>
+          </a:p>
+        </p:txBody>
+      </p:sp>
+      <p:sp>
+        <p:nvSpPr>
+          <p:cNvPr id="7" name="Text 4"/>
+          <p:cNvSpPr txBox="1"/>
+          <p:nvPr/>
+        </p:nvSpPr>
+        <p:spPr>
+          <a:xfrm>
+            <a:off x="685800" y="3135430"/>
+            <a:ext cx="2743200" cy="228600"/>
+          </a:xfrm>
+          <a:prstGeom prst="rect">
+            <a:avLst/>
+          </a:prstGeom>
+          <a:noFill/>
+          <a:ln/>
+        </p:spPr>
+        <p:txBody>
+          <a:bodyPr wrap="square" lIns="0" tIns="0" rIns="0" bIns="0" rtlCol="0" anchor="ctr"/>
+          <a:lstStyle/>
+          <a:p>
+            <a:pPr marL="0" indent="0">
+              <a:buNone/>
+            </a:pPr>
+            <a:r>
+              <a:rPr lang="en-US" sz="900" b="1" kern="0" spc="180">
+                <a:solidFill>
+                  <a:srgbClr val="005358"/>
+                </a:solidFill>
+              </a:rPr>
+              <a:t>COMMENTARY</a:t>
+            </a:r>
+            <a:endParaRPr lang="en-US" sz="900"/>
+          </a:p>
+        </p:txBody>
+      </p:sp>
+      <p:sp>
+        <p:nvSpPr>
+          <p:cNvPr id="8" name="Text 5"/>
+          <p:cNvSpPr txBox="1"/>
+          <p:nvPr/>
+        </p:nvSpPr>
+        <p:spPr>
+          <a:xfrm>
+            <a:off x="685800" y="3309166"/>
+            <a:ext cx="3703320" cy="1290265"/>
+          </a:xfrm>
+          <a:prstGeom prst="rect">
+            <a:avLst/>
+          </a:prstGeom>
+          <a:noFill/>
+          <a:ln/>
+        </p:spPr>
+        <p:txBody>
+          <a:bodyPr wrap="square" lIns="0" tIns="0" rIns="0" bIns="0" rtlCol="0" anchor="t">
+            <a:normAutofit fontScale="77500" lnSpcReduction="20000"/>
+          </a:bodyPr>
+          <a:lstStyle/>
+          <a:p>
+            <a:pPr marL="342900" indent="-342900">
+              <a:lnSpc>
+                <a:spcPts val="1200"/>
+              </a:lnSpc>
+              <a:spcAft>
+                <a:spcPts val="400"/>
+              </a:spcAft>
+              <a:buSzPct val="100000"/>
+              <a:buChar char="•"/>
+            </a:pPr>
+            <a:r>
+              <a:rPr lang="en-US" sz="1000">
+                <a:solidFill>
+                  <a:srgbClr val="3A4453"/>
+                </a:solidFill>
+              </a:rPr>
+              <a:t>Aware Super has an outstanding balance of $277k, representing 33% of total receivables.</a:t>
+            </a:r>
+            <a:endParaRPr lang="en-US" sz="950"/>
+          </a:p>
+          <a:p>
+            <a:pPr marL="342900" indent="-342900">
+              <a:lnSpc>
+                <a:spcPts val="1200"/>
+              </a:lnSpc>
+              <a:spcAft>
+                <a:spcPts val="400"/>
+              </a:spcAft>
+              <a:buSzPct val="100000"/>
+              <a:buChar char="•"/>
+            </a:pPr>
+            <a:r>
+              <a:rPr lang="en-US" sz="1000">
+                <a:solidFill>
+                  <a:srgbClr val="3A4453"/>
+                </a:solidFill>
+              </a:rPr>
+              <a:t>Together with Deloitte Services P/L for Deloitte Services Trust at $132k, the two account for approximately 49% of receivables.</a:t>
+            </a:r>
+            <a:endParaRPr lang="en-US" sz="950"/>
+          </a:p>
+        </p:txBody>
+      </p:sp>
+      <p:sp>
+        <p:nvSpPr>
+          <p:cNvPr id="25" name="Slide Number Placeholder 0"/>
+          <p:cNvSpPr>
+            <a:spLocks noGrp="1"/>
+          </p:cNvSpPr>
+          <p:nvPr>
+            <p:ph type="sldNum" sz="quarter" idx="4294967295"/>
+          </p:nvPr>
+        </p:nvSpPr>
+        <p:spPr>
+          <a:xfrm>
+            <a:off x="8092440" y="4736592"/>
+            <a:ext cx="548640" cy="228600"/>
+          </a:xfrm>
+          <a:prstGeom prst="rect">
+            <a:avLst/>
+          </a:prstGeom>
+          <a:extLst>
+            <a:ext uri="{C572A759-6A51-4108-AA02-DFA0A04FC94B}">
+              <ma14:wrappingTextBoxFlag xmlns="" xmlns:ma14="http://schemas.microsoft.com/office/mac/drawingml/2011/main" val="0"/>
+            </a:ext>
+          </a:extLst>
+        </p:spPr>
+        <p:txBody>
+          <a:bodyPr/>
+          <a:lstStyle>
+            <a:lvl1pPr>
+              <a:defRPr sz="800">
+                <a:solidFill>
+                  <a:srgbClr val="6B7585"/>
+                </a:solidFill>
+              </a:defRPr>
+            </a:lvl1pPr>
+          </a:lstStyle>
+          <a:p>
+            <a:pPr algn="r"/>
+            <a:fld id="{F7021451-1387-4CA6-816F-3879F97B5CBC}" type="slidenum">
+              <a:rPr lang="en-US" b="0"/>
+              <a:t>28</a:t>
+            </a:fld>
+            <a:endParaRPr lang="en-US"/>
+          </a:p>
+        </p:txBody>
+      </p:sp>
+      <p:pic>
+        <p:nvPicPr>
+          <p:cNvPr id="26" name="cts logo" descr="cts-logo.png"/>
+          <p:cNvPicPr>
+            <a:picLocks noChangeAspect="1"/>
+          </p:cNvPicPr>
+          <p:nvPr/>
+        </p:nvPicPr>
+        <p:blipFill>
+          <a:blip r:embed="rId4"/>
+          <a:stretch>
+            <a:fillRect/>
+          </a:stretch>
+        </p:blipFill>
+        <p:spPr>
+          <a:xfrm>
+            <a:off x="7680959" y="182880"/>
+            <a:ext cx="960120" cy="539696"/>
+          </a:xfrm>
+          <a:prstGeom prst="rect">
+            <a:avLst/>
+          </a:prstGeom>
+        </p:spPr>
+      </p:pic>
+      <p:sp>
+        <p:nvSpPr>
+          <p:cNvPr id="8" name="Text 5b"/>
+          <p:cNvSpPr txBox="1"/>
+          <p:nvPr/>
+        </p:nvSpPr>
+        <p:spPr>
+          <a:xfrm>
+            <a:off x="4663440" y="3309166"/>
+            <a:ext cx="3703320" cy="1290265"/>
+          </a:xfrm>
+          <a:prstGeom prst="rect">
+            <a:avLst/>
+          </a:prstGeom>
+          <a:noFill/>
+          <a:ln/>
+        </p:spPr>
+        <p:txBody>
+          <a:bodyPr wrap="square" lIns="0" tIns="0" rIns="0" bIns="0" rtlCol="0" anchor="t">
+            <a:normAutofit fontScale="77500" lnSpcReduction="20000"/>
+          </a:bodyPr>
+          <a:lstStyle/>
+          <a:p>
+            <a:pPr marL="342900" indent="-342900">
+              <a:lnSpc>
+                <a:spcPts val="1200"/>
+              </a:lnSpc>
+              <a:spcAft>
+                <a:spcPts val="400"/>
+              </a:spcAft>
+              <a:buSzPct val="100000"/>
+              <a:buChar char="•"/>
+            </a:pPr>
+            <a:r>
+              <a:rPr lang="en-US" sz="1000">
+                <a:solidFill>
+                  <a:srgbClr val="3A4453"/>
+                </a:solidFill>
+              </a:rPr>
+              <a:t>Overdue amounts total approximately $245k, or 29% of the debtor balance.</a:t>
+            </a:r>
+            <a:endParaRPr lang="en-US" sz="950"/>
+          </a:p>
+          <a:p>
+            <a:pPr marL="342900" indent="-342900">
+              <a:lnSpc>
+                <a:spcPts val="1200"/>
+              </a:lnSpc>
+              <a:spcAft>
+                <a:spcPts val="400"/>
+              </a:spcAft>
+              <a:buSzPct val="100000"/>
+              <a:buChar char="•"/>
+            </a:pPr>
+            <a:r>
+              <a:rPr lang="en-US" sz="1000">
+                <a:solidFill>
+                  <a:srgbClr val="3A4453"/>
+                </a:solidFill>
+              </a:rPr>
+              <a:t>Collections efforts should prioritise these larger accounts while maintaining follow-up on other overdue invoices.</a:t>
+            </a:r>
+            <a:endParaRPr lang="en-US" sz="950"/>
+          </a:p>
+          <a:p>
+            <a:pPr marL="342900" indent="-342900">
+              <a:lnSpc>
+                <a:spcPts val="1200"/>
+              </a:lnSpc>
+              <a:spcAft>
+                <a:spcPts val="400"/>
+              </a:spcAft>
+              <a:buSzPct val="100000"/>
+              <a:buChar char="•"/>
+            </a:pPr>
+            <a:r>
+              <a:rPr lang="en-US" sz="1000">
+                <a:solidFill>
+                  <a:srgbClr val="3A4453"/>
+                </a:solidFill>
+              </a:rPr>
+              <a:t>A targeted collections plan with clear owners and follow-up dates is likely to be more effective than a broad reminder process alone.</a:t>
+            </a:r>
+            <a:endParaRPr lang="en-US" sz="950"/>
+          </a:p>
+        </p:txBody>
+      </p:sp>
+    </p:spTree>
+  </p:cSld>
+  <p:clrMapOvr>
+    <a:masterClrMapping/>
+  </p:clrMapOvr>
+</p:sld>
+</file>
+
+<file path=ppt/slides/slide32.xml><?xml version="1.0" encoding="utf-8"?>
+<p:sld xmlns:a="http://schemas.openxmlformats.org/drawingml/2006/main" xmlns:r="http://schemas.openxmlformats.org/officeDocument/2006/relationships" xmlns:p="http://schemas.openxmlformats.org/presentationml/2006/main">
+  <p:cSld name="Slide 24">
+    <p:spTree>
+      <p:nvGrpSpPr>
+        <p:cNvPr id="1" name=""/>
+        <p:cNvGrpSpPr/>
+        <p:nvPr/>
+      </p:nvGrpSpPr>
+      <p:grpSpPr>
+        <a:xfrm>
+          <a:off x="0" y="0"/>
+          <a:ext cx="0" cy="0"/>
+          <a:chOff x="0" y="0"/>
+          <a:chExt cx="0" cy="0"/>
+        </a:xfrm>
+      </p:grpSpPr>
+      <p:sp>
+        <p:nvSpPr>
+          <p:cNvPr id="2" name="dot 2"/>
+          <p:cNvSpPr/>
+          <p:nvPr/>
+        </p:nvSpPr>
+        <p:spPr>
+          <a:xfrm>
+            <a:off x="7178040" y="2057400"/>
+            <a:ext cx="2240280" cy="2240280"/>
+          </a:xfrm>
+          <a:prstGeom prst="ellipse">
+            <a:avLst/>
+          </a:prstGeom>
+          <a:solidFill>
+            <a:srgbClr val="F33844">
+              <a:alpha val="55000"/>
+            </a:srgbClr>
+          </a:solidFill>
+          <a:ln/>
+        </p:spPr>
+        <p:txBody>
+          <a:bodyPr/>
+          <a:lstStyle/>
+          <a:p>
+            <a:endParaRPr lang="en-AU"/>
+          </a:p>
+        </p:txBody>
+      </p:sp>
+      <p:sp>
+        <p:nvSpPr>
+          <p:cNvPr id="8" name="dot 1"/>
+          <p:cNvSpPr/>
+          <p:nvPr/>
+        </p:nvSpPr>
+        <p:spPr>
+          <a:xfrm>
+            <a:off x="7909560" y="1188720"/>
+            <a:ext cx="1783080" cy="1783080"/>
+          </a:xfrm>
+          <a:prstGeom prst="ellipse">
+            <a:avLst/>
+          </a:prstGeom>
+          <a:solidFill>
+            <a:srgbClr val="6D71FF">
+              <a:alpha val="55000"/>
+            </a:srgbClr>
+          </a:solidFill>
+          <a:ln/>
+        </p:spPr>
+        <p:txBody>
+          <a:bodyPr/>
+          <a:lstStyle/>
+          <a:p>
+            <a:endParaRPr lang="en-AU"/>
+          </a:p>
+        </p:txBody>
+      </p:sp>
+      <p:sp>
+        <p:nvSpPr>
+          <p:cNvPr id="9" name="dot 0"/>
+          <p:cNvSpPr/>
+          <p:nvPr/>
+        </p:nvSpPr>
+        <p:spPr>
+          <a:xfrm>
+            <a:off x="6949440" y="274320"/>
+            <a:ext cx="2148840" cy="2148840"/>
+          </a:xfrm>
+          <a:prstGeom prst="ellipse">
+            <a:avLst/>
+          </a:prstGeom>
+          <a:solidFill>
+            <a:srgbClr val="3FD0C9">
+              <a:alpha val="55000"/>
+            </a:srgbClr>
+          </a:solidFill>
+          <a:ln/>
+        </p:spPr>
+        <p:txBody>
+          <a:bodyPr/>
+          <a:lstStyle/>
+          <a:p>
+            <a:endParaRPr lang="en-AU"/>
+          </a:p>
+        </p:txBody>
+      </p:sp>
+      <p:sp>
+        <p:nvSpPr>
+          <p:cNvPr id="3" name="Shape 1"/>
+          <p:cNvSpPr/>
+          <p:nvPr/>
+        </p:nvSpPr>
+        <p:spPr>
+          <a:xfrm>
+            <a:off x="502920" y="1874520"/>
+            <a:ext cx="868680" cy="868680"/>
+          </a:xfrm>
+          <a:prstGeom prst="rect">
+            <a:avLst/>
+          </a:prstGeom>
+          <a:solidFill>
+            <a:srgbClr val="3FD0C9"/>
+          </a:solidFill>
+          <a:ln/>
+        </p:spPr>
+        <p:txBody>
+          <a:bodyPr/>
+          <a:lstStyle/>
+          <a:p>
+            <a:endParaRPr lang="en-AU"/>
+          </a:p>
+        </p:txBody>
+      </p:sp>
+      <p:sp>
+        <p:nvSpPr>
+          <p:cNvPr id="4" name="Text 2"/>
+          <p:cNvSpPr txBox="1"/>
+          <p:nvPr/>
+        </p:nvSpPr>
+        <p:spPr>
+          <a:xfrm>
+            <a:off x="502920" y="1874520"/>
+            <a:ext cx="868680" cy="868680"/>
+          </a:xfrm>
+          <a:prstGeom prst="rect">
+            <a:avLst/>
+          </a:prstGeom>
+          <a:noFill/>
+          <a:ln/>
+        </p:spPr>
+        <p:txBody>
+          <a:bodyPr wrap="square" lIns="0" tIns="0" rIns="0" bIns="0" rtlCol="0" anchor="ctr"/>
+          <a:lstStyle/>
+          <a:p>
+            <a:pPr marL="0" indent="0" algn="ctr">
+              <a:buNone/>
+            </a:pPr>
+            <a:r>
+              <a:rPr lang="en-US" sz="2200" b="1">
+                <a:solidFill>
+                  <a:srgbClr val="242C39"/>
+                </a:solidFill>
+              </a:rPr>
+              <a:t>04</a:t>
+            </a:r>
+            <a:endParaRPr lang="en-US" sz="2600"/>
+          </a:p>
+        </p:txBody>
+      </p:sp>
+      <p:sp>
+        <p:nvSpPr>
+          <p:cNvPr id="5" name="Text 3"/>
+          <p:cNvSpPr txBox="1"/>
+          <p:nvPr/>
+        </p:nvSpPr>
+        <p:spPr>
+          <a:xfrm>
+            <a:off x="502920" y="411480"/>
+            <a:ext cx="3657600" cy="274320"/>
+          </a:xfrm>
+          <a:prstGeom prst="rect">
+            <a:avLst/>
+          </a:prstGeom>
+          <a:noFill/>
+          <a:ln/>
+        </p:spPr>
+        <p:txBody>
+          <a:bodyPr wrap="square" lIns="0" tIns="0" rIns="0" bIns="0" rtlCol="0" anchor="ctr"/>
+          <a:lstStyle/>
+          <a:p>
+            <a:pPr marL="0" indent="0">
+              <a:buNone/>
+            </a:pPr>
+            <a:r>
+              <a:rPr lang="en-US" sz="950" b="1" kern="0" spc="220">
+                <a:solidFill>
+                  <a:srgbClr val="3FD0C9"/>
+                </a:solidFill>
+              </a:rPr>
+              <a:t>SECTION</a:t>
+            </a:r>
+            <a:endParaRPr lang="en-US" sz="950"/>
+          </a:p>
+        </p:txBody>
+      </p:sp>
+      <p:sp>
+        <p:nvSpPr>
+          <p:cNvPr id="6" name="Text 4"/>
+          <p:cNvSpPr txBox="1"/>
+          <p:nvPr/>
+        </p:nvSpPr>
+        <p:spPr>
+          <a:xfrm>
+            <a:off x="1600200" y="1874520"/>
+            <a:ext cx="5943600" cy="502920"/>
+          </a:xfrm>
+          <a:prstGeom prst="rect">
+            <a:avLst/>
+          </a:prstGeom>
+          <a:noFill/>
+          <a:ln/>
+        </p:spPr>
+        <p:txBody>
+          <a:bodyPr wrap="square" lIns="0" tIns="0" rIns="0" bIns="0" rtlCol="0" anchor="ctr"/>
+          <a:lstStyle/>
+          <a:p>
+            <a:pPr marL="0" indent="0">
+              <a:buNone/>
+            </a:pPr>
+            <a:r>
+              <a:rPr lang="en-US" sz="2300" b="1">
+                <a:solidFill>
+                  <a:srgbClr val="FFFFFF"/>
+                </a:solidFill>
+              </a:rPr>
+              <a:t>People and utilisation</a:t>
+            </a:r>
+            <a:endParaRPr lang="en-US" sz="2800"/>
+          </a:p>
+        </p:txBody>
+      </p:sp>
+      <p:sp>
+        <p:nvSpPr>
+          <p:cNvPr id="7" name="Text 5"/>
+          <p:cNvSpPr txBox="1"/>
+          <p:nvPr/>
+        </p:nvSpPr>
+        <p:spPr>
+          <a:xfrm>
+            <a:off x="1600200" y="2395728"/>
+            <a:ext cx="5943600" cy="347472"/>
+          </a:xfrm>
+          <a:prstGeom prst="rect">
+            <a:avLst/>
+          </a:prstGeom>
+          <a:noFill/>
+          <a:ln/>
+        </p:spPr>
+        <p:txBody>
+          <a:bodyPr wrap="square" lIns="0" tIns="0" rIns="0" bIns="0" rtlCol="0" anchor="ctr"/>
+          <a:lstStyle/>
+          <a:p>
+            <a:pPr marL="0" indent="0">
+              <a:buNone/>
+            </a:pPr>
+            <a:r>
+              <a:rPr lang="en-US" sz="1200">
+                <a:solidFill>
+                  <a:srgbClr val="C9CED6"/>
+                </a:solidFill>
+              </a:rPr>
+              <a:t>Chargeable hours and the profit they produce</a:t>
+            </a:r>
+            <a:endParaRPr lang="en-US" sz="1200"/>
+          </a:p>
+        </p:txBody>
+      </p:sp>
+    </p:spTree>
+  </p:cSld>
+  <p:clrMapOvr>
+    <a:masterClrMapping/>
+  </p:clrMapOvr>
+</p:sld>
+</file>
+
+<file path=ppt/slides/slide33.xml><?xml version="1.0" encoding="utf-8"?>
+<p:sld xmlns:a="http://schemas.openxmlformats.org/drawingml/2006/main" xmlns:r="http://schemas.openxmlformats.org/officeDocument/2006/relationships" xmlns:p="http://schemas.openxmlformats.org/presentationml/2006/main">
   <p:cSld name="Slide 25">
     <p:spTree>
       <p:nvGrpSpPr>
@@ -17147,7 +18542,7 @@
 </p:sld>
 </file>
 
-<file path=ppt/slides/slide31.xml><?xml version="1.0" encoding="utf-8"?>
+<file path=ppt/slides/slide34.xml><?xml version="1.0" encoding="utf-8"?>
 <p:sld xmlns:a="http://schemas.openxmlformats.org/drawingml/2006/main" xmlns:r="http://schemas.openxmlformats.org/officeDocument/2006/relationships" xmlns:p="http://schemas.openxmlformats.org/presentationml/2006/main">
   <p:cSld name="Slide 26">
     <p:spTree>
@@ -17553,7 +18948,7 @@
 </p:sld>
 </file>
 
-<file path=ppt/slides/slide32.xml><?xml version="1.0" encoding="utf-8"?>
+<file path=ppt/slides/slide35.xml><?xml version="1.0" encoding="utf-8"?>
 <p:sld xmlns:a="http://schemas.openxmlformats.org/drawingml/2006/main" xmlns:r="http://schemas.openxmlformats.org/officeDocument/2006/relationships" xmlns:p="http://schemas.openxmlformats.org/presentationml/2006/main">
   <p:cSld name="Slide 27">
     <p:spTree>
@@ -17587,7 +18982,7 @@
         <p:spPr>
           <a:xfrm>
             <a:off x="587282" y="1005840"/>
-            <a:ext cx="7969435" cy="1964998"/>
+            <a:ext cx="7969434" cy="1964997"/>
           </a:xfrm>
           <a:prstGeom prst="rect">
             <a:avLst/>
@@ -17959,7 +19354,7 @@
 </p:sld>
 </file>
 
-<file path=ppt/slides/slide33.xml><?xml version="1.0" encoding="utf-8"?>
+<file path=ppt/slides/slide36.xml><?xml version="1.0" encoding="utf-8"?>
 <p:sld xmlns:a="http://schemas.openxmlformats.org/drawingml/2006/main" xmlns:r="http://schemas.openxmlformats.org/officeDocument/2006/relationships" xmlns:p="http://schemas.openxmlformats.org/presentationml/2006/main">
   <p:cSld name="Slide 28">
     <p:spTree>
@@ -18242,7 +19637,7 @@
 </p:sld>
 </file>
 
-<file path=ppt/slides/slide34.xml><?xml version="1.0" encoding="utf-8"?>
+<file path=ppt/slides/slide37.xml><?xml version="1.0" encoding="utf-8"?>
 <p:sld xmlns:a="http://schemas.openxmlformats.org/drawingml/2006/main" xmlns:r="http://schemas.openxmlformats.org/officeDocument/2006/relationships" xmlns:p="http://schemas.openxmlformats.org/presentationml/2006/main">
   <p:cSld name="Slide 29">
     <p:spTree>
@@ -18648,7 +20043,7 @@
 </p:sld>
 </file>
 
-<file path=ppt/slides/slide35.xml><?xml version="1.0" encoding="utf-8"?>
+<file path=ppt/slides/slide38.xml><?xml version="1.0" encoding="utf-8"?>
 <p:sld xmlns:a="http://schemas.openxmlformats.org/drawingml/2006/main" xmlns:r="http://schemas.openxmlformats.org/officeDocument/2006/relationships" xmlns:p="http://schemas.openxmlformats.org/presentationml/2006/main">
   <p:cSld name="Slide 30">
     <p:spTree>
@@ -20794,7 +22189,7 @@
 </p:sld>
 </file>
 
-<file path=ppt/slides/slide36.xml><?xml version="1.0" encoding="utf-8"?>
+<file path=ppt/slides/slide39.xml><?xml version="1.0" encoding="utf-8"?>
 <p:sld xmlns:a="http://schemas.openxmlformats.org/drawingml/2006/main" xmlns:r="http://schemas.openxmlformats.org/officeDocument/2006/relationships" xmlns:p="http://schemas.openxmlformats.org/presentationml/2006/main">
   <p:cSld>
     <p:bg>
@@ -21170,262 +22565,6 @@
 </p:sld>
 </file>
 
-<file path=ppt/slides/slide37.xml><?xml version="1.0" encoding="utf-8"?>
-<p:sld xmlns:a="http://schemas.openxmlformats.org/drawingml/2006/main" xmlns:r="http://schemas.openxmlformats.org/officeDocument/2006/relationships" xmlns:p="http://schemas.openxmlformats.org/presentationml/2006/main">
-  <p:cSld name="Slide 31">
-    <p:spTree>
-      <p:nvGrpSpPr>
-        <p:cNvPr id="1" name=""/>
-        <p:cNvGrpSpPr/>
-        <p:nvPr/>
-      </p:nvGrpSpPr>
-      <p:grpSpPr>
-        <a:xfrm>
-          <a:off x="0" y="0"/>
-          <a:ext cx="0" cy="0"/>
-          <a:chOff x="0" y="0"/>
-          <a:chExt cx="0" cy="0"/>
-        </a:xfrm>
-      </p:grpSpPr>
-      <p:sp>
-        <p:nvSpPr>
-          <p:cNvPr id="2" name="dot 2"/>
-          <p:cNvSpPr/>
-          <p:nvPr/>
-        </p:nvSpPr>
-        <p:spPr>
-          <a:xfrm>
-            <a:off x="5074920" y="2148840"/>
-            <a:ext cx="2240280" cy="2240280"/>
-          </a:xfrm>
-          <a:prstGeom prst="ellipse">
-            <a:avLst/>
-          </a:prstGeom>
-          <a:solidFill>
-            <a:srgbClr val="F33844">
-              <a:alpha val="82000"/>
-            </a:srgbClr>
-          </a:solidFill>
-          <a:ln/>
-        </p:spPr>
-        <p:txBody>
-          <a:bodyPr/>
-          <a:lstStyle/>
-          <a:p>
-            <a:endParaRPr lang="en-AU"/>
-          </a:p>
-        </p:txBody>
-      </p:sp>
-      <p:sp>
-        <p:nvSpPr>
-          <p:cNvPr id="3" name="dot 1"/>
-          <p:cNvSpPr/>
-          <p:nvPr/>
-        </p:nvSpPr>
-        <p:spPr>
-          <a:xfrm>
-            <a:off x="5806440" y="1280160"/>
-            <a:ext cx="1783080" cy="1783080"/>
-          </a:xfrm>
-          <a:prstGeom prst="ellipse">
-            <a:avLst/>
-          </a:prstGeom>
-          <a:solidFill>
-            <a:srgbClr val="6D71FF">
-              <a:alpha val="82000"/>
-            </a:srgbClr>
-          </a:solidFill>
-          <a:ln/>
-        </p:spPr>
-        <p:txBody>
-          <a:bodyPr/>
-          <a:lstStyle/>
-          <a:p>
-            <a:endParaRPr lang="en-AU"/>
-          </a:p>
-        </p:txBody>
-      </p:sp>
-      <p:sp>
-        <p:nvSpPr>
-          <p:cNvPr id="4" name="dot 0"/>
-          <p:cNvSpPr/>
-          <p:nvPr/>
-        </p:nvSpPr>
-        <p:spPr>
-          <a:xfrm>
-            <a:off x="4846320" y="365760"/>
-            <a:ext cx="2148840" cy="2148840"/>
-          </a:xfrm>
-          <a:prstGeom prst="ellipse">
-            <a:avLst/>
-          </a:prstGeom>
-          <a:solidFill>
-            <a:srgbClr val="3FD0C9">
-              <a:alpha val="82000"/>
-            </a:srgbClr>
-          </a:solidFill>
-          <a:ln/>
-        </p:spPr>
-        <p:txBody>
-          <a:bodyPr/>
-          <a:lstStyle/>
-          <a:p>
-            <a:endParaRPr lang="en-AU"/>
-          </a:p>
-        </p:txBody>
-      </p:sp>
-      <p:sp>
-        <p:nvSpPr>
-          <p:cNvPr id="5" name="Text 3"/>
-          <p:cNvSpPr txBox="1"/>
-          <p:nvPr/>
-        </p:nvSpPr>
-        <p:spPr>
-          <a:xfrm>
-            <a:off x="502920" y="411480"/>
-            <a:ext cx="1828800" cy="640080"/>
-          </a:xfrm>
-          <a:prstGeom prst="rect">
-            <a:avLst/>
-          </a:prstGeom>
-          <a:noFill/>
-          <a:ln/>
-        </p:spPr>
-        <p:txBody>
-          <a:bodyPr wrap="square" lIns="0" tIns="0" rIns="0" bIns="0" rtlCol="0" anchor="ctr"/>
-          <a:lstStyle/>
-          <a:p>
-            <a:pPr marL="0" indent="0">
-              <a:buNone/>
-            </a:pPr>
-            <a:r>
-              <a:rPr lang="en-US" sz="3400" b="1">
-                <a:solidFill>
-                  <a:srgbClr val="FFFFFF"/>
-                </a:solidFill>
-              </a:rPr>
-              <a:t>cts</a:t>
-            </a:r>
-            <a:endParaRPr lang="en-US" sz="3400"/>
-          </a:p>
-        </p:txBody>
-      </p:sp>
-      <p:sp>
-        <p:nvSpPr>
-          <p:cNvPr id="6" name="Text 4"/>
-          <p:cNvSpPr txBox="1"/>
-          <p:nvPr/>
-        </p:nvSpPr>
-        <p:spPr>
-          <a:xfrm>
-            <a:off x="548640" y="896112"/>
-            <a:ext cx="1828800" cy="228600"/>
-          </a:xfrm>
-          <a:prstGeom prst="rect">
-            <a:avLst/>
-          </a:prstGeom>
-          <a:noFill/>
-          <a:ln/>
-        </p:spPr>
-        <p:txBody>
-          <a:bodyPr wrap="square" lIns="0" tIns="0" rIns="0" bIns="0" rtlCol="0" anchor="ctr"/>
-          <a:lstStyle/>
-          <a:p>
-            <a:pPr marL="0" indent="0">
-              <a:buNone/>
-            </a:pPr>
-            <a:r>
-              <a:rPr lang="en-US" sz="850">
-                <a:solidFill>
-                  <a:srgbClr val="C9CED6"/>
-                </a:solidFill>
-              </a:rPr>
-              <a:t>Seamless AV</a:t>
-            </a:r>
-            <a:endParaRPr lang="en-US" sz="850"/>
-          </a:p>
-        </p:txBody>
-      </p:sp>
-      <p:sp>
-        <p:nvSpPr>
-          <p:cNvPr id="7" name="Text 5"/>
-          <p:cNvSpPr txBox="1"/>
-          <p:nvPr/>
-        </p:nvSpPr>
-        <p:spPr>
-          <a:xfrm>
-            <a:off x="502920" y="2103120"/>
-            <a:ext cx="4572000" cy="731520"/>
-          </a:xfrm>
-          <a:prstGeom prst="rect">
-            <a:avLst/>
-          </a:prstGeom>
-          <a:noFill/>
-          <a:ln/>
-        </p:spPr>
-        <p:txBody>
-          <a:bodyPr wrap="square" lIns="0" tIns="0" rIns="0" bIns="0" rtlCol="0" anchor="ctr"/>
-          <a:lstStyle/>
-          <a:p>
-            <a:pPr marL="0" indent="0">
-              <a:buNone/>
-            </a:pPr>
-            <a:r>
-              <a:rPr lang="en-US" sz="3000" b="1">
-                <a:solidFill>
-                  <a:srgbClr val="FFFFFF"/>
-                </a:solidFill>
-              </a:rPr>
-              <a:t>Thank you</a:t>
-            </a:r>
-            <a:endParaRPr lang="en-US" sz="3800"/>
-          </a:p>
-        </p:txBody>
-      </p:sp>
-      <p:sp>
-        <p:nvSpPr>
-          <p:cNvPr id="8" name="Text 6"/>
-          <p:cNvSpPr txBox="1"/>
-          <p:nvPr/>
-        </p:nvSpPr>
-        <p:spPr>
-          <a:xfrm>
-            <a:off x="502920" y="2834640"/>
-            <a:ext cx="4572000" cy="365760"/>
-          </a:xfrm>
-          <a:prstGeom prst="rect">
-            <a:avLst/>
-          </a:prstGeom>
-          <a:noFill/>
-          <a:ln/>
-        </p:spPr>
-        <p:txBody>
-          <a:bodyPr wrap="square" lIns="0" tIns="0" rIns="0" bIns="0" rtlCol="0" anchor="ctr"/>
-          <a:lstStyle/>
-          <a:p>
-            <a:pPr marL="0" indent="0">
-              <a:buNone/>
-            </a:pPr>
-            <a:r>
-              <a:rPr lang="en-US" sz="1300">
-                <a:solidFill>
-                  <a:srgbClr val="C9CED6"/>
-                </a:solidFill>
-              </a:rPr>
-              <a:t>Questions and discussion</a:t>
-            </a:r>
-            <a:endParaRPr lang="en-US" sz="1300"/>
-          </a:p>
-        </p:txBody>
-      </p:sp>
-    </p:spTree>
-  </p:cSld>
-  <p:clrMapOvr>
-    <a:masterClrMapping/>
-  </p:clrMapOvr>
-</p:sld>
-</file>
-
 <file path=ppt/slides/slide4.xml><?xml version="1.0" encoding="utf-8"?>
 <p:sld xmlns:a="http://schemas.openxmlformats.org/drawingml/2006/main" xmlns:r="http://schemas.openxmlformats.org/officeDocument/2006/relationships" xmlns:p="http://schemas.openxmlformats.org/presentationml/2006/main">
   <p:cSld name="Slide 4">
@@ -21698,6 +22837,262 @@
               <a:t>The P&amp;L for September 2026 and the year to date</a:t>
             </a:r>
             <a:endParaRPr lang="en-US" sz="1200"/>
+          </a:p>
+        </p:txBody>
+      </p:sp>
+    </p:spTree>
+  </p:cSld>
+  <p:clrMapOvr>
+    <a:masterClrMapping/>
+  </p:clrMapOvr>
+</p:sld>
+</file>
+
+<file path=ppt/slides/slide40.xml><?xml version="1.0" encoding="utf-8"?>
+<p:sld xmlns:a="http://schemas.openxmlformats.org/drawingml/2006/main" xmlns:r="http://schemas.openxmlformats.org/officeDocument/2006/relationships" xmlns:p="http://schemas.openxmlformats.org/presentationml/2006/main">
+  <p:cSld name="Slide 31">
+    <p:spTree>
+      <p:nvGrpSpPr>
+        <p:cNvPr id="1" name=""/>
+        <p:cNvGrpSpPr/>
+        <p:nvPr/>
+      </p:nvGrpSpPr>
+      <p:grpSpPr>
+        <a:xfrm>
+          <a:off x="0" y="0"/>
+          <a:ext cx="0" cy="0"/>
+          <a:chOff x="0" y="0"/>
+          <a:chExt cx="0" cy="0"/>
+        </a:xfrm>
+      </p:grpSpPr>
+      <p:sp>
+        <p:nvSpPr>
+          <p:cNvPr id="2" name="dot 2"/>
+          <p:cNvSpPr/>
+          <p:nvPr/>
+        </p:nvSpPr>
+        <p:spPr>
+          <a:xfrm>
+            <a:off x="5074920" y="2148840"/>
+            <a:ext cx="2240280" cy="2240280"/>
+          </a:xfrm>
+          <a:prstGeom prst="ellipse">
+            <a:avLst/>
+          </a:prstGeom>
+          <a:solidFill>
+            <a:srgbClr val="F33844">
+              <a:alpha val="82000"/>
+            </a:srgbClr>
+          </a:solidFill>
+          <a:ln/>
+        </p:spPr>
+        <p:txBody>
+          <a:bodyPr/>
+          <a:lstStyle/>
+          <a:p>
+            <a:endParaRPr lang="en-AU"/>
+          </a:p>
+        </p:txBody>
+      </p:sp>
+      <p:sp>
+        <p:nvSpPr>
+          <p:cNvPr id="3" name="dot 1"/>
+          <p:cNvSpPr/>
+          <p:nvPr/>
+        </p:nvSpPr>
+        <p:spPr>
+          <a:xfrm>
+            <a:off x="5806440" y="1280160"/>
+            <a:ext cx="1783080" cy="1783080"/>
+          </a:xfrm>
+          <a:prstGeom prst="ellipse">
+            <a:avLst/>
+          </a:prstGeom>
+          <a:solidFill>
+            <a:srgbClr val="6D71FF">
+              <a:alpha val="82000"/>
+            </a:srgbClr>
+          </a:solidFill>
+          <a:ln/>
+        </p:spPr>
+        <p:txBody>
+          <a:bodyPr/>
+          <a:lstStyle/>
+          <a:p>
+            <a:endParaRPr lang="en-AU"/>
+          </a:p>
+        </p:txBody>
+      </p:sp>
+      <p:sp>
+        <p:nvSpPr>
+          <p:cNvPr id="4" name="dot 0"/>
+          <p:cNvSpPr/>
+          <p:nvPr/>
+        </p:nvSpPr>
+        <p:spPr>
+          <a:xfrm>
+            <a:off x="4846320" y="365760"/>
+            <a:ext cx="2148840" cy="2148840"/>
+          </a:xfrm>
+          <a:prstGeom prst="ellipse">
+            <a:avLst/>
+          </a:prstGeom>
+          <a:solidFill>
+            <a:srgbClr val="3FD0C9">
+              <a:alpha val="82000"/>
+            </a:srgbClr>
+          </a:solidFill>
+          <a:ln/>
+        </p:spPr>
+        <p:txBody>
+          <a:bodyPr/>
+          <a:lstStyle/>
+          <a:p>
+            <a:endParaRPr lang="en-AU"/>
+          </a:p>
+        </p:txBody>
+      </p:sp>
+      <p:sp>
+        <p:nvSpPr>
+          <p:cNvPr id="5" name="Text 3"/>
+          <p:cNvSpPr txBox="1"/>
+          <p:nvPr/>
+        </p:nvSpPr>
+        <p:spPr>
+          <a:xfrm>
+            <a:off x="502920" y="411480"/>
+            <a:ext cx="1828800" cy="640080"/>
+          </a:xfrm>
+          <a:prstGeom prst="rect">
+            <a:avLst/>
+          </a:prstGeom>
+          <a:noFill/>
+          <a:ln/>
+        </p:spPr>
+        <p:txBody>
+          <a:bodyPr wrap="square" lIns="0" tIns="0" rIns="0" bIns="0" rtlCol="0" anchor="ctr"/>
+          <a:lstStyle/>
+          <a:p>
+            <a:pPr marL="0" indent="0">
+              <a:buNone/>
+            </a:pPr>
+            <a:r>
+              <a:rPr lang="en-US" sz="3400" b="1">
+                <a:solidFill>
+                  <a:srgbClr val="FFFFFF"/>
+                </a:solidFill>
+              </a:rPr>
+              <a:t>cts</a:t>
+            </a:r>
+            <a:endParaRPr lang="en-US" sz="3400"/>
+          </a:p>
+        </p:txBody>
+      </p:sp>
+      <p:sp>
+        <p:nvSpPr>
+          <p:cNvPr id="6" name="Text 4"/>
+          <p:cNvSpPr txBox="1"/>
+          <p:nvPr/>
+        </p:nvSpPr>
+        <p:spPr>
+          <a:xfrm>
+            <a:off x="548640" y="896112"/>
+            <a:ext cx="1828800" cy="228600"/>
+          </a:xfrm>
+          <a:prstGeom prst="rect">
+            <a:avLst/>
+          </a:prstGeom>
+          <a:noFill/>
+          <a:ln/>
+        </p:spPr>
+        <p:txBody>
+          <a:bodyPr wrap="square" lIns="0" tIns="0" rIns="0" bIns="0" rtlCol="0" anchor="ctr"/>
+          <a:lstStyle/>
+          <a:p>
+            <a:pPr marL="0" indent="0">
+              <a:buNone/>
+            </a:pPr>
+            <a:r>
+              <a:rPr lang="en-US" sz="850">
+                <a:solidFill>
+                  <a:srgbClr val="C9CED6"/>
+                </a:solidFill>
+              </a:rPr>
+              <a:t>Seamless AV</a:t>
+            </a:r>
+            <a:endParaRPr lang="en-US" sz="850"/>
+          </a:p>
+        </p:txBody>
+      </p:sp>
+      <p:sp>
+        <p:nvSpPr>
+          <p:cNvPr id="7" name="Text 5"/>
+          <p:cNvSpPr txBox="1"/>
+          <p:nvPr/>
+        </p:nvSpPr>
+        <p:spPr>
+          <a:xfrm>
+            <a:off x="502920" y="2103120"/>
+            <a:ext cx="4572000" cy="731520"/>
+          </a:xfrm>
+          <a:prstGeom prst="rect">
+            <a:avLst/>
+          </a:prstGeom>
+          <a:noFill/>
+          <a:ln/>
+        </p:spPr>
+        <p:txBody>
+          <a:bodyPr wrap="square" lIns="0" tIns="0" rIns="0" bIns="0" rtlCol="0" anchor="ctr"/>
+          <a:lstStyle/>
+          <a:p>
+            <a:pPr marL="0" indent="0">
+              <a:buNone/>
+            </a:pPr>
+            <a:r>
+              <a:rPr lang="en-US" sz="3000" b="1">
+                <a:solidFill>
+                  <a:srgbClr val="FFFFFF"/>
+                </a:solidFill>
+              </a:rPr>
+              <a:t>Thank you</a:t>
+            </a:r>
+            <a:endParaRPr lang="en-US" sz="3800"/>
+          </a:p>
+        </p:txBody>
+      </p:sp>
+      <p:sp>
+        <p:nvSpPr>
+          <p:cNvPr id="8" name="Text 6"/>
+          <p:cNvSpPr txBox="1"/>
+          <p:nvPr/>
+        </p:nvSpPr>
+        <p:spPr>
+          <a:xfrm>
+            <a:off x="502920" y="2834640"/>
+            <a:ext cx="4572000" cy="365760"/>
+          </a:xfrm>
+          <a:prstGeom prst="rect">
+            <a:avLst/>
+          </a:prstGeom>
+          <a:noFill/>
+          <a:ln/>
+        </p:spPr>
+        <p:txBody>
+          <a:bodyPr wrap="square" lIns="0" tIns="0" rIns="0" bIns="0" rtlCol="0" anchor="ctr"/>
+          <a:lstStyle/>
+          <a:p>
+            <a:pPr marL="0" indent="0">
+              <a:buNone/>
+            </a:pPr>
+            <a:r>
+              <a:rPr lang="en-US" sz="1300">
+                <a:solidFill>
+                  <a:srgbClr val="C9CED6"/>
+                </a:solidFill>
+              </a:rPr>
+              <a:t>Questions and discussion</a:t>
+            </a:r>
+            <a:endParaRPr lang="en-US" sz="1300"/>
           </a:p>
         </p:txBody>
       </p:sp>
@@ -22134,7 +23529,7 @@
       </p:grpSpPr>
       <p:pic>
         <p:nvPicPr>
-          <p:cNvPr id="27" name="snip rev_month" descr="rev_month.png"/>
+          <p:cNvPr id="27" name="snip rev_month" descr="image.png"/>
           <p:cNvPicPr>
             <a:picLocks noChangeAspect="1"/>
           </p:cNvPicPr>
@@ -22949,7 +24344,7 @@
       </p:grpSpPr>
       <p:pic>
         <p:nvPicPr>
-          <p:cNvPr id="27" name="snip rev_q1" descr="xero_qtr.png"/>
+          <p:cNvPr id="27" name="snip rev_q1" descr="image.png"/>
           <p:cNvPicPr>
             <a:picLocks noChangeAspect="1"/>
           </p:cNvPicPr>
@@ -23334,7 +24729,7 @@
       </p:grpSpPr>
       <p:pic>
         <p:nvPicPr>
-          <p:cNvPr id="27" name="snip xero_hist" descr="xero_hist.png"/>
+          <p:cNvPr id="27" name="snip xero_hist" descr="image.png"/>
           <p:cNvPicPr>
             <a:picLocks noChangeAspect="1"/>
           </p:cNvPicPr>

--- a/deck/CTS Monthly Business Review - 30092026.pptx
+++ b/deck/CTS Monthly Business Review - 30092026.pptx
@@ -22,6 +22,7 @@
     <p:sldId id="295" r:id="rId49"/>
     <p:sldId id="296" r:id="rId50"/>
     <p:sldId id="297" r:id="rId51"/>
+    <p:sldId id="298" r:id="rId52"/>
     <p:sldId id="262" r:id="rId16"/>
     <p:sldId id="263" r:id="rId17"/>
     <p:sldId id="264" r:id="rId18"/>
@@ -4780,49 +4781,125 @@
           <a:lstStyle/>
           <a:p>
             <a:r>
-              <a:t>Net profit above and below the line, the reporting month and the first quarter across three years, taken from the Xero History tab. Net profit is the pack's own figure and includes other income.</a:t>
+              <a:t>Net profit and net loss for September across three years, taken from the Xero History tab. Net profit is the pack's own figure and includes other income.</a:t>
             </a:r>
           </a:p>
           <a:p/>
           <a:p>
             <a:r>
-              <a:t>The month: September 2026 a loss of $41,464, September 2025 a loss of $52,615, September 2024 a profit of $20,737.</a:t>
+              <a:t>September 2026 a loss of $41,464. September 2025 a loss of $52,615. September 2024 a profit of $20,737.</a:t>
             </a:r>
           </a:p>
           <a:p/>
           <a:p>
             <a:r>
-              <a:t>The quarter: Q1 2026 a loss of $5,808, Q1 2025 a loss of $85,404, Q1 2024 a profit of $34,595.</a:t>
+              <a:t>This September is $11,152 better than the same month last year, and $62,201 worse than the September before that.</a:t>
             </a:r>
           </a:p>
           <a:p/>
           <a:p>
             <a:r>
-              <a:t>Two readings come out of this and they point in opposite directions.</a:t>
+              <a:t>The thing worth drawing out is that the loss is not a revenue failure. September 2026 billed $561,945, which is the highest of the three Septembers, ahead of $356,323 last year and $440,243 the year before. The month earned more than either comparison and still finished below the line.</a:t>
             </a:r>
           </a:p>
           <a:p/>
           <a:p>
             <a:r>
-              <a:t>The first is that the business has been below the line for two years. Five of the six bars on this chart are losses or near enough, and the only two profits are both FY25. Whatever else the numbers say, September and the first quarter have not made money since FY25.</a:t>
+              <a:t>What changed is the cost of earning it. Cost of sales was $374,130 against $216,749 in September 2024 on revenue only $121,701 higher. The gross margin on the month was 33.4%, against 50.8% in September 2024.</a:t>
             </a:r>
           </a:p>
           <a:p/>
           <a:p>
             <a:r>
-              <a:t>The second is that the direction is right. The quarter has improved $79,596 on last year and is within $5,808 of breaking even. The month is $11,152 better than the same month last year. On revenue alone the business is billing a third more than it did a year ago.</a:t>
+              <a:t>So the question this chart puts to the board is about pricing and delivery cost on the work being won, not about the volume of work being won.</a:t>
             </a:r>
           </a:p>
           <a:p/>
           <a:p>
             <a:r>
-              <a:t>What stops that being good news is the plan. The budget had the first quarter at a $222,700 profit. Coming in at a $5,808 loss is $228,508 below it. The business has recovered most of the ground it lost in FY26 and is still a long way from the year it was asked to deliver.</a:t>
+              <a:t>FY25 was pulled from Xero on 22 October 2026. FY26 is the Actual FY26 tab and FY27 the P&amp;L FY27 tab. The month follows the reporting month on Setup, so in October this becomes October. Only the first quarter of FY25 was pulled, so the FY25 bar is blank from October until the rest is pulled.</a:t>
+            </a:r>
+          </a:p>
+        </p:txBody>
+      </p:sp>
+    </p:spTree>
+  </p:cSld>
+  <p:clrMapOvr>
+    <a:masterClrMapping/>
+  </p:clrMapOvr>
+</p:notes>
+</file>
+
+<file path=ppt/notesSlides/notesSlide41.xml><?xml version="1.0" encoding="utf-8"?>
+<p:notes xmlns:a="http://schemas.openxmlformats.org/drawingml/2006/main" xmlns:p="http://schemas.openxmlformats.org/presentationml/2006/main" xmlns:r="http://schemas.openxmlformats.org/officeDocument/2006/relationships">
+  <p:cSld>
+    <p:spTree>
+      <p:nvGrpSpPr>
+        <p:cNvPr id="1" name=""/>
+        <p:cNvGrpSpPr/>
+        <p:nvPr/>
+      </p:nvGrpSpPr>
+      <p:grpSpPr>
+        <a:xfrm>
+          <a:off x="0" y="0"/>
+          <a:ext cx="0" cy="0"/>
+          <a:chOff x="0" y="0"/>
+          <a:chExt cx="0" cy="0"/>
+        </a:xfrm>
+      </p:grpSpPr>
+      <p:sp>
+        <p:nvSpPr>
+          <p:cNvPr id="3" name="Notes Placeholder 2"/>
+          <p:cNvSpPr>
+            <a:spLocks noGrp="1"/>
+          </p:cNvSpPr>
+          <p:nvPr>
+            <p:ph type="body" idx="1"/>
+          </p:nvPr>
+        </p:nvSpPr>
+        <p:spPr/>
+        <p:txBody>
+          <a:bodyPr lIns="107095" tIns="53547" rIns="107095" bIns="53547"/>
+          <a:lstStyle/>
+          <a:p>
+            <a:r>
+              <a:t>Net profit and net loss for the first quarter across three years, taken from the Xero History tab. Net profit is the pack's own figure and includes other income.</a:t>
             </a:r>
           </a:p>
           <a:p/>
           <a:p>
             <a:r>
-              <a:t>FY25 was pulled from Xero on 22 October 2026. Only the first quarter of FY25 was pulled, so the FY25 bar on the monthly side is blank from October onward until the rest is pulled.</a:t>
+              <a:t>Q1 2026 a loss of $5,808. Q1 2025 a loss of $85,404. Q1 2024 a profit of $34,595.</a:t>
+            </a:r>
+          </a:p>
+          <a:p/>
+          <a:p>
+            <a:r>
+              <a:t>The quarter has improved $79,596 on last year and is within $5,808 of breaking even. On that reading the recovery is real and the direction is right.</a:t>
+            </a:r>
+          </a:p>
+          <a:p/>
+          <a:p>
+            <a:r>
+              <a:t>Against the plan it reads differently. The budget had the first quarter at a $222,700 profit. Coming in at a $5,808 loss is $228,508 below it.</a:t>
+            </a:r>
+          </a:p>
+          <a:p/>
+          <a:p>
+            <a:r>
+              <a:t>As with the month, this is not a revenue failure. The quarter billed $1,624,460, which is the highest first quarter of the three, ahead of $1,228,582 last year and $1,380,102 the year before. It earned more than either comparison and still finished below the line.</a:t>
+            </a:r>
+          </a:p>
+          <a:p/>
+          <a:p>
+            <a:r>
+              <a:t>The cost of earning it is where the quarter went. Cost of sales was $992,160 against $708,478 in Q1 2024, which is $283,682 more on revenue $244,358 higher. Overheads were almost unchanged at $641,508 against $638,615. The overhead base is not the problem and has not been for three years. The margin on the work is.</a:t>
+            </a:r>
+          </a:p>
+          <a:p/>
+          <a:p>
+            <a:r>
+              <a:t>FY25 was pulled from Xero on 22 October 2026. The quarter is July to September, so it is fixed rather than following Setup.</a:t>
             </a:r>
           </a:p>
         </p:txBody>
@@ -7822,22 +7899,22 @@
       <p:grpSpPr/>
       <p:pic>
         <p:nvPicPr>
-          <p:cNvPr id="27" name="snip profit_line" descr="profit_line.png"/>
+          <p:cNvPr id="27" name="snip profit_month" descr="profit_month.png"/>
           <p:cNvPicPr>
             <a:picLocks noChangeAspect="1"/>
           </p:cNvPicPr>
           <p:nvPr/>
         </p:nvPicPr>
         <p:blipFill>
-          <a:blip r:embed="rId3"/>
+          <a:blip r:embed="rId5"/>
           <a:stretch>
             <a:fillRect/>
           </a:stretch>
         </p:blipFill>
         <p:spPr>
           <a:xfrm>
-            <a:off x="522419" y="1005840"/>
-            <a:ext cx="8099161" cy="2525689"/>
+            <a:off x="793198" y="1005840"/>
+            <a:ext cx="7557602" cy="2356806"/>
           </a:xfrm>
           <a:prstGeom prst="rect">
             <a:avLst/>
@@ -7910,7 +7987,7 @@
                   <a:srgbClr val="242C39"/>
                 </a:solidFill>
               </a:rPr>
-              <a:t>Net profit above and below the line</a:t>
+              <a:t>Net profit and net loss, the month</a:t>
             </a:r>
             <a:endParaRPr lang="en-US" sz="2700" dirty="0"/>
           </a:p>
@@ -7924,8 +8001,8 @@
         </p:nvSpPr>
         <p:spPr>
           <a:xfrm>
-            <a:off x="502920" y="3622969"/>
-            <a:ext cx="8138160" cy="1003894"/>
+            <a:off x="502920" y="3454086"/>
+            <a:ext cx="8138160" cy="1172777"/>
           </a:xfrm>
           <a:prstGeom prst="rect">
             <a:avLst/>
@@ -7951,7 +8028,7 @@
         </p:nvSpPr>
         <p:spPr>
           <a:xfrm>
-            <a:off x="685800" y="3696121"/>
+            <a:off x="685800" y="3527238"/>
             <a:ext cx="2743200" cy="228600"/>
           </a:xfrm>
           <a:prstGeom prst="rect">
@@ -7987,8 +8064,8 @@
         </p:nvSpPr>
         <p:spPr>
           <a:xfrm>
-            <a:off x="685800" y="3869857"/>
-            <a:ext cx="3703320" cy="729574"/>
+            <a:off x="685800" y="3700974"/>
+            <a:ext cx="3703320" cy="898457"/>
           </a:xfrm>
           <a:prstGeom prst="rect">
             <a:avLst/>
@@ -8018,7 +8095,7 @@
                   <a:srgbClr val="3A4453"/>
                 </a:solidFill>
               </a:rPr>
-              <a:t>September lost $41k. Last September lost $53k. The September before made $21k.</a:t>
+              <a:t>September lost $41k, against a $53k loss last September and a $21k profit the September before.</a:t>
             </a:r>
             <a:endParaRPr lang="en-US" sz="850"/>
           </a:p>
@@ -8039,7 +8116,7 @@
                   <a:srgbClr val="3A4453"/>
                 </a:solidFill>
               </a:rPr>
-              <a:t>The quarter lost $6k, against a $85k loss last year and a $35k profit the year before.</a:t>
+              <a:t>This September is $11k better than the same month last year.</a:t>
             </a:r>
             <a:endParaRPr lang="en-US" sz="850"/>
           </a:p>
@@ -8098,8 +8175,8 @@
         </p:nvSpPr>
         <p:spPr>
           <a:xfrm>
-            <a:off x="4663440" y="3869857"/>
-            <a:ext cx="3703320" cy="729574"/>
+            <a:off x="4663440" y="3700974"/>
+            <a:ext cx="3703320" cy="898457"/>
           </a:xfrm>
           <a:prstGeom prst="rect">
             <a:avLst/>
@@ -8129,7 +8206,7 @@
                   <a:srgbClr val="3A4453"/>
                 </a:solidFill>
               </a:rPr>
-              <a:t>The quarter is $80k better than last year and close to breakeven.</a:t>
+              <a:t>Three Septembers and only one above the line, which is FY25.</a:t>
             </a:r>
             <a:endParaRPr lang="en-US" sz="850"/>
           </a:p>
@@ -8150,7 +8227,7 @@
                   <a:srgbClr val="3A4453"/>
                 </a:solidFill>
               </a:rPr>
-              <a:t>It is still $229k below budget, which had the quarter at a $223k profit.</a:t>
+              <a:t>September revenue was the highest of the three at $562k, so the loss is a margin problem rather than a revenue problem.</a:t>
             </a:r>
             <a:endParaRPr lang="en-US" sz="850"/>
           </a:p>
@@ -8189,6 +8266,384 @@
 </file>
 
 <file path=ppt/slides/slide15.xml><?xml version="1.0" encoding="utf-8"?>
+<p:sld xmlns:a="http://schemas.openxmlformats.org/drawingml/2006/main" xmlns:p="http://schemas.openxmlformats.org/presentationml/2006/main" xmlns:r="http://schemas.openxmlformats.org/officeDocument/2006/relationships">
+  <p:cSld>
+    <p:spTree>
+      <p:nvGrpSpPr>
+        <p:cNvPr id="1" name=""/>
+        <p:cNvGrpSpPr/>
+        <p:nvPr/>
+      </p:nvGrpSpPr>
+      <p:grpSpPr/>
+      <p:pic>
+        <p:nvPicPr>
+          <p:cNvPr id="27" name="snip profit_qtr" descr="profit_qtr.png"/>
+          <p:cNvPicPr>
+            <a:picLocks noChangeAspect="1"/>
+          </p:cNvPicPr>
+          <p:nvPr/>
+        </p:nvPicPr>
+        <p:blipFill>
+          <a:blip r:embed="rId3"/>
+          <a:stretch>
+            <a:fillRect/>
+          </a:stretch>
+        </p:blipFill>
+        <p:spPr>
+          <a:xfrm>
+            <a:off x="522419" y="1005840"/>
+            <a:ext cx="8099161" cy="2525689"/>
+          </a:xfrm>
+          <a:prstGeom prst="rect">
+            <a:avLst/>
+          </a:prstGeom>
+        </p:spPr>
+      </p:pic>
+      <p:sp>
+        <p:nvSpPr>
+          <p:cNvPr id="2" name="Text 0"/>
+          <p:cNvSpPr txBox="1"/>
+          <p:nvPr/>
+        </p:nvSpPr>
+        <p:spPr>
+          <a:xfrm>
+            <a:off x="502920" y="365760"/>
+            <a:ext cx="6400800" cy="274320"/>
+          </a:xfrm>
+          <a:prstGeom prst="rect">
+            <a:avLst/>
+          </a:prstGeom>
+          <a:noFill/>
+          <a:ln/>
+        </p:spPr>
+        <p:txBody>
+          <a:bodyPr wrap="square" lIns="0" tIns="0" rIns="0" bIns="0" rtlCol="0" anchor="ctr"/>
+          <a:lstStyle/>
+          <a:p>
+            <a:pPr marL="0" indent="0">
+              <a:buNone/>
+            </a:pPr>
+            <a:r>
+              <a:rPr lang="en-US" sz="950" b="1" kern="0" spc="220">
+                <a:solidFill>
+                  <a:srgbClr val="122B82"/>
+                </a:solidFill>
+              </a:rPr>
+              <a:t>FINANCIAL PERFORMANCE</a:t>
+            </a:r>
+            <a:endParaRPr lang="en-US" sz="950"/>
+          </a:p>
+        </p:txBody>
+      </p:sp>
+      <p:sp>
+        <p:nvSpPr>
+          <p:cNvPr id="3" name="Text 1"/>
+          <p:cNvSpPr txBox="1"/>
+          <p:nvPr/>
+        </p:nvSpPr>
+        <p:spPr>
+          <a:xfrm>
+            <a:off x="502920" y="640080"/>
+            <a:ext cx="7315200" cy="365760"/>
+          </a:xfrm>
+          <a:prstGeom prst="rect">
+            <a:avLst/>
+          </a:prstGeom>
+          <a:noFill/>
+          <a:ln/>
+        </p:spPr>
+        <p:txBody>
+          <a:bodyPr wrap="square" lIns="0" tIns="0" rIns="0" bIns="0" rtlCol="0" anchor="ctr"/>
+          <a:lstStyle/>
+          <a:p>
+            <a:pPr marL="0" indent="0" algn="ctr">
+              <a:buNone/>
+            </a:pPr>
+            <a:r>
+              <a:rPr lang="en-US" sz="2200" b="1" dirty="0">
+                <a:solidFill>
+                  <a:srgbClr val="242C39"/>
+                </a:solidFill>
+              </a:rPr>
+              <a:t>Net profit and net loss, the quarter</a:t>
+            </a:r>
+            <a:endParaRPr lang="en-US" sz="2700" dirty="0"/>
+          </a:p>
+        </p:txBody>
+      </p:sp>
+      <p:sp>
+        <p:nvSpPr>
+          <p:cNvPr id="6" name="commentary panel"/>
+          <p:cNvSpPr/>
+          <p:nvPr/>
+        </p:nvSpPr>
+        <p:spPr>
+          <a:xfrm>
+            <a:off x="502920" y="3622969"/>
+            <a:ext cx="8138160" cy="1003894"/>
+          </a:xfrm>
+          <a:prstGeom prst="rect">
+            <a:avLst/>
+          </a:prstGeom>
+          <a:solidFill>
+            <a:srgbClr val="E8F9F8"/>
+          </a:solidFill>
+          <a:ln/>
+        </p:spPr>
+        <p:txBody>
+          <a:bodyPr/>
+          <a:lstStyle/>
+          <a:p>
+            <a:endParaRPr lang="en-AU"/>
+          </a:p>
+        </p:txBody>
+      </p:sp>
+      <p:sp>
+        <p:nvSpPr>
+          <p:cNvPr id="7" name="Text 4"/>
+          <p:cNvSpPr txBox="1"/>
+          <p:nvPr/>
+        </p:nvSpPr>
+        <p:spPr>
+          <a:xfrm>
+            <a:off x="685800" y="3696121"/>
+            <a:ext cx="2743200" cy="228600"/>
+          </a:xfrm>
+          <a:prstGeom prst="rect">
+            <a:avLst/>
+          </a:prstGeom>
+          <a:noFill/>
+          <a:ln/>
+        </p:spPr>
+        <p:txBody>
+          <a:bodyPr wrap="square" lIns="0" tIns="0" rIns="0" bIns="0" rtlCol="0" anchor="ctr"/>
+          <a:lstStyle/>
+          <a:p>
+            <a:pPr marL="0" indent="0">
+              <a:buNone/>
+            </a:pPr>
+            <a:r>
+              <a:rPr lang="en-US" sz="900" b="1" kern="0" spc="180">
+                <a:solidFill>
+                  <a:srgbClr val="005358"/>
+                </a:solidFill>
+              </a:rPr>
+              <a:t>COMMENTARY</a:t>
+            </a:r>
+            <a:endParaRPr lang="en-US" sz="900"/>
+          </a:p>
+        </p:txBody>
+      </p:sp>
+      <p:sp>
+        <p:nvSpPr>
+          <p:cNvPr id="8" name="Text 5"/>
+          <p:cNvSpPr txBox="1"/>
+          <p:nvPr/>
+        </p:nvSpPr>
+        <p:spPr>
+          <a:xfrm>
+            <a:off x="685800" y="3869857"/>
+            <a:ext cx="3703320" cy="729574"/>
+          </a:xfrm>
+          <a:prstGeom prst="rect">
+            <a:avLst/>
+          </a:prstGeom>
+          <a:noFill/>
+          <a:ln/>
+        </p:spPr>
+        <p:txBody>
+          <a:bodyPr wrap="square" lIns="0" tIns="0" rIns="0" bIns="0" rtlCol="0" anchor="t">
+            <a:normAutofit fontScale="85000" lnSpcReduction="10000"/>
+          </a:bodyPr>
+          <a:lstStyle/>
+          <a:p>
+            <a:pPr marL="342900" indent="-342900">
+              <a:lnSpc>
+                <a:spcPts val="1050"/>
+              </a:lnSpc>
+              <a:spcAft>
+                <a:spcPts val="400"/>
+              </a:spcAft>
+              <a:buSzPct val="100000"/>
+              <a:buChar char="•"/>
+            </a:pPr>
+            <a:r>
+              <a:rPr lang="en-US" sz="1000">
+                <a:solidFill>
+                  <a:srgbClr val="3A4453"/>
+                </a:solidFill>
+              </a:rPr>
+              <a:t>The quarter lost $6k, against a $85k loss last year and a $35k profit the year before.</a:t>
+            </a:r>
+            <a:endParaRPr lang="en-US" sz="850"/>
+          </a:p>
+          <a:p>
+            <a:pPr marL="342900" indent="-342900">
+              <a:lnSpc>
+                <a:spcPts val="1050"/>
+              </a:lnSpc>
+              <a:spcAft>
+                <a:spcPts val="400"/>
+              </a:spcAft>
+              <a:buSzPct val="100000"/>
+              <a:buChar char="•"/>
+            </a:pPr>
+            <a:r>
+              <a:rPr lang="en-US" sz="1000">
+                <a:solidFill>
+                  <a:srgbClr val="3A4453"/>
+                </a:solidFill>
+              </a:rPr>
+              <a:t>That is $80k better than last year and within $6k of breaking even.</a:t>
+            </a:r>
+            <a:endParaRPr lang="en-US" sz="850"/>
+          </a:p>
+        </p:txBody>
+      </p:sp>
+      <p:sp>
+        <p:nvSpPr>
+          <p:cNvPr id="25" name="Slide Number Placeholder 0"/>
+          <p:cNvSpPr>
+            <a:spLocks noGrp="1"/>
+          </p:cNvSpPr>
+          <p:nvPr>
+            <p:ph type="sldNum" sz="quarter" idx="4294967295"/>
+          </p:nvPr>
+        </p:nvSpPr>
+        <p:spPr>
+          <a:xfrm>
+            <a:off x="8092440" y="4736592"/>
+            <a:ext cx="548640" cy="228600"/>
+          </a:xfrm>
+          <a:prstGeom prst="rect">
+            <a:avLst/>
+          </a:prstGeom>
+          <a:extLst>
+            <a:ext uri="{C572A759-6A51-4108-AA02-DFA0A04FC94B}">
+              <ma14:wrappingTextBoxFlag xmlns="" xmlns:ma14="http://schemas.microsoft.com/office/mac/drawingml/2011/main" val="0"/>
+            </a:ext>
+          </a:extLst>
+        </p:spPr>
+        <p:txBody>
+          <a:bodyPr/>
+          <a:lstStyle>
+            <a:lvl1pPr>
+              <a:defRPr sz="800">
+                <a:solidFill>
+                  <a:srgbClr val="6B7585"/>
+                </a:solidFill>
+              </a:defRPr>
+            </a:lvl1pPr>
+          </a:lstStyle>
+          <a:p>
+            <a:pPr algn="r"/>
+            <a:fld id="{F7021451-1387-4CA6-816F-3879F97B5CBC}" type="slidenum">
+              <a:rPr lang="en-US" b="0"/>
+              <a:t>9</a:t>
+            </a:fld>
+            <a:endParaRPr lang="en-US"/>
+          </a:p>
+        </p:txBody>
+      </p:sp>
+      <p:sp>
+        <p:nvSpPr>
+          <p:cNvPr id="4" name="Text 5b"/>
+          <p:cNvSpPr txBox="1"/>
+          <p:nvPr/>
+        </p:nvSpPr>
+        <p:spPr>
+          <a:xfrm>
+            <a:off x="4663440" y="3869857"/>
+            <a:ext cx="3703320" cy="729574"/>
+          </a:xfrm>
+          <a:prstGeom prst="rect">
+            <a:avLst/>
+          </a:prstGeom>
+          <a:noFill/>
+          <a:ln/>
+        </p:spPr>
+        <p:txBody>
+          <a:bodyPr wrap="square" lIns="0" tIns="0" rIns="0" bIns="0" rtlCol="0" anchor="t">
+            <a:normAutofit fontScale="85000" lnSpcReduction="10000"/>
+          </a:bodyPr>
+          <a:lstStyle/>
+          <a:p>
+            <a:pPr marL="342900" indent="-342900">
+              <a:lnSpc>
+                <a:spcPts val="1050"/>
+              </a:lnSpc>
+              <a:spcAft>
+                <a:spcPts val="400"/>
+              </a:spcAft>
+              <a:buSzPct val="100000"/>
+              <a:buChar char="•"/>
+            </a:pPr>
+            <a:r>
+              <a:rPr lang="en-US" sz="1000">
+                <a:solidFill>
+                  <a:srgbClr val="3A4453"/>
+                </a:solidFill>
+              </a:rPr>
+              <a:t>It is still $229k below the budget, which had the quarter at a $223k profit.</a:t>
+            </a:r>
+            <a:endParaRPr lang="en-US" sz="850"/>
+          </a:p>
+          <a:p>
+            <a:pPr marL="342900" indent="-342900">
+              <a:lnSpc>
+                <a:spcPts val="1050"/>
+              </a:lnSpc>
+              <a:spcAft>
+                <a:spcPts val="400"/>
+              </a:spcAft>
+              <a:buSzPct val="100000"/>
+              <a:buChar char="•"/>
+            </a:pPr>
+            <a:r>
+              <a:rPr lang="en-US" sz="1000">
+                <a:solidFill>
+                  <a:srgbClr val="3A4453"/>
+                </a:solidFill>
+              </a:rPr>
+              <a:t>Quarter revenue was the highest of the three at $1,624k, so again the gap is margin.</a:t>
+            </a:r>
+            <a:endParaRPr lang="en-US" sz="850"/>
+          </a:p>
+        </p:txBody>
+      </p:sp>
+      <p:pic>
+        <p:nvPicPr>
+          <p:cNvPr id="26" name="cts logo" descr="image.png"/>
+          <p:cNvPicPr>
+            <a:picLocks noChangeAspect="1"/>
+          </p:cNvPicPr>
+          <p:nvPr/>
+        </p:nvPicPr>
+        <p:blipFill>
+          <a:blip r:embed="rId2"/>
+          <a:stretch>
+            <a:fillRect/>
+          </a:stretch>
+        </p:blipFill>
+        <p:spPr>
+          <a:xfrm>
+            <a:off x="7680959" y="182880"/>
+            <a:ext cx="960120" cy="539696"/>
+          </a:xfrm>
+          <a:prstGeom prst="rect">
+            <a:avLst/>
+          </a:prstGeom>
+        </p:spPr>
+      </p:pic>
+    </p:spTree>
+  </p:cSld>
+  <p:clrMapOvr>
+    <a:masterClrMapping/>
+  </p:clrMapOvr>
+</p:sld>
+</file>
+
+<file path=ppt/slides/slide16.xml><?xml version="1.0" encoding="utf-8"?>
 <p:sld xmlns:a="http://schemas.openxmlformats.org/drawingml/2006/main" xmlns:r="http://schemas.openxmlformats.org/officeDocument/2006/relationships" xmlns:p="http://schemas.openxmlformats.org/presentationml/2006/main">
   <p:cSld name="Slide 7">
     <p:spTree>
@@ -8573,7 +9028,7 @@
 </p:sld>
 </file>
 
-<file path=ppt/slides/slide16.xml><?xml version="1.0" encoding="utf-8"?>
+<file path=ppt/slides/slide17.xml><?xml version="1.0" encoding="utf-8"?>
 <p:sld xmlns:a="http://schemas.openxmlformats.org/drawingml/2006/main" xmlns:r="http://schemas.openxmlformats.org/officeDocument/2006/relationships" xmlns:p="http://schemas.openxmlformats.org/presentationml/2006/main">
   <p:cSld name="Slide 8">
     <p:spTree>
@@ -8958,7 +9413,7 @@
 </p:sld>
 </file>
 
-<file path=ppt/slides/slide17.xml><?xml version="1.0" encoding="utf-8"?>
+<file path=ppt/slides/slide18.xml><?xml version="1.0" encoding="utf-8"?>
 <p:sld xmlns:a="http://schemas.openxmlformats.org/drawingml/2006/main" xmlns:r="http://schemas.openxmlformats.org/officeDocument/2006/relationships" xmlns:p="http://schemas.openxmlformats.org/presentationml/2006/main">
   <p:cSld name="Slide 9">
     <p:spTree>
@@ -9364,7 +9819,7 @@
 </p:sld>
 </file>
 
-<file path=ppt/slides/slide18.xml><?xml version="1.0" encoding="utf-8"?>
+<file path=ppt/slides/slide19.xml><?xml version="1.0" encoding="utf-8"?>
 <p:sld xmlns:a="http://schemas.openxmlformats.org/drawingml/2006/main" xmlns:r="http://schemas.openxmlformats.org/officeDocument/2006/relationships" xmlns:p="http://schemas.openxmlformats.org/presentationml/2006/main">
   <p:cSld name="Slide 10">
     <p:spTree>
@@ -9759,412 +10214,6 @@
               <a:t>The team recorded 333 hours of leave and 241 billable hours, highlighting reduced available delivery capacity.</a:t>
             </a:r>
             <a:endParaRPr lang="en-US" sz="900"/>
-          </a:p>
-        </p:txBody>
-      </p:sp>
-    </p:spTree>
-  </p:cSld>
-  <p:clrMapOvr>
-    <a:masterClrMapping/>
-  </p:clrMapOvr>
-</p:sld>
-</file>
-
-<file path=ppt/slides/slide19.xml><?xml version="1.0" encoding="utf-8"?>
-<p:sld xmlns:a="http://schemas.openxmlformats.org/drawingml/2006/main" xmlns:r="http://schemas.openxmlformats.org/officeDocument/2006/relationships" xmlns:p="http://schemas.openxmlformats.org/presentationml/2006/main">
-  <p:cSld name="Slide 11">
-    <p:spTree>
-      <p:nvGrpSpPr>
-        <p:cNvPr id="1" name=""/>
-        <p:cNvGrpSpPr/>
-        <p:nvPr/>
-      </p:nvGrpSpPr>
-      <p:grpSpPr>
-        <a:xfrm>
-          <a:off x="0" y="0"/>
-          <a:ext cx="0" cy="0"/>
-          <a:chOff x="0" y="0"/>
-          <a:chExt cx="0" cy="0"/>
-        </a:xfrm>
-      </p:grpSpPr>
-      <p:pic>
-        <p:nvPicPr>
-          <p:cNvPr id="27" name="snip dept_Video" descr="dept_Video.png"/>
-          <p:cNvPicPr>
-            <a:picLocks noChangeAspect="1"/>
-          </p:cNvPicPr>
-          <p:nvPr/>
-        </p:nvPicPr>
-        <p:blipFill>
-          <a:blip r:embed="rId3"/>
-          <a:stretch>
-            <a:fillRect/>
-          </a:stretch>
-        </p:blipFill>
-        <p:spPr>
-          <a:xfrm>
-            <a:off x="683582" y="1005840"/>
-            <a:ext cx="7776835" cy="2302763"/>
-          </a:xfrm>
-          <a:prstGeom prst="rect">
-            <a:avLst/>
-          </a:prstGeom>
-        </p:spPr>
-      </p:pic>
-      <p:sp>
-        <p:nvSpPr>
-          <p:cNvPr id="2" name="Text 0"/>
-          <p:cNvSpPr txBox="1"/>
-          <p:nvPr/>
-        </p:nvSpPr>
-        <p:spPr>
-          <a:xfrm>
-            <a:off x="502920" y="365760"/>
-            <a:ext cx="6400800" cy="274320"/>
-          </a:xfrm>
-          <a:prstGeom prst="rect">
-            <a:avLst/>
-          </a:prstGeom>
-          <a:noFill/>
-          <a:ln/>
-        </p:spPr>
-        <p:txBody>
-          <a:bodyPr wrap="square" lIns="0" tIns="0" rIns="0" bIns="0" rtlCol="0" anchor="ctr"/>
-          <a:lstStyle/>
-          <a:p>
-            <a:pPr marL="0" indent="0">
-              <a:buNone/>
-            </a:pPr>
-            <a:r>
-              <a:rPr lang="en-US" sz="950" b="1" kern="0" spc="220">
-                <a:solidFill>
-                  <a:srgbClr val="122B82"/>
-                </a:solidFill>
-              </a:rPr>
-              <a:t>FINANCIAL PERFORMANCE</a:t>
-            </a:r>
-            <a:endParaRPr lang="en-US" sz="950"/>
-          </a:p>
-        </p:txBody>
-      </p:sp>
-      <p:sp>
-        <p:nvSpPr>
-          <p:cNvPr id="3" name="Text 1"/>
-          <p:cNvSpPr txBox="1"/>
-          <p:nvPr/>
-        </p:nvSpPr>
-        <p:spPr>
-          <a:xfrm>
-            <a:off x="502920" y="640080"/>
-            <a:ext cx="7315200" cy="365760"/>
-          </a:xfrm>
-          <a:prstGeom prst="rect">
-            <a:avLst/>
-          </a:prstGeom>
-          <a:noFill/>
-          <a:ln/>
-        </p:spPr>
-        <p:txBody>
-          <a:bodyPr wrap="square" lIns="0" tIns="0" rIns="0" bIns="0" rtlCol="0" anchor="ctr"/>
-          <a:lstStyle/>
-          <a:p>
-            <a:pPr marL="0" indent="0" algn="ctr">
-              <a:buNone/>
-            </a:pPr>
-            <a:r>
-              <a:rPr lang="en-US" sz="2200" b="1">
-                <a:solidFill>
-                  <a:srgbClr val="242C39"/>
-                </a:solidFill>
-              </a:rPr>
-              <a:t>Video, Sep 26</a:t>
-            </a:r>
-            <a:endParaRPr lang="en-US" sz="2700"/>
-          </a:p>
-        </p:txBody>
-      </p:sp>
-      <p:sp>
-        <p:nvSpPr>
-          <p:cNvPr id="6" name="commentary panel"/>
-          <p:cNvSpPr/>
-          <p:nvPr/>
-        </p:nvSpPr>
-        <p:spPr>
-          <a:xfrm>
-            <a:off x="502920" y="3400043"/>
-            <a:ext cx="8138160" cy="1226820"/>
-          </a:xfrm>
-          <a:prstGeom prst="rect">
-            <a:avLst/>
-          </a:prstGeom>
-          <a:solidFill>
-            <a:srgbClr val="E8F9F8"/>
-          </a:solidFill>
-          <a:ln/>
-        </p:spPr>
-        <p:txBody>
-          <a:bodyPr/>
-          <a:lstStyle/>
-          <a:p>
-            <a:endParaRPr lang="en-AU"/>
-          </a:p>
-        </p:txBody>
-      </p:sp>
-      <p:sp>
-        <p:nvSpPr>
-          <p:cNvPr id="7" name="Text 4"/>
-          <p:cNvSpPr txBox="1"/>
-          <p:nvPr/>
-        </p:nvSpPr>
-        <p:spPr>
-          <a:xfrm>
-            <a:off x="685800" y="3473195"/>
-            <a:ext cx="2743200" cy="228600"/>
-          </a:xfrm>
-          <a:prstGeom prst="rect">
-            <a:avLst/>
-          </a:prstGeom>
-          <a:noFill/>
-          <a:ln/>
-        </p:spPr>
-        <p:txBody>
-          <a:bodyPr wrap="square" lIns="0" tIns="0" rIns="0" bIns="0" rtlCol="0" anchor="ctr"/>
-          <a:lstStyle/>
-          <a:p>
-            <a:pPr marL="0" indent="0">
-              <a:buNone/>
-            </a:pPr>
-            <a:r>
-              <a:rPr lang="en-US" sz="900" b="1" kern="0" spc="180">
-                <a:solidFill>
-                  <a:srgbClr val="005358"/>
-                </a:solidFill>
-              </a:rPr>
-              <a:t>COMMENTARY</a:t>
-            </a:r>
-            <a:endParaRPr lang="en-US" sz="900"/>
-          </a:p>
-        </p:txBody>
-      </p:sp>
-      <p:sp>
-        <p:nvSpPr>
-          <p:cNvPr id="8" name="Text 5"/>
-          <p:cNvSpPr txBox="1"/>
-          <p:nvPr/>
-        </p:nvSpPr>
-        <p:spPr>
-          <a:xfrm>
-            <a:off x="685800" y="3646931"/>
-            <a:ext cx="3703320" cy="952500"/>
-          </a:xfrm>
-          <a:prstGeom prst="rect">
-            <a:avLst/>
-          </a:prstGeom>
-          <a:noFill/>
-          <a:ln/>
-        </p:spPr>
-        <p:txBody>
-          <a:bodyPr wrap="square" lIns="0" tIns="0" rIns="0" bIns="0" rtlCol="0" anchor="t">
-            <a:normAutofit/>
-          </a:bodyPr>
-          <a:lstStyle/>
-          <a:p>
-            <a:pPr marL="342900" indent="-342900">
-              <a:lnSpc>
-                <a:spcPts val="1200"/>
-              </a:lnSpc>
-              <a:spcAft>
-                <a:spcPts val="400"/>
-              </a:spcAft>
-              <a:buSzPct val="100000"/>
-              <a:buChar char="•"/>
-            </a:pPr>
-            <a:r>
-              <a:rPr lang="en-US" sz="1000">
-                <a:solidFill>
-                  <a:srgbClr val="3A4453"/>
-                </a:solidFill>
-              </a:rPr>
-              <a:t>Video generated $7k revenue against a $17k budget, marking a third consecutive month below plan.</a:t>
-            </a:r>
-            <a:endParaRPr lang="en-US" sz="950"/>
-          </a:p>
-          <a:p>
-            <a:pPr marL="342900" indent="-342900">
-              <a:lnSpc>
-                <a:spcPts val="1200"/>
-              </a:lnSpc>
-              <a:spcAft>
-                <a:spcPts val="400"/>
-              </a:spcAft>
-              <a:buSzPct val="100000"/>
-              <a:buChar char="•"/>
-            </a:pPr>
-            <a:r>
-              <a:rPr lang="en-US" sz="1000">
-                <a:solidFill>
-                  <a:srgbClr val="3A4453"/>
-                </a:solidFill>
-              </a:rPr>
-              <a:t>Gross margin was 79.6%, the highest of the departments.</a:t>
-            </a:r>
-            <a:endParaRPr lang="en-US" sz="950"/>
-          </a:p>
-          <a:p>
-            <a:pPr marL="342900" indent="-342900">
-              <a:lnSpc>
-                <a:spcPts val="1200"/>
-              </a:lnSpc>
-              <a:spcAft>
-                <a:spcPts val="400"/>
-              </a:spcAft>
-              <a:buSzPct val="100000"/>
-              <a:buChar char="•"/>
-            </a:pPr>
-            <a:r>
-              <a:rPr lang="en-US" sz="1000">
-                <a:solidFill>
-                  <a:srgbClr val="3A4453"/>
-                </a:solidFill>
-              </a:rPr>
-              <a:t>However, this produced only $6k in gross profit against approximately $13k of overheads.</a:t>
-            </a:r>
-            <a:endParaRPr lang="en-US" sz="950"/>
-          </a:p>
-        </p:txBody>
-      </p:sp>
-      <p:sp>
-        <p:nvSpPr>
-          <p:cNvPr id="25" name="Slide Number Placeholder 0"/>
-          <p:cNvSpPr>
-            <a:spLocks noGrp="1"/>
-          </p:cNvSpPr>
-          <p:nvPr>
-            <p:ph type="sldNum" sz="quarter" idx="4294967295"/>
-          </p:nvPr>
-        </p:nvSpPr>
-        <p:spPr>
-          <a:xfrm>
-            <a:off x="8092440" y="4736592"/>
-            <a:ext cx="548640" cy="228600"/>
-          </a:xfrm>
-          <a:prstGeom prst="rect">
-            <a:avLst/>
-          </a:prstGeom>
-          <a:extLst>
-            <a:ext uri="{C572A759-6A51-4108-AA02-DFA0A04FC94B}">
-              <ma14:wrappingTextBoxFlag xmlns="" xmlns:ma14="http://schemas.microsoft.com/office/mac/drawingml/2011/main" val="0"/>
-            </a:ext>
-          </a:extLst>
-        </p:spPr>
-        <p:txBody>
-          <a:bodyPr/>
-          <a:lstStyle>
-            <a:lvl1pPr>
-              <a:defRPr sz="800">
-                <a:solidFill>
-                  <a:srgbClr val="6B7585"/>
-                </a:solidFill>
-              </a:defRPr>
-            </a:lvl1pPr>
-          </a:lstStyle>
-          <a:p>
-            <a:pPr algn="r"/>
-            <a:fld id="{F7021451-1387-4CA6-816F-3879F97B5CBC}" type="slidenum">
-              <a:rPr lang="en-US" b="0"/>
-              <a:t>16</a:t>
-            </a:fld>
-            <a:endParaRPr lang="en-US"/>
-          </a:p>
-        </p:txBody>
-      </p:sp>
-      <p:pic>
-        <p:nvPicPr>
-          <p:cNvPr id="26" name="cts logo" descr="cts-logo.png"/>
-          <p:cNvPicPr>
-            <a:picLocks noChangeAspect="1"/>
-          </p:cNvPicPr>
-          <p:nvPr/>
-        </p:nvPicPr>
-        <p:blipFill>
-          <a:blip r:embed="rId4"/>
-          <a:stretch>
-            <a:fillRect/>
-          </a:stretch>
-        </p:blipFill>
-        <p:spPr>
-          <a:xfrm>
-            <a:off x="7680959" y="182880"/>
-            <a:ext cx="960120" cy="539696"/>
-          </a:xfrm>
-          <a:prstGeom prst="rect">
-            <a:avLst/>
-          </a:prstGeom>
-        </p:spPr>
-      </p:pic>
-      <p:sp>
-        <p:nvSpPr>
-          <p:cNvPr id="4" name="Text 5b"/>
-          <p:cNvSpPr txBox="1"/>
-          <p:nvPr/>
-        </p:nvSpPr>
-        <p:spPr>
-          <a:xfrm>
-            <a:off x="4663440" y="3646931"/>
-            <a:ext cx="3703320" cy="952500"/>
-          </a:xfrm>
-          <a:prstGeom prst="rect">
-            <a:avLst/>
-          </a:prstGeom>
-          <a:noFill/>
-          <a:ln/>
-        </p:spPr>
-        <p:txBody>
-          <a:bodyPr wrap="square" lIns="0" tIns="0" rIns="0" bIns="0" rtlCol="0" anchor="t">
-            <a:normAutofit/>
-          </a:bodyPr>
-          <a:lstStyle/>
-          <a:p>
-            <a:pPr marL="342900" indent="-342900">
-              <a:lnSpc>
-                <a:spcPts val="1200"/>
-              </a:lnSpc>
-              <a:spcAft>
-                <a:spcPts val="400"/>
-              </a:spcAft>
-              <a:buSzPct val="100000"/>
-              <a:buChar char="•"/>
-            </a:pPr>
-            <a:r>
-              <a:rPr lang="en-US" sz="1000">
-                <a:solidFill>
-                  <a:srgbClr val="3A4453"/>
-                </a:solidFill>
-              </a:rPr>
-              <a:t>The main challenge is the volume of billable work rather than the gross margin percentage.</a:t>
-            </a:r>
-            <a:endParaRPr lang="en-US" sz="950"/>
-          </a:p>
-          <a:p>
-            <a:pPr marL="342900" indent="-342900">
-              <a:lnSpc>
-                <a:spcPts val="1200"/>
-              </a:lnSpc>
-              <a:spcAft>
-                <a:spcPts val="400"/>
-              </a:spcAft>
-              <a:buSzPct val="100000"/>
-              <a:buChar char="•"/>
-            </a:pPr>
-            <a:r>
-              <a:rPr lang="en-US" sz="1000">
-                <a:solidFill>
-                  <a:srgbClr val="3A4453"/>
-                </a:solidFill>
-              </a:rPr>
-              <a:t>Only 24.5 billable hours were recorded for September, indicating limited activity.</a:t>
-            </a:r>
-            <a:endParaRPr lang="en-US" sz="950"/>
           </a:p>
         </p:txBody>
       </p:sp>
@@ -11019,6 +11068,412 @@
 
 <file path=ppt/slides/slide20.xml><?xml version="1.0" encoding="utf-8"?>
 <p:sld xmlns:a="http://schemas.openxmlformats.org/drawingml/2006/main" xmlns:r="http://schemas.openxmlformats.org/officeDocument/2006/relationships" xmlns:p="http://schemas.openxmlformats.org/presentationml/2006/main">
+  <p:cSld name="Slide 11">
+    <p:spTree>
+      <p:nvGrpSpPr>
+        <p:cNvPr id="1" name=""/>
+        <p:cNvGrpSpPr/>
+        <p:nvPr/>
+      </p:nvGrpSpPr>
+      <p:grpSpPr>
+        <a:xfrm>
+          <a:off x="0" y="0"/>
+          <a:ext cx="0" cy="0"/>
+          <a:chOff x="0" y="0"/>
+          <a:chExt cx="0" cy="0"/>
+        </a:xfrm>
+      </p:grpSpPr>
+      <p:pic>
+        <p:nvPicPr>
+          <p:cNvPr id="27" name="snip dept_Video" descr="dept_Video.png"/>
+          <p:cNvPicPr>
+            <a:picLocks noChangeAspect="1"/>
+          </p:cNvPicPr>
+          <p:nvPr/>
+        </p:nvPicPr>
+        <p:blipFill>
+          <a:blip r:embed="rId3"/>
+          <a:stretch>
+            <a:fillRect/>
+          </a:stretch>
+        </p:blipFill>
+        <p:spPr>
+          <a:xfrm>
+            <a:off x="683582" y="1005840"/>
+            <a:ext cx="7776835" cy="2302763"/>
+          </a:xfrm>
+          <a:prstGeom prst="rect">
+            <a:avLst/>
+          </a:prstGeom>
+        </p:spPr>
+      </p:pic>
+      <p:sp>
+        <p:nvSpPr>
+          <p:cNvPr id="2" name="Text 0"/>
+          <p:cNvSpPr txBox="1"/>
+          <p:nvPr/>
+        </p:nvSpPr>
+        <p:spPr>
+          <a:xfrm>
+            <a:off x="502920" y="365760"/>
+            <a:ext cx="6400800" cy="274320"/>
+          </a:xfrm>
+          <a:prstGeom prst="rect">
+            <a:avLst/>
+          </a:prstGeom>
+          <a:noFill/>
+          <a:ln/>
+        </p:spPr>
+        <p:txBody>
+          <a:bodyPr wrap="square" lIns="0" tIns="0" rIns="0" bIns="0" rtlCol="0" anchor="ctr"/>
+          <a:lstStyle/>
+          <a:p>
+            <a:pPr marL="0" indent="0">
+              <a:buNone/>
+            </a:pPr>
+            <a:r>
+              <a:rPr lang="en-US" sz="950" b="1" kern="0" spc="220">
+                <a:solidFill>
+                  <a:srgbClr val="122B82"/>
+                </a:solidFill>
+              </a:rPr>
+              <a:t>FINANCIAL PERFORMANCE</a:t>
+            </a:r>
+            <a:endParaRPr lang="en-US" sz="950"/>
+          </a:p>
+        </p:txBody>
+      </p:sp>
+      <p:sp>
+        <p:nvSpPr>
+          <p:cNvPr id="3" name="Text 1"/>
+          <p:cNvSpPr txBox="1"/>
+          <p:nvPr/>
+        </p:nvSpPr>
+        <p:spPr>
+          <a:xfrm>
+            <a:off x="502920" y="640080"/>
+            <a:ext cx="7315200" cy="365760"/>
+          </a:xfrm>
+          <a:prstGeom prst="rect">
+            <a:avLst/>
+          </a:prstGeom>
+          <a:noFill/>
+          <a:ln/>
+        </p:spPr>
+        <p:txBody>
+          <a:bodyPr wrap="square" lIns="0" tIns="0" rIns="0" bIns="0" rtlCol="0" anchor="ctr"/>
+          <a:lstStyle/>
+          <a:p>
+            <a:pPr marL="0" indent="0" algn="ctr">
+              <a:buNone/>
+            </a:pPr>
+            <a:r>
+              <a:rPr lang="en-US" sz="2200" b="1">
+                <a:solidFill>
+                  <a:srgbClr val="242C39"/>
+                </a:solidFill>
+              </a:rPr>
+              <a:t>Video, Sep 26</a:t>
+            </a:r>
+            <a:endParaRPr lang="en-US" sz="2700"/>
+          </a:p>
+        </p:txBody>
+      </p:sp>
+      <p:sp>
+        <p:nvSpPr>
+          <p:cNvPr id="6" name="commentary panel"/>
+          <p:cNvSpPr/>
+          <p:nvPr/>
+        </p:nvSpPr>
+        <p:spPr>
+          <a:xfrm>
+            <a:off x="502920" y="3400043"/>
+            <a:ext cx="8138160" cy="1226820"/>
+          </a:xfrm>
+          <a:prstGeom prst="rect">
+            <a:avLst/>
+          </a:prstGeom>
+          <a:solidFill>
+            <a:srgbClr val="E8F9F8"/>
+          </a:solidFill>
+          <a:ln/>
+        </p:spPr>
+        <p:txBody>
+          <a:bodyPr/>
+          <a:lstStyle/>
+          <a:p>
+            <a:endParaRPr lang="en-AU"/>
+          </a:p>
+        </p:txBody>
+      </p:sp>
+      <p:sp>
+        <p:nvSpPr>
+          <p:cNvPr id="7" name="Text 4"/>
+          <p:cNvSpPr txBox="1"/>
+          <p:nvPr/>
+        </p:nvSpPr>
+        <p:spPr>
+          <a:xfrm>
+            <a:off x="685800" y="3473195"/>
+            <a:ext cx="2743200" cy="228600"/>
+          </a:xfrm>
+          <a:prstGeom prst="rect">
+            <a:avLst/>
+          </a:prstGeom>
+          <a:noFill/>
+          <a:ln/>
+        </p:spPr>
+        <p:txBody>
+          <a:bodyPr wrap="square" lIns="0" tIns="0" rIns="0" bIns="0" rtlCol="0" anchor="ctr"/>
+          <a:lstStyle/>
+          <a:p>
+            <a:pPr marL="0" indent="0">
+              <a:buNone/>
+            </a:pPr>
+            <a:r>
+              <a:rPr lang="en-US" sz="900" b="1" kern="0" spc="180">
+                <a:solidFill>
+                  <a:srgbClr val="005358"/>
+                </a:solidFill>
+              </a:rPr>
+              <a:t>COMMENTARY</a:t>
+            </a:r>
+            <a:endParaRPr lang="en-US" sz="900"/>
+          </a:p>
+        </p:txBody>
+      </p:sp>
+      <p:sp>
+        <p:nvSpPr>
+          <p:cNvPr id="8" name="Text 5"/>
+          <p:cNvSpPr txBox="1"/>
+          <p:nvPr/>
+        </p:nvSpPr>
+        <p:spPr>
+          <a:xfrm>
+            <a:off x="685800" y="3646931"/>
+            <a:ext cx="3703320" cy="952500"/>
+          </a:xfrm>
+          <a:prstGeom prst="rect">
+            <a:avLst/>
+          </a:prstGeom>
+          <a:noFill/>
+          <a:ln/>
+        </p:spPr>
+        <p:txBody>
+          <a:bodyPr wrap="square" lIns="0" tIns="0" rIns="0" bIns="0" rtlCol="0" anchor="t">
+            <a:normAutofit/>
+          </a:bodyPr>
+          <a:lstStyle/>
+          <a:p>
+            <a:pPr marL="342900" indent="-342900">
+              <a:lnSpc>
+                <a:spcPts val="1200"/>
+              </a:lnSpc>
+              <a:spcAft>
+                <a:spcPts val="400"/>
+              </a:spcAft>
+              <a:buSzPct val="100000"/>
+              <a:buChar char="•"/>
+            </a:pPr>
+            <a:r>
+              <a:rPr lang="en-US" sz="1000">
+                <a:solidFill>
+                  <a:srgbClr val="3A4453"/>
+                </a:solidFill>
+              </a:rPr>
+              <a:t>Video generated $7k revenue against a $17k budget, marking a third consecutive month below plan.</a:t>
+            </a:r>
+            <a:endParaRPr lang="en-US" sz="950"/>
+          </a:p>
+          <a:p>
+            <a:pPr marL="342900" indent="-342900">
+              <a:lnSpc>
+                <a:spcPts val="1200"/>
+              </a:lnSpc>
+              <a:spcAft>
+                <a:spcPts val="400"/>
+              </a:spcAft>
+              <a:buSzPct val="100000"/>
+              <a:buChar char="•"/>
+            </a:pPr>
+            <a:r>
+              <a:rPr lang="en-US" sz="1000">
+                <a:solidFill>
+                  <a:srgbClr val="3A4453"/>
+                </a:solidFill>
+              </a:rPr>
+              <a:t>Gross margin was 79.6%, the highest of the departments.</a:t>
+            </a:r>
+            <a:endParaRPr lang="en-US" sz="950"/>
+          </a:p>
+          <a:p>
+            <a:pPr marL="342900" indent="-342900">
+              <a:lnSpc>
+                <a:spcPts val="1200"/>
+              </a:lnSpc>
+              <a:spcAft>
+                <a:spcPts val="400"/>
+              </a:spcAft>
+              <a:buSzPct val="100000"/>
+              <a:buChar char="•"/>
+            </a:pPr>
+            <a:r>
+              <a:rPr lang="en-US" sz="1000">
+                <a:solidFill>
+                  <a:srgbClr val="3A4453"/>
+                </a:solidFill>
+              </a:rPr>
+              <a:t>However, this produced only $6k in gross profit against approximately $13k of overheads.</a:t>
+            </a:r>
+            <a:endParaRPr lang="en-US" sz="950"/>
+          </a:p>
+        </p:txBody>
+      </p:sp>
+      <p:sp>
+        <p:nvSpPr>
+          <p:cNvPr id="25" name="Slide Number Placeholder 0"/>
+          <p:cNvSpPr>
+            <a:spLocks noGrp="1"/>
+          </p:cNvSpPr>
+          <p:nvPr>
+            <p:ph type="sldNum" sz="quarter" idx="4294967295"/>
+          </p:nvPr>
+        </p:nvSpPr>
+        <p:spPr>
+          <a:xfrm>
+            <a:off x="8092440" y="4736592"/>
+            <a:ext cx="548640" cy="228600"/>
+          </a:xfrm>
+          <a:prstGeom prst="rect">
+            <a:avLst/>
+          </a:prstGeom>
+          <a:extLst>
+            <a:ext uri="{C572A759-6A51-4108-AA02-DFA0A04FC94B}">
+              <ma14:wrappingTextBoxFlag xmlns="" xmlns:ma14="http://schemas.microsoft.com/office/mac/drawingml/2011/main" val="0"/>
+            </a:ext>
+          </a:extLst>
+        </p:spPr>
+        <p:txBody>
+          <a:bodyPr/>
+          <a:lstStyle>
+            <a:lvl1pPr>
+              <a:defRPr sz="800">
+                <a:solidFill>
+                  <a:srgbClr val="6B7585"/>
+                </a:solidFill>
+              </a:defRPr>
+            </a:lvl1pPr>
+          </a:lstStyle>
+          <a:p>
+            <a:pPr algn="r"/>
+            <a:fld id="{F7021451-1387-4CA6-816F-3879F97B5CBC}" type="slidenum">
+              <a:rPr lang="en-US" b="0"/>
+              <a:t>16</a:t>
+            </a:fld>
+            <a:endParaRPr lang="en-US"/>
+          </a:p>
+        </p:txBody>
+      </p:sp>
+      <p:pic>
+        <p:nvPicPr>
+          <p:cNvPr id="26" name="cts logo" descr="cts-logo.png"/>
+          <p:cNvPicPr>
+            <a:picLocks noChangeAspect="1"/>
+          </p:cNvPicPr>
+          <p:nvPr/>
+        </p:nvPicPr>
+        <p:blipFill>
+          <a:blip r:embed="rId4"/>
+          <a:stretch>
+            <a:fillRect/>
+          </a:stretch>
+        </p:blipFill>
+        <p:spPr>
+          <a:xfrm>
+            <a:off x="7680959" y="182880"/>
+            <a:ext cx="960120" cy="539696"/>
+          </a:xfrm>
+          <a:prstGeom prst="rect">
+            <a:avLst/>
+          </a:prstGeom>
+        </p:spPr>
+      </p:pic>
+      <p:sp>
+        <p:nvSpPr>
+          <p:cNvPr id="4" name="Text 5b"/>
+          <p:cNvSpPr txBox="1"/>
+          <p:nvPr/>
+        </p:nvSpPr>
+        <p:spPr>
+          <a:xfrm>
+            <a:off x="4663440" y="3646931"/>
+            <a:ext cx="3703320" cy="952500"/>
+          </a:xfrm>
+          <a:prstGeom prst="rect">
+            <a:avLst/>
+          </a:prstGeom>
+          <a:noFill/>
+          <a:ln/>
+        </p:spPr>
+        <p:txBody>
+          <a:bodyPr wrap="square" lIns="0" tIns="0" rIns="0" bIns="0" rtlCol="0" anchor="t">
+            <a:normAutofit/>
+          </a:bodyPr>
+          <a:lstStyle/>
+          <a:p>
+            <a:pPr marL="342900" indent="-342900">
+              <a:lnSpc>
+                <a:spcPts val="1200"/>
+              </a:lnSpc>
+              <a:spcAft>
+                <a:spcPts val="400"/>
+              </a:spcAft>
+              <a:buSzPct val="100000"/>
+              <a:buChar char="•"/>
+            </a:pPr>
+            <a:r>
+              <a:rPr lang="en-US" sz="1000">
+                <a:solidFill>
+                  <a:srgbClr val="3A4453"/>
+                </a:solidFill>
+              </a:rPr>
+              <a:t>The main challenge is the volume of billable work rather than the gross margin percentage.</a:t>
+            </a:r>
+            <a:endParaRPr lang="en-US" sz="950"/>
+          </a:p>
+          <a:p>
+            <a:pPr marL="342900" indent="-342900">
+              <a:lnSpc>
+                <a:spcPts val="1200"/>
+              </a:lnSpc>
+              <a:spcAft>
+                <a:spcPts val="400"/>
+              </a:spcAft>
+              <a:buSzPct val="100000"/>
+              <a:buChar char="•"/>
+            </a:pPr>
+            <a:r>
+              <a:rPr lang="en-US" sz="1000">
+                <a:solidFill>
+                  <a:srgbClr val="3A4453"/>
+                </a:solidFill>
+              </a:rPr>
+              <a:t>Only 24.5 billable hours were recorded for September, indicating limited activity.</a:t>
+            </a:r>
+            <a:endParaRPr lang="en-US" sz="950"/>
+          </a:p>
+        </p:txBody>
+      </p:sp>
+    </p:spTree>
+  </p:cSld>
+  <p:clrMapOvr>
+    <a:masterClrMapping/>
+  </p:clrMapOvr>
+</p:sld>
+</file>
+
+<file path=ppt/slides/slide21.xml><?xml version="1.0" encoding="utf-8"?>
+<p:sld xmlns:a="http://schemas.openxmlformats.org/drawingml/2006/main" xmlns:r="http://schemas.openxmlformats.org/officeDocument/2006/relationships" xmlns:p="http://schemas.openxmlformats.org/presentationml/2006/main">
   <p:cSld name="Slide 12">
     <p:spTree>
       <p:nvGrpSpPr>
@@ -11423,7 +11878,7 @@
 </p:sld>
 </file>
 
-<file path=ppt/slides/slide21.xml><?xml version="1.0" encoding="utf-8"?>
+<file path=ppt/slides/slide22.xml><?xml version="1.0" encoding="utf-8"?>
 <p:sld xmlns:a="http://schemas.openxmlformats.org/drawingml/2006/main" xmlns:r="http://schemas.openxmlformats.org/officeDocument/2006/relationships" xmlns:p="http://schemas.openxmlformats.org/presentationml/2006/main">
   <p:cSld name="Slide 13">
     <p:spTree>
@@ -11829,7 +12284,7 @@
 </p:sld>
 </file>
 
-<file path=ppt/slides/slide22.xml><?xml version="1.0" encoding="utf-8"?>
+<file path=ppt/slides/slide23.xml><?xml version="1.0" encoding="utf-8"?>
 <p:sld xmlns:a="http://schemas.openxmlformats.org/drawingml/2006/main" xmlns:r="http://schemas.openxmlformats.org/officeDocument/2006/relationships" xmlns:p="http://schemas.openxmlformats.org/presentationml/2006/main">
   <p:cSld name="Slide 14">
     <p:spTree>
@@ -12235,7 +12690,7 @@
 </p:sld>
 </file>
 
-<file path=ppt/slides/slide23.xml><?xml version="1.0" encoding="utf-8"?>
+<file path=ppt/slides/slide24.xml><?xml version="1.0" encoding="utf-8"?>
 <p:sld xmlns:a="http://schemas.openxmlformats.org/drawingml/2006/main" xmlns:r="http://schemas.openxmlformats.org/officeDocument/2006/relationships" xmlns:p="http://schemas.openxmlformats.org/presentationml/2006/main">
   <p:cSld name="Slide 15">
     <p:spTree>
@@ -12518,7 +12973,7 @@
 </p:sld>
 </file>
 
-<file path=ppt/slides/slide24.xml><?xml version="1.0" encoding="utf-8"?>
+<file path=ppt/slides/slide25.xml><?xml version="1.0" encoding="utf-8"?>
 <p:sld xmlns:a="http://schemas.openxmlformats.org/drawingml/2006/main" xmlns:r="http://schemas.openxmlformats.org/officeDocument/2006/relationships" xmlns:p="http://schemas.openxmlformats.org/presentationml/2006/main">
   <p:cSld name="Slide 16">
     <p:spTree>
@@ -12924,7 +13379,7 @@
 </p:sld>
 </file>
 
-<file path=ppt/slides/slide25.xml><?xml version="1.0" encoding="utf-8"?>
+<file path=ppt/slides/slide26.xml><?xml version="1.0" encoding="utf-8"?>
 <p:sld xmlns:a="http://schemas.openxmlformats.org/drawingml/2006/main" xmlns:r="http://schemas.openxmlformats.org/officeDocument/2006/relationships" xmlns:p="http://schemas.openxmlformats.org/presentationml/2006/main">
   <p:cSld name="Slide 17">
     <p:spTree>
@@ -13330,7 +13785,7 @@
 </p:sld>
 </file>
 
-<file path=ppt/slides/slide26.xml><?xml version="1.0" encoding="utf-8"?>
+<file path=ppt/slides/slide27.xml><?xml version="1.0" encoding="utf-8"?>
 <p:sld xmlns:a="http://schemas.openxmlformats.org/drawingml/2006/main" xmlns:r="http://schemas.openxmlformats.org/officeDocument/2006/relationships" xmlns:p="http://schemas.openxmlformats.org/presentationml/2006/main">
   <p:cSld name="Slide 18">
     <p:spTree>
@@ -13736,7 +14191,7 @@
 </p:sld>
 </file>
 
-<file path=ppt/slides/slide27.xml><?xml version="1.0" encoding="utf-8"?>
+<file path=ppt/slides/slide28.xml><?xml version="1.0" encoding="utf-8"?>
 <p:sld xmlns:a="http://schemas.openxmlformats.org/drawingml/2006/main" xmlns:r="http://schemas.openxmlformats.org/officeDocument/2006/relationships" xmlns:p="http://schemas.openxmlformats.org/presentationml/2006/main">
   <p:cSld name="Slide 19">
     <p:spTree>
@@ -14121,7 +14576,7 @@
 </p:sld>
 </file>
 
-<file path=ppt/slides/slide28.xml><?xml version="1.0" encoding="utf-8"?>
+<file path=ppt/slides/slide29.xml><?xml version="1.0" encoding="utf-8"?>
 <p:sld xmlns:a="http://schemas.openxmlformats.org/drawingml/2006/main" xmlns:r="http://schemas.openxmlformats.org/officeDocument/2006/relationships" xmlns:p="http://schemas.openxmlformats.org/presentationml/2006/main">
   <p:cSld name="Slide 20">
     <p:spTree>
@@ -14393,412 +14848,6 @@
               <a:t>Who pays us, how much, and how slowly</a:t>
             </a:r>
             <a:endParaRPr lang="en-US" sz="1200"/>
-          </a:p>
-        </p:txBody>
-      </p:sp>
-    </p:spTree>
-  </p:cSld>
-  <p:clrMapOvr>
-    <a:masterClrMapping/>
-  </p:clrMapOvr>
-</p:sld>
-</file>
-
-<file path=ppt/slides/slide29.xml><?xml version="1.0" encoding="utf-8"?>
-<p:sld xmlns:a="http://schemas.openxmlformats.org/drawingml/2006/main" xmlns:r="http://schemas.openxmlformats.org/officeDocument/2006/relationships" xmlns:p="http://schemas.openxmlformats.org/presentationml/2006/main">
-  <p:cSld name="Slide 21">
-    <p:spTree>
-      <p:nvGrpSpPr>
-        <p:cNvPr id="1" name=""/>
-        <p:cNvGrpSpPr/>
-        <p:nvPr/>
-      </p:nvGrpSpPr>
-      <p:grpSpPr>
-        <a:xfrm>
-          <a:off x="0" y="0"/>
-          <a:ext cx="0" cy="0"/>
-          <a:chOff x="0" y="0"/>
-          <a:chExt cx="0" cy="0"/>
-        </a:xfrm>
-      </p:grpSpPr>
-      <p:pic>
-        <p:nvPicPr>
-          <p:cNvPr id="27" name="snip top10" descr="top10.png"/>
-          <p:cNvPicPr>
-            <a:picLocks noChangeAspect="1"/>
-          </p:cNvPicPr>
-          <p:nvPr/>
-        </p:nvPicPr>
-        <p:blipFill>
-          <a:blip r:embed="rId5"/>
-          <a:stretch>
-            <a:fillRect/>
-          </a:stretch>
-        </p:blipFill>
-        <p:spPr>
-          <a:xfrm>
-            <a:off x="2639119" y="1005840"/>
-            <a:ext cx="3865761" cy="1964997"/>
-          </a:xfrm>
-          <a:prstGeom prst="rect">
-            <a:avLst/>
-          </a:prstGeom>
-        </p:spPr>
-      </p:pic>
-      <p:sp>
-        <p:nvSpPr>
-          <p:cNvPr id="2" name="Text 0"/>
-          <p:cNvSpPr txBox="1"/>
-          <p:nvPr/>
-        </p:nvSpPr>
-        <p:spPr>
-          <a:xfrm>
-            <a:off x="502920" y="365760"/>
-            <a:ext cx="6400800" cy="274320"/>
-          </a:xfrm>
-          <a:prstGeom prst="rect">
-            <a:avLst/>
-          </a:prstGeom>
-          <a:noFill/>
-          <a:ln/>
-        </p:spPr>
-        <p:txBody>
-          <a:bodyPr wrap="square" lIns="0" tIns="0" rIns="0" bIns="0" rtlCol="0" anchor="ctr"/>
-          <a:lstStyle/>
-          <a:p>
-            <a:pPr marL="0" indent="0">
-              <a:buNone/>
-            </a:pPr>
-            <a:r>
-              <a:rPr lang="en-US" sz="950" b="1" kern="0" spc="220">
-                <a:solidFill>
-                  <a:srgbClr val="122B82"/>
-                </a:solidFill>
-              </a:rPr>
-              <a:t>CUSTOMERS AND CASH</a:t>
-            </a:r>
-            <a:endParaRPr lang="en-US" sz="950"/>
-          </a:p>
-        </p:txBody>
-      </p:sp>
-      <p:sp>
-        <p:nvSpPr>
-          <p:cNvPr id="3" name="Text 1"/>
-          <p:cNvSpPr txBox="1"/>
-          <p:nvPr/>
-        </p:nvSpPr>
-        <p:spPr>
-          <a:xfrm>
-            <a:off x="502920" y="640080"/>
-            <a:ext cx="7315200" cy="365760"/>
-          </a:xfrm>
-          <a:prstGeom prst="rect">
-            <a:avLst/>
-          </a:prstGeom>
-          <a:noFill/>
-          <a:ln/>
-        </p:spPr>
-        <p:txBody>
-          <a:bodyPr wrap="square" lIns="0" tIns="0" rIns="0" bIns="0" rtlCol="0" anchor="ctr"/>
-          <a:lstStyle/>
-          <a:p>
-            <a:pPr marL="0" indent="0" algn="ctr">
-              <a:buNone/>
-            </a:pPr>
-            <a:r>
-              <a:rPr lang="en-US" sz="2200" b="1">
-                <a:solidFill>
-                  <a:srgbClr val="242C39"/>
-                </a:solidFill>
-              </a:rPr>
-              <a:t>Top ten customers, year to date</a:t>
-            </a:r>
-            <a:endParaRPr lang="en-US" sz="2700"/>
-          </a:p>
-        </p:txBody>
-      </p:sp>
-      <p:sp>
-        <p:nvSpPr>
-          <p:cNvPr id="6" name="commentary panel"/>
-          <p:cNvSpPr/>
-          <p:nvPr/>
-        </p:nvSpPr>
-        <p:spPr>
-          <a:xfrm>
-            <a:off x="502920" y="3062278"/>
-            <a:ext cx="8138160" cy="1564585"/>
-          </a:xfrm>
-          <a:prstGeom prst="rect">
-            <a:avLst/>
-          </a:prstGeom>
-          <a:solidFill>
-            <a:srgbClr val="E8F9F8"/>
-          </a:solidFill>
-          <a:ln/>
-        </p:spPr>
-        <p:txBody>
-          <a:bodyPr/>
-          <a:lstStyle/>
-          <a:p>
-            <a:endParaRPr lang="en-AU"/>
-          </a:p>
-        </p:txBody>
-      </p:sp>
-      <p:sp>
-        <p:nvSpPr>
-          <p:cNvPr id="7" name="Text 4"/>
-          <p:cNvSpPr txBox="1"/>
-          <p:nvPr/>
-        </p:nvSpPr>
-        <p:spPr>
-          <a:xfrm>
-            <a:off x="685800" y="3135430"/>
-            <a:ext cx="2743200" cy="228600"/>
-          </a:xfrm>
-          <a:prstGeom prst="rect">
-            <a:avLst/>
-          </a:prstGeom>
-          <a:noFill/>
-          <a:ln/>
-        </p:spPr>
-        <p:txBody>
-          <a:bodyPr wrap="square" lIns="0" tIns="0" rIns="0" bIns="0" rtlCol="0" anchor="ctr"/>
-          <a:lstStyle/>
-          <a:p>
-            <a:pPr marL="0" indent="0">
-              <a:buNone/>
-            </a:pPr>
-            <a:r>
-              <a:rPr lang="en-US" sz="900" b="1" kern="0" spc="180">
-                <a:solidFill>
-                  <a:srgbClr val="005358"/>
-                </a:solidFill>
-              </a:rPr>
-              <a:t>COMMENTARY</a:t>
-            </a:r>
-            <a:endParaRPr lang="en-US" sz="900"/>
-          </a:p>
-        </p:txBody>
-      </p:sp>
-      <p:sp>
-        <p:nvSpPr>
-          <p:cNvPr id="8" name="Text 5"/>
-          <p:cNvSpPr txBox="1"/>
-          <p:nvPr/>
-        </p:nvSpPr>
-        <p:spPr>
-          <a:xfrm>
-            <a:off x="685800" y="3309166"/>
-            <a:ext cx="3703320" cy="1290265"/>
-          </a:xfrm>
-          <a:prstGeom prst="rect">
-            <a:avLst/>
-          </a:prstGeom>
-          <a:noFill/>
-          <a:ln/>
-        </p:spPr>
-        <p:txBody>
-          <a:bodyPr wrap="square" lIns="0" tIns="0" rIns="0" bIns="0" rtlCol="0" anchor="t">
-            <a:normAutofit fontScale="77500" lnSpcReduction="20000"/>
-          </a:bodyPr>
-          <a:lstStyle/>
-          <a:p>
-            <a:pPr marL="342900" indent="-342900">
-              <a:lnSpc>
-                <a:spcPts val="1150"/>
-              </a:lnSpc>
-              <a:spcAft>
-                <a:spcPts val="400"/>
-              </a:spcAft>
-              <a:buSzPct val="100000"/>
-              <a:buChar char="•"/>
-            </a:pPr>
-            <a:r>
-              <a:rPr lang="en-US" sz="1000">
-                <a:solidFill>
-                  <a:srgbClr val="3A4453"/>
-                </a:solidFill>
-              </a:rPr>
-              <a:t>The top three customers account for approximately 49% of year-to-date revenue.</a:t>
-            </a:r>
-            <a:endParaRPr lang="en-US" sz="900"/>
-          </a:p>
-          <a:p>
-            <a:pPr marL="342900" indent="-342900">
-              <a:lnSpc>
-                <a:spcPts val="1150"/>
-              </a:lnSpc>
-              <a:spcAft>
-                <a:spcPts val="400"/>
-              </a:spcAft>
-              <a:buSzPct val="100000"/>
-              <a:buChar char="•"/>
-            </a:pPr>
-            <a:r>
-              <a:rPr lang="en-US" sz="1000">
-                <a:solidFill>
-                  <a:srgbClr val="3A4453"/>
-                </a:solidFill>
-              </a:rPr>
-              <a:t>The top ten contribute 76%, leaving 24% from all other customers combined.</a:t>
-            </a:r>
-            <a:endParaRPr lang="en-US" sz="900"/>
-          </a:p>
-          <a:p>
-            <a:pPr marL="342900" indent="-342900">
-              <a:lnSpc>
-                <a:spcPts val="1150"/>
-              </a:lnSpc>
-              <a:spcAft>
-                <a:spcPts val="400"/>
-              </a:spcAft>
-              <a:buSzPct val="100000"/>
-              <a:buChar char="•"/>
-            </a:pPr>
-            <a:r>
-              <a:rPr lang="en-US" sz="1000">
-                <a:solidFill>
-                  <a:srgbClr val="3A4453"/>
-                </a:solidFill>
-              </a:rPr>
-              <a:t>Deloitte Services represents approximately 25% of revenue at $402k, creating significant customer concentration risk.</a:t>
-            </a:r>
-            <a:endParaRPr lang="en-US" sz="900"/>
-          </a:p>
-        </p:txBody>
-      </p:sp>
-      <p:sp>
-        <p:nvSpPr>
-          <p:cNvPr id="25" name="Slide Number Placeholder 0"/>
-          <p:cNvSpPr>
-            <a:spLocks noGrp="1"/>
-          </p:cNvSpPr>
-          <p:nvPr>
-            <p:ph type="sldNum" sz="quarter" idx="4294967295"/>
-          </p:nvPr>
-        </p:nvSpPr>
-        <p:spPr>
-          <a:xfrm>
-            <a:off x="8092440" y="4736592"/>
-            <a:ext cx="548640" cy="228600"/>
-          </a:xfrm>
-          <a:prstGeom prst="rect">
-            <a:avLst/>
-          </a:prstGeom>
-          <a:extLst>
-            <a:ext uri="{C572A759-6A51-4108-AA02-DFA0A04FC94B}">
-              <ma14:wrappingTextBoxFlag xmlns="" xmlns:ma14="http://schemas.microsoft.com/office/mac/drawingml/2011/main" val="0"/>
-            </a:ext>
-          </a:extLst>
-        </p:spPr>
-        <p:txBody>
-          <a:bodyPr/>
-          <a:lstStyle>
-            <a:lvl1pPr>
-              <a:defRPr sz="800">
-                <a:solidFill>
-                  <a:srgbClr val="6B7585"/>
-                </a:solidFill>
-              </a:defRPr>
-            </a:lvl1pPr>
-          </a:lstStyle>
-          <a:p>
-            <a:pPr algn="r"/>
-            <a:fld id="{F7021451-1387-4CA6-816F-3879F97B5CBC}" type="slidenum">
-              <a:rPr lang="en-US" b="0"/>
-              <a:t>26</a:t>
-            </a:fld>
-            <a:endParaRPr lang="en-US"/>
-          </a:p>
-        </p:txBody>
-      </p:sp>
-      <p:pic>
-        <p:nvPicPr>
-          <p:cNvPr id="26" name="cts logo" descr="cts-logo.png"/>
-          <p:cNvPicPr>
-            <a:picLocks noChangeAspect="1"/>
-          </p:cNvPicPr>
-          <p:nvPr/>
-        </p:nvPicPr>
-        <p:blipFill>
-          <a:blip r:embed="rId4"/>
-          <a:stretch>
-            <a:fillRect/>
-          </a:stretch>
-        </p:blipFill>
-        <p:spPr>
-          <a:xfrm>
-            <a:off x="7680959" y="182880"/>
-            <a:ext cx="960120" cy="539696"/>
-          </a:xfrm>
-          <a:prstGeom prst="rect">
-            <a:avLst/>
-          </a:prstGeom>
-        </p:spPr>
-      </p:pic>
-      <p:sp>
-        <p:nvSpPr>
-          <p:cNvPr id="8" name="Text 5b"/>
-          <p:cNvSpPr txBox="1"/>
-          <p:nvPr/>
-        </p:nvSpPr>
-        <p:spPr>
-          <a:xfrm>
-            <a:off x="4663440" y="3309166"/>
-            <a:ext cx="3703320" cy="1290265"/>
-          </a:xfrm>
-          <a:prstGeom prst="rect">
-            <a:avLst/>
-          </a:prstGeom>
-          <a:noFill/>
-          <a:ln/>
-        </p:spPr>
-        <p:txBody>
-          <a:bodyPr wrap="square" lIns="0" tIns="0" rIns="0" bIns="0" rtlCol="0" anchor="t">
-            <a:normAutofit fontScale="77500" lnSpcReduction="20000"/>
-          </a:bodyPr>
-          <a:lstStyle/>
-          <a:p>
-            <a:pPr marL="342900" indent="-342900">
-              <a:lnSpc>
-                <a:spcPts val="1150"/>
-              </a:lnSpc>
-              <a:spcAft>
-                <a:spcPts val="400"/>
-              </a:spcAft>
-              <a:buSzPct val="100000"/>
-              <a:buChar char="•"/>
-            </a:pPr>
-            <a:r>
-              <a:rPr lang="en-US" sz="1000">
-                <a:solidFill>
-                  <a:srgbClr val="3A4453"/>
-                </a:solidFill>
-              </a:rPr>
-              <a:t>Aware Super contributed $285k during the quarter, mainly from a one-off September project.</a:t>
-            </a:r>
-            <a:endParaRPr lang="en-US" sz="900"/>
-          </a:p>
-          <a:p>
-            <a:pPr marL="342900" indent="-342900">
-              <a:lnSpc>
-                <a:spcPts val="1150"/>
-              </a:lnSpc>
-              <a:spcAft>
-                <a:spcPts val="400"/>
-              </a:spcAft>
-              <a:buSzPct val="100000"/>
-              <a:buChar char="•"/>
-            </a:pPr>
-            <a:r>
-              <a:rPr lang="en-US" sz="1000">
-                <a:solidFill>
-                  <a:srgbClr val="3A4453"/>
-                </a:solidFill>
-              </a:rPr>
-              <a:t>Revenue drops considerably beyond the largest customers, highlighting the importance of growing the wider customer base.</a:t>
-            </a:r>
-            <a:endParaRPr lang="en-US" sz="900"/>
           </a:p>
         </p:txBody>
       </p:sp>
@@ -17064,6 +17113,412 @@
 
 <file path=ppt/slides/slide30.xml><?xml version="1.0" encoding="utf-8"?>
 <p:sld xmlns:a="http://schemas.openxmlformats.org/drawingml/2006/main" xmlns:r="http://schemas.openxmlformats.org/officeDocument/2006/relationships" xmlns:p="http://schemas.openxmlformats.org/presentationml/2006/main">
+  <p:cSld name="Slide 21">
+    <p:spTree>
+      <p:nvGrpSpPr>
+        <p:cNvPr id="1" name=""/>
+        <p:cNvGrpSpPr/>
+        <p:nvPr/>
+      </p:nvGrpSpPr>
+      <p:grpSpPr>
+        <a:xfrm>
+          <a:off x="0" y="0"/>
+          <a:ext cx="0" cy="0"/>
+          <a:chOff x="0" y="0"/>
+          <a:chExt cx="0" cy="0"/>
+        </a:xfrm>
+      </p:grpSpPr>
+      <p:pic>
+        <p:nvPicPr>
+          <p:cNvPr id="27" name="snip top10" descr="top10.png"/>
+          <p:cNvPicPr>
+            <a:picLocks noChangeAspect="1"/>
+          </p:cNvPicPr>
+          <p:nvPr/>
+        </p:nvPicPr>
+        <p:blipFill>
+          <a:blip r:embed="rId5"/>
+          <a:stretch>
+            <a:fillRect/>
+          </a:stretch>
+        </p:blipFill>
+        <p:spPr>
+          <a:xfrm>
+            <a:off x="2639119" y="1005840"/>
+            <a:ext cx="3865761" cy="1964997"/>
+          </a:xfrm>
+          <a:prstGeom prst="rect">
+            <a:avLst/>
+          </a:prstGeom>
+        </p:spPr>
+      </p:pic>
+      <p:sp>
+        <p:nvSpPr>
+          <p:cNvPr id="2" name="Text 0"/>
+          <p:cNvSpPr txBox="1"/>
+          <p:nvPr/>
+        </p:nvSpPr>
+        <p:spPr>
+          <a:xfrm>
+            <a:off x="502920" y="365760"/>
+            <a:ext cx="6400800" cy="274320"/>
+          </a:xfrm>
+          <a:prstGeom prst="rect">
+            <a:avLst/>
+          </a:prstGeom>
+          <a:noFill/>
+          <a:ln/>
+        </p:spPr>
+        <p:txBody>
+          <a:bodyPr wrap="square" lIns="0" tIns="0" rIns="0" bIns="0" rtlCol="0" anchor="ctr"/>
+          <a:lstStyle/>
+          <a:p>
+            <a:pPr marL="0" indent="0">
+              <a:buNone/>
+            </a:pPr>
+            <a:r>
+              <a:rPr lang="en-US" sz="950" b="1" kern="0" spc="220">
+                <a:solidFill>
+                  <a:srgbClr val="122B82"/>
+                </a:solidFill>
+              </a:rPr>
+              <a:t>CUSTOMERS AND CASH</a:t>
+            </a:r>
+            <a:endParaRPr lang="en-US" sz="950"/>
+          </a:p>
+        </p:txBody>
+      </p:sp>
+      <p:sp>
+        <p:nvSpPr>
+          <p:cNvPr id="3" name="Text 1"/>
+          <p:cNvSpPr txBox="1"/>
+          <p:nvPr/>
+        </p:nvSpPr>
+        <p:spPr>
+          <a:xfrm>
+            <a:off x="502920" y="640080"/>
+            <a:ext cx="7315200" cy="365760"/>
+          </a:xfrm>
+          <a:prstGeom prst="rect">
+            <a:avLst/>
+          </a:prstGeom>
+          <a:noFill/>
+          <a:ln/>
+        </p:spPr>
+        <p:txBody>
+          <a:bodyPr wrap="square" lIns="0" tIns="0" rIns="0" bIns="0" rtlCol="0" anchor="ctr"/>
+          <a:lstStyle/>
+          <a:p>
+            <a:pPr marL="0" indent="0" algn="ctr">
+              <a:buNone/>
+            </a:pPr>
+            <a:r>
+              <a:rPr lang="en-US" sz="2200" b="1">
+                <a:solidFill>
+                  <a:srgbClr val="242C39"/>
+                </a:solidFill>
+              </a:rPr>
+              <a:t>Top ten customers, year to date</a:t>
+            </a:r>
+            <a:endParaRPr lang="en-US" sz="2700"/>
+          </a:p>
+        </p:txBody>
+      </p:sp>
+      <p:sp>
+        <p:nvSpPr>
+          <p:cNvPr id="6" name="commentary panel"/>
+          <p:cNvSpPr/>
+          <p:nvPr/>
+        </p:nvSpPr>
+        <p:spPr>
+          <a:xfrm>
+            <a:off x="502920" y="3062278"/>
+            <a:ext cx="8138160" cy="1564585"/>
+          </a:xfrm>
+          <a:prstGeom prst="rect">
+            <a:avLst/>
+          </a:prstGeom>
+          <a:solidFill>
+            <a:srgbClr val="E8F9F8"/>
+          </a:solidFill>
+          <a:ln/>
+        </p:spPr>
+        <p:txBody>
+          <a:bodyPr/>
+          <a:lstStyle/>
+          <a:p>
+            <a:endParaRPr lang="en-AU"/>
+          </a:p>
+        </p:txBody>
+      </p:sp>
+      <p:sp>
+        <p:nvSpPr>
+          <p:cNvPr id="7" name="Text 4"/>
+          <p:cNvSpPr txBox="1"/>
+          <p:nvPr/>
+        </p:nvSpPr>
+        <p:spPr>
+          <a:xfrm>
+            <a:off x="685800" y="3135430"/>
+            <a:ext cx="2743200" cy="228600"/>
+          </a:xfrm>
+          <a:prstGeom prst="rect">
+            <a:avLst/>
+          </a:prstGeom>
+          <a:noFill/>
+          <a:ln/>
+        </p:spPr>
+        <p:txBody>
+          <a:bodyPr wrap="square" lIns="0" tIns="0" rIns="0" bIns="0" rtlCol="0" anchor="ctr"/>
+          <a:lstStyle/>
+          <a:p>
+            <a:pPr marL="0" indent="0">
+              <a:buNone/>
+            </a:pPr>
+            <a:r>
+              <a:rPr lang="en-US" sz="900" b="1" kern="0" spc="180">
+                <a:solidFill>
+                  <a:srgbClr val="005358"/>
+                </a:solidFill>
+              </a:rPr>
+              <a:t>COMMENTARY</a:t>
+            </a:r>
+            <a:endParaRPr lang="en-US" sz="900"/>
+          </a:p>
+        </p:txBody>
+      </p:sp>
+      <p:sp>
+        <p:nvSpPr>
+          <p:cNvPr id="8" name="Text 5"/>
+          <p:cNvSpPr txBox="1"/>
+          <p:nvPr/>
+        </p:nvSpPr>
+        <p:spPr>
+          <a:xfrm>
+            <a:off x="685800" y="3309166"/>
+            <a:ext cx="3703320" cy="1290265"/>
+          </a:xfrm>
+          <a:prstGeom prst="rect">
+            <a:avLst/>
+          </a:prstGeom>
+          <a:noFill/>
+          <a:ln/>
+        </p:spPr>
+        <p:txBody>
+          <a:bodyPr wrap="square" lIns="0" tIns="0" rIns="0" bIns="0" rtlCol="0" anchor="t">
+            <a:normAutofit fontScale="77500" lnSpcReduction="20000"/>
+          </a:bodyPr>
+          <a:lstStyle/>
+          <a:p>
+            <a:pPr marL="342900" indent="-342900">
+              <a:lnSpc>
+                <a:spcPts val="1150"/>
+              </a:lnSpc>
+              <a:spcAft>
+                <a:spcPts val="400"/>
+              </a:spcAft>
+              <a:buSzPct val="100000"/>
+              <a:buChar char="•"/>
+            </a:pPr>
+            <a:r>
+              <a:rPr lang="en-US" sz="1000">
+                <a:solidFill>
+                  <a:srgbClr val="3A4453"/>
+                </a:solidFill>
+              </a:rPr>
+              <a:t>The top three customers account for approximately 49% of year-to-date revenue.</a:t>
+            </a:r>
+            <a:endParaRPr lang="en-US" sz="900"/>
+          </a:p>
+          <a:p>
+            <a:pPr marL="342900" indent="-342900">
+              <a:lnSpc>
+                <a:spcPts val="1150"/>
+              </a:lnSpc>
+              <a:spcAft>
+                <a:spcPts val="400"/>
+              </a:spcAft>
+              <a:buSzPct val="100000"/>
+              <a:buChar char="•"/>
+            </a:pPr>
+            <a:r>
+              <a:rPr lang="en-US" sz="1000">
+                <a:solidFill>
+                  <a:srgbClr val="3A4453"/>
+                </a:solidFill>
+              </a:rPr>
+              <a:t>The top ten contribute 76%, leaving 24% from all other customers combined.</a:t>
+            </a:r>
+            <a:endParaRPr lang="en-US" sz="900"/>
+          </a:p>
+          <a:p>
+            <a:pPr marL="342900" indent="-342900">
+              <a:lnSpc>
+                <a:spcPts val="1150"/>
+              </a:lnSpc>
+              <a:spcAft>
+                <a:spcPts val="400"/>
+              </a:spcAft>
+              <a:buSzPct val="100000"/>
+              <a:buChar char="•"/>
+            </a:pPr>
+            <a:r>
+              <a:rPr lang="en-US" sz="1000">
+                <a:solidFill>
+                  <a:srgbClr val="3A4453"/>
+                </a:solidFill>
+              </a:rPr>
+              <a:t>Deloitte Services represents approximately 25% of revenue at $402k, creating significant customer concentration risk.</a:t>
+            </a:r>
+            <a:endParaRPr lang="en-US" sz="900"/>
+          </a:p>
+        </p:txBody>
+      </p:sp>
+      <p:sp>
+        <p:nvSpPr>
+          <p:cNvPr id="25" name="Slide Number Placeholder 0"/>
+          <p:cNvSpPr>
+            <a:spLocks noGrp="1"/>
+          </p:cNvSpPr>
+          <p:nvPr>
+            <p:ph type="sldNum" sz="quarter" idx="4294967295"/>
+          </p:nvPr>
+        </p:nvSpPr>
+        <p:spPr>
+          <a:xfrm>
+            <a:off x="8092440" y="4736592"/>
+            <a:ext cx="548640" cy="228600"/>
+          </a:xfrm>
+          <a:prstGeom prst="rect">
+            <a:avLst/>
+          </a:prstGeom>
+          <a:extLst>
+            <a:ext uri="{C572A759-6A51-4108-AA02-DFA0A04FC94B}">
+              <ma14:wrappingTextBoxFlag xmlns="" xmlns:ma14="http://schemas.microsoft.com/office/mac/drawingml/2011/main" val="0"/>
+            </a:ext>
+          </a:extLst>
+        </p:spPr>
+        <p:txBody>
+          <a:bodyPr/>
+          <a:lstStyle>
+            <a:lvl1pPr>
+              <a:defRPr sz="800">
+                <a:solidFill>
+                  <a:srgbClr val="6B7585"/>
+                </a:solidFill>
+              </a:defRPr>
+            </a:lvl1pPr>
+          </a:lstStyle>
+          <a:p>
+            <a:pPr algn="r"/>
+            <a:fld id="{F7021451-1387-4CA6-816F-3879F97B5CBC}" type="slidenum">
+              <a:rPr lang="en-US" b="0"/>
+              <a:t>26</a:t>
+            </a:fld>
+            <a:endParaRPr lang="en-US"/>
+          </a:p>
+        </p:txBody>
+      </p:sp>
+      <p:pic>
+        <p:nvPicPr>
+          <p:cNvPr id="26" name="cts logo" descr="cts-logo.png"/>
+          <p:cNvPicPr>
+            <a:picLocks noChangeAspect="1"/>
+          </p:cNvPicPr>
+          <p:nvPr/>
+        </p:nvPicPr>
+        <p:blipFill>
+          <a:blip r:embed="rId4"/>
+          <a:stretch>
+            <a:fillRect/>
+          </a:stretch>
+        </p:blipFill>
+        <p:spPr>
+          <a:xfrm>
+            <a:off x="7680959" y="182880"/>
+            <a:ext cx="960120" cy="539696"/>
+          </a:xfrm>
+          <a:prstGeom prst="rect">
+            <a:avLst/>
+          </a:prstGeom>
+        </p:spPr>
+      </p:pic>
+      <p:sp>
+        <p:nvSpPr>
+          <p:cNvPr id="8" name="Text 5b"/>
+          <p:cNvSpPr txBox="1"/>
+          <p:nvPr/>
+        </p:nvSpPr>
+        <p:spPr>
+          <a:xfrm>
+            <a:off x="4663440" y="3309166"/>
+            <a:ext cx="3703320" cy="1290265"/>
+          </a:xfrm>
+          <a:prstGeom prst="rect">
+            <a:avLst/>
+          </a:prstGeom>
+          <a:noFill/>
+          <a:ln/>
+        </p:spPr>
+        <p:txBody>
+          <a:bodyPr wrap="square" lIns="0" tIns="0" rIns="0" bIns="0" rtlCol="0" anchor="t">
+            <a:normAutofit fontScale="77500" lnSpcReduction="20000"/>
+          </a:bodyPr>
+          <a:lstStyle/>
+          <a:p>
+            <a:pPr marL="342900" indent="-342900">
+              <a:lnSpc>
+                <a:spcPts val="1150"/>
+              </a:lnSpc>
+              <a:spcAft>
+                <a:spcPts val="400"/>
+              </a:spcAft>
+              <a:buSzPct val="100000"/>
+              <a:buChar char="•"/>
+            </a:pPr>
+            <a:r>
+              <a:rPr lang="en-US" sz="1000">
+                <a:solidFill>
+                  <a:srgbClr val="3A4453"/>
+                </a:solidFill>
+              </a:rPr>
+              <a:t>Aware Super contributed $285k during the quarter, mainly from a one-off September project.</a:t>
+            </a:r>
+            <a:endParaRPr lang="en-US" sz="900"/>
+          </a:p>
+          <a:p>
+            <a:pPr marL="342900" indent="-342900">
+              <a:lnSpc>
+                <a:spcPts val="1150"/>
+              </a:lnSpc>
+              <a:spcAft>
+                <a:spcPts val="400"/>
+              </a:spcAft>
+              <a:buSzPct val="100000"/>
+              <a:buChar char="•"/>
+            </a:pPr>
+            <a:r>
+              <a:rPr lang="en-US" sz="1000">
+                <a:solidFill>
+                  <a:srgbClr val="3A4453"/>
+                </a:solidFill>
+              </a:rPr>
+              <a:t>Revenue drops considerably beyond the largest customers, highlighting the importance of growing the wider customer base.</a:t>
+            </a:r>
+            <a:endParaRPr lang="en-US" sz="900"/>
+          </a:p>
+        </p:txBody>
+      </p:sp>
+    </p:spTree>
+  </p:cSld>
+  <p:clrMapOvr>
+    <a:masterClrMapping/>
+  </p:clrMapOvr>
+</p:sld>
+</file>
+
+<file path=ppt/slides/slide31.xml><?xml version="1.0" encoding="utf-8"?>
+<p:sld xmlns:a="http://schemas.openxmlformats.org/drawingml/2006/main" xmlns:r="http://schemas.openxmlformats.org/officeDocument/2006/relationships" xmlns:p="http://schemas.openxmlformats.org/presentationml/2006/main">
   <p:cSld name="Slide 22">
     <p:spTree>
       <p:nvGrpSpPr>
@@ -17468,7 +17923,7 @@
 </p:sld>
 </file>
 
-<file path=ppt/slides/slide31.xml><?xml version="1.0" encoding="utf-8"?>
+<file path=ppt/slides/slide32.xml><?xml version="1.0" encoding="utf-8"?>
 <p:sld xmlns:a="http://schemas.openxmlformats.org/drawingml/2006/main" xmlns:r="http://schemas.openxmlformats.org/officeDocument/2006/relationships" xmlns:p="http://schemas.openxmlformats.org/presentationml/2006/main">
   <p:cSld name="Slide 23">
     <p:spTree>
@@ -17874,7 +18329,7 @@
 </p:sld>
 </file>
 
-<file path=ppt/slides/slide32.xml><?xml version="1.0" encoding="utf-8"?>
+<file path=ppt/slides/slide33.xml><?xml version="1.0" encoding="utf-8"?>
 <p:sld xmlns:a="http://schemas.openxmlformats.org/drawingml/2006/main" xmlns:r="http://schemas.openxmlformats.org/officeDocument/2006/relationships" xmlns:p="http://schemas.openxmlformats.org/presentationml/2006/main">
   <p:cSld name="Slide 24">
     <p:spTree>
@@ -18157,7 +18612,7 @@
 </p:sld>
 </file>
 
-<file path=ppt/slides/slide33.xml><?xml version="1.0" encoding="utf-8"?>
+<file path=ppt/slides/slide34.xml><?xml version="1.0" encoding="utf-8"?>
 <p:sld xmlns:a="http://schemas.openxmlformats.org/drawingml/2006/main" xmlns:r="http://schemas.openxmlformats.org/officeDocument/2006/relationships" xmlns:p="http://schemas.openxmlformats.org/presentationml/2006/main">
   <p:cSld name="Slide 25">
     <p:spTree>
@@ -18542,7 +18997,7 @@
 </p:sld>
 </file>
 
-<file path=ppt/slides/slide34.xml><?xml version="1.0" encoding="utf-8"?>
+<file path=ppt/slides/slide35.xml><?xml version="1.0" encoding="utf-8"?>
 <p:sld xmlns:a="http://schemas.openxmlformats.org/drawingml/2006/main" xmlns:r="http://schemas.openxmlformats.org/officeDocument/2006/relationships" xmlns:p="http://schemas.openxmlformats.org/presentationml/2006/main">
   <p:cSld name="Slide 26">
     <p:spTree>
@@ -18948,7 +19403,7 @@
 </p:sld>
 </file>
 
-<file path=ppt/slides/slide35.xml><?xml version="1.0" encoding="utf-8"?>
+<file path=ppt/slides/slide36.xml><?xml version="1.0" encoding="utf-8"?>
 <p:sld xmlns:a="http://schemas.openxmlformats.org/drawingml/2006/main" xmlns:r="http://schemas.openxmlformats.org/officeDocument/2006/relationships" xmlns:p="http://schemas.openxmlformats.org/presentationml/2006/main">
   <p:cSld name="Slide 27">
     <p:spTree>
@@ -19354,7 +19809,7 @@
 </p:sld>
 </file>
 
-<file path=ppt/slides/slide36.xml><?xml version="1.0" encoding="utf-8"?>
+<file path=ppt/slides/slide37.xml><?xml version="1.0" encoding="utf-8"?>
 <p:sld xmlns:a="http://schemas.openxmlformats.org/drawingml/2006/main" xmlns:r="http://schemas.openxmlformats.org/officeDocument/2006/relationships" xmlns:p="http://schemas.openxmlformats.org/presentationml/2006/main">
   <p:cSld name="Slide 28">
     <p:spTree>
@@ -19637,7 +20092,7 @@
 </p:sld>
 </file>
 
-<file path=ppt/slides/slide37.xml><?xml version="1.0" encoding="utf-8"?>
+<file path=ppt/slides/slide38.xml><?xml version="1.0" encoding="utf-8"?>
 <p:sld xmlns:a="http://schemas.openxmlformats.org/drawingml/2006/main" xmlns:r="http://schemas.openxmlformats.org/officeDocument/2006/relationships" xmlns:p="http://schemas.openxmlformats.org/presentationml/2006/main">
   <p:cSld name="Slide 29">
     <p:spTree>
@@ -20043,7 +20498,7 @@
 </p:sld>
 </file>
 
-<file path=ppt/slides/slide38.xml><?xml version="1.0" encoding="utf-8"?>
+<file path=ppt/slides/slide39.xml><?xml version="1.0" encoding="utf-8"?>
 <p:sld xmlns:a="http://schemas.openxmlformats.org/drawingml/2006/main" xmlns:r="http://schemas.openxmlformats.org/officeDocument/2006/relationships" xmlns:p="http://schemas.openxmlformats.org/presentationml/2006/main">
   <p:cSld name="Slide 30">
     <p:spTree>
@@ -22189,7 +22644,290 @@
 </p:sld>
 </file>
 
-<file path=ppt/slides/slide39.xml><?xml version="1.0" encoding="utf-8"?>
+<file path=ppt/slides/slide4.xml><?xml version="1.0" encoding="utf-8"?>
+<p:sld xmlns:a="http://schemas.openxmlformats.org/drawingml/2006/main" xmlns:r="http://schemas.openxmlformats.org/officeDocument/2006/relationships" xmlns:p="http://schemas.openxmlformats.org/presentationml/2006/main">
+  <p:cSld name="Slide 4">
+    <p:spTree>
+      <p:nvGrpSpPr>
+        <p:cNvPr id="1" name=""/>
+        <p:cNvGrpSpPr/>
+        <p:nvPr/>
+      </p:nvGrpSpPr>
+      <p:grpSpPr>
+        <a:xfrm>
+          <a:off x="0" y="0"/>
+          <a:ext cx="0" cy="0"/>
+          <a:chOff x="0" y="0"/>
+          <a:chExt cx="0" cy="0"/>
+        </a:xfrm>
+      </p:grpSpPr>
+      <p:sp>
+        <p:nvSpPr>
+          <p:cNvPr id="2" name="dot 2"/>
+          <p:cNvSpPr/>
+          <p:nvPr/>
+        </p:nvSpPr>
+        <p:spPr>
+          <a:xfrm>
+            <a:off x="6537960" y="1965960"/>
+            <a:ext cx="2240280" cy="2240280"/>
+          </a:xfrm>
+          <a:prstGeom prst="ellipse">
+            <a:avLst/>
+          </a:prstGeom>
+          <a:solidFill>
+            <a:srgbClr val="F33844">
+              <a:alpha val="55000"/>
+            </a:srgbClr>
+          </a:solidFill>
+          <a:ln/>
+        </p:spPr>
+        <p:txBody>
+          <a:bodyPr/>
+          <a:lstStyle/>
+          <a:p>
+            <a:endParaRPr lang="en-AU"/>
+          </a:p>
+        </p:txBody>
+      </p:sp>
+      <p:sp>
+        <p:nvSpPr>
+          <p:cNvPr id="8" name="dot 1"/>
+          <p:cNvSpPr/>
+          <p:nvPr/>
+        </p:nvSpPr>
+        <p:spPr>
+          <a:xfrm>
+            <a:off x="7269480" y="1097280"/>
+            <a:ext cx="1783080" cy="1783080"/>
+          </a:xfrm>
+          <a:prstGeom prst="ellipse">
+            <a:avLst/>
+          </a:prstGeom>
+          <a:solidFill>
+            <a:srgbClr val="6D71FF">
+              <a:alpha val="55000"/>
+            </a:srgbClr>
+          </a:solidFill>
+          <a:ln/>
+        </p:spPr>
+        <p:txBody>
+          <a:bodyPr/>
+          <a:lstStyle/>
+          <a:p>
+            <a:endParaRPr lang="en-AU"/>
+          </a:p>
+        </p:txBody>
+      </p:sp>
+      <p:sp>
+        <p:nvSpPr>
+          <p:cNvPr id="9" name="dot 0"/>
+          <p:cNvSpPr/>
+          <p:nvPr/>
+        </p:nvSpPr>
+        <p:spPr>
+          <a:xfrm>
+            <a:off x="6309360" y="182880"/>
+            <a:ext cx="2148840" cy="2148840"/>
+          </a:xfrm>
+          <a:prstGeom prst="ellipse">
+            <a:avLst/>
+          </a:prstGeom>
+          <a:solidFill>
+            <a:srgbClr val="3FD0C9">
+              <a:alpha val="55000"/>
+            </a:srgbClr>
+          </a:solidFill>
+          <a:ln/>
+        </p:spPr>
+        <p:txBody>
+          <a:bodyPr/>
+          <a:lstStyle/>
+          <a:p>
+            <a:endParaRPr lang="en-AU"/>
+          </a:p>
+        </p:txBody>
+      </p:sp>
+      <p:sp>
+        <p:nvSpPr>
+          <p:cNvPr id="3" name="Shape 1"/>
+          <p:cNvSpPr/>
+          <p:nvPr/>
+        </p:nvSpPr>
+        <p:spPr>
+          <a:xfrm>
+            <a:off x="502920" y="1874520"/>
+            <a:ext cx="868680" cy="868680"/>
+          </a:xfrm>
+          <a:prstGeom prst="rect">
+            <a:avLst/>
+          </a:prstGeom>
+          <a:solidFill>
+            <a:srgbClr val="3FD0C9"/>
+          </a:solidFill>
+          <a:ln/>
+        </p:spPr>
+        <p:txBody>
+          <a:bodyPr/>
+          <a:lstStyle/>
+          <a:p>
+            <a:endParaRPr lang="en-AU"/>
+          </a:p>
+        </p:txBody>
+      </p:sp>
+      <p:sp>
+        <p:nvSpPr>
+          <p:cNvPr id="4" name="Text 2"/>
+          <p:cNvSpPr txBox="1"/>
+          <p:nvPr/>
+        </p:nvSpPr>
+        <p:spPr>
+          <a:xfrm>
+            <a:off x="502920" y="1874520"/>
+            <a:ext cx="868680" cy="868680"/>
+          </a:xfrm>
+          <a:prstGeom prst="rect">
+            <a:avLst/>
+          </a:prstGeom>
+          <a:noFill/>
+          <a:ln/>
+        </p:spPr>
+        <p:txBody>
+          <a:bodyPr wrap="square" lIns="0" tIns="0" rIns="0" bIns="0" rtlCol="0" anchor="ctr"/>
+          <a:lstStyle/>
+          <a:p>
+            <a:pPr marL="0" indent="0" algn="ctr">
+              <a:buNone/>
+            </a:pPr>
+            <a:r>
+              <a:rPr lang="en-US" sz="2200" b="1">
+                <a:solidFill>
+                  <a:srgbClr val="242C39"/>
+                </a:solidFill>
+              </a:rPr>
+              <a:t>01</a:t>
+            </a:r>
+            <a:endParaRPr lang="en-US" sz="2600"/>
+          </a:p>
+        </p:txBody>
+      </p:sp>
+      <p:sp>
+        <p:nvSpPr>
+          <p:cNvPr id="5" name="Text 3"/>
+          <p:cNvSpPr txBox="1"/>
+          <p:nvPr/>
+        </p:nvSpPr>
+        <p:spPr>
+          <a:xfrm>
+            <a:off x="502920" y="411480"/>
+            <a:ext cx="3657600" cy="274320"/>
+          </a:xfrm>
+          <a:prstGeom prst="rect">
+            <a:avLst/>
+          </a:prstGeom>
+          <a:noFill/>
+          <a:ln/>
+        </p:spPr>
+        <p:txBody>
+          <a:bodyPr wrap="square" lIns="0" tIns="0" rIns="0" bIns="0" rtlCol="0" anchor="ctr"/>
+          <a:lstStyle/>
+          <a:p>
+            <a:pPr marL="0" indent="0">
+              <a:buNone/>
+            </a:pPr>
+            <a:r>
+              <a:rPr lang="en-US" sz="950" b="1" kern="0" spc="220">
+                <a:solidFill>
+                  <a:srgbClr val="3FD0C9"/>
+                </a:solidFill>
+              </a:rPr>
+              <a:t>SECTION</a:t>
+            </a:r>
+            <a:endParaRPr lang="en-US" sz="950"/>
+          </a:p>
+        </p:txBody>
+      </p:sp>
+      <p:sp>
+        <p:nvSpPr>
+          <p:cNvPr id="6" name="Text 4"/>
+          <p:cNvSpPr txBox="1"/>
+          <p:nvPr/>
+        </p:nvSpPr>
+        <p:spPr>
+          <a:xfrm>
+            <a:off x="1600200" y="1874520"/>
+            <a:ext cx="5943600" cy="502920"/>
+          </a:xfrm>
+          <a:prstGeom prst="rect">
+            <a:avLst/>
+          </a:prstGeom>
+          <a:noFill/>
+          <a:ln/>
+        </p:spPr>
+        <p:txBody>
+          <a:bodyPr wrap="square" lIns="0" tIns="0" rIns="0" bIns="0" rtlCol="0" anchor="ctr"/>
+          <a:lstStyle/>
+          <a:p>
+            <a:pPr marL="0" indent="0">
+              <a:buNone/>
+            </a:pPr>
+            <a:r>
+              <a:rPr lang="en-US" sz="2300" b="1">
+                <a:solidFill>
+                  <a:srgbClr val="FFFFFF"/>
+                </a:solidFill>
+              </a:rPr>
+              <a:t>Financial performance</a:t>
+            </a:r>
+            <a:endParaRPr lang="en-US" sz="2800"/>
+          </a:p>
+        </p:txBody>
+      </p:sp>
+      <p:sp>
+        <p:nvSpPr>
+          <p:cNvPr id="7" name="Text 5"/>
+          <p:cNvSpPr txBox="1"/>
+          <p:nvPr/>
+        </p:nvSpPr>
+        <p:spPr>
+          <a:xfrm>
+            <a:off x="1600200" y="2395728"/>
+            <a:ext cx="5943600" cy="347472"/>
+          </a:xfrm>
+          <a:prstGeom prst="rect">
+            <a:avLst/>
+          </a:prstGeom>
+          <a:noFill/>
+          <a:ln/>
+        </p:spPr>
+        <p:txBody>
+          <a:bodyPr wrap="square" lIns="0" tIns="0" rIns="0" bIns="0" rtlCol="0" anchor="ctr"/>
+          <a:lstStyle/>
+          <a:p>
+            <a:pPr marL="0" indent="0">
+              <a:buNone/>
+            </a:pPr>
+            <a:r>
+              <a:rPr lang="en-US" sz="1200">
+                <a:solidFill>
+                  <a:srgbClr val="C9CED6"/>
+                </a:solidFill>
+              </a:rPr>
+              <a:t>The P&amp;L for September 2026 and the year to date</a:t>
+            </a:r>
+            <a:endParaRPr lang="en-US" sz="1200"/>
+          </a:p>
+        </p:txBody>
+      </p:sp>
+    </p:spTree>
+  </p:cSld>
+  <p:clrMapOvr>
+    <a:masterClrMapping/>
+  </p:clrMapOvr>
+</p:sld>
+</file>
+
+<file path=ppt/slides/slide40.xml><?xml version="1.0" encoding="utf-8"?>
 <p:sld xmlns:a="http://schemas.openxmlformats.org/drawingml/2006/main" xmlns:r="http://schemas.openxmlformats.org/officeDocument/2006/relationships" xmlns:p="http://schemas.openxmlformats.org/presentationml/2006/main">
   <p:cSld>
     <p:bg>
@@ -22565,290 +23303,7 @@
 </p:sld>
 </file>
 
-<file path=ppt/slides/slide4.xml><?xml version="1.0" encoding="utf-8"?>
-<p:sld xmlns:a="http://schemas.openxmlformats.org/drawingml/2006/main" xmlns:r="http://schemas.openxmlformats.org/officeDocument/2006/relationships" xmlns:p="http://schemas.openxmlformats.org/presentationml/2006/main">
-  <p:cSld name="Slide 4">
-    <p:spTree>
-      <p:nvGrpSpPr>
-        <p:cNvPr id="1" name=""/>
-        <p:cNvGrpSpPr/>
-        <p:nvPr/>
-      </p:nvGrpSpPr>
-      <p:grpSpPr>
-        <a:xfrm>
-          <a:off x="0" y="0"/>
-          <a:ext cx="0" cy="0"/>
-          <a:chOff x="0" y="0"/>
-          <a:chExt cx="0" cy="0"/>
-        </a:xfrm>
-      </p:grpSpPr>
-      <p:sp>
-        <p:nvSpPr>
-          <p:cNvPr id="2" name="dot 2"/>
-          <p:cNvSpPr/>
-          <p:nvPr/>
-        </p:nvSpPr>
-        <p:spPr>
-          <a:xfrm>
-            <a:off x="6537960" y="1965960"/>
-            <a:ext cx="2240280" cy="2240280"/>
-          </a:xfrm>
-          <a:prstGeom prst="ellipse">
-            <a:avLst/>
-          </a:prstGeom>
-          <a:solidFill>
-            <a:srgbClr val="F33844">
-              <a:alpha val="55000"/>
-            </a:srgbClr>
-          </a:solidFill>
-          <a:ln/>
-        </p:spPr>
-        <p:txBody>
-          <a:bodyPr/>
-          <a:lstStyle/>
-          <a:p>
-            <a:endParaRPr lang="en-AU"/>
-          </a:p>
-        </p:txBody>
-      </p:sp>
-      <p:sp>
-        <p:nvSpPr>
-          <p:cNvPr id="8" name="dot 1"/>
-          <p:cNvSpPr/>
-          <p:nvPr/>
-        </p:nvSpPr>
-        <p:spPr>
-          <a:xfrm>
-            <a:off x="7269480" y="1097280"/>
-            <a:ext cx="1783080" cy="1783080"/>
-          </a:xfrm>
-          <a:prstGeom prst="ellipse">
-            <a:avLst/>
-          </a:prstGeom>
-          <a:solidFill>
-            <a:srgbClr val="6D71FF">
-              <a:alpha val="55000"/>
-            </a:srgbClr>
-          </a:solidFill>
-          <a:ln/>
-        </p:spPr>
-        <p:txBody>
-          <a:bodyPr/>
-          <a:lstStyle/>
-          <a:p>
-            <a:endParaRPr lang="en-AU"/>
-          </a:p>
-        </p:txBody>
-      </p:sp>
-      <p:sp>
-        <p:nvSpPr>
-          <p:cNvPr id="9" name="dot 0"/>
-          <p:cNvSpPr/>
-          <p:nvPr/>
-        </p:nvSpPr>
-        <p:spPr>
-          <a:xfrm>
-            <a:off x="6309360" y="182880"/>
-            <a:ext cx="2148840" cy="2148840"/>
-          </a:xfrm>
-          <a:prstGeom prst="ellipse">
-            <a:avLst/>
-          </a:prstGeom>
-          <a:solidFill>
-            <a:srgbClr val="3FD0C9">
-              <a:alpha val="55000"/>
-            </a:srgbClr>
-          </a:solidFill>
-          <a:ln/>
-        </p:spPr>
-        <p:txBody>
-          <a:bodyPr/>
-          <a:lstStyle/>
-          <a:p>
-            <a:endParaRPr lang="en-AU"/>
-          </a:p>
-        </p:txBody>
-      </p:sp>
-      <p:sp>
-        <p:nvSpPr>
-          <p:cNvPr id="3" name="Shape 1"/>
-          <p:cNvSpPr/>
-          <p:nvPr/>
-        </p:nvSpPr>
-        <p:spPr>
-          <a:xfrm>
-            <a:off x="502920" y="1874520"/>
-            <a:ext cx="868680" cy="868680"/>
-          </a:xfrm>
-          <a:prstGeom prst="rect">
-            <a:avLst/>
-          </a:prstGeom>
-          <a:solidFill>
-            <a:srgbClr val="3FD0C9"/>
-          </a:solidFill>
-          <a:ln/>
-        </p:spPr>
-        <p:txBody>
-          <a:bodyPr/>
-          <a:lstStyle/>
-          <a:p>
-            <a:endParaRPr lang="en-AU"/>
-          </a:p>
-        </p:txBody>
-      </p:sp>
-      <p:sp>
-        <p:nvSpPr>
-          <p:cNvPr id="4" name="Text 2"/>
-          <p:cNvSpPr txBox="1"/>
-          <p:nvPr/>
-        </p:nvSpPr>
-        <p:spPr>
-          <a:xfrm>
-            <a:off x="502920" y="1874520"/>
-            <a:ext cx="868680" cy="868680"/>
-          </a:xfrm>
-          <a:prstGeom prst="rect">
-            <a:avLst/>
-          </a:prstGeom>
-          <a:noFill/>
-          <a:ln/>
-        </p:spPr>
-        <p:txBody>
-          <a:bodyPr wrap="square" lIns="0" tIns="0" rIns="0" bIns="0" rtlCol="0" anchor="ctr"/>
-          <a:lstStyle/>
-          <a:p>
-            <a:pPr marL="0" indent="0" algn="ctr">
-              <a:buNone/>
-            </a:pPr>
-            <a:r>
-              <a:rPr lang="en-US" sz="2200" b="1">
-                <a:solidFill>
-                  <a:srgbClr val="242C39"/>
-                </a:solidFill>
-              </a:rPr>
-              <a:t>01</a:t>
-            </a:r>
-            <a:endParaRPr lang="en-US" sz="2600"/>
-          </a:p>
-        </p:txBody>
-      </p:sp>
-      <p:sp>
-        <p:nvSpPr>
-          <p:cNvPr id="5" name="Text 3"/>
-          <p:cNvSpPr txBox="1"/>
-          <p:nvPr/>
-        </p:nvSpPr>
-        <p:spPr>
-          <a:xfrm>
-            <a:off x="502920" y="411480"/>
-            <a:ext cx="3657600" cy="274320"/>
-          </a:xfrm>
-          <a:prstGeom prst="rect">
-            <a:avLst/>
-          </a:prstGeom>
-          <a:noFill/>
-          <a:ln/>
-        </p:spPr>
-        <p:txBody>
-          <a:bodyPr wrap="square" lIns="0" tIns="0" rIns="0" bIns="0" rtlCol="0" anchor="ctr"/>
-          <a:lstStyle/>
-          <a:p>
-            <a:pPr marL="0" indent="0">
-              <a:buNone/>
-            </a:pPr>
-            <a:r>
-              <a:rPr lang="en-US" sz="950" b="1" kern="0" spc="220">
-                <a:solidFill>
-                  <a:srgbClr val="3FD0C9"/>
-                </a:solidFill>
-              </a:rPr>
-              <a:t>SECTION</a:t>
-            </a:r>
-            <a:endParaRPr lang="en-US" sz="950"/>
-          </a:p>
-        </p:txBody>
-      </p:sp>
-      <p:sp>
-        <p:nvSpPr>
-          <p:cNvPr id="6" name="Text 4"/>
-          <p:cNvSpPr txBox="1"/>
-          <p:nvPr/>
-        </p:nvSpPr>
-        <p:spPr>
-          <a:xfrm>
-            <a:off x="1600200" y="1874520"/>
-            <a:ext cx="5943600" cy="502920"/>
-          </a:xfrm>
-          <a:prstGeom prst="rect">
-            <a:avLst/>
-          </a:prstGeom>
-          <a:noFill/>
-          <a:ln/>
-        </p:spPr>
-        <p:txBody>
-          <a:bodyPr wrap="square" lIns="0" tIns="0" rIns="0" bIns="0" rtlCol="0" anchor="ctr"/>
-          <a:lstStyle/>
-          <a:p>
-            <a:pPr marL="0" indent="0">
-              <a:buNone/>
-            </a:pPr>
-            <a:r>
-              <a:rPr lang="en-US" sz="2300" b="1">
-                <a:solidFill>
-                  <a:srgbClr val="FFFFFF"/>
-                </a:solidFill>
-              </a:rPr>
-              <a:t>Financial performance</a:t>
-            </a:r>
-            <a:endParaRPr lang="en-US" sz="2800"/>
-          </a:p>
-        </p:txBody>
-      </p:sp>
-      <p:sp>
-        <p:nvSpPr>
-          <p:cNvPr id="7" name="Text 5"/>
-          <p:cNvSpPr txBox="1"/>
-          <p:nvPr/>
-        </p:nvSpPr>
-        <p:spPr>
-          <a:xfrm>
-            <a:off x="1600200" y="2395728"/>
-            <a:ext cx="5943600" cy="347472"/>
-          </a:xfrm>
-          <a:prstGeom prst="rect">
-            <a:avLst/>
-          </a:prstGeom>
-          <a:noFill/>
-          <a:ln/>
-        </p:spPr>
-        <p:txBody>
-          <a:bodyPr wrap="square" lIns="0" tIns="0" rIns="0" bIns="0" rtlCol="0" anchor="ctr"/>
-          <a:lstStyle/>
-          <a:p>
-            <a:pPr marL="0" indent="0">
-              <a:buNone/>
-            </a:pPr>
-            <a:r>
-              <a:rPr lang="en-US" sz="1200">
-                <a:solidFill>
-                  <a:srgbClr val="C9CED6"/>
-                </a:solidFill>
-              </a:rPr>
-              <a:t>The P&amp;L for September 2026 and the year to date</a:t>
-            </a:r>
-            <a:endParaRPr lang="en-US" sz="1200"/>
-          </a:p>
-        </p:txBody>
-      </p:sp>
-    </p:spTree>
-  </p:cSld>
-  <p:clrMapOvr>
-    <a:masterClrMapping/>
-  </p:clrMapOvr>
-</p:sld>
-</file>
-
-<file path=ppt/slides/slide40.xml><?xml version="1.0" encoding="utf-8"?>
+<file path=ppt/slides/slide41.xml><?xml version="1.0" encoding="utf-8"?>
 <p:sld xmlns:a="http://schemas.openxmlformats.org/drawingml/2006/main" xmlns:r="http://schemas.openxmlformats.org/officeDocument/2006/relationships" xmlns:p="http://schemas.openxmlformats.org/presentationml/2006/main">
   <p:cSld name="Slide 31">
     <p:spTree>

--- a/deck/CTS Monthly Business Review - 30092026.pptx
+++ b/deck/CTS Monthly Business Review - 30092026.pptx
@@ -5,7 +5,7 @@
     <p:sldMasterId id="2147483648" r:id="rId4"/>
   </p:sldMasterIdLst>
   <p:notesMasterIdLst>
-    <p:notesMasterId r:id="rId42"/>
+    <p:notesMasterId r:id="rId45"/>
   </p:notesMasterIdLst>
   <p:sldIdLst>
     <p:sldId id="256" r:id="rId5"/>
@@ -19,36 +19,36 @@
     <p:sldId id="293" r:id="rId13"/>
     <p:sldId id="294" r:id="rId14"/>
     <p:sldId id="261" r:id="rId15"/>
-    <p:sldId id="295" r:id="rId49"/>
-    <p:sldId id="296" r:id="rId50"/>
-    <p:sldId id="297" r:id="rId51"/>
+    <p:sldId id="295" r:id="rId16"/>
+    <p:sldId id="296" r:id="rId17"/>
+    <p:sldId id="297" r:id="rId18"/>
     <p:sldId id="298" r:id="rId52"/>
-    <p:sldId id="262" r:id="rId16"/>
-    <p:sldId id="263" r:id="rId17"/>
-    <p:sldId id="264" r:id="rId18"/>
-    <p:sldId id="265" r:id="rId19"/>
-    <p:sldId id="266" r:id="rId20"/>
-    <p:sldId id="267" r:id="rId21"/>
-    <p:sldId id="268" r:id="rId22"/>
-    <p:sldId id="269" r:id="rId23"/>
-    <p:sldId id="270" r:id="rId24"/>
-    <p:sldId id="271" r:id="rId25"/>
-    <p:sldId id="272" r:id="rId26"/>
-    <p:sldId id="273" r:id="rId27"/>
-    <p:sldId id="274" r:id="rId28"/>
-    <p:sldId id="275" r:id="rId29"/>
-    <p:sldId id="276" r:id="rId30"/>
-    <p:sldId id="277" r:id="rId31"/>
-    <p:sldId id="278" r:id="rId32"/>
-    <p:sldId id="279" r:id="rId33"/>
-    <p:sldId id="280" r:id="rId34"/>
-    <p:sldId id="281" r:id="rId35"/>
-    <p:sldId id="282" r:id="rId36"/>
-    <p:sldId id="283" r:id="rId37"/>
-    <p:sldId id="284" r:id="rId38"/>
-    <p:sldId id="285" r:id="rId39"/>
-    <p:sldId id="288" r:id="rId40"/>
-    <p:sldId id="286" r:id="rId41"/>
+    <p:sldId id="262" r:id="rId19"/>
+    <p:sldId id="263" r:id="rId20"/>
+    <p:sldId id="264" r:id="rId21"/>
+    <p:sldId id="265" r:id="rId22"/>
+    <p:sldId id="266" r:id="rId23"/>
+    <p:sldId id="267" r:id="rId24"/>
+    <p:sldId id="268" r:id="rId25"/>
+    <p:sldId id="269" r:id="rId26"/>
+    <p:sldId id="270" r:id="rId27"/>
+    <p:sldId id="271" r:id="rId28"/>
+    <p:sldId id="272" r:id="rId29"/>
+    <p:sldId id="273" r:id="rId30"/>
+    <p:sldId id="274" r:id="rId31"/>
+    <p:sldId id="275" r:id="rId32"/>
+    <p:sldId id="276" r:id="rId33"/>
+    <p:sldId id="277" r:id="rId34"/>
+    <p:sldId id="278" r:id="rId35"/>
+    <p:sldId id="279" r:id="rId36"/>
+    <p:sldId id="280" r:id="rId37"/>
+    <p:sldId id="281" r:id="rId38"/>
+    <p:sldId id="282" r:id="rId39"/>
+    <p:sldId id="283" r:id="rId40"/>
+    <p:sldId id="284" r:id="rId41"/>
+    <p:sldId id="285" r:id="rId42"/>
+    <p:sldId id="288" r:id="rId43"/>
+    <p:sldId id="286" r:id="rId44"/>
   </p:sldIdLst>
   <p:sldSz cx="9144000" cy="5143500" type="screen16x9"/>
   <p:notesSz cx="6800850" cy="9932988"/>
@@ -144,6 +144,11 @@
       </a:defRPr>
     </a:lvl9pPr>
   </p:defaultTextStyle>
+  <p:extLst>
+    <p:ext uri="{EFAFB233-063F-42B5-8137-9DF3F51BA10A}">
+      <p15:sldGuideLst xmlns:p15="http://schemas.microsoft.com/office/powerpoint/2012/main"/>
+    </p:ext>
+  </p:extLst>
 </p:presentation>
 </file>
 
@@ -1152,18 +1157,6 @@
       </p:grpSpPr>
       <p:sp>
         <p:nvSpPr>
-          <p:cNvPr id="2" name="Slide Image Placeholder 1"/>
-          <p:cNvSpPr>
-            <a:spLocks noGrp="1" noRot="1" noChangeAspect="1"/>
-          </p:cNvSpPr>
-          <p:nvPr>
-            <p:ph type="sldImg"/>
-          </p:nvPr>
-        </p:nvSpPr>
-        <p:spPr/>
-      </p:sp>
-      <p:sp>
-        <p:nvSpPr>
           <p:cNvPr id="3" name="Notes Placeholder 2"/>
           <p:cNvSpPr>
             <a:spLocks noGrp="1"/>
@@ -1178,7 +1171,7 @@
           <a:lstStyle/>
           <a:p>
             <a:r>
-              <a:t>Each department against budget, carrying its full overhead charge, taken from section 7 of the Overhead Split tab.</a:t>
+              <a:t>Spend for September across three years and against budget, taken from the Xero History tab.</a:t>
             </a:r>
           </a:p>
           <a:p>
@@ -1186,27 +1179,7 @@
           </a:p>
           <a:p>
             <a:r>
-              <a:t>Support: revenue $242,948 against a $248,017 budget. Gross profit $101,290 at 41.7%. Overhead $72,283, of which $59,182 is allocated admin. Result $29,007.</a:t>
-            </a:r>
-          </a:p>
-          <a:p>
-            <a:r>
-              <a:t>Events: revenue $73,304 against $65,828. Gross profit $56,881 at 77.6%. Overhead $111,108, of which $71,672 is allocated admin. Result a loss of $54,227.</a:t>
-            </a:r>
-          </a:p>
-          <a:p>
-            <a:r>
-              <a:t>Video: revenue $7,303 against $17,498. Gross profit $5,813 at 79.6%. Overhead $12,659, of which $9,782 is allocated admin. Result a loss of $6,846.</a:t>
-            </a:r>
-          </a:p>
-          <a:p>
-            <a:r>
-              <a:t>Integration: revenue $234,858 against $59,272. Gross profit $23,756 at 10.1%. Overhead $13,285, of which $4,148 is allocated admin. Result $10,471.</a:t>
-            </a:r>
-          </a:p>
-          <a:p>
-            <a:r>
-              <a:t>Consulting: revenue $3,531 against $23,050. Gross profit $74 at 2.1%. Overhead $19,944, of which $13,979 is allocated admin. Result a loss of $19,870.</a:t>
+              <a:t>Spend here is cost of sales plus overheads. September 2026 $604,363. Budget $520,765. September 2025 $408,939. September 2024 $419,910.</a:t>
             </a:r>
           </a:p>
           <a:p>
@@ -1214,7 +1187,7 @@
           </a:p>
           <a:p>
             <a:r>
-              <a:t>The five departments total a loss of $41,464, which is net profit for the month.</a:t>
+              <a:t>September was $83,599 or 16.1% over budget on spend.</a:t>
             </a:r>
           </a:p>
           <a:p>
@@ -1222,40 +1195,44 @@
           </a:p>
           <a:p>
             <a:r>
-              <a:t>Two observations. Integration sold $175,586 more than planned and it produced very little profit, because the margin retained on resold equipment is 10.1%. And Events carries $71,672 of office costs on $73,304 of sales. That charge is allocated on office usage, and Events is not the department occupying the office. I would suggest the allocation basis is reviewed for FY28 rather than changed mid-year.</a:t>
-            </a:r>
-          </a:p>
-        </p:txBody>
-      </p:sp>
-      <p:sp>
-        <p:nvSpPr>
-          <p:cNvPr id="4" name="Slide Number Placeholder 3"/>
-          <p:cNvSpPr>
-            <a:spLocks noGrp="1"/>
-          </p:cNvSpPr>
-          <p:nvPr>
-            <p:ph type="sldNum" sz="quarter" idx="10"/>
-          </p:nvPr>
-        </p:nvSpPr>
-        <p:spPr/>
-        <p:txBody>
-          <a:bodyPr lIns="107095" tIns="53547" rIns="107095" bIns="53547"/>
-          <a:lstStyle/>
-          <a:p>
-            <a:fld id="{F7021451-1387-4CA6-816F-3879F97B5CBC}" type="slidenum">
-              <a:rPr lang="en-US"/>
-              <a:t>12</a:t>
-            </a:fld>
-            <a:endParaRPr lang="en-US"/>
+              <a:t>Where that sits matters more than the total. Cost of sales was $374,130 against $289,192 budgeted, which is $84,938 over. Overheads were $230,233 against $231,573 budgeted, which is $1,340 under. So the entire overspend is cost of sales and the overheads landed on plan.</a:t>
+            </a:r>
+          </a:p>
+          <a:p>
+            <a:endParaRPr/>
+          </a:p>
+          <a:p>
+            <a:r>
+              <a:t>That is the better of the two outcomes. Cost of sales moves with revenue, and September billed $561,945 against a budget of $413,665, so some of the extra cost bought extra revenue. Overheads do not move with revenue, and those held.</a:t>
+            </a:r>
+          </a:p>
+          <a:p>
+            <a:endParaRPr/>
+          </a:p>
+          <a:p>
+            <a:r>
+              <a:t>Against the two earlier years, spend is up $195,425 or 47.8% on September 2025 and $184,453 or 43.9% on September 2024. Revenue over the same two years is up 57.7% and 27.6%, so spend has grown faster than revenue against FY25 and slower than revenue against FY26.</a:t>
+            </a:r>
+          </a:p>
+          <a:p>
+            <a:endParaRPr/>
+          </a:p>
+          <a:p>
+            <a:r>
+              <a:t>The red line is revenue. It sat above the spend bar in September 2024 and below it in both years since, which is the same thing as saying those two Septembers lost money.</a:t>
+            </a:r>
+          </a:p>
+          <a:p>
+            <a:endParaRPr/>
+          </a:p>
+          <a:p>
+            <a:r>
+              <a:t>FY25 comes from Xero, pulled on 22 October 2026. FY26 is the Actual FY26 tab and FY27 the P&amp;L FY27 tab. The month follows the reporting month on Setup, so in October this becomes October.</a:t>
+            </a:r>
           </a:p>
         </p:txBody>
       </p:sp>
     </p:spTree>
-    <p:extLst>
-      <p:ext uri="{BB962C8B-B14F-4D97-AF65-F5344CB8AC3E}">
-        <p14:creationId xmlns:p14="http://schemas.microsoft.com/office/powerpoint/2010/main" val="1024086991"/>
-      </p:ext>
-    </p:extLst>
   </p:cSld>
   <p:clrMapOvr>
     <a:masterClrMapping/>
@@ -1282,18 +1259,6 @@
       </p:grpSpPr>
       <p:sp>
         <p:nvSpPr>
-          <p:cNvPr id="2" name="Slide Image Placeholder 1"/>
-          <p:cNvSpPr>
-            <a:spLocks noGrp="1" noRot="1" noChangeAspect="1"/>
-          </p:cNvSpPr>
-          <p:nvPr>
-            <p:ph type="sldImg"/>
-          </p:nvPr>
-        </p:nvSpPr>
-        <p:spPr/>
-      </p:sp>
-      <p:sp>
-        <p:nvSpPr>
           <p:cNvPr id="3" name="Notes Placeholder 2"/>
           <p:cNvSpPr>
             <a:spLocks noGrp="1"/>
@@ -1308,7 +1273,7 @@
           <a:lstStyle/>
           <a:p>
             <a:r>
-              <a:t>The same month read as three departments rather than five, which is how the Summary tab is constructed.</a:t>
+              <a:t>Spend for the first quarter across three years and against budget, taken from the Xero History tab.</a:t>
             </a:r>
           </a:p>
           <a:p>
@@ -1316,7 +1281,7 @@
           </a:p>
           <a:p>
             <a:r>
-              <a:t>Production is the parent of Events and Video. Consulting is the parent of Integration and Consulting. Support has no sub-departments. Admin is not a trading department and its costs are allocated across the three.</a:t>
+              <a:t>Q1 2026 $1,633,668. Budget $1,773,409. Q1 2025 $1,313,986. Q1 2024 $1,347,094.</a:t>
             </a:r>
           </a:p>
           <a:p>
@@ -1324,17 +1289,7 @@
           </a:p>
           <a:p>
             <a:r>
-              <a:t>Support: revenue $242,948 against a $248,017 budget. Gross profit $101,290 at 41.7%. All overhead $72,283. Result $29,007.</a:t>
-            </a:r>
-          </a:p>
-          <a:p>
-            <a:r>
-              <a:t>Production: revenue $80,607 against $83,326. Gross profit $62,694 at 77.8%. All overhead $123,767. Result a loss of $61,073.</a:t>
-            </a:r>
-          </a:p>
-          <a:p>
-            <a:r>
-              <a:t>Consulting: revenue $238,389 against $82,322. Gross profit $23,830 at 10.0%. All overhead $33,229. Result a loss of $9,398.</a:t>
+              <a:t>The quarter is $139,742 or 7.9% under budget on spend. That is the opposite of the month, where spend ran over.</a:t>
             </a:r>
           </a:p>
           <a:p>
@@ -1342,7 +1297,7 @@
           </a:p>
           <a:p>
             <a:r>
-              <a:t>The three total a loss of $41,464, which is net profit for the month, and the check row on the tab reconciles it to the five department view.</a:t>
+              <a:t>The split is the point. Overheads have been $638,615, $646,721 and $641,508 across the three first quarters, a range of $8,106 on about $640,000. The overhead base has not moved in three years. Every bit of the movement in spend is cost of sales, which went $708,478, $667,265 and $992,160, up $324,895 or 48.7% on last year.</a:t>
             </a:r>
           </a:p>
           <a:p>
@@ -1350,7 +1305,7 @@
           </a:p>
           <a:p>
             <a:r>
-              <a:t>The grouping shows something the five departments did not. Production, being Events and Video together, retains 77.8% of what it sells, the strongest margin in the business. It records a loss only because it carries $123,767 of running costs against $80,607 of sales. That is a volume position rather than a pricing one, and it presents the clearest growth case in the pack.</a:t>
+              <a:t>Cost of sales rising with revenue is what should happen. Revenue rose $395,878 over the same year, so cost of sales rose $324,895 to earn it, which is a contribution of about $71,000 on the extra revenue. That is a thin return on the extra work and it is why the quarter is still a loss.</a:t>
             </a:r>
           </a:p>
           <a:p>
@@ -1358,7 +1313,7 @@
           </a:p>
           <a:p>
             <a:r>
-              <a:t>The Consulting group is the opposite. It sold $156,068 more than plan and retains 10.0%, because almost all of that was resold equipment through Integration. Additional sales of that kind would not improve the result.</a:t>
+              <a:t>The red line is revenue. In Q1 2024 it sat above the spend bar and the quarter made money. In Q1 2025 and Q1 2026 it sat below and both lost money. The budget line has revenue well clear of spend, which is how it was built to make $223,000.</a:t>
             </a:r>
           </a:p>
           <a:p>
@@ -1366,40 +1321,12 @@
           </a:p>
           <a:p>
             <a:r>
-              <a:t>Support carries the profit of the business. On these three lines the questions are how Support is protected, how Production is given volume, and how Consulting is resolved.</a:t>
-            </a:r>
-          </a:p>
-        </p:txBody>
-      </p:sp>
-      <p:sp>
-        <p:nvSpPr>
-          <p:cNvPr id="4" name="Slide Number Placeholder 3"/>
-          <p:cNvSpPr>
-            <a:spLocks noGrp="1"/>
-          </p:cNvSpPr>
-          <p:nvPr>
-            <p:ph type="sldNum" sz="quarter" idx="10"/>
-          </p:nvPr>
-        </p:nvSpPr>
-        <p:spPr/>
-        <p:txBody>
-          <a:bodyPr lIns="107095" tIns="53547" rIns="107095" bIns="53547"/>
-          <a:lstStyle/>
-          <a:p>
-            <a:fld id="{F7021451-1387-4CA6-816F-3879F97B5CBC}" type="slidenum">
-              <a:rPr lang="en-US"/>
-              <a:t>13</a:t>
-            </a:fld>
-            <a:endParaRPr lang="en-US"/>
+              <a:t>FY25 comes from Xero, pulled 22 October 2026. The quarter is July to September, so it is fixed rather than following Setup.</a:t>
+            </a:r>
           </a:p>
         </p:txBody>
       </p:sp>
     </p:spTree>
-    <p:extLst>
-      <p:ext uri="{BB962C8B-B14F-4D97-AF65-F5344CB8AC3E}">
-        <p14:creationId xmlns:p14="http://schemas.microsoft.com/office/powerpoint/2010/main" val="1024086991"/>
-      </p:ext>
-    </p:extLst>
   </p:cSld>
   <p:clrMapOvr>
     <a:masterClrMapping/>
@@ -1426,18 +1353,6 @@
       </p:grpSpPr>
       <p:sp>
         <p:nvSpPr>
-          <p:cNvPr id="2" name="Slide Image Placeholder 1"/>
-          <p:cNvSpPr>
-            <a:spLocks noGrp="1" noRot="1" noChangeAspect="1"/>
-          </p:cNvSpPr>
-          <p:nvPr>
-            <p:ph type="sldImg"/>
-          </p:nvPr>
-        </p:nvSpPr>
-        <p:spPr/>
-      </p:sp>
-      <p:sp>
-        <p:nvSpPr>
           <p:cNvPr id="3" name="Notes Placeholder 2"/>
           <p:cNvSpPr>
             <a:spLocks noGrp="1"/>
@@ -1452,88 +1367,48 @@
           <a:lstStyle/>
           <a:p>
             <a:r>
-              <a:t>Support for September 2026, taken from the Dept P&amp;L tab.</a:t>
-            </a:r>
-          </a:p>
-          <a:p>
-            <a:endParaRPr/>
-          </a:p>
-          <a:p>
-            <a:r>
-              <a:t>Revenue $242,948 against a budget of $248,017, behind by $5,068. September last year was $231,214.</a:t>
-            </a:r>
-          </a:p>
-          <a:p>
-            <a:endParaRPr/>
-          </a:p>
-          <a:p>
-            <a:r>
-              <a:t>After direct costs of $141,659 it retained $101,290, being 41.7% of revenue.</a:t>
-            </a:r>
-          </a:p>
-          <a:p>
-            <a:endParaRPr/>
-          </a:p>
-          <a:p>
-            <a:r>
-              <a:t>Overheads charged to it were $72,283, of which $13,101 is its own spending and $59,182 is its share of the office, allocated on the keys set in the pack.</a:t>
-            </a:r>
-          </a:p>
-          <a:p>
-            <a:endParaRPr/>
-          </a:p>
-          <a:p>
-            <a:r>
-              <a:t>That leaves $29,007 for the month.</a:t>
-            </a:r>
-          </a:p>
-          <a:p>
-            <a:endParaRPr/>
-          </a:p>
-          <a:p>
-            <a:r>
-              <a:t>Year to date it has billed $718,587 against a budget of $743,185.</a:t>
-            </a:r>
-          </a:p>
-          <a:p>
-            <a:endParaRPr/>
-          </a:p>
-          <a:p>
-            <a:r>
-              <a:t>On people, employment expense of $51,242, of which $8,980 is its own staff and $42,262 its share of office wages. It recorded 2,132 billable hours and 11 non-billable, with 218 hours of leave.</a:t>
-            </a:r>
-          </a:p>
-        </p:txBody>
-      </p:sp>
-      <p:sp>
-        <p:nvSpPr>
-          <p:cNvPr id="4" name="Slide Number Placeholder 3"/>
-          <p:cNvSpPr>
-            <a:spLocks noGrp="1"/>
-          </p:cNvSpPr>
-          <p:nvPr>
-            <p:ph type="sldNum" sz="quarter" idx="10"/>
-          </p:nvPr>
-        </p:nvSpPr>
-        <p:spPr/>
-        <p:txBody>
-          <a:bodyPr lIns="107095" tIns="53547" rIns="107095" bIns="53547"/>
-          <a:lstStyle/>
-          <a:p>
-            <a:fld id="{F7021451-1387-4CA6-816F-3879F97B5CBC}" type="slidenum">
-              <a:rPr lang="en-US"/>
-              <a:t>14</a:t>
-            </a:fld>
-            <a:endParaRPr lang="en-US"/>
+              <a:t>Net profit and net loss for September across three years, taken from the Xero History tab. Net profit is the pack's own figure and includes other income.</a:t>
+            </a:r>
+          </a:p>
+          <a:p/>
+          <a:p>
+            <a:r>
+              <a:t>September 2026 a loss of $41,464. September 2025 a loss of $52,615. September 2024 a profit of $20,737.</a:t>
+            </a:r>
+          </a:p>
+          <a:p/>
+          <a:p>
+            <a:r>
+              <a:t>This September is $11,152 better than the same month last year, and $62,201 worse than the September before that.</a:t>
+            </a:r>
+          </a:p>
+          <a:p/>
+          <a:p>
+            <a:r>
+              <a:t>The thing worth drawing out is that the loss is not a revenue failure. September 2026 billed $561,945, which is the highest of the three Septembers, ahead of $356,323 last year and $440,243 the year before. The month earned more than either comparison and still finished below the line.</a:t>
+            </a:r>
+          </a:p>
+          <a:p/>
+          <a:p>
+            <a:r>
+              <a:t>What changed is the cost of earning it. Cost of sales was $374,130 against $216,749 in September 2024 on revenue only $121,701 higher. The gross margin on the month was 33.4%, against 50.8% in September 2024.</a:t>
+            </a:r>
+          </a:p>
+          <a:p/>
+          <a:p>
+            <a:r>
+              <a:t>So the question this chart puts to the board is about pricing and delivery cost on the work being won, not about the volume of work being won.</a:t>
+            </a:r>
+          </a:p>
+          <a:p/>
+          <a:p>
+            <a:r>
+              <a:t>FY25 was pulled from Xero on 22 October 2026. FY26 is the Actual FY26 tab and FY27 the P&amp;L FY27 tab. The month follows the reporting month on Setup, so in October this becomes October. Only the first quarter of FY25 was pulled, so the FY25 bar is blank from October until the rest is pulled.</a:t>
+            </a:r>
           </a:p>
         </p:txBody>
       </p:sp>
     </p:spTree>
-    <p:extLst>
-      <p:ext uri="{BB962C8B-B14F-4D97-AF65-F5344CB8AC3E}">
-        <p14:creationId xmlns:p14="http://schemas.microsoft.com/office/powerpoint/2010/main" val="1024086991"/>
-      </p:ext>
-    </p:extLst>
   </p:cSld>
   <p:clrMapOvr>
     <a:masterClrMapping/>
@@ -1586,7 +1461,7 @@
           <a:lstStyle/>
           <a:p>
             <a:r>
-              <a:t>Events for September 2026, taken from the Dept P&amp;L tab.</a:t>
+              <a:t>Each department against budget, carrying its full overhead charge, taken from section 7 of the Overhead Split tab.</a:t>
             </a:r>
           </a:p>
           <a:p>
@@ -1594,7 +1469,27 @@
           </a:p>
           <a:p>
             <a:r>
-              <a:t>Revenue $73,304 against a budget of $65,828, ahead by $7,476. September last year was $75,333.</a:t>
+              <a:t>Support: revenue $242,948 against a $248,017 budget. Gross profit $101,290 at 41.7%. Overhead $72,283, of which $59,182 is allocated admin. Result $29,007.</a:t>
+            </a:r>
+          </a:p>
+          <a:p>
+            <a:r>
+              <a:t>Events: revenue $73,304 against $65,828. Gross profit $56,881 at 77.6%. Overhead $111,108, of which $71,672 is allocated admin. Result a loss of $54,227.</a:t>
+            </a:r>
+          </a:p>
+          <a:p>
+            <a:r>
+              <a:t>Video: revenue $7,303 against $17,498. Gross profit $5,813 at 79.6%. Overhead $12,659, of which $9,782 is allocated admin. Result a loss of $6,846.</a:t>
+            </a:r>
+          </a:p>
+          <a:p>
+            <a:r>
+              <a:t>Integration: revenue $234,858 against $59,272. Gross profit $23,756 at 10.1%. Overhead $13,285, of which $4,148 is allocated admin. Result $10,471.</a:t>
+            </a:r>
+          </a:p>
+          <a:p>
+            <a:r>
+              <a:t>Consulting: revenue $3,531 against $23,050. Gross profit $74 at 2.1%. Overhead $19,944, of which $13,979 is allocated admin. Result a loss of $19,870.</a:t>
             </a:r>
           </a:p>
           <a:p>
@@ -1602,7 +1497,7 @@
           </a:p>
           <a:p>
             <a:r>
-              <a:t>After direct costs of $16,423 it retained $56,881, being 77.6% of revenue.</a:t>
+              <a:t>The five departments total a loss of $41,464, which is net profit for the month.</a:t>
             </a:r>
           </a:p>
           <a:p>
@@ -1610,39 +1505,7 @@
           </a:p>
           <a:p>
             <a:r>
-              <a:t>Overheads charged to it were $111,108, of which $39,436 is its own spending and $71,672 is its share of the office.</a:t>
-            </a:r>
-          </a:p>
-          <a:p>
-            <a:endParaRPr/>
-          </a:p>
-          <a:p>
-            <a:r>
-              <a:t>That leaves a loss of $54,227 for the month.</a:t>
-            </a:r>
-          </a:p>
-          <a:p>
-            <a:endParaRPr/>
-          </a:p>
-          <a:p>
-            <a:r>
-              <a:t>Year to date it has billed $420,121 against a budget of $321,957.</a:t>
-            </a:r>
-          </a:p>
-          <a:p>
-            <a:endParaRPr/>
-          </a:p>
-          <a:p>
-            <a:r>
-              <a:t>On people, employment expense of $50,959, of which $35,665 is its own staff and $15,294 its share of office wages. It recorded 241 billable hours and 249 non-billable, with 333 hours of leave.</a:t>
-            </a:r>
-          </a:p>
-          <a:p>
-            <a:endParaRPr/>
-          </a:p>
-          <a:p>
-            <a:r>
-              <a:t>The department earns the second strongest margin in the business and still records a loss, because the overhead allocated to it is larger than its revenue. I would suggest the allocation basis is the item to examine here, alongside the leave taken in the month.</a:t>
+              <a:t>Two observations. Integration sold $175,586 more than planned and it produced very little profit, because the margin retained on resold equipment is 10.1%. And Events carries $71,672 of office costs on $73,304 of sales. That charge is allocated on office usage, and Events is not the department occupying the office. I would suggest the allocation basis is reviewed for FY28 rather than changed mid-year.</a:t>
             </a:r>
           </a:p>
         </p:txBody>
@@ -1728,7 +1591,7 @@
           <a:lstStyle/>
           <a:p>
             <a:r>
-              <a:t>Video for September 2026, taken from the Dept P&amp;L tab.</a:t>
+              <a:t>The same month read as three departments rather than five, which is how the Summary tab is constructed.</a:t>
             </a:r>
           </a:p>
           <a:p>
@@ -1736,7 +1599,7 @@
           </a:p>
           <a:p>
             <a:r>
-              <a:t>Revenue $7,303 against a budget of $17,498, behind by $10,196. September last year was $20,025.</a:t>
+              <a:t>Production is the parent of Events and Video. Consulting is the parent of Integration and Consulting. Support has no sub-departments. Admin is not a trading department and its costs are allocated across the three.</a:t>
             </a:r>
           </a:p>
           <a:p>
@@ -1744,7 +1607,17 @@
           </a:p>
           <a:p>
             <a:r>
-              <a:t>After direct costs of $1,489 it retained $5,813, being 79.6% of revenue.</a:t>
+              <a:t>Support: revenue $242,948 against a $248,017 budget. Gross profit $101,290 at 41.7%. All overhead $72,283. Result $29,007.</a:t>
+            </a:r>
+          </a:p>
+          <a:p>
+            <a:r>
+              <a:t>Production: revenue $80,607 against $83,326. Gross profit $62,694 at 77.8%. All overhead $123,767. Result a loss of $61,073.</a:t>
+            </a:r>
+          </a:p>
+          <a:p>
+            <a:r>
+              <a:t>Consulting: revenue $238,389 against $82,322. Gross profit $23,830 at 10.0%. All overhead $33,229. Result a loss of $9,398.</a:t>
             </a:r>
           </a:p>
           <a:p>
@@ -1752,7 +1625,7 @@
           </a:p>
           <a:p>
             <a:r>
-              <a:t>Overheads charged to it were $12,659, of which $2,878 is its own spending and $9,782 is its share of the office.</a:t>
+              <a:t>The three total a loss of $41,464, which is net profit for the month, and the check row on the tab reconciles it to the five department view.</a:t>
             </a:r>
           </a:p>
           <a:p>
@@ -1760,7 +1633,7 @@
           </a:p>
           <a:p>
             <a:r>
-              <a:t>That leaves a loss of $6,846 for the month.</a:t>
+              <a:t>The grouping shows something the five departments did not. Production, being Events and Video together, retains 77.8% of what it sells, the strongest margin in the business. It records a loss only because it carries $123,767 of running costs against $80,607 of sales. That is a volume position rather than a pricing one, and it presents the clearest growth case in the pack.</a:t>
             </a:r>
           </a:p>
           <a:p>
@@ -1768,7 +1641,7 @@
           </a:p>
           <a:p>
             <a:r>
-              <a:t>Year to date it has billed $40,270 against a budget of $85,584.</a:t>
+              <a:t>The Consulting group is the opposite. It sold $156,068 more than plan and retains 10.0%, because almost all of that was resold equipment through Integration. Additional sales of that kind would not improve the result.</a:t>
             </a:r>
           </a:p>
           <a:p>
@@ -1776,15 +1649,7 @@
           </a:p>
           <a:p>
             <a:r>
-              <a:t>On people, employment expense of $3,961, of which $2,660 is its own staff and $1,301 its share of office wages. It recorded 25 billable hours and 8 non-billable, with no leave.</a:t>
-            </a:r>
-          </a:p>
-          <a:p>
-            <a:endParaRPr/>
-          </a:p>
-          <a:p>
-            <a:r>
-              <a:t>The margin is the highest in the business. The constraint is the volume of billable work, which at 25 hours for the month is well below the level the budget assumed.</a:t>
+              <a:t>Support carries the profit of the business. On these three lines the questions are how Support is protected, how Production is given volume, and how Consulting is resolved.</a:t>
             </a:r>
           </a:p>
         </p:txBody>
@@ -1870,7 +1735,7 @@
           <a:lstStyle/>
           <a:p>
             <a:r>
-              <a:t>Integration for September 2026, taken from the Dept P&amp;L tab.</a:t>
+              <a:t>Support for September 2026, taken from the Dept P&amp;L tab.</a:t>
             </a:r>
           </a:p>
           <a:p>
@@ -1878,7 +1743,7 @@
           </a:p>
           <a:p>
             <a:r>
-              <a:t>Revenue $234,858 against a budget of $59,272, ahead by $175,586. September last year was $21,421.</a:t>
+              <a:t>Revenue $242,948 against a budget of $248,017, behind by $5,068. September last year was $231,214.</a:t>
             </a:r>
           </a:p>
           <a:p>
@@ -1886,7 +1751,7 @@
           </a:p>
           <a:p>
             <a:r>
-              <a:t>After direct costs of $211,102 it retained $23,756, being 10.1% of revenue.</a:t>
+              <a:t>After direct costs of $141,659 it retained $101,290, being 41.7% of revenue.</a:t>
             </a:r>
           </a:p>
           <a:p>
@@ -1894,7 +1759,7 @@
           </a:p>
           <a:p>
             <a:r>
-              <a:t>Overheads charged to it were $13,285, of which $9,136 is its own spending and $4,148 is its share of the office.</a:t>
+              <a:t>Overheads charged to it were $72,283, of which $13,101 is its own spending and $59,182 is its share of the office, allocated on the keys set in the pack.</a:t>
             </a:r>
           </a:p>
           <a:p>
@@ -1902,7 +1767,7 @@
           </a:p>
           <a:p>
             <a:r>
-              <a:t>That leaves $10,471 for the month.</a:t>
+              <a:t>That leaves $29,007 for the month.</a:t>
             </a:r>
           </a:p>
           <a:p>
@@ -1910,7 +1775,7 @@
           </a:p>
           <a:p>
             <a:r>
-              <a:t>Year to date it has billed $441,414 against a budget of $608,676.</a:t>
+              <a:t>Year to date it has billed $718,587 against a budget of $743,185.</a:t>
             </a:r>
           </a:p>
           <a:p>
@@ -1918,15 +1783,7 @@
           </a:p>
           <a:p>
             <a:r>
-              <a:t>On people, employment expense of $8,832, of which $8,563 is its own staff and $269 its share of office wages. It recorded 10 billable hours and no non-billable time.</a:t>
-            </a:r>
-          </a:p>
-          <a:p>
-            <a:endParaRPr/>
-          </a:p>
-          <a:p>
-            <a:r>
-              <a:t>The revenue came from a single completed installation rather than from recurring work, and from equipment supply rather than labour, which is why 10 billable hours sit behind $235k of sales. I would treat the result as timing rather than as a change in run rate.</a:t>
+              <a:t>On people, employment expense of $51,242, of which $8,980 is its own staff and $42,262 its share of office wages. It recorded 2,132 billable hours and 11 non-billable, with 218 hours of leave.</a:t>
             </a:r>
           </a:p>
         </p:txBody>
@@ -2012,7 +1869,7 @@
           <a:lstStyle/>
           <a:p>
             <a:r>
-              <a:t>Consulting for September 2026, taken from the Dept P&amp;L tab.</a:t>
+              <a:t>Events for September 2026, taken from the Dept P&amp;L tab.</a:t>
             </a:r>
           </a:p>
           <a:p>
@@ -2020,7 +1877,7 @@
           </a:p>
           <a:p>
             <a:r>
-              <a:t>Revenue $3,531 against a budget of $23,050, behind by $19,519. September last year was $8,330.</a:t>
+              <a:t>Revenue $73,304 against a budget of $65,828, ahead by $7,476. September last year was $75,333.</a:t>
             </a:r>
           </a:p>
           <a:p>
@@ -2028,7 +1885,7 @@
           </a:p>
           <a:p>
             <a:r>
-              <a:t>After direct costs of $3,457 it retained $74, being 2.1% of revenue.</a:t>
+              <a:t>After direct costs of $16,423 it retained $56,881, being 77.6% of revenue.</a:t>
             </a:r>
           </a:p>
           <a:p>
@@ -2036,7 +1893,7 @@
           </a:p>
           <a:p>
             <a:r>
-              <a:t>Overheads charged to it were $19,944, of which $5,965 is its own spending and $13,979 is its share of the office.</a:t>
+              <a:t>Overheads charged to it were $111,108, of which $39,436 is its own spending and $71,672 is its share of the office.</a:t>
             </a:r>
           </a:p>
           <a:p>
@@ -2044,7 +1901,7 @@
           </a:p>
           <a:p>
             <a:r>
-              <a:t>That leaves a loss of $19,870 for the month.</a:t>
+              <a:t>That leaves a loss of $54,227 for the month.</a:t>
             </a:r>
           </a:p>
           <a:p>
@@ -2052,7 +1909,7 @@
           </a:p>
           <a:p>
             <a:r>
-              <a:t>Year to date it has billed $4,068 against a budget of $236,707.</a:t>
+              <a:t>Year to date it has billed $420,121 against a budget of $321,957.</a:t>
             </a:r>
           </a:p>
           <a:p>
@@ -2060,7 +1917,7 @@
           </a:p>
           <a:p>
             <a:r>
-              <a:t>On people, employment expense of $9,496, of which $5,545 is its own staff and $3,951 its share of office wages. It recorded 31 billable hours and 84 non-billable, with 53 hours of leave.</a:t>
+              <a:t>On people, employment expense of $50,959, of which $35,665 is its own staff and $15,294 its share of office wages. It recorded 241 billable hours and 249 non-billable, with 333 hours of leave.</a:t>
             </a:r>
           </a:p>
           <a:p>
@@ -2068,7 +1925,7 @@
           </a:p>
           <a:p>
             <a:r>
-              <a:t>The department has carried running costs against almost no fee income for three consecutive months. I would suggest its structure, capacity and commercial basis are reviewed, including whether the work is better delivered within Integration.</a:t>
+              <a:t>The department earns the second strongest margin in the business and still records a loss, because the overhead allocated to it is larger than its revenue. I would suggest the allocation basis is the item to examine here, alongside the leave taken in the month.</a:t>
             </a:r>
           </a:p>
         </p:txBody>
@@ -2154,7 +2011,7 @@
           <a:lstStyle/>
           <a:p>
             <a:r>
-              <a:t>Revenue by department for September 2026, actual against budget and against the same month last year.</a:t>
+              <a:t>Video for September 2026, taken from the Dept P&amp;L tab.</a:t>
             </a:r>
           </a:p>
           <a:p>
@@ -2162,27 +2019,7 @@
           </a:p>
           <a:p>
             <a:r>
-              <a:t>Support: $242,948 against a budget of $248,017 and $231,214 last year.</a:t>
-            </a:r>
-          </a:p>
-          <a:p>
-            <a:r>
-              <a:t>Integration: $234,858 against a budget of $59,272 and $21,421 last year.</a:t>
-            </a:r>
-          </a:p>
-          <a:p>
-            <a:r>
-              <a:t>Events: $73,304 against a budget of $65,828 and $75,333 last year.</a:t>
-            </a:r>
-          </a:p>
-          <a:p>
-            <a:r>
-              <a:t>Video: $7,303 against a budget of $17,498 and $20,025 last year.</a:t>
-            </a:r>
-          </a:p>
-          <a:p>
-            <a:r>
-              <a:t>Consulting: $3,531 against a budget of $23,050 and $8,330 last year.</a:t>
+              <a:t>Revenue $7,303 against a budget of $17,498, behind by $10,196. September last year was $20,025.</a:t>
             </a:r>
           </a:p>
           <a:p>
@@ -2190,7 +2027,7 @@
           </a:p>
           <a:p>
             <a:r>
-              <a:t>Company revenue of $561,945 against a $413,665 budget and $356,323 in September last year.</a:t>
+              <a:t>After direct costs of $1,489 it retained $5,813, being 79.6% of revenue.</a:t>
             </a:r>
           </a:p>
           <a:p>
@@ -2198,7 +2035,39 @@
           </a:p>
           <a:p>
             <a:r>
-              <a:t>The variance to budget is almost entirely Integration, and it represents one large fit-out at a 10.1% gross margin. It is better read as timing than as growth. Video and Consulting are below budget for the third consecutive month.</a:t>
+              <a:t>Overheads charged to it were $12,659, of which $2,878 is its own spending and $9,782 is its share of the office.</a:t>
+            </a:r>
+          </a:p>
+          <a:p>
+            <a:endParaRPr/>
+          </a:p>
+          <a:p>
+            <a:r>
+              <a:t>That leaves a loss of $6,846 for the month.</a:t>
+            </a:r>
+          </a:p>
+          <a:p>
+            <a:endParaRPr/>
+          </a:p>
+          <a:p>
+            <a:r>
+              <a:t>Year to date it has billed $40,270 against a budget of $85,584.</a:t>
+            </a:r>
+          </a:p>
+          <a:p>
+            <a:endParaRPr/>
+          </a:p>
+          <a:p>
+            <a:r>
+              <a:t>On people, employment expense of $3,961, of which $2,660 is its own staff and $1,301 its share of office wages. It recorded 25 billable hours and 8 non-billable, with no leave.</a:t>
+            </a:r>
+          </a:p>
+          <a:p>
+            <a:endParaRPr/>
+          </a:p>
+          <a:p>
+            <a:r>
+              <a:t>The margin is the highest in the business. The constraint is the volume of billable work, which at 25 hours for the month is well below the level the budget assumed.</a:t>
             </a:r>
           </a:p>
         </p:txBody>
@@ -2378,7 +2247,63 @@
           <a:lstStyle/>
           <a:p>
             <a:r>
-              <a:t>Running costs are steady at approximately $214k a month. Spending is not the cause of the result, but it is the figure revenue has to cover.</a:t>
+              <a:t>Integration for September 2026, taken from the Dept P&amp;L tab.</a:t>
+            </a:r>
+          </a:p>
+          <a:p>
+            <a:endParaRPr/>
+          </a:p>
+          <a:p>
+            <a:r>
+              <a:t>Revenue $234,858 against a budget of $59,272, ahead by $175,586. September last year was $21,421.</a:t>
+            </a:r>
+          </a:p>
+          <a:p>
+            <a:endParaRPr/>
+          </a:p>
+          <a:p>
+            <a:r>
+              <a:t>After direct costs of $211,102 it retained $23,756, being 10.1% of revenue.</a:t>
+            </a:r>
+          </a:p>
+          <a:p>
+            <a:endParaRPr/>
+          </a:p>
+          <a:p>
+            <a:r>
+              <a:t>Overheads charged to it were $13,285, of which $9,136 is its own spending and $4,148 is its share of the office.</a:t>
+            </a:r>
+          </a:p>
+          <a:p>
+            <a:endParaRPr/>
+          </a:p>
+          <a:p>
+            <a:r>
+              <a:t>That leaves $10,471 for the month.</a:t>
+            </a:r>
+          </a:p>
+          <a:p>
+            <a:endParaRPr/>
+          </a:p>
+          <a:p>
+            <a:r>
+              <a:t>Year to date it has billed $441,414 against a budget of $608,676.</a:t>
+            </a:r>
+          </a:p>
+          <a:p>
+            <a:endParaRPr/>
+          </a:p>
+          <a:p>
+            <a:r>
+              <a:t>On people, employment expense of $8,832, of which $8,563 is its own staff and $269 its share of office wages. It recorded 10 billable hours and no non-billable time.</a:t>
+            </a:r>
+          </a:p>
+          <a:p>
+            <a:endParaRPr/>
+          </a:p>
+          <a:p>
+            <a:r>
+              <a:t>The revenue came from a single completed installation rather than from recurring work, and from equipment supply rather than labour, which is why 10 billable hours sit behind $235k of sales. I would treat the result as timing rather than as a change in run rate.</a:t>
             </a:r>
           </a:p>
         </p:txBody>
@@ -2464,7 +2389,7 @@
           <a:lstStyle/>
           <a:p>
             <a:r>
-              <a:t>Operating cost distribution for the year to date, with cost of sales and overhead shown on one scale.</a:t>
+              <a:t>Consulting for September 2026, taken from the Dept P&amp;L tab.</a:t>
             </a:r>
           </a:p>
           <a:p>
@@ -2472,7 +2397,7 @@
           </a:p>
           <a:p>
             <a:r>
-              <a:t>Cost of sales, labour $620,737 at 38.0%. Cost of sales, equipment and services $347,307 at 21.3%. Cost of sales, other direct $24,117 at 1.5%. Overhead, general and administrative $75,700 at 4.6%. Overhead, business insurances $25,227 at 1.5%. Overhead, advertising and promotion $34,119 at 2.1%. Overhead, operating expenses $136,752 at 8.4%. Overhead, employment expenses $369,466 at 22.6%.</a:t>
+              <a:t>Revenue $3,531 against a budget of $23,050, behind by $19,519. September last year was $8,330.</a:t>
             </a:r>
           </a:p>
           <a:p>
@@ -2480,7 +2405,7 @@
           </a:p>
           <a:p>
             <a:r>
-              <a:t>The concentration is the point. Wages for staff on jobs and wages for everyone else make up the bulk of the cost base, and the second group is largely fixed within the year, which is why a quieter month passes straight to the result.</a:t>
+              <a:t>After direct costs of $3,457 it retained $74, being 2.1% of revenue.</a:t>
             </a:r>
           </a:p>
           <a:p>
@@ -2488,7 +2413,39 @@
           </a:p>
           <a:p>
             <a:r>
-              <a:t>If the question is where costs can be reduced, the honest answer is headcount or premises. Reductions in subscriptions and travel would not change this picture materially.</a:t>
+              <a:t>Overheads charged to it were $19,944, of which $5,965 is its own spending and $13,979 is its share of the office.</a:t>
+            </a:r>
+          </a:p>
+          <a:p>
+            <a:endParaRPr/>
+          </a:p>
+          <a:p>
+            <a:r>
+              <a:t>That leaves a loss of $19,870 for the month.</a:t>
+            </a:r>
+          </a:p>
+          <a:p>
+            <a:endParaRPr/>
+          </a:p>
+          <a:p>
+            <a:r>
+              <a:t>Year to date it has billed $4,068 against a budget of $236,707.</a:t>
+            </a:r>
+          </a:p>
+          <a:p>
+            <a:endParaRPr/>
+          </a:p>
+          <a:p>
+            <a:r>
+              <a:t>On people, employment expense of $9,496, of which $5,545 is its own staff and $3,951 its share of office wages. It recorded 31 billable hours and 84 non-billable, with 53 hours of leave.</a:t>
+            </a:r>
+          </a:p>
+          <a:p>
+            <a:endParaRPr/>
+          </a:p>
+          <a:p>
+            <a:r>
+              <a:t>The department has carried running costs against almost no fee income for three consecutive months. I would suggest its structure, capacity and commercial basis are reviewed, including whether the work is better delivered within Integration.</a:t>
             </a:r>
           </a:p>
         </p:txBody>
@@ -2574,7 +2531,7 @@
           <a:lstStyle/>
           <a:p>
             <a:r>
-              <a:t>Other operating expenses for the year to date.</a:t>
+              <a:t>Revenue by department for September 2026, actual against budget and against the same month last year.</a:t>
             </a:r>
           </a:p>
           <a:p>
@@ -2582,7 +2539,27 @@
           </a:p>
           <a:p>
             <a:r>
-              <a:t>Rent $62,043 at 45.4%. IT network service and support $39,570 at 28.9%. Rental outgoings $14,684 at 10.7%. Travel and per diems $5,627 at 4.1%. Stamp duty, indirect, $3,455 at 2.5%. Repairs and maintenance $2,079 at 1.5%. Office cleaning $2,079 at 1.5%. Mobile phones $1,825 at 1.3%. All other items $5,390 at 3.9%.</a:t>
+              <a:t>Support: $242,948 against a budget of $248,017 and $231,214 last year.</a:t>
+            </a:r>
+          </a:p>
+          <a:p>
+            <a:r>
+              <a:t>Integration: $234,858 against a budget of $59,272 and $21,421 last year.</a:t>
+            </a:r>
+          </a:p>
+          <a:p>
+            <a:r>
+              <a:t>Events: $73,304 against a budget of $65,828 and $75,333 last year.</a:t>
+            </a:r>
+          </a:p>
+          <a:p>
+            <a:r>
+              <a:t>Video: $7,303 against a budget of $17,498 and $20,025 last year.</a:t>
+            </a:r>
+          </a:p>
+          <a:p>
+            <a:r>
+              <a:t>Consulting: $3,531 against a budget of $23,050 and $8,330 last year.</a:t>
             </a:r>
           </a:p>
           <a:p>
@@ -2590,7 +2567,7 @@
           </a:p>
           <a:p>
             <a:r>
-              <a:t>Rent and outgoings are fixed by the lease. IT support is the next largest and the only item that moves with activity.</a:t>
+              <a:t>Company revenue of $561,945 against a $413,665 budget and $356,323 in September last year.</a:t>
             </a:r>
           </a:p>
           <a:p>
@@ -2598,7 +2575,7 @@
           </a:p>
           <a:p>
             <a:r>
-              <a:t>The practical conclusion is that savings of any size do not come from this category. A material reduction would require a discussion about the office lease.</a:t>
+              <a:t>The variance to budget is almost entirely Integration, and it represents one large fit-out at a 10.1% gross margin. It is better read as timing than as growth. Video and Consulting are below budget for the third consecutive month.</a:t>
             </a:r>
           </a:p>
         </p:txBody>
@@ -2684,31 +2661,7 @@
           <a:lstStyle/>
           <a:p>
             <a:r>
-              <a:t>Labour mix for the year to date, direct labour charged to cost of sales split by type.</a:t>
-            </a:r>
-          </a:p>
-          <a:p>
-            <a:endParaRPr/>
-          </a:p>
-          <a:p>
-            <a:r>
-              <a:t>Sub-contract labour $117,012. Service hires $23,704. Direct salaries $314,763. Direct wages $111,018. Direct superannuation $54,240.</a:t>
-            </a:r>
-          </a:p>
-          <a:p>
-            <a:endParaRPr/>
-          </a:p>
-          <a:p>
-            <a:r>
-              <a:t>The majority is permanent payroll. Contractors are the only labour cost that rises and falls with the work.</a:t>
-            </a:r>
-          </a:p>
-          <a:p>
-            <a:endParaRPr/>
-          </a:p>
-          <a:p>
-            <a:r>
-              <a:t>This is the link to the utilisation section. The business pays for hours worked and invoices for hours that are chargeable, and margin follows the difference between the two.</a:t>
+              <a:t>Running costs are steady at approximately $214k a month. Spending is not the cause of the result, but it is the figure revenue has to cover.</a:t>
             </a:r>
           </a:p>
         </p:txBody>
@@ -2794,7 +2747,7 @@
           <a:lstStyle/>
           <a:p>
             <a:r>
-              <a:t>Employment expense split between office staff and departmental staff for September 2026.</a:t>
+              <a:t>Operating cost distribution for the year to date, with cost of sales and overhead shown on one scale.</a:t>
             </a:r>
           </a:p>
           <a:p>
@@ -2802,7 +2755,7 @@
           </a:p>
           <a:p>
             <a:r>
-              <a:t>Departmental staff is the employment expense on each department's own cost centre: Support $8,980, Events $35,665, Video $2,660, Integration $8,563, Consulting $5,545.</a:t>
+              <a:t>Cost of sales, labour $620,737 at 38.0%. Cost of sales, equipment and services $347,307 at 21.3%. Cost of sales, other direct $24,117 at 1.5%. Overhead, general and administrative $75,700 at 4.6%. Overhead, business insurances $25,227 at 1.5%. Overhead, advertising and promotion $34,119 at 2.1%. Overhead, operating expenses $136,752 at 8.4%. Overhead, employment expenses $369,466 at 22.6%.</a:t>
             </a:r>
           </a:p>
           <a:p>
@@ -2810,7 +2763,7 @@
           </a:p>
           <a:p>
             <a:r>
-              <a:t>Office staff is the admin employment pot of $63,077, allocated across the departments on their share of full time equivalent: Support $42,262, Events $15,294, Video $1,301, Integration $269, Consulting $3,951.</a:t>
+              <a:t>The concentration is the point. Wages for staff on jobs and wages for everyone else make up the bulk of the cost base, and the second group is largely fixed within the year, which is why a quieter month passes straight to the result.</a:t>
             </a:r>
           </a:p>
           <a:p>
@@ -2818,15 +2771,7 @@
           </a:p>
           <a:p>
             <a:r>
-              <a:t>Full time equivalent is rolling twelve month worked hours on that cost centre divided by 2,024 hours, being 253 working days at eight hours. That is the method set out in the training material.</a:t>
-            </a:r>
-          </a:p>
-          <a:p>
-            <a:endParaRPr/>
-          </a:p>
-          <a:p>
-            <a:r>
-              <a:t>The change worth noting is that this allocation no longer depends on a figure typed in by hand. The pack calculates it from the Labour Hours Report, so it reproduces each month without a judgement being made.</a:t>
+              <a:t>If the question is where costs can be reduced, the honest answer is headcount or premises. Reductions in subscriptions and travel would not change this picture materially.</a:t>
             </a:r>
           </a:p>
         </p:txBody>
@@ -2912,7 +2857,31 @@
           <a:lstStyle/>
           <a:p>
             <a:r>
-              <a:t>Revenue is concentrated and cash is slow. Days sales outstanding is 47.2 days against a 30 day target, which represents $303,605 of cash held in the receivables book above where it should be.</a:t>
+              <a:t>Other operating expenses for the year to date.</a:t>
+            </a:r>
+          </a:p>
+          <a:p>
+            <a:endParaRPr/>
+          </a:p>
+          <a:p>
+            <a:r>
+              <a:t>Rent $62,043 at 45.4%. IT network service and support $39,570 at 28.9%. Rental outgoings $14,684 at 10.7%. Travel and per diems $5,627 at 4.1%. Stamp duty, indirect, $3,455 at 2.5%. Repairs and maintenance $2,079 at 1.5%. Office cleaning $2,079 at 1.5%. Mobile phones $1,825 at 1.3%. All other items $5,390 at 3.9%.</a:t>
+            </a:r>
+          </a:p>
+          <a:p>
+            <a:endParaRPr/>
+          </a:p>
+          <a:p>
+            <a:r>
+              <a:t>Rent and outgoings are fixed by the lease. IT support is the next largest and the only item that moves with activity.</a:t>
+            </a:r>
+          </a:p>
+          <a:p>
+            <a:endParaRPr/>
+          </a:p>
+          <a:p>
+            <a:r>
+              <a:t>The practical conclusion is that savings of any size do not come from this category. A material reduction would require a discussion about the office lease.</a:t>
             </a:r>
           </a:p>
         </p:txBody>
@@ -2998,7 +2967,7 @@
           <a:lstStyle/>
           <a:p>
             <a:r>
-              <a:t>The ten largest customers by revenue for the year to date, with the top three highlighted.</a:t>
+              <a:t>Labour mix for the year to date, direct labour charged to cost of sales split by type.</a:t>
             </a:r>
           </a:p>
           <a:p>
@@ -3006,52 +2975,7 @@
           </a:p>
           <a:p>
             <a:r>
-              <a:t>1. Deloitte Services: $401,755 for the year, 24.7% of the total, $119,614 of it in September.</a:t>
-            </a:r>
-          </a:p>
-          <a:p>
-            <a:r>
-              <a:t>2. Aware Super: $285,075 for the year, 17.5% of the total, $241,178 of it in September.</a:t>
-            </a:r>
-          </a:p>
-          <a:p>
-            <a:r>
-              <a:t>3. CBA Place South: $105,040 for the year, 6.5% of the total, $30,409 of it in September.</a:t>
-            </a:r>
-          </a:p>
-          <a:p>
-            <a:r>
-              <a:t>4. Ventia: $97,662 for the year, 6.0% of the total, $9,105 of it in September.</a:t>
-            </a:r>
-          </a:p>
-          <a:p>
-            <a:r>
-              <a:t>5. PwC Services: $88,051 for the year, 5.4% of the total, $26,707 of it in September.</a:t>
-            </a:r>
-          </a:p>
-          <a:p>
-            <a:r>
-              <a:t>6. APT Management Services: $63,613 for the year, 3.9% of the total, $4,527 of it in September.</a:t>
-            </a:r>
-          </a:p>
-          <a:p>
-            <a:r>
-              <a:t>7. ASX Operations: $60,858 for the year, 3.7% of the total, $17,167 of it in September.</a:t>
-            </a:r>
-          </a:p>
-          <a:p>
-            <a:r>
-              <a:t>8. Bankwest: $54,971 for the year, 3.4% of the total, $17,230 of it in September.</a:t>
-            </a:r>
-          </a:p>
-          <a:p>
-            <a:r>
-              <a:t>9. Data#3: $45,909 for the year, 2.8% of the total, none in September.</a:t>
-            </a:r>
-          </a:p>
-          <a:p>
-            <a:r>
-              <a:t>10. Generation-e Productivity Solutions: $37,166 for the year, 2.3% of the total, $12,389 of it in September.</a:t>
+              <a:t>Sub-contract labour $117,012. Service hires $23,704. Direct salaries $314,763. Direct wages $111,018. Direct superannuation $54,240.</a:t>
             </a:r>
           </a:p>
           <a:p>
@@ -3059,7 +2983,7 @@
           </a:p>
           <a:p>
             <a:r>
-              <a:t>The ten together represent $1,240,100, or 76.3% of total revenue. Every other customer accounts for the remaining $384,360. The three highlighted customers are 48.7% of the year between them.</a:t>
+              <a:t>The majority is permanent payroll. Contractors are the only labour cost that rises and falls with the work.</a:t>
             </a:r>
           </a:p>
           <a:p>
@@ -3067,15 +2991,7 @@
           </a:p>
           <a:p>
             <a:r>
-              <a:t>The distinction that matters is contracted work against one-off projects. Deloitte Services is contracted support that renews monthly. Aware Super is a fit-out that has now completed. Treating the two as the same kind of income is how a forecast goes wrong.</a:t>
-            </a:r>
-          </a:p>
-          <a:p>
-            <a:endParaRPr/>
-          </a:p>
-          <a:p>
-            <a:r>
-              <a:t>I would suggest a named relationship owner for each of the top three before the half year, and that the new business target is set on customers four to twenty rather than on the accounts the business already holds.</a:t>
+              <a:t>This is the link to the utilisation section. The business pays for hours worked and invoices for hours that are chargeable, and margin follows the difference between the two.</a:t>
             </a:r>
           </a:p>
         </p:txBody>
@@ -3161,7 +3077,7 @@
           <a:lstStyle/>
           <a:p>
             <a:r>
-              <a:t>Days sales outstanding at 30 September 2026.</a:t>
+              <a:t>Employment expense split between office staff and departmental staff for September 2026.</a:t>
             </a:r>
           </a:p>
           <a:p>
@@ -3169,7 +3085,7 @@
           </a:p>
           <a:p>
             <a:r>
-              <a:t>Receivables are $833,320. Over the last three months the business sold $1,624,460, which across 92 days is $17,657 of sales a day. On that basis customers are taking 47.2 days to pay.</a:t>
+              <a:t>Departmental staff is the employment expense on each department's own cost centre: Support $8,980, Events $35,665, Video $2,660, Integration $8,563, Consulting $5,545.</a:t>
             </a:r>
           </a:p>
           <a:p>
@@ -3177,7 +3093,7 @@
           </a:p>
           <a:p>
             <a:r>
-              <a:t>The target is 30 days, so the book is 17.2 days over. Collected on time, receivables would be $529,715 rather than $833,320, leaving $303,605 of cash in the book that should already be with the business.</a:t>
+              <a:t>Office staff is the admin employment pot of $63,077, allocated across the departments on their share of full time equivalent: Support $42,262, Events $15,294, Video $1,301, Integration $269, Consulting $3,951.</a:t>
             </a:r>
           </a:p>
           <a:p>
@@ -3185,7 +3101,7 @@
           </a:p>
           <a:p>
             <a:r>
-              <a:t>Set against the result, the quarter produced $5,774 of EBITDA while $303,605 remains uncollected. Collection is worth considerably more this quarter than any trading improvement available in the time, and it requires no additional cost.</a:t>
+              <a:t>Full time equivalent is rolling twelve month worked hours on that cost centre divided by 2,024 hours, being 253 working days at eight hours. That is the method set out in the training material.</a:t>
             </a:r>
           </a:p>
           <a:p>
@@ -3193,7 +3109,7 @@
           </a:p>
           <a:p>
             <a:r>
-              <a:t>Each day removed from the figure returns approximately $17,657.</a:t>
+              <a:t>The change worth noting is that this allocation no longer depends on a figure typed in by hand. The pack calculates it from the Labour Hours Report, so it reproduces each month without a judgement being made.</a:t>
             </a:r>
           </a:p>
         </p:txBody>
@@ -3279,51 +3195,7 @@
           <a:lstStyle/>
           <a:p>
             <a:r>
-              <a:t>The ten largest amounts owed at 30 September 2026.</a:t>
-            </a:r>
-          </a:p>
-          <a:p>
-            <a:endParaRPr/>
-          </a:p>
-          <a:p>
-            <a:r>
-              <a:t>Aware Super: $277,395, 33.3% of the total.</a:t>
-            </a:r>
-          </a:p>
-          <a:p>
-            <a:r>
-              <a:t>Deloitte Services P/L for Deloitte Services Trust: $131,575, 15.8%.</a:t>
-            </a:r>
-          </a:p>
-          <a:p>
-            <a:r>
-              <a:t>Ventia: $94,701, 11.4%.</a:t>
-            </a:r>
-          </a:p>
-          <a:p>
-            <a:r>
-              <a:t>Downer EDI Limited: $39,664, 4.8%.</a:t>
-            </a:r>
-          </a:p>
-          <a:p>
-            <a:r>
-              <a:t>Generation-e Productivity Solutions: $39,106, 4.7%.</a:t>
-            </a:r>
-          </a:p>
-          <a:p>
-            <a:endParaRPr/>
-          </a:p>
-          <a:p>
-            <a:r>
-              <a:t>The ageing profile is current $588,782 at 70.7%, under one month $133,177 at 16.0%, one month $86,553 at 10.4%, and three months $24,809 at 3.0%. Overdue in total $244,538, or 29.3% of the book.</a:t>
-            </a:r>
-          </a:p>
-          <a:p>
-            <a:endParaRPr/>
-          </a:p>
-          <a:p>
-            <a:r>
-              <a:t>Two customers hold most of the balance, so a targeted approach to those accounts would be more productive than a general collections exercise, and it represents the fastest cash available to the business this quarter.</a:t>
+              <a:t>Revenue is concentrated and cash is slow. Days sales outstanding is 47.2 days against a 30 day target, which represents $303,605 of cash held in the receivables book above where it should be.</a:t>
             </a:r>
           </a:p>
         </p:txBody>
@@ -3409,7 +3281,84 @@
           <a:lstStyle/>
           <a:p>
             <a:r>
-              <a:t>The company invoiced 2,438 hours in September 2026 out of 3,395 it was available for, which is 72%. Where chargeable hours fall short, margin follows.</a:t>
+              <a:t>The ten largest customers by revenue for the year to date, with the top three highlighted.</a:t>
+            </a:r>
+          </a:p>
+          <a:p>
+            <a:endParaRPr/>
+          </a:p>
+          <a:p>
+            <a:r>
+              <a:t>1. Deloitte Services: $401,755 for the year, 24.7% of the total, $119,614 of it in September.</a:t>
+            </a:r>
+          </a:p>
+          <a:p>
+            <a:r>
+              <a:t>2. Aware Super: $285,075 for the year, 17.5% of the total, $241,178 of it in September.</a:t>
+            </a:r>
+          </a:p>
+          <a:p>
+            <a:r>
+              <a:t>3. CBA Place South: $105,040 for the year, 6.5% of the total, $30,409 of it in September.</a:t>
+            </a:r>
+          </a:p>
+          <a:p>
+            <a:r>
+              <a:t>4. Ventia: $97,662 for the year, 6.0% of the total, $9,105 of it in September.</a:t>
+            </a:r>
+          </a:p>
+          <a:p>
+            <a:r>
+              <a:t>5. PwC Services: $88,051 for the year, 5.4% of the total, $26,707 of it in September.</a:t>
+            </a:r>
+          </a:p>
+          <a:p>
+            <a:r>
+              <a:t>6. APT Management Services: $63,613 for the year, 3.9% of the total, $4,527 of it in September.</a:t>
+            </a:r>
+          </a:p>
+          <a:p>
+            <a:r>
+              <a:t>7. ASX Operations: $60,858 for the year, 3.7% of the total, $17,167 of it in September.</a:t>
+            </a:r>
+          </a:p>
+          <a:p>
+            <a:r>
+              <a:t>8. Bankwest: $54,971 for the year, 3.4% of the total, $17,230 of it in September.</a:t>
+            </a:r>
+          </a:p>
+          <a:p>
+            <a:r>
+              <a:t>9. Data#3: $45,909 for the year, 2.8% of the total, none in September.</a:t>
+            </a:r>
+          </a:p>
+          <a:p>
+            <a:r>
+              <a:t>10. Generation-e Productivity Solutions: $37,166 for the year, 2.3% of the total, $12,389 of it in September.</a:t>
+            </a:r>
+          </a:p>
+          <a:p>
+            <a:endParaRPr/>
+          </a:p>
+          <a:p>
+            <a:r>
+              <a:t>The ten together represent $1,240,100, or 76.3% of total revenue. Every other customer accounts for the remaining $384,360. The three highlighted customers are 48.7% of the year between them.</a:t>
+            </a:r>
+          </a:p>
+          <a:p>
+            <a:endParaRPr/>
+          </a:p>
+          <a:p>
+            <a:r>
+              <a:t>The distinction that matters is contracted work against one-off projects. Deloitte Services is contracted support that renews monthly. Aware Super is a fit-out that has now completed. Treating the two as the same kind of income is how a forecast goes wrong.</a:t>
+            </a:r>
+          </a:p>
+          <a:p>
+            <a:endParaRPr/>
+          </a:p>
+          <a:p>
+            <a:r>
+              <a:t>I would suggest a named relationship owner for each of the top three before the half year, and that the new business target is set on customers four to twenty rather than on the accounts the business already holds.</a:t>
             </a:r>
           </a:p>
         </p:txBody>
@@ -3605,7 +3554,7 @@
           <a:lstStyle/>
           <a:p>
             <a:r>
-              <a:t>Chargeable per cent for September 2026, calculated on the same basis as the monthly Utilisation Report.</a:t>
+              <a:t>Days sales outstanding at 30 September 2026.</a:t>
             </a:r>
           </a:p>
           <a:p>
@@ -3613,7 +3562,7 @@
           </a:p>
           <a:p>
             <a:r>
-              <a:t>The measure is billable hours divided by workable business hours, being the hours each person was available for in the month. Leave and public holidays remain in the denominator, so a team taking its leave entitlement shows a lower percentage. That is the business's own definition and the pack now follows it.</a:t>
+              <a:t>Receivables are $833,320. Over the last three months the business sold $1,624,460, which across 92 days is $17,657 of sales a day. On that basis customers are taking 47.2 days to pay.</a:t>
             </a:r>
           </a:p>
           <a:p>
@@ -3621,7 +3570,7 @@
           </a:p>
           <a:p>
             <a:r>
-              <a:t>Support 91.2% against an 88.0% target, 3.2 points over. Production 30.2% against 67.0%, 36.8 points under. Consulting 23.0% against 50.0%, 27.0 points under. The company 71.8% against 80.9%, 9.0 points under.</a:t>
+              <a:t>The target is 30 days, so the book is 17.2 days over. Collected on time, receivables would be $529,715 rather than $833,320, leaving $303,605 of cash in the book that should already be with the business.</a:t>
             </a:r>
           </a:p>
           <a:p>
@@ -3629,7 +3578,7 @@
           </a:p>
           <a:p>
             <a:r>
-              <a:t>Support has exceeded its target in all three closed months, by 1.4, 5.8 and 3.2 points.</a:t>
+              <a:t>Set against the result, the quarter produced $5,774 of EBITDA while $303,605 remains uncollected. Collection is worth considerably more this quarter than any trading improvement available in the time, and it requires no additional cost.</a:t>
             </a:r>
           </a:p>
           <a:p>
@@ -3637,39 +3586,7 @@
           </a:p>
           <a:p>
             <a:r>
-              <a:t>Leave explains the Production position: 333 hours out of 882 available, being 37.7% of the month. Across the company, leave accounted for 17.8% of available hours against 7.5% in August.</a:t>
-            </a:r>
-          </a:p>
-          <a:p>
-            <a:endParaRPr/>
-          </a:p>
-          <a:p>
-            <a:r>
-              <a:t>The report shows three person groups rather than five, because it groups by the department a person belongs to and nobody is assigned to Video or Integration. Their work is carried out by Production and Consulting staff.</a:t>
-            </a:r>
-          </a:p>
-          <a:p>
-            <a:endParaRPr/>
-          </a:p>
-          <a:p>
-            <a:r>
-              <a:t>On sources, workable business hours and the target are both entered from the report, as neither can be derived in the pack: the first requires each group's headcount and part time arrangements, and the second is set per person and averaged. The over or under reading and the leave share are calculated and reproduce the report's own columns. The three month history is held on the Utilisation tab with two reconciliation rows against the report's grand total.</a:t>
-            </a:r>
-          </a:p>
-          <a:p>
-            <a:endParaRPr/>
-          </a:p>
-          <a:p>
-            <a:r>
-              <a:t>One correction to note for completeness. An earlier version of this pack divided billable hours by hours actually worked, excluding leave, which showed Support at 99.5% and gave the appearance of a coding error. That was a difference in method rather than a problem with the data.</a:t>
-            </a:r>
-          </a:p>
-          <a:p>
-            <a:endParaRPr/>
-          </a:p>
-          <a:p>
-            <a:r>
-              <a:t>OT and TIL is reported but is not carried in the pack. The August figure for Support reads 365.62, which cannot represent hours in a month, so that column would benefit from review on the source report before it is relied upon.</a:t>
+              <a:t>Each day removed from the figure returns approximately $17,657.</a:t>
             </a:r>
           </a:p>
         </p:txBody>
@@ -3755,7 +3672,7 @@
           <a:lstStyle/>
           <a:p>
             <a:r>
-              <a:t>How each department spent its hours in September 2026.</a:t>
+              <a:t>The ten largest amounts owed at 30 September 2026.</a:t>
             </a:r>
           </a:p>
           <a:p>
@@ -3763,7 +3680,27 @@
           </a:p>
           <a:p>
             <a:r>
-              <a:t>The bars show the mix within each department rather than its size. Each is scaled to that department's own total, because Support works around a hundred times the hours Integration does and on a common scale four of the five would not be visible. The figure on each segment is the actual hours.</a:t>
+              <a:t>Aware Super: $277,395, 33.3% of the total.</a:t>
+            </a:r>
+          </a:p>
+          <a:p>
+            <a:r>
+              <a:t>Deloitte Services P/L for Deloitte Services Trust: $131,575, 15.8%.</a:t>
+            </a:r>
+          </a:p>
+          <a:p>
+            <a:r>
+              <a:t>Ventia: $94,701, 11.4%.</a:t>
+            </a:r>
+          </a:p>
+          <a:p>
+            <a:r>
+              <a:t>Downer EDI Limited: $39,664, 4.8%.</a:t>
+            </a:r>
+          </a:p>
+          <a:p>
+            <a:r>
+              <a:t>Generation-e Productivity Solutions: $39,106, 4.7%.</a:t>
             </a:r>
           </a:p>
           <a:p>
@@ -3771,27 +3708,7 @@
           </a:p>
           <a:p>
             <a:r>
-              <a:t>Support: 2,132 hours on jobs, 11 not on jobs, 218 leave.</a:t>
-            </a:r>
-          </a:p>
-          <a:p>
-            <a:r>
-              <a:t>Events: 241 hours on jobs, 249 not on jobs, 333 leave.</a:t>
-            </a:r>
-          </a:p>
-          <a:p>
-            <a:r>
-              <a:t>Video: 25 hours on jobs, 8 not on jobs, no leave.</a:t>
-            </a:r>
-          </a:p>
-          <a:p>
-            <a:r>
-              <a:t>Integration: 10 hours on jobs, none off jobs, no leave.</a:t>
-            </a:r>
-          </a:p>
-          <a:p>
-            <a:r>
-              <a:t>Consulting: 31 hours on jobs, 84 not on jobs, 53 leave.</a:t>
+              <a:t>The ageing profile is current $588,782 at 70.7%, under one month $133,177 at 16.0%, one month $86,553 at 10.4%, and three months $24,809 at 3.0%. Overdue in total $244,538, or 29.3% of the book.</a:t>
             </a:r>
           </a:p>
           <a:p>
@@ -3799,31 +3716,7 @@
           </a:p>
           <a:p>
             <a:r>
-              <a:t>Across the five departments, 2,437 hours on jobs out of 2,789 worked.</a:t>
-            </a:r>
-          </a:p>
-          <a:p>
-            <a:endParaRPr/>
-          </a:p>
-          <a:p>
-            <a:r>
-              <a:t>On the Support bar, the small non-billable segment arises from the regrouping rather than from coding. The monthly report shows Support with no non-billable hours in September. This view groups by the department the work was performed for, so a small amount of other staff's non-billable time appears here.</a:t>
-            </a:r>
-          </a:p>
-          <a:p>
-            <a:endParaRPr/>
-          </a:p>
-          <a:p>
-            <a:r>
-              <a:t>Events is the clearest operational position on this slide: 333 hours of leave on a small team removes most of the month's capacity.</a:t>
-            </a:r>
-          </a:p>
-          <a:p>
-            <a:endParaRPr/>
-          </a:p>
-          <a:p>
-            <a:r>
-              <a:t>There is also an opportunity worth quantifying. Support earns approximately $48 of margin on each hour it invoices. Five additional points of billable time across Support and Events, at the rates each already achieves, would be worth approximately $15,813 a month at no additional cost. It is the largest controllable item in this pack.</a:t>
+              <a:t>Two customers hold most of the balance, so a targeted approach to those accounts would be more productive than a general collections exercise, and it represents the fastest cash available to the business this quarter.</a:t>
             </a:r>
           </a:p>
         </p:txBody>
@@ -3909,39 +3802,7 @@
           <a:lstStyle/>
           <a:p>
             <a:r>
-              <a:t>The hours mix for September 2026, grouped as the three departments the P&amp;L is built on.</a:t>
-            </a:r>
-          </a:p>
-          <a:p>
-            <a:endParaRPr/>
-          </a:p>
-          <a:p>
-            <a:r>
-              <a:t>Production is Events and Video together. Consulting is Integration and Consulting together. Support stands alone.</a:t>
-            </a:r>
-          </a:p>
-          <a:p>
-            <a:endParaRPr/>
-          </a:p>
-          <a:p>
-            <a:r>
-              <a:t>Each bar is scaled to its own total, as Support works considerably more hours than the other two groups combined.</a:t>
-            </a:r>
-          </a:p>
-          <a:p>
-            <a:endParaRPr/>
-          </a:p>
-          <a:p>
-            <a:r>
-              <a:t>The pattern underlies much of this pack. Support is almost entirely billable and is the only group covering its costs. Production and Consulting each spend around half their paid hours, or more, on work that cannot be invoiced, and both record losses.</a:t>
-            </a:r>
-          </a:p>
-          <a:p>
-            <a:endParaRPr/>
-          </a:p>
-          <a:p>
-            <a:r>
-              <a:t>On the monthly report's own basis, which counts leave against the measure, Support reads 91.2%. That is the figure to use in discussion.</a:t>
+              <a:t>The company invoiced 2,438 hours in September 2026 out of 3,395 it was available for, which is 72%. Where chargeable hours fall short, margin follows.</a:t>
             </a:r>
           </a:p>
         </p:txBody>
@@ -4027,7 +3888,71 @@
           <a:lstStyle/>
           <a:p>
             <a:r>
-              <a:t>Three months are closed and the remaining nine remain at original budget. That is the matter before the board.</a:t>
+              <a:t>Chargeable per cent for September 2026, calculated on the same basis as the monthly Utilisation Report.</a:t>
+            </a:r>
+          </a:p>
+          <a:p>
+            <a:endParaRPr/>
+          </a:p>
+          <a:p>
+            <a:r>
+              <a:t>The measure is billable hours divided by workable business hours, being the hours each person was available for in the month. Leave and public holidays remain in the denominator, so a team taking its leave entitlement shows a lower percentage. That is the business's own definition and the pack now follows it.</a:t>
+            </a:r>
+          </a:p>
+          <a:p>
+            <a:endParaRPr/>
+          </a:p>
+          <a:p>
+            <a:r>
+              <a:t>Support 91.2% against an 88.0% target, 3.2 points over. Production 30.2% against 67.0%, 36.8 points under. Consulting 23.0% against 50.0%, 27.0 points under. The company 71.8% against 80.9%, 9.0 points under.</a:t>
+            </a:r>
+          </a:p>
+          <a:p>
+            <a:endParaRPr/>
+          </a:p>
+          <a:p>
+            <a:r>
+              <a:t>Support has exceeded its target in all three closed months, by 1.4, 5.8 and 3.2 points.</a:t>
+            </a:r>
+          </a:p>
+          <a:p>
+            <a:endParaRPr/>
+          </a:p>
+          <a:p>
+            <a:r>
+              <a:t>Leave explains the Production position: 333 hours out of 882 available, being 37.7% of the month. Across the company, leave accounted for 17.8% of available hours against 7.5% in August.</a:t>
+            </a:r>
+          </a:p>
+          <a:p>
+            <a:endParaRPr/>
+          </a:p>
+          <a:p>
+            <a:r>
+              <a:t>The report shows three person groups rather than five, because it groups by the department a person belongs to and nobody is assigned to Video or Integration. Their work is carried out by Production and Consulting staff.</a:t>
+            </a:r>
+          </a:p>
+          <a:p>
+            <a:endParaRPr/>
+          </a:p>
+          <a:p>
+            <a:r>
+              <a:t>On sources, workable business hours and the target are both entered from the report, as neither can be derived in the pack: the first requires each group's headcount and part time arrangements, and the second is set per person and averaged. The over or under reading and the leave share are calculated and reproduce the report's own columns. The three month history is held on the Utilisation tab with two reconciliation rows against the report's grand total.</a:t>
+            </a:r>
+          </a:p>
+          <a:p>
+            <a:endParaRPr/>
+          </a:p>
+          <a:p>
+            <a:r>
+              <a:t>One correction to note for completeness. An earlier version of this pack divided billable hours by hours actually worked, excluding leave, which showed Support at 99.5% and gave the appearance of a coding error. That was a difference in method rather than a problem with the data.</a:t>
+            </a:r>
+          </a:p>
+          <a:p>
+            <a:endParaRPr/>
+          </a:p>
+          <a:p>
+            <a:r>
+              <a:t>OT and TIL is reported but is not carried in the pack. The August figure for Support reads 365.62, which cannot represent hours in a month, so that column would benefit from review on the source report before it is relied upon.</a:t>
             </a:r>
           </a:p>
         </p:txBody>
@@ -4113,7 +4038,7 @@
           <a:lstStyle/>
           <a:p>
             <a:r>
-              <a:t>Revenue by month, actual for the three closed months and original budget thereafter.</a:t>
+              <a:t>How each department spent its hours in September 2026.</a:t>
             </a:r>
           </a:p>
           <a:p>
@@ -4121,7 +4046,7 @@
           </a:p>
           <a:p>
             <a:r>
-              <a:t>First quarter actual of $1,624,460 against a budget of $1,996,110, behind by $371,650.</a:t>
+              <a:t>The bars show the mix within each department rather than its size. Each is scaled to that department's own total, because Support works around a hundred times the hours Integration does and on a common scale four of the five would not be visible. The figure on each segment is the actual hours.</a:t>
             </a:r>
           </a:p>
           <a:p>
@@ -4129,7 +4054,27 @@
           </a:p>
           <a:p>
             <a:r>
-              <a:t>The nine months from October remain at the budget set before the year began. October is budgeted at $950,416, which is higher than any month the business has delivered.</a:t>
+              <a:t>Support: 2,132 hours on jobs, 11 not on jobs, 218 leave.</a:t>
+            </a:r>
+          </a:p>
+          <a:p>
+            <a:r>
+              <a:t>Events: 241 hours on jobs, 249 not on jobs, 333 leave.</a:t>
+            </a:r>
+          </a:p>
+          <a:p>
+            <a:r>
+              <a:t>Video: 25 hours on jobs, 8 not on jobs, no leave.</a:t>
+            </a:r>
+          </a:p>
+          <a:p>
+            <a:r>
+              <a:t>Integration: 10 hours on jobs, none off jobs, no leave.</a:t>
+            </a:r>
+          </a:p>
+          <a:p>
+            <a:r>
+              <a:t>Consulting: 31 hours on jobs, 84 not on jobs, 53 leave.</a:t>
             </a:r>
           </a:p>
           <a:p>
@@ -4137,7 +4082,7 @@
           </a:p>
           <a:p>
             <a:r>
-              <a:t>Two points for the board. The first quarter variance is concentrated in Consulting and Video, which were budgeted on a resourcing level that does not exist. And the margin assumption in the budget sits above the rate the business has delivered for two years, so a month that meets the revenue figure would still fall short on profit.</a:t>
+              <a:t>Across the five departments, 2,437 hours on jobs out of 2,789 worked.</a:t>
             </a:r>
           </a:p>
           <a:p>
@@ -4145,7 +4090,23 @@
           </a:p>
           <a:p>
             <a:r>
-              <a:t>My recommendation is a rolling forecast from the second quarter, rebuilding Consulting around actual capacity and resetting gross margin to delivered rates. December would be better left as budgeted, as the business closes for two weeks and the loss is genuine.</a:t>
+              <a:t>On the Support bar, the small non-billable segment arises from the regrouping rather than from coding. The monthly report shows Support with no non-billable hours in September. This view groups by the department the work was performed for, so a small amount of other staff's non-billable time appears here.</a:t>
+            </a:r>
+          </a:p>
+          <a:p>
+            <a:endParaRPr/>
+          </a:p>
+          <a:p>
+            <a:r>
+              <a:t>Events is the clearest operational position on this slide: 333 hours of leave on a small team removes most of the month's capacity.</a:t>
+            </a:r>
+          </a:p>
+          <a:p>
+            <a:endParaRPr/>
+          </a:p>
+          <a:p>
+            <a:r>
+              <a:t>There is also an opportunity worth quantifying. Support earns approximately $48 of margin on each hour it invoices. Five additional points of billable time across Support and Events, at the rates each already achieves, would be worth approximately $15,813 a month at no additional cost. It is the largest controllable item in this pack.</a:t>
             </a:r>
           </a:p>
         </p:txBody>
@@ -4231,7 +4192,7 @@
           <a:lstStyle/>
           <a:p>
             <a:r>
-              <a:t>Seven recommendations, each with a suggested owner and date.</a:t>
+              <a:t>The hours mix for September 2026, grouped as the three departments the P&amp;L is built on.</a:t>
             </a:r>
           </a:p>
           <a:p>
@@ -4239,7 +4200,7 @@
           </a:p>
           <a:p>
             <a:r>
-              <a:t>The first two carry the most weight: reforecasting on margin rather than revenue, and reviewing the overhead keys. Most of the pack follows from those two figures.</a:t>
+              <a:t>Production is Events and Video together. Consulting is Integration and Consulting together. Support stands alone.</a:t>
             </a:r>
           </a:p>
           <a:p>
@@ -4247,7 +4208,7 @@
           </a:p>
           <a:p>
             <a:r>
-              <a:t>The Consulting position has now run for three months with running costs against almost no fee income, and would benefit from a decision this quarter.</a:t>
+              <a:t>Each bar is scaled to its own total, as Support works considerably more hours than the other two groups combined.</a:t>
             </a:r>
           </a:p>
           <a:p>
@@ -4255,7 +4216,15 @@
           </a:p>
           <a:p>
             <a:r>
-              <a:t>The receivables item is the only one that produces cash within the quarter, and utilisation remains the largest controllable item.</a:t>
+              <a:t>The pattern underlies much of this pack. Support is almost entirely billable and is the only group covering its costs. Production and Consulting each spend around half their paid hours, or more, on work that cannot be invoiced, and both record losses.</a:t>
+            </a:r>
+          </a:p>
+          <a:p>
+            <a:endParaRPr/>
+          </a:p>
+          <a:p>
+            <a:r>
+              <a:t>On the monthly report's own basis, which counts leave against the measure, Support reads 91.2%. That is the figure to use in discussion.</a:t>
             </a:r>
           </a:p>
         </p:txBody>
@@ -4301,13 +4270,7 @@
   <p:cSld>
     <p:spTree>
       <p:nvGrpSpPr>
-        <p:cNvPr id="1" name="">
-          <a:extLst>
-            <a:ext uri="{FF2B5EF4-FFF2-40B4-BE49-F238E27FC236}">
-              <a16:creationId xmlns:a16="http://schemas.microsoft.com/office/drawing/2014/main" id="{E5E3A21A-7AA5-7C87-038E-0D4DDF08F609}"/>
-            </a:ext>
-          </a:extLst>
-        </p:cNvPr>
+        <p:cNvPr id="1" name=""/>
         <p:cNvGrpSpPr/>
         <p:nvPr/>
       </p:nvGrpSpPr>
@@ -4321,13 +4284,7 @@
       </p:grpSpPr>
       <p:sp>
         <p:nvSpPr>
-          <p:cNvPr id="2" name="Slide Image Placeholder 1">
-            <a:extLst>
-              <a:ext uri="{FF2B5EF4-FFF2-40B4-BE49-F238E27FC236}">
-                <a16:creationId xmlns:a16="http://schemas.microsoft.com/office/drawing/2014/main" id="{9302D704-9E09-EEBE-23A6-CE9293C97765}"/>
-              </a:ext>
-            </a:extLst>
-          </p:cNvPr>
+          <p:cNvPr id="2" name="Slide Image Placeholder 1"/>
           <p:cNvSpPr>
             <a:spLocks noGrp="1" noRot="1" noChangeAspect="1"/>
           </p:cNvSpPr>
@@ -4339,13 +4296,7 @@
       </p:sp>
       <p:sp>
         <p:nvSpPr>
-          <p:cNvPr id="3" name="Notes Placeholder 2">
-            <a:extLst>
-              <a:ext uri="{FF2B5EF4-FFF2-40B4-BE49-F238E27FC236}">
-                <a16:creationId xmlns:a16="http://schemas.microsoft.com/office/drawing/2014/main" id="{BBF2BDA7-2C2E-0731-EAF4-B2CA3E8B0B68}"/>
-              </a:ext>
-            </a:extLst>
-          </p:cNvPr>
+          <p:cNvPr id="3" name="Notes Placeholder 2"/>
           <p:cNvSpPr>
             <a:spLocks noGrp="1"/>
           </p:cNvSpPr>
@@ -4359,20 +4310,14 @@
           <a:lstStyle/>
           <a:p>
             <a:r>
-              <a:t>The source files behind this pack. Every figure in the review is drawn from the Financial Controller Pack, which reconciles to the Xero general ledger.</a:t>
-            </a:r>
-          </a:p>
-        </p:txBody>
-      </p:sp>
-      <p:sp>
-        <p:nvSpPr>
-          <p:cNvPr id="4" name="Slide Number Placeholder 3">
-            <a:extLst>
-              <a:ext uri="{FF2B5EF4-FFF2-40B4-BE49-F238E27FC236}">
-                <a16:creationId xmlns:a16="http://schemas.microsoft.com/office/drawing/2014/main" id="{9509B891-383F-E7FD-8008-0EB6BA55BD4F}"/>
-              </a:ext>
-            </a:extLst>
-          </p:cNvPr>
+              <a:t>Three months are closed and the remaining nine remain at original budget. That is the matter before the board.</a:t>
+            </a:r>
+          </a:p>
+        </p:txBody>
+      </p:sp>
+      <p:sp>
+        <p:nvSpPr>
+          <p:cNvPr id="4" name="Slide Number Placeholder 3"/>
           <p:cNvSpPr>
             <a:spLocks noGrp="1"/>
           </p:cNvSpPr>
@@ -4396,7 +4341,7 @@
     </p:spTree>
     <p:extLst>
       <p:ext uri="{BB962C8B-B14F-4D97-AF65-F5344CB8AC3E}">
-        <p14:creationId xmlns:p14="http://schemas.microsoft.com/office/powerpoint/2010/main" val="3112518695"/>
+        <p14:creationId xmlns:p14="http://schemas.microsoft.com/office/powerpoint/2010/main" val="1024086991"/>
       </p:ext>
     </p:extLst>
   </p:cSld>
@@ -4451,7 +4396,39 @@
           <a:lstStyle/>
           <a:p>
             <a:r>
-              <a:t>Two figures to close on. At the margin the business delivers, break even requires $549,372 of revenue a month, and the business is running at $541,487. Everything else in the pack sits underneath those two numbers.</a:t>
+              <a:t>Revenue by month, actual for the three closed months and original budget thereafter.</a:t>
+            </a:r>
+          </a:p>
+          <a:p>
+            <a:endParaRPr/>
+          </a:p>
+          <a:p>
+            <a:r>
+              <a:t>First quarter actual of $1,624,460 against a budget of $1,996,110, behind by $371,650.</a:t>
+            </a:r>
+          </a:p>
+          <a:p>
+            <a:endParaRPr/>
+          </a:p>
+          <a:p>
+            <a:r>
+              <a:t>The nine months from October remain at the budget set before the year began. October is budgeted at $950,416, which is higher than any month the business has delivered.</a:t>
+            </a:r>
+          </a:p>
+          <a:p>
+            <a:endParaRPr/>
+          </a:p>
+          <a:p>
+            <a:r>
+              <a:t>Two points for the board. The first quarter variance is concentrated in Consulting and Video, which were budgeted on a resourcing level that does not exist. And the margin assumption in the budget sits above the rate the business has delivered for two years, so a month that meets the revenue figure would still fall short on profit.</a:t>
+            </a:r>
+          </a:p>
+          <a:p>
+            <a:endParaRPr/>
+          </a:p>
+          <a:p>
+            <a:r>
+              <a:t>My recommendation is a rolling forecast from the second quarter, rebuilding Consulting around actual capacity and resetting gross margin to delivered rates. December would be better left as budgeted, as the business closes for two weeks and the loss is genuine.</a:t>
             </a:r>
           </a:p>
         </p:txBody>
@@ -4493,7 +4470,7 @@
 </file>
 
 <file path=ppt/notesSlides/notesSlide38.xml><?xml version="1.0" encoding="utf-8"?>
-<p:notes xmlns:a="http://schemas.openxmlformats.org/drawingml/2006/main" xmlns:p="http://schemas.openxmlformats.org/presentationml/2006/main" xmlns:r="http://schemas.openxmlformats.org/officeDocument/2006/relationships">
+<p:notes xmlns:a="http://schemas.openxmlformats.org/drawingml/2006/main" xmlns:r="http://schemas.openxmlformats.org/officeDocument/2006/relationships" xmlns:p="http://schemas.openxmlformats.org/presentationml/2006/main">
   <p:cSld>
     <p:spTree>
       <p:nvGrpSpPr>
@@ -4511,6 +4488,18 @@
       </p:grpSpPr>
       <p:sp>
         <p:nvSpPr>
+          <p:cNvPr id="2" name="Slide Image Placeholder 1"/>
+          <p:cNvSpPr>
+            <a:spLocks noGrp="1" noRot="1" noChangeAspect="1"/>
+          </p:cNvSpPr>
+          <p:nvPr>
+            <p:ph type="sldImg"/>
+          </p:nvPr>
+        </p:nvSpPr>
+        <p:spPr/>
+      </p:sp>
+      <p:sp>
+        <p:nvSpPr>
           <p:cNvPr id="3" name="Notes Placeholder 2"/>
           <p:cNvSpPr>
             <a:spLocks noGrp="1"/>
@@ -4525,54 +4514,64 @@
           <a:lstStyle/>
           <a:p>
             <a:r>
-              <a:t>Spend for September across three years and against budget, taken from the Xero History tab.</a:t>
-            </a:r>
-          </a:p>
-          <a:p/>
-          <a:p>
-            <a:r>
-              <a:t>Spend here is cost of sales plus overheads. September 2026 $604,363. Budget $520,765. September 2025 $408,939. September 2024 $419,910.</a:t>
-            </a:r>
-          </a:p>
-          <a:p/>
-          <a:p>
-            <a:r>
-              <a:t>September was $83,599 or 16.1% over budget on spend.</a:t>
-            </a:r>
-          </a:p>
-          <a:p/>
-          <a:p>
-            <a:r>
-              <a:t>Where that sits matters more than the total. Cost of sales was $374,130 against $289,192 budgeted, which is $84,938 over. Overheads were $230,233 against $231,573 budgeted, which is $1,340 under. So the entire overspend is cost of sales and the overheads landed on plan.</a:t>
-            </a:r>
-          </a:p>
-          <a:p/>
-          <a:p>
-            <a:r>
-              <a:t>That is the better of the two outcomes. Cost of sales moves with revenue, and September billed $561,945 against a budget of $413,665, so some of the extra cost bought extra revenue. Overheads do not move with revenue, and those held.</a:t>
-            </a:r>
-          </a:p>
-          <a:p/>
-          <a:p>
-            <a:r>
-              <a:t>Against the two earlier years, spend is up $195,425 or 47.8% on September 2025 and $184,453 or 43.9% on September 2024. Revenue over the same two years is up 57.7% and 27.6%, so spend has grown faster than revenue against FY25 and slower than revenue against FY26.</a:t>
-            </a:r>
-          </a:p>
-          <a:p/>
-          <a:p>
-            <a:r>
-              <a:t>The red line is revenue. It sat above the spend bar in September 2024 and below it in both years since, which is the same thing as saying those two Septembers lost money.</a:t>
-            </a:r>
-          </a:p>
-          <a:p/>
-          <a:p>
-            <a:r>
-              <a:t>FY25 comes from Xero, pulled on 22 October 2026. FY26 is the Actual FY26 tab and FY27 the P&amp;L FY27 tab. The month follows the reporting month on Setup, so in October this becomes October.</a:t>
-            </a:r>
+              <a:t>Seven recommendations, each with a suggested owner and date.</a:t>
+            </a:r>
+          </a:p>
+          <a:p>
+            <a:endParaRPr/>
+          </a:p>
+          <a:p>
+            <a:r>
+              <a:t>The first two carry the most weight: reforecasting on margin rather than revenue, and reviewing the overhead keys. Most of the pack follows from those two figures.</a:t>
+            </a:r>
+          </a:p>
+          <a:p>
+            <a:endParaRPr/>
+          </a:p>
+          <a:p>
+            <a:r>
+              <a:t>The Consulting position has now run for three months with running costs against almost no fee income, and would benefit from a decision this quarter.</a:t>
+            </a:r>
+          </a:p>
+          <a:p>
+            <a:endParaRPr/>
+          </a:p>
+          <a:p>
+            <a:r>
+              <a:t>The receivables item is the only one that produces cash within the quarter, and utilisation remains the largest controllable item.</a:t>
+            </a:r>
+          </a:p>
+        </p:txBody>
+      </p:sp>
+      <p:sp>
+        <p:nvSpPr>
+          <p:cNvPr id="4" name="Slide Number Placeholder 3"/>
+          <p:cNvSpPr>
+            <a:spLocks noGrp="1"/>
+          </p:cNvSpPr>
+          <p:nvPr>
+            <p:ph type="sldNum" sz="quarter" idx="10"/>
+          </p:nvPr>
+        </p:nvSpPr>
+        <p:spPr/>
+        <p:txBody>
+          <a:bodyPr lIns="107095" tIns="53547" rIns="107095" bIns="53547"/>
+          <a:lstStyle/>
+          <a:p>
+            <a:fld id="{F7021451-1387-4CA6-816F-3879F97B5CBC}" type="slidenum">
+              <a:rPr lang="en-US"/>
+              <a:t>38</a:t>
+            </a:fld>
+            <a:endParaRPr lang="en-US"/>
           </a:p>
         </p:txBody>
       </p:sp>
     </p:spTree>
+    <p:extLst>
+      <p:ext uri="{BB962C8B-B14F-4D97-AF65-F5344CB8AC3E}">
+        <p14:creationId xmlns:p14="http://schemas.microsoft.com/office/powerpoint/2010/main" val="1024086991"/>
+      </p:ext>
+    </p:extLst>
   </p:cSld>
   <p:clrMapOvr>
     <a:masterClrMapping/>
@@ -4581,11 +4580,17 @@
 </file>
 
 <file path=ppt/notesSlides/notesSlide39.xml><?xml version="1.0" encoding="utf-8"?>
-<p:notes xmlns:a="http://schemas.openxmlformats.org/drawingml/2006/main" xmlns:p="http://schemas.openxmlformats.org/presentationml/2006/main" xmlns:r="http://schemas.openxmlformats.org/officeDocument/2006/relationships">
+<p:notes xmlns:a="http://schemas.openxmlformats.org/drawingml/2006/main" xmlns:r="http://schemas.openxmlformats.org/officeDocument/2006/relationships" xmlns:p="http://schemas.openxmlformats.org/presentationml/2006/main">
   <p:cSld>
     <p:spTree>
       <p:nvGrpSpPr>
-        <p:cNvPr id="1" name=""/>
+        <p:cNvPr id="1" name="">
+          <a:extLst>
+            <a:ext uri="{FF2B5EF4-FFF2-40B4-BE49-F238E27FC236}">
+              <a16:creationId xmlns:a16="http://schemas.microsoft.com/office/drawing/2014/main" id="{E5E3A21A-7AA5-7C87-038E-0D4DDF08F609}"/>
+            </a:ext>
+          </a:extLst>
+        </p:cNvPr>
         <p:cNvGrpSpPr/>
         <p:nvPr/>
       </p:nvGrpSpPr>
@@ -4599,7 +4604,31 @@
       </p:grpSpPr>
       <p:sp>
         <p:nvSpPr>
-          <p:cNvPr id="3" name="Notes Placeholder 2"/>
+          <p:cNvPr id="2" name="Slide Image Placeholder 1">
+            <a:extLst>
+              <a:ext uri="{FF2B5EF4-FFF2-40B4-BE49-F238E27FC236}">
+                <a16:creationId xmlns:a16="http://schemas.microsoft.com/office/drawing/2014/main" id="{9302D704-9E09-EEBE-23A6-CE9293C97765}"/>
+              </a:ext>
+            </a:extLst>
+          </p:cNvPr>
+          <p:cNvSpPr>
+            <a:spLocks noGrp="1" noRot="1" noChangeAspect="1"/>
+          </p:cNvSpPr>
+          <p:nvPr>
+            <p:ph type="sldImg"/>
+          </p:nvPr>
+        </p:nvSpPr>
+        <p:spPr/>
+      </p:sp>
+      <p:sp>
+        <p:nvSpPr>
+          <p:cNvPr id="3" name="Notes Placeholder 2">
+            <a:extLst>
+              <a:ext uri="{FF2B5EF4-FFF2-40B4-BE49-F238E27FC236}">
+                <a16:creationId xmlns:a16="http://schemas.microsoft.com/office/drawing/2014/main" id="{BBF2BDA7-2C2E-0731-EAF4-B2CA3E8B0B68}"/>
+              </a:ext>
+            </a:extLst>
+          </p:cNvPr>
           <p:cNvSpPr>
             <a:spLocks noGrp="1"/>
           </p:cNvSpPr>
@@ -4613,48 +4642,46 @@
           <a:lstStyle/>
           <a:p>
             <a:r>
-              <a:t>Spend for the first quarter across three years and against budget, taken from the Xero History tab.</a:t>
-            </a:r>
-          </a:p>
-          <a:p/>
-          <a:p>
-            <a:r>
-              <a:t>Q1 2026 $1,633,668. Budget $1,773,409. Q1 2025 $1,313,986. Q1 2024 $1,347,094.</a:t>
-            </a:r>
-          </a:p>
-          <a:p/>
-          <a:p>
-            <a:r>
-              <a:t>The quarter is $139,742 or 7.9% under budget on spend. That is the opposite of the month, where spend ran over.</a:t>
-            </a:r>
-          </a:p>
-          <a:p/>
-          <a:p>
-            <a:r>
-              <a:t>The split is the point. Overheads have been $638,615, $646,721 and $641,508 across the three first quarters, a range of $8,106 on about $640,000. The overhead base has not moved in three years. Every bit of the movement in spend is cost of sales, which went $708,478, $667,265 and $992,160, up $324,895 or 48.7% on last year.</a:t>
-            </a:r>
-          </a:p>
-          <a:p/>
-          <a:p>
-            <a:r>
-              <a:t>Cost of sales rising with revenue is what should happen. Revenue rose $395,878 over the same year, so cost of sales rose $324,895 to earn it, which is a contribution of about $71,000 on the extra revenue. That is a thin return on the extra work and it is why the quarter is still a loss.</a:t>
-            </a:r>
-          </a:p>
-          <a:p/>
-          <a:p>
-            <a:r>
-              <a:t>The red line is revenue. In Q1 2024 it sat above the spend bar and the quarter made money. In Q1 2025 and Q1 2026 it sat below and both lost money. The budget line has revenue well clear of spend, which is how it was built to make $223,000.</a:t>
-            </a:r>
-          </a:p>
-          <a:p/>
-          <a:p>
-            <a:r>
-              <a:t>FY25 comes from Xero, pulled 22 October 2026. The quarter is July to September, so it is fixed rather than following Setup.</a:t>
-            </a:r>
+              <a:t>The source files behind this pack. Every figure in the review is drawn from the Financial Controller Pack, which reconciles to the Xero general ledger.</a:t>
+            </a:r>
+          </a:p>
+        </p:txBody>
+      </p:sp>
+      <p:sp>
+        <p:nvSpPr>
+          <p:cNvPr id="4" name="Slide Number Placeholder 3">
+            <a:extLst>
+              <a:ext uri="{FF2B5EF4-FFF2-40B4-BE49-F238E27FC236}">
+                <a16:creationId xmlns:a16="http://schemas.microsoft.com/office/drawing/2014/main" id="{9509B891-383F-E7FD-8008-0EB6BA55BD4F}"/>
+              </a:ext>
+            </a:extLst>
+          </p:cNvPr>
+          <p:cNvSpPr>
+            <a:spLocks noGrp="1"/>
+          </p:cNvSpPr>
+          <p:nvPr>
+            <p:ph type="sldNum" sz="quarter" idx="10"/>
+          </p:nvPr>
+        </p:nvSpPr>
+        <p:spPr/>
+        <p:txBody>
+          <a:bodyPr lIns="107095" tIns="53547" rIns="107095" bIns="53547"/>
+          <a:lstStyle/>
+          <a:p>
+            <a:fld id="{F7021451-1387-4CA6-816F-3879F97B5CBC}" type="slidenum">
+              <a:rPr lang="en-US"/>
+              <a:t>39</a:t>
+            </a:fld>
+            <a:endParaRPr lang="en-US"/>
           </a:p>
         </p:txBody>
       </p:sp>
     </p:spTree>
+    <p:extLst>
+      <p:ext uri="{BB962C8B-B14F-4D97-AF65-F5344CB8AC3E}">
+        <p14:creationId xmlns:p14="http://schemas.microsoft.com/office/powerpoint/2010/main" val="3112518695"/>
+      </p:ext>
+    </p:extLst>
   </p:cSld>
   <p:clrMapOvr>
     <a:masterClrMapping/>
@@ -4749,7 +4776,7 @@
 </file>
 
 <file path=ppt/notesSlides/notesSlide40.xml><?xml version="1.0" encoding="utf-8"?>
-<p:notes xmlns:a="http://schemas.openxmlformats.org/drawingml/2006/main" xmlns:p="http://schemas.openxmlformats.org/presentationml/2006/main" xmlns:r="http://schemas.openxmlformats.org/officeDocument/2006/relationships">
+<p:notes xmlns:a="http://schemas.openxmlformats.org/drawingml/2006/main" xmlns:r="http://schemas.openxmlformats.org/officeDocument/2006/relationships" xmlns:p="http://schemas.openxmlformats.org/presentationml/2006/main">
   <p:cSld>
     <p:spTree>
       <p:nvGrpSpPr>
@@ -4767,6 +4794,18 @@
       </p:grpSpPr>
       <p:sp>
         <p:nvSpPr>
+          <p:cNvPr id="2" name="Slide Image Placeholder 1"/>
+          <p:cNvSpPr>
+            <a:spLocks noGrp="1" noRot="1" noChangeAspect="1"/>
+          </p:cNvSpPr>
+          <p:nvPr>
+            <p:ph type="sldImg"/>
+          </p:nvPr>
+        </p:nvSpPr>
+        <p:spPr/>
+      </p:sp>
+      <p:sp>
+        <p:nvSpPr>
           <p:cNvPr id="3" name="Notes Placeholder 2"/>
           <p:cNvSpPr>
             <a:spLocks noGrp="1"/>
@@ -4781,48 +4820,40 @@
           <a:lstStyle/>
           <a:p>
             <a:r>
-              <a:t>Net profit and net loss for September across three years, taken from the Xero History tab. Net profit is the pack's own figure and includes other income.</a:t>
-            </a:r>
-          </a:p>
-          <a:p/>
-          <a:p>
-            <a:r>
-              <a:t>September 2026 a loss of $41,464. September 2025 a loss of $52,615. September 2024 a profit of $20,737.</a:t>
-            </a:r>
-          </a:p>
-          <a:p/>
-          <a:p>
-            <a:r>
-              <a:t>This September is $11,152 better than the same month last year, and $62,201 worse than the September before that.</a:t>
-            </a:r>
-          </a:p>
-          <a:p/>
-          <a:p>
-            <a:r>
-              <a:t>The thing worth drawing out is that the loss is not a revenue failure. September 2026 billed $561,945, which is the highest of the three Septembers, ahead of $356,323 last year and $440,243 the year before. The month earned more than either comparison and still finished below the line.</a:t>
-            </a:r>
-          </a:p>
-          <a:p/>
-          <a:p>
-            <a:r>
-              <a:t>What changed is the cost of earning it. Cost of sales was $374,130 against $216,749 in September 2024 on revenue only $121,701 higher. The gross margin on the month was 33.4%, against 50.8% in September 2024.</a:t>
-            </a:r>
-          </a:p>
-          <a:p/>
-          <a:p>
-            <a:r>
-              <a:t>So the question this chart puts to the board is about pricing and delivery cost on the work being won, not about the volume of work being won.</a:t>
-            </a:r>
-          </a:p>
-          <a:p/>
-          <a:p>
-            <a:r>
-              <a:t>FY25 was pulled from Xero on 22 October 2026. FY26 is the Actual FY26 tab and FY27 the P&amp;L FY27 tab. The month follows the reporting month on Setup, so in October this becomes October. Only the first quarter of FY25 was pulled, so the FY25 bar is blank from October until the rest is pulled.</a:t>
-            </a:r>
+              <a:t>Two figures to close on. At the margin the business delivers, break even requires $549,372 of revenue a month, and the business is running at $541,487. Everything else in the pack sits underneath those two numbers.</a:t>
+            </a:r>
+          </a:p>
+        </p:txBody>
+      </p:sp>
+      <p:sp>
+        <p:nvSpPr>
+          <p:cNvPr id="4" name="Slide Number Placeholder 3"/>
+          <p:cNvSpPr>
+            <a:spLocks noGrp="1"/>
+          </p:cNvSpPr>
+          <p:nvPr>
+            <p:ph type="sldNum" sz="quarter" idx="10"/>
+          </p:nvPr>
+        </p:nvSpPr>
+        <p:spPr/>
+        <p:txBody>
+          <a:bodyPr lIns="107095" tIns="53547" rIns="107095" bIns="53547"/>
+          <a:lstStyle/>
+          <a:p>
+            <a:fld id="{F7021451-1387-4CA6-816F-3879F97B5CBC}" type="slidenum">
+              <a:rPr lang="en-US"/>
+              <a:t>40</a:t>
+            </a:fld>
+            <a:endParaRPr lang="en-US"/>
           </a:p>
         </p:txBody>
       </p:sp>
     </p:spTree>
+    <p:extLst>
+      <p:ext uri="{BB962C8B-B14F-4D97-AF65-F5344CB8AC3E}">
+        <p14:creationId xmlns:p14="http://schemas.microsoft.com/office/powerpoint/2010/main" val="1024086991"/>
+      </p:ext>
+    </p:extLst>
   </p:cSld>
   <p:clrMapOvr>
     <a:masterClrMapping/>
@@ -5649,7 +5680,7 @@
           </a:prstGeom>
           <a:extLst>
             <a:ext uri="{C572A759-6A51-4108-AA02-DFA0A04FC94B}">
-              <ma14:wrappingTextBoxFlag xmlns="" xmlns:ma14="http://schemas.microsoft.com/office/mac/drawingml/2011/main" val="0"/>
+              <ma14:wrappingTextBoxFlag xmlns:ma14="http://schemas.microsoft.com/office/mac/drawingml/2011/main" xmlns="" val="0"/>
             </a:ext>
           </a:extLst>
         </p:spPr>
@@ -5724,7 +5755,7 @@
           </a:prstGeom>
           <a:extLst>
             <a:ext uri="{C572A759-6A51-4108-AA02-DFA0A04FC94B}">
-              <ma14:wrappingTextBoxFlag xmlns="" xmlns:ma14="http://schemas.microsoft.com/office/mac/drawingml/2011/main" val="0"/>
+              <ma14:wrappingTextBoxFlag xmlns:ma14="http://schemas.microsoft.com/office/mac/drawingml/2011/main" xmlns="" val="0"/>
             </a:ext>
           </a:extLst>
         </p:spPr>
@@ -6366,14 +6397,14 @@
           <p:nvPr/>
         </p:nvPicPr>
         <p:blipFill>
-          <a:blip r:embed="rId5"/>
+          <a:blip r:embed="rId3"/>
           <a:stretch>
             <a:fillRect/>
           </a:stretch>
         </p:blipFill>
         <p:spPr>
           <a:xfrm>
-            <a:off x="502920" y="1007468"/>
+            <a:off x="502920" y="1006495"/>
             <a:ext cx="8138160" cy="2522431"/>
           </a:xfrm>
           <a:prstGeom prst="rect">
@@ -6447,7 +6478,7 @@
                   <a:srgbClr val="242C39"/>
                 </a:solidFill>
               </a:rPr>
-              <a:t>Revenue year to date, against budget</a:t>
+              <a:t>Year to date revenue against budget</a:t>
             </a:r>
             <a:endParaRPr lang="en-US" sz="2700" dirty="0"/>
           </a:p>
@@ -6461,8 +6492,8 @@
         </p:nvSpPr>
         <p:spPr>
           <a:xfrm>
-            <a:off x="502920" y="3622969"/>
-            <a:ext cx="8138160" cy="1003894"/>
+            <a:off x="502920" y="3621023"/>
+            <a:ext cx="8138160" cy="1005840"/>
           </a:xfrm>
           <a:prstGeom prst="rect">
             <a:avLst/>
@@ -6488,7 +6519,7 @@
         </p:nvSpPr>
         <p:spPr>
           <a:xfrm>
-            <a:off x="685800" y="3696121"/>
+            <a:off x="685800" y="3694175"/>
             <a:ext cx="2743200" cy="228600"/>
           </a:xfrm>
           <a:prstGeom prst="rect">
@@ -6524,8 +6555,8 @@
         </p:nvSpPr>
         <p:spPr>
           <a:xfrm>
-            <a:off x="685800" y="3869857"/>
-            <a:ext cx="3703320" cy="729574"/>
+            <a:off x="685800" y="3867911"/>
+            <a:ext cx="3703320" cy="731520"/>
           </a:xfrm>
           <a:prstGeom prst="rect">
             <a:avLst/>
@@ -6602,7 +6633,7 @@
           </a:prstGeom>
           <a:extLst>
             <a:ext uri="{C572A759-6A51-4108-AA02-DFA0A04FC94B}">
-              <ma14:wrappingTextBoxFlag xmlns="" xmlns:ma14="http://schemas.microsoft.com/office/mac/drawingml/2011/main" val="0"/>
+              <ma14:wrappingTextBoxFlag xmlns:ma14="http://schemas.microsoft.com/office/mac/drawingml/2011/main" xmlns="" val="0"/>
             </a:ext>
           </a:extLst>
         </p:spPr>
@@ -6635,8 +6666,8 @@
         </p:nvSpPr>
         <p:spPr>
           <a:xfrm>
-            <a:off x="4663440" y="3869857"/>
-            <a:ext cx="3703320" cy="729574"/>
+            <a:off x="4663440" y="3867911"/>
+            <a:ext cx="3703320" cy="731520"/>
           </a:xfrm>
           <a:prstGeom prst="rect">
             <a:avLst/>
@@ -6758,8 +6789,8 @@
         </p:blipFill>
         <p:spPr>
           <a:xfrm>
-            <a:off x="988472" y="1005840"/>
-            <a:ext cx="7167054" cy="1964997"/>
+            <a:off x="1003394" y="1005840"/>
+            <a:ext cx="7137211" cy="1956815"/>
           </a:xfrm>
           <a:prstGeom prst="rect">
             <a:avLst/>
@@ -6832,7 +6863,7 @@
                   <a:srgbClr val="242C39"/>
                 </a:solidFill>
               </a:rPr>
-              <a:t>P&amp;L summary, cost and profit</a:t>
+              <a:t>Profit and loss summary, cost and profit</a:t>
             </a:r>
             <a:endParaRPr lang="en-US" sz="2700" dirty="0"/>
           </a:p>
@@ -6846,8 +6877,8 @@
         </p:nvSpPr>
         <p:spPr>
           <a:xfrm>
-            <a:off x="502920" y="3062278"/>
-            <a:ext cx="8138160" cy="1564585"/>
+            <a:off x="502920" y="3054096"/>
+            <a:ext cx="8138160" cy="1572768"/>
           </a:xfrm>
           <a:prstGeom prst="rect">
             <a:avLst/>
@@ -6873,7 +6904,7 @@
         </p:nvSpPr>
         <p:spPr>
           <a:xfrm>
-            <a:off x="685800" y="3135430"/>
+            <a:off x="685800" y="3127248"/>
             <a:ext cx="2743200" cy="228600"/>
           </a:xfrm>
           <a:prstGeom prst="rect">
@@ -6909,8 +6940,8 @@
         </p:nvSpPr>
         <p:spPr>
           <a:xfrm>
-            <a:off x="685800" y="3309166"/>
-            <a:ext cx="3703320" cy="1290265"/>
+            <a:off x="685800" y="3300984"/>
+            <a:ext cx="3703320" cy="1298448"/>
           </a:xfrm>
           <a:prstGeom prst="rect">
             <a:avLst/>
@@ -7008,7 +7039,7 @@
           </a:prstGeom>
           <a:extLst>
             <a:ext uri="{C572A759-6A51-4108-AA02-DFA0A04FC94B}">
-              <ma14:wrappingTextBoxFlag xmlns="" xmlns:ma14="http://schemas.microsoft.com/office/mac/drawingml/2011/main" val="0"/>
+              <ma14:wrappingTextBoxFlag xmlns:ma14="http://schemas.microsoft.com/office/mac/drawingml/2011/main" xmlns="" val="0"/>
             </a:ext>
           </a:extLst>
         </p:spPr>
@@ -7065,8 +7096,8 @@
         </p:nvSpPr>
         <p:spPr>
           <a:xfrm>
-            <a:off x="4663440" y="3309166"/>
-            <a:ext cx="3703320" cy="1290265"/>
+            <a:off x="4663440" y="3300984"/>
+            <a:ext cx="3703320" cy="1298448"/>
           </a:xfrm>
           <a:prstGeom prst="rect">
             <a:avLst/>
@@ -7132,7 +7163,7 @@
 </file>
 
 <file path=ppt/slides/slide12.xml><?xml version="1.0" encoding="utf-8"?>
-<p:sld xmlns:a="http://schemas.openxmlformats.org/drawingml/2006/main" xmlns:p="http://schemas.openxmlformats.org/presentationml/2006/main" xmlns:r="http://schemas.openxmlformats.org/officeDocument/2006/relationships">
+<p:sld xmlns:a="http://schemas.openxmlformats.org/drawingml/2006/main" xmlns:r="http://schemas.openxmlformats.org/officeDocument/2006/relationships" xmlns:p="http://schemas.openxmlformats.org/presentationml/2006/main">
   <p:cSld>
     <p:spTree>
       <p:nvGrpSpPr>
@@ -7140,7 +7171,14 @@
         <p:cNvGrpSpPr/>
         <p:nvPr/>
       </p:nvGrpSpPr>
-      <p:grpSpPr/>
+      <p:grpSpPr>
+        <a:xfrm>
+          <a:off x="0" y="0"/>
+          <a:ext cx="0" cy="0"/>
+          <a:chOff x="0" y="0"/>
+          <a:chExt cx="0" cy="0"/>
+        </a:xfrm>
+      </p:grpSpPr>
       <p:pic>
         <p:nvPicPr>
           <p:cNvPr id="27" name="snip spend_month" descr="spend_month.png"/>
@@ -7157,8 +7195,8 @@
         </p:blipFill>
         <p:spPr>
           <a:xfrm>
-            <a:off x="522419" y="1005840"/>
-            <a:ext cx="8099161" cy="2525689"/>
+            <a:off x="525539" y="1005840"/>
+            <a:ext cx="8092921" cy="2523743"/>
           </a:xfrm>
           <a:prstGeom prst="rect">
             <a:avLst/>
@@ -7231,7 +7269,7 @@
                   <a:srgbClr val="242C39"/>
                 </a:solidFill>
               </a:rPr>
-              <a:t>Spend for the month, against budget</a:t>
+              <a:t>Monthly expenditure against budget</a:t>
             </a:r>
             <a:endParaRPr lang="en-US" sz="2700" dirty="0"/>
           </a:p>
@@ -7245,8 +7283,8 @@
         </p:nvSpPr>
         <p:spPr>
           <a:xfrm>
-            <a:off x="502920" y="3622969"/>
-            <a:ext cx="8138160" cy="1003894"/>
+            <a:off x="502920" y="3621023"/>
+            <a:ext cx="8138160" cy="1005840"/>
           </a:xfrm>
           <a:prstGeom prst="rect">
             <a:avLst/>
@@ -7272,7 +7310,7 @@
         </p:nvSpPr>
         <p:spPr>
           <a:xfrm>
-            <a:off x="685800" y="3696121"/>
+            <a:off x="685800" y="3694175"/>
             <a:ext cx="2743200" cy="228600"/>
           </a:xfrm>
           <a:prstGeom prst="rect">
@@ -7308,8 +7346,8 @@
         </p:nvSpPr>
         <p:spPr>
           <a:xfrm>
-            <a:off x="685800" y="3869857"/>
-            <a:ext cx="3703320" cy="729574"/>
+            <a:off x="685800" y="3867911"/>
+            <a:ext cx="3703320" cy="731520"/>
           </a:xfrm>
           <a:prstGeom prst="rect">
             <a:avLst/>
@@ -7386,7 +7424,7 @@
           </a:prstGeom>
           <a:extLst>
             <a:ext uri="{C572A759-6A51-4108-AA02-DFA0A04FC94B}">
-              <ma14:wrappingTextBoxFlag xmlns="" xmlns:ma14="http://schemas.microsoft.com/office/mac/drawingml/2011/main" val="0"/>
+              <ma14:wrappingTextBoxFlag xmlns:ma14="http://schemas.microsoft.com/office/mac/drawingml/2011/main" xmlns="" val="0"/>
             </a:ext>
           </a:extLst>
         </p:spPr>
@@ -7405,7 +7443,7 @@
             <a:pPr algn="r"/>
             <a:fld id="{F7021451-1387-4CA6-816F-3879F97B5CBC}" type="slidenum">
               <a:rPr lang="en-US" b="0"/>
-              <a:t>9</a:t>
+              <a:t>12</a:t>
             </a:fld>
             <a:endParaRPr lang="en-US"/>
           </a:p>
@@ -7419,8 +7457,8 @@
         </p:nvSpPr>
         <p:spPr>
           <a:xfrm>
-            <a:off x="4663440" y="3869857"/>
-            <a:ext cx="3703320" cy="729574"/>
+            <a:off x="4663440" y="3867911"/>
+            <a:ext cx="3703320" cy="731520"/>
           </a:xfrm>
           <a:prstGeom prst="rect">
             <a:avLst/>
@@ -7486,7 +7524,7 @@
           <p:nvPr/>
         </p:nvPicPr>
         <p:blipFill>
-          <a:blip r:embed="rId2"/>
+          <a:blip r:embed="rId4"/>
           <a:stretch>
             <a:fillRect/>
           </a:stretch>
@@ -7510,7 +7548,7 @@
 </file>
 
 <file path=ppt/slides/slide13.xml><?xml version="1.0" encoding="utf-8"?>
-<p:sld xmlns:a="http://schemas.openxmlformats.org/drawingml/2006/main" xmlns:p="http://schemas.openxmlformats.org/presentationml/2006/main" xmlns:r="http://schemas.openxmlformats.org/officeDocument/2006/relationships">
+<p:sld xmlns:a="http://schemas.openxmlformats.org/drawingml/2006/main" xmlns:r="http://schemas.openxmlformats.org/officeDocument/2006/relationships" xmlns:p="http://schemas.openxmlformats.org/presentationml/2006/main">
   <p:cSld>
     <p:spTree>
       <p:nvGrpSpPr>
@@ -7518,7 +7556,14 @@
         <p:cNvGrpSpPr/>
         <p:nvPr/>
       </p:nvGrpSpPr>
-      <p:grpSpPr/>
+      <p:grpSpPr>
+        <a:xfrm>
+          <a:off x="0" y="0"/>
+          <a:ext cx="0" cy="0"/>
+          <a:chOff x="0" y="0"/>
+          <a:chExt cx="0" cy="0"/>
+        </a:xfrm>
+      </p:grpSpPr>
       <p:pic>
         <p:nvPicPr>
           <p:cNvPr id="27" name="snip spend_qtr" descr="spend_qtr.png"/>
@@ -7535,8 +7580,8 @@
         </p:blipFill>
         <p:spPr>
           <a:xfrm>
-            <a:off x="522419" y="1005840"/>
-            <a:ext cx="8099161" cy="2525689"/>
+            <a:off x="525539" y="1005840"/>
+            <a:ext cx="8092921" cy="2523743"/>
           </a:xfrm>
           <a:prstGeom prst="rect">
             <a:avLst/>
@@ -7609,7 +7654,7 @@
                   <a:srgbClr val="242C39"/>
                 </a:solidFill>
               </a:rPr>
-              <a:t>Spend for the quarter, against budget</a:t>
+              <a:t>Quarterly expenditure against budget</a:t>
             </a:r>
             <a:endParaRPr lang="en-US" sz="2700" dirty="0"/>
           </a:p>
@@ -7623,8 +7668,8 @@
         </p:nvSpPr>
         <p:spPr>
           <a:xfrm>
-            <a:off x="502920" y="3622969"/>
-            <a:ext cx="8138160" cy="1003894"/>
+            <a:off x="502920" y="3621023"/>
+            <a:ext cx="8138160" cy="1005840"/>
           </a:xfrm>
           <a:prstGeom prst="rect">
             <a:avLst/>
@@ -7650,7 +7695,7 @@
         </p:nvSpPr>
         <p:spPr>
           <a:xfrm>
-            <a:off x="685800" y="3696121"/>
+            <a:off x="685800" y="3694175"/>
             <a:ext cx="2743200" cy="228600"/>
           </a:xfrm>
           <a:prstGeom prst="rect">
@@ -7686,8 +7731,8 @@
         </p:nvSpPr>
         <p:spPr>
           <a:xfrm>
-            <a:off x="685800" y="3869857"/>
-            <a:ext cx="3703320" cy="729574"/>
+            <a:off x="685800" y="3867911"/>
+            <a:ext cx="3703320" cy="731520"/>
           </a:xfrm>
           <a:prstGeom prst="rect">
             <a:avLst/>
@@ -7764,7 +7809,7 @@
           </a:prstGeom>
           <a:extLst>
             <a:ext uri="{C572A759-6A51-4108-AA02-DFA0A04FC94B}">
-              <ma14:wrappingTextBoxFlag xmlns="" xmlns:ma14="http://schemas.microsoft.com/office/mac/drawingml/2011/main" val="0"/>
+              <ma14:wrappingTextBoxFlag xmlns:ma14="http://schemas.microsoft.com/office/mac/drawingml/2011/main" xmlns="" val="0"/>
             </a:ext>
           </a:extLst>
         </p:spPr>
@@ -7783,7 +7828,7 @@
             <a:pPr algn="r"/>
             <a:fld id="{F7021451-1387-4CA6-816F-3879F97B5CBC}" type="slidenum">
               <a:rPr lang="en-US" b="0"/>
-              <a:t>9</a:t>
+              <a:t>13</a:t>
             </a:fld>
             <a:endParaRPr lang="en-US"/>
           </a:p>
@@ -7797,8 +7842,8 @@
         </p:nvSpPr>
         <p:spPr>
           <a:xfrm>
-            <a:off x="4663440" y="3869857"/>
-            <a:ext cx="3703320" cy="729574"/>
+            <a:off x="4663440" y="3867911"/>
+            <a:ext cx="3703320" cy="731520"/>
           </a:xfrm>
           <a:prstGeom prst="rect">
             <a:avLst/>
@@ -7864,7 +7909,7 @@
           <p:nvPr/>
         </p:nvPicPr>
         <p:blipFill>
-          <a:blip r:embed="rId2"/>
+          <a:blip r:embed="rId4"/>
           <a:stretch>
             <a:fillRect/>
           </a:stretch>
@@ -7888,7 +7933,7 @@
 </file>
 
 <file path=ppt/slides/slide14.xml><?xml version="1.0" encoding="utf-8"?>
-<p:sld xmlns:a="http://schemas.openxmlformats.org/drawingml/2006/main" xmlns:p="http://schemas.openxmlformats.org/presentationml/2006/main" xmlns:r="http://schemas.openxmlformats.org/officeDocument/2006/relationships">
+<p:sld xmlns:a="http://schemas.openxmlformats.org/drawingml/2006/main" xmlns:r="http://schemas.openxmlformats.org/officeDocument/2006/relationships" xmlns:p="http://schemas.openxmlformats.org/presentationml/2006/main">
   <p:cSld>
     <p:spTree>
       <p:nvGrpSpPr>
@@ -7896,7 +7941,14 @@
         <p:cNvGrpSpPr/>
         <p:nvPr/>
       </p:nvGrpSpPr>
-      <p:grpSpPr/>
+      <p:grpSpPr>
+        <a:xfrm>
+          <a:off x="0" y="0"/>
+          <a:ext cx="0" cy="0"/>
+          <a:chOff x="0" y="0"/>
+          <a:chExt cx="0" cy="0"/>
+        </a:xfrm>
+      </p:grpSpPr>
       <p:pic>
         <p:nvPicPr>
           <p:cNvPr id="27" name="snip profit_month" descr="profit_month.png"/>
@@ -7913,8 +7965,8 @@
         </p:blipFill>
         <p:spPr>
           <a:xfrm>
-            <a:off x="793198" y="1005840"/>
-            <a:ext cx="7557602" cy="2356806"/>
+            <a:off x="1155966" y="1005840"/>
+            <a:ext cx="6832067" cy="2130551"/>
           </a:xfrm>
           <a:prstGeom prst="rect">
             <a:avLst/>
@@ -7987,7 +8039,7 @@
                   <a:srgbClr val="242C39"/>
                 </a:solidFill>
               </a:rPr>
-              <a:t>Net profit and net loss, the month</a:t>
+              <a:t>Monthly net result, three year comparison</a:t>
             </a:r>
             <a:endParaRPr lang="en-US" sz="2700" dirty="0"/>
           </a:p>
@@ -8001,8 +8053,8 @@
         </p:nvSpPr>
         <p:spPr>
           <a:xfrm>
-            <a:off x="502920" y="3454086"/>
-            <a:ext cx="8138160" cy="1172777"/>
+            <a:off x="502920" y="3227831"/>
+            <a:ext cx="8138160" cy="1399032"/>
           </a:xfrm>
           <a:prstGeom prst="rect">
             <a:avLst/>
@@ -8028,7 +8080,7 @@
         </p:nvSpPr>
         <p:spPr>
           <a:xfrm>
-            <a:off x="685800" y="3527238"/>
+            <a:off x="685800" y="3300983"/>
             <a:ext cx="2743200" cy="228600"/>
           </a:xfrm>
           <a:prstGeom prst="rect">
@@ -8064,8 +8116,8 @@
         </p:nvSpPr>
         <p:spPr>
           <a:xfrm>
-            <a:off x="685800" y="3700974"/>
-            <a:ext cx="3703320" cy="898457"/>
+            <a:off x="685800" y="3474719"/>
+            <a:ext cx="3703320" cy="1124712"/>
           </a:xfrm>
           <a:prstGeom prst="rect">
             <a:avLst/>
@@ -8142,7 +8194,7 @@
           </a:prstGeom>
           <a:extLst>
             <a:ext uri="{C572A759-6A51-4108-AA02-DFA0A04FC94B}">
-              <ma14:wrappingTextBoxFlag xmlns="" xmlns:ma14="http://schemas.microsoft.com/office/mac/drawingml/2011/main" val="0"/>
+              <ma14:wrappingTextBoxFlag xmlns:ma14="http://schemas.microsoft.com/office/mac/drawingml/2011/main" xmlns="" val="0"/>
             </a:ext>
           </a:extLst>
         </p:spPr>
@@ -8161,7 +8213,7 @@
             <a:pPr algn="r"/>
             <a:fld id="{F7021451-1387-4CA6-816F-3879F97B5CBC}" type="slidenum">
               <a:rPr lang="en-US" b="0"/>
-              <a:t>9</a:t>
+              <a:t>14</a:t>
             </a:fld>
             <a:endParaRPr lang="en-US"/>
           </a:p>
@@ -8175,8 +8227,8 @@
         </p:nvSpPr>
         <p:spPr>
           <a:xfrm>
-            <a:off x="4663440" y="3700974"/>
-            <a:ext cx="3703320" cy="898457"/>
+            <a:off x="4663440" y="3474719"/>
+            <a:ext cx="3703320" cy="1124712"/>
           </a:xfrm>
           <a:prstGeom prst="rect">
             <a:avLst/>
@@ -8242,7 +8294,7 @@
           <p:nvPr/>
         </p:nvPicPr>
         <p:blipFill>
-          <a:blip r:embed="rId2"/>
+          <a:blip r:embed="rId4"/>
           <a:stretch>
             <a:fillRect/>
           </a:stretch>
@@ -8291,8 +8343,8 @@
         </p:blipFill>
         <p:spPr>
           <a:xfrm>
-            <a:off x="522419" y="1005840"/>
-            <a:ext cx="8099161" cy="2525689"/>
+            <a:off x="525539" y="1005840"/>
+            <a:ext cx="8092921" cy="2523743"/>
           </a:xfrm>
           <a:prstGeom prst="rect">
             <a:avLst/>
@@ -8365,7 +8417,7 @@
                   <a:srgbClr val="242C39"/>
                 </a:solidFill>
               </a:rPr>
-              <a:t>Net profit and net loss, the quarter</a:t>
+              <a:t>Quarterly net result, three year comparison</a:t>
             </a:r>
             <a:endParaRPr lang="en-US" sz="2700" dirty="0"/>
           </a:p>
@@ -8379,8 +8431,8 @@
         </p:nvSpPr>
         <p:spPr>
           <a:xfrm>
-            <a:off x="502920" y="3622969"/>
-            <a:ext cx="8138160" cy="1003894"/>
+            <a:off x="502920" y="3621023"/>
+            <a:ext cx="8138160" cy="1005840"/>
           </a:xfrm>
           <a:prstGeom prst="rect">
             <a:avLst/>
@@ -8406,7 +8458,7 @@
         </p:nvSpPr>
         <p:spPr>
           <a:xfrm>
-            <a:off x="685800" y="3696121"/>
+            <a:off x="685800" y="3694175"/>
             <a:ext cx="2743200" cy="228600"/>
           </a:xfrm>
           <a:prstGeom prst="rect">
@@ -8442,8 +8494,8 @@
         </p:nvSpPr>
         <p:spPr>
           <a:xfrm>
-            <a:off x="685800" y="3869857"/>
-            <a:ext cx="3703320" cy="729574"/>
+            <a:off x="685800" y="3867911"/>
+            <a:ext cx="3703320" cy="731520"/>
           </a:xfrm>
           <a:prstGeom prst="rect">
             <a:avLst/>
@@ -8520,7 +8572,7 @@
           </a:prstGeom>
           <a:extLst>
             <a:ext uri="{C572A759-6A51-4108-AA02-DFA0A04FC94B}">
-              <ma14:wrappingTextBoxFlag xmlns="" xmlns:ma14="http://schemas.microsoft.com/office/mac/drawingml/2011/main" val="0"/>
+              <ma14:wrappingTextBoxFlag xmlns:ma14="http://schemas.microsoft.com/office/mac/drawingml/2011/main" xmlns="" val="0"/>
             </a:ext>
           </a:extLst>
         </p:spPr>
@@ -8553,8 +8605,8 @@
         </p:nvSpPr>
         <p:spPr>
           <a:xfrm>
-            <a:off x="4663440" y="3869857"/>
-            <a:ext cx="3703320" cy="729574"/>
+            <a:off x="4663440" y="3867911"/>
+            <a:ext cx="3703320" cy="731520"/>
           </a:xfrm>
           <a:prstGeom prst="rect">
             <a:avLst/>
@@ -8726,7 +8778,7 @@
                   <a:srgbClr val="242C39"/>
                 </a:solidFill>
               </a:rPr>
-              <a:t>Department result, Sep 26</a:t>
+              <a:t>Departmental result, September 2026</a:t>
             </a:r>
             <a:endParaRPr lang="en-US" sz="2700" dirty="0"/>
           </a:p>
@@ -8748,7 +8800,7 @@
         </p:blipFill>
         <p:spPr>
           <a:xfrm>
-            <a:off x="502920" y="1346681"/>
+            <a:off x="502920" y="1233554"/>
             <a:ext cx="8138160" cy="1675122"/>
           </a:xfrm>
           <a:prstGeom prst="rect">
@@ -8764,8 +8816,8 @@
         </p:nvSpPr>
         <p:spPr>
           <a:xfrm>
-            <a:off x="502920" y="3454086"/>
-            <a:ext cx="8138160" cy="1172777"/>
+            <a:off x="502920" y="3227831"/>
+            <a:ext cx="8138160" cy="1399032"/>
           </a:xfrm>
           <a:prstGeom prst="rect">
             <a:avLst/>
@@ -8791,8 +8843,8 @@
         </p:nvSpPr>
         <p:spPr>
           <a:xfrm>
-            <a:off x="685800" y="3527238"/>
-            <a:ext cx="2743200" cy="164592"/>
+            <a:off x="685800" y="3300983"/>
+            <a:ext cx="2743200" cy="228600"/>
           </a:xfrm>
           <a:prstGeom prst="rect">
             <a:avLst/>
@@ -8827,8 +8879,8 @@
         </p:nvSpPr>
         <p:spPr>
           <a:xfrm>
-            <a:off x="685800" y="3700974"/>
-            <a:ext cx="3703320" cy="898457"/>
+            <a:off x="685800" y="3474719"/>
+            <a:ext cx="3703320" cy="1124712"/>
           </a:xfrm>
           <a:prstGeom prst="rect">
             <a:avLst/>
@@ -8887,14 +8939,14 @@
       </p:sp>
       <p:sp>
         <p:nvSpPr>
-          <p:cNvPr id="9" name="Text 6"/>
+          <p:cNvPr id="9" name="Text 5b"/>
           <p:cNvSpPr txBox="1"/>
           <p:nvPr/>
         </p:nvSpPr>
         <p:spPr>
           <a:xfrm>
-            <a:off x="4663440" y="3700974"/>
-            <a:ext cx="3703320" cy="898457"/>
+            <a:off x="4663440" y="3474719"/>
+            <a:ext cx="3703320" cy="1124712"/>
           </a:xfrm>
           <a:prstGeom prst="rect">
             <a:avLst/>
@@ -8971,7 +9023,7 @@
           </a:prstGeom>
           <a:extLst>
             <a:ext uri="{C572A759-6A51-4108-AA02-DFA0A04FC94B}">
-              <ma14:wrappingTextBoxFlag xmlns="" xmlns:ma14="http://schemas.microsoft.com/office/mac/drawingml/2011/main" val="0"/>
+              <ma14:wrappingTextBoxFlag xmlns:ma14="http://schemas.microsoft.com/office/mac/drawingml/2011/main" xmlns="" val="0"/>
             </a:ext>
           </a:extLst>
         </p:spPr>
@@ -8990,7 +9042,7 @@
             <a:pPr algn="r"/>
             <a:fld id="{F7021451-1387-4CA6-816F-3879F97B5CBC}" type="slidenum">
               <a:rPr lang="en-US" b="0"/>
-              <a:t>12</a:t>
+              <a:t>15</a:t>
             </a:fld>
             <a:endParaRPr lang="en-US"/>
           </a:p>
@@ -9111,7 +9163,7 @@
                   <a:srgbClr val="242C39"/>
                 </a:solidFill>
               </a:rPr>
-              <a:t>The three departments, Sep 26</a:t>
+              <a:t>Results by reporting group, September 2026</a:t>
             </a:r>
             <a:endParaRPr lang="en-US" sz="2700" dirty="0"/>
           </a:p>
@@ -9133,7 +9185,7 @@
         </p:blipFill>
         <p:spPr>
           <a:xfrm>
-            <a:off x="502920" y="1525850"/>
+            <a:off x="502920" y="1412723"/>
             <a:ext cx="8138160" cy="1316784"/>
           </a:xfrm>
           <a:prstGeom prst="rect">
@@ -9149,8 +9201,8 @@
         </p:nvSpPr>
         <p:spPr>
           <a:xfrm>
-            <a:off x="502920" y="3454086"/>
-            <a:ext cx="8138160" cy="1172777"/>
+            <a:off x="502920" y="3227831"/>
+            <a:ext cx="8138160" cy="1399032"/>
           </a:xfrm>
           <a:prstGeom prst="rect">
             <a:avLst/>
@@ -9176,8 +9228,8 @@
         </p:nvSpPr>
         <p:spPr>
           <a:xfrm>
-            <a:off x="685800" y="3527238"/>
-            <a:ext cx="2743200" cy="164592"/>
+            <a:off x="685800" y="3300983"/>
+            <a:ext cx="2743200" cy="228600"/>
           </a:xfrm>
           <a:prstGeom prst="rect">
             <a:avLst/>
@@ -9212,8 +9264,8 @@
         </p:nvSpPr>
         <p:spPr>
           <a:xfrm>
-            <a:off x="685800" y="3700974"/>
-            <a:ext cx="3703320" cy="898457"/>
+            <a:off x="685800" y="3474719"/>
+            <a:ext cx="3703320" cy="1124712"/>
           </a:xfrm>
           <a:prstGeom prst="rect">
             <a:avLst/>
@@ -9272,14 +9324,14 @@
       </p:sp>
       <p:sp>
         <p:nvSpPr>
-          <p:cNvPr id="9" name="Text 6"/>
+          <p:cNvPr id="9" name="Text 5b"/>
           <p:cNvSpPr txBox="1"/>
           <p:nvPr/>
         </p:nvSpPr>
         <p:spPr>
           <a:xfrm>
-            <a:off x="4663440" y="3700974"/>
-            <a:ext cx="3703320" cy="898457"/>
+            <a:off x="4663440" y="3474719"/>
+            <a:ext cx="3703320" cy="1124712"/>
           </a:xfrm>
           <a:prstGeom prst="rect">
             <a:avLst/>
@@ -9356,7 +9408,7 @@
           </a:prstGeom>
           <a:extLst>
             <a:ext uri="{C572A759-6A51-4108-AA02-DFA0A04FC94B}">
-              <ma14:wrappingTextBoxFlag xmlns="" xmlns:ma14="http://schemas.microsoft.com/office/mac/drawingml/2011/main" val="0"/>
+              <ma14:wrappingTextBoxFlag xmlns:ma14="http://schemas.microsoft.com/office/mac/drawingml/2011/main" xmlns="" val="0"/>
             </a:ext>
           </a:extLst>
         </p:spPr>
@@ -9375,7 +9427,7 @@
             <a:pPr algn="r"/>
             <a:fld id="{F7021451-1387-4CA6-816F-3879F97B5CBC}" type="slidenum">
               <a:rPr lang="en-US" b="0"/>
-              <a:t>13</a:t>
+              <a:t>16</a:t>
             </a:fld>
             <a:endParaRPr lang="en-US"/>
           </a:p>
@@ -9446,8 +9498,8 @@
         </p:blipFill>
         <p:spPr>
           <a:xfrm>
-            <a:off x="968754" y="1005840"/>
-            <a:ext cx="7206491" cy="2133881"/>
+            <a:off x="974377" y="1005840"/>
+            <a:ext cx="7195245" cy="2130551"/>
           </a:xfrm>
           <a:prstGeom prst="rect">
             <a:avLst/>
@@ -9520,7 +9572,7 @@
                   <a:srgbClr val="242C39"/>
                 </a:solidFill>
               </a:rPr>
-              <a:t>Support, Sep 26</a:t>
+              <a:t>Support, September 2026</a:t>
             </a:r>
             <a:endParaRPr lang="en-US" sz="2700" dirty="0"/>
           </a:p>
@@ -9534,8 +9586,8 @@
         </p:nvSpPr>
         <p:spPr>
           <a:xfrm>
-            <a:off x="502920" y="3231161"/>
-            <a:ext cx="8138160" cy="1395702"/>
+            <a:off x="502920" y="3227831"/>
+            <a:ext cx="8138160" cy="1399032"/>
           </a:xfrm>
           <a:prstGeom prst="rect">
             <a:avLst/>
@@ -9561,7 +9613,7 @@
         </p:nvSpPr>
         <p:spPr>
           <a:xfrm>
-            <a:off x="685800" y="3304313"/>
+            <a:off x="685800" y="3300983"/>
             <a:ext cx="2743200" cy="228600"/>
           </a:xfrm>
           <a:prstGeom prst="rect">
@@ -9597,8 +9649,8 @@
         </p:nvSpPr>
         <p:spPr>
           <a:xfrm>
-            <a:off x="685800" y="3478049"/>
-            <a:ext cx="3703320" cy="1121382"/>
+            <a:off x="685800" y="3474719"/>
+            <a:ext cx="3703320" cy="1124712"/>
           </a:xfrm>
           <a:prstGeom prst="rect">
             <a:avLst/>
@@ -9675,7 +9727,7 @@
           </a:prstGeom>
           <a:extLst>
             <a:ext uri="{C572A759-6A51-4108-AA02-DFA0A04FC94B}">
-              <ma14:wrappingTextBoxFlag xmlns="" xmlns:ma14="http://schemas.microsoft.com/office/mac/drawingml/2011/main" val="0"/>
+              <ma14:wrappingTextBoxFlag xmlns:ma14="http://schemas.microsoft.com/office/mac/drawingml/2011/main" xmlns="" val="0"/>
             </a:ext>
           </a:extLst>
         </p:spPr>
@@ -9694,7 +9746,7 @@
             <a:pPr algn="r"/>
             <a:fld id="{F7021451-1387-4CA6-816F-3879F97B5CBC}" type="slidenum">
               <a:rPr lang="en-US" b="0"/>
-              <a:t>14</a:t>
+              <a:t>17</a:t>
             </a:fld>
             <a:endParaRPr lang="en-US"/>
           </a:p>
@@ -9732,8 +9784,8 @@
         </p:nvSpPr>
         <p:spPr>
           <a:xfrm>
-            <a:off x="4663440" y="3478049"/>
-            <a:ext cx="3703320" cy="1121382"/>
+            <a:off x="4663440" y="3474719"/>
+            <a:ext cx="3703320" cy="1124712"/>
           </a:xfrm>
           <a:prstGeom prst="rect">
             <a:avLst/>
@@ -9852,8 +9904,8 @@
         </p:blipFill>
         <p:spPr>
           <a:xfrm>
-            <a:off x="968754" y="1005840"/>
-            <a:ext cx="7206491" cy="2133881"/>
+            <a:off x="974377" y="1005840"/>
+            <a:ext cx="7195245" cy="2130551"/>
           </a:xfrm>
           <a:prstGeom prst="rect">
             <a:avLst/>
@@ -9926,7 +9978,7 @@
                   <a:srgbClr val="242C39"/>
                 </a:solidFill>
               </a:rPr>
-              <a:t>Events, Sep 26</a:t>
+              <a:t>Events, September 2026</a:t>
             </a:r>
             <a:endParaRPr lang="en-US" sz="2700"/>
           </a:p>
@@ -9940,8 +9992,8 @@
         </p:nvSpPr>
         <p:spPr>
           <a:xfrm>
-            <a:off x="502920" y="3231161"/>
-            <a:ext cx="8138160" cy="1395702"/>
+            <a:off x="502920" y="3227831"/>
+            <a:ext cx="8138160" cy="1399032"/>
           </a:xfrm>
           <a:prstGeom prst="rect">
             <a:avLst/>
@@ -9967,7 +10019,7 @@
         </p:nvSpPr>
         <p:spPr>
           <a:xfrm>
-            <a:off x="685800" y="3304313"/>
+            <a:off x="685800" y="3300983"/>
             <a:ext cx="2743200" cy="228600"/>
           </a:xfrm>
           <a:prstGeom prst="rect">
@@ -10003,8 +10055,8 @@
         </p:nvSpPr>
         <p:spPr>
           <a:xfrm>
-            <a:off x="685800" y="3478049"/>
-            <a:ext cx="3703320" cy="1121382"/>
+            <a:off x="685800" y="3474719"/>
+            <a:ext cx="3703320" cy="1124712"/>
           </a:xfrm>
           <a:prstGeom prst="rect">
             <a:avLst/>
@@ -10102,7 +10154,7 @@
           </a:prstGeom>
           <a:extLst>
             <a:ext uri="{C572A759-6A51-4108-AA02-DFA0A04FC94B}">
-              <ma14:wrappingTextBoxFlag xmlns="" xmlns:ma14="http://schemas.microsoft.com/office/mac/drawingml/2011/main" val="0"/>
+              <ma14:wrappingTextBoxFlag xmlns:ma14="http://schemas.microsoft.com/office/mac/drawingml/2011/main" xmlns="" val="0"/>
             </a:ext>
           </a:extLst>
         </p:spPr>
@@ -10121,7 +10173,7 @@
             <a:pPr algn="r"/>
             <a:fld id="{F7021451-1387-4CA6-816F-3879F97B5CBC}" type="slidenum">
               <a:rPr lang="en-US" b="0"/>
-              <a:t>15</a:t>
+              <a:t>18</a:t>
             </a:fld>
             <a:endParaRPr lang="en-US"/>
           </a:p>
@@ -10159,8 +10211,8 @@
         </p:nvSpPr>
         <p:spPr>
           <a:xfrm>
-            <a:off x="4663440" y="3478049"/>
-            <a:ext cx="3703320" cy="1121382"/>
+            <a:off x="4663440" y="3474719"/>
+            <a:ext cx="3703320" cy="1124712"/>
           </a:xfrm>
           <a:prstGeom prst="rect">
             <a:avLst/>
@@ -10287,7 +10339,7 @@
         <p:spPr>
           <a:xfrm>
             <a:off x="502920" y="640080"/>
-            <a:ext cx="7315200" cy="685800"/>
+            <a:ext cx="7315200" cy="365760"/>
           </a:xfrm>
           <a:prstGeom prst="rect">
             <a:avLst/>
@@ -10299,7 +10351,7 @@
           <a:bodyPr wrap="square" lIns="0" tIns="0" rIns="0" bIns="0" rtlCol="0" anchor="ctr"/>
           <a:lstStyle/>
           <a:p>
-            <a:pPr marL="0" indent="0">
+            <a:pPr marL="0" indent="0" algn="ctr">
               <a:buNone/>
             </a:pPr>
             <a:r>
@@ -10308,7 +10360,7 @@
                   <a:srgbClr val="242C39"/>
                 </a:solidFill>
               </a:rPr>
-              <a:t>What we will cover</a:t>
+              <a:t>Scope of this review</a:t>
             </a:r>
             <a:endParaRPr lang="en-US" sz="2700"/>
           </a:p>
@@ -10542,7 +10594,7 @@
                   <a:srgbClr val="242C39"/>
                 </a:solidFill>
               </a:rPr>
-              <a:t>What we spend</a:t>
+              <a:t>Operating expenditure</a:t>
             </a:r>
             <a:endParaRPr lang="en-US" sz="1300"/>
           </a:p>
@@ -10677,7 +10729,7 @@
                   <a:srgbClr val="242C39"/>
                 </a:solidFill>
               </a:rPr>
-              <a:t>Customers and cash</a:t>
+              <a:t>Customers and receivables</a:t>
             </a:r>
             <a:endParaRPr lang="en-US" sz="1300"/>
           </a:p>
@@ -11009,7 +11061,7 @@
           </a:prstGeom>
           <a:extLst>
             <a:ext uri="{C572A759-6A51-4108-AA02-DFA0A04FC94B}">
-              <ma14:wrappingTextBoxFlag xmlns="" xmlns:ma14="http://schemas.microsoft.com/office/mac/drawingml/2011/main" val="0"/>
+              <ma14:wrappingTextBoxFlag xmlns:ma14="http://schemas.microsoft.com/office/mac/drawingml/2011/main" xmlns="" val="0"/>
             </a:ext>
           </a:extLst>
         </p:spPr>
@@ -11099,8 +11151,8 @@
         </p:blipFill>
         <p:spPr>
           <a:xfrm>
-            <a:off x="683582" y="1005840"/>
-            <a:ext cx="7776835" cy="2302763"/>
+            <a:off x="974377" y="1005840"/>
+            <a:ext cx="7195245" cy="2130551"/>
           </a:xfrm>
           <a:prstGeom prst="rect">
             <a:avLst/>
@@ -11173,7 +11225,7 @@
                   <a:srgbClr val="242C39"/>
                 </a:solidFill>
               </a:rPr>
-              <a:t>Video, Sep 26</a:t>
+              <a:t>Video, September 2026</a:t>
             </a:r>
             <a:endParaRPr lang="en-US" sz="2700"/>
           </a:p>
@@ -11187,8 +11239,8 @@
         </p:nvSpPr>
         <p:spPr>
           <a:xfrm>
-            <a:off x="502920" y="3400043"/>
-            <a:ext cx="8138160" cy="1226820"/>
+            <a:off x="502920" y="3227831"/>
+            <a:ext cx="8138160" cy="1399032"/>
           </a:xfrm>
           <a:prstGeom prst="rect">
             <a:avLst/>
@@ -11214,7 +11266,7 @@
         </p:nvSpPr>
         <p:spPr>
           <a:xfrm>
-            <a:off x="685800" y="3473195"/>
+            <a:off x="685800" y="3300983"/>
             <a:ext cx="2743200" cy="228600"/>
           </a:xfrm>
           <a:prstGeom prst="rect">
@@ -11250,8 +11302,8 @@
         </p:nvSpPr>
         <p:spPr>
           <a:xfrm>
-            <a:off x="685800" y="3646931"/>
-            <a:ext cx="3703320" cy="952500"/>
+            <a:off x="685800" y="3474719"/>
+            <a:ext cx="3703320" cy="1124712"/>
           </a:xfrm>
           <a:prstGeom prst="rect">
             <a:avLst/>
@@ -11349,7 +11401,7 @@
           </a:prstGeom>
           <a:extLst>
             <a:ext uri="{C572A759-6A51-4108-AA02-DFA0A04FC94B}">
-              <ma14:wrappingTextBoxFlag xmlns="" xmlns:ma14="http://schemas.microsoft.com/office/mac/drawingml/2011/main" val="0"/>
+              <ma14:wrappingTextBoxFlag xmlns:ma14="http://schemas.microsoft.com/office/mac/drawingml/2011/main" xmlns="" val="0"/>
             </a:ext>
           </a:extLst>
         </p:spPr>
@@ -11368,7 +11420,7 @@
             <a:pPr algn="r"/>
             <a:fld id="{F7021451-1387-4CA6-816F-3879F97B5CBC}" type="slidenum">
               <a:rPr lang="en-US" b="0"/>
-              <a:t>16</a:t>
+              <a:t>19</a:t>
             </a:fld>
             <a:endParaRPr lang="en-US"/>
           </a:p>
@@ -11406,8 +11458,8 @@
         </p:nvSpPr>
         <p:spPr>
           <a:xfrm>
-            <a:off x="4663440" y="3646931"/>
-            <a:ext cx="3703320" cy="952500"/>
+            <a:off x="4663440" y="3474719"/>
+            <a:ext cx="3703320" cy="1124712"/>
           </a:xfrm>
           <a:prstGeom prst="rect">
             <a:avLst/>
@@ -11505,8 +11557,8 @@
         </p:blipFill>
         <p:spPr>
           <a:xfrm>
-            <a:off x="968754" y="1005840"/>
-            <a:ext cx="7206491" cy="2133881"/>
+            <a:off x="974377" y="1005840"/>
+            <a:ext cx="7195245" cy="2130551"/>
           </a:xfrm>
           <a:prstGeom prst="rect">
             <a:avLst/>
@@ -11579,7 +11631,7 @@
                   <a:srgbClr val="242C39"/>
                 </a:solidFill>
               </a:rPr>
-              <a:t>Integration, Sep 26</a:t>
+              <a:t>Integration, September 2026</a:t>
             </a:r>
             <a:endParaRPr lang="en-US" sz="2700"/>
           </a:p>
@@ -11593,8 +11645,8 @@
         </p:nvSpPr>
         <p:spPr>
           <a:xfrm>
-            <a:off x="502920" y="3231161"/>
-            <a:ext cx="8138160" cy="1395702"/>
+            <a:off x="502920" y="3227831"/>
+            <a:ext cx="8138160" cy="1399032"/>
           </a:xfrm>
           <a:prstGeom prst="rect">
             <a:avLst/>
@@ -11620,7 +11672,7 @@
         </p:nvSpPr>
         <p:spPr>
           <a:xfrm>
-            <a:off x="685800" y="3304313"/>
+            <a:off x="685800" y="3300983"/>
             <a:ext cx="2743200" cy="228600"/>
           </a:xfrm>
           <a:prstGeom prst="rect">
@@ -11656,8 +11708,8 @@
         </p:nvSpPr>
         <p:spPr>
           <a:xfrm>
-            <a:off x="685800" y="3478049"/>
-            <a:ext cx="3703320" cy="1121382"/>
+            <a:off x="685800" y="3474719"/>
+            <a:ext cx="3703320" cy="1124712"/>
           </a:xfrm>
           <a:prstGeom prst="rect">
             <a:avLst/>
@@ -11755,7 +11807,7 @@
           </a:prstGeom>
           <a:extLst>
             <a:ext uri="{C572A759-6A51-4108-AA02-DFA0A04FC94B}">
-              <ma14:wrappingTextBoxFlag xmlns="" xmlns:ma14="http://schemas.microsoft.com/office/mac/drawingml/2011/main" val="0"/>
+              <ma14:wrappingTextBoxFlag xmlns:ma14="http://schemas.microsoft.com/office/mac/drawingml/2011/main" xmlns="" val="0"/>
             </a:ext>
           </a:extLst>
         </p:spPr>
@@ -11774,7 +11826,7 @@
             <a:pPr algn="r"/>
             <a:fld id="{F7021451-1387-4CA6-816F-3879F97B5CBC}" type="slidenum">
               <a:rPr lang="en-US" b="0"/>
-              <a:t>17</a:t>
+              <a:t>20</a:t>
             </a:fld>
             <a:endParaRPr lang="en-US"/>
           </a:p>
@@ -11812,8 +11864,8 @@
         </p:nvSpPr>
         <p:spPr>
           <a:xfrm>
-            <a:off x="4663440" y="3478049"/>
-            <a:ext cx="3703320" cy="1121382"/>
+            <a:off x="4663440" y="3474719"/>
+            <a:ext cx="3703320" cy="1124712"/>
           </a:xfrm>
           <a:prstGeom prst="rect">
             <a:avLst/>
@@ -11911,8 +11963,8 @@
         </p:blipFill>
         <p:spPr>
           <a:xfrm>
-            <a:off x="968754" y="1005840"/>
-            <a:ext cx="7206491" cy="2133881"/>
+            <a:off x="974377" y="1005840"/>
+            <a:ext cx="7195245" cy="2130551"/>
           </a:xfrm>
           <a:prstGeom prst="rect">
             <a:avLst/>
@@ -11985,7 +12037,7 @@
                   <a:srgbClr val="242C39"/>
                 </a:solidFill>
               </a:rPr>
-              <a:t>Consulting, Sep 26</a:t>
+              <a:t>Consulting, September 2026</a:t>
             </a:r>
             <a:endParaRPr lang="en-US" sz="2700"/>
           </a:p>
@@ -11999,8 +12051,8 @@
         </p:nvSpPr>
         <p:spPr>
           <a:xfrm>
-            <a:off x="502920" y="3231161"/>
-            <a:ext cx="8138160" cy="1395702"/>
+            <a:off x="502920" y="3227831"/>
+            <a:ext cx="8138160" cy="1399032"/>
           </a:xfrm>
           <a:prstGeom prst="rect">
             <a:avLst/>
@@ -12026,7 +12078,7 @@
         </p:nvSpPr>
         <p:spPr>
           <a:xfrm>
-            <a:off x="685800" y="3304313"/>
+            <a:off x="685800" y="3300983"/>
             <a:ext cx="2743200" cy="228600"/>
           </a:xfrm>
           <a:prstGeom prst="rect">
@@ -12062,8 +12114,8 @@
         </p:nvSpPr>
         <p:spPr>
           <a:xfrm>
-            <a:off x="685800" y="3478049"/>
-            <a:ext cx="3703320" cy="1121382"/>
+            <a:off x="685800" y="3474719"/>
+            <a:ext cx="3703320" cy="1124712"/>
           </a:xfrm>
           <a:prstGeom prst="rect">
             <a:avLst/>
@@ -12140,7 +12192,7 @@
           </a:prstGeom>
           <a:extLst>
             <a:ext uri="{C572A759-6A51-4108-AA02-DFA0A04FC94B}">
-              <ma14:wrappingTextBoxFlag xmlns="" xmlns:ma14="http://schemas.microsoft.com/office/mac/drawingml/2011/main" val="0"/>
+              <ma14:wrappingTextBoxFlag xmlns:ma14="http://schemas.microsoft.com/office/mac/drawingml/2011/main" xmlns="" val="0"/>
             </a:ext>
           </a:extLst>
         </p:spPr>
@@ -12159,7 +12211,7 @@
             <a:pPr algn="r"/>
             <a:fld id="{F7021451-1387-4CA6-816F-3879F97B5CBC}" type="slidenum">
               <a:rPr lang="en-US" b="0"/>
-              <a:t>18</a:t>
+              <a:t>21</a:t>
             </a:fld>
             <a:endParaRPr lang="en-US"/>
           </a:p>
@@ -12197,8 +12249,8 @@
         </p:nvSpPr>
         <p:spPr>
           <a:xfrm>
-            <a:off x="4663440" y="3478049"/>
-            <a:ext cx="3703320" cy="1121382"/>
+            <a:off x="4663440" y="3474719"/>
+            <a:ext cx="3703320" cy="1124712"/>
           </a:xfrm>
           <a:prstGeom prst="rect">
             <a:avLst/>
@@ -12310,15 +12362,15 @@
           <p:nvPr/>
         </p:nvPicPr>
         <p:blipFill>
-          <a:blip r:embed="rId5"/>
+          <a:blip r:embed="rId3"/>
           <a:stretch>
             <a:fillRect/>
           </a:stretch>
         </p:blipFill>
         <p:spPr>
           <a:xfrm>
-            <a:off x="518066" y="1005840"/>
-            <a:ext cx="8107866" cy="2133881"/>
+            <a:off x="524393" y="1005840"/>
+            <a:ext cx="8095213" cy="2130551"/>
           </a:xfrm>
           <a:prstGeom prst="rect">
             <a:avLst/>
@@ -12391,7 +12443,7 @@
                   <a:srgbClr val="242C39"/>
                 </a:solidFill>
               </a:rPr>
-              <a:t>Revenue against budget and last year</a:t>
+              <a:t>Departmental revenue against budget and prior year</a:t>
             </a:r>
             <a:endParaRPr lang="en-US" sz="2700"/>
           </a:p>
@@ -12405,8 +12457,8 @@
         </p:nvSpPr>
         <p:spPr>
           <a:xfrm>
-            <a:off x="502920" y="3231161"/>
-            <a:ext cx="8138160" cy="1395702"/>
+            <a:off x="502920" y="3227831"/>
+            <a:ext cx="8138160" cy="1399032"/>
           </a:xfrm>
           <a:prstGeom prst="rect">
             <a:avLst/>
@@ -12432,7 +12484,7 @@
         </p:nvSpPr>
         <p:spPr>
           <a:xfrm>
-            <a:off x="685800" y="3304313"/>
+            <a:off x="685800" y="3300983"/>
             <a:ext cx="2743200" cy="228600"/>
           </a:xfrm>
           <a:prstGeom prst="rect">
@@ -12468,8 +12520,8 @@
         </p:nvSpPr>
         <p:spPr>
           <a:xfrm>
-            <a:off x="685800" y="3478049"/>
-            <a:ext cx="3703320" cy="1121382"/>
+            <a:off x="685800" y="3474719"/>
+            <a:ext cx="3703320" cy="1124712"/>
           </a:xfrm>
           <a:prstGeom prst="rect">
             <a:avLst/>
@@ -12546,7 +12598,7 @@
           </a:prstGeom>
           <a:extLst>
             <a:ext uri="{C572A759-6A51-4108-AA02-DFA0A04FC94B}">
-              <ma14:wrappingTextBoxFlag xmlns="" xmlns:ma14="http://schemas.microsoft.com/office/mac/drawingml/2011/main" val="0"/>
+              <ma14:wrappingTextBoxFlag xmlns:ma14="http://schemas.microsoft.com/office/mac/drawingml/2011/main" xmlns="" val="0"/>
             </a:ext>
           </a:extLst>
         </p:spPr>
@@ -12565,7 +12617,7 @@
             <a:pPr algn="r"/>
             <a:fld id="{F7021451-1387-4CA6-816F-3879F97B5CBC}" type="slidenum">
               <a:rPr lang="en-US" b="0"/>
-              <a:t>19</a:t>
+              <a:t>22</a:t>
             </a:fld>
             <a:endParaRPr lang="en-US"/>
           </a:p>
@@ -12603,8 +12655,8 @@
         </p:nvSpPr>
         <p:spPr>
           <a:xfrm>
-            <a:off x="4663440" y="3478049"/>
-            <a:ext cx="3703320" cy="1121382"/>
+            <a:off x="4663440" y="3474719"/>
+            <a:ext cx="3703320" cy="1124712"/>
           </a:xfrm>
           <a:prstGeom prst="rect">
             <a:avLst/>
@@ -12901,7 +12953,7 @@
         </p:nvSpPr>
         <p:spPr>
           <a:xfrm>
-            <a:off x="1600200" y="1874520"/>
+            <a:off x="1600200" y="1874519"/>
             <a:ext cx="5943600" cy="502920"/>
           </a:xfrm>
           <a:prstGeom prst="rect">
@@ -12923,7 +12975,7 @@
                   <a:srgbClr val="FFFFFF"/>
                 </a:solidFill>
               </a:rPr>
-              <a:t>What we spend</a:t>
+              <a:t>Operating expenditure</a:t>
             </a:r>
             <a:endParaRPr lang="en-US" sz="2800"/>
           </a:p>
@@ -12999,15 +13051,15 @@
           <p:nvPr/>
         </p:nvPicPr>
         <p:blipFill>
-          <a:blip r:embed="rId5"/>
+          <a:blip r:embed="rId3"/>
           <a:stretch>
             <a:fillRect/>
           </a:stretch>
         </p:blipFill>
         <p:spPr>
           <a:xfrm>
-            <a:off x="2632893" y="1005840"/>
-            <a:ext cx="3878213" cy="1964997"/>
+            <a:off x="2640967" y="1005840"/>
+            <a:ext cx="3862065" cy="1956815"/>
           </a:xfrm>
           <a:prstGeom prst="rect">
             <a:avLst/>
@@ -13044,7 +13096,7 @@
                   <a:srgbClr val="122B82"/>
                 </a:solidFill>
               </a:rPr>
-              <a:t>WHAT WE SPEND</a:t>
+              <a:t>OPERATING EXPENDITURE</a:t>
             </a:r>
             <a:endParaRPr lang="en-US" sz="950"/>
           </a:p>
@@ -13094,8 +13146,8 @@
         </p:nvSpPr>
         <p:spPr>
           <a:xfrm>
-            <a:off x="502920" y="3062278"/>
-            <a:ext cx="8138160" cy="1564585"/>
+            <a:off x="502920" y="3054096"/>
+            <a:ext cx="8138160" cy="1572768"/>
           </a:xfrm>
           <a:prstGeom prst="rect">
             <a:avLst/>
@@ -13121,7 +13173,7 @@
         </p:nvSpPr>
         <p:spPr>
           <a:xfrm>
-            <a:off x="685800" y="3135430"/>
+            <a:off x="685800" y="3127248"/>
             <a:ext cx="2743200" cy="228600"/>
           </a:xfrm>
           <a:prstGeom prst="rect">
@@ -13157,8 +13209,8 @@
         </p:nvSpPr>
         <p:spPr>
           <a:xfrm>
-            <a:off x="685800" y="3309166"/>
-            <a:ext cx="3703320" cy="1290265"/>
+            <a:off x="685800" y="3300984"/>
+            <a:ext cx="3703320" cy="1298448"/>
           </a:xfrm>
           <a:prstGeom prst="rect">
             <a:avLst/>
@@ -13235,7 +13287,7 @@
           </a:prstGeom>
           <a:extLst>
             <a:ext uri="{C572A759-6A51-4108-AA02-DFA0A04FC94B}">
-              <ma14:wrappingTextBoxFlag xmlns="" xmlns:ma14="http://schemas.microsoft.com/office/mac/drawingml/2011/main" val="0"/>
+              <ma14:wrappingTextBoxFlag xmlns:ma14="http://schemas.microsoft.com/office/mac/drawingml/2011/main" xmlns="" val="0"/>
             </a:ext>
           </a:extLst>
         </p:spPr>
@@ -13254,7 +13306,7 @@
             <a:pPr algn="r"/>
             <a:fld id="{F7021451-1387-4CA6-816F-3879F97B5CBC}" type="slidenum">
               <a:rPr lang="en-US" b="0"/>
-              <a:t>21</a:t>
+              <a:t>24</a:t>
             </a:fld>
             <a:endParaRPr lang="en-US"/>
           </a:p>
@@ -13286,14 +13338,14 @@
       </p:pic>
       <p:sp>
         <p:nvSpPr>
-          <p:cNvPr id="8" name="Text 5b"/>
+          <p:cNvPr id="4" name="Text 5b"/>
           <p:cNvSpPr txBox="1"/>
           <p:nvPr/>
         </p:nvSpPr>
         <p:spPr>
           <a:xfrm>
-            <a:off x="4663440" y="3309166"/>
-            <a:ext cx="3703320" cy="1290265"/>
+            <a:off x="4663440" y="3300984"/>
+            <a:ext cx="3703320" cy="1298448"/>
           </a:xfrm>
           <a:prstGeom prst="rect">
             <a:avLst/>
@@ -13405,15 +13457,15 @@
           <p:nvPr/>
         </p:nvPicPr>
         <p:blipFill>
-          <a:blip r:embed="rId5"/>
+          <a:blip r:embed="rId3"/>
           <a:stretch>
             <a:fillRect/>
           </a:stretch>
         </p:blipFill>
         <p:spPr>
           <a:xfrm>
-            <a:off x="2264619" y="1005840"/>
-            <a:ext cx="4614760" cy="2133881"/>
+            <a:off x="2268220" y="1005840"/>
+            <a:ext cx="4607559" cy="2130551"/>
           </a:xfrm>
           <a:prstGeom prst="rect">
             <a:avLst/>
@@ -13450,7 +13502,7 @@
                   <a:srgbClr val="122B82"/>
                 </a:solidFill>
               </a:rPr>
-              <a:t>WHAT WE SPEND</a:t>
+              <a:t>OPERATING EXPENDITURE</a:t>
             </a:r>
             <a:endParaRPr lang="en-US" sz="950"/>
           </a:p>
@@ -13500,8 +13552,8 @@
         </p:nvSpPr>
         <p:spPr>
           <a:xfrm>
-            <a:off x="502920" y="3231161"/>
-            <a:ext cx="8138160" cy="1395702"/>
+            <a:off x="502920" y="3227831"/>
+            <a:ext cx="8138160" cy="1399032"/>
           </a:xfrm>
           <a:prstGeom prst="rect">
             <a:avLst/>
@@ -13527,7 +13579,7 @@
         </p:nvSpPr>
         <p:spPr>
           <a:xfrm>
-            <a:off x="685800" y="3304313"/>
+            <a:off x="685800" y="3300983"/>
             <a:ext cx="2743200" cy="228600"/>
           </a:xfrm>
           <a:prstGeom prst="rect">
@@ -13563,8 +13615,8 @@
         </p:nvSpPr>
         <p:spPr>
           <a:xfrm>
-            <a:off x="685800" y="3478049"/>
-            <a:ext cx="3703320" cy="1121382"/>
+            <a:off x="685800" y="3474719"/>
+            <a:ext cx="3703320" cy="1124712"/>
           </a:xfrm>
           <a:prstGeom prst="rect">
             <a:avLst/>
@@ -13641,7 +13693,7 @@
           </a:prstGeom>
           <a:extLst>
             <a:ext uri="{C572A759-6A51-4108-AA02-DFA0A04FC94B}">
-              <ma14:wrappingTextBoxFlag xmlns="" xmlns:ma14="http://schemas.microsoft.com/office/mac/drawingml/2011/main" val="0"/>
+              <ma14:wrappingTextBoxFlag xmlns:ma14="http://schemas.microsoft.com/office/mac/drawingml/2011/main" xmlns="" val="0"/>
             </a:ext>
           </a:extLst>
         </p:spPr>
@@ -13660,7 +13712,7 @@
             <a:pPr algn="r"/>
             <a:fld id="{F7021451-1387-4CA6-816F-3879F97B5CBC}" type="slidenum">
               <a:rPr lang="en-US" b="0"/>
-              <a:t>22</a:t>
+              <a:t>25</a:t>
             </a:fld>
             <a:endParaRPr lang="en-US"/>
           </a:p>
@@ -13692,14 +13744,14 @@
       </p:pic>
       <p:sp>
         <p:nvSpPr>
-          <p:cNvPr id="8" name="Text 5b"/>
+          <p:cNvPr id="4" name="Text 5b"/>
           <p:cNvSpPr txBox="1"/>
           <p:nvPr/>
         </p:nvSpPr>
         <p:spPr>
           <a:xfrm>
-            <a:off x="4663440" y="3478049"/>
-            <a:ext cx="3703320" cy="1121382"/>
+            <a:off x="4663440" y="3474719"/>
+            <a:ext cx="3703320" cy="1124712"/>
           </a:xfrm>
           <a:prstGeom prst="rect">
             <a:avLst/>
@@ -13811,15 +13863,15 @@
           <p:nvPr/>
         </p:nvPicPr>
         <p:blipFill>
-          <a:blip r:embed="rId5"/>
+          <a:blip r:embed="rId3"/>
           <a:stretch>
             <a:fillRect/>
           </a:stretch>
         </p:blipFill>
         <p:spPr>
           <a:xfrm>
-            <a:off x="2783712" y="1005840"/>
-            <a:ext cx="3576575" cy="2133881"/>
+            <a:off x="2786502" y="1005840"/>
+            <a:ext cx="3570994" cy="2130551"/>
           </a:xfrm>
           <a:prstGeom prst="rect">
             <a:avLst/>
@@ -13856,7 +13908,7 @@
                   <a:srgbClr val="122B82"/>
                 </a:solidFill>
               </a:rPr>
-              <a:t>WHAT WE SPEND</a:t>
+              <a:t>OPERATING EXPENDITURE</a:t>
             </a:r>
             <a:endParaRPr lang="en-US" sz="950"/>
           </a:p>
@@ -13892,7 +13944,7 @@
                   <a:srgbClr val="242C39"/>
                 </a:solidFill>
               </a:rPr>
-              <a:t>Labour mix, year to date</a:t>
+              <a:t>Direct and indirect labour, year to date</a:t>
             </a:r>
             <a:endParaRPr lang="en-US" sz="2700"/>
           </a:p>
@@ -13906,8 +13958,8 @@
         </p:nvSpPr>
         <p:spPr>
           <a:xfrm>
-            <a:off x="502920" y="3231161"/>
-            <a:ext cx="8138160" cy="1395702"/>
+            <a:off x="502920" y="3227831"/>
+            <a:ext cx="8138160" cy="1399032"/>
           </a:xfrm>
           <a:prstGeom prst="rect">
             <a:avLst/>
@@ -13933,7 +13985,7 @@
         </p:nvSpPr>
         <p:spPr>
           <a:xfrm>
-            <a:off x="685800" y="3304313"/>
+            <a:off x="685800" y="3300983"/>
             <a:ext cx="2743200" cy="228600"/>
           </a:xfrm>
           <a:prstGeom prst="rect">
@@ -13969,8 +14021,8 @@
         </p:nvSpPr>
         <p:spPr>
           <a:xfrm>
-            <a:off x="685800" y="3478049"/>
-            <a:ext cx="3703320" cy="1121382"/>
+            <a:off x="685800" y="3474719"/>
+            <a:ext cx="3703320" cy="1124712"/>
           </a:xfrm>
           <a:prstGeom prst="rect">
             <a:avLst/>
@@ -14047,7 +14099,7 @@
           </a:prstGeom>
           <a:extLst>
             <a:ext uri="{C572A759-6A51-4108-AA02-DFA0A04FC94B}">
-              <ma14:wrappingTextBoxFlag xmlns="" xmlns:ma14="http://schemas.microsoft.com/office/mac/drawingml/2011/main" val="0"/>
+              <ma14:wrappingTextBoxFlag xmlns:ma14="http://schemas.microsoft.com/office/mac/drawingml/2011/main" xmlns="" val="0"/>
             </a:ext>
           </a:extLst>
         </p:spPr>
@@ -14066,7 +14118,7 @@
             <a:pPr algn="r"/>
             <a:fld id="{F7021451-1387-4CA6-816F-3879F97B5CBC}" type="slidenum">
               <a:rPr lang="en-US" b="0"/>
-              <a:t>23</a:t>
+              <a:t>26</a:t>
             </a:fld>
             <a:endParaRPr lang="en-US"/>
           </a:p>
@@ -14098,14 +14150,14 @@
       </p:pic>
       <p:sp>
         <p:nvSpPr>
-          <p:cNvPr id="8" name="Text 5b"/>
+          <p:cNvPr id="4" name="Text 5b"/>
           <p:cNvSpPr txBox="1"/>
           <p:nvPr/>
         </p:nvSpPr>
         <p:spPr>
           <a:xfrm>
-            <a:off x="4663440" y="3478049"/>
-            <a:ext cx="3703320" cy="1121382"/>
+            <a:off x="4663440" y="3474719"/>
+            <a:ext cx="3703320" cy="1124712"/>
           </a:xfrm>
           <a:prstGeom prst="rect">
             <a:avLst/>
@@ -14238,7 +14290,7 @@
                   <a:srgbClr val="122B82"/>
                 </a:solidFill>
               </a:rPr>
-              <a:t>WHAT WE SPEND</a:t>
+              <a:t>OPERATING EXPENDITURE</a:t>
             </a:r>
             <a:endParaRPr lang="en-US" sz="950"/>
           </a:p>
@@ -14274,7 +14326,7 @@
                   <a:srgbClr val="242C39"/>
                 </a:solidFill>
               </a:rPr>
-              <a:t>Employment expense, office and departmental</a:t>
+              <a:t>Employment expense by function</a:t>
             </a:r>
             <a:endParaRPr lang="en-US" sz="2700"/>
           </a:p>
@@ -14296,8 +14348,8 @@
         </p:blipFill>
         <p:spPr>
           <a:xfrm>
-            <a:off x="502920" y="1096428"/>
-            <a:ext cx="8138160" cy="2175628"/>
+            <a:off x="587228" y="1005840"/>
+            <a:ext cx="7969542" cy="2130551"/>
           </a:xfrm>
           <a:prstGeom prst="rect">
             <a:avLst/>
@@ -14312,8 +14364,8 @@
         </p:nvSpPr>
         <p:spPr>
           <a:xfrm>
-            <a:off x="502920" y="3454086"/>
-            <a:ext cx="8138160" cy="1172777"/>
+            <a:off x="502920" y="3227831"/>
+            <a:ext cx="8138160" cy="1399032"/>
           </a:xfrm>
           <a:prstGeom prst="rect">
             <a:avLst/>
@@ -14339,8 +14391,8 @@
         </p:nvSpPr>
         <p:spPr>
           <a:xfrm>
-            <a:off x="685800" y="3527238"/>
-            <a:ext cx="2743200" cy="164592"/>
+            <a:off x="685800" y="3300983"/>
+            <a:ext cx="2743200" cy="228600"/>
           </a:xfrm>
           <a:prstGeom prst="rect">
             <a:avLst/>
@@ -14375,8 +14427,8 @@
         </p:nvSpPr>
         <p:spPr>
           <a:xfrm>
-            <a:off x="685800" y="3700974"/>
-            <a:ext cx="3703320" cy="898457"/>
+            <a:off x="685800" y="3474719"/>
+            <a:ext cx="3703320" cy="1124712"/>
           </a:xfrm>
           <a:prstGeom prst="rect">
             <a:avLst/>
@@ -14435,14 +14487,14 @@
       </p:sp>
       <p:sp>
         <p:nvSpPr>
-          <p:cNvPr id="9" name="Text 6"/>
+          <p:cNvPr id="9" name="Text 5b"/>
           <p:cNvSpPr txBox="1"/>
           <p:nvPr/>
         </p:nvSpPr>
         <p:spPr>
           <a:xfrm>
-            <a:off x="4663440" y="3700974"/>
-            <a:ext cx="3703320" cy="898457"/>
+            <a:off x="4663440" y="3474719"/>
+            <a:ext cx="3703320" cy="1124712"/>
           </a:xfrm>
           <a:prstGeom prst="rect">
             <a:avLst/>
@@ -14519,7 +14571,7 @@
           </a:prstGeom>
           <a:extLst>
             <a:ext uri="{C572A759-6A51-4108-AA02-DFA0A04FC94B}">
-              <ma14:wrappingTextBoxFlag xmlns="" xmlns:ma14="http://schemas.microsoft.com/office/mac/drawingml/2011/main" val="0"/>
+              <ma14:wrappingTextBoxFlag xmlns:ma14="http://schemas.microsoft.com/office/mac/drawingml/2011/main" xmlns="" val="0"/>
             </a:ext>
           </a:extLst>
         </p:spPr>
@@ -14538,7 +14590,7 @@
             <a:pPr algn="r"/>
             <a:fld id="{F7021451-1387-4CA6-816F-3879F97B5CBC}" type="slidenum">
               <a:rPr lang="en-US" b="0"/>
-              <a:t>24</a:t>
+              <a:t>27</a:t>
             </a:fld>
             <a:endParaRPr lang="en-US"/>
           </a:p>
@@ -14787,7 +14839,7 @@
         </p:nvSpPr>
         <p:spPr>
           <a:xfrm>
-            <a:off x="1600200" y="1874520"/>
+            <a:off x="1600200" y="1874519"/>
             <a:ext cx="5943600" cy="502920"/>
           </a:xfrm>
           <a:prstGeom prst="rect">
@@ -14809,7 +14861,7 @@
                   <a:srgbClr val="FFFFFF"/>
                 </a:solidFill>
               </a:rPr>
-              <a:t>Customers and cash</a:t>
+              <a:t>Customers and receivables</a:t>
             </a:r>
             <a:endParaRPr lang="en-US" sz="2800"/>
           </a:p>
@@ -14906,7 +14958,7 @@
                   <a:srgbClr val="122B82"/>
                 </a:solidFill>
               </a:rPr>
-              <a:t>INTRODUCTION</a:t>
+              <a:t>EXECUTIVE SUMMARY</a:t>
             </a:r>
             <a:endParaRPr lang="en-US" sz="950"/>
           </a:p>
@@ -14921,7 +14973,7 @@
         <p:spPr>
           <a:xfrm>
             <a:off x="502920" y="640080"/>
-            <a:ext cx="7315200" cy="685800"/>
+            <a:ext cx="7315200" cy="365760"/>
           </a:xfrm>
           <a:prstGeom prst="rect">
             <a:avLst/>
@@ -14933,7 +14985,7 @@
           <a:bodyPr wrap="square" lIns="0" tIns="0" rIns="0" bIns="0" rtlCol="0" anchor="ctr"/>
           <a:lstStyle/>
           <a:p>
-            <a:pPr marL="0" indent="0">
+            <a:pPr marL="0" indent="0" algn="ctr">
               <a:buNone/>
             </a:pPr>
             <a:r>
@@ -14942,7 +14994,7 @@
                   <a:srgbClr val="242C39"/>
                 </a:solidFill>
               </a:rPr>
-              <a:t>Where the business stands, Sep 26</a:t>
+              <a:t>Performance summary, September 2026</a:t>
             </a:r>
             <a:endParaRPr lang="en-US" sz="2700"/>
           </a:p>
@@ -16807,7 +16859,7 @@
           </a:prstGeom>
           <a:extLst>
             <a:ext uri="{C572A759-6A51-4108-AA02-DFA0A04FC94B}">
-              <ma14:wrappingTextBoxFlag xmlns="" xmlns:ma14="http://schemas.microsoft.com/office/mac/drawingml/2011/main" val="0"/>
+              <ma14:wrappingTextBoxFlag xmlns:ma14="http://schemas.microsoft.com/office/mac/drawingml/2011/main" xmlns="" val="0"/>
             </a:ext>
           </a:extLst>
         </p:spPr>
@@ -17137,15 +17189,15 @@
           <p:nvPr/>
         </p:nvPicPr>
         <p:blipFill>
-          <a:blip r:embed="rId5"/>
+          <a:blip r:embed="rId3"/>
           <a:stretch>
             <a:fillRect/>
           </a:stretch>
         </p:blipFill>
         <p:spPr>
           <a:xfrm>
-            <a:off x="2639119" y="1005840"/>
-            <a:ext cx="3865761" cy="1964997"/>
+            <a:off x="2647167" y="1005840"/>
+            <a:ext cx="3849664" cy="1956815"/>
           </a:xfrm>
           <a:prstGeom prst="rect">
             <a:avLst/>
@@ -17182,7 +17234,7 @@
                   <a:srgbClr val="122B82"/>
                 </a:solidFill>
               </a:rPr>
-              <a:t>CUSTOMERS AND CASH</a:t>
+              <a:t>CUSTOMERS AND RECEIVABLES</a:t>
             </a:r>
             <a:endParaRPr lang="en-US" sz="950"/>
           </a:p>
@@ -17218,7 +17270,7 @@
                   <a:srgbClr val="242C39"/>
                 </a:solidFill>
               </a:rPr>
-              <a:t>Top ten customers, year to date</a:t>
+              <a:t>Top ten customers by revenue, year to date</a:t>
             </a:r>
             <a:endParaRPr lang="en-US" sz="2700"/>
           </a:p>
@@ -17232,8 +17284,8 @@
         </p:nvSpPr>
         <p:spPr>
           <a:xfrm>
-            <a:off x="502920" y="3062278"/>
-            <a:ext cx="8138160" cy="1564585"/>
+            <a:off x="502920" y="3054096"/>
+            <a:ext cx="8138160" cy="1572768"/>
           </a:xfrm>
           <a:prstGeom prst="rect">
             <a:avLst/>
@@ -17259,7 +17311,7 @@
         </p:nvSpPr>
         <p:spPr>
           <a:xfrm>
-            <a:off x="685800" y="3135430"/>
+            <a:off x="685800" y="3127248"/>
             <a:ext cx="2743200" cy="228600"/>
           </a:xfrm>
           <a:prstGeom prst="rect">
@@ -17295,8 +17347,8 @@
         </p:nvSpPr>
         <p:spPr>
           <a:xfrm>
-            <a:off x="685800" y="3309166"/>
-            <a:ext cx="3703320" cy="1290265"/>
+            <a:off x="685800" y="3300984"/>
+            <a:ext cx="3703320" cy="1298448"/>
           </a:xfrm>
           <a:prstGeom prst="rect">
             <a:avLst/>
@@ -17394,7 +17446,7 @@
           </a:prstGeom>
           <a:extLst>
             <a:ext uri="{C572A759-6A51-4108-AA02-DFA0A04FC94B}">
-              <ma14:wrappingTextBoxFlag xmlns="" xmlns:ma14="http://schemas.microsoft.com/office/mac/drawingml/2011/main" val="0"/>
+              <ma14:wrappingTextBoxFlag xmlns:ma14="http://schemas.microsoft.com/office/mac/drawingml/2011/main" xmlns="" val="0"/>
             </a:ext>
           </a:extLst>
         </p:spPr>
@@ -17413,7 +17465,7 @@
             <a:pPr algn="r"/>
             <a:fld id="{F7021451-1387-4CA6-816F-3879F97B5CBC}" type="slidenum">
               <a:rPr lang="en-US" b="0"/>
-              <a:t>26</a:t>
+              <a:t>29</a:t>
             </a:fld>
             <a:endParaRPr lang="en-US"/>
           </a:p>
@@ -17445,14 +17497,14 @@
       </p:pic>
       <p:sp>
         <p:nvSpPr>
-          <p:cNvPr id="8" name="Text 5b"/>
+          <p:cNvPr id="4" name="Text 5b"/>
           <p:cNvSpPr txBox="1"/>
           <p:nvPr/>
         </p:nvSpPr>
         <p:spPr>
           <a:xfrm>
-            <a:off x="4663440" y="3309166"/>
-            <a:ext cx="3703320" cy="1290265"/>
+            <a:off x="4663440" y="3300984"/>
+            <a:ext cx="3703320" cy="1298448"/>
           </a:xfrm>
           <a:prstGeom prst="rect">
             <a:avLst/>
@@ -17550,8 +17602,8 @@
         </p:blipFill>
         <p:spPr>
           <a:xfrm>
-            <a:off x="2520006" y="1005840"/>
-            <a:ext cx="4103987" cy="2133881"/>
+            <a:off x="2523208" y="1005840"/>
+            <a:ext cx="4097583" cy="2130551"/>
           </a:xfrm>
           <a:prstGeom prst="rect">
             <a:avLst/>
@@ -17588,7 +17640,7 @@
                   <a:srgbClr val="122B82"/>
                 </a:solidFill>
               </a:rPr>
-              <a:t>CUSTOMERS AND CASH</a:t>
+              <a:t>CUSTOMERS AND RECEIVABLES</a:t>
             </a:r>
             <a:endParaRPr lang="en-US" sz="950"/>
           </a:p>
@@ -17624,7 +17676,7 @@
                   <a:srgbClr val="242C39"/>
                 </a:solidFill>
               </a:rPr>
-              <a:t>How long customers take to pay</a:t>
+              <a:t>Debtor days and collection performance</a:t>
             </a:r>
             <a:endParaRPr lang="en-US" sz="2700"/>
           </a:p>
@@ -17638,8 +17690,8 @@
         </p:nvSpPr>
         <p:spPr>
           <a:xfrm>
-            <a:off x="502920" y="3231161"/>
-            <a:ext cx="8138160" cy="1395702"/>
+            <a:off x="502920" y="3227831"/>
+            <a:ext cx="8138160" cy="1399032"/>
           </a:xfrm>
           <a:prstGeom prst="rect">
             <a:avLst/>
@@ -17665,7 +17717,7 @@
         </p:nvSpPr>
         <p:spPr>
           <a:xfrm>
-            <a:off x="685800" y="3304313"/>
+            <a:off x="685800" y="3300983"/>
             <a:ext cx="2743200" cy="228600"/>
           </a:xfrm>
           <a:prstGeom prst="rect">
@@ -17701,8 +17753,8 @@
         </p:nvSpPr>
         <p:spPr>
           <a:xfrm>
-            <a:off x="685800" y="3478049"/>
-            <a:ext cx="3703320" cy="1121382"/>
+            <a:off x="685800" y="3474719"/>
+            <a:ext cx="3703320" cy="1124712"/>
           </a:xfrm>
           <a:prstGeom prst="rect">
             <a:avLst/>
@@ -17779,7 +17831,7 @@
           </a:prstGeom>
           <a:extLst>
             <a:ext uri="{C572A759-6A51-4108-AA02-DFA0A04FC94B}">
-              <ma14:wrappingTextBoxFlag xmlns="" xmlns:ma14="http://schemas.microsoft.com/office/mac/drawingml/2011/main" val="0"/>
+              <ma14:wrappingTextBoxFlag xmlns:ma14="http://schemas.microsoft.com/office/mac/drawingml/2011/main" xmlns="" val="0"/>
             </a:ext>
           </a:extLst>
         </p:spPr>
@@ -17798,7 +17850,7 @@
             <a:pPr algn="r"/>
             <a:fld id="{F7021451-1387-4CA6-816F-3879F97B5CBC}" type="slidenum">
               <a:rPr lang="en-US" b="0"/>
-              <a:t>27</a:t>
+              <a:t>30</a:t>
             </a:fld>
             <a:endParaRPr lang="en-US"/>
           </a:p>
@@ -17830,14 +17882,14 @@
       </p:pic>
       <p:sp>
         <p:nvSpPr>
-          <p:cNvPr id="8" name="Text 5b"/>
+          <p:cNvPr id="4" name="Text 5b"/>
           <p:cNvSpPr txBox="1"/>
           <p:nvPr/>
         </p:nvSpPr>
         <p:spPr>
           <a:xfrm>
-            <a:off x="4663440" y="3478049"/>
-            <a:ext cx="3703320" cy="1121382"/>
+            <a:off x="4663440" y="3474719"/>
+            <a:ext cx="3703320" cy="1124712"/>
           </a:xfrm>
           <a:prstGeom prst="rect">
             <a:avLst/>
@@ -17956,8 +18008,8 @@
         </p:blipFill>
         <p:spPr>
           <a:xfrm>
-            <a:off x="3107424" y="1005840"/>
-            <a:ext cx="2929151" cy="1964997"/>
+            <a:off x="3113522" y="1005840"/>
+            <a:ext cx="2916954" cy="1956815"/>
           </a:xfrm>
           <a:prstGeom prst="rect">
             <a:avLst/>
@@ -17994,7 +18046,7 @@
                   <a:srgbClr val="122B82"/>
                 </a:solidFill>
               </a:rPr>
-              <a:t>CUSTOMERS AND CASH</a:t>
+              <a:t>CUSTOMERS AND RECEIVABLES</a:t>
             </a:r>
             <a:endParaRPr lang="en-US" sz="950"/>
           </a:p>
@@ -18030,7 +18082,7 @@
                   <a:srgbClr val="242C39"/>
                 </a:solidFill>
               </a:rPr>
-              <a:t>Who owes us the most</a:t>
+              <a:t>Aged receivables by customer</a:t>
             </a:r>
             <a:endParaRPr lang="en-US" sz="2700"/>
           </a:p>
@@ -18044,8 +18096,8 @@
         </p:nvSpPr>
         <p:spPr>
           <a:xfrm>
-            <a:off x="502920" y="3062278"/>
-            <a:ext cx="8138160" cy="1564585"/>
+            <a:off x="502920" y="3054096"/>
+            <a:ext cx="8138160" cy="1572768"/>
           </a:xfrm>
           <a:prstGeom prst="rect">
             <a:avLst/>
@@ -18071,7 +18123,7 @@
         </p:nvSpPr>
         <p:spPr>
           <a:xfrm>
-            <a:off x="685800" y="3135430"/>
+            <a:off x="685800" y="3127248"/>
             <a:ext cx="2743200" cy="228600"/>
           </a:xfrm>
           <a:prstGeom prst="rect">
@@ -18107,8 +18159,8 @@
         </p:nvSpPr>
         <p:spPr>
           <a:xfrm>
-            <a:off x="685800" y="3309166"/>
-            <a:ext cx="3703320" cy="1290265"/>
+            <a:off x="685800" y="3300984"/>
+            <a:ext cx="3703320" cy="1298448"/>
           </a:xfrm>
           <a:prstGeom prst="rect">
             <a:avLst/>
@@ -18185,7 +18237,7 @@
           </a:prstGeom>
           <a:extLst>
             <a:ext uri="{C572A759-6A51-4108-AA02-DFA0A04FC94B}">
-              <ma14:wrappingTextBoxFlag xmlns="" xmlns:ma14="http://schemas.microsoft.com/office/mac/drawingml/2011/main" val="0"/>
+              <ma14:wrappingTextBoxFlag xmlns:ma14="http://schemas.microsoft.com/office/mac/drawingml/2011/main" xmlns="" val="0"/>
             </a:ext>
           </a:extLst>
         </p:spPr>
@@ -18204,7 +18256,7 @@
             <a:pPr algn="r"/>
             <a:fld id="{F7021451-1387-4CA6-816F-3879F97B5CBC}" type="slidenum">
               <a:rPr lang="en-US" b="0"/>
-              <a:t>28</a:t>
+              <a:t>31</a:t>
             </a:fld>
             <a:endParaRPr lang="en-US"/>
           </a:p>
@@ -18236,14 +18288,14 @@
       </p:pic>
       <p:sp>
         <p:nvSpPr>
-          <p:cNvPr id="8" name="Text 5b"/>
+          <p:cNvPr id="4" name="Text 5b"/>
           <p:cNvSpPr txBox="1"/>
           <p:nvPr/>
         </p:nvSpPr>
         <p:spPr>
           <a:xfrm>
-            <a:off x="4663440" y="3309166"/>
-            <a:ext cx="3703320" cy="1290265"/>
+            <a:off x="4663440" y="3300984"/>
+            <a:ext cx="3703320" cy="1298448"/>
           </a:xfrm>
           <a:prstGeom prst="rect">
             <a:avLst/>
@@ -18540,7 +18592,7 @@
         </p:nvSpPr>
         <p:spPr>
           <a:xfrm>
-            <a:off x="1600200" y="1874520"/>
+            <a:off x="1600200" y="1874519"/>
             <a:ext cx="5943600" cy="502920"/>
           </a:xfrm>
           <a:prstGeom prst="rect">
@@ -18695,7 +18747,7 @@
                   <a:srgbClr val="242C39"/>
                 </a:solidFill>
               </a:rPr>
-              <a:t>Chargeable per cent, Sep 26</a:t>
+              <a:t>Chargeable percentage by department, September 2026</a:t>
             </a:r>
             <a:endParaRPr lang="en-US" sz="2700"/>
           </a:p>
@@ -18717,7 +18769,7 @@
         </p:blipFill>
         <p:spPr>
           <a:xfrm>
-            <a:off x="502920" y="1491681"/>
+            <a:off x="502920" y="1378554"/>
             <a:ext cx="8138160" cy="1385122"/>
           </a:xfrm>
           <a:prstGeom prst="rect">
@@ -18733,8 +18785,8 @@
         </p:nvSpPr>
         <p:spPr>
           <a:xfrm>
-            <a:off x="502920" y="3454086"/>
-            <a:ext cx="8138160" cy="1172777"/>
+            <a:off x="502920" y="3227831"/>
+            <a:ext cx="8138160" cy="1399032"/>
           </a:xfrm>
           <a:prstGeom prst="rect">
             <a:avLst/>
@@ -18760,8 +18812,8 @@
         </p:nvSpPr>
         <p:spPr>
           <a:xfrm>
-            <a:off x="685800" y="3527238"/>
-            <a:ext cx="2743200" cy="164592"/>
+            <a:off x="685800" y="3300983"/>
+            <a:ext cx="2743200" cy="228600"/>
           </a:xfrm>
           <a:prstGeom prst="rect">
             <a:avLst/>
@@ -18796,8 +18848,8 @@
         </p:nvSpPr>
         <p:spPr>
           <a:xfrm>
-            <a:off x="685800" y="3700974"/>
-            <a:ext cx="3703320" cy="898457"/>
+            <a:off x="685800" y="3474719"/>
+            <a:ext cx="3703320" cy="1124712"/>
           </a:xfrm>
           <a:prstGeom prst="rect">
             <a:avLst/>
@@ -18856,14 +18908,14 @@
       </p:sp>
       <p:sp>
         <p:nvSpPr>
-          <p:cNvPr id="9" name="Text 6"/>
+          <p:cNvPr id="9" name="Text 5b"/>
           <p:cNvSpPr txBox="1"/>
           <p:nvPr/>
         </p:nvSpPr>
         <p:spPr>
           <a:xfrm>
-            <a:off x="4663440" y="3700974"/>
-            <a:ext cx="3703320" cy="898457"/>
+            <a:off x="4663440" y="3474719"/>
+            <a:ext cx="3703320" cy="1124712"/>
           </a:xfrm>
           <a:prstGeom prst="rect">
             <a:avLst/>
@@ -18940,7 +18992,7 @@
           </a:prstGeom>
           <a:extLst>
             <a:ext uri="{C572A759-6A51-4108-AA02-DFA0A04FC94B}">
-              <ma14:wrappingTextBoxFlag xmlns="" xmlns:ma14="http://schemas.microsoft.com/office/mac/drawingml/2011/main" val="0"/>
+              <ma14:wrappingTextBoxFlag xmlns:ma14="http://schemas.microsoft.com/office/mac/drawingml/2011/main" xmlns="" val="0"/>
             </a:ext>
           </a:extLst>
         </p:spPr>
@@ -18959,7 +19011,7 @@
             <a:pPr algn="r"/>
             <a:fld id="{F7021451-1387-4CA6-816F-3879F97B5CBC}" type="slidenum">
               <a:rPr lang="en-US" b="0"/>
-              <a:t>30</a:t>
+              <a:t>33</a:t>
             </a:fld>
             <a:endParaRPr lang="en-US"/>
           </a:p>
@@ -19023,15 +19075,15 @@
           <p:nvPr/>
         </p:nvPicPr>
         <p:blipFill>
-          <a:blip r:embed="rId5"/>
+          <a:blip r:embed="rId3"/>
           <a:stretch>
             <a:fillRect/>
           </a:stretch>
         </p:blipFill>
         <p:spPr>
           <a:xfrm>
-            <a:off x="559702" y="1005840"/>
-            <a:ext cx="8024594" cy="2133881"/>
+            <a:off x="565963" y="1005840"/>
+            <a:ext cx="8012072" cy="2130551"/>
           </a:xfrm>
           <a:prstGeom prst="rect">
             <a:avLst/>
@@ -19104,7 +19156,7 @@
                   <a:srgbClr val="242C39"/>
                 </a:solidFill>
               </a:rPr>
-              <a:t>How each department spent its hours, Sep 26</a:t>
+              <a:t>Hours mix by department, September 2026</a:t>
             </a:r>
             <a:endParaRPr lang="en-US" sz="2700"/>
           </a:p>
@@ -19118,8 +19170,8 @@
         </p:nvSpPr>
         <p:spPr>
           <a:xfrm>
-            <a:off x="502920" y="3231161"/>
-            <a:ext cx="8138160" cy="1395702"/>
+            <a:off x="502920" y="3227831"/>
+            <a:ext cx="8138160" cy="1399032"/>
           </a:xfrm>
           <a:prstGeom prst="rect">
             <a:avLst/>
@@ -19145,7 +19197,7 @@
         </p:nvSpPr>
         <p:spPr>
           <a:xfrm>
-            <a:off x="685800" y="3304313"/>
+            <a:off x="685800" y="3300983"/>
             <a:ext cx="2743200" cy="228600"/>
           </a:xfrm>
           <a:prstGeom prst="rect">
@@ -19181,8 +19233,8 @@
         </p:nvSpPr>
         <p:spPr>
           <a:xfrm>
-            <a:off x="685800" y="3478049"/>
-            <a:ext cx="3703320" cy="1121382"/>
+            <a:off x="685800" y="3474719"/>
+            <a:ext cx="3703320" cy="1124712"/>
           </a:xfrm>
           <a:prstGeom prst="rect">
             <a:avLst/>
@@ -19259,7 +19311,7 @@
           </a:prstGeom>
           <a:extLst>
             <a:ext uri="{C572A759-6A51-4108-AA02-DFA0A04FC94B}">
-              <ma14:wrappingTextBoxFlag xmlns="" xmlns:ma14="http://schemas.microsoft.com/office/mac/drawingml/2011/main" val="0"/>
+              <ma14:wrappingTextBoxFlag xmlns:ma14="http://schemas.microsoft.com/office/mac/drawingml/2011/main" xmlns="" val="0"/>
             </a:ext>
           </a:extLst>
         </p:spPr>
@@ -19278,7 +19330,7 @@
             <a:pPr algn="r"/>
             <a:fld id="{F7021451-1387-4CA6-816F-3879F97B5CBC}" type="slidenum">
               <a:rPr lang="en-US" b="0"/>
-              <a:t>31</a:t>
+              <a:t>34</a:t>
             </a:fld>
             <a:endParaRPr lang="en-US"/>
           </a:p>
@@ -19310,14 +19362,14 @@
       </p:pic>
       <p:sp>
         <p:nvSpPr>
-          <p:cNvPr id="8" name="Text 5b"/>
+          <p:cNvPr id="4" name="Text 5b"/>
           <p:cNvSpPr txBox="1"/>
           <p:nvPr/>
         </p:nvSpPr>
         <p:spPr>
           <a:xfrm>
-            <a:off x="4663440" y="3478049"/>
-            <a:ext cx="3703320" cy="1121382"/>
+            <a:off x="4663440" y="3474719"/>
+            <a:ext cx="3703320" cy="1124712"/>
           </a:xfrm>
           <a:prstGeom prst="rect">
             <a:avLst/>
@@ -19429,15 +19481,15 @@
           <p:nvPr/>
         </p:nvPicPr>
         <p:blipFill>
-          <a:blip r:embed="rId5"/>
+          <a:blip r:embed="rId3"/>
           <a:stretch>
             <a:fillRect/>
           </a:stretch>
         </p:blipFill>
         <p:spPr>
           <a:xfrm>
-            <a:off x="587282" y="1005840"/>
-            <a:ext cx="7969434" cy="1964997"/>
+            <a:off x="603874" y="1005840"/>
+            <a:ext cx="7936251" cy="1956815"/>
           </a:xfrm>
           <a:prstGeom prst="rect">
             <a:avLst/>
@@ -19510,7 +19562,7 @@
                   <a:srgbClr val="242C39"/>
                 </a:solidFill>
               </a:rPr>
-              <a:t>Hours, the three departments, Sep 26</a:t>
+              <a:t>Hours mix by reporting group, September 2026</a:t>
             </a:r>
             <a:endParaRPr lang="en-US" sz="2700"/>
           </a:p>
@@ -19524,8 +19576,8 @@
         </p:nvSpPr>
         <p:spPr>
           <a:xfrm>
-            <a:off x="502920" y="3062278"/>
-            <a:ext cx="8138160" cy="1564585"/>
+            <a:off x="502920" y="3054096"/>
+            <a:ext cx="8138160" cy="1572768"/>
           </a:xfrm>
           <a:prstGeom prst="rect">
             <a:avLst/>
@@ -19551,7 +19603,7 @@
         </p:nvSpPr>
         <p:spPr>
           <a:xfrm>
-            <a:off x="685800" y="3135430"/>
+            <a:off x="685800" y="3127248"/>
             <a:ext cx="2743200" cy="228600"/>
           </a:xfrm>
           <a:prstGeom prst="rect">
@@ -19587,8 +19639,8 @@
         </p:nvSpPr>
         <p:spPr>
           <a:xfrm>
-            <a:off x="685800" y="3309166"/>
-            <a:ext cx="3703320" cy="1290265"/>
+            <a:off x="685800" y="3300984"/>
+            <a:ext cx="3703320" cy="1298448"/>
           </a:xfrm>
           <a:prstGeom prst="rect">
             <a:avLst/>
@@ -19665,7 +19717,7 @@
           </a:prstGeom>
           <a:extLst>
             <a:ext uri="{C572A759-6A51-4108-AA02-DFA0A04FC94B}">
-              <ma14:wrappingTextBoxFlag xmlns="" xmlns:ma14="http://schemas.microsoft.com/office/mac/drawingml/2011/main" val="0"/>
+              <ma14:wrappingTextBoxFlag xmlns:ma14="http://schemas.microsoft.com/office/mac/drawingml/2011/main" xmlns="" val="0"/>
             </a:ext>
           </a:extLst>
         </p:spPr>
@@ -19684,7 +19736,7 @@
             <a:pPr algn="r"/>
             <a:fld id="{F7021451-1387-4CA6-816F-3879F97B5CBC}" type="slidenum">
               <a:rPr lang="en-US" b="0"/>
-              <a:t>32</a:t>
+              <a:t>35</a:t>
             </a:fld>
             <a:endParaRPr lang="en-US"/>
           </a:p>
@@ -19716,14 +19768,14 @@
       </p:pic>
       <p:sp>
         <p:nvSpPr>
-          <p:cNvPr id="8" name="Text 5b"/>
+          <p:cNvPr id="4" name="Text 5b"/>
           <p:cNvSpPr txBox="1"/>
           <p:nvPr/>
         </p:nvSpPr>
         <p:spPr>
           <a:xfrm>
-            <a:off x="4663440" y="3309166"/>
-            <a:ext cx="3703320" cy="1290265"/>
+            <a:off x="4663440" y="3300984"/>
+            <a:ext cx="3703320" cy="1298448"/>
           </a:xfrm>
           <a:prstGeom prst="rect">
             <a:avLst/>
@@ -20020,7 +20072,7 @@
         </p:nvSpPr>
         <p:spPr>
           <a:xfrm>
-            <a:off x="1600200" y="1874520"/>
+            <a:off x="1600200" y="1874519"/>
             <a:ext cx="5943600" cy="502920"/>
           </a:xfrm>
           <a:prstGeom prst="rect">
@@ -20118,15 +20170,15 @@
           <p:nvPr/>
         </p:nvPicPr>
         <p:blipFill>
-          <a:blip r:embed="rId5"/>
+          <a:blip r:embed="rId3"/>
           <a:stretch>
             <a:fillRect/>
           </a:stretch>
         </p:blipFill>
         <p:spPr>
           <a:xfrm>
-            <a:off x="543882" y="1005840"/>
-            <a:ext cx="8056234" cy="2133881"/>
+            <a:off x="550168" y="1005840"/>
+            <a:ext cx="8043662" cy="2130551"/>
           </a:xfrm>
           <a:prstGeom prst="rect">
             <a:avLst/>
@@ -20199,7 +20251,7 @@
                   <a:srgbClr val="242C39"/>
                 </a:solidFill>
               </a:rPr>
-              <a:t>Revenue by month against budget</a:t>
+              <a:t>Full year revenue against budget</a:t>
             </a:r>
             <a:endParaRPr lang="en-US" sz="2700"/>
           </a:p>
@@ -20213,8 +20265,8 @@
         </p:nvSpPr>
         <p:spPr>
           <a:xfrm>
-            <a:off x="502920" y="3231161"/>
-            <a:ext cx="8138160" cy="1395702"/>
+            <a:off x="502920" y="3227831"/>
+            <a:ext cx="8138160" cy="1399032"/>
           </a:xfrm>
           <a:prstGeom prst="rect">
             <a:avLst/>
@@ -20240,7 +20292,7 @@
         </p:nvSpPr>
         <p:spPr>
           <a:xfrm>
-            <a:off x="685800" y="3304313"/>
+            <a:off x="685800" y="3300983"/>
             <a:ext cx="2743200" cy="228600"/>
           </a:xfrm>
           <a:prstGeom prst="rect">
@@ -20276,8 +20328,8 @@
         </p:nvSpPr>
         <p:spPr>
           <a:xfrm>
-            <a:off x="685800" y="3478049"/>
-            <a:ext cx="3703320" cy="1121382"/>
+            <a:off x="685800" y="3474719"/>
+            <a:ext cx="3703320" cy="1124712"/>
           </a:xfrm>
           <a:prstGeom prst="rect">
             <a:avLst/>
@@ -20375,7 +20427,7 @@
           </a:prstGeom>
           <a:extLst>
             <a:ext uri="{C572A759-6A51-4108-AA02-DFA0A04FC94B}">
-              <ma14:wrappingTextBoxFlag xmlns="" xmlns:ma14="http://schemas.microsoft.com/office/mac/drawingml/2011/main" val="0"/>
+              <ma14:wrappingTextBoxFlag xmlns:ma14="http://schemas.microsoft.com/office/mac/drawingml/2011/main" xmlns="" val="0"/>
             </a:ext>
           </a:extLst>
         </p:spPr>
@@ -20394,7 +20446,7 @@
             <a:pPr algn="r"/>
             <a:fld id="{F7021451-1387-4CA6-816F-3879F97B5CBC}" type="slidenum">
               <a:rPr lang="en-US" b="0"/>
-              <a:t>34</a:t>
+              <a:t>37</a:t>
             </a:fld>
             <a:endParaRPr lang="en-US"/>
           </a:p>
@@ -20426,14 +20478,14 @@
       </p:pic>
       <p:sp>
         <p:nvSpPr>
-          <p:cNvPr id="8" name="Text 5b"/>
+          <p:cNvPr id="4" name="Text 5b"/>
           <p:cNvSpPr txBox="1"/>
           <p:nvPr/>
         </p:nvSpPr>
         <p:spPr>
           <a:xfrm>
-            <a:off x="4663440" y="3478049"/>
-            <a:ext cx="3703320" cy="1121382"/>
+            <a:off x="4663440" y="3474719"/>
+            <a:ext cx="3703320" cy="1124712"/>
           </a:xfrm>
           <a:prstGeom prst="rect">
             <a:avLst/>
@@ -20545,7 +20597,7 @@
                   <a:srgbClr val="122B82"/>
                 </a:solidFill>
               </a:rPr>
-              <a:t>SUMMARY AND ACTIONS</a:t>
+              <a:t>RECOMMENDATIONS</a:t>
             </a:r>
             <a:endParaRPr lang="en-US" sz="950"/>
           </a:p>
@@ -20560,7 +20612,7 @@
         <p:spPr>
           <a:xfrm>
             <a:off x="502920" y="640080"/>
-            <a:ext cx="7315200" cy="685800"/>
+            <a:ext cx="7315200" cy="365760"/>
           </a:xfrm>
           <a:prstGeom prst="rect">
             <a:avLst/>
@@ -20572,7 +20624,7 @@
           <a:bodyPr wrap="square" lIns="0" tIns="0" rIns="0" bIns="0" rtlCol="0" anchor="ctr"/>
           <a:lstStyle/>
           <a:p>
-            <a:pPr marL="0" indent="0">
+            <a:pPr marL="0" indent="0" algn="ctr">
               <a:buNone/>
             </a:pPr>
             <a:r>
@@ -20581,7 +20633,7 @@
                   <a:srgbClr val="242C39"/>
                 </a:solidFill>
               </a:rPr>
-              <a:t>What we agreed</a:t>
+              <a:t>Recommendations and agreed actions</a:t>
             </a:r>
             <a:endParaRPr lang="en-US" sz="2700"/>
           </a:p>
@@ -20837,7 +20889,7 @@
                             <a:srgbClr val="FFFFFF"/>
                           </a:solidFill>
                         </a:rPr>
-                        <a:t>Suggested by</a:t>
+                        <a:t>Target date</a:t>
                       </a:r>
                       <a:endParaRPr lang="en-US" sz="900"/>
                     </a:p>
@@ -22587,7 +22639,7 @@
           </a:prstGeom>
           <a:extLst>
             <a:ext uri="{C572A759-6A51-4108-AA02-DFA0A04FC94B}">
-              <ma14:wrappingTextBoxFlag xmlns="" xmlns:ma14="http://schemas.microsoft.com/office/mac/drawingml/2011/main" val="0"/>
+              <ma14:wrappingTextBoxFlag xmlns:ma14="http://schemas.microsoft.com/office/mac/drawingml/2011/main" xmlns="" val="0"/>
             </a:ext>
           </a:extLst>
         </p:spPr>
@@ -22606,7 +22658,7 @@
             <a:pPr algn="r"/>
             <a:fld id="{F7021451-1387-4CA6-816F-3879F97B5CBC}" type="slidenum">
               <a:rPr lang="en-US" b="0"/>
-              <a:t>35</a:t>
+              <a:t>38</a:t>
             </a:fld>
             <a:endParaRPr lang="en-US"/>
           </a:p>
@@ -22855,7 +22907,7 @@
         </p:nvSpPr>
         <p:spPr>
           <a:xfrm>
-            <a:off x="1600200" y="1874520"/>
+            <a:off x="1600200" y="1874519"/>
             <a:ext cx="5943600" cy="502920"/>
           </a:xfrm>
           <a:prstGeom prst="rect">
@@ -23194,7 +23246,7 @@
         </p:nvSpPr>
         <p:spPr>
           <a:xfrm>
-            <a:off x="1463040" y="1874520"/>
+            <a:off x="1600200" y="1874519"/>
             <a:ext cx="5943600" cy="502920"/>
           </a:xfrm>
           <a:prstGeom prst="rect">
@@ -23212,7 +23264,7 @@
             </a:pPr>
             <a:r>
               <a:rPr lang="en-US" sz="2300" b="1"/>
-              <a:t>Links </a:t>
+              <a:t>Source documents</a:t>
             </a:r>
             <a:endParaRPr lang="en-US" sz="2800"/>
           </a:p>
@@ -23232,7 +23284,7 @@
         </p:nvSpPr>
         <p:spPr>
           <a:xfrm>
-            <a:off x="1463040" y="2809494"/>
+            <a:off x="1600200" y="2798064"/>
             <a:ext cx="5943600" cy="347472"/>
           </a:xfrm>
           <a:prstGeom prst="rect">
@@ -23269,7 +23321,7 @@
         </p:nvSpPr>
         <p:spPr>
           <a:xfrm>
-            <a:off x="1463040" y="2269305"/>
+            <a:off x="1600200" y="2395728"/>
             <a:ext cx="5943600" cy="347472"/>
           </a:xfrm>
           <a:prstGeom prst="rect">
@@ -23432,7 +23484,7 @@
               <a:buNone/>
             </a:pPr>
             <a:r>
-              <a:rPr lang="en-US" sz="3400" b="1">
+              <a:rPr lang="en-US" sz="4000" b="1">
                 <a:solidFill>
                   <a:srgbClr val="FFFFFF"/>
                 </a:solidFill>
@@ -23451,7 +23503,7 @@
         </p:nvSpPr>
         <p:spPr>
           <a:xfrm>
-            <a:off x="548640" y="896112"/>
+            <a:off x="566928" y="960120"/>
             <a:ext cx="1828800" cy="228600"/>
           </a:xfrm>
           <a:prstGeom prst="rect">
@@ -23592,8 +23644,8 @@
         </p:blipFill>
         <p:spPr>
           <a:xfrm>
-            <a:off x="693698" y="1005840"/>
-            <a:ext cx="7756603" cy="2133881"/>
+            <a:off x="699750" y="1005840"/>
+            <a:ext cx="7744498" cy="2130551"/>
           </a:xfrm>
           <a:prstGeom prst="rect">
             <a:avLst/>
@@ -23666,7 +23718,7 @@
                   <a:srgbClr val="242C39"/>
                 </a:solidFill>
               </a:rPr>
-              <a:t>P&amp;L summary, income</a:t>
+              <a:t>Profit and loss summary, income</a:t>
             </a:r>
             <a:endParaRPr lang="en-US" sz="2700" dirty="0"/>
           </a:p>
@@ -23680,8 +23732,8 @@
         </p:nvSpPr>
         <p:spPr>
           <a:xfrm>
-            <a:off x="502920" y="3231161"/>
-            <a:ext cx="8138160" cy="1395702"/>
+            <a:off x="502920" y="3227831"/>
+            <a:ext cx="8138160" cy="1399032"/>
           </a:xfrm>
           <a:prstGeom prst="rect">
             <a:avLst/>
@@ -23707,7 +23759,7 @@
         </p:nvSpPr>
         <p:spPr>
           <a:xfrm>
-            <a:off x="685800" y="3304313"/>
+            <a:off x="685800" y="3300983"/>
             <a:ext cx="2743200" cy="228600"/>
           </a:xfrm>
           <a:prstGeom prst="rect">
@@ -23743,8 +23795,8 @@
         </p:nvSpPr>
         <p:spPr>
           <a:xfrm>
-            <a:off x="685800" y="3478049"/>
-            <a:ext cx="3703320" cy="1121382"/>
+            <a:off x="685800" y="3474719"/>
+            <a:ext cx="3703320" cy="1124712"/>
           </a:xfrm>
           <a:prstGeom prst="rect">
             <a:avLst/>
@@ -23821,7 +23873,7 @@
           </a:prstGeom>
           <a:extLst>
             <a:ext uri="{C572A759-6A51-4108-AA02-DFA0A04FC94B}">
-              <ma14:wrappingTextBoxFlag xmlns="" xmlns:ma14="http://schemas.microsoft.com/office/mac/drawingml/2011/main" val="0"/>
+              <ma14:wrappingTextBoxFlag xmlns:ma14="http://schemas.microsoft.com/office/mac/drawingml/2011/main" xmlns="" val="0"/>
             </a:ext>
           </a:extLst>
         </p:spPr>
@@ -23854,8 +23906,8 @@
         </p:nvSpPr>
         <p:spPr>
           <a:xfrm>
-            <a:off x="4663440" y="3478049"/>
-            <a:ext cx="3703320" cy="1121382"/>
+            <a:off x="4663440" y="3474719"/>
+            <a:ext cx="3703320" cy="1124712"/>
           </a:xfrm>
           <a:prstGeom prst="rect">
             <a:avLst/>
@@ -23991,15 +24043,15 @@
           <p:nvPr/>
         </p:nvPicPr>
         <p:blipFill>
-          <a:blip r:embed="rId5"/>
+          <a:blip r:embed="rId3"/>
           <a:stretch>
             <a:fillRect/>
           </a:stretch>
         </p:blipFill>
         <p:spPr>
           <a:xfrm>
-            <a:off x="504052" y="1005840"/>
-            <a:ext cx="8135894" cy="2302763"/>
+            <a:off x="808274" y="1005840"/>
+            <a:ext cx="7527451" cy="2130551"/>
           </a:xfrm>
           <a:prstGeom prst="rect">
             <a:avLst/>
@@ -24072,7 +24124,7 @@
                   <a:srgbClr val="242C39"/>
                 </a:solidFill>
               </a:rPr>
-              <a:t>Revenue by month and department</a:t>
+              <a:t>Monthly revenue by department</a:t>
             </a:r>
             <a:endParaRPr lang="en-US" sz="2700" dirty="0"/>
           </a:p>
@@ -24086,8 +24138,8 @@
         </p:nvSpPr>
         <p:spPr>
           <a:xfrm>
-            <a:off x="502920" y="3400043"/>
-            <a:ext cx="8138160" cy="1226820"/>
+            <a:off x="502920" y="3227831"/>
+            <a:ext cx="8138160" cy="1399032"/>
           </a:xfrm>
           <a:prstGeom prst="rect">
             <a:avLst/>
@@ -24113,7 +24165,7 @@
         </p:nvSpPr>
         <p:spPr>
           <a:xfrm>
-            <a:off x="685800" y="3473195"/>
+            <a:off x="685800" y="3300983"/>
             <a:ext cx="2743200" cy="228600"/>
           </a:xfrm>
           <a:prstGeom prst="rect">
@@ -24149,8 +24201,8 @@
         </p:nvSpPr>
         <p:spPr>
           <a:xfrm>
-            <a:off x="685800" y="3646931"/>
-            <a:ext cx="3703320" cy="952500"/>
+            <a:off x="685800" y="3474719"/>
+            <a:ext cx="3703320" cy="1124712"/>
           </a:xfrm>
           <a:prstGeom prst="rect">
             <a:avLst/>
@@ -24227,7 +24279,7 @@
           </a:prstGeom>
           <a:extLst>
             <a:ext uri="{C572A759-6A51-4108-AA02-DFA0A04FC94B}">
-              <ma14:wrappingTextBoxFlag xmlns="" xmlns:ma14="http://schemas.microsoft.com/office/mac/drawingml/2011/main" val="0"/>
+              <ma14:wrappingTextBoxFlag xmlns:ma14="http://schemas.microsoft.com/office/mac/drawingml/2011/main" xmlns="" val="0"/>
             </a:ext>
           </a:extLst>
         </p:spPr>
@@ -24284,8 +24336,8 @@
         </p:nvSpPr>
         <p:spPr>
           <a:xfrm>
-            <a:off x="4663440" y="3646931"/>
-            <a:ext cx="3703320" cy="952500"/>
+            <a:off x="4663440" y="3474719"/>
+            <a:ext cx="3703320" cy="1124712"/>
           </a:xfrm>
           <a:prstGeom prst="rect">
             <a:avLst/>
@@ -24404,7 +24456,7 @@
         </p:blipFill>
         <p:spPr>
           <a:xfrm>
-            <a:off x="4663440" y="1042453"/>
+            <a:off x="4663440" y="1041480"/>
             <a:ext cx="3977640" cy="2452462"/>
           </a:xfrm>
           <a:prstGeom prst="rect">
@@ -24428,7 +24480,7 @@
         </p:blipFill>
         <p:spPr>
           <a:xfrm>
-            <a:off x="502920" y="1042453"/>
+            <a:off x="502920" y="1041480"/>
             <a:ext cx="3977640" cy="2452462"/>
           </a:xfrm>
           <a:prstGeom prst="rect">
@@ -24502,7 +24554,7 @@
                   <a:srgbClr val="242C39"/>
                 </a:solidFill>
               </a:rPr>
-              <a:t>Revenue, against budget and year on year</a:t>
+              <a:t>Revenue against budget and prior years</a:t>
             </a:r>
             <a:endParaRPr lang="en-US" sz="2700" dirty="0"/>
           </a:p>
@@ -24516,8 +24568,8 @@
         </p:nvSpPr>
         <p:spPr>
           <a:xfrm>
-            <a:off x="502920" y="3622969"/>
-            <a:ext cx="8138160" cy="1003894"/>
+            <a:off x="502920" y="3621023"/>
+            <a:ext cx="8138160" cy="1005840"/>
           </a:xfrm>
           <a:prstGeom prst="rect">
             <a:avLst/>
@@ -24543,7 +24595,7 @@
         </p:nvSpPr>
         <p:spPr>
           <a:xfrm>
-            <a:off x="685800" y="3696121"/>
+            <a:off x="685800" y="3694175"/>
             <a:ext cx="2743200" cy="228600"/>
           </a:xfrm>
           <a:prstGeom prst="rect">
@@ -24579,8 +24631,8 @@
         </p:nvSpPr>
         <p:spPr>
           <a:xfrm>
-            <a:off x="685800" y="3869857"/>
-            <a:ext cx="3703320" cy="729574"/>
+            <a:off x="685800" y="3867911"/>
+            <a:ext cx="3703320" cy="731520"/>
           </a:xfrm>
           <a:prstGeom prst="rect">
             <a:avLst/>
@@ -24657,7 +24709,7 @@
           </a:prstGeom>
           <a:extLst>
             <a:ext uri="{C572A759-6A51-4108-AA02-DFA0A04FC94B}">
-              <ma14:wrappingTextBoxFlag xmlns="" xmlns:ma14="http://schemas.microsoft.com/office/mac/drawingml/2011/main" val="0"/>
+              <ma14:wrappingTextBoxFlag xmlns:ma14="http://schemas.microsoft.com/office/mac/drawingml/2011/main" xmlns="" val="0"/>
             </a:ext>
           </a:extLst>
         </p:spPr>
@@ -24690,8 +24742,8 @@
         </p:nvSpPr>
         <p:spPr>
           <a:xfrm>
-            <a:off x="4663440" y="3869857"/>
-            <a:ext cx="3703320" cy="729574"/>
+            <a:off x="4663440" y="3867911"/>
+            <a:ext cx="3703320" cy="731520"/>
           </a:xfrm>
           <a:prstGeom prst="rect">
             <a:avLst/>
@@ -24806,14 +24858,14 @@
           <p:nvPr/>
         </p:nvPicPr>
         <p:blipFill>
-          <a:blip r:embed="rId5"/>
+          <a:blip r:embed="rId3"/>
           <a:stretch>
             <a:fillRect/>
           </a:stretch>
         </p:blipFill>
         <p:spPr>
           <a:xfrm>
-            <a:off x="502920" y="1007468"/>
+            <a:off x="502920" y="1006495"/>
             <a:ext cx="8138160" cy="2522431"/>
           </a:xfrm>
           <a:prstGeom prst="rect">
@@ -24887,7 +24939,7 @@
                   <a:srgbClr val="242C39"/>
                 </a:solidFill>
               </a:rPr>
-              <a:t>Revenue by quarter, year on year</a:t>
+              <a:t>Quarterly revenue, three year comparison</a:t>
             </a:r>
             <a:endParaRPr lang="en-US" sz="2700" dirty="0"/>
           </a:p>
@@ -24901,8 +24953,8 @@
         </p:nvSpPr>
         <p:spPr>
           <a:xfrm>
-            <a:off x="502920" y="3622969"/>
-            <a:ext cx="8138160" cy="1003894"/>
+            <a:off x="502920" y="3621023"/>
+            <a:ext cx="8138160" cy="1005840"/>
           </a:xfrm>
           <a:prstGeom prst="rect">
             <a:avLst/>
@@ -24928,7 +24980,7 @@
         </p:nvSpPr>
         <p:spPr>
           <a:xfrm>
-            <a:off x="685800" y="3696121"/>
+            <a:off x="685800" y="3694175"/>
             <a:ext cx="2743200" cy="228600"/>
           </a:xfrm>
           <a:prstGeom prst="rect">
@@ -24964,8 +25016,8 @@
         </p:nvSpPr>
         <p:spPr>
           <a:xfrm>
-            <a:off x="685800" y="3869857"/>
-            <a:ext cx="3703320" cy="729574"/>
+            <a:off x="685800" y="3867911"/>
+            <a:ext cx="3703320" cy="731520"/>
           </a:xfrm>
           <a:prstGeom prst="rect">
             <a:avLst/>
@@ -25042,7 +25094,7 @@
           </a:prstGeom>
           <a:extLst>
             <a:ext uri="{C572A759-6A51-4108-AA02-DFA0A04FC94B}">
-              <ma14:wrappingTextBoxFlag xmlns="" xmlns:ma14="http://schemas.microsoft.com/office/mac/drawingml/2011/main" val="0"/>
+              <ma14:wrappingTextBoxFlag xmlns:ma14="http://schemas.microsoft.com/office/mac/drawingml/2011/main" xmlns="" val="0"/>
             </a:ext>
           </a:extLst>
         </p:spPr>
@@ -25075,8 +25127,8 @@
         </p:nvSpPr>
         <p:spPr>
           <a:xfrm>
-            <a:off x="4663440" y="3869857"/>
-            <a:ext cx="3703320" cy="729574"/>
+            <a:off x="4663440" y="3867911"/>
+            <a:ext cx="3703320" cy="731520"/>
           </a:xfrm>
           <a:prstGeom prst="rect">
             <a:avLst/>
@@ -25191,14 +25243,14 @@
           <p:nvPr/>
         </p:nvPicPr>
         <p:blipFill>
-          <a:blip r:embed="rId5"/>
+          <a:blip r:embed="rId3"/>
           <a:stretch>
             <a:fillRect/>
           </a:stretch>
         </p:blipFill>
         <p:spPr>
           <a:xfrm>
-            <a:off x="502920" y="1007468"/>
+            <a:off x="502920" y="1006495"/>
             <a:ext cx="8138160" cy="2522431"/>
           </a:xfrm>
           <a:prstGeom prst="rect">
@@ -25272,7 +25324,7 @@
                   <a:srgbClr val="242C39"/>
                 </a:solidFill>
               </a:rPr>
-              <a:t>Three years of revenue by month</a:t>
+              <a:t>Monthly revenue, three year history</a:t>
             </a:r>
             <a:endParaRPr lang="en-US" sz="2700" dirty="0"/>
           </a:p>
@@ -25286,8 +25338,8 @@
         </p:nvSpPr>
         <p:spPr>
           <a:xfrm>
-            <a:off x="502920" y="3622969"/>
-            <a:ext cx="8138160" cy="1003894"/>
+            <a:off x="502920" y="3621023"/>
+            <a:ext cx="8138160" cy="1005840"/>
           </a:xfrm>
           <a:prstGeom prst="rect">
             <a:avLst/>
@@ -25313,7 +25365,7 @@
         </p:nvSpPr>
         <p:spPr>
           <a:xfrm>
-            <a:off x="685800" y="3696121"/>
+            <a:off x="685800" y="3694175"/>
             <a:ext cx="2743200" cy="228600"/>
           </a:xfrm>
           <a:prstGeom prst="rect">
@@ -25349,8 +25401,8 @@
         </p:nvSpPr>
         <p:spPr>
           <a:xfrm>
-            <a:off x="685800" y="3869857"/>
-            <a:ext cx="3703320" cy="729574"/>
+            <a:off x="685800" y="3867911"/>
+            <a:ext cx="3703320" cy="731520"/>
           </a:xfrm>
           <a:prstGeom prst="rect">
             <a:avLst/>
@@ -25427,7 +25479,7 @@
           </a:prstGeom>
           <a:extLst>
             <a:ext uri="{C572A759-6A51-4108-AA02-DFA0A04FC94B}">
-              <ma14:wrappingTextBoxFlag xmlns="" xmlns:ma14="http://schemas.microsoft.com/office/mac/drawingml/2011/main" val="0"/>
+              <ma14:wrappingTextBoxFlag xmlns:ma14="http://schemas.microsoft.com/office/mac/drawingml/2011/main" xmlns="" val="0"/>
             </a:ext>
           </a:extLst>
         </p:spPr>
@@ -25460,8 +25512,8 @@
         </p:nvSpPr>
         <p:spPr>
           <a:xfrm>
-            <a:off x="4663440" y="3869857"/>
-            <a:ext cx="3703320" cy="729574"/>
+            <a:off x="4663440" y="3867911"/>
+            <a:ext cx="3703320" cy="731520"/>
           </a:xfrm>
           <a:prstGeom prst="rect">
             <a:avLst/>
@@ -26161,15 +26213,6 @@
 </file>
 
 <file path=customXml/item1.xml><?xml version="1.0" encoding="utf-8"?>
-<?mso-contentType ?>
-<FormTemplates xmlns="http://schemas.microsoft.com/sharepoint/v3/contenttype/forms">
-  <Display>DocumentLibraryForm</Display>
-  <Edit>DocumentLibraryForm</Edit>
-  <New>DocumentLibraryForm</New>
-</FormTemplates>
-</file>
-
-<file path=customXml/item2.xml><?xml version="1.0" encoding="utf-8"?>
 <ct:contentTypeSchema xmlns:ct="http://schemas.microsoft.com/office/2006/metadata/contentType" xmlns:ma="http://schemas.microsoft.com/office/2006/metadata/properties/metaAttributes" ct:_="" ma:_="" ma:contentTypeName="Document" ma:contentTypeID="0x01010095D8E4D2559E924A87A79F54B9BAD5BE" ma:contentTypeVersion="16" ma:contentTypeDescription="Create a new document." ma:contentTypeScope="" ma:versionID="ba53b6c843234409b40c8f59a9b7c6b9">
   <xsd:schema xmlns:xsd="http://www.w3.org/2001/XMLSchema" xmlns:xs="http://www.w3.org/2001/XMLSchema" xmlns:p="http://schemas.microsoft.com/office/2006/metadata/properties" xmlns:ns2="3a6658fd-f367-467d-85f1-98b3d34a9a42" xmlns:ns3="1a8adb4b-2ec4-4c17-a363-a3f920aacb8a" targetNamespace="http://schemas.microsoft.com/office/2006/metadata/properties" ma:root="true" ma:fieldsID="00f5d55f7ac0385ca13a055e2e5b8cec" ns2:_="" ns3:_="">
     <xsd:import namespace="3a6658fd-f367-467d-85f1-98b3d34a9a42"/>
@@ -26404,7 +26447,7 @@
 </ct:contentTypeSchema>
 </file>
 
-<file path=customXml/item3.xml><?xml version="1.0" encoding="utf-8"?>
+<file path=customXml/item2.xml><?xml version="1.0" encoding="utf-8"?>
 <p:properties xmlns:p="http://schemas.microsoft.com/office/2006/metadata/properties" xmlns:xsi="http://www.w3.org/2001/XMLSchema-instance" xmlns:pc="http://schemas.microsoft.com/office/infopath/2007/PartnerControls">
   <documentManagement>
     <TaxCatchAll xmlns="1a8adb4b-2ec4-4c17-a363-a3f920aacb8a" xsi:nil="true"/>
@@ -26415,15 +26458,16 @@
 </p:properties>
 </file>
 
-<file path=customXml/itemProps1.xml><?xml version="1.0" encoding="utf-8"?>
-<ds:datastoreItem xmlns:ds="http://schemas.openxmlformats.org/officeDocument/2006/customXml" ds:itemID="{7EF5184D-7A02-4F38-A067-CB9CBB93537D}">
-  <ds:schemaRefs>
-    <ds:schemaRef ds:uri="http://schemas.microsoft.com/sharepoint/v3/contenttype/forms"/>
-  </ds:schemaRefs>
-</ds:datastoreItem>
+<file path=customXml/item3.xml><?xml version="1.0" encoding="utf-8"?>
+<?mso-contentType ?>
+<FormTemplates xmlns="http://schemas.microsoft.com/sharepoint/v3/contenttype/forms">
+  <Display>DocumentLibraryForm</Display>
+  <Edit>DocumentLibraryForm</Edit>
+  <New>DocumentLibraryForm</New>
+</FormTemplates>
 </file>
 
-<file path=customXml/itemProps2.xml><?xml version="1.0" encoding="utf-8"?>
+<file path=customXml/itemProps1.xml><?xml version="1.0" encoding="utf-8"?>
 <ds:datastoreItem xmlns:ds="http://schemas.openxmlformats.org/officeDocument/2006/customXml" ds:itemID="{D71164FC-CBD9-4C6A-93C8-7DD966AE2D58}">
   <ds:schemaRefs>
     <ds:schemaRef ds:uri="1a8adb4b-2ec4-4c17-a363-a3f920aacb8a"/>
@@ -26442,7 +26486,7 @@
 </ds:datastoreItem>
 </file>
 
-<file path=customXml/itemProps3.xml><?xml version="1.0" encoding="utf-8"?>
+<file path=customXml/itemProps2.xml><?xml version="1.0" encoding="utf-8"?>
 <ds:datastoreItem xmlns:ds="http://schemas.openxmlformats.org/officeDocument/2006/customXml" ds:itemID="{F4125B7E-8B3D-498B-9153-BDD048D2CB2F}">
   <ds:schemaRefs>
     <ds:schemaRef ds:uri="1a8adb4b-2ec4-4c17-a363-a3f920aacb8a"/>
@@ -26451,4 +26495,12 @@
     <ds:schemaRef ds:uri="http://schemas.microsoft.com/office/infopath/2007/PartnerControls"/>
   </ds:schemaRefs>
 </ds:datastoreItem>
+</file>
+
+<file path=customXml/itemProps3.xml><?xml version="1.0" encoding="utf-8"?>
+<ds:datastoreItem xmlns:ds="http://schemas.openxmlformats.org/officeDocument/2006/customXml" ds:itemID="{7EF5184D-7A02-4F38-A067-CB9CBB93537D}">
+  <ds:schemaRefs>
+    <ds:schemaRef ds:uri="http://schemas.microsoft.com/sharepoint/v3/contenttype/forms"/>
+  </ds:schemaRefs>
+</ds:datastoreItem>
 </file>
--- a/deck/CTS Monthly Business Review - 30092026.pptx
+++ b/deck/CTS Monthly Business Review - 30092026.pptx
@@ -23,6 +23,7 @@
     <p:sldId id="296" r:id="rId17"/>
     <p:sldId id="297" r:id="rId18"/>
     <p:sldId id="298" r:id="rId52"/>
+    <p:sldId id="299" r:id="rId53"/>
     <p:sldId id="262" r:id="rId19"/>
     <p:sldId id="263" r:id="rId20"/>
     <p:sldId id="264" r:id="rId21"/>
@@ -4943,6 +4944,58 @@
 </p:notes>
 </file>
 
+<file path=ppt/notesSlides/notesSlide42.xml><?xml version="1.0" encoding="utf-8"?>
+<p:notes xmlns:a="http://schemas.openxmlformats.org/drawingml/2006/main" xmlns:p="http://schemas.openxmlformats.org/presentationml/2006/main" xmlns:r="http://schemas.openxmlformats.org/officeDocument/2006/relationships">
+  <p:cSld>
+    <p:spTree>
+      <p:nvGrpSpPr>
+        <p:cNvPr id="1" name=""/>
+        <p:cNvGrpSpPr/>
+        <p:nvPr/>
+      </p:nvGrpSpPr>
+      <p:grpSpPr>
+        <a:xfrm>
+          <a:off x="0" y="0"/>
+          <a:ext cx="0" cy="0"/>
+          <a:chOff x="0" y="0"/>
+          <a:chExt cx="0" cy="0"/>
+        </a:xfrm>
+      </p:grpSpPr>
+      <p:sp>
+        <p:nvSpPr>
+          <p:cNvPr id="3" name="Notes Placeholder 2"/>
+          <p:cNvSpPr>
+            <a:spLocks noGrp="1"/>
+          </p:cNvSpPr>
+          <p:nvPr>
+            <p:ph type="body" idx="1"/>
+          </p:nvPr>
+        </p:nvSpPr>
+        <p:spPr/>
+        <p:txBody>
+          <a:bodyPr lIns="107095" tIns="53547" rIns="107095" bIns="53547"/>
+          <a:lstStyle/>
+          <a:p>
+            <a:r>
+              <a:t>Departmental performance for September 2026.</a:t>
+            </a:r>
+          </a:p>
+          <a:p/>
+          <a:p>
+            <a:r>
+              <a:t>The pages that follow give the company result by department, the same result rolled up the way the P&amp;L groups the business, then a page for each of the five departments, and finally departmental revenue against budget and against the same month last year.</a:t>
+            </a:r>
+          </a:p>
+        </p:txBody>
+      </p:sp>
+    </p:spTree>
+  </p:cSld>
+  <p:clrMapOvr>
+    <a:masterClrMapping/>
+  </p:clrMapOvr>
+</p:notes>
+</file>
+
 <file path=ppt/notesSlides/notesSlide5.xml><?xml version="1.0" encoding="utf-8"?>
 <p:notes xmlns:a="http://schemas.openxmlformats.org/drawingml/2006/main" xmlns:r="http://schemas.openxmlformats.org/officeDocument/2006/relationships" xmlns:p="http://schemas.openxmlformats.org/presentationml/2006/main">
   <p:cSld>
@@ -8696,6 +8749,415 @@
 </file>
 
 <file path=ppt/slides/slide16.xml><?xml version="1.0" encoding="utf-8"?>
+<p:sld xmlns:a="http://schemas.openxmlformats.org/drawingml/2006/main" xmlns:p="http://schemas.openxmlformats.org/presentationml/2006/main" xmlns:r="http://schemas.openxmlformats.org/officeDocument/2006/relationships">
+  <p:cSld>
+    <p:spTree>
+      <p:nvGrpSpPr>
+        <p:cNvPr id="1" name=""/>
+        <p:cNvGrpSpPr/>
+        <p:nvPr/>
+      </p:nvGrpSpPr>
+      <p:grpSpPr/>
+      <p:sp>
+        <p:nvSpPr>
+          <p:cNvPr id="12" name="dot 4"/>
+          <p:cNvSpPr/>
+          <p:nvPr/>
+        </p:nvSpPr>
+        <p:spPr>
+          <a:xfrm>
+            <a:off x="5897880" y="3154680"/>
+            <a:ext cx="1371600" cy="1371600"/>
+          </a:xfrm>
+          <a:prstGeom prst="ellipse">
+            <a:avLst/>
+          </a:prstGeom>
+          <a:solidFill>
+            <a:srgbClr val="8F4AFA"/>
+          </a:solidFill>
+          <a:ln>
+            <a:noFill/>
+          </a:ln>
+          <a:effectLst/>
+        </p:spPr>
+        <p:style>
+          <a:lnRef idx="1">
+            <a:schemeClr val="accent1"/>
+          </a:lnRef>
+          <a:fillRef idx="3">
+            <a:schemeClr val="accent1"/>
+          </a:fillRef>
+          <a:effectRef idx="2">
+            <a:schemeClr val="accent1"/>
+          </a:effectRef>
+          <a:fontRef idx="minor">
+            <a:schemeClr val="lt1"/>
+          </a:fontRef>
+        </p:style>
+        <p:txBody>
+          <a:bodyPr rtlCol="0" anchor="ctr"/>
+          <a:lstStyle/>
+          <a:p>
+            <a:pPr algn="ctr"/>
+          </a:p>
+        </p:txBody>
+      </p:sp>
+      <p:sp>
+        <p:nvSpPr>
+          <p:cNvPr id="11" name="dot 3"/>
+          <p:cNvSpPr/>
+          <p:nvPr/>
+        </p:nvSpPr>
+        <p:spPr>
+          <a:xfrm>
+            <a:off x="7040880" y="2468880"/>
+            <a:ext cx="2057400" cy="2057400"/>
+          </a:xfrm>
+          <a:prstGeom prst="ellipse">
+            <a:avLst/>
+          </a:prstGeom>
+          <a:solidFill>
+            <a:srgbClr val="6D71FF"/>
+          </a:solidFill>
+          <a:ln>
+            <a:noFill/>
+          </a:ln>
+          <a:effectLst/>
+        </p:spPr>
+        <p:style>
+          <a:lnRef idx="1">
+            <a:schemeClr val="accent1"/>
+          </a:lnRef>
+          <a:fillRef idx="3">
+            <a:schemeClr val="accent1"/>
+          </a:fillRef>
+          <a:effectRef idx="2">
+            <a:schemeClr val="accent1"/>
+          </a:effectRef>
+          <a:fontRef idx="minor">
+            <a:schemeClr val="lt1"/>
+          </a:fontRef>
+        </p:style>
+        <p:txBody>
+          <a:bodyPr rtlCol="0" anchor="ctr"/>
+          <a:lstStyle/>
+          <a:p>
+            <a:pPr algn="ctr"/>
+          </a:p>
+        </p:txBody>
+      </p:sp>
+      <p:sp>
+        <p:nvSpPr>
+          <p:cNvPr id="10" name="dot 2"/>
+          <p:cNvSpPr/>
+          <p:nvPr/>
+        </p:nvSpPr>
+        <p:spPr>
+          <a:xfrm>
+            <a:off x="6629400" y="2057400"/>
+            <a:ext cx="1554480" cy="1554480"/>
+          </a:xfrm>
+          <a:prstGeom prst="ellipse">
+            <a:avLst/>
+          </a:prstGeom>
+          <a:solidFill>
+            <a:srgbClr val="3FD0C9"/>
+          </a:solidFill>
+          <a:ln>
+            <a:noFill/>
+          </a:ln>
+          <a:effectLst/>
+        </p:spPr>
+        <p:style>
+          <a:lnRef idx="1">
+            <a:schemeClr val="accent1"/>
+          </a:lnRef>
+          <a:fillRef idx="3">
+            <a:schemeClr val="accent1"/>
+          </a:fillRef>
+          <a:effectRef idx="2">
+            <a:schemeClr val="accent1"/>
+          </a:effectRef>
+          <a:fontRef idx="minor">
+            <a:schemeClr val="lt1"/>
+          </a:fontRef>
+        </p:style>
+        <p:txBody>
+          <a:bodyPr rtlCol="0" anchor="ctr"/>
+          <a:lstStyle/>
+          <a:p>
+            <a:pPr algn="ctr"/>
+          </a:p>
+        </p:txBody>
+      </p:sp>
+      <p:sp>
+        <p:nvSpPr>
+          <p:cNvPr id="9" name="dot 1"/>
+          <p:cNvSpPr/>
+          <p:nvPr/>
+        </p:nvSpPr>
+        <p:spPr>
+          <a:xfrm>
+            <a:off x="7132320" y="868680"/>
+            <a:ext cx="1874519" cy="1874519"/>
+          </a:xfrm>
+          <a:prstGeom prst="ellipse">
+            <a:avLst/>
+          </a:prstGeom>
+          <a:solidFill>
+            <a:srgbClr val="005358"/>
+          </a:solidFill>
+          <a:ln>
+            <a:noFill/>
+          </a:ln>
+          <a:effectLst/>
+        </p:spPr>
+        <p:style>
+          <a:lnRef idx="1">
+            <a:schemeClr val="accent1"/>
+          </a:lnRef>
+          <a:fillRef idx="3">
+            <a:schemeClr val="accent1"/>
+          </a:fillRef>
+          <a:effectRef idx="2">
+            <a:schemeClr val="accent1"/>
+          </a:effectRef>
+          <a:fontRef idx="minor">
+            <a:schemeClr val="lt1"/>
+          </a:fontRef>
+        </p:style>
+        <p:txBody>
+          <a:bodyPr rtlCol="0" anchor="ctr"/>
+          <a:lstStyle/>
+          <a:p>
+            <a:pPr algn="ctr"/>
+          </a:p>
+        </p:txBody>
+      </p:sp>
+      <p:sp>
+        <p:nvSpPr>
+          <p:cNvPr id="8" name="dot 0"/>
+          <p:cNvSpPr/>
+          <p:nvPr/>
+        </p:nvSpPr>
+        <p:spPr>
+          <a:xfrm>
+            <a:off x="5897880" y="91440"/>
+            <a:ext cx="2240280" cy="2240280"/>
+          </a:xfrm>
+          <a:prstGeom prst="ellipse">
+            <a:avLst/>
+          </a:prstGeom>
+          <a:solidFill>
+            <a:srgbClr val="F33844"/>
+          </a:solidFill>
+          <a:ln>
+            <a:noFill/>
+          </a:ln>
+          <a:effectLst/>
+        </p:spPr>
+        <p:style>
+          <a:lnRef idx="1">
+            <a:schemeClr val="accent1"/>
+          </a:lnRef>
+          <a:fillRef idx="3">
+            <a:schemeClr val="accent1"/>
+          </a:fillRef>
+          <a:effectRef idx="2">
+            <a:schemeClr val="accent1"/>
+          </a:effectRef>
+          <a:fontRef idx="minor">
+            <a:schemeClr val="lt1"/>
+          </a:fontRef>
+        </p:style>
+        <p:txBody>
+          <a:bodyPr rtlCol="0" anchor="ctr"/>
+          <a:lstStyle/>
+          <a:p>
+            <a:pPr algn="ctr"/>
+          </a:p>
+        </p:txBody>
+      </p:sp>
+      <p:sp>
+        <p:nvSpPr>
+          <p:cNvPr id="3" name="Shape 1"/>
+          <p:cNvSpPr/>
+          <p:nvPr/>
+        </p:nvSpPr>
+        <p:spPr>
+          <a:xfrm>
+            <a:off x="502920" y="1874520"/>
+            <a:ext cx="868680" cy="868680"/>
+          </a:xfrm>
+          <a:prstGeom prst="rect">
+            <a:avLst/>
+          </a:prstGeom>
+          <a:solidFill>
+            <a:srgbClr val="3FD0C9"/>
+          </a:solidFill>
+          <a:ln/>
+        </p:spPr>
+        <p:txBody>
+          <a:bodyPr/>
+          <a:lstStyle/>
+          <a:p>
+            <a:endParaRPr lang="en-AU"/>
+          </a:p>
+        </p:txBody>
+      </p:sp>
+      <p:sp>
+        <p:nvSpPr>
+          <p:cNvPr id="4" name="Text 2"/>
+          <p:cNvSpPr txBox="1"/>
+          <p:nvPr/>
+        </p:nvSpPr>
+        <p:spPr>
+          <a:xfrm>
+            <a:off x="502920" y="1874520"/>
+            <a:ext cx="868680" cy="868680"/>
+          </a:xfrm>
+          <a:prstGeom prst="rect">
+            <a:avLst/>
+          </a:prstGeom>
+          <a:noFill/>
+          <a:ln/>
+        </p:spPr>
+        <p:txBody>
+          <a:bodyPr wrap="square" lIns="0" tIns="0" rIns="0" bIns="0" rtlCol="0" anchor="ctr"/>
+          <a:lstStyle/>
+          <a:p>
+            <a:pPr marL="0" indent="0" algn="ctr">
+              <a:buNone/>
+            </a:pPr>
+            <a:r>
+              <a:rPr lang="en-US" sz="2200" b="1">
+                <a:solidFill>
+                  <a:srgbClr val="242C39"/>
+                </a:solidFill>
+              </a:rPr>
+              <a:t>02</a:t>
+            </a:r>
+            <a:endParaRPr lang="en-US" sz="2600"/>
+          </a:p>
+        </p:txBody>
+      </p:sp>
+      <p:sp>
+        <p:nvSpPr>
+          <p:cNvPr id="5" name="Text 3"/>
+          <p:cNvSpPr txBox="1"/>
+          <p:nvPr/>
+        </p:nvSpPr>
+        <p:spPr>
+          <a:xfrm>
+            <a:off x="502920" y="411480"/>
+            <a:ext cx="3657600" cy="274320"/>
+          </a:xfrm>
+          <a:prstGeom prst="rect">
+            <a:avLst/>
+          </a:prstGeom>
+          <a:noFill/>
+          <a:ln/>
+        </p:spPr>
+        <p:txBody>
+          <a:bodyPr wrap="square" lIns="0" tIns="0" rIns="0" bIns="0" rtlCol="0" anchor="ctr"/>
+          <a:lstStyle/>
+          <a:p>
+            <a:pPr marL="0" indent="0">
+              <a:buNone/>
+            </a:pPr>
+            <a:r>
+              <a:rPr lang="en-US" sz="950" b="1" kern="0" spc="220">
+                <a:solidFill>
+                  <a:srgbClr val="3FD0C9"/>
+                </a:solidFill>
+              </a:rPr>
+              <a:t>SECTION</a:t>
+            </a:r>
+            <a:endParaRPr lang="en-US" sz="950"/>
+          </a:p>
+        </p:txBody>
+      </p:sp>
+      <p:sp>
+        <p:nvSpPr>
+          <p:cNvPr id="6" name="Text 4"/>
+          <p:cNvSpPr txBox="1"/>
+          <p:nvPr/>
+        </p:nvSpPr>
+        <p:spPr>
+          <a:xfrm>
+            <a:off x="1600200" y="1874519"/>
+            <a:ext cx="5943600" cy="502920"/>
+          </a:xfrm>
+          <a:prstGeom prst="rect">
+            <a:avLst/>
+          </a:prstGeom>
+          <a:noFill/>
+          <a:ln/>
+        </p:spPr>
+        <p:txBody>
+          <a:bodyPr wrap="square" lIns="0" tIns="0" rIns="0" bIns="0" rtlCol="0" anchor="ctr"/>
+          <a:lstStyle/>
+          <a:p>
+            <a:pPr marL="0" indent="0">
+              <a:buNone/>
+            </a:pPr>
+            <a:r>
+              <a:rPr lang="en-US" sz="2300" b="1">
+                <a:solidFill>
+                  <a:srgbClr val="FFFFFF"/>
+                </a:solidFill>
+              </a:rPr>
+              <a:t>Departmental performance</a:t>
+            </a:r>
+            <a:endParaRPr lang="en-US" sz="2800"/>
+          </a:p>
+        </p:txBody>
+      </p:sp>
+      <p:sp>
+        <p:nvSpPr>
+          <p:cNvPr id="7" name="Text 5"/>
+          <p:cNvSpPr txBox="1"/>
+          <p:nvPr/>
+        </p:nvSpPr>
+        <p:spPr>
+          <a:xfrm>
+            <a:off x="1600200" y="2395728"/>
+            <a:ext cx="5943600" cy="347472"/>
+          </a:xfrm>
+          <a:prstGeom prst="rect">
+            <a:avLst/>
+          </a:prstGeom>
+          <a:noFill/>
+          <a:ln/>
+        </p:spPr>
+        <p:txBody>
+          <a:bodyPr wrap="square" lIns="0" tIns="0" rIns="0" bIns="0" rtlCol="0" anchor="ctr"/>
+          <a:lstStyle/>
+          <a:p>
+            <a:pPr marL="0" indent="0">
+              <a:buNone/>
+            </a:pPr>
+            <a:r>
+              <a:rPr lang="en-US" sz="1200">
+                <a:solidFill>
+                  <a:srgbClr val="C9CED6"/>
+                </a:solidFill>
+              </a:rPr>
+              <a:t>Every department's result for September 2026 and how it was made</a:t>
+            </a:r>
+            <a:endParaRPr lang="en-US" sz="1200"/>
+          </a:p>
+        </p:txBody>
+      </p:sp>
+    </p:spTree>
+  </p:cSld>
+  <p:clrMapOvr>
+    <a:masterClrMapping/>
+  </p:clrMapOvr>
+</p:sld>
+</file>
+
+<file path=ppt/slides/slide17.xml><?xml version="1.0" encoding="utf-8"?>
 <p:sld xmlns:a="http://schemas.openxmlformats.org/drawingml/2006/main" xmlns:r="http://schemas.openxmlformats.org/officeDocument/2006/relationships" xmlns:p="http://schemas.openxmlformats.org/presentationml/2006/main">
   <p:cSld name="Slide 7">
     <p:spTree>
@@ -8742,7 +9204,7 @@
                   <a:srgbClr val="122B82"/>
                 </a:solidFill>
               </a:rPr>
-              <a:t>FINANCIAL PERFORMANCE</a:t>
+              <a:t>DEPARTMENTAL PERFORMANCE</a:t>
             </a:r>
             <a:endParaRPr lang="en-US" sz="950"/>
           </a:p>
@@ -9080,7 +9542,7 @@
 </p:sld>
 </file>
 
-<file path=ppt/slides/slide17.xml><?xml version="1.0" encoding="utf-8"?>
+<file path=ppt/slides/slide18.xml><?xml version="1.0" encoding="utf-8"?>
 <p:sld xmlns:a="http://schemas.openxmlformats.org/drawingml/2006/main" xmlns:r="http://schemas.openxmlformats.org/officeDocument/2006/relationships" xmlns:p="http://schemas.openxmlformats.org/presentationml/2006/main">
   <p:cSld name="Slide 8">
     <p:spTree>
@@ -9127,7 +9589,7 @@
                   <a:srgbClr val="122B82"/>
                 </a:solidFill>
               </a:rPr>
-              <a:t>FINANCIAL PERFORMANCE</a:t>
+              <a:t>DEPARTMENTAL PERFORMANCE</a:t>
             </a:r>
             <a:endParaRPr lang="en-US" sz="950"/>
           </a:p>
@@ -9465,7 +9927,7 @@
 </p:sld>
 </file>
 
-<file path=ppt/slides/slide18.xml><?xml version="1.0" encoding="utf-8"?>
+<file path=ppt/slides/slide19.xml><?xml version="1.0" encoding="utf-8"?>
 <p:sld xmlns:a="http://schemas.openxmlformats.org/drawingml/2006/main" xmlns:r="http://schemas.openxmlformats.org/officeDocument/2006/relationships" xmlns:p="http://schemas.openxmlformats.org/presentationml/2006/main">
   <p:cSld name="Slide 9">
     <p:spTree>
@@ -9536,7 +9998,7 @@
                   <a:srgbClr val="122B82"/>
                 </a:solidFill>
               </a:rPr>
-              <a:t>FINANCIAL PERFORMANCE</a:t>
+              <a:t>DEPARTMENTAL PERFORMANCE</a:t>
             </a:r>
             <a:endParaRPr lang="en-US" sz="950"/>
           </a:p>
@@ -9860,412 +10322,6 @@
               <a:t>Chargeable utilisation reached 91.2%, above the 88% target and the strongest result across the groups.</a:t>
             </a:r>
             <a:endParaRPr lang="en-US" sz="850"/>
-          </a:p>
-        </p:txBody>
-      </p:sp>
-    </p:spTree>
-  </p:cSld>
-  <p:clrMapOvr>
-    <a:masterClrMapping/>
-  </p:clrMapOvr>
-</p:sld>
-</file>
-
-<file path=ppt/slides/slide19.xml><?xml version="1.0" encoding="utf-8"?>
-<p:sld xmlns:a="http://schemas.openxmlformats.org/drawingml/2006/main" xmlns:r="http://schemas.openxmlformats.org/officeDocument/2006/relationships" xmlns:p="http://schemas.openxmlformats.org/presentationml/2006/main">
-  <p:cSld name="Slide 10">
-    <p:spTree>
-      <p:nvGrpSpPr>
-        <p:cNvPr id="1" name=""/>
-        <p:cNvGrpSpPr/>
-        <p:nvPr/>
-      </p:nvGrpSpPr>
-      <p:grpSpPr>
-        <a:xfrm>
-          <a:off x="0" y="0"/>
-          <a:ext cx="0" cy="0"/>
-          <a:chOff x="0" y="0"/>
-          <a:chExt cx="0" cy="0"/>
-        </a:xfrm>
-      </p:grpSpPr>
-      <p:pic>
-        <p:nvPicPr>
-          <p:cNvPr id="27" name="snip dept_Events" descr="dept_Events.png"/>
-          <p:cNvPicPr>
-            <a:picLocks noChangeAspect="1"/>
-          </p:cNvPicPr>
-          <p:nvPr/>
-        </p:nvPicPr>
-        <p:blipFill>
-          <a:blip r:embed="rId3"/>
-          <a:stretch>
-            <a:fillRect/>
-          </a:stretch>
-        </p:blipFill>
-        <p:spPr>
-          <a:xfrm>
-            <a:off x="974377" y="1005840"/>
-            <a:ext cx="7195245" cy="2130551"/>
-          </a:xfrm>
-          <a:prstGeom prst="rect">
-            <a:avLst/>
-          </a:prstGeom>
-        </p:spPr>
-      </p:pic>
-      <p:sp>
-        <p:nvSpPr>
-          <p:cNvPr id="2" name="Text 0"/>
-          <p:cNvSpPr txBox="1"/>
-          <p:nvPr/>
-        </p:nvSpPr>
-        <p:spPr>
-          <a:xfrm>
-            <a:off x="502920" y="365760"/>
-            <a:ext cx="6400800" cy="274320"/>
-          </a:xfrm>
-          <a:prstGeom prst="rect">
-            <a:avLst/>
-          </a:prstGeom>
-          <a:noFill/>
-          <a:ln/>
-        </p:spPr>
-        <p:txBody>
-          <a:bodyPr wrap="square" lIns="0" tIns="0" rIns="0" bIns="0" rtlCol="0" anchor="ctr"/>
-          <a:lstStyle/>
-          <a:p>
-            <a:pPr marL="0" indent="0">
-              <a:buNone/>
-            </a:pPr>
-            <a:r>
-              <a:rPr lang="en-US" sz="950" b="1" kern="0" spc="220">
-                <a:solidFill>
-                  <a:srgbClr val="122B82"/>
-                </a:solidFill>
-              </a:rPr>
-              <a:t>FINANCIAL PERFORMANCE</a:t>
-            </a:r>
-            <a:endParaRPr lang="en-US" sz="950"/>
-          </a:p>
-        </p:txBody>
-      </p:sp>
-      <p:sp>
-        <p:nvSpPr>
-          <p:cNvPr id="3" name="Text 1"/>
-          <p:cNvSpPr txBox="1"/>
-          <p:nvPr/>
-        </p:nvSpPr>
-        <p:spPr>
-          <a:xfrm>
-            <a:off x="502920" y="640080"/>
-            <a:ext cx="7315200" cy="365760"/>
-          </a:xfrm>
-          <a:prstGeom prst="rect">
-            <a:avLst/>
-          </a:prstGeom>
-          <a:noFill/>
-          <a:ln/>
-        </p:spPr>
-        <p:txBody>
-          <a:bodyPr wrap="square" lIns="0" tIns="0" rIns="0" bIns="0" rtlCol="0" anchor="ctr"/>
-          <a:lstStyle/>
-          <a:p>
-            <a:pPr marL="0" indent="0" algn="ctr">
-              <a:buNone/>
-            </a:pPr>
-            <a:r>
-              <a:rPr lang="en-US" sz="2200" b="1">
-                <a:solidFill>
-                  <a:srgbClr val="242C39"/>
-                </a:solidFill>
-              </a:rPr>
-              <a:t>Events, September 2026</a:t>
-            </a:r>
-            <a:endParaRPr lang="en-US" sz="2700"/>
-          </a:p>
-        </p:txBody>
-      </p:sp>
-      <p:sp>
-        <p:nvSpPr>
-          <p:cNvPr id="6" name="commentary panel"/>
-          <p:cNvSpPr/>
-          <p:nvPr/>
-        </p:nvSpPr>
-        <p:spPr>
-          <a:xfrm>
-            <a:off x="502920" y="3227831"/>
-            <a:ext cx="8138160" cy="1399032"/>
-          </a:xfrm>
-          <a:prstGeom prst="rect">
-            <a:avLst/>
-          </a:prstGeom>
-          <a:solidFill>
-            <a:srgbClr val="E8F9F8"/>
-          </a:solidFill>
-          <a:ln/>
-        </p:spPr>
-        <p:txBody>
-          <a:bodyPr/>
-          <a:lstStyle/>
-          <a:p>
-            <a:endParaRPr lang="en-AU"/>
-          </a:p>
-        </p:txBody>
-      </p:sp>
-      <p:sp>
-        <p:nvSpPr>
-          <p:cNvPr id="7" name="Text 4"/>
-          <p:cNvSpPr txBox="1"/>
-          <p:nvPr/>
-        </p:nvSpPr>
-        <p:spPr>
-          <a:xfrm>
-            <a:off x="685800" y="3300983"/>
-            <a:ext cx="2743200" cy="228600"/>
-          </a:xfrm>
-          <a:prstGeom prst="rect">
-            <a:avLst/>
-          </a:prstGeom>
-          <a:noFill/>
-          <a:ln/>
-        </p:spPr>
-        <p:txBody>
-          <a:bodyPr wrap="square" lIns="0" tIns="0" rIns="0" bIns="0" rtlCol="0" anchor="ctr"/>
-          <a:lstStyle/>
-          <a:p>
-            <a:pPr marL="0" indent="0">
-              <a:buNone/>
-            </a:pPr>
-            <a:r>
-              <a:rPr lang="en-US" sz="900" b="1" kern="0" spc="180">
-                <a:solidFill>
-                  <a:srgbClr val="005358"/>
-                </a:solidFill>
-              </a:rPr>
-              <a:t>COMMENTARY</a:t>
-            </a:r>
-            <a:endParaRPr lang="en-US" sz="900"/>
-          </a:p>
-        </p:txBody>
-      </p:sp>
-      <p:sp>
-        <p:nvSpPr>
-          <p:cNvPr id="8" name="Text 5"/>
-          <p:cNvSpPr txBox="1"/>
-          <p:nvPr/>
-        </p:nvSpPr>
-        <p:spPr>
-          <a:xfrm>
-            <a:off x="685800" y="3474719"/>
-            <a:ext cx="3703320" cy="1124712"/>
-          </a:xfrm>
-          <a:prstGeom prst="rect">
-            <a:avLst/>
-          </a:prstGeom>
-          <a:noFill/>
-          <a:ln/>
-        </p:spPr>
-        <p:txBody>
-          <a:bodyPr wrap="square" lIns="0" tIns="0" rIns="0" bIns="0" rtlCol="0" anchor="t">
-            <a:normAutofit fontScale="92500"/>
-          </a:bodyPr>
-          <a:lstStyle/>
-          <a:p>
-            <a:pPr marL="342900" indent="-342900">
-              <a:lnSpc>
-                <a:spcPts val="1150"/>
-              </a:lnSpc>
-              <a:spcAft>
-                <a:spcPts val="400"/>
-              </a:spcAft>
-              <a:buSzPct val="100000"/>
-              <a:buChar char="•"/>
-            </a:pPr>
-            <a:r>
-              <a:rPr lang="en-US" sz="1000">
-                <a:solidFill>
-                  <a:srgbClr val="3A4453"/>
-                </a:solidFill>
-              </a:rPr>
-              <a:t>Events generated $73k revenue against a $66k budget for September.</a:t>
-            </a:r>
-            <a:endParaRPr lang="en-US" sz="900"/>
-          </a:p>
-          <a:p>
-            <a:pPr marL="342900" indent="-342900">
-              <a:lnSpc>
-                <a:spcPts val="1150"/>
-              </a:lnSpc>
-              <a:spcAft>
-                <a:spcPts val="400"/>
-              </a:spcAft>
-              <a:buSzPct val="100000"/>
-              <a:buChar char="•"/>
-            </a:pPr>
-            <a:r>
-              <a:rPr lang="en-US" sz="1000">
-                <a:solidFill>
-                  <a:srgbClr val="3A4453"/>
-                </a:solidFill>
-              </a:rPr>
-              <a:t>Gross margin was 77.6%, a strong result compared with other departments.</a:t>
-            </a:r>
-            <a:endParaRPr lang="en-US" sz="900"/>
-          </a:p>
-          <a:p>
-            <a:pPr marL="342900" indent="-342900">
-              <a:lnSpc>
-                <a:spcPts val="1150"/>
-              </a:lnSpc>
-              <a:spcAft>
-                <a:spcPts val="400"/>
-              </a:spcAft>
-              <a:buSzPct val="100000"/>
-              <a:buChar char="•"/>
-            </a:pPr>
-            <a:r>
-              <a:rPr lang="en-US" sz="1000">
-                <a:solidFill>
-                  <a:srgbClr val="3A4453"/>
-                </a:solidFill>
-              </a:rPr>
-              <a:t>Despite this, Events recorded a $54k loss after $111k of allocated overheads.</a:t>
-            </a:r>
-            <a:endParaRPr lang="en-US" sz="900"/>
-          </a:p>
-        </p:txBody>
-      </p:sp>
-      <p:sp>
-        <p:nvSpPr>
-          <p:cNvPr id="25" name="Slide Number Placeholder 0"/>
-          <p:cNvSpPr>
-            <a:spLocks noGrp="1"/>
-          </p:cNvSpPr>
-          <p:nvPr>
-            <p:ph type="sldNum" sz="quarter" idx="4294967295"/>
-          </p:nvPr>
-        </p:nvSpPr>
-        <p:spPr>
-          <a:xfrm>
-            <a:off x="8092440" y="4736592"/>
-            <a:ext cx="548640" cy="228600"/>
-          </a:xfrm>
-          <a:prstGeom prst="rect">
-            <a:avLst/>
-          </a:prstGeom>
-          <a:extLst>
-            <a:ext uri="{C572A759-6A51-4108-AA02-DFA0A04FC94B}">
-              <ma14:wrappingTextBoxFlag xmlns:ma14="http://schemas.microsoft.com/office/mac/drawingml/2011/main" xmlns="" val="0"/>
-            </a:ext>
-          </a:extLst>
-        </p:spPr>
-        <p:txBody>
-          <a:bodyPr/>
-          <a:lstStyle>
-            <a:lvl1pPr>
-              <a:defRPr sz="800">
-                <a:solidFill>
-                  <a:srgbClr val="6B7585"/>
-                </a:solidFill>
-              </a:defRPr>
-            </a:lvl1pPr>
-          </a:lstStyle>
-          <a:p>
-            <a:pPr algn="r"/>
-            <a:fld id="{F7021451-1387-4CA6-816F-3879F97B5CBC}" type="slidenum">
-              <a:rPr lang="en-US" b="0"/>
-              <a:t>18</a:t>
-            </a:fld>
-            <a:endParaRPr lang="en-US"/>
-          </a:p>
-        </p:txBody>
-      </p:sp>
-      <p:pic>
-        <p:nvPicPr>
-          <p:cNvPr id="26" name="cts logo" descr="cts-logo.png"/>
-          <p:cNvPicPr>
-            <a:picLocks noChangeAspect="1"/>
-          </p:cNvPicPr>
-          <p:nvPr/>
-        </p:nvPicPr>
-        <p:blipFill>
-          <a:blip r:embed="rId4"/>
-          <a:stretch>
-            <a:fillRect/>
-          </a:stretch>
-        </p:blipFill>
-        <p:spPr>
-          <a:xfrm>
-            <a:off x="7680959" y="182880"/>
-            <a:ext cx="960120" cy="539696"/>
-          </a:xfrm>
-          <a:prstGeom prst="rect">
-            <a:avLst/>
-          </a:prstGeom>
-        </p:spPr>
-      </p:pic>
-      <p:sp>
-        <p:nvSpPr>
-          <p:cNvPr id="4" name="Text 5b"/>
-          <p:cNvSpPr txBox="1"/>
-          <p:nvPr/>
-        </p:nvSpPr>
-        <p:spPr>
-          <a:xfrm>
-            <a:off x="4663440" y="3474719"/>
-            <a:ext cx="3703320" cy="1124712"/>
-          </a:xfrm>
-          <a:prstGeom prst="rect">
-            <a:avLst/>
-          </a:prstGeom>
-          <a:noFill/>
-          <a:ln/>
-        </p:spPr>
-        <p:txBody>
-          <a:bodyPr wrap="square" lIns="0" tIns="0" rIns="0" bIns="0" rtlCol="0" anchor="t">
-            <a:normAutofit fontScale="92500"/>
-          </a:bodyPr>
-          <a:lstStyle/>
-          <a:p>
-            <a:pPr marL="342900" indent="-342900">
-              <a:lnSpc>
-                <a:spcPts val="1150"/>
-              </a:lnSpc>
-              <a:spcAft>
-                <a:spcPts val="400"/>
-              </a:spcAft>
-              <a:buSzPct val="100000"/>
-              <a:buChar char="•"/>
-            </a:pPr>
-            <a:r>
-              <a:rPr lang="en-US" sz="1000">
-                <a:solidFill>
-                  <a:srgbClr val="3A4453"/>
-                </a:solidFill>
-              </a:rPr>
-              <a:t>Approximately $72k relates to shared overhead allocations. The allocation basis should be reviewed to confirm it appropriately reflects departmental activity.</a:t>
-            </a:r>
-            <a:endParaRPr lang="en-US" sz="900"/>
-          </a:p>
-          <a:p>
-            <a:pPr marL="342900" indent="-342900">
-              <a:lnSpc>
-                <a:spcPts val="1150"/>
-              </a:lnSpc>
-              <a:spcAft>
-                <a:spcPts val="400"/>
-              </a:spcAft>
-              <a:buSzPct val="100000"/>
-              <a:buChar char="•"/>
-            </a:pPr>
-            <a:r>
-              <a:rPr lang="en-US" sz="1000">
-                <a:solidFill>
-                  <a:srgbClr val="3A4453"/>
-                </a:solidFill>
-              </a:rPr>
-              <a:t>The team recorded 333 hours of leave and 241 billable hours, highlighting reduced available delivery capacity.</a:t>
-            </a:r>
-            <a:endParaRPr lang="en-US" sz="900"/>
           </a:p>
         </p:txBody>
       </p:sp>
@@ -10495,7 +10551,7 @@
                   <a:srgbClr val="6B7585"/>
                 </a:solidFill>
               </a:rPr>
-              <a:t>P&amp;L summary, the three months to date, and every department against budget</a:t>
+              <a:t>Profit and loss summary, revenue against budget, and the three year comparisons</a:t>
             </a:r>
             <a:endParaRPr lang="en-US" sz="1000"/>
           </a:p>
@@ -10509,7 +10565,7 @@
         </p:nvSpPr>
         <p:spPr>
           <a:xfrm>
-            <a:off x="502920" y="2057400"/>
+            <a:off x="502920" y="1965960"/>
             <a:ext cx="384048" cy="384048"/>
           </a:xfrm>
           <a:prstGeom prst="rect">
@@ -10536,7 +10592,7 @@
         </p:nvSpPr>
         <p:spPr>
           <a:xfrm>
-            <a:off x="502920" y="2057400"/>
+            <a:off x="502920" y="1965960"/>
             <a:ext cx="384048" cy="384048"/>
           </a:xfrm>
           <a:prstGeom prst="rect">
@@ -10572,7 +10628,7 @@
         </p:nvSpPr>
         <p:spPr>
           <a:xfrm>
-            <a:off x="1051560" y="2039112"/>
+            <a:off x="1051560" y="1947672"/>
             <a:ext cx="7589520" cy="237744"/>
           </a:xfrm>
           <a:prstGeom prst="rect">
@@ -10594,7 +10650,7 @@
                   <a:srgbClr val="242C39"/>
                 </a:solidFill>
               </a:rPr>
-              <a:t>Operating expenditure</a:t>
+              <a:t>Departmental performance</a:t>
             </a:r>
             <a:endParaRPr lang="en-US" sz="1300"/>
           </a:p>
@@ -10608,7 +10664,7 @@
         </p:nvSpPr>
         <p:spPr>
           <a:xfrm>
-            <a:off x="1051560" y="2258568"/>
+            <a:off x="1051560" y="2167128"/>
             <a:ext cx="7589520" cy="219456"/>
           </a:xfrm>
           <a:prstGeom prst="rect">
@@ -10630,7 +10686,7 @@
                   <a:srgbClr val="6B7585"/>
                 </a:solidFill>
               </a:rPr>
-              <a:t>Where the money goes: cost distribution, operating expense, labour and employment</a:t>
+              <a:t>Every department's result for September 2026 and how it was made</a:t>
             </a:r>
             <a:endParaRPr lang="en-US" sz="1000"/>
           </a:p>
@@ -10644,7 +10700,7 @@
         </p:nvSpPr>
         <p:spPr>
           <a:xfrm>
-            <a:off x="502920" y="2697480"/>
+            <a:off x="502920" y="2514600"/>
             <a:ext cx="384048" cy="384048"/>
           </a:xfrm>
           <a:prstGeom prst="rect">
@@ -10671,7 +10727,7 @@
         </p:nvSpPr>
         <p:spPr>
           <a:xfrm>
-            <a:off x="502920" y="2697480"/>
+            <a:off x="502920" y="2514600"/>
             <a:ext cx="384048" cy="384048"/>
           </a:xfrm>
           <a:prstGeom prst="rect">
@@ -10707,7 +10763,7 @@
         </p:nvSpPr>
         <p:spPr>
           <a:xfrm>
-            <a:off x="1051560" y="2679192"/>
+            <a:off x="1051560" y="2496312"/>
             <a:ext cx="7589520" cy="237744"/>
           </a:xfrm>
           <a:prstGeom prst="rect">
@@ -10729,7 +10785,7 @@
                   <a:srgbClr val="242C39"/>
                 </a:solidFill>
               </a:rPr>
-              <a:t>Customers and receivables</a:t>
+              <a:t>Operating expenditure</a:t>
             </a:r>
             <a:endParaRPr lang="en-US" sz="1300"/>
           </a:p>
@@ -10743,7 +10799,7 @@
         </p:nvSpPr>
         <p:spPr>
           <a:xfrm>
-            <a:off x="1051560" y="2898648"/>
+            <a:off x="1051560" y="2715768"/>
             <a:ext cx="7589520" cy="219456"/>
           </a:xfrm>
           <a:prstGeom prst="rect">
@@ -10765,7 +10821,7 @@
                   <a:srgbClr val="6B7585"/>
                 </a:solidFill>
               </a:rPr>
-              <a:t>Top ten customers, receivables and days sales outstanding</a:t>
+              <a:t>Where the money goes: cost distribution, operating expense, labour and employment</a:t>
             </a:r>
             <a:endParaRPr lang="en-US" sz="1000"/>
           </a:p>
@@ -10779,7 +10835,7 @@
         </p:nvSpPr>
         <p:spPr>
           <a:xfrm>
-            <a:off x="502920" y="3337560"/>
+            <a:off x="502920" y="3063239"/>
             <a:ext cx="384048" cy="384048"/>
           </a:xfrm>
           <a:prstGeom prst="rect">
@@ -10806,7 +10862,7 @@
         </p:nvSpPr>
         <p:spPr>
           <a:xfrm>
-            <a:off x="502920" y="3337560"/>
+            <a:off x="502920" y="3063239"/>
             <a:ext cx="384048" cy="384048"/>
           </a:xfrm>
           <a:prstGeom prst="rect">
@@ -10842,7 +10898,7 @@
         </p:nvSpPr>
         <p:spPr>
           <a:xfrm>
-            <a:off x="1051560" y="3319272"/>
+            <a:off x="1051560" y="3044951"/>
             <a:ext cx="7589520" cy="237744"/>
           </a:xfrm>
           <a:prstGeom prst="rect">
@@ -10864,7 +10920,7 @@
                   <a:srgbClr val="242C39"/>
                 </a:solidFill>
               </a:rPr>
-              <a:t>People and utilisation</a:t>
+              <a:t>Customers and receivables</a:t>
             </a:r>
             <a:endParaRPr lang="en-US" sz="1300"/>
           </a:p>
@@ -10878,7 +10934,7 @@
         </p:nvSpPr>
         <p:spPr>
           <a:xfrm>
-            <a:off x="1051560" y="3538728"/>
+            <a:off x="1051560" y="3264408"/>
             <a:ext cx="7589520" cy="219456"/>
           </a:xfrm>
           <a:prstGeom prst="rect">
@@ -10900,7 +10956,7 @@
                   <a:srgbClr val="6B7585"/>
                 </a:solidFill>
               </a:rPr>
-              <a:t>Chargeable hours by department and the profit they produce</a:t>
+              <a:t>Top ten customers, receivables and days sales outstanding</a:t>
             </a:r>
             <a:endParaRPr lang="en-US" sz="1000"/>
           </a:p>
@@ -10914,7 +10970,7 @@
         </p:nvSpPr>
         <p:spPr>
           <a:xfrm>
-            <a:off x="502920" y="3977640"/>
+            <a:off x="502920" y="3611880"/>
             <a:ext cx="384048" cy="384048"/>
           </a:xfrm>
           <a:prstGeom prst="rect">
@@ -10941,7 +10997,7 @@
         </p:nvSpPr>
         <p:spPr>
           <a:xfrm>
-            <a:off x="502920" y="3977640"/>
+            <a:off x="502920" y="3611880"/>
             <a:ext cx="384048" cy="384048"/>
           </a:xfrm>
           <a:prstGeom prst="rect">
@@ -10977,7 +11033,7 @@
         </p:nvSpPr>
         <p:spPr>
           <a:xfrm>
-            <a:off x="1051560" y="3959352"/>
+            <a:off x="1051560" y="3593592"/>
             <a:ext cx="7589520" cy="237744"/>
           </a:xfrm>
           <a:prstGeom prst="rect">
@@ -10999,7 +11055,7 @@
                   <a:srgbClr val="242C39"/>
                 </a:solidFill>
               </a:rPr>
-              <a:t>Budget and outlook</a:t>
+              <a:t>People and utilisation</a:t>
             </a:r>
             <a:endParaRPr lang="en-US" sz="1300"/>
           </a:p>
@@ -11013,7 +11069,7 @@
         </p:nvSpPr>
         <p:spPr>
           <a:xfrm>
-            <a:off x="1051560" y="4178808"/>
+            <a:off x="1051560" y="3813048"/>
             <a:ext cx="7589520" cy="219456"/>
           </a:xfrm>
           <a:prstGeom prst="rect">
@@ -11035,7 +11091,7 @@
                   <a:srgbClr val="6B7585"/>
                 </a:solidFill>
               </a:rPr>
-              <a:t>Revenue by month against budget, and what we do about it</a:t>
+              <a:t>Chargeable hours by department and the profit they produce</a:t>
             </a:r>
             <a:endParaRPr lang="en-US" sz="1000"/>
           </a:p>
@@ -11110,6 +11166,141 @@
           </a:prstGeom>
         </p:spPr>
       </p:pic>
+      <p:sp>
+        <p:nvSpPr>
+          <p:cNvPr id="20" name="Shape 22"/>
+          <p:cNvSpPr/>
+          <p:nvPr/>
+        </p:nvSpPr>
+        <p:spPr>
+          <a:xfrm>
+            <a:off x="502920" y="4160520"/>
+            <a:ext cx="384048" cy="384048"/>
+          </a:xfrm>
+          <a:prstGeom prst="rect">
+            <a:avLst/>
+          </a:prstGeom>
+          <a:solidFill>
+            <a:srgbClr val="242C39"/>
+          </a:solidFill>
+          <a:ln/>
+        </p:spPr>
+        <p:txBody>
+          <a:bodyPr/>
+          <a:lstStyle/>
+          <a:p>
+            <a:endParaRPr lang="en-AU"/>
+          </a:p>
+        </p:txBody>
+      </p:sp>
+      <p:sp>
+        <p:nvSpPr>
+          <p:cNvPr id="21" name="Text 23"/>
+          <p:cNvSpPr txBox="1"/>
+          <p:nvPr/>
+        </p:nvSpPr>
+        <p:spPr>
+          <a:xfrm>
+            <a:off x="502920" y="4160520"/>
+            <a:ext cx="384048" cy="384048"/>
+          </a:xfrm>
+          <a:prstGeom prst="rect">
+            <a:avLst/>
+          </a:prstGeom>
+          <a:noFill/>
+          <a:ln/>
+        </p:spPr>
+        <p:txBody>
+          <a:bodyPr wrap="square" lIns="0" tIns="0" rIns="0" bIns="0" rtlCol="0" anchor="ctr"/>
+          <a:lstStyle/>
+          <a:p>
+            <a:pPr marL="0" indent="0" algn="ctr">
+              <a:buNone/>
+            </a:pPr>
+            <a:r>
+              <a:rPr lang="en-US" sz="1100" b="1">
+                <a:solidFill>
+                  <a:srgbClr val="FFFFFF"/>
+                </a:solidFill>
+              </a:rPr>
+              <a:t>06</a:t>
+            </a:r>
+            <a:endParaRPr lang="en-US" sz="1100"/>
+          </a:p>
+        </p:txBody>
+      </p:sp>
+      <p:sp>
+        <p:nvSpPr>
+          <p:cNvPr id="22" name="Text 24"/>
+          <p:cNvSpPr txBox="1"/>
+          <p:nvPr/>
+        </p:nvSpPr>
+        <p:spPr>
+          <a:xfrm>
+            <a:off x="1051560" y="4142232"/>
+            <a:ext cx="7589520" cy="237744"/>
+          </a:xfrm>
+          <a:prstGeom prst="rect">
+            <a:avLst/>
+          </a:prstGeom>
+          <a:noFill/>
+          <a:ln/>
+        </p:spPr>
+        <p:txBody>
+          <a:bodyPr wrap="square" lIns="0" tIns="0" rIns="0" bIns="0" rtlCol="0" anchor="ctr"/>
+          <a:lstStyle/>
+          <a:p>
+            <a:pPr marL="0" indent="0">
+              <a:buNone/>
+            </a:pPr>
+            <a:r>
+              <a:rPr lang="en-US" sz="1300" b="1">
+                <a:solidFill>
+                  <a:srgbClr val="242C39"/>
+                </a:solidFill>
+              </a:rPr>
+              <a:t>Budget and outlook</a:t>
+            </a:r>
+            <a:endParaRPr lang="en-US" sz="1300"/>
+          </a:p>
+        </p:txBody>
+      </p:sp>
+      <p:sp>
+        <p:nvSpPr>
+          <p:cNvPr id="23" name="Text 25"/>
+          <p:cNvSpPr txBox="1"/>
+          <p:nvPr/>
+        </p:nvSpPr>
+        <p:spPr>
+          <a:xfrm>
+            <a:off x="1051560" y="4361688"/>
+            <a:ext cx="7589520" cy="219456"/>
+          </a:xfrm>
+          <a:prstGeom prst="rect">
+            <a:avLst/>
+          </a:prstGeom>
+          <a:noFill/>
+          <a:ln/>
+        </p:spPr>
+        <p:txBody>
+          <a:bodyPr wrap="square" lIns="0" tIns="0" rIns="0" bIns="0" rtlCol="0" anchor="ctr"/>
+          <a:lstStyle/>
+          <a:p>
+            <a:pPr marL="0" indent="0">
+              <a:buNone/>
+            </a:pPr>
+            <a:r>
+              <a:rPr lang="en-US" sz="1000">
+                <a:solidFill>
+                  <a:srgbClr val="6B7585"/>
+                </a:solidFill>
+              </a:rPr>
+              <a:t>Revenue by month against budget, and what we do about it</a:t>
+            </a:r>
+            <a:endParaRPr lang="en-US" sz="1000"/>
+          </a:p>
+        </p:txBody>
+      </p:sp>
     </p:spTree>
   </p:cSld>
   <p:clrMapOvr>
@@ -11119,6 +11310,412 @@
 </file>
 
 <file path=ppt/slides/slide20.xml><?xml version="1.0" encoding="utf-8"?>
+<p:sld xmlns:a="http://schemas.openxmlformats.org/drawingml/2006/main" xmlns:r="http://schemas.openxmlformats.org/officeDocument/2006/relationships" xmlns:p="http://schemas.openxmlformats.org/presentationml/2006/main">
+  <p:cSld name="Slide 10">
+    <p:spTree>
+      <p:nvGrpSpPr>
+        <p:cNvPr id="1" name=""/>
+        <p:cNvGrpSpPr/>
+        <p:nvPr/>
+      </p:nvGrpSpPr>
+      <p:grpSpPr>
+        <a:xfrm>
+          <a:off x="0" y="0"/>
+          <a:ext cx="0" cy="0"/>
+          <a:chOff x="0" y="0"/>
+          <a:chExt cx="0" cy="0"/>
+        </a:xfrm>
+      </p:grpSpPr>
+      <p:pic>
+        <p:nvPicPr>
+          <p:cNvPr id="27" name="snip dept_Events" descr="dept_Events.png"/>
+          <p:cNvPicPr>
+            <a:picLocks noChangeAspect="1"/>
+          </p:cNvPicPr>
+          <p:nvPr/>
+        </p:nvPicPr>
+        <p:blipFill>
+          <a:blip r:embed="rId3"/>
+          <a:stretch>
+            <a:fillRect/>
+          </a:stretch>
+        </p:blipFill>
+        <p:spPr>
+          <a:xfrm>
+            <a:off x="974377" y="1005840"/>
+            <a:ext cx="7195245" cy="2130551"/>
+          </a:xfrm>
+          <a:prstGeom prst="rect">
+            <a:avLst/>
+          </a:prstGeom>
+        </p:spPr>
+      </p:pic>
+      <p:sp>
+        <p:nvSpPr>
+          <p:cNvPr id="2" name="Text 0"/>
+          <p:cNvSpPr txBox="1"/>
+          <p:nvPr/>
+        </p:nvSpPr>
+        <p:spPr>
+          <a:xfrm>
+            <a:off x="502920" y="365760"/>
+            <a:ext cx="6400800" cy="274320"/>
+          </a:xfrm>
+          <a:prstGeom prst="rect">
+            <a:avLst/>
+          </a:prstGeom>
+          <a:noFill/>
+          <a:ln/>
+        </p:spPr>
+        <p:txBody>
+          <a:bodyPr wrap="square" lIns="0" tIns="0" rIns="0" bIns="0" rtlCol="0" anchor="ctr"/>
+          <a:lstStyle/>
+          <a:p>
+            <a:pPr marL="0" indent="0">
+              <a:buNone/>
+            </a:pPr>
+            <a:r>
+              <a:rPr lang="en-US" sz="950" b="1" kern="0" spc="220">
+                <a:solidFill>
+                  <a:srgbClr val="122B82"/>
+                </a:solidFill>
+              </a:rPr>
+              <a:t>DEPARTMENTAL PERFORMANCE</a:t>
+            </a:r>
+            <a:endParaRPr lang="en-US" sz="950"/>
+          </a:p>
+        </p:txBody>
+      </p:sp>
+      <p:sp>
+        <p:nvSpPr>
+          <p:cNvPr id="3" name="Text 1"/>
+          <p:cNvSpPr txBox="1"/>
+          <p:nvPr/>
+        </p:nvSpPr>
+        <p:spPr>
+          <a:xfrm>
+            <a:off x="502920" y="640080"/>
+            <a:ext cx="7315200" cy="365760"/>
+          </a:xfrm>
+          <a:prstGeom prst="rect">
+            <a:avLst/>
+          </a:prstGeom>
+          <a:noFill/>
+          <a:ln/>
+        </p:spPr>
+        <p:txBody>
+          <a:bodyPr wrap="square" lIns="0" tIns="0" rIns="0" bIns="0" rtlCol="0" anchor="ctr"/>
+          <a:lstStyle/>
+          <a:p>
+            <a:pPr marL="0" indent="0" algn="ctr">
+              <a:buNone/>
+            </a:pPr>
+            <a:r>
+              <a:rPr lang="en-US" sz="2200" b="1">
+                <a:solidFill>
+                  <a:srgbClr val="242C39"/>
+                </a:solidFill>
+              </a:rPr>
+              <a:t>Events, September 2026</a:t>
+            </a:r>
+            <a:endParaRPr lang="en-US" sz="2700"/>
+          </a:p>
+        </p:txBody>
+      </p:sp>
+      <p:sp>
+        <p:nvSpPr>
+          <p:cNvPr id="6" name="commentary panel"/>
+          <p:cNvSpPr/>
+          <p:nvPr/>
+        </p:nvSpPr>
+        <p:spPr>
+          <a:xfrm>
+            <a:off x="502920" y="3227831"/>
+            <a:ext cx="8138160" cy="1399032"/>
+          </a:xfrm>
+          <a:prstGeom prst="rect">
+            <a:avLst/>
+          </a:prstGeom>
+          <a:solidFill>
+            <a:srgbClr val="E8F9F8"/>
+          </a:solidFill>
+          <a:ln/>
+        </p:spPr>
+        <p:txBody>
+          <a:bodyPr/>
+          <a:lstStyle/>
+          <a:p>
+            <a:endParaRPr lang="en-AU"/>
+          </a:p>
+        </p:txBody>
+      </p:sp>
+      <p:sp>
+        <p:nvSpPr>
+          <p:cNvPr id="7" name="Text 4"/>
+          <p:cNvSpPr txBox="1"/>
+          <p:nvPr/>
+        </p:nvSpPr>
+        <p:spPr>
+          <a:xfrm>
+            <a:off x="685800" y="3300983"/>
+            <a:ext cx="2743200" cy="228600"/>
+          </a:xfrm>
+          <a:prstGeom prst="rect">
+            <a:avLst/>
+          </a:prstGeom>
+          <a:noFill/>
+          <a:ln/>
+        </p:spPr>
+        <p:txBody>
+          <a:bodyPr wrap="square" lIns="0" tIns="0" rIns="0" bIns="0" rtlCol="0" anchor="ctr"/>
+          <a:lstStyle/>
+          <a:p>
+            <a:pPr marL="0" indent="0">
+              <a:buNone/>
+            </a:pPr>
+            <a:r>
+              <a:rPr lang="en-US" sz="900" b="1" kern="0" spc="180">
+                <a:solidFill>
+                  <a:srgbClr val="005358"/>
+                </a:solidFill>
+              </a:rPr>
+              <a:t>COMMENTARY</a:t>
+            </a:r>
+            <a:endParaRPr lang="en-US" sz="900"/>
+          </a:p>
+        </p:txBody>
+      </p:sp>
+      <p:sp>
+        <p:nvSpPr>
+          <p:cNvPr id="8" name="Text 5"/>
+          <p:cNvSpPr txBox="1"/>
+          <p:nvPr/>
+        </p:nvSpPr>
+        <p:spPr>
+          <a:xfrm>
+            <a:off x="685800" y="3474719"/>
+            <a:ext cx="3703320" cy="1124712"/>
+          </a:xfrm>
+          <a:prstGeom prst="rect">
+            <a:avLst/>
+          </a:prstGeom>
+          <a:noFill/>
+          <a:ln/>
+        </p:spPr>
+        <p:txBody>
+          <a:bodyPr wrap="square" lIns="0" tIns="0" rIns="0" bIns="0" rtlCol="0" anchor="t">
+            <a:normAutofit fontScale="92500"/>
+          </a:bodyPr>
+          <a:lstStyle/>
+          <a:p>
+            <a:pPr marL="342900" indent="-342900">
+              <a:lnSpc>
+                <a:spcPts val="1150"/>
+              </a:lnSpc>
+              <a:spcAft>
+                <a:spcPts val="400"/>
+              </a:spcAft>
+              <a:buSzPct val="100000"/>
+              <a:buChar char="•"/>
+            </a:pPr>
+            <a:r>
+              <a:rPr lang="en-US" sz="1000">
+                <a:solidFill>
+                  <a:srgbClr val="3A4453"/>
+                </a:solidFill>
+              </a:rPr>
+              <a:t>Events generated $73k revenue against a $66k budget for September.</a:t>
+            </a:r>
+            <a:endParaRPr lang="en-US" sz="900"/>
+          </a:p>
+          <a:p>
+            <a:pPr marL="342900" indent="-342900">
+              <a:lnSpc>
+                <a:spcPts val="1150"/>
+              </a:lnSpc>
+              <a:spcAft>
+                <a:spcPts val="400"/>
+              </a:spcAft>
+              <a:buSzPct val="100000"/>
+              <a:buChar char="•"/>
+            </a:pPr>
+            <a:r>
+              <a:rPr lang="en-US" sz="1000">
+                <a:solidFill>
+                  <a:srgbClr val="3A4453"/>
+                </a:solidFill>
+              </a:rPr>
+              <a:t>Gross margin was 77.6%, a strong result compared with other departments.</a:t>
+            </a:r>
+            <a:endParaRPr lang="en-US" sz="900"/>
+          </a:p>
+          <a:p>
+            <a:pPr marL="342900" indent="-342900">
+              <a:lnSpc>
+                <a:spcPts val="1150"/>
+              </a:lnSpc>
+              <a:spcAft>
+                <a:spcPts val="400"/>
+              </a:spcAft>
+              <a:buSzPct val="100000"/>
+              <a:buChar char="•"/>
+            </a:pPr>
+            <a:r>
+              <a:rPr lang="en-US" sz="1000">
+                <a:solidFill>
+                  <a:srgbClr val="3A4453"/>
+                </a:solidFill>
+              </a:rPr>
+              <a:t>Despite this, Events recorded a $54k loss after $111k of allocated overheads.</a:t>
+            </a:r>
+            <a:endParaRPr lang="en-US" sz="900"/>
+          </a:p>
+        </p:txBody>
+      </p:sp>
+      <p:sp>
+        <p:nvSpPr>
+          <p:cNvPr id="25" name="Slide Number Placeholder 0"/>
+          <p:cNvSpPr>
+            <a:spLocks noGrp="1"/>
+          </p:cNvSpPr>
+          <p:nvPr>
+            <p:ph type="sldNum" sz="quarter" idx="4294967295"/>
+          </p:nvPr>
+        </p:nvSpPr>
+        <p:spPr>
+          <a:xfrm>
+            <a:off x="8092440" y="4736592"/>
+            <a:ext cx="548640" cy="228600"/>
+          </a:xfrm>
+          <a:prstGeom prst="rect">
+            <a:avLst/>
+          </a:prstGeom>
+          <a:extLst>
+            <a:ext uri="{C572A759-6A51-4108-AA02-DFA0A04FC94B}">
+              <ma14:wrappingTextBoxFlag xmlns:ma14="http://schemas.microsoft.com/office/mac/drawingml/2011/main" xmlns="" val="0"/>
+            </a:ext>
+          </a:extLst>
+        </p:spPr>
+        <p:txBody>
+          <a:bodyPr/>
+          <a:lstStyle>
+            <a:lvl1pPr>
+              <a:defRPr sz="800">
+                <a:solidFill>
+                  <a:srgbClr val="6B7585"/>
+                </a:solidFill>
+              </a:defRPr>
+            </a:lvl1pPr>
+          </a:lstStyle>
+          <a:p>
+            <a:pPr algn="r"/>
+            <a:fld id="{F7021451-1387-4CA6-816F-3879F97B5CBC}" type="slidenum">
+              <a:rPr lang="en-US" b="0"/>
+              <a:t>18</a:t>
+            </a:fld>
+            <a:endParaRPr lang="en-US"/>
+          </a:p>
+        </p:txBody>
+      </p:sp>
+      <p:pic>
+        <p:nvPicPr>
+          <p:cNvPr id="26" name="cts logo" descr="cts-logo.png"/>
+          <p:cNvPicPr>
+            <a:picLocks noChangeAspect="1"/>
+          </p:cNvPicPr>
+          <p:nvPr/>
+        </p:nvPicPr>
+        <p:blipFill>
+          <a:blip r:embed="rId4"/>
+          <a:stretch>
+            <a:fillRect/>
+          </a:stretch>
+        </p:blipFill>
+        <p:spPr>
+          <a:xfrm>
+            <a:off x="7680959" y="182880"/>
+            <a:ext cx="960120" cy="539696"/>
+          </a:xfrm>
+          <a:prstGeom prst="rect">
+            <a:avLst/>
+          </a:prstGeom>
+        </p:spPr>
+      </p:pic>
+      <p:sp>
+        <p:nvSpPr>
+          <p:cNvPr id="4" name="Text 5b"/>
+          <p:cNvSpPr txBox="1"/>
+          <p:nvPr/>
+        </p:nvSpPr>
+        <p:spPr>
+          <a:xfrm>
+            <a:off x="4663440" y="3474719"/>
+            <a:ext cx="3703320" cy="1124712"/>
+          </a:xfrm>
+          <a:prstGeom prst="rect">
+            <a:avLst/>
+          </a:prstGeom>
+          <a:noFill/>
+          <a:ln/>
+        </p:spPr>
+        <p:txBody>
+          <a:bodyPr wrap="square" lIns="0" tIns="0" rIns="0" bIns="0" rtlCol="0" anchor="t">
+            <a:normAutofit fontScale="92500"/>
+          </a:bodyPr>
+          <a:lstStyle/>
+          <a:p>
+            <a:pPr marL="342900" indent="-342900">
+              <a:lnSpc>
+                <a:spcPts val="1150"/>
+              </a:lnSpc>
+              <a:spcAft>
+                <a:spcPts val="400"/>
+              </a:spcAft>
+              <a:buSzPct val="100000"/>
+              <a:buChar char="•"/>
+            </a:pPr>
+            <a:r>
+              <a:rPr lang="en-US" sz="1000">
+                <a:solidFill>
+                  <a:srgbClr val="3A4453"/>
+                </a:solidFill>
+              </a:rPr>
+              <a:t>Approximately $72k relates to shared overhead allocations. The allocation basis should be reviewed to confirm it appropriately reflects departmental activity.</a:t>
+            </a:r>
+            <a:endParaRPr lang="en-US" sz="900"/>
+          </a:p>
+          <a:p>
+            <a:pPr marL="342900" indent="-342900">
+              <a:lnSpc>
+                <a:spcPts val="1150"/>
+              </a:lnSpc>
+              <a:spcAft>
+                <a:spcPts val="400"/>
+              </a:spcAft>
+              <a:buSzPct val="100000"/>
+              <a:buChar char="•"/>
+            </a:pPr>
+            <a:r>
+              <a:rPr lang="en-US" sz="1000">
+                <a:solidFill>
+                  <a:srgbClr val="3A4453"/>
+                </a:solidFill>
+              </a:rPr>
+              <a:t>The team recorded 333 hours of leave and 241 billable hours, highlighting reduced available delivery capacity.</a:t>
+            </a:r>
+            <a:endParaRPr lang="en-US" sz="900"/>
+          </a:p>
+        </p:txBody>
+      </p:sp>
+    </p:spTree>
+  </p:cSld>
+  <p:clrMapOvr>
+    <a:masterClrMapping/>
+  </p:clrMapOvr>
+</p:sld>
+</file>
+
+<file path=ppt/slides/slide21.xml><?xml version="1.0" encoding="utf-8"?>
 <p:sld xmlns:a="http://schemas.openxmlformats.org/drawingml/2006/main" xmlns:r="http://schemas.openxmlformats.org/officeDocument/2006/relationships" xmlns:p="http://schemas.openxmlformats.org/presentationml/2006/main">
   <p:cSld name="Slide 11">
     <p:spTree>
@@ -11189,7 +11786,7 @@
                   <a:srgbClr val="122B82"/>
                 </a:solidFill>
               </a:rPr>
-              <a:t>FINANCIAL PERFORMANCE</a:t>
+              <a:t>DEPARTMENTAL PERFORMANCE</a:t>
             </a:r>
             <a:endParaRPr lang="en-US" sz="950"/>
           </a:p>
@@ -11524,7 +12121,7 @@
 </p:sld>
 </file>
 
-<file path=ppt/slides/slide21.xml><?xml version="1.0" encoding="utf-8"?>
+<file path=ppt/slides/slide22.xml><?xml version="1.0" encoding="utf-8"?>
 <p:sld xmlns:a="http://schemas.openxmlformats.org/drawingml/2006/main" xmlns:r="http://schemas.openxmlformats.org/officeDocument/2006/relationships" xmlns:p="http://schemas.openxmlformats.org/presentationml/2006/main">
   <p:cSld name="Slide 12">
     <p:spTree>
@@ -11595,7 +12192,7 @@
                   <a:srgbClr val="122B82"/>
                 </a:solidFill>
               </a:rPr>
-              <a:t>FINANCIAL PERFORMANCE</a:t>
+              <a:t>DEPARTMENTAL PERFORMANCE</a:t>
             </a:r>
             <a:endParaRPr lang="en-US" sz="950"/>
           </a:p>
@@ -11930,7 +12527,7 @@
 </p:sld>
 </file>
 
-<file path=ppt/slides/slide22.xml><?xml version="1.0" encoding="utf-8"?>
+<file path=ppt/slides/slide23.xml><?xml version="1.0" encoding="utf-8"?>
 <p:sld xmlns:a="http://schemas.openxmlformats.org/drawingml/2006/main" xmlns:r="http://schemas.openxmlformats.org/officeDocument/2006/relationships" xmlns:p="http://schemas.openxmlformats.org/presentationml/2006/main">
   <p:cSld name="Slide 13">
     <p:spTree>
@@ -12001,7 +12598,7 @@
                   <a:srgbClr val="122B82"/>
                 </a:solidFill>
               </a:rPr>
-              <a:t>FINANCIAL PERFORMANCE</a:t>
+              <a:t>DEPARTMENTAL PERFORMANCE</a:t>
             </a:r>
             <a:endParaRPr lang="en-US" sz="950"/>
           </a:p>
@@ -12336,7 +12933,7 @@
 </p:sld>
 </file>
 
-<file path=ppt/slides/slide23.xml><?xml version="1.0" encoding="utf-8"?>
+<file path=ppt/slides/slide24.xml><?xml version="1.0" encoding="utf-8"?>
 <p:sld xmlns:a="http://schemas.openxmlformats.org/drawingml/2006/main" xmlns:r="http://schemas.openxmlformats.org/officeDocument/2006/relationships" xmlns:p="http://schemas.openxmlformats.org/presentationml/2006/main">
   <p:cSld name="Slide 14">
     <p:spTree>
@@ -12407,7 +13004,7 @@
                   <a:srgbClr val="122B82"/>
                 </a:solidFill>
               </a:rPr>
-              <a:t>FINANCIAL PERFORMANCE</a:t>
+              <a:t>DEPARTMENTAL PERFORMANCE</a:t>
             </a:r>
             <a:endParaRPr lang="en-US" sz="950"/>
           </a:p>
@@ -12742,7 +13339,7 @@
 </p:sld>
 </file>
 
-<file path=ppt/slides/slide24.xml><?xml version="1.0" encoding="utf-8"?>
+<file path=ppt/slides/slide25.xml><?xml version="1.0" encoding="utf-8"?>
 <p:sld xmlns:a="http://schemas.openxmlformats.org/drawingml/2006/main" xmlns:r="http://schemas.openxmlformats.org/officeDocument/2006/relationships" xmlns:p="http://schemas.openxmlformats.org/presentationml/2006/main">
   <p:cSld name="Slide 15">
     <p:spTree>
@@ -12903,7 +13500,7 @@
                   <a:srgbClr val="242C39"/>
                 </a:solidFill>
               </a:rPr>
-              <a:t>02</a:t>
+              <a:t>03</a:t>
             </a:r>
             <a:endParaRPr lang="en-US" sz="2600"/>
           </a:p>
@@ -13025,7 +13622,7 @@
 </p:sld>
 </file>
 
-<file path=ppt/slides/slide25.xml><?xml version="1.0" encoding="utf-8"?>
+<file path=ppt/slides/slide26.xml><?xml version="1.0" encoding="utf-8"?>
 <p:sld xmlns:a="http://schemas.openxmlformats.org/drawingml/2006/main" xmlns:r="http://schemas.openxmlformats.org/officeDocument/2006/relationships" xmlns:p="http://schemas.openxmlformats.org/presentationml/2006/main">
   <p:cSld name="Slide 16">
     <p:spTree>
@@ -13431,7 +14028,7 @@
 </p:sld>
 </file>
 
-<file path=ppt/slides/slide26.xml><?xml version="1.0" encoding="utf-8"?>
+<file path=ppt/slides/slide27.xml><?xml version="1.0" encoding="utf-8"?>
 <p:sld xmlns:a="http://schemas.openxmlformats.org/drawingml/2006/main" xmlns:r="http://schemas.openxmlformats.org/officeDocument/2006/relationships" xmlns:p="http://schemas.openxmlformats.org/presentationml/2006/main">
   <p:cSld name="Slide 17">
     <p:spTree>
@@ -13837,7 +14434,7 @@
 </p:sld>
 </file>
 
-<file path=ppt/slides/slide27.xml><?xml version="1.0" encoding="utf-8"?>
+<file path=ppt/slides/slide28.xml><?xml version="1.0" encoding="utf-8"?>
 <p:sld xmlns:a="http://schemas.openxmlformats.org/drawingml/2006/main" xmlns:r="http://schemas.openxmlformats.org/officeDocument/2006/relationships" xmlns:p="http://schemas.openxmlformats.org/presentationml/2006/main">
   <p:cSld name="Slide 18">
     <p:spTree>
@@ -14243,7 +14840,7 @@
 </p:sld>
 </file>
 
-<file path=ppt/slides/slide28.xml><?xml version="1.0" encoding="utf-8"?>
+<file path=ppt/slides/slide29.xml><?xml version="1.0" encoding="utf-8"?>
 <p:sld xmlns:a="http://schemas.openxmlformats.org/drawingml/2006/main" xmlns:r="http://schemas.openxmlformats.org/officeDocument/2006/relationships" xmlns:p="http://schemas.openxmlformats.org/presentationml/2006/main">
   <p:cSld name="Slide 19">
     <p:spTree>
@@ -14620,289 +15217,6 @@
           </a:prstGeom>
         </p:spPr>
       </p:pic>
-    </p:spTree>
-  </p:cSld>
-  <p:clrMapOvr>
-    <a:masterClrMapping/>
-  </p:clrMapOvr>
-</p:sld>
-</file>
-
-<file path=ppt/slides/slide29.xml><?xml version="1.0" encoding="utf-8"?>
-<p:sld xmlns:a="http://schemas.openxmlformats.org/drawingml/2006/main" xmlns:r="http://schemas.openxmlformats.org/officeDocument/2006/relationships" xmlns:p="http://schemas.openxmlformats.org/presentationml/2006/main">
-  <p:cSld name="Slide 20">
-    <p:spTree>
-      <p:nvGrpSpPr>
-        <p:cNvPr id="1" name=""/>
-        <p:cNvGrpSpPr/>
-        <p:nvPr/>
-      </p:nvGrpSpPr>
-      <p:grpSpPr>
-        <a:xfrm>
-          <a:off x="0" y="0"/>
-          <a:ext cx="0" cy="0"/>
-          <a:chOff x="0" y="0"/>
-          <a:chExt cx="0" cy="0"/>
-        </a:xfrm>
-      </p:grpSpPr>
-      <p:sp>
-        <p:nvSpPr>
-          <p:cNvPr id="2" name="dot 2"/>
-          <p:cNvSpPr/>
-          <p:nvPr/>
-        </p:nvSpPr>
-        <p:spPr>
-          <a:xfrm>
-            <a:off x="6355080" y="2697480"/>
-            <a:ext cx="2240280" cy="2240280"/>
-          </a:xfrm>
-          <a:prstGeom prst="ellipse">
-            <a:avLst/>
-          </a:prstGeom>
-          <a:solidFill>
-            <a:srgbClr val="F33844">
-              <a:alpha val="55000"/>
-            </a:srgbClr>
-          </a:solidFill>
-          <a:ln/>
-        </p:spPr>
-        <p:txBody>
-          <a:bodyPr/>
-          <a:lstStyle/>
-          <a:p>
-            <a:endParaRPr lang="en-AU"/>
-          </a:p>
-        </p:txBody>
-      </p:sp>
-      <p:sp>
-        <p:nvSpPr>
-          <p:cNvPr id="8" name="dot 1"/>
-          <p:cNvSpPr/>
-          <p:nvPr/>
-        </p:nvSpPr>
-        <p:spPr>
-          <a:xfrm>
-            <a:off x="7086600" y="1828800"/>
-            <a:ext cx="1783080" cy="1783080"/>
-          </a:xfrm>
-          <a:prstGeom prst="ellipse">
-            <a:avLst/>
-          </a:prstGeom>
-          <a:solidFill>
-            <a:srgbClr val="6D71FF">
-              <a:alpha val="55000"/>
-            </a:srgbClr>
-          </a:solidFill>
-          <a:ln/>
-        </p:spPr>
-        <p:txBody>
-          <a:bodyPr/>
-          <a:lstStyle/>
-          <a:p>
-            <a:endParaRPr lang="en-AU"/>
-          </a:p>
-        </p:txBody>
-      </p:sp>
-      <p:sp>
-        <p:nvSpPr>
-          <p:cNvPr id="9" name="dot 0"/>
-          <p:cNvSpPr/>
-          <p:nvPr/>
-        </p:nvSpPr>
-        <p:spPr>
-          <a:xfrm>
-            <a:off x="6126480" y="914400"/>
-            <a:ext cx="2148840" cy="2148840"/>
-          </a:xfrm>
-          <a:prstGeom prst="ellipse">
-            <a:avLst/>
-          </a:prstGeom>
-          <a:solidFill>
-            <a:srgbClr val="3FD0C9">
-              <a:alpha val="55000"/>
-            </a:srgbClr>
-          </a:solidFill>
-          <a:ln/>
-        </p:spPr>
-        <p:txBody>
-          <a:bodyPr/>
-          <a:lstStyle/>
-          <a:p>
-            <a:endParaRPr lang="en-AU"/>
-          </a:p>
-        </p:txBody>
-      </p:sp>
-      <p:sp>
-        <p:nvSpPr>
-          <p:cNvPr id="3" name="Shape 1"/>
-          <p:cNvSpPr/>
-          <p:nvPr/>
-        </p:nvSpPr>
-        <p:spPr>
-          <a:xfrm>
-            <a:off x="502920" y="1874520"/>
-            <a:ext cx="868680" cy="868680"/>
-          </a:xfrm>
-          <a:prstGeom prst="rect">
-            <a:avLst/>
-          </a:prstGeom>
-          <a:solidFill>
-            <a:srgbClr val="3FD0C9"/>
-          </a:solidFill>
-          <a:ln/>
-        </p:spPr>
-        <p:txBody>
-          <a:bodyPr/>
-          <a:lstStyle/>
-          <a:p>
-            <a:endParaRPr lang="en-AU"/>
-          </a:p>
-        </p:txBody>
-      </p:sp>
-      <p:sp>
-        <p:nvSpPr>
-          <p:cNvPr id="4" name="Text 2"/>
-          <p:cNvSpPr txBox="1"/>
-          <p:nvPr/>
-        </p:nvSpPr>
-        <p:spPr>
-          <a:xfrm>
-            <a:off x="502920" y="1874520"/>
-            <a:ext cx="868680" cy="868680"/>
-          </a:xfrm>
-          <a:prstGeom prst="rect">
-            <a:avLst/>
-          </a:prstGeom>
-          <a:noFill/>
-          <a:ln/>
-        </p:spPr>
-        <p:txBody>
-          <a:bodyPr wrap="square" lIns="0" tIns="0" rIns="0" bIns="0" rtlCol="0" anchor="ctr"/>
-          <a:lstStyle/>
-          <a:p>
-            <a:pPr marL="0" indent="0" algn="ctr">
-              <a:buNone/>
-            </a:pPr>
-            <a:r>
-              <a:rPr lang="en-US" sz="2200" b="1">
-                <a:solidFill>
-                  <a:srgbClr val="242C39"/>
-                </a:solidFill>
-              </a:rPr>
-              <a:t>03</a:t>
-            </a:r>
-            <a:endParaRPr lang="en-US" sz="2600"/>
-          </a:p>
-        </p:txBody>
-      </p:sp>
-      <p:sp>
-        <p:nvSpPr>
-          <p:cNvPr id="5" name="Text 3"/>
-          <p:cNvSpPr txBox="1"/>
-          <p:nvPr/>
-        </p:nvSpPr>
-        <p:spPr>
-          <a:xfrm>
-            <a:off x="502920" y="411480"/>
-            <a:ext cx="3657600" cy="274320"/>
-          </a:xfrm>
-          <a:prstGeom prst="rect">
-            <a:avLst/>
-          </a:prstGeom>
-          <a:noFill/>
-          <a:ln/>
-        </p:spPr>
-        <p:txBody>
-          <a:bodyPr wrap="square" lIns="0" tIns="0" rIns="0" bIns="0" rtlCol="0" anchor="ctr"/>
-          <a:lstStyle/>
-          <a:p>
-            <a:pPr marL="0" indent="0">
-              <a:buNone/>
-            </a:pPr>
-            <a:r>
-              <a:rPr lang="en-US" sz="950" b="1" kern="0" spc="220">
-                <a:solidFill>
-                  <a:srgbClr val="3FD0C9"/>
-                </a:solidFill>
-              </a:rPr>
-              <a:t>SECTION</a:t>
-            </a:r>
-            <a:endParaRPr lang="en-US" sz="950"/>
-          </a:p>
-        </p:txBody>
-      </p:sp>
-      <p:sp>
-        <p:nvSpPr>
-          <p:cNvPr id="6" name="Text 4"/>
-          <p:cNvSpPr txBox="1"/>
-          <p:nvPr/>
-        </p:nvSpPr>
-        <p:spPr>
-          <a:xfrm>
-            <a:off x="1600200" y="1874519"/>
-            <a:ext cx="5943600" cy="502920"/>
-          </a:xfrm>
-          <a:prstGeom prst="rect">
-            <a:avLst/>
-          </a:prstGeom>
-          <a:noFill/>
-          <a:ln/>
-        </p:spPr>
-        <p:txBody>
-          <a:bodyPr wrap="square" lIns="0" tIns="0" rIns="0" bIns="0" rtlCol="0" anchor="ctr"/>
-          <a:lstStyle/>
-          <a:p>
-            <a:pPr marL="0" indent="0">
-              <a:buNone/>
-            </a:pPr>
-            <a:r>
-              <a:rPr lang="en-US" sz="2300" b="1">
-                <a:solidFill>
-                  <a:srgbClr val="FFFFFF"/>
-                </a:solidFill>
-              </a:rPr>
-              <a:t>Customers and receivables</a:t>
-            </a:r>
-            <a:endParaRPr lang="en-US" sz="2800"/>
-          </a:p>
-        </p:txBody>
-      </p:sp>
-      <p:sp>
-        <p:nvSpPr>
-          <p:cNvPr id="7" name="Text 5"/>
-          <p:cNvSpPr txBox="1"/>
-          <p:nvPr/>
-        </p:nvSpPr>
-        <p:spPr>
-          <a:xfrm>
-            <a:off x="1600200" y="2395728"/>
-            <a:ext cx="5943600" cy="347472"/>
-          </a:xfrm>
-          <a:prstGeom prst="rect">
-            <a:avLst/>
-          </a:prstGeom>
-          <a:noFill/>
-          <a:ln/>
-        </p:spPr>
-        <p:txBody>
-          <a:bodyPr wrap="square" lIns="0" tIns="0" rIns="0" bIns="0" rtlCol="0" anchor="ctr"/>
-          <a:lstStyle/>
-          <a:p>
-            <a:pPr marL="0" indent="0">
-              <a:buNone/>
-            </a:pPr>
-            <a:r>
-              <a:rPr lang="en-US" sz="1200">
-                <a:solidFill>
-                  <a:srgbClr val="C9CED6"/>
-                </a:solidFill>
-              </a:rPr>
-              <a:t>Who pays us, how much, and how slowly</a:t>
-            </a:r>
-            <a:endParaRPr lang="en-US" sz="1200"/>
-          </a:p>
-        </p:txBody>
-      </p:sp>
     </p:spTree>
   </p:cSld>
   <p:clrMapOvr>
@@ -17165,6 +17479,289 @@
 
 <file path=ppt/slides/slide30.xml><?xml version="1.0" encoding="utf-8"?>
 <p:sld xmlns:a="http://schemas.openxmlformats.org/drawingml/2006/main" xmlns:r="http://schemas.openxmlformats.org/officeDocument/2006/relationships" xmlns:p="http://schemas.openxmlformats.org/presentationml/2006/main">
+  <p:cSld name="Slide 20">
+    <p:spTree>
+      <p:nvGrpSpPr>
+        <p:cNvPr id="1" name=""/>
+        <p:cNvGrpSpPr/>
+        <p:nvPr/>
+      </p:nvGrpSpPr>
+      <p:grpSpPr>
+        <a:xfrm>
+          <a:off x="0" y="0"/>
+          <a:ext cx="0" cy="0"/>
+          <a:chOff x="0" y="0"/>
+          <a:chExt cx="0" cy="0"/>
+        </a:xfrm>
+      </p:grpSpPr>
+      <p:sp>
+        <p:nvSpPr>
+          <p:cNvPr id="2" name="dot 2"/>
+          <p:cNvSpPr/>
+          <p:nvPr/>
+        </p:nvSpPr>
+        <p:spPr>
+          <a:xfrm>
+            <a:off x="6355080" y="2697480"/>
+            <a:ext cx="2240280" cy="2240280"/>
+          </a:xfrm>
+          <a:prstGeom prst="ellipse">
+            <a:avLst/>
+          </a:prstGeom>
+          <a:solidFill>
+            <a:srgbClr val="F33844">
+              <a:alpha val="55000"/>
+            </a:srgbClr>
+          </a:solidFill>
+          <a:ln/>
+        </p:spPr>
+        <p:txBody>
+          <a:bodyPr/>
+          <a:lstStyle/>
+          <a:p>
+            <a:endParaRPr lang="en-AU"/>
+          </a:p>
+        </p:txBody>
+      </p:sp>
+      <p:sp>
+        <p:nvSpPr>
+          <p:cNvPr id="8" name="dot 1"/>
+          <p:cNvSpPr/>
+          <p:nvPr/>
+        </p:nvSpPr>
+        <p:spPr>
+          <a:xfrm>
+            <a:off x="7086600" y="1828800"/>
+            <a:ext cx="1783080" cy="1783080"/>
+          </a:xfrm>
+          <a:prstGeom prst="ellipse">
+            <a:avLst/>
+          </a:prstGeom>
+          <a:solidFill>
+            <a:srgbClr val="6D71FF">
+              <a:alpha val="55000"/>
+            </a:srgbClr>
+          </a:solidFill>
+          <a:ln/>
+        </p:spPr>
+        <p:txBody>
+          <a:bodyPr/>
+          <a:lstStyle/>
+          <a:p>
+            <a:endParaRPr lang="en-AU"/>
+          </a:p>
+        </p:txBody>
+      </p:sp>
+      <p:sp>
+        <p:nvSpPr>
+          <p:cNvPr id="9" name="dot 0"/>
+          <p:cNvSpPr/>
+          <p:nvPr/>
+        </p:nvSpPr>
+        <p:spPr>
+          <a:xfrm>
+            <a:off x="6126480" y="914400"/>
+            <a:ext cx="2148840" cy="2148840"/>
+          </a:xfrm>
+          <a:prstGeom prst="ellipse">
+            <a:avLst/>
+          </a:prstGeom>
+          <a:solidFill>
+            <a:srgbClr val="3FD0C9">
+              <a:alpha val="55000"/>
+            </a:srgbClr>
+          </a:solidFill>
+          <a:ln/>
+        </p:spPr>
+        <p:txBody>
+          <a:bodyPr/>
+          <a:lstStyle/>
+          <a:p>
+            <a:endParaRPr lang="en-AU"/>
+          </a:p>
+        </p:txBody>
+      </p:sp>
+      <p:sp>
+        <p:nvSpPr>
+          <p:cNvPr id="3" name="Shape 1"/>
+          <p:cNvSpPr/>
+          <p:nvPr/>
+        </p:nvSpPr>
+        <p:spPr>
+          <a:xfrm>
+            <a:off x="502920" y="1874520"/>
+            <a:ext cx="868680" cy="868680"/>
+          </a:xfrm>
+          <a:prstGeom prst="rect">
+            <a:avLst/>
+          </a:prstGeom>
+          <a:solidFill>
+            <a:srgbClr val="3FD0C9"/>
+          </a:solidFill>
+          <a:ln/>
+        </p:spPr>
+        <p:txBody>
+          <a:bodyPr/>
+          <a:lstStyle/>
+          <a:p>
+            <a:endParaRPr lang="en-AU"/>
+          </a:p>
+        </p:txBody>
+      </p:sp>
+      <p:sp>
+        <p:nvSpPr>
+          <p:cNvPr id="4" name="Text 2"/>
+          <p:cNvSpPr txBox="1"/>
+          <p:nvPr/>
+        </p:nvSpPr>
+        <p:spPr>
+          <a:xfrm>
+            <a:off x="502920" y="1874520"/>
+            <a:ext cx="868680" cy="868680"/>
+          </a:xfrm>
+          <a:prstGeom prst="rect">
+            <a:avLst/>
+          </a:prstGeom>
+          <a:noFill/>
+          <a:ln/>
+        </p:spPr>
+        <p:txBody>
+          <a:bodyPr wrap="square" lIns="0" tIns="0" rIns="0" bIns="0" rtlCol="0" anchor="ctr"/>
+          <a:lstStyle/>
+          <a:p>
+            <a:pPr marL="0" indent="0" algn="ctr">
+              <a:buNone/>
+            </a:pPr>
+            <a:r>
+              <a:rPr lang="en-US" sz="2200" b="1">
+                <a:solidFill>
+                  <a:srgbClr val="242C39"/>
+                </a:solidFill>
+              </a:rPr>
+              <a:t>04</a:t>
+            </a:r>
+            <a:endParaRPr lang="en-US" sz="2600"/>
+          </a:p>
+        </p:txBody>
+      </p:sp>
+      <p:sp>
+        <p:nvSpPr>
+          <p:cNvPr id="5" name="Text 3"/>
+          <p:cNvSpPr txBox="1"/>
+          <p:nvPr/>
+        </p:nvSpPr>
+        <p:spPr>
+          <a:xfrm>
+            <a:off x="502920" y="411480"/>
+            <a:ext cx="3657600" cy="274320"/>
+          </a:xfrm>
+          <a:prstGeom prst="rect">
+            <a:avLst/>
+          </a:prstGeom>
+          <a:noFill/>
+          <a:ln/>
+        </p:spPr>
+        <p:txBody>
+          <a:bodyPr wrap="square" lIns="0" tIns="0" rIns="0" bIns="0" rtlCol="0" anchor="ctr"/>
+          <a:lstStyle/>
+          <a:p>
+            <a:pPr marL="0" indent="0">
+              <a:buNone/>
+            </a:pPr>
+            <a:r>
+              <a:rPr lang="en-US" sz="950" b="1" kern="0" spc="220">
+                <a:solidFill>
+                  <a:srgbClr val="3FD0C9"/>
+                </a:solidFill>
+              </a:rPr>
+              <a:t>SECTION</a:t>
+            </a:r>
+            <a:endParaRPr lang="en-US" sz="950"/>
+          </a:p>
+        </p:txBody>
+      </p:sp>
+      <p:sp>
+        <p:nvSpPr>
+          <p:cNvPr id="6" name="Text 4"/>
+          <p:cNvSpPr txBox="1"/>
+          <p:nvPr/>
+        </p:nvSpPr>
+        <p:spPr>
+          <a:xfrm>
+            <a:off x="1600200" y="1874519"/>
+            <a:ext cx="5943600" cy="502920"/>
+          </a:xfrm>
+          <a:prstGeom prst="rect">
+            <a:avLst/>
+          </a:prstGeom>
+          <a:noFill/>
+          <a:ln/>
+        </p:spPr>
+        <p:txBody>
+          <a:bodyPr wrap="square" lIns="0" tIns="0" rIns="0" bIns="0" rtlCol="0" anchor="ctr"/>
+          <a:lstStyle/>
+          <a:p>
+            <a:pPr marL="0" indent="0">
+              <a:buNone/>
+            </a:pPr>
+            <a:r>
+              <a:rPr lang="en-US" sz="2300" b="1">
+                <a:solidFill>
+                  <a:srgbClr val="FFFFFF"/>
+                </a:solidFill>
+              </a:rPr>
+              <a:t>Customers and receivables</a:t>
+            </a:r>
+            <a:endParaRPr lang="en-US" sz="2800"/>
+          </a:p>
+        </p:txBody>
+      </p:sp>
+      <p:sp>
+        <p:nvSpPr>
+          <p:cNvPr id="7" name="Text 5"/>
+          <p:cNvSpPr txBox="1"/>
+          <p:nvPr/>
+        </p:nvSpPr>
+        <p:spPr>
+          <a:xfrm>
+            <a:off x="1600200" y="2395728"/>
+            <a:ext cx="5943600" cy="347472"/>
+          </a:xfrm>
+          <a:prstGeom prst="rect">
+            <a:avLst/>
+          </a:prstGeom>
+          <a:noFill/>
+          <a:ln/>
+        </p:spPr>
+        <p:txBody>
+          <a:bodyPr wrap="square" lIns="0" tIns="0" rIns="0" bIns="0" rtlCol="0" anchor="ctr"/>
+          <a:lstStyle/>
+          <a:p>
+            <a:pPr marL="0" indent="0">
+              <a:buNone/>
+            </a:pPr>
+            <a:r>
+              <a:rPr lang="en-US" sz="1200">
+                <a:solidFill>
+                  <a:srgbClr val="C9CED6"/>
+                </a:solidFill>
+              </a:rPr>
+              <a:t>Who pays us, how much, and how slowly</a:t>
+            </a:r>
+            <a:endParaRPr lang="en-US" sz="1200"/>
+          </a:p>
+        </p:txBody>
+      </p:sp>
+    </p:spTree>
+  </p:cSld>
+  <p:clrMapOvr>
+    <a:masterClrMapping/>
+  </p:clrMapOvr>
+</p:sld>
+</file>
+
+<file path=ppt/slides/slide31.xml><?xml version="1.0" encoding="utf-8"?>
+<p:sld xmlns:a="http://schemas.openxmlformats.org/drawingml/2006/main" xmlns:r="http://schemas.openxmlformats.org/officeDocument/2006/relationships" xmlns:p="http://schemas.openxmlformats.org/presentationml/2006/main">
   <p:cSld name="Slide 21">
     <p:spTree>
       <p:nvGrpSpPr>
@@ -17569,7 +18166,7 @@
 </p:sld>
 </file>
 
-<file path=ppt/slides/slide31.xml><?xml version="1.0" encoding="utf-8"?>
+<file path=ppt/slides/slide32.xml><?xml version="1.0" encoding="utf-8"?>
 <p:sld xmlns:a="http://schemas.openxmlformats.org/drawingml/2006/main" xmlns:r="http://schemas.openxmlformats.org/officeDocument/2006/relationships" xmlns:p="http://schemas.openxmlformats.org/presentationml/2006/main">
   <p:cSld name="Slide 22">
     <p:spTree>
@@ -17975,7 +18572,7 @@
 </p:sld>
 </file>
 
-<file path=ppt/slides/slide32.xml><?xml version="1.0" encoding="utf-8"?>
+<file path=ppt/slides/slide33.xml><?xml version="1.0" encoding="utf-8"?>
 <p:sld xmlns:a="http://schemas.openxmlformats.org/drawingml/2006/main" xmlns:r="http://schemas.openxmlformats.org/officeDocument/2006/relationships" xmlns:p="http://schemas.openxmlformats.org/presentationml/2006/main">
   <p:cSld name="Slide 23">
     <p:spTree>
@@ -18381,7 +18978,7 @@
 </p:sld>
 </file>
 
-<file path=ppt/slides/slide33.xml><?xml version="1.0" encoding="utf-8"?>
+<file path=ppt/slides/slide34.xml><?xml version="1.0" encoding="utf-8"?>
 <p:sld xmlns:a="http://schemas.openxmlformats.org/drawingml/2006/main" xmlns:r="http://schemas.openxmlformats.org/officeDocument/2006/relationships" xmlns:p="http://schemas.openxmlformats.org/presentationml/2006/main">
   <p:cSld name="Slide 24">
     <p:spTree>
@@ -18542,7 +19139,7 @@
                   <a:srgbClr val="242C39"/>
                 </a:solidFill>
               </a:rPr>
-              <a:t>04</a:t>
+              <a:t>05</a:t>
             </a:r>
             <a:endParaRPr lang="en-US" sz="2600"/>
           </a:p>
@@ -18664,7 +19261,7 @@
 </p:sld>
 </file>
 
-<file path=ppt/slides/slide34.xml><?xml version="1.0" encoding="utf-8"?>
+<file path=ppt/slides/slide35.xml><?xml version="1.0" encoding="utf-8"?>
 <p:sld xmlns:a="http://schemas.openxmlformats.org/drawingml/2006/main" xmlns:r="http://schemas.openxmlformats.org/officeDocument/2006/relationships" xmlns:p="http://schemas.openxmlformats.org/presentationml/2006/main">
   <p:cSld name="Slide 25">
     <p:spTree>
@@ -19049,7 +19646,7 @@
 </p:sld>
 </file>
 
-<file path=ppt/slides/slide35.xml><?xml version="1.0" encoding="utf-8"?>
+<file path=ppt/slides/slide36.xml><?xml version="1.0" encoding="utf-8"?>
 <p:sld xmlns:a="http://schemas.openxmlformats.org/drawingml/2006/main" xmlns:r="http://schemas.openxmlformats.org/officeDocument/2006/relationships" xmlns:p="http://schemas.openxmlformats.org/presentationml/2006/main">
   <p:cSld name="Slide 26">
     <p:spTree>
@@ -19455,7 +20052,7 @@
 </p:sld>
 </file>
 
-<file path=ppt/slides/slide36.xml><?xml version="1.0" encoding="utf-8"?>
+<file path=ppt/slides/slide37.xml><?xml version="1.0" encoding="utf-8"?>
 <p:sld xmlns:a="http://schemas.openxmlformats.org/drawingml/2006/main" xmlns:r="http://schemas.openxmlformats.org/officeDocument/2006/relationships" xmlns:p="http://schemas.openxmlformats.org/presentationml/2006/main">
   <p:cSld name="Slide 27">
     <p:spTree>
@@ -19861,7 +20458,7 @@
 </p:sld>
 </file>
 
-<file path=ppt/slides/slide37.xml><?xml version="1.0" encoding="utf-8"?>
+<file path=ppt/slides/slide38.xml><?xml version="1.0" encoding="utf-8"?>
 <p:sld xmlns:a="http://schemas.openxmlformats.org/drawingml/2006/main" xmlns:r="http://schemas.openxmlformats.org/officeDocument/2006/relationships" xmlns:p="http://schemas.openxmlformats.org/presentationml/2006/main">
   <p:cSld name="Slide 28">
     <p:spTree>
@@ -20022,7 +20619,7 @@
                   <a:srgbClr val="242C39"/>
                 </a:solidFill>
               </a:rPr>
-              <a:t>05</a:t>
+              <a:t>06</a:t>
             </a:r>
             <a:endParaRPr lang="en-US" sz="2600"/>
           </a:p>
@@ -20144,7 +20741,7 @@
 </p:sld>
 </file>
 
-<file path=ppt/slides/slide38.xml><?xml version="1.0" encoding="utf-8"?>
+<file path=ppt/slides/slide39.xml><?xml version="1.0" encoding="utf-8"?>
 <p:sld xmlns:a="http://schemas.openxmlformats.org/drawingml/2006/main" xmlns:r="http://schemas.openxmlformats.org/officeDocument/2006/relationships" xmlns:p="http://schemas.openxmlformats.org/presentationml/2006/main">
   <p:cSld name="Slide 29">
     <p:spTree>
@@ -20550,7 +21147,290 @@
 </p:sld>
 </file>
 
-<file path=ppt/slides/slide39.xml><?xml version="1.0" encoding="utf-8"?>
+<file path=ppt/slides/slide4.xml><?xml version="1.0" encoding="utf-8"?>
+<p:sld xmlns:a="http://schemas.openxmlformats.org/drawingml/2006/main" xmlns:r="http://schemas.openxmlformats.org/officeDocument/2006/relationships" xmlns:p="http://schemas.openxmlformats.org/presentationml/2006/main">
+  <p:cSld name="Slide 4">
+    <p:spTree>
+      <p:nvGrpSpPr>
+        <p:cNvPr id="1" name=""/>
+        <p:cNvGrpSpPr/>
+        <p:nvPr/>
+      </p:nvGrpSpPr>
+      <p:grpSpPr>
+        <a:xfrm>
+          <a:off x="0" y="0"/>
+          <a:ext cx="0" cy="0"/>
+          <a:chOff x="0" y="0"/>
+          <a:chExt cx="0" cy="0"/>
+        </a:xfrm>
+      </p:grpSpPr>
+      <p:sp>
+        <p:nvSpPr>
+          <p:cNvPr id="2" name="dot 2"/>
+          <p:cNvSpPr/>
+          <p:nvPr/>
+        </p:nvSpPr>
+        <p:spPr>
+          <a:xfrm>
+            <a:off x="6537960" y="1965960"/>
+            <a:ext cx="2240280" cy="2240280"/>
+          </a:xfrm>
+          <a:prstGeom prst="ellipse">
+            <a:avLst/>
+          </a:prstGeom>
+          <a:solidFill>
+            <a:srgbClr val="F33844">
+              <a:alpha val="55000"/>
+            </a:srgbClr>
+          </a:solidFill>
+          <a:ln/>
+        </p:spPr>
+        <p:txBody>
+          <a:bodyPr/>
+          <a:lstStyle/>
+          <a:p>
+            <a:endParaRPr lang="en-AU"/>
+          </a:p>
+        </p:txBody>
+      </p:sp>
+      <p:sp>
+        <p:nvSpPr>
+          <p:cNvPr id="8" name="dot 1"/>
+          <p:cNvSpPr/>
+          <p:nvPr/>
+        </p:nvSpPr>
+        <p:spPr>
+          <a:xfrm>
+            <a:off x="7269480" y="1097280"/>
+            <a:ext cx="1783080" cy="1783080"/>
+          </a:xfrm>
+          <a:prstGeom prst="ellipse">
+            <a:avLst/>
+          </a:prstGeom>
+          <a:solidFill>
+            <a:srgbClr val="6D71FF">
+              <a:alpha val="55000"/>
+            </a:srgbClr>
+          </a:solidFill>
+          <a:ln/>
+        </p:spPr>
+        <p:txBody>
+          <a:bodyPr/>
+          <a:lstStyle/>
+          <a:p>
+            <a:endParaRPr lang="en-AU"/>
+          </a:p>
+        </p:txBody>
+      </p:sp>
+      <p:sp>
+        <p:nvSpPr>
+          <p:cNvPr id="9" name="dot 0"/>
+          <p:cNvSpPr/>
+          <p:nvPr/>
+        </p:nvSpPr>
+        <p:spPr>
+          <a:xfrm>
+            <a:off x="6309360" y="182880"/>
+            <a:ext cx="2148840" cy="2148840"/>
+          </a:xfrm>
+          <a:prstGeom prst="ellipse">
+            <a:avLst/>
+          </a:prstGeom>
+          <a:solidFill>
+            <a:srgbClr val="3FD0C9">
+              <a:alpha val="55000"/>
+            </a:srgbClr>
+          </a:solidFill>
+          <a:ln/>
+        </p:spPr>
+        <p:txBody>
+          <a:bodyPr/>
+          <a:lstStyle/>
+          <a:p>
+            <a:endParaRPr lang="en-AU"/>
+          </a:p>
+        </p:txBody>
+      </p:sp>
+      <p:sp>
+        <p:nvSpPr>
+          <p:cNvPr id="3" name="Shape 1"/>
+          <p:cNvSpPr/>
+          <p:nvPr/>
+        </p:nvSpPr>
+        <p:spPr>
+          <a:xfrm>
+            <a:off x="502920" y="1874520"/>
+            <a:ext cx="868680" cy="868680"/>
+          </a:xfrm>
+          <a:prstGeom prst="rect">
+            <a:avLst/>
+          </a:prstGeom>
+          <a:solidFill>
+            <a:srgbClr val="3FD0C9"/>
+          </a:solidFill>
+          <a:ln/>
+        </p:spPr>
+        <p:txBody>
+          <a:bodyPr/>
+          <a:lstStyle/>
+          <a:p>
+            <a:endParaRPr lang="en-AU"/>
+          </a:p>
+        </p:txBody>
+      </p:sp>
+      <p:sp>
+        <p:nvSpPr>
+          <p:cNvPr id="4" name="Text 2"/>
+          <p:cNvSpPr txBox="1"/>
+          <p:nvPr/>
+        </p:nvSpPr>
+        <p:spPr>
+          <a:xfrm>
+            <a:off x="502920" y="1874520"/>
+            <a:ext cx="868680" cy="868680"/>
+          </a:xfrm>
+          <a:prstGeom prst="rect">
+            <a:avLst/>
+          </a:prstGeom>
+          <a:noFill/>
+          <a:ln/>
+        </p:spPr>
+        <p:txBody>
+          <a:bodyPr wrap="square" lIns="0" tIns="0" rIns="0" bIns="0" rtlCol="0" anchor="ctr"/>
+          <a:lstStyle/>
+          <a:p>
+            <a:pPr marL="0" indent="0" algn="ctr">
+              <a:buNone/>
+            </a:pPr>
+            <a:r>
+              <a:rPr lang="en-US" sz="2200" b="1">
+                <a:solidFill>
+                  <a:srgbClr val="242C39"/>
+                </a:solidFill>
+              </a:rPr>
+              <a:t>01</a:t>
+            </a:r>
+            <a:endParaRPr lang="en-US" sz="2600"/>
+          </a:p>
+        </p:txBody>
+      </p:sp>
+      <p:sp>
+        <p:nvSpPr>
+          <p:cNvPr id="5" name="Text 3"/>
+          <p:cNvSpPr txBox="1"/>
+          <p:nvPr/>
+        </p:nvSpPr>
+        <p:spPr>
+          <a:xfrm>
+            <a:off x="502920" y="411480"/>
+            <a:ext cx="3657600" cy="274320"/>
+          </a:xfrm>
+          <a:prstGeom prst="rect">
+            <a:avLst/>
+          </a:prstGeom>
+          <a:noFill/>
+          <a:ln/>
+        </p:spPr>
+        <p:txBody>
+          <a:bodyPr wrap="square" lIns="0" tIns="0" rIns="0" bIns="0" rtlCol="0" anchor="ctr"/>
+          <a:lstStyle/>
+          <a:p>
+            <a:pPr marL="0" indent="0">
+              <a:buNone/>
+            </a:pPr>
+            <a:r>
+              <a:rPr lang="en-US" sz="950" b="1" kern="0" spc="220">
+                <a:solidFill>
+                  <a:srgbClr val="3FD0C9"/>
+                </a:solidFill>
+              </a:rPr>
+              <a:t>SECTION</a:t>
+            </a:r>
+            <a:endParaRPr lang="en-US" sz="950"/>
+          </a:p>
+        </p:txBody>
+      </p:sp>
+      <p:sp>
+        <p:nvSpPr>
+          <p:cNvPr id="6" name="Text 4"/>
+          <p:cNvSpPr txBox="1"/>
+          <p:nvPr/>
+        </p:nvSpPr>
+        <p:spPr>
+          <a:xfrm>
+            <a:off x="1600200" y="1874519"/>
+            <a:ext cx="5943600" cy="502920"/>
+          </a:xfrm>
+          <a:prstGeom prst="rect">
+            <a:avLst/>
+          </a:prstGeom>
+          <a:noFill/>
+          <a:ln/>
+        </p:spPr>
+        <p:txBody>
+          <a:bodyPr wrap="square" lIns="0" tIns="0" rIns="0" bIns="0" rtlCol="0" anchor="ctr"/>
+          <a:lstStyle/>
+          <a:p>
+            <a:pPr marL="0" indent="0">
+              <a:buNone/>
+            </a:pPr>
+            <a:r>
+              <a:rPr lang="en-US" sz="2300" b="1">
+                <a:solidFill>
+                  <a:srgbClr val="FFFFFF"/>
+                </a:solidFill>
+              </a:rPr>
+              <a:t>Financial performance</a:t>
+            </a:r>
+            <a:endParaRPr lang="en-US" sz="2800"/>
+          </a:p>
+        </p:txBody>
+      </p:sp>
+      <p:sp>
+        <p:nvSpPr>
+          <p:cNvPr id="7" name="Text 5"/>
+          <p:cNvSpPr txBox="1"/>
+          <p:nvPr/>
+        </p:nvSpPr>
+        <p:spPr>
+          <a:xfrm>
+            <a:off x="1600200" y="2395728"/>
+            <a:ext cx="5943600" cy="347472"/>
+          </a:xfrm>
+          <a:prstGeom prst="rect">
+            <a:avLst/>
+          </a:prstGeom>
+          <a:noFill/>
+          <a:ln/>
+        </p:spPr>
+        <p:txBody>
+          <a:bodyPr wrap="square" lIns="0" tIns="0" rIns="0" bIns="0" rtlCol="0" anchor="ctr"/>
+          <a:lstStyle/>
+          <a:p>
+            <a:pPr marL="0" indent="0">
+              <a:buNone/>
+            </a:pPr>
+            <a:r>
+              <a:rPr lang="en-US" sz="1200">
+                <a:solidFill>
+                  <a:srgbClr val="C9CED6"/>
+                </a:solidFill>
+              </a:rPr>
+              <a:t>The P&amp;L for September 2026 and the year to date</a:t>
+            </a:r>
+            <a:endParaRPr lang="en-US" sz="1200"/>
+          </a:p>
+        </p:txBody>
+      </p:sp>
+    </p:spTree>
+  </p:cSld>
+  <p:clrMapOvr>
+    <a:masterClrMapping/>
+  </p:clrMapOvr>
+</p:sld>
+</file>
+
+<file path=ppt/slides/slide40.xml><?xml version="1.0" encoding="utf-8"?>
 <p:sld xmlns:a="http://schemas.openxmlformats.org/drawingml/2006/main" xmlns:r="http://schemas.openxmlformats.org/officeDocument/2006/relationships" xmlns:p="http://schemas.openxmlformats.org/presentationml/2006/main">
   <p:cSld name="Slide 30">
     <p:spTree>
@@ -22696,290 +23576,7 @@
 </p:sld>
 </file>
 
-<file path=ppt/slides/slide4.xml><?xml version="1.0" encoding="utf-8"?>
-<p:sld xmlns:a="http://schemas.openxmlformats.org/drawingml/2006/main" xmlns:r="http://schemas.openxmlformats.org/officeDocument/2006/relationships" xmlns:p="http://schemas.openxmlformats.org/presentationml/2006/main">
-  <p:cSld name="Slide 4">
-    <p:spTree>
-      <p:nvGrpSpPr>
-        <p:cNvPr id="1" name=""/>
-        <p:cNvGrpSpPr/>
-        <p:nvPr/>
-      </p:nvGrpSpPr>
-      <p:grpSpPr>
-        <a:xfrm>
-          <a:off x="0" y="0"/>
-          <a:ext cx="0" cy="0"/>
-          <a:chOff x="0" y="0"/>
-          <a:chExt cx="0" cy="0"/>
-        </a:xfrm>
-      </p:grpSpPr>
-      <p:sp>
-        <p:nvSpPr>
-          <p:cNvPr id="2" name="dot 2"/>
-          <p:cNvSpPr/>
-          <p:nvPr/>
-        </p:nvSpPr>
-        <p:spPr>
-          <a:xfrm>
-            <a:off x="6537960" y="1965960"/>
-            <a:ext cx="2240280" cy="2240280"/>
-          </a:xfrm>
-          <a:prstGeom prst="ellipse">
-            <a:avLst/>
-          </a:prstGeom>
-          <a:solidFill>
-            <a:srgbClr val="F33844">
-              <a:alpha val="55000"/>
-            </a:srgbClr>
-          </a:solidFill>
-          <a:ln/>
-        </p:spPr>
-        <p:txBody>
-          <a:bodyPr/>
-          <a:lstStyle/>
-          <a:p>
-            <a:endParaRPr lang="en-AU"/>
-          </a:p>
-        </p:txBody>
-      </p:sp>
-      <p:sp>
-        <p:nvSpPr>
-          <p:cNvPr id="8" name="dot 1"/>
-          <p:cNvSpPr/>
-          <p:nvPr/>
-        </p:nvSpPr>
-        <p:spPr>
-          <a:xfrm>
-            <a:off x="7269480" y="1097280"/>
-            <a:ext cx="1783080" cy="1783080"/>
-          </a:xfrm>
-          <a:prstGeom prst="ellipse">
-            <a:avLst/>
-          </a:prstGeom>
-          <a:solidFill>
-            <a:srgbClr val="6D71FF">
-              <a:alpha val="55000"/>
-            </a:srgbClr>
-          </a:solidFill>
-          <a:ln/>
-        </p:spPr>
-        <p:txBody>
-          <a:bodyPr/>
-          <a:lstStyle/>
-          <a:p>
-            <a:endParaRPr lang="en-AU"/>
-          </a:p>
-        </p:txBody>
-      </p:sp>
-      <p:sp>
-        <p:nvSpPr>
-          <p:cNvPr id="9" name="dot 0"/>
-          <p:cNvSpPr/>
-          <p:nvPr/>
-        </p:nvSpPr>
-        <p:spPr>
-          <a:xfrm>
-            <a:off x="6309360" y="182880"/>
-            <a:ext cx="2148840" cy="2148840"/>
-          </a:xfrm>
-          <a:prstGeom prst="ellipse">
-            <a:avLst/>
-          </a:prstGeom>
-          <a:solidFill>
-            <a:srgbClr val="3FD0C9">
-              <a:alpha val="55000"/>
-            </a:srgbClr>
-          </a:solidFill>
-          <a:ln/>
-        </p:spPr>
-        <p:txBody>
-          <a:bodyPr/>
-          <a:lstStyle/>
-          <a:p>
-            <a:endParaRPr lang="en-AU"/>
-          </a:p>
-        </p:txBody>
-      </p:sp>
-      <p:sp>
-        <p:nvSpPr>
-          <p:cNvPr id="3" name="Shape 1"/>
-          <p:cNvSpPr/>
-          <p:nvPr/>
-        </p:nvSpPr>
-        <p:spPr>
-          <a:xfrm>
-            <a:off x="502920" y="1874520"/>
-            <a:ext cx="868680" cy="868680"/>
-          </a:xfrm>
-          <a:prstGeom prst="rect">
-            <a:avLst/>
-          </a:prstGeom>
-          <a:solidFill>
-            <a:srgbClr val="3FD0C9"/>
-          </a:solidFill>
-          <a:ln/>
-        </p:spPr>
-        <p:txBody>
-          <a:bodyPr/>
-          <a:lstStyle/>
-          <a:p>
-            <a:endParaRPr lang="en-AU"/>
-          </a:p>
-        </p:txBody>
-      </p:sp>
-      <p:sp>
-        <p:nvSpPr>
-          <p:cNvPr id="4" name="Text 2"/>
-          <p:cNvSpPr txBox="1"/>
-          <p:nvPr/>
-        </p:nvSpPr>
-        <p:spPr>
-          <a:xfrm>
-            <a:off x="502920" y="1874520"/>
-            <a:ext cx="868680" cy="868680"/>
-          </a:xfrm>
-          <a:prstGeom prst="rect">
-            <a:avLst/>
-          </a:prstGeom>
-          <a:noFill/>
-          <a:ln/>
-        </p:spPr>
-        <p:txBody>
-          <a:bodyPr wrap="square" lIns="0" tIns="0" rIns="0" bIns="0" rtlCol="0" anchor="ctr"/>
-          <a:lstStyle/>
-          <a:p>
-            <a:pPr marL="0" indent="0" algn="ctr">
-              <a:buNone/>
-            </a:pPr>
-            <a:r>
-              <a:rPr lang="en-US" sz="2200" b="1">
-                <a:solidFill>
-                  <a:srgbClr val="242C39"/>
-                </a:solidFill>
-              </a:rPr>
-              <a:t>01</a:t>
-            </a:r>
-            <a:endParaRPr lang="en-US" sz="2600"/>
-          </a:p>
-        </p:txBody>
-      </p:sp>
-      <p:sp>
-        <p:nvSpPr>
-          <p:cNvPr id="5" name="Text 3"/>
-          <p:cNvSpPr txBox="1"/>
-          <p:nvPr/>
-        </p:nvSpPr>
-        <p:spPr>
-          <a:xfrm>
-            <a:off x="502920" y="411480"/>
-            <a:ext cx="3657600" cy="274320"/>
-          </a:xfrm>
-          <a:prstGeom prst="rect">
-            <a:avLst/>
-          </a:prstGeom>
-          <a:noFill/>
-          <a:ln/>
-        </p:spPr>
-        <p:txBody>
-          <a:bodyPr wrap="square" lIns="0" tIns="0" rIns="0" bIns="0" rtlCol="0" anchor="ctr"/>
-          <a:lstStyle/>
-          <a:p>
-            <a:pPr marL="0" indent="0">
-              <a:buNone/>
-            </a:pPr>
-            <a:r>
-              <a:rPr lang="en-US" sz="950" b="1" kern="0" spc="220">
-                <a:solidFill>
-                  <a:srgbClr val="3FD0C9"/>
-                </a:solidFill>
-              </a:rPr>
-              <a:t>SECTION</a:t>
-            </a:r>
-            <a:endParaRPr lang="en-US" sz="950"/>
-          </a:p>
-        </p:txBody>
-      </p:sp>
-      <p:sp>
-        <p:nvSpPr>
-          <p:cNvPr id="6" name="Text 4"/>
-          <p:cNvSpPr txBox="1"/>
-          <p:nvPr/>
-        </p:nvSpPr>
-        <p:spPr>
-          <a:xfrm>
-            <a:off x="1600200" y="1874519"/>
-            <a:ext cx="5943600" cy="502920"/>
-          </a:xfrm>
-          <a:prstGeom prst="rect">
-            <a:avLst/>
-          </a:prstGeom>
-          <a:noFill/>
-          <a:ln/>
-        </p:spPr>
-        <p:txBody>
-          <a:bodyPr wrap="square" lIns="0" tIns="0" rIns="0" bIns="0" rtlCol="0" anchor="ctr"/>
-          <a:lstStyle/>
-          <a:p>
-            <a:pPr marL="0" indent="0">
-              <a:buNone/>
-            </a:pPr>
-            <a:r>
-              <a:rPr lang="en-US" sz="2300" b="1">
-                <a:solidFill>
-                  <a:srgbClr val="FFFFFF"/>
-                </a:solidFill>
-              </a:rPr>
-              <a:t>Financial performance</a:t>
-            </a:r>
-            <a:endParaRPr lang="en-US" sz="2800"/>
-          </a:p>
-        </p:txBody>
-      </p:sp>
-      <p:sp>
-        <p:nvSpPr>
-          <p:cNvPr id="7" name="Text 5"/>
-          <p:cNvSpPr txBox="1"/>
-          <p:nvPr/>
-        </p:nvSpPr>
-        <p:spPr>
-          <a:xfrm>
-            <a:off x="1600200" y="2395728"/>
-            <a:ext cx="5943600" cy="347472"/>
-          </a:xfrm>
-          <a:prstGeom prst="rect">
-            <a:avLst/>
-          </a:prstGeom>
-          <a:noFill/>
-          <a:ln/>
-        </p:spPr>
-        <p:txBody>
-          <a:bodyPr wrap="square" lIns="0" tIns="0" rIns="0" bIns="0" rtlCol="0" anchor="ctr"/>
-          <a:lstStyle/>
-          <a:p>
-            <a:pPr marL="0" indent="0">
-              <a:buNone/>
-            </a:pPr>
-            <a:r>
-              <a:rPr lang="en-US" sz="1200">
-                <a:solidFill>
-                  <a:srgbClr val="C9CED6"/>
-                </a:solidFill>
-              </a:rPr>
-              <a:t>The P&amp;L for September 2026 and the year to date</a:t>
-            </a:r>
-            <a:endParaRPr lang="en-US" sz="1200"/>
-          </a:p>
-        </p:txBody>
-      </p:sp>
-    </p:spTree>
-  </p:cSld>
-  <p:clrMapOvr>
-    <a:masterClrMapping/>
-  </p:clrMapOvr>
-</p:sld>
-</file>
-
-<file path=ppt/slides/slide40.xml><?xml version="1.0" encoding="utf-8"?>
+<file path=ppt/slides/slide41.xml><?xml version="1.0" encoding="utf-8"?>
 <p:sld xmlns:a="http://schemas.openxmlformats.org/drawingml/2006/main" xmlns:r="http://schemas.openxmlformats.org/officeDocument/2006/relationships" xmlns:p="http://schemas.openxmlformats.org/presentationml/2006/main">
   <p:cSld>
     <p:bg>
@@ -23184,7 +23781,7 @@
                   <a:srgbClr val="242C39"/>
                 </a:solidFill>
               </a:rPr>
-              <a:t>06</a:t>
+              <a:t>07</a:t>
             </a:r>
             <a:endParaRPr lang="en-US" sz="2600"/>
           </a:p>
@@ -23355,7 +23952,7 @@
 </p:sld>
 </file>
 
-<file path=ppt/slides/slide41.xml><?xml version="1.0" encoding="utf-8"?>
+<file path=ppt/slides/slide42.xml><?xml version="1.0" encoding="utf-8"?>
 <p:sld xmlns:a="http://schemas.openxmlformats.org/drawingml/2006/main" xmlns:r="http://schemas.openxmlformats.org/officeDocument/2006/relationships" xmlns:p="http://schemas.openxmlformats.org/presentationml/2006/main">
   <p:cSld name="Slide 31">
     <p:spTree>

--- a/deck/CTS Monthly Business Review - 30092026.pptx
+++ b/deck/CTS Monthly Business Review - 30092026.pptx
@@ -8773,7 +8773,9 @@
             <a:avLst/>
           </a:prstGeom>
           <a:solidFill>
-            <a:srgbClr val="8F4AFA"/>
+            <a:srgbClr val="8F4AFA">
+              <a:alpha val="55000"/>
+            </a:srgbClr>
           </a:solidFill>
           <a:ln>
             <a:noFill/>
@@ -8817,7 +8819,9 @@
             <a:avLst/>
           </a:prstGeom>
           <a:solidFill>
-            <a:srgbClr val="6D71FF"/>
+            <a:srgbClr val="6D71FF">
+              <a:alpha val="55000"/>
+            </a:srgbClr>
           </a:solidFill>
           <a:ln>
             <a:noFill/>
@@ -8861,7 +8865,9 @@
             <a:avLst/>
           </a:prstGeom>
           <a:solidFill>
-            <a:srgbClr val="3FD0C9"/>
+            <a:srgbClr val="3FD0C9">
+              <a:alpha val="55000"/>
+            </a:srgbClr>
           </a:solidFill>
           <a:ln>
             <a:noFill/>
@@ -8905,7 +8911,9 @@
             <a:avLst/>
           </a:prstGeom>
           <a:solidFill>
-            <a:srgbClr val="005358"/>
+            <a:srgbClr val="005358">
+              <a:alpha val="55000"/>
+            </a:srgbClr>
           </a:solidFill>
           <a:ln>
             <a:noFill/>
@@ -8949,7 +8957,9 @@
             <a:avLst/>
           </a:prstGeom>
           <a:solidFill>
-            <a:srgbClr val="F33844"/>
+            <a:srgbClr val="F33844">
+              <a:alpha val="55000"/>
+            </a:srgbClr>
           </a:solidFill>
           <a:ln>
             <a:noFill/>

--- a/deck/CTS Monthly Business Review - 30092026.pptx
+++ b/deck/CTS Monthly Business Review - 30092026.pptx
@@ -24,6 +24,7 @@
     <p:sldId id="297" r:id="rId18"/>
     <p:sldId id="298" r:id="rId52"/>
     <p:sldId id="299" r:id="rId53"/>
+    <p:sldId id="300" r:id="rId54"/>
     <p:sldId id="262" r:id="rId19"/>
     <p:sldId id="263" r:id="rId20"/>
     <p:sldId id="264" r:id="rId21"/>
@@ -4996,6 +4997,114 @@
 </p:notes>
 </file>
 
+<file path=ppt/notesSlides/notesSlide43.xml><?xml version="1.0" encoding="utf-8"?>
+<p:notes xmlns:a="http://schemas.openxmlformats.org/drawingml/2006/main" xmlns:p="http://schemas.openxmlformats.org/presentationml/2006/main" xmlns:r="http://schemas.openxmlformats.org/officeDocument/2006/relationships">
+  <p:cSld>
+    <p:spTree>
+      <p:nvGrpSpPr>
+        <p:cNvPr id="1" name=""/>
+        <p:cNvGrpSpPr/>
+        <p:nvPr/>
+      </p:nvGrpSpPr>
+      <p:grpSpPr>
+        <a:xfrm>
+          <a:off x="0" y="0"/>
+          <a:ext cx="0" cy="0"/>
+          <a:chOff x="0" y="0"/>
+          <a:chExt cx="0" cy="0"/>
+        </a:xfrm>
+      </p:grpSpPr>
+      <p:sp>
+        <p:nvSpPr>
+          <p:cNvPr id="3" name="Notes Placeholder 2"/>
+          <p:cNvSpPr>
+            <a:spLocks noGrp="1"/>
+          </p:cNvSpPr>
+          <p:nvPr>
+            <p:ph type="body" idx="1"/>
+          </p:nvPr>
+        </p:nvSpPr>
+        <p:spPr/>
+        <p:txBody>
+          <a:bodyPr lIns="107095" tIns="53547" rIns="107095" bIns="53547"/>
+          <a:lstStyle/>
+          <a:p>
+            <a:r>
+              <a:t>Gross profit against the overhead charged to each department for September 2026, taken from section 7 of the Overhead Split tab. The bar above the line is what the department earned, the bar below is the overhead allocated to it, and the diamond is the result.</a:t>
+            </a:r>
+          </a:p>
+          <a:p/>
+          <a:p>
+            <a:r>
+              <a:t>Support earned $101,290 and carries $72,283, leaving $29,007.</a:t>
+            </a:r>
+          </a:p>
+          <a:p>
+            <a:r>
+              <a:t>Events earned $56,881 and carries $111,108, leaving a loss of $54,227.</a:t>
+            </a:r>
+          </a:p>
+          <a:p>
+            <a:r>
+              <a:t>Video earned $5,813 and carries $12,659, leaving a loss of $6,846.</a:t>
+            </a:r>
+          </a:p>
+          <a:p>
+            <a:r>
+              <a:t>Integration earned $23,756 and carries $13,285, leaving $10,471.</a:t>
+            </a:r>
+          </a:p>
+          <a:p>
+            <a:r>
+              <a:t>Consulting earned $74 and carries $19,944, leaving a loss of $19,870.</a:t>
+            </a:r>
+          </a:p>
+          <a:p/>
+          <a:p>
+            <a:r>
+              <a:t>The company earned $187,814 of gross profit against $229,278 of overhead. The $41,464 difference is the loss for the month. Put plainly, the business did not earn enough gross profit to carry its own overhead base.</a:t>
+            </a:r>
+          </a:p>
+          <a:p/>
+          <a:p>
+            <a:r>
+              <a:t>Two things come out of the shape of this chart.</a:t>
+            </a:r>
+          </a:p>
+          <a:p/>
+          <a:p>
+            <a:r>
+              <a:t>The first is Events. Its gross margin was 77.6%, the second highest of the five, and it still produced the largest loss on the page. It carries $111,108 of overhead, which is 48.5% of the company total, on $73,304 of revenue, which is 13.0% of the company total. No improvement in margin fixes that. Either Events carries more revenue or it carries less overhead, and the overhead keys are worth testing before the next budget.</a:t>
+            </a:r>
+          </a:p>
+          <a:p/>
+          <a:p>
+            <a:r>
+              <a:t>The second is Integration. It brought in $234,858 of revenue, the second largest of the five, and converted it into $23,756 of gross profit at a 10.1% margin. It covers its overhead and returns $10,471, so it is not a loss maker, but it is doing the most work for the least return.</a:t>
+            </a:r>
+          </a:p>
+          <a:p/>
+          <a:p>
+            <a:r>
+              <a:t>Support is the one department behaving as it should. A 41.7% margin on contract revenue, covering its allocated overhead, and returning $29,007.</a:t>
+            </a:r>
+          </a:p>
+          <a:p/>
+          <a:p>
+            <a:r>
+              <a:t>The full table is on the next page.</a:t>
+            </a:r>
+          </a:p>
+        </p:txBody>
+      </p:sp>
+    </p:spTree>
+  </p:cSld>
+  <p:clrMapOvr>
+    <a:masterClrMapping/>
+  </p:clrMapOvr>
+</p:notes>
+</file>
+
 <file path=ppt/notesSlides/notesSlide5.xml><?xml version="1.0" encoding="utf-8"?>
 <p:notes xmlns:a="http://schemas.openxmlformats.org/drawingml/2006/main" xmlns:r="http://schemas.openxmlformats.org/officeDocument/2006/relationships" xmlns:p="http://schemas.openxmlformats.org/presentationml/2006/main">
   <p:cSld>
@@ -9168,6 +9277,384 @@
 </file>
 
 <file path=ppt/slides/slide17.xml><?xml version="1.0" encoding="utf-8"?>
+<p:sld xmlns:a="http://schemas.openxmlformats.org/drawingml/2006/main" xmlns:p="http://schemas.openxmlformats.org/presentationml/2006/main" xmlns:r="http://schemas.openxmlformats.org/officeDocument/2006/relationships">
+  <p:cSld>
+    <p:spTree>
+      <p:nvGrpSpPr>
+        <p:cNvPr id="1" name=""/>
+        <p:cNvGrpSpPr/>
+        <p:nvPr/>
+      </p:nvGrpSpPr>
+      <p:grpSpPr/>
+      <p:pic>
+        <p:nvPicPr>
+          <p:cNvPr id="27" name="snip dept_mix" descr="dept_mix.png"/>
+          <p:cNvPicPr>
+            <a:picLocks noChangeAspect="1"/>
+          </p:cNvPicPr>
+          <p:nvPr/>
+        </p:nvPicPr>
+        <p:blipFill>
+          <a:blip r:embed="rId3"/>
+          <a:stretch>
+            <a:fillRect/>
+          </a:stretch>
+        </p:blipFill>
+        <p:spPr>
+          <a:xfrm>
+            <a:off x="535418" y="1005840"/>
+            <a:ext cx="8073163" cy="2523743"/>
+          </a:xfrm>
+          <a:prstGeom prst="rect">
+            <a:avLst/>
+          </a:prstGeom>
+        </p:spPr>
+      </p:pic>
+      <p:sp>
+        <p:nvSpPr>
+          <p:cNvPr id="2" name="Text 0"/>
+          <p:cNvSpPr txBox="1"/>
+          <p:nvPr/>
+        </p:nvSpPr>
+        <p:spPr>
+          <a:xfrm>
+            <a:off x="502920" y="365760"/>
+            <a:ext cx="6400800" cy="274320"/>
+          </a:xfrm>
+          <a:prstGeom prst="rect">
+            <a:avLst/>
+          </a:prstGeom>
+          <a:noFill/>
+          <a:ln/>
+        </p:spPr>
+        <p:txBody>
+          <a:bodyPr wrap="square" lIns="0" tIns="0" rIns="0" bIns="0" rtlCol="0" anchor="ctr"/>
+          <a:lstStyle/>
+          <a:p>
+            <a:pPr marL="0" indent="0">
+              <a:buNone/>
+            </a:pPr>
+            <a:r>
+              <a:rPr lang="en-US" sz="950" b="1" kern="0" spc="220">
+                <a:solidFill>
+                  <a:srgbClr val="122B82"/>
+                </a:solidFill>
+              </a:rPr>
+              <a:t>DEPARTMENTAL PERFORMANCE</a:t>
+            </a:r>
+            <a:endParaRPr lang="en-US" sz="950"/>
+          </a:p>
+        </p:txBody>
+      </p:sp>
+      <p:sp>
+        <p:nvSpPr>
+          <p:cNvPr id="3" name="Text 1"/>
+          <p:cNvSpPr txBox="1"/>
+          <p:nvPr/>
+        </p:nvSpPr>
+        <p:spPr>
+          <a:xfrm>
+            <a:off x="502920" y="640080"/>
+            <a:ext cx="7315200" cy="365760"/>
+          </a:xfrm>
+          <a:prstGeom prst="rect">
+            <a:avLst/>
+          </a:prstGeom>
+          <a:noFill/>
+          <a:ln/>
+        </p:spPr>
+        <p:txBody>
+          <a:bodyPr wrap="square" lIns="0" tIns="0" rIns="0" bIns="0" rtlCol="0" anchor="ctr"/>
+          <a:lstStyle/>
+          <a:p>
+            <a:pPr marL="0" indent="0" algn="ctr">
+              <a:buNone/>
+            </a:pPr>
+            <a:r>
+              <a:rPr lang="en-US" sz="2200" b="1" dirty="0">
+                <a:solidFill>
+                  <a:srgbClr val="242C39"/>
+                </a:solidFill>
+              </a:rPr>
+              <a:t>Departmental result, September 2026</a:t>
+            </a:r>
+            <a:endParaRPr lang="en-US" sz="2700" dirty="0"/>
+          </a:p>
+        </p:txBody>
+      </p:sp>
+      <p:sp>
+        <p:nvSpPr>
+          <p:cNvPr id="6" name="commentary panel"/>
+          <p:cNvSpPr/>
+          <p:nvPr/>
+        </p:nvSpPr>
+        <p:spPr>
+          <a:xfrm>
+            <a:off x="502920" y="3621023"/>
+            <a:ext cx="8138160" cy="1005840"/>
+          </a:xfrm>
+          <a:prstGeom prst="rect">
+            <a:avLst/>
+          </a:prstGeom>
+          <a:solidFill>
+            <a:srgbClr val="E8F9F8"/>
+          </a:solidFill>
+          <a:ln/>
+        </p:spPr>
+        <p:txBody>
+          <a:bodyPr/>
+          <a:lstStyle/>
+          <a:p>
+            <a:endParaRPr lang="en-AU"/>
+          </a:p>
+        </p:txBody>
+      </p:sp>
+      <p:sp>
+        <p:nvSpPr>
+          <p:cNvPr id="7" name="Text 4"/>
+          <p:cNvSpPr txBox="1"/>
+          <p:nvPr/>
+        </p:nvSpPr>
+        <p:spPr>
+          <a:xfrm>
+            <a:off x="685800" y="3694175"/>
+            <a:ext cx="2743200" cy="228600"/>
+          </a:xfrm>
+          <a:prstGeom prst="rect">
+            <a:avLst/>
+          </a:prstGeom>
+          <a:noFill/>
+          <a:ln/>
+        </p:spPr>
+        <p:txBody>
+          <a:bodyPr wrap="square" lIns="0" tIns="0" rIns="0" bIns="0" rtlCol="0" anchor="ctr"/>
+          <a:lstStyle/>
+          <a:p>
+            <a:pPr marL="0" indent="0">
+              <a:buNone/>
+            </a:pPr>
+            <a:r>
+              <a:rPr lang="en-US" sz="900" b="1" kern="0" spc="180">
+                <a:solidFill>
+                  <a:srgbClr val="005358"/>
+                </a:solidFill>
+              </a:rPr>
+              <a:t>COMMENTARY</a:t>
+            </a:r>
+            <a:endParaRPr lang="en-US" sz="900"/>
+          </a:p>
+        </p:txBody>
+      </p:sp>
+      <p:sp>
+        <p:nvSpPr>
+          <p:cNvPr id="8" name="Text 5"/>
+          <p:cNvSpPr txBox="1"/>
+          <p:nvPr/>
+        </p:nvSpPr>
+        <p:spPr>
+          <a:xfrm>
+            <a:off x="685800" y="3867911"/>
+            <a:ext cx="3703320" cy="731520"/>
+          </a:xfrm>
+          <a:prstGeom prst="rect">
+            <a:avLst/>
+          </a:prstGeom>
+          <a:noFill/>
+          <a:ln/>
+        </p:spPr>
+        <p:txBody>
+          <a:bodyPr wrap="square" lIns="0" tIns="0" rIns="0" bIns="0" rtlCol="0" anchor="t">
+            <a:normAutofit fontScale="85000" lnSpcReduction="10000"/>
+          </a:bodyPr>
+          <a:lstStyle/>
+          <a:p>
+            <a:pPr marL="342900" indent="-342900">
+              <a:lnSpc>
+                <a:spcPts val="1050"/>
+              </a:lnSpc>
+              <a:spcAft>
+                <a:spcPts val="400"/>
+              </a:spcAft>
+              <a:buSzPct val="100000"/>
+              <a:buChar char="•"/>
+            </a:pPr>
+            <a:r>
+              <a:rPr lang="en-US" sz="1000">
+                <a:solidFill>
+                  <a:srgbClr val="3A4453"/>
+                </a:solidFill>
+              </a:rPr>
+              <a:t>Gross profit of $188k did not cover overheads of $229k. That gap is the $41k loss.</a:t>
+            </a:r>
+            <a:endParaRPr lang="en-US" sz="850"/>
+          </a:p>
+          <a:p>
+            <a:pPr marL="342900" indent="-342900">
+              <a:lnSpc>
+                <a:spcPts val="1050"/>
+              </a:lnSpc>
+              <a:spcAft>
+                <a:spcPts val="400"/>
+              </a:spcAft>
+              <a:buSzPct val="100000"/>
+              <a:buChar char="•"/>
+            </a:pPr>
+            <a:r>
+              <a:rPr lang="en-US" sz="1000">
+                <a:solidFill>
+                  <a:srgbClr val="3A4453"/>
+                </a:solidFill>
+              </a:rPr>
+              <a:t>Only Support and Integration covered the overhead charged to them.</a:t>
+            </a:r>
+            <a:endParaRPr lang="en-US" sz="850"/>
+          </a:p>
+        </p:txBody>
+      </p:sp>
+      <p:sp>
+        <p:nvSpPr>
+          <p:cNvPr id="25" name="Slide Number Placeholder 0"/>
+          <p:cNvSpPr>
+            <a:spLocks noGrp="1"/>
+          </p:cNvSpPr>
+          <p:nvPr>
+            <p:ph type="sldNum" sz="quarter" idx="4294967295"/>
+          </p:nvPr>
+        </p:nvSpPr>
+        <p:spPr>
+          <a:xfrm>
+            <a:off x="8092440" y="4736592"/>
+            <a:ext cx="548640" cy="228600"/>
+          </a:xfrm>
+          <a:prstGeom prst="rect">
+            <a:avLst/>
+          </a:prstGeom>
+          <a:extLst>
+            <a:ext uri="{C572A759-6A51-4108-AA02-DFA0A04FC94B}">
+              <ma14:wrappingTextBoxFlag xmlns:ma14="http://schemas.microsoft.com/office/mac/drawingml/2011/main" xmlns="" val="0"/>
+            </a:ext>
+          </a:extLst>
+        </p:spPr>
+        <p:txBody>
+          <a:bodyPr/>
+          <a:lstStyle>
+            <a:lvl1pPr>
+              <a:defRPr sz="800">
+                <a:solidFill>
+                  <a:srgbClr val="6B7585"/>
+                </a:solidFill>
+              </a:defRPr>
+            </a:lvl1pPr>
+          </a:lstStyle>
+          <a:p>
+            <a:pPr algn="r"/>
+            <a:fld id="{F7021451-1387-4CA6-816F-3879F97B5CBC}" type="slidenum">
+              <a:rPr lang="en-US" b="0"/>
+              <a:t>9</a:t>
+            </a:fld>
+            <a:endParaRPr lang="en-US"/>
+          </a:p>
+        </p:txBody>
+      </p:sp>
+      <p:sp>
+        <p:nvSpPr>
+          <p:cNvPr id="4" name="Text 5b"/>
+          <p:cNvSpPr txBox="1"/>
+          <p:nvPr/>
+        </p:nvSpPr>
+        <p:spPr>
+          <a:xfrm>
+            <a:off x="4663440" y="3867911"/>
+            <a:ext cx="3703320" cy="731520"/>
+          </a:xfrm>
+          <a:prstGeom prst="rect">
+            <a:avLst/>
+          </a:prstGeom>
+          <a:noFill/>
+          <a:ln/>
+        </p:spPr>
+        <p:txBody>
+          <a:bodyPr wrap="square" lIns="0" tIns="0" rIns="0" bIns="0" rtlCol="0" anchor="t">
+            <a:normAutofit fontScale="85000" lnSpcReduction="10000"/>
+          </a:bodyPr>
+          <a:lstStyle/>
+          <a:p>
+            <a:pPr marL="342900" indent="-342900">
+              <a:lnSpc>
+                <a:spcPts val="1050"/>
+              </a:lnSpc>
+              <a:spcAft>
+                <a:spcPts val="400"/>
+              </a:spcAft>
+              <a:buSzPct val="100000"/>
+              <a:buChar char="•"/>
+            </a:pPr>
+            <a:r>
+              <a:rPr lang="en-US" sz="1000">
+                <a:solidFill>
+                  <a:srgbClr val="3A4453"/>
+                </a:solidFill>
+              </a:rPr>
+              <a:t>Events carries 48% of all overhead on 13% of revenue, so a 78% margin still ends in a $54k loss.</a:t>
+            </a:r>
+            <a:endParaRPr lang="en-US" sz="850"/>
+          </a:p>
+          <a:p>
+            <a:pPr marL="342900" indent="-342900">
+              <a:lnSpc>
+                <a:spcPts val="1050"/>
+              </a:lnSpc>
+              <a:spcAft>
+                <a:spcPts val="400"/>
+              </a:spcAft>
+              <a:buSzPct val="100000"/>
+              <a:buChar char="•"/>
+            </a:pPr>
+            <a:r>
+              <a:rPr lang="en-US" sz="1000">
+                <a:solidFill>
+                  <a:srgbClr val="3A4453"/>
+                </a:solidFill>
+              </a:rPr>
+              <a:t>Consulting earned $74 of gross profit on $4k of revenue and carries $20k of overhead.</a:t>
+            </a:r>
+            <a:endParaRPr lang="en-US" sz="850"/>
+          </a:p>
+        </p:txBody>
+      </p:sp>
+      <p:pic>
+        <p:nvPicPr>
+          <p:cNvPr id="26" name="cts logo" descr="image.png"/>
+          <p:cNvPicPr>
+            <a:picLocks noChangeAspect="1"/>
+          </p:cNvPicPr>
+          <p:nvPr/>
+        </p:nvPicPr>
+        <p:blipFill>
+          <a:blip r:embed="rId2"/>
+          <a:stretch>
+            <a:fillRect/>
+          </a:stretch>
+        </p:blipFill>
+        <p:spPr>
+          <a:xfrm>
+            <a:off x="7680959" y="182880"/>
+            <a:ext cx="960120" cy="539696"/>
+          </a:xfrm>
+          <a:prstGeom prst="rect">
+            <a:avLst/>
+          </a:prstGeom>
+        </p:spPr>
+      </p:pic>
+    </p:spTree>
+  </p:cSld>
+  <p:clrMapOvr>
+    <a:masterClrMapping/>
+  </p:clrMapOvr>
+</p:sld>
+</file>
+
+<file path=ppt/slides/slide18.xml><?xml version="1.0" encoding="utf-8"?>
 <p:sld xmlns:a="http://schemas.openxmlformats.org/drawingml/2006/main" xmlns:r="http://schemas.openxmlformats.org/officeDocument/2006/relationships" xmlns:p="http://schemas.openxmlformats.org/presentationml/2006/main">
   <p:cSld name="Slide 7">
     <p:spTree>
@@ -9250,7 +9737,7 @@
                   <a:srgbClr val="242C39"/>
                 </a:solidFill>
               </a:rPr>
-              <a:t>Departmental result, September 2026</a:t>
+              <a:t>Departmental result in full, September 2026</a:t>
             </a:r>
             <a:endParaRPr lang="en-US" sz="2700" dirty="0"/>
           </a:p>
@@ -9552,7 +10039,7 @@
 </p:sld>
 </file>
 
-<file path=ppt/slides/slide18.xml><?xml version="1.0" encoding="utf-8"?>
+<file path=ppt/slides/slide19.xml><?xml version="1.0" encoding="utf-8"?>
 <p:sld xmlns:a="http://schemas.openxmlformats.org/drawingml/2006/main" xmlns:r="http://schemas.openxmlformats.org/officeDocument/2006/relationships" xmlns:p="http://schemas.openxmlformats.org/presentationml/2006/main">
   <p:cSld name="Slide 8">
     <p:spTree>
@@ -9929,412 +10416,6 @@
           </a:prstGeom>
         </p:spPr>
       </p:pic>
-    </p:spTree>
-  </p:cSld>
-  <p:clrMapOvr>
-    <a:masterClrMapping/>
-  </p:clrMapOvr>
-</p:sld>
-</file>
-
-<file path=ppt/slides/slide19.xml><?xml version="1.0" encoding="utf-8"?>
-<p:sld xmlns:a="http://schemas.openxmlformats.org/drawingml/2006/main" xmlns:r="http://schemas.openxmlformats.org/officeDocument/2006/relationships" xmlns:p="http://schemas.openxmlformats.org/presentationml/2006/main">
-  <p:cSld name="Slide 9">
-    <p:spTree>
-      <p:nvGrpSpPr>
-        <p:cNvPr id="1" name=""/>
-        <p:cNvGrpSpPr/>
-        <p:nvPr/>
-      </p:nvGrpSpPr>
-      <p:grpSpPr>
-        <a:xfrm>
-          <a:off x="0" y="0"/>
-          <a:ext cx="0" cy="0"/>
-          <a:chOff x="0" y="0"/>
-          <a:chExt cx="0" cy="0"/>
-        </a:xfrm>
-      </p:grpSpPr>
-      <p:pic>
-        <p:nvPicPr>
-          <p:cNvPr id="27" name="snip dept_Support" descr="dept_Support.png"/>
-          <p:cNvPicPr>
-            <a:picLocks noChangeAspect="1"/>
-          </p:cNvPicPr>
-          <p:nvPr/>
-        </p:nvPicPr>
-        <p:blipFill>
-          <a:blip r:embed="rId3"/>
-          <a:stretch>
-            <a:fillRect/>
-          </a:stretch>
-        </p:blipFill>
-        <p:spPr>
-          <a:xfrm>
-            <a:off x="974377" y="1005840"/>
-            <a:ext cx="7195245" cy="2130551"/>
-          </a:xfrm>
-          <a:prstGeom prst="rect">
-            <a:avLst/>
-          </a:prstGeom>
-        </p:spPr>
-      </p:pic>
-      <p:sp>
-        <p:nvSpPr>
-          <p:cNvPr id="2" name="Text 0"/>
-          <p:cNvSpPr txBox="1"/>
-          <p:nvPr/>
-        </p:nvSpPr>
-        <p:spPr>
-          <a:xfrm>
-            <a:off x="502920" y="365760"/>
-            <a:ext cx="6400800" cy="274320"/>
-          </a:xfrm>
-          <a:prstGeom prst="rect">
-            <a:avLst/>
-          </a:prstGeom>
-          <a:noFill/>
-          <a:ln/>
-        </p:spPr>
-        <p:txBody>
-          <a:bodyPr wrap="square" lIns="0" tIns="0" rIns="0" bIns="0" rtlCol="0" anchor="ctr"/>
-          <a:lstStyle/>
-          <a:p>
-            <a:pPr marL="0" indent="0">
-              <a:buNone/>
-            </a:pPr>
-            <a:r>
-              <a:rPr lang="en-US" sz="950" b="1" kern="0" spc="220">
-                <a:solidFill>
-                  <a:srgbClr val="122B82"/>
-                </a:solidFill>
-              </a:rPr>
-              <a:t>DEPARTMENTAL PERFORMANCE</a:t>
-            </a:r>
-            <a:endParaRPr lang="en-US" sz="950"/>
-          </a:p>
-        </p:txBody>
-      </p:sp>
-      <p:sp>
-        <p:nvSpPr>
-          <p:cNvPr id="3" name="Text 1"/>
-          <p:cNvSpPr txBox="1"/>
-          <p:nvPr/>
-        </p:nvSpPr>
-        <p:spPr>
-          <a:xfrm>
-            <a:off x="502920" y="640080"/>
-            <a:ext cx="7315200" cy="365760"/>
-          </a:xfrm>
-          <a:prstGeom prst="rect">
-            <a:avLst/>
-          </a:prstGeom>
-          <a:noFill/>
-          <a:ln/>
-        </p:spPr>
-        <p:txBody>
-          <a:bodyPr wrap="square" lIns="0" tIns="0" rIns="0" bIns="0" rtlCol="0" anchor="ctr"/>
-          <a:lstStyle/>
-          <a:p>
-            <a:pPr marL="0" indent="0" algn="ctr">
-              <a:buNone/>
-            </a:pPr>
-            <a:r>
-              <a:rPr lang="en-US" sz="2200" b="1" dirty="0">
-                <a:solidFill>
-                  <a:srgbClr val="242C39"/>
-                </a:solidFill>
-              </a:rPr>
-              <a:t>Support, September 2026</a:t>
-            </a:r>
-            <a:endParaRPr lang="en-US" sz="2700" dirty="0"/>
-          </a:p>
-        </p:txBody>
-      </p:sp>
-      <p:sp>
-        <p:nvSpPr>
-          <p:cNvPr id="6" name="commentary panel"/>
-          <p:cNvSpPr/>
-          <p:nvPr/>
-        </p:nvSpPr>
-        <p:spPr>
-          <a:xfrm>
-            <a:off x="502920" y="3227831"/>
-            <a:ext cx="8138160" cy="1399032"/>
-          </a:xfrm>
-          <a:prstGeom prst="rect">
-            <a:avLst/>
-          </a:prstGeom>
-          <a:solidFill>
-            <a:srgbClr val="E8F9F8"/>
-          </a:solidFill>
-          <a:ln/>
-        </p:spPr>
-        <p:txBody>
-          <a:bodyPr/>
-          <a:lstStyle/>
-          <a:p>
-            <a:endParaRPr lang="en-AU"/>
-          </a:p>
-        </p:txBody>
-      </p:sp>
-      <p:sp>
-        <p:nvSpPr>
-          <p:cNvPr id="7" name="Text 4"/>
-          <p:cNvSpPr txBox="1"/>
-          <p:nvPr/>
-        </p:nvSpPr>
-        <p:spPr>
-          <a:xfrm>
-            <a:off x="685800" y="3300983"/>
-            <a:ext cx="2743200" cy="228600"/>
-          </a:xfrm>
-          <a:prstGeom prst="rect">
-            <a:avLst/>
-          </a:prstGeom>
-          <a:noFill/>
-          <a:ln/>
-        </p:spPr>
-        <p:txBody>
-          <a:bodyPr wrap="square" lIns="0" tIns="0" rIns="0" bIns="0" rtlCol="0" anchor="ctr"/>
-          <a:lstStyle/>
-          <a:p>
-            <a:pPr marL="0" indent="0">
-              <a:buNone/>
-            </a:pPr>
-            <a:r>
-              <a:rPr lang="en-US" sz="900" b="1" kern="0" spc="180">
-                <a:solidFill>
-                  <a:srgbClr val="005358"/>
-                </a:solidFill>
-              </a:rPr>
-              <a:t>COMMENTARY</a:t>
-            </a:r>
-            <a:endParaRPr lang="en-US" sz="900"/>
-          </a:p>
-        </p:txBody>
-      </p:sp>
-      <p:sp>
-        <p:nvSpPr>
-          <p:cNvPr id="8" name="Text 5"/>
-          <p:cNvSpPr txBox="1"/>
-          <p:nvPr/>
-        </p:nvSpPr>
-        <p:spPr>
-          <a:xfrm>
-            <a:off x="685800" y="3474719"/>
-            <a:ext cx="3703320" cy="1124712"/>
-          </a:xfrm>
-          <a:prstGeom prst="rect">
-            <a:avLst/>
-          </a:prstGeom>
-          <a:noFill/>
-          <a:ln/>
-        </p:spPr>
-        <p:txBody>
-          <a:bodyPr wrap="square" lIns="0" tIns="0" rIns="0" bIns="0" rtlCol="0" anchor="t">
-            <a:normAutofit/>
-          </a:bodyPr>
-          <a:lstStyle/>
-          <a:p>
-            <a:pPr marL="342900" indent="-342900">
-              <a:lnSpc>
-                <a:spcPts val="1050"/>
-              </a:lnSpc>
-              <a:spcAft>
-                <a:spcPts val="400"/>
-              </a:spcAft>
-              <a:buSzPct val="100000"/>
-              <a:buChar char="•"/>
-            </a:pPr>
-            <a:r>
-              <a:rPr lang="en-US" sz="1000">
-                <a:solidFill>
-                  <a:srgbClr val="3A4453"/>
-                </a:solidFill>
-              </a:rPr>
-              <a:t>Support generated $243k revenue against a $248k budget, broadly in line with expected recurring contract income.</a:t>
-            </a:r>
-            <a:endParaRPr lang="en-US" sz="850"/>
-          </a:p>
-          <a:p>
-            <a:pPr marL="342900" indent="-342900">
-              <a:lnSpc>
-                <a:spcPts val="1050"/>
-              </a:lnSpc>
-              <a:spcAft>
-                <a:spcPts val="400"/>
-              </a:spcAft>
-              <a:buSzPct val="100000"/>
-              <a:buChar char="•"/>
-            </a:pPr>
-            <a:r>
-              <a:rPr lang="en-US" sz="1000">
-                <a:solidFill>
-                  <a:srgbClr val="3A4453"/>
-                </a:solidFill>
-              </a:rPr>
-              <a:t>Gross margin was 41.7%, compared with 41.0% in September last year.</a:t>
-            </a:r>
-            <a:endParaRPr lang="en-US" sz="850"/>
-          </a:p>
-        </p:txBody>
-      </p:sp>
-      <p:sp>
-        <p:nvSpPr>
-          <p:cNvPr id="25" name="Slide Number Placeholder 0"/>
-          <p:cNvSpPr>
-            <a:spLocks noGrp="1"/>
-          </p:cNvSpPr>
-          <p:nvPr>
-            <p:ph type="sldNum" sz="quarter" idx="4294967295"/>
-          </p:nvPr>
-        </p:nvSpPr>
-        <p:spPr>
-          <a:xfrm>
-            <a:off x="8092440" y="4736592"/>
-            <a:ext cx="548640" cy="228600"/>
-          </a:xfrm>
-          <a:prstGeom prst="rect">
-            <a:avLst/>
-          </a:prstGeom>
-          <a:extLst>
-            <a:ext uri="{C572A759-6A51-4108-AA02-DFA0A04FC94B}">
-              <ma14:wrappingTextBoxFlag xmlns:ma14="http://schemas.microsoft.com/office/mac/drawingml/2011/main" xmlns="" val="0"/>
-            </a:ext>
-          </a:extLst>
-        </p:spPr>
-        <p:txBody>
-          <a:bodyPr/>
-          <a:lstStyle>
-            <a:lvl1pPr>
-              <a:defRPr sz="800">
-                <a:solidFill>
-                  <a:srgbClr val="6B7585"/>
-                </a:solidFill>
-              </a:defRPr>
-            </a:lvl1pPr>
-          </a:lstStyle>
-          <a:p>
-            <a:pPr algn="r"/>
-            <a:fld id="{F7021451-1387-4CA6-816F-3879F97B5CBC}" type="slidenum">
-              <a:rPr lang="en-US" b="0"/>
-              <a:t>17</a:t>
-            </a:fld>
-            <a:endParaRPr lang="en-US"/>
-          </a:p>
-        </p:txBody>
-      </p:sp>
-      <p:pic>
-        <p:nvPicPr>
-          <p:cNvPr id="26" name="cts logo" descr="cts-logo.png"/>
-          <p:cNvPicPr>
-            <a:picLocks noChangeAspect="1"/>
-          </p:cNvPicPr>
-          <p:nvPr/>
-        </p:nvPicPr>
-        <p:blipFill>
-          <a:blip r:embed="rId4"/>
-          <a:stretch>
-            <a:fillRect/>
-          </a:stretch>
-        </p:blipFill>
-        <p:spPr>
-          <a:xfrm>
-            <a:off x="7680959" y="182880"/>
-            <a:ext cx="960120" cy="539696"/>
-          </a:xfrm>
-          <a:prstGeom prst="rect">
-            <a:avLst/>
-          </a:prstGeom>
-        </p:spPr>
-      </p:pic>
-      <p:sp>
-        <p:nvSpPr>
-          <p:cNvPr id="4" name="Text 5b"/>
-          <p:cNvSpPr txBox="1"/>
-          <p:nvPr/>
-        </p:nvSpPr>
-        <p:spPr>
-          <a:xfrm>
-            <a:off x="4663440" y="3474719"/>
-            <a:ext cx="3703320" cy="1124712"/>
-          </a:xfrm>
-          <a:prstGeom prst="rect">
-            <a:avLst/>
-          </a:prstGeom>
-          <a:noFill/>
-          <a:ln/>
-        </p:spPr>
-        <p:txBody>
-          <a:bodyPr wrap="square" lIns="0" tIns="0" rIns="0" bIns="0" rtlCol="0" anchor="t">
-            <a:normAutofit/>
-          </a:bodyPr>
-          <a:lstStyle/>
-          <a:p>
-            <a:pPr marL="342900" indent="-342900">
-              <a:lnSpc>
-                <a:spcPts val="1050"/>
-              </a:lnSpc>
-              <a:spcAft>
-                <a:spcPts val="400"/>
-              </a:spcAft>
-              <a:buSzPct val="100000"/>
-              <a:buChar char="•"/>
-            </a:pPr>
-            <a:r>
-              <a:rPr lang="en-US" sz="1000">
-                <a:solidFill>
-                  <a:srgbClr val="3A4453"/>
-                </a:solidFill>
-              </a:rPr>
-              <a:t>After $72k of allocated overheads, Support recorded a $29k profit.</a:t>
-            </a:r>
-            <a:endParaRPr lang="en-US" sz="850"/>
-          </a:p>
-          <a:p>
-            <a:pPr marL="342900" indent="-342900">
-              <a:lnSpc>
-                <a:spcPts val="1050"/>
-              </a:lnSpc>
-              <a:spcAft>
-                <a:spcPts val="400"/>
-              </a:spcAft>
-              <a:buSzPct val="100000"/>
-              <a:buChar char="•"/>
-            </a:pPr>
-            <a:r>
-              <a:rPr lang="en-US" sz="1000">
-                <a:solidFill>
-                  <a:srgbClr val="3A4453"/>
-                </a:solidFill>
-              </a:rPr>
-              <a:t>Its allocated office wages were $42k, reflecting the established allocation method.</a:t>
-            </a:r>
-            <a:endParaRPr lang="en-US" sz="850"/>
-          </a:p>
-          <a:p>
-            <a:pPr marL="342900" indent="-342900">
-              <a:lnSpc>
-                <a:spcPts val="1050"/>
-              </a:lnSpc>
-              <a:spcAft>
-                <a:spcPts val="400"/>
-              </a:spcAft>
-              <a:buSzPct val="100000"/>
-              <a:buChar char="•"/>
-            </a:pPr>
-            <a:r>
-              <a:rPr lang="en-US" sz="1000">
-                <a:solidFill>
-                  <a:srgbClr val="3A4453"/>
-                </a:solidFill>
-              </a:rPr>
-              <a:t>Chargeable utilisation reached 91.2%, above the 88% target and the strongest result across the groups.</a:t>
-            </a:r>
-            <a:endParaRPr lang="en-US" sz="850"/>
-          </a:p>
-        </p:txBody>
-      </p:sp>
     </p:spTree>
   </p:cSld>
   <p:clrMapOvr>
@@ -11321,6 +11402,412 @@
 
 <file path=ppt/slides/slide20.xml><?xml version="1.0" encoding="utf-8"?>
 <p:sld xmlns:a="http://schemas.openxmlformats.org/drawingml/2006/main" xmlns:r="http://schemas.openxmlformats.org/officeDocument/2006/relationships" xmlns:p="http://schemas.openxmlformats.org/presentationml/2006/main">
+  <p:cSld name="Slide 9">
+    <p:spTree>
+      <p:nvGrpSpPr>
+        <p:cNvPr id="1" name=""/>
+        <p:cNvGrpSpPr/>
+        <p:nvPr/>
+      </p:nvGrpSpPr>
+      <p:grpSpPr>
+        <a:xfrm>
+          <a:off x="0" y="0"/>
+          <a:ext cx="0" cy="0"/>
+          <a:chOff x="0" y="0"/>
+          <a:chExt cx="0" cy="0"/>
+        </a:xfrm>
+      </p:grpSpPr>
+      <p:pic>
+        <p:nvPicPr>
+          <p:cNvPr id="27" name="snip dept_Support" descr="dept_Support.png"/>
+          <p:cNvPicPr>
+            <a:picLocks noChangeAspect="1"/>
+          </p:cNvPicPr>
+          <p:nvPr/>
+        </p:nvPicPr>
+        <p:blipFill>
+          <a:blip r:embed="rId3"/>
+          <a:stretch>
+            <a:fillRect/>
+          </a:stretch>
+        </p:blipFill>
+        <p:spPr>
+          <a:xfrm>
+            <a:off x="974377" y="1005840"/>
+            <a:ext cx="7195245" cy="2130551"/>
+          </a:xfrm>
+          <a:prstGeom prst="rect">
+            <a:avLst/>
+          </a:prstGeom>
+        </p:spPr>
+      </p:pic>
+      <p:sp>
+        <p:nvSpPr>
+          <p:cNvPr id="2" name="Text 0"/>
+          <p:cNvSpPr txBox="1"/>
+          <p:nvPr/>
+        </p:nvSpPr>
+        <p:spPr>
+          <a:xfrm>
+            <a:off x="502920" y="365760"/>
+            <a:ext cx="6400800" cy="274320"/>
+          </a:xfrm>
+          <a:prstGeom prst="rect">
+            <a:avLst/>
+          </a:prstGeom>
+          <a:noFill/>
+          <a:ln/>
+        </p:spPr>
+        <p:txBody>
+          <a:bodyPr wrap="square" lIns="0" tIns="0" rIns="0" bIns="0" rtlCol="0" anchor="ctr"/>
+          <a:lstStyle/>
+          <a:p>
+            <a:pPr marL="0" indent="0">
+              <a:buNone/>
+            </a:pPr>
+            <a:r>
+              <a:rPr lang="en-US" sz="950" b="1" kern="0" spc="220">
+                <a:solidFill>
+                  <a:srgbClr val="122B82"/>
+                </a:solidFill>
+              </a:rPr>
+              <a:t>DEPARTMENTAL PERFORMANCE</a:t>
+            </a:r>
+            <a:endParaRPr lang="en-US" sz="950"/>
+          </a:p>
+        </p:txBody>
+      </p:sp>
+      <p:sp>
+        <p:nvSpPr>
+          <p:cNvPr id="3" name="Text 1"/>
+          <p:cNvSpPr txBox="1"/>
+          <p:nvPr/>
+        </p:nvSpPr>
+        <p:spPr>
+          <a:xfrm>
+            <a:off x="502920" y="640080"/>
+            <a:ext cx="7315200" cy="365760"/>
+          </a:xfrm>
+          <a:prstGeom prst="rect">
+            <a:avLst/>
+          </a:prstGeom>
+          <a:noFill/>
+          <a:ln/>
+        </p:spPr>
+        <p:txBody>
+          <a:bodyPr wrap="square" lIns="0" tIns="0" rIns="0" bIns="0" rtlCol="0" anchor="ctr"/>
+          <a:lstStyle/>
+          <a:p>
+            <a:pPr marL="0" indent="0" algn="ctr">
+              <a:buNone/>
+            </a:pPr>
+            <a:r>
+              <a:rPr lang="en-US" sz="2200" b="1" dirty="0">
+                <a:solidFill>
+                  <a:srgbClr val="242C39"/>
+                </a:solidFill>
+              </a:rPr>
+              <a:t>Support, September 2026</a:t>
+            </a:r>
+            <a:endParaRPr lang="en-US" sz="2700" dirty="0"/>
+          </a:p>
+        </p:txBody>
+      </p:sp>
+      <p:sp>
+        <p:nvSpPr>
+          <p:cNvPr id="6" name="commentary panel"/>
+          <p:cNvSpPr/>
+          <p:nvPr/>
+        </p:nvSpPr>
+        <p:spPr>
+          <a:xfrm>
+            <a:off x="502920" y="3227831"/>
+            <a:ext cx="8138160" cy="1399032"/>
+          </a:xfrm>
+          <a:prstGeom prst="rect">
+            <a:avLst/>
+          </a:prstGeom>
+          <a:solidFill>
+            <a:srgbClr val="E8F9F8"/>
+          </a:solidFill>
+          <a:ln/>
+        </p:spPr>
+        <p:txBody>
+          <a:bodyPr/>
+          <a:lstStyle/>
+          <a:p>
+            <a:endParaRPr lang="en-AU"/>
+          </a:p>
+        </p:txBody>
+      </p:sp>
+      <p:sp>
+        <p:nvSpPr>
+          <p:cNvPr id="7" name="Text 4"/>
+          <p:cNvSpPr txBox="1"/>
+          <p:nvPr/>
+        </p:nvSpPr>
+        <p:spPr>
+          <a:xfrm>
+            <a:off x="685800" y="3300983"/>
+            <a:ext cx="2743200" cy="228600"/>
+          </a:xfrm>
+          <a:prstGeom prst="rect">
+            <a:avLst/>
+          </a:prstGeom>
+          <a:noFill/>
+          <a:ln/>
+        </p:spPr>
+        <p:txBody>
+          <a:bodyPr wrap="square" lIns="0" tIns="0" rIns="0" bIns="0" rtlCol="0" anchor="ctr"/>
+          <a:lstStyle/>
+          <a:p>
+            <a:pPr marL="0" indent="0">
+              <a:buNone/>
+            </a:pPr>
+            <a:r>
+              <a:rPr lang="en-US" sz="900" b="1" kern="0" spc="180">
+                <a:solidFill>
+                  <a:srgbClr val="005358"/>
+                </a:solidFill>
+              </a:rPr>
+              <a:t>COMMENTARY</a:t>
+            </a:r>
+            <a:endParaRPr lang="en-US" sz="900"/>
+          </a:p>
+        </p:txBody>
+      </p:sp>
+      <p:sp>
+        <p:nvSpPr>
+          <p:cNvPr id="8" name="Text 5"/>
+          <p:cNvSpPr txBox="1"/>
+          <p:nvPr/>
+        </p:nvSpPr>
+        <p:spPr>
+          <a:xfrm>
+            <a:off x="685800" y="3474719"/>
+            <a:ext cx="3703320" cy="1124712"/>
+          </a:xfrm>
+          <a:prstGeom prst="rect">
+            <a:avLst/>
+          </a:prstGeom>
+          <a:noFill/>
+          <a:ln/>
+        </p:spPr>
+        <p:txBody>
+          <a:bodyPr wrap="square" lIns="0" tIns="0" rIns="0" bIns="0" rtlCol="0" anchor="t">
+            <a:normAutofit/>
+          </a:bodyPr>
+          <a:lstStyle/>
+          <a:p>
+            <a:pPr marL="342900" indent="-342900">
+              <a:lnSpc>
+                <a:spcPts val="1050"/>
+              </a:lnSpc>
+              <a:spcAft>
+                <a:spcPts val="400"/>
+              </a:spcAft>
+              <a:buSzPct val="100000"/>
+              <a:buChar char="•"/>
+            </a:pPr>
+            <a:r>
+              <a:rPr lang="en-US" sz="1000">
+                <a:solidFill>
+                  <a:srgbClr val="3A4453"/>
+                </a:solidFill>
+              </a:rPr>
+              <a:t>Support generated $243k revenue against a $248k budget, broadly in line with expected recurring contract income.</a:t>
+            </a:r>
+            <a:endParaRPr lang="en-US" sz="850"/>
+          </a:p>
+          <a:p>
+            <a:pPr marL="342900" indent="-342900">
+              <a:lnSpc>
+                <a:spcPts val="1050"/>
+              </a:lnSpc>
+              <a:spcAft>
+                <a:spcPts val="400"/>
+              </a:spcAft>
+              <a:buSzPct val="100000"/>
+              <a:buChar char="•"/>
+            </a:pPr>
+            <a:r>
+              <a:rPr lang="en-US" sz="1000">
+                <a:solidFill>
+                  <a:srgbClr val="3A4453"/>
+                </a:solidFill>
+              </a:rPr>
+              <a:t>Gross margin was 41.7%, compared with 41.0% in September last year.</a:t>
+            </a:r>
+            <a:endParaRPr lang="en-US" sz="850"/>
+          </a:p>
+        </p:txBody>
+      </p:sp>
+      <p:sp>
+        <p:nvSpPr>
+          <p:cNvPr id="25" name="Slide Number Placeholder 0"/>
+          <p:cNvSpPr>
+            <a:spLocks noGrp="1"/>
+          </p:cNvSpPr>
+          <p:nvPr>
+            <p:ph type="sldNum" sz="quarter" idx="4294967295"/>
+          </p:nvPr>
+        </p:nvSpPr>
+        <p:spPr>
+          <a:xfrm>
+            <a:off x="8092440" y="4736592"/>
+            <a:ext cx="548640" cy="228600"/>
+          </a:xfrm>
+          <a:prstGeom prst="rect">
+            <a:avLst/>
+          </a:prstGeom>
+          <a:extLst>
+            <a:ext uri="{C572A759-6A51-4108-AA02-DFA0A04FC94B}">
+              <ma14:wrappingTextBoxFlag xmlns:ma14="http://schemas.microsoft.com/office/mac/drawingml/2011/main" xmlns="" val="0"/>
+            </a:ext>
+          </a:extLst>
+        </p:spPr>
+        <p:txBody>
+          <a:bodyPr/>
+          <a:lstStyle>
+            <a:lvl1pPr>
+              <a:defRPr sz="800">
+                <a:solidFill>
+                  <a:srgbClr val="6B7585"/>
+                </a:solidFill>
+              </a:defRPr>
+            </a:lvl1pPr>
+          </a:lstStyle>
+          <a:p>
+            <a:pPr algn="r"/>
+            <a:fld id="{F7021451-1387-4CA6-816F-3879F97B5CBC}" type="slidenum">
+              <a:rPr lang="en-US" b="0"/>
+              <a:t>17</a:t>
+            </a:fld>
+            <a:endParaRPr lang="en-US"/>
+          </a:p>
+        </p:txBody>
+      </p:sp>
+      <p:pic>
+        <p:nvPicPr>
+          <p:cNvPr id="26" name="cts logo" descr="cts-logo.png"/>
+          <p:cNvPicPr>
+            <a:picLocks noChangeAspect="1"/>
+          </p:cNvPicPr>
+          <p:nvPr/>
+        </p:nvPicPr>
+        <p:blipFill>
+          <a:blip r:embed="rId4"/>
+          <a:stretch>
+            <a:fillRect/>
+          </a:stretch>
+        </p:blipFill>
+        <p:spPr>
+          <a:xfrm>
+            <a:off x="7680959" y="182880"/>
+            <a:ext cx="960120" cy="539696"/>
+          </a:xfrm>
+          <a:prstGeom prst="rect">
+            <a:avLst/>
+          </a:prstGeom>
+        </p:spPr>
+      </p:pic>
+      <p:sp>
+        <p:nvSpPr>
+          <p:cNvPr id="4" name="Text 5b"/>
+          <p:cNvSpPr txBox="1"/>
+          <p:nvPr/>
+        </p:nvSpPr>
+        <p:spPr>
+          <a:xfrm>
+            <a:off x="4663440" y="3474719"/>
+            <a:ext cx="3703320" cy="1124712"/>
+          </a:xfrm>
+          <a:prstGeom prst="rect">
+            <a:avLst/>
+          </a:prstGeom>
+          <a:noFill/>
+          <a:ln/>
+        </p:spPr>
+        <p:txBody>
+          <a:bodyPr wrap="square" lIns="0" tIns="0" rIns="0" bIns="0" rtlCol="0" anchor="t">
+            <a:normAutofit/>
+          </a:bodyPr>
+          <a:lstStyle/>
+          <a:p>
+            <a:pPr marL="342900" indent="-342900">
+              <a:lnSpc>
+                <a:spcPts val="1050"/>
+              </a:lnSpc>
+              <a:spcAft>
+                <a:spcPts val="400"/>
+              </a:spcAft>
+              <a:buSzPct val="100000"/>
+              <a:buChar char="•"/>
+            </a:pPr>
+            <a:r>
+              <a:rPr lang="en-US" sz="1000">
+                <a:solidFill>
+                  <a:srgbClr val="3A4453"/>
+                </a:solidFill>
+              </a:rPr>
+              <a:t>After $72k of allocated overheads, Support recorded a $29k profit.</a:t>
+            </a:r>
+            <a:endParaRPr lang="en-US" sz="850"/>
+          </a:p>
+          <a:p>
+            <a:pPr marL="342900" indent="-342900">
+              <a:lnSpc>
+                <a:spcPts val="1050"/>
+              </a:lnSpc>
+              <a:spcAft>
+                <a:spcPts val="400"/>
+              </a:spcAft>
+              <a:buSzPct val="100000"/>
+              <a:buChar char="•"/>
+            </a:pPr>
+            <a:r>
+              <a:rPr lang="en-US" sz="1000">
+                <a:solidFill>
+                  <a:srgbClr val="3A4453"/>
+                </a:solidFill>
+              </a:rPr>
+              <a:t>Its allocated office wages were $42k, reflecting the established allocation method.</a:t>
+            </a:r>
+            <a:endParaRPr lang="en-US" sz="850"/>
+          </a:p>
+          <a:p>
+            <a:pPr marL="342900" indent="-342900">
+              <a:lnSpc>
+                <a:spcPts val="1050"/>
+              </a:lnSpc>
+              <a:spcAft>
+                <a:spcPts val="400"/>
+              </a:spcAft>
+              <a:buSzPct val="100000"/>
+              <a:buChar char="•"/>
+            </a:pPr>
+            <a:r>
+              <a:rPr lang="en-US" sz="1000">
+                <a:solidFill>
+                  <a:srgbClr val="3A4453"/>
+                </a:solidFill>
+              </a:rPr>
+              <a:t>Chargeable utilisation reached 91.2%, above the 88% target and the strongest result across the groups.</a:t>
+            </a:r>
+            <a:endParaRPr lang="en-US" sz="850"/>
+          </a:p>
+        </p:txBody>
+      </p:sp>
+    </p:spTree>
+  </p:cSld>
+  <p:clrMapOvr>
+    <a:masterClrMapping/>
+  </p:clrMapOvr>
+</p:sld>
+</file>
+
+<file path=ppt/slides/slide21.xml><?xml version="1.0" encoding="utf-8"?>
+<p:sld xmlns:a="http://schemas.openxmlformats.org/drawingml/2006/main" xmlns:r="http://schemas.openxmlformats.org/officeDocument/2006/relationships" xmlns:p="http://schemas.openxmlformats.org/presentationml/2006/main">
   <p:cSld name="Slide 10">
     <p:spTree>
       <p:nvGrpSpPr>
@@ -11725,7 +12212,7 @@
 </p:sld>
 </file>
 
-<file path=ppt/slides/slide21.xml><?xml version="1.0" encoding="utf-8"?>
+<file path=ppt/slides/slide22.xml><?xml version="1.0" encoding="utf-8"?>
 <p:sld xmlns:a="http://schemas.openxmlformats.org/drawingml/2006/main" xmlns:r="http://schemas.openxmlformats.org/officeDocument/2006/relationships" xmlns:p="http://schemas.openxmlformats.org/presentationml/2006/main">
   <p:cSld name="Slide 11">
     <p:spTree>
@@ -12131,7 +12618,7 @@
 </p:sld>
 </file>
 
-<file path=ppt/slides/slide22.xml><?xml version="1.0" encoding="utf-8"?>
+<file path=ppt/slides/slide23.xml><?xml version="1.0" encoding="utf-8"?>
 <p:sld xmlns:a="http://schemas.openxmlformats.org/drawingml/2006/main" xmlns:r="http://schemas.openxmlformats.org/officeDocument/2006/relationships" xmlns:p="http://schemas.openxmlformats.org/presentationml/2006/main">
   <p:cSld name="Slide 12">
     <p:spTree>
@@ -12537,7 +13024,7 @@
 </p:sld>
 </file>
 
-<file path=ppt/slides/slide23.xml><?xml version="1.0" encoding="utf-8"?>
+<file path=ppt/slides/slide24.xml><?xml version="1.0" encoding="utf-8"?>
 <p:sld xmlns:a="http://schemas.openxmlformats.org/drawingml/2006/main" xmlns:r="http://schemas.openxmlformats.org/officeDocument/2006/relationships" xmlns:p="http://schemas.openxmlformats.org/presentationml/2006/main">
   <p:cSld name="Slide 13">
     <p:spTree>
@@ -12943,7 +13430,7 @@
 </p:sld>
 </file>
 
-<file path=ppt/slides/slide24.xml><?xml version="1.0" encoding="utf-8"?>
+<file path=ppt/slides/slide25.xml><?xml version="1.0" encoding="utf-8"?>
 <p:sld xmlns:a="http://schemas.openxmlformats.org/drawingml/2006/main" xmlns:r="http://schemas.openxmlformats.org/officeDocument/2006/relationships" xmlns:p="http://schemas.openxmlformats.org/presentationml/2006/main">
   <p:cSld name="Slide 14">
     <p:spTree>
@@ -13349,7 +13836,7 @@
 </p:sld>
 </file>
 
-<file path=ppt/slides/slide25.xml><?xml version="1.0" encoding="utf-8"?>
+<file path=ppt/slides/slide26.xml><?xml version="1.0" encoding="utf-8"?>
 <p:sld xmlns:a="http://schemas.openxmlformats.org/drawingml/2006/main" xmlns:r="http://schemas.openxmlformats.org/officeDocument/2006/relationships" xmlns:p="http://schemas.openxmlformats.org/presentationml/2006/main">
   <p:cSld name="Slide 15">
     <p:spTree>
@@ -13632,7 +14119,7 @@
 </p:sld>
 </file>
 
-<file path=ppt/slides/slide26.xml><?xml version="1.0" encoding="utf-8"?>
+<file path=ppt/slides/slide27.xml><?xml version="1.0" encoding="utf-8"?>
 <p:sld xmlns:a="http://schemas.openxmlformats.org/drawingml/2006/main" xmlns:r="http://schemas.openxmlformats.org/officeDocument/2006/relationships" xmlns:p="http://schemas.openxmlformats.org/presentationml/2006/main">
   <p:cSld name="Slide 16">
     <p:spTree>
@@ -14038,7 +14525,7 @@
 </p:sld>
 </file>
 
-<file path=ppt/slides/slide27.xml><?xml version="1.0" encoding="utf-8"?>
+<file path=ppt/slides/slide28.xml><?xml version="1.0" encoding="utf-8"?>
 <p:sld xmlns:a="http://schemas.openxmlformats.org/drawingml/2006/main" xmlns:r="http://schemas.openxmlformats.org/officeDocument/2006/relationships" xmlns:p="http://schemas.openxmlformats.org/presentationml/2006/main">
   <p:cSld name="Slide 17">
     <p:spTree>
@@ -14444,7 +14931,7 @@
 </p:sld>
 </file>
 
-<file path=ppt/slides/slide28.xml><?xml version="1.0" encoding="utf-8"?>
+<file path=ppt/slides/slide29.xml><?xml version="1.0" encoding="utf-8"?>
 <p:sld xmlns:a="http://schemas.openxmlformats.org/drawingml/2006/main" xmlns:r="http://schemas.openxmlformats.org/officeDocument/2006/relationships" xmlns:p="http://schemas.openxmlformats.org/presentationml/2006/main">
   <p:cSld name="Slide 18">
     <p:spTree>
@@ -14842,391 +15329,6 @@
           </a:p>
         </p:txBody>
       </p:sp>
-    </p:spTree>
-  </p:cSld>
-  <p:clrMapOvr>
-    <a:masterClrMapping/>
-  </p:clrMapOvr>
-</p:sld>
-</file>
-
-<file path=ppt/slides/slide29.xml><?xml version="1.0" encoding="utf-8"?>
-<p:sld xmlns:a="http://schemas.openxmlformats.org/drawingml/2006/main" xmlns:r="http://schemas.openxmlformats.org/officeDocument/2006/relationships" xmlns:p="http://schemas.openxmlformats.org/presentationml/2006/main">
-  <p:cSld name="Slide 19">
-    <p:spTree>
-      <p:nvGrpSpPr>
-        <p:cNvPr id="1" name=""/>
-        <p:cNvGrpSpPr/>
-        <p:nvPr/>
-      </p:nvGrpSpPr>
-      <p:grpSpPr>
-        <a:xfrm>
-          <a:off x="0" y="0"/>
-          <a:ext cx="0" cy="0"/>
-          <a:chOff x="0" y="0"/>
-          <a:chExt cx="0" cy="0"/>
-        </a:xfrm>
-      </p:grpSpPr>
-      <p:sp>
-        <p:nvSpPr>
-          <p:cNvPr id="2" name="Text 0"/>
-          <p:cNvSpPr txBox="1"/>
-          <p:nvPr/>
-        </p:nvSpPr>
-        <p:spPr>
-          <a:xfrm>
-            <a:off x="502920" y="365760"/>
-            <a:ext cx="6400800" cy="274320"/>
-          </a:xfrm>
-          <a:prstGeom prst="rect">
-            <a:avLst/>
-          </a:prstGeom>
-          <a:noFill/>
-          <a:ln/>
-        </p:spPr>
-        <p:txBody>
-          <a:bodyPr wrap="square" lIns="0" tIns="0" rIns="0" bIns="0" rtlCol="0" anchor="ctr"/>
-          <a:lstStyle/>
-          <a:p>
-            <a:pPr marL="0" indent="0">
-              <a:buNone/>
-            </a:pPr>
-            <a:r>
-              <a:rPr lang="en-US" sz="950" b="1" kern="0" spc="220">
-                <a:solidFill>
-                  <a:srgbClr val="122B82"/>
-                </a:solidFill>
-              </a:rPr>
-              <a:t>OPERATING EXPENDITURE</a:t>
-            </a:r>
-            <a:endParaRPr lang="en-US" sz="950"/>
-          </a:p>
-        </p:txBody>
-      </p:sp>
-      <p:sp>
-        <p:nvSpPr>
-          <p:cNvPr id="3" name="Text 1"/>
-          <p:cNvSpPr txBox="1"/>
-          <p:nvPr/>
-        </p:nvSpPr>
-        <p:spPr>
-          <a:xfrm>
-            <a:off x="502920" y="640080"/>
-            <a:ext cx="7315200" cy="365760"/>
-          </a:xfrm>
-          <a:prstGeom prst="rect">
-            <a:avLst/>
-          </a:prstGeom>
-          <a:noFill/>
-          <a:ln/>
-        </p:spPr>
-        <p:txBody>
-          <a:bodyPr wrap="square" lIns="0" tIns="0" rIns="0" bIns="0" rtlCol="0" anchor="ctr"/>
-          <a:lstStyle/>
-          <a:p>
-            <a:pPr marL="0" indent="0" algn="ctr">
-              <a:buNone/>
-            </a:pPr>
-            <a:r>
-              <a:rPr lang="en-US" sz="2200" b="1">
-                <a:solidFill>
-                  <a:srgbClr val="242C39"/>
-                </a:solidFill>
-              </a:rPr>
-              <a:t>Employment expense by function</a:t>
-            </a:r>
-            <a:endParaRPr lang="en-US" sz="2700"/>
-          </a:p>
-        </p:txBody>
-      </p:sp>
-      <p:pic>
-        <p:nvPicPr>
-          <p:cNvPr id="4" name="snip staff_split" descr="/home/user/Claude/deck/snips/staff_split.png"/>
-          <p:cNvPicPr>
-            <a:picLocks noChangeAspect="1"/>
-          </p:cNvPicPr>
-          <p:nvPr/>
-        </p:nvPicPr>
-        <p:blipFill>
-          <a:blip r:embed="rId3"/>
-          <a:stretch>
-            <a:fillRect/>
-          </a:stretch>
-        </p:blipFill>
-        <p:spPr>
-          <a:xfrm>
-            <a:off x="587228" y="1005840"/>
-            <a:ext cx="7969542" cy="2130551"/>
-          </a:xfrm>
-          <a:prstGeom prst="rect">
-            <a:avLst/>
-          </a:prstGeom>
-        </p:spPr>
-      </p:pic>
-      <p:sp>
-        <p:nvSpPr>
-          <p:cNvPr id="6" name="commentary panel"/>
-          <p:cNvSpPr/>
-          <p:nvPr/>
-        </p:nvSpPr>
-        <p:spPr>
-          <a:xfrm>
-            <a:off x="502920" y="3227831"/>
-            <a:ext cx="8138160" cy="1399032"/>
-          </a:xfrm>
-          <a:prstGeom prst="rect">
-            <a:avLst/>
-          </a:prstGeom>
-          <a:solidFill>
-            <a:srgbClr val="E8F9F8"/>
-          </a:solidFill>
-          <a:ln/>
-        </p:spPr>
-        <p:txBody>
-          <a:bodyPr/>
-          <a:lstStyle/>
-          <a:p>
-            <a:endParaRPr lang="en-AU"/>
-          </a:p>
-        </p:txBody>
-      </p:sp>
-      <p:sp>
-        <p:nvSpPr>
-          <p:cNvPr id="7" name="Text 4"/>
-          <p:cNvSpPr txBox="1"/>
-          <p:nvPr/>
-        </p:nvSpPr>
-        <p:spPr>
-          <a:xfrm>
-            <a:off x="685800" y="3300983"/>
-            <a:ext cx="2743200" cy="228600"/>
-          </a:xfrm>
-          <a:prstGeom prst="rect">
-            <a:avLst/>
-          </a:prstGeom>
-          <a:noFill/>
-          <a:ln/>
-        </p:spPr>
-        <p:txBody>
-          <a:bodyPr wrap="square" lIns="0" tIns="0" rIns="0" bIns="0" rtlCol="0" anchor="ctr"/>
-          <a:lstStyle/>
-          <a:p>
-            <a:pPr marL="0" indent="0">
-              <a:buNone/>
-            </a:pPr>
-            <a:r>
-              <a:rPr lang="en-US" sz="850" b="1" kern="0" spc="180">
-                <a:solidFill>
-                  <a:srgbClr val="005358"/>
-                </a:solidFill>
-              </a:rPr>
-              <a:t>COMMENTARY</a:t>
-            </a:r>
-            <a:endParaRPr lang="en-US" sz="850"/>
-          </a:p>
-        </p:txBody>
-      </p:sp>
-      <p:sp>
-        <p:nvSpPr>
-          <p:cNvPr id="8" name="Text 5"/>
-          <p:cNvSpPr txBox="1"/>
-          <p:nvPr/>
-        </p:nvSpPr>
-        <p:spPr>
-          <a:xfrm>
-            <a:off x="685800" y="3474719"/>
-            <a:ext cx="3703320" cy="1124712"/>
-          </a:xfrm>
-          <a:prstGeom prst="rect">
-            <a:avLst/>
-          </a:prstGeom>
-          <a:noFill/>
-          <a:ln/>
-        </p:spPr>
-        <p:txBody>
-          <a:bodyPr wrap="square" lIns="0" tIns="0" rIns="0" bIns="0" rtlCol="0" anchor="t">
-            <a:normAutofit/>
-          </a:bodyPr>
-          <a:lstStyle/>
-          <a:p>
-            <a:pPr marL="342900" indent="-342900">
-              <a:lnSpc>
-                <a:spcPts val="1050"/>
-              </a:lnSpc>
-              <a:spcAft>
-                <a:spcPts val="300"/>
-              </a:spcAft>
-              <a:buSzPct val="100000"/>
-              <a:buChar char="•"/>
-            </a:pPr>
-            <a:r>
-              <a:rPr lang="en-US" sz="1000">
-                <a:solidFill>
-                  <a:srgbClr val="3A4453"/>
-                </a:solidFill>
-              </a:rPr>
-              <a:t>Office employment costs totalled $63,077 in September and were allocated across departments.</a:t>
-            </a:r>
-            <a:endParaRPr lang="en-US" sz="850"/>
-          </a:p>
-          <a:p>
-            <a:pPr marL="342900" indent="-342900">
-              <a:lnSpc>
-                <a:spcPts val="1050"/>
-              </a:lnSpc>
-              <a:spcAft>
-                <a:spcPts val="300"/>
-              </a:spcAft>
-              <a:buSzPct val="100000"/>
-              <a:buChar char="•"/>
-            </a:pPr>
-            <a:r>
-              <a:rPr lang="en-US" sz="1000">
-                <a:solidFill>
-                  <a:srgbClr val="3A4453"/>
-                </a:solidFill>
-              </a:rPr>
-              <a:t>Support received approximately 67% of the allocation under the rolling-hours methodology.</a:t>
-            </a:r>
-            <a:endParaRPr lang="en-US" sz="850"/>
-          </a:p>
-        </p:txBody>
-      </p:sp>
-      <p:sp>
-        <p:nvSpPr>
-          <p:cNvPr id="9" name="Text 5b"/>
-          <p:cNvSpPr txBox="1"/>
-          <p:nvPr/>
-        </p:nvSpPr>
-        <p:spPr>
-          <a:xfrm>
-            <a:off x="4663440" y="3474719"/>
-            <a:ext cx="3703320" cy="1124712"/>
-          </a:xfrm>
-          <a:prstGeom prst="rect">
-            <a:avLst/>
-          </a:prstGeom>
-          <a:noFill/>
-          <a:ln/>
-        </p:spPr>
-        <p:txBody>
-          <a:bodyPr wrap="square" lIns="0" tIns="0" rIns="0" bIns="0" rtlCol="0" anchor="t">
-            <a:normAutofit/>
-          </a:bodyPr>
-          <a:lstStyle/>
-          <a:p>
-            <a:pPr marL="342900" indent="-342900">
-              <a:lnSpc>
-                <a:spcPts val="1050"/>
-              </a:lnSpc>
-              <a:spcAft>
-                <a:spcPts val="300"/>
-              </a:spcAft>
-              <a:buSzPct val="100000"/>
-              <a:buChar char="•"/>
-            </a:pPr>
-            <a:r>
-              <a:rPr lang="en-US" sz="1000">
-                <a:solidFill>
-                  <a:srgbClr val="3A4453"/>
-                </a:solidFill>
-              </a:rPr>
-              <a:t>Events incurred $35,665 in direct departmental employment costs, alongside $15,294 in allocated office wages.</a:t>
-            </a:r>
-            <a:endParaRPr lang="en-US" sz="850"/>
-          </a:p>
-          <a:p>
-            <a:pPr marL="342900" indent="-342900">
-              <a:lnSpc>
-                <a:spcPts val="1050"/>
-              </a:lnSpc>
-              <a:spcAft>
-                <a:spcPts val="300"/>
-              </a:spcAft>
-              <a:buSzPct val="100000"/>
-              <a:buChar char="•"/>
-            </a:pPr>
-            <a:r>
-              <a:rPr lang="en-US" sz="1000">
-                <a:solidFill>
-                  <a:srgbClr val="3A4453"/>
-                </a:solidFill>
-              </a:rPr>
-              <a:t>Integration was allocated $269 in office wages, reflecting its comparatively low share under the allocation methodology.</a:t>
-            </a:r>
-            <a:endParaRPr lang="en-US" sz="850"/>
-          </a:p>
-        </p:txBody>
-      </p:sp>
-      <p:sp>
-        <p:nvSpPr>
-          <p:cNvPr id="25" name="Slide Number Placeholder 0"/>
-          <p:cNvSpPr>
-            <a:spLocks noGrp="1"/>
-          </p:cNvSpPr>
-          <p:nvPr>
-            <p:ph type="sldNum" sz="quarter" idx="4294967295"/>
-          </p:nvPr>
-        </p:nvSpPr>
-        <p:spPr>
-          <a:xfrm>
-            <a:off x="8092440" y="4736592"/>
-            <a:ext cx="548640" cy="228600"/>
-          </a:xfrm>
-          <a:prstGeom prst="rect">
-            <a:avLst/>
-          </a:prstGeom>
-          <a:extLst>
-            <a:ext uri="{C572A759-6A51-4108-AA02-DFA0A04FC94B}">
-              <ma14:wrappingTextBoxFlag xmlns:ma14="http://schemas.microsoft.com/office/mac/drawingml/2011/main" xmlns="" val="0"/>
-            </a:ext>
-          </a:extLst>
-        </p:spPr>
-        <p:txBody>
-          <a:bodyPr/>
-          <a:lstStyle>
-            <a:lvl1pPr>
-              <a:defRPr sz="800">
-                <a:solidFill>
-                  <a:srgbClr val="6B7585"/>
-                </a:solidFill>
-              </a:defRPr>
-            </a:lvl1pPr>
-          </a:lstStyle>
-          <a:p>
-            <a:pPr algn="r"/>
-            <a:fld id="{F7021451-1387-4CA6-816F-3879F97B5CBC}" type="slidenum">
-              <a:rPr lang="en-US" b="0"/>
-              <a:t>27</a:t>
-            </a:fld>
-            <a:endParaRPr lang="en-US"/>
-          </a:p>
-        </p:txBody>
-      </p:sp>
-      <p:pic>
-        <p:nvPicPr>
-          <p:cNvPr id="26" name="cts logo" descr="cts-logo.png"/>
-          <p:cNvPicPr>
-            <a:picLocks noChangeAspect="1"/>
-          </p:cNvPicPr>
-          <p:nvPr/>
-        </p:nvPicPr>
-        <p:blipFill>
-          <a:blip r:embed="rId4"/>
-          <a:stretch>
-            <a:fillRect/>
-          </a:stretch>
-        </p:blipFill>
-        <p:spPr>
-          <a:xfrm>
-            <a:off x="7680959" y="182880"/>
-            <a:ext cx="960120" cy="539696"/>
-          </a:xfrm>
-          <a:prstGeom prst="rect">
-            <a:avLst/>
-          </a:prstGeom>
-        </p:spPr>
-      </p:pic>
     </p:spTree>
   </p:cSld>
   <p:clrMapOvr>
@@ -17489,6 +17591,391 @@
 
 <file path=ppt/slides/slide30.xml><?xml version="1.0" encoding="utf-8"?>
 <p:sld xmlns:a="http://schemas.openxmlformats.org/drawingml/2006/main" xmlns:r="http://schemas.openxmlformats.org/officeDocument/2006/relationships" xmlns:p="http://schemas.openxmlformats.org/presentationml/2006/main">
+  <p:cSld name="Slide 19">
+    <p:spTree>
+      <p:nvGrpSpPr>
+        <p:cNvPr id="1" name=""/>
+        <p:cNvGrpSpPr/>
+        <p:nvPr/>
+      </p:nvGrpSpPr>
+      <p:grpSpPr>
+        <a:xfrm>
+          <a:off x="0" y="0"/>
+          <a:ext cx="0" cy="0"/>
+          <a:chOff x="0" y="0"/>
+          <a:chExt cx="0" cy="0"/>
+        </a:xfrm>
+      </p:grpSpPr>
+      <p:sp>
+        <p:nvSpPr>
+          <p:cNvPr id="2" name="Text 0"/>
+          <p:cNvSpPr txBox="1"/>
+          <p:nvPr/>
+        </p:nvSpPr>
+        <p:spPr>
+          <a:xfrm>
+            <a:off x="502920" y="365760"/>
+            <a:ext cx="6400800" cy="274320"/>
+          </a:xfrm>
+          <a:prstGeom prst="rect">
+            <a:avLst/>
+          </a:prstGeom>
+          <a:noFill/>
+          <a:ln/>
+        </p:spPr>
+        <p:txBody>
+          <a:bodyPr wrap="square" lIns="0" tIns="0" rIns="0" bIns="0" rtlCol="0" anchor="ctr"/>
+          <a:lstStyle/>
+          <a:p>
+            <a:pPr marL="0" indent="0">
+              <a:buNone/>
+            </a:pPr>
+            <a:r>
+              <a:rPr lang="en-US" sz="950" b="1" kern="0" spc="220">
+                <a:solidFill>
+                  <a:srgbClr val="122B82"/>
+                </a:solidFill>
+              </a:rPr>
+              <a:t>OPERATING EXPENDITURE</a:t>
+            </a:r>
+            <a:endParaRPr lang="en-US" sz="950"/>
+          </a:p>
+        </p:txBody>
+      </p:sp>
+      <p:sp>
+        <p:nvSpPr>
+          <p:cNvPr id="3" name="Text 1"/>
+          <p:cNvSpPr txBox="1"/>
+          <p:nvPr/>
+        </p:nvSpPr>
+        <p:spPr>
+          <a:xfrm>
+            <a:off x="502920" y="640080"/>
+            <a:ext cx="7315200" cy="365760"/>
+          </a:xfrm>
+          <a:prstGeom prst="rect">
+            <a:avLst/>
+          </a:prstGeom>
+          <a:noFill/>
+          <a:ln/>
+        </p:spPr>
+        <p:txBody>
+          <a:bodyPr wrap="square" lIns="0" tIns="0" rIns="0" bIns="0" rtlCol="0" anchor="ctr"/>
+          <a:lstStyle/>
+          <a:p>
+            <a:pPr marL="0" indent="0" algn="ctr">
+              <a:buNone/>
+            </a:pPr>
+            <a:r>
+              <a:rPr lang="en-US" sz="2200" b="1">
+                <a:solidFill>
+                  <a:srgbClr val="242C39"/>
+                </a:solidFill>
+              </a:rPr>
+              <a:t>Employment expense by function</a:t>
+            </a:r>
+            <a:endParaRPr lang="en-US" sz="2700"/>
+          </a:p>
+        </p:txBody>
+      </p:sp>
+      <p:pic>
+        <p:nvPicPr>
+          <p:cNvPr id="4" name="snip staff_split" descr="/home/user/Claude/deck/snips/staff_split.png"/>
+          <p:cNvPicPr>
+            <a:picLocks noChangeAspect="1"/>
+          </p:cNvPicPr>
+          <p:nvPr/>
+        </p:nvPicPr>
+        <p:blipFill>
+          <a:blip r:embed="rId3"/>
+          <a:stretch>
+            <a:fillRect/>
+          </a:stretch>
+        </p:blipFill>
+        <p:spPr>
+          <a:xfrm>
+            <a:off x="587228" y="1005840"/>
+            <a:ext cx="7969542" cy="2130551"/>
+          </a:xfrm>
+          <a:prstGeom prst="rect">
+            <a:avLst/>
+          </a:prstGeom>
+        </p:spPr>
+      </p:pic>
+      <p:sp>
+        <p:nvSpPr>
+          <p:cNvPr id="6" name="commentary panel"/>
+          <p:cNvSpPr/>
+          <p:nvPr/>
+        </p:nvSpPr>
+        <p:spPr>
+          <a:xfrm>
+            <a:off x="502920" y="3227831"/>
+            <a:ext cx="8138160" cy="1399032"/>
+          </a:xfrm>
+          <a:prstGeom prst="rect">
+            <a:avLst/>
+          </a:prstGeom>
+          <a:solidFill>
+            <a:srgbClr val="E8F9F8"/>
+          </a:solidFill>
+          <a:ln/>
+        </p:spPr>
+        <p:txBody>
+          <a:bodyPr/>
+          <a:lstStyle/>
+          <a:p>
+            <a:endParaRPr lang="en-AU"/>
+          </a:p>
+        </p:txBody>
+      </p:sp>
+      <p:sp>
+        <p:nvSpPr>
+          <p:cNvPr id="7" name="Text 4"/>
+          <p:cNvSpPr txBox="1"/>
+          <p:nvPr/>
+        </p:nvSpPr>
+        <p:spPr>
+          <a:xfrm>
+            <a:off x="685800" y="3300983"/>
+            <a:ext cx="2743200" cy="228600"/>
+          </a:xfrm>
+          <a:prstGeom prst="rect">
+            <a:avLst/>
+          </a:prstGeom>
+          <a:noFill/>
+          <a:ln/>
+        </p:spPr>
+        <p:txBody>
+          <a:bodyPr wrap="square" lIns="0" tIns="0" rIns="0" bIns="0" rtlCol="0" anchor="ctr"/>
+          <a:lstStyle/>
+          <a:p>
+            <a:pPr marL="0" indent="0">
+              <a:buNone/>
+            </a:pPr>
+            <a:r>
+              <a:rPr lang="en-US" sz="850" b="1" kern="0" spc="180">
+                <a:solidFill>
+                  <a:srgbClr val="005358"/>
+                </a:solidFill>
+              </a:rPr>
+              <a:t>COMMENTARY</a:t>
+            </a:r>
+            <a:endParaRPr lang="en-US" sz="850"/>
+          </a:p>
+        </p:txBody>
+      </p:sp>
+      <p:sp>
+        <p:nvSpPr>
+          <p:cNvPr id="8" name="Text 5"/>
+          <p:cNvSpPr txBox="1"/>
+          <p:nvPr/>
+        </p:nvSpPr>
+        <p:spPr>
+          <a:xfrm>
+            <a:off x="685800" y="3474719"/>
+            <a:ext cx="3703320" cy="1124712"/>
+          </a:xfrm>
+          <a:prstGeom prst="rect">
+            <a:avLst/>
+          </a:prstGeom>
+          <a:noFill/>
+          <a:ln/>
+        </p:spPr>
+        <p:txBody>
+          <a:bodyPr wrap="square" lIns="0" tIns="0" rIns="0" bIns="0" rtlCol="0" anchor="t">
+            <a:normAutofit/>
+          </a:bodyPr>
+          <a:lstStyle/>
+          <a:p>
+            <a:pPr marL="342900" indent="-342900">
+              <a:lnSpc>
+                <a:spcPts val="1050"/>
+              </a:lnSpc>
+              <a:spcAft>
+                <a:spcPts val="300"/>
+              </a:spcAft>
+              <a:buSzPct val="100000"/>
+              <a:buChar char="•"/>
+            </a:pPr>
+            <a:r>
+              <a:rPr lang="en-US" sz="1000">
+                <a:solidFill>
+                  <a:srgbClr val="3A4453"/>
+                </a:solidFill>
+              </a:rPr>
+              <a:t>Office employment costs totalled $63,077 in September and were allocated across departments.</a:t>
+            </a:r>
+            <a:endParaRPr lang="en-US" sz="850"/>
+          </a:p>
+          <a:p>
+            <a:pPr marL="342900" indent="-342900">
+              <a:lnSpc>
+                <a:spcPts val="1050"/>
+              </a:lnSpc>
+              <a:spcAft>
+                <a:spcPts val="300"/>
+              </a:spcAft>
+              <a:buSzPct val="100000"/>
+              <a:buChar char="•"/>
+            </a:pPr>
+            <a:r>
+              <a:rPr lang="en-US" sz="1000">
+                <a:solidFill>
+                  <a:srgbClr val="3A4453"/>
+                </a:solidFill>
+              </a:rPr>
+              <a:t>Support received approximately 67% of the allocation under the rolling-hours methodology.</a:t>
+            </a:r>
+            <a:endParaRPr lang="en-US" sz="850"/>
+          </a:p>
+        </p:txBody>
+      </p:sp>
+      <p:sp>
+        <p:nvSpPr>
+          <p:cNvPr id="9" name="Text 5b"/>
+          <p:cNvSpPr txBox="1"/>
+          <p:nvPr/>
+        </p:nvSpPr>
+        <p:spPr>
+          <a:xfrm>
+            <a:off x="4663440" y="3474719"/>
+            <a:ext cx="3703320" cy="1124712"/>
+          </a:xfrm>
+          <a:prstGeom prst="rect">
+            <a:avLst/>
+          </a:prstGeom>
+          <a:noFill/>
+          <a:ln/>
+        </p:spPr>
+        <p:txBody>
+          <a:bodyPr wrap="square" lIns="0" tIns="0" rIns="0" bIns="0" rtlCol="0" anchor="t">
+            <a:normAutofit/>
+          </a:bodyPr>
+          <a:lstStyle/>
+          <a:p>
+            <a:pPr marL="342900" indent="-342900">
+              <a:lnSpc>
+                <a:spcPts val="1050"/>
+              </a:lnSpc>
+              <a:spcAft>
+                <a:spcPts val="300"/>
+              </a:spcAft>
+              <a:buSzPct val="100000"/>
+              <a:buChar char="•"/>
+            </a:pPr>
+            <a:r>
+              <a:rPr lang="en-US" sz="1000">
+                <a:solidFill>
+                  <a:srgbClr val="3A4453"/>
+                </a:solidFill>
+              </a:rPr>
+              <a:t>Events incurred $35,665 in direct departmental employment costs, alongside $15,294 in allocated office wages.</a:t>
+            </a:r>
+            <a:endParaRPr lang="en-US" sz="850"/>
+          </a:p>
+          <a:p>
+            <a:pPr marL="342900" indent="-342900">
+              <a:lnSpc>
+                <a:spcPts val="1050"/>
+              </a:lnSpc>
+              <a:spcAft>
+                <a:spcPts val="300"/>
+              </a:spcAft>
+              <a:buSzPct val="100000"/>
+              <a:buChar char="•"/>
+            </a:pPr>
+            <a:r>
+              <a:rPr lang="en-US" sz="1000">
+                <a:solidFill>
+                  <a:srgbClr val="3A4453"/>
+                </a:solidFill>
+              </a:rPr>
+              <a:t>Integration was allocated $269 in office wages, reflecting its comparatively low share under the allocation methodology.</a:t>
+            </a:r>
+            <a:endParaRPr lang="en-US" sz="850"/>
+          </a:p>
+        </p:txBody>
+      </p:sp>
+      <p:sp>
+        <p:nvSpPr>
+          <p:cNvPr id="25" name="Slide Number Placeholder 0"/>
+          <p:cNvSpPr>
+            <a:spLocks noGrp="1"/>
+          </p:cNvSpPr>
+          <p:nvPr>
+            <p:ph type="sldNum" sz="quarter" idx="4294967295"/>
+          </p:nvPr>
+        </p:nvSpPr>
+        <p:spPr>
+          <a:xfrm>
+            <a:off x="8092440" y="4736592"/>
+            <a:ext cx="548640" cy="228600"/>
+          </a:xfrm>
+          <a:prstGeom prst="rect">
+            <a:avLst/>
+          </a:prstGeom>
+          <a:extLst>
+            <a:ext uri="{C572A759-6A51-4108-AA02-DFA0A04FC94B}">
+              <ma14:wrappingTextBoxFlag xmlns:ma14="http://schemas.microsoft.com/office/mac/drawingml/2011/main" xmlns="" val="0"/>
+            </a:ext>
+          </a:extLst>
+        </p:spPr>
+        <p:txBody>
+          <a:bodyPr/>
+          <a:lstStyle>
+            <a:lvl1pPr>
+              <a:defRPr sz="800">
+                <a:solidFill>
+                  <a:srgbClr val="6B7585"/>
+                </a:solidFill>
+              </a:defRPr>
+            </a:lvl1pPr>
+          </a:lstStyle>
+          <a:p>
+            <a:pPr algn="r"/>
+            <a:fld id="{F7021451-1387-4CA6-816F-3879F97B5CBC}" type="slidenum">
+              <a:rPr lang="en-US" b="0"/>
+              <a:t>27</a:t>
+            </a:fld>
+            <a:endParaRPr lang="en-US"/>
+          </a:p>
+        </p:txBody>
+      </p:sp>
+      <p:pic>
+        <p:nvPicPr>
+          <p:cNvPr id="26" name="cts logo" descr="cts-logo.png"/>
+          <p:cNvPicPr>
+            <a:picLocks noChangeAspect="1"/>
+          </p:cNvPicPr>
+          <p:nvPr/>
+        </p:nvPicPr>
+        <p:blipFill>
+          <a:blip r:embed="rId4"/>
+          <a:stretch>
+            <a:fillRect/>
+          </a:stretch>
+        </p:blipFill>
+        <p:spPr>
+          <a:xfrm>
+            <a:off x="7680959" y="182880"/>
+            <a:ext cx="960120" cy="539696"/>
+          </a:xfrm>
+          <a:prstGeom prst="rect">
+            <a:avLst/>
+          </a:prstGeom>
+        </p:spPr>
+      </p:pic>
+    </p:spTree>
+  </p:cSld>
+  <p:clrMapOvr>
+    <a:masterClrMapping/>
+  </p:clrMapOvr>
+</p:sld>
+</file>
+
+<file path=ppt/slides/slide31.xml><?xml version="1.0" encoding="utf-8"?>
+<p:sld xmlns:a="http://schemas.openxmlformats.org/drawingml/2006/main" xmlns:r="http://schemas.openxmlformats.org/officeDocument/2006/relationships" xmlns:p="http://schemas.openxmlformats.org/presentationml/2006/main">
   <p:cSld name="Slide 20">
     <p:spTree>
       <p:nvGrpSpPr>
@@ -17770,7 +18257,7 @@
 </p:sld>
 </file>
 
-<file path=ppt/slides/slide31.xml><?xml version="1.0" encoding="utf-8"?>
+<file path=ppt/slides/slide32.xml><?xml version="1.0" encoding="utf-8"?>
 <p:sld xmlns:a="http://schemas.openxmlformats.org/drawingml/2006/main" xmlns:r="http://schemas.openxmlformats.org/officeDocument/2006/relationships" xmlns:p="http://schemas.openxmlformats.org/presentationml/2006/main">
   <p:cSld name="Slide 21">
     <p:spTree>
@@ -18176,7 +18663,7 @@
 </p:sld>
 </file>
 
-<file path=ppt/slides/slide32.xml><?xml version="1.0" encoding="utf-8"?>
+<file path=ppt/slides/slide33.xml><?xml version="1.0" encoding="utf-8"?>
 <p:sld xmlns:a="http://schemas.openxmlformats.org/drawingml/2006/main" xmlns:r="http://schemas.openxmlformats.org/officeDocument/2006/relationships" xmlns:p="http://schemas.openxmlformats.org/presentationml/2006/main">
   <p:cSld name="Slide 22">
     <p:spTree>
@@ -18582,7 +19069,7 @@
 </p:sld>
 </file>
 
-<file path=ppt/slides/slide33.xml><?xml version="1.0" encoding="utf-8"?>
+<file path=ppt/slides/slide34.xml><?xml version="1.0" encoding="utf-8"?>
 <p:sld xmlns:a="http://schemas.openxmlformats.org/drawingml/2006/main" xmlns:r="http://schemas.openxmlformats.org/officeDocument/2006/relationships" xmlns:p="http://schemas.openxmlformats.org/presentationml/2006/main">
   <p:cSld name="Slide 23">
     <p:spTree>
@@ -18988,7 +19475,7 @@
 </p:sld>
 </file>
 
-<file path=ppt/slides/slide34.xml><?xml version="1.0" encoding="utf-8"?>
+<file path=ppt/slides/slide35.xml><?xml version="1.0" encoding="utf-8"?>
 <p:sld xmlns:a="http://schemas.openxmlformats.org/drawingml/2006/main" xmlns:r="http://schemas.openxmlformats.org/officeDocument/2006/relationships" xmlns:p="http://schemas.openxmlformats.org/presentationml/2006/main">
   <p:cSld name="Slide 24">
     <p:spTree>
@@ -19271,7 +19758,7 @@
 </p:sld>
 </file>
 
-<file path=ppt/slides/slide35.xml><?xml version="1.0" encoding="utf-8"?>
+<file path=ppt/slides/slide36.xml><?xml version="1.0" encoding="utf-8"?>
 <p:sld xmlns:a="http://schemas.openxmlformats.org/drawingml/2006/main" xmlns:r="http://schemas.openxmlformats.org/officeDocument/2006/relationships" xmlns:p="http://schemas.openxmlformats.org/presentationml/2006/main">
   <p:cSld name="Slide 25">
     <p:spTree>
@@ -19656,7 +20143,7 @@
 </p:sld>
 </file>
 
-<file path=ppt/slides/slide36.xml><?xml version="1.0" encoding="utf-8"?>
+<file path=ppt/slides/slide37.xml><?xml version="1.0" encoding="utf-8"?>
 <p:sld xmlns:a="http://schemas.openxmlformats.org/drawingml/2006/main" xmlns:r="http://schemas.openxmlformats.org/officeDocument/2006/relationships" xmlns:p="http://schemas.openxmlformats.org/presentationml/2006/main">
   <p:cSld name="Slide 26">
     <p:spTree>
@@ -20062,7 +20549,7 @@
 </p:sld>
 </file>
 
-<file path=ppt/slides/slide37.xml><?xml version="1.0" encoding="utf-8"?>
+<file path=ppt/slides/slide38.xml><?xml version="1.0" encoding="utf-8"?>
 <p:sld xmlns:a="http://schemas.openxmlformats.org/drawingml/2006/main" xmlns:r="http://schemas.openxmlformats.org/officeDocument/2006/relationships" xmlns:p="http://schemas.openxmlformats.org/presentationml/2006/main">
   <p:cSld name="Slide 27">
     <p:spTree>
@@ -20468,7 +20955,7 @@
 </p:sld>
 </file>
 
-<file path=ppt/slides/slide38.xml><?xml version="1.0" encoding="utf-8"?>
+<file path=ppt/slides/slide39.xml><?xml version="1.0" encoding="utf-8"?>
 <p:sld xmlns:a="http://schemas.openxmlformats.org/drawingml/2006/main" xmlns:r="http://schemas.openxmlformats.org/officeDocument/2006/relationships" xmlns:p="http://schemas.openxmlformats.org/presentationml/2006/main">
   <p:cSld name="Slide 28">
     <p:spTree>
@@ -20740,412 +21227,6 @@
               <a:t>What the rest of the year looks like and what we change</a:t>
             </a:r>
             <a:endParaRPr lang="en-US" sz="1200"/>
-          </a:p>
-        </p:txBody>
-      </p:sp>
-    </p:spTree>
-  </p:cSld>
-  <p:clrMapOvr>
-    <a:masterClrMapping/>
-  </p:clrMapOvr>
-</p:sld>
-</file>
-
-<file path=ppt/slides/slide39.xml><?xml version="1.0" encoding="utf-8"?>
-<p:sld xmlns:a="http://schemas.openxmlformats.org/drawingml/2006/main" xmlns:r="http://schemas.openxmlformats.org/officeDocument/2006/relationships" xmlns:p="http://schemas.openxmlformats.org/presentationml/2006/main">
-  <p:cSld name="Slide 29">
-    <p:spTree>
-      <p:nvGrpSpPr>
-        <p:cNvPr id="1" name=""/>
-        <p:cNvGrpSpPr/>
-        <p:nvPr/>
-      </p:nvGrpSpPr>
-      <p:grpSpPr>
-        <a:xfrm>
-          <a:off x="0" y="0"/>
-          <a:ext cx="0" cy="0"/>
-          <a:chOff x="0" y="0"/>
-          <a:chExt cx="0" cy="0"/>
-        </a:xfrm>
-      </p:grpSpPr>
-      <p:pic>
-        <p:nvPicPr>
-          <p:cNvPr id="27" name="snip income_month" descr="income_month.png"/>
-          <p:cNvPicPr>
-            <a:picLocks noChangeAspect="1"/>
-          </p:cNvPicPr>
-          <p:nvPr/>
-        </p:nvPicPr>
-        <p:blipFill>
-          <a:blip r:embed="rId3"/>
-          <a:stretch>
-            <a:fillRect/>
-          </a:stretch>
-        </p:blipFill>
-        <p:spPr>
-          <a:xfrm>
-            <a:off x="550168" y="1005840"/>
-            <a:ext cx="8043662" cy="2130551"/>
-          </a:xfrm>
-          <a:prstGeom prst="rect">
-            <a:avLst/>
-          </a:prstGeom>
-        </p:spPr>
-      </p:pic>
-      <p:sp>
-        <p:nvSpPr>
-          <p:cNvPr id="2" name="Text 0"/>
-          <p:cNvSpPr txBox="1"/>
-          <p:nvPr/>
-        </p:nvSpPr>
-        <p:spPr>
-          <a:xfrm>
-            <a:off x="502920" y="365760"/>
-            <a:ext cx="6400800" cy="274320"/>
-          </a:xfrm>
-          <a:prstGeom prst="rect">
-            <a:avLst/>
-          </a:prstGeom>
-          <a:noFill/>
-          <a:ln/>
-        </p:spPr>
-        <p:txBody>
-          <a:bodyPr wrap="square" lIns="0" tIns="0" rIns="0" bIns="0" rtlCol="0" anchor="ctr"/>
-          <a:lstStyle/>
-          <a:p>
-            <a:pPr marL="0" indent="0">
-              <a:buNone/>
-            </a:pPr>
-            <a:r>
-              <a:rPr lang="en-US" sz="950" b="1" kern="0" spc="220">
-                <a:solidFill>
-                  <a:srgbClr val="122B82"/>
-                </a:solidFill>
-              </a:rPr>
-              <a:t>BUDGET AND OUTLOOK</a:t>
-            </a:r>
-            <a:endParaRPr lang="en-US" sz="950"/>
-          </a:p>
-        </p:txBody>
-      </p:sp>
-      <p:sp>
-        <p:nvSpPr>
-          <p:cNvPr id="3" name="Text 1"/>
-          <p:cNvSpPr txBox="1"/>
-          <p:nvPr/>
-        </p:nvSpPr>
-        <p:spPr>
-          <a:xfrm>
-            <a:off x="502920" y="640080"/>
-            <a:ext cx="7315200" cy="365760"/>
-          </a:xfrm>
-          <a:prstGeom prst="rect">
-            <a:avLst/>
-          </a:prstGeom>
-          <a:noFill/>
-          <a:ln/>
-        </p:spPr>
-        <p:txBody>
-          <a:bodyPr wrap="square" lIns="0" tIns="0" rIns="0" bIns="0" rtlCol="0" anchor="ctr"/>
-          <a:lstStyle/>
-          <a:p>
-            <a:pPr marL="0" indent="0" algn="ctr">
-              <a:buNone/>
-            </a:pPr>
-            <a:r>
-              <a:rPr lang="en-US" sz="2200" b="1">
-                <a:solidFill>
-                  <a:srgbClr val="242C39"/>
-                </a:solidFill>
-              </a:rPr>
-              <a:t>Full year revenue against budget</a:t>
-            </a:r>
-            <a:endParaRPr lang="en-US" sz="2700"/>
-          </a:p>
-        </p:txBody>
-      </p:sp>
-      <p:sp>
-        <p:nvSpPr>
-          <p:cNvPr id="6" name="commentary panel"/>
-          <p:cNvSpPr/>
-          <p:nvPr/>
-        </p:nvSpPr>
-        <p:spPr>
-          <a:xfrm>
-            <a:off x="502920" y="3227831"/>
-            <a:ext cx="8138160" cy="1399032"/>
-          </a:xfrm>
-          <a:prstGeom prst="rect">
-            <a:avLst/>
-          </a:prstGeom>
-          <a:solidFill>
-            <a:srgbClr val="E8F9F8"/>
-          </a:solidFill>
-          <a:ln/>
-        </p:spPr>
-        <p:txBody>
-          <a:bodyPr/>
-          <a:lstStyle/>
-          <a:p>
-            <a:endParaRPr lang="en-AU"/>
-          </a:p>
-        </p:txBody>
-      </p:sp>
-      <p:sp>
-        <p:nvSpPr>
-          <p:cNvPr id="7" name="Text 4"/>
-          <p:cNvSpPr txBox="1"/>
-          <p:nvPr/>
-        </p:nvSpPr>
-        <p:spPr>
-          <a:xfrm>
-            <a:off x="685800" y="3300983"/>
-            <a:ext cx="2743200" cy="228600"/>
-          </a:xfrm>
-          <a:prstGeom prst="rect">
-            <a:avLst/>
-          </a:prstGeom>
-          <a:noFill/>
-          <a:ln/>
-        </p:spPr>
-        <p:txBody>
-          <a:bodyPr wrap="square" lIns="0" tIns="0" rIns="0" bIns="0" rtlCol="0" anchor="ctr"/>
-          <a:lstStyle/>
-          <a:p>
-            <a:pPr marL="0" indent="0">
-              <a:buNone/>
-            </a:pPr>
-            <a:r>
-              <a:rPr lang="en-US" sz="900" b="1" kern="0" spc="180">
-                <a:solidFill>
-                  <a:srgbClr val="005358"/>
-                </a:solidFill>
-              </a:rPr>
-              <a:t>COMMENTARY</a:t>
-            </a:r>
-            <a:endParaRPr lang="en-US" sz="900"/>
-          </a:p>
-        </p:txBody>
-      </p:sp>
-      <p:sp>
-        <p:nvSpPr>
-          <p:cNvPr id="8" name="Text 5"/>
-          <p:cNvSpPr txBox="1"/>
-          <p:nvPr/>
-        </p:nvSpPr>
-        <p:spPr>
-          <a:xfrm>
-            <a:off x="685800" y="3474719"/>
-            <a:ext cx="3703320" cy="1124712"/>
-          </a:xfrm>
-          <a:prstGeom prst="rect">
-            <a:avLst/>
-          </a:prstGeom>
-          <a:noFill/>
-          <a:ln/>
-        </p:spPr>
-        <p:txBody>
-          <a:bodyPr wrap="square" lIns="0" tIns="0" rIns="0" bIns="0" rtlCol="0" anchor="t">
-            <a:normAutofit fontScale="77500" lnSpcReduction="20000"/>
-          </a:bodyPr>
-          <a:lstStyle/>
-          <a:p>
-            <a:pPr marL="342900" indent="-342900">
-              <a:lnSpc>
-                <a:spcPts val="1150"/>
-              </a:lnSpc>
-              <a:spcAft>
-                <a:spcPts val="400"/>
-              </a:spcAft>
-              <a:buSzPct val="100000"/>
-              <a:buChar char="•"/>
-            </a:pPr>
-            <a:r>
-              <a:rPr lang="en-US" sz="1000">
-                <a:solidFill>
-                  <a:srgbClr val="3A4453"/>
-                </a:solidFill>
-              </a:rPr>
-              <a:t>First-quarter revenue was $372k below budget, with significant shortfalls in Consulting and Video.</a:t>
-            </a:r>
-            <a:endParaRPr lang="en-US" sz="900"/>
-          </a:p>
-          <a:p>
-            <a:pPr marL="342900" indent="-342900">
-              <a:lnSpc>
-                <a:spcPts val="1150"/>
-              </a:lnSpc>
-              <a:spcAft>
-                <a:spcPts val="400"/>
-              </a:spcAft>
-              <a:buSzPct val="100000"/>
-              <a:buChar char="•"/>
-            </a:pPr>
-            <a:r>
-              <a:rPr lang="en-US" sz="1000">
-                <a:solidFill>
-                  <a:srgbClr val="3A4453"/>
-                </a:solidFill>
-              </a:rPr>
-              <a:t>October to June currently reflects the original budget rather than an updated forecast.</a:t>
-            </a:r>
-            <a:endParaRPr lang="en-US" sz="900"/>
-          </a:p>
-          <a:p>
-            <a:pPr marL="342900" indent="-342900">
-              <a:lnSpc>
-                <a:spcPts val="1150"/>
-              </a:lnSpc>
-              <a:spcAft>
-                <a:spcPts val="400"/>
-              </a:spcAft>
-              <a:buSzPct val="100000"/>
-              <a:buChar char="•"/>
-            </a:pPr>
-            <a:r>
-              <a:rPr lang="en-US" sz="1000">
-                <a:solidFill>
-                  <a:srgbClr val="3A4453"/>
-                </a:solidFill>
-              </a:rPr>
-              <a:t>October revenue is budgeted at $950k, well above the highest actual month recorded so far this year.</a:t>
-            </a:r>
-            <a:endParaRPr lang="en-US" sz="900"/>
-          </a:p>
-        </p:txBody>
-      </p:sp>
-      <p:sp>
-        <p:nvSpPr>
-          <p:cNvPr id="25" name="Slide Number Placeholder 0"/>
-          <p:cNvSpPr>
-            <a:spLocks noGrp="1"/>
-          </p:cNvSpPr>
-          <p:nvPr>
-            <p:ph type="sldNum" sz="quarter" idx="4294967295"/>
-          </p:nvPr>
-        </p:nvSpPr>
-        <p:spPr>
-          <a:xfrm>
-            <a:off x="8092440" y="4736592"/>
-            <a:ext cx="548640" cy="228600"/>
-          </a:xfrm>
-          <a:prstGeom prst="rect">
-            <a:avLst/>
-          </a:prstGeom>
-          <a:extLst>
-            <a:ext uri="{C572A759-6A51-4108-AA02-DFA0A04FC94B}">
-              <ma14:wrappingTextBoxFlag xmlns:ma14="http://schemas.microsoft.com/office/mac/drawingml/2011/main" xmlns="" val="0"/>
-            </a:ext>
-          </a:extLst>
-        </p:spPr>
-        <p:txBody>
-          <a:bodyPr/>
-          <a:lstStyle>
-            <a:lvl1pPr>
-              <a:defRPr sz="800">
-                <a:solidFill>
-                  <a:srgbClr val="6B7585"/>
-                </a:solidFill>
-              </a:defRPr>
-            </a:lvl1pPr>
-          </a:lstStyle>
-          <a:p>
-            <a:pPr algn="r"/>
-            <a:fld id="{F7021451-1387-4CA6-816F-3879F97B5CBC}" type="slidenum">
-              <a:rPr lang="en-US" b="0"/>
-              <a:t>37</a:t>
-            </a:fld>
-            <a:endParaRPr lang="en-US"/>
-          </a:p>
-        </p:txBody>
-      </p:sp>
-      <p:pic>
-        <p:nvPicPr>
-          <p:cNvPr id="26" name="cts logo" descr="cts-logo.png"/>
-          <p:cNvPicPr>
-            <a:picLocks noChangeAspect="1"/>
-          </p:cNvPicPr>
-          <p:nvPr/>
-        </p:nvPicPr>
-        <p:blipFill>
-          <a:blip r:embed="rId4"/>
-          <a:stretch>
-            <a:fillRect/>
-          </a:stretch>
-        </p:blipFill>
-        <p:spPr>
-          <a:xfrm>
-            <a:off x="7680959" y="182880"/>
-            <a:ext cx="960120" cy="539696"/>
-          </a:xfrm>
-          <a:prstGeom prst="rect">
-            <a:avLst/>
-          </a:prstGeom>
-        </p:spPr>
-      </p:pic>
-      <p:sp>
-        <p:nvSpPr>
-          <p:cNvPr id="4" name="Text 5b"/>
-          <p:cNvSpPr txBox="1"/>
-          <p:nvPr/>
-        </p:nvSpPr>
-        <p:spPr>
-          <a:xfrm>
-            <a:off x="4663440" y="3474719"/>
-            <a:ext cx="3703320" cy="1124712"/>
-          </a:xfrm>
-          <a:prstGeom prst="rect">
-            <a:avLst/>
-          </a:prstGeom>
-          <a:noFill/>
-          <a:ln/>
-        </p:spPr>
-        <p:txBody>
-          <a:bodyPr wrap="square" lIns="0" tIns="0" rIns="0" bIns="0" rtlCol="0" anchor="t">
-            <a:normAutofit fontScale="77500" lnSpcReduction="20000"/>
-          </a:bodyPr>
-          <a:lstStyle/>
-          <a:p>
-            <a:pPr marL="342900" indent="-342900">
-              <a:lnSpc>
-                <a:spcPts val="1150"/>
-              </a:lnSpc>
-              <a:spcAft>
-                <a:spcPts val="400"/>
-              </a:spcAft>
-              <a:buSzPct val="100000"/>
-              <a:buChar char="•"/>
-            </a:pPr>
-            <a:r>
-              <a:rPr lang="en-US" sz="1000">
-                <a:solidFill>
-                  <a:srgbClr val="3A4453"/>
-                </a:solidFill>
-              </a:rPr>
-              <a:t>December includes a planned loss reflecting the two-week business closure, which should remain in the revised assumptions.</a:t>
-            </a:r>
-            <a:endParaRPr lang="en-US" sz="900"/>
-          </a:p>
-          <a:p>
-            <a:pPr marL="342900" indent="-342900">
-              <a:lnSpc>
-                <a:spcPts val="1150"/>
-              </a:lnSpc>
-              <a:spcAft>
-                <a:spcPts val="400"/>
-              </a:spcAft>
-              <a:buSzPct val="100000"/>
-              <a:buChar char="•"/>
-            </a:pPr>
-            <a:r>
-              <a:rPr lang="en-US" sz="1000">
-                <a:solidFill>
-                  <a:srgbClr val="3A4453"/>
-                </a:solidFill>
-              </a:rPr>
-              <a:t>Recommend preparing an updated rolling forecast using actual delivery capacity and achievable gross margins.</a:t>
-            </a:r>
-            <a:endParaRPr lang="en-US" sz="900"/>
           </a:p>
         </p:txBody>
       </p:sp>
@@ -21441,6 +21522,412 @@
 </file>
 
 <file path=ppt/slides/slide40.xml><?xml version="1.0" encoding="utf-8"?>
+<p:sld xmlns:a="http://schemas.openxmlformats.org/drawingml/2006/main" xmlns:r="http://schemas.openxmlformats.org/officeDocument/2006/relationships" xmlns:p="http://schemas.openxmlformats.org/presentationml/2006/main">
+  <p:cSld name="Slide 29">
+    <p:spTree>
+      <p:nvGrpSpPr>
+        <p:cNvPr id="1" name=""/>
+        <p:cNvGrpSpPr/>
+        <p:nvPr/>
+      </p:nvGrpSpPr>
+      <p:grpSpPr>
+        <a:xfrm>
+          <a:off x="0" y="0"/>
+          <a:ext cx="0" cy="0"/>
+          <a:chOff x="0" y="0"/>
+          <a:chExt cx="0" cy="0"/>
+        </a:xfrm>
+      </p:grpSpPr>
+      <p:pic>
+        <p:nvPicPr>
+          <p:cNvPr id="27" name="snip income_month" descr="income_month.png"/>
+          <p:cNvPicPr>
+            <a:picLocks noChangeAspect="1"/>
+          </p:cNvPicPr>
+          <p:nvPr/>
+        </p:nvPicPr>
+        <p:blipFill>
+          <a:blip r:embed="rId3"/>
+          <a:stretch>
+            <a:fillRect/>
+          </a:stretch>
+        </p:blipFill>
+        <p:spPr>
+          <a:xfrm>
+            <a:off x="550168" y="1005840"/>
+            <a:ext cx="8043662" cy="2130551"/>
+          </a:xfrm>
+          <a:prstGeom prst="rect">
+            <a:avLst/>
+          </a:prstGeom>
+        </p:spPr>
+      </p:pic>
+      <p:sp>
+        <p:nvSpPr>
+          <p:cNvPr id="2" name="Text 0"/>
+          <p:cNvSpPr txBox="1"/>
+          <p:nvPr/>
+        </p:nvSpPr>
+        <p:spPr>
+          <a:xfrm>
+            <a:off x="502920" y="365760"/>
+            <a:ext cx="6400800" cy="274320"/>
+          </a:xfrm>
+          <a:prstGeom prst="rect">
+            <a:avLst/>
+          </a:prstGeom>
+          <a:noFill/>
+          <a:ln/>
+        </p:spPr>
+        <p:txBody>
+          <a:bodyPr wrap="square" lIns="0" tIns="0" rIns="0" bIns="0" rtlCol="0" anchor="ctr"/>
+          <a:lstStyle/>
+          <a:p>
+            <a:pPr marL="0" indent="0">
+              <a:buNone/>
+            </a:pPr>
+            <a:r>
+              <a:rPr lang="en-US" sz="950" b="1" kern="0" spc="220">
+                <a:solidFill>
+                  <a:srgbClr val="122B82"/>
+                </a:solidFill>
+              </a:rPr>
+              <a:t>BUDGET AND OUTLOOK</a:t>
+            </a:r>
+            <a:endParaRPr lang="en-US" sz="950"/>
+          </a:p>
+        </p:txBody>
+      </p:sp>
+      <p:sp>
+        <p:nvSpPr>
+          <p:cNvPr id="3" name="Text 1"/>
+          <p:cNvSpPr txBox="1"/>
+          <p:nvPr/>
+        </p:nvSpPr>
+        <p:spPr>
+          <a:xfrm>
+            <a:off x="502920" y="640080"/>
+            <a:ext cx="7315200" cy="365760"/>
+          </a:xfrm>
+          <a:prstGeom prst="rect">
+            <a:avLst/>
+          </a:prstGeom>
+          <a:noFill/>
+          <a:ln/>
+        </p:spPr>
+        <p:txBody>
+          <a:bodyPr wrap="square" lIns="0" tIns="0" rIns="0" bIns="0" rtlCol="0" anchor="ctr"/>
+          <a:lstStyle/>
+          <a:p>
+            <a:pPr marL="0" indent="0" algn="ctr">
+              <a:buNone/>
+            </a:pPr>
+            <a:r>
+              <a:rPr lang="en-US" sz="2200" b="1">
+                <a:solidFill>
+                  <a:srgbClr val="242C39"/>
+                </a:solidFill>
+              </a:rPr>
+              <a:t>Full year revenue against budget</a:t>
+            </a:r>
+            <a:endParaRPr lang="en-US" sz="2700"/>
+          </a:p>
+        </p:txBody>
+      </p:sp>
+      <p:sp>
+        <p:nvSpPr>
+          <p:cNvPr id="6" name="commentary panel"/>
+          <p:cNvSpPr/>
+          <p:nvPr/>
+        </p:nvSpPr>
+        <p:spPr>
+          <a:xfrm>
+            <a:off x="502920" y="3227831"/>
+            <a:ext cx="8138160" cy="1399032"/>
+          </a:xfrm>
+          <a:prstGeom prst="rect">
+            <a:avLst/>
+          </a:prstGeom>
+          <a:solidFill>
+            <a:srgbClr val="E8F9F8"/>
+          </a:solidFill>
+          <a:ln/>
+        </p:spPr>
+        <p:txBody>
+          <a:bodyPr/>
+          <a:lstStyle/>
+          <a:p>
+            <a:endParaRPr lang="en-AU"/>
+          </a:p>
+        </p:txBody>
+      </p:sp>
+      <p:sp>
+        <p:nvSpPr>
+          <p:cNvPr id="7" name="Text 4"/>
+          <p:cNvSpPr txBox="1"/>
+          <p:nvPr/>
+        </p:nvSpPr>
+        <p:spPr>
+          <a:xfrm>
+            <a:off x="685800" y="3300983"/>
+            <a:ext cx="2743200" cy="228600"/>
+          </a:xfrm>
+          <a:prstGeom prst="rect">
+            <a:avLst/>
+          </a:prstGeom>
+          <a:noFill/>
+          <a:ln/>
+        </p:spPr>
+        <p:txBody>
+          <a:bodyPr wrap="square" lIns="0" tIns="0" rIns="0" bIns="0" rtlCol="0" anchor="ctr"/>
+          <a:lstStyle/>
+          <a:p>
+            <a:pPr marL="0" indent="0">
+              <a:buNone/>
+            </a:pPr>
+            <a:r>
+              <a:rPr lang="en-US" sz="900" b="1" kern="0" spc="180">
+                <a:solidFill>
+                  <a:srgbClr val="005358"/>
+                </a:solidFill>
+              </a:rPr>
+              <a:t>COMMENTARY</a:t>
+            </a:r>
+            <a:endParaRPr lang="en-US" sz="900"/>
+          </a:p>
+        </p:txBody>
+      </p:sp>
+      <p:sp>
+        <p:nvSpPr>
+          <p:cNvPr id="8" name="Text 5"/>
+          <p:cNvSpPr txBox="1"/>
+          <p:nvPr/>
+        </p:nvSpPr>
+        <p:spPr>
+          <a:xfrm>
+            <a:off x="685800" y="3474719"/>
+            <a:ext cx="3703320" cy="1124712"/>
+          </a:xfrm>
+          <a:prstGeom prst="rect">
+            <a:avLst/>
+          </a:prstGeom>
+          <a:noFill/>
+          <a:ln/>
+        </p:spPr>
+        <p:txBody>
+          <a:bodyPr wrap="square" lIns="0" tIns="0" rIns="0" bIns="0" rtlCol="0" anchor="t">
+            <a:normAutofit fontScale="77500" lnSpcReduction="20000"/>
+          </a:bodyPr>
+          <a:lstStyle/>
+          <a:p>
+            <a:pPr marL="342900" indent="-342900">
+              <a:lnSpc>
+                <a:spcPts val="1150"/>
+              </a:lnSpc>
+              <a:spcAft>
+                <a:spcPts val="400"/>
+              </a:spcAft>
+              <a:buSzPct val="100000"/>
+              <a:buChar char="•"/>
+            </a:pPr>
+            <a:r>
+              <a:rPr lang="en-US" sz="1000">
+                <a:solidFill>
+                  <a:srgbClr val="3A4453"/>
+                </a:solidFill>
+              </a:rPr>
+              <a:t>First-quarter revenue was $372k below budget, with significant shortfalls in Consulting and Video.</a:t>
+            </a:r>
+            <a:endParaRPr lang="en-US" sz="900"/>
+          </a:p>
+          <a:p>
+            <a:pPr marL="342900" indent="-342900">
+              <a:lnSpc>
+                <a:spcPts val="1150"/>
+              </a:lnSpc>
+              <a:spcAft>
+                <a:spcPts val="400"/>
+              </a:spcAft>
+              <a:buSzPct val="100000"/>
+              <a:buChar char="•"/>
+            </a:pPr>
+            <a:r>
+              <a:rPr lang="en-US" sz="1000">
+                <a:solidFill>
+                  <a:srgbClr val="3A4453"/>
+                </a:solidFill>
+              </a:rPr>
+              <a:t>October to June currently reflects the original budget rather than an updated forecast.</a:t>
+            </a:r>
+            <a:endParaRPr lang="en-US" sz="900"/>
+          </a:p>
+          <a:p>
+            <a:pPr marL="342900" indent="-342900">
+              <a:lnSpc>
+                <a:spcPts val="1150"/>
+              </a:lnSpc>
+              <a:spcAft>
+                <a:spcPts val="400"/>
+              </a:spcAft>
+              <a:buSzPct val="100000"/>
+              <a:buChar char="•"/>
+            </a:pPr>
+            <a:r>
+              <a:rPr lang="en-US" sz="1000">
+                <a:solidFill>
+                  <a:srgbClr val="3A4453"/>
+                </a:solidFill>
+              </a:rPr>
+              <a:t>October revenue is budgeted at $950k, well above the highest actual month recorded so far this year.</a:t>
+            </a:r>
+            <a:endParaRPr lang="en-US" sz="900"/>
+          </a:p>
+        </p:txBody>
+      </p:sp>
+      <p:sp>
+        <p:nvSpPr>
+          <p:cNvPr id="25" name="Slide Number Placeholder 0"/>
+          <p:cNvSpPr>
+            <a:spLocks noGrp="1"/>
+          </p:cNvSpPr>
+          <p:nvPr>
+            <p:ph type="sldNum" sz="quarter" idx="4294967295"/>
+          </p:nvPr>
+        </p:nvSpPr>
+        <p:spPr>
+          <a:xfrm>
+            <a:off x="8092440" y="4736592"/>
+            <a:ext cx="548640" cy="228600"/>
+          </a:xfrm>
+          <a:prstGeom prst="rect">
+            <a:avLst/>
+          </a:prstGeom>
+          <a:extLst>
+            <a:ext uri="{C572A759-6A51-4108-AA02-DFA0A04FC94B}">
+              <ma14:wrappingTextBoxFlag xmlns:ma14="http://schemas.microsoft.com/office/mac/drawingml/2011/main" xmlns="" val="0"/>
+            </a:ext>
+          </a:extLst>
+        </p:spPr>
+        <p:txBody>
+          <a:bodyPr/>
+          <a:lstStyle>
+            <a:lvl1pPr>
+              <a:defRPr sz="800">
+                <a:solidFill>
+                  <a:srgbClr val="6B7585"/>
+                </a:solidFill>
+              </a:defRPr>
+            </a:lvl1pPr>
+          </a:lstStyle>
+          <a:p>
+            <a:pPr algn="r"/>
+            <a:fld id="{F7021451-1387-4CA6-816F-3879F97B5CBC}" type="slidenum">
+              <a:rPr lang="en-US" b="0"/>
+              <a:t>37</a:t>
+            </a:fld>
+            <a:endParaRPr lang="en-US"/>
+          </a:p>
+        </p:txBody>
+      </p:sp>
+      <p:pic>
+        <p:nvPicPr>
+          <p:cNvPr id="26" name="cts logo" descr="cts-logo.png"/>
+          <p:cNvPicPr>
+            <a:picLocks noChangeAspect="1"/>
+          </p:cNvPicPr>
+          <p:nvPr/>
+        </p:nvPicPr>
+        <p:blipFill>
+          <a:blip r:embed="rId4"/>
+          <a:stretch>
+            <a:fillRect/>
+          </a:stretch>
+        </p:blipFill>
+        <p:spPr>
+          <a:xfrm>
+            <a:off x="7680959" y="182880"/>
+            <a:ext cx="960120" cy="539696"/>
+          </a:xfrm>
+          <a:prstGeom prst="rect">
+            <a:avLst/>
+          </a:prstGeom>
+        </p:spPr>
+      </p:pic>
+      <p:sp>
+        <p:nvSpPr>
+          <p:cNvPr id="4" name="Text 5b"/>
+          <p:cNvSpPr txBox="1"/>
+          <p:nvPr/>
+        </p:nvSpPr>
+        <p:spPr>
+          <a:xfrm>
+            <a:off x="4663440" y="3474719"/>
+            <a:ext cx="3703320" cy="1124712"/>
+          </a:xfrm>
+          <a:prstGeom prst="rect">
+            <a:avLst/>
+          </a:prstGeom>
+          <a:noFill/>
+          <a:ln/>
+        </p:spPr>
+        <p:txBody>
+          <a:bodyPr wrap="square" lIns="0" tIns="0" rIns="0" bIns="0" rtlCol="0" anchor="t">
+            <a:normAutofit fontScale="77500" lnSpcReduction="20000"/>
+          </a:bodyPr>
+          <a:lstStyle/>
+          <a:p>
+            <a:pPr marL="342900" indent="-342900">
+              <a:lnSpc>
+                <a:spcPts val="1150"/>
+              </a:lnSpc>
+              <a:spcAft>
+                <a:spcPts val="400"/>
+              </a:spcAft>
+              <a:buSzPct val="100000"/>
+              <a:buChar char="•"/>
+            </a:pPr>
+            <a:r>
+              <a:rPr lang="en-US" sz="1000">
+                <a:solidFill>
+                  <a:srgbClr val="3A4453"/>
+                </a:solidFill>
+              </a:rPr>
+              <a:t>December includes a planned loss reflecting the two-week business closure, which should remain in the revised assumptions.</a:t>
+            </a:r>
+            <a:endParaRPr lang="en-US" sz="900"/>
+          </a:p>
+          <a:p>
+            <a:pPr marL="342900" indent="-342900">
+              <a:lnSpc>
+                <a:spcPts val="1150"/>
+              </a:lnSpc>
+              <a:spcAft>
+                <a:spcPts val="400"/>
+              </a:spcAft>
+              <a:buSzPct val="100000"/>
+              <a:buChar char="•"/>
+            </a:pPr>
+            <a:r>
+              <a:rPr lang="en-US" sz="1000">
+                <a:solidFill>
+                  <a:srgbClr val="3A4453"/>
+                </a:solidFill>
+              </a:rPr>
+              <a:t>Recommend preparing an updated rolling forecast using actual delivery capacity and achievable gross margins.</a:t>
+            </a:r>
+            <a:endParaRPr lang="en-US" sz="900"/>
+          </a:p>
+        </p:txBody>
+      </p:sp>
+    </p:spTree>
+  </p:cSld>
+  <p:clrMapOvr>
+    <a:masterClrMapping/>
+  </p:clrMapOvr>
+</p:sld>
+</file>
+
+<file path=ppt/slides/slide41.xml><?xml version="1.0" encoding="utf-8"?>
 <p:sld xmlns:a="http://schemas.openxmlformats.org/drawingml/2006/main" xmlns:r="http://schemas.openxmlformats.org/officeDocument/2006/relationships" xmlns:p="http://schemas.openxmlformats.org/presentationml/2006/main">
   <p:cSld name="Slide 30">
     <p:spTree>
@@ -23586,7 +24073,7 @@
 </p:sld>
 </file>
 
-<file path=ppt/slides/slide41.xml><?xml version="1.0" encoding="utf-8"?>
+<file path=ppt/slides/slide42.xml><?xml version="1.0" encoding="utf-8"?>
 <p:sld xmlns:a="http://schemas.openxmlformats.org/drawingml/2006/main" xmlns:r="http://schemas.openxmlformats.org/officeDocument/2006/relationships" xmlns:p="http://schemas.openxmlformats.org/presentationml/2006/main">
   <p:cSld>
     <p:bg>
@@ -23962,7 +24449,7 @@
 </p:sld>
 </file>
 
-<file path=ppt/slides/slide42.xml><?xml version="1.0" encoding="utf-8"?>
+<file path=ppt/slides/slide43.xml><?xml version="1.0" encoding="utf-8"?>
 <p:sld xmlns:a="http://schemas.openxmlformats.org/drawingml/2006/main" xmlns:r="http://schemas.openxmlformats.org/officeDocument/2006/relationships" xmlns:p="http://schemas.openxmlformats.org/presentationml/2006/main">
   <p:cSld name="Slide 31">
     <p:spTree>

--- a/deck/CTS Monthly Business Review - 30092026.pptx
+++ b/deck/CTS Monthly Business Review - 30092026.pptx
@@ -5,7 +5,7 @@
     <p:sldMasterId id="2147483648" r:id="rId4"/>
   </p:sldMasterIdLst>
   <p:notesMasterIdLst>
-    <p:notesMasterId r:id="rId45"/>
+    <p:notesMasterId r:id="rId48"/>
   </p:notesMasterIdLst>
   <p:sldIdLst>
     <p:sldId id="256" r:id="rId5"/>
@@ -22,35 +22,36 @@
     <p:sldId id="295" r:id="rId16"/>
     <p:sldId id="296" r:id="rId17"/>
     <p:sldId id="297" r:id="rId18"/>
-    <p:sldId id="298" r:id="rId52"/>
-    <p:sldId id="299" r:id="rId53"/>
-    <p:sldId id="300" r:id="rId54"/>
-    <p:sldId id="262" r:id="rId19"/>
-    <p:sldId id="263" r:id="rId20"/>
-    <p:sldId id="264" r:id="rId21"/>
-    <p:sldId id="265" r:id="rId22"/>
-    <p:sldId id="266" r:id="rId23"/>
-    <p:sldId id="267" r:id="rId24"/>
-    <p:sldId id="268" r:id="rId25"/>
-    <p:sldId id="269" r:id="rId26"/>
-    <p:sldId id="270" r:id="rId27"/>
-    <p:sldId id="271" r:id="rId28"/>
-    <p:sldId id="272" r:id="rId29"/>
-    <p:sldId id="273" r:id="rId30"/>
-    <p:sldId id="274" r:id="rId31"/>
-    <p:sldId id="275" r:id="rId32"/>
-    <p:sldId id="276" r:id="rId33"/>
-    <p:sldId id="277" r:id="rId34"/>
-    <p:sldId id="278" r:id="rId35"/>
-    <p:sldId id="279" r:id="rId36"/>
-    <p:sldId id="280" r:id="rId37"/>
-    <p:sldId id="281" r:id="rId38"/>
-    <p:sldId id="282" r:id="rId39"/>
-    <p:sldId id="283" r:id="rId40"/>
-    <p:sldId id="284" r:id="rId41"/>
-    <p:sldId id="285" r:id="rId42"/>
-    <p:sldId id="288" r:id="rId43"/>
-    <p:sldId id="286" r:id="rId44"/>
+    <p:sldId id="298" r:id="rId19"/>
+    <p:sldId id="299" r:id="rId20"/>
+    <p:sldId id="262" r:id="rId21"/>
+    <p:sldId id="300" r:id="rId22"/>
+    <p:sldId id="263" r:id="rId23"/>
+    <p:sldId id="264" r:id="rId24"/>
+    <p:sldId id="265" r:id="rId25"/>
+    <p:sldId id="266" r:id="rId26"/>
+    <p:sldId id="267" r:id="rId27"/>
+    <p:sldId id="268" r:id="rId28"/>
+    <p:sldId id="301" r:id="rId55"/>
+    <p:sldId id="269" r:id="rId29"/>
+    <p:sldId id="270" r:id="rId30"/>
+    <p:sldId id="271" r:id="rId31"/>
+    <p:sldId id="272" r:id="rId32"/>
+    <p:sldId id="273" r:id="rId33"/>
+    <p:sldId id="274" r:id="rId34"/>
+    <p:sldId id="275" r:id="rId35"/>
+    <p:sldId id="276" r:id="rId36"/>
+    <p:sldId id="277" r:id="rId37"/>
+    <p:sldId id="278" r:id="rId38"/>
+    <p:sldId id="279" r:id="rId39"/>
+    <p:sldId id="280" r:id="rId40"/>
+    <p:sldId id="281" r:id="rId41"/>
+    <p:sldId id="282" r:id="rId42"/>
+    <p:sldId id="283" r:id="rId43"/>
+    <p:sldId id="284" r:id="rId44"/>
+    <p:sldId id="285" r:id="rId45"/>
+    <p:sldId id="288" r:id="rId46"/>
+    <p:sldId id="286" r:id="rId47"/>
   </p:sldIdLst>
   <p:sldSz cx="9144000" cy="5143500" type="screen16x9"/>
   <p:notesSz cx="6800850" cy="9932988"/>
@@ -1372,37 +1373,49 @@
               <a:t>Net profit and net loss for September across three years, taken from the Xero History tab. Net profit is the pack's own figure and includes other income.</a:t>
             </a:r>
           </a:p>
-          <a:p/>
+          <a:p>
+            <a:endParaRPr/>
+          </a:p>
           <a:p>
             <a:r>
               <a:t>September 2026 a loss of $41,464. September 2025 a loss of $52,615. September 2024 a profit of $20,737.</a:t>
             </a:r>
           </a:p>
-          <a:p/>
+          <a:p>
+            <a:endParaRPr/>
+          </a:p>
           <a:p>
             <a:r>
               <a:t>This September is $11,152 better than the same month last year, and $62,201 worse than the September before that.</a:t>
             </a:r>
           </a:p>
-          <a:p/>
+          <a:p>
+            <a:endParaRPr/>
+          </a:p>
           <a:p>
             <a:r>
               <a:t>The thing worth drawing out is that the loss is not a revenue failure. September 2026 billed $561,945, which is the highest of the three Septembers, ahead of $356,323 last year and $440,243 the year before. The month earned more than either comparison and still finished below the line.</a:t>
             </a:r>
           </a:p>
-          <a:p/>
+          <a:p>
+            <a:endParaRPr/>
+          </a:p>
           <a:p>
             <a:r>
               <a:t>What changed is the cost of earning it. Cost of sales was $374,130 against $216,749 in September 2024 on revenue only $121,701 higher. The gross margin on the month was 33.4%, against 50.8% in September 2024.</a:t>
             </a:r>
           </a:p>
-          <a:p/>
+          <a:p>
+            <a:endParaRPr/>
+          </a:p>
           <a:p>
             <a:r>
               <a:t>So the question this chart puts to the board is about pricing and delivery cost on the work being won, not about the volume of work being won.</a:t>
             </a:r>
           </a:p>
-          <a:p/>
+          <a:p>
+            <a:endParaRPr/>
+          </a:p>
           <a:p>
             <a:r>
               <a:t>FY25 was pulled from Xero on 22 October 2026. FY26 is the Actual FY26 tab and FY27 the P&amp;L FY27 tab. The month follows the reporting month on Setup, so in October this becomes October. Only the first quarter of FY25 was pulled, so the FY25 bar is blank from October until the rest is pulled.</a:t>
@@ -1437,18 +1450,6 @@
       </p:grpSpPr>
       <p:sp>
         <p:nvSpPr>
-          <p:cNvPr id="2" name="Slide Image Placeholder 1"/>
-          <p:cNvSpPr>
-            <a:spLocks noGrp="1" noRot="1" noChangeAspect="1"/>
-          </p:cNvSpPr>
-          <p:nvPr>
-            <p:ph type="sldImg"/>
-          </p:nvPr>
-        </p:nvSpPr>
-        <p:spPr/>
-      </p:sp>
-      <p:sp>
-        <p:nvSpPr>
           <p:cNvPr id="3" name="Notes Placeholder 2"/>
           <p:cNvSpPr>
             <a:spLocks noGrp="1"/>
@@ -1463,7 +1464,7 @@
           <a:lstStyle/>
           <a:p>
             <a:r>
-              <a:t>Each department against budget, carrying its full overhead charge, taken from section 7 of the Overhead Split tab.</a:t>
+              <a:t>Net profit and net loss for the first quarter across three years, taken from the Xero History tab. Net profit is the pack's own figure and includes other income.</a:t>
             </a:r>
           </a:p>
           <a:p>
@@ -1471,27 +1472,7 @@
           </a:p>
           <a:p>
             <a:r>
-              <a:t>Support: revenue $242,948 against a $248,017 budget. Gross profit $101,290 at 41.7%. Overhead $72,283, of which $59,182 is allocated admin. Result $29,007.</a:t>
-            </a:r>
-          </a:p>
-          <a:p>
-            <a:r>
-              <a:t>Events: revenue $73,304 against $65,828. Gross profit $56,881 at 77.6%. Overhead $111,108, of which $71,672 is allocated admin. Result a loss of $54,227.</a:t>
-            </a:r>
-          </a:p>
-          <a:p>
-            <a:r>
-              <a:t>Video: revenue $7,303 against $17,498. Gross profit $5,813 at 79.6%. Overhead $12,659, of which $9,782 is allocated admin. Result a loss of $6,846.</a:t>
-            </a:r>
-          </a:p>
-          <a:p>
-            <a:r>
-              <a:t>Integration: revenue $234,858 against $59,272. Gross profit $23,756 at 10.1%. Overhead $13,285, of which $4,148 is allocated admin. Result $10,471.</a:t>
-            </a:r>
-          </a:p>
-          <a:p>
-            <a:r>
-              <a:t>Consulting: revenue $3,531 against $23,050. Gross profit $74 at 2.1%. Overhead $19,944, of which $13,979 is allocated admin. Result a loss of $19,870.</a:t>
+              <a:t>Q1 2026 a loss of $5,808. Q1 2025 a loss of $85,404. Q1 2024 a profit of $34,595.</a:t>
             </a:r>
           </a:p>
           <a:p>
@@ -1499,7 +1480,7 @@
           </a:p>
           <a:p>
             <a:r>
-              <a:t>The five departments total a loss of $41,464, which is net profit for the month.</a:t>
+              <a:t>The quarter has improved $79,596 on last year and is within $5,808 of breaking even. On that reading the recovery is real and the direction is right.</a:t>
             </a:r>
           </a:p>
           <a:p>
@@ -1507,40 +1488,36 @@
           </a:p>
           <a:p>
             <a:r>
-              <a:t>Two observations. Integration sold $175,586 more than planned and it produced very little profit, because the margin retained on resold equipment is 10.1%. And Events carries $71,672 of office costs on $73,304 of sales. That charge is allocated on office usage, and Events is not the department occupying the office. I would suggest the allocation basis is reviewed for FY28 rather than changed mid-year.</a:t>
-            </a:r>
-          </a:p>
-        </p:txBody>
-      </p:sp>
-      <p:sp>
-        <p:nvSpPr>
-          <p:cNvPr id="4" name="Slide Number Placeholder 3"/>
-          <p:cNvSpPr>
-            <a:spLocks noGrp="1"/>
-          </p:cNvSpPr>
-          <p:nvPr>
-            <p:ph type="sldNum" sz="quarter" idx="10"/>
-          </p:nvPr>
-        </p:nvSpPr>
-        <p:spPr/>
-        <p:txBody>
-          <a:bodyPr lIns="107095" tIns="53547" rIns="107095" bIns="53547"/>
-          <a:lstStyle/>
-          <a:p>
-            <a:fld id="{F7021451-1387-4CA6-816F-3879F97B5CBC}" type="slidenum">
-              <a:rPr lang="en-US"/>
-              <a:t>15</a:t>
-            </a:fld>
-            <a:endParaRPr lang="en-US"/>
+              <a:t>Against the plan it reads differently. The budget had the first quarter at a $222,700 profit. Coming in at a $5,808 loss is $228,508 below it.</a:t>
+            </a:r>
+          </a:p>
+          <a:p>
+            <a:endParaRPr/>
+          </a:p>
+          <a:p>
+            <a:r>
+              <a:t>As with the month, this is not a revenue failure. The quarter billed $1,624,460, which is the highest first quarter of the three, ahead of $1,228,582 last year and $1,380,102 the year before. It earned more than either comparison and still finished below the line.</a:t>
+            </a:r>
+          </a:p>
+          <a:p>
+            <a:endParaRPr/>
+          </a:p>
+          <a:p>
+            <a:r>
+              <a:t>The cost of earning it is where the quarter went. Cost of sales was $992,160 against $708,478 in Q1 2024, which is $283,682 more on revenue $244,358 higher. Overheads were almost unchanged at $641,508 against $638,615. The overhead base is not the problem and has not been for three years. The margin on the work is.</a:t>
+            </a:r>
+          </a:p>
+          <a:p>
+            <a:endParaRPr/>
+          </a:p>
+          <a:p>
+            <a:r>
+              <a:t>FY25 was pulled from Xero on 22 October 2026. The quarter is July to September, so it is fixed rather than following Setup.</a:t>
+            </a:r>
           </a:p>
         </p:txBody>
       </p:sp>
     </p:spTree>
-    <p:extLst>
-      <p:ext uri="{BB962C8B-B14F-4D97-AF65-F5344CB8AC3E}">
-        <p14:creationId xmlns:p14="http://schemas.microsoft.com/office/powerpoint/2010/main" val="1024086991"/>
-      </p:ext>
-    </p:extLst>
   </p:cSld>
   <p:clrMapOvr>
     <a:masterClrMapping/>
@@ -1567,18 +1544,6 @@
       </p:grpSpPr>
       <p:sp>
         <p:nvSpPr>
-          <p:cNvPr id="2" name="Slide Image Placeholder 1"/>
-          <p:cNvSpPr>
-            <a:spLocks noGrp="1" noRot="1" noChangeAspect="1"/>
-          </p:cNvSpPr>
-          <p:nvPr>
-            <p:ph type="sldImg"/>
-          </p:nvPr>
-        </p:nvSpPr>
-        <p:spPr/>
-      </p:sp>
-      <p:sp>
-        <p:nvSpPr>
           <p:cNvPr id="3" name="Notes Placeholder 2"/>
           <p:cNvSpPr>
             <a:spLocks noGrp="1"/>
@@ -1593,7 +1558,7 @@
           <a:lstStyle/>
           <a:p>
             <a:r>
-              <a:t>The same month read as three departments rather than five, which is how the Summary tab is constructed.</a:t>
+              <a:t>Departmental performance for September 2026.</a:t>
             </a:r>
           </a:p>
           <a:p>
@@ -1601,90 +1566,12 @@
           </a:p>
           <a:p>
             <a:r>
-              <a:t>Production is the parent of Events and Video. Consulting is the parent of Integration and Consulting. Support has no sub-departments. Admin is not a trading department and its costs are allocated across the three.</a:t>
-            </a:r>
-          </a:p>
-          <a:p>
-            <a:endParaRPr/>
-          </a:p>
-          <a:p>
-            <a:r>
-              <a:t>Support: revenue $242,948 against a $248,017 budget. Gross profit $101,290 at 41.7%. All overhead $72,283. Result $29,007.</a:t>
-            </a:r>
-          </a:p>
-          <a:p>
-            <a:r>
-              <a:t>Production: revenue $80,607 against $83,326. Gross profit $62,694 at 77.8%. All overhead $123,767. Result a loss of $61,073.</a:t>
-            </a:r>
-          </a:p>
-          <a:p>
-            <a:r>
-              <a:t>Consulting: revenue $238,389 against $82,322. Gross profit $23,830 at 10.0%. All overhead $33,229. Result a loss of $9,398.</a:t>
-            </a:r>
-          </a:p>
-          <a:p>
-            <a:endParaRPr/>
-          </a:p>
-          <a:p>
-            <a:r>
-              <a:t>The three total a loss of $41,464, which is net profit for the month, and the check row on the tab reconciles it to the five department view.</a:t>
-            </a:r>
-          </a:p>
-          <a:p>
-            <a:endParaRPr/>
-          </a:p>
-          <a:p>
-            <a:r>
-              <a:t>The grouping shows something the five departments did not. Production, being Events and Video together, retains 77.8% of what it sells, the strongest margin in the business. It records a loss only because it carries $123,767 of running costs against $80,607 of sales. That is a volume position rather than a pricing one, and it presents the clearest growth case in the pack.</a:t>
-            </a:r>
-          </a:p>
-          <a:p>
-            <a:endParaRPr/>
-          </a:p>
-          <a:p>
-            <a:r>
-              <a:t>The Consulting group is the opposite. It sold $156,068 more than plan and retains 10.0%, because almost all of that was resold equipment through Integration. Additional sales of that kind would not improve the result.</a:t>
-            </a:r>
-          </a:p>
-          <a:p>
-            <a:endParaRPr/>
-          </a:p>
-          <a:p>
-            <a:r>
-              <a:t>Support carries the profit of the business. On these three lines the questions are how Support is protected, how Production is given volume, and how Consulting is resolved.</a:t>
-            </a:r>
-          </a:p>
-        </p:txBody>
-      </p:sp>
-      <p:sp>
-        <p:nvSpPr>
-          <p:cNvPr id="4" name="Slide Number Placeholder 3"/>
-          <p:cNvSpPr>
-            <a:spLocks noGrp="1"/>
-          </p:cNvSpPr>
-          <p:nvPr>
-            <p:ph type="sldNum" sz="quarter" idx="10"/>
-          </p:nvPr>
-        </p:nvSpPr>
-        <p:spPr/>
-        <p:txBody>
-          <a:bodyPr lIns="107095" tIns="53547" rIns="107095" bIns="53547"/>
-          <a:lstStyle/>
-          <a:p>
-            <a:fld id="{F7021451-1387-4CA6-816F-3879F97B5CBC}" type="slidenum">
-              <a:rPr lang="en-US"/>
-              <a:t>16</a:t>
-            </a:fld>
-            <a:endParaRPr lang="en-US"/>
+              <a:t>The pages that follow give the company result by department, the same result rolled up the way the P&amp;L groups the business, then a page for each of the five departments, and finally departmental revenue against budget and against the same month last year.</a:t>
+            </a:r>
           </a:p>
         </p:txBody>
       </p:sp>
     </p:spTree>
-    <p:extLst>
-      <p:ext uri="{BB962C8B-B14F-4D97-AF65-F5344CB8AC3E}">
-        <p14:creationId xmlns:p14="http://schemas.microsoft.com/office/powerpoint/2010/main" val="1024086991"/>
-      </p:ext>
-    </p:extLst>
   </p:cSld>
   <p:clrMapOvr>
     <a:masterClrMapping/>
@@ -1737,7 +1624,7 @@
           <a:lstStyle/>
           <a:p>
             <a:r>
-              <a:t>Support for September 2026, taken from the Dept P&amp;L tab.</a:t>
+              <a:t>Each department against budget, carrying its full overhead charge, taken from section 7 of the Overhead Split tab.</a:t>
             </a:r>
           </a:p>
           <a:p>
@@ -1745,7 +1632,27 @@
           </a:p>
           <a:p>
             <a:r>
-              <a:t>Revenue $242,948 against a budget of $248,017, behind by $5,068. September last year was $231,214.</a:t>
+              <a:t>Support: revenue $242,948 against a $248,017 budget. Gross profit $101,290 at 41.7%. Overhead $72,283, of which $59,182 is allocated admin. Result $29,007.</a:t>
+            </a:r>
+          </a:p>
+          <a:p>
+            <a:r>
+              <a:t>Events: revenue $73,304 against $65,828. Gross profit $56,881 at 77.6%. Overhead $111,108, of which $71,672 is allocated admin. Result a loss of $54,227.</a:t>
+            </a:r>
+          </a:p>
+          <a:p>
+            <a:r>
+              <a:t>Video: revenue $7,303 against $17,498. Gross profit $5,813 at 79.6%. Overhead $12,659, of which $9,782 is allocated admin. Result a loss of $6,846.</a:t>
+            </a:r>
+          </a:p>
+          <a:p>
+            <a:r>
+              <a:t>Integration: revenue $234,858 against $59,272. Gross profit $23,756 at 10.1%. Overhead $13,285, of which $4,148 is allocated admin. Result $10,471.</a:t>
+            </a:r>
+          </a:p>
+          <a:p>
+            <a:r>
+              <a:t>Consulting: revenue $3,531 against $23,050. Gross profit $74 at 2.1%. Overhead $19,944, of which $13,979 is allocated admin. Result a loss of $19,870.</a:t>
             </a:r>
           </a:p>
           <a:p>
@@ -1753,7 +1660,7 @@
           </a:p>
           <a:p>
             <a:r>
-              <a:t>After direct costs of $141,659 it retained $101,290, being 41.7% of revenue.</a:t>
+              <a:t>The five departments total a loss of $41,464, which is net profit for the month.</a:t>
             </a:r>
           </a:p>
           <a:p>
@@ -1761,31 +1668,7 @@
           </a:p>
           <a:p>
             <a:r>
-              <a:t>Overheads charged to it were $72,283, of which $13,101 is its own spending and $59,182 is its share of the office, allocated on the keys set in the pack.</a:t>
-            </a:r>
-          </a:p>
-          <a:p>
-            <a:endParaRPr/>
-          </a:p>
-          <a:p>
-            <a:r>
-              <a:t>That leaves $29,007 for the month.</a:t>
-            </a:r>
-          </a:p>
-          <a:p>
-            <a:endParaRPr/>
-          </a:p>
-          <a:p>
-            <a:r>
-              <a:t>Year to date it has billed $718,587 against a budget of $743,185.</a:t>
-            </a:r>
-          </a:p>
-          <a:p>
-            <a:endParaRPr/>
-          </a:p>
-          <a:p>
-            <a:r>
-              <a:t>On people, employment expense of $51,242, of which $8,980 is its own staff and $42,262 its share of office wages. It recorded 2,132 billable hours and 11 non-billable, with 218 hours of leave.</a:t>
+              <a:t>Two observations. Integration sold $175,586 more than planned and it produced very little profit, because the margin retained on resold equipment is 10.1%. And Events carries $71,672 of office costs on $73,304 of sales. That charge is allocated on office usage, and Events is not the department occupying the office. I would suggest the allocation basis is reviewed for FY28 rather than changed mid-year.</a:t>
             </a:r>
           </a:p>
         </p:txBody>
@@ -1845,18 +1728,6 @@
       </p:grpSpPr>
       <p:sp>
         <p:nvSpPr>
-          <p:cNvPr id="2" name="Slide Image Placeholder 1"/>
-          <p:cNvSpPr>
-            <a:spLocks noGrp="1" noRot="1" noChangeAspect="1"/>
-          </p:cNvSpPr>
-          <p:nvPr>
-            <p:ph type="sldImg"/>
-          </p:nvPr>
-        </p:nvSpPr>
-        <p:spPr/>
-      </p:sp>
-      <p:sp>
-        <p:nvSpPr>
           <p:cNvPr id="3" name="Notes Placeholder 2"/>
           <p:cNvSpPr>
             <a:spLocks noGrp="1"/>
@@ -1871,7 +1742,7 @@
           <a:lstStyle/>
           <a:p>
             <a:r>
-              <a:t>Events for September 2026, taken from the Dept P&amp;L tab.</a:t>
+              <a:t>Gross profit against the overhead charged to each department for September 2026, taken from section 7 of the Overhead Split tab. The bar above the line is what the department earned, the bar below is the overhead allocated to it, and the diamond is the result.</a:t>
             </a:r>
           </a:p>
           <a:p>
@@ -1879,7 +1750,27 @@
           </a:p>
           <a:p>
             <a:r>
-              <a:t>Revenue $73,304 against a budget of $65,828, ahead by $7,476. September last year was $75,333.</a:t>
+              <a:t>Support earned $101,290 and carries $72,283, leaving $29,007.</a:t>
+            </a:r>
+          </a:p>
+          <a:p>
+            <a:r>
+              <a:t>Events earned $56,881 and carries $111,108, leaving a loss of $54,227.</a:t>
+            </a:r>
+          </a:p>
+          <a:p>
+            <a:r>
+              <a:t>Video earned $5,813 and carries $12,659, leaving a loss of $6,846.</a:t>
+            </a:r>
+          </a:p>
+          <a:p>
+            <a:r>
+              <a:t>Integration earned $23,756 and carries $13,285, leaving $10,471.</a:t>
+            </a:r>
+          </a:p>
+          <a:p>
+            <a:r>
+              <a:t>Consulting earned $74 and carries $19,944, leaving a loss of $19,870.</a:t>
             </a:r>
           </a:p>
           <a:p>
@@ -1887,7 +1778,7 @@
           </a:p>
           <a:p>
             <a:r>
-              <a:t>After direct costs of $16,423 it retained $56,881, being 77.6% of revenue.</a:t>
+              <a:t>The company earned $187,814 of gross profit against $229,278 of overhead. The $41,464 difference is the loss for the month. Put plainly, the business did not earn enough gross profit to carry its own overhead base.</a:t>
             </a:r>
           </a:p>
           <a:p>
@@ -1895,7 +1786,7 @@
           </a:p>
           <a:p>
             <a:r>
-              <a:t>Overheads charged to it were $111,108, of which $39,436 is its own spending and $71,672 is its share of the office.</a:t>
+              <a:t>Two things come out of the shape of this chart.</a:t>
             </a:r>
           </a:p>
           <a:p>
@@ -1903,7 +1794,7 @@
           </a:p>
           <a:p>
             <a:r>
-              <a:t>That leaves a loss of $54,227 for the month.</a:t>
+              <a:t>The first is Events. Its gross margin was 77.6%, the second highest of the five, and it still produced the largest loss on the page. It carries $111,108 of overhead, which is 48.5% of the company total, on $73,304 of revenue, which is 13.0% of the company total. No improvement in margin fixes that. Either Events carries more revenue or it carries less overhead, and the overhead keys are worth testing before the next budget.</a:t>
             </a:r>
           </a:p>
           <a:p>
@@ -1911,7 +1802,7 @@
           </a:p>
           <a:p>
             <a:r>
-              <a:t>Year to date it has billed $420,121 against a budget of $321,957.</a:t>
+              <a:t>The second is Integration. It brought in $234,858 of revenue, the second largest of the five, and converted it into $23,756 of gross profit at a 10.1% margin. It covers its overhead and returns $10,471, so it is not a loss maker, but it is doing the most work for the least return.</a:t>
             </a:r>
           </a:p>
           <a:p>
@@ -1919,7 +1810,7 @@
           </a:p>
           <a:p>
             <a:r>
-              <a:t>On people, employment expense of $50,959, of which $35,665 is its own staff and $15,294 its share of office wages. It recorded 241 billable hours and 249 non-billable, with 333 hours of leave.</a:t>
+              <a:t>Support is the one department behaving as it should. A 41.7% margin on contract revenue, covering its allocated overhead, and returning $29,007.</a:t>
             </a:r>
           </a:p>
           <a:p>
@@ -1927,40 +1818,12 @@
           </a:p>
           <a:p>
             <a:r>
-              <a:t>The department earns the second strongest margin in the business and still records a loss, because the overhead allocated to it is larger than its revenue. I would suggest the allocation basis is the item to examine here, alongside the leave taken in the month.</a:t>
-            </a:r>
-          </a:p>
-        </p:txBody>
-      </p:sp>
-      <p:sp>
-        <p:nvSpPr>
-          <p:cNvPr id="4" name="Slide Number Placeholder 3"/>
-          <p:cNvSpPr>
-            <a:spLocks noGrp="1"/>
-          </p:cNvSpPr>
-          <p:nvPr>
-            <p:ph type="sldNum" sz="quarter" idx="10"/>
-          </p:nvPr>
-        </p:nvSpPr>
-        <p:spPr/>
-        <p:txBody>
-          <a:bodyPr lIns="107095" tIns="53547" rIns="107095" bIns="53547"/>
-          <a:lstStyle/>
-          <a:p>
-            <a:fld id="{F7021451-1387-4CA6-816F-3879F97B5CBC}" type="slidenum">
-              <a:rPr lang="en-US"/>
-              <a:t>18</a:t>
-            </a:fld>
-            <a:endParaRPr lang="en-US"/>
+              <a:t>The full table is on the next page.</a:t>
+            </a:r>
           </a:p>
         </p:txBody>
       </p:sp>
     </p:spTree>
-    <p:extLst>
-      <p:ext uri="{BB962C8B-B14F-4D97-AF65-F5344CB8AC3E}">
-        <p14:creationId xmlns:p14="http://schemas.microsoft.com/office/powerpoint/2010/main" val="1024086991"/>
-      </p:ext>
-    </p:extLst>
   </p:cSld>
   <p:clrMapOvr>
     <a:masterClrMapping/>
@@ -2013,7 +1876,7 @@
           <a:lstStyle/>
           <a:p>
             <a:r>
-              <a:t>Video for September 2026, taken from the Dept P&amp;L tab.</a:t>
+              <a:t>The same month read as three departments rather than five, which is how the Summary tab is constructed.</a:t>
             </a:r>
           </a:p>
           <a:p>
@@ -2021,7 +1884,7 @@
           </a:p>
           <a:p>
             <a:r>
-              <a:t>Revenue $7,303 against a budget of $17,498, behind by $10,196. September last year was $20,025.</a:t>
+              <a:t>Production is the parent of Events and Video. Consulting is the parent of Integration and Consulting. Support has no sub-departments. Admin is not a trading department and its costs are allocated across the three.</a:t>
             </a:r>
           </a:p>
           <a:p>
@@ -2029,7 +1892,17 @@
           </a:p>
           <a:p>
             <a:r>
-              <a:t>After direct costs of $1,489 it retained $5,813, being 79.6% of revenue.</a:t>
+              <a:t>Support: revenue $242,948 against a $248,017 budget. Gross profit $101,290 at 41.7%. All overhead $72,283. Result $29,007.</a:t>
+            </a:r>
+          </a:p>
+          <a:p>
+            <a:r>
+              <a:t>Production: revenue $80,607 against $83,326. Gross profit $62,694 at 77.8%. All overhead $123,767. Result a loss of $61,073.</a:t>
+            </a:r>
+          </a:p>
+          <a:p>
+            <a:r>
+              <a:t>Consulting: revenue $238,389 against $82,322. Gross profit $23,830 at 10.0%. All overhead $33,229. Result a loss of $9,398.</a:t>
             </a:r>
           </a:p>
           <a:p>
@@ -2037,7 +1910,7 @@
           </a:p>
           <a:p>
             <a:r>
-              <a:t>Overheads charged to it were $12,659, of which $2,878 is its own spending and $9,782 is its share of the office.</a:t>
+              <a:t>The three total a loss of $41,464, which is net profit for the month, and the check row on the tab reconciles it to the five department view.</a:t>
             </a:r>
           </a:p>
           <a:p>
@@ -2045,7 +1918,7 @@
           </a:p>
           <a:p>
             <a:r>
-              <a:t>That leaves a loss of $6,846 for the month.</a:t>
+              <a:t>The grouping shows something the five departments did not. Production, being Events and Video together, retains 77.8% of what it sells, the strongest margin in the business. It records a loss only because it carries $123,767 of running costs against $80,607 of sales. That is a volume position rather than a pricing one, and it presents the clearest growth case in the pack.</a:t>
             </a:r>
           </a:p>
           <a:p>
@@ -2053,7 +1926,7 @@
           </a:p>
           <a:p>
             <a:r>
-              <a:t>Year to date it has billed $40,270 against a budget of $85,584.</a:t>
+              <a:t>The Consulting group is the opposite. It sold $156,068 more than plan and retains 10.0%, because almost all of that was resold equipment through Integration. Additional sales of that kind would not improve the result.</a:t>
             </a:r>
           </a:p>
           <a:p>
@@ -2061,15 +1934,7 @@
           </a:p>
           <a:p>
             <a:r>
-              <a:t>On people, employment expense of $3,961, of which $2,660 is its own staff and $1,301 its share of office wages. It recorded 25 billable hours and 8 non-billable, with no leave.</a:t>
-            </a:r>
-          </a:p>
-          <a:p>
-            <a:endParaRPr/>
-          </a:p>
-          <a:p>
-            <a:r>
-              <a:t>The margin is the highest in the business. The constraint is the volume of billable work, which at 25 hours for the month is well below the level the budget assumed.</a:t>
+              <a:t>Support carries the profit of the business. On these three lines the questions are how Support is protected, how Production is given volume, and how Consulting is resolved.</a:t>
             </a:r>
           </a:p>
         </p:txBody>
@@ -2249,7 +2114,7 @@
           <a:lstStyle/>
           <a:p>
             <a:r>
-              <a:t>Integration for September 2026, taken from the Dept P&amp;L tab.</a:t>
+              <a:t>Support for September 2026, taken from the Dept P&amp;L tab.</a:t>
             </a:r>
           </a:p>
           <a:p>
@@ -2257,7 +2122,7 @@
           </a:p>
           <a:p>
             <a:r>
-              <a:t>Revenue $234,858 against a budget of $59,272, ahead by $175,586. September last year was $21,421.</a:t>
+              <a:t>Revenue $242,948 against a budget of $248,017, behind by $5,068. September last year was $231,214.</a:t>
             </a:r>
           </a:p>
           <a:p>
@@ -2265,7 +2130,7 @@
           </a:p>
           <a:p>
             <a:r>
-              <a:t>After direct costs of $211,102 it retained $23,756, being 10.1% of revenue.</a:t>
+              <a:t>After direct costs of $141,659 it retained $101,290, being 41.7% of revenue.</a:t>
             </a:r>
           </a:p>
           <a:p>
@@ -2273,7 +2138,7 @@
           </a:p>
           <a:p>
             <a:r>
-              <a:t>Overheads charged to it were $13,285, of which $9,136 is its own spending and $4,148 is its share of the office.</a:t>
+              <a:t>Overheads charged to it were $72,283, of which $13,101 is its own spending and $59,182 is its share of the office, allocated on the keys set in the pack.</a:t>
             </a:r>
           </a:p>
           <a:p>
@@ -2281,7 +2146,7 @@
           </a:p>
           <a:p>
             <a:r>
-              <a:t>That leaves $10,471 for the month.</a:t>
+              <a:t>That leaves $29,007 for the month.</a:t>
             </a:r>
           </a:p>
           <a:p>
@@ -2289,7 +2154,7 @@
           </a:p>
           <a:p>
             <a:r>
-              <a:t>Year to date it has billed $441,414 against a budget of $608,676.</a:t>
+              <a:t>Year to date it has billed $718,587 against a budget of $743,185.</a:t>
             </a:r>
           </a:p>
           <a:p>
@@ -2297,15 +2162,7 @@
           </a:p>
           <a:p>
             <a:r>
-              <a:t>On people, employment expense of $8,832, of which $8,563 is its own staff and $269 its share of office wages. It recorded 10 billable hours and no non-billable time.</a:t>
-            </a:r>
-          </a:p>
-          <a:p>
-            <a:endParaRPr/>
-          </a:p>
-          <a:p>
-            <a:r>
-              <a:t>The revenue came from a single completed installation rather than from recurring work, and from equipment supply rather than labour, which is why 10 billable hours sit behind $235k of sales. I would treat the result as timing rather than as a change in run rate.</a:t>
+              <a:t>On people, employment expense of $51,242, of which $8,980 is its own staff and $42,262 its share of office wages. It recorded 2,132 billable hours and 11 non-billable, with 218 hours of leave.</a:t>
             </a:r>
           </a:p>
         </p:txBody>
@@ -2391,7 +2248,7 @@
           <a:lstStyle/>
           <a:p>
             <a:r>
-              <a:t>Consulting for September 2026, taken from the Dept P&amp;L tab.</a:t>
+              <a:t>Events for September 2026, taken from the Dept P&amp;L tab.</a:t>
             </a:r>
           </a:p>
           <a:p>
@@ -2399,7 +2256,7 @@
           </a:p>
           <a:p>
             <a:r>
-              <a:t>Revenue $3,531 against a budget of $23,050, behind by $19,519. September last year was $8,330.</a:t>
+              <a:t>Revenue $73,304 against a budget of $65,828, ahead by $7,476. September last year was $75,333.</a:t>
             </a:r>
           </a:p>
           <a:p>
@@ -2407,7 +2264,7 @@
           </a:p>
           <a:p>
             <a:r>
-              <a:t>After direct costs of $3,457 it retained $74, being 2.1% of revenue.</a:t>
+              <a:t>After direct costs of $16,423 it retained $56,881, being 77.6% of revenue.</a:t>
             </a:r>
           </a:p>
           <a:p>
@@ -2415,7 +2272,7 @@
           </a:p>
           <a:p>
             <a:r>
-              <a:t>Overheads charged to it were $19,944, of which $5,965 is its own spending and $13,979 is its share of the office.</a:t>
+              <a:t>Overheads charged to it were $111,108, of which $39,436 is its own spending and $71,672 is its share of the office.</a:t>
             </a:r>
           </a:p>
           <a:p>
@@ -2423,7 +2280,7 @@
           </a:p>
           <a:p>
             <a:r>
-              <a:t>That leaves a loss of $19,870 for the month.</a:t>
+              <a:t>That leaves a loss of $54,227 for the month.</a:t>
             </a:r>
           </a:p>
           <a:p>
@@ -2431,7 +2288,7 @@
           </a:p>
           <a:p>
             <a:r>
-              <a:t>Year to date it has billed $4,068 against a budget of $236,707.</a:t>
+              <a:t>Year to date it has billed $420,121 against a budget of $321,957.</a:t>
             </a:r>
           </a:p>
           <a:p>
@@ -2439,7 +2296,7 @@
           </a:p>
           <a:p>
             <a:r>
-              <a:t>On people, employment expense of $9,496, of which $5,545 is its own staff and $3,951 its share of office wages. It recorded 31 billable hours and 84 non-billable, with 53 hours of leave.</a:t>
+              <a:t>On people, employment expense of $50,959, of which $35,665 is its own staff and $15,294 its share of office wages. It recorded 241 billable hours and 249 non-billable, with 333 hours of leave.</a:t>
             </a:r>
           </a:p>
           <a:p>
@@ -2447,7 +2304,7 @@
           </a:p>
           <a:p>
             <a:r>
-              <a:t>The department has carried running costs against almost no fee income for three consecutive months. I would suggest its structure, capacity and commercial basis are reviewed, including whether the work is better delivered within Integration.</a:t>
+              <a:t>The department earns the second strongest margin in the business and still records a loss, because the overhead allocated to it is larger than its revenue. I would suggest the allocation basis is the item to examine here, alongside the leave taken in the month.</a:t>
             </a:r>
           </a:p>
         </p:txBody>
@@ -2533,7 +2390,7 @@
           <a:lstStyle/>
           <a:p>
             <a:r>
-              <a:t>Revenue by department for September 2026, actual against budget and against the same month last year.</a:t>
+              <a:t>Video for September 2026, taken from the Dept P&amp;L tab.</a:t>
             </a:r>
           </a:p>
           <a:p>
@@ -2541,27 +2398,7 @@
           </a:p>
           <a:p>
             <a:r>
-              <a:t>Support: $242,948 against a budget of $248,017 and $231,214 last year.</a:t>
-            </a:r>
-          </a:p>
-          <a:p>
-            <a:r>
-              <a:t>Integration: $234,858 against a budget of $59,272 and $21,421 last year.</a:t>
-            </a:r>
-          </a:p>
-          <a:p>
-            <a:r>
-              <a:t>Events: $73,304 against a budget of $65,828 and $75,333 last year.</a:t>
-            </a:r>
-          </a:p>
-          <a:p>
-            <a:r>
-              <a:t>Video: $7,303 against a budget of $17,498 and $20,025 last year.</a:t>
-            </a:r>
-          </a:p>
-          <a:p>
-            <a:r>
-              <a:t>Consulting: $3,531 against a budget of $23,050 and $8,330 last year.</a:t>
+              <a:t>Revenue $7,303 against a budget of $17,498, behind by $10,196. September last year was $20,025.</a:t>
             </a:r>
           </a:p>
           <a:p>
@@ -2569,7 +2406,7 @@
           </a:p>
           <a:p>
             <a:r>
-              <a:t>Company revenue of $561,945 against a $413,665 budget and $356,323 in September last year.</a:t>
+              <a:t>After direct costs of $1,489 it retained $5,813, being 79.6% of revenue.</a:t>
             </a:r>
           </a:p>
           <a:p>
@@ -2577,7 +2414,39 @@
           </a:p>
           <a:p>
             <a:r>
-              <a:t>The variance to budget is almost entirely Integration, and it represents one large fit-out at a 10.1% gross margin. It is better read as timing than as growth. Video and Consulting are below budget for the third consecutive month.</a:t>
+              <a:t>Overheads charged to it were $12,659, of which $2,878 is its own spending and $9,782 is its share of the office.</a:t>
+            </a:r>
+          </a:p>
+          <a:p>
+            <a:endParaRPr/>
+          </a:p>
+          <a:p>
+            <a:r>
+              <a:t>That leaves a loss of $6,846 for the month.</a:t>
+            </a:r>
+          </a:p>
+          <a:p>
+            <a:endParaRPr/>
+          </a:p>
+          <a:p>
+            <a:r>
+              <a:t>Year to date it has billed $40,270 against a budget of $85,584.</a:t>
+            </a:r>
+          </a:p>
+          <a:p>
+            <a:endParaRPr/>
+          </a:p>
+          <a:p>
+            <a:r>
+              <a:t>On people, employment expense of $3,961, of which $2,660 is its own staff and $1,301 its share of office wages. It recorded 25 billable hours and 8 non-billable, with no leave.</a:t>
+            </a:r>
+          </a:p>
+          <a:p>
+            <a:endParaRPr/>
+          </a:p>
+          <a:p>
+            <a:r>
+              <a:t>The margin is the highest in the business. The constraint is the volume of billable work, which at 25 hours for the month is well below the level the budget assumed.</a:t>
             </a:r>
           </a:p>
         </p:txBody>
@@ -2663,7 +2532,63 @@
           <a:lstStyle/>
           <a:p>
             <a:r>
-              <a:t>Running costs are steady at approximately $214k a month. Spending is not the cause of the result, but it is the figure revenue has to cover.</a:t>
+              <a:t>Integration for September 2026, taken from the Dept P&amp;L tab.</a:t>
+            </a:r>
+          </a:p>
+          <a:p>
+            <a:endParaRPr/>
+          </a:p>
+          <a:p>
+            <a:r>
+              <a:t>Revenue $234,858 against a budget of $59,272, ahead by $175,586. September last year was $21,421.</a:t>
+            </a:r>
+          </a:p>
+          <a:p>
+            <a:endParaRPr/>
+          </a:p>
+          <a:p>
+            <a:r>
+              <a:t>After direct costs of $211,102 it retained $23,756, being 10.1% of revenue.</a:t>
+            </a:r>
+          </a:p>
+          <a:p>
+            <a:endParaRPr/>
+          </a:p>
+          <a:p>
+            <a:r>
+              <a:t>Overheads charged to it were $13,285, of which $9,136 is its own spending and $4,148 is its share of the office.</a:t>
+            </a:r>
+          </a:p>
+          <a:p>
+            <a:endParaRPr/>
+          </a:p>
+          <a:p>
+            <a:r>
+              <a:t>That leaves $10,471 for the month.</a:t>
+            </a:r>
+          </a:p>
+          <a:p>
+            <a:endParaRPr/>
+          </a:p>
+          <a:p>
+            <a:r>
+              <a:t>Year to date it has billed $441,414 against a budget of $608,676.</a:t>
+            </a:r>
+          </a:p>
+          <a:p>
+            <a:endParaRPr/>
+          </a:p>
+          <a:p>
+            <a:r>
+              <a:t>On people, employment expense of $8,832, of which $8,563 is its own staff and $269 its share of office wages. It recorded 10 billable hours and no non-billable time.</a:t>
+            </a:r>
+          </a:p>
+          <a:p>
+            <a:endParaRPr/>
+          </a:p>
+          <a:p>
+            <a:r>
+              <a:t>The revenue came from a single completed installation rather than from recurring work, and from equipment supply rather than labour, which is why 10 billable hours sit behind $235k of sales. I would treat the result as timing rather than as a change in run rate.</a:t>
             </a:r>
           </a:p>
         </p:txBody>
@@ -2749,7 +2674,7 @@
           <a:lstStyle/>
           <a:p>
             <a:r>
-              <a:t>Operating cost distribution for the year to date, with cost of sales and overhead shown on one scale.</a:t>
+              <a:t>Consulting for September 2026, taken from the Dept P&amp;L tab.</a:t>
             </a:r>
           </a:p>
           <a:p>
@@ -2757,7 +2682,7 @@
           </a:p>
           <a:p>
             <a:r>
-              <a:t>Cost of sales, labour $620,737 at 38.0%. Cost of sales, equipment and services $347,307 at 21.3%. Cost of sales, other direct $24,117 at 1.5%. Overhead, general and administrative $75,700 at 4.6%. Overhead, business insurances $25,227 at 1.5%. Overhead, advertising and promotion $34,119 at 2.1%. Overhead, operating expenses $136,752 at 8.4%. Overhead, employment expenses $369,466 at 22.6%.</a:t>
+              <a:t>Revenue $3,531 against a budget of $23,050, behind by $19,519. September last year was $8,330.</a:t>
             </a:r>
           </a:p>
           <a:p>
@@ -2765,7 +2690,7 @@
           </a:p>
           <a:p>
             <a:r>
-              <a:t>The concentration is the point. Wages for staff on jobs and wages for everyone else make up the bulk of the cost base, and the second group is largely fixed within the year, which is why a quieter month passes straight to the result.</a:t>
+              <a:t>After direct costs of $3,457 it retained $74, being 2.1% of revenue.</a:t>
             </a:r>
           </a:p>
           <a:p>
@@ -2773,7 +2698,39 @@
           </a:p>
           <a:p>
             <a:r>
-              <a:t>If the question is where costs can be reduced, the honest answer is headcount or premises. Reductions in subscriptions and travel would not change this picture materially.</a:t>
+              <a:t>Overheads charged to it were $19,944, of which $5,965 is its own spending and $13,979 is its share of the office.</a:t>
+            </a:r>
+          </a:p>
+          <a:p>
+            <a:endParaRPr/>
+          </a:p>
+          <a:p>
+            <a:r>
+              <a:t>That leaves a loss of $19,870 for the month.</a:t>
+            </a:r>
+          </a:p>
+          <a:p>
+            <a:endParaRPr/>
+          </a:p>
+          <a:p>
+            <a:r>
+              <a:t>Year to date it has billed $4,068 against a budget of $236,707.</a:t>
+            </a:r>
+          </a:p>
+          <a:p>
+            <a:endParaRPr/>
+          </a:p>
+          <a:p>
+            <a:r>
+              <a:t>On people, employment expense of $9,496, of which $5,545 is its own staff and $3,951 its share of office wages. It recorded 31 billable hours and 84 non-billable, with 53 hours of leave.</a:t>
+            </a:r>
+          </a:p>
+          <a:p>
+            <a:endParaRPr/>
+          </a:p>
+          <a:p>
+            <a:r>
+              <a:t>The department has carried running costs against almost no fee income for three consecutive months. I would suggest its structure, capacity and commercial basis are reviewed, including whether the work is better delivered within Integration.</a:t>
             </a:r>
           </a:p>
         </p:txBody>
@@ -2859,7 +2816,7 @@
           <a:lstStyle/>
           <a:p>
             <a:r>
-              <a:t>Other operating expenses for the year to date.</a:t>
+              <a:t>Revenue by department for September 2026, actual against budget and against the same month last year.</a:t>
             </a:r>
           </a:p>
           <a:p>
@@ -2867,7 +2824,27 @@
           </a:p>
           <a:p>
             <a:r>
-              <a:t>Rent $62,043 at 45.4%. IT network service and support $39,570 at 28.9%. Rental outgoings $14,684 at 10.7%. Travel and per diems $5,627 at 4.1%. Stamp duty, indirect, $3,455 at 2.5%. Repairs and maintenance $2,079 at 1.5%. Office cleaning $2,079 at 1.5%. Mobile phones $1,825 at 1.3%. All other items $5,390 at 3.9%.</a:t>
+              <a:t>Support: $242,948 against a budget of $248,017 and $231,214 last year.</a:t>
+            </a:r>
+          </a:p>
+          <a:p>
+            <a:r>
+              <a:t>Integration: $234,858 against a budget of $59,272 and $21,421 last year.</a:t>
+            </a:r>
+          </a:p>
+          <a:p>
+            <a:r>
+              <a:t>Events: $73,304 against a budget of $65,828 and $75,333 last year.</a:t>
+            </a:r>
+          </a:p>
+          <a:p>
+            <a:r>
+              <a:t>Video: $7,303 against a budget of $17,498 and $20,025 last year.</a:t>
+            </a:r>
+          </a:p>
+          <a:p>
+            <a:r>
+              <a:t>Consulting: $3,531 against a budget of $23,050 and $8,330 last year.</a:t>
             </a:r>
           </a:p>
           <a:p>
@@ -2875,7 +2852,7 @@
           </a:p>
           <a:p>
             <a:r>
-              <a:t>Rent and outgoings are fixed by the lease. IT support is the next largest and the only item that moves with activity.</a:t>
+              <a:t>Company revenue of $561,945 against a $413,665 budget and $356,323 in September last year.</a:t>
             </a:r>
           </a:p>
           <a:p>
@@ -2883,7 +2860,7 @@
           </a:p>
           <a:p>
             <a:r>
-              <a:t>The practical conclusion is that savings of any size do not come from this category. A material reduction would require a discussion about the office lease.</a:t>
+              <a:t>The variance to budget is almost entirely Integration, and it represents one large fit-out at a 10.1% gross margin. It is better read as timing than as growth. Video and Consulting are below budget for the third consecutive month.</a:t>
             </a:r>
           </a:p>
         </p:txBody>
@@ -2969,31 +2946,7 @@
           <a:lstStyle/>
           <a:p>
             <a:r>
-              <a:t>Labour mix for the year to date, direct labour charged to cost of sales split by type.</a:t>
-            </a:r>
-          </a:p>
-          <a:p>
-            <a:endParaRPr/>
-          </a:p>
-          <a:p>
-            <a:r>
-              <a:t>Sub-contract labour $117,012. Service hires $23,704. Direct salaries $314,763. Direct wages $111,018. Direct superannuation $54,240.</a:t>
-            </a:r>
-          </a:p>
-          <a:p>
-            <a:endParaRPr/>
-          </a:p>
-          <a:p>
-            <a:r>
-              <a:t>The majority is permanent payroll. Contractors are the only labour cost that rises and falls with the work.</a:t>
-            </a:r>
-          </a:p>
-          <a:p>
-            <a:endParaRPr/>
-          </a:p>
-          <a:p>
-            <a:r>
-              <a:t>This is the link to the utilisation section. The business pays for hours worked and invoices for hours that are chargeable, and margin follows the difference between the two.</a:t>
+              <a:t>Running costs are steady at approximately $214k a month. Spending is not the cause of the result, but it is the figure revenue has to cover.</a:t>
             </a:r>
           </a:p>
         </p:txBody>
@@ -3079,7 +3032,7 @@
           <a:lstStyle/>
           <a:p>
             <a:r>
-              <a:t>Employment expense split between office staff and departmental staff for September 2026.</a:t>
+              <a:t>Operating cost distribution for the year to date, with cost of sales and overhead shown on one scale.</a:t>
             </a:r>
           </a:p>
           <a:p>
@@ -3087,7 +3040,7 @@
           </a:p>
           <a:p>
             <a:r>
-              <a:t>Departmental staff is the employment expense on each department's own cost centre: Support $8,980, Events $35,665, Video $2,660, Integration $8,563, Consulting $5,545.</a:t>
+              <a:t>Cost of sales, labour $620,737 at 38.0%. Cost of sales, equipment and services $347,307 at 21.3%. Cost of sales, other direct $24,117 at 1.5%. Overhead, general and administrative $75,700 at 4.6%. Overhead, business insurances $25,227 at 1.5%. Overhead, advertising and promotion $34,119 at 2.1%. Overhead, operating expenses $136,752 at 8.4%. Overhead, employment expenses $369,466 at 22.6%.</a:t>
             </a:r>
           </a:p>
           <a:p>
@@ -3095,7 +3048,7 @@
           </a:p>
           <a:p>
             <a:r>
-              <a:t>Office staff is the admin employment pot of $63,077, allocated across the departments on their share of full time equivalent: Support $42,262, Events $15,294, Video $1,301, Integration $269, Consulting $3,951.</a:t>
+              <a:t>The concentration is the point. Wages for staff on jobs and wages for everyone else make up the bulk of the cost base, and the second group is largely fixed within the year, which is why a quieter month passes straight to the result.</a:t>
             </a:r>
           </a:p>
           <a:p>
@@ -3103,15 +3056,7 @@
           </a:p>
           <a:p>
             <a:r>
-              <a:t>Full time equivalent is rolling twelve month worked hours on that cost centre divided by 2,024 hours, being 253 working days at eight hours. That is the method set out in the training material.</a:t>
-            </a:r>
-          </a:p>
-          <a:p>
-            <a:endParaRPr/>
-          </a:p>
-          <a:p>
-            <a:r>
-              <a:t>The change worth noting is that this allocation no longer depends on a figure typed in by hand. The pack calculates it from the Labour Hours Report, so it reproduces each month without a judgement being made.</a:t>
+              <a:t>If the question is where costs can be reduced, the honest answer is headcount or premises. Reductions in subscriptions and travel would not change this picture materially.</a:t>
             </a:r>
           </a:p>
         </p:txBody>
@@ -3197,7 +3142,31 @@
           <a:lstStyle/>
           <a:p>
             <a:r>
-              <a:t>Revenue is concentrated and cash is slow. Days sales outstanding is 47.2 days against a 30 day target, which represents $303,605 of cash held in the receivables book above where it should be.</a:t>
+              <a:t>Other operating expenses for the year to date.</a:t>
+            </a:r>
+          </a:p>
+          <a:p>
+            <a:endParaRPr/>
+          </a:p>
+          <a:p>
+            <a:r>
+              <a:t>Rent $62,043 at 45.4%. IT network service and support $39,570 at 28.9%. Rental outgoings $14,684 at 10.7%. Travel and per diems $5,627 at 4.1%. Stamp duty, indirect, $3,455 at 2.5%. Repairs and maintenance $2,079 at 1.5%. Office cleaning $2,079 at 1.5%. Mobile phones $1,825 at 1.3%. All other items $5,390 at 3.9%.</a:t>
+            </a:r>
+          </a:p>
+          <a:p>
+            <a:endParaRPr/>
+          </a:p>
+          <a:p>
+            <a:r>
+              <a:t>Rent and outgoings are fixed by the lease. IT support is the next largest and the only item that moves with activity.</a:t>
+            </a:r>
+          </a:p>
+          <a:p>
+            <a:endParaRPr/>
+          </a:p>
+          <a:p>
+            <a:r>
+              <a:t>The practical conclusion is that savings of any size do not come from this category. A material reduction would require a discussion about the office lease.</a:t>
             </a:r>
           </a:p>
         </p:txBody>
@@ -3283,7 +3252,7 @@
           <a:lstStyle/>
           <a:p>
             <a:r>
-              <a:t>The ten largest customers by revenue for the year to date, with the top three highlighted.</a:t>
+              <a:t>Labour mix for the year to date, direct labour charged to cost of sales split by type.</a:t>
             </a:r>
           </a:p>
           <a:p>
@@ -3291,52 +3260,7 @@
           </a:p>
           <a:p>
             <a:r>
-              <a:t>1. Deloitte Services: $401,755 for the year, 24.7% of the total, $119,614 of it in September.</a:t>
-            </a:r>
-          </a:p>
-          <a:p>
-            <a:r>
-              <a:t>2. Aware Super: $285,075 for the year, 17.5% of the total, $241,178 of it in September.</a:t>
-            </a:r>
-          </a:p>
-          <a:p>
-            <a:r>
-              <a:t>3. CBA Place South: $105,040 for the year, 6.5% of the total, $30,409 of it in September.</a:t>
-            </a:r>
-          </a:p>
-          <a:p>
-            <a:r>
-              <a:t>4. Ventia: $97,662 for the year, 6.0% of the total, $9,105 of it in September.</a:t>
-            </a:r>
-          </a:p>
-          <a:p>
-            <a:r>
-              <a:t>5. PwC Services: $88,051 for the year, 5.4% of the total, $26,707 of it in September.</a:t>
-            </a:r>
-          </a:p>
-          <a:p>
-            <a:r>
-              <a:t>6. APT Management Services: $63,613 for the year, 3.9% of the total, $4,527 of it in September.</a:t>
-            </a:r>
-          </a:p>
-          <a:p>
-            <a:r>
-              <a:t>7. ASX Operations: $60,858 for the year, 3.7% of the total, $17,167 of it in September.</a:t>
-            </a:r>
-          </a:p>
-          <a:p>
-            <a:r>
-              <a:t>8. Bankwest: $54,971 for the year, 3.4% of the total, $17,230 of it in September.</a:t>
-            </a:r>
-          </a:p>
-          <a:p>
-            <a:r>
-              <a:t>9. Data#3: $45,909 for the year, 2.8% of the total, none in September.</a:t>
-            </a:r>
-          </a:p>
-          <a:p>
-            <a:r>
-              <a:t>10. Generation-e Productivity Solutions: $37,166 for the year, 2.3% of the total, $12,389 of it in September.</a:t>
+              <a:t>Sub-contract labour $117,012. Service hires $23,704. Direct salaries $314,763. Direct wages $111,018. Direct superannuation $54,240.</a:t>
             </a:r>
           </a:p>
           <a:p>
@@ -3344,7 +3268,7 @@
           </a:p>
           <a:p>
             <a:r>
-              <a:t>The ten together represent $1,240,100, or 76.3% of total revenue. Every other customer accounts for the remaining $384,360. The three highlighted customers are 48.7% of the year between them.</a:t>
+              <a:t>The majority is permanent payroll. Contractors are the only labour cost that rises and falls with the work.</a:t>
             </a:r>
           </a:p>
           <a:p>
@@ -3352,15 +3276,7 @@
           </a:p>
           <a:p>
             <a:r>
-              <a:t>The distinction that matters is contracted work against one-off projects. Deloitte Services is contracted support that renews monthly. Aware Super is a fit-out that has now completed. Treating the two as the same kind of income is how a forecast goes wrong.</a:t>
-            </a:r>
-          </a:p>
-          <a:p>
-            <a:endParaRPr/>
-          </a:p>
-          <a:p>
-            <a:r>
-              <a:t>I would suggest a named relationship owner for each of the top three before the half year, and that the new business target is set on customers four to twenty rather than on the accounts the business already holds.</a:t>
+              <a:t>This is the link to the utilisation section. The business pays for hours worked and invoices for hours that are chargeable, and margin follows the difference between the two.</a:t>
             </a:r>
           </a:p>
         </p:txBody>
@@ -3556,7 +3472,7 @@
           <a:lstStyle/>
           <a:p>
             <a:r>
-              <a:t>Days sales outstanding at 30 September 2026.</a:t>
+              <a:t>Employment expense split between office staff and departmental staff for September 2026.</a:t>
             </a:r>
           </a:p>
           <a:p>
@@ -3564,7 +3480,7 @@
           </a:p>
           <a:p>
             <a:r>
-              <a:t>Receivables are $833,320. Over the last three months the business sold $1,624,460, which across 92 days is $17,657 of sales a day. On that basis customers are taking 47.2 days to pay.</a:t>
+              <a:t>Departmental staff is the employment expense on each department's own cost centre: Support $8,980, Events $35,665, Video $2,660, Integration $8,563, Consulting $5,545.</a:t>
             </a:r>
           </a:p>
           <a:p>
@@ -3572,7 +3488,7 @@
           </a:p>
           <a:p>
             <a:r>
-              <a:t>The target is 30 days, so the book is 17.2 days over. Collected on time, receivables would be $529,715 rather than $833,320, leaving $303,605 of cash in the book that should already be with the business.</a:t>
+              <a:t>Office staff is the admin employment pot of $63,077, allocated across the departments on their share of full time equivalent: Support $42,262, Events $15,294, Video $1,301, Integration $269, Consulting $3,951.</a:t>
             </a:r>
           </a:p>
           <a:p>
@@ -3580,7 +3496,7 @@
           </a:p>
           <a:p>
             <a:r>
-              <a:t>Set against the result, the quarter produced $5,774 of EBITDA while $303,605 remains uncollected. Collection is worth considerably more this quarter than any trading improvement available in the time, and it requires no additional cost.</a:t>
+              <a:t>Full time equivalent is rolling twelve month worked hours on that cost centre divided by 2,024 hours, being 253 working days at eight hours. That is the method set out in the training material.</a:t>
             </a:r>
           </a:p>
           <a:p>
@@ -3588,7 +3504,7 @@
           </a:p>
           <a:p>
             <a:r>
-              <a:t>Each day removed from the figure returns approximately $17,657.</a:t>
+              <a:t>The change worth noting is that this allocation no longer depends on a figure typed in by hand. The pack calculates it from the Labour Hours Report, so it reproduces each month without a judgement being made.</a:t>
             </a:r>
           </a:p>
         </p:txBody>
@@ -3674,51 +3590,7 @@
           <a:lstStyle/>
           <a:p>
             <a:r>
-              <a:t>The ten largest amounts owed at 30 September 2026.</a:t>
-            </a:r>
-          </a:p>
-          <a:p>
-            <a:endParaRPr/>
-          </a:p>
-          <a:p>
-            <a:r>
-              <a:t>Aware Super: $277,395, 33.3% of the total.</a:t>
-            </a:r>
-          </a:p>
-          <a:p>
-            <a:r>
-              <a:t>Deloitte Services P/L for Deloitte Services Trust: $131,575, 15.8%.</a:t>
-            </a:r>
-          </a:p>
-          <a:p>
-            <a:r>
-              <a:t>Ventia: $94,701, 11.4%.</a:t>
-            </a:r>
-          </a:p>
-          <a:p>
-            <a:r>
-              <a:t>Downer EDI Limited: $39,664, 4.8%.</a:t>
-            </a:r>
-          </a:p>
-          <a:p>
-            <a:r>
-              <a:t>Generation-e Productivity Solutions: $39,106, 4.7%.</a:t>
-            </a:r>
-          </a:p>
-          <a:p>
-            <a:endParaRPr/>
-          </a:p>
-          <a:p>
-            <a:r>
-              <a:t>The ageing profile is current $588,782 at 70.7%, under one month $133,177 at 16.0%, one month $86,553 at 10.4%, and three months $24,809 at 3.0%. Overdue in total $244,538, or 29.3% of the book.</a:t>
-            </a:r>
-          </a:p>
-          <a:p>
-            <a:endParaRPr/>
-          </a:p>
-          <a:p>
-            <a:r>
-              <a:t>Two customers hold most of the balance, so a targeted approach to those accounts would be more productive than a general collections exercise, and it represents the fastest cash available to the business this quarter.</a:t>
+              <a:t>Revenue is concentrated and cash is slow. Days sales outstanding is 47.2 days against a 30 day target, which represents $303,605 of cash held in the receivables book above where it should be.</a:t>
             </a:r>
           </a:p>
         </p:txBody>
@@ -3804,7 +3676,84 @@
           <a:lstStyle/>
           <a:p>
             <a:r>
-              <a:t>The company invoiced 2,438 hours in September 2026 out of 3,395 it was available for, which is 72%. Where chargeable hours fall short, margin follows.</a:t>
+              <a:t>The ten largest customers by revenue for the year to date, with the top three highlighted.</a:t>
+            </a:r>
+          </a:p>
+          <a:p>
+            <a:endParaRPr/>
+          </a:p>
+          <a:p>
+            <a:r>
+              <a:t>1. Deloitte Services: $401,755 for the year, 24.7% of the total, $119,614 of it in September.</a:t>
+            </a:r>
+          </a:p>
+          <a:p>
+            <a:r>
+              <a:t>2. Aware Super: $285,075 for the year, 17.5% of the total, $241,178 of it in September.</a:t>
+            </a:r>
+          </a:p>
+          <a:p>
+            <a:r>
+              <a:t>3. CBA Place South: $105,040 for the year, 6.5% of the total, $30,409 of it in September.</a:t>
+            </a:r>
+          </a:p>
+          <a:p>
+            <a:r>
+              <a:t>4. Ventia: $97,662 for the year, 6.0% of the total, $9,105 of it in September.</a:t>
+            </a:r>
+          </a:p>
+          <a:p>
+            <a:r>
+              <a:t>5. PwC Services: $88,051 for the year, 5.4% of the total, $26,707 of it in September.</a:t>
+            </a:r>
+          </a:p>
+          <a:p>
+            <a:r>
+              <a:t>6. APT Management Services: $63,613 for the year, 3.9% of the total, $4,527 of it in September.</a:t>
+            </a:r>
+          </a:p>
+          <a:p>
+            <a:r>
+              <a:t>7. ASX Operations: $60,858 for the year, 3.7% of the total, $17,167 of it in September.</a:t>
+            </a:r>
+          </a:p>
+          <a:p>
+            <a:r>
+              <a:t>8. Bankwest: $54,971 for the year, 3.4% of the total, $17,230 of it in September.</a:t>
+            </a:r>
+          </a:p>
+          <a:p>
+            <a:r>
+              <a:t>9. Data#3: $45,909 for the year, 2.8% of the total, none in September.</a:t>
+            </a:r>
+          </a:p>
+          <a:p>
+            <a:r>
+              <a:t>10. Generation-e Productivity Solutions: $37,166 for the year, 2.3% of the total, $12,389 of it in September.</a:t>
+            </a:r>
+          </a:p>
+          <a:p>
+            <a:endParaRPr/>
+          </a:p>
+          <a:p>
+            <a:r>
+              <a:t>The ten together represent $1,240,100, or 76.3% of total revenue. Every other customer accounts for the remaining $384,360. The three highlighted customers are 48.7% of the year between them.</a:t>
+            </a:r>
+          </a:p>
+          <a:p>
+            <a:endParaRPr/>
+          </a:p>
+          <a:p>
+            <a:r>
+              <a:t>The distinction that matters is contracted work against one-off projects. Deloitte Services is contracted support that renews monthly. Aware Super is a fit-out that has now completed. Treating the two as the same kind of income is how a forecast goes wrong.</a:t>
+            </a:r>
+          </a:p>
+          <a:p>
+            <a:endParaRPr/>
+          </a:p>
+          <a:p>
+            <a:r>
+              <a:t>I would suggest a named relationship owner for each of the top three before the half year, and that the new business target is set on customers four to twenty rather than on the accounts the business already holds.</a:t>
             </a:r>
           </a:p>
         </p:txBody>
@@ -3890,7 +3839,7 @@
           <a:lstStyle/>
           <a:p>
             <a:r>
-              <a:t>Chargeable per cent for September 2026, calculated on the same basis as the monthly Utilisation Report.</a:t>
+              <a:t>Days sales outstanding at 30 September 2026.</a:t>
             </a:r>
           </a:p>
           <a:p>
@@ -3898,7 +3847,7 @@
           </a:p>
           <a:p>
             <a:r>
-              <a:t>The measure is billable hours divided by workable business hours, being the hours each person was available for in the month. Leave and public holidays remain in the denominator, so a team taking its leave entitlement shows a lower percentage. That is the business's own definition and the pack now follows it.</a:t>
+              <a:t>Receivables are $833,320. Over the last three months the business sold $1,624,460, which across 92 days is $17,657 of sales a day. On that basis customers are taking 47.2 days to pay.</a:t>
             </a:r>
           </a:p>
           <a:p>
@@ -3906,7 +3855,7 @@
           </a:p>
           <a:p>
             <a:r>
-              <a:t>Support 91.2% against an 88.0% target, 3.2 points over. Production 30.2% against 67.0%, 36.8 points under. Consulting 23.0% against 50.0%, 27.0 points under. The company 71.8% against 80.9%, 9.0 points under.</a:t>
+              <a:t>The target is 30 days, so the book is 17.2 days over. Collected on time, receivables would be $529,715 rather than $833,320, leaving $303,605 of cash in the book that should already be with the business.</a:t>
             </a:r>
           </a:p>
           <a:p>
@@ -3914,7 +3863,7 @@
           </a:p>
           <a:p>
             <a:r>
-              <a:t>Support has exceeded its target in all three closed months, by 1.4, 5.8 and 3.2 points.</a:t>
+              <a:t>Set against the result, the quarter produced $5,774 of EBITDA while $303,605 remains uncollected. Collection is worth considerably more this quarter than any trading improvement available in the time, and it requires no additional cost.</a:t>
             </a:r>
           </a:p>
           <a:p>
@@ -3922,39 +3871,7 @@
           </a:p>
           <a:p>
             <a:r>
-              <a:t>Leave explains the Production position: 333 hours out of 882 available, being 37.7% of the month. Across the company, leave accounted for 17.8% of available hours against 7.5% in August.</a:t>
-            </a:r>
-          </a:p>
-          <a:p>
-            <a:endParaRPr/>
-          </a:p>
-          <a:p>
-            <a:r>
-              <a:t>The report shows three person groups rather than five, because it groups by the department a person belongs to and nobody is assigned to Video or Integration. Their work is carried out by Production and Consulting staff.</a:t>
-            </a:r>
-          </a:p>
-          <a:p>
-            <a:endParaRPr/>
-          </a:p>
-          <a:p>
-            <a:r>
-              <a:t>On sources, workable business hours and the target are both entered from the report, as neither can be derived in the pack: the first requires each group's headcount and part time arrangements, and the second is set per person and averaged. The over or under reading and the leave share are calculated and reproduce the report's own columns. The three month history is held on the Utilisation tab with two reconciliation rows against the report's grand total.</a:t>
-            </a:r>
-          </a:p>
-          <a:p>
-            <a:endParaRPr/>
-          </a:p>
-          <a:p>
-            <a:r>
-              <a:t>One correction to note for completeness. An earlier version of this pack divided billable hours by hours actually worked, excluding leave, which showed Support at 99.5% and gave the appearance of a coding error. That was a difference in method rather than a problem with the data.</a:t>
-            </a:r>
-          </a:p>
-          <a:p>
-            <a:endParaRPr/>
-          </a:p>
-          <a:p>
-            <a:r>
-              <a:t>OT and TIL is reported but is not carried in the pack. The August figure for Support reads 365.62, which cannot represent hours in a month, so that column would benefit from review on the source report before it is relied upon.</a:t>
+              <a:t>Each day removed from the figure returns approximately $17,657.</a:t>
             </a:r>
           </a:p>
         </p:txBody>
@@ -4040,7 +3957,7 @@
           <a:lstStyle/>
           <a:p>
             <a:r>
-              <a:t>How each department spent its hours in September 2026.</a:t>
+              <a:t>The ten largest amounts owed at 30 September 2026.</a:t>
             </a:r>
           </a:p>
           <a:p>
@@ -4048,7 +3965,27 @@
           </a:p>
           <a:p>
             <a:r>
-              <a:t>The bars show the mix within each department rather than its size. Each is scaled to that department's own total, because Support works around a hundred times the hours Integration does and on a common scale four of the five would not be visible. The figure on each segment is the actual hours.</a:t>
+              <a:t>Aware Super: $277,395, 33.3% of the total.</a:t>
+            </a:r>
+          </a:p>
+          <a:p>
+            <a:r>
+              <a:t>Deloitte Services P/L for Deloitte Services Trust: $131,575, 15.8%.</a:t>
+            </a:r>
+          </a:p>
+          <a:p>
+            <a:r>
+              <a:t>Ventia: $94,701, 11.4%.</a:t>
+            </a:r>
+          </a:p>
+          <a:p>
+            <a:r>
+              <a:t>Downer EDI Limited: $39,664, 4.8%.</a:t>
+            </a:r>
+          </a:p>
+          <a:p>
+            <a:r>
+              <a:t>Generation-e Productivity Solutions: $39,106, 4.7%.</a:t>
             </a:r>
           </a:p>
           <a:p>
@@ -4056,27 +3993,7 @@
           </a:p>
           <a:p>
             <a:r>
-              <a:t>Support: 2,132 hours on jobs, 11 not on jobs, 218 leave.</a:t>
-            </a:r>
-          </a:p>
-          <a:p>
-            <a:r>
-              <a:t>Events: 241 hours on jobs, 249 not on jobs, 333 leave.</a:t>
-            </a:r>
-          </a:p>
-          <a:p>
-            <a:r>
-              <a:t>Video: 25 hours on jobs, 8 not on jobs, no leave.</a:t>
-            </a:r>
-          </a:p>
-          <a:p>
-            <a:r>
-              <a:t>Integration: 10 hours on jobs, none off jobs, no leave.</a:t>
-            </a:r>
-          </a:p>
-          <a:p>
-            <a:r>
-              <a:t>Consulting: 31 hours on jobs, 84 not on jobs, 53 leave.</a:t>
+              <a:t>The ageing profile is current $588,782 at 70.7%, under one month $133,177 at 16.0%, one month $86,553 at 10.4%, and three months $24,809 at 3.0%. Overdue in total $244,538, or 29.3% of the book.</a:t>
             </a:r>
           </a:p>
           <a:p>
@@ -4084,31 +4001,7 @@
           </a:p>
           <a:p>
             <a:r>
-              <a:t>Across the five departments, 2,437 hours on jobs out of 2,789 worked.</a:t>
-            </a:r>
-          </a:p>
-          <a:p>
-            <a:endParaRPr/>
-          </a:p>
-          <a:p>
-            <a:r>
-              <a:t>On the Support bar, the small non-billable segment arises from the regrouping rather than from coding. The monthly report shows Support with no non-billable hours in September. This view groups by the department the work was performed for, so a small amount of other staff's non-billable time appears here.</a:t>
-            </a:r>
-          </a:p>
-          <a:p>
-            <a:endParaRPr/>
-          </a:p>
-          <a:p>
-            <a:r>
-              <a:t>Events is the clearest operational position on this slide: 333 hours of leave on a small team removes most of the month's capacity.</a:t>
-            </a:r>
-          </a:p>
-          <a:p>
-            <a:endParaRPr/>
-          </a:p>
-          <a:p>
-            <a:r>
-              <a:t>There is also an opportunity worth quantifying. Support earns approximately $48 of margin on each hour it invoices. Five additional points of billable time across Support and Events, at the rates each already achieves, would be worth approximately $15,813 a month at no additional cost. It is the largest controllable item in this pack.</a:t>
+              <a:t>Two customers hold most of the balance, so a targeted approach to those accounts would be more productive than a general collections exercise, and it represents the fastest cash available to the business this quarter.</a:t>
             </a:r>
           </a:p>
         </p:txBody>
@@ -4194,39 +4087,7 @@
           <a:lstStyle/>
           <a:p>
             <a:r>
-              <a:t>The hours mix for September 2026, grouped as the three departments the P&amp;L is built on.</a:t>
-            </a:r>
-          </a:p>
-          <a:p>
-            <a:endParaRPr/>
-          </a:p>
-          <a:p>
-            <a:r>
-              <a:t>Production is Events and Video together. Consulting is Integration and Consulting together. Support stands alone.</a:t>
-            </a:r>
-          </a:p>
-          <a:p>
-            <a:endParaRPr/>
-          </a:p>
-          <a:p>
-            <a:r>
-              <a:t>Each bar is scaled to its own total, as Support works considerably more hours than the other two groups combined.</a:t>
-            </a:r>
-          </a:p>
-          <a:p>
-            <a:endParaRPr/>
-          </a:p>
-          <a:p>
-            <a:r>
-              <a:t>The pattern underlies much of this pack. Support is almost entirely billable and is the only group covering its costs. Production and Consulting each spend around half their paid hours, or more, on work that cannot be invoiced, and both record losses.</a:t>
-            </a:r>
-          </a:p>
-          <a:p>
-            <a:endParaRPr/>
-          </a:p>
-          <a:p>
-            <a:r>
-              <a:t>On the monthly report's own basis, which counts leave against the measure, Support reads 91.2%. That is the figure to use in discussion.</a:t>
+              <a:t>The company invoiced 2,438 hours in September 2026 out of 3,395 it was available for, which is 72%. Where chargeable hours fall short, margin follows.</a:t>
             </a:r>
           </a:p>
         </p:txBody>
@@ -4312,7 +4173,71 @@
           <a:lstStyle/>
           <a:p>
             <a:r>
-              <a:t>Three months are closed and the remaining nine remain at original budget. That is the matter before the board.</a:t>
+              <a:t>Chargeable per cent for September 2026, calculated on the same basis as the monthly Utilisation Report.</a:t>
+            </a:r>
+          </a:p>
+          <a:p>
+            <a:endParaRPr/>
+          </a:p>
+          <a:p>
+            <a:r>
+              <a:t>The measure is billable hours divided by workable business hours, being the hours each person was available for in the month. Leave and public holidays remain in the denominator, so a team taking its leave entitlement shows a lower percentage. That is the business's own definition and the pack now follows it.</a:t>
+            </a:r>
+          </a:p>
+          <a:p>
+            <a:endParaRPr/>
+          </a:p>
+          <a:p>
+            <a:r>
+              <a:t>Support 91.2% against an 88.0% target, 3.2 points over. Production 30.2% against 67.0%, 36.8 points under. Consulting 23.0% against 50.0%, 27.0 points under. The company 71.8% against 80.9%, 9.0 points under.</a:t>
+            </a:r>
+          </a:p>
+          <a:p>
+            <a:endParaRPr/>
+          </a:p>
+          <a:p>
+            <a:r>
+              <a:t>Support has exceeded its target in all three closed months, by 1.4, 5.8 and 3.2 points.</a:t>
+            </a:r>
+          </a:p>
+          <a:p>
+            <a:endParaRPr/>
+          </a:p>
+          <a:p>
+            <a:r>
+              <a:t>Leave explains the Production position: 333 hours out of 882 available, being 37.7% of the month. Across the company, leave accounted for 17.8% of available hours against 7.5% in August.</a:t>
+            </a:r>
+          </a:p>
+          <a:p>
+            <a:endParaRPr/>
+          </a:p>
+          <a:p>
+            <a:r>
+              <a:t>The report shows three person groups rather than five, because it groups by the department a person belongs to and nobody is assigned to Video or Integration. Their work is carried out by Production and Consulting staff.</a:t>
+            </a:r>
+          </a:p>
+          <a:p>
+            <a:endParaRPr/>
+          </a:p>
+          <a:p>
+            <a:r>
+              <a:t>On sources, workable business hours and the target are both entered from the report, as neither can be derived in the pack: the first requires each group's headcount and part time arrangements, and the second is set per person and averaged. The over or under reading and the leave share are calculated and reproduce the report's own columns. The three month history is held on the Utilisation tab with two reconciliation rows against the report's grand total.</a:t>
+            </a:r>
+          </a:p>
+          <a:p>
+            <a:endParaRPr/>
+          </a:p>
+          <a:p>
+            <a:r>
+              <a:t>One correction to note for completeness. An earlier version of this pack divided billable hours by hours actually worked, excluding leave, which showed Support at 99.5% and gave the appearance of a coding error. That was a difference in method rather than a problem with the data.</a:t>
+            </a:r>
+          </a:p>
+          <a:p>
+            <a:endParaRPr/>
+          </a:p>
+          <a:p>
+            <a:r>
+              <a:t>OT and TIL is reported but is not carried in the pack. The August figure for Support reads 365.62, which cannot represent hours in a month, so that column would benefit from review on the source report before it is relied upon.</a:t>
             </a:r>
           </a:p>
         </p:txBody>
@@ -4398,7 +4323,7 @@
           <a:lstStyle/>
           <a:p>
             <a:r>
-              <a:t>Revenue by month, actual for the three closed months and original budget thereafter.</a:t>
+              <a:t>How each department spent its hours in September 2026.</a:t>
             </a:r>
           </a:p>
           <a:p>
@@ -4406,7 +4331,7 @@
           </a:p>
           <a:p>
             <a:r>
-              <a:t>First quarter actual of $1,624,460 against a budget of $1,996,110, behind by $371,650.</a:t>
+              <a:t>The bars show the mix within each department rather than its size. Each is scaled to that department's own total, because Support works around a hundred times the hours Integration does and on a common scale four of the five would not be visible. The figure on each segment is the actual hours.</a:t>
             </a:r>
           </a:p>
           <a:p>
@@ -4414,7 +4339,27 @@
           </a:p>
           <a:p>
             <a:r>
-              <a:t>The nine months from October remain at the budget set before the year began. October is budgeted at $950,416, which is higher than any month the business has delivered.</a:t>
+              <a:t>Support: 2,132 hours on jobs, 11 not on jobs, 218 leave.</a:t>
+            </a:r>
+          </a:p>
+          <a:p>
+            <a:r>
+              <a:t>Events: 241 hours on jobs, 249 not on jobs, 333 leave.</a:t>
+            </a:r>
+          </a:p>
+          <a:p>
+            <a:r>
+              <a:t>Video: 25 hours on jobs, 8 not on jobs, no leave.</a:t>
+            </a:r>
+          </a:p>
+          <a:p>
+            <a:r>
+              <a:t>Integration: 10 hours on jobs, none off jobs, no leave.</a:t>
+            </a:r>
+          </a:p>
+          <a:p>
+            <a:r>
+              <a:t>Consulting: 31 hours on jobs, 84 not on jobs, 53 leave.</a:t>
             </a:r>
           </a:p>
           <a:p>
@@ -4422,7 +4367,7 @@
           </a:p>
           <a:p>
             <a:r>
-              <a:t>Two points for the board. The first quarter variance is concentrated in Consulting and Video, which were budgeted on a resourcing level that does not exist. And the margin assumption in the budget sits above the rate the business has delivered for two years, so a month that meets the revenue figure would still fall short on profit.</a:t>
+              <a:t>Across the five departments, 2,437 hours on jobs out of 2,789 worked.</a:t>
             </a:r>
           </a:p>
           <a:p>
@@ -4430,7 +4375,23 @@
           </a:p>
           <a:p>
             <a:r>
-              <a:t>My recommendation is a rolling forecast from the second quarter, rebuilding Consulting around actual capacity and resetting gross margin to delivered rates. December would be better left as budgeted, as the business closes for two weeks and the loss is genuine.</a:t>
+              <a:t>On the Support bar, the small non-billable segment arises from the regrouping rather than from coding. The monthly report shows Support with no non-billable hours in September. This view groups by the department the work was performed for, so a small amount of other staff's non-billable time appears here.</a:t>
+            </a:r>
+          </a:p>
+          <a:p>
+            <a:endParaRPr/>
+          </a:p>
+          <a:p>
+            <a:r>
+              <a:t>Events is the clearest operational position on this slide: 333 hours of leave on a small team removes most of the month's capacity.</a:t>
+            </a:r>
+          </a:p>
+          <a:p>
+            <a:endParaRPr/>
+          </a:p>
+          <a:p>
+            <a:r>
+              <a:t>There is also an opportunity worth quantifying. Support earns approximately $48 of margin on each hour it invoices. Five additional points of billable time across Support and Events, at the rates each already achieves, would be worth approximately $15,813 a month at no additional cost. It is the largest controllable item in this pack.</a:t>
             </a:r>
           </a:p>
         </p:txBody>
@@ -4516,7 +4477,7 @@
           <a:lstStyle/>
           <a:p>
             <a:r>
-              <a:t>Seven recommendations, each with a suggested owner and date.</a:t>
+              <a:t>The hours mix for September 2026, grouped as the three departments the P&amp;L is built on.</a:t>
             </a:r>
           </a:p>
           <a:p>
@@ -4524,7 +4485,7 @@
           </a:p>
           <a:p>
             <a:r>
-              <a:t>The first two carry the most weight: reforecasting on margin rather than revenue, and reviewing the overhead keys. Most of the pack follows from those two figures.</a:t>
+              <a:t>Production is Events and Video together. Consulting is Integration and Consulting together. Support stands alone.</a:t>
             </a:r>
           </a:p>
           <a:p>
@@ -4532,7 +4493,7 @@
           </a:p>
           <a:p>
             <a:r>
-              <a:t>The Consulting position has now run for three months with running costs against almost no fee income, and would benefit from a decision this quarter.</a:t>
+              <a:t>Each bar is scaled to its own total, as Support works considerably more hours than the other two groups combined.</a:t>
             </a:r>
           </a:p>
           <a:p>
@@ -4540,7 +4501,15 @@
           </a:p>
           <a:p>
             <a:r>
-              <a:t>The receivables item is the only one that produces cash within the quarter, and utilisation remains the largest controllable item.</a:t>
+              <a:t>The pattern underlies much of this pack. Support is almost entirely billable and is the only group covering its costs. Production and Consulting each spend around half their paid hours, or more, on work that cannot be invoiced, and both record losses.</a:t>
+            </a:r>
+          </a:p>
+          <a:p>
+            <a:endParaRPr/>
+          </a:p>
+          <a:p>
+            <a:r>
+              <a:t>On the monthly report's own basis, which counts leave against the measure, Support reads 91.2%. That is the figure to use in discussion.</a:t>
             </a:r>
           </a:p>
         </p:txBody>
@@ -4586,13 +4555,7 @@
   <p:cSld>
     <p:spTree>
       <p:nvGrpSpPr>
-        <p:cNvPr id="1" name="">
-          <a:extLst>
-            <a:ext uri="{FF2B5EF4-FFF2-40B4-BE49-F238E27FC236}">
-              <a16:creationId xmlns:a16="http://schemas.microsoft.com/office/drawing/2014/main" id="{E5E3A21A-7AA5-7C87-038E-0D4DDF08F609}"/>
-            </a:ext>
-          </a:extLst>
-        </p:cNvPr>
+        <p:cNvPr id="1" name=""/>
         <p:cNvGrpSpPr/>
         <p:nvPr/>
       </p:nvGrpSpPr>
@@ -4606,13 +4569,7 @@
       </p:grpSpPr>
       <p:sp>
         <p:nvSpPr>
-          <p:cNvPr id="2" name="Slide Image Placeholder 1">
-            <a:extLst>
-              <a:ext uri="{FF2B5EF4-FFF2-40B4-BE49-F238E27FC236}">
-                <a16:creationId xmlns:a16="http://schemas.microsoft.com/office/drawing/2014/main" id="{9302D704-9E09-EEBE-23A6-CE9293C97765}"/>
-              </a:ext>
-            </a:extLst>
-          </p:cNvPr>
+          <p:cNvPr id="2" name="Slide Image Placeholder 1"/>
           <p:cNvSpPr>
             <a:spLocks noGrp="1" noRot="1" noChangeAspect="1"/>
           </p:cNvSpPr>
@@ -4624,13 +4581,7 @@
       </p:sp>
       <p:sp>
         <p:nvSpPr>
-          <p:cNvPr id="3" name="Notes Placeholder 2">
-            <a:extLst>
-              <a:ext uri="{FF2B5EF4-FFF2-40B4-BE49-F238E27FC236}">
-                <a16:creationId xmlns:a16="http://schemas.microsoft.com/office/drawing/2014/main" id="{BBF2BDA7-2C2E-0731-EAF4-B2CA3E8B0B68}"/>
-              </a:ext>
-            </a:extLst>
-          </p:cNvPr>
+          <p:cNvPr id="3" name="Notes Placeholder 2"/>
           <p:cNvSpPr>
             <a:spLocks noGrp="1"/>
           </p:cNvSpPr>
@@ -4644,20 +4595,14 @@
           <a:lstStyle/>
           <a:p>
             <a:r>
-              <a:t>The source files behind this pack. Every figure in the review is drawn from the Financial Controller Pack, which reconciles to the Xero general ledger.</a:t>
-            </a:r>
-          </a:p>
-        </p:txBody>
-      </p:sp>
-      <p:sp>
-        <p:nvSpPr>
-          <p:cNvPr id="4" name="Slide Number Placeholder 3">
-            <a:extLst>
-              <a:ext uri="{FF2B5EF4-FFF2-40B4-BE49-F238E27FC236}">
-                <a16:creationId xmlns:a16="http://schemas.microsoft.com/office/drawing/2014/main" id="{9509B891-383F-E7FD-8008-0EB6BA55BD4F}"/>
-              </a:ext>
-            </a:extLst>
-          </p:cNvPr>
+              <a:t>Three months are closed and the remaining nine remain at original budget. That is the matter before the board.</a:t>
+            </a:r>
+          </a:p>
+        </p:txBody>
+      </p:sp>
+      <p:sp>
+        <p:nvSpPr>
+          <p:cNvPr id="4" name="Slide Number Placeholder 3"/>
           <p:cNvSpPr>
             <a:spLocks noGrp="1"/>
           </p:cNvSpPr>
@@ -4681,7 +4626,7 @@
     </p:spTree>
     <p:extLst>
       <p:ext uri="{BB962C8B-B14F-4D97-AF65-F5344CB8AC3E}">
-        <p14:creationId xmlns:p14="http://schemas.microsoft.com/office/powerpoint/2010/main" val="3112518695"/>
+        <p14:creationId xmlns:p14="http://schemas.microsoft.com/office/powerpoint/2010/main" val="1024086991"/>
       </p:ext>
     </p:extLst>
   </p:cSld>
@@ -4822,7 +4767,39 @@
           <a:lstStyle/>
           <a:p>
             <a:r>
-              <a:t>Two figures to close on. At the margin the business delivers, break even requires $549,372 of revenue a month, and the business is running at $541,487. Everything else in the pack sits underneath those two numbers.</a:t>
+              <a:t>Revenue by month, actual for the three closed months and original budget thereafter.</a:t>
+            </a:r>
+          </a:p>
+          <a:p>
+            <a:endParaRPr/>
+          </a:p>
+          <a:p>
+            <a:r>
+              <a:t>First quarter actual of $1,624,460 against a budget of $1,996,110, behind by $371,650.</a:t>
+            </a:r>
+          </a:p>
+          <a:p>
+            <a:endParaRPr/>
+          </a:p>
+          <a:p>
+            <a:r>
+              <a:t>The nine months from October remain at the budget set before the year began. October is budgeted at $950,416, which is higher than any month the business has delivered.</a:t>
+            </a:r>
+          </a:p>
+          <a:p>
+            <a:endParaRPr/>
+          </a:p>
+          <a:p>
+            <a:r>
+              <a:t>Two points for the board. The first quarter variance is concentrated in Consulting and Video, which were budgeted on a resourcing level that does not exist. And the margin assumption in the budget sits above the rate the business has delivered for two years, so a month that meets the revenue figure would still fall short on profit.</a:t>
+            </a:r>
+          </a:p>
+          <a:p>
+            <a:endParaRPr/>
+          </a:p>
+          <a:p>
+            <a:r>
+              <a:t>My recommendation is a rolling forecast from the second quarter, rebuilding Consulting around actual capacity and resetting gross margin to delivered rates. December would be better left as budgeted, as the business closes for two weeks and the loss is genuine.</a:t>
             </a:r>
           </a:p>
         </p:txBody>
@@ -4864,6 +4841,312 @@
 </file>
 
 <file path=ppt/notesSlides/notesSlide41.xml><?xml version="1.0" encoding="utf-8"?>
+<p:notes xmlns:a="http://schemas.openxmlformats.org/drawingml/2006/main" xmlns:r="http://schemas.openxmlformats.org/officeDocument/2006/relationships" xmlns:p="http://schemas.openxmlformats.org/presentationml/2006/main">
+  <p:cSld>
+    <p:spTree>
+      <p:nvGrpSpPr>
+        <p:cNvPr id="1" name=""/>
+        <p:cNvGrpSpPr/>
+        <p:nvPr/>
+      </p:nvGrpSpPr>
+      <p:grpSpPr>
+        <a:xfrm>
+          <a:off x="0" y="0"/>
+          <a:ext cx="0" cy="0"/>
+          <a:chOff x="0" y="0"/>
+          <a:chExt cx="0" cy="0"/>
+        </a:xfrm>
+      </p:grpSpPr>
+      <p:sp>
+        <p:nvSpPr>
+          <p:cNvPr id="2" name="Slide Image Placeholder 1"/>
+          <p:cNvSpPr>
+            <a:spLocks noGrp="1" noRot="1" noChangeAspect="1"/>
+          </p:cNvSpPr>
+          <p:nvPr>
+            <p:ph type="sldImg"/>
+          </p:nvPr>
+        </p:nvSpPr>
+        <p:spPr/>
+      </p:sp>
+      <p:sp>
+        <p:nvSpPr>
+          <p:cNvPr id="3" name="Notes Placeholder 2"/>
+          <p:cNvSpPr>
+            <a:spLocks noGrp="1"/>
+          </p:cNvSpPr>
+          <p:nvPr>
+            <p:ph type="body" idx="1"/>
+          </p:nvPr>
+        </p:nvSpPr>
+        <p:spPr/>
+        <p:txBody>
+          <a:bodyPr lIns="107095" tIns="53547" rIns="107095" bIns="53547"/>
+          <a:lstStyle/>
+          <a:p>
+            <a:r>
+              <a:t>Seven recommendations, each with a suggested owner and date.</a:t>
+            </a:r>
+          </a:p>
+          <a:p>
+            <a:endParaRPr/>
+          </a:p>
+          <a:p>
+            <a:r>
+              <a:t>The first two carry the most weight: reforecasting on margin rather than revenue, and reviewing the overhead keys. Most of the pack follows from those two figures.</a:t>
+            </a:r>
+          </a:p>
+          <a:p>
+            <a:endParaRPr/>
+          </a:p>
+          <a:p>
+            <a:r>
+              <a:t>The Consulting position has now run for three months with running costs against almost no fee income, and would benefit from a decision this quarter.</a:t>
+            </a:r>
+          </a:p>
+          <a:p>
+            <a:endParaRPr/>
+          </a:p>
+          <a:p>
+            <a:r>
+              <a:t>The receivables item is the only one that produces cash within the quarter, and utilisation remains the largest controllable item.</a:t>
+            </a:r>
+          </a:p>
+        </p:txBody>
+      </p:sp>
+      <p:sp>
+        <p:nvSpPr>
+          <p:cNvPr id="4" name="Slide Number Placeholder 3"/>
+          <p:cNvSpPr>
+            <a:spLocks noGrp="1"/>
+          </p:cNvSpPr>
+          <p:nvPr>
+            <p:ph type="sldNum" sz="quarter" idx="10"/>
+          </p:nvPr>
+        </p:nvSpPr>
+        <p:spPr/>
+        <p:txBody>
+          <a:bodyPr lIns="107095" tIns="53547" rIns="107095" bIns="53547"/>
+          <a:lstStyle/>
+          <a:p>
+            <a:fld id="{F7021451-1387-4CA6-816F-3879F97B5CBC}" type="slidenum">
+              <a:rPr lang="en-US"/>
+              <a:t>41</a:t>
+            </a:fld>
+            <a:endParaRPr lang="en-US"/>
+          </a:p>
+        </p:txBody>
+      </p:sp>
+    </p:spTree>
+    <p:extLst>
+      <p:ext uri="{BB962C8B-B14F-4D97-AF65-F5344CB8AC3E}">
+        <p14:creationId xmlns:p14="http://schemas.microsoft.com/office/powerpoint/2010/main" val="1024086991"/>
+      </p:ext>
+    </p:extLst>
+  </p:cSld>
+  <p:clrMapOvr>
+    <a:masterClrMapping/>
+  </p:clrMapOvr>
+</p:notes>
+</file>
+
+<file path=ppt/notesSlides/notesSlide42.xml><?xml version="1.0" encoding="utf-8"?>
+<p:notes xmlns:a="http://schemas.openxmlformats.org/drawingml/2006/main" xmlns:r="http://schemas.openxmlformats.org/officeDocument/2006/relationships" xmlns:p="http://schemas.openxmlformats.org/presentationml/2006/main">
+  <p:cSld>
+    <p:spTree>
+      <p:nvGrpSpPr>
+        <p:cNvPr id="1" name="">
+          <a:extLst>
+            <a:ext uri="{FF2B5EF4-FFF2-40B4-BE49-F238E27FC236}">
+              <a16:creationId xmlns:a16="http://schemas.microsoft.com/office/drawing/2014/main" id="{E5E3A21A-7AA5-7C87-038E-0D4DDF08F609}"/>
+            </a:ext>
+          </a:extLst>
+        </p:cNvPr>
+        <p:cNvGrpSpPr/>
+        <p:nvPr/>
+      </p:nvGrpSpPr>
+      <p:grpSpPr>
+        <a:xfrm>
+          <a:off x="0" y="0"/>
+          <a:ext cx="0" cy="0"/>
+          <a:chOff x="0" y="0"/>
+          <a:chExt cx="0" cy="0"/>
+        </a:xfrm>
+      </p:grpSpPr>
+      <p:sp>
+        <p:nvSpPr>
+          <p:cNvPr id="2" name="Slide Image Placeholder 1">
+            <a:extLst>
+              <a:ext uri="{FF2B5EF4-FFF2-40B4-BE49-F238E27FC236}">
+                <a16:creationId xmlns:a16="http://schemas.microsoft.com/office/drawing/2014/main" id="{9302D704-9E09-EEBE-23A6-CE9293C97765}"/>
+              </a:ext>
+            </a:extLst>
+          </p:cNvPr>
+          <p:cNvSpPr>
+            <a:spLocks noGrp="1" noRot="1" noChangeAspect="1"/>
+          </p:cNvSpPr>
+          <p:nvPr>
+            <p:ph type="sldImg"/>
+          </p:nvPr>
+        </p:nvSpPr>
+        <p:spPr/>
+      </p:sp>
+      <p:sp>
+        <p:nvSpPr>
+          <p:cNvPr id="3" name="Notes Placeholder 2">
+            <a:extLst>
+              <a:ext uri="{FF2B5EF4-FFF2-40B4-BE49-F238E27FC236}">
+                <a16:creationId xmlns:a16="http://schemas.microsoft.com/office/drawing/2014/main" id="{BBF2BDA7-2C2E-0731-EAF4-B2CA3E8B0B68}"/>
+              </a:ext>
+            </a:extLst>
+          </p:cNvPr>
+          <p:cNvSpPr>
+            <a:spLocks noGrp="1"/>
+          </p:cNvSpPr>
+          <p:nvPr>
+            <p:ph type="body" idx="1"/>
+          </p:nvPr>
+        </p:nvSpPr>
+        <p:spPr/>
+        <p:txBody>
+          <a:bodyPr lIns="107095" tIns="53547" rIns="107095" bIns="53547"/>
+          <a:lstStyle/>
+          <a:p>
+            <a:r>
+              <a:t>The source files behind this pack. Every figure in the review is drawn from the Financial Controller Pack, which reconciles to the Xero general ledger.</a:t>
+            </a:r>
+          </a:p>
+        </p:txBody>
+      </p:sp>
+      <p:sp>
+        <p:nvSpPr>
+          <p:cNvPr id="4" name="Slide Number Placeholder 3">
+            <a:extLst>
+              <a:ext uri="{FF2B5EF4-FFF2-40B4-BE49-F238E27FC236}">
+                <a16:creationId xmlns:a16="http://schemas.microsoft.com/office/drawing/2014/main" id="{9509B891-383F-E7FD-8008-0EB6BA55BD4F}"/>
+              </a:ext>
+            </a:extLst>
+          </p:cNvPr>
+          <p:cNvSpPr>
+            <a:spLocks noGrp="1"/>
+          </p:cNvSpPr>
+          <p:nvPr>
+            <p:ph type="sldNum" sz="quarter" idx="10"/>
+          </p:nvPr>
+        </p:nvSpPr>
+        <p:spPr/>
+        <p:txBody>
+          <a:bodyPr lIns="107095" tIns="53547" rIns="107095" bIns="53547"/>
+          <a:lstStyle/>
+          <a:p>
+            <a:fld id="{F7021451-1387-4CA6-816F-3879F97B5CBC}" type="slidenum">
+              <a:rPr lang="en-US"/>
+              <a:t>42</a:t>
+            </a:fld>
+            <a:endParaRPr lang="en-US"/>
+          </a:p>
+        </p:txBody>
+      </p:sp>
+    </p:spTree>
+    <p:extLst>
+      <p:ext uri="{BB962C8B-B14F-4D97-AF65-F5344CB8AC3E}">
+        <p14:creationId xmlns:p14="http://schemas.microsoft.com/office/powerpoint/2010/main" val="3112518695"/>
+      </p:ext>
+    </p:extLst>
+  </p:cSld>
+  <p:clrMapOvr>
+    <a:masterClrMapping/>
+  </p:clrMapOvr>
+</p:notes>
+</file>
+
+<file path=ppt/notesSlides/notesSlide43.xml><?xml version="1.0" encoding="utf-8"?>
+<p:notes xmlns:a="http://schemas.openxmlformats.org/drawingml/2006/main" xmlns:r="http://schemas.openxmlformats.org/officeDocument/2006/relationships" xmlns:p="http://schemas.openxmlformats.org/presentationml/2006/main">
+  <p:cSld>
+    <p:spTree>
+      <p:nvGrpSpPr>
+        <p:cNvPr id="1" name=""/>
+        <p:cNvGrpSpPr/>
+        <p:nvPr/>
+      </p:nvGrpSpPr>
+      <p:grpSpPr>
+        <a:xfrm>
+          <a:off x="0" y="0"/>
+          <a:ext cx="0" cy="0"/>
+          <a:chOff x="0" y="0"/>
+          <a:chExt cx="0" cy="0"/>
+        </a:xfrm>
+      </p:grpSpPr>
+      <p:sp>
+        <p:nvSpPr>
+          <p:cNvPr id="2" name="Slide Image Placeholder 1"/>
+          <p:cNvSpPr>
+            <a:spLocks noGrp="1" noRot="1" noChangeAspect="1"/>
+          </p:cNvSpPr>
+          <p:nvPr>
+            <p:ph type="sldImg"/>
+          </p:nvPr>
+        </p:nvSpPr>
+        <p:spPr/>
+      </p:sp>
+      <p:sp>
+        <p:nvSpPr>
+          <p:cNvPr id="3" name="Notes Placeholder 2"/>
+          <p:cNvSpPr>
+            <a:spLocks noGrp="1"/>
+          </p:cNvSpPr>
+          <p:nvPr>
+            <p:ph type="body" idx="1"/>
+          </p:nvPr>
+        </p:nvSpPr>
+        <p:spPr/>
+        <p:txBody>
+          <a:bodyPr lIns="107095" tIns="53547" rIns="107095" bIns="53547"/>
+          <a:lstStyle/>
+          <a:p>
+            <a:r>
+              <a:t>Two figures to close on. At the margin the business delivers, break even requires $549,372 of revenue a month, and the business is running at $541,487. Everything else in the pack sits underneath those two numbers.</a:t>
+            </a:r>
+          </a:p>
+        </p:txBody>
+      </p:sp>
+      <p:sp>
+        <p:nvSpPr>
+          <p:cNvPr id="4" name="Slide Number Placeholder 3"/>
+          <p:cNvSpPr>
+            <a:spLocks noGrp="1"/>
+          </p:cNvSpPr>
+          <p:nvPr>
+            <p:ph type="sldNum" sz="quarter" idx="10"/>
+          </p:nvPr>
+        </p:nvSpPr>
+        <p:spPr/>
+        <p:txBody>
+          <a:bodyPr lIns="107095" tIns="53547" rIns="107095" bIns="53547"/>
+          <a:lstStyle/>
+          <a:p>
+            <a:fld id="{F7021451-1387-4CA6-816F-3879F97B5CBC}" type="slidenum">
+              <a:rPr lang="en-US"/>
+              <a:t>43</a:t>
+            </a:fld>
+            <a:endParaRPr lang="en-US"/>
+          </a:p>
+        </p:txBody>
+      </p:sp>
+    </p:spTree>
+    <p:extLst>
+      <p:ext uri="{BB962C8B-B14F-4D97-AF65-F5344CB8AC3E}">
+        <p14:creationId xmlns:p14="http://schemas.microsoft.com/office/powerpoint/2010/main" val="1024086991"/>
+      </p:ext>
+    </p:extLst>
+  </p:cSld>
+  <p:clrMapOvr>
+    <a:masterClrMapping/>
+  </p:clrMapOvr>
+</p:notes>
+</file>
+
+<file path=ppt/notesSlides/notesSlide44.xml><?xml version="1.0" encoding="utf-8"?>
 <p:notes xmlns:a="http://schemas.openxmlformats.org/drawingml/2006/main" xmlns:p="http://schemas.openxmlformats.org/presentationml/2006/main" xmlns:r="http://schemas.openxmlformats.org/officeDocument/2006/relationships">
   <p:cSld>
     <p:spTree>
@@ -4896,203 +5179,63 @@
           <a:lstStyle/>
           <a:p>
             <a:r>
-              <a:t>Net profit and net loss for the first quarter across three years, taken from the Xero History tab. Net profit is the pack's own figure and includes other income.</a:t>
+              <a:t>The whole profit and loss by department for September 2026, taken from section 7 of the Overhead Split tab. Teal is what the department earned, red is what it cost, navy is what was left.</a:t>
             </a:r>
           </a:p>
           <a:p/>
           <a:p>
             <a:r>
-              <a:t>Q1 2026 a loss of $5,808. Q1 2025 a loss of $85,404. Q1 2024 a profit of $34,595.</a:t>
+              <a:t>Support earned $242,948, cost $213,942 and kept $29,007.</a:t>
+            </a:r>
+          </a:p>
+          <a:p>
+            <a:r>
+              <a:t>Events earned $73,304, cost $127,531 and lost $54,227.</a:t>
+            </a:r>
+          </a:p>
+          <a:p>
+            <a:r>
+              <a:t>Video earned $7,303, cost $14,149 and lost $6,846.</a:t>
+            </a:r>
+          </a:p>
+          <a:p>
+            <a:r>
+              <a:t>Integration earned $234,858, cost $224,387 and kept $10,471.</a:t>
+            </a:r>
+          </a:p>
+          <a:p>
+            <a:r>
+              <a:t>Consulting earned $3,531, cost $23,401 and lost $19,870.</a:t>
             </a:r>
           </a:p>
           <a:p/>
           <a:p>
             <a:r>
-              <a:t>The quarter has improved $79,596 on last year and is within $5,808 of breaking even. On that reading the recovery is real and the direction is right.</a:t>
+              <a:t>Across the five, $561,945 of revenue against $603,408 of cost, which is the $41,464 loss for the month.</a:t>
             </a:r>
           </a:p>
           <a:p/>
           <a:p>
             <a:r>
-              <a:t>Against the plan it reads differently. The budget had the first quarter at a $222,700 profit. Coming in at a $5,808 loss is $228,508 below it.</a:t>
+              <a:t>On the cost figure, because it does not appear on the department pages. Total cost is cost of sales plus overhead. For Support that is $141,659 of cost of sales plus $72,283 of overhead, giving $213,942. Cost of sales is not a line on those tables either, it is revenue less gross profit. Every department on this chart ties to the cent: revenue less total cost equals the result shown on the table, and the five results add to the $41,464 net loss on the P&amp;L.</a:t>
             </a:r>
           </a:p>
           <a:p/>
           <a:p>
             <a:r>
-              <a:t>As with the month, this is not a revenue failure. The quarter billed $1,624,460, which is the highest first quarter of the three, ahead of $1,228,582 last year and $1,380,102 the year before. It earned more than either comparison and still finished below the line.</a:t>
+              <a:t>What the chart shows that the department pages cannot. Support and Integration have almost the same revenue, $242,948 and $234,858, and almost the same cost, $213,942 and $224,387. The results are $29,007 and $10,471. Integration is running nearly the same volume for a third of the return, because its gross margin is 10.1% against Support's 41.7%.</a:t>
             </a:r>
           </a:p>
           <a:p/>
           <a:p>
             <a:r>
-              <a:t>The cost of earning it is where the quarter went. Cost of sales was $992,160 against $708,478 in Q1 2024, which is $283,682 more on revenue $244,358 higher. Overheads were almost unchanged at $641,508 against $638,615. The overhead base is not the problem and has not been for three years. The margin on the work is.</a:t>
+              <a:t>Events is the opposite problem. It is the smallest cost base of the three large departments and the second largest loss, because $111,108 of the $127,531 it costs is allocated overhead rather than cost of sales.</a:t>
             </a:r>
           </a:p>
           <a:p/>
           <a:p>
             <a:r>
-              <a:t>FY25 was pulled from Xero on 22 October 2026. The quarter is July to September, so it is fixed rather than following Setup.</a:t>
-            </a:r>
-          </a:p>
-        </p:txBody>
-      </p:sp>
-    </p:spTree>
-  </p:cSld>
-  <p:clrMapOvr>
-    <a:masterClrMapping/>
-  </p:clrMapOvr>
-</p:notes>
-</file>
-
-<file path=ppt/notesSlides/notesSlide42.xml><?xml version="1.0" encoding="utf-8"?>
-<p:notes xmlns:a="http://schemas.openxmlformats.org/drawingml/2006/main" xmlns:p="http://schemas.openxmlformats.org/presentationml/2006/main" xmlns:r="http://schemas.openxmlformats.org/officeDocument/2006/relationships">
-  <p:cSld>
-    <p:spTree>
-      <p:nvGrpSpPr>
-        <p:cNvPr id="1" name=""/>
-        <p:cNvGrpSpPr/>
-        <p:nvPr/>
-      </p:nvGrpSpPr>
-      <p:grpSpPr>
-        <a:xfrm>
-          <a:off x="0" y="0"/>
-          <a:ext cx="0" cy="0"/>
-          <a:chOff x="0" y="0"/>
-          <a:chExt cx="0" cy="0"/>
-        </a:xfrm>
-      </p:grpSpPr>
-      <p:sp>
-        <p:nvSpPr>
-          <p:cNvPr id="3" name="Notes Placeholder 2"/>
-          <p:cNvSpPr>
-            <a:spLocks noGrp="1"/>
-          </p:cNvSpPr>
-          <p:nvPr>
-            <p:ph type="body" idx="1"/>
-          </p:nvPr>
-        </p:nvSpPr>
-        <p:spPr/>
-        <p:txBody>
-          <a:bodyPr lIns="107095" tIns="53547" rIns="107095" bIns="53547"/>
-          <a:lstStyle/>
-          <a:p>
-            <a:r>
-              <a:t>Departmental performance for September 2026.</a:t>
-            </a:r>
-          </a:p>
-          <a:p/>
-          <a:p>
-            <a:r>
-              <a:t>The pages that follow give the company result by department, the same result rolled up the way the P&amp;L groups the business, then a page for each of the five departments, and finally departmental revenue against budget and against the same month last year.</a:t>
-            </a:r>
-          </a:p>
-        </p:txBody>
-      </p:sp>
-    </p:spTree>
-  </p:cSld>
-  <p:clrMapOvr>
-    <a:masterClrMapping/>
-  </p:clrMapOvr>
-</p:notes>
-</file>
-
-<file path=ppt/notesSlides/notesSlide43.xml><?xml version="1.0" encoding="utf-8"?>
-<p:notes xmlns:a="http://schemas.openxmlformats.org/drawingml/2006/main" xmlns:p="http://schemas.openxmlformats.org/presentationml/2006/main" xmlns:r="http://schemas.openxmlformats.org/officeDocument/2006/relationships">
-  <p:cSld>
-    <p:spTree>
-      <p:nvGrpSpPr>
-        <p:cNvPr id="1" name=""/>
-        <p:cNvGrpSpPr/>
-        <p:nvPr/>
-      </p:nvGrpSpPr>
-      <p:grpSpPr>
-        <a:xfrm>
-          <a:off x="0" y="0"/>
-          <a:ext cx="0" cy="0"/>
-          <a:chOff x="0" y="0"/>
-          <a:chExt cx="0" cy="0"/>
-        </a:xfrm>
-      </p:grpSpPr>
-      <p:sp>
-        <p:nvSpPr>
-          <p:cNvPr id="3" name="Notes Placeholder 2"/>
-          <p:cNvSpPr>
-            <a:spLocks noGrp="1"/>
-          </p:cNvSpPr>
-          <p:nvPr>
-            <p:ph type="body" idx="1"/>
-          </p:nvPr>
-        </p:nvSpPr>
-        <p:spPr/>
-        <p:txBody>
-          <a:bodyPr lIns="107095" tIns="53547" rIns="107095" bIns="53547"/>
-          <a:lstStyle/>
-          <a:p>
-            <a:r>
-              <a:t>Gross profit against the overhead charged to each department for September 2026, taken from section 7 of the Overhead Split tab. The bar above the line is what the department earned, the bar below is the overhead allocated to it, and the diamond is the result.</a:t>
-            </a:r>
-          </a:p>
-          <a:p/>
-          <a:p>
-            <a:r>
-              <a:t>Support earned $101,290 and carries $72,283, leaving $29,007.</a:t>
-            </a:r>
-          </a:p>
-          <a:p>
-            <a:r>
-              <a:t>Events earned $56,881 and carries $111,108, leaving a loss of $54,227.</a:t>
-            </a:r>
-          </a:p>
-          <a:p>
-            <a:r>
-              <a:t>Video earned $5,813 and carries $12,659, leaving a loss of $6,846.</a:t>
-            </a:r>
-          </a:p>
-          <a:p>
-            <a:r>
-              <a:t>Integration earned $23,756 and carries $13,285, leaving $10,471.</a:t>
-            </a:r>
-          </a:p>
-          <a:p>
-            <a:r>
-              <a:t>Consulting earned $74 and carries $19,944, leaving a loss of $19,870.</a:t>
-            </a:r>
-          </a:p>
-          <a:p/>
-          <a:p>
-            <a:r>
-              <a:t>The company earned $187,814 of gross profit against $229,278 of overhead. The $41,464 difference is the loss for the month. Put plainly, the business did not earn enough gross profit to carry its own overhead base.</a:t>
-            </a:r>
-          </a:p>
-          <a:p/>
-          <a:p>
-            <a:r>
-              <a:t>Two things come out of the shape of this chart.</a:t>
-            </a:r>
-          </a:p>
-          <a:p/>
-          <a:p>
-            <a:r>
-              <a:t>The first is Events. Its gross margin was 77.6%, the second highest of the five, and it still produced the largest loss on the page. It carries $111,108 of overhead, which is 48.5% of the company total, on $73,304 of revenue, which is 13.0% of the company total. No improvement in margin fixes that. Either Events carries more revenue or it carries less overhead, and the overhead keys are worth testing before the next budget.</a:t>
-            </a:r>
-          </a:p>
-          <a:p/>
-          <a:p>
-            <a:r>
-              <a:t>The second is Integration. It brought in $234,858 of revenue, the second largest of the five, and converted it into $23,756 of gross profit at a 10.1% margin. It covers its overhead and returns $10,471, so it is not a loss maker, but it is doing the most work for the least return.</a:t>
-            </a:r>
-          </a:p>
-          <a:p/>
-          <a:p>
-            <a:r>
-              <a:t>Support is the one department behaving as it should. A 41.7% margin on contract revenue, covering its allocated overhead, and returning $29,007.</a:t>
-            </a:r>
-          </a:p>
-          <a:p/>
-          <a:p>
-            <a:r>
-              <a:t>The full table is on the next page.</a:t>
+              <a:t>Video and Consulting are small on this chart because they are small. Between them they earned $10,834 and cost $37,550.</a:t>
             </a:r>
           </a:p>
         </p:txBody>
@@ -5842,7 +5985,7 @@
           </a:prstGeom>
           <a:extLst>
             <a:ext uri="{C572A759-6A51-4108-AA02-DFA0A04FC94B}">
-              <ma14:wrappingTextBoxFlag xmlns:ma14="http://schemas.microsoft.com/office/mac/drawingml/2011/main" xmlns="" val="0"/>
+              <ma14:wrappingTextBoxFlag xmlns="" xmlns:ma14="http://schemas.microsoft.com/office/mac/drawingml/2011/main" val="0"/>
             </a:ext>
           </a:extLst>
         </p:spPr>
@@ -5917,7 +6060,7 @@
           </a:prstGeom>
           <a:extLst>
             <a:ext uri="{C572A759-6A51-4108-AA02-DFA0A04FC94B}">
-              <ma14:wrappingTextBoxFlag xmlns:ma14="http://schemas.microsoft.com/office/mac/drawingml/2011/main" xmlns="" val="0"/>
+              <ma14:wrappingTextBoxFlag xmlns="" xmlns:ma14="http://schemas.microsoft.com/office/mac/drawingml/2011/main" val="0"/>
             </a:ext>
           </a:extLst>
         </p:spPr>
@@ -6795,7 +6938,7 @@
           </a:prstGeom>
           <a:extLst>
             <a:ext uri="{C572A759-6A51-4108-AA02-DFA0A04FC94B}">
-              <ma14:wrappingTextBoxFlag xmlns:ma14="http://schemas.microsoft.com/office/mac/drawingml/2011/main" xmlns="" val="0"/>
+              <ma14:wrappingTextBoxFlag xmlns="" xmlns:ma14="http://schemas.microsoft.com/office/mac/drawingml/2011/main" val="0"/>
             </a:ext>
           </a:extLst>
         </p:spPr>
@@ -7201,7 +7344,7 @@
           </a:prstGeom>
           <a:extLst>
             <a:ext uri="{C572A759-6A51-4108-AA02-DFA0A04FC94B}">
-              <ma14:wrappingTextBoxFlag xmlns:ma14="http://schemas.microsoft.com/office/mac/drawingml/2011/main" xmlns="" val="0"/>
+              <ma14:wrappingTextBoxFlag xmlns="" xmlns:ma14="http://schemas.microsoft.com/office/mac/drawingml/2011/main" val="0"/>
             </a:ext>
           </a:extLst>
         </p:spPr>
@@ -7586,7 +7729,7 @@
           </a:prstGeom>
           <a:extLst>
             <a:ext uri="{C572A759-6A51-4108-AA02-DFA0A04FC94B}">
-              <ma14:wrappingTextBoxFlag xmlns:ma14="http://schemas.microsoft.com/office/mac/drawingml/2011/main" xmlns="" val="0"/>
+              <ma14:wrappingTextBoxFlag xmlns="" xmlns:ma14="http://schemas.microsoft.com/office/mac/drawingml/2011/main" val="0"/>
             </a:ext>
           </a:extLst>
         </p:spPr>
@@ -7971,7 +8114,7 @@
           </a:prstGeom>
           <a:extLst>
             <a:ext uri="{C572A759-6A51-4108-AA02-DFA0A04FC94B}">
-              <ma14:wrappingTextBoxFlag xmlns:ma14="http://schemas.microsoft.com/office/mac/drawingml/2011/main" xmlns="" val="0"/>
+              <ma14:wrappingTextBoxFlag xmlns="" xmlns:ma14="http://schemas.microsoft.com/office/mac/drawingml/2011/main" val="0"/>
             </a:ext>
           </a:extLst>
         </p:spPr>
@@ -8120,7 +8263,7 @@
           <p:nvPr/>
         </p:nvPicPr>
         <p:blipFill>
-          <a:blip r:embed="rId5"/>
+          <a:blip r:embed="rId3"/>
           <a:stretch>
             <a:fillRect/>
           </a:stretch>
@@ -8356,7 +8499,7 @@
           </a:prstGeom>
           <a:extLst>
             <a:ext uri="{C572A759-6A51-4108-AA02-DFA0A04FC94B}">
-              <ma14:wrappingTextBoxFlag xmlns:ma14="http://schemas.microsoft.com/office/mac/drawingml/2011/main" xmlns="" val="0"/>
+              <ma14:wrappingTextBoxFlag xmlns="" xmlns:ma14="http://schemas.microsoft.com/office/mac/drawingml/2011/main" val="0"/>
             </a:ext>
           </a:extLst>
         </p:spPr>
@@ -8480,7 +8623,7 @@
 </file>
 
 <file path=ppt/slides/slide15.xml><?xml version="1.0" encoding="utf-8"?>
-<p:sld xmlns:a="http://schemas.openxmlformats.org/drawingml/2006/main" xmlns:p="http://schemas.openxmlformats.org/presentationml/2006/main" xmlns:r="http://schemas.openxmlformats.org/officeDocument/2006/relationships">
+<p:sld xmlns:a="http://schemas.openxmlformats.org/drawingml/2006/main" xmlns:r="http://schemas.openxmlformats.org/officeDocument/2006/relationships" xmlns:p="http://schemas.openxmlformats.org/presentationml/2006/main">
   <p:cSld>
     <p:spTree>
       <p:nvGrpSpPr>
@@ -8488,7 +8631,14 @@
         <p:cNvGrpSpPr/>
         <p:nvPr/>
       </p:nvGrpSpPr>
-      <p:grpSpPr/>
+      <p:grpSpPr>
+        <a:xfrm>
+          <a:off x="0" y="0"/>
+          <a:ext cx="0" cy="0"/>
+          <a:chOff x="0" y="0"/>
+          <a:chExt cx="0" cy="0"/>
+        </a:xfrm>
+      </p:grpSpPr>
       <p:pic>
         <p:nvPicPr>
           <p:cNvPr id="27" name="snip profit_qtr" descr="profit_qtr.png"/>
@@ -8734,7 +8884,7 @@
           </a:prstGeom>
           <a:extLst>
             <a:ext uri="{C572A759-6A51-4108-AA02-DFA0A04FC94B}">
-              <ma14:wrappingTextBoxFlag xmlns:ma14="http://schemas.microsoft.com/office/mac/drawingml/2011/main" xmlns="" val="0"/>
+              <ma14:wrappingTextBoxFlag xmlns="" xmlns:ma14="http://schemas.microsoft.com/office/mac/drawingml/2011/main" val="0"/>
             </a:ext>
           </a:extLst>
         </p:spPr>
@@ -8753,7 +8903,7 @@
             <a:pPr algn="r"/>
             <a:fld id="{F7021451-1387-4CA6-816F-3879F97B5CBC}" type="slidenum">
               <a:rPr lang="en-US" b="0"/>
-              <a:t>9</a:t>
+              <a:t>15</a:t>
             </a:fld>
             <a:endParaRPr lang="en-US"/>
           </a:p>
@@ -8834,7 +8984,7 @@
           <p:nvPr/>
         </p:nvPicPr>
         <p:blipFill>
-          <a:blip r:embed="rId2"/>
+          <a:blip r:embed="rId4"/>
           <a:stretch>
             <a:fillRect/>
           </a:stretch>
@@ -8858,7 +9008,7 @@
 </file>
 
 <file path=ppt/slides/slide16.xml><?xml version="1.0" encoding="utf-8"?>
-<p:sld xmlns:a="http://schemas.openxmlformats.org/drawingml/2006/main" xmlns:p="http://schemas.openxmlformats.org/presentationml/2006/main" xmlns:r="http://schemas.openxmlformats.org/officeDocument/2006/relationships">
+<p:sld xmlns:a="http://schemas.openxmlformats.org/drawingml/2006/main" xmlns:r="http://schemas.openxmlformats.org/officeDocument/2006/relationships" xmlns:p="http://schemas.openxmlformats.org/presentationml/2006/main">
   <p:cSld>
     <p:spTree>
       <p:nvGrpSpPr>
@@ -8866,23 +9016,30 @@
         <p:cNvGrpSpPr/>
         <p:nvPr/>
       </p:nvGrpSpPr>
-      <p:grpSpPr/>
-      <p:sp>
-        <p:nvSpPr>
-          <p:cNvPr id="12" name="dot 4"/>
+      <p:grpSpPr>
+        <a:xfrm>
+          <a:off x="0" y="0"/>
+          <a:ext cx="0" cy="0"/>
+          <a:chOff x="0" y="0"/>
+          <a:chExt cx="0" cy="0"/>
+        </a:xfrm>
+      </p:grpSpPr>
+      <p:sp>
+        <p:nvSpPr>
+          <p:cNvPr id="11" name="dot 3"/>
           <p:cNvSpPr/>
           <p:nvPr/>
         </p:nvSpPr>
         <p:spPr>
           <a:xfrm>
-            <a:off x="5897880" y="3154680"/>
-            <a:ext cx="1371600" cy="1371600"/>
+            <a:off x="7040880" y="2468880"/>
+            <a:ext cx="2057400" cy="2057400"/>
           </a:xfrm>
           <a:prstGeom prst="ellipse">
             <a:avLst/>
           </a:prstGeom>
           <a:solidFill>
-            <a:srgbClr val="8F4AFA">
+            <a:srgbClr val="6D71FF">
               <a:alpha val="55000"/>
             </a:srgbClr>
           </a:solidFill>
@@ -8910,25 +9067,26 @@
           <a:lstStyle/>
           <a:p>
             <a:pPr algn="ctr"/>
-          </a:p>
-        </p:txBody>
-      </p:sp>
-      <p:sp>
-        <p:nvSpPr>
-          <p:cNvPr id="11" name="dot 3"/>
+            <a:endParaRPr/>
+          </a:p>
+        </p:txBody>
+      </p:sp>
+      <p:sp>
+        <p:nvSpPr>
+          <p:cNvPr id="10" name="dot 2"/>
           <p:cNvSpPr/>
           <p:nvPr/>
         </p:nvSpPr>
         <p:spPr>
           <a:xfrm>
-            <a:off x="7040880" y="2468880"/>
-            <a:ext cx="2057400" cy="2057400"/>
+            <a:off x="6629400" y="2057400"/>
+            <a:ext cx="1554480" cy="1554480"/>
           </a:xfrm>
           <a:prstGeom prst="ellipse">
             <a:avLst/>
           </a:prstGeom>
           <a:solidFill>
-            <a:srgbClr val="6D71FF">
+            <a:srgbClr val="3FD0C9">
               <a:alpha val="55000"/>
             </a:srgbClr>
           </a:solidFill>
@@ -8956,25 +9114,26 @@
           <a:lstStyle/>
           <a:p>
             <a:pPr algn="ctr"/>
-          </a:p>
-        </p:txBody>
-      </p:sp>
-      <p:sp>
-        <p:nvSpPr>
-          <p:cNvPr id="10" name="dot 2"/>
+            <a:endParaRPr/>
+          </a:p>
+        </p:txBody>
+      </p:sp>
+      <p:sp>
+        <p:nvSpPr>
+          <p:cNvPr id="8" name="dot 0"/>
           <p:cNvSpPr/>
           <p:nvPr/>
         </p:nvSpPr>
         <p:spPr>
           <a:xfrm>
-            <a:off x="6629400" y="2057400"/>
-            <a:ext cx="1554480" cy="1554480"/>
+            <a:off x="5897880" y="91440"/>
+            <a:ext cx="2240280" cy="2240280"/>
           </a:xfrm>
           <a:prstGeom prst="ellipse">
             <a:avLst/>
           </a:prstGeom>
           <a:solidFill>
-            <a:srgbClr val="3FD0C9">
+            <a:srgbClr val="F33844">
               <a:alpha val="55000"/>
             </a:srgbClr>
           </a:solidFill>
@@ -9002,98 +9161,7 @@
           <a:lstStyle/>
           <a:p>
             <a:pPr algn="ctr"/>
-          </a:p>
-        </p:txBody>
-      </p:sp>
-      <p:sp>
-        <p:nvSpPr>
-          <p:cNvPr id="9" name="dot 1"/>
-          <p:cNvSpPr/>
-          <p:nvPr/>
-        </p:nvSpPr>
-        <p:spPr>
-          <a:xfrm>
-            <a:off x="7132320" y="868680"/>
-            <a:ext cx="1874519" cy="1874519"/>
-          </a:xfrm>
-          <a:prstGeom prst="ellipse">
-            <a:avLst/>
-          </a:prstGeom>
-          <a:solidFill>
-            <a:srgbClr val="005358">
-              <a:alpha val="55000"/>
-            </a:srgbClr>
-          </a:solidFill>
-          <a:ln>
-            <a:noFill/>
-          </a:ln>
-          <a:effectLst/>
-        </p:spPr>
-        <p:style>
-          <a:lnRef idx="1">
-            <a:schemeClr val="accent1"/>
-          </a:lnRef>
-          <a:fillRef idx="3">
-            <a:schemeClr val="accent1"/>
-          </a:fillRef>
-          <a:effectRef idx="2">
-            <a:schemeClr val="accent1"/>
-          </a:effectRef>
-          <a:fontRef idx="minor">
-            <a:schemeClr val="lt1"/>
-          </a:fontRef>
-        </p:style>
-        <p:txBody>
-          <a:bodyPr rtlCol="0" anchor="ctr"/>
-          <a:lstStyle/>
-          <a:p>
-            <a:pPr algn="ctr"/>
-          </a:p>
-        </p:txBody>
-      </p:sp>
-      <p:sp>
-        <p:nvSpPr>
-          <p:cNvPr id="8" name="dot 0"/>
-          <p:cNvSpPr/>
-          <p:nvPr/>
-        </p:nvSpPr>
-        <p:spPr>
-          <a:xfrm>
-            <a:off x="5897880" y="91440"/>
-            <a:ext cx="2240280" cy="2240280"/>
-          </a:xfrm>
-          <a:prstGeom prst="ellipse">
-            <a:avLst/>
-          </a:prstGeom>
-          <a:solidFill>
-            <a:srgbClr val="F33844">
-              <a:alpha val="55000"/>
-            </a:srgbClr>
-          </a:solidFill>
-          <a:ln>
-            <a:noFill/>
-          </a:ln>
-          <a:effectLst/>
-        </p:spPr>
-        <p:style>
-          <a:lnRef idx="1">
-            <a:schemeClr val="accent1"/>
-          </a:lnRef>
-          <a:fillRef idx="3">
-            <a:schemeClr val="accent1"/>
-          </a:fillRef>
-          <a:effectRef idx="2">
-            <a:schemeClr val="accent1"/>
-          </a:effectRef>
-          <a:fontRef idx="minor">
-            <a:schemeClr val="lt1"/>
-          </a:fontRef>
-        </p:style>
-        <p:txBody>
-          <a:bodyPr rtlCol="0" anchor="ctr"/>
-          <a:lstStyle/>
-          <a:p>
-            <a:pPr algn="ctr"/>
+            <a:endParaRPr/>
           </a:p>
         </p:txBody>
       </p:sp>
@@ -9277,384 +9345,6 @@
 </file>
 
 <file path=ppt/slides/slide17.xml><?xml version="1.0" encoding="utf-8"?>
-<p:sld xmlns:a="http://schemas.openxmlformats.org/drawingml/2006/main" xmlns:p="http://schemas.openxmlformats.org/presentationml/2006/main" xmlns:r="http://schemas.openxmlformats.org/officeDocument/2006/relationships">
-  <p:cSld>
-    <p:spTree>
-      <p:nvGrpSpPr>
-        <p:cNvPr id="1" name=""/>
-        <p:cNvGrpSpPr/>
-        <p:nvPr/>
-      </p:nvGrpSpPr>
-      <p:grpSpPr/>
-      <p:pic>
-        <p:nvPicPr>
-          <p:cNvPr id="27" name="snip dept_mix" descr="dept_mix.png"/>
-          <p:cNvPicPr>
-            <a:picLocks noChangeAspect="1"/>
-          </p:cNvPicPr>
-          <p:nvPr/>
-        </p:nvPicPr>
-        <p:blipFill>
-          <a:blip r:embed="rId3"/>
-          <a:stretch>
-            <a:fillRect/>
-          </a:stretch>
-        </p:blipFill>
-        <p:spPr>
-          <a:xfrm>
-            <a:off x="535418" y="1005840"/>
-            <a:ext cx="8073163" cy="2523743"/>
-          </a:xfrm>
-          <a:prstGeom prst="rect">
-            <a:avLst/>
-          </a:prstGeom>
-        </p:spPr>
-      </p:pic>
-      <p:sp>
-        <p:nvSpPr>
-          <p:cNvPr id="2" name="Text 0"/>
-          <p:cNvSpPr txBox="1"/>
-          <p:nvPr/>
-        </p:nvSpPr>
-        <p:spPr>
-          <a:xfrm>
-            <a:off x="502920" y="365760"/>
-            <a:ext cx="6400800" cy="274320"/>
-          </a:xfrm>
-          <a:prstGeom prst="rect">
-            <a:avLst/>
-          </a:prstGeom>
-          <a:noFill/>
-          <a:ln/>
-        </p:spPr>
-        <p:txBody>
-          <a:bodyPr wrap="square" lIns="0" tIns="0" rIns="0" bIns="0" rtlCol="0" anchor="ctr"/>
-          <a:lstStyle/>
-          <a:p>
-            <a:pPr marL="0" indent="0">
-              <a:buNone/>
-            </a:pPr>
-            <a:r>
-              <a:rPr lang="en-US" sz="950" b="1" kern="0" spc="220">
-                <a:solidFill>
-                  <a:srgbClr val="122B82"/>
-                </a:solidFill>
-              </a:rPr>
-              <a:t>DEPARTMENTAL PERFORMANCE</a:t>
-            </a:r>
-            <a:endParaRPr lang="en-US" sz="950"/>
-          </a:p>
-        </p:txBody>
-      </p:sp>
-      <p:sp>
-        <p:nvSpPr>
-          <p:cNvPr id="3" name="Text 1"/>
-          <p:cNvSpPr txBox="1"/>
-          <p:nvPr/>
-        </p:nvSpPr>
-        <p:spPr>
-          <a:xfrm>
-            <a:off x="502920" y="640080"/>
-            <a:ext cx="7315200" cy="365760"/>
-          </a:xfrm>
-          <a:prstGeom prst="rect">
-            <a:avLst/>
-          </a:prstGeom>
-          <a:noFill/>
-          <a:ln/>
-        </p:spPr>
-        <p:txBody>
-          <a:bodyPr wrap="square" lIns="0" tIns="0" rIns="0" bIns="0" rtlCol="0" anchor="ctr"/>
-          <a:lstStyle/>
-          <a:p>
-            <a:pPr marL="0" indent="0" algn="ctr">
-              <a:buNone/>
-            </a:pPr>
-            <a:r>
-              <a:rPr lang="en-US" sz="2200" b="1" dirty="0">
-                <a:solidFill>
-                  <a:srgbClr val="242C39"/>
-                </a:solidFill>
-              </a:rPr>
-              <a:t>Departmental result, September 2026</a:t>
-            </a:r>
-            <a:endParaRPr lang="en-US" sz="2700" dirty="0"/>
-          </a:p>
-        </p:txBody>
-      </p:sp>
-      <p:sp>
-        <p:nvSpPr>
-          <p:cNvPr id="6" name="commentary panel"/>
-          <p:cNvSpPr/>
-          <p:nvPr/>
-        </p:nvSpPr>
-        <p:spPr>
-          <a:xfrm>
-            <a:off x="502920" y="3621023"/>
-            <a:ext cx="8138160" cy="1005840"/>
-          </a:xfrm>
-          <a:prstGeom prst="rect">
-            <a:avLst/>
-          </a:prstGeom>
-          <a:solidFill>
-            <a:srgbClr val="E8F9F8"/>
-          </a:solidFill>
-          <a:ln/>
-        </p:spPr>
-        <p:txBody>
-          <a:bodyPr/>
-          <a:lstStyle/>
-          <a:p>
-            <a:endParaRPr lang="en-AU"/>
-          </a:p>
-        </p:txBody>
-      </p:sp>
-      <p:sp>
-        <p:nvSpPr>
-          <p:cNvPr id="7" name="Text 4"/>
-          <p:cNvSpPr txBox="1"/>
-          <p:nvPr/>
-        </p:nvSpPr>
-        <p:spPr>
-          <a:xfrm>
-            <a:off x="685800" y="3694175"/>
-            <a:ext cx="2743200" cy="228600"/>
-          </a:xfrm>
-          <a:prstGeom prst="rect">
-            <a:avLst/>
-          </a:prstGeom>
-          <a:noFill/>
-          <a:ln/>
-        </p:spPr>
-        <p:txBody>
-          <a:bodyPr wrap="square" lIns="0" tIns="0" rIns="0" bIns="0" rtlCol="0" anchor="ctr"/>
-          <a:lstStyle/>
-          <a:p>
-            <a:pPr marL="0" indent="0">
-              <a:buNone/>
-            </a:pPr>
-            <a:r>
-              <a:rPr lang="en-US" sz="900" b="1" kern="0" spc="180">
-                <a:solidFill>
-                  <a:srgbClr val="005358"/>
-                </a:solidFill>
-              </a:rPr>
-              <a:t>COMMENTARY</a:t>
-            </a:r>
-            <a:endParaRPr lang="en-US" sz="900"/>
-          </a:p>
-        </p:txBody>
-      </p:sp>
-      <p:sp>
-        <p:nvSpPr>
-          <p:cNvPr id="8" name="Text 5"/>
-          <p:cNvSpPr txBox="1"/>
-          <p:nvPr/>
-        </p:nvSpPr>
-        <p:spPr>
-          <a:xfrm>
-            <a:off x="685800" y="3867911"/>
-            <a:ext cx="3703320" cy="731520"/>
-          </a:xfrm>
-          <a:prstGeom prst="rect">
-            <a:avLst/>
-          </a:prstGeom>
-          <a:noFill/>
-          <a:ln/>
-        </p:spPr>
-        <p:txBody>
-          <a:bodyPr wrap="square" lIns="0" tIns="0" rIns="0" bIns="0" rtlCol="0" anchor="t">
-            <a:normAutofit fontScale="85000" lnSpcReduction="10000"/>
-          </a:bodyPr>
-          <a:lstStyle/>
-          <a:p>
-            <a:pPr marL="342900" indent="-342900">
-              <a:lnSpc>
-                <a:spcPts val="1050"/>
-              </a:lnSpc>
-              <a:spcAft>
-                <a:spcPts val="400"/>
-              </a:spcAft>
-              <a:buSzPct val="100000"/>
-              <a:buChar char="•"/>
-            </a:pPr>
-            <a:r>
-              <a:rPr lang="en-US" sz="1000">
-                <a:solidFill>
-                  <a:srgbClr val="3A4453"/>
-                </a:solidFill>
-              </a:rPr>
-              <a:t>Gross profit of $188k did not cover overheads of $229k. That gap is the $41k loss.</a:t>
-            </a:r>
-            <a:endParaRPr lang="en-US" sz="850"/>
-          </a:p>
-          <a:p>
-            <a:pPr marL="342900" indent="-342900">
-              <a:lnSpc>
-                <a:spcPts val="1050"/>
-              </a:lnSpc>
-              <a:spcAft>
-                <a:spcPts val="400"/>
-              </a:spcAft>
-              <a:buSzPct val="100000"/>
-              <a:buChar char="•"/>
-            </a:pPr>
-            <a:r>
-              <a:rPr lang="en-US" sz="1000">
-                <a:solidFill>
-                  <a:srgbClr val="3A4453"/>
-                </a:solidFill>
-              </a:rPr>
-              <a:t>Only Support and Integration covered the overhead charged to them.</a:t>
-            </a:r>
-            <a:endParaRPr lang="en-US" sz="850"/>
-          </a:p>
-        </p:txBody>
-      </p:sp>
-      <p:sp>
-        <p:nvSpPr>
-          <p:cNvPr id="25" name="Slide Number Placeholder 0"/>
-          <p:cNvSpPr>
-            <a:spLocks noGrp="1"/>
-          </p:cNvSpPr>
-          <p:nvPr>
-            <p:ph type="sldNum" sz="quarter" idx="4294967295"/>
-          </p:nvPr>
-        </p:nvSpPr>
-        <p:spPr>
-          <a:xfrm>
-            <a:off x="8092440" y="4736592"/>
-            <a:ext cx="548640" cy="228600"/>
-          </a:xfrm>
-          <a:prstGeom prst="rect">
-            <a:avLst/>
-          </a:prstGeom>
-          <a:extLst>
-            <a:ext uri="{C572A759-6A51-4108-AA02-DFA0A04FC94B}">
-              <ma14:wrappingTextBoxFlag xmlns:ma14="http://schemas.microsoft.com/office/mac/drawingml/2011/main" xmlns="" val="0"/>
-            </a:ext>
-          </a:extLst>
-        </p:spPr>
-        <p:txBody>
-          <a:bodyPr/>
-          <a:lstStyle>
-            <a:lvl1pPr>
-              <a:defRPr sz="800">
-                <a:solidFill>
-                  <a:srgbClr val="6B7585"/>
-                </a:solidFill>
-              </a:defRPr>
-            </a:lvl1pPr>
-          </a:lstStyle>
-          <a:p>
-            <a:pPr algn="r"/>
-            <a:fld id="{F7021451-1387-4CA6-816F-3879F97B5CBC}" type="slidenum">
-              <a:rPr lang="en-US" b="0"/>
-              <a:t>9</a:t>
-            </a:fld>
-            <a:endParaRPr lang="en-US"/>
-          </a:p>
-        </p:txBody>
-      </p:sp>
-      <p:sp>
-        <p:nvSpPr>
-          <p:cNvPr id="4" name="Text 5b"/>
-          <p:cNvSpPr txBox="1"/>
-          <p:nvPr/>
-        </p:nvSpPr>
-        <p:spPr>
-          <a:xfrm>
-            <a:off x="4663440" y="3867911"/>
-            <a:ext cx="3703320" cy="731520"/>
-          </a:xfrm>
-          <a:prstGeom prst="rect">
-            <a:avLst/>
-          </a:prstGeom>
-          <a:noFill/>
-          <a:ln/>
-        </p:spPr>
-        <p:txBody>
-          <a:bodyPr wrap="square" lIns="0" tIns="0" rIns="0" bIns="0" rtlCol="0" anchor="t">
-            <a:normAutofit fontScale="85000" lnSpcReduction="10000"/>
-          </a:bodyPr>
-          <a:lstStyle/>
-          <a:p>
-            <a:pPr marL="342900" indent="-342900">
-              <a:lnSpc>
-                <a:spcPts val="1050"/>
-              </a:lnSpc>
-              <a:spcAft>
-                <a:spcPts val="400"/>
-              </a:spcAft>
-              <a:buSzPct val="100000"/>
-              <a:buChar char="•"/>
-            </a:pPr>
-            <a:r>
-              <a:rPr lang="en-US" sz="1000">
-                <a:solidFill>
-                  <a:srgbClr val="3A4453"/>
-                </a:solidFill>
-              </a:rPr>
-              <a:t>Events carries 48% of all overhead on 13% of revenue, so a 78% margin still ends in a $54k loss.</a:t>
-            </a:r>
-            <a:endParaRPr lang="en-US" sz="850"/>
-          </a:p>
-          <a:p>
-            <a:pPr marL="342900" indent="-342900">
-              <a:lnSpc>
-                <a:spcPts val="1050"/>
-              </a:lnSpc>
-              <a:spcAft>
-                <a:spcPts val="400"/>
-              </a:spcAft>
-              <a:buSzPct val="100000"/>
-              <a:buChar char="•"/>
-            </a:pPr>
-            <a:r>
-              <a:rPr lang="en-US" sz="1000">
-                <a:solidFill>
-                  <a:srgbClr val="3A4453"/>
-                </a:solidFill>
-              </a:rPr>
-              <a:t>Consulting earned $74 of gross profit on $4k of revenue and carries $20k of overhead.</a:t>
-            </a:r>
-            <a:endParaRPr lang="en-US" sz="850"/>
-          </a:p>
-        </p:txBody>
-      </p:sp>
-      <p:pic>
-        <p:nvPicPr>
-          <p:cNvPr id="26" name="cts logo" descr="image.png"/>
-          <p:cNvPicPr>
-            <a:picLocks noChangeAspect="1"/>
-          </p:cNvPicPr>
-          <p:nvPr/>
-        </p:nvPicPr>
-        <p:blipFill>
-          <a:blip r:embed="rId2"/>
-          <a:stretch>
-            <a:fillRect/>
-          </a:stretch>
-        </p:blipFill>
-        <p:spPr>
-          <a:xfrm>
-            <a:off x="7680959" y="182880"/>
-            <a:ext cx="960120" cy="539696"/>
-          </a:xfrm>
-          <a:prstGeom prst="rect">
-            <a:avLst/>
-          </a:prstGeom>
-        </p:spPr>
-      </p:pic>
-    </p:spTree>
-  </p:cSld>
-  <p:clrMapOvr>
-    <a:masterClrMapping/>
-  </p:clrMapOvr>
-</p:sld>
-</file>
-
-<file path=ppt/slides/slide18.xml><?xml version="1.0" encoding="utf-8"?>
 <p:sld xmlns:a="http://schemas.openxmlformats.org/drawingml/2006/main" xmlns:r="http://schemas.openxmlformats.org/officeDocument/2006/relationships" xmlns:p="http://schemas.openxmlformats.org/presentationml/2006/main">
   <p:cSld name="Slide 7">
     <p:spTree>
@@ -9982,7 +9672,7 @@
           </a:prstGeom>
           <a:extLst>
             <a:ext uri="{C572A759-6A51-4108-AA02-DFA0A04FC94B}">
-              <ma14:wrappingTextBoxFlag xmlns:ma14="http://schemas.microsoft.com/office/mac/drawingml/2011/main" xmlns="" val="0"/>
+              <ma14:wrappingTextBoxFlag xmlns="" xmlns:ma14="http://schemas.microsoft.com/office/mac/drawingml/2011/main" val="0"/>
             </a:ext>
           </a:extLst>
         </p:spPr>
@@ -10001,7 +9691,7 @@
             <a:pPr algn="r"/>
             <a:fld id="{F7021451-1387-4CA6-816F-3879F97B5CBC}" type="slidenum">
               <a:rPr lang="en-US" b="0"/>
-              <a:t>15</a:t>
+              <a:t>17</a:t>
             </a:fld>
             <a:endParaRPr lang="en-US"/>
           </a:p>
@@ -10010,6 +9700,391 @@
       <p:pic>
         <p:nvPicPr>
           <p:cNvPr id="26" name="cts logo" descr="cts-logo.png"/>
+          <p:cNvPicPr>
+            <a:picLocks noChangeAspect="1"/>
+          </p:cNvPicPr>
+          <p:nvPr/>
+        </p:nvPicPr>
+        <p:blipFill>
+          <a:blip r:embed="rId4"/>
+          <a:stretch>
+            <a:fillRect/>
+          </a:stretch>
+        </p:blipFill>
+        <p:spPr>
+          <a:xfrm>
+            <a:off x="7680959" y="182880"/>
+            <a:ext cx="960120" cy="539696"/>
+          </a:xfrm>
+          <a:prstGeom prst="rect">
+            <a:avLst/>
+          </a:prstGeom>
+        </p:spPr>
+      </p:pic>
+    </p:spTree>
+  </p:cSld>
+  <p:clrMapOvr>
+    <a:masterClrMapping/>
+  </p:clrMapOvr>
+</p:sld>
+</file>
+
+<file path=ppt/slides/slide18.xml><?xml version="1.0" encoding="utf-8"?>
+<p:sld xmlns:a="http://schemas.openxmlformats.org/drawingml/2006/main" xmlns:r="http://schemas.openxmlformats.org/officeDocument/2006/relationships" xmlns:p="http://schemas.openxmlformats.org/presentationml/2006/main">
+  <p:cSld>
+    <p:spTree>
+      <p:nvGrpSpPr>
+        <p:cNvPr id="1" name=""/>
+        <p:cNvGrpSpPr/>
+        <p:nvPr/>
+      </p:nvGrpSpPr>
+      <p:grpSpPr>
+        <a:xfrm>
+          <a:off x="0" y="0"/>
+          <a:ext cx="0" cy="0"/>
+          <a:chOff x="0" y="0"/>
+          <a:chExt cx="0" cy="0"/>
+        </a:xfrm>
+      </p:grpSpPr>
+      <p:pic>
+        <p:nvPicPr>
+          <p:cNvPr id="27" name="snip dept_mix" descr="dept_mix.png"/>
+          <p:cNvPicPr>
+            <a:picLocks noChangeAspect="1"/>
+          </p:cNvPicPr>
+          <p:nvPr/>
+        </p:nvPicPr>
+        <p:blipFill>
+          <a:blip r:embed="rId3"/>
+          <a:stretch>
+            <a:fillRect/>
+          </a:stretch>
+        </p:blipFill>
+        <p:spPr>
+          <a:xfrm>
+            <a:off x="535418" y="1005840"/>
+            <a:ext cx="8073163" cy="2523743"/>
+          </a:xfrm>
+          <a:prstGeom prst="rect">
+            <a:avLst/>
+          </a:prstGeom>
+        </p:spPr>
+      </p:pic>
+      <p:sp>
+        <p:nvSpPr>
+          <p:cNvPr id="2" name="Text 0"/>
+          <p:cNvSpPr txBox="1"/>
+          <p:nvPr/>
+        </p:nvSpPr>
+        <p:spPr>
+          <a:xfrm>
+            <a:off x="502920" y="365760"/>
+            <a:ext cx="6400800" cy="274320"/>
+          </a:xfrm>
+          <a:prstGeom prst="rect">
+            <a:avLst/>
+          </a:prstGeom>
+          <a:noFill/>
+          <a:ln/>
+        </p:spPr>
+        <p:txBody>
+          <a:bodyPr wrap="square" lIns="0" tIns="0" rIns="0" bIns="0" rtlCol="0" anchor="ctr"/>
+          <a:lstStyle/>
+          <a:p>
+            <a:pPr marL="0" indent="0">
+              <a:buNone/>
+            </a:pPr>
+            <a:r>
+              <a:rPr lang="en-US" sz="950" b="1" kern="0" spc="220">
+                <a:solidFill>
+                  <a:srgbClr val="122B82"/>
+                </a:solidFill>
+              </a:rPr>
+              <a:t>DEPARTMENTAL PERFORMANCE</a:t>
+            </a:r>
+            <a:endParaRPr lang="en-US" sz="950"/>
+          </a:p>
+        </p:txBody>
+      </p:sp>
+      <p:sp>
+        <p:nvSpPr>
+          <p:cNvPr id="3" name="Text 1"/>
+          <p:cNvSpPr txBox="1"/>
+          <p:nvPr/>
+        </p:nvSpPr>
+        <p:spPr>
+          <a:xfrm>
+            <a:off x="502920" y="640080"/>
+            <a:ext cx="7315200" cy="365760"/>
+          </a:xfrm>
+          <a:prstGeom prst="rect">
+            <a:avLst/>
+          </a:prstGeom>
+          <a:noFill/>
+          <a:ln/>
+        </p:spPr>
+        <p:txBody>
+          <a:bodyPr wrap="square" lIns="0" tIns="0" rIns="0" bIns="0" rtlCol="0" anchor="ctr"/>
+          <a:lstStyle/>
+          <a:p>
+            <a:pPr marL="0" indent="0" algn="ctr">
+              <a:buNone/>
+            </a:pPr>
+            <a:r>
+              <a:rPr lang="en-US" sz="2200" b="1" dirty="0">
+                <a:solidFill>
+                  <a:srgbClr val="242C39"/>
+                </a:solidFill>
+              </a:rPr>
+              <a:t>Gross profit against overhead, September 2026</a:t>
+            </a:r>
+            <a:endParaRPr lang="en-US" sz="2700" dirty="0"/>
+          </a:p>
+        </p:txBody>
+      </p:sp>
+      <p:sp>
+        <p:nvSpPr>
+          <p:cNvPr id="6" name="commentary panel"/>
+          <p:cNvSpPr/>
+          <p:nvPr/>
+        </p:nvSpPr>
+        <p:spPr>
+          <a:xfrm>
+            <a:off x="502920" y="3621023"/>
+            <a:ext cx="8138160" cy="1005840"/>
+          </a:xfrm>
+          <a:prstGeom prst="rect">
+            <a:avLst/>
+          </a:prstGeom>
+          <a:solidFill>
+            <a:srgbClr val="E8F9F8"/>
+          </a:solidFill>
+          <a:ln/>
+        </p:spPr>
+        <p:txBody>
+          <a:bodyPr/>
+          <a:lstStyle/>
+          <a:p>
+            <a:endParaRPr lang="en-AU"/>
+          </a:p>
+        </p:txBody>
+      </p:sp>
+      <p:sp>
+        <p:nvSpPr>
+          <p:cNvPr id="7" name="Text 4"/>
+          <p:cNvSpPr txBox="1"/>
+          <p:nvPr/>
+        </p:nvSpPr>
+        <p:spPr>
+          <a:xfrm>
+            <a:off x="685800" y="3694175"/>
+            <a:ext cx="2743200" cy="228600"/>
+          </a:xfrm>
+          <a:prstGeom prst="rect">
+            <a:avLst/>
+          </a:prstGeom>
+          <a:noFill/>
+          <a:ln/>
+        </p:spPr>
+        <p:txBody>
+          <a:bodyPr wrap="square" lIns="0" tIns="0" rIns="0" bIns="0" rtlCol="0" anchor="ctr"/>
+          <a:lstStyle/>
+          <a:p>
+            <a:pPr marL="0" indent="0">
+              <a:buNone/>
+            </a:pPr>
+            <a:r>
+              <a:rPr lang="en-US" sz="900" b="1" kern="0" spc="180">
+                <a:solidFill>
+                  <a:srgbClr val="005358"/>
+                </a:solidFill>
+              </a:rPr>
+              <a:t>COMMENTARY</a:t>
+            </a:r>
+            <a:endParaRPr lang="en-US" sz="900"/>
+          </a:p>
+        </p:txBody>
+      </p:sp>
+      <p:sp>
+        <p:nvSpPr>
+          <p:cNvPr id="8" name="Text 5"/>
+          <p:cNvSpPr txBox="1"/>
+          <p:nvPr/>
+        </p:nvSpPr>
+        <p:spPr>
+          <a:xfrm>
+            <a:off x="685800" y="3867911"/>
+            <a:ext cx="3703320" cy="731520"/>
+          </a:xfrm>
+          <a:prstGeom prst="rect">
+            <a:avLst/>
+          </a:prstGeom>
+          <a:noFill/>
+          <a:ln/>
+        </p:spPr>
+        <p:txBody>
+          <a:bodyPr wrap="square" lIns="0" tIns="0" rIns="0" bIns="0" rtlCol="0" anchor="t">
+            <a:normAutofit fontScale="85000" lnSpcReduction="10000"/>
+          </a:bodyPr>
+          <a:lstStyle/>
+          <a:p>
+            <a:pPr marL="342900" indent="-342900">
+              <a:lnSpc>
+                <a:spcPts val="1050"/>
+              </a:lnSpc>
+              <a:spcAft>
+                <a:spcPts val="400"/>
+              </a:spcAft>
+              <a:buSzPct val="100000"/>
+              <a:buChar char="•"/>
+            </a:pPr>
+            <a:r>
+              <a:rPr lang="en-US" sz="1000">
+                <a:solidFill>
+                  <a:srgbClr val="3A4453"/>
+                </a:solidFill>
+              </a:rPr>
+              <a:t>Gross profit of $188k did not cover overheads of $229k. That gap is the $41k loss.</a:t>
+            </a:r>
+            <a:endParaRPr lang="en-US" sz="850"/>
+          </a:p>
+          <a:p>
+            <a:pPr marL="342900" indent="-342900">
+              <a:lnSpc>
+                <a:spcPts val="1050"/>
+              </a:lnSpc>
+              <a:spcAft>
+                <a:spcPts val="400"/>
+              </a:spcAft>
+              <a:buSzPct val="100000"/>
+              <a:buChar char="•"/>
+            </a:pPr>
+            <a:r>
+              <a:rPr lang="en-US" sz="1000">
+                <a:solidFill>
+                  <a:srgbClr val="3A4453"/>
+                </a:solidFill>
+              </a:rPr>
+              <a:t>Only Support and Integration covered the overhead charged to them.</a:t>
+            </a:r>
+            <a:endParaRPr lang="en-US" sz="850"/>
+          </a:p>
+        </p:txBody>
+      </p:sp>
+      <p:sp>
+        <p:nvSpPr>
+          <p:cNvPr id="25" name="Slide Number Placeholder 0"/>
+          <p:cNvSpPr>
+            <a:spLocks noGrp="1"/>
+          </p:cNvSpPr>
+          <p:nvPr>
+            <p:ph type="sldNum" sz="quarter" idx="4294967295"/>
+          </p:nvPr>
+        </p:nvSpPr>
+        <p:spPr>
+          <a:xfrm>
+            <a:off x="8092440" y="4736592"/>
+            <a:ext cx="548640" cy="228600"/>
+          </a:xfrm>
+          <a:prstGeom prst="rect">
+            <a:avLst/>
+          </a:prstGeom>
+          <a:extLst>
+            <a:ext uri="{C572A759-6A51-4108-AA02-DFA0A04FC94B}">
+              <ma14:wrappingTextBoxFlag xmlns="" xmlns:ma14="http://schemas.microsoft.com/office/mac/drawingml/2011/main" val="0"/>
+            </a:ext>
+          </a:extLst>
+        </p:spPr>
+        <p:txBody>
+          <a:bodyPr/>
+          <a:lstStyle>
+            <a:lvl1pPr>
+              <a:defRPr sz="800">
+                <a:solidFill>
+                  <a:srgbClr val="6B7585"/>
+                </a:solidFill>
+              </a:defRPr>
+            </a:lvl1pPr>
+          </a:lstStyle>
+          <a:p>
+            <a:pPr algn="r"/>
+            <a:fld id="{F7021451-1387-4CA6-816F-3879F97B5CBC}" type="slidenum">
+              <a:rPr lang="en-US" b="0"/>
+              <a:t>18</a:t>
+            </a:fld>
+            <a:endParaRPr lang="en-US"/>
+          </a:p>
+        </p:txBody>
+      </p:sp>
+      <p:sp>
+        <p:nvSpPr>
+          <p:cNvPr id="4" name="Text 5b"/>
+          <p:cNvSpPr txBox="1"/>
+          <p:nvPr/>
+        </p:nvSpPr>
+        <p:spPr>
+          <a:xfrm>
+            <a:off x="4663440" y="3867911"/>
+            <a:ext cx="3703320" cy="731520"/>
+          </a:xfrm>
+          <a:prstGeom prst="rect">
+            <a:avLst/>
+          </a:prstGeom>
+          <a:noFill/>
+          <a:ln/>
+        </p:spPr>
+        <p:txBody>
+          <a:bodyPr wrap="square" lIns="0" tIns="0" rIns="0" bIns="0" rtlCol="0" anchor="t">
+            <a:normAutofit fontScale="85000" lnSpcReduction="10000"/>
+          </a:bodyPr>
+          <a:lstStyle/>
+          <a:p>
+            <a:pPr marL="342900" indent="-342900">
+              <a:lnSpc>
+                <a:spcPts val="1050"/>
+              </a:lnSpc>
+              <a:spcAft>
+                <a:spcPts val="400"/>
+              </a:spcAft>
+              <a:buSzPct val="100000"/>
+              <a:buChar char="•"/>
+            </a:pPr>
+            <a:r>
+              <a:rPr lang="en-US" sz="1000">
+                <a:solidFill>
+                  <a:srgbClr val="3A4453"/>
+                </a:solidFill>
+              </a:rPr>
+              <a:t>Events carries 48% of all overhead on 13% of revenue, so a 78% margin still ends in a $54k loss.</a:t>
+            </a:r>
+            <a:endParaRPr lang="en-US" sz="850"/>
+          </a:p>
+          <a:p>
+            <a:pPr marL="342900" indent="-342900">
+              <a:lnSpc>
+                <a:spcPts val="1050"/>
+              </a:lnSpc>
+              <a:spcAft>
+                <a:spcPts val="400"/>
+              </a:spcAft>
+              <a:buSzPct val="100000"/>
+              <a:buChar char="•"/>
+            </a:pPr>
+            <a:r>
+              <a:rPr lang="en-US" sz="1000">
+                <a:solidFill>
+                  <a:srgbClr val="3A4453"/>
+                </a:solidFill>
+              </a:rPr>
+              <a:t>Consulting earned $74 of gross profit on $4k of revenue and carries $20k of overhead.</a:t>
+            </a:r>
+            <a:endParaRPr lang="en-US" sz="850"/>
+          </a:p>
+        </p:txBody>
+      </p:sp>
+      <p:pic>
+        <p:nvPicPr>
+          <p:cNvPr id="26" name="cts logo" descr="image.png"/>
           <p:cNvPicPr>
             <a:picLocks noChangeAspect="1"/>
           </p:cNvPicPr>
@@ -10367,7 +10442,7 @@
           </a:prstGeom>
           <a:extLst>
             <a:ext uri="{C572A759-6A51-4108-AA02-DFA0A04FC94B}">
-              <ma14:wrappingTextBoxFlag xmlns:ma14="http://schemas.microsoft.com/office/mac/drawingml/2011/main" xmlns="" val="0"/>
+              <ma14:wrappingTextBoxFlag xmlns="" xmlns:ma14="http://schemas.microsoft.com/office/mac/drawingml/2011/main" val="0"/>
             </a:ext>
           </a:extLst>
         </p:spPr>
@@ -10386,7 +10461,7 @@
             <a:pPr algn="r"/>
             <a:fld id="{F7021451-1387-4CA6-816F-3879F97B5CBC}" type="slidenum">
               <a:rPr lang="en-US" b="0"/>
-              <a:t>16</a:t>
+              <a:t>19</a:t>
             </a:fld>
             <a:endParaRPr lang="en-US"/>
           </a:p>
@@ -11208,7 +11283,7 @@
           </a:prstGeom>
           <a:extLst>
             <a:ext uri="{C572A759-6A51-4108-AA02-DFA0A04FC94B}">
-              <ma14:wrappingTextBoxFlag xmlns:ma14="http://schemas.microsoft.com/office/mac/drawingml/2011/main" xmlns="" val="0"/>
+              <ma14:wrappingTextBoxFlag xmlns="" xmlns:ma14="http://schemas.microsoft.com/office/mac/drawingml/2011/main" val="0"/>
             </a:ext>
           </a:extLst>
         </p:spPr>
@@ -11259,7 +11334,7 @@
       </p:pic>
       <p:sp>
         <p:nvSpPr>
-          <p:cNvPr id="20" name="Shape 22"/>
+          <p:cNvPr id="24" name="Shape 22"/>
           <p:cNvSpPr/>
           <p:nvPr/>
         </p:nvSpPr>
@@ -11286,7 +11361,7 @@
       </p:sp>
       <p:sp>
         <p:nvSpPr>
-          <p:cNvPr id="21" name="Text 23"/>
+          <p:cNvPr id="27" name="Text 23"/>
           <p:cNvSpPr txBox="1"/>
           <p:nvPr/>
         </p:nvSpPr>
@@ -11322,7 +11397,7 @@
       </p:sp>
       <p:sp>
         <p:nvSpPr>
-          <p:cNvPr id="22" name="Text 24"/>
+          <p:cNvPr id="28" name="Text 24"/>
           <p:cNvSpPr txBox="1"/>
           <p:nvPr/>
         </p:nvSpPr>
@@ -11358,7 +11433,7 @@
       </p:sp>
       <p:sp>
         <p:nvSpPr>
-          <p:cNvPr id="23" name="Text 25"/>
+          <p:cNvPr id="29" name="Text 25"/>
           <p:cNvSpPr txBox="1"/>
           <p:nvPr/>
         </p:nvSpPr>
@@ -11662,7 +11737,7 @@
           </a:prstGeom>
           <a:extLst>
             <a:ext uri="{C572A759-6A51-4108-AA02-DFA0A04FC94B}">
-              <ma14:wrappingTextBoxFlag xmlns:ma14="http://schemas.microsoft.com/office/mac/drawingml/2011/main" xmlns="" val="0"/>
+              <ma14:wrappingTextBoxFlag xmlns="" xmlns:ma14="http://schemas.microsoft.com/office/mac/drawingml/2011/main" val="0"/>
             </a:ext>
           </a:extLst>
         </p:spPr>
@@ -11681,7 +11756,7 @@
             <a:pPr algn="r"/>
             <a:fld id="{F7021451-1387-4CA6-816F-3879F97B5CBC}" type="slidenum">
               <a:rPr lang="en-US" b="0"/>
-              <a:t>17</a:t>
+              <a:t>20</a:t>
             </a:fld>
             <a:endParaRPr lang="en-US"/>
           </a:p>
@@ -12089,7 +12164,7 @@
           </a:prstGeom>
           <a:extLst>
             <a:ext uri="{C572A759-6A51-4108-AA02-DFA0A04FC94B}">
-              <ma14:wrappingTextBoxFlag xmlns:ma14="http://schemas.microsoft.com/office/mac/drawingml/2011/main" xmlns="" val="0"/>
+              <ma14:wrappingTextBoxFlag xmlns="" xmlns:ma14="http://schemas.microsoft.com/office/mac/drawingml/2011/main" val="0"/>
             </a:ext>
           </a:extLst>
         </p:spPr>
@@ -12108,7 +12183,7 @@
             <a:pPr algn="r"/>
             <a:fld id="{F7021451-1387-4CA6-816F-3879F97B5CBC}" type="slidenum">
               <a:rPr lang="en-US" b="0"/>
-              <a:t>18</a:t>
+              <a:t>21</a:t>
             </a:fld>
             <a:endParaRPr lang="en-US"/>
           </a:p>
@@ -12495,7 +12570,7 @@
           </a:prstGeom>
           <a:extLst>
             <a:ext uri="{C572A759-6A51-4108-AA02-DFA0A04FC94B}">
-              <ma14:wrappingTextBoxFlag xmlns:ma14="http://schemas.microsoft.com/office/mac/drawingml/2011/main" xmlns="" val="0"/>
+              <ma14:wrappingTextBoxFlag xmlns="" xmlns:ma14="http://schemas.microsoft.com/office/mac/drawingml/2011/main" val="0"/>
             </a:ext>
           </a:extLst>
         </p:spPr>
@@ -12514,7 +12589,7 @@
             <a:pPr algn="r"/>
             <a:fld id="{F7021451-1387-4CA6-816F-3879F97B5CBC}" type="slidenum">
               <a:rPr lang="en-US" b="0"/>
-              <a:t>19</a:t>
+              <a:t>22</a:t>
             </a:fld>
             <a:endParaRPr lang="en-US"/>
           </a:p>
@@ -12901,7 +12976,7 @@
           </a:prstGeom>
           <a:extLst>
             <a:ext uri="{C572A759-6A51-4108-AA02-DFA0A04FC94B}">
-              <ma14:wrappingTextBoxFlag xmlns:ma14="http://schemas.microsoft.com/office/mac/drawingml/2011/main" xmlns="" val="0"/>
+              <ma14:wrappingTextBoxFlag xmlns="" xmlns:ma14="http://schemas.microsoft.com/office/mac/drawingml/2011/main" val="0"/>
             </a:ext>
           </a:extLst>
         </p:spPr>
@@ -12920,7 +12995,7 @@
             <a:pPr algn="r"/>
             <a:fld id="{F7021451-1387-4CA6-816F-3879F97B5CBC}" type="slidenum">
               <a:rPr lang="en-US" b="0"/>
-              <a:t>20</a:t>
+              <a:t>23</a:t>
             </a:fld>
             <a:endParaRPr lang="en-US"/>
           </a:p>
@@ -13286,7 +13361,7 @@
           </a:prstGeom>
           <a:extLst>
             <a:ext uri="{C572A759-6A51-4108-AA02-DFA0A04FC94B}">
-              <ma14:wrappingTextBoxFlag xmlns:ma14="http://schemas.microsoft.com/office/mac/drawingml/2011/main" xmlns="" val="0"/>
+              <ma14:wrappingTextBoxFlag xmlns="" xmlns:ma14="http://schemas.microsoft.com/office/mac/drawingml/2011/main" val="0"/>
             </a:ext>
           </a:extLst>
         </p:spPr>
@@ -13305,7 +13380,7 @@
             <a:pPr algn="r"/>
             <a:fld id="{F7021451-1387-4CA6-816F-3879F97B5CBC}" type="slidenum">
               <a:rPr lang="en-US" b="0"/>
-              <a:t>21</a:t>
+              <a:t>24</a:t>
             </a:fld>
             <a:endParaRPr lang="en-US"/>
           </a:p>
@@ -13431,6 +13506,384 @@
 </file>
 
 <file path=ppt/slides/slide25.xml><?xml version="1.0" encoding="utf-8"?>
+<p:sld xmlns:a="http://schemas.openxmlformats.org/drawingml/2006/main" xmlns:p="http://schemas.openxmlformats.org/presentationml/2006/main" xmlns:r="http://schemas.openxmlformats.org/officeDocument/2006/relationships">
+  <p:cSld>
+    <p:spTree>
+      <p:nvGrpSpPr>
+        <p:cNvPr id="1" name=""/>
+        <p:cNvGrpSpPr/>
+        <p:nvPr/>
+      </p:nvGrpSpPr>
+      <p:grpSpPr/>
+      <p:pic>
+        <p:nvPicPr>
+          <p:cNvPr id="27" name="snip dept_pl" descr="dept_pl.png"/>
+          <p:cNvPicPr>
+            <a:picLocks noChangeAspect="1"/>
+          </p:cNvPicPr>
+          <p:nvPr/>
+        </p:nvPicPr>
+        <p:blipFill>
+          <a:blip r:embed="rId3"/>
+          <a:stretch>
+            <a:fillRect/>
+          </a:stretch>
+        </p:blipFill>
+        <p:spPr>
+          <a:xfrm>
+            <a:off x="535418" y="1005840"/>
+            <a:ext cx="8073163" cy="2523743"/>
+          </a:xfrm>
+          <a:prstGeom prst="rect">
+            <a:avLst/>
+          </a:prstGeom>
+        </p:spPr>
+      </p:pic>
+      <p:sp>
+        <p:nvSpPr>
+          <p:cNvPr id="2" name="Text 0"/>
+          <p:cNvSpPr txBox="1"/>
+          <p:nvPr/>
+        </p:nvSpPr>
+        <p:spPr>
+          <a:xfrm>
+            <a:off x="502920" y="365760"/>
+            <a:ext cx="6400800" cy="274320"/>
+          </a:xfrm>
+          <a:prstGeom prst="rect">
+            <a:avLst/>
+          </a:prstGeom>
+          <a:noFill/>
+          <a:ln/>
+        </p:spPr>
+        <p:txBody>
+          <a:bodyPr wrap="square" lIns="0" tIns="0" rIns="0" bIns="0" rtlCol="0" anchor="ctr"/>
+          <a:lstStyle/>
+          <a:p>
+            <a:pPr marL="0" indent="0">
+              <a:buNone/>
+            </a:pPr>
+            <a:r>
+              <a:rPr lang="en-US" sz="950" b="1" kern="0" spc="220">
+                <a:solidFill>
+                  <a:srgbClr val="122B82"/>
+                </a:solidFill>
+              </a:rPr>
+              <a:t>DEPARTMENTAL PERFORMANCE</a:t>
+            </a:r>
+            <a:endParaRPr lang="en-US" sz="950"/>
+          </a:p>
+        </p:txBody>
+      </p:sp>
+      <p:sp>
+        <p:nvSpPr>
+          <p:cNvPr id="3" name="Text 1"/>
+          <p:cNvSpPr txBox="1"/>
+          <p:nvPr/>
+        </p:nvSpPr>
+        <p:spPr>
+          <a:xfrm>
+            <a:off x="502920" y="640080"/>
+            <a:ext cx="7315200" cy="365760"/>
+          </a:xfrm>
+          <a:prstGeom prst="rect">
+            <a:avLst/>
+          </a:prstGeom>
+          <a:noFill/>
+          <a:ln/>
+        </p:spPr>
+        <p:txBody>
+          <a:bodyPr wrap="square" lIns="0" tIns="0" rIns="0" bIns="0" rtlCol="0" anchor="ctr"/>
+          <a:lstStyle/>
+          <a:p>
+            <a:pPr marL="0" indent="0" algn="ctr">
+              <a:buNone/>
+            </a:pPr>
+            <a:r>
+              <a:rPr lang="en-US" sz="2200" b="1" dirty="0">
+                <a:solidFill>
+                  <a:srgbClr val="242C39"/>
+                </a:solidFill>
+              </a:rPr>
+              <a:t>Departmental profit and loss, September 2026</a:t>
+            </a:r>
+            <a:endParaRPr lang="en-US" sz="2700" dirty="0"/>
+          </a:p>
+        </p:txBody>
+      </p:sp>
+      <p:sp>
+        <p:nvSpPr>
+          <p:cNvPr id="6" name="commentary panel"/>
+          <p:cNvSpPr/>
+          <p:nvPr/>
+        </p:nvSpPr>
+        <p:spPr>
+          <a:xfrm>
+            <a:off x="502920" y="3621023"/>
+            <a:ext cx="8138160" cy="1005840"/>
+          </a:xfrm>
+          <a:prstGeom prst="rect">
+            <a:avLst/>
+          </a:prstGeom>
+          <a:solidFill>
+            <a:srgbClr val="E8F9F8"/>
+          </a:solidFill>
+          <a:ln/>
+        </p:spPr>
+        <p:txBody>
+          <a:bodyPr/>
+          <a:lstStyle/>
+          <a:p>
+            <a:endParaRPr lang="en-AU"/>
+          </a:p>
+        </p:txBody>
+      </p:sp>
+      <p:sp>
+        <p:nvSpPr>
+          <p:cNvPr id="7" name="Text 4"/>
+          <p:cNvSpPr txBox="1"/>
+          <p:nvPr/>
+        </p:nvSpPr>
+        <p:spPr>
+          <a:xfrm>
+            <a:off x="685800" y="3694175"/>
+            <a:ext cx="2743200" cy="228600"/>
+          </a:xfrm>
+          <a:prstGeom prst="rect">
+            <a:avLst/>
+          </a:prstGeom>
+          <a:noFill/>
+          <a:ln/>
+        </p:spPr>
+        <p:txBody>
+          <a:bodyPr wrap="square" lIns="0" tIns="0" rIns="0" bIns="0" rtlCol="0" anchor="ctr"/>
+          <a:lstStyle/>
+          <a:p>
+            <a:pPr marL="0" indent="0">
+              <a:buNone/>
+            </a:pPr>
+            <a:r>
+              <a:rPr lang="en-US" sz="900" b="1" kern="0" spc="180">
+                <a:solidFill>
+                  <a:srgbClr val="005358"/>
+                </a:solidFill>
+              </a:rPr>
+              <a:t>COMMENTARY</a:t>
+            </a:r>
+            <a:endParaRPr lang="en-US" sz="900"/>
+          </a:p>
+        </p:txBody>
+      </p:sp>
+      <p:sp>
+        <p:nvSpPr>
+          <p:cNvPr id="8" name="Text 5"/>
+          <p:cNvSpPr txBox="1"/>
+          <p:nvPr/>
+        </p:nvSpPr>
+        <p:spPr>
+          <a:xfrm>
+            <a:off x="685800" y="3867911"/>
+            <a:ext cx="3703320" cy="731520"/>
+          </a:xfrm>
+          <a:prstGeom prst="rect">
+            <a:avLst/>
+          </a:prstGeom>
+          <a:noFill/>
+          <a:ln/>
+        </p:spPr>
+        <p:txBody>
+          <a:bodyPr wrap="square" lIns="0" tIns="0" rIns="0" bIns="0" rtlCol="0" anchor="t">
+            <a:normAutofit fontScale="85000" lnSpcReduction="10000"/>
+          </a:bodyPr>
+          <a:lstStyle/>
+          <a:p>
+            <a:pPr marL="342900" indent="-342900">
+              <a:lnSpc>
+                <a:spcPts val="1050"/>
+              </a:lnSpc>
+              <a:spcAft>
+                <a:spcPts val="400"/>
+              </a:spcAft>
+              <a:buSzPct val="100000"/>
+              <a:buChar char="•"/>
+            </a:pPr>
+            <a:r>
+              <a:rPr lang="en-US" sz="1000">
+                <a:solidFill>
+                  <a:srgbClr val="3A4453"/>
+                </a:solidFill>
+              </a:rPr>
+              <a:t>Support earned $243k, cost $214k and kept $29k.</a:t>
+            </a:r>
+            <a:endParaRPr lang="en-US" sz="850"/>
+          </a:p>
+          <a:p>
+            <a:pPr marL="342900" indent="-342900">
+              <a:lnSpc>
+                <a:spcPts val="1050"/>
+              </a:lnSpc>
+              <a:spcAft>
+                <a:spcPts val="400"/>
+              </a:spcAft>
+              <a:buSzPct val="100000"/>
+              <a:buChar char="•"/>
+            </a:pPr>
+            <a:r>
+              <a:rPr lang="en-US" sz="1000">
+                <a:solidFill>
+                  <a:srgbClr val="3A4453"/>
+                </a:solidFill>
+              </a:rPr>
+              <a:t>Events earned $73k, cost $128k and lost $54k.</a:t>
+            </a:r>
+            <a:endParaRPr lang="en-US" sz="850"/>
+          </a:p>
+        </p:txBody>
+      </p:sp>
+      <p:sp>
+        <p:nvSpPr>
+          <p:cNvPr id="25" name="Slide Number Placeholder 0"/>
+          <p:cNvSpPr>
+            <a:spLocks noGrp="1"/>
+          </p:cNvSpPr>
+          <p:nvPr>
+            <p:ph type="sldNum" sz="quarter" idx="4294967295"/>
+          </p:nvPr>
+        </p:nvSpPr>
+        <p:spPr>
+          <a:xfrm>
+            <a:off x="8092440" y="4736592"/>
+            <a:ext cx="548640" cy="228600"/>
+          </a:xfrm>
+          <a:prstGeom prst="rect">
+            <a:avLst/>
+          </a:prstGeom>
+          <a:extLst>
+            <a:ext uri="{C572A759-6A51-4108-AA02-DFA0A04FC94B}">
+              <ma14:wrappingTextBoxFlag xmlns="" xmlns:ma14="http://schemas.microsoft.com/office/mac/drawingml/2011/main" val="0"/>
+            </a:ext>
+          </a:extLst>
+        </p:spPr>
+        <p:txBody>
+          <a:bodyPr/>
+          <a:lstStyle>
+            <a:lvl1pPr>
+              <a:defRPr sz="800">
+                <a:solidFill>
+                  <a:srgbClr val="6B7585"/>
+                </a:solidFill>
+              </a:defRPr>
+            </a:lvl1pPr>
+          </a:lstStyle>
+          <a:p>
+            <a:pPr algn="r"/>
+            <a:fld id="{F7021451-1387-4CA6-816F-3879F97B5CBC}" type="slidenum">
+              <a:rPr lang="en-US" b="0"/>
+              <a:t>9</a:t>
+            </a:fld>
+            <a:endParaRPr lang="en-US"/>
+          </a:p>
+        </p:txBody>
+      </p:sp>
+      <p:sp>
+        <p:nvSpPr>
+          <p:cNvPr id="4" name="Text 5b"/>
+          <p:cNvSpPr txBox="1"/>
+          <p:nvPr/>
+        </p:nvSpPr>
+        <p:spPr>
+          <a:xfrm>
+            <a:off x="4663440" y="3867911"/>
+            <a:ext cx="3703320" cy="731520"/>
+          </a:xfrm>
+          <a:prstGeom prst="rect">
+            <a:avLst/>
+          </a:prstGeom>
+          <a:noFill/>
+          <a:ln/>
+        </p:spPr>
+        <p:txBody>
+          <a:bodyPr wrap="square" lIns="0" tIns="0" rIns="0" bIns="0" rtlCol="0" anchor="t">
+            <a:normAutofit fontScale="85000" lnSpcReduction="10000"/>
+          </a:bodyPr>
+          <a:lstStyle/>
+          <a:p>
+            <a:pPr marL="342900" indent="-342900">
+              <a:lnSpc>
+                <a:spcPts val="1050"/>
+              </a:lnSpc>
+              <a:spcAft>
+                <a:spcPts val="400"/>
+              </a:spcAft>
+              <a:buSzPct val="100000"/>
+              <a:buChar char="•"/>
+            </a:pPr>
+            <a:r>
+              <a:rPr lang="en-US" sz="1000">
+                <a:solidFill>
+                  <a:srgbClr val="3A4453"/>
+                </a:solidFill>
+              </a:rPr>
+              <a:t>Integration earned $235k, cost $224k and kept $10k, the most work for the least return.</a:t>
+            </a:r>
+            <a:endParaRPr lang="en-US" sz="850"/>
+          </a:p>
+          <a:p>
+            <a:pPr marL="342900" indent="-342900">
+              <a:lnSpc>
+                <a:spcPts val="1050"/>
+              </a:lnSpc>
+              <a:spcAft>
+                <a:spcPts val="400"/>
+              </a:spcAft>
+              <a:buSzPct val="100000"/>
+              <a:buChar char="•"/>
+            </a:pPr>
+            <a:r>
+              <a:rPr lang="en-US" sz="1000">
+                <a:solidFill>
+                  <a:srgbClr val="3A4453"/>
+                </a:solidFill>
+              </a:rPr>
+              <a:t>Across all five, $562k earned against $603k of cost. That is the $41k loss.</a:t>
+            </a:r>
+            <a:endParaRPr lang="en-US" sz="850"/>
+          </a:p>
+        </p:txBody>
+      </p:sp>
+      <p:pic>
+        <p:nvPicPr>
+          <p:cNvPr id="26" name="cts logo" descr="image.png"/>
+          <p:cNvPicPr>
+            <a:picLocks noChangeAspect="1"/>
+          </p:cNvPicPr>
+          <p:nvPr/>
+        </p:nvPicPr>
+        <p:blipFill>
+          <a:blip r:embed="rId2"/>
+          <a:stretch>
+            <a:fillRect/>
+          </a:stretch>
+        </p:blipFill>
+        <p:spPr>
+          <a:xfrm>
+            <a:off x="7680959" y="182880"/>
+            <a:ext cx="960120" cy="539696"/>
+          </a:xfrm>
+          <a:prstGeom prst="rect">
+            <a:avLst/>
+          </a:prstGeom>
+        </p:spPr>
+      </p:pic>
+    </p:spTree>
+  </p:cSld>
+  <p:clrMapOvr>
+    <a:masterClrMapping/>
+  </p:clrMapOvr>
+</p:sld>
+</file>
+
+<file path=ppt/slides/slide26.xml><?xml version="1.0" encoding="utf-8"?>
 <p:sld xmlns:a="http://schemas.openxmlformats.org/drawingml/2006/main" xmlns:r="http://schemas.openxmlformats.org/officeDocument/2006/relationships" xmlns:p="http://schemas.openxmlformats.org/presentationml/2006/main">
   <p:cSld name="Slide 14">
     <p:spTree>
@@ -13692,7 +14145,7 @@
           </a:prstGeom>
           <a:extLst>
             <a:ext uri="{C572A759-6A51-4108-AA02-DFA0A04FC94B}">
-              <ma14:wrappingTextBoxFlag xmlns:ma14="http://schemas.microsoft.com/office/mac/drawingml/2011/main" xmlns="" val="0"/>
+              <ma14:wrappingTextBoxFlag xmlns="" xmlns:ma14="http://schemas.microsoft.com/office/mac/drawingml/2011/main" val="0"/>
             </a:ext>
           </a:extLst>
         </p:spPr>
@@ -13711,7 +14164,7 @@
             <a:pPr algn="r"/>
             <a:fld id="{F7021451-1387-4CA6-816F-3879F97B5CBC}" type="slidenum">
               <a:rPr lang="en-US" b="0"/>
-              <a:t>22</a:t>
+              <a:t>25</a:t>
             </a:fld>
             <a:endParaRPr lang="en-US"/>
           </a:p>
@@ -13836,7 +14289,7 @@
 </p:sld>
 </file>
 
-<file path=ppt/slides/slide26.xml><?xml version="1.0" encoding="utf-8"?>
+<file path=ppt/slides/slide27.xml><?xml version="1.0" encoding="utf-8"?>
 <p:sld xmlns:a="http://schemas.openxmlformats.org/drawingml/2006/main" xmlns:r="http://schemas.openxmlformats.org/officeDocument/2006/relationships" xmlns:p="http://schemas.openxmlformats.org/presentationml/2006/main">
   <p:cSld name="Slide 15">
     <p:spTree>
@@ -14119,7 +14572,7 @@
 </p:sld>
 </file>
 
-<file path=ppt/slides/slide27.xml><?xml version="1.0" encoding="utf-8"?>
+<file path=ppt/slides/slide28.xml><?xml version="1.0" encoding="utf-8"?>
 <p:sld xmlns:a="http://schemas.openxmlformats.org/drawingml/2006/main" xmlns:r="http://schemas.openxmlformats.org/officeDocument/2006/relationships" xmlns:p="http://schemas.openxmlformats.org/presentationml/2006/main">
   <p:cSld name="Slide 16">
     <p:spTree>
@@ -14381,7 +14834,7 @@
           </a:prstGeom>
           <a:extLst>
             <a:ext uri="{C572A759-6A51-4108-AA02-DFA0A04FC94B}">
-              <ma14:wrappingTextBoxFlag xmlns:ma14="http://schemas.microsoft.com/office/mac/drawingml/2011/main" xmlns="" val="0"/>
+              <ma14:wrappingTextBoxFlag xmlns="" xmlns:ma14="http://schemas.microsoft.com/office/mac/drawingml/2011/main" val="0"/>
             </a:ext>
           </a:extLst>
         </p:spPr>
@@ -14400,7 +14853,7 @@
             <a:pPr algn="r"/>
             <a:fld id="{F7021451-1387-4CA6-816F-3879F97B5CBC}" type="slidenum">
               <a:rPr lang="en-US" b="0"/>
-              <a:t>24</a:t>
+              <a:t>27</a:t>
             </a:fld>
             <a:endParaRPr lang="en-US"/>
           </a:p>
@@ -14525,7 +14978,7 @@
 </p:sld>
 </file>
 
-<file path=ppt/slides/slide28.xml><?xml version="1.0" encoding="utf-8"?>
+<file path=ppt/slides/slide29.xml><?xml version="1.0" encoding="utf-8"?>
 <p:sld xmlns:a="http://schemas.openxmlformats.org/drawingml/2006/main" xmlns:r="http://schemas.openxmlformats.org/officeDocument/2006/relationships" xmlns:p="http://schemas.openxmlformats.org/presentationml/2006/main">
   <p:cSld name="Slide 17">
     <p:spTree>
@@ -14787,7 +15240,7 @@
           </a:prstGeom>
           <a:extLst>
             <a:ext uri="{C572A759-6A51-4108-AA02-DFA0A04FC94B}">
-              <ma14:wrappingTextBoxFlag xmlns:ma14="http://schemas.microsoft.com/office/mac/drawingml/2011/main" xmlns="" val="0"/>
+              <ma14:wrappingTextBoxFlag xmlns="" xmlns:ma14="http://schemas.microsoft.com/office/mac/drawingml/2011/main" val="0"/>
             </a:ext>
           </a:extLst>
         </p:spPr>
@@ -14806,7 +15259,7 @@
             <a:pPr algn="r"/>
             <a:fld id="{F7021451-1387-4CA6-816F-3879F97B5CBC}" type="slidenum">
               <a:rPr lang="en-US" b="0"/>
-              <a:t>25</a:t>
+              <a:t>28</a:t>
             </a:fld>
             <a:endParaRPr lang="en-US"/>
           </a:p>
@@ -14920,412 +15373,6 @@
               <a:t>Any substantial saving in this category would require a review of premises and lease commitments.</a:t>
             </a:r>
             <a:endParaRPr lang="en-US" sz="900"/>
-          </a:p>
-        </p:txBody>
-      </p:sp>
-    </p:spTree>
-  </p:cSld>
-  <p:clrMapOvr>
-    <a:masterClrMapping/>
-  </p:clrMapOvr>
-</p:sld>
-</file>
-
-<file path=ppt/slides/slide29.xml><?xml version="1.0" encoding="utf-8"?>
-<p:sld xmlns:a="http://schemas.openxmlformats.org/drawingml/2006/main" xmlns:r="http://schemas.openxmlformats.org/officeDocument/2006/relationships" xmlns:p="http://schemas.openxmlformats.org/presentationml/2006/main">
-  <p:cSld name="Slide 18">
-    <p:spTree>
-      <p:nvGrpSpPr>
-        <p:cNvPr id="1" name=""/>
-        <p:cNvGrpSpPr/>
-        <p:nvPr/>
-      </p:nvGrpSpPr>
-      <p:grpSpPr>
-        <a:xfrm>
-          <a:off x="0" y="0"/>
-          <a:ext cx="0" cy="0"/>
-          <a:chOff x="0" y="0"/>
-          <a:chExt cx="0" cy="0"/>
-        </a:xfrm>
-      </p:grpSpPr>
-      <p:pic>
-        <p:nvPicPr>
-          <p:cNvPr id="27" name="snip labour_mix" descr="labour_mix.png"/>
-          <p:cNvPicPr>
-            <a:picLocks noChangeAspect="1"/>
-          </p:cNvPicPr>
-          <p:nvPr/>
-        </p:nvPicPr>
-        <p:blipFill>
-          <a:blip r:embed="rId3"/>
-          <a:stretch>
-            <a:fillRect/>
-          </a:stretch>
-        </p:blipFill>
-        <p:spPr>
-          <a:xfrm>
-            <a:off x="2786502" y="1005840"/>
-            <a:ext cx="3570994" cy="2130551"/>
-          </a:xfrm>
-          <a:prstGeom prst="rect">
-            <a:avLst/>
-          </a:prstGeom>
-        </p:spPr>
-      </p:pic>
-      <p:sp>
-        <p:nvSpPr>
-          <p:cNvPr id="2" name="Text 0"/>
-          <p:cNvSpPr txBox="1"/>
-          <p:nvPr/>
-        </p:nvSpPr>
-        <p:spPr>
-          <a:xfrm>
-            <a:off x="502920" y="365760"/>
-            <a:ext cx="6400800" cy="274320"/>
-          </a:xfrm>
-          <a:prstGeom prst="rect">
-            <a:avLst/>
-          </a:prstGeom>
-          <a:noFill/>
-          <a:ln/>
-        </p:spPr>
-        <p:txBody>
-          <a:bodyPr wrap="square" lIns="0" tIns="0" rIns="0" bIns="0" rtlCol="0" anchor="ctr"/>
-          <a:lstStyle/>
-          <a:p>
-            <a:pPr marL="0" indent="0">
-              <a:buNone/>
-            </a:pPr>
-            <a:r>
-              <a:rPr lang="en-US" sz="950" b="1" kern="0" spc="220">
-                <a:solidFill>
-                  <a:srgbClr val="122B82"/>
-                </a:solidFill>
-              </a:rPr>
-              <a:t>OPERATING EXPENDITURE</a:t>
-            </a:r>
-            <a:endParaRPr lang="en-US" sz="950"/>
-          </a:p>
-        </p:txBody>
-      </p:sp>
-      <p:sp>
-        <p:nvSpPr>
-          <p:cNvPr id="3" name="Text 1"/>
-          <p:cNvSpPr txBox="1"/>
-          <p:nvPr/>
-        </p:nvSpPr>
-        <p:spPr>
-          <a:xfrm>
-            <a:off x="502920" y="640080"/>
-            <a:ext cx="7315200" cy="365760"/>
-          </a:xfrm>
-          <a:prstGeom prst="rect">
-            <a:avLst/>
-          </a:prstGeom>
-          <a:noFill/>
-          <a:ln/>
-        </p:spPr>
-        <p:txBody>
-          <a:bodyPr wrap="square" lIns="0" tIns="0" rIns="0" bIns="0" rtlCol="0" anchor="ctr"/>
-          <a:lstStyle/>
-          <a:p>
-            <a:pPr marL="0" indent="0" algn="ctr">
-              <a:buNone/>
-            </a:pPr>
-            <a:r>
-              <a:rPr lang="en-US" sz="2200" b="1">
-                <a:solidFill>
-                  <a:srgbClr val="242C39"/>
-                </a:solidFill>
-              </a:rPr>
-              <a:t>Direct and indirect labour, year to date</a:t>
-            </a:r>
-            <a:endParaRPr lang="en-US" sz="2700"/>
-          </a:p>
-        </p:txBody>
-      </p:sp>
-      <p:sp>
-        <p:nvSpPr>
-          <p:cNvPr id="6" name="commentary panel"/>
-          <p:cNvSpPr/>
-          <p:nvPr/>
-        </p:nvSpPr>
-        <p:spPr>
-          <a:xfrm>
-            <a:off x="502920" y="3227831"/>
-            <a:ext cx="8138160" cy="1399032"/>
-          </a:xfrm>
-          <a:prstGeom prst="rect">
-            <a:avLst/>
-          </a:prstGeom>
-          <a:solidFill>
-            <a:srgbClr val="E8F9F8"/>
-          </a:solidFill>
-          <a:ln/>
-        </p:spPr>
-        <p:txBody>
-          <a:bodyPr/>
-          <a:lstStyle/>
-          <a:p>
-            <a:endParaRPr lang="en-AU"/>
-          </a:p>
-        </p:txBody>
-      </p:sp>
-      <p:sp>
-        <p:nvSpPr>
-          <p:cNvPr id="7" name="Text 4"/>
-          <p:cNvSpPr txBox="1"/>
-          <p:nvPr/>
-        </p:nvSpPr>
-        <p:spPr>
-          <a:xfrm>
-            <a:off x="685800" y="3300983"/>
-            <a:ext cx="2743200" cy="228600"/>
-          </a:xfrm>
-          <a:prstGeom prst="rect">
-            <a:avLst/>
-          </a:prstGeom>
-          <a:noFill/>
-          <a:ln/>
-        </p:spPr>
-        <p:txBody>
-          <a:bodyPr wrap="square" lIns="0" tIns="0" rIns="0" bIns="0" rtlCol="0" anchor="ctr"/>
-          <a:lstStyle/>
-          <a:p>
-            <a:pPr marL="0" indent="0">
-              <a:buNone/>
-            </a:pPr>
-            <a:r>
-              <a:rPr lang="en-US" sz="900" b="1" kern="0" spc="180">
-                <a:solidFill>
-                  <a:srgbClr val="005358"/>
-                </a:solidFill>
-              </a:rPr>
-              <a:t>COMMENTARY</a:t>
-            </a:r>
-            <a:endParaRPr lang="en-US" sz="900"/>
-          </a:p>
-        </p:txBody>
-      </p:sp>
-      <p:sp>
-        <p:nvSpPr>
-          <p:cNvPr id="8" name="Text 5"/>
-          <p:cNvSpPr txBox="1"/>
-          <p:nvPr/>
-        </p:nvSpPr>
-        <p:spPr>
-          <a:xfrm>
-            <a:off x="685800" y="3474719"/>
-            <a:ext cx="3703320" cy="1124712"/>
-          </a:xfrm>
-          <a:prstGeom prst="rect">
-            <a:avLst/>
-          </a:prstGeom>
-          <a:noFill/>
-          <a:ln/>
-        </p:spPr>
-        <p:txBody>
-          <a:bodyPr wrap="square" lIns="0" tIns="0" rIns="0" bIns="0" rtlCol="0" anchor="t">
-            <a:normAutofit/>
-          </a:bodyPr>
-          <a:lstStyle/>
-          <a:p>
-            <a:pPr marL="342900" indent="-342900">
-              <a:lnSpc>
-                <a:spcPts val="1050"/>
-              </a:lnSpc>
-              <a:spcAft>
-                <a:spcPts val="400"/>
-              </a:spcAft>
-              <a:buSzPct val="100000"/>
-              <a:buChar char="•"/>
-            </a:pPr>
-            <a:r>
-              <a:rPr lang="en-US" sz="1000">
-                <a:solidFill>
-                  <a:srgbClr val="3A4453"/>
-                </a:solidFill>
-              </a:rPr>
-              <a:t>Direct labour consists of employee costs and external contractors or service hires.</a:t>
-            </a:r>
-            <a:endParaRPr lang="en-US" sz="850"/>
-          </a:p>
-          <a:p>
-            <a:pPr marL="342900" indent="-342900">
-              <a:lnSpc>
-                <a:spcPts val="1050"/>
-              </a:lnSpc>
-              <a:spcAft>
-                <a:spcPts val="400"/>
-              </a:spcAft>
-              <a:buSzPct val="100000"/>
-              <a:buChar char="•"/>
-            </a:pPr>
-            <a:r>
-              <a:rPr lang="en-US" sz="1000">
-                <a:solidFill>
-                  <a:srgbClr val="3A4453"/>
-                </a:solidFill>
-              </a:rPr>
-              <a:t>Employee salaries, wages and superannuation account for most direct labour costs.</a:t>
-            </a:r>
-            <a:endParaRPr lang="en-US" sz="850"/>
-          </a:p>
-        </p:txBody>
-      </p:sp>
-      <p:sp>
-        <p:nvSpPr>
-          <p:cNvPr id="25" name="Slide Number Placeholder 0"/>
-          <p:cNvSpPr>
-            <a:spLocks noGrp="1"/>
-          </p:cNvSpPr>
-          <p:nvPr>
-            <p:ph type="sldNum" sz="quarter" idx="4294967295"/>
-          </p:nvPr>
-        </p:nvSpPr>
-        <p:spPr>
-          <a:xfrm>
-            <a:off x="8092440" y="4736592"/>
-            <a:ext cx="548640" cy="228600"/>
-          </a:xfrm>
-          <a:prstGeom prst="rect">
-            <a:avLst/>
-          </a:prstGeom>
-          <a:extLst>
-            <a:ext uri="{C572A759-6A51-4108-AA02-DFA0A04FC94B}">
-              <ma14:wrappingTextBoxFlag xmlns:ma14="http://schemas.microsoft.com/office/mac/drawingml/2011/main" xmlns="" val="0"/>
-            </a:ext>
-          </a:extLst>
-        </p:spPr>
-        <p:txBody>
-          <a:bodyPr/>
-          <a:lstStyle>
-            <a:lvl1pPr>
-              <a:defRPr sz="800">
-                <a:solidFill>
-                  <a:srgbClr val="6B7585"/>
-                </a:solidFill>
-              </a:defRPr>
-            </a:lvl1pPr>
-          </a:lstStyle>
-          <a:p>
-            <a:pPr algn="r"/>
-            <a:fld id="{F7021451-1387-4CA6-816F-3879F97B5CBC}" type="slidenum">
-              <a:rPr lang="en-US" b="0"/>
-              <a:t>26</a:t>
-            </a:fld>
-            <a:endParaRPr lang="en-US"/>
-          </a:p>
-        </p:txBody>
-      </p:sp>
-      <p:pic>
-        <p:nvPicPr>
-          <p:cNvPr id="26" name="cts logo" descr="cts-logo.png"/>
-          <p:cNvPicPr>
-            <a:picLocks noChangeAspect="1"/>
-          </p:cNvPicPr>
-          <p:nvPr/>
-        </p:nvPicPr>
-        <p:blipFill>
-          <a:blip r:embed="rId4"/>
-          <a:stretch>
-            <a:fillRect/>
-          </a:stretch>
-        </p:blipFill>
-        <p:spPr>
-          <a:xfrm>
-            <a:off x="7680959" y="182880"/>
-            <a:ext cx="960120" cy="539696"/>
-          </a:xfrm>
-          <a:prstGeom prst="rect">
-            <a:avLst/>
-          </a:prstGeom>
-        </p:spPr>
-      </p:pic>
-      <p:sp>
-        <p:nvSpPr>
-          <p:cNvPr id="4" name="Text 5b"/>
-          <p:cNvSpPr txBox="1"/>
-          <p:nvPr/>
-        </p:nvSpPr>
-        <p:spPr>
-          <a:xfrm>
-            <a:off x="4663440" y="3474719"/>
-            <a:ext cx="3703320" cy="1124712"/>
-          </a:xfrm>
-          <a:prstGeom prst="rect">
-            <a:avLst/>
-          </a:prstGeom>
-          <a:noFill/>
-          <a:ln/>
-        </p:spPr>
-        <p:txBody>
-          <a:bodyPr wrap="square" lIns="0" tIns="0" rIns="0" bIns="0" rtlCol="0" anchor="t">
-            <a:normAutofit/>
-          </a:bodyPr>
-          <a:lstStyle/>
-          <a:p>
-            <a:pPr marL="342900" indent="-342900">
-              <a:lnSpc>
-                <a:spcPts val="1050"/>
-              </a:lnSpc>
-              <a:spcAft>
-                <a:spcPts val="400"/>
-              </a:spcAft>
-              <a:buSzPct val="100000"/>
-              <a:buChar char="•"/>
-            </a:pPr>
-            <a:r>
-              <a:rPr lang="en-US" sz="1000">
-                <a:solidFill>
-                  <a:srgbClr val="3A4453"/>
-                </a:solidFill>
-              </a:rPr>
-              <a:t>Contractor spending generally changes with project demand and resourcing requirements.</a:t>
-            </a:r>
-            <a:endParaRPr lang="en-US" sz="850"/>
-          </a:p>
-          <a:p>
-            <a:pPr marL="342900" indent="-342900">
-              <a:lnSpc>
-                <a:spcPts val="1050"/>
-              </a:lnSpc>
-              <a:spcAft>
-                <a:spcPts val="400"/>
-              </a:spcAft>
-              <a:buSzPct val="100000"/>
-              <a:buChar char="•"/>
-            </a:pPr>
-            <a:r>
-              <a:rPr lang="en-US" sz="1000">
-                <a:solidFill>
-                  <a:srgbClr val="3A4453"/>
-                </a:solidFill>
-              </a:rPr>
-  